--- a/docs/ppt/위례_공급가능용량_최종발표_v3.pptx
+++ b/docs/ppt/위례_공급가능용량_최종발표_v3.pptx
@@ -1253,8 +1253,8 @@
         </p:nvSpPr>
         <p:spPr>
           <a:xfrm>
-            <a:off x="685800" y="1638300"/>
-            <a:ext cx="2533650" cy="185738"/>
+            <a:off x="685800" y="1600200"/>
+            <a:ext cx="2533650" cy="179546"/>
           </a:xfrm>
           <a:prstGeom prst="rect">
             <a:avLst/>
@@ -1268,12 +1268,12 @@
           <a:p>
             <a:pPr algn="ctr" indent="0" marL="0">
               <a:lnSpc>
-                <a:spcPts val="1463"/>
+                <a:spcPts val="1414"/>
               </a:lnSpc>
               <a:buNone/>
             </a:pPr>
             <a:r>
-              <a:rPr lang="en-US" sz="1125" b="1" dirty="0">
+              <a:rPr lang="en-US" sz="1088" b="1" dirty="0">
                 <a:solidFill>
                   <a:srgbClr val="EFB13C"/>
                 </a:solidFill>
@@ -1283,7 +1283,7 @@
               </a:rPr>
               <a:t>① 값 받아오기</a:t>
             </a:r>
-            <a:endParaRPr lang="en-US" sz="1125" dirty="0"/>
+            <a:endParaRPr lang="en-US" sz="1088" dirty="0"/>
           </a:p>
         </p:txBody>
       </p:sp>
@@ -1295,8 +1295,8 @@
         </p:nvSpPr>
         <p:spPr>
           <a:xfrm>
-            <a:off x="685800" y="1885950"/>
-            <a:ext cx="2533650" cy="2381250"/>
+            <a:off x="685800" y="1828800"/>
+            <a:ext cx="2533650" cy="1866900"/>
           </a:xfrm>
           <a:prstGeom prst="rect">
             <a:avLst/>
@@ -1328,7 +1328,7 @@
         </p:blipFill>
         <p:spPr>
           <a:xfrm>
-            <a:off x="781050" y="2697120"/>
+            <a:off x="781050" y="2382795"/>
             <a:ext cx="2343150" cy="758909"/>
           </a:xfrm>
           <a:prstGeom prst="rect">
@@ -1344,7 +1344,7 @@
         </p:nvSpPr>
         <p:spPr>
           <a:xfrm>
-            <a:off x="771525" y="2687595"/>
+            <a:off x="771525" y="2373270"/>
             <a:ext cx="2362200" cy="777959"/>
           </a:xfrm>
           <a:prstGeom prst="rect">
@@ -1366,7 +1366,7 @@
         </p:nvSpPr>
         <p:spPr>
           <a:xfrm>
-            <a:off x="3238500" y="2971800"/>
+            <a:off x="3238500" y="2686050"/>
             <a:ext cx="190500" cy="148590"/>
           </a:xfrm>
           <a:prstGeom prst="rect">
@@ -1408,8 +1408,8 @@
         </p:nvSpPr>
         <p:spPr>
           <a:xfrm>
-            <a:off x="3448050" y="1638300"/>
-            <a:ext cx="2533650" cy="185738"/>
+            <a:off x="3448050" y="1600200"/>
+            <a:ext cx="2533650" cy="179546"/>
           </a:xfrm>
           <a:prstGeom prst="rect">
             <a:avLst/>
@@ -1423,12 +1423,12 @@
           <a:p>
             <a:pPr algn="ctr" indent="0" marL="0">
               <a:lnSpc>
-                <a:spcPts val="1463"/>
+                <a:spcPts val="1414"/>
               </a:lnSpc>
               <a:buNone/>
             </a:pPr>
             <a:r>
-              <a:rPr lang="en-US" sz="1125" b="1" dirty="0">
+              <a:rPr lang="en-US" sz="1088" b="1" dirty="0">
                 <a:solidFill>
                   <a:srgbClr val="EFB13C"/>
                 </a:solidFill>
@@ -1438,7 +1438,7 @@
               </a:rPr>
               <a:t>② 온도별 계산</a:t>
             </a:r>
-            <a:endParaRPr lang="en-US" sz="1125" dirty="0"/>
+            <a:endParaRPr lang="en-US" sz="1088" dirty="0"/>
           </a:p>
         </p:txBody>
       </p:sp>
@@ -1450,8 +1450,8 @@
         </p:nvSpPr>
         <p:spPr>
           <a:xfrm>
-            <a:off x="3448050" y="1885950"/>
-            <a:ext cx="2533650" cy="2381250"/>
+            <a:off x="3448050" y="1828800"/>
+            <a:ext cx="2533650" cy="1866900"/>
           </a:xfrm>
           <a:prstGeom prst="rect">
             <a:avLst/>
@@ -1483,8 +1483,8 @@
         </p:blipFill>
         <p:spPr>
           <a:xfrm>
-            <a:off x="3543300" y="2084595"/>
-            <a:ext cx="2343150" cy="1983961"/>
+            <a:off x="3702423" y="1905000"/>
+            <a:ext cx="2024905" cy="1714500"/>
           </a:xfrm>
           <a:prstGeom prst="rect">
             <a:avLst/>
@@ -1499,8 +1499,8 @@
         </p:nvSpPr>
         <p:spPr>
           <a:xfrm>
-            <a:off x="3533775" y="2075070"/>
-            <a:ext cx="2362200" cy="2003011"/>
+            <a:off x="3692898" y="1895475"/>
+            <a:ext cx="2043955" cy="1733550"/>
           </a:xfrm>
           <a:prstGeom prst="rect">
             <a:avLst/>
@@ -1521,7 +1521,7 @@
         </p:nvSpPr>
         <p:spPr>
           <a:xfrm>
-            <a:off x="6000750" y="2971800"/>
+            <a:off x="6000750" y="2686050"/>
             <a:ext cx="190500" cy="148590"/>
           </a:xfrm>
           <a:prstGeom prst="rect">
@@ -1563,8 +1563,8 @@
         </p:nvSpPr>
         <p:spPr>
           <a:xfrm>
-            <a:off x="6210300" y="1638300"/>
-            <a:ext cx="2533650" cy="185738"/>
+            <a:off x="6210300" y="1600200"/>
+            <a:ext cx="2533650" cy="179546"/>
           </a:xfrm>
           <a:prstGeom prst="rect">
             <a:avLst/>
@@ -1578,12 +1578,12 @@
           <a:p>
             <a:pPr algn="ctr" indent="0" marL="0">
               <a:lnSpc>
-                <a:spcPts val="1463"/>
+                <a:spcPts val="1414"/>
               </a:lnSpc>
               <a:buNone/>
             </a:pPr>
             <a:r>
-              <a:rPr lang="en-US" sz="1125" b="1" dirty="0">
+              <a:rPr lang="en-US" sz="1088" b="1" dirty="0">
                 <a:solidFill>
                   <a:srgbClr val="EFB13C"/>
                 </a:solidFill>
@@ -1593,7 +1593,7 @@
               </a:rPr>
               <a:t>③ 차이 더하기</a:t>
             </a:r>
-            <a:endParaRPr lang="en-US" sz="1125" dirty="0"/>
+            <a:endParaRPr lang="en-US" sz="1088" dirty="0"/>
           </a:p>
         </p:txBody>
       </p:sp>
@@ -1605,8 +1605,8 @@
         </p:nvSpPr>
         <p:spPr>
           <a:xfrm>
-            <a:off x="6210300" y="1885950"/>
-            <a:ext cx="2533650" cy="2381250"/>
+            <a:off x="6210300" y="1828800"/>
+            <a:ext cx="2533650" cy="1866900"/>
           </a:xfrm>
           <a:prstGeom prst="rect">
             <a:avLst/>
@@ -1638,7 +1638,7 @@
         </p:blipFill>
         <p:spPr>
           <a:xfrm>
-            <a:off x="6305550" y="2827304"/>
+            <a:off x="6305550" y="2512979"/>
             <a:ext cx="2343150" cy="498543"/>
           </a:xfrm>
           <a:prstGeom prst="rect">
@@ -1654,7 +1654,7 @@
         </p:nvSpPr>
         <p:spPr>
           <a:xfrm>
-            <a:off x="6296025" y="2817779"/>
+            <a:off x="6296025" y="2503454"/>
             <a:ext cx="2362200" cy="517593"/>
           </a:xfrm>
           <a:prstGeom prst="rect">
@@ -1676,7 +1676,7 @@
         </p:nvSpPr>
         <p:spPr>
           <a:xfrm>
-            <a:off x="8763000" y="2971800"/>
+            <a:off x="8763000" y="2686050"/>
             <a:ext cx="190500" cy="148590"/>
           </a:xfrm>
           <a:prstGeom prst="rect">
@@ -1718,8 +1718,8 @@
         </p:nvSpPr>
         <p:spPr>
           <a:xfrm>
-            <a:off x="8972550" y="1638300"/>
-            <a:ext cx="2533650" cy="185738"/>
+            <a:off x="8972550" y="1600200"/>
+            <a:ext cx="2533650" cy="179546"/>
           </a:xfrm>
           <a:prstGeom prst="rect">
             <a:avLst/>
@@ -1733,12 +1733,12 @@
           <a:p>
             <a:pPr algn="ctr" indent="0" marL="0">
               <a:lnSpc>
-                <a:spcPts val="1463"/>
+                <a:spcPts val="1414"/>
               </a:lnSpc>
               <a:buNone/>
             </a:pPr>
             <a:r>
-              <a:rPr lang="en-US" sz="1125" b="1" dirty="0">
+              <a:rPr lang="en-US" sz="1088" b="1" dirty="0">
                 <a:solidFill>
                   <a:srgbClr val="EFB13C"/>
                 </a:solidFill>
@@ -1748,7 +1748,7 @@
               </a:rPr>
               <a:t>④ 프로파일 완성</a:t>
             </a:r>
-            <a:endParaRPr lang="en-US" sz="1125" dirty="0"/>
+            <a:endParaRPr lang="en-US" sz="1088" dirty="0"/>
           </a:p>
         </p:txBody>
       </p:sp>
@@ -1760,8 +1760,8 @@
         </p:nvSpPr>
         <p:spPr>
           <a:xfrm>
-            <a:off x="8972550" y="1885950"/>
-            <a:ext cx="2533650" cy="2381250"/>
+            <a:off x="8972550" y="1828800"/>
+            <a:ext cx="2533650" cy="1866900"/>
           </a:xfrm>
           <a:prstGeom prst="rect">
             <a:avLst/>
@@ -1793,7 +1793,7 @@
         </p:blipFill>
         <p:spPr>
           <a:xfrm>
-            <a:off x="9067800" y="2382308"/>
+            <a:off x="9067800" y="2067983"/>
             <a:ext cx="2343150" cy="1388533"/>
           </a:xfrm>
           <a:prstGeom prst="rect">
@@ -1809,7 +1809,7 @@
         </p:nvSpPr>
         <p:spPr>
           <a:xfrm>
-            <a:off x="9058275" y="2372783"/>
+            <a:off x="9058275" y="2058458"/>
             <a:ext cx="2362200" cy="1407583"/>
           </a:xfrm>
           <a:prstGeom prst="rect">
@@ -1825,14 +1825,39 @@
       </p:sp>
       <p:sp>
         <p:nvSpPr>
-          <p:cNvPr id="31" name="Text 25"/>
+          <p:cNvPr id="31" name="Shape 25"/>
+          <p:cNvSpPr/>
+          <p:nvPr/>
+        </p:nvSpPr>
+        <p:spPr>
+          <a:xfrm>
+            <a:off x="685800" y="3848100"/>
+            <a:ext cx="10820400" cy="2095500"/>
+          </a:xfrm>
+          <a:prstGeom prst="rect">
+            <a:avLst/>
+          </a:prstGeom>
+          <a:solidFill>
+            <a:srgbClr val="0A1320"/>
+          </a:solidFill>
+          <a:ln w="12700">
+            <a:solidFill>
+              <a:srgbClr val="182838"/>
+            </a:solidFill>
+            <a:prstDash val="solid"/>
+          </a:ln>
+        </p:spPr>
+      </p:sp>
+      <p:sp>
+        <p:nvSpPr>
+          <p:cNvPr id="32" name="Text 26"/>
           <p:cNvSpPr txBox="1"/>
           <p:nvPr/>
         </p:nvSpPr>
         <p:spPr>
           <a:xfrm>
-            <a:off x="685800" y="4533900"/>
-            <a:ext cx="7810500" cy="1048512"/>
+            <a:off x="914400" y="3962400"/>
+            <a:ext cx="4762500" cy="125016"/>
           </a:xfrm>
           <a:prstGeom prst="rect">
             <a:avLst/>
@@ -1846,75 +1871,1755 @@
           <a:p>
             <a:pPr algn="l" indent="0" marL="0">
               <a:lnSpc>
-                <a:spcPts val="2064"/>
+                <a:spcPts val="984"/>
               </a:lnSpc>
               <a:buNone/>
             </a:pPr>
             <a:r>
-              <a:rPr lang="en-US" sz="1200" dirty="0">
+              <a:rPr lang="en-US" sz="788" b="1" spc="150" kern="0" dirty="0">
                 <a:solidFill>
-                  <a:srgbClr val="CFCBC2"/>
+                  <a:srgbClr val="8A8880"/>
                 </a:solidFill>
-                <a:latin typeface="Malgun Gothic" pitchFamily="34" charset="0"/>
-                <a:ea typeface="Malgun Gothic" pitchFamily="34" charset="-122"/>
-                <a:cs typeface="Malgun Gothic" pitchFamily="34" charset="-120"/>
+                <a:latin typeface="Consolas" pitchFamily="34" charset="0"/>
+                <a:ea typeface="Consolas" pitchFamily="34" charset="-122"/>
+                <a:cs typeface="Consolas" pitchFamily="34" charset="-120"/>
               </a:rPr>
-              <a:t>시험은 하루에 한 번, 그날 날씨에서만 합니다. 그런데 신고는 영하 20도부터 40도까지 61개 온도를 다 해야 합니다.</a:t>
+              <a:t>시험한 온도는 하루에 한 곳뿐입니다</a:t>
             </a:r>
-            <a:endParaRPr lang="en-US" sz="1200" dirty="0"/>
+            <a:endParaRPr lang="en-US" sz="788" dirty="0"/>
           </a:p>
+        </p:txBody>
+      </p:sp>
+      <p:sp>
+        <p:nvSpPr>
+          <p:cNvPr id="33" name="Shape 27"/>
+          <p:cNvSpPr/>
+          <p:nvPr/>
+        </p:nvSpPr>
+        <p:spPr>
+          <a:xfrm>
+            <a:off x="2038350" y="5400675"/>
+            <a:ext cx="0" cy="66675"/>
+          </a:xfrm>
+          <a:prstGeom prst="line">
+            <a:avLst/>
+          </a:prstGeom>
+          <a:noFill/>
+          <a:ln w="12700">
+            <a:solidFill>
+              <a:srgbClr val="22354A"/>
+            </a:solidFill>
+            <a:prstDash val="solid"/>
+          </a:ln>
+        </p:spPr>
+      </p:sp>
+      <p:sp>
+        <p:nvSpPr>
+          <p:cNvPr id="34" name="Shape 28"/>
+          <p:cNvSpPr/>
+          <p:nvPr/>
+        </p:nvSpPr>
+        <p:spPr>
+          <a:xfrm>
+            <a:off x="2182178" y="5400675"/>
+            <a:ext cx="0" cy="66675"/>
+          </a:xfrm>
+          <a:prstGeom prst="line">
+            <a:avLst/>
+          </a:prstGeom>
+          <a:noFill/>
+          <a:ln w="12700">
+            <a:solidFill>
+              <a:srgbClr val="22354A"/>
+            </a:solidFill>
+            <a:prstDash val="solid"/>
+          </a:ln>
+        </p:spPr>
+      </p:sp>
+      <p:sp>
+        <p:nvSpPr>
+          <p:cNvPr id="35" name="Shape 29"/>
+          <p:cNvSpPr/>
+          <p:nvPr/>
+        </p:nvSpPr>
+        <p:spPr>
+          <a:xfrm>
+            <a:off x="2326005" y="5400675"/>
+            <a:ext cx="0" cy="66675"/>
+          </a:xfrm>
+          <a:prstGeom prst="line">
+            <a:avLst/>
+          </a:prstGeom>
+          <a:noFill/>
+          <a:ln w="12700">
+            <a:solidFill>
+              <a:srgbClr val="22354A"/>
+            </a:solidFill>
+            <a:prstDash val="solid"/>
+          </a:ln>
+        </p:spPr>
+      </p:sp>
+      <p:sp>
+        <p:nvSpPr>
+          <p:cNvPr id="36" name="Shape 30"/>
+          <p:cNvSpPr/>
+          <p:nvPr/>
+        </p:nvSpPr>
+        <p:spPr>
+          <a:xfrm>
+            <a:off x="2469833" y="5400675"/>
+            <a:ext cx="0" cy="66675"/>
+          </a:xfrm>
+          <a:prstGeom prst="line">
+            <a:avLst/>
+          </a:prstGeom>
+          <a:noFill/>
+          <a:ln w="12700">
+            <a:solidFill>
+              <a:srgbClr val="22354A"/>
+            </a:solidFill>
+            <a:prstDash val="solid"/>
+          </a:ln>
+        </p:spPr>
+      </p:sp>
+      <p:sp>
+        <p:nvSpPr>
+          <p:cNvPr id="37" name="Shape 31"/>
+          <p:cNvSpPr/>
+          <p:nvPr/>
+        </p:nvSpPr>
+        <p:spPr>
+          <a:xfrm>
+            <a:off x="2613660" y="5400675"/>
+            <a:ext cx="0" cy="66675"/>
+          </a:xfrm>
+          <a:prstGeom prst="line">
+            <a:avLst/>
+          </a:prstGeom>
+          <a:noFill/>
+          <a:ln w="12700">
+            <a:solidFill>
+              <a:srgbClr val="22354A"/>
+            </a:solidFill>
+            <a:prstDash val="solid"/>
+          </a:ln>
+        </p:spPr>
+      </p:sp>
+      <p:sp>
+        <p:nvSpPr>
+          <p:cNvPr id="38" name="Shape 32"/>
+          <p:cNvSpPr/>
+          <p:nvPr/>
+        </p:nvSpPr>
+        <p:spPr>
+          <a:xfrm>
+            <a:off x="2757488" y="5400675"/>
+            <a:ext cx="0" cy="66675"/>
+          </a:xfrm>
+          <a:prstGeom prst="line">
+            <a:avLst/>
+          </a:prstGeom>
+          <a:noFill/>
+          <a:ln w="12700">
+            <a:solidFill>
+              <a:srgbClr val="22354A"/>
+            </a:solidFill>
+            <a:prstDash val="solid"/>
+          </a:ln>
+        </p:spPr>
+      </p:sp>
+      <p:sp>
+        <p:nvSpPr>
+          <p:cNvPr id="39" name="Shape 33"/>
+          <p:cNvSpPr/>
+          <p:nvPr/>
+        </p:nvSpPr>
+        <p:spPr>
+          <a:xfrm>
+            <a:off x="2901315" y="5400675"/>
+            <a:ext cx="0" cy="66675"/>
+          </a:xfrm>
+          <a:prstGeom prst="line">
+            <a:avLst/>
+          </a:prstGeom>
+          <a:noFill/>
+          <a:ln w="12700">
+            <a:solidFill>
+              <a:srgbClr val="22354A"/>
+            </a:solidFill>
+            <a:prstDash val="solid"/>
+          </a:ln>
+        </p:spPr>
+      </p:sp>
+      <p:sp>
+        <p:nvSpPr>
+          <p:cNvPr id="40" name="Shape 34"/>
+          <p:cNvSpPr/>
+          <p:nvPr/>
+        </p:nvSpPr>
+        <p:spPr>
+          <a:xfrm>
+            <a:off x="3045143" y="5400675"/>
+            <a:ext cx="0" cy="66675"/>
+          </a:xfrm>
+          <a:prstGeom prst="line">
+            <a:avLst/>
+          </a:prstGeom>
+          <a:noFill/>
+          <a:ln w="12700">
+            <a:solidFill>
+              <a:srgbClr val="22354A"/>
+            </a:solidFill>
+            <a:prstDash val="solid"/>
+          </a:ln>
+        </p:spPr>
+      </p:sp>
+      <p:sp>
+        <p:nvSpPr>
+          <p:cNvPr id="41" name="Shape 35"/>
+          <p:cNvSpPr/>
+          <p:nvPr/>
+        </p:nvSpPr>
+        <p:spPr>
+          <a:xfrm>
+            <a:off x="3188970" y="5400675"/>
+            <a:ext cx="0" cy="66675"/>
+          </a:xfrm>
+          <a:prstGeom prst="line">
+            <a:avLst/>
+          </a:prstGeom>
+          <a:noFill/>
+          <a:ln w="12700">
+            <a:solidFill>
+              <a:srgbClr val="22354A"/>
+            </a:solidFill>
+            <a:prstDash val="solid"/>
+          </a:ln>
+        </p:spPr>
+      </p:sp>
+      <p:sp>
+        <p:nvSpPr>
+          <p:cNvPr id="42" name="Shape 36"/>
+          <p:cNvSpPr/>
+          <p:nvPr/>
+        </p:nvSpPr>
+        <p:spPr>
+          <a:xfrm>
+            <a:off x="3332798" y="5400675"/>
+            <a:ext cx="0" cy="66675"/>
+          </a:xfrm>
+          <a:prstGeom prst="line">
+            <a:avLst/>
+          </a:prstGeom>
+          <a:noFill/>
+          <a:ln w="12700">
+            <a:solidFill>
+              <a:srgbClr val="22354A"/>
+            </a:solidFill>
+            <a:prstDash val="solid"/>
+          </a:ln>
+        </p:spPr>
+      </p:sp>
+      <p:sp>
+        <p:nvSpPr>
+          <p:cNvPr id="43" name="Shape 37"/>
+          <p:cNvSpPr/>
+          <p:nvPr/>
+        </p:nvSpPr>
+        <p:spPr>
+          <a:xfrm>
+            <a:off x="3476625" y="5400675"/>
+            <a:ext cx="0" cy="66675"/>
+          </a:xfrm>
+          <a:prstGeom prst="line">
+            <a:avLst/>
+          </a:prstGeom>
+          <a:noFill/>
+          <a:ln w="12700">
+            <a:solidFill>
+              <a:srgbClr val="22354A"/>
+            </a:solidFill>
+            <a:prstDash val="solid"/>
+          </a:ln>
+        </p:spPr>
+      </p:sp>
+      <p:sp>
+        <p:nvSpPr>
+          <p:cNvPr id="44" name="Shape 38"/>
+          <p:cNvSpPr/>
+          <p:nvPr/>
+        </p:nvSpPr>
+        <p:spPr>
+          <a:xfrm>
+            <a:off x="3620453" y="5400675"/>
+            <a:ext cx="0" cy="66675"/>
+          </a:xfrm>
+          <a:prstGeom prst="line">
+            <a:avLst/>
+          </a:prstGeom>
+          <a:noFill/>
+          <a:ln w="12700">
+            <a:solidFill>
+              <a:srgbClr val="22354A"/>
+            </a:solidFill>
+            <a:prstDash val="solid"/>
+          </a:ln>
+        </p:spPr>
+      </p:sp>
+      <p:sp>
+        <p:nvSpPr>
+          <p:cNvPr id="45" name="Shape 39"/>
+          <p:cNvSpPr/>
+          <p:nvPr/>
+        </p:nvSpPr>
+        <p:spPr>
+          <a:xfrm>
+            <a:off x="3764280" y="5400675"/>
+            <a:ext cx="0" cy="66675"/>
+          </a:xfrm>
+          <a:prstGeom prst="line">
+            <a:avLst/>
+          </a:prstGeom>
+          <a:noFill/>
+          <a:ln w="12700">
+            <a:solidFill>
+              <a:srgbClr val="22354A"/>
+            </a:solidFill>
+            <a:prstDash val="solid"/>
+          </a:ln>
+        </p:spPr>
+      </p:sp>
+      <p:sp>
+        <p:nvSpPr>
+          <p:cNvPr id="46" name="Shape 40"/>
+          <p:cNvSpPr/>
+          <p:nvPr/>
+        </p:nvSpPr>
+        <p:spPr>
+          <a:xfrm>
+            <a:off x="3908107" y="5400675"/>
+            <a:ext cx="0" cy="66675"/>
+          </a:xfrm>
+          <a:prstGeom prst="line">
+            <a:avLst/>
+          </a:prstGeom>
+          <a:noFill/>
+          <a:ln w="12700">
+            <a:solidFill>
+              <a:srgbClr val="22354A"/>
+            </a:solidFill>
+            <a:prstDash val="solid"/>
+          </a:ln>
+        </p:spPr>
+      </p:sp>
+      <p:sp>
+        <p:nvSpPr>
+          <p:cNvPr id="47" name="Shape 41"/>
+          <p:cNvSpPr/>
+          <p:nvPr/>
+        </p:nvSpPr>
+        <p:spPr>
+          <a:xfrm>
+            <a:off x="4051935" y="5400675"/>
+            <a:ext cx="0" cy="66675"/>
+          </a:xfrm>
+          <a:prstGeom prst="line">
+            <a:avLst/>
+          </a:prstGeom>
+          <a:noFill/>
+          <a:ln w="12700">
+            <a:solidFill>
+              <a:srgbClr val="22354A"/>
+            </a:solidFill>
+            <a:prstDash val="solid"/>
+          </a:ln>
+        </p:spPr>
+      </p:sp>
+      <p:sp>
+        <p:nvSpPr>
+          <p:cNvPr id="48" name="Shape 42"/>
+          <p:cNvSpPr/>
+          <p:nvPr/>
+        </p:nvSpPr>
+        <p:spPr>
+          <a:xfrm>
+            <a:off x="4195763" y="5400675"/>
+            <a:ext cx="0" cy="66675"/>
+          </a:xfrm>
+          <a:prstGeom prst="line">
+            <a:avLst/>
+          </a:prstGeom>
+          <a:noFill/>
+          <a:ln w="12700">
+            <a:solidFill>
+              <a:srgbClr val="22354A"/>
+            </a:solidFill>
+            <a:prstDash val="solid"/>
+          </a:ln>
+        </p:spPr>
+      </p:sp>
+      <p:sp>
+        <p:nvSpPr>
+          <p:cNvPr id="49" name="Shape 43"/>
+          <p:cNvSpPr/>
+          <p:nvPr/>
+        </p:nvSpPr>
+        <p:spPr>
+          <a:xfrm>
+            <a:off x="4339590" y="5400675"/>
+            <a:ext cx="0" cy="66675"/>
+          </a:xfrm>
+          <a:prstGeom prst="line">
+            <a:avLst/>
+          </a:prstGeom>
+          <a:noFill/>
+          <a:ln w="12700">
+            <a:solidFill>
+              <a:srgbClr val="22354A"/>
+            </a:solidFill>
+            <a:prstDash val="solid"/>
+          </a:ln>
+        </p:spPr>
+      </p:sp>
+      <p:sp>
+        <p:nvSpPr>
+          <p:cNvPr id="50" name="Shape 44"/>
+          <p:cNvSpPr/>
+          <p:nvPr/>
+        </p:nvSpPr>
+        <p:spPr>
+          <a:xfrm>
+            <a:off x="4483418" y="5400675"/>
+            <a:ext cx="0" cy="66675"/>
+          </a:xfrm>
+          <a:prstGeom prst="line">
+            <a:avLst/>
+          </a:prstGeom>
+          <a:noFill/>
+          <a:ln w="12700">
+            <a:solidFill>
+              <a:srgbClr val="22354A"/>
+            </a:solidFill>
+            <a:prstDash val="solid"/>
+          </a:ln>
+        </p:spPr>
+      </p:sp>
+      <p:sp>
+        <p:nvSpPr>
+          <p:cNvPr id="51" name="Shape 45"/>
+          <p:cNvSpPr/>
+          <p:nvPr/>
+        </p:nvSpPr>
+        <p:spPr>
+          <a:xfrm>
+            <a:off x="4627245" y="5400675"/>
+            <a:ext cx="0" cy="66675"/>
+          </a:xfrm>
+          <a:prstGeom prst="line">
+            <a:avLst/>
+          </a:prstGeom>
+          <a:noFill/>
+          <a:ln w="12700">
+            <a:solidFill>
+              <a:srgbClr val="22354A"/>
+            </a:solidFill>
+            <a:prstDash val="solid"/>
+          </a:ln>
+        </p:spPr>
+      </p:sp>
+      <p:sp>
+        <p:nvSpPr>
+          <p:cNvPr id="52" name="Shape 46"/>
+          <p:cNvSpPr/>
+          <p:nvPr/>
+        </p:nvSpPr>
+        <p:spPr>
+          <a:xfrm>
+            <a:off x="4771073" y="5400675"/>
+            <a:ext cx="0" cy="66675"/>
+          </a:xfrm>
+          <a:prstGeom prst="line">
+            <a:avLst/>
+          </a:prstGeom>
+          <a:noFill/>
+          <a:ln w="12700">
+            <a:solidFill>
+              <a:srgbClr val="22354A"/>
+            </a:solidFill>
+            <a:prstDash val="solid"/>
+          </a:ln>
+        </p:spPr>
+      </p:sp>
+      <p:sp>
+        <p:nvSpPr>
+          <p:cNvPr id="53" name="Shape 47"/>
+          <p:cNvSpPr/>
+          <p:nvPr/>
+        </p:nvSpPr>
+        <p:spPr>
+          <a:xfrm>
+            <a:off x="4914900" y="5400675"/>
+            <a:ext cx="0" cy="66675"/>
+          </a:xfrm>
+          <a:prstGeom prst="line">
+            <a:avLst/>
+          </a:prstGeom>
+          <a:noFill/>
+          <a:ln w="12700">
+            <a:solidFill>
+              <a:srgbClr val="22354A"/>
+            </a:solidFill>
+            <a:prstDash val="solid"/>
+          </a:ln>
+        </p:spPr>
+      </p:sp>
+      <p:sp>
+        <p:nvSpPr>
+          <p:cNvPr id="54" name="Shape 48"/>
+          <p:cNvSpPr/>
+          <p:nvPr/>
+        </p:nvSpPr>
+        <p:spPr>
+          <a:xfrm>
+            <a:off x="5058727" y="5400675"/>
+            <a:ext cx="0" cy="66675"/>
+          </a:xfrm>
+          <a:prstGeom prst="line">
+            <a:avLst/>
+          </a:prstGeom>
+          <a:noFill/>
+          <a:ln w="12700">
+            <a:solidFill>
+              <a:srgbClr val="22354A"/>
+            </a:solidFill>
+            <a:prstDash val="solid"/>
+          </a:ln>
+        </p:spPr>
+      </p:sp>
+      <p:sp>
+        <p:nvSpPr>
+          <p:cNvPr id="55" name="Shape 49"/>
+          <p:cNvSpPr/>
+          <p:nvPr/>
+        </p:nvSpPr>
+        <p:spPr>
+          <a:xfrm>
+            <a:off x="5202555" y="5400675"/>
+            <a:ext cx="0" cy="66675"/>
+          </a:xfrm>
+          <a:prstGeom prst="line">
+            <a:avLst/>
+          </a:prstGeom>
+          <a:noFill/>
+          <a:ln w="12700">
+            <a:solidFill>
+              <a:srgbClr val="22354A"/>
+            </a:solidFill>
+            <a:prstDash val="solid"/>
+          </a:ln>
+        </p:spPr>
+      </p:sp>
+      <p:sp>
+        <p:nvSpPr>
+          <p:cNvPr id="56" name="Shape 50"/>
+          <p:cNvSpPr/>
+          <p:nvPr/>
+        </p:nvSpPr>
+        <p:spPr>
+          <a:xfrm>
+            <a:off x="5346383" y="5400675"/>
+            <a:ext cx="0" cy="66675"/>
+          </a:xfrm>
+          <a:prstGeom prst="line">
+            <a:avLst/>
+          </a:prstGeom>
+          <a:noFill/>
+          <a:ln w="12700">
+            <a:solidFill>
+              <a:srgbClr val="22354A"/>
+            </a:solidFill>
+            <a:prstDash val="solid"/>
+          </a:ln>
+        </p:spPr>
+      </p:sp>
+      <p:sp>
+        <p:nvSpPr>
+          <p:cNvPr id="57" name="Shape 51"/>
+          <p:cNvSpPr/>
+          <p:nvPr/>
+        </p:nvSpPr>
+        <p:spPr>
+          <a:xfrm>
+            <a:off x="5490210" y="5400675"/>
+            <a:ext cx="0" cy="66675"/>
+          </a:xfrm>
+          <a:prstGeom prst="line">
+            <a:avLst/>
+          </a:prstGeom>
+          <a:noFill/>
+          <a:ln w="12700">
+            <a:solidFill>
+              <a:srgbClr val="22354A"/>
+            </a:solidFill>
+            <a:prstDash val="solid"/>
+          </a:ln>
+        </p:spPr>
+      </p:sp>
+      <p:sp>
+        <p:nvSpPr>
+          <p:cNvPr id="58" name="Shape 52"/>
+          <p:cNvSpPr/>
+          <p:nvPr/>
+        </p:nvSpPr>
+        <p:spPr>
+          <a:xfrm>
+            <a:off x="5634038" y="5400675"/>
+            <a:ext cx="0" cy="66675"/>
+          </a:xfrm>
+          <a:prstGeom prst="line">
+            <a:avLst/>
+          </a:prstGeom>
+          <a:noFill/>
+          <a:ln w="12700">
+            <a:solidFill>
+              <a:srgbClr val="22354A"/>
+            </a:solidFill>
+            <a:prstDash val="solid"/>
+          </a:ln>
+        </p:spPr>
+      </p:sp>
+      <p:sp>
+        <p:nvSpPr>
+          <p:cNvPr id="59" name="Shape 53"/>
+          <p:cNvSpPr/>
+          <p:nvPr/>
+        </p:nvSpPr>
+        <p:spPr>
+          <a:xfrm>
+            <a:off x="5777865" y="5400675"/>
+            <a:ext cx="0" cy="66675"/>
+          </a:xfrm>
+          <a:prstGeom prst="line">
+            <a:avLst/>
+          </a:prstGeom>
+          <a:noFill/>
+          <a:ln w="12700">
+            <a:solidFill>
+              <a:srgbClr val="22354A"/>
+            </a:solidFill>
+            <a:prstDash val="solid"/>
+          </a:ln>
+        </p:spPr>
+      </p:sp>
+      <p:sp>
+        <p:nvSpPr>
+          <p:cNvPr id="60" name="Shape 54"/>
+          <p:cNvSpPr/>
+          <p:nvPr/>
+        </p:nvSpPr>
+        <p:spPr>
+          <a:xfrm>
+            <a:off x="5921693" y="5400675"/>
+            <a:ext cx="0" cy="66675"/>
+          </a:xfrm>
+          <a:prstGeom prst="line">
+            <a:avLst/>
+          </a:prstGeom>
+          <a:noFill/>
+          <a:ln w="12700">
+            <a:solidFill>
+              <a:srgbClr val="22354A"/>
+            </a:solidFill>
+            <a:prstDash val="solid"/>
+          </a:ln>
+        </p:spPr>
+      </p:sp>
+      <p:sp>
+        <p:nvSpPr>
+          <p:cNvPr id="61" name="Shape 55"/>
+          <p:cNvSpPr/>
+          <p:nvPr/>
+        </p:nvSpPr>
+        <p:spPr>
+          <a:xfrm>
+            <a:off x="6065520" y="5400675"/>
+            <a:ext cx="0" cy="66675"/>
+          </a:xfrm>
+          <a:prstGeom prst="line">
+            <a:avLst/>
+          </a:prstGeom>
+          <a:noFill/>
+          <a:ln w="12700">
+            <a:solidFill>
+              <a:srgbClr val="22354A"/>
+            </a:solidFill>
+            <a:prstDash val="solid"/>
+          </a:ln>
+        </p:spPr>
+      </p:sp>
+      <p:sp>
+        <p:nvSpPr>
+          <p:cNvPr id="62" name="Shape 56"/>
+          <p:cNvSpPr/>
+          <p:nvPr/>
+        </p:nvSpPr>
+        <p:spPr>
+          <a:xfrm>
+            <a:off x="6209347" y="5400675"/>
+            <a:ext cx="0" cy="66675"/>
+          </a:xfrm>
+          <a:prstGeom prst="line">
+            <a:avLst/>
+          </a:prstGeom>
+          <a:noFill/>
+          <a:ln w="12700">
+            <a:solidFill>
+              <a:srgbClr val="22354A"/>
+            </a:solidFill>
+            <a:prstDash val="solid"/>
+          </a:ln>
+        </p:spPr>
+      </p:sp>
+      <p:sp>
+        <p:nvSpPr>
+          <p:cNvPr id="63" name="Shape 57"/>
+          <p:cNvSpPr/>
+          <p:nvPr/>
+        </p:nvSpPr>
+        <p:spPr>
+          <a:xfrm>
+            <a:off x="6353175" y="5400675"/>
+            <a:ext cx="0" cy="66675"/>
+          </a:xfrm>
+          <a:prstGeom prst="line">
+            <a:avLst/>
+          </a:prstGeom>
+          <a:noFill/>
+          <a:ln w="12700">
+            <a:solidFill>
+              <a:srgbClr val="22354A"/>
+            </a:solidFill>
+            <a:prstDash val="solid"/>
+          </a:ln>
+        </p:spPr>
+      </p:sp>
+      <p:sp>
+        <p:nvSpPr>
+          <p:cNvPr id="64" name="Shape 58"/>
+          <p:cNvSpPr/>
+          <p:nvPr/>
+        </p:nvSpPr>
+        <p:spPr>
+          <a:xfrm>
+            <a:off x="6497002" y="5400675"/>
+            <a:ext cx="0" cy="66675"/>
+          </a:xfrm>
+          <a:prstGeom prst="line">
+            <a:avLst/>
+          </a:prstGeom>
+          <a:noFill/>
+          <a:ln w="12700">
+            <a:solidFill>
+              <a:srgbClr val="22354A"/>
+            </a:solidFill>
+            <a:prstDash val="solid"/>
+          </a:ln>
+        </p:spPr>
+      </p:sp>
+      <p:sp>
+        <p:nvSpPr>
+          <p:cNvPr id="65" name="Shape 59"/>
+          <p:cNvSpPr/>
+          <p:nvPr/>
+        </p:nvSpPr>
+        <p:spPr>
+          <a:xfrm>
+            <a:off x="6640830" y="5400675"/>
+            <a:ext cx="0" cy="66675"/>
+          </a:xfrm>
+          <a:prstGeom prst="line">
+            <a:avLst/>
+          </a:prstGeom>
+          <a:noFill/>
+          <a:ln w="12700">
+            <a:solidFill>
+              <a:srgbClr val="22354A"/>
+            </a:solidFill>
+            <a:prstDash val="solid"/>
+          </a:ln>
+        </p:spPr>
+      </p:sp>
+      <p:sp>
+        <p:nvSpPr>
+          <p:cNvPr id="66" name="Shape 60"/>
+          <p:cNvSpPr/>
+          <p:nvPr/>
+        </p:nvSpPr>
+        <p:spPr>
+          <a:xfrm>
+            <a:off x="6784657" y="5400675"/>
+            <a:ext cx="0" cy="66675"/>
+          </a:xfrm>
+          <a:prstGeom prst="line">
+            <a:avLst/>
+          </a:prstGeom>
+          <a:noFill/>
+          <a:ln w="12700">
+            <a:solidFill>
+              <a:srgbClr val="22354A"/>
+            </a:solidFill>
+            <a:prstDash val="solid"/>
+          </a:ln>
+        </p:spPr>
+      </p:sp>
+      <p:sp>
+        <p:nvSpPr>
+          <p:cNvPr id="67" name="Shape 61"/>
+          <p:cNvSpPr/>
+          <p:nvPr/>
+        </p:nvSpPr>
+        <p:spPr>
+          <a:xfrm>
+            <a:off x="6928485" y="5400675"/>
+            <a:ext cx="0" cy="66675"/>
+          </a:xfrm>
+          <a:prstGeom prst="line">
+            <a:avLst/>
+          </a:prstGeom>
+          <a:noFill/>
+          <a:ln w="12700">
+            <a:solidFill>
+              <a:srgbClr val="22354A"/>
+            </a:solidFill>
+            <a:prstDash val="solid"/>
+          </a:ln>
+        </p:spPr>
+      </p:sp>
+      <p:sp>
+        <p:nvSpPr>
+          <p:cNvPr id="68" name="Shape 62"/>
+          <p:cNvSpPr/>
+          <p:nvPr/>
+        </p:nvSpPr>
+        <p:spPr>
+          <a:xfrm>
+            <a:off x="7072313" y="5400675"/>
+            <a:ext cx="0" cy="66675"/>
+          </a:xfrm>
+          <a:prstGeom prst="line">
+            <a:avLst/>
+          </a:prstGeom>
+          <a:noFill/>
+          <a:ln w="12700">
+            <a:solidFill>
+              <a:srgbClr val="22354A"/>
+            </a:solidFill>
+            <a:prstDash val="solid"/>
+          </a:ln>
+        </p:spPr>
+      </p:sp>
+      <p:sp>
+        <p:nvSpPr>
+          <p:cNvPr id="69" name="Shape 63"/>
+          <p:cNvSpPr/>
+          <p:nvPr/>
+        </p:nvSpPr>
+        <p:spPr>
+          <a:xfrm>
+            <a:off x="7216140" y="5400675"/>
+            <a:ext cx="0" cy="66675"/>
+          </a:xfrm>
+          <a:prstGeom prst="line">
+            <a:avLst/>
+          </a:prstGeom>
+          <a:noFill/>
+          <a:ln w="12700">
+            <a:solidFill>
+              <a:srgbClr val="22354A"/>
+            </a:solidFill>
+            <a:prstDash val="solid"/>
+          </a:ln>
+        </p:spPr>
+      </p:sp>
+      <p:sp>
+        <p:nvSpPr>
+          <p:cNvPr id="70" name="Shape 64"/>
+          <p:cNvSpPr/>
+          <p:nvPr/>
+        </p:nvSpPr>
+        <p:spPr>
+          <a:xfrm>
+            <a:off x="7359968" y="5400675"/>
+            <a:ext cx="0" cy="66675"/>
+          </a:xfrm>
+          <a:prstGeom prst="line">
+            <a:avLst/>
+          </a:prstGeom>
+          <a:noFill/>
+          <a:ln w="12700">
+            <a:solidFill>
+              <a:srgbClr val="22354A"/>
+            </a:solidFill>
+            <a:prstDash val="solid"/>
+          </a:ln>
+        </p:spPr>
+      </p:sp>
+      <p:sp>
+        <p:nvSpPr>
+          <p:cNvPr id="71" name="Shape 65"/>
+          <p:cNvSpPr/>
+          <p:nvPr/>
+        </p:nvSpPr>
+        <p:spPr>
+          <a:xfrm>
+            <a:off x="7503795" y="5400675"/>
+            <a:ext cx="0" cy="66675"/>
+          </a:xfrm>
+          <a:prstGeom prst="line">
+            <a:avLst/>
+          </a:prstGeom>
+          <a:noFill/>
+          <a:ln w="12700">
+            <a:solidFill>
+              <a:srgbClr val="22354A"/>
+            </a:solidFill>
+            <a:prstDash val="solid"/>
+          </a:ln>
+        </p:spPr>
+      </p:sp>
+      <p:sp>
+        <p:nvSpPr>
+          <p:cNvPr id="72" name="Shape 66"/>
+          <p:cNvSpPr/>
+          <p:nvPr/>
+        </p:nvSpPr>
+        <p:spPr>
+          <a:xfrm>
+            <a:off x="7647623" y="5400675"/>
+            <a:ext cx="0" cy="66675"/>
+          </a:xfrm>
+          <a:prstGeom prst="line">
+            <a:avLst/>
+          </a:prstGeom>
+          <a:noFill/>
+          <a:ln w="12700">
+            <a:solidFill>
+              <a:srgbClr val="22354A"/>
+            </a:solidFill>
+            <a:prstDash val="solid"/>
+          </a:ln>
+        </p:spPr>
+      </p:sp>
+      <p:sp>
+        <p:nvSpPr>
+          <p:cNvPr id="73" name="Shape 67"/>
+          <p:cNvSpPr/>
+          <p:nvPr/>
+        </p:nvSpPr>
+        <p:spPr>
+          <a:xfrm>
+            <a:off x="7791450" y="5400675"/>
+            <a:ext cx="0" cy="66675"/>
+          </a:xfrm>
+          <a:prstGeom prst="line">
+            <a:avLst/>
+          </a:prstGeom>
+          <a:noFill/>
+          <a:ln w="12700">
+            <a:solidFill>
+              <a:srgbClr val="22354A"/>
+            </a:solidFill>
+            <a:prstDash val="solid"/>
+          </a:ln>
+        </p:spPr>
+      </p:sp>
+      <p:sp>
+        <p:nvSpPr>
+          <p:cNvPr id="74" name="Shape 68"/>
+          <p:cNvSpPr/>
+          <p:nvPr/>
+        </p:nvSpPr>
+        <p:spPr>
+          <a:xfrm>
+            <a:off x="7935278" y="5400675"/>
+            <a:ext cx="0" cy="66675"/>
+          </a:xfrm>
+          <a:prstGeom prst="line">
+            <a:avLst/>
+          </a:prstGeom>
+          <a:noFill/>
+          <a:ln w="12700">
+            <a:solidFill>
+              <a:srgbClr val="22354A"/>
+            </a:solidFill>
+            <a:prstDash val="solid"/>
+          </a:ln>
+        </p:spPr>
+      </p:sp>
+      <p:sp>
+        <p:nvSpPr>
+          <p:cNvPr id="75" name="Shape 69"/>
+          <p:cNvSpPr/>
+          <p:nvPr/>
+        </p:nvSpPr>
+        <p:spPr>
+          <a:xfrm>
+            <a:off x="8079105" y="5400675"/>
+            <a:ext cx="0" cy="66675"/>
+          </a:xfrm>
+          <a:prstGeom prst="line">
+            <a:avLst/>
+          </a:prstGeom>
+          <a:noFill/>
+          <a:ln w="12700">
+            <a:solidFill>
+              <a:srgbClr val="22354A"/>
+            </a:solidFill>
+            <a:prstDash val="solid"/>
+          </a:ln>
+        </p:spPr>
+      </p:sp>
+      <p:sp>
+        <p:nvSpPr>
+          <p:cNvPr id="76" name="Shape 70"/>
+          <p:cNvSpPr/>
+          <p:nvPr/>
+        </p:nvSpPr>
+        <p:spPr>
+          <a:xfrm>
+            <a:off x="8222933" y="5400675"/>
+            <a:ext cx="0" cy="66675"/>
+          </a:xfrm>
+          <a:prstGeom prst="line">
+            <a:avLst/>
+          </a:prstGeom>
+          <a:noFill/>
+          <a:ln w="12700">
+            <a:solidFill>
+              <a:srgbClr val="22354A"/>
+            </a:solidFill>
+            <a:prstDash val="solid"/>
+          </a:ln>
+        </p:spPr>
+      </p:sp>
+      <p:sp>
+        <p:nvSpPr>
+          <p:cNvPr id="77" name="Shape 71"/>
+          <p:cNvSpPr/>
+          <p:nvPr/>
+        </p:nvSpPr>
+        <p:spPr>
+          <a:xfrm>
+            <a:off x="8366760" y="5400675"/>
+            <a:ext cx="0" cy="66675"/>
+          </a:xfrm>
+          <a:prstGeom prst="line">
+            <a:avLst/>
+          </a:prstGeom>
+          <a:noFill/>
+          <a:ln w="12700">
+            <a:solidFill>
+              <a:srgbClr val="22354A"/>
+            </a:solidFill>
+            <a:prstDash val="solid"/>
+          </a:ln>
+        </p:spPr>
+      </p:sp>
+      <p:sp>
+        <p:nvSpPr>
+          <p:cNvPr id="78" name="Shape 72"/>
+          <p:cNvSpPr/>
+          <p:nvPr/>
+        </p:nvSpPr>
+        <p:spPr>
+          <a:xfrm>
+            <a:off x="8510588" y="5314950"/>
+            <a:ext cx="0" cy="152400"/>
+          </a:xfrm>
+          <a:prstGeom prst="line">
+            <a:avLst/>
+          </a:prstGeom>
+          <a:noFill/>
+          <a:ln w="25400">
+            <a:solidFill>
+              <a:srgbClr val="EFB13C"/>
+            </a:solidFill>
+            <a:prstDash val="solid"/>
+          </a:ln>
+        </p:spPr>
+      </p:sp>
+      <p:sp>
+        <p:nvSpPr>
+          <p:cNvPr id="79" name="Shape 73"/>
+          <p:cNvSpPr/>
+          <p:nvPr/>
+        </p:nvSpPr>
+        <p:spPr>
+          <a:xfrm>
+            <a:off x="8654415" y="5400675"/>
+            <a:ext cx="0" cy="66675"/>
+          </a:xfrm>
+          <a:prstGeom prst="line">
+            <a:avLst/>
+          </a:prstGeom>
+          <a:noFill/>
+          <a:ln w="12700">
+            <a:solidFill>
+              <a:srgbClr val="22354A"/>
+            </a:solidFill>
+            <a:prstDash val="solid"/>
+          </a:ln>
+        </p:spPr>
+      </p:sp>
+      <p:sp>
+        <p:nvSpPr>
+          <p:cNvPr id="80" name="Shape 74"/>
+          <p:cNvSpPr/>
+          <p:nvPr/>
+        </p:nvSpPr>
+        <p:spPr>
+          <a:xfrm>
+            <a:off x="8798243" y="5400675"/>
+            <a:ext cx="0" cy="66675"/>
+          </a:xfrm>
+          <a:prstGeom prst="line">
+            <a:avLst/>
+          </a:prstGeom>
+          <a:noFill/>
+          <a:ln w="12700">
+            <a:solidFill>
+              <a:srgbClr val="22354A"/>
+            </a:solidFill>
+            <a:prstDash val="solid"/>
+          </a:ln>
+        </p:spPr>
+      </p:sp>
+      <p:sp>
+        <p:nvSpPr>
+          <p:cNvPr id="81" name="Shape 75"/>
+          <p:cNvSpPr/>
+          <p:nvPr/>
+        </p:nvSpPr>
+        <p:spPr>
+          <a:xfrm>
+            <a:off x="8942070" y="5400675"/>
+            <a:ext cx="0" cy="66675"/>
+          </a:xfrm>
+          <a:prstGeom prst="line">
+            <a:avLst/>
+          </a:prstGeom>
+          <a:noFill/>
+          <a:ln w="12700">
+            <a:solidFill>
+              <a:srgbClr val="22354A"/>
+            </a:solidFill>
+            <a:prstDash val="solid"/>
+          </a:ln>
+        </p:spPr>
+      </p:sp>
+      <p:sp>
+        <p:nvSpPr>
+          <p:cNvPr id="82" name="Shape 76"/>
+          <p:cNvSpPr/>
+          <p:nvPr/>
+        </p:nvSpPr>
+        <p:spPr>
+          <a:xfrm>
+            <a:off x="9085898" y="5400675"/>
+            <a:ext cx="0" cy="66675"/>
+          </a:xfrm>
+          <a:prstGeom prst="line">
+            <a:avLst/>
+          </a:prstGeom>
+          <a:noFill/>
+          <a:ln w="12700">
+            <a:solidFill>
+              <a:srgbClr val="22354A"/>
+            </a:solidFill>
+            <a:prstDash val="solid"/>
+          </a:ln>
+        </p:spPr>
+      </p:sp>
+      <p:sp>
+        <p:nvSpPr>
+          <p:cNvPr id="83" name="Shape 77"/>
+          <p:cNvSpPr/>
+          <p:nvPr/>
+        </p:nvSpPr>
+        <p:spPr>
+          <a:xfrm>
+            <a:off x="9229725" y="5400675"/>
+            <a:ext cx="0" cy="66675"/>
+          </a:xfrm>
+          <a:prstGeom prst="line">
+            <a:avLst/>
+          </a:prstGeom>
+          <a:noFill/>
+          <a:ln w="12700">
+            <a:solidFill>
+              <a:srgbClr val="22354A"/>
+            </a:solidFill>
+            <a:prstDash val="solid"/>
+          </a:ln>
+        </p:spPr>
+      </p:sp>
+      <p:sp>
+        <p:nvSpPr>
+          <p:cNvPr id="84" name="Shape 78"/>
+          <p:cNvSpPr/>
+          <p:nvPr/>
+        </p:nvSpPr>
+        <p:spPr>
+          <a:xfrm>
+            <a:off x="9373553" y="5400675"/>
+            <a:ext cx="0" cy="66675"/>
+          </a:xfrm>
+          <a:prstGeom prst="line">
+            <a:avLst/>
+          </a:prstGeom>
+          <a:noFill/>
+          <a:ln w="12700">
+            <a:solidFill>
+              <a:srgbClr val="22354A"/>
+            </a:solidFill>
+            <a:prstDash val="solid"/>
+          </a:ln>
+        </p:spPr>
+      </p:sp>
+      <p:sp>
+        <p:nvSpPr>
+          <p:cNvPr id="85" name="Shape 79"/>
+          <p:cNvSpPr/>
+          <p:nvPr/>
+        </p:nvSpPr>
+        <p:spPr>
+          <a:xfrm>
+            <a:off x="9517380" y="5400675"/>
+            <a:ext cx="0" cy="66675"/>
+          </a:xfrm>
+          <a:prstGeom prst="line">
+            <a:avLst/>
+          </a:prstGeom>
+          <a:noFill/>
+          <a:ln w="12700">
+            <a:solidFill>
+              <a:srgbClr val="22354A"/>
+            </a:solidFill>
+            <a:prstDash val="solid"/>
+          </a:ln>
+        </p:spPr>
+      </p:sp>
+      <p:sp>
+        <p:nvSpPr>
+          <p:cNvPr id="86" name="Shape 80"/>
+          <p:cNvSpPr/>
+          <p:nvPr/>
+        </p:nvSpPr>
+        <p:spPr>
+          <a:xfrm>
+            <a:off x="9661207" y="5400675"/>
+            <a:ext cx="0" cy="66675"/>
+          </a:xfrm>
+          <a:prstGeom prst="line">
+            <a:avLst/>
+          </a:prstGeom>
+          <a:noFill/>
+          <a:ln w="12700">
+            <a:solidFill>
+              <a:srgbClr val="22354A"/>
+            </a:solidFill>
+            <a:prstDash val="solid"/>
+          </a:ln>
+        </p:spPr>
+      </p:sp>
+      <p:sp>
+        <p:nvSpPr>
+          <p:cNvPr id="87" name="Shape 81"/>
+          <p:cNvSpPr/>
+          <p:nvPr/>
+        </p:nvSpPr>
+        <p:spPr>
+          <a:xfrm>
+            <a:off x="9805035" y="5400675"/>
+            <a:ext cx="0" cy="66675"/>
+          </a:xfrm>
+          <a:prstGeom prst="line">
+            <a:avLst/>
+          </a:prstGeom>
+          <a:noFill/>
+          <a:ln w="12700">
+            <a:solidFill>
+              <a:srgbClr val="22354A"/>
+            </a:solidFill>
+            <a:prstDash val="solid"/>
+          </a:ln>
+        </p:spPr>
+      </p:sp>
+      <p:sp>
+        <p:nvSpPr>
+          <p:cNvPr id="88" name="Shape 82"/>
+          <p:cNvSpPr/>
+          <p:nvPr/>
+        </p:nvSpPr>
+        <p:spPr>
+          <a:xfrm>
+            <a:off x="9948863" y="5400675"/>
+            <a:ext cx="0" cy="66675"/>
+          </a:xfrm>
+          <a:prstGeom prst="line">
+            <a:avLst/>
+          </a:prstGeom>
+          <a:noFill/>
+          <a:ln w="12700">
+            <a:solidFill>
+              <a:srgbClr val="22354A"/>
+            </a:solidFill>
+            <a:prstDash val="solid"/>
+          </a:ln>
+        </p:spPr>
+      </p:sp>
+      <p:sp>
+        <p:nvSpPr>
+          <p:cNvPr id="89" name="Shape 83"/>
+          <p:cNvSpPr/>
+          <p:nvPr/>
+        </p:nvSpPr>
+        <p:spPr>
+          <a:xfrm>
+            <a:off x="10092690" y="5400675"/>
+            <a:ext cx="0" cy="66675"/>
+          </a:xfrm>
+          <a:prstGeom prst="line">
+            <a:avLst/>
+          </a:prstGeom>
+          <a:noFill/>
+          <a:ln w="12700">
+            <a:solidFill>
+              <a:srgbClr val="22354A"/>
+            </a:solidFill>
+            <a:prstDash val="solid"/>
+          </a:ln>
+        </p:spPr>
+      </p:sp>
+      <p:sp>
+        <p:nvSpPr>
+          <p:cNvPr id="90" name="Shape 84"/>
+          <p:cNvSpPr/>
+          <p:nvPr/>
+        </p:nvSpPr>
+        <p:spPr>
+          <a:xfrm>
+            <a:off x="10236517" y="5400675"/>
+            <a:ext cx="0" cy="66675"/>
+          </a:xfrm>
+          <a:prstGeom prst="line">
+            <a:avLst/>
+          </a:prstGeom>
+          <a:noFill/>
+          <a:ln w="12700">
+            <a:solidFill>
+              <a:srgbClr val="22354A"/>
+            </a:solidFill>
+            <a:prstDash val="solid"/>
+          </a:ln>
+        </p:spPr>
+      </p:sp>
+      <p:sp>
+        <p:nvSpPr>
+          <p:cNvPr id="91" name="Shape 85"/>
+          <p:cNvSpPr/>
+          <p:nvPr/>
+        </p:nvSpPr>
+        <p:spPr>
+          <a:xfrm>
+            <a:off x="10380345" y="5400675"/>
+            <a:ext cx="0" cy="66675"/>
+          </a:xfrm>
+          <a:prstGeom prst="line">
+            <a:avLst/>
+          </a:prstGeom>
+          <a:noFill/>
+          <a:ln w="12700">
+            <a:solidFill>
+              <a:srgbClr val="22354A"/>
+            </a:solidFill>
+            <a:prstDash val="solid"/>
+          </a:ln>
+        </p:spPr>
+      </p:sp>
+      <p:sp>
+        <p:nvSpPr>
+          <p:cNvPr id="92" name="Shape 86"/>
+          <p:cNvSpPr/>
+          <p:nvPr/>
+        </p:nvSpPr>
+        <p:spPr>
+          <a:xfrm>
+            <a:off x="10524173" y="5400675"/>
+            <a:ext cx="0" cy="66675"/>
+          </a:xfrm>
+          <a:prstGeom prst="line">
+            <a:avLst/>
+          </a:prstGeom>
+          <a:noFill/>
+          <a:ln w="12700">
+            <a:solidFill>
+              <a:srgbClr val="22354A"/>
+            </a:solidFill>
+            <a:prstDash val="solid"/>
+          </a:ln>
+        </p:spPr>
+      </p:sp>
+      <p:sp>
+        <p:nvSpPr>
+          <p:cNvPr id="93" name="Shape 87"/>
+          <p:cNvSpPr/>
+          <p:nvPr/>
+        </p:nvSpPr>
+        <p:spPr>
+          <a:xfrm>
+            <a:off x="10668000" y="5400675"/>
+            <a:ext cx="0" cy="66675"/>
+          </a:xfrm>
+          <a:prstGeom prst="line">
+            <a:avLst/>
+          </a:prstGeom>
+          <a:noFill/>
+          <a:ln w="12700">
+            <a:solidFill>
+              <a:srgbClr val="22354A"/>
+            </a:solidFill>
+            <a:prstDash val="solid"/>
+          </a:ln>
+        </p:spPr>
+      </p:sp>
+      <p:sp>
+        <p:nvSpPr>
+          <p:cNvPr id="94" name="Shape 88"/>
+          <p:cNvSpPr/>
+          <p:nvPr/>
+        </p:nvSpPr>
+        <p:spPr>
+          <a:xfrm>
+            <a:off x="1962150" y="5467350"/>
+            <a:ext cx="8782050" cy="0"/>
+          </a:xfrm>
+          <a:prstGeom prst="line">
+            <a:avLst/>
+          </a:prstGeom>
+          <a:noFill/>
+          <a:ln w="12700">
+            <a:solidFill>
+              <a:srgbClr val="22354A"/>
+            </a:solidFill>
+            <a:prstDash val="solid"/>
+          </a:ln>
+        </p:spPr>
+      </p:sp>
+      <p:sp>
+        <p:nvSpPr>
+          <p:cNvPr id="95" name="Text 89"/>
+          <p:cNvSpPr txBox="1"/>
+          <p:nvPr/>
+        </p:nvSpPr>
+        <p:spPr>
+          <a:xfrm>
+            <a:off x="1809750" y="5543550"/>
+            <a:ext cx="457200" cy="120015"/>
+          </a:xfrm>
+          <a:prstGeom prst="rect">
+            <a:avLst/>
+          </a:prstGeom>
+          <a:noFill/>
+          <a:ln/>
+        </p:spPr>
+        <p:txBody>
+          <a:bodyPr wrap="square" lIns="0" tIns="0" rIns="0" bIns="0" rtlCol="0" anchor="t"/>
+          <a:lstStyle/>
           <a:p>
-            <a:pPr algn="l" indent="0" marL="0">
+            <a:pPr algn="ctr" indent="0" marL="0">
               <a:lnSpc>
-                <a:spcPts val="2064"/>
+                <a:spcPts val="945"/>
               </a:lnSpc>
               <a:buNone/>
             </a:pPr>
             <a:r>
-              <a:rPr lang="en-US" sz="1200" dirty="0">
+              <a:rPr lang="en-US" sz="788" dirty="0">
                 <a:solidFill>
-                  <a:srgbClr val="CFCBC2"/>
+                  <a:srgbClr val="8A8880"/>
                 </a:solidFill>
-                <a:latin typeface="Malgun Gothic" pitchFamily="34" charset="0"/>
-                <a:ea typeface="Malgun Gothic" pitchFamily="34" charset="-122"/>
-                <a:cs typeface="Malgun Gothic" pitchFamily="34" charset="-120"/>
+                <a:latin typeface="Consolas" pitchFamily="34" charset="0"/>
+                <a:ea typeface="Consolas" pitchFamily="34" charset="-122"/>
+                <a:cs typeface="Consolas" pitchFamily="34" charset="-120"/>
               </a:rPr>
-              <a:t>해보지 않은 온도는 실제로 얼마가 나오는지 알 방법이 없었습니다. 그래서 시험한 날에 생긴 차이를 나머지 온도에도 똑같이 더해서 신고했습니다.</a:t>
+              <a:t>-20</a:t>
             </a:r>
-            <a:endParaRPr lang="en-US" sz="1200" dirty="0"/>
+            <a:endParaRPr lang="en-US" sz="788" dirty="0"/>
           </a:p>
         </p:txBody>
       </p:sp>
       <p:sp>
         <p:nvSpPr>
-          <p:cNvPr id="32" name="Shape 26"/>
-          <p:cNvSpPr/>
-          <p:nvPr/>
-        </p:nvSpPr>
-        <p:spPr>
-          <a:xfrm>
-            <a:off x="8763000" y="4572000"/>
-            <a:ext cx="28575" cy="914400"/>
-          </a:xfrm>
-          <a:prstGeom prst="rect">
-            <a:avLst/>
-          </a:prstGeom>
-          <a:solidFill>
-            <a:srgbClr val="22354A"/>
-          </a:solidFill>
-          <a:ln/>
-        </p:spPr>
-      </p:sp>
-      <p:sp>
-        <p:nvSpPr>
-          <p:cNvPr id="33" name="Text 27"/>
+          <p:cNvPr id="96" name="Text 90"/>
           <p:cNvSpPr txBox="1"/>
           <p:nvPr/>
         </p:nvSpPr>
         <p:spPr>
           <a:xfrm>
-            <a:off x="8972550" y="4610100"/>
-            <a:ext cx="2533650" cy="200025"/>
+            <a:off x="3248025" y="5543550"/>
+            <a:ext cx="457200" cy="120015"/>
+          </a:xfrm>
+          <a:prstGeom prst="rect">
+            <a:avLst/>
+          </a:prstGeom>
+          <a:noFill/>
+          <a:ln/>
+        </p:spPr>
+        <p:txBody>
+          <a:bodyPr wrap="square" lIns="0" tIns="0" rIns="0" bIns="0" rtlCol="0" anchor="t"/>
+          <a:lstStyle/>
+          <a:p>
+            <a:pPr algn="ctr" indent="0" marL="0">
+              <a:lnSpc>
+                <a:spcPts val="945"/>
+              </a:lnSpc>
+              <a:buNone/>
+            </a:pPr>
+            <a:r>
+              <a:rPr lang="en-US" sz="788" dirty="0">
+                <a:solidFill>
+                  <a:srgbClr val="8A8880"/>
+                </a:solidFill>
+                <a:latin typeface="Consolas" pitchFamily="34" charset="0"/>
+                <a:ea typeface="Consolas" pitchFamily="34" charset="-122"/>
+                <a:cs typeface="Consolas" pitchFamily="34" charset="-120"/>
+              </a:rPr>
+              <a:t>-10</a:t>
+            </a:r>
+            <a:endParaRPr lang="en-US" sz="788" dirty="0"/>
+          </a:p>
+        </p:txBody>
+      </p:sp>
+      <p:sp>
+        <p:nvSpPr>
+          <p:cNvPr id="97" name="Text 91"/>
+          <p:cNvSpPr txBox="1"/>
+          <p:nvPr/>
+        </p:nvSpPr>
+        <p:spPr>
+          <a:xfrm>
+            <a:off x="4686300" y="5543550"/>
+            <a:ext cx="457200" cy="120015"/>
+          </a:xfrm>
+          <a:prstGeom prst="rect">
+            <a:avLst/>
+          </a:prstGeom>
+          <a:noFill/>
+          <a:ln/>
+        </p:spPr>
+        <p:txBody>
+          <a:bodyPr wrap="square" lIns="0" tIns="0" rIns="0" bIns="0" rtlCol="0" anchor="t"/>
+          <a:lstStyle/>
+          <a:p>
+            <a:pPr algn="ctr" indent="0" marL="0">
+              <a:lnSpc>
+                <a:spcPts val="945"/>
+              </a:lnSpc>
+              <a:buNone/>
+            </a:pPr>
+            <a:r>
+              <a:rPr lang="en-US" sz="788" dirty="0">
+                <a:solidFill>
+                  <a:srgbClr val="8A8880"/>
+                </a:solidFill>
+                <a:latin typeface="Consolas" pitchFamily="34" charset="0"/>
+                <a:ea typeface="Consolas" pitchFamily="34" charset="-122"/>
+                <a:cs typeface="Consolas" pitchFamily="34" charset="-120"/>
+              </a:rPr>
+              <a:t>0</a:t>
+            </a:r>
+            <a:endParaRPr lang="en-US" sz="788" dirty="0"/>
+          </a:p>
+        </p:txBody>
+      </p:sp>
+      <p:sp>
+        <p:nvSpPr>
+          <p:cNvPr id="98" name="Text 92"/>
+          <p:cNvSpPr txBox="1"/>
+          <p:nvPr/>
+        </p:nvSpPr>
+        <p:spPr>
+          <a:xfrm>
+            <a:off x="6124575" y="5543550"/>
+            <a:ext cx="457200" cy="120015"/>
+          </a:xfrm>
+          <a:prstGeom prst="rect">
+            <a:avLst/>
+          </a:prstGeom>
+          <a:noFill/>
+          <a:ln/>
+        </p:spPr>
+        <p:txBody>
+          <a:bodyPr wrap="square" lIns="0" tIns="0" rIns="0" bIns="0" rtlCol="0" anchor="t"/>
+          <a:lstStyle/>
+          <a:p>
+            <a:pPr algn="ctr" indent="0" marL="0">
+              <a:lnSpc>
+                <a:spcPts val="945"/>
+              </a:lnSpc>
+              <a:buNone/>
+            </a:pPr>
+            <a:r>
+              <a:rPr lang="en-US" sz="788" dirty="0">
+                <a:solidFill>
+                  <a:srgbClr val="8A8880"/>
+                </a:solidFill>
+                <a:latin typeface="Consolas" pitchFamily="34" charset="0"/>
+                <a:ea typeface="Consolas" pitchFamily="34" charset="-122"/>
+                <a:cs typeface="Consolas" pitchFamily="34" charset="-120"/>
+              </a:rPr>
+              <a:t>+10</a:t>
+            </a:r>
+            <a:endParaRPr lang="en-US" sz="788" dirty="0"/>
+          </a:p>
+        </p:txBody>
+      </p:sp>
+      <p:sp>
+        <p:nvSpPr>
+          <p:cNvPr id="99" name="Text 93"/>
+          <p:cNvSpPr txBox="1"/>
+          <p:nvPr/>
+        </p:nvSpPr>
+        <p:spPr>
+          <a:xfrm>
+            <a:off x="7562850" y="5543550"/>
+            <a:ext cx="457200" cy="120015"/>
+          </a:xfrm>
+          <a:prstGeom prst="rect">
+            <a:avLst/>
+          </a:prstGeom>
+          <a:noFill/>
+          <a:ln/>
+        </p:spPr>
+        <p:txBody>
+          <a:bodyPr wrap="square" lIns="0" tIns="0" rIns="0" bIns="0" rtlCol="0" anchor="t"/>
+          <a:lstStyle/>
+          <a:p>
+            <a:pPr algn="ctr" indent="0" marL="0">
+              <a:lnSpc>
+                <a:spcPts val="945"/>
+              </a:lnSpc>
+              <a:buNone/>
+            </a:pPr>
+            <a:r>
+              <a:rPr lang="en-US" sz="788" dirty="0">
+                <a:solidFill>
+                  <a:srgbClr val="8A8880"/>
+                </a:solidFill>
+                <a:latin typeface="Consolas" pitchFamily="34" charset="0"/>
+                <a:ea typeface="Consolas" pitchFamily="34" charset="-122"/>
+                <a:cs typeface="Consolas" pitchFamily="34" charset="-120"/>
+              </a:rPr>
+              <a:t>+20</a:t>
+            </a:r>
+            <a:endParaRPr lang="en-US" sz="788" dirty="0"/>
+          </a:p>
+        </p:txBody>
+      </p:sp>
+      <p:sp>
+        <p:nvSpPr>
+          <p:cNvPr id="100" name="Text 94"/>
+          <p:cNvSpPr txBox="1"/>
+          <p:nvPr/>
+        </p:nvSpPr>
+        <p:spPr>
+          <a:xfrm>
+            <a:off x="9001125" y="5543550"/>
+            <a:ext cx="457200" cy="120015"/>
+          </a:xfrm>
+          <a:prstGeom prst="rect">
+            <a:avLst/>
+          </a:prstGeom>
+          <a:noFill/>
+          <a:ln/>
+        </p:spPr>
+        <p:txBody>
+          <a:bodyPr wrap="square" lIns="0" tIns="0" rIns="0" bIns="0" rtlCol="0" anchor="t"/>
+          <a:lstStyle/>
+          <a:p>
+            <a:pPr algn="ctr" indent="0" marL="0">
+              <a:lnSpc>
+                <a:spcPts val="945"/>
+              </a:lnSpc>
+              <a:buNone/>
+            </a:pPr>
+            <a:r>
+              <a:rPr lang="en-US" sz="788" dirty="0">
+                <a:solidFill>
+                  <a:srgbClr val="8A8880"/>
+                </a:solidFill>
+                <a:latin typeface="Consolas" pitchFamily="34" charset="0"/>
+                <a:ea typeface="Consolas" pitchFamily="34" charset="-122"/>
+                <a:cs typeface="Consolas" pitchFamily="34" charset="-120"/>
+              </a:rPr>
+              <a:t>+30</a:t>
+            </a:r>
+            <a:endParaRPr lang="en-US" sz="788" dirty="0"/>
+          </a:p>
+        </p:txBody>
+      </p:sp>
+      <p:sp>
+        <p:nvSpPr>
+          <p:cNvPr id="101" name="Text 95"/>
+          <p:cNvSpPr txBox="1"/>
+          <p:nvPr/>
+        </p:nvSpPr>
+        <p:spPr>
+          <a:xfrm>
+            <a:off x="10439400" y="5543550"/>
+            <a:ext cx="457200" cy="120015"/>
+          </a:xfrm>
+          <a:prstGeom prst="rect">
+            <a:avLst/>
+          </a:prstGeom>
+          <a:noFill/>
+          <a:ln/>
+        </p:spPr>
+        <p:txBody>
+          <a:bodyPr wrap="square" lIns="0" tIns="0" rIns="0" bIns="0" rtlCol="0" anchor="t"/>
+          <a:lstStyle/>
+          <a:p>
+            <a:pPr algn="ctr" indent="0" marL="0">
+              <a:lnSpc>
+                <a:spcPts val="945"/>
+              </a:lnSpc>
+              <a:buNone/>
+            </a:pPr>
+            <a:r>
+              <a:rPr lang="en-US" sz="788" dirty="0">
+                <a:solidFill>
+                  <a:srgbClr val="8A8880"/>
+                </a:solidFill>
+                <a:latin typeface="Consolas" pitchFamily="34" charset="0"/>
+                <a:ea typeface="Consolas" pitchFamily="34" charset="-122"/>
+                <a:cs typeface="Consolas" pitchFamily="34" charset="-120"/>
+              </a:rPr>
+              <a:t>+40</a:t>
+            </a:r>
+            <a:endParaRPr lang="en-US" sz="788" dirty="0"/>
+          </a:p>
+        </p:txBody>
+      </p:sp>
+      <p:sp>
+        <p:nvSpPr>
+          <p:cNvPr id="102" name="Text 96"/>
+          <p:cNvSpPr txBox="1"/>
+          <p:nvPr/>
+        </p:nvSpPr>
+        <p:spPr>
+          <a:xfrm>
+            <a:off x="10915650" y="5543550"/>
+            <a:ext cx="228600" cy="120015"/>
           </a:xfrm>
           <a:prstGeom prst="rect">
             <a:avLst/>
@@ -1928,12 +3633,162 @@
           <a:p>
             <a:pPr algn="l" indent="0" marL="0">
               <a:lnSpc>
-                <a:spcPts val="1575"/>
+                <a:spcPts val="945"/>
               </a:lnSpc>
               <a:buNone/>
             </a:pPr>
             <a:r>
-              <a:rPr lang="en-US" sz="1125" dirty="0">
+              <a:rPr lang="en-US" sz="788" dirty="0">
+                <a:solidFill>
+                  <a:srgbClr val="8A8880"/>
+                </a:solidFill>
+                <a:latin typeface="Malgun Gothic" pitchFamily="34" charset="0"/>
+                <a:ea typeface="Malgun Gothic" pitchFamily="34" charset="-122"/>
+                <a:cs typeface="Malgun Gothic" pitchFamily="34" charset="-120"/>
+              </a:rPr>
+              <a:t>℃</a:t>
+            </a:r>
+            <a:endParaRPr lang="en-US" sz="788" dirty="0"/>
+          </a:p>
+        </p:txBody>
+      </p:sp>
+      <p:sp>
+        <p:nvSpPr>
+          <p:cNvPr id="103" name="Shape 97"/>
+          <p:cNvSpPr/>
+          <p:nvPr/>
+        </p:nvSpPr>
+        <p:spPr>
+          <a:xfrm>
+            <a:off x="2038350" y="4724400"/>
+            <a:ext cx="8629650" cy="0"/>
+          </a:xfrm>
+          <a:prstGeom prst="line">
+            <a:avLst/>
+          </a:prstGeom>
+          <a:noFill/>
+          <a:ln w="17780">
+            <a:solidFill>
+              <a:srgbClr val="A8BCD1"/>
+            </a:solidFill>
+            <a:prstDash val="dash"/>
+          </a:ln>
+        </p:spPr>
+      </p:sp>
+      <p:sp>
+        <p:nvSpPr>
+          <p:cNvPr id="104" name="Shape 98"/>
+          <p:cNvSpPr/>
+          <p:nvPr/>
+        </p:nvSpPr>
+        <p:spPr>
+          <a:xfrm>
+            <a:off x="8443913" y="4657725"/>
+            <a:ext cx="133350" cy="133350"/>
+          </a:xfrm>
+          <a:prstGeom prst="ellipse">
+            <a:avLst/>
+          </a:prstGeom>
+          <a:solidFill>
+            <a:srgbClr val="EFB13C"/>
+          </a:solidFill>
+          <a:ln/>
+        </p:spPr>
+      </p:sp>
+      <p:sp>
+        <p:nvSpPr>
+          <p:cNvPr id="105" name="Shape 99"/>
+          <p:cNvSpPr/>
+          <p:nvPr/>
+        </p:nvSpPr>
+        <p:spPr>
+          <a:xfrm>
+            <a:off x="8510588" y="4800600"/>
+            <a:ext cx="0" cy="514350"/>
+          </a:xfrm>
+          <a:prstGeom prst="line">
+            <a:avLst/>
+          </a:prstGeom>
+          <a:noFill/>
+          <a:ln w="12700">
+            <a:solidFill>
+              <a:srgbClr val="EFB13C"/>
+            </a:solidFill>
+            <a:prstDash val="dash"/>
+          </a:ln>
+        </p:spPr>
+      </p:sp>
+      <p:sp>
+        <p:nvSpPr>
+          <p:cNvPr id="106" name="Text 100"/>
+          <p:cNvSpPr txBox="1"/>
+          <p:nvPr/>
+        </p:nvSpPr>
+        <p:spPr>
+          <a:xfrm>
+            <a:off x="7177088" y="4438650"/>
+            <a:ext cx="2667000" cy="173355"/>
+          </a:xfrm>
+          <a:prstGeom prst="rect">
+            <a:avLst/>
+          </a:prstGeom>
+          <a:noFill/>
+          <a:ln/>
+        </p:spPr>
+        <p:txBody>
+          <a:bodyPr wrap="square" lIns="0" tIns="0" rIns="0" bIns="0" rtlCol="0" anchor="t"/>
+          <a:lstStyle/>
+          <a:p>
+            <a:pPr algn="ctr" indent="0" marL="0">
+              <a:lnSpc>
+                <a:spcPts val="1365"/>
+              </a:lnSpc>
+              <a:buNone/>
+            </a:pPr>
+            <a:r>
+              <a:rPr lang="en-US" sz="1050" b="1" dirty="0">
+                <a:solidFill>
+                  <a:srgbClr val="EFB13C"/>
+                </a:solidFill>
+                <a:latin typeface="Malgun Gothic" pitchFamily="34" charset="0"/>
+                <a:ea typeface="Malgun Gothic" pitchFamily="34" charset="-122"/>
+                <a:cs typeface="Malgun Gothic" pitchFamily="34" charset="-120"/>
+              </a:rPr>
+              <a:t>여기서 시험했습니다</a:t>
+            </a:r>
+            <a:endParaRPr lang="en-US" sz="1050" dirty="0"/>
+          </a:p>
+        </p:txBody>
+      </p:sp>
+      <p:sp>
+        <p:nvSpPr>
+          <p:cNvPr id="107" name="Text 101"/>
+          <p:cNvSpPr txBox="1"/>
+          <p:nvPr/>
+        </p:nvSpPr>
+        <p:spPr>
+          <a:xfrm>
+            <a:off x="914400" y="4400550"/>
+            <a:ext cx="2286000" cy="180023"/>
+          </a:xfrm>
+          <a:prstGeom prst="rect">
+            <a:avLst/>
+          </a:prstGeom>
+          <a:noFill/>
+          <a:ln/>
+        </p:spPr>
+        <p:txBody>
+          <a:bodyPr wrap="square" lIns="0" tIns="0" rIns="0" bIns="0" rtlCol="0" anchor="t"/>
+          <a:lstStyle/>
+          <a:p>
+            <a:pPr algn="l" indent="0" marL="0">
+              <a:lnSpc>
+                <a:spcPts val="1418"/>
+              </a:lnSpc>
+              <a:buNone/>
+            </a:pPr>
+            <a:r>
+              <a:rPr lang="en-US" sz="1013" dirty="0">
                 <a:solidFill>
                   <a:srgbClr val="A9A79F"/>
                 </a:solidFill>
@@ -1941,22 +3796,22 @@
                 <a:ea typeface="Malgun Gothic" pitchFamily="34" charset="-122"/>
                 <a:cs typeface="Malgun Gothic" pitchFamily="34" charset="-120"/>
               </a:rPr>
-              <a:t>엑셀 파일 4개</a:t>
+              <a:t>여기서 나온 차이를</a:t>
             </a:r>
-            <a:endParaRPr lang="en-US" sz="1125" dirty="0"/>
+            <a:endParaRPr lang="en-US" sz="1013" dirty="0"/>
           </a:p>
         </p:txBody>
       </p:sp>
       <p:sp>
         <p:nvSpPr>
-          <p:cNvPr id="34" name="Text 28"/>
+          <p:cNvPr id="108" name="Text 102"/>
           <p:cNvSpPr txBox="1"/>
           <p:nvPr/>
         </p:nvSpPr>
         <p:spPr>
           <a:xfrm>
-            <a:off x="8972550" y="4876800"/>
-            <a:ext cx="2533650" cy="200025"/>
+            <a:off x="914400" y="4781550"/>
+            <a:ext cx="2286000" cy="360045"/>
           </a:xfrm>
           <a:prstGeom prst="rect">
             <a:avLst/>
@@ -1970,12 +3825,54 @@
           <a:p>
             <a:pPr algn="l" indent="0" marL="0">
               <a:lnSpc>
-                <a:spcPts val="1575"/>
+                <a:spcPts val="1418"/>
               </a:lnSpc>
               <a:buNone/>
             </a:pPr>
             <a:r>
-              <a:rPr lang="en-US" sz="1125" dirty="0">
+              <a:rPr lang="en-US" sz="1013" dirty="0">
+                <a:solidFill>
+                  <a:srgbClr val="A8BCD1"/>
+                </a:solidFill>
+                <a:latin typeface="Malgun Gothic" pitchFamily="34" charset="0"/>
+                <a:ea typeface="Malgun Gothic" pitchFamily="34" charset="-122"/>
+                <a:cs typeface="Malgun Gothic" pitchFamily="34" charset="-120"/>
+              </a:rPr>
+              <a:t>61개 온도 전부에 똑같이 얹었습니다</a:t>
+            </a:r>
+            <a:endParaRPr lang="en-US" sz="1013" dirty="0"/>
+          </a:p>
+        </p:txBody>
+      </p:sp>
+      <p:sp>
+        <p:nvSpPr>
+          <p:cNvPr id="109" name="Text 103"/>
+          <p:cNvSpPr txBox="1"/>
+          <p:nvPr/>
+        </p:nvSpPr>
+        <p:spPr>
+          <a:xfrm>
+            <a:off x="2038350" y="5753100"/>
+            <a:ext cx="8629650" cy="160973"/>
+          </a:xfrm>
+          <a:prstGeom prst="rect">
+            <a:avLst/>
+          </a:prstGeom>
+          <a:noFill/>
+          <a:ln/>
+        </p:spPr>
+        <p:txBody>
+          <a:bodyPr wrap="square" lIns="0" tIns="0" rIns="0" bIns="0" rtlCol="0" anchor="t"/>
+          <a:lstStyle/>
+          <a:p>
+            <a:pPr algn="ctr" indent="0" marL="0">
+              <a:lnSpc>
+                <a:spcPts val="1268"/>
+              </a:lnSpc>
+              <a:buNone/>
+            </a:pPr>
+            <a:r>
+              <a:rPr lang="en-US" sz="975" dirty="0">
                 <a:solidFill>
                   <a:srgbClr val="A9A79F"/>
                 </a:solidFill>
@@ -1983,57 +3880,15 @@
                 <a:ea typeface="Malgun Gothic" pitchFamily="34" charset="-122"/>
                 <a:cs typeface="Malgun Gothic" pitchFamily="34" charset="-120"/>
               </a:rPr>
-              <a:t>손으로 옮기는 값 61개</a:t>
+              <a:t>나머지 60개 온도는 시험해 보지 않았습니다</a:t>
             </a:r>
-            <a:endParaRPr lang="en-US" sz="1125" dirty="0"/>
+            <a:endParaRPr lang="en-US" sz="975" dirty="0"/>
           </a:p>
         </p:txBody>
       </p:sp>
       <p:sp>
         <p:nvSpPr>
-          <p:cNvPr id="35" name="Text 29"/>
-          <p:cNvSpPr txBox="1"/>
-          <p:nvPr/>
-        </p:nvSpPr>
-        <p:spPr>
-          <a:xfrm>
-            <a:off x="8972550" y="5143500"/>
-            <a:ext cx="2533650" cy="200025"/>
-          </a:xfrm>
-          <a:prstGeom prst="rect">
-            <a:avLst/>
-          </a:prstGeom>
-          <a:noFill/>
-          <a:ln/>
-        </p:spPr>
-        <p:txBody>
-          <a:bodyPr wrap="square" lIns="0" tIns="0" rIns="0" bIns="0" rtlCol="0" anchor="t"/>
-          <a:lstStyle/>
-          <a:p>
-            <a:pPr algn="l" indent="0" marL="0">
-              <a:lnSpc>
-                <a:spcPts val="1575"/>
-              </a:lnSpc>
-              <a:buNone/>
-            </a:pPr>
-            <a:r>
-              <a:rPr lang="en-US" sz="1125" dirty="0">
-                <a:solidFill>
-                  <a:srgbClr val="A9A79F"/>
-                </a:solidFill>
-                <a:latin typeface="Malgun Gothic" pitchFamily="34" charset="0"/>
-                <a:ea typeface="Malgun Gothic" pitchFamily="34" charset="-122"/>
-                <a:cs typeface="Malgun Gothic" pitchFamily="34" charset="-120"/>
-              </a:rPr>
-              <a:t>대기압 받는 파일 별도</a:t>
-            </a:r>
-            <a:endParaRPr lang="en-US" sz="1125" dirty="0"/>
-          </a:p>
-        </p:txBody>
-      </p:sp>
-      <p:sp>
-        <p:nvSpPr>
-          <p:cNvPr id="36" name="Shape 30"/>
+          <p:cNvPr id="110" name="Shape 104"/>
           <p:cNvSpPr/>
           <p:nvPr/>
         </p:nvSpPr>
@@ -2056,7 +3911,7 @@
       </p:sp>
       <p:sp>
         <p:nvSpPr>
-          <p:cNvPr id="37" name="Text 31"/>
+          <p:cNvPr id="111" name="Text 105"/>
           <p:cNvSpPr txBox="1"/>
           <p:nvPr/>
         </p:nvSpPr>
@@ -2098,7 +3953,7 @@
       </p:sp>
       <p:sp>
         <p:nvSpPr>
-          <p:cNvPr id="38" name="Text 32"/>
+          <p:cNvPr id="112" name="Text 106"/>
           <p:cNvSpPr txBox="1"/>
           <p:nvPr/>
         </p:nvSpPr>
@@ -2459,8 +4314,8 @@
         </p:nvSpPr>
         <p:spPr>
           <a:xfrm>
-            <a:off x="685800" y="1638300"/>
-            <a:ext cx="6172200" cy="3810000"/>
+            <a:off x="685800" y="1600200"/>
+            <a:ext cx="6172200" cy="3848100"/>
           </a:xfrm>
           <a:prstGeom prst="rect">
             <a:avLst/>
@@ -2484,7 +4339,7 @@
         </p:nvSpPr>
         <p:spPr>
           <a:xfrm>
-            <a:off x="876300" y="1752600"/>
+            <a:off x="876300" y="1714500"/>
             <a:ext cx="4762500" cy="125016"/>
           </a:xfrm>
           <a:prstGeom prst="rect">
@@ -2534,7 +4389,7 @@
         </p:blipFill>
         <p:spPr>
           <a:xfrm>
-            <a:off x="879231" y="1981200"/>
+            <a:off x="879231" y="1943100"/>
             <a:ext cx="5785338" cy="3200400"/>
           </a:xfrm>
           <a:prstGeom prst="rect">
@@ -2550,7 +4405,7 @@
         </p:nvSpPr>
         <p:spPr>
           <a:xfrm>
-            <a:off x="869706" y="1971675"/>
+            <a:off x="869706" y="1933575"/>
             <a:ext cx="5804388" cy="3219450"/>
           </a:xfrm>
           <a:prstGeom prst="rect">
@@ -2572,7 +4427,7 @@
         </p:nvSpPr>
         <p:spPr>
           <a:xfrm>
-            <a:off x="876300" y="5257800"/>
+            <a:off x="876300" y="5238750"/>
             <a:ext cx="5791200" cy="131445"/>
           </a:xfrm>
           <a:prstGeom prst="rect">
@@ -2614,8 +4469,8 @@
         </p:nvSpPr>
         <p:spPr>
           <a:xfrm>
-            <a:off x="7162800" y="1866900"/>
-            <a:ext cx="247650" cy="133350"/>
+            <a:off x="7162800" y="1714500"/>
+            <a:ext cx="228600" cy="123825"/>
           </a:xfrm>
           <a:prstGeom prst="rect">
             <a:avLst/>
@@ -2634,8 +4489,8 @@
         </p:nvSpPr>
         <p:spPr>
           <a:xfrm>
-            <a:off x="7524750" y="1809750"/>
-            <a:ext cx="3943350" cy="270034"/>
+            <a:off x="7486650" y="1657350"/>
+            <a:ext cx="4019550" cy="257175"/>
           </a:xfrm>
           <a:prstGeom prst="rect">
             <a:avLst/>
@@ -2649,12 +4504,12 @@
           <a:p>
             <a:pPr algn="l" indent="0" marL="0">
               <a:lnSpc>
-                <a:spcPts val="2126"/>
+                <a:spcPts val="2025"/>
               </a:lnSpc>
               <a:buNone/>
             </a:pPr>
             <a:r>
-              <a:rPr lang="en-US" sz="1575" b="1" dirty="0">
+              <a:rPr lang="en-US" sz="1500" b="1" dirty="0">
                 <a:solidFill>
                   <a:srgbClr val="EAE7E0"/>
                 </a:solidFill>
@@ -2664,7 +4519,7 @@
               </a:rPr>
               <a:t>시험할 때마다 달랐습니다</a:t>
             </a:r>
-            <a:endParaRPr lang="en-US" sz="1575" dirty="0"/>
+            <a:endParaRPr lang="en-US" sz="1500" dirty="0"/>
           </a:p>
         </p:txBody>
       </p:sp>
@@ -2676,8 +4531,8 @@
         </p:nvSpPr>
         <p:spPr>
           <a:xfrm>
-            <a:off x="7162800" y="2171700"/>
-            <a:ext cx="4343400" cy="728663"/>
+            <a:off x="7162800" y="1962150"/>
+            <a:ext cx="4343400" cy="207169"/>
           </a:xfrm>
           <a:prstGeom prst="rect">
             <a:avLst/>
@@ -2691,12 +4546,12 @@
           <a:p>
             <a:pPr algn="l" indent="0" marL="0">
               <a:lnSpc>
-                <a:spcPts val="1913"/>
+                <a:spcPts val="1631"/>
               </a:lnSpc>
               <a:buNone/>
             </a:pPr>
             <a:r>
-              <a:rPr lang="en-US" sz="1125" dirty="0">
+              <a:rPr lang="en-US" sz="1088" dirty="0">
                 <a:solidFill>
                   <a:srgbClr val="CFCBC2"/>
                 </a:solidFill>
@@ -2704,9 +4559,9 @@
                 <a:ea typeface="Malgun Gothic" pitchFamily="34" charset="-122"/>
                 <a:cs typeface="Malgun Gothic" pitchFamily="34" charset="-120"/>
               </a:rPr>
-              <a:t>어떤 날은 11 정도 차이가 났고, 어떤 날은 4밖에 안 났습니다. 한 번은 아예 반대로 나온 날도 있었습니다.</a:t>
+              <a:t>11이 나온 날도 있고 4가 나온 날도 있었습니다.</a:t>
             </a:r>
-            <a:endParaRPr lang="en-US" sz="1125" dirty="0"/>
+            <a:endParaRPr lang="en-US" sz="1088" dirty="0"/>
           </a:p>
         </p:txBody>
       </p:sp>
@@ -2718,8 +4573,8 @@
         </p:nvSpPr>
         <p:spPr>
           <a:xfrm>
-            <a:off x="7162800" y="3276600"/>
-            <a:ext cx="247650" cy="133350"/>
+            <a:off x="7162800" y="2438400"/>
+            <a:ext cx="228600" cy="123825"/>
           </a:xfrm>
           <a:prstGeom prst="rect">
             <a:avLst/>
@@ -2738,8 +4593,8 @@
         </p:nvSpPr>
         <p:spPr>
           <a:xfrm>
-            <a:off x="7524750" y="3219450"/>
-            <a:ext cx="3943350" cy="270034"/>
+            <a:off x="7486650" y="2381250"/>
+            <a:ext cx="4019550" cy="257175"/>
           </a:xfrm>
           <a:prstGeom prst="rect">
             <a:avLst/>
@@ -2753,12 +4608,12 @@
           <a:p>
             <a:pPr algn="l" indent="0" marL="0">
               <a:lnSpc>
-                <a:spcPts val="2126"/>
+                <a:spcPts val="2025"/>
               </a:lnSpc>
               <a:buNone/>
             </a:pPr>
             <a:r>
-              <a:rPr lang="en-US" sz="1575" b="1" dirty="0">
+              <a:rPr lang="en-US" sz="1500" b="1" dirty="0">
                 <a:solidFill>
                   <a:srgbClr val="EAE7E0"/>
                 </a:solidFill>
@@ -2768,7 +4623,7 @@
               </a:rPr>
               <a:t>더하는 값은 늘 같았습니다</a:t>
             </a:r>
-            <a:endParaRPr lang="en-US" sz="1575" dirty="0"/>
+            <a:endParaRPr lang="en-US" sz="1500" dirty="0"/>
           </a:p>
         </p:txBody>
       </p:sp>
@@ -2780,8 +4635,8 @@
         </p:nvSpPr>
         <p:spPr>
           <a:xfrm>
-            <a:off x="7162800" y="3581400"/>
-            <a:ext cx="4343400" cy="728663"/>
+            <a:off x="7162800" y="2686050"/>
+            <a:ext cx="4343400" cy="207169"/>
           </a:xfrm>
           <a:prstGeom prst="rect">
             <a:avLst/>
@@ -2795,12 +4650,12 @@
           <a:p>
             <a:pPr algn="l" indent="0" marL="0">
               <a:lnSpc>
-                <a:spcPts val="1913"/>
+                <a:spcPts val="1631"/>
               </a:lnSpc>
               <a:buNone/>
             </a:pPr>
             <a:r>
-              <a:rPr lang="en-US" sz="1125" dirty="0">
+              <a:rPr lang="en-US" sz="1088" dirty="0">
                 <a:solidFill>
                   <a:srgbClr val="CFCBC2"/>
                 </a:solidFill>
@@ -2808,9 +4663,9 @@
                 <a:ea typeface="Malgun Gothic" pitchFamily="34" charset="-122"/>
                 <a:cs typeface="Malgun Gothic" pitchFamily="34" charset="-120"/>
               </a:rPr>
-              <a:t>차이가 얼마로 나오든 4를 더했습니다. 몇 달에 한 번 5나 2로 바꾸기는 했지만, 온도마다 다르게 주지는 못했습니다.</a:t>
+              <a:t>차이가 얼마든 4를 더했습니다.</a:t>
             </a:r>
-            <a:endParaRPr lang="en-US" sz="1125" dirty="0"/>
+            <a:endParaRPr lang="en-US" sz="1088" dirty="0"/>
           </a:p>
         </p:txBody>
       </p:sp>
@@ -2822,16 +4677,19 @@
         </p:nvSpPr>
         <p:spPr>
           <a:xfrm>
-            <a:off x="7162800" y="4572000"/>
-            <a:ext cx="4343400" cy="9525"/>
-          </a:xfrm>
-          <a:prstGeom prst="rect">
-            <a:avLst/>
-          </a:prstGeom>
-          <a:solidFill>
-            <a:srgbClr val="22354A"/>
-          </a:solidFill>
-          <a:ln/>
+            <a:off x="7162800" y="3067050"/>
+            <a:ext cx="4343400" cy="0"/>
+          </a:xfrm>
+          <a:prstGeom prst="line">
+            <a:avLst/>
+          </a:prstGeom>
+          <a:noFill/>
+          <a:ln w="12700">
+            <a:solidFill>
+              <a:srgbClr val="22354A"/>
+            </a:solidFill>
+            <a:prstDash val="solid"/>
+          </a:ln>
         </p:spPr>
       </p:sp>
       <p:sp>
@@ -2842,8 +4700,8 @@
         </p:nvSpPr>
         <p:spPr>
           <a:xfrm>
-            <a:off x="7162800" y="4724400"/>
-            <a:ext cx="4343400" cy="728663"/>
+            <a:off x="7162800" y="3200400"/>
+            <a:ext cx="3238500" cy="125016"/>
           </a:xfrm>
           <a:prstGeom prst="rect">
             <a:avLst/>
@@ -2857,28 +4715,1520 @@
           <a:p>
             <a:pPr algn="l" indent="0" marL="0">
               <a:lnSpc>
-                <a:spcPts val="1913"/>
+                <a:spcPts val="984"/>
               </a:lnSpc>
               <a:buNone/>
             </a:pPr>
             <a:r>
-              <a:rPr lang="en-US" sz="1125" dirty="0">
+              <a:rPr lang="en-US" sz="788" b="1" spc="150" kern="0" dirty="0">
                 <a:solidFill>
-                  <a:srgbClr val="A9A79F"/>
+                  <a:srgbClr val="8A8880"/>
+                </a:solidFill>
+                <a:latin typeface="Consolas" pitchFamily="34" charset="0"/>
+                <a:ea typeface="Consolas" pitchFamily="34" charset="-122"/>
+                <a:cs typeface="Consolas" pitchFamily="34" charset="-120"/>
+              </a:rPr>
+              <a:t>시험 40회를 온도별로 전부 찍으면</a:t>
+            </a:r>
+            <a:endParaRPr lang="en-US" sz="788" dirty="0"/>
+          </a:p>
+        </p:txBody>
+      </p:sp>
+      <p:sp>
+        <p:nvSpPr>
+          <p:cNvPr id="25" name="Shape 22"/>
+          <p:cNvSpPr/>
+          <p:nvPr/>
+        </p:nvSpPr>
+        <p:spPr>
+          <a:xfrm>
+            <a:off x="7391400" y="3718560"/>
+            <a:ext cx="3943350" cy="0"/>
+          </a:xfrm>
+          <a:prstGeom prst="line">
+            <a:avLst/>
+          </a:prstGeom>
+          <a:noFill/>
+          <a:ln w="12700">
+            <a:solidFill>
+              <a:srgbClr val="182838"/>
+            </a:solidFill>
+            <a:prstDash val="solid"/>
+          </a:ln>
+        </p:spPr>
+      </p:sp>
+      <p:sp>
+        <p:nvSpPr>
+          <p:cNvPr id="26" name="Shape 23"/>
+          <p:cNvSpPr/>
+          <p:nvPr/>
+        </p:nvSpPr>
+        <p:spPr>
+          <a:xfrm>
+            <a:off x="7391400" y="4069080"/>
+            <a:ext cx="3943350" cy="0"/>
+          </a:xfrm>
+          <a:prstGeom prst="line">
+            <a:avLst/>
+          </a:prstGeom>
+          <a:noFill/>
+          <a:ln w="12700">
+            <a:solidFill>
+              <a:srgbClr val="182838"/>
+            </a:solidFill>
+            <a:prstDash val="solid"/>
+          </a:ln>
+        </p:spPr>
+      </p:sp>
+      <p:sp>
+        <p:nvSpPr>
+          <p:cNvPr id="27" name="Shape 24"/>
+          <p:cNvSpPr/>
+          <p:nvPr/>
+        </p:nvSpPr>
+        <p:spPr>
+          <a:xfrm>
+            <a:off x="7391400" y="4419600"/>
+            <a:ext cx="3943350" cy="0"/>
+          </a:xfrm>
+          <a:prstGeom prst="line">
+            <a:avLst/>
+          </a:prstGeom>
+          <a:noFill/>
+          <a:ln w="12700">
+            <a:solidFill>
+              <a:srgbClr val="182838"/>
+            </a:solidFill>
+            <a:prstDash val="solid"/>
+          </a:ln>
+        </p:spPr>
+      </p:sp>
+      <p:sp>
+        <p:nvSpPr>
+          <p:cNvPr id="28" name="Shape 25"/>
+          <p:cNvSpPr/>
+          <p:nvPr/>
+        </p:nvSpPr>
+        <p:spPr>
+          <a:xfrm>
+            <a:off x="7391400" y="5120640"/>
+            <a:ext cx="3943350" cy="0"/>
+          </a:xfrm>
+          <a:prstGeom prst="line">
+            <a:avLst/>
+          </a:prstGeom>
+          <a:noFill/>
+          <a:ln w="12700">
+            <a:solidFill>
+              <a:srgbClr val="182838"/>
+            </a:solidFill>
+            <a:prstDash val="solid"/>
+          </a:ln>
+        </p:spPr>
+      </p:sp>
+      <p:sp>
+        <p:nvSpPr>
+          <p:cNvPr id="29" name="Shape 26"/>
+          <p:cNvSpPr/>
+          <p:nvPr/>
+        </p:nvSpPr>
+        <p:spPr>
+          <a:xfrm>
+            <a:off x="7391400" y="4770120"/>
+            <a:ext cx="3943350" cy="0"/>
+          </a:xfrm>
+          <a:prstGeom prst="line">
+            <a:avLst/>
+          </a:prstGeom>
+          <a:noFill/>
+          <a:ln w="12700">
+            <a:solidFill>
+              <a:srgbClr val="22354A"/>
+            </a:solidFill>
+            <a:prstDash val="solid"/>
+          </a:ln>
+        </p:spPr>
+      </p:sp>
+      <p:sp>
+        <p:nvSpPr>
+          <p:cNvPr id="30" name="Text 27"/>
+          <p:cNvSpPr txBox="1"/>
+          <p:nvPr/>
+        </p:nvSpPr>
+        <p:spPr>
+          <a:xfrm>
+            <a:off x="7029450" y="3651885"/>
+            <a:ext cx="304800" cy="114300"/>
+          </a:xfrm>
+          <a:prstGeom prst="rect">
+            <a:avLst/>
+          </a:prstGeom>
+          <a:noFill/>
+          <a:ln/>
+        </p:spPr>
+        <p:txBody>
+          <a:bodyPr wrap="square" lIns="0" tIns="0" rIns="0" bIns="0" rtlCol="0" anchor="t"/>
+          <a:lstStyle/>
+          <a:p>
+            <a:pPr algn="r" indent="0" marL="0">
+              <a:lnSpc>
+                <a:spcPts val="900"/>
+              </a:lnSpc>
+              <a:buNone/>
+            </a:pPr>
+            <a:r>
+              <a:rPr lang="en-US" sz="750" dirty="0">
+                <a:solidFill>
+                  <a:srgbClr val="8A8880"/>
+                </a:solidFill>
+                <a:latin typeface="Consolas" pitchFamily="34" charset="0"/>
+                <a:ea typeface="Consolas" pitchFamily="34" charset="-122"/>
+                <a:cs typeface="Consolas" pitchFamily="34" charset="-120"/>
+              </a:rPr>
+              <a:t>+12</a:t>
+            </a:r>
+            <a:endParaRPr lang="en-US" sz="750" dirty="0"/>
+          </a:p>
+        </p:txBody>
+      </p:sp>
+      <p:sp>
+        <p:nvSpPr>
+          <p:cNvPr id="31" name="Text 28"/>
+          <p:cNvSpPr txBox="1"/>
+          <p:nvPr/>
+        </p:nvSpPr>
+        <p:spPr>
+          <a:xfrm>
+            <a:off x="7029450" y="4002405"/>
+            <a:ext cx="304800" cy="114300"/>
+          </a:xfrm>
+          <a:prstGeom prst="rect">
+            <a:avLst/>
+          </a:prstGeom>
+          <a:noFill/>
+          <a:ln/>
+        </p:spPr>
+        <p:txBody>
+          <a:bodyPr wrap="square" lIns="0" tIns="0" rIns="0" bIns="0" rtlCol="0" anchor="t"/>
+          <a:lstStyle/>
+          <a:p>
+            <a:pPr algn="r" indent="0" marL="0">
+              <a:lnSpc>
+                <a:spcPts val="900"/>
+              </a:lnSpc>
+              <a:buNone/>
+            </a:pPr>
+            <a:r>
+              <a:rPr lang="en-US" sz="750" dirty="0">
+                <a:solidFill>
+                  <a:srgbClr val="8A8880"/>
+                </a:solidFill>
+                <a:latin typeface="Consolas" pitchFamily="34" charset="0"/>
+                <a:ea typeface="Consolas" pitchFamily="34" charset="-122"/>
+                <a:cs typeface="Consolas" pitchFamily="34" charset="-120"/>
+              </a:rPr>
+              <a:t>+8</a:t>
+            </a:r>
+            <a:endParaRPr lang="en-US" sz="750" dirty="0"/>
+          </a:p>
+        </p:txBody>
+      </p:sp>
+      <p:sp>
+        <p:nvSpPr>
+          <p:cNvPr id="32" name="Text 29"/>
+          <p:cNvSpPr txBox="1"/>
+          <p:nvPr/>
+        </p:nvSpPr>
+        <p:spPr>
+          <a:xfrm>
+            <a:off x="7029450" y="4352925"/>
+            <a:ext cx="304800" cy="114300"/>
+          </a:xfrm>
+          <a:prstGeom prst="rect">
+            <a:avLst/>
+          </a:prstGeom>
+          <a:noFill/>
+          <a:ln/>
+        </p:spPr>
+        <p:txBody>
+          <a:bodyPr wrap="square" lIns="0" tIns="0" rIns="0" bIns="0" rtlCol="0" anchor="t"/>
+          <a:lstStyle/>
+          <a:p>
+            <a:pPr algn="r" indent="0" marL="0">
+              <a:lnSpc>
+                <a:spcPts val="900"/>
+              </a:lnSpc>
+              <a:buNone/>
+            </a:pPr>
+            <a:r>
+              <a:rPr lang="en-US" sz="750" dirty="0">
+                <a:solidFill>
+                  <a:srgbClr val="8A8880"/>
+                </a:solidFill>
+                <a:latin typeface="Consolas" pitchFamily="34" charset="0"/>
+                <a:ea typeface="Consolas" pitchFamily="34" charset="-122"/>
+                <a:cs typeface="Consolas" pitchFamily="34" charset="-120"/>
+              </a:rPr>
+              <a:t>+4</a:t>
+            </a:r>
+            <a:endParaRPr lang="en-US" sz="750" dirty="0"/>
+          </a:p>
+        </p:txBody>
+      </p:sp>
+      <p:sp>
+        <p:nvSpPr>
+          <p:cNvPr id="33" name="Text 30"/>
+          <p:cNvSpPr txBox="1"/>
+          <p:nvPr/>
+        </p:nvSpPr>
+        <p:spPr>
+          <a:xfrm>
+            <a:off x="7029450" y="4703445"/>
+            <a:ext cx="304800" cy="114300"/>
+          </a:xfrm>
+          <a:prstGeom prst="rect">
+            <a:avLst/>
+          </a:prstGeom>
+          <a:noFill/>
+          <a:ln/>
+        </p:spPr>
+        <p:txBody>
+          <a:bodyPr wrap="square" lIns="0" tIns="0" rIns="0" bIns="0" rtlCol="0" anchor="t"/>
+          <a:lstStyle/>
+          <a:p>
+            <a:pPr algn="r" indent="0" marL="0">
+              <a:lnSpc>
+                <a:spcPts val="900"/>
+              </a:lnSpc>
+              <a:buNone/>
+            </a:pPr>
+            <a:r>
+              <a:rPr lang="en-US" sz="750" dirty="0">
+                <a:solidFill>
+                  <a:srgbClr val="8A8880"/>
+                </a:solidFill>
+                <a:latin typeface="Consolas" pitchFamily="34" charset="0"/>
+                <a:ea typeface="Consolas" pitchFamily="34" charset="-122"/>
+                <a:cs typeface="Consolas" pitchFamily="34" charset="-120"/>
+              </a:rPr>
+              <a:t>0</a:t>
+            </a:r>
+            <a:endParaRPr lang="en-US" sz="750" dirty="0"/>
+          </a:p>
+        </p:txBody>
+      </p:sp>
+      <p:sp>
+        <p:nvSpPr>
+          <p:cNvPr id="34" name="Text 31"/>
+          <p:cNvSpPr txBox="1"/>
+          <p:nvPr/>
+        </p:nvSpPr>
+        <p:spPr>
+          <a:xfrm>
+            <a:off x="7029450" y="5053965"/>
+            <a:ext cx="304800" cy="114300"/>
+          </a:xfrm>
+          <a:prstGeom prst="rect">
+            <a:avLst/>
+          </a:prstGeom>
+          <a:noFill/>
+          <a:ln/>
+        </p:spPr>
+        <p:txBody>
+          <a:bodyPr wrap="square" lIns="0" tIns="0" rIns="0" bIns="0" rtlCol="0" anchor="t"/>
+          <a:lstStyle/>
+          <a:p>
+            <a:pPr algn="r" indent="0" marL="0">
+              <a:lnSpc>
+                <a:spcPts val="900"/>
+              </a:lnSpc>
+              <a:buNone/>
+            </a:pPr>
+            <a:r>
+              <a:rPr lang="en-US" sz="750" dirty="0">
+                <a:solidFill>
+                  <a:srgbClr val="8A8880"/>
+                </a:solidFill>
+                <a:latin typeface="Consolas" pitchFamily="34" charset="0"/>
+                <a:ea typeface="Consolas" pitchFamily="34" charset="-122"/>
+                <a:cs typeface="Consolas" pitchFamily="34" charset="-120"/>
+              </a:rPr>
+              <a:t>-4</a:t>
+            </a:r>
+            <a:endParaRPr lang="en-US" sz="750" dirty="0"/>
+          </a:p>
+        </p:txBody>
+      </p:sp>
+      <p:sp>
+        <p:nvSpPr>
+          <p:cNvPr id="35" name="Shape 32"/>
+          <p:cNvSpPr/>
+          <p:nvPr/>
+        </p:nvSpPr>
+        <p:spPr>
+          <a:xfrm>
+            <a:off x="7674293" y="5295900"/>
+            <a:ext cx="0" cy="47625"/>
+          </a:xfrm>
+          <a:prstGeom prst="line">
+            <a:avLst/>
+          </a:prstGeom>
+          <a:noFill/>
+          <a:ln w="12700">
+            <a:solidFill>
+              <a:srgbClr val="8A8880"/>
+            </a:solidFill>
+            <a:prstDash val="solid"/>
+          </a:ln>
+        </p:spPr>
+      </p:sp>
+      <p:sp>
+        <p:nvSpPr>
+          <p:cNvPr id="36" name="Text 33"/>
+          <p:cNvSpPr txBox="1"/>
+          <p:nvPr/>
+        </p:nvSpPr>
+        <p:spPr>
+          <a:xfrm>
+            <a:off x="7464743" y="5372100"/>
+            <a:ext cx="419100" cy="114300"/>
+          </a:xfrm>
+          <a:prstGeom prst="rect">
+            <a:avLst/>
+          </a:prstGeom>
+          <a:noFill/>
+          <a:ln/>
+        </p:spPr>
+        <p:txBody>
+          <a:bodyPr wrap="square" lIns="0" tIns="0" rIns="0" bIns="0" rtlCol="0" anchor="t"/>
+          <a:lstStyle/>
+          <a:p>
+            <a:pPr algn="ctr" indent="0" marL="0">
+              <a:lnSpc>
+                <a:spcPts val="900"/>
+              </a:lnSpc>
+              <a:buNone/>
+            </a:pPr>
+            <a:r>
+              <a:rPr lang="en-US" sz="750" dirty="0">
+                <a:solidFill>
+                  <a:srgbClr val="8A8880"/>
+                </a:solidFill>
+                <a:latin typeface="Consolas" pitchFamily="34" charset="0"/>
+                <a:ea typeface="Consolas" pitchFamily="34" charset="-122"/>
+                <a:cs typeface="Consolas" pitchFamily="34" charset="-120"/>
+              </a:rPr>
+              <a:t>0℃</a:t>
+            </a:r>
+            <a:endParaRPr lang="en-US" sz="750" dirty="0"/>
+          </a:p>
+        </p:txBody>
+      </p:sp>
+      <p:sp>
+        <p:nvSpPr>
+          <p:cNvPr id="37" name="Shape 34"/>
+          <p:cNvSpPr/>
+          <p:nvPr/>
+        </p:nvSpPr>
+        <p:spPr>
+          <a:xfrm>
+            <a:off x="8617268" y="5295900"/>
+            <a:ext cx="0" cy="47625"/>
+          </a:xfrm>
+          <a:prstGeom prst="line">
+            <a:avLst/>
+          </a:prstGeom>
+          <a:noFill/>
+          <a:ln w="12700">
+            <a:solidFill>
+              <a:srgbClr val="8A8880"/>
+            </a:solidFill>
+            <a:prstDash val="solid"/>
+          </a:ln>
+        </p:spPr>
+      </p:sp>
+      <p:sp>
+        <p:nvSpPr>
+          <p:cNvPr id="38" name="Text 35"/>
+          <p:cNvSpPr txBox="1"/>
+          <p:nvPr/>
+        </p:nvSpPr>
+        <p:spPr>
+          <a:xfrm>
+            <a:off x="8407718" y="5372100"/>
+            <a:ext cx="419100" cy="114300"/>
+          </a:xfrm>
+          <a:prstGeom prst="rect">
+            <a:avLst/>
+          </a:prstGeom>
+          <a:noFill/>
+          <a:ln/>
+        </p:spPr>
+        <p:txBody>
+          <a:bodyPr wrap="square" lIns="0" tIns="0" rIns="0" bIns="0" rtlCol="0" anchor="t"/>
+          <a:lstStyle/>
+          <a:p>
+            <a:pPr algn="ctr" indent="0" marL="0">
+              <a:lnSpc>
+                <a:spcPts val="900"/>
+              </a:lnSpc>
+              <a:buNone/>
+            </a:pPr>
+            <a:r>
+              <a:rPr lang="en-US" sz="750" dirty="0">
+                <a:solidFill>
+                  <a:srgbClr val="8A8880"/>
+                </a:solidFill>
+                <a:latin typeface="Consolas" pitchFamily="34" charset="0"/>
+                <a:ea typeface="Consolas" pitchFamily="34" charset="-122"/>
+                <a:cs typeface="Consolas" pitchFamily="34" charset="-120"/>
+              </a:rPr>
+              <a:t>10</a:t>
+            </a:r>
+            <a:endParaRPr lang="en-US" sz="750" dirty="0"/>
+          </a:p>
+        </p:txBody>
+      </p:sp>
+      <p:sp>
+        <p:nvSpPr>
+          <p:cNvPr id="39" name="Shape 36"/>
+          <p:cNvSpPr/>
+          <p:nvPr/>
+        </p:nvSpPr>
+        <p:spPr>
+          <a:xfrm>
+            <a:off x="9560243" y="5295900"/>
+            <a:ext cx="0" cy="47625"/>
+          </a:xfrm>
+          <a:prstGeom prst="line">
+            <a:avLst/>
+          </a:prstGeom>
+          <a:noFill/>
+          <a:ln w="12700">
+            <a:solidFill>
+              <a:srgbClr val="8A8880"/>
+            </a:solidFill>
+            <a:prstDash val="solid"/>
+          </a:ln>
+        </p:spPr>
+      </p:sp>
+      <p:sp>
+        <p:nvSpPr>
+          <p:cNvPr id="40" name="Text 37"/>
+          <p:cNvSpPr txBox="1"/>
+          <p:nvPr/>
+        </p:nvSpPr>
+        <p:spPr>
+          <a:xfrm>
+            <a:off x="9350693" y="5372100"/>
+            <a:ext cx="419100" cy="114300"/>
+          </a:xfrm>
+          <a:prstGeom prst="rect">
+            <a:avLst/>
+          </a:prstGeom>
+          <a:noFill/>
+          <a:ln/>
+        </p:spPr>
+        <p:txBody>
+          <a:bodyPr wrap="square" lIns="0" tIns="0" rIns="0" bIns="0" rtlCol="0" anchor="t"/>
+          <a:lstStyle/>
+          <a:p>
+            <a:pPr algn="ctr" indent="0" marL="0">
+              <a:lnSpc>
+                <a:spcPts val="900"/>
+              </a:lnSpc>
+              <a:buNone/>
+            </a:pPr>
+            <a:r>
+              <a:rPr lang="en-US" sz="750" dirty="0">
+                <a:solidFill>
+                  <a:srgbClr val="8A8880"/>
+                </a:solidFill>
+                <a:latin typeface="Consolas" pitchFamily="34" charset="0"/>
+                <a:ea typeface="Consolas" pitchFamily="34" charset="-122"/>
+                <a:cs typeface="Consolas" pitchFamily="34" charset="-120"/>
+              </a:rPr>
+              <a:t>20</a:t>
+            </a:r>
+            <a:endParaRPr lang="en-US" sz="750" dirty="0"/>
+          </a:p>
+        </p:txBody>
+      </p:sp>
+      <p:sp>
+        <p:nvSpPr>
+          <p:cNvPr id="41" name="Shape 38"/>
+          <p:cNvSpPr/>
+          <p:nvPr/>
+        </p:nvSpPr>
+        <p:spPr>
+          <a:xfrm>
+            <a:off x="10503218" y="5295900"/>
+            <a:ext cx="0" cy="47625"/>
+          </a:xfrm>
+          <a:prstGeom prst="line">
+            <a:avLst/>
+          </a:prstGeom>
+          <a:noFill/>
+          <a:ln w="12700">
+            <a:solidFill>
+              <a:srgbClr val="8A8880"/>
+            </a:solidFill>
+            <a:prstDash val="solid"/>
+          </a:ln>
+        </p:spPr>
+      </p:sp>
+      <p:sp>
+        <p:nvSpPr>
+          <p:cNvPr id="42" name="Text 39"/>
+          <p:cNvSpPr txBox="1"/>
+          <p:nvPr/>
+        </p:nvSpPr>
+        <p:spPr>
+          <a:xfrm>
+            <a:off x="10293668" y="5372100"/>
+            <a:ext cx="419100" cy="114300"/>
+          </a:xfrm>
+          <a:prstGeom prst="rect">
+            <a:avLst/>
+          </a:prstGeom>
+          <a:noFill/>
+          <a:ln/>
+        </p:spPr>
+        <p:txBody>
+          <a:bodyPr wrap="square" lIns="0" tIns="0" rIns="0" bIns="0" rtlCol="0" anchor="t"/>
+          <a:lstStyle/>
+          <a:p>
+            <a:pPr algn="ctr" indent="0" marL="0">
+              <a:lnSpc>
+                <a:spcPts val="900"/>
+              </a:lnSpc>
+              <a:buNone/>
+            </a:pPr>
+            <a:r>
+              <a:rPr lang="en-US" sz="750" dirty="0">
+                <a:solidFill>
+                  <a:srgbClr val="8A8880"/>
+                </a:solidFill>
+                <a:latin typeface="Consolas" pitchFamily="34" charset="0"/>
+                <a:ea typeface="Consolas" pitchFamily="34" charset="-122"/>
+                <a:cs typeface="Consolas" pitchFamily="34" charset="-120"/>
+              </a:rPr>
+              <a:t>30</a:t>
+            </a:r>
+            <a:endParaRPr lang="en-US" sz="750" dirty="0"/>
+          </a:p>
+        </p:txBody>
+      </p:sp>
+      <p:sp>
+        <p:nvSpPr>
+          <p:cNvPr id="43" name="Shape 40"/>
+          <p:cNvSpPr/>
+          <p:nvPr/>
+        </p:nvSpPr>
+        <p:spPr>
+          <a:xfrm>
+            <a:off x="7391400" y="4554988"/>
+            <a:ext cx="3943350" cy="0"/>
+          </a:xfrm>
+          <a:prstGeom prst="line">
+            <a:avLst/>
+          </a:prstGeom>
+          <a:noFill/>
+          <a:ln w="17780">
+            <a:solidFill>
+              <a:srgbClr val="A8BCD1"/>
+            </a:solidFill>
+            <a:prstDash val="dash"/>
+          </a:ln>
+        </p:spPr>
+      </p:sp>
+      <p:sp>
+        <p:nvSpPr>
+          <p:cNvPr id="44" name="Text 41"/>
+          <p:cNvSpPr txBox="1"/>
+          <p:nvPr/>
+        </p:nvSpPr>
+        <p:spPr>
+          <a:xfrm>
+            <a:off x="9937433" y="4364488"/>
+            <a:ext cx="1524000" cy="131445"/>
+          </a:xfrm>
+          <a:prstGeom prst="rect">
+            <a:avLst/>
+          </a:prstGeom>
+          <a:noFill/>
+          <a:ln/>
+        </p:spPr>
+        <p:txBody>
+          <a:bodyPr wrap="square" lIns="0" tIns="0" rIns="0" bIns="0" rtlCol="0" anchor="t"/>
+          <a:lstStyle/>
+          <a:p>
+            <a:pPr algn="r" indent="0" marL="0">
+              <a:lnSpc>
+                <a:spcPts val="1035"/>
+              </a:lnSpc>
+              <a:buNone/>
+            </a:pPr>
+            <a:r>
+              <a:rPr lang="en-US" sz="863" b="1" dirty="0">
+                <a:solidFill>
+                  <a:srgbClr val="A8BCD1"/>
                 </a:solidFill>
                 <a:latin typeface="Malgun Gothic" pitchFamily="34" charset="0"/>
                 <a:ea typeface="Malgun Gothic" pitchFamily="34" charset="-122"/>
                 <a:cs typeface="Malgun Gothic" pitchFamily="34" charset="-120"/>
               </a:rPr>
-              <a:t>겨울에는 더 낼 수 있는데 적게 신고했고, 여름에는 못 내는데 많이 신고했습니다.</a:t>
+              <a:t>늘 더하던 값</a:t>
             </a:r>
-            <a:endParaRPr lang="en-US" sz="1125" dirty="0"/>
+            <a:endParaRPr lang="en-US" sz="863" dirty="0"/>
           </a:p>
         </p:txBody>
       </p:sp>
       <p:sp>
         <p:nvSpPr>
-          <p:cNvPr id="25" name="Shape 22"/>
+          <p:cNvPr id="45" name="Shape 42"/>
+          <p:cNvSpPr/>
+          <p:nvPr/>
+        </p:nvSpPr>
+        <p:spPr>
+          <a:xfrm>
+            <a:off x="7464647" y="3605270"/>
+            <a:ext cx="60960" cy="60960"/>
+          </a:xfrm>
+          <a:prstGeom prst="ellipse">
+            <a:avLst/>
+          </a:prstGeom>
+          <a:solidFill>
+            <a:srgbClr val="CFCBC2"/>
+          </a:solidFill>
+          <a:ln/>
+        </p:spPr>
+      </p:sp>
+      <p:sp>
+        <p:nvSpPr>
+          <p:cNvPr id="46" name="Shape 43"/>
+          <p:cNvSpPr/>
+          <p:nvPr/>
+        </p:nvSpPr>
+        <p:spPr>
+          <a:xfrm>
+            <a:off x="7507081" y="3646719"/>
+            <a:ext cx="60960" cy="60960"/>
+          </a:xfrm>
+          <a:prstGeom prst="ellipse">
+            <a:avLst/>
+          </a:prstGeom>
+          <a:solidFill>
+            <a:srgbClr val="CFCBC2"/>
+          </a:solidFill>
+          <a:ln/>
+        </p:spPr>
+      </p:sp>
+      <p:sp>
+        <p:nvSpPr>
+          <p:cNvPr id="47" name="Shape 44"/>
+          <p:cNvSpPr/>
+          <p:nvPr/>
+        </p:nvSpPr>
+        <p:spPr>
+          <a:xfrm>
+            <a:off x="7822978" y="3969986"/>
+            <a:ext cx="60960" cy="60960"/>
+          </a:xfrm>
+          <a:prstGeom prst="ellipse">
+            <a:avLst/>
+          </a:prstGeom>
+          <a:solidFill>
+            <a:srgbClr val="CFCBC2"/>
+          </a:solidFill>
+          <a:ln/>
+        </p:spPr>
+      </p:sp>
+      <p:sp>
+        <p:nvSpPr>
+          <p:cNvPr id="48" name="Shape 45"/>
+          <p:cNvSpPr/>
+          <p:nvPr/>
+        </p:nvSpPr>
+        <p:spPr>
+          <a:xfrm>
+            <a:off x="8011573" y="4239010"/>
+            <a:ext cx="60960" cy="60960"/>
+          </a:xfrm>
+          <a:prstGeom prst="ellipse">
+            <a:avLst/>
+          </a:prstGeom>
+          <a:solidFill>
+            <a:srgbClr val="CFCBC2"/>
+          </a:solidFill>
+          <a:ln/>
+        </p:spPr>
+      </p:sp>
+      <p:sp>
+        <p:nvSpPr>
+          <p:cNvPr id="49" name="Shape 46"/>
+          <p:cNvSpPr/>
+          <p:nvPr/>
+        </p:nvSpPr>
+        <p:spPr>
+          <a:xfrm>
+            <a:off x="8209598" y="4263459"/>
+            <a:ext cx="60960" cy="60960"/>
+          </a:xfrm>
+          <a:prstGeom prst="ellipse">
+            <a:avLst/>
+          </a:prstGeom>
+          <a:solidFill>
+            <a:srgbClr val="CFCBC2"/>
+          </a:solidFill>
+          <a:ln/>
+        </p:spPr>
+      </p:sp>
+      <p:sp>
+        <p:nvSpPr>
+          <p:cNvPr id="50" name="Shape 47"/>
+          <p:cNvSpPr/>
+          <p:nvPr/>
+        </p:nvSpPr>
+        <p:spPr>
+          <a:xfrm>
+            <a:off x="8303895" y="4303505"/>
+            <a:ext cx="60960" cy="60960"/>
+          </a:xfrm>
+          <a:prstGeom prst="ellipse">
+            <a:avLst/>
+          </a:prstGeom>
+          <a:solidFill>
+            <a:srgbClr val="CFCBC2"/>
+          </a:solidFill>
+          <a:ln/>
+        </p:spPr>
+      </p:sp>
+      <p:sp>
+        <p:nvSpPr>
+          <p:cNvPr id="51" name="Shape 48"/>
+          <p:cNvSpPr/>
+          <p:nvPr/>
+        </p:nvSpPr>
+        <p:spPr>
+          <a:xfrm>
+            <a:off x="8398193" y="4340661"/>
+            <a:ext cx="60960" cy="60960"/>
+          </a:xfrm>
+          <a:prstGeom prst="ellipse">
+            <a:avLst/>
+          </a:prstGeom>
+          <a:solidFill>
+            <a:srgbClr val="CFCBC2"/>
+          </a:solidFill>
+          <a:ln/>
+        </p:spPr>
+      </p:sp>
+      <p:sp>
+        <p:nvSpPr>
+          <p:cNvPr id="52" name="Shape 49"/>
+          <p:cNvSpPr/>
+          <p:nvPr/>
+        </p:nvSpPr>
+        <p:spPr>
+          <a:xfrm>
+            <a:off x="8483060" y="4192916"/>
+            <a:ext cx="60960" cy="60960"/>
+          </a:xfrm>
+          <a:prstGeom prst="ellipse">
+            <a:avLst/>
+          </a:prstGeom>
+          <a:solidFill>
+            <a:srgbClr val="CFCBC2"/>
+          </a:solidFill>
+          <a:ln/>
+        </p:spPr>
+      </p:sp>
+      <p:sp>
+        <p:nvSpPr>
+          <p:cNvPr id="53" name="Shape 50"/>
+          <p:cNvSpPr/>
+          <p:nvPr/>
+        </p:nvSpPr>
+        <p:spPr>
+          <a:xfrm>
+            <a:off x="8539639" y="4419177"/>
+            <a:ext cx="60960" cy="60960"/>
+          </a:xfrm>
+          <a:prstGeom prst="ellipse">
+            <a:avLst/>
+          </a:prstGeom>
+          <a:solidFill>
+            <a:srgbClr val="CFCBC2"/>
+          </a:solidFill>
+          <a:ln/>
+        </p:spPr>
+      </p:sp>
+      <p:sp>
+        <p:nvSpPr>
+          <p:cNvPr id="54" name="Shape 51"/>
+          <p:cNvSpPr/>
+          <p:nvPr/>
+        </p:nvSpPr>
+        <p:spPr>
+          <a:xfrm>
+            <a:off x="8699945" y="4288871"/>
+            <a:ext cx="60960" cy="60960"/>
+          </a:xfrm>
+          <a:prstGeom prst="ellipse">
+            <a:avLst/>
+          </a:prstGeom>
+          <a:solidFill>
+            <a:srgbClr val="CFCBC2"/>
+          </a:solidFill>
+          <a:ln/>
+        </p:spPr>
+      </p:sp>
+      <p:sp>
+        <p:nvSpPr>
+          <p:cNvPr id="55" name="Shape 52"/>
+          <p:cNvSpPr/>
+          <p:nvPr/>
+        </p:nvSpPr>
+        <p:spPr>
+          <a:xfrm>
+            <a:off x="8841391" y="4316037"/>
+            <a:ext cx="60960" cy="60960"/>
+          </a:xfrm>
+          <a:prstGeom prst="ellipse">
+            <a:avLst/>
+          </a:prstGeom>
+          <a:solidFill>
+            <a:srgbClr val="CFCBC2"/>
+          </a:solidFill>
+          <a:ln/>
+        </p:spPr>
+      </p:sp>
+      <p:sp>
+        <p:nvSpPr>
+          <p:cNvPr id="56" name="Shape 53"/>
+          <p:cNvSpPr/>
+          <p:nvPr/>
+        </p:nvSpPr>
+        <p:spPr>
+          <a:xfrm>
+            <a:off x="8869680" y="4132890"/>
+            <a:ext cx="60960" cy="60960"/>
+          </a:xfrm>
+          <a:prstGeom prst="ellipse">
+            <a:avLst/>
+          </a:prstGeom>
+          <a:solidFill>
+            <a:srgbClr val="CFCBC2"/>
+          </a:solidFill>
+          <a:ln/>
+        </p:spPr>
+      </p:sp>
+      <p:sp>
+        <p:nvSpPr>
+          <p:cNvPr id="57" name="Shape 54"/>
+          <p:cNvSpPr/>
+          <p:nvPr/>
+        </p:nvSpPr>
+        <p:spPr>
+          <a:xfrm>
+            <a:off x="8897969" y="4171885"/>
+            <a:ext cx="60960" cy="60960"/>
+          </a:xfrm>
+          <a:prstGeom prst="ellipse">
+            <a:avLst/>
+          </a:prstGeom>
+          <a:solidFill>
+            <a:srgbClr val="CFCBC2"/>
+          </a:solidFill>
+          <a:ln/>
+        </p:spPr>
+      </p:sp>
+      <p:sp>
+        <p:nvSpPr>
+          <p:cNvPr id="58" name="Shape 55"/>
+          <p:cNvSpPr/>
+          <p:nvPr/>
+        </p:nvSpPr>
+        <p:spPr>
+          <a:xfrm>
+            <a:off x="9001697" y="4095472"/>
+            <a:ext cx="60960" cy="60960"/>
+          </a:xfrm>
+          <a:prstGeom prst="ellipse">
+            <a:avLst/>
+          </a:prstGeom>
+          <a:solidFill>
+            <a:srgbClr val="CFCBC2"/>
+          </a:solidFill>
+          <a:ln/>
+        </p:spPr>
+      </p:sp>
+      <p:sp>
+        <p:nvSpPr>
+          <p:cNvPr id="59" name="Shape 56"/>
+          <p:cNvSpPr/>
+          <p:nvPr/>
+        </p:nvSpPr>
+        <p:spPr>
+          <a:xfrm>
+            <a:off x="9011126" y="4212896"/>
+            <a:ext cx="60960" cy="60960"/>
+          </a:xfrm>
+          <a:prstGeom prst="ellipse">
+            <a:avLst/>
+          </a:prstGeom>
+          <a:solidFill>
+            <a:srgbClr val="CFCBC2"/>
+          </a:solidFill>
+          <a:ln/>
+        </p:spPr>
+      </p:sp>
+      <p:sp>
+        <p:nvSpPr>
+          <p:cNvPr id="60" name="Shape 57"/>
+          <p:cNvSpPr/>
+          <p:nvPr/>
+        </p:nvSpPr>
+        <p:spPr>
+          <a:xfrm>
+            <a:off x="9067705" y="4249964"/>
+            <a:ext cx="60960" cy="60960"/>
+          </a:xfrm>
+          <a:prstGeom prst="ellipse">
+            <a:avLst/>
+          </a:prstGeom>
+          <a:solidFill>
+            <a:srgbClr val="CFCBC2"/>
+          </a:solidFill>
+          <a:ln/>
+        </p:spPr>
+      </p:sp>
+      <p:sp>
+        <p:nvSpPr>
+          <p:cNvPr id="61" name="Shape 58"/>
+          <p:cNvSpPr/>
+          <p:nvPr/>
+        </p:nvSpPr>
+        <p:spPr>
+          <a:xfrm>
+            <a:off x="9209151" y="4269417"/>
+            <a:ext cx="60960" cy="60960"/>
+          </a:xfrm>
+          <a:prstGeom prst="ellipse">
+            <a:avLst/>
+          </a:prstGeom>
+          <a:solidFill>
+            <a:srgbClr val="CFCBC2"/>
+          </a:solidFill>
+          <a:ln/>
+        </p:spPr>
+      </p:sp>
+      <p:sp>
+        <p:nvSpPr>
+          <p:cNvPr id="62" name="Shape 59"/>
+          <p:cNvSpPr/>
+          <p:nvPr/>
+        </p:nvSpPr>
+        <p:spPr>
+          <a:xfrm>
+            <a:off x="9218581" y="4239886"/>
+            <a:ext cx="60960" cy="60960"/>
+          </a:xfrm>
+          <a:prstGeom prst="ellipse">
+            <a:avLst/>
+          </a:prstGeom>
+          <a:solidFill>
+            <a:srgbClr val="CFCBC2"/>
+          </a:solidFill>
+          <a:ln/>
+        </p:spPr>
+      </p:sp>
+      <p:sp>
+        <p:nvSpPr>
+          <p:cNvPr id="63" name="Shape 60"/>
+          <p:cNvSpPr/>
+          <p:nvPr/>
+        </p:nvSpPr>
+        <p:spPr>
+          <a:xfrm>
+            <a:off x="9652349" y="4510137"/>
+            <a:ext cx="60960" cy="60960"/>
+          </a:xfrm>
+          <a:prstGeom prst="ellipse">
+            <a:avLst/>
+          </a:prstGeom>
+          <a:solidFill>
+            <a:srgbClr val="CFCBC2"/>
+          </a:solidFill>
+          <a:ln/>
+        </p:spPr>
+      </p:sp>
+      <p:sp>
+        <p:nvSpPr>
+          <p:cNvPr id="64" name="Shape 61"/>
+          <p:cNvSpPr/>
+          <p:nvPr/>
+        </p:nvSpPr>
+        <p:spPr>
+          <a:xfrm>
+            <a:off x="10010680" y="4924452"/>
+            <a:ext cx="60960" cy="60960"/>
+          </a:xfrm>
+          <a:prstGeom prst="ellipse">
+            <a:avLst/>
+          </a:prstGeom>
+          <a:solidFill>
+            <a:srgbClr val="CFCBC2"/>
+          </a:solidFill>
+          <a:ln/>
+        </p:spPr>
+      </p:sp>
+      <p:sp>
+        <p:nvSpPr>
+          <p:cNvPr id="65" name="Shape 62"/>
+          <p:cNvSpPr/>
+          <p:nvPr/>
+        </p:nvSpPr>
+        <p:spPr>
+          <a:xfrm>
+            <a:off x="10029539" y="5027417"/>
+            <a:ext cx="60960" cy="60960"/>
+          </a:xfrm>
+          <a:prstGeom prst="ellipse">
+            <a:avLst/>
+          </a:prstGeom>
+          <a:solidFill>
+            <a:srgbClr val="CFCBC2"/>
+          </a:solidFill>
+          <a:ln/>
+        </p:spPr>
+      </p:sp>
+      <p:sp>
+        <p:nvSpPr>
+          <p:cNvPr id="66" name="Shape 63"/>
+          <p:cNvSpPr/>
+          <p:nvPr/>
+        </p:nvSpPr>
+        <p:spPr>
+          <a:xfrm>
+            <a:off x="10038969" y="4790378"/>
+            <a:ext cx="60960" cy="60960"/>
+          </a:xfrm>
+          <a:prstGeom prst="ellipse">
+            <a:avLst/>
+          </a:prstGeom>
+          <a:solidFill>
+            <a:srgbClr val="CFCBC2"/>
+          </a:solidFill>
+          <a:ln/>
+        </p:spPr>
+      </p:sp>
+      <p:sp>
+        <p:nvSpPr>
+          <p:cNvPr id="67" name="Shape 64"/>
+          <p:cNvSpPr/>
+          <p:nvPr/>
+        </p:nvSpPr>
+        <p:spPr>
+          <a:xfrm>
+            <a:off x="10067258" y="4800981"/>
+            <a:ext cx="60960" cy="60960"/>
+          </a:xfrm>
+          <a:prstGeom prst="ellipse">
+            <a:avLst/>
+          </a:prstGeom>
+          <a:solidFill>
+            <a:srgbClr val="CFCBC2"/>
+          </a:solidFill>
+          <a:ln/>
+        </p:spPr>
+      </p:sp>
+      <p:sp>
+        <p:nvSpPr>
+          <p:cNvPr id="68" name="Shape 65"/>
+          <p:cNvSpPr/>
+          <p:nvPr/>
+        </p:nvSpPr>
+        <p:spPr>
+          <a:xfrm>
+            <a:off x="10227564" y="4973787"/>
+            <a:ext cx="60960" cy="60960"/>
+          </a:xfrm>
+          <a:prstGeom prst="ellipse">
+            <a:avLst/>
+          </a:prstGeom>
+          <a:solidFill>
+            <a:srgbClr val="CFCBC2"/>
+          </a:solidFill>
+          <a:ln/>
+        </p:spPr>
+      </p:sp>
+      <p:sp>
+        <p:nvSpPr>
+          <p:cNvPr id="69" name="Shape 66"/>
+          <p:cNvSpPr/>
+          <p:nvPr/>
+        </p:nvSpPr>
+        <p:spPr>
+          <a:xfrm>
+            <a:off x="10350151" y="5165084"/>
+            <a:ext cx="60960" cy="60960"/>
+          </a:xfrm>
+          <a:prstGeom prst="ellipse">
+            <a:avLst/>
+          </a:prstGeom>
+          <a:solidFill>
+            <a:srgbClr val="CFCBC2"/>
+          </a:solidFill>
+          <a:ln/>
+        </p:spPr>
+      </p:sp>
+      <p:sp>
+        <p:nvSpPr>
+          <p:cNvPr id="70" name="Shape 67"/>
+          <p:cNvSpPr/>
+          <p:nvPr/>
+        </p:nvSpPr>
+        <p:spPr>
+          <a:xfrm>
+            <a:off x="10491597" y="4880286"/>
+            <a:ext cx="60960" cy="60960"/>
+          </a:xfrm>
+          <a:prstGeom prst="ellipse">
+            <a:avLst/>
+          </a:prstGeom>
+          <a:solidFill>
+            <a:srgbClr val="CFCBC2"/>
+          </a:solidFill>
+          <a:ln/>
+        </p:spPr>
+      </p:sp>
+      <p:sp>
+        <p:nvSpPr>
+          <p:cNvPr id="71" name="Shape 68"/>
+          <p:cNvSpPr/>
+          <p:nvPr/>
+        </p:nvSpPr>
+        <p:spPr>
+          <a:xfrm>
+            <a:off x="10491597" y="4781615"/>
+            <a:ext cx="60960" cy="60960"/>
+          </a:xfrm>
+          <a:prstGeom prst="ellipse">
+            <a:avLst/>
+          </a:prstGeom>
+          <a:solidFill>
+            <a:srgbClr val="CFCBC2"/>
+          </a:solidFill>
+          <a:ln/>
+        </p:spPr>
+      </p:sp>
+      <p:sp>
+        <p:nvSpPr>
+          <p:cNvPr id="72" name="Shape 69"/>
+          <p:cNvSpPr/>
+          <p:nvPr/>
+        </p:nvSpPr>
+        <p:spPr>
+          <a:xfrm>
+            <a:off x="10538746" y="5041876"/>
+            <a:ext cx="60960" cy="60960"/>
+          </a:xfrm>
+          <a:prstGeom prst="ellipse">
+            <a:avLst/>
+          </a:prstGeom>
+          <a:solidFill>
+            <a:srgbClr val="CFCBC2"/>
+          </a:solidFill>
+          <a:ln/>
+        </p:spPr>
+      </p:sp>
+      <p:sp>
+        <p:nvSpPr>
+          <p:cNvPr id="73" name="Shape 70"/>
+          <p:cNvSpPr/>
+          <p:nvPr/>
+        </p:nvSpPr>
+        <p:spPr>
+          <a:xfrm>
+            <a:off x="10557605" y="5037231"/>
+            <a:ext cx="60960" cy="60960"/>
+          </a:xfrm>
+          <a:prstGeom prst="ellipse">
+            <a:avLst/>
+          </a:prstGeom>
+          <a:solidFill>
+            <a:srgbClr val="CFCBC2"/>
+          </a:solidFill>
+          <a:ln/>
+        </p:spPr>
+      </p:sp>
+      <p:sp>
+        <p:nvSpPr>
+          <p:cNvPr id="74" name="Shape 71"/>
+          <p:cNvSpPr/>
+          <p:nvPr/>
+        </p:nvSpPr>
+        <p:spPr>
+          <a:xfrm>
+            <a:off x="10633043" y="4816141"/>
+            <a:ext cx="60960" cy="60960"/>
+          </a:xfrm>
+          <a:prstGeom prst="ellipse">
+            <a:avLst/>
+          </a:prstGeom>
+          <a:solidFill>
+            <a:srgbClr val="CFCBC2"/>
+          </a:solidFill>
+          <a:ln/>
+        </p:spPr>
+      </p:sp>
+      <p:sp>
+        <p:nvSpPr>
+          <p:cNvPr id="75" name="Shape 72"/>
+          <p:cNvSpPr/>
+          <p:nvPr/>
+        </p:nvSpPr>
+        <p:spPr>
+          <a:xfrm>
+            <a:off x="10699052" y="4793971"/>
+            <a:ext cx="60960" cy="60960"/>
+          </a:xfrm>
+          <a:prstGeom prst="ellipse">
+            <a:avLst/>
+          </a:prstGeom>
+          <a:solidFill>
+            <a:srgbClr val="CFCBC2"/>
+          </a:solidFill>
+          <a:ln/>
+        </p:spPr>
+      </p:sp>
+      <p:sp>
+        <p:nvSpPr>
+          <p:cNvPr id="76" name="Shape 73"/>
+          <p:cNvSpPr/>
+          <p:nvPr/>
+        </p:nvSpPr>
+        <p:spPr>
+          <a:xfrm>
+            <a:off x="10727341" y="4962308"/>
+            <a:ext cx="60960" cy="60960"/>
+          </a:xfrm>
+          <a:prstGeom prst="ellipse">
+            <a:avLst/>
+          </a:prstGeom>
+          <a:solidFill>
+            <a:srgbClr val="CFCBC2"/>
+          </a:solidFill>
+          <a:ln/>
+        </p:spPr>
+      </p:sp>
+      <p:sp>
+        <p:nvSpPr>
+          <p:cNvPr id="77" name="Shape 74"/>
+          <p:cNvSpPr/>
+          <p:nvPr/>
+        </p:nvSpPr>
+        <p:spPr>
+          <a:xfrm>
+            <a:off x="10736771" y="4554653"/>
+            <a:ext cx="60960" cy="60960"/>
+          </a:xfrm>
+          <a:prstGeom prst="ellipse">
+            <a:avLst/>
+          </a:prstGeom>
+          <a:solidFill>
+            <a:srgbClr val="CFCBC2"/>
+          </a:solidFill>
+          <a:ln/>
+        </p:spPr>
+      </p:sp>
+      <p:sp>
+        <p:nvSpPr>
+          <p:cNvPr id="78" name="Shape 75"/>
+          <p:cNvSpPr/>
+          <p:nvPr/>
+        </p:nvSpPr>
+        <p:spPr>
+          <a:xfrm>
+            <a:off x="10736771" y="4617747"/>
+            <a:ext cx="60960" cy="60960"/>
+          </a:xfrm>
+          <a:prstGeom prst="ellipse">
+            <a:avLst/>
+          </a:prstGeom>
+          <a:solidFill>
+            <a:srgbClr val="CFCBC2"/>
+          </a:solidFill>
+          <a:ln/>
+        </p:spPr>
+      </p:sp>
+      <p:sp>
+        <p:nvSpPr>
+          <p:cNvPr id="79" name="Shape 76"/>
+          <p:cNvSpPr/>
+          <p:nvPr/>
+        </p:nvSpPr>
+        <p:spPr>
+          <a:xfrm>
+            <a:off x="10736771" y="4873977"/>
+            <a:ext cx="60960" cy="60960"/>
+          </a:xfrm>
+          <a:prstGeom prst="ellipse">
+            <a:avLst/>
+          </a:prstGeom>
+          <a:solidFill>
+            <a:srgbClr val="CFCBC2"/>
+          </a:solidFill>
+          <a:ln/>
+        </p:spPr>
+      </p:sp>
+      <p:sp>
+        <p:nvSpPr>
+          <p:cNvPr id="80" name="Shape 77"/>
+          <p:cNvSpPr/>
+          <p:nvPr/>
+        </p:nvSpPr>
+        <p:spPr>
+          <a:xfrm>
+            <a:off x="10812209" y="4680227"/>
+            <a:ext cx="60960" cy="60960"/>
+          </a:xfrm>
+          <a:prstGeom prst="ellipse">
+            <a:avLst/>
+          </a:prstGeom>
+          <a:solidFill>
+            <a:srgbClr val="CFCBC2"/>
+          </a:solidFill>
+          <a:ln/>
+        </p:spPr>
+      </p:sp>
+      <p:sp>
+        <p:nvSpPr>
+          <p:cNvPr id="81" name="Shape 78"/>
+          <p:cNvSpPr/>
+          <p:nvPr/>
+        </p:nvSpPr>
+        <p:spPr>
+          <a:xfrm>
+            <a:off x="10831068" y="4943555"/>
+            <a:ext cx="60960" cy="60960"/>
+          </a:xfrm>
+          <a:prstGeom prst="ellipse">
+            <a:avLst/>
+          </a:prstGeom>
+          <a:solidFill>
+            <a:srgbClr val="CFCBC2"/>
+          </a:solidFill>
+          <a:ln/>
+        </p:spPr>
+      </p:sp>
+      <p:sp>
+        <p:nvSpPr>
+          <p:cNvPr id="82" name="Shape 79"/>
+          <p:cNvSpPr/>
+          <p:nvPr/>
+        </p:nvSpPr>
+        <p:spPr>
+          <a:xfrm>
+            <a:off x="10906506" y="4674881"/>
+            <a:ext cx="60960" cy="60960"/>
+          </a:xfrm>
+          <a:prstGeom prst="ellipse">
+            <a:avLst/>
+          </a:prstGeom>
+          <a:solidFill>
+            <a:srgbClr val="CFCBC2"/>
+          </a:solidFill>
+          <a:ln/>
+        </p:spPr>
+      </p:sp>
+      <p:sp>
+        <p:nvSpPr>
+          <p:cNvPr id="83" name="Shape 80"/>
+          <p:cNvSpPr/>
+          <p:nvPr/>
+        </p:nvSpPr>
+        <p:spPr>
+          <a:xfrm>
+            <a:off x="11047952" y="4555617"/>
+            <a:ext cx="60960" cy="60960"/>
+          </a:xfrm>
+          <a:prstGeom prst="ellipse">
+            <a:avLst/>
+          </a:prstGeom>
+          <a:solidFill>
+            <a:srgbClr val="CFCBC2"/>
+          </a:solidFill>
+          <a:ln/>
+        </p:spPr>
+      </p:sp>
+      <p:sp>
+        <p:nvSpPr>
+          <p:cNvPr id="84" name="Shape 81"/>
+          <p:cNvSpPr/>
+          <p:nvPr/>
+        </p:nvSpPr>
+        <p:spPr>
+          <a:xfrm>
+            <a:off x="11217688" y="4614855"/>
+            <a:ext cx="60960" cy="60960"/>
+          </a:xfrm>
+          <a:prstGeom prst="ellipse">
+            <a:avLst/>
+          </a:prstGeom>
+          <a:solidFill>
+            <a:srgbClr val="CFCBC2"/>
+          </a:solidFill>
+          <a:ln/>
+        </p:spPr>
+      </p:sp>
+      <p:sp>
+        <p:nvSpPr>
+          <p:cNvPr id="85" name="Text 82"/>
+          <p:cNvSpPr txBox="1"/>
+          <p:nvPr/>
+        </p:nvSpPr>
+        <p:spPr>
+          <a:xfrm>
+            <a:off x="7162800" y="5543550"/>
+            <a:ext cx="4343400" cy="131445"/>
+          </a:xfrm>
+          <a:prstGeom prst="rect">
+            <a:avLst/>
+          </a:prstGeom>
+          <a:noFill/>
+          <a:ln/>
+        </p:spPr>
+        <p:txBody>
+          <a:bodyPr wrap="square" lIns="0" tIns="0" rIns="0" bIns="0" rtlCol="0" anchor="t"/>
+          <a:lstStyle/>
+          <a:p>
+            <a:pPr algn="l" indent="0" marL="0">
+              <a:lnSpc>
+                <a:spcPts val="1035"/>
+              </a:lnSpc>
+              <a:buNone/>
+            </a:pPr>
+            <a:r>
+              <a:rPr lang="en-US" sz="863" dirty="0">
+                <a:solidFill>
+                  <a:srgbClr val="8A8880"/>
+                </a:solidFill>
+                <a:latin typeface="Malgun Gothic" pitchFamily="34" charset="0"/>
+                <a:ea typeface="Malgun Gothic" pitchFamily="34" charset="-122"/>
+                <a:cs typeface="Malgun Gothic" pitchFamily="34" charset="-120"/>
+              </a:rPr>
+              <a:t>점 하나가 시험 한 번입니다.</a:t>
+            </a:r>
+            <a:endParaRPr lang="en-US" sz="863" dirty="0"/>
+          </a:p>
+        </p:txBody>
+      </p:sp>
+      <p:sp>
+        <p:nvSpPr>
+          <p:cNvPr id="86" name="Shape 83"/>
           <p:cNvSpPr/>
           <p:nvPr/>
         </p:nvSpPr>
@@ -2901,7 +6251,7 @@
       </p:sp>
       <p:sp>
         <p:nvSpPr>
-          <p:cNvPr id="26" name="Text 23"/>
+          <p:cNvPr id="87" name="Text 84"/>
           <p:cNvSpPr txBox="1"/>
           <p:nvPr/>
         </p:nvSpPr>
@@ -2943,7 +6293,7 @@
       </p:sp>
       <p:sp>
         <p:nvSpPr>
-          <p:cNvPr id="27" name="Text 24"/>
+          <p:cNvPr id="88" name="Text 85"/>
           <p:cNvSpPr txBox="1"/>
           <p:nvPr/>
         </p:nvSpPr>

--- a/docs/ppt/위례_공급가능용량_최종발표_v3.pptx
+++ b/docs/ppt/위례_공급가능용량_최종발표_v3.pptx
@@ -1239,7 +1239,7 @@
                 <a:ea typeface="Malgun Gothic" pitchFamily="34" charset="-122"/>
                 <a:cs typeface="Malgun Gothic" pitchFamily="34" charset="-120"/>
               </a:rPr>
-              <a:t>기존에는 이렇게 했습니다</a:t>
+              <a:t>기존 방식</a:t>
             </a:r>
             <a:endParaRPr lang="en-US" sz="2775" dirty="0"/>
           </a:p>
@@ -1253,8 +1253,8 @@
         </p:nvSpPr>
         <p:spPr>
           <a:xfrm>
-            <a:off x="685800" y="1600200"/>
-            <a:ext cx="2533650" cy="179546"/>
+            <a:off x="685800" y="1447800"/>
+            <a:ext cx="10287000" cy="284607"/>
           </a:xfrm>
           <a:prstGeom prst="rect">
             <a:avLst/>
@@ -1266,21 +1266,63 @@
           <a:bodyPr wrap="square" lIns="0" tIns="0" rIns="0" bIns="0" rtlCol="0" anchor="t"/>
           <a:lstStyle/>
           <a:p>
-            <a:pPr algn="ctr" indent="0" marL="0">
-              <a:lnSpc>
-                <a:spcPts val="1414"/>
-              </a:lnSpc>
-              <a:buNone/>
-            </a:pPr>
-            <a:r>
-              <a:rPr lang="en-US" sz="1088" b="1" dirty="0">
-                <a:solidFill>
-                  <a:srgbClr val="EFB13C"/>
+            <a:pPr algn="l" indent="0" marL="0">
+              <a:lnSpc>
+                <a:spcPts val="2241"/>
+              </a:lnSpc>
+              <a:buNone/>
+            </a:pPr>
+            <a:r>
+              <a:rPr lang="en-US" sz="1350" dirty="0">
+                <a:solidFill>
+                  <a:srgbClr val="CFCBC2"/>
                 </a:solidFill>
                 <a:latin typeface="Malgun Gothic" pitchFamily="34" charset="0"/>
                 <a:ea typeface="Malgun Gothic" pitchFamily="34" charset="-122"/>
                 <a:cs typeface="Malgun Gothic" pitchFamily="34" charset="-120"/>
               </a:rPr>
+              <a:t>엑셀 파일 네 개를 순서대로 돌려서 신고할 숫자를 만들었습니다.</a:t>
+            </a:r>
+            <a:endParaRPr lang="en-US" sz="1350" dirty="0"/>
+          </a:p>
+        </p:txBody>
+      </p:sp>
+      <p:sp>
+        <p:nvSpPr>
+          <p:cNvPr id="13" name="Text 11"/>
+          <p:cNvSpPr txBox="1"/>
+          <p:nvPr/>
+        </p:nvSpPr>
+        <p:spPr>
+          <a:xfrm>
+            <a:off x="685800" y="1866900"/>
+            <a:ext cx="2533650" cy="179546"/>
+          </a:xfrm>
+          <a:prstGeom prst="rect">
+            <a:avLst/>
+          </a:prstGeom>
+          <a:noFill/>
+          <a:ln/>
+        </p:spPr>
+        <p:txBody>
+          <a:bodyPr wrap="square" lIns="0" tIns="0" rIns="0" bIns="0" rtlCol="0" anchor="t"/>
+          <a:lstStyle/>
+          <a:p>
+            <a:pPr algn="ctr" indent="0" marL="0">
+              <a:lnSpc>
+                <a:spcPts val="1414"/>
+              </a:lnSpc>
+              <a:buNone/>
+            </a:pPr>
+            <a:r>
+              <a:rPr lang="en-US" sz="1088" b="1" dirty="0">
+                <a:solidFill>
+                  <a:srgbClr val="EFB13C"/>
+                </a:solidFill>
+                <a:latin typeface="Malgun Gothic" pitchFamily="34" charset="0"/>
+                <a:ea typeface="Malgun Gothic" pitchFamily="34" charset="-122"/>
+                <a:cs typeface="Malgun Gothic" pitchFamily="34" charset="-120"/>
+              </a:rPr>
               <a:t>① 값 받아오기</a:t>
             </a:r>
             <a:endParaRPr lang="en-US" sz="1088" dirty="0"/>
@@ -1289,14 +1331,14 @@
       </p:sp>
       <p:sp>
         <p:nvSpPr>
-          <p:cNvPr id="13" name="Shape 11"/>
-          <p:cNvSpPr/>
-          <p:nvPr/>
-        </p:nvSpPr>
-        <p:spPr>
-          <a:xfrm>
-            <a:off x="685800" y="1828800"/>
-            <a:ext cx="2533650" cy="1866900"/>
+          <p:cNvPr id="14" name="Shape 12"/>
+          <p:cNvSpPr/>
+          <p:nvPr/>
+        </p:nvSpPr>
+        <p:spPr>
+          <a:xfrm>
+            <a:off x="685800" y="2095500"/>
+            <a:ext cx="2533650" cy="1733550"/>
           </a:xfrm>
           <a:prstGeom prst="rect">
             <a:avLst/>
@@ -1314,7 +1356,7 @@
       </p:sp>
       <p:pic>
         <p:nvPicPr>
-          <p:cNvPr id="14" name="Image 0" descr="/home/user/Narae-AI/docs/ppt/assets/엑셀1-1_날짜, 시간 입력 후(RiMS 데이터 가져오기).png">    </p:cNvPr>
+          <p:cNvPr id="15" name="Image 0" descr="/home/user/Narae-AI/docs/ppt/assets/엑셀1-1_날짜, 시간 입력 후(RiMS 데이터 가져오기).png">    </p:cNvPr>
           <p:cNvPicPr>
             <a:picLocks noChangeAspect="1"/>
           </p:cNvPicPr>
@@ -1328,7 +1370,7 @@
         </p:blipFill>
         <p:spPr>
           <a:xfrm>
-            <a:off x="781050" y="2382795"/>
+            <a:off x="781050" y="2582820"/>
             <a:ext cx="2343150" cy="758909"/>
           </a:xfrm>
           <a:prstGeom prst="rect">
@@ -1338,13 +1380,13 @@
       </p:pic>
       <p:sp>
         <p:nvSpPr>
-          <p:cNvPr id="15" name="Shape 12"/>
-          <p:cNvSpPr/>
-          <p:nvPr/>
-        </p:nvSpPr>
-        <p:spPr>
-          <a:xfrm>
-            <a:off x="771525" y="2373270"/>
+          <p:cNvPr id="16" name="Shape 13"/>
+          <p:cNvSpPr/>
+          <p:nvPr/>
+        </p:nvSpPr>
+        <p:spPr>
+          <a:xfrm>
+            <a:off x="771525" y="2573295"/>
             <a:ext cx="2362200" cy="777959"/>
           </a:xfrm>
           <a:prstGeom prst="rect">
@@ -1360,13 +1402,13 @@
       </p:sp>
       <p:sp>
         <p:nvSpPr>
-          <p:cNvPr id="16" name="Text 13"/>
+          <p:cNvPr id="17" name="Text 14"/>
           <p:cNvSpPr txBox="1"/>
           <p:nvPr/>
         </p:nvSpPr>
         <p:spPr>
           <a:xfrm>
-            <a:off x="3238500" y="2686050"/>
+            <a:off x="3238500" y="2876550"/>
             <a:ext cx="190500" cy="148590"/>
           </a:xfrm>
           <a:prstGeom prst="rect">
@@ -1402,13 +1444,13 @@
       </p:sp>
       <p:sp>
         <p:nvSpPr>
-          <p:cNvPr id="17" name="Text 14"/>
+          <p:cNvPr id="18" name="Text 15"/>
           <p:cNvSpPr txBox="1"/>
           <p:nvPr/>
         </p:nvSpPr>
         <p:spPr>
           <a:xfrm>
-            <a:off x="3448050" y="1600200"/>
+            <a:off x="3448050" y="1866900"/>
             <a:ext cx="2533650" cy="179546"/>
           </a:xfrm>
           <a:prstGeom prst="rect">
@@ -1444,14 +1486,14 @@
       </p:sp>
       <p:sp>
         <p:nvSpPr>
-          <p:cNvPr id="18" name="Shape 15"/>
-          <p:cNvSpPr/>
-          <p:nvPr/>
-        </p:nvSpPr>
-        <p:spPr>
-          <a:xfrm>
-            <a:off x="3448050" y="1828800"/>
-            <a:ext cx="2533650" cy="1866900"/>
+          <p:cNvPr id="19" name="Shape 16"/>
+          <p:cNvSpPr/>
+          <p:nvPr/>
+        </p:nvSpPr>
+        <p:spPr>
+          <a:xfrm>
+            <a:off x="3448050" y="2095500"/>
+            <a:ext cx="2533650" cy="1733550"/>
           </a:xfrm>
           <a:prstGeom prst="rect">
             <a:avLst/>
@@ -1469,7 +1511,7 @@
       </p:sp>
       <p:pic>
         <p:nvPicPr>
-          <p:cNvPr id="19" name="Image 1" descr="/home/user/Narae-AI/docs/ppt/assets/엑셀2-1_G열 대기압 입력 후 온도별 이론값 생성.png">    </p:cNvPr>
+          <p:cNvPr id="20" name="Image 1" descr="/home/user/Narae-AI/docs/ppt/assets/엑셀2-1_G열 대기압 입력 후 온도별 이론값 생성.png">    </p:cNvPr>
           <p:cNvPicPr>
             <a:picLocks noChangeAspect="1"/>
           </p:cNvPicPr>
@@ -1483,8 +1525,8 @@
         </p:blipFill>
         <p:spPr>
           <a:xfrm>
-            <a:off x="3702423" y="1905000"/>
-            <a:ext cx="2024905" cy="1714500"/>
+            <a:off x="3781169" y="2171700"/>
+            <a:ext cx="1867412" cy="1581150"/>
           </a:xfrm>
           <a:prstGeom prst="rect">
             <a:avLst/>
@@ -1493,14 +1535,14 @@
       </p:pic>
       <p:sp>
         <p:nvSpPr>
-          <p:cNvPr id="20" name="Shape 16"/>
-          <p:cNvSpPr/>
-          <p:nvPr/>
-        </p:nvSpPr>
-        <p:spPr>
-          <a:xfrm>
-            <a:off x="3692898" y="1895475"/>
-            <a:ext cx="2043955" cy="1733550"/>
+          <p:cNvPr id="21" name="Shape 17"/>
+          <p:cNvSpPr/>
+          <p:nvPr/>
+        </p:nvSpPr>
+        <p:spPr>
+          <a:xfrm>
+            <a:off x="3771644" y="2162175"/>
+            <a:ext cx="1886462" cy="1600200"/>
           </a:xfrm>
           <a:prstGeom prst="rect">
             <a:avLst/>
@@ -1515,13 +1557,13 @@
       </p:sp>
       <p:sp>
         <p:nvSpPr>
-          <p:cNvPr id="21" name="Text 17"/>
+          <p:cNvPr id="22" name="Text 18"/>
           <p:cNvSpPr txBox="1"/>
           <p:nvPr/>
         </p:nvSpPr>
         <p:spPr>
           <a:xfrm>
-            <a:off x="6000750" y="2686050"/>
+            <a:off x="6000750" y="2876550"/>
             <a:ext cx="190500" cy="148590"/>
           </a:xfrm>
           <a:prstGeom prst="rect">
@@ -1557,13 +1599,13 @@
       </p:sp>
       <p:sp>
         <p:nvSpPr>
-          <p:cNvPr id="22" name="Text 18"/>
+          <p:cNvPr id="23" name="Text 19"/>
           <p:cNvSpPr txBox="1"/>
           <p:nvPr/>
         </p:nvSpPr>
         <p:spPr>
           <a:xfrm>
-            <a:off x="6210300" y="1600200"/>
+            <a:off x="6210300" y="1866900"/>
             <a:ext cx="2533650" cy="179546"/>
           </a:xfrm>
           <a:prstGeom prst="rect">
@@ -1599,14 +1641,14 @@
       </p:sp>
       <p:sp>
         <p:nvSpPr>
-          <p:cNvPr id="23" name="Shape 19"/>
-          <p:cNvSpPr/>
-          <p:nvPr/>
-        </p:nvSpPr>
-        <p:spPr>
-          <a:xfrm>
-            <a:off x="6210300" y="1828800"/>
-            <a:ext cx="2533650" cy="1866900"/>
+          <p:cNvPr id="24" name="Shape 20"/>
+          <p:cNvSpPr/>
+          <p:nvPr/>
+        </p:nvSpPr>
+        <p:spPr>
+          <a:xfrm>
+            <a:off x="6210300" y="2095500"/>
+            <a:ext cx="2533650" cy="1733550"/>
           </a:xfrm>
           <a:prstGeom prst="rect">
             <a:avLst/>
@@ -1624,7 +1666,7 @@
       </p:sp>
       <p:pic>
         <p:nvPicPr>
-          <p:cNvPr id="24" name="Image 2" descr="/home/user/Narae-AI/docs/ppt/assets/엑셀2-2_IGV Turn up 적용 및, 테스트 온도 지점의 실제 출력과 이론값 비교하여 BTL(보정값) 적용.png">    </p:cNvPr>
+          <p:cNvPr id="25" name="Image 2" descr="/home/user/Narae-AI/docs/ppt/assets/엑셀2-2_IGV Turn up 적용 및, 테스트 온도 지점의 실제 출력과 이론값 비교하여 BTL(보정값) 적용.png">    </p:cNvPr>
           <p:cNvPicPr>
             <a:picLocks noChangeAspect="1"/>
           </p:cNvPicPr>
@@ -1638,7 +1680,7 @@
         </p:blipFill>
         <p:spPr>
           <a:xfrm>
-            <a:off x="6305550" y="2512979"/>
+            <a:off x="6305550" y="2713004"/>
             <a:ext cx="2343150" cy="498543"/>
           </a:xfrm>
           <a:prstGeom prst="rect">
@@ -1648,13 +1690,13 @@
       </p:pic>
       <p:sp>
         <p:nvSpPr>
-          <p:cNvPr id="25" name="Shape 20"/>
-          <p:cNvSpPr/>
-          <p:nvPr/>
-        </p:nvSpPr>
-        <p:spPr>
-          <a:xfrm>
-            <a:off x="6296025" y="2503454"/>
+          <p:cNvPr id="26" name="Shape 21"/>
+          <p:cNvSpPr/>
+          <p:nvPr/>
+        </p:nvSpPr>
+        <p:spPr>
+          <a:xfrm>
+            <a:off x="6296025" y="2703479"/>
             <a:ext cx="2362200" cy="517593"/>
           </a:xfrm>
           <a:prstGeom prst="rect">
@@ -1670,13 +1712,13 @@
       </p:sp>
       <p:sp>
         <p:nvSpPr>
-          <p:cNvPr id="26" name="Text 21"/>
+          <p:cNvPr id="27" name="Text 22"/>
           <p:cNvSpPr txBox="1"/>
           <p:nvPr/>
         </p:nvSpPr>
         <p:spPr>
           <a:xfrm>
-            <a:off x="8763000" y="2686050"/>
+            <a:off x="8763000" y="2876550"/>
             <a:ext cx="190500" cy="148590"/>
           </a:xfrm>
           <a:prstGeom prst="rect">
@@ -1712,13 +1754,13 @@
       </p:sp>
       <p:sp>
         <p:nvSpPr>
-          <p:cNvPr id="27" name="Text 22"/>
+          <p:cNvPr id="28" name="Text 23"/>
           <p:cNvSpPr txBox="1"/>
           <p:nvPr/>
         </p:nvSpPr>
         <p:spPr>
           <a:xfrm>
-            <a:off x="8972550" y="1600200"/>
+            <a:off x="8972550" y="1866900"/>
             <a:ext cx="2533650" cy="179546"/>
           </a:xfrm>
           <a:prstGeom prst="rect">
@@ -1754,14 +1796,14 @@
       </p:sp>
       <p:sp>
         <p:nvSpPr>
-          <p:cNvPr id="28" name="Shape 23"/>
-          <p:cNvSpPr/>
-          <p:nvPr/>
-        </p:nvSpPr>
-        <p:spPr>
-          <a:xfrm>
-            <a:off x="8972550" y="1828800"/>
-            <a:ext cx="2533650" cy="1866900"/>
+          <p:cNvPr id="29" name="Shape 24"/>
+          <p:cNvSpPr/>
+          <p:nvPr/>
+        </p:nvSpPr>
+        <p:spPr>
+          <a:xfrm>
+            <a:off x="8972550" y="2095500"/>
+            <a:ext cx="2533650" cy="1733550"/>
           </a:xfrm>
           <a:prstGeom prst="rect">
             <a:avLst/>
@@ -1779,7 +1821,7 @@
       </p:sp>
       <p:pic>
         <p:nvPicPr>
-          <p:cNvPr id="29" name="Image 3" descr="/home/user/Narae-AI/docs/ppt/assets/xl_profile.png">    </p:cNvPr>
+          <p:cNvPr id="30" name="Image 3" descr="/home/user/Narae-AI/docs/ppt/assets/xl_profile.png">    </p:cNvPr>
           <p:cNvPicPr>
             <a:picLocks noChangeAspect="1"/>
           </p:cNvPicPr>
@@ -1793,7 +1835,7 @@
         </p:blipFill>
         <p:spPr>
           <a:xfrm>
-            <a:off x="9067800" y="2067983"/>
+            <a:off x="9067800" y="2268008"/>
             <a:ext cx="2343150" cy="1388533"/>
           </a:xfrm>
           <a:prstGeom prst="rect">
@@ -1803,13 +1845,13 @@
       </p:pic>
       <p:sp>
         <p:nvSpPr>
-          <p:cNvPr id="30" name="Shape 24"/>
-          <p:cNvSpPr/>
-          <p:nvPr/>
-        </p:nvSpPr>
-        <p:spPr>
-          <a:xfrm>
-            <a:off x="9058275" y="2058458"/>
+          <p:cNvPr id="31" name="Shape 25"/>
+          <p:cNvSpPr/>
+          <p:nvPr/>
+        </p:nvSpPr>
+        <p:spPr>
+          <a:xfrm>
+            <a:off x="9058275" y="2258483"/>
             <a:ext cx="2362200" cy="1407583"/>
           </a:xfrm>
           <a:prstGeom prst="rect">
@@ -1825,14 +1867,14 @@
       </p:sp>
       <p:sp>
         <p:nvSpPr>
-          <p:cNvPr id="31" name="Shape 25"/>
-          <p:cNvSpPr/>
-          <p:nvPr/>
-        </p:nvSpPr>
-        <p:spPr>
-          <a:xfrm>
-            <a:off x="685800" y="3848100"/>
-            <a:ext cx="10820400" cy="2095500"/>
+          <p:cNvPr id="32" name="Shape 26"/>
+          <p:cNvSpPr/>
+          <p:nvPr/>
+        </p:nvSpPr>
+        <p:spPr>
+          <a:xfrm>
+            <a:off x="685800" y="3962400"/>
+            <a:ext cx="10820400" cy="1981200"/>
           </a:xfrm>
           <a:prstGeom prst="rect">
             <a:avLst/>
@@ -1850,14 +1892,14 @@
       </p:sp>
       <p:sp>
         <p:nvSpPr>
-          <p:cNvPr id="32" name="Text 26"/>
+          <p:cNvPr id="33" name="Text 27"/>
           <p:cNvSpPr txBox="1"/>
           <p:nvPr/>
         </p:nvSpPr>
         <p:spPr>
           <a:xfrm>
-            <a:off x="914400" y="3962400"/>
-            <a:ext cx="4762500" cy="125016"/>
+            <a:off x="914400" y="4076700"/>
+            <a:ext cx="2857500" cy="125016"/>
           </a:xfrm>
           <a:prstGeom prst="rect">
             <a:avLst/>
@@ -1884,7 +1926,7 @@
                 <a:ea typeface="Consolas" pitchFamily="34" charset="-122"/>
                 <a:cs typeface="Consolas" pitchFamily="34" charset="-120"/>
               </a:rPr>
-              <a:t>시험한 온도는 하루에 한 곳뿐입니다</a:t>
+              <a:t>시험 지점과 신고 범위</a:t>
             </a:r>
             <a:endParaRPr lang="en-US" sz="788" dirty="0"/>
           </a:p>
@@ -1892,13 +1934,13 @@
       </p:sp>
       <p:sp>
         <p:nvSpPr>
-          <p:cNvPr id="33" name="Shape 27"/>
-          <p:cNvSpPr/>
-          <p:nvPr/>
-        </p:nvSpPr>
-        <p:spPr>
-          <a:xfrm>
-            <a:off x="2038350" y="5400675"/>
+          <p:cNvPr id="34" name="Shape 28"/>
+          <p:cNvSpPr/>
+          <p:nvPr/>
+        </p:nvSpPr>
+        <p:spPr>
+          <a:xfrm>
+            <a:off x="2038350" y="5438775"/>
             <a:ext cx="0" cy="66675"/>
           </a:xfrm>
           <a:prstGeom prst="line">
@@ -1915,13 +1957,13 @@
       </p:sp>
       <p:sp>
         <p:nvSpPr>
-          <p:cNvPr id="34" name="Shape 28"/>
-          <p:cNvSpPr/>
-          <p:nvPr/>
-        </p:nvSpPr>
-        <p:spPr>
-          <a:xfrm>
-            <a:off x="2182178" y="5400675"/>
+          <p:cNvPr id="35" name="Shape 29"/>
+          <p:cNvSpPr/>
+          <p:nvPr/>
+        </p:nvSpPr>
+        <p:spPr>
+          <a:xfrm>
+            <a:off x="2182178" y="5438775"/>
             <a:ext cx="0" cy="66675"/>
           </a:xfrm>
           <a:prstGeom prst="line">
@@ -1938,13 +1980,13 @@
       </p:sp>
       <p:sp>
         <p:nvSpPr>
-          <p:cNvPr id="35" name="Shape 29"/>
-          <p:cNvSpPr/>
-          <p:nvPr/>
-        </p:nvSpPr>
-        <p:spPr>
-          <a:xfrm>
-            <a:off x="2326005" y="5400675"/>
+          <p:cNvPr id="36" name="Shape 30"/>
+          <p:cNvSpPr/>
+          <p:nvPr/>
+        </p:nvSpPr>
+        <p:spPr>
+          <a:xfrm>
+            <a:off x="2326005" y="5438775"/>
             <a:ext cx="0" cy="66675"/>
           </a:xfrm>
           <a:prstGeom prst="line">
@@ -1961,13 +2003,13 @@
       </p:sp>
       <p:sp>
         <p:nvSpPr>
-          <p:cNvPr id="36" name="Shape 30"/>
-          <p:cNvSpPr/>
-          <p:nvPr/>
-        </p:nvSpPr>
-        <p:spPr>
-          <a:xfrm>
-            <a:off x="2469833" y="5400675"/>
+          <p:cNvPr id="37" name="Shape 31"/>
+          <p:cNvSpPr/>
+          <p:nvPr/>
+        </p:nvSpPr>
+        <p:spPr>
+          <a:xfrm>
+            <a:off x="2469833" y="5438775"/>
             <a:ext cx="0" cy="66675"/>
           </a:xfrm>
           <a:prstGeom prst="line">
@@ -1984,13 +2026,13 @@
       </p:sp>
       <p:sp>
         <p:nvSpPr>
-          <p:cNvPr id="37" name="Shape 31"/>
-          <p:cNvSpPr/>
-          <p:nvPr/>
-        </p:nvSpPr>
-        <p:spPr>
-          <a:xfrm>
-            <a:off x="2613660" y="5400675"/>
+          <p:cNvPr id="38" name="Shape 32"/>
+          <p:cNvSpPr/>
+          <p:nvPr/>
+        </p:nvSpPr>
+        <p:spPr>
+          <a:xfrm>
+            <a:off x="2613660" y="5438775"/>
             <a:ext cx="0" cy="66675"/>
           </a:xfrm>
           <a:prstGeom prst="line">
@@ -2007,13 +2049,13 @@
       </p:sp>
       <p:sp>
         <p:nvSpPr>
-          <p:cNvPr id="38" name="Shape 32"/>
-          <p:cNvSpPr/>
-          <p:nvPr/>
-        </p:nvSpPr>
-        <p:spPr>
-          <a:xfrm>
-            <a:off x="2757488" y="5400675"/>
+          <p:cNvPr id="39" name="Shape 33"/>
+          <p:cNvSpPr/>
+          <p:nvPr/>
+        </p:nvSpPr>
+        <p:spPr>
+          <a:xfrm>
+            <a:off x="2757488" y="5438775"/>
             <a:ext cx="0" cy="66675"/>
           </a:xfrm>
           <a:prstGeom prst="line">
@@ -2030,13 +2072,13 @@
       </p:sp>
       <p:sp>
         <p:nvSpPr>
-          <p:cNvPr id="39" name="Shape 33"/>
-          <p:cNvSpPr/>
-          <p:nvPr/>
-        </p:nvSpPr>
-        <p:spPr>
-          <a:xfrm>
-            <a:off x="2901315" y="5400675"/>
+          <p:cNvPr id="40" name="Shape 34"/>
+          <p:cNvSpPr/>
+          <p:nvPr/>
+        </p:nvSpPr>
+        <p:spPr>
+          <a:xfrm>
+            <a:off x="2901315" y="5438775"/>
             <a:ext cx="0" cy="66675"/>
           </a:xfrm>
           <a:prstGeom prst="line">
@@ -2053,13 +2095,13 @@
       </p:sp>
       <p:sp>
         <p:nvSpPr>
-          <p:cNvPr id="40" name="Shape 34"/>
-          <p:cNvSpPr/>
-          <p:nvPr/>
-        </p:nvSpPr>
-        <p:spPr>
-          <a:xfrm>
-            <a:off x="3045143" y="5400675"/>
+          <p:cNvPr id="41" name="Shape 35"/>
+          <p:cNvSpPr/>
+          <p:nvPr/>
+        </p:nvSpPr>
+        <p:spPr>
+          <a:xfrm>
+            <a:off x="3045143" y="5438775"/>
             <a:ext cx="0" cy="66675"/>
           </a:xfrm>
           <a:prstGeom prst="line">
@@ -2076,13 +2118,13 @@
       </p:sp>
       <p:sp>
         <p:nvSpPr>
-          <p:cNvPr id="41" name="Shape 35"/>
-          <p:cNvSpPr/>
-          <p:nvPr/>
-        </p:nvSpPr>
-        <p:spPr>
-          <a:xfrm>
-            <a:off x="3188970" y="5400675"/>
+          <p:cNvPr id="42" name="Shape 36"/>
+          <p:cNvSpPr/>
+          <p:nvPr/>
+        </p:nvSpPr>
+        <p:spPr>
+          <a:xfrm>
+            <a:off x="3188970" y="5438775"/>
             <a:ext cx="0" cy="66675"/>
           </a:xfrm>
           <a:prstGeom prst="line">
@@ -2099,13 +2141,13 @@
       </p:sp>
       <p:sp>
         <p:nvSpPr>
-          <p:cNvPr id="42" name="Shape 36"/>
-          <p:cNvSpPr/>
-          <p:nvPr/>
-        </p:nvSpPr>
-        <p:spPr>
-          <a:xfrm>
-            <a:off x="3332798" y="5400675"/>
+          <p:cNvPr id="43" name="Shape 37"/>
+          <p:cNvSpPr/>
+          <p:nvPr/>
+        </p:nvSpPr>
+        <p:spPr>
+          <a:xfrm>
+            <a:off x="3332798" y="5438775"/>
             <a:ext cx="0" cy="66675"/>
           </a:xfrm>
           <a:prstGeom prst="line">
@@ -2122,13 +2164,13 @@
       </p:sp>
       <p:sp>
         <p:nvSpPr>
-          <p:cNvPr id="43" name="Shape 37"/>
-          <p:cNvSpPr/>
-          <p:nvPr/>
-        </p:nvSpPr>
-        <p:spPr>
-          <a:xfrm>
-            <a:off x="3476625" y="5400675"/>
+          <p:cNvPr id="44" name="Shape 38"/>
+          <p:cNvSpPr/>
+          <p:nvPr/>
+        </p:nvSpPr>
+        <p:spPr>
+          <a:xfrm>
+            <a:off x="3476625" y="5438775"/>
             <a:ext cx="0" cy="66675"/>
           </a:xfrm>
           <a:prstGeom prst="line">
@@ -2145,13 +2187,13 @@
       </p:sp>
       <p:sp>
         <p:nvSpPr>
-          <p:cNvPr id="44" name="Shape 38"/>
-          <p:cNvSpPr/>
-          <p:nvPr/>
-        </p:nvSpPr>
-        <p:spPr>
-          <a:xfrm>
-            <a:off x="3620453" y="5400675"/>
+          <p:cNvPr id="45" name="Shape 39"/>
+          <p:cNvSpPr/>
+          <p:nvPr/>
+        </p:nvSpPr>
+        <p:spPr>
+          <a:xfrm>
+            <a:off x="3620453" y="5438775"/>
             <a:ext cx="0" cy="66675"/>
           </a:xfrm>
           <a:prstGeom prst="line">
@@ -2168,13 +2210,13 @@
       </p:sp>
       <p:sp>
         <p:nvSpPr>
-          <p:cNvPr id="45" name="Shape 39"/>
-          <p:cNvSpPr/>
-          <p:nvPr/>
-        </p:nvSpPr>
-        <p:spPr>
-          <a:xfrm>
-            <a:off x="3764280" y="5400675"/>
+          <p:cNvPr id="46" name="Shape 40"/>
+          <p:cNvSpPr/>
+          <p:nvPr/>
+        </p:nvSpPr>
+        <p:spPr>
+          <a:xfrm>
+            <a:off x="3764280" y="5438775"/>
             <a:ext cx="0" cy="66675"/>
           </a:xfrm>
           <a:prstGeom prst="line">
@@ -2191,13 +2233,13 @@
       </p:sp>
       <p:sp>
         <p:nvSpPr>
-          <p:cNvPr id="46" name="Shape 40"/>
-          <p:cNvSpPr/>
-          <p:nvPr/>
-        </p:nvSpPr>
-        <p:spPr>
-          <a:xfrm>
-            <a:off x="3908107" y="5400675"/>
+          <p:cNvPr id="47" name="Shape 41"/>
+          <p:cNvSpPr/>
+          <p:nvPr/>
+        </p:nvSpPr>
+        <p:spPr>
+          <a:xfrm>
+            <a:off x="3908107" y="5438775"/>
             <a:ext cx="0" cy="66675"/>
           </a:xfrm>
           <a:prstGeom prst="line">
@@ -2214,13 +2256,13 @@
       </p:sp>
       <p:sp>
         <p:nvSpPr>
-          <p:cNvPr id="47" name="Shape 41"/>
-          <p:cNvSpPr/>
-          <p:nvPr/>
-        </p:nvSpPr>
-        <p:spPr>
-          <a:xfrm>
-            <a:off x="4051935" y="5400675"/>
+          <p:cNvPr id="48" name="Shape 42"/>
+          <p:cNvSpPr/>
+          <p:nvPr/>
+        </p:nvSpPr>
+        <p:spPr>
+          <a:xfrm>
+            <a:off x="4051935" y="5438775"/>
             <a:ext cx="0" cy="66675"/>
           </a:xfrm>
           <a:prstGeom prst="line">
@@ -2237,13 +2279,13 @@
       </p:sp>
       <p:sp>
         <p:nvSpPr>
-          <p:cNvPr id="48" name="Shape 42"/>
-          <p:cNvSpPr/>
-          <p:nvPr/>
-        </p:nvSpPr>
-        <p:spPr>
-          <a:xfrm>
-            <a:off x="4195763" y="5400675"/>
+          <p:cNvPr id="49" name="Shape 43"/>
+          <p:cNvSpPr/>
+          <p:nvPr/>
+        </p:nvSpPr>
+        <p:spPr>
+          <a:xfrm>
+            <a:off x="4195763" y="5438775"/>
             <a:ext cx="0" cy="66675"/>
           </a:xfrm>
           <a:prstGeom prst="line">
@@ -2260,13 +2302,13 @@
       </p:sp>
       <p:sp>
         <p:nvSpPr>
-          <p:cNvPr id="49" name="Shape 43"/>
-          <p:cNvSpPr/>
-          <p:nvPr/>
-        </p:nvSpPr>
-        <p:spPr>
-          <a:xfrm>
-            <a:off x="4339590" y="5400675"/>
+          <p:cNvPr id="50" name="Shape 44"/>
+          <p:cNvSpPr/>
+          <p:nvPr/>
+        </p:nvSpPr>
+        <p:spPr>
+          <a:xfrm>
+            <a:off x="4339590" y="5438775"/>
             <a:ext cx="0" cy="66675"/>
           </a:xfrm>
           <a:prstGeom prst="line">
@@ -2283,13 +2325,13 @@
       </p:sp>
       <p:sp>
         <p:nvSpPr>
-          <p:cNvPr id="50" name="Shape 44"/>
-          <p:cNvSpPr/>
-          <p:nvPr/>
-        </p:nvSpPr>
-        <p:spPr>
-          <a:xfrm>
-            <a:off x="4483418" y="5400675"/>
+          <p:cNvPr id="51" name="Shape 45"/>
+          <p:cNvSpPr/>
+          <p:nvPr/>
+        </p:nvSpPr>
+        <p:spPr>
+          <a:xfrm>
+            <a:off x="4483418" y="5438775"/>
             <a:ext cx="0" cy="66675"/>
           </a:xfrm>
           <a:prstGeom prst="line">
@@ -2306,13 +2348,13 @@
       </p:sp>
       <p:sp>
         <p:nvSpPr>
-          <p:cNvPr id="51" name="Shape 45"/>
-          <p:cNvSpPr/>
-          <p:nvPr/>
-        </p:nvSpPr>
-        <p:spPr>
-          <a:xfrm>
-            <a:off x="4627245" y="5400675"/>
+          <p:cNvPr id="52" name="Shape 46"/>
+          <p:cNvSpPr/>
+          <p:nvPr/>
+        </p:nvSpPr>
+        <p:spPr>
+          <a:xfrm>
+            <a:off x="4627245" y="5438775"/>
             <a:ext cx="0" cy="66675"/>
           </a:xfrm>
           <a:prstGeom prst="line">
@@ -2329,13 +2371,13 @@
       </p:sp>
       <p:sp>
         <p:nvSpPr>
-          <p:cNvPr id="52" name="Shape 46"/>
-          <p:cNvSpPr/>
-          <p:nvPr/>
-        </p:nvSpPr>
-        <p:spPr>
-          <a:xfrm>
-            <a:off x="4771073" y="5400675"/>
+          <p:cNvPr id="53" name="Shape 47"/>
+          <p:cNvSpPr/>
+          <p:nvPr/>
+        </p:nvSpPr>
+        <p:spPr>
+          <a:xfrm>
+            <a:off x="4771073" y="5438775"/>
             <a:ext cx="0" cy="66675"/>
           </a:xfrm>
           <a:prstGeom prst="line">
@@ -2352,13 +2394,13 @@
       </p:sp>
       <p:sp>
         <p:nvSpPr>
-          <p:cNvPr id="53" name="Shape 47"/>
-          <p:cNvSpPr/>
-          <p:nvPr/>
-        </p:nvSpPr>
-        <p:spPr>
-          <a:xfrm>
-            <a:off x="4914900" y="5400675"/>
+          <p:cNvPr id="54" name="Shape 48"/>
+          <p:cNvSpPr/>
+          <p:nvPr/>
+        </p:nvSpPr>
+        <p:spPr>
+          <a:xfrm>
+            <a:off x="4914900" y="5438775"/>
             <a:ext cx="0" cy="66675"/>
           </a:xfrm>
           <a:prstGeom prst="line">
@@ -2375,13 +2417,13 @@
       </p:sp>
       <p:sp>
         <p:nvSpPr>
-          <p:cNvPr id="54" name="Shape 48"/>
-          <p:cNvSpPr/>
-          <p:nvPr/>
-        </p:nvSpPr>
-        <p:spPr>
-          <a:xfrm>
-            <a:off x="5058727" y="5400675"/>
+          <p:cNvPr id="55" name="Shape 49"/>
+          <p:cNvSpPr/>
+          <p:nvPr/>
+        </p:nvSpPr>
+        <p:spPr>
+          <a:xfrm>
+            <a:off x="5058727" y="5438775"/>
             <a:ext cx="0" cy="66675"/>
           </a:xfrm>
           <a:prstGeom prst="line">
@@ -2398,13 +2440,13 @@
       </p:sp>
       <p:sp>
         <p:nvSpPr>
-          <p:cNvPr id="55" name="Shape 49"/>
-          <p:cNvSpPr/>
-          <p:nvPr/>
-        </p:nvSpPr>
-        <p:spPr>
-          <a:xfrm>
-            <a:off x="5202555" y="5400675"/>
+          <p:cNvPr id="56" name="Shape 50"/>
+          <p:cNvSpPr/>
+          <p:nvPr/>
+        </p:nvSpPr>
+        <p:spPr>
+          <a:xfrm>
+            <a:off x="5202555" y="5438775"/>
             <a:ext cx="0" cy="66675"/>
           </a:xfrm>
           <a:prstGeom prst="line">
@@ -2421,13 +2463,13 @@
       </p:sp>
       <p:sp>
         <p:nvSpPr>
-          <p:cNvPr id="56" name="Shape 50"/>
-          <p:cNvSpPr/>
-          <p:nvPr/>
-        </p:nvSpPr>
-        <p:spPr>
-          <a:xfrm>
-            <a:off x="5346383" y="5400675"/>
+          <p:cNvPr id="57" name="Shape 51"/>
+          <p:cNvSpPr/>
+          <p:nvPr/>
+        </p:nvSpPr>
+        <p:spPr>
+          <a:xfrm>
+            <a:off x="5346383" y="5438775"/>
             <a:ext cx="0" cy="66675"/>
           </a:xfrm>
           <a:prstGeom prst="line">
@@ -2444,13 +2486,13 @@
       </p:sp>
       <p:sp>
         <p:nvSpPr>
-          <p:cNvPr id="57" name="Shape 51"/>
-          <p:cNvSpPr/>
-          <p:nvPr/>
-        </p:nvSpPr>
-        <p:spPr>
-          <a:xfrm>
-            <a:off x="5490210" y="5400675"/>
+          <p:cNvPr id="58" name="Shape 52"/>
+          <p:cNvSpPr/>
+          <p:nvPr/>
+        </p:nvSpPr>
+        <p:spPr>
+          <a:xfrm>
+            <a:off x="5490210" y="5438775"/>
             <a:ext cx="0" cy="66675"/>
           </a:xfrm>
           <a:prstGeom prst="line">
@@ -2467,13 +2509,13 @@
       </p:sp>
       <p:sp>
         <p:nvSpPr>
-          <p:cNvPr id="58" name="Shape 52"/>
-          <p:cNvSpPr/>
-          <p:nvPr/>
-        </p:nvSpPr>
-        <p:spPr>
-          <a:xfrm>
-            <a:off x="5634038" y="5400675"/>
+          <p:cNvPr id="59" name="Shape 53"/>
+          <p:cNvSpPr/>
+          <p:nvPr/>
+        </p:nvSpPr>
+        <p:spPr>
+          <a:xfrm>
+            <a:off x="5634038" y="5438775"/>
             <a:ext cx="0" cy="66675"/>
           </a:xfrm>
           <a:prstGeom prst="line">
@@ -2490,13 +2532,13 @@
       </p:sp>
       <p:sp>
         <p:nvSpPr>
-          <p:cNvPr id="59" name="Shape 53"/>
-          <p:cNvSpPr/>
-          <p:nvPr/>
-        </p:nvSpPr>
-        <p:spPr>
-          <a:xfrm>
-            <a:off x="5777865" y="5400675"/>
+          <p:cNvPr id="60" name="Shape 54"/>
+          <p:cNvSpPr/>
+          <p:nvPr/>
+        </p:nvSpPr>
+        <p:spPr>
+          <a:xfrm>
+            <a:off x="5777865" y="5438775"/>
             <a:ext cx="0" cy="66675"/>
           </a:xfrm>
           <a:prstGeom prst="line">
@@ -2513,13 +2555,13 @@
       </p:sp>
       <p:sp>
         <p:nvSpPr>
-          <p:cNvPr id="60" name="Shape 54"/>
-          <p:cNvSpPr/>
-          <p:nvPr/>
-        </p:nvSpPr>
-        <p:spPr>
-          <a:xfrm>
-            <a:off x="5921693" y="5400675"/>
+          <p:cNvPr id="61" name="Shape 55"/>
+          <p:cNvSpPr/>
+          <p:nvPr/>
+        </p:nvSpPr>
+        <p:spPr>
+          <a:xfrm>
+            <a:off x="5921693" y="5438775"/>
             <a:ext cx="0" cy="66675"/>
           </a:xfrm>
           <a:prstGeom prst="line">
@@ -2536,13 +2578,13 @@
       </p:sp>
       <p:sp>
         <p:nvSpPr>
-          <p:cNvPr id="61" name="Shape 55"/>
-          <p:cNvSpPr/>
-          <p:nvPr/>
-        </p:nvSpPr>
-        <p:spPr>
-          <a:xfrm>
-            <a:off x="6065520" y="5400675"/>
+          <p:cNvPr id="62" name="Shape 56"/>
+          <p:cNvSpPr/>
+          <p:nvPr/>
+        </p:nvSpPr>
+        <p:spPr>
+          <a:xfrm>
+            <a:off x="6065520" y="5438775"/>
             <a:ext cx="0" cy="66675"/>
           </a:xfrm>
           <a:prstGeom prst="line">
@@ -2559,13 +2601,13 @@
       </p:sp>
       <p:sp>
         <p:nvSpPr>
-          <p:cNvPr id="62" name="Shape 56"/>
-          <p:cNvSpPr/>
-          <p:nvPr/>
-        </p:nvSpPr>
-        <p:spPr>
-          <a:xfrm>
-            <a:off x="6209347" y="5400675"/>
+          <p:cNvPr id="63" name="Shape 57"/>
+          <p:cNvSpPr/>
+          <p:nvPr/>
+        </p:nvSpPr>
+        <p:spPr>
+          <a:xfrm>
+            <a:off x="6209347" y="5438775"/>
             <a:ext cx="0" cy="66675"/>
           </a:xfrm>
           <a:prstGeom prst="line">
@@ -2582,13 +2624,13 @@
       </p:sp>
       <p:sp>
         <p:nvSpPr>
-          <p:cNvPr id="63" name="Shape 57"/>
-          <p:cNvSpPr/>
-          <p:nvPr/>
-        </p:nvSpPr>
-        <p:spPr>
-          <a:xfrm>
-            <a:off x="6353175" y="5400675"/>
+          <p:cNvPr id="64" name="Shape 58"/>
+          <p:cNvSpPr/>
+          <p:nvPr/>
+        </p:nvSpPr>
+        <p:spPr>
+          <a:xfrm>
+            <a:off x="6353175" y="5438775"/>
             <a:ext cx="0" cy="66675"/>
           </a:xfrm>
           <a:prstGeom prst="line">
@@ -2605,13 +2647,13 @@
       </p:sp>
       <p:sp>
         <p:nvSpPr>
-          <p:cNvPr id="64" name="Shape 58"/>
-          <p:cNvSpPr/>
-          <p:nvPr/>
-        </p:nvSpPr>
-        <p:spPr>
-          <a:xfrm>
-            <a:off x="6497002" y="5400675"/>
+          <p:cNvPr id="65" name="Shape 59"/>
+          <p:cNvSpPr/>
+          <p:nvPr/>
+        </p:nvSpPr>
+        <p:spPr>
+          <a:xfrm>
+            <a:off x="6497002" y="5438775"/>
             <a:ext cx="0" cy="66675"/>
           </a:xfrm>
           <a:prstGeom prst="line">
@@ -2628,13 +2670,13 @@
       </p:sp>
       <p:sp>
         <p:nvSpPr>
-          <p:cNvPr id="65" name="Shape 59"/>
-          <p:cNvSpPr/>
-          <p:nvPr/>
-        </p:nvSpPr>
-        <p:spPr>
-          <a:xfrm>
-            <a:off x="6640830" y="5400675"/>
+          <p:cNvPr id="66" name="Shape 60"/>
+          <p:cNvSpPr/>
+          <p:nvPr/>
+        </p:nvSpPr>
+        <p:spPr>
+          <a:xfrm>
+            <a:off x="6640830" y="5438775"/>
             <a:ext cx="0" cy="66675"/>
           </a:xfrm>
           <a:prstGeom prst="line">
@@ -2651,13 +2693,13 @@
       </p:sp>
       <p:sp>
         <p:nvSpPr>
-          <p:cNvPr id="66" name="Shape 60"/>
-          <p:cNvSpPr/>
-          <p:nvPr/>
-        </p:nvSpPr>
-        <p:spPr>
-          <a:xfrm>
-            <a:off x="6784657" y="5400675"/>
+          <p:cNvPr id="67" name="Shape 61"/>
+          <p:cNvSpPr/>
+          <p:nvPr/>
+        </p:nvSpPr>
+        <p:spPr>
+          <a:xfrm>
+            <a:off x="6784657" y="5438775"/>
             <a:ext cx="0" cy="66675"/>
           </a:xfrm>
           <a:prstGeom prst="line">
@@ -2674,13 +2716,13 @@
       </p:sp>
       <p:sp>
         <p:nvSpPr>
-          <p:cNvPr id="67" name="Shape 61"/>
-          <p:cNvSpPr/>
-          <p:nvPr/>
-        </p:nvSpPr>
-        <p:spPr>
-          <a:xfrm>
-            <a:off x="6928485" y="5400675"/>
+          <p:cNvPr id="68" name="Shape 62"/>
+          <p:cNvSpPr/>
+          <p:nvPr/>
+        </p:nvSpPr>
+        <p:spPr>
+          <a:xfrm>
+            <a:off x="6928485" y="5438775"/>
             <a:ext cx="0" cy="66675"/>
           </a:xfrm>
           <a:prstGeom prst="line">
@@ -2697,13 +2739,13 @@
       </p:sp>
       <p:sp>
         <p:nvSpPr>
-          <p:cNvPr id="68" name="Shape 62"/>
-          <p:cNvSpPr/>
-          <p:nvPr/>
-        </p:nvSpPr>
-        <p:spPr>
-          <a:xfrm>
-            <a:off x="7072313" y="5400675"/>
+          <p:cNvPr id="69" name="Shape 63"/>
+          <p:cNvSpPr/>
+          <p:nvPr/>
+        </p:nvSpPr>
+        <p:spPr>
+          <a:xfrm>
+            <a:off x="7072313" y="5438775"/>
             <a:ext cx="0" cy="66675"/>
           </a:xfrm>
           <a:prstGeom prst="line">
@@ -2720,13 +2762,13 @@
       </p:sp>
       <p:sp>
         <p:nvSpPr>
-          <p:cNvPr id="69" name="Shape 63"/>
-          <p:cNvSpPr/>
-          <p:nvPr/>
-        </p:nvSpPr>
-        <p:spPr>
-          <a:xfrm>
-            <a:off x="7216140" y="5400675"/>
+          <p:cNvPr id="70" name="Shape 64"/>
+          <p:cNvSpPr/>
+          <p:nvPr/>
+        </p:nvSpPr>
+        <p:spPr>
+          <a:xfrm>
+            <a:off x="7216140" y="5438775"/>
             <a:ext cx="0" cy="66675"/>
           </a:xfrm>
           <a:prstGeom prst="line">
@@ -2743,13 +2785,13 @@
       </p:sp>
       <p:sp>
         <p:nvSpPr>
-          <p:cNvPr id="70" name="Shape 64"/>
-          <p:cNvSpPr/>
-          <p:nvPr/>
-        </p:nvSpPr>
-        <p:spPr>
-          <a:xfrm>
-            <a:off x="7359968" y="5400675"/>
+          <p:cNvPr id="71" name="Shape 65"/>
+          <p:cNvSpPr/>
+          <p:nvPr/>
+        </p:nvSpPr>
+        <p:spPr>
+          <a:xfrm>
+            <a:off x="7359968" y="5438775"/>
             <a:ext cx="0" cy="66675"/>
           </a:xfrm>
           <a:prstGeom prst="line">
@@ -2766,13 +2808,13 @@
       </p:sp>
       <p:sp>
         <p:nvSpPr>
-          <p:cNvPr id="71" name="Shape 65"/>
-          <p:cNvSpPr/>
-          <p:nvPr/>
-        </p:nvSpPr>
-        <p:spPr>
-          <a:xfrm>
-            <a:off x="7503795" y="5400675"/>
+          <p:cNvPr id="72" name="Shape 66"/>
+          <p:cNvSpPr/>
+          <p:nvPr/>
+        </p:nvSpPr>
+        <p:spPr>
+          <a:xfrm>
+            <a:off x="7503795" y="5438775"/>
             <a:ext cx="0" cy="66675"/>
           </a:xfrm>
           <a:prstGeom prst="line">
@@ -2789,13 +2831,13 @@
       </p:sp>
       <p:sp>
         <p:nvSpPr>
-          <p:cNvPr id="72" name="Shape 66"/>
-          <p:cNvSpPr/>
-          <p:nvPr/>
-        </p:nvSpPr>
-        <p:spPr>
-          <a:xfrm>
-            <a:off x="7647623" y="5400675"/>
+          <p:cNvPr id="73" name="Shape 67"/>
+          <p:cNvSpPr/>
+          <p:nvPr/>
+        </p:nvSpPr>
+        <p:spPr>
+          <a:xfrm>
+            <a:off x="7647623" y="5438775"/>
             <a:ext cx="0" cy="66675"/>
           </a:xfrm>
           <a:prstGeom prst="line">
@@ -2812,13 +2854,13 @@
       </p:sp>
       <p:sp>
         <p:nvSpPr>
-          <p:cNvPr id="73" name="Shape 67"/>
-          <p:cNvSpPr/>
-          <p:nvPr/>
-        </p:nvSpPr>
-        <p:spPr>
-          <a:xfrm>
-            <a:off x="7791450" y="5400675"/>
+          <p:cNvPr id="74" name="Shape 68"/>
+          <p:cNvSpPr/>
+          <p:nvPr/>
+        </p:nvSpPr>
+        <p:spPr>
+          <a:xfrm>
+            <a:off x="7791450" y="5438775"/>
             <a:ext cx="0" cy="66675"/>
           </a:xfrm>
           <a:prstGeom prst="line">
@@ -2835,13 +2877,13 @@
       </p:sp>
       <p:sp>
         <p:nvSpPr>
-          <p:cNvPr id="74" name="Shape 68"/>
-          <p:cNvSpPr/>
-          <p:nvPr/>
-        </p:nvSpPr>
-        <p:spPr>
-          <a:xfrm>
-            <a:off x="7935278" y="5400675"/>
+          <p:cNvPr id="75" name="Shape 69"/>
+          <p:cNvSpPr/>
+          <p:nvPr/>
+        </p:nvSpPr>
+        <p:spPr>
+          <a:xfrm>
+            <a:off x="7935278" y="5438775"/>
             <a:ext cx="0" cy="66675"/>
           </a:xfrm>
           <a:prstGeom prst="line">
@@ -2858,13 +2900,13 @@
       </p:sp>
       <p:sp>
         <p:nvSpPr>
-          <p:cNvPr id="75" name="Shape 69"/>
-          <p:cNvSpPr/>
-          <p:nvPr/>
-        </p:nvSpPr>
-        <p:spPr>
-          <a:xfrm>
-            <a:off x="8079105" y="5400675"/>
+          <p:cNvPr id="76" name="Shape 70"/>
+          <p:cNvSpPr/>
+          <p:nvPr/>
+        </p:nvSpPr>
+        <p:spPr>
+          <a:xfrm>
+            <a:off x="8079105" y="5438775"/>
             <a:ext cx="0" cy="66675"/>
           </a:xfrm>
           <a:prstGeom prst="line">
@@ -2881,13 +2923,13 @@
       </p:sp>
       <p:sp>
         <p:nvSpPr>
-          <p:cNvPr id="76" name="Shape 70"/>
-          <p:cNvSpPr/>
-          <p:nvPr/>
-        </p:nvSpPr>
-        <p:spPr>
-          <a:xfrm>
-            <a:off x="8222933" y="5400675"/>
+          <p:cNvPr id="77" name="Shape 71"/>
+          <p:cNvSpPr/>
+          <p:nvPr/>
+        </p:nvSpPr>
+        <p:spPr>
+          <a:xfrm>
+            <a:off x="8222933" y="5438775"/>
             <a:ext cx="0" cy="66675"/>
           </a:xfrm>
           <a:prstGeom prst="line">
@@ -2904,13 +2946,13 @@
       </p:sp>
       <p:sp>
         <p:nvSpPr>
-          <p:cNvPr id="77" name="Shape 71"/>
-          <p:cNvSpPr/>
-          <p:nvPr/>
-        </p:nvSpPr>
-        <p:spPr>
-          <a:xfrm>
-            <a:off x="8366760" y="5400675"/>
+          <p:cNvPr id="78" name="Shape 72"/>
+          <p:cNvSpPr/>
+          <p:nvPr/>
+        </p:nvSpPr>
+        <p:spPr>
+          <a:xfrm>
+            <a:off x="8366760" y="5438775"/>
             <a:ext cx="0" cy="66675"/>
           </a:xfrm>
           <a:prstGeom prst="line">
@@ -2927,13 +2969,13 @@
       </p:sp>
       <p:sp>
         <p:nvSpPr>
-          <p:cNvPr id="78" name="Shape 72"/>
-          <p:cNvSpPr/>
-          <p:nvPr/>
-        </p:nvSpPr>
-        <p:spPr>
-          <a:xfrm>
-            <a:off x="8510588" y="5314950"/>
+          <p:cNvPr id="79" name="Shape 73"/>
+          <p:cNvSpPr/>
+          <p:nvPr/>
+        </p:nvSpPr>
+        <p:spPr>
+          <a:xfrm>
+            <a:off x="8510588" y="5353050"/>
             <a:ext cx="0" cy="152400"/>
           </a:xfrm>
           <a:prstGeom prst="line">
@@ -2950,13 +2992,13 @@
       </p:sp>
       <p:sp>
         <p:nvSpPr>
-          <p:cNvPr id="79" name="Shape 73"/>
-          <p:cNvSpPr/>
-          <p:nvPr/>
-        </p:nvSpPr>
-        <p:spPr>
-          <a:xfrm>
-            <a:off x="8654415" y="5400675"/>
+          <p:cNvPr id="80" name="Shape 74"/>
+          <p:cNvSpPr/>
+          <p:nvPr/>
+        </p:nvSpPr>
+        <p:spPr>
+          <a:xfrm>
+            <a:off x="8654415" y="5438775"/>
             <a:ext cx="0" cy="66675"/>
           </a:xfrm>
           <a:prstGeom prst="line">
@@ -2973,13 +3015,13 @@
       </p:sp>
       <p:sp>
         <p:nvSpPr>
-          <p:cNvPr id="80" name="Shape 74"/>
-          <p:cNvSpPr/>
-          <p:nvPr/>
-        </p:nvSpPr>
-        <p:spPr>
-          <a:xfrm>
-            <a:off x="8798243" y="5400675"/>
+          <p:cNvPr id="81" name="Shape 75"/>
+          <p:cNvSpPr/>
+          <p:nvPr/>
+        </p:nvSpPr>
+        <p:spPr>
+          <a:xfrm>
+            <a:off x="8798243" y="5438775"/>
             <a:ext cx="0" cy="66675"/>
           </a:xfrm>
           <a:prstGeom prst="line">
@@ -2996,13 +3038,13 @@
       </p:sp>
       <p:sp>
         <p:nvSpPr>
-          <p:cNvPr id="81" name="Shape 75"/>
-          <p:cNvSpPr/>
-          <p:nvPr/>
-        </p:nvSpPr>
-        <p:spPr>
-          <a:xfrm>
-            <a:off x="8942070" y="5400675"/>
+          <p:cNvPr id="82" name="Shape 76"/>
+          <p:cNvSpPr/>
+          <p:nvPr/>
+        </p:nvSpPr>
+        <p:spPr>
+          <a:xfrm>
+            <a:off x="8942070" y="5438775"/>
             <a:ext cx="0" cy="66675"/>
           </a:xfrm>
           <a:prstGeom prst="line">
@@ -3019,13 +3061,13 @@
       </p:sp>
       <p:sp>
         <p:nvSpPr>
-          <p:cNvPr id="82" name="Shape 76"/>
-          <p:cNvSpPr/>
-          <p:nvPr/>
-        </p:nvSpPr>
-        <p:spPr>
-          <a:xfrm>
-            <a:off x="9085898" y="5400675"/>
+          <p:cNvPr id="83" name="Shape 77"/>
+          <p:cNvSpPr/>
+          <p:nvPr/>
+        </p:nvSpPr>
+        <p:spPr>
+          <a:xfrm>
+            <a:off x="9085898" y="5438775"/>
             <a:ext cx="0" cy="66675"/>
           </a:xfrm>
           <a:prstGeom prst="line">
@@ -3042,13 +3084,13 @@
       </p:sp>
       <p:sp>
         <p:nvSpPr>
-          <p:cNvPr id="83" name="Shape 77"/>
-          <p:cNvSpPr/>
-          <p:nvPr/>
-        </p:nvSpPr>
-        <p:spPr>
-          <a:xfrm>
-            <a:off x="9229725" y="5400675"/>
+          <p:cNvPr id="84" name="Shape 78"/>
+          <p:cNvSpPr/>
+          <p:nvPr/>
+        </p:nvSpPr>
+        <p:spPr>
+          <a:xfrm>
+            <a:off x="9229725" y="5438775"/>
             <a:ext cx="0" cy="66675"/>
           </a:xfrm>
           <a:prstGeom prst="line">
@@ -3065,13 +3107,13 @@
       </p:sp>
       <p:sp>
         <p:nvSpPr>
-          <p:cNvPr id="84" name="Shape 78"/>
-          <p:cNvSpPr/>
-          <p:nvPr/>
-        </p:nvSpPr>
-        <p:spPr>
-          <a:xfrm>
-            <a:off x="9373553" y="5400675"/>
+          <p:cNvPr id="85" name="Shape 79"/>
+          <p:cNvSpPr/>
+          <p:nvPr/>
+        </p:nvSpPr>
+        <p:spPr>
+          <a:xfrm>
+            <a:off x="9373553" y="5438775"/>
             <a:ext cx="0" cy="66675"/>
           </a:xfrm>
           <a:prstGeom prst="line">
@@ -3088,13 +3130,13 @@
       </p:sp>
       <p:sp>
         <p:nvSpPr>
-          <p:cNvPr id="85" name="Shape 79"/>
-          <p:cNvSpPr/>
-          <p:nvPr/>
-        </p:nvSpPr>
-        <p:spPr>
-          <a:xfrm>
-            <a:off x="9517380" y="5400675"/>
+          <p:cNvPr id="86" name="Shape 80"/>
+          <p:cNvSpPr/>
+          <p:nvPr/>
+        </p:nvSpPr>
+        <p:spPr>
+          <a:xfrm>
+            <a:off x="9517380" y="5438775"/>
             <a:ext cx="0" cy="66675"/>
           </a:xfrm>
           <a:prstGeom prst="line">
@@ -3111,13 +3153,13 @@
       </p:sp>
       <p:sp>
         <p:nvSpPr>
-          <p:cNvPr id="86" name="Shape 80"/>
-          <p:cNvSpPr/>
-          <p:nvPr/>
-        </p:nvSpPr>
-        <p:spPr>
-          <a:xfrm>
-            <a:off x="9661207" y="5400675"/>
+          <p:cNvPr id="87" name="Shape 81"/>
+          <p:cNvSpPr/>
+          <p:nvPr/>
+        </p:nvSpPr>
+        <p:spPr>
+          <a:xfrm>
+            <a:off x="9661207" y="5438775"/>
             <a:ext cx="0" cy="66675"/>
           </a:xfrm>
           <a:prstGeom prst="line">
@@ -3134,13 +3176,13 @@
       </p:sp>
       <p:sp>
         <p:nvSpPr>
-          <p:cNvPr id="87" name="Shape 81"/>
-          <p:cNvSpPr/>
-          <p:nvPr/>
-        </p:nvSpPr>
-        <p:spPr>
-          <a:xfrm>
-            <a:off x="9805035" y="5400675"/>
+          <p:cNvPr id="88" name="Shape 82"/>
+          <p:cNvSpPr/>
+          <p:nvPr/>
+        </p:nvSpPr>
+        <p:spPr>
+          <a:xfrm>
+            <a:off x="9805035" y="5438775"/>
             <a:ext cx="0" cy="66675"/>
           </a:xfrm>
           <a:prstGeom prst="line">
@@ -3157,13 +3199,13 @@
       </p:sp>
       <p:sp>
         <p:nvSpPr>
-          <p:cNvPr id="88" name="Shape 82"/>
-          <p:cNvSpPr/>
-          <p:nvPr/>
-        </p:nvSpPr>
-        <p:spPr>
-          <a:xfrm>
-            <a:off x="9948863" y="5400675"/>
+          <p:cNvPr id="89" name="Shape 83"/>
+          <p:cNvSpPr/>
+          <p:nvPr/>
+        </p:nvSpPr>
+        <p:spPr>
+          <a:xfrm>
+            <a:off x="9948863" y="5438775"/>
             <a:ext cx="0" cy="66675"/>
           </a:xfrm>
           <a:prstGeom prst="line">
@@ -3180,13 +3222,13 @@
       </p:sp>
       <p:sp>
         <p:nvSpPr>
-          <p:cNvPr id="89" name="Shape 83"/>
-          <p:cNvSpPr/>
-          <p:nvPr/>
-        </p:nvSpPr>
-        <p:spPr>
-          <a:xfrm>
-            <a:off x="10092690" y="5400675"/>
+          <p:cNvPr id="90" name="Shape 84"/>
+          <p:cNvSpPr/>
+          <p:nvPr/>
+        </p:nvSpPr>
+        <p:spPr>
+          <a:xfrm>
+            <a:off x="10092690" y="5438775"/>
             <a:ext cx="0" cy="66675"/>
           </a:xfrm>
           <a:prstGeom prst="line">
@@ -3203,13 +3245,13 @@
       </p:sp>
       <p:sp>
         <p:nvSpPr>
-          <p:cNvPr id="90" name="Shape 84"/>
-          <p:cNvSpPr/>
-          <p:nvPr/>
-        </p:nvSpPr>
-        <p:spPr>
-          <a:xfrm>
-            <a:off x="10236517" y="5400675"/>
+          <p:cNvPr id="91" name="Shape 85"/>
+          <p:cNvSpPr/>
+          <p:nvPr/>
+        </p:nvSpPr>
+        <p:spPr>
+          <a:xfrm>
+            <a:off x="10236517" y="5438775"/>
             <a:ext cx="0" cy="66675"/>
           </a:xfrm>
           <a:prstGeom prst="line">
@@ -3226,13 +3268,13 @@
       </p:sp>
       <p:sp>
         <p:nvSpPr>
-          <p:cNvPr id="91" name="Shape 85"/>
-          <p:cNvSpPr/>
-          <p:nvPr/>
-        </p:nvSpPr>
-        <p:spPr>
-          <a:xfrm>
-            <a:off x="10380345" y="5400675"/>
+          <p:cNvPr id="92" name="Shape 86"/>
+          <p:cNvSpPr/>
+          <p:nvPr/>
+        </p:nvSpPr>
+        <p:spPr>
+          <a:xfrm>
+            <a:off x="10380345" y="5438775"/>
             <a:ext cx="0" cy="66675"/>
           </a:xfrm>
           <a:prstGeom prst="line">
@@ -3249,13 +3291,13 @@
       </p:sp>
       <p:sp>
         <p:nvSpPr>
-          <p:cNvPr id="92" name="Shape 86"/>
-          <p:cNvSpPr/>
-          <p:nvPr/>
-        </p:nvSpPr>
-        <p:spPr>
-          <a:xfrm>
-            <a:off x="10524173" y="5400675"/>
+          <p:cNvPr id="93" name="Shape 87"/>
+          <p:cNvSpPr/>
+          <p:nvPr/>
+        </p:nvSpPr>
+        <p:spPr>
+          <a:xfrm>
+            <a:off x="10524173" y="5438775"/>
             <a:ext cx="0" cy="66675"/>
           </a:xfrm>
           <a:prstGeom prst="line">
@@ -3272,13 +3314,13 @@
       </p:sp>
       <p:sp>
         <p:nvSpPr>
-          <p:cNvPr id="93" name="Shape 87"/>
-          <p:cNvSpPr/>
-          <p:nvPr/>
-        </p:nvSpPr>
-        <p:spPr>
-          <a:xfrm>
-            <a:off x="10668000" y="5400675"/>
+          <p:cNvPr id="94" name="Shape 88"/>
+          <p:cNvSpPr/>
+          <p:nvPr/>
+        </p:nvSpPr>
+        <p:spPr>
+          <a:xfrm>
+            <a:off x="10668000" y="5438775"/>
             <a:ext cx="0" cy="66675"/>
           </a:xfrm>
           <a:prstGeom prst="line">
@@ -3295,13 +3337,13 @@
       </p:sp>
       <p:sp>
         <p:nvSpPr>
-          <p:cNvPr id="94" name="Shape 88"/>
-          <p:cNvSpPr/>
-          <p:nvPr/>
-        </p:nvSpPr>
-        <p:spPr>
-          <a:xfrm>
-            <a:off x="1962150" y="5467350"/>
+          <p:cNvPr id="95" name="Shape 89"/>
+          <p:cNvSpPr/>
+          <p:nvPr/>
+        </p:nvSpPr>
+        <p:spPr>
+          <a:xfrm>
+            <a:off x="1962150" y="5505450"/>
             <a:ext cx="8782050" cy="0"/>
           </a:xfrm>
           <a:prstGeom prst="line">
@@ -3318,13 +3360,13 @@
       </p:sp>
       <p:sp>
         <p:nvSpPr>
-          <p:cNvPr id="95" name="Text 89"/>
+          <p:cNvPr id="96" name="Text 90"/>
           <p:cNvSpPr txBox="1"/>
           <p:nvPr/>
         </p:nvSpPr>
         <p:spPr>
           <a:xfrm>
-            <a:off x="1809750" y="5543550"/>
+            <a:off x="1809750" y="5581650"/>
             <a:ext cx="457200" cy="120015"/>
           </a:xfrm>
           <a:prstGeom prst="rect">
@@ -3360,13 +3402,13 @@
       </p:sp>
       <p:sp>
         <p:nvSpPr>
-          <p:cNvPr id="96" name="Text 90"/>
+          <p:cNvPr id="97" name="Text 91"/>
           <p:cNvSpPr txBox="1"/>
           <p:nvPr/>
         </p:nvSpPr>
         <p:spPr>
           <a:xfrm>
-            <a:off x="3248025" y="5543550"/>
+            <a:off x="3248025" y="5581650"/>
             <a:ext cx="457200" cy="120015"/>
           </a:xfrm>
           <a:prstGeom prst="rect">
@@ -3402,13 +3444,13 @@
       </p:sp>
       <p:sp>
         <p:nvSpPr>
-          <p:cNvPr id="97" name="Text 91"/>
+          <p:cNvPr id="98" name="Text 92"/>
           <p:cNvSpPr txBox="1"/>
           <p:nvPr/>
         </p:nvSpPr>
         <p:spPr>
           <a:xfrm>
-            <a:off x="4686300" y="5543550"/>
+            <a:off x="4686300" y="5581650"/>
             <a:ext cx="457200" cy="120015"/>
           </a:xfrm>
           <a:prstGeom prst="rect">
@@ -3444,13 +3486,13 @@
       </p:sp>
       <p:sp>
         <p:nvSpPr>
-          <p:cNvPr id="98" name="Text 92"/>
+          <p:cNvPr id="99" name="Text 93"/>
           <p:cNvSpPr txBox="1"/>
           <p:nvPr/>
         </p:nvSpPr>
         <p:spPr>
           <a:xfrm>
-            <a:off x="6124575" y="5543550"/>
+            <a:off x="6124575" y="5581650"/>
             <a:ext cx="457200" cy="120015"/>
           </a:xfrm>
           <a:prstGeom prst="rect">
@@ -3486,13 +3528,13 @@
       </p:sp>
       <p:sp>
         <p:nvSpPr>
-          <p:cNvPr id="99" name="Text 93"/>
+          <p:cNvPr id="100" name="Text 94"/>
           <p:cNvSpPr txBox="1"/>
           <p:nvPr/>
         </p:nvSpPr>
         <p:spPr>
           <a:xfrm>
-            <a:off x="7562850" y="5543550"/>
+            <a:off x="7562850" y="5581650"/>
             <a:ext cx="457200" cy="120015"/>
           </a:xfrm>
           <a:prstGeom prst="rect">
@@ -3528,13 +3570,13 @@
       </p:sp>
       <p:sp>
         <p:nvSpPr>
-          <p:cNvPr id="100" name="Text 94"/>
+          <p:cNvPr id="101" name="Text 95"/>
           <p:cNvSpPr txBox="1"/>
           <p:nvPr/>
         </p:nvSpPr>
         <p:spPr>
           <a:xfrm>
-            <a:off x="9001125" y="5543550"/>
+            <a:off x="9001125" y="5581650"/>
             <a:ext cx="457200" cy="120015"/>
           </a:xfrm>
           <a:prstGeom prst="rect">
@@ -3570,13 +3612,13 @@
       </p:sp>
       <p:sp>
         <p:nvSpPr>
-          <p:cNvPr id="101" name="Text 95"/>
+          <p:cNvPr id="102" name="Text 96"/>
           <p:cNvSpPr txBox="1"/>
           <p:nvPr/>
         </p:nvSpPr>
         <p:spPr>
           <a:xfrm>
-            <a:off x="10439400" y="5543550"/>
+            <a:off x="10439400" y="5581650"/>
             <a:ext cx="457200" cy="120015"/>
           </a:xfrm>
           <a:prstGeom prst="rect">
@@ -3612,13 +3654,13 @@
       </p:sp>
       <p:sp>
         <p:nvSpPr>
-          <p:cNvPr id="102" name="Text 96"/>
+          <p:cNvPr id="103" name="Text 97"/>
           <p:cNvSpPr txBox="1"/>
           <p:nvPr/>
         </p:nvSpPr>
         <p:spPr>
           <a:xfrm>
-            <a:off x="10915650" y="5543550"/>
+            <a:off x="10915650" y="5581650"/>
             <a:ext cx="228600" cy="120015"/>
           </a:xfrm>
           <a:prstGeom prst="rect">
@@ -3654,13 +3696,13 @@
       </p:sp>
       <p:sp>
         <p:nvSpPr>
-          <p:cNvPr id="103" name="Shape 97"/>
-          <p:cNvSpPr/>
-          <p:nvPr/>
-        </p:nvSpPr>
-        <p:spPr>
-          <a:xfrm>
-            <a:off x="2038350" y="4724400"/>
+          <p:cNvPr id="104" name="Shape 98"/>
+          <p:cNvSpPr/>
+          <p:nvPr/>
+        </p:nvSpPr>
+        <p:spPr>
+          <a:xfrm>
+            <a:off x="2038350" y="4800600"/>
             <a:ext cx="8629650" cy="0"/>
           </a:xfrm>
           <a:prstGeom prst="line">
@@ -3677,13 +3719,13 @@
       </p:sp>
       <p:sp>
         <p:nvSpPr>
-          <p:cNvPr id="104" name="Shape 98"/>
-          <p:cNvSpPr/>
-          <p:nvPr/>
-        </p:nvSpPr>
-        <p:spPr>
-          <a:xfrm>
-            <a:off x="8443913" y="4657725"/>
+          <p:cNvPr id="105" name="Shape 99"/>
+          <p:cNvSpPr/>
+          <p:nvPr/>
+        </p:nvSpPr>
+        <p:spPr>
+          <a:xfrm>
+            <a:off x="8443913" y="4733925"/>
             <a:ext cx="133350" cy="133350"/>
           </a:xfrm>
           <a:prstGeom prst="ellipse">
@@ -3697,14 +3739,14 @@
       </p:sp>
       <p:sp>
         <p:nvSpPr>
-          <p:cNvPr id="105" name="Shape 99"/>
-          <p:cNvSpPr/>
-          <p:nvPr/>
-        </p:nvSpPr>
-        <p:spPr>
-          <a:xfrm>
-            <a:off x="8510588" y="4800600"/>
-            <a:ext cx="0" cy="514350"/>
+          <p:cNvPr id="106" name="Shape 100"/>
+          <p:cNvSpPr/>
+          <p:nvPr/>
+        </p:nvSpPr>
+        <p:spPr>
+          <a:xfrm>
+            <a:off x="8510588" y="4876800"/>
+            <a:ext cx="0" cy="476250"/>
           </a:xfrm>
           <a:prstGeom prst="line">
             <a:avLst/>
@@ -3720,13 +3762,13 @@
       </p:sp>
       <p:sp>
         <p:nvSpPr>
-          <p:cNvPr id="106" name="Text 100"/>
+          <p:cNvPr id="107" name="Text 101"/>
           <p:cNvSpPr txBox="1"/>
           <p:nvPr/>
         </p:nvSpPr>
         <p:spPr>
           <a:xfrm>
-            <a:off x="7177088" y="4438650"/>
+            <a:off x="7177088" y="4514850"/>
             <a:ext cx="2667000" cy="173355"/>
           </a:xfrm>
           <a:prstGeom prst="rect">
@@ -3754,7 +3796,7 @@
                 <a:ea typeface="Malgun Gothic" pitchFamily="34" charset="-122"/>
                 <a:cs typeface="Malgun Gothic" pitchFamily="34" charset="-120"/>
               </a:rPr>
-              <a:t>여기서 시험했습니다</a:t>
+              <a:t>시험한 온도 1곳</a:t>
             </a:r>
             <a:endParaRPr lang="en-US" sz="1050" dirty="0"/>
           </a:p>
@@ -3762,13 +3804,13 @@
       </p:sp>
       <p:sp>
         <p:nvSpPr>
-          <p:cNvPr id="107" name="Text 101"/>
+          <p:cNvPr id="108" name="Text 102"/>
           <p:cNvSpPr txBox="1"/>
           <p:nvPr/>
         </p:nvSpPr>
         <p:spPr>
           <a:xfrm>
-            <a:off x="914400" y="4400550"/>
+            <a:off x="914400" y="4495800"/>
             <a:ext cx="2286000" cy="180023"/>
           </a:xfrm>
           <a:prstGeom prst="rect">
@@ -3788,15 +3830,15 @@
               <a:buNone/>
             </a:pPr>
             <a:r>
-              <a:rPr lang="en-US" sz="1013" dirty="0">
-                <a:solidFill>
-                  <a:srgbClr val="A9A79F"/>
+              <a:rPr lang="en-US" sz="1013" b="1" dirty="0">
+                <a:solidFill>
+                  <a:srgbClr val="A8BCD1"/>
                 </a:solidFill>
                 <a:latin typeface="Malgun Gothic" pitchFamily="34" charset="0"/>
                 <a:ea typeface="Malgun Gothic" pitchFamily="34" charset="-122"/>
                 <a:cs typeface="Malgun Gothic" pitchFamily="34" charset="-120"/>
               </a:rPr>
-              <a:t>여기서 나온 차이를</a:t>
+              <a:t>신고 범위 61개 온도</a:t>
             </a:r>
             <a:endParaRPr lang="en-US" sz="1013" dirty="0"/>
           </a:p>
@@ -3804,14 +3846,14 @@
       </p:sp>
       <p:sp>
         <p:nvSpPr>
-          <p:cNvPr id="108" name="Text 102"/>
+          <p:cNvPr id="109" name="Text 103"/>
           <p:cNvSpPr txBox="1"/>
           <p:nvPr/>
         </p:nvSpPr>
         <p:spPr>
           <a:xfrm>
-            <a:off x="914400" y="4781550"/>
-            <a:ext cx="2286000" cy="360045"/>
+            <a:off x="914400" y="4838700"/>
+            <a:ext cx="2286000" cy="517922"/>
           </a:xfrm>
           <a:prstGeom prst="rect">
             <a:avLst/>
@@ -3825,64 +3867,22 @@
           <a:p>
             <a:pPr algn="l" indent="0" marL="0">
               <a:lnSpc>
-                <a:spcPts val="1418"/>
-              </a:lnSpc>
-              <a:buNone/>
-            </a:pPr>
-            <a:r>
-              <a:rPr lang="en-US" sz="1013" dirty="0">
-                <a:solidFill>
-                  <a:srgbClr val="A8BCD1"/>
+                <a:spcPts val="1359"/>
+              </a:lnSpc>
+              <a:buNone/>
+            </a:pPr>
+            <a:r>
+              <a:rPr lang="en-US" sz="938" dirty="0">
+                <a:solidFill>
+                  <a:srgbClr val="A9A79F"/>
                 </a:solidFill>
                 <a:latin typeface="Malgun Gothic" pitchFamily="34" charset="0"/>
                 <a:ea typeface="Malgun Gothic" pitchFamily="34" charset="-122"/>
                 <a:cs typeface="Malgun Gothic" pitchFamily="34" charset="-120"/>
               </a:rPr>
-              <a:t>61개 온도 전부에 똑같이 얹었습니다</a:t>
-            </a:r>
-            <a:endParaRPr lang="en-US" sz="1013" dirty="0"/>
-          </a:p>
-        </p:txBody>
-      </p:sp>
-      <p:sp>
-        <p:nvSpPr>
-          <p:cNvPr id="109" name="Text 103"/>
-          <p:cNvSpPr txBox="1"/>
-          <p:nvPr/>
-        </p:nvSpPr>
-        <p:spPr>
-          <a:xfrm>
-            <a:off x="2038350" y="5753100"/>
-            <a:ext cx="8629650" cy="160973"/>
-          </a:xfrm>
-          <a:prstGeom prst="rect">
-            <a:avLst/>
-          </a:prstGeom>
-          <a:noFill/>
-          <a:ln/>
-        </p:spPr>
-        <p:txBody>
-          <a:bodyPr wrap="square" lIns="0" tIns="0" rIns="0" bIns="0" rtlCol="0" anchor="t"/>
-          <a:lstStyle/>
-          <a:p>
-            <a:pPr algn="ctr" indent="0" marL="0">
-              <a:lnSpc>
-                <a:spcPts val="1268"/>
-              </a:lnSpc>
-              <a:buNone/>
-            </a:pPr>
-            <a:r>
-              <a:rPr lang="en-US" sz="975" dirty="0">
-                <a:solidFill>
-                  <a:srgbClr val="A9A79F"/>
-                </a:solidFill>
-                <a:latin typeface="Malgun Gothic" pitchFamily="34" charset="0"/>
-                <a:ea typeface="Malgun Gothic" pitchFamily="34" charset="-122"/>
-                <a:cs typeface="Malgun Gothic" pitchFamily="34" charset="-120"/>
-              </a:rPr>
-              <a:t>나머지 60개 온도는 시험해 보지 않았습니다</a:t>
-            </a:r>
-            <a:endParaRPr lang="en-US" sz="975" dirty="0"/>
+              <a:t>시험한 한 곳의 차이를 나머지 온도에도 똑같이 더했습니다.</a:t>
+            </a:r>
+            <a:endParaRPr lang="en-US" sz="938" dirty="0"/>
           </a:p>
         </p:txBody>
       </p:sp>
@@ -4095,7 +4095,7 @@
                 <a:ea typeface="Malgun Gothic" pitchFamily="34" charset="-122"/>
                 <a:cs typeface="Malgun Gothic" pitchFamily="34" charset="-120"/>
               </a:rPr>
-              <a:t>   ·   문제</a:t>
+              <a:t>   ·   문제점</a:t>
             </a:r>
             <a:endParaRPr lang="en-US" sz="1125" dirty="0"/>
           </a:p>
@@ -4300,7 +4300,7 @@
                 <a:ea typeface="Malgun Gothic" pitchFamily="34" charset="-122"/>
                 <a:cs typeface="Malgun Gothic" pitchFamily="34" charset="-120"/>
               </a:rPr>
-              <a:t>그런데 문제가 있었습니다</a:t>
+              <a:t>문제점</a:t>
             </a:r>
             <a:endParaRPr lang="en-US" sz="2775" dirty="0"/>
           </a:p>
@@ -4308,14 +4308,56 @@
       </p:sp>
       <p:sp>
         <p:nvSpPr>
-          <p:cNvPr id="12" name="Shape 10"/>
-          <p:cNvSpPr/>
+          <p:cNvPr id="12" name="Text 10"/>
+          <p:cNvSpPr txBox="1"/>
           <p:nvPr/>
         </p:nvSpPr>
         <p:spPr>
           <a:xfrm>
             <a:off x="685800" y="1600200"/>
-            <a:ext cx="6172200" cy="3848100"/>
+            <a:ext cx="10287000" cy="284607"/>
+          </a:xfrm>
+          <a:prstGeom prst="rect">
+            <a:avLst/>
+          </a:prstGeom>
+          <a:noFill/>
+          <a:ln/>
+        </p:spPr>
+        <p:txBody>
+          <a:bodyPr wrap="square" lIns="0" tIns="0" rIns="0" bIns="0" rtlCol="0" anchor="t"/>
+          <a:lstStyle/>
+          <a:p>
+            <a:pPr algn="l" indent="0" marL="0">
+              <a:lnSpc>
+                <a:spcPts val="2241"/>
+              </a:lnSpc>
+              <a:buNone/>
+            </a:pPr>
+            <a:r>
+              <a:rPr lang="en-US" sz="1350" dirty="0">
+                <a:solidFill>
+                  <a:srgbClr val="CFCBC2"/>
+                </a:solidFill>
+                <a:latin typeface="Malgun Gothic" pitchFamily="34" charset="0"/>
+                <a:ea typeface="Malgun Gothic" pitchFamily="34" charset="-122"/>
+                <a:cs typeface="Malgun Gothic" pitchFamily="34" charset="-120"/>
+              </a:rPr>
+              <a:t>시험 결과는 회차마다 달랐지만, 더해 주는 보정값은 거의 하나로 고정돼 있었습니다.</a:t>
+            </a:r>
+            <a:endParaRPr lang="en-US" sz="1350" dirty="0"/>
+          </a:p>
+        </p:txBody>
+      </p:sp>
+      <p:sp>
+        <p:nvSpPr>
+          <p:cNvPr id="13" name="Shape 11"/>
+          <p:cNvSpPr/>
+          <p:nvPr/>
+        </p:nvSpPr>
+        <p:spPr>
+          <a:xfrm>
+            <a:off x="685800" y="2152650"/>
+            <a:ext cx="5219700" cy="3829050"/>
           </a:xfrm>
           <a:prstGeom prst="rect">
             <a:avLst/>
@@ -4333,14 +4375,14 @@
       </p:sp>
       <p:sp>
         <p:nvSpPr>
-          <p:cNvPr id="13" name="Text 11"/>
+          <p:cNvPr id="14" name="Text 12"/>
           <p:cNvSpPr txBox="1"/>
           <p:nvPr/>
         </p:nvSpPr>
         <p:spPr>
           <a:xfrm>
-            <a:off x="876300" y="1714500"/>
-            <a:ext cx="4762500" cy="125016"/>
+            <a:off x="876300" y="2266950"/>
+            <a:ext cx="2286000" cy="125016"/>
           </a:xfrm>
           <a:prstGeom prst="rect">
             <a:avLst/>
@@ -4367,50 +4409,69 @@
                 <a:ea typeface="Consolas" pitchFamily="34" charset="-122"/>
                 <a:cs typeface="Consolas" pitchFamily="34" charset="-120"/>
               </a:rPr>
-              <a:t>기존 실적 시트에서 세 열만 오렸습니다</a:t>
+              <a:t>기존 실적 시트 기록</a:t>
             </a:r>
             <a:endParaRPr lang="en-US" sz="788" dirty="0"/>
           </a:p>
         </p:txBody>
       </p:sp>
-      <p:pic>
-        <p:nvPicPr>
-          <p:cNvPr id="14" name="Image 0" descr="/home/user/Narae-AI/docs/ppt/assets/xl1_gap.png">    </p:cNvPr>
-          <p:cNvPicPr>
-            <a:picLocks noChangeAspect="1"/>
-          </p:cNvPicPr>
-          <p:nvPr/>
-        </p:nvPicPr>
-        <p:blipFill>
-          <a:blip r:embed="rId1"/>
-          <a:stretch>
-            <a:fillRect/>
-          </a:stretch>
-        </p:blipFill>
-        <p:spPr>
-          <a:xfrm>
-            <a:off x="879231" y="1943100"/>
-            <a:ext cx="5785338" cy="3200400"/>
-          </a:xfrm>
-          <a:prstGeom prst="rect">
-            <a:avLst/>
-          </a:prstGeom>
-        </p:spPr>
-      </p:pic>
-      <p:sp>
-        <p:nvSpPr>
-          <p:cNvPr id="15" name="Shape 12"/>
-          <p:cNvSpPr/>
-          <p:nvPr/>
-        </p:nvSpPr>
-        <p:spPr>
-          <a:xfrm>
-            <a:off x="869706" y="1933575"/>
-            <a:ext cx="5804388" cy="3219450"/>
-          </a:xfrm>
-          <a:prstGeom prst="rect">
-            <a:avLst/>
-          </a:prstGeom>
+      <p:sp>
+        <p:nvSpPr>
+          <p:cNvPr id="15" name="Text 13"/>
+          <p:cNvSpPr txBox="1"/>
+          <p:nvPr/>
+        </p:nvSpPr>
+        <p:spPr>
+          <a:xfrm>
+            <a:off x="4476750" y="2257425"/>
+            <a:ext cx="1238250" cy="120015"/>
+          </a:xfrm>
+          <a:prstGeom prst="rect">
+            <a:avLst/>
+          </a:prstGeom>
+          <a:noFill/>
+          <a:ln/>
+        </p:spPr>
+        <p:txBody>
+          <a:bodyPr wrap="square" lIns="0" tIns="0" rIns="0" bIns="0" rtlCol="0" anchor="t"/>
+          <a:lstStyle/>
+          <a:p>
+            <a:pPr algn="r" indent="0" marL="0">
+              <a:lnSpc>
+                <a:spcPts val="945"/>
+              </a:lnSpc>
+              <a:buNone/>
+            </a:pPr>
+            <a:r>
+              <a:rPr lang="en-US" sz="788" dirty="0">
+                <a:solidFill>
+                  <a:srgbClr val="8A8880"/>
+                </a:solidFill>
+                <a:latin typeface="Consolas" pitchFamily="34" charset="0"/>
+                <a:ea typeface="Consolas" pitchFamily="34" charset="-122"/>
+                <a:cs typeface="Consolas" pitchFamily="34" charset="-120"/>
+              </a:rPr>
+              <a:t>MW</a:t>
+            </a:r>
+            <a:endParaRPr lang="en-US" sz="788" dirty="0"/>
+          </a:p>
+        </p:txBody>
+      </p:sp>
+      <p:sp>
+        <p:nvSpPr>
+          <p:cNvPr id="16" name="Shape 14"/>
+          <p:cNvSpPr/>
+          <p:nvPr/>
+        </p:nvSpPr>
+        <p:spPr>
+          <a:xfrm>
+            <a:off x="2209800" y="2457450"/>
+            <a:ext cx="0" cy="3143250"/>
+          </a:xfrm>
+          <a:prstGeom prst="line">
+            <a:avLst/>
+          </a:prstGeom>
+          <a:noFill/>
           <a:ln w="12700">
             <a:solidFill>
               <a:srgbClr val="22354A"/>
@@ -4421,14 +4482,14 @@
       </p:sp>
       <p:sp>
         <p:nvSpPr>
-          <p:cNvPr id="16" name="Text 13"/>
+          <p:cNvPr id="17" name="Text 15"/>
           <p:cNvSpPr txBox="1"/>
           <p:nvPr/>
         </p:nvSpPr>
         <p:spPr>
           <a:xfrm>
-            <a:off x="876300" y="5238750"/>
-            <a:ext cx="5791200" cy="131445"/>
+            <a:off x="876300" y="2552700"/>
+            <a:ext cx="552450" cy="137160"/>
           </a:xfrm>
           <a:prstGeom prst="rect">
             <a:avLst/>
@@ -4440,6 +4501,2184 @@
           <a:bodyPr wrap="square" lIns="0" tIns="0" rIns="0" bIns="0" rtlCol="0" anchor="t"/>
           <a:lstStyle/>
           <a:p>
+            <a:pPr algn="r" indent="0" marL="0">
+              <a:lnSpc>
+                <a:spcPts val="1080"/>
+              </a:lnSpc>
+              <a:buNone/>
+            </a:pPr>
+            <a:r>
+              <a:rPr lang="en-US" sz="900" dirty="0">
+                <a:solidFill>
+                  <a:srgbClr val="A9A79F"/>
+                </a:solidFill>
+                <a:latin typeface="Consolas" pitchFamily="34" charset="0"/>
+                <a:ea typeface="Consolas" pitchFamily="34" charset="-122"/>
+                <a:cs typeface="Consolas" pitchFamily="34" charset="-120"/>
+              </a:rPr>
+              <a:t>2/24</a:t>
+            </a:r>
+            <a:endParaRPr lang="en-US" sz="900" dirty="0"/>
+          </a:p>
+        </p:txBody>
+      </p:sp>
+      <p:sp>
+        <p:nvSpPr>
+          <p:cNvPr id="18" name="Shape 16"/>
+          <p:cNvSpPr/>
+          <p:nvPr/>
+        </p:nvSpPr>
+        <p:spPr>
+          <a:xfrm>
+            <a:off x="2209800" y="2533650"/>
+            <a:ext cx="2001965" cy="85725"/>
+          </a:xfrm>
+          <a:prstGeom prst="rect">
+            <a:avLst/>
+          </a:prstGeom>
+          <a:solidFill>
+            <a:srgbClr val="EFB13C"/>
+          </a:solidFill>
+          <a:ln/>
+        </p:spPr>
+      </p:sp>
+      <p:sp>
+        <p:nvSpPr>
+          <p:cNvPr id="19" name="Shape 17"/>
+          <p:cNvSpPr/>
+          <p:nvPr/>
+        </p:nvSpPr>
+        <p:spPr>
+          <a:xfrm>
+            <a:off x="2209800" y="2638425"/>
+            <a:ext cx="708660" cy="47625"/>
+          </a:xfrm>
+          <a:prstGeom prst="rect">
+            <a:avLst/>
+          </a:prstGeom>
+          <a:solidFill>
+            <a:srgbClr val="718BA6"/>
+          </a:solidFill>
+          <a:ln/>
+        </p:spPr>
+      </p:sp>
+      <p:sp>
+        <p:nvSpPr>
+          <p:cNvPr id="20" name="Text 18"/>
+          <p:cNvSpPr txBox="1"/>
+          <p:nvPr/>
+        </p:nvSpPr>
+        <p:spPr>
+          <a:xfrm>
+            <a:off x="4305300" y="2543175"/>
+            <a:ext cx="457200" cy="137160"/>
+          </a:xfrm>
+          <a:prstGeom prst="rect">
+            <a:avLst/>
+          </a:prstGeom>
+          <a:noFill/>
+          <a:ln/>
+        </p:spPr>
+        <p:txBody>
+          <a:bodyPr wrap="square" lIns="0" tIns="0" rIns="0" bIns="0" rtlCol="0" anchor="t"/>
+          <a:lstStyle/>
+          <a:p>
+            <a:pPr algn="r" indent="0" marL="0">
+              <a:lnSpc>
+                <a:spcPts val="1080"/>
+              </a:lnSpc>
+              <a:buNone/>
+            </a:pPr>
+            <a:r>
+              <a:rPr lang="en-US" sz="900" b="1" dirty="0">
+                <a:solidFill>
+                  <a:srgbClr val="EFB13C"/>
+                </a:solidFill>
+                <a:latin typeface="Consolas" pitchFamily="34" charset="0"/>
+                <a:ea typeface="Consolas" pitchFamily="34" charset="-122"/>
+                <a:cs typeface="Consolas" pitchFamily="34" charset="-120"/>
+              </a:rPr>
+              <a:t>11.3</a:t>
+            </a:r>
+            <a:endParaRPr lang="en-US" sz="900" dirty="0"/>
+          </a:p>
+        </p:txBody>
+      </p:sp>
+      <p:sp>
+        <p:nvSpPr>
+          <p:cNvPr id="21" name="Text 19"/>
+          <p:cNvSpPr txBox="1"/>
+          <p:nvPr/>
+        </p:nvSpPr>
+        <p:spPr>
+          <a:xfrm>
+            <a:off x="4876800" y="2543175"/>
+            <a:ext cx="457200" cy="137160"/>
+          </a:xfrm>
+          <a:prstGeom prst="rect">
+            <a:avLst/>
+          </a:prstGeom>
+          <a:noFill/>
+          <a:ln/>
+        </p:spPr>
+        <p:txBody>
+          <a:bodyPr wrap="square" lIns="0" tIns="0" rIns="0" bIns="0" rtlCol="0" anchor="t"/>
+          <a:lstStyle/>
+          <a:p>
+            <a:pPr algn="r" indent="0" marL="0">
+              <a:lnSpc>
+                <a:spcPts val="1080"/>
+              </a:lnSpc>
+              <a:buNone/>
+            </a:pPr>
+            <a:r>
+              <a:rPr lang="en-US" sz="900" dirty="0">
+                <a:solidFill>
+                  <a:srgbClr val="A8BCD1"/>
+                </a:solidFill>
+                <a:latin typeface="Consolas" pitchFamily="34" charset="0"/>
+                <a:ea typeface="Consolas" pitchFamily="34" charset="-122"/>
+                <a:cs typeface="Consolas" pitchFamily="34" charset="-120"/>
+              </a:rPr>
+              <a:t>4</a:t>
+            </a:r>
+            <a:endParaRPr lang="en-US" sz="900" dirty="0"/>
+          </a:p>
+        </p:txBody>
+      </p:sp>
+      <p:sp>
+        <p:nvSpPr>
+          <p:cNvPr id="22" name="Text 20"/>
+          <p:cNvSpPr txBox="1"/>
+          <p:nvPr/>
+        </p:nvSpPr>
+        <p:spPr>
+          <a:xfrm>
+            <a:off x="876300" y="2790825"/>
+            <a:ext cx="552450" cy="137160"/>
+          </a:xfrm>
+          <a:prstGeom prst="rect">
+            <a:avLst/>
+          </a:prstGeom>
+          <a:noFill/>
+          <a:ln/>
+        </p:spPr>
+        <p:txBody>
+          <a:bodyPr wrap="square" lIns="0" tIns="0" rIns="0" bIns="0" rtlCol="0" anchor="t"/>
+          <a:lstStyle/>
+          <a:p>
+            <a:pPr algn="r" indent="0" marL="0">
+              <a:lnSpc>
+                <a:spcPts val="1080"/>
+              </a:lnSpc>
+              <a:buNone/>
+            </a:pPr>
+            <a:r>
+              <a:rPr lang="en-US" sz="900" dirty="0">
+                <a:solidFill>
+                  <a:srgbClr val="A9A79F"/>
+                </a:solidFill>
+                <a:latin typeface="Consolas" pitchFamily="34" charset="0"/>
+                <a:ea typeface="Consolas" pitchFamily="34" charset="-122"/>
+                <a:cs typeface="Consolas" pitchFamily="34" charset="-120"/>
+              </a:rPr>
+              <a:t>2/25</a:t>
+            </a:r>
+            <a:endParaRPr lang="en-US" sz="900" dirty="0"/>
+          </a:p>
+        </p:txBody>
+      </p:sp>
+      <p:sp>
+        <p:nvSpPr>
+          <p:cNvPr id="23" name="Shape 21"/>
+          <p:cNvSpPr/>
+          <p:nvPr/>
+        </p:nvSpPr>
+        <p:spPr>
+          <a:xfrm>
+            <a:off x="2209800" y="2771775"/>
+            <a:ext cx="1062990" cy="85725"/>
+          </a:xfrm>
+          <a:prstGeom prst="rect">
+            <a:avLst/>
+          </a:prstGeom>
+          <a:solidFill>
+            <a:srgbClr val="EFB13C"/>
+          </a:solidFill>
+          <a:ln/>
+        </p:spPr>
+      </p:sp>
+      <p:sp>
+        <p:nvSpPr>
+          <p:cNvPr id="24" name="Shape 22"/>
+          <p:cNvSpPr/>
+          <p:nvPr/>
+        </p:nvSpPr>
+        <p:spPr>
+          <a:xfrm>
+            <a:off x="2209800" y="2876550"/>
+            <a:ext cx="708660" cy="47625"/>
+          </a:xfrm>
+          <a:prstGeom prst="rect">
+            <a:avLst/>
+          </a:prstGeom>
+          <a:solidFill>
+            <a:srgbClr val="718BA6"/>
+          </a:solidFill>
+          <a:ln/>
+        </p:spPr>
+      </p:sp>
+      <p:sp>
+        <p:nvSpPr>
+          <p:cNvPr id="25" name="Text 23"/>
+          <p:cNvSpPr txBox="1"/>
+          <p:nvPr/>
+        </p:nvSpPr>
+        <p:spPr>
+          <a:xfrm>
+            <a:off x="4305300" y="2781300"/>
+            <a:ext cx="457200" cy="137160"/>
+          </a:xfrm>
+          <a:prstGeom prst="rect">
+            <a:avLst/>
+          </a:prstGeom>
+          <a:noFill/>
+          <a:ln/>
+        </p:spPr>
+        <p:txBody>
+          <a:bodyPr wrap="square" lIns="0" tIns="0" rIns="0" bIns="0" rtlCol="0" anchor="t"/>
+          <a:lstStyle/>
+          <a:p>
+            <a:pPr algn="r" indent="0" marL="0">
+              <a:lnSpc>
+                <a:spcPts val="1080"/>
+              </a:lnSpc>
+              <a:buNone/>
+            </a:pPr>
+            <a:r>
+              <a:rPr lang="en-US" sz="900" b="1" dirty="0">
+                <a:solidFill>
+                  <a:srgbClr val="EFB13C"/>
+                </a:solidFill>
+                <a:latin typeface="Consolas" pitchFamily="34" charset="0"/>
+                <a:ea typeface="Consolas" pitchFamily="34" charset="-122"/>
+                <a:cs typeface="Consolas" pitchFamily="34" charset="-120"/>
+              </a:rPr>
+              <a:t>6.0</a:t>
+            </a:r>
+            <a:endParaRPr lang="en-US" sz="900" dirty="0"/>
+          </a:p>
+        </p:txBody>
+      </p:sp>
+      <p:sp>
+        <p:nvSpPr>
+          <p:cNvPr id="26" name="Text 24"/>
+          <p:cNvSpPr txBox="1"/>
+          <p:nvPr/>
+        </p:nvSpPr>
+        <p:spPr>
+          <a:xfrm>
+            <a:off x="4876800" y="2781300"/>
+            <a:ext cx="457200" cy="137160"/>
+          </a:xfrm>
+          <a:prstGeom prst="rect">
+            <a:avLst/>
+          </a:prstGeom>
+          <a:noFill/>
+          <a:ln/>
+        </p:spPr>
+        <p:txBody>
+          <a:bodyPr wrap="square" lIns="0" tIns="0" rIns="0" bIns="0" rtlCol="0" anchor="t"/>
+          <a:lstStyle/>
+          <a:p>
+            <a:pPr algn="r" indent="0" marL="0">
+              <a:lnSpc>
+                <a:spcPts val="1080"/>
+              </a:lnSpc>
+              <a:buNone/>
+            </a:pPr>
+            <a:r>
+              <a:rPr lang="en-US" sz="900" dirty="0">
+                <a:solidFill>
+                  <a:srgbClr val="A8BCD1"/>
+                </a:solidFill>
+                <a:latin typeface="Consolas" pitchFamily="34" charset="0"/>
+                <a:ea typeface="Consolas" pitchFamily="34" charset="-122"/>
+                <a:cs typeface="Consolas" pitchFamily="34" charset="-120"/>
+              </a:rPr>
+              <a:t>4</a:t>
+            </a:r>
+            <a:endParaRPr lang="en-US" sz="900" dirty="0"/>
+          </a:p>
+        </p:txBody>
+      </p:sp>
+      <p:sp>
+        <p:nvSpPr>
+          <p:cNvPr id="27" name="Text 25"/>
+          <p:cNvSpPr txBox="1"/>
+          <p:nvPr/>
+        </p:nvSpPr>
+        <p:spPr>
+          <a:xfrm>
+            <a:off x="876300" y="3028950"/>
+            <a:ext cx="552450" cy="137160"/>
+          </a:xfrm>
+          <a:prstGeom prst="rect">
+            <a:avLst/>
+          </a:prstGeom>
+          <a:noFill/>
+          <a:ln/>
+        </p:spPr>
+        <p:txBody>
+          <a:bodyPr wrap="square" lIns="0" tIns="0" rIns="0" bIns="0" rtlCol="0" anchor="t"/>
+          <a:lstStyle/>
+          <a:p>
+            <a:pPr algn="r" indent="0" marL="0">
+              <a:lnSpc>
+                <a:spcPts val="1080"/>
+              </a:lnSpc>
+              <a:buNone/>
+            </a:pPr>
+            <a:r>
+              <a:rPr lang="en-US" sz="900" dirty="0">
+                <a:solidFill>
+                  <a:srgbClr val="A9A79F"/>
+                </a:solidFill>
+                <a:latin typeface="Consolas" pitchFamily="34" charset="0"/>
+                <a:ea typeface="Consolas" pitchFamily="34" charset="-122"/>
+                <a:cs typeface="Consolas" pitchFamily="34" charset="-120"/>
+              </a:rPr>
+              <a:t>2/25</a:t>
+            </a:r>
+            <a:endParaRPr lang="en-US" sz="900" dirty="0"/>
+          </a:p>
+        </p:txBody>
+      </p:sp>
+      <p:sp>
+        <p:nvSpPr>
+          <p:cNvPr id="28" name="Shape 26"/>
+          <p:cNvSpPr/>
+          <p:nvPr/>
+        </p:nvSpPr>
+        <p:spPr>
+          <a:xfrm>
+            <a:off x="2209800" y="3009900"/>
+            <a:ext cx="1948815" cy="85725"/>
+          </a:xfrm>
+          <a:prstGeom prst="rect">
+            <a:avLst/>
+          </a:prstGeom>
+          <a:solidFill>
+            <a:srgbClr val="EFB13C"/>
+          </a:solidFill>
+          <a:ln/>
+        </p:spPr>
+      </p:sp>
+      <p:sp>
+        <p:nvSpPr>
+          <p:cNvPr id="29" name="Shape 27"/>
+          <p:cNvSpPr/>
+          <p:nvPr/>
+        </p:nvSpPr>
+        <p:spPr>
+          <a:xfrm>
+            <a:off x="2209800" y="3114675"/>
+            <a:ext cx="708660" cy="47625"/>
+          </a:xfrm>
+          <a:prstGeom prst="rect">
+            <a:avLst/>
+          </a:prstGeom>
+          <a:solidFill>
+            <a:srgbClr val="718BA6"/>
+          </a:solidFill>
+          <a:ln/>
+        </p:spPr>
+      </p:sp>
+      <p:sp>
+        <p:nvSpPr>
+          <p:cNvPr id="30" name="Text 28"/>
+          <p:cNvSpPr txBox="1"/>
+          <p:nvPr/>
+        </p:nvSpPr>
+        <p:spPr>
+          <a:xfrm>
+            <a:off x="4305300" y="3019425"/>
+            <a:ext cx="457200" cy="137160"/>
+          </a:xfrm>
+          <a:prstGeom prst="rect">
+            <a:avLst/>
+          </a:prstGeom>
+          <a:noFill/>
+          <a:ln/>
+        </p:spPr>
+        <p:txBody>
+          <a:bodyPr wrap="square" lIns="0" tIns="0" rIns="0" bIns="0" rtlCol="0" anchor="t"/>
+          <a:lstStyle/>
+          <a:p>
+            <a:pPr algn="r" indent="0" marL="0">
+              <a:lnSpc>
+                <a:spcPts val="1080"/>
+              </a:lnSpc>
+              <a:buNone/>
+            </a:pPr>
+            <a:r>
+              <a:rPr lang="en-US" sz="900" b="1" dirty="0">
+                <a:solidFill>
+                  <a:srgbClr val="EFB13C"/>
+                </a:solidFill>
+                <a:latin typeface="Consolas" pitchFamily="34" charset="0"/>
+                <a:ea typeface="Consolas" pitchFamily="34" charset="-122"/>
+                <a:cs typeface="Consolas" pitchFamily="34" charset="-120"/>
+              </a:rPr>
+              <a:t>11.0</a:t>
+            </a:r>
+            <a:endParaRPr lang="en-US" sz="900" dirty="0"/>
+          </a:p>
+        </p:txBody>
+      </p:sp>
+      <p:sp>
+        <p:nvSpPr>
+          <p:cNvPr id="31" name="Text 29"/>
+          <p:cNvSpPr txBox="1"/>
+          <p:nvPr/>
+        </p:nvSpPr>
+        <p:spPr>
+          <a:xfrm>
+            <a:off x="4876800" y="3019425"/>
+            <a:ext cx="457200" cy="137160"/>
+          </a:xfrm>
+          <a:prstGeom prst="rect">
+            <a:avLst/>
+          </a:prstGeom>
+          <a:noFill/>
+          <a:ln/>
+        </p:spPr>
+        <p:txBody>
+          <a:bodyPr wrap="square" lIns="0" tIns="0" rIns="0" bIns="0" rtlCol="0" anchor="t"/>
+          <a:lstStyle/>
+          <a:p>
+            <a:pPr algn="r" indent="0" marL="0">
+              <a:lnSpc>
+                <a:spcPts val="1080"/>
+              </a:lnSpc>
+              <a:buNone/>
+            </a:pPr>
+            <a:r>
+              <a:rPr lang="en-US" sz="900" dirty="0">
+                <a:solidFill>
+                  <a:srgbClr val="A8BCD1"/>
+                </a:solidFill>
+                <a:latin typeface="Consolas" pitchFamily="34" charset="0"/>
+                <a:ea typeface="Consolas" pitchFamily="34" charset="-122"/>
+                <a:cs typeface="Consolas" pitchFamily="34" charset="-120"/>
+              </a:rPr>
+              <a:t>4</a:t>
+            </a:r>
+            <a:endParaRPr lang="en-US" sz="900" dirty="0"/>
+          </a:p>
+        </p:txBody>
+      </p:sp>
+      <p:sp>
+        <p:nvSpPr>
+          <p:cNvPr id="32" name="Text 30"/>
+          <p:cNvSpPr txBox="1"/>
+          <p:nvPr/>
+        </p:nvSpPr>
+        <p:spPr>
+          <a:xfrm>
+            <a:off x="876300" y="3267075"/>
+            <a:ext cx="552450" cy="137160"/>
+          </a:xfrm>
+          <a:prstGeom prst="rect">
+            <a:avLst/>
+          </a:prstGeom>
+          <a:noFill/>
+          <a:ln/>
+        </p:spPr>
+        <p:txBody>
+          <a:bodyPr wrap="square" lIns="0" tIns="0" rIns="0" bIns="0" rtlCol="0" anchor="t"/>
+          <a:lstStyle/>
+          <a:p>
+            <a:pPr algn="r" indent="0" marL="0">
+              <a:lnSpc>
+                <a:spcPts val="1080"/>
+              </a:lnSpc>
+              <a:buNone/>
+            </a:pPr>
+            <a:r>
+              <a:rPr lang="en-US" sz="900" dirty="0">
+                <a:solidFill>
+                  <a:srgbClr val="A9A79F"/>
+                </a:solidFill>
+                <a:latin typeface="Consolas" pitchFamily="34" charset="0"/>
+                <a:ea typeface="Consolas" pitchFamily="34" charset="-122"/>
+                <a:cs typeface="Consolas" pitchFamily="34" charset="-120"/>
+              </a:rPr>
+              <a:t>3/4</a:t>
+            </a:r>
+            <a:endParaRPr lang="en-US" sz="900" dirty="0"/>
+          </a:p>
+        </p:txBody>
+      </p:sp>
+      <p:sp>
+        <p:nvSpPr>
+          <p:cNvPr id="33" name="Shape 31"/>
+          <p:cNvSpPr/>
+          <p:nvPr/>
+        </p:nvSpPr>
+        <p:spPr>
+          <a:xfrm>
+            <a:off x="2209800" y="3248025"/>
+            <a:ext cx="1417320" cy="85725"/>
+          </a:xfrm>
+          <a:prstGeom prst="rect">
+            <a:avLst/>
+          </a:prstGeom>
+          <a:solidFill>
+            <a:srgbClr val="EFB13C"/>
+          </a:solidFill>
+          <a:ln/>
+        </p:spPr>
+      </p:sp>
+      <p:sp>
+        <p:nvSpPr>
+          <p:cNvPr id="34" name="Shape 32"/>
+          <p:cNvSpPr/>
+          <p:nvPr/>
+        </p:nvSpPr>
+        <p:spPr>
+          <a:xfrm>
+            <a:off x="2209800" y="3352800"/>
+            <a:ext cx="708660" cy="47625"/>
+          </a:xfrm>
+          <a:prstGeom prst="rect">
+            <a:avLst/>
+          </a:prstGeom>
+          <a:solidFill>
+            <a:srgbClr val="718BA6"/>
+          </a:solidFill>
+          <a:ln/>
+        </p:spPr>
+      </p:sp>
+      <p:sp>
+        <p:nvSpPr>
+          <p:cNvPr id="35" name="Text 33"/>
+          <p:cNvSpPr txBox="1"/>
+          <p:nvPr/>
+        </p:nvSpPr>
+        <p:spPr>
+          <a:xfrm>
+            <a:off x="4305300" y="3257550"/>
+            <a:ext cx="457200" cy="137160"/>
+          </a:xfrm>
+          <a:prstGeom prst="rect">
+            <a:avLst/>
+          </a:prstGeom>
+          <a:noFill/>
+          <a:ln/>
+        </p:spPr>
+        <p:txBody>
+          <a:bodyPr wrap="square" lIns="0" tIns="0" rIns="0" bIns="0" rtlCol="0" anchor="t"/>
+          <a:lstStyle/>
+          <a:p>
+            <a:pPr algn="r" indent="0" marL="0">
+              <a:lnSpc>
+                <a:spcPts val="1080"/>
+              </a:lnSpc>
+              <a:buNone/>
+            </a:pPr>
+            <a:r>
+              <a:rPr lang="en-US" sz="900" b="1" dirty="0">
+                <a:solidFill>
+                  <a:srgbClr val="EFB13C"/>
+                </a:solidFill>
+                <a:latin typeface="Consolas" pitchFamily="34" charset="0"/>
+                <a:ea typeface="Consolas" pitchFamily="34" charset="-122"/>
+                <a:cs typeface="Consolas" pitchFamily="34" charset="-120"/>
+              </a:rPr>
+              <a:t>8.0</a:t>
+            </a:r>
+            <a:endParaRPr lang="en-US" sz="900" dirty="0"/>
+          </a:p>
+        </p:txBody>
+      </p:sp>
+      <p:sp>
+        <p:nvSpPr>
+          <p:cNvPr id="36" name="Text 34"/>
+          <p:cNvSpPr txBox="1"/>
+          <p:nvPr/>
+        </p:nvSpPr>
+        <p:spPr>
+          <a:xfrm>
+            <a:off x="4876800" y="3257550"/>
+            <a:ext cx="457200" cy="137160"/>
+          </a:xfrm>
+          <a:prstGeom prst="rect">
+            <a:avLst/>
+          </a:prstGeom>
+          <a:noFill/>
+          <a:ln/>
+        </p:spPr>
+        <p:txBody>
+          <a:bodyPr wrap="square" lIns="0" tIns="0" rIns="0" bIns="0" rtlCol="0" anchor="t"/>
+          <a:lstStyle/>
+          <a:p>
+            <a:pPr algn="r" indent="0" marL="0">
+              <a:lnSpc>
+                <a:spcPts val="1080"/>
+              </a:lnSpc>
+              <a:buNone/>
+            </a:pPr>
+            <a:r>
+              <a:rPr lang="en-US" sz="900" dirty="0">
+                <a:solidFill>
+                  <a:srgbClr val="A8BCD1"/>
+                </a:solidFill>
+                <a:latin typeface="Consolas" pitchFamily="34" charset="0"/>
+                <a:ea typeface="Consolas" pitchFamily="34" charset="-122"/>
+                <a:cs typeface="Consolas" pitchFamily="34" charset="-120"/>
+              </a:rPr>
+              <a:t>4</a:t>
+            </a:r>
+            <a:endParaRPr lang="en-US" sz="900" dirty="0"/>
+          </a:p>
+        </p:txBody>
+      </p:sp>
+      <p:sp>
+        <p:nvSpPr>
+          <p:cNvPr id="37" name="Text 35"/>
+          <p:cNvSpPr txBox="1"/>
+          <p:nvPr/>
+        </p:nvSpPr>
+        <p:spPr>
+          <a:xfrm>
+            <a:off x="876300" y="3505200"/>
+            <a:ext cx="552450" cy="137160"/>
+          </a:xfrm>
+          <a:prstGeom prst="rect">
+            <a:avLst/>
+          </a:prstGeom>
+          <a:noFill/>
+          <a:ln/>
+        </p:spPr>
+        <p:txBody>
+          <a:bodyPr wrap="square" lIns="0" tIns="0" rIns="0" bIns="0" rtlCol="0" anchor="t"/>
+          <a:lstStyle/>
+          <a:p>
+            <a:pPr algn="r" indent="0" marL="0">
+              <a:lnSpc>
+                <a:spcPts val="1080"/>
+              </a:lnSpc>
+              <a:buNone/>
+            </a:pPr>
+            <a:r>
+              <a:rPr lang="en-US" sz="900" dirty="0">
+                <a:solidFill>
+                  <a:srgbClr val="A9A79F"/>
+                </a:solidFill>
+                <a:latin typeface="Consolas" pitchFamily="34" charset="0"/>
+                <a:ea typeface="Consolas" pitchFamily="34" charset="-122"/>
+                <a:cs typeface="Consolas" pitchFamily="34" charset="-120"/>
+              </a:rPr>
+              <a:t>3/4</a:t>
+            </a:r>
+            <a:endParaRPr lang="en-US" sz="900" dirty="0"/>
+          </a:p>
+        </p:txBody>
+      </p:sp>
+      <p:sp>
+        <p:nvSpPr>
+          <p:cNvPr id="38" name="Shape 36"/>
+          <p:cNvSpPr/>
+          <p:nvPr/>
+        </p:nvSpPr>
+        <p:spPr>
+          <a:xfrm>
+            <a:off x="2209800" y="3486150"/>
+            <a:ext cx="2037398" cy="85725"/>
+          </a:xfrm>
+          <a:prstGeom prst="rect">
+            <a:avLst/>
+          </a:prstGeom>
+          <a:solidFill>
+            <a:srgbClr val="EFB13C"/>
+          </a:solidFill>
+          <a:ln/>
+        </p:spPr>
+      </p:sp>
+      <p:sp>
+        <p:nvSpPr>
+          <p:cNvPr id="39" name="Shape 37"/>
+          <p:cNvSpPr/>
+          <p:nvPr/>
+        </p:nvSpPr>
+        <p:spPr>
+          <a:xfrm>
+            <a:off x="2209800" y="3590925"/>
+            <a:ext cx="708660" cy="47625"/>
+          </a:xfrm>
+          <a:prstGeom prst="rect">
+            <a:avLst/>
+          </a:prstGeom>
+          <a:solidFill>
+            <a:srgbClr val="718BA6"/>
+          </a:solidFill>
+          <a:ln/>
+        </p:spPr>
+      </p:sp>
+      <p:sp>
+        <p:nvSpPr>
+          <p:cNvPr id="40" name="Text 38"/>
+          <p:cNvSpPr txBox="1"/>
+          <p:nvPr/>
+        </p:nvSpPr>
+        <p:spPr>
+          <a:xfrm>
+            <a:off x="4305300" y="3495675"/>
+            <a:ext cx="457200" cy="137160"/>
+          </a:xfrm>
+          <a:prstGeom prst="rect">
+            <a:avLst/>
+          </a:prstGeom>
+          <a:noFill/>
+          <a:ln/>
+        </p:spPr>
+        <p:txBody>
+          <a:bodyPr wrap="square" lIns="0" tIns="0" rIns="0" bIns="0" rtlCol="0" anchor="t"/>
+          <a:lstStyle/>
+          <a:p>
+            <a:pPr algn="r" indent="0" marL="0">
+              <a:lnSpc>
+                <a:spcPts val="1080"/>
+              </a:lnSpc>
+              <a:buNone/>
+            </a:pPr>
+            <a:r>
+              <a:rPr lang="en-US" sz="900" b="1" dirty="0">
+                <a:solidFill>
+                  <a:srgbClr val="EFB13C"/>
+                </a:solidFill>
+                <a:latin typeface="Consolas" pitchFamily="34" charset="0"/>
+                <a:ea typeface="Consolas" pitchFamily="34" charset="-122"/>
+                <a:cs typeface="Consolas" pitchFamily="34" charset="-120"/>
+              </a:rPr>
+              <a:t>11.5</a:t>
+            </a:r>
+            <a:endParaRPr lang="en-US" sz="900" dirty="0"/>
+          </a:p>
+        </p:txBody>
+      </p:sp>
+      <p:sp>
+        <p:nvSpPr>
+          <p:cNvPr id="41" name="Text 39"/>
+          <p:cNvSpPr txBox="1"/>
+          <p:nvPr/>
+        </p:nvSpPr>
+        <p:spPr>
+          <a:xfrm>
+            <a:off x="4876800" y="3495675"/>
+            <a:ext cx="457200" cy="137160"/>
+          </a:xfrm>
+          <a:prstGeom prst="rect">
+            <a:avLst/>
+          </a:prstGeom>
+          <a:noFill/>
+          <a:ln/>
+        </p:spPr>
+        <p:txBody>
+          <a:bodyPr wrap="square" lIns="0" tIns="0" rIns="0" bIns="0" rtlCol="0" anchor="t"/>
+          <a:lstStyle/>
+          <a:p>
+            <a:pPr algn="r" indent="0" marL="0">
+              <a:lnSpc>
+                <a:spcPts val="1080"/>
+              </a:lnSpc>
+              <a:buNone/>
+            </a:pPr>
+            <a:r>
+              <a:rPr lang="en-US" sz="900" dirty="0">
+                <a:solidFill>
+                  <a:srgbClr val="A8BCD1"/>
+                </a:solidFill>
+                <a:latin typeface="Consolas" pitchFamily="34" charset="0"/>
+                <a:ea typeface="Consolas" pitchFamily="34" charset="-122"/>
+                <a:cs typeface="Consolas" pitchFamily="34" charset="-120"/>
+              </a:rPr>
+              <a:t>4</a:t>
+            </a:r>
+            <a:endParaRPr lang="en-US" sz="900" dirty="0"/>
+          </a:p>
+        </p:txBody>
+      </p:sp>
+      <p:sp>
+        <p:nvSpPr>
+          <p:cNvPr id="42" name="Text 40"/>
+          <p:cNvSpPr txBox="1"/>
+          <p:nvPr/>
+        </p:nvSpPr>
+        <p:spPr>
+          <a:xfrm>
+            <a:off x="876300" y="3743325"/>
+            <a:ext cx="552450" cy="137160"/>
+          </a:xfrm>
+          <a:prstGeom prst="rect">
+            <a:avLst/>
+          </a:prstGeom>
+          <a:noFill/>
+          <a:ln/>
+        </p:spPr>
+        <p:txBody>
+          <a:bodyPr wrap="square" lIns="0" tIns="0" rIns="0" bIns="0" rtlCol="0" anchor="t"/>
+          <a:lstStyle/>
+          <a:p>
+            <a:pPr algn="r" indent="0" marL="0">
+              <a:lnSpc>
+                <a:spcPts val="1080"/>
+              </a:lnSpc>
+              <a:buNone/>
+            </a:pPr>
+            <a:r>
+              <a:rPr lang="en-US" sz="900" dirty="0">
+                <a:solidFill>
+                  <a:srgbClr val="A9A79F"/>
+                </a:solidFill>
+                <a:latin typeface="Consolas" pitchFamily="34" charset="0"/>
+                <a:ea typeface="Consolas" pitchFamily="34" charset="-122"/>
+                <a:cs typeface="Consolas" pitchFamily="34" charset="-120"/>
+              </a:rPr>
+              <a:t>3/18</a:t>
+            </a:r>
+            <a:endParaRPr lang="en-US" sz="900" dirty="0"/>
+          </a:p>
+        </p:txBody>
+      </p:sp>
+      <p:sp>
+        <p:nvSpPr>
+          <p:cNvPr id="43" name="Shape 41"/>
+          <p:cNvSpPr/>
+          <p:nvPr/>
+        </p:nvSpPr>
+        <p:spPr>
+          <a:xfrm>
+            <a:off x="2209800" y="3724275"/>
+            <a:ext cx="1222439" cy="85725"/>
+          </a:xfrm>
+          <a:prstGeom prst="rect">
+            <a:avLst/>
+          </a:prstGeom>
+          <a:solidFill>
+            <a:srgbClr val="EFB13C"/>
+          </a:solidFill>
+          <a:ln/>
+        </p:spPr>
+      </p:sp>
+      <p:sp>
+        <p:nvSpPr>
+          <p:cNvPr id="44" name="Shape 42"/>
+          <p:cNvSpPr/>
+          <p:nvPr/>
+        </p:nvSpPr>
+        <p:spPr>
+          <a:xfrm>
+            <a:off x="2209800" y="3829050"/>
+            <a:ext cx="708660" cy="47625"/>
+          </a:xfrm>
+          <a:prstGeom prst="rect">
+            <a:avLst/>
+          </a:prstGeom>
+          <a:solidFill>
+            <a:srgbClr val="718BA6"/>
+          </a:solidFill>
+          <a:ln/>
+        </p:spPr>
+      </p:sp>
+      <p:sp>
+        <p:nvSpPr>
+          <p:cNvPr id="45" name="Text 43"/>
+          <p:cNvSpPr txBox="1"/>
+          <p:nvPr/>
+        </p:nvSpPr>
+        <p:spPr>
+          <a:xfrm>
+            <a:off x="4305300" y="3733800"/>
+            <a:ext cx="457200" cy="137160"/>
+          </a:xfrm>
+          <a:prstGeom prst="rect">
+            <a:avLst/>
+          </a:prstGeom>
+          <a:noFill/>
+          <a:ln/>
+        </p:spPr>
+        <p:txBody>
+          <a:bodyPr wrap="square" lIns="0" tIns="0" rIns="0" bIns="0" rtlCol="0" anchor="t"/>
+          <a:lstStyle/>
+          <a:p>
+            <a:pPr algn="r" indent="0" marL="0">
+              <a:lnSpc>
+                <a:spcPts val="1080"/>
+              </a:lnSpc>
+              <a:buNone/>
+            </a:pPr>
+            <a:r>
+              <a:rPr lang="en-US" sz="900" b="1" dirty="0">
+                <a:solidFill>
+                  <a:srgbClr val="EFB13C"/>
+                </a:solidFill>
+                <a:latin typeface="Consolas" pitchFamily="34" charset="0"/>
+                <a:ea typeface="Consolas" pitchFamily="34" charset="-122"/>
+                <a:cs typeface="Consolas" pitchFamily="34" charset="-120"/>
+              </a:rPr>
+              <a:t>6.9</a:t>
+            </a:r>
+            <a:endParaRPr lang="en-US" sz="900" dirty="0"/>
+          </a:p>
+        </p:txBody>
+      </p:sp>
+      <p:sp>
+        <p:nvSpPr>
+          <p:cNvPr id="46" name="Text 44"/>
+          <p:cNvSpPr txBox="1"/>
+          <p:nvPr/>
+        </p:nvSpPr>
+        <p:spPr>
+          <a:xfrm>
+            <a:off x="4876800" y="3733800"/>
+            <a:ext cx="457200" cy="137160"/>
+          </a:xfrm>
+          <a:prstGeom prst="rect">
+            <a:avLst/>
+          </a:prstGeom>
+          <a:noFill/>
+          <a:ln/>
+        </p:spPr>
+        <p:txBody>
+          <a:bodyPr wrap="square" lIns="0" tIns="0" rIns="0" bIns="0" rtlCol="0" anchor="t"/>
+          <a:lstStyle/>
+          <a:p>
+            <a:pPr algn="r" indent="0" marL="0">
+              <a:lnSpc>
+                <a:spcPts val="1080"/>
+              </a:lnSpc>
+              <a:buNone/>
+            </a:pPr>
+            <a:r>
+              <a:rPr lang="en-US" sz="900" dirty="0">
+                <a:solidFill>
+                  <a:srgbClr val="A8BCD1"/>
+                </a:solidFill>
+                <a:latin typeface="Consolas" pitchFamily="34" charset="0"/>
+                <a:ea typeface="Consolas" pitchFamily="34" charset="-122"/>
+                <a:cs typeface="Consolas" pitchFamily="34" charset="-120"/>
+              </a:rPr>
+              <a:t>4</a:t>
+            </a:r>
+            <a:endParaRPr lang="en-US" sz="900" dirty="0"/>
+          </a:p>
+        </p:txBody>
+      </p:sp>
+      <p:sp>
+        <p:nvSpPr>
+          <p:cNvPr id="47" name="Text 45"/>
+          <p:cNvSpPr txBox="1"/>
+          <p:nvPr/>
+        </p:nvSpPr>
+        <p:spPr>
+          <a:xfrm>
+            <a:off x="876300" y="3981450"/>
+            <a:ext cx="552450" cy="137160"/>
+          </a:xfrm>
+          <a:prstGeom prst="rect">
+            <a:avLst/>
+          </a:prstGeom>
+          <a:noFill/>
+          <a:ln/>
+        </p:spPr>
+        <p:txBody>
+          <a:bodyPr wrap="square" lIns="0" tIns="0" rIns="0" bIns="0" rtlCol="0" anchor="t"/>
+          <a:lstStyle/>
+          <a:p>
+            <a:pPr algn="r" indent="0" marL="0">
+              <a:lnSpc>
+                <a:spcPts val="1080"/>
+              </a:lnSpc>
+              <a:buNone/>
+            </a:pPr>
+            <a:r>
+              <a:rPr lang="en-US" sz="900" dirty="0">
+                <a:solidFill>
+                  <a:srgbClr val="A9A79F"/>
+                </a:solidFill>
+                <a:latin typeface="Consolas" pitchFamily="34" charset="0"/>
+                <a:ea typeface="Consolas" pitchFamily="34" charset="-122"/>
+                <a:cs typeface="Consolas" pitchFamily="34" charset="-120"/>
+              </a:rPr>
+              <a:t>3/18</a:t>
+            </a:r>
+            <a:endParaRPr lang="en-US" sz="900" dirty="0"/>
+          </a:p>
+        </p:txBody>
+      </p:sp>
+      <p:sp>
+        <p:nvSpPr>
+          <p:cNvPr id="48" name="Shape 46"/>
+          <p:cNvSpPr/>
+          <p:nvPr/>
+        </p:nvSpPr>
+        <p:spPr>
+          <a:xfrm>
+            <a:off x="2209800" y="3962400"/>
+            <a:ext cx="1683068" cy="85725"/>
+          </a:xfrm>
+          <a:prstGeom prst="rect">
+            <a:avLst/>
+          </a:prstGeom>
+          <a:solidFill>
+            <a:srgbClr val="EFB13C"/>
+          </a:solidFill>
+          <a:ln/>
+        </p:spPr>
+      </p:sp>
+      <p:sp>
+        <p:nvSpPr>
+          <p:cNvPr id="49" name="Shape 47"/>
+          <p:cNvSpPr/>
+          <p:nvPr/>
+        </p:nvSpPr>
+        <p:spPr>
+          <a:xfrm>
+            <a:off x="2209800" y="4067175"/>
+            <a:ext cx="708660" cy="47625"/>
+          </a:xfrm>
+          <a:prstGeom prst="rect">
+            <a:avLst/>
+          </a:prstGeom>
+          <a:solidFill>
+            <a:srgbClr val="718BA6"/>
+          </a:solidFill>
+          <a:ln/>
+        </p:spPr>
+      </p:sp>
+      <p:sp>
+        <p:nvSpPr>
+          <p:cNvPr id="50" name="Text 48"/>
+          <p:cNvSpPr txBox="1"/>
+          <p:nvPr/>
+        </p:nvSpPr>
+        <p:spPr>
+          <a:xfrm>
+            <a:off x="4305300" y="3971925"/>
+            <a:ext cx="457200" cy="137160"/>
+          </a:xfrm>
+          <a:prstGeom prst="rect">
+            <a:avLst/>
+          </a:prstGeom>
+          <a:noFill/>
+          <a:ln/>
+        </p:spPr>
+        <p:txBody>
+          <a:bodyPr wrap="square" lIns="0" tIns="0" rIns="0" bIns="0" rtlCol="0" anchor="t"/>
+          <a:lstStyle/>
+          <a:p>
+            <a:pPr algn="r" indent="0" marL="0">
+              <a:lnSpc>
+                <a:spcPts val="1080"/>
+              </a:lnSpc>
+              <a:buNone/>
+            </a:pPr>
+            <a:r>
+              <a:rPr lang="en-US" sz="900" b="1" dirty="0">
+                <a:solidFill>
+                  <a:srgbClr val="EFB13C"/>
+                </a:solidFill>
+                <a:latin typeface="Consolas" pitchFamily="34" charset="0"/>
+                <a:ea typeface="Consolas" pitchFamily="34" charset="-122"/>
+                <a:cs typeface="Consolas" pitchFamily="34" charset="-120"/>
+              </a:rPr>
+              <a:t>9.5</a:t>
+            </a:r>
+            <a:endParaRPr lang="en-US" sz="900" dirty="0"/>
+          </a:p>
+        </p:txBody>
+      </p:sp>
+      <p:sp>
+        <p:nvSpPr>
+          <p:cNvPr id="51" name="Text 49"/>
+          <p:cNvSpPr txBox="1"/>
+          <p:nvPr/>
+        </p:nvSpPr>
+        <p:spPr>
+          <a:xfrm>
+            <a:off x="4876800" y="3971925"/>
+            <a:ext cx="457200" cy="137160"/>
+          </a:xfrm>
+          <a:prstGeom prst="rect">
+            <a:avLst/>
+          </a:prstGeom>
+          <a:noFill/>
+          <a:ln/>
+        </p:spPr>
+        <p:txBody>
+          <a:bodyPr wrap="square" lIns="0" tIns="0" rIns="0" bIns="0" rtlCol="0" anchor="t"/>
+          <a:lstStyle/>
+          <a:p>
+            <a:pPr algn="r" indent="0" marL="0">
+              <a:lnSpc>
+                <a:spcPts val="1080"/>
+              </a:lnSpc>
+              <a:buNone/>
+            </a:pPr>
+            <a:r>
+              <a:rPr lang="en-US" sz="900" dirty="0">
+                <a:solidFill>
+                  <a:srgbClr val="A8BCD1"/>
+                </a:solidFill>
+                <a:latin typeface="Consolas" pitchFamily="34" charset="0"/>
+                <a:ea typeface="Consolas" pitchFamily="34" charset="-122"/>
+                <a:cs typeface="Consolas" pitchFamily="34" charset="-120"/>
+              </a:rPr>
+              <a:t>4</a:t>
+            </a:r>
+            <a:endParaRPr lang="en-US" sz="900" dirty="0"/>
+          </a:p>
+        </p:txBody>
+      </p:sp>
+      <p:sp>
+        <p:nvSpPr>
+          <p:cNvPr id="52" name="Text 50"/>
+          <p:cNvSpPr txBox="1"/>
+          <p:nvPr/>
+        </p:nvSpPr>
+        <p:spPr>
+          <a:xfrm>
+            <a:off x="876300" y="4219575"/>
+            <a:ext cx="552450" cy="137160"/>
+          </a:xfrm>
+          <a:prstGeom prst="rect">
+            <a:avLst/>
+          </a:prstGeom>
+          <a:noFill/>
+          <a:ln/>
+        </p:spPr>
+        <p:txBody>
+          <a:bodyPr wrap="square" lIns="0" tIns="0" rIns="0" bIns="0" rtlCol="0" anchor="t"/>
+          <a:lstStyle/>
+          <a:p>
+            <a:pPr algn="r" indent="0" marL="0">
+              <a:lnSpc>
+                <a:spcPts val="1080"/>
+              </a:lnSpc>
+              <a:buNone/>
+            </a:pPr>
+            <a:r>
+              <a:rPr lang="en-US" sz="900" dirty="0">
+                <a:solidFill>
+                  <a:srgbClr val="A9A79F"/>
+                </a:solidFill>
+                <a:latin typeface="Consolas" pitchFamily="34" charset="0"/>
+                <a:ea typeface="Consolas" pitchFamily="34" charset="-122"/>
+                <a:cs typeface="Consolas" pitchFamily="34" charset="-120"/>
+              </a:rPr>
+              <a:t>3/24</a:t>
+            </a:r>
+            <a:endParaRPr lang="en-US" sz="900" dirty="0"/>
+          </a:p>
+        </p:txBody>
+      </p:sp>
+      <p:sp>
+        <p:nvSpPr>
+          <p:cNvPr id="53" name="Shape 51"/>
+          <p:cNvSpPr/>
+          <p:nvPr/>
+        </p:nvSpPr>
+        <p:spPr>
+          <a:xfrm>
+            <a:off x="2209800" y="4200525"/>
+            <a:ext cx="673227" cy="85725"/>
+          </a:xfrm>
+          <a:prstGeom prst="rect">
+            <a:avLst/>
+          </a:prstGeom>
+          <a:solidFill>
+            <a:srgbClr val="EFB13C"/>
+          </a:solidFill>
+          <a:ln/>
+        </p:spPr>
+      </p:sp>
+      <p:sp>
+        <p:nvSpPr>
+          <p:cNvPr id="54" name="Shape 52"/>
+          <p:cNvSpPr/>
+          <p:nvPr/>
+        </p:nvSpPr>
+        <p:spPr>
+          <a:xfrm>
+            <a:off x="2209800" y="4305300"/>
+            <a:ext cx="708660" cy="47625"/>
+          </a:xfrm>
+          <a:prstGeom prst="rect">
+            <a:avLst/>
+          </a:prstGeom>
+          <a:solidFill>
+            <a:srgbClr val="718BA6"/>
+          </a:solidFill>
+          <a:ln/>
+        </p:spPr>
+      </p:sp>
+      <p:sp>
+        <p:nvSpPr>
+          <p:cNvPr id="55" name="Text 53"/>
+          <p:cNvSpPr txBox="1"/>
+          <p:nvPr/>
+        </p:nvSpPr>
+        <p:spPr>
+          <a:xfrm>
+            <a:off x="4305300" y="4210050"/>
+            <a:ext cx="457200" cy="137160"/>
+          </a:xfrm>
+          <a:prstGeom prst="rect">
+            <a:avLst/>
+          </a:prstGeom>
+          <a:noFill/>
+          <a:ln/>
+        </p:spPr>
+        <p:txBody>
+          <a:bodyPr wrap="square" lIns="0" tIns="0" rIns="0" bIns="0" rtlCol="0" anchor="t"/>
+          <a:lstStyle/>
+          <a:p>
+            <a:pPr algn="r" indent="0" marL="0">
+              <a:lnSpc>
+                <a:spcPts val="1080"/>
+              </a:lnSpc>
+              <a:buNone/>
+            </a:pPr>
+            <a:r>
+              <a:rPr lang="en-US" sz="900" b="1" dirty="0">
+                <a:solidFill>
+                  <a:srgbClr val="EFB13C"/>
+                </a:solidFill>
+                <a:latin typeface="Consolas" pitchFamily="34" charset="0"/>
+                <a:ea typeface="Consolas" pitchFamily="34" charset="-122"/>
+                <a:cs typeface="Consolas" pitchFamily="34" charset="-120"/>
+              </a:rPr>
+              <a:t>3.8</a:t>
+            </a:r>
+            <a:endParaRPr lang="en-US" sz="900" dirty="0"/>
+          </a:p>
+        </p:txBody>
+      </p:sp>
+      <p:sp>
+        <p:nvSpPr>
+          <p:cNvPr id="56" name="Text 54"/>
+          <p:cNvSpPr txBox="1"/>
+          <p:nvPr/>
+        </p:nvSpPr>
+        <p:spPr>
+          <a:xfrm>
+            <a:off x="4876800" y="4210050"/>
+            <a:ext cx="457200" cy="137160"/>
+          </a:xfrm>
+          <a:prstGeom prst="rect">
+            <a:avLst/>
+          </a:prstGeom>
+          <a:noFill/>
+          <a:ln/>
+        </p:spPr>
+        <p:txBody>
+          <a:bodyPr wrap="square" lIns="0" tIns="0" rIns="0" bIns="0" rtlCol="0" anchor="t"/>
+          <a:lstStyle/>
+          <a:p>
+            <a:pPr algn="r" indent="0" marL="0">
+              <a:lnSpc>
+                <a:spcPts val="1080"/>
+              </a:lnSpc>
+              <a:buNone/>
+            </a:pPr>
+            <a:r>
+              <a:rPr lang="en-US" sz="900" dirty="0">
+                <a:solidFill>
+                  <a:srgbClr val="A8BCD1"/>
+                </a:solidFill>
+                <a:latin typeface="Consolas" pitchFamily="34" charset="0"/>
+                <a:ea typeface="Consolas" pitchFamily="34" charset="-122"/>
+                <a:cs typeface="Consolas" pitchFamily="34" charset="-120"/>
+              </a:rPr>
+              <a:t>4</a:t>
+            </a:r>
+            <a:endParaRPr lang="en-US" sz="900" dirty="0"/>
+          </a:p>
+        </p:txBody>
+      </p:sp>
+      <p:sp>
+        <p:nvSpPr>
+          <p:cNvPr id="57" name="Text 55"/>
+          <p:cNvSpPr txBox="1"/>
+          <p:nvPr/>
+        </p:nvSpPr>
+        <p:spPr>
+          <a:xfrm>
+            <a:off x="876300" y="4457700"/>
+            <a:ext cx="552450" cy="137160"/>
+          </a:xfrm>
+          <a:prstGeom prst="rect">
+            <a:avLst/>
+          </a:prstGeom>
+          <a:noFill/>
+          <a:ln/>
+        </p:spPr>
+        <p:txBody>
+          <a:bodyPr wrap="square" lIns="0" tIns="0" rIns="0" bIns="0" rtlCol="0" anchor="t"/>
+          <a:lstStyle/>
+          <a:p>
+            <a:pPr algn="r" indent="0" marL="0">
+              <a:lnSpc>
+                <a:spcPts val="1080"/>
+              </a:lnSpc>
+              <a:buNone/>
+            </a:pPr>
+            <a:r>
+              <a:rPr lang="en-US" sz="900" dirty="0">
+                <a:solidFill>
+                  <a:srgbClr val="A9A79F"/>
+                </a:solidFill>
+                <a:latin typeface="Consolas" pitchFamily="34" charset="0"/>
+                <a:ea typeface="Consolas" pitchFamily="34" charset="-122"/>
+                <a:cs typeface="Consolas" pitchFamily="34" charset="-120"/>
+              </a:rPr>
+              <a:t>3/24</a:t>
+            </a:r>
+            <a:endParaRPr lang="en-US" sz="900" dirty="0"/>
+          </a:p>
+        </p:txBody>
+      </p:sp>
+      <p:sp>
+        <p:nvSpPr>
+          <p:cNvPr id="58" name="Shape 56"/>
+          <p:cNvSpPr/>
+          <p:nvPr/>
+        </p:nvSpPr>
+        <p:spPr>
+          <a:xfrm>
+            <a:off x="2209800" y="4438650"/>
+            <a:ext cx="1718500" cy="85725"/>
+          </a:xfrm>
+          <a:prstGeom prst="rect">
+            <a:avLst/>
+          </a:prstGeom>
+          <a:solidFill>
+            <a:srgbClr val="EFB13C"/>
+          </a:solidFill>
+          <a:ln/>
+        </p:spPr>
+      </p:sp>
+      <p:sp>
+        <p:nvSpPr>
+          <p:cNvPr id="59" name="Shape 57"/>
+          <p:cNvSpPr/>
+          <p:nvPr/>
+        </p:nvSpPr>
+        <p:spPr>
+          <a:xfrm>
+            <a:off x="2209800" y="4543425"/>
+            <a:ext cx="708660" cy="47625"/>
+          </a:xfrm>
+          <a:prstGeom prst="rect">
+            <a:avLst/>
+          </a:prstGeom>
+          <a:solidFill>
+            <a:srgbClr val="718BA6"/>
+          </a:solidFill>
+          <a:ln/>
+        </p:spPr>
+      </p:sp>
+      <p:sp>
+        <p:nvSpPr>
+          <p:cNvPr id="60" name="Text 58"/>
+          <p:cNvSpPr txBox="1"/>
+          <p:nvPr/>
+        </p:nvSpPr>
+        <p:spPr>
+          <a:xfrm>
+            <a:off x="4305300" y="4448175"/>
+            <a:ext cx="457200" cy="137160"/>
+          </a:xfrm>
+          <a:prstGeom prst="rect">
+            <a:avLst/>
+          </a:prstGeom>
+          <a:noFill/>
+          <a:ln/>
+        </p:spPr>
+        <p:txBody>
+          <a:bodyPr wrap="square" lIns="0" tIns="0" rIns="0" bIns="0" rtlCol="0" anchor="t"/>
+          <a:lstStyle/>
+          <a:p>
+            <a:pPr algn="r" indent="0" marL="0">
+              <a:lnSpc>
+                <a:spcPts val="1080"/>
+              </a:lnSpc>
+              <a:buNone/>
+            </a:pPr>
+            <a:r>
+              <a:rPr lang="en-US" sz="900" b="1" dirty="0">
+                <a:solidFill>
+                  <a:srgbClr val="EFB13C"/>
+                </a:solidFill>
+                <a:latin typeface="Consolas" pitchFamily="34" charset="0"/>
+                <a:ea typeface="Consolas" pitchFamily="34" charset="-122"/>
+                <a:cs typeface="Consolas" pitchFamily="34" charset="-120"/>
+              </a:rPr>
+              <a:t>9.7</a:t>
+            </a:r>
+            <a:endParaRPr lang="en-US" sz="900" dirty="0"/>
+          </a:p>
+        </p:txBody>
+      </p:sp>
+      <p:sp>
+        <p:nvSpPr>
+          <p:cNvPr id="61" name="Text 59"/>
+          <p:cNvSpPr txBox="1"/>
+          <p:nvPr/>
+        </p:nvSpPr>
+        <p:spPr>
+          <a:xfrm>
+            <a:off x="4876800" y="4448175"/>
+            <a:ext cx="457200" cy="137160"/>
+          </a:xfrm>
+          <a:prstGeom prst="rect">
+            <a:avLst/>
+          </a:prstGeom>
+          <a:noFill/>
+          <a:ln/>
+        </p:spPr>
+        <p:txBody>
+          <a:bodyPr wrap="square" lIns="0" tIns="0" rIns="0" bIns="0" rtlCol="0" anchor="t"/>
+          <a:lstStyle/>
+          <a:p>
+            <a:pPr algn="r" indent="0" marL="0">
+              <a:lnSpc>
+                <a:spcPts val="1080"/>
+              </a:lnSpc>
+              <a:buNone/>
+            </a:pPr>
+            <a:r>
+              <a:rPr lang="en-US" sz="900" dirty="0">
+                <a:solidFill>
+                  <a:srgbClr val="A8BCD1"/>
+                </a:solidFill>
+                <a:latin typeface="Consolas" pitchFamily="34" charset="0"/>
+                <a:ea typeface="Consolas" pitchFamily="34" charset="-122"/>
+                <a:cs typeface="Consolas" pitchFamily="34" charset="-120"/>
+              </a:rPr>
+              <a:t>4</a:t>
+            </a:r>
+            <a:endParaRPr lang="en-US" sz="900" dirty="0"/>
+          </a:p>
+        </p:txBody>
+      </p:sp>
+      <p:sp>
+        <p:nvSpPr>
+          <p:cNvPr id="62" name="Text 60"/>
+          <p:cNvSpPr txBox="1"/>
+          <p:nvPr/>
+        </p:nvSpPr>
+        <p:spPr>
+          <a:xfrm>
+            <a:off x="876300" y="4695825"/>
+            <a:ext cx="552450" cy="137160"/>
+          </a:xfrm>
+          <a:prstGeom prst="rect">
+            <a:avLst/>
+          </a:prstGeom>
+          <a:noFill/>
+          <a:ln/>
+        </p:spPr>
+        <p:txBody>
+          <a:bodyPr wrap="square" lIns="0" tIns="0" rIns="0" bIns="0" rtlCol="0" anchor="t"/>
+          <a:lstStyle/>
+          <a:p>
+            <a:pPr algn="r" indent="0" marL="0">
+              <a:lnSpc>
+                <a:spcPts val="1080"/>
+              </a:lnSpc>
+              <a:buNone/>
+            </a:pPr>
+            <a:r>
+              <a:rPr lang="en-US" sz="900" dirty="0">
+                <a:solidFill>
+                  <a:srgbClr val="A9A79F"/>
+                </a:solidFill>
+                <a:latin typeface="Consolas" pitchFamily="34" charset="0"/>
+                <a:ea typeface="Consolas" pitchFamily="34" charset="-122"/>
+                <a:cs typeface="Consolas" pitchFamily="34" charset="-120"/>
+              </a:rPr>
+              <a:t>4/2</a:t>
+            </a:r>
+            <a:endParaRPr lang="en-US" sz="900" dirty="0"/>
+          </a:p>
+        </p:txBody>
+      </p:sp>
+      <p:sp>
+        <p:nvSpPr>
+          <p:cNvPr id="63" name="Shape 61"/>
+          <p:cNvSpPr/>
+          <p:nvPr/>
+        </p:nvSpPr>
+        <p:spPr>
+          <a:xfrm>
+            <a:off x="2209800" y="4676775"/>
+            <a:ext cx="814959" cy="85725"/>
+          </a:xfrm>
+          <a:prstGeom prst="rect">
+            <a:avLst/>
+          </a:prstGeom>
+          <a:solidFill>
+            <a:srgbClr val="EFB13C"/>
+          </a:solidFill>
+          <a:ln/>
+        </p:spPr>
+      </p:sp>
+      <p:sp>
+        <p:nvSpPr>
+          <p:cNvPr id="64" name="Shape 62"/>
+          <p:cNvSpPr/>
+          <p:nvPr/>
+        </p:nvSpPr>
+        <p:spPr>
+          <a:xfrm>
+            <a:off x="2209800" y="4781550"/>
+            <a:ext cx="885825" cy="47625"/>
+          </a:xfrm>
+          <a:prstGeom prst="rect">
+            <a:avLst/>
+          </a:prstGeom>
+          <a:solidFill>
+            <a:srgbClr val="718BA6"/>
+          </a:solidFill>
+          <a:ln/>
+        </p:spPr>
+      </p:sp>
+      <p:sp>
+        <p:nvSpPr>
+          <p:cNvPr id="65" name="Text 63"/>
+          <p:cNvSpPr txBox="1"/>
+          <p:nvPr/>
+        </p:nvSpPr>
+        <p:spPr>
+          <a:xfrm>
+            <a:off x="4305300" y="4686300"/>
+            <a:ext cx="457200" cy="137160"/>
+          </a:xfrm>
+          <a:prstGeom prst="rect">
+            <a:avLst/>
+          </a:prstGeom>
+          <a:noFill/>
+          <a:ln/>
+        </p:spPr>
+        <p:txBody>
+          <a:bodyPr wrap="square" lIns="0" tIns="0" rIns="0" bIns="0" rtlCol="0" anchor="t"/>
+          <a:lstStyle/>
+          <a:p>
+            <a:pPr algn="r" indent="0" marL="0">
+              <a:lnSpc>
+                <a:spcPts val="1080"/>
+              </a:lnSpc>
+              <a:buNone/>
+            </a:pPr>
+            <a:r>
+              <a:rPr lang="en-US" sz="900" b="1" dirty="0">
+                <a:solidFill>
+                  <a:srgbClr val="EFB13C"/>
+                </a:solidFill>
+                <a:latin typeface="Consolas" pitchFamily="34" charset="0"/>
+                <a:ea typeface="Consolas" pitchFamily="34" charset="-122"/>
+                <a:cs typeface="Consolas" pitchFamily="34" charset="-120"/>
+              </a:rPr>
+              <a:t>4.6</a:t>
+            </a:r>
+            <a:endParaRPr lang="en-US" sz="900" dirty="0"/>
+          </a:p>
+        </p:txBody>
+      </p:sp>
+      <p:sp>
+        <p:nvSpPr>
+          <p:cNvPr id="66" name="Text 64"/>
+          <p:cNvSpPr txBox="1"/>
+          <p:nvPr/>
+        </p:nvSpPr>
+        <p:spPr>
+          <a:xfrm>
+            <a:off x="4876800" y="4686300"/>
+            <a:ext cx="457200" cy="137160"/>
+          </a:xfrm>
+          <a:prstGeom prst="rect">
+            <a:avLst/>
+          </a:prstGeom>
+          <a:noFill/>
+          <a:ln/>
+        </p:spPr>
+        <p:txBody>
+          <a:bodyPr wrap="square" lIns="0" tIns="0" rIns="0" bIns="0" rtlCol="0" anchor="t"/>
+          <a:lstStyle/>
+          <a:p>
+            <a:pPr algn="r" indent="0" marL="0">
+              <a:lnSpc>
+                <a:spcPts val="1080"/>
+              </a:lnSpc>
+              <a:buNone/>
+            </a:pPr>
+            <a:r>
+              <a:rPr lang="en-US" sz="900" dirty="0">
+                <a:solidFill>
+                  <a:srgbClr val="A8BCD1"/>
+                </a:solidFill>
+                <a:latin typeface="Consolas" pitchFamily="34" charset="0"/>
+                <a:ea typeface="Consolas" pitchFamily="34" charset="-122"/>
+                <a:cs typeface="Consolas" pitchFamily="34" charset="-120"/>
+              </a:rPr>
+              <a:t>5</a:t>
+            </a:r>
+            <a:endParaRPr lang="en-US" sz="900" dirty="0"/>
+          </a:p>
+        </p:txBody>
+      </p:sp>
+      <p:sp>
+        <p:nvSpPr>
+          <p:cNvPr id="67" name="Text 65"/>
+          <p:cNvSpPr txBox="1"/>
+          <p:nvPr/>
+        </p:nvSpPr>
+        <p:spPr>
+          <a:xfrm>
+            <a:off x="876300" y="4933950"/>
+            <a:ext cx="552450" cy="137160"/>
+          </a:xfrm>
+          <a:prstGeom prst="rect">
+            <a:avLst/>
+          </a:prstGeom>
+          <a:noFill/>
+          <a:ln/>
+        </p:spPr>
+        <p:txBody>
+          <a:bodyPr wrap="square" lIns="0" tIns="0" rIns="0" bIns="0" rtlCol="0" anchor="t"/>
+          <a:lstStyle/>
+          <a:p>
+            <a:pPr algn="r" indent="0" marL="0">
+              <a:lnSpc>
+                <a:spcPts val="1080"/>
+              </a:lnSpc>
+              <a:buNone/>
+            </a:pPr>
+            <a:r>
+              <a:rPr lang="en-US" sz="900" dirty="0">
+                <a:solidFill>
+                  <a:srgbClr val="A9A79F"/>
+                </a:solidFill>
+                <a:latin typeface="Consolas" pitchFamily="34" charset="0"/>
+                <a:ea typeface="Consolas" pitchFamily="34" charset="-122"/>
+                <a:cs typeface="Consolas" pitchFamily="34" charset="-120"/>
+              </a:rPr>
+              <a:t>4/2</a:t>
+            </a:r>
+            <a:endParaRPr lang="en-US" sz="900" dirty="0"/>
+          </a:p>
+        </p:txBody>
+      </p:sp>
+      <p:sp>
+        <p:nvSpPr>
+          <p:cNvPr id="68" name="Shape 66"/>
+          <p:cNvSpPr/>
+          <p:nvPr/>
+        </p:nvSpPr>
+        <p:spPr>
+          <a:xfrm>
+            <a:off x="2209800" y="4914900"/>
+            <a:ext cx="1807083" cy="85725"/>
+          </a:xfrm>
+          <a:prstGeom prst="rect">
+            <a:avLst/>
+          </a:prstGeom>
+          <a:solidFill>
+            <a:srgbClr val="EFB13C"/>
+          </a:solidFill>
+          <a:ln/>
+        </p:spPr>
+      </p:sp>
+      <p:sp>
+        <p:nvSpPr>
+          <p:cNvPr id="69" name="Shape 67"/>
+          <p:cNvSpPr/>
+          <p:nvPr/>
+        </p:nvSpPr>
+        <p:spPr>
+          <a:xfrm>
+            <a:off x="2209800" y="5019675"/>
+            <a:ext cx="885825" cy="47625"/>
+          </a:xfrm>
+          <a:prstGeom prst="rect">
+            <a:avLst/>
+          </a:prstGeom>
+          <a:solidFill>
+            <a:srgbClr val="718BA6"/>
+          </a:solidFill>
+          <a:ln/>
+        </p:spPr>
+      </p:sp>
+      <p:sp>
+        <p:nvSpPr>
+          <p:cNvPr id="70" name="Text 68"/>
+          <p:cNvSpPr txBox="1"/>
+          <p:nvPr/>
+        </p:nvSpPr>
+        <p:spPr>
+          <a:xfrm>
+            <a:off x="4305300" y="4924425"/>
+            <a:ext cx="457200" cy="137160"/>
+          </a:xfrm>
+          <a:prstGeom prst="rect">
+            <a:avLst/>
+          </a:prstGeom>
+          <a:noFill/>
+          <a:ln/>
+        </p:spPr>
+        <p:txBody>
+          <a:bodyPr wrap="square" lIns="0" tIns="0" rIns="0" bIns="0" rtlCol="0" anchor="t"/>
+          <a:lstStyle/>
+          <a:p>
+            <a:pPr algn="r" indent="0" marL="0">
+              <a:lnSpc>
+                <a:spcPts val="1080"/>
+              </a:lnSpc>
+              <a:buNone/>
+            </a:pPr>
+            <a:r>
+              <a:rPr lang="en-US" sz="900" b="1" dirty="0">
+                <a:solidFill>
+                  <a:srgbClr val="EFB13C"/>
+                </a:solidFill>
+                <a:latin typeface="Consolas" pitchFamily="34" charset="0"/>
+                <a:ea typeface="Consolas" pitchFamily="34" charset="-122"/>
+                <a:cs typeface="Consolas" pitchFamily="34" charset="-120"/>
+              </a:rPr>
+              <a:t>10.2</a:t>
+            </a:r>
+            <a:endParaRPr lang="en-US" sz="900" dirty="0"/>
+          </a:p>
+        </p:txBody>
+      </p:sp>
+      <p:sp>
+        <p:nvSpPr>
+          <p:cNvPr id="71" name="Text 69"/>
+          <p:cNvSpPr txBox="1"/>
+          <p:nvPr/>
+        </p:nvSpPr>
+        <p:spPr>
+          <a:xfrm>
+            <a:off x="4876800" y="4924425"/>
+            <a:ext cx="457200" cy="137160"/>
+          </a:xfrm>
+          <a:prstGeom prst="rect">
+            <a:avLst/>
+          </a:prstGeom>
+          <a:noFill/>
+          <a:ln/>
+        </p:spPr>
+        <p:txBody>
+          <a:bodyPr wrap="square" lIns="0" tIns="0" rIns="0" bIns="0" rtlCol="0" anchor="t"/>
+          <a:lstStyle/>
+          <a:p>
+            <a:pPr algn="r" indent="0" marL="0">
+              <a:lnSpc>
+                <a:spcPts val="1080"/>
+              </a:lnSpc>
+              <a:buNone/>
+            </a:pPr>
+            <a:r>
+              <a:rPr lang="en-US" sz="900" dirty="0">
+                <a:solidFill>
+                  <a:srgbClr val="A8BCD1"/>
+                </a:solidFill>
+                <a:latin typeface="Consolas" pitchFamily="34" charset="0"/>
+                <a:ea typeface="Consolas" pitchFamily="34" charset="-122"/>
+                <a:cs typeface="Consolas" pitchFamily="34" charset="-120"/>
+              </a:rPr>
+              <a:t>5</a:t>
+            </a:r>
+            <a:endParaRPr lang="en-US" sz="900" dirty="0"/>
+          </a:p>
+        </p:txBody>
+      </p:sp>
+      <p:sp>
+        <p:nvSpPr>
+          <p:cNvPr id="72" name="Text 70"/>
+          <p:cNvSpPr txBox="1"/>
+          <p:nvPr/>
+        </p:nvSpPr>
+        <p:spPr>
+          <a:xfrm>
+            <a:off x="876300" y="5172075"/>
+            <a:ext cx="552450" cy="137160"/>
+          </a:xfrm>
+          <a:prstGeom prst="rect">
+            <a:avLst/>
+          </a:prstGeom>
+          <a:noFill/>
+          <a:ln/>
+        </p:spPr>
+        <p:txBody>
+          <a:bodyPr wrap="square" lIns="0" tIns="0" rIns="0" bIns="0" rtlCol="0" anchor="t"/>
+          <a:lstStyle/>
+          <a:p>
+            <a:pPr algn="r" indent="0" marL="0">
+              <a:lnSpc>
+                <a:spcPts val="1080"/>
+              </a:lnSpc>
+              <a:buNone/>
+            </a:pPr>
+            <a:r>
+              <a:rPr lang="en-US" sz="900" dirty="0">
+                <a:solidFill>
+                  <a:srgbClr val="A9A79F"/>
+                </a:solidFill>
+                <a:latin typeface="Consolas" pitchFamily="34" charset="0"/>
+                <a:ea typeface="Consolas" pitchFamily="34" charset="-122"/>
+                <a:cs typeface="Consolas" pitchFamily="34" charset="-120"/>
+              </a:rPr>
+              <a:t>4/15</a:t>
+            </a:r>
+            <a:endParaRPr lang="en-US" sz="900" dirty="0"/>
+          </a:p>
+        </p:txBody>
+      </p:sp>
+      <p:sp>
+        <p:nvSpPr>
+          <p:cNvPr id="73" name="Shape 71"/>
+          <p:cNvSpPr/>
+          <p:nvPr/>
+        </p:nvSpPr>
+        <p:spPr>
+          <a:xfrm>
+            <a:off x="1394841" y="5153025"/>
+            <a:ext cx="814959" cy="85725"/>
+          </a:xfrm>
+          <a:prstGeom prst="rect">
+            <a:avLst/>
+          </a:prstGeom>
+          <a:solidFill>
+            <a:srgbClr val="FF4D63"/>
+          </a:solidFill>
+          <a:ln/>
+        </p:spPr>
+      </p:sp>
+      <p:sp>
+        <p:nvSpPr>
+          <p:cNvPr id="74" name="Shape 72"/>
+          <p:cNvSpPr/>
+          <p:nvPr/>
+        </p:nvSpPr>
+        <p:spPr>
+          <a:xfrm>
+            <a:off x="2209800" y="5257800"/>
+            <a:ext cx="354330" cy="47625"/>
+          </a:xfrm>
+          <a:prstGeom prst="rect">
+            <a:avLst/>
+          </a:prstGeom>
+          <a:solidFill>
+            <a:srgbClr val="718BA6"/>
+          </a:solidFill>
+          <a:ln/>
+        </p:spPr>
+      </p:sp>
+      <p:sp>
+        <p:nvSpPr>
+          <p:cNvPr id="75" name="Text 73"/>
+          <p:cNvSpPr txBox="1"/>
+          <p:nvPr/>
+        </p:nvSpPr>
+        <p:spPr>
+          <a:xfrm>
+            <a:off x="4305300" y="5162550"/>
+            <a:ext cx="457200" cy="137160"/>
+          </a:xfrm>
+          <a:prstGeom prst="rect">
+            <a:avLst/>
+          </a:prstGeom>
+          <a:noFill/>
+          <a:ln/>
+        </p:spPr>
+        <p:txBody>
+          <a:bodyPr wrap="square" lIns="0" tIns="0" rIns="0" bIns="0" rtlCol="0" anchor="t"/>
+          <a:lstStyle/>
+          <a:p>
+            <a:pPr algn="r" indent="0" marL="0">
+              <a:lnSpc>
+                <a:spcPts val="1080"/>
+              </a:lnSpc>
+              <a:buNone/>
+            </a:pPr>
+            <a:r>
+              <a:rPr lang="en-US" sz="900" b="1" dirty="0">
+                <a:solidFill>
+                  <a:srgbClr val="FF4D63"/>
+                </a:solidFill>
+                <a:latin typeface="Consolas" pitchFamily="34" charset="0"/>
+                <a:ea typeface="Consolas" pitchFamily="34" charset="-122"/>
+                <a:cs typeface="Consolas" pitchFamily="34" charset="-120"/>
+              </a:rPr>
+              <a:t>-4.6</a:t>
+            </a:r>
+            <a:endParaRPr lang="en-US" sz="900" dirty="0"/>
+          </a:p>
+        </p:txBody>
+      </p:sp>
+      <p:sp>
+        <p:nvSpPr>
+          <p:cNvPr id="76" name="Text 74"/>
+          <p:cNvSpPr txBox="1"/>
+          <p:nvPr/>
+        </p:nvSpPr>
+        <p:spPr>
+          <a:xfrm>
+            <a:off x="4876800" y="5162550"/>
+            <a:ext cx="457200" cy="137160"/>
+          </a:xfrm>
+          <a:prstGeom prst="rect">
+            <a:avLst/>
+          </a:prstGeom>
+          <a:noFill/>
+          <a:ln/>
+        </p:spPr>
+        <p:txBody>
+          <a:bodyPr wrap="square" lIns="0" tIns="0" rIns="0" bIns="0" rtlCol="0" anchor="t"/>
+          <a:lstStyle/>
+          <a:p>
+            <a:pPr algn="r" indent="0" marL="0">
+              <a:lnSpc>
+                <a:spcPts val="1080"/>
+              </a:lnSpc>
+              <a:buNone/>
+            </a:pPr>
+            <a:r>
+              <a:rPr lang="en-US" sz="900" dirty="0">
+                <a:solidFill>
+                  <a:srgbClr val="A8BCD1"/>
+                </a:solidFill>
+                <a:latin typeface="Consolas" pitchFamily="34" charset="0"/>
+                <a:ea typeface="Consolas" pitchFamily="34" charset="-122"/>
+                <a:cs typeface="Consolas" pitchFamily="34" charset="-120"/>
+              </a:rPr>
+              <a:t>2</a:t>
+            </a:r>
+            <a:endParaRPr lang="en-US" sz="900" dirty="0"/>
+          </a:p>
+        </p:txBody>
+      </p:sp>
+      <p:sp>
+        <p:nvSpPr>
+          <p:cNvPr id="77" name="Text 75"/>
+          <p:cNvSpPr txBox="1"/>
+          <p:nvPr/>
+        </p:nvSpPr>
+        <p:spPr>
+          <a:xfrm>
+            <a:off x="876300" y="5410200"/>
+            <a:ext cx="552450" cy="137160"/>
+          </a:xfrm>
+          <a:prstGeom prst="rect">
+            <a:avLst/>
+          </a:prstGeom>
+          <a:noFill/>
+          <a:ln/>
+        </p:spPr>
+        <p:txBody>
+          <a:bodyPr wrap="square" lIns="0" tIns="0" rIns="0" bIns="0" rtlCol="0" anchor="t"/>
+          <a:lstStyle/>
+          <a:p>
+            <a:pPr algn="r" indent="0" marL="0">
+              <a:lnSpc>
+                <a:spcPts val="1080"/>
+              </a:lnSpc>
+              <a:buNone/>
+            </a:pPr>
+            <a:r>
+              <a:rPr lang="en-US" sz="900" dirty="0">
+                <a:solidFill>
+                  <a:srgbClr val="A9A79F"/>
+                </a:solidFill>
+                <a:latin typeface="Consolas" pitchFamily="34" charset="0"/>
+                <a:ea typeface="Consolas" pitchFamily="34" charset="-122"/>
+                <a:cs typeface="Consolas" pitchFamily="34" charset="-120"/>
+              </a:rPr>
+              <a:t>4/15</a:t>
+            </a:r>
+            <a:endParaRPr lang="en-US" sz="900" dirty="0"/>
+          </a:p>
+        </p:txBody>
+      </p:sp>
+      <p:sp>
+        <p:nvSpPr>
+          <p:cNvPr id="78" name="Shape 76"/>
+          <p:cNvSpPr/>
+          <p:nvPr/>
+        </p:nvSpPr>
+        <p:spPr>
+          <a:xfrm>
+            <a:off x="2209800" y="5391150"/>
+            <a:ext cx="566928" cy="85725"/>
+          </a:xfrm>
+          <a:prstGeom prst="rect">
+            <a:avLst/>
+          </a:prstGeom>
+          <a:solidFill>
+            <a:srgbClr val="EFB13C"/>
+          </a:solidFill>
+          <a:ln/>
+        </p:spPr>
+      </p:sp>
+      <p:sp>
+        <p:nvSpPr>
+          <p:cNvPr id="79" name="Shape 77"/>
+          <p:cNvSpPr/>
+          <p:nvPr/>
+        </p:nvSpPr>
+        <p:spPr>
+          <a:xfrm>
+            <a:off x="2209800" y="5495925"/>
+            <a:ext cx="354330" cy="47625"/>
+          </a:xfrm>
+          <a:prstGeom prst="rect">
+            <a:avLst/>
+          </a:prstGeom>
+          <a:solidFill>
+            <a:srgbClr val="718BA6"/>
+          </a:solidFill>
+          <a:ln/>
+        </p:spPr>
+      </p:sp>
+      <p:sp>
+        <p:nvSpPr>
+          <p:cNvPr id="80" name="Text 78"/>
+          <p:cNvSpPr txBox="1"/>
+          <p:nvPr/>
+        </p:nvSpPr>
+        <p:spPr>
+          <a:xfrm>
+            <a:off x="4305300" y="5400675"/>
+            <a:ext cx="457200" cy="137160"/>
+          </a:xfrm>
+          <a:prstGeom prst="rect">
+            <a:avLst/>
+          </a:prstGeom>
+          <a:noFill/>
+          <a:ln/>
+        </p:spPr>
+        <p:txBody>
+          <a:bodyPr wrap="square" lIns="0" tIns="0" rIns="0" bIns="0" rtlCol="0" anchor="t"/>
+          <a:lstStyle/>
+          <a:p>
+            <a:pPr algn="r" indent="0" marL="0">
+              <a:lnSpc>
+                <a:spcPts val="1080"/>
+              </a:lnSpc>
+              <a:buNone/>
+            </a:pPr>
+            <a:r>
+              <a:rPr lang="en-US" sz="900" b="1" dirty="0">
+                <a:solidFill>
+                  <a:srgbClr val="EFB13C"/>
+                </a:solidFill>
+                <a:latin typeface="Consolas" pitchFamily="34" charset="0"/>
+                <a:ea typeface="Consolas" pitchFamily="34" charset="-122"/>
+                <a:cs typeface="Consolas" pitchFamily="34" charset="-120"/>
+              </a:rPr>
+              <a:t>3.2</a:t>
+            </a:r>
+            <a:endParaRPr lang="en-US" sz="900" dirty="0"/>
+          </a:p>
+        </p:txBody>
+      </p:sp>
+      <p:sp>
+        <p:nvSpPr>
+          <p:cNvPr id="81" name="Text 79"/>
+          <p:cNvSpPr txBox="1"/>
+          <p:nvPr/>
+        </p:nvSpPr>
+        <p:spPr>
+          <a:xfrm>
+            <a:off x="4876800" y="5400675"/>
+            <a:ext cx="457200" cy="137160"/>
+          </a:xfrm>
+          <a:prstGeom prst="rect">
+            <a:avLst/>
+          </a:prstGeom>
+          <a:noFill/>
+          <a:ln/>
+        </p:spPr>
+        <p:txBody>
+          <a:bodyPr wrap="square" lIns="0" tIns="0" rIns="0" bIns="0" rtlCol="0" anchor="t"/>
+          <a:lstStyle/>
+          <a:p>
+            <a:pPr algn="r" indent="0" marL="0">
+              <a:lnSpc>
+                <a:spcPts val="1080"/>
+              </a:lnSpc>
+              <a:buNone/>
+            </a:pPr>
+            <a:r>
+              <a:rPr lang="en-US" sz="900" dirty="0">
+                <a:solidFill>
+                  <a:srgbClr val="A8BCD1"/>
+                </a:solidFill>
+                <a:latin typeface="Consolas" pitchFamily="34" charset="0"/>
+                <a:ea typeface="Consolas" pitchFamily="34" charset="-122"/>
+                <a:cs typeface="Consolas" pitchFamily="34" charset="-120"/>
+              </a:rPr>
+              <a:t>2</a:t>
+            </a:r>
+            <a:endParaRPr lang="en-US" sz="900" dirty="0"/>
+          </a:p>
+        </p:txBody>
+      </p:sp>
+      <p:sp>
+        <p:nvSpPr>
+          <p:cNvPr id="82" name="Shape 80"/>
+          <p:cNvSpPr/>
+          <p:nvPr/>
+        </p:nvSpPr>
+        <p:spPr>
+          <a:xfrm>
+            <a:off x="876300" y="5715000"/>
+            <a:ext cx="152400" cy="76200"/>
+          </a:xfrm>
+          <a:prstGeom prst="rect">
+            <a:avLst/>
+          </a:prstGeom>
+          <a:solidFill>
+            <a:srgbClr val="EFB13C"/>
+          </a:solidFill>
+          <a:ln/>
+        </p:spPr>
+      </p:sp>
+      <p:sp>
+        <p:nvSpPr>
+          <p:cNvPr id="83" name="Text 81"/>
+          <p:cNvSpPr txBox="1"/>
+          <p:nvPr/>
+        </p:nvSpPr>
+        <p:spPr>
+          <a:xfrm>
+            <a:off x="1085850" y="5686425"/>
+            <a:ext cx="1143000" cy="131445"/>
+          </a:xfrm>
+          <a:prstGeom prst="rect">
+            <a:avLst/>
+          </a:prstGeom>
+          <a:noFill/>
+          <a:ln/>
+        </p:spPr>
+        <p:txBody>
+          <a:bodyPr wrap="square" lIns="0" tIns="0" rIns="0" bIns="0" rtlCol="0" anchor="t"/>
+          <a:lstStyle/>
+          <a:p>
             <a:pPr algn="l" indent="0" marL="0">
               <a:lnSpc>
                 <a:spcPts val="1035"/>
@@ -4449,13 +6688,13 @@
             <a:r>
               <a:rPr lang="en-US" sz="863" dirty="0">
                 <a:solidFill>
-                  <a:srgbClr val="8A8880"/>
+                  <a:srgbClr val="A9A79F"/>
                 </a:solidFill>
                 <a:latin typeface="Malgun Gothic" pitchFamily="34" charset="0"/>
                 <a:ea typeface="Malgun Gothic" pitchFamily="34" charset="-122"/>
                 <a:cs typeface="Malgun Gothic" pitchFamily="34" charset="-120"/>
               </a:rPr>
-              <a:t>같은 시트 같은 회차이고, 열 사이 거리만 좁혔습니다.</a:t>
+              <a:t>실제 차이</a:t>
             </a:r>
             <a:endParaRPr lang="en-US" sz="863" dirty="0"/>
           </a:p>
@@ -4463,34 +6702,34 @@
       </p:sp>
       <p:sp>
         <p:nvSpPr>
-          <p:cNvPr id="17" name="Shape 14"/>
-          <p:cNvSpPr/>
-          <p:nvPr/>
-        </p:nvSpPr>
-        <p:spPr>
-          <a:xfrm>
-            <a:off x="7162800" y="1714500"/>
-            <a:ext cx="228600" cy="123825"/>
-          </a:xfrm>
-          <a:prstGeom prst="rect">
-            <a:avLst/>
-          </a:prstGeom>
-          <a:solidFill>
-            <a:srgbClr val="EFB13C"/>
-          </a:solidFill>
-          <a:ln/>
-        </p:spPr>
-      </p:sp>
-      <p:sp>
-        <p:nvSpPr>
-          <p:cNvPr id="18" name="Text 15"/>
+          <p:cNvPr id="84" name="Shape 82"/>
+          <p:cNvSpPr/>
+          <p:nvPr/>
+        </p:nvSpPr>
+        <p:spPr>
+          <a:xfrm>
+            <a:off x="2286000" y="5724525"/>
+            <a:ext cx="152400" cy="57150"/>
+          </a:xfrm>
+          <a:prstGeom prst="rect">
+            <a:avLst/>
+          </a:prstGeom>
+          <a:solidFill>
+            <a:srgbClr val="718BA6"/>
+          </a:solidFill>
+          <a:ln/>
+        </p:spPr>
+      </p:sp>
+      <p:sp>
+        <p:nvSpPr>
+          <p:cNvPr id="85" name="Text 83"/>
           <p:cNvSpPr txBox="1"/>
           <p:nvPr/>
         </p:nvSpPr>
         <p:spPr>
           <a:xfrm>
-            <a:off x="7486650" y="1657350"/>
-            <a:ext cx="4019550" cy="257175"/>
+            <a:off x="2495550" y="5686425"/>
+            <a:ext cx="1333500" cy="131445"/>
           </a:xfrm>
           <a:prstGeom prst="rect">
             <a:avLst/>
@@ -4504,35 +6743,60 @@
           <a:p>
             <a:pPr algn="l" indent="0" marL="0">
               <a:lnSpc>
-                <a:spcPts val="2025"/>
-              </a:lnSpc>
-              <a:buNone/>
-            </a:pPr>
-            <a:r>
-              <a:rPr lang="en-US" sz="1500" b="1" dirty="0">
-                <a:solidFill>
-                  <a:srgbClr val="EAE7E0"/>
+                <a:spcPts val="1035"/>
+              </a:lnSpc>
+              <a:buNone/>
+            </a:pPr>
+            <a:r>
+              <a:rPr lang="en-US" sz="863" dirty="0">
+                <a:solidFill>
+                  <a:srgbClr val="A9A79F"/>
                 </a:solidFill>
                 <a:latin typeface="Malgun Gothic" pitchFamily="34" charset="0"/>
                 <a:ea typeface="Malgun Gothic" pitchFamily="34" charset="-122"/>
                 <a:cs typeface="Malgun Gothic" pitchFamily="34" charset="-120"/>
               </a:rPr>
-              <a:t>시험할 때마다 달랐습니다</a:t>
-            </a:r>
-            <a:endParaRPr lang="en-US" sz="1500" dirty="0"/>
-          </a:p>
-        </p:txBody>
-      </p:sp>
-      <p:sp>
-        <p:nvSpPr>
-          <p:cNvPr id="19" name="Text 16"/>
+              <a:t>적용한 보정값</a:t>
+            </a:r>
+            <a:endParaRPr lang="en-US" sz="863" dirty="0"/>
+          </a:p>
+        </p:txBody>
+      </p:sp>
+      <p:sp>
+        <p:nvSpPr>
+          <p:cNvPr id="86" name="Shape 84"/>
+          <p:cNvSpPr/>
+          <p:nvPr/>
+        </p:nvSpPr>
+        <p:spPr>
+          <a:xfrm>
+            <a:off x="6057900" y="2152650"/>
+            <a:ext cx="5448300" cy="3829050"/>
+          </a:xfrm>
+          <a:prstGeom prst="rect">
+            <a:avLst/>
+          </a:prstGeom>
+          <a:solidFill>
+            <a:srgbClr val="0A1320"/>
+          </a:solidFill>
+          <a:ln w="12700">
+            <a:solidFill>
+              <a:srgbClr val="182838"/>
+            </a:solidFill>
+            <a:prstDash val="solid"/>
+          </a:ln>
+        </p:spPr>
+      </p:sp>
+      <p:sp>
+        <p:nvSpPr>
+          <p:cNvPr id="87" name="Text 85"/>
           <p:cNvSpPr txBox="1"/>
           <p:nvPr/>
         </p:nvSpPr>
         <p:spPr>
           <a:xfrm>
-            <a:off x="7162800" y="1962150"/>
-            <a:ext cx="4343400" cy="207169"/>
+            <a:off x="6248400" y="2266950"/>
+            <a:ext cx="2286000" cy="125016"/>
           </a:xfrm>
           <a:prstGeom prst="rect">
             <a:avLst/>
@@ -4546,55 +6810,192 @@
           <a:p>
             <a:pPr algn="l" indent="0" marL="0">
               <a:lnSpc>
-                <a:spcPts val="1631"/>
-              </a:lnSpc>
-              <a:buNone/>
-            </a:pPr>
-            <a:r>
-              <a:rPr lang="en-US" sz="1088" dirty="0">
-                <a:solidFill>
-                  <a:srgbClr val="CFCBC2"/>
+                <a:spcPts val="984"/>
+              </a:lnSpc>
+              <a:buNone/>
+            </a:pPr>
+            <a:r>
+              <a:rPr lang="en-US" sz="788" b="1" spc="150" kern="0" dirty="0">
+                <a:solidFill>
+                  <a:srgbClr val="8A8880"/>
+                </a:solidFill>
+                <a:latin typeface="Consolas" pitchFamily="34" charset="0"/>
+                <a:ea typeface="Consolas" pitchFamily="34" charset="-122"/>
+                <a:cs typeface="Consolas" pitchFamily="34" charset="-120"/>
+              </a:rPr>
+              <a:t>시험 40회 전체</a:t>
+            </a:r>
+            <a:endParaRPr lang="en-US" sz="788" dirty="0"/>
+          </a:p>
+        </p:txBody>
+      </p:sp>
+      <p:sp>
+        <p:nvSpPr>
+          <p:cNvPr id="88" name="Text 86"/>
+          <p:cNvSpPr txBox="1"/>
+          <p:nvPr/>
+        </p:nvSpPr>
+        <p:spPr>
+          <a:xfrm>
+            <a:off x="9029700" y="2257425"/>
+            <a:ext cx="2286000" cy="120015"/>
+          </a:xfrm>
+          <a:prstGeom prst="rect">
+            <a:avLst/>
+          </a:prstGeom>
+          <a:noFill/>
+          <a:ln/>
+        </p:spPr>
+        <p:txBody>
+          <a:bodyPr wrap="square" lIns="0" tIns="0" rIns="0" bIns="0" rtlCol="0" anchor="t"/>
+          <a:lstStyle/>
+          <a:p>
+            <a:pPr algn="r" indent="0" marL="0">
+              <a:lnSpc>
+                <a:spcPts val="945"/>
+              </a:lnSpc>
+              <a:buNone/>
+            </a:pPr>
+            <a:r>
+              <a:rPr lang="en-US" sz="788" dirty="0">
+                <a:solidFill>
+                  <a:srgbClr val="8A8880"/>
                 </a:solidFill>
                 <a:latin typeface="Malgun Gothic" pitchFamily="34" charset="0"/>
                 <a:ea typeface="Malgun Gothic" pitchFamily="34" charset="-122"/>
                 <a:cs typeface="Malgun Gothic" pitchFamily="34" charset="-120"/>
               </a:rPr>
-              <a:t>11이 나온 날도 있고 4가 나온 날도 있었습니다.</a:t>
-            </a:r>
-            <a:endParaRPr lang="en-US" sz="1088" dirty="0"/>
-          </a:p>
-        </p:txBody>
-      </p:sp>
-      <p:sp>
-        <p:nvSpPr>
-          <p:cNvPr id="20" name="Shape 17"/>
-          <p:cNvSpPr/>
-          <p:nvPr/>
-        </p:nvSpPr>
-        <p:spPr>
-          <a:xfrm>
-            <a:off x="7162800" y="2438400"/>
-            <a:ext cx="228600" cy="123825"/>
-          </a:xfrm>
-          <a:prstGeom prst="rect">
-            <a:avLst/>
-          </a:prstGeom>
-          <a:solidFill>
-            <a:srgbClr val="718BA6"/>
-          </a:solidFill>
-          <a:ln/>
-        </p:spPr>
-      </p:sp>
-      <p:sp>
-        <p:nvSpPr>
-          <p:cNvPr id="21" name="Text 18"/>
+              <a:t>가로 외기온도 ℃ / 세로 차이 MW</a:t>
+            </a:r>
+            <a:endParaRPr lang="en-US" sz="788" dirty="0"/>
+          </a:p>
+        </p:txBody>
+      </p:sp>
+      <p:sp>
+        <p:nvSpPr>
+          <p:cNvPr id="89" name="Shape 87"/>
+          <p:cNvSpPr/>
+          <p:nvPr/>
+        </p:nvSpPr>
+        <p:spPr>
+          <a:xfrm>
+            <a:off x="6667500" y="2979420"/>
+            <a:ext cx="4476750" cy="0"/>
+          </a:xfrm>
+          <a:prstGeom prst="line">
+            <a:avLst/>
+          </a:prstGeom>
+          <a:noFill/>
+          <a:ln w="12700">
+            <a:solidFill>
+              <a:srgbClr val="182838"/>
+            </a:solidFill>
+            <a:prstDash val="solid"/>
+          </a:ln>
+        </p:spPr>
+      </p:sp>
+      <p:sp>
+        <p:nvSpPr>
+          <p:cNvPr id="90" name="Shape 88"/>
+          <p:cNvSpPr/>
+          <p:nvPr/>
+        </p:nvSpPr>
+        <p:spPr>
+          <a:xfrm>
+            <a:off x="6667500" y="3451860"/>
+            <a:ext cx="4476750" cy="0"/>
+          </a:xfrm>
+          <a:prstGeom prst="line">
+            <a:avLst/>
+          </a:prstGeom>
+          <a:noFill/>
+          <a:ln w="12700">
+            <a:solidFill>
+              <a:srgbClr val="182838"/>
+            </a:solidFill>
+            <a:prstDash val="solid"/>
+          </a:ln>
+        </p:spPr>
+      </p:sp>
+      <p:sp>
+        <p:nvSpPr>
+          <p:cNvPr id="91" name="Shape 89"/>
+          <p:cNvSpPr/>
+          <p:nvPr/>
+        </p:nvSpPr>
+        <p:spPr>
+          <a:xfrm>
+            <a:off x="6667500" y="3924300"/>
+            <a:ext cx="4476750" cy="0"/>
+          </a:xfrm>
+          <a:prstGeom prst="line">
+            <a:avLst/>
+          </a:prstGeom>
+          <a:noFill/>
+          <a:ln w="12700">
+            <a:solidFill>
+              <a:srgbClr val="182838"/>
+            </a:solidFill>
+            <a:prstDash val="solid"/>
+          </a:ln>
+        </p:spPr>
+      </p:sp>
+      <p:sp>
+        <p:nvSpPr>
+          <p:cNvPr id="92" name="Shape 90"/>
+          <p:cNvSpPr/>
+          <p:nvPr/>
+        </p:nvSpPr>
+        <p:spPr>
+          <a:xfrm>
+            <a:off x="6667500" y="4869180"/>
+            <a:ext cx="4476750" cy="0"/>
+          </a:xfrm>
+          <a:prstGeom prst="line">
+            <a:avLst/>
+          </a:prstGeom>
+          <a:noFill/>
+          <a:ln w="12700">
+            <a:solidFill>
+              <a:srgbClr val="182838"/>
+            </a:solidFill>
+            <a:prstDash val="solid"/>
+          </a:ln>
+        </p:spPr>
+      </p:sp>
+      <p:sp>
+        <p:nvSpPr>
+          <p:cNvPr id="93" name="Shape 91"/>
+          <p:cNvSpPr/>
+          <p:nvPr/>
+        </p:nvSpPr>
+        <p:spPr>
+          <a:xfrm>
+            <a:off x="6667500" y="4396740"/>
+            <a:ext cx="4476750" cy="0"/>
+          </a:xfrm>
+          <a:prstGeom prst="line">
+            <a:avLst/>
+          </a:prstGeom>
+          <a:noFill/>
+          <a:ln w="12700">
+            <a:solidFill>
+              <a:srgbClr val="22354A"/>
+            </a:solidFill>
+            <a:prstDash val="solid"/>
+          </a:ln>
+        </p:spPr>
+      </p:sp>
+      <p:sp>
+        <p:nvSpPr>
+          <p:cNvPr id="94" name="Text 92"/>
           <p:cNvSpPr txBox="1"/>
           <p:nvPr/>
         </p:nvSpPr>
         <p:spPr>
           <a:xfrm>
-            <a:off x="7486650" y="2381250"/>
-            <a:ext cx="4019550" cy="257175"/>
+            <a:off x="6248400" y="2912745"/>
+            <a:ext cx="323850" cy="114300"/>
           </a:xfrm>
           <a:prstGeom prst="rect">
             <a:avLst/>
@@ -4606,37 +7007,1330 @@
           <a:bodyPr wrap="square" lIns="0" tIns="0" rIns="0" bIns="0" rtlCol="0" anchor="t"/>
           <a:lstStyle/>
           <a:p>
-            <a:pPr algn="l" indent="0" marL="0">
-              <a:lnSpc>
-                <a:spcPts val="2025"/>
-              </a:lnSpc>
-              <a:buNone/>
-            </a:pPr>
-            <a:r>
-              <a:rPr lang="en-US" sz="1500" b="1" dirty="0">
-                <a:solidFill>
-                  <a:srgbClr val="EAE7E0"/>
+            <a:pPr algn="r" indent="0" marL="0">
+              <a:lnSpc>
+                <a:spcPts val="900"/>
+              </a:lnSpc>
+              <a:buNone/>
+            </a:pPr>
+            <a:r>
+              <a:rPr lang="en-US" sz="750" dirty="0">
+                <a:solidFill>
+                  <a:srgbClr val="8A8880"/>
+                </a:solidFill>
+                <a:latin typeface="Consolas" pitchFamily="34" charset="0"/>
+                <a:ea typeface="Consolas" pitchFamily="34" charset="-122"/>
+                <a:cs typeface="Consolas" pitchFamily="34" charset="-120"/>
+              </a:rPr>
+              <a:t>+12</a:t>
+            </a:r>
+            <a:endParaRPr lang="en-US" sz="750" dirty="0"/>
+          </a:p>
+        </p:txBody>
+      </p:sp>
+      <p:sp>
+        <p:nvSpPr>
+          <p:cNvPr id="95" name="Text 93"/>
+          <p:cNvSpPr txBox="1"/>
+          <p:nvPr/>
+        </p:nvSpPr>
+        <p:spPr>
+          <a:xfrm>
+            <a:off x="6248400" y="3385185"/>
+            <a:ext cx="323850" cy="114300"/>
+          </a:xfrm>
+          <a:prstGeom prst="rect">
+            <a:avLst/>
+          </a:prstGeom>
+          <a:noFill/>
+          <a:ln/>
+        </p:spPr>
+        <p:txBody>
+          <a:bodyPr wrap="square" lIns="0" tIns="0" rIns="0" bIns="0" rtlCol="0" anchor="t"/>
+          <a:lstStyle/>
+          <a:p>
+            <a:pPr algn="r" indent="0" marL="0">
+              <a:lnSpc>
+                <a:spcPts val="900"/>
+              </a:lnSpc>
+              <a:buNone/>
+            </a:pPr>
+            <a:r>
+              <a:rPr lang="en-US" sz="750" dirty="0">
+                <a:solidFill>
+                  <a:srgbClr val="8A8880"/>
+                </a:solidFill>
+                <a:latin typeface="Consolas" pitchFamily="34" charset="0"/>
+                <a:ea typeface="Consolas" pitchFamily="34" charset="-122"/>
+                <a:cs typeface="Consolas" pitchFamily="34" charset="-120"/>
+              </a:rPr>
+              <a:t>+8</a:t>
+            </a:r>
+            <a:endParaRPr lang="en-US" sz="750" dirty="0"/>
+          </a:p>
+        </p:txBody>
+      </p:sp>
+      <p:sp>
+        <p:nvSpPr>
+          <p:cNvPr id="96" name="Text 94"/>
+          <p:cNvSpPr txBox="1"/>
+          <p:nvPr/>
+        </p:nvSpPr>
+        <p:spPr>
+          <a:xfrm>
+            <a:off x="6248400" y="3857625"/>
+            <a:ext cx="323850" cy="114300"/>
+          </a:xfrm>
+          <a:prstGeom prst="rect">
+            <a:avLst/>
+          </a:prstGeom>
+          <a:noFill/>
+          <a:ln/>
+        </p:spPr>
+        <p:txBody>
+          <a:bodyPr wrap="square" lIns="0" tIns="0" rIns="0" bIns="0" rtlCol="0" anchor="t"/>
+          <a:lstStyle/>
+          <a:p>
+            <a:pPr algn="r" indent="0" marL="0">
+              <a:lnSpc>
+                <a:spcPts val="900"/>
+              </a:lnSpc>
+              <a:buNone/>
+            </a:pPr>
+            <a:r>
+              <a:rPr lang="en-US" sz="750" dirty="0">
+                <a:solidFill>
+                  <a:srgbClr val="8A8880"/>
+                </a:solidFill>
+                <a:latin typeface="Consolas" pitchFamily="34" charset="0"/>
+                <a:ea typeface="Consolas" pitchFamily="34" charset="-122"/>
+                <a:cs typeface="Consolas" pitchFamily="34" charset="-120"/>
+              </a:rPr>
+              <a:t>+4</a:t>
+            </a:r>
+            <a:endParaRPr lang="en-US" sz="750" dirty="0"/>
+          </a:p>
+        </p:txBody>
+      </p:sp>
+      <p:sp>
+        <p:nvSpPr>
+          <p:cNvPr id="97" name="Text 95"/>
+          <p:cNvSpPr txBox="1"/>
+          <p:nvPr/>
+        </p:nvSpPr>
+        <p:spPr>
+          <a:xfrm>
+            <a:off x="6248400" y="4330065"/>
+            <a:ext cx="323850" cy="114300"/>
+          </a:xfrm>
+          <a:prstGeom prst="rect">
+            <a:avLst/>
+          </a:prstGeom>
+          <a:noFill/>
+          <a:ln/>
+        </p:spPr>
+        <p:txBody>
+          <a:bodyPr wrap="square" lIns="0" tIns="0" rIns="0" bIns="0" rtlCol="0" anchor="t"/>
+          <a:lstStyle/>
+          <a:p>
+            <a:pPr algn="r" indent="0" marL="0">
+              <a:lnSpc>
+                <a:spcPts val="900"/>
+              </a:lnSpc>
+              <a:buNone/>
+            </a:pPr>
+            <a:r>
+              <a:rPr lang="en-US" sz="750" dirty="0">
+                <a:solidFill>
+                  <a:srgbClr val="8A8880"/>
+                </a:solidFill>
+                <a:latin typeface="Consolas" pitchFamily="34" charset="0"/>
+                <a:ea typeface="Consolas" pitchFamily="34" charset="-122"/>
+                <a:cs typeface="Consolas" pitchFamily="34" charset="-120"/>
+              </a:rPr>
+              <a:t>0</a:t>
+            </a:r>
+            <a:endParaRPr lang="en-US" sz="750" dirty="0"/>
+          </a:p>
+        </p:txBody>
+      </p:sp>
+      <p:sp>
+        <p:nvSpPr>
+          <p:cNvPr id="98" name="Text 96"/>
+          <p:cNvSpPr txBox="1"/>
+          <p:nvPr/>
+        </p:nvSpPr>
+        <p:spPr>
+          <a:xfrm>
+            <a:off x="6248400" y="4802505"/>
+            <a:ext cx="323850" cy="114300"/>
+          </a:xfrm>
+          <a:prstGeom prst="rect">
+            <a:avLst/>
+          </a:prstGeom>
+          <a:noFill/>
+          <a:ln/>
+        </p:spPr>
+        <p:txBody>
+          <a:bodyPr wrap="square" lIns="0" tIns="0" rIns="0" bIns="0" rtlCol="0" anchor="t"/>
+          <a:lstStyle/>
+          <a:p>
+            <a:pPr algn="r" indent="0" marL="0">
+              <a:lnSpc>
+                <a:spcPts val="900"/>
+              </a:lnSpc>
+              <a:buNone/>
+            </a:pPr>
+            <a:r>
+              <a:rPr lang="en-US" sz="750" dirty="0">
+                <a:solidFill>
+                  <a:srgbClr val="8A8880"/>
+                </a:solidFill>
+                <a:latin typeface="Consolas" pitchFamily="34" charset="0"/>
+                <a:ea typeface="Consolas" pitchFamily="34" charset="-122"/>
+                <a:cs typeface="Consolas" pitchFamily="34" charset="-120"/>
+              </a:rPr>
+              <a:t>-4</a:t>
+            </a:r>
+            <a:endParaRPr lang="en-US" sz="750" dirty="0"/>
+          </a:p>
+        </p:txBody>
+      </p:sp>
+      <p:sp>
+        <p:nvSpPr>
+          <p:cNvPr id="99" name="Shape 97"/>
+          <p:cNvSpPr/>
+          <p:nvPr/>
+        </p:nvSpPr>
+        <p:spPr>
+          <a:xfrm>
+            <a:off x="6990398" y="5105400"/>
+            <a:ext cx="0" cy="47625"/>
+          </a:xfrm>
+          <a:prstGeom prst="line">
+            <a:avLst/>
+          </a:prstGeom>
+          <a:noFill/>
+          <a:ln w="12700">
+            <a:solidFill>
+              <a:srgbClr val="8A8880"/>
+            </a:solidFill>
+            <a:prstDash val="solid"/>
+          </a:ln>
+        </p:spPr>
+      </p:sp>
+      <p:sp>
+        <p:nvSpPr>
+          <p:cNvPr id="100" name="Text 98"/>
+          <p:cNvSpPr txBox="1"/>
+          <p:nvPr/>
+        </p:nvSpPr>
+        <p:spPr>
+          <a:xfrm>
+            <a:off x="6780847" y="5181600"/>
+            <a:ext cx="419100" cy="114300"/>
+          </a:xfrm>
+          <a:prstGeom prst="rect">
+            <a:avLst/>
+          </a:prstGeom>
+          <a:noFill/>
+          <a:ln/>
+        </p:spPr>
+        <p:txBody>
+          <a:bodyPr wrap="square" lIns="0" tIns="0" rIns="0" bIns="0" rtlCol="0" anchor="t"/>
+          <a:lstStyle/>
+          <a:p>
+            <a:pPr algn="ctr" indent="0" marL="0">
+              <a:lnSpc>
+                <a:spcPts val="900"/>
+              </a:lnSpc>
+              <a:buNone/>
+            </a:pPr>
+            <a:r>
+              <a:rPr lang="en-US" sz="750" dirty="0">
+                <a:solidFill>
+                  <a:srgbClr val="8A8880"/>
+                </a:solidFill>
+                <a:latin typeface="Consolas" pitchFamily="34" charset="0"/>
+                <a:ea typeface="Consolas" pitchFamily="34" charset="-122"/>
+                <a:cs typeface="Consolas" pitchFamily="34" charset="-120"/>
+              </a:rPr>
+              <a:t>0℃</a:t>
+            </a:r>
+            <a:endParaRPr lang="en-US" sz="750" dirty="0"/>
+          </a:p>
+        </p:txBody>
+      </p:sp>
+      <p:sp>
+        <p:nvSpPr>
+          <p:cNvPr id="101" name="Shape 99"/>
+          <p:cNvSpPr/>
+          <p:nvPr/>
+        </p:nvSpPr>
+        <p:spPr>
+          <a:xfrm>
+            <a:off x="8066723" y="5105400"/>
+            <a:ext cx="0" cy="47625"/>
+          </a:xfrm>
+          <a:prstGeom prst="line">
+            <a:avLst/>
+          </a:prstGeom>
+          <a:noFill/>
+          <a:ln w="12700">
+            <a:solidFill>
+              <a:srgbClr val="8A8880"/>
+            </a:solidFill>
+            <a:prstDash val="solid"/>
+          </a:ln>
+        </p:spPr>
+      </p:sp>
+      <p:sp>
+        <p:nvSpPr>
+          <p:cNvPr id="102" name="Text 100"/>
+          <p:cNvSpPr txBox="1"/>
+          <p:nvPr/>
+        </p:nvSpPr>
+        <p:spPr>
+          <a:xfrm>
+            <a:off x="7857172" y="5181600"/>
+            <a:ext cx="419100" cy="114300"/>
+          </a:xfrm>
+          <a:prstGeom prst="rect">
+            <a:avLst/>
+          </a:prstGeom>
+          <a:noFill/>
+          <a:ln/>
+        </p:spPr>
+        <p:txBody>
+          <a:bodyPr wrap="square" lIns="0" tIns="0" rIns="0" bIns="0" rtlCol="0" anchor="t"/>
+          <a:lstStyle/>
+          <a:p>
+            <a:pPr algn="ctr" indent="0" marL="0">
+              <a:lnSpc>
+                <a:spcPts val="900"/>
+              </a:lnSpc>
+              <a:buNone/>
+            </a:pPr>
+            <a:r>
+              <a:rPr lang="en-US" sz="750" dirty="0">
+                <a:solidFill>
+                  <a:srgbClr val="8A8880"/>
+                </a:solidFill>
+                <a:latin typeface="Consolas" pitchFamily="34" charset="0"/>
+                <a:ea typeface="Consolas" pitchFamily="34" charset="-122"/>
+                <a:cs typeface="Consolas" pitchFamily="34" charset="-120"/>
+              </a:rPr>
+              <a:t>10</a:t>
+            </a:r>
+            <a:endParaRPr lang="en-US" sz="750" dirty="0"/>
+          </a:p>
+        </p:txBody>
+      </p:sp>
+      <p:sp>
+        <p:nvSpPr>
+          <p:cNvPr id="103" name="Shape 101"/>
+          <p:cNvSpPr/>
+          <p:nvPr/>
+        </p:nvSpPr>
+        <p:spPr>
+          <a:xfrm>
+            <a:off x="9143048" y="5105400"/>
+            <a:ext cx="0" cy="47625"/>
+          </a:xfrm>
+          <a:prstGeom prst="line">
+            <a:avLst/>
+          </a:prstGeom>
+          <a:noFill/>
+          <a:ln w="12700">
+            <a:solidFill>
+              <a:srgbClr val="8A8880"/>
+            </a:solidFill>
+            <a:prstDash val="solid"/>
+          </a:ln>
+        </p:spPr>
+      </p:sp>
+      <p:sp>
+        <p:nvSpPr>
+          <p:cNvPr id="104" name="Text 102"/>
+          <p:cNvSpPr txBox="1"/>
+          <p:nvPr/>
+        </p:nvSpPr>
+        <p:spPr>
+          <a:xfrm>
+            <a:off x="8933498" y="5181600"/>
+            <a:ext cx="419100" cy="114300"/>
+          </a:xfrm>
+          <a:prstGeom prst="rect">
+            <a:avLst/>
+          </a:prstGeom>
+          <a:noFill/>
+          <a:ln/>
+        </p:spPr>
+        <p:txBody>
+          <a:bodyPr wrap="square" lIns="0" tIns="0" rIns="0" bIns="0" rtlCol="0" anchor="t"/>
+          <a:lstStyle/>
+          <a:p>
+            <a:pPr algn="ctr" indent="0" marL="0">
+              <a:lnSpc>
+                <a:spcPts val="900"/>
+              </a:lnSpc>
+              <a:buNone/>
+            </a:pPr>
+            <a:r>
+              <a:rPr lang="en-US" sz="750" dirty="0">
+                <a:solidFill>
+                  <a:srgbClr val="8A8880"/>
+                </a:solidFill>
+                <a:latin typeface="Consolas" pitchFamily="34" charset="0"/>
+                <a:ea typeface="Consolas" pitchFamily="34" charset="-122"/>
+                <a:cs typeface="Consolas" pitchFamily="34" charset="-120"/>
+              </a:rPr>
+              <a:t>20</a:t>
+            </a:r>
+            <a:endParaRPr lang="en-US" sz="750" dirty="0"/>
+          </a:p>
+        </p:txBody>
+      </p:sp>
+      <p:sp>
+        <p:nvSpPr>
+          <p:cNvPr id="105" name="Shape 103"/>
+          <p:cNvSpPr/>
+          <p:nvPr/>
+        </p:nvSpPr>
+        <p:spPr>
+          <a:xfrm>
+            <a:off x="10219373" y="5105400"/>
+            <a:ext cx="0" cy="47625"/>
+          </a:xfrm>
+          <a:prstGeom prst="line">
+            <a:avLst/>
+          </a:prstGeom>
+          <a:noFill/>
+          <a:ln w="12700">
+            <a:solidFill>
+              <a:srgbClr val="8A8880"/>
+            </a:solidFill>
+            <a:prstDash val="solid"/>
+          </a:ln>
+        </p:spPr>
+      </p:sp>
+      <p:sp>
+        <p:nvSpPr>
+          <p:cNvPr id="106" name="Text 104"/>
+          <p:cNvSpPr txBox="1"/>
+          <p:nvPr/>
+        </p:nvSpPr>
+        <p:spPr>
+          <a:xfrm>
+            <a:off x="10009823" y="5181600"/>
+            <a:ext cx="419100" cy="114300"/>
+          </a:xfrm>
+          <a:prstGeom prst="rect">
+            <a:avLst/>
+          </a:prstGeom>
+          <a:noFill/>
+          <a:ln/>
+        </p:spPr>
+        <p:txBody>
+          <a:bodyPr wrap="square" lIns="0" tIns="0" rIns="0" bIns="0" rtlCol="0" anchor="t"/>
+          <a:lstStyle/>
+          <a:p>
+            <a:pPr algn="ctr" indent="0" marL="0">
+              <a:lnSpc>
+                <a:spcPts val="900"/>
+              </a:lnSpc>
+              <a:buNone/>
+            </a:pPr>
+            <a:r>
+              <a:rPr lang="en-US" sz="750" dirty="0">
+                <a:solidFill>
+                  <a:srgbClr val="8A8880"/>
+                </a:solidFill>
+                <a:latin typeface="Consolas" pitchFamily="34" charset="0"/>
+                <a:ea typeface="Consolas" pitchFamily="34" charset="-122"/>
+                <a:cs typeface="Consolas" pitchFamily="34" charset="-120"/>
+              </a:rPr>
+              <a:t>30</a:t>
+            </a:r>
+            <a:endParaRPr lang="en-US" sz="750" dirty="0"/>
+          </a:p>
+        </p:txBody>
+      </p:sp>
+      <p:sp>
+        <p:nvSpPr>
+          <p:cNvPr id="107" name="Shape 105"/>
+          <p:cNvSpPr/>
+          <p:nvPr/>
+        </p:nvSpPr>
+        <p:spPr>
+          <a:xfrm>
+            <a:off x="6667500" y="4106780"/>
+            <a:ext cx="4476750" cy="0"/>
+          </a:xfrm>
+          <a:prstGeom prst="line">
+            <a:avLst/>
+          </a:prstGeom>
+          <a:noFill/>
+          <a:ln w="17780">
+            <a:solidFill>
+              <a:srgbClr val="A8BCD1"/>
+            </a:solidFill>
+            <a:prstDash val="dash"/>
+          </a:ln>
+        </p:spPr>
+      </p:sp>
+      <p:sp>
+        <p:nvSpPr>
+          <p:cNvPr id="108" name="Text 106"/>
+          <p:cNvSpPr txBox="1"/>
+          <p:nvPr/>
+        </p:nvSpPr>
+        <p:spPr>
+          <a:xfrm>
+            <a:off x="9358313" y="3916280"/>
+            <a:ext cx="1714500" cy="131445"/>
+          </a:xfrm>
+          <a:prstGeom prst="rect">
+            <a:avLst/>
+          </a:prstGeom>
+          <a:noFill/>
+          <a:ln/>
+        </p:spPr>
+        <p:txBody>
+          <a:bodyPr wrap="square" lIns="0" tIns="0" rIns="0" bIns="0" rtlCol="0" anchor="t"/>
+          <a:lstStyle/>
+          <a:p>
+            <a:pPr algn="r" indent="0" marL="0">
+              <a:lnSpc>
+                <a:spcPts val="1035"/>
+              </a:lnSpc>
+              <a:buNone/>
+            </a:pPr>
+            <a:r>
+              <a:rPr lang="en-US" sz="863" b="1" dirty="0">
+                <a:solidFill>
+                  <a:srgbClr val="A8BCD1"/>
                 </a:solidFill>
                 <a:latin typeface="Malgun Gothic" pitchFamily="34" charset="0"/>
                 <a:ea typeface="Malgun Gothic" pitchFamily="34" charset="-122"/>
                 <a:cs typeface="Malgun Gothic" pitchFamily="34" charset="-120"/>
               </a:rPr>
-              <a:t>더하는 값은 늘 같았습니다</a:t>
-            </a:r>
-            <a:endParaRPr lang="en-US" sz="1500" dirty="0"/>
-          </a:p>
-        </p:txBody>
-      </p:sp>
-      <p:sp>
-        <p:nvSpPr>
-          <p:cNvPr id="22" name="Text 19"/>
+              <a:t>적용한 보정값</a:t>
+            </a:r>
+            <a:endParaRPr lang="en-US" sz="863" dirty="0"/>
+          </a:p>
+        </p:txBody>
+      </p:sp>
+      <p:sp>
+        <p:nvSpPr>
+          <p:cNvPr id="109" name="Shape 107"/>
+          <p:cNvSpPr/>
+          <p:nvPr/>
+        </p:nvSpPr>
+        <p:spPr>
+          <a:xfrm>
+            <a:off x="6755416" y="2837326"/>
+            <a:ext cx="60960" cy="60960"/>
+          </a:xfrm>
+          <a:prstGeom prst="ellipse">
+            <a:avLst/>
+          </a:prstGeom>
+          <a:solidFill>
+            <a:srgbClr val="CFCBC2"/>
+          </a:solidFill>
+          <a:ln/>
+        </p:spPr>
+      </p:sp>
+      <p:sp>
+        <p:nvSpPr>
+          <p:cNvPr id="110" name="Shape 108"/>
+          <p:cNvSpPr/>
+          <p:nvPr/>
+        </p:nvSpPr>
+        <p:spPr>
+          <a:xfrm>
+            <a:off x="6803850" y="2893192"/>
+            <a:ext cx="60960" cy="60960"/>
+          </a:xfrm>
+          <a:prstGeom prst="ellipse">
+            <a:avLst/>
+          </a:prstGeom>
+          <a:solidFill>
+            <a:srgbClr val="CFCBC2"/>
+          </a:solidFill>
+          <a:ln/>
+        </p:spPr>
+      </p:sp>
+      <p:sp>
+        <p:nvSpPr>
+          <p:cNvPr id="111" name="Shape 109"/>
+          <p:cNvSpPr/>
+          <p:nvPr/>
+        </p:nvSpPr>
+        <p:spPr>
+          <a:xfrm>
+            <a:off x="7164419" y="3328900"/>
+            <a:ext cx="60960" cy="60960"/>
+          </a:xfrm>
+          <a:prstGeom prst="ellipse">
+            <a:avLst/>
+          </a:prstGeom>
+          <a:solidFill>
+            <a:srgbClr val="CFCBC2"/>
+          </a:solidFill>
+          <a:ln/>
+        </p:spPr>
+      </p:sp>
+      <p:sp>
+        <p:nvSpPr>
+          <p:cNvPr id="112" name="Shape 110"/>
+          <p:cNvSpPr/>
+          <p:nvPr/>
+        </p:nvSpPr>
+        <p:spPr>
+          <a:xfrm>
+            <a:off x="7379684" y="3691498"/>
+            <a:ext cx="60960" cy="60960"/>
+          </a:xfrm>
+          <a:prstGeom prst="ellipse">
+            <a:avLst/>
+          </a:prstGeom>
+          <a:solidFill>
+            <a:srgbClr val="CFCBC2"/>
+          </a:solidFill>
+          <a:ln/>
+        </p:spPr>
+      </p:sp>
+      <p:sp>
+        <p:nvSpPr>
+          <p:cNvPr id="113" name="Shape 111"/>
+          <p:cNvSpPr/>
+          <p:nvPr/>
+        </p:nvSpPr>
+        <p:spPr>
+          <a:xfrm>
+            <a:off x="7605713" y="3724450"/>
+            <a:ext cx="60960" cy="60960"/>
+          </a:xfrm>
+          <a:prstGeom prst="ellipse">
+            <a:avLst/>
+          </a:prstGeom>
+          <a:solidFill>
+            <a:srgbClr val="CFCBC2"/>
+          </a:solidFill>
+          <a:ln/>
+        </p:spPr>
+      </p:sp>
+      <p:sp>
+        <p:nvSpPr>
+          <p:cNvPr id="114" name="Shape 112"/>
+          <p:cNvSpPr/>
+          <p:nvPr/>
+        </p:nvSpPr>
+        <p:spPr>
+          <a:xfrm>
+            <a:off x="7713345" y="3778427"/>
+            <a:ext cx="60960" cy="60960"/>
+          </a:xfrm>
+          <a:prstGeom prst="ellipse">
+            <a:avLst/>
+          </a:prstGeom>
+          <a:solidFill>
+            <a:srgbClr val="CFCBC2"/>
+          </a:solidFill>
+          <a:ln/>
+        </p:spPr>
+      </p:sp>
+      <p:sp>
+        <p:nvSpPr>
+          <p:cNvPr id="115" name="Shape 113"/>
+          <p:cNvSpPr/>
+          <p:nvPr/>
+        </p:nvSpPr>
+        <p:spPr>
+          <a:xfrm>
+            <a:off x="7820978" y="3828505"/>
+            <a:ext cx="60960" cy="60960"/>
+          </a:xfrm>
+          <a:prstGeom prst="ellipse">
+            <a:avLst/>
+          </a:prstGeom>
+          <a:solidFill>
+            <a:srgbClr val="CFCBC2"/>
+          </a:solidFill>
+          <a:ln/>
+        </p:spPr>
+      </p:sp>
+      <p:sp>
+        <p:nvSpPr>
+          <p:cNvPr id="116" name="Shape 114"/>
+          <p:cNvSpPr/>
+          <p:nvPr/>
+        </p:nvSpPr>
+        <p:spPr>
+          <a:xfrm>
+            <a:off x="7917847" y="3629372"/>
+            <a:ext cx="60960" cy="60960"/>
+          </a:xfrm>
+          <a:prstGeom prst="ellipse">
+            <a:avLst/>
+          </a:prstGeom>
+          <a:solidFill>
+            <a:srgbClr val="CFCBC2"/>
+          </a:solidFill>
+          <a:ln/>
+        </p:spPr>
+      </p:sp>
+      <p:sp>
+        <p:nvSpPr>
+          <p:cNvPr id="117" name="Shape 115"/>
+          <p:cNvSpPr/>
+          <p:nvPr/>
+        </p:nvSpPr>
+        <p:spPr>
+          <a:xfrm>
+            <a:off x="7982426" y="3934332"/>
+            <a:ext cx="60960" cy="60960"/>
+          </a:xfrm>
+          <a:prstGeom prst="ellipse">
+            <a:avLst/>
+          </a:prstGeom>
+          <a:solidFill>
+            <a:srgbClr val="CFCBC2"/>
+          </a:solidFill>
+          <a:ln/>
+        </p:spPr>
+      </p:sp>
+      <p:sp>
+        <p:nvSpPr>
+          <p:cNvPr id="118" name="Shape 116"/>
+          <p:cNvSpPr/>
+          <p:nvPr/>
+        </p:nvSpPr>
+        <p:spPr>
+          <a:xfrm>
+            <a:off x="8165402" y="3758702"/>
+            <a:ext cx="60960" cy="60960"/>
+          </a:xfrm>
+          <a:prstGeom prst="ellipse">
+            <a:avLst/>
+          </a:prstGeom>
+          <a:solidFill>
+            <a:srgbClr val="CFCBC2"/>
+          </a:solidFill>
+          <a:ln/>
+        </p:spPr>
+      </p:sp>
+      <p:sp>
+        <p:nvSpPr>
+          <p:cNvPr id="119" name="Shape 117"/>
+          <p:cNvSpPr/>
+          <p:nvPr/>
+        </p:nvSpPr>
+        <p:spPr>
+          <a:xfrm>
+            <a:off x="8326850" y="3795316"/>
+            <a:ext cx="60960" cy="60960"/>
+          </a:xfrm>
+          <a:prstGeom prst="ellipse">
+            <a:avLst/>
+          </a:prstGeom>
+          <a:solidFill>
+            <a:srgbClr val="CFCBC2"/>
+          </a:solidFill>
+          <a:ln/>
+        </p:spPr>
+      </p:sp>
+      <p:sp>
+        <p:nvSpPr>
+          <p:cNvPr id="120" name="Shape 118"/>
+          <p:cNvSpPr/>
+          <p:nvPr/>
+        </p:nvSpPr>
+        <p:spPr>
+          <a:xfrm>
+            <a:off x="8359140" y="3548466"/>
+            <a:ext cx="60960" cy="60960"/>
+          </a:xfrm>
+          <a:prstGeom prst="ellipse">
+            <a:avLst/>
+          </a:prstGeom>
+          <a:solidFill>
+            <a:srgbClr val="CFCBC2"/>
+          </a:solidFill>
+          <a:ln/>
+        </p:spPr>
+      </p:sp>
+      <p:sp>
+        <p:nvSpPr>
+          <p:cNvPr id="121" name="Shape 119"/>
+          <p:cNvSpPr/>
+          <p:nvPr/>
+        </p:nvSpPr>
+        <p:spPr>
+          <a:xfrm>
+            <a:off x="8391430" y="3601025"/>
+            <a:ext cx="60960" cy="60960"/>
+          </a:xfrm>
+          <a:prstGeom prst="ellipse">
+            <a:avLst/>
+          </a:prstGeom>
+          <a:solidFill>
+            <a:srgbClr val="CFCBC2"/>
+          </a:solidFill>
+          <a:ln/>
+        </p:spPr>
+      </p:sp>
+      <p:sp>
+        <p:nvSpPr>
+          <p:cNvPr id="122" name="Shape 120"/>
+          <p:cNvSpPr/>
+          <p:nvPr/>
+        </p:nvSpPr>
+        <p:spPr>
+          <a:xfrm>
+            <a:off x="8509826" y="3498033"/>
+            <a:ext cx="60960" cy="60960"/>
+          </a:xfrm>
+          <a:prstGeom prst="ellipse">
+            <a:avLst/>
+          </a:prstGeom>
+          <a:solidFill>
+            <a:srgbClr val="CFCBC2"/>
+          </a:solidFill>
+          <a:ln/>
+        </p:spPr>
+      </p:sp>
+      <p:sp>
+        <p:nvSpPr>
+          <p:cNvPr id="123" name="Shape 121"/>
+          <p:cNvSpPr/>
+          <p:nvPr/>
+        </p:nvSpPr>
+        <p:spPr>
+          <a:xfrm>
+            <a:off x="8520589" y="3656301"/>
+            <a:ext cx="60960" cy="60960"/>
+          </a:xfrm>
+          <a:prstGeom prst="ellipse">
+            <a:avLst/>
+          </a:prstGeom>
+          <a:solidFill>
+            <a:srgbClr val="CFCBC2"/>
+          </a:solidFill>
+          <a:ln/>
+        </p:spPr>
+      </p:sp>
+      <p:sp>
+        <p:nvSpPr>
+          <p:cNvPr id="124" name="Shape 122"/>
+          <p:cNvSpPr/>
+          <p:nvPr/>
+        </p:nvSpPr>
+        <p:spPr>
+          <a:xfrm>
+            <a:off x="8585168" y="3706261"/>
+            <a:ext cx="60960" cy="60960"/>
+          </a:xfrm>
+          <a:prstGeom prst="ellipse">
+            <a:avLst/>
+          </a:prstGeom>
+          <a:solidFill>
+            <a:srgbClr val="CFCBC2"/>
+          </a:solidFill>
+          <a:ln/>
+        </p:spPr>
+      </p:sp>
+      <p:sp>
+        <p:nvSpPr>
+          <p:cNvPr id="125" name="Shape 123"/>
+          <p:cNvSpPr/>
+          <p:nvPr/>
+        </p:nvSpPr>
+        <p:spPr>
+          <a:xfrm>
+            <a:off x="8746617" y="3732482"/>
+            <a:ext cx="60960" cy="60960"/>
+          </a:xfrm>
+          <a:prstGeom prst="ellipse">
+            <a:avLst/>
+          </a:prstGeom>
+          <a:solidFill>
+            <a:srgbClr val="CFCBC2"/>
+          </a:solidFill>
+          <a:ln/>
+        </p:spPr>
+      </p:sp>
+      <p:sp>
+        <p:nvSpPr>
+          <p:cNvPr id="126" name="Shape 124"/>
+          <p:cNvSpPr/>
+          <p:nvPr/>
+        </p:nvSpPr>
+        <p:spPr>
+          <a:xfrm>
+            <a:off x="8757380" y="3692679"/>
+            <a:ext cx="60960" cy="60960"/>
+          </a:xfrm>
+          <a:prstGeom prst="ellipse">
+            <a:avLst/>
+          </a:prstGeom>
+          <a:solidFill>
+            <a:srgbClr val="CFCBC2"/>
+          </a:solidFill>
+          <a:ln/>
+        </p:spPr>
+      </p:sp>
+      <p:sp>
+        <p:nvSpPr>
+          <p:cNvPr id="127" name="Shape 125"/>
+          <p:cNvSpPr/>
+          <p:nvPr/>
+        </p:nvSpPr>
+        <p:spPr>
+          <a:xfrm>
+            <a:off x="9252490" y="4056930"/>
+            <a:ext cx="60960" cy="60960"/>
+          </a:xfrm>
+          <a:prstGeom prst="ellipse">
+            <a:avLst/>
+          </a:prstGeom>
+          <a:solidFill>
+            <a:srgbClr val="CFCBC2"/>
+          </a:solidFill>
+          <a:ln/>
+        </p:spPr>
+      </p:sp>
+      <p:sp>
+        <p:nvSpPr>
+          <p:cNvPr id="128" name="Shape 126"/>
+          <p:cNvSpPr/>
+          <p:nvPr/>
+        </p:nvSpPr>
+        <p:spPr>
+          <a:xfrm>
+            <a:off x="9661493" y="4615354"/>
+            <a:ext cx="60960" cy="60960"/>
+          </a:xfrm>
+          <a:prstGeom prst="ellipse">
+            <a:avLst/>
+          </a:prstGeom>
+          <a:solidFill>
+            <a:srgbClr val="CFCBC2"/>
+          </a:solidFill>
+          <a:ln/>
+        </p:spPr>
+      </p:sp>
+      <p:sp>
+        <p:nvSpPr>
+          <p:cNvPr id="129" name="Shape 127"/>
+          <p:cNvSpPr/>
+          <p:nvPr/>
+        </p:nvSpPr>
+        <p:spPr>
+          <a:xfrm>
+            <a:off x="9683020" y="4754133"/>
+            <a:ext cx="60960" cy="60960"/>
+          </a:xfrm>
+          <a:prstGeom prst="ellipse">
+            <a:avLst/>
+          </a:prstGeom>
+          <a:solidFill>
+            <a:srgbClr val="CFCBC2"/>
+          </a:solidFill>
+          <a:ln/>
+        </p:spPr>
+      </p:sp>
+      <p:sp>
+        <p:nvSpPr>
+          <p:cNvPr id="130" name="Shape 128"/>
+          <p:cNvSpPr/>
+          <p:nvPr/>
+        </p:nvSpPr>
+        <p:spPr>
+          <a:xfrm>
+            <a:off x="9693783" y="4434646"/>
+            <a:ext cx="60960" cy="60960"/>
+          </a:xfrm>
+          <a:prstGeom prst="ellipse">
+            <a:avLst/>
+          </a:prstGeom>
+          <a:solidFill>
+            <a:srgbClr val="CFCBC2"/>
+          </a:solidFill>
+          <a:ln/>
+        </p:spPr>
+      </p:sp>
+      <p:sp>
+        <p:nvSpPr>
+          <p:cNvPr id="131" name="Shape 129"/>
+          <p:cNvSpPr/>
+          <p:nvPr/>
+        </p:nvSpPr>
+        <p:spPr>
+          <a:xfrm>
+            <a:off x="9726073" y="4448937"/>
+            <a:ext cx="60960" cy="60960"/>
+          </a:xfrm>
+          <a:prstGeom prst="ellipse">
+            <a:avLst/>
+          </a:prstGeom>
+          <a:solidFill>
+            <a:srgbClr val="CFCBC2"/>
+          </a:solidFill>
+          <a:ln/>
+        </p:spPr>
+      </p:sp>
+      <p:sp>
+        <p:nvSpPr>
+          <p:cNvPr id="132" name="Shape 130"/>
+          <p:cNvSpPr/>
+          <p:nvPr/>
+        </p:nvSpPr>
+        <p:spPr>
+          <a:xfrm>
+            <a:off x="9909048" y="4681850"/>
+            <a:ext cx="60960" cy="60960"/>
+          </a:xfrm>
+          <a:prstGeom prst="ellipse">
+            <a:avLst/>
+          </a:prstGeom>
+          <a:solidFill>
+            <a:srgbClr val="CFCBC2"/>
+          </a:solidFill>
+          <a:ln/>
+        </p:spPr>
+      </p:sp>
+      <p:sp>
+        <p:nvSpPr>
+          <p:cNvPr id="133" name="Shape 131"/>
+          <p:cNvSpPr/>
+          <p:nvPr/>
+        </p:nvSpPr>
+        <p:spPr>
+          <a:xfrm>
+            <a:off x="10048970" y="4939684"/>
+            <a:ext cx="60960" cy="60960"/>
+          </a:xfrm>
+          <a:prstGeom prst="ellipse">
+            <a:avLst/>
+          </a:prstGeom>
+          <a:solidFill>
+            <a:srgbClr val="CFCBC2"/>
+          </a:solidFill>
+          <a:ln/>
+        </p:spPr>
+      </p:sp>
+      <p:sp>
+        <p:nvSpPr>
+          <p:cNvPr id="134" name="Shape 132"/>
+          <p:cNvSpPr/>
+          <p:nvPr/>
+        </p:nvSpPr>
+        <p:spPr>
+          <a:xfrm>
+            <a:off x="10210419" y="4555827"/>
+            <a:ext cx="60960" cy="60960"/>
+          </a:xfrm>
+          <a:prstGeom prst="ellipse">
+            <a:avLst/>
+          </a:prstGeom>
+          <a:solidFill>
+            <a:srgbClr val="CFCBC2"/>
+          </a:solidFill>
+          <a:ln/>
+        </p:spPr>
+      </p:sp>
+      <p:sp>
+        <p:nvSpPr>
+          <p:cNvPr id="135" name="Shape 133"/>
+          <p:cNvSpPr/>
+          <p:nvPr/>
+        </p:nvSpPr>
+        <p:spPr>
+          <a:xfrm>
+            <a:off x="10210419" y="4422835"/>
+            <a:ext cx="60960" cy="60960"/>
+          </a:xfrm>
+          <a:prstGeom prst="ellipse">
+            <a:avLst/>
+          </a:prstGeom>
+          <a:solidFill>
+            <a:srgbClr val="CFCBC2"/>
+          </a:solidFill>
+          <a:ln/>
+        </p:spPr>
+      </p:sp>
+      <p:sp>
+        <p:nvSpPr>
+          <p:cNvPr id="136" name="Shape 134"/>
+          <p:cNvSpPr/>
+          <p:nvPr/>
+        </p:nvSpPr>
+        <p:spPr>
+          <a:xfrm>
+            <a:off x="10264235" y="4773621"/>
+            <a:ext cx="60960" cy="60960"/>
+          </a:xfrm>
+          <a:prstGeom prst="ellipse">
+            <a:avLst/>
+          </a:prstGeom>
+          <a:solidFill>
+            <a:srgbClr val="CFCBC2"/>
+          </a:solidFill>
+          <a:ln/>
+        </p:spPr>
+      </p:sp>
+      <p:sp>
+        <p:nvSpPr>
+          <p:cNvPr id="137" name="Shape 135"/>
+          <p:cNvSpPr/>
+          <p:nvPr/>
+        </p:nvSpPr>
+        <p:spPr>
+          <a:xfrm>
+            <a:off x="10285762" y="4767362"/>
+            <a:ext cx="60960" cy="60960"/>
+          </a:xfrm>
+          <a:prstGeom prst="ellipse">
+            <a:avLst/>
+          </a:prstGeom>
+          <a:solidFill>
+            <a:srgbClr val="CFCBC2"/>
+          </a:solidFill>
+          <a:ln/>
+        </p:spPr>
+      </p:sp>
+      <p:sp>
+        <p:nvSpPr>
+          <p:cNvPr id="138" name="Shape 136"/>
+          <p:cNvSpPr/>
+          <p:nvPr/>
+        </p:nvSpPr>
+        <p:spPr>
+          <a:xfrm>
+            <a:off x="10371868" y="4469370"/>
+            <a:ext cx="60960" cy="60960"/>
+          </a:xfrm>
+          <a:prstGeom prst="ellipse">
+            <a:avLst/>
+          </a:prstGeom>
+          <a:solidFill>
+            <a:srgbClr val="CFCBC2"/>
+          </a:solidFill>
+          <a:ln/>
+        </p:spPr>
+      </p:sp>
+      <p:sp>
+        <p:nvSpPr>
+          <p:cNvPr id="139" name="Shape 137"/>
+          <p:cNvSpPr/>
+          <p:nvPr/>
+        </p:nvSpPr>
+        <p:spPr>
+          <a:xfrm>
+            <a:off x="10447210" y="4439488"/>
+            <a:ext cx="60960" cy="60960"/>
+          </a:xfrm>
+          <a:prstGeom prst="ellipse">
+            <a:avLst/>
+          </a:prstGeom>
+          <a:solidFill>
+            <a:srgbClr val="CFCBC2"/>
+          </a:solidFill>
+          <a:ln/>
+        </p:spPr>
+      </p:sp>
+      <p:sp>
+        <p:nvSpPr>
+          <p:cNvPr id="140" name="Shape 138"/>
+          <p:cNvSpPr/>
+          <p:nvPr/>
+        </p:nvSpPr>
+        <p:spPr>
+          <a:xfrm>
+            <a:off x="10479500" y="4666378"/>
+            <a:ext cx="60960" cy="60960"/>
+          </a:xfrm>
+          <a:prstGeom prst="ellipse">
+            <a:avLst/>
+          </a:prstGeom>
+          <a:solidFill>
+            <a:srgbClr val="CFCBC2"/>
+          </a:solidFill>
+          <a:ln/>
+        </p:spPr>
+      </p:sp>
+      <p:sp>
+        <p:nvSpPr>
+          <p:cNvPr id="141" name="Shape 139"/>
+          <p:cNvSpPr/>
+          <p:nvPr/>
+        </p:nvSpPr>
+        <p:spPr>
+          <a:xfrm>
+            <a:off x="10490263" y="4116930"/>
+            <a:ext cx="60960" cy="60960"/>
+          </a:xfrm>
+          <a:prstGeom prst="ellipse">
+            <a:avLst/>
+          </a:prstGeom>
+          <a:solidFill>
+            <a:srgbClr val="CFCBC2"/>
+          </a:solidFill>
+          <a:ln/>
+        </p:spPr>
+      </p:sp>
+      <p:sp>
+        <p:nvSpPr>
+          <p:cNvPr id="142" name="Shape 140"/>
+          <p:cNvSpPr/>
+          <p:nvPr/>
+        </p:nvSpPr>
+        <p:spPr>
+          <a:xfrm>
+            <a:off x="10490263" y="4201969"/>
+            <a:ext cx="60960" cy="60960"/>
+          </a:xfrm>
+          <a:prstGeom prst="ellipse">
+            <a:avLst/>
+          </a:prstGeom>
+          <a:solidFill>
+            <a:srgbClr val="CFCBC2"/>
+          </a:solidFill>
+          <a:ln/>
+        </p:spPr>
+      </p:sp>
+      <p:sp>
+        <p:nvSpPr>
+          <p:cNvPr id="143" name="Shape 141"/>
+          <p:cNvSpPr/>
+          <p:nvPr/>
+        </p:nvSpPr>
+        <p:spPr>
+          <a:xfrm>
+            <a:off x="10490263" y="4547323"/>
+            <a:ext cx="60960" cy="60960"/>
+          </a:xfrm>
+          <a:prstGeom prst="ellipse">
+            <a:avLst/>
+          </a:prstGeom>
+          <a:solidFill>
+            <a:srgbClr val="CFCBC2"/>
+          </a:solidFill>
+          <a:ln/>
+        </p:spPr>
+      </p:sp>
+      <p:sp>
+        <p:nvSpPr>
+          <p:cNvPr id="144" name="Shape 142"/>
+          <p:cNvSpPr/>
+          <p:nvPr/>
+        </p:nvSpPr>
+        <p:spPr>
+          <a:xfrm>
+            <a:off x="10576369" y="4286181"/>
+            <a:ext cx="60960" cy="60960"/>
+          </a:xfrm>
+          <a:prstGeom prst="ellipse">
+            <a:avLst/>
+          </a:prstGeom>
+          <a:solidFill>
+            <a:srgbClr val="CFCBC2"/>
+          </a:solidFill>
+          <a:ln/>
+        </p:spPr>
+      </p:sp>
+      <p:sp>
+        <p:nvSpPr>
+          <p:cNvPr id="145" name="Shape 143"/>
+          <p:cNvSpPr/>
+          <p:nvPr/>
+        </p:nvSpPr>
+        <p:spPr>
+          <a:xfrm>
+            <a:off x="10597896" y="4641102"/>
+            <a:ext cx="60960" cy="60960"/>
+          </a:xfrm>
+          <a:prstGeom prst="ellipse">
+            <a:avLst/>
+          </a:prstGeom>
+          <a:solidFill>
+            <a:srgbClr val="CFCBC2"/>
+          </a:solidFill>
+          <a:ln/>
+        </p:spPr>
+      </p:sp>
+      <p:sp>
+        <p:nvSpPr>
+          <p:cNvPr id="146" name="Shape 144"/>
+          <p:cNvSpPr/>
+          <p:nvPr/>
+        </p:nvSpPr>
+        <p:spPr>
+          <a:xfrm>
+            <a:off x="10684002" y="4278977"/>
+            <a:ext cx="60960" cy="60960"/>
+          </a:xfrm>
+          <a:prstGeom prst="ellipse">
+            <a:avLst/>
+          </a:prstGeom>
+          <a:solidFill>
+            <a:srgbClr val="CFCBC2"/>
+          </a:solidFill>
+          <a:ln/>
+        </p:spPr>
+      </p:sp>
+      <p:sp>
+        <p:nvSpPr>
+          <p:cNvPr id="147" name="Shape 145"/>
+          <p:cNvSpPr/>
+          <p:nvPr/>
+        </p:nvSpPr>
+        <p:spPr>
+          <a:xfrm>
+            <a:off x="10845451" y="4118229"/>
+            <a:ext cx="60960" cy="60960"/>
+          </a:xfrm>
+          <a:prstGeom prst="ellipse">
+            <a:avLst/>
+          </a:prstGeom>
+          <a:solidFill>
+            <a:srgbClr val="CFCBC2"/>
+          </a:solidFill>
+          <a:ln/>
+        </p:spPr>
+      </p:sp>
+      <p:sp>
+        <p:nvSpPr>
+          <p:cNvPr id="148" name="Shape 146"/>
+          <p:cNvSpPr/>
+          <p:nvPr/>
+        </p:nvSpPr>
+        <p:spPr>
+          <a:xfrm>
+            <a:off x="11039189" y="4198071"/>
+            <a:ext cx="60960" cy="60960"/>
+          </a:xfrm>
+          <a:prstGeom prst="ellipse">
+            <a:avLst/>
+          </a:prstGeom>
+          <a:solidFill>
+            <a:srgbClr val="CFCBC2"/>
+          </a:solidFill>
+          <a:ln/>
+        </p:spPr>
+      </p:sp>
+      <p:sp>
+        <p:nvSpPr>
+          <p:cNvPr id="149" name="Text 147"/>
           <p:cNvSpPr txBox="1"/>
           <p:nvPr/>
         </p:nvSpPr>
         <p:spPr>
           <a:xfrm>
-            <a:off x="7162800" y="2686050"/>
-            <a:ext cx="4343400" cy="207169"/>
+            <a:off x="6248400" y="5429250"/>
+            <a:ext cx="5143500" cy="426720"/>
           </a:xfrm>
           <a:prstGeom prst="rect">
             <a:avLst/>
@@ -4650,12 +8344,12 @@
           <a:p>
             <a:pPr algn="l" indent="0" marL="0">
               <a:lnSpc>
-                <a:spcPts val="1631"/>
-              </a:lnSpc>
-              <a:buNone/>
-            </a:pPr>
-            <a:r>
-              <a:rPr lang="en-US" sz="1088" dirty="0">
+                <a:spcPts val="1680"/>
+              </a:lnSpc>
+              <a:buNone/>
+            </a:pPr>
+            <a:r>
+              <a:rPr lang="en-US" sz="1050" dirty="0">
                 <a:solidFill>
                   <a:srgbClr val="CFCBC2"/>
                 </a:solidFill>
@@ -4663,22 +8357,22 @@
                 <a:ea typeface="Malgun Gothic" pitchFamily="34" charset="-122"/>
                 <a:cs typeface="Malgun Gothic" pitchFamily="34" charset="-120"/>
               </a:rPr>
-              <a:t>차이가 얼마든 4를 더했습니다.</a:t>
-            </a:r>
-            <a:endParaRPr lang="en-US" sz="1088" dirty="0"/>
-          </a:p>
-        </p:txBody>
-      </p:sp>
-      <p:sp>
-        <p:nvSpPr>
-          <p:cNvPr id="23" name="Shape 20"/>
-          <p:cNvSpPr/>
-          <p:nvPr/>
-        </p:nvSpPr>
-        <p:spPr>
-          <a:xfrm>
-            <a:off x="7162800" y="3067050"/>
-            <a:ext cx="4343400" cy="0"/>
+              <a:t>추울 때는 더 나오고 더울 때는 덜 나옵니다. 그 폭이 온도마다 달랐습니다.</a:t>
+            </a:r>
+            <a:endParaRPr lang="en-US" sz="1050" dirty="0"/>
+          </a:p>
+        </p:txBody>
+      </p:sp>
+      <p:sp>
+        <p:nvSpPr>
+          <p:cNvPr id="150" name="Shape 148"/>
+          <p:cNvSpPr/>
+          <p:nvPr/>
+        </p:nvSpPr>
+        <p:spPr>
+          <a:xfrm>
+            <a:off x="685800" y="6057900"/>
+            <a:ext cx="10820400" cy="0"/>
           </a:xfrm>
           <a:prstGeom prst="line">
             <a:avLst/>
@@ -4694,14 +8388,14 @@
       </p:sp>
       <p:sp>
         <p:nvSpPr>
-          <p:cNvPr id="24" name="Text 21"/>
+          <p:cNvPr id="151" name="Text 149"/>
           <p:cNvSpPr txBox="1"/>
           <p:nvPr/>
         </p:nvSpPr>
         <p:spPr>
           <a:xfrm>
-            <a:off x="7162800" y="3200400"/>
-            <a:ext cx="3238500" cy="125016"/>
+            <a:off x="685800" y="6267450"/>
+            <a:ext cx="476250" cy="120015"/>
           </a:xfrm>
           <a:prstGeom prst="rect">
             <a:avLst/>
@@ -4715,20 +8409,20 @@
           <a:p>
             <a:pPr algn="l" indent="0" marL="0">
               <a:lnSpc>
-                <a:spcPts val="984"/>
-              </a:lnSpc>
-              <a:buNone/>
-            </a:pPr>
-            <a:r>
-              <a:rPr lang="en-US" sz="788" b="1" spc="150" kern="0" dirty="0">
-                <a:solidFill>
-                  <a:srgbClr val="8A8880"/>
+                <a:spcPts val="945"/>
+              </a:lnSpc>
+              <a:buNone/>
+            </a:pPr>
+            <a:r>
+              <a:rPr lang="en-US" sz="788" b="1" spc="180" kern="0" dirty="0">
+                <a:solidFill>
+                  <a:srgbClr val="EFB13C"/>
                 </a:solidFill>
                 <a:latin typeface="Consolas" pitchFamily="34" charset="0"/>
                 <a:ea typeface="Consolas" pitchFamily="34" charset="-122"/>
                 <a:cs typeface="Consolas" pitchFamily="34" charset="-120"/>
               </a:rPr>
-              <a:t>시험 40회를 온도별로 전부 찍으면</a:t>
+              <a:t>결론</a:t>
             </a:r>
             <a:endParaRPr lang="en-US" sz="788" dirty="0"/>
           </a:p>
@@ -4736,129 +8430,14 @@
       </p:sp>
       <p:sp>
         <p:nvSpPr>
-          <p:cNvPr id="25" name="Shape 22"/>
-          <p:cNvSpPr/>
-          <p:nvPr/>
-        </p:nvSpPr>
-        <p:spPr>
-          <a:xfrm>
-            <a:off x="7391400" y="3718560"/>
-            <a:ext cx="3943350" cy="0"/>
-          </a:xfrm>
-          <a:prstGeom prst="line">
-            <a:avLst/>
-          </a:prstGeom>
-          <a:noFill/>
-          <a:ln w="12700">
-            <a:solidFill>
-              <a:srgbClr val="182838"/>
-            </a:solidFill>
-            <a:prstDash val="solid"/>
-          </a:ln>
-        </p:spPr>
-      </p:sp>
-      <p:sp>
-        <p:nvSpPr>
-          <p:cNvPr id="26" name="Shape 23"/>
-          <p:cNvSpPr/>
-          <p:nvPr/>
-        </p:nvSpPr>
-        <p:spPr>
-          <a:xfrm>
-            <a:off x="7391400" y="4069080"/>
-            <a:ext cx="3943350" cy="0"/>
-          </a:xfrm>
-          <a:prstGeom prst="line">
-            <a:avLst/>
-          </a:prstGeom>
-          <a:noFill/>
-          <a:ln w="12700">
-            <a:solidFill>
-              <a:srgbClr val="182838"/>
-            </a:solidFill>
-            <a:prstDash val="solid"/>
-          </a:ln>
-        </p:spPr>
-      </p:sp>
-      <p:sp>
-        <p:nvSpPr>
-          <p:cNvPr id="27" name="Shape 24"/>
-          <p:cNvSpPr/>
-          <p:nvPr/>
-        </p:nvSpPr>
-        <p:spPr>
-          <a:xfrm>
-            <a:off x="7391400" y="4419600"/>
-            <a:ext cx="3943350" cy="0"/>
-          </a:xfrm>
-          <a:prstGeom prst="line">
-            <a:avLst/>
-          </a:prstGeom>
-          <a:noFill/>
-          <a:ln w="12700">
-            <a:solidFill>
-              <a:srgbClr val="182838"/>
-            </a:solidFill>
-            <a:prstDash val="solid"/>
-          </a:ln>
-        </p:spPr>
-      </p:sp>
-      <p:sp>
-        <p:nvSpPr>
-          <p:cNvPr id="28" name="Shape 25"/>
-          <p:cNvSpPr/>
-          <p:nvPr/>
-        </p:nvSpPr>
-        <p:spPr>
-          <a:xfrm>
-            <a:off x="7391400" y="5120640"/>
-            <a:ext cx="3943350" cy="0"/>
-          </a:xfrm>
-          <a:prstGeom prst="line">
-            <a:avLst/>
-          </a:prstGeom>
-          <a:noFill/>
-          <a:ln w="12700">
-            <a:solidFill>
-              <a:srgbClr val="182838"/>
-            </a:solidFill>
-            <a:prstDash val="solid"/>
-          </a:ln>
-        </p:spPr>
-      </p:sp>
-      <p:sp>
-        <p:nvSpPr>
-          <p:cNvPr id="29" name="Shape 26"/>
-          <p:cNvSpPr/>
-          <p:nvPr/>
-        </p:nvSpPr>
-        <p:spPr>
-          <a:xfrm>
-            <a:off x="7391400" y="4770120"/>
-            <a:ext cx="3943350" cy="0"/>
-          </a:xfrm>
-          <a:prstGeom prst="line">
-            <a:avLst/>
-          </a:prstGeom>
-          <a:noFill/>
-          <a:ln w="12700">
-            <a:solidFill>
-              <a:srgbClr val="22354A"/>
-            </a:solidFill>
-            <a:prstDash val="solid"/>
-          </a:ln>
-        </p:spPr>
-      </p:sp>
-      <p:sp>
-        <p:nvSpPr>
-          <p:cNvPr id="30" name="Text 27"/>
+          <p:cNvPr id="152" name="Text 150"/>
           <p:cNvSpPr txBox="1"/>
           <p:nvPr/>
         </p:nvSpPr>
         <p:spPr>
           <a:xfrm>
-            <a:off x="7029450" y="3651885"/>
-            <a:ext cx="304800" cy="114300"/>
+            <a:off x="1219200" y="6229350"/>
+            <a:ext cx="10287000" cy="220027"/>
           </a:xfrm>
           <a:prstGeom prst="rect">
             <a:avLst/>
@@ -4870,1464 +8449,22 @@
           <a:bodyPr wrap="square" lIns="0" tIns="0" rIns="0" bIns="0" rtlCol="0" anchor="t"/>
           <a:lstStyle/>
           <a:p>
-            <a:pPr algn="r" indent="0" marL="0">
-              <a:lnSpc>
-                <a:spcPts val="900"/>
-              </a:lnSpc>
-              <a:buNone/>
-            </a:pPr>
-            <a:r>
-              <a:rPr lang="en-US" sz="750" dirty="0">
-                <a:solidFill>
-                  <a:srgbClr val="8A8880"/>
-                </a:solidFill>
-                <a:latin typeface="Consolas" pitchFamily="34" charset="0"/>
-                <a:ea typeface="Consolas" pitchFamily="34" charset="-122"/>
-                <a:cs typeface="Consolas" pitchFamily="34" charset="-120"/>
-              </a:rPr>
-              <a:t>+12</a:t>
-            </a:r>
-            <a:endParaRPr lang="en-US" sz="750" dirty="0"/>
-          </a:p>
-        </p:txBody>
-      </p:sp>
-      <p:sp>
-        <p:nvSpPr>
-          <p:cNvPr id="31" name="Text 28"/>
-          <p:cNvSpPr txBox="1"/>
-          <p:nvPr/>
-        </p:nvSpPr>
-        <p:spPr>
-          <a:xfrm>
-            <a:off x="7029450" y="4002405"/>
-            <a:ext cx="304800" cy="114300"/>
-          </a:xfrm>
-          <a:prstGeom prst="rect">
-            <a:avLst/>
-          </a:prstGeom>
-          <a:noFill/>
-          <a:ln/>
-        </p:spPr>
-        <p:txBody>
-          <a:bodyPr wrap="square" lIns="0" tIns="0" rIns="0" bIns="0" rtlCol="0" anchor="t"/>
-          <a:lstStyle/>
-          <a:p>
-            <a:pPr algn="r" indent="0" marL="0">
-              <a:lnSpc>
-                <a:spcPts val="900"/>
-              </a:lnSpc>
-              <a:buNone/>
-            </a:pPr>
-            <a:r>
-              <a:rPr lang="en-US" sz="750" dirty="0">
-                <a:solidFill>
-                  <a:srgbClr val="8A8880"/>
-                </a:solidFill>
-                <a:latin typeface="Consolas" pitchFamily="34" charset="0"/>
-                <a:ea typeface="Consolas" pitchFamily="34" charset="-122"/>
-                <a:cs typeface="Consolas" pitchFamily="34" charset="-120"/>
-              </a:rPr>
-              <a:t>+8</a:t>
-            </a:r>
-            <a:endParaRPr lang="en-US" sz="750" dirty="0"/>
-          </a:p>
-        </p:txBody>
-      </p:sp>
-      <p:sp>
-        <p:nvSpPr>
-          <p:cNvPr id="32" name="Text 29"/>
-          <p:cNvSpPr txBox="1"/>
-          <p:nvPr/>
-        </p:nvSpPr>
-        <p:spPr>
-          <a:xfrm>
-            <a:off x="7029450" y="4352925"/>
-            <a:ext cx="304800" cy="114300"/>
-          </a:xfrm>
-          <a:prstGeom prst="rect">
-            <a:avLst/>
-          </a:prstGeom>
-          <a:noFill/>
-          <a:ln/>
-        </p:spPr>
-        <p:txBody>
-          <a:bodyPr wrap="square" lIns="0" tIns="0" rIns="0" bIns="0" rtlCol="0" anchor="t"/>
-          <a:lstStyle/>
-          <a:p>
-            <a:pPr algn="r" indent="0" marL="0">
-              <a:lnSpc>
-                <a:spcPts val="900"/>
-              </a:lnSpc>
-              <a:buNone/>
-            </a:pPr>
-            <a:r>
-              <a:rPr lang="en-US" sz="750" dirty="0">
-                <a:solidFill>
-                  <a:srgbClr val="8A8880"/>
-                </a:solidFill>
-                <a:latin typeface="Consolas" pitchFamily="34" charset="0"/>
-                <a:ea typeface="Consolas" pitchFamily="34" charset="-122"/>
-                <a:cs typeface="Consolas" pitchFamily="34" charset="-120"/>
-              </a:rPr>
-              <a:t>+4</a:t>
-            </a:r>
-            <a:endParaRPr lang="en-US" sz="750" dirty="0"/>
-          </a:p>
-        </p:txBody>
-      </p:sp>
-      <p:sp>
-        <p:nvSpPr>
-          <p:cNvPr id="33" name="Text 30"/>
-          <p:cNvSpPr txBox="1"/>
-          <p:nvPr/>
-        </p:nvSpPr>
-        <p:spPr>
-          <a:xfrm>
-            <a:off x="7029450" y="4703445"/>
-            <a:ext cx="304800" cy="114300"/>
-          </a:xfrm>
-          <a:prstGeom prst="rect">
-            <a:avLst/>
-          </a:prstGeom>
-          <a:noFill/>
-          <a:ln/>
-        </p:spPr>
-        <p:txBody>
-          <a:bodyPr wrap="square" lIns="0" tIns="0" rIns="0" bIns="0" rtlCol="0" anchor="t"/>
-          <a:lstStyle/>
-          <a:p>
-            <a:pPr algn="r" indent="0" marL="0">
-              <a:lnSpc>
-                <a:spcPts val="900"/>
-              </a:lnSpc>
-              <a:buNone/>
-            </a:pPr>
-            <a:r>
-              <a:rPr lang="en-US" sz="750" dirty="0">
-                <a:solidFill>
-                  <a:srgbClr val="8A8880"/>
-                </a:solidFill>
-                <a:latin typeface="Consolas" pitchFamily="34" charset="0"/>
-                <a:ea typeface="Consolas" pitchFamily="34" charset="-122"/>
-                <a:cs typeface="Consolas" pitchFamily="34" charset="-120"/>
-              </a:rPr>
-              <a:t>0</a:t>
-            </a:r>
-            <a:endParaRPr lang="en-US" sz="750" dirty="0"/>
-          </a:p>
-        </p:txBody>
-      </p:sp>
-      <p:sp>
-        <p:nvSpPr>
-          <p:cNvPr id="34" name="Text 31"/>
-          <p:cNvSpPr txBox="1"/>
-          <p:nvPr/>
-        </p:nvSpPr>
-        <p:spPr>
-          <a:xfrm>
-            <a:off x="7029450" y="5053965"/>
-            <a:ext cx="304800" cy="114300"/>
-          </a:xfrm>
-          <a:prstGeom prst="rect">
-            <a:avLst/>
-          </a:prstGeom>
-          <a:noFill/>
-          <a:ln/>
-        </p:spPr>
-        <p:txBody>
-          <a:bodyPr wrap="square" lIns="0" tIns="0" rIns="0" bIns="0" rtlCol="0" anchor="t"/>
-          <a:lstStyle/>
-          <a:p>
-            <a:pPr algn="r" indent="0" marL="0">
-              <a:lnSpc>
-                <a:spcPts val="900"/>
-              </a:lnSpc>
-              <a:buNone/>
-            </a:pPr>
-            <a:r>
-              <a:rPr lang="en-US" sz="750" dirty="0">
-                <a:solidFill>
-                  <a:srgbClr val="8A8880"/>
-                </a:solidFill>
-                <a:latin typeface="Consolas" pitchFamily="34" charset="0"/>
-                <a:ea typeface="Consolas" pitchFamily="34" charset="-122"/>
-                <a:cs typeface="Consolas" pitchFamily="34" charset="-120"/>
-              </a:rPr>
-              <a:t>-4</a:t>
-            </a:r>
-            <a:endParaRPr lang="en-US" sz="750" dirty="0"/>
-          </a:p>
-        </p:txBody>
-      </p:sp>
-      <p:sp>
-        <p:nvSpPr>
-          <p:cNvPr id="35" name="Shape 32"/>
-          <p:cNvSpPr/>
-          <p:nvPr/>
-        </p:nvSpPr>
-        <p:spPr>
-          <a:xfrm>
-            <a:off x="7674293" y="5295900"/>
-            <a:ext cx="0" cy="47625"/>
-          </a:xfrm>
-          <a:prstGeom prst="line">
-            <a:avLst/>
-          </a:prstGeom>
-          <a:noFill/>
-          <a:ln w="12700">
-            <a:solidFill>
-              <a:srgbClr val="8A8880"/>
-            </a:solidFill>
-            <a:prstDash val="solid"/>
-          </a:ln>
-        </p:spPr>
-      </p:sp>
-      <p:sp>
-        <p:nvSpPr>
-          <p:cNvPr id="36" name="Text 33"/>
-          <p:cNvSpPr txBox="1"/>
-          <p:nvPr/>
-        </p:nvSpPr>
-        <p:spPr>
-          <a:xfrm>
-            <a:off x="7464743" y="5372100"/>
-            <a:ext cx="419100" cy="114300"/>
-          </a:xfrm>
-          <a:prstGeom prst="rect">
-            <a:avLst/>
-          </a:prstGeom>
-          <a:noFill/>
-          <a:ln/>
-        </p:spPr>
-        <p:txBody>
-          <a:bodyPr wrap="square" lIns="0" tIns="0" rIns="0" bIns="0" rtlCol="0" anchor="t"/>
-          <a:lstStyle/>
-          <a:p>
-            <a:pPr algn="ctr" indent="0" marL="0">
-              <a:lnSpc>
-                <a:spcPts val="900"/>
-              </a:lnSpc>
-              <a:buNone/>
-            </a:pPr>
-            <a:r>
-              <a:rPr lang="en-US" sz="750" dirty="0">
-                <a:solidFill>
-                  <a:srgbClr val="8A8880"/>
-                </a:solidFill>
-                <a:latin typeface="Consolas" pitchFamily="34" charset="0"/>
-                <a:ea typeface="Consolas" pitchFamily="34" charset="-122"/>
-                <a:cs typeface="Consolas" pitchFamily="34" charset="-120"/>
-              </a:rPr>
-              <a:t>0℃</a:t>
-            </a:r>
-            <a:endParaRPr lang="en-US" sz="750" dirty="0"/>
-          </a:p>
-        </p:txBody>
-      </p:sp>
-      <p:sp>
-        <p:nvSpPr>
-          <p:cNvPr id="37" name="Shape 34"/>
-          <p:cNvSpPr/>
-          <p:nvPr/>
-        </p:nvSpPr>
-        <p:spPr>
-          <a:xfrm>
-            <a:off x="8617268" y="5295900"/>
-            <a:ext cx="0" cy="47625"/>
-          </a:xfrm>
-          <a:prstGeom prst="line">
-            <a:avLst/>
-          </a:prstGeom>
-          <a:noFill/>
-          <a:ln w="12700">
-            <a:solidFill>
-              <a:srgbClr val="8A8880"/>
-            </a:solidFill>
-            <a:prstDash val="solid"/>
-          </a:ln>
-        </p:spPr>
-      </p:sp>
-      <p:sp>
-        <p:nvSpPr>
-          <p:cNvPr id="38" name="Text 35"/>
-          <p:cNvSpPr txBox="1"/>
-          <p:nvPr/>
-        </p:nvSpPr>
-        <p:spPr>
-          <a:xfrm>
-            <a:off x="8407718" y="5372100"/>
-            <a:ext cx="419100" cy="114300"/>
-          </a:xfrm>
-          <a:prstGeom prst="rect">
-            <a:avLst/>
-          </a:prstGeom>
-          <a:noFill/>
-          <a:ln/>
-        </p:spPr>
-        <p:txBody>
-          <a:bodyPr wrap="square" lIns="0" tIns="0" rIns="0" bIns="0" rtlCol="0" anchor="t"/>
-          <a:lstStyle/>
-          <a:p>
-            <a:pPr algn="ctr" indent="0" marL="0">
-              <a:lnSpc>
-                <a:spcPts val="900"/>
-              </a:lnSpc>
-              <a:buNone/>
-            </a:pPr>
-            <a:r>
-              <a:rPr lang="en-US" sz="750" dirty="0">
-                <a:solidFill>
-                  <a:srgbClr val="8A8880"/>
-                </a:solidFill>
-                <a:latin typeface="Consolas" pitchFamily="34" charset="0"/>
-                <a:ea typeface="Consolas" pitchFamily="34" charset="-122"/>
-                <a:cs typeface="Consolas" pitchFamily="34" charset="-120"/>
-              </a:rPr>
-              <a:t>10</a:t>
-            </a:r>
-            <a:endParaRPr lang="en-US" sz="750" dirty="0"/>
-          </a:p>
-        </p:txBody>
-      </p:sp>
-      <p:sp>
-        <p:nvSpPr>
-          <p:cNvPr id="39" name="Shape 36"/>
-          <p:cNvSpPr/>
-          <p:nvPr/>
-        </p:nvSpPr>
-        <p:spPr>
-          <a:xfrm>
-            <a:off x="9560243" y="5295900"/>
-            <a:ext cx="0" cy="47625"/>
-          </a:xfrm>
-          <a:prstGeom prst="line">
-            <a:avLst/>
-          </a:prstGeom>
-          <a:noFill/>
-          <a:ln w="12700">
-            <a:solidFill>
-              <a:srgbClr val="8A8880"/>
-            </a:solidFill>
-            <a:prstDash val="solid"/>
-          </a:ln>
-        </p:spPr>
-      </p:sp>
-      <p:sp>
-        <p:nvSpPr>
-          <p:cNvPr id="40" name="Text 37"/>
-          <p:cNvSpPr txBox="1"/>
-          <p:nvPr/>
-        </p:nvSpPr>
-        <p:spPr>
-          <a:xfrm>
-            <a:off x="9350693" y="5372100"/>
-            <a:ext cx="419100" cy="114300"/>
-          </a:xfrm>
-          <a:prstGeom prst="rect">
-            <a:avLst/>
-          </a:prstGeom>
-          <a:noFill/>
-          <a:ln/>
-        </p:spPr>
-        <p:txBody>
-          <a:bodyPr wrap="square" lIns="0" tIns="0" rIns="0" bIns="0" rtlCol="0" anchor="t"/>
-          <a:lstStyle/>
-          <a:p>
-            <a:pPr algn="ctr" indent="0" marL="0">
-              <a:lnSpc>
-                <a:spcPts val="900"/>
-              </a:lnSpc>
-              <a:buNone/>
-            </a:pPr>
-            <a:r>
-              <a:rPr lang="en-US" sz="750" dirty="0">
-                <a:solidFill>
-                  <a:srgbClr val="8A8880"/>
-                </a:solidFill>
-                <a:latin typeface="Consolas" pitchFamily="34" charset="0"/>
-                <a:ea typeface="Consolas" pitchFamily="34" charset="-122"/>
-                <a:cs typeface="Consolas" pitchFamily="34" charset="-120"/>
-              </a:rPr>
-              <a:t>20</a:t>
-            </a:r>
-            <a:endParaRPr lang="en-US" sz="750" dirty="0"/>
-          </a:p>
-        </p:txBody>
-      </p:sp>
-      <p:sp>
-        <p:nvSpPr>
-          <p:cNvPr id="41" name="Shape 38"/>
-          <p:cNvSpPr/>
-          <p:nvPr/>
-        </p:nvSpPr>
-        <p:spPr>
-          <a:xfrm>
-            <a:off x="10503218" y="5295900"/>
-            <a:ext cx="0" cy="47625"/>
-          </a:xfrm>
-          <a:prstGeom prst="line">
-            <a:avLst/>
-          </a:prstGeom>
-          <a:noFill/>
-          <a:ln w="12700">
-            <a:solidFill>
-              <a:srgbClr val="8A8880"/>
-            </a:solidFill>
-            <a:prstDash val="solid"/>
-          </a:ln>
-        </p:spPr>
-      </p:sp>
-      <p:sp>
-        <p:nvSpPr>
-          <p:cNvPr id="42" name="Text 39"/>
-          <p:cNvSpPr txBox="1"/>
-          <p:nvPr/>
-        </p:nvSpPr>
-        <p:spPr>
-          <a:xfrm>
-            <a:off x="10293668" y="5372100"/>
-            <a:ext cx="419100" cy="114300"/>
-          </a:xfrm>
-          <a:prstGeom prst="rect">
-            <a:avLst/>
-          </a:prstGeom>
-          <a:noFill/>
-          <a:ln/>
-        </p:spPr>
-        <p:txBody>
-          <a:bodyPr wrap="square" lIns="0" tIns="0" rIns="0" bIns="0" rtlCol="0" anchor="t"/>
-          <a:lstStyle/>
-          <a:p>
-            <a:pPr algn="ctr" indent="0" marL="0">
-              <a:lnSpc>
-                <a:spcPts val="900"/>
-              </a:lnSpc>
-              <a:buNone/>
-            </a:pPr>
-            <a:r>
-              <a:rPr lang="en-US" sz="750" dirty="0">
-                <a:solidFill>
-                  <a:srgbClr val="8A8880"/>
-                </a:solidFill>
-                <a:latin typeface="Consolas" pitchFamily="34" charset="0"/>
-                <a:ea typeface="Consolas" pitchFamily="34" charset="-122"/>
-                <a:cs typeface="Consolas" pitchFamily="34" charset="-120"/>
-              </a:rPr>
-              <a:t>30</a:t>
-            </a:r>
-            <a:endParaRPr lang="en-US" sz="750" dirty="0"/>
-          </a:p>
-        </p:txBody>
-      </p:sp>
-      <p:sp>
-        <p:nvSpPr>
-          <p:cNvPr id="43" name="Shape 40"/>
-          <p:cNvSpPr/>
-          <p:nvPr/>
-        </p:nvSpPr>
-        <p:spPr>
-          <a:xfrm>
-            <a:off x="7391400" y="4554988"/>
-            <a:ext cx="3943350" cy="0"/>
-          </a:xfrm>
-          <a:prstGeom prst="line">
-            <a:avLst/>
-          </a:prstGeom>
-          <a:noFill/>
-          <a:ln w="17780">
-            <a:solidFill>
-              <a:srgbClr val="A8BCD1"/>
-            </a:solidFill>
-            <a:prstDash val="dash"/>
-          </a:ln>
-        </p:spPr>
-      </p:sp>
-      <p:sp>
-        <p:nvSpPr>
-          <p:cNvPr id="44" name="Text 41"/>
-          <p:cNvSpPr txBox="1"/>
-          <p:nvPr/>
-        </p:nvSpPr>
-        <p:spPr>
-          <a:xfrm>
-            <a:off x="9937433" y="4364488"/>
-            <a:ext cx="1524000" cy="131445"/>
-          </a:xfrm>
-          <a:prstGeom prst="rect">
-            <a:avLst/>
-          </a:prstGeom>
-          <a:noFill/>
-          <a:ln/>
-        </p:spPr>
-        <p:txBody>
-          <a:bodyPr wrap="square" lIns="0" tIns="0" rIns="0" bIns="0" rtlCol="0" anchor="t"/>
-          <a:lstStyle/>
-          <a:p>
-            <a:pPr algn="r" indent="0" marL="0">
-              <a:lnSpc>
-                <a:spcPts val="1035"/>
-              </a:lnSpc>
-              <a:buNone/>
-            </a:pPr>
-            <a:r>
-              <a:rPr lang="en-US" sz="863" b="1" dirty="0">
-                <a:solidFill>
-                  <a:srgbClr val="A8BCD1"/>
+            <a:pPr algn="l" indent="0" marL="0">
+              <a:lnSpc>
+                <a:spcPts val="1733"/>
+              </a:lnSpc>
+              <a:buNone/>
+            </a:pPr>
+            <a:r>
+              <a:rPr lang="en-US" sz="1238" dirty="0">
+                <a:solidFill>
+                  <a:srgbClr val="CFCBC2"/>
                 </a:solidFill>
                 <a:latin typeface="Malgun Gothic" pitchFamily="34" charset="0"/>
                 <a:ea typeface="Malgun Gothic" pitchFamily="34" charset="-122"/>
                 <a:cs typeface="Malgun Gothic" pitchFamily="34" charset="-120"/>
               </a:rPr>
-              <a:t>늘 더하던 값</a:t>
-            </a:r>
-            <a:endParaRPr lang="en-US" sz="863" dirty="0"/>
-          </a:p>
-        </p:txBody>
-      </p:sp>
-      <p:sp>
-        <p:nvSpPr>
-          <p:cNvPr id="45" name="Shape 42"/>
-          <p:cNvSpPr/>
-          <p:nvPr/>
-        </p:nvSpPr>
-        <p:spPr>
-          <a:xfrm>
-            <a:off x="7464647" y="3605270"/>
-            <a:ext cx="60960" cy="60960"/>
-          </a:xfrm>
-          <a:prstGeom prst="ellipse">
-            <a:avLst/>
-          </a:prstGeom>
-          <a:solidFill>
-            <a:srgbClr val="CFCBC2"/>
-          </a:solidFill>
-          <a:ln/>
-        </p:spPr>
-      </p:sp>
-      <p:sp>
-        <p:nvSpPr>
-          <p:cNvPr id="46" name="Shape 43"/>
-          <p:cNvSpPr/>
-          <p:nvPr/>
-        </p:nvSpPr>
-        <p:spPr>
-          <a:xfrm>
-            <a:off x="7507081" y="3646719"/>
-            <a:ext cx="60960" cy="60960"/>
-          </a:xfrm>
-          <a:prstGeom prst="ellipse">
-            <a:avLst/>
-          </a:prstGeom>
-          <a:solidFill>
-            <a:srgbClr val="CFCBC2"/>
-          </a:solidFill>
-          <a:ln/>
-        </p:spPr>
-      </p:sp>
-      <p:sp>
-        <p:nvSpPr>
-          <p:cNvPr id="47" name="Shape 44"/>
-          <p:cNvSpPr/>
-          <p:nvPr/>
-        </p:nvSpPr>
-        <p:spPr>
-          <a:xfrm>
-            <a:off x="7822978" y="3969986"/>
-            <a:ext cx="60960" cy="60960"/>
-          </a:xfrm>
-          <a:prstGeom prst="ellipse">
-            <a:avLst/>
-          </a:prstGeom>
-          <a:solidFill>
-            <a:srgbClr val="CFCBC2"/>
-          </a:solidFill>
-          <a:ln/>
-        </p:spPr>
-      </p:sp>
-      <p:sp>
-        <p:nvSpPr>
-          <p:cNvPr id="48" name="Shape 45"/>
-          <p:cNvSpPr/>
-          <p:nvPr/>
-        </p:nvSpPr>
-        <p:spPr>
-          <a:xfrm>
-            <a:off x="8011573" y="4239010"/>
-            <a:ext cx="60960" cy="60960"/>
-          </a:xfrm>
-          <a:prstGeom prst="ellipse">
-            <a:avLst/>
-          </a:prstGeom>
-          <a:solidFill>
-            <a:srgbClr val="CFCBC2"/>
-          </a:solidFill>
-          <a:ln/>
-        </p:spPr>
-      </p:sp>
-      <p:sp>
-        <p:nvSpPr>
-          <p:cNvPr id="49" name="Shape 46"/>
-          <p:cNvSpPr/>
-          <p:nvPr/>
-        </p:nvSpPr>
-        <p:spPr>
-          <a:xfrm>
-            <a:off x="8209598" y="4263459"/>
-            <a:ext cx="60960" cy="60960"/>
-          </a:xfrm>
-          <a:prstGeom prst="ellipse">
-            <a:avLst/>
-          </a:prstGeom>
-          <a:solidFill>
-            <a:srgbClr val="CFCBC2"/>
-          </a:solidFill>
-          <a:ln/>
-        </p:spPr>
-      </p:sp>
-      <p:sp>
-        <p:nvSpPr>
-          <p:cNvPr id="50" name="Shape 47"/>
-          <p:cNvSpPr/>
-          <p:nvPr/>
-        </p:nvSpPr>
-        <p:spPr>
-          <a:xfrm>
-            <a:off x="8303895" y="4303505"/>
-            <a:ext cx="60960" cy="60960"/>
-          </a:xfrm>
-          <a:prstGeom prst="ellipse">
-            <a:avLst/>
-          </a:prstGeom>
-          <a:solidFill>
-            <a:srgbClr val="CFCBC2"/>
-          </a:solidFill>
-          <a:ln/>
-        </p:spPr>
-      </p:sp>
-      <p:sp>
-        <p:nvSpPr>
-          <p:cNvPr id="51" name="Shape 48"/>
-          <p:cNvSpPr/>
-          <p:nvPr/>
-        </p:nvSpPr>
-        <p:spPr>
-          <a:xfrm>
-            <a:off x="8398193" y="4340661"/>
-            <a:ext cx="60960" cy="60960"/>
-          </a:xfrm>
-          <a:prstGeom prst="ellipse">
-            <a:avLst/>
-          </a:prstGeom>
-          <a:solidFill>
-            <a:srgbClr val="CFCBC2"/>
-          </a:solidFill>
-          <a:ln/>
-        </p:spPr>
-      </p:sp>
-      <p:sp>
-        <p:nvSpPr>
-          <p:cNvPr id="52" name="Shape 49"/>
-          <p:cNvSpPr/>
-          <p:nvPr/>
-        </p:nvSpPr>
-        <p:spPr>
-          <a:xfrm>
-            <a:off x="8483060" y="4192916"/>
-            <a:ext cx="60960" cy="60960"/>
-          </a:xfrm>
-          <a:prstGeom prst="ellipse">
-            <a:avLst/>
-          </a:prstGeom>
-          <a:solidFill>
-            <a:srgbClr val="CFCBC2"/>
-          </a:solidFill>
-          <a:ln/>
-        </p:spPr>
-      </p:sp>
-      <p:sp>
-        <p:nvSpPr>
-          <p:cNvPr id="53" name="Shape 50"/>
-          <p:cNvSpPr/>
-          <p:nvPr/>
-        </p:nvSpPr>
-        <p:spPr>
-          <a:xfrm>
-            <a:off x="8539639" y="4419177"/>
-            <a:ext cx="60960" cy="60960"/>
-          </a:xfrm>
-          <a:prstGeom prst="ellipse">
-            <a:avLst/>
-          </a:prstGeom>
-          <a:solidFill>
-            <a:srgbClr val="CFCBC2"/>
-          </a:solidFill>
-          <a:ln/>
-        </p:spPr>
-      </p:sp>
-      <p:sp>
-        <p:nvSpPr>
-          <p:cNvPr id="54" name="Shape 51"/>
-          <p:cNvSpPr/>
-          <p:nvPr/>
-        </p:nvSpPr>
-        <p:spPr>
-          <a:xfrm>
-            <a:off x="8699945" y="4288871"/>
-            <a:ext cx="60960" cy="60960"/>
-          </a:xfrm>
-          <a:prstGeom prst="ellipse">
-            <a:avLst/>
-          </a:prstGeom>
-          <a:solidFill>
-            <a:srgbClr val="CFCBC2"/>
-          </a:solidFill>
-          <a:ln/>
-        </p:spPr>
-      </p:sp>
-      <p:sp>
-        <p:nvSpPr>
-          <p:cNvPr id="55" name="Shape 52"/>
-          <p:cNvSpPr/>
-          <p:nvPr/>
-        </p:nvSpPr>
-        <p:spPr>
-          <a:xfrm>
-            <a:off x="8841391" y="4316037"/>
-            <a:ext cx="60960" cy="60960"/>
-          </a:xfrm>
-          <a:prstGeom prst="ellipse">
-            <a:avLst/>
-          </a:prstGeom>
-          <a:solidFill>
-            <a:srgbClr val="CFCBC2"/>
-          </a:solidFill>
-          <a:ln/>
-        </p:spPr>
-      </p:sp>
-      <p:sp>
-        <p:nvSpPr>
-          <p:cNvPr id="56" name="Shape 53"/>
-          <p:cNvSpPr/>
-          <p:nvPr/>
-        </p:nvSpPr>
-        <p:spPr>
-          <a:xfrm>
-            <a:off x="8869680" y="4132890"/>
-            <a:ext cx="60960" cy="60960"/>
-          </a:xfrm>
-          <a:prstGeom prst="ellipse">
-            <a:avLst/>
-          </a:prstGeom>
-          <a:solidFill>
-            <a:srgbClr val="CFCBC2"/>
-          </a:solidFill>
-          <a:ln/>
-        </p:spPr>
-      </p:sp>
-      <p:sp>
-        <p:nvSpPr>
-          <p:cNvPr id="57" name="Shape 54"/>
-          <p:cNvSpPr/>
-          <p:nvPr/>
-        </p:nvSpPr>
-        <p:spPr>
-          <a:xfrm>
-            <a:off x="8897969" y="4171885"/>
-            <a:ext cx="60960" cy="60960"/>
-          </a:xfrm>
-          <a:prstGeom prst="ellipse">
-            <a:avLst/>
-          </a:prstGeom>
-          <a:solidFill>
-            <a:srgbClr val="CFCBC2"/>
-          </a:solidFill>
-          <a:ln/>
-        </p:spPr>
-      </p:sp>
-      <p:sp>
-        <p:nvSpPr>
-          <p:cNvPr id="58" name="Shape 55"/>
-          <p:cNvSpPr/>
-          <p:nvPr/>
-        </p:nvSpPr>
-        <p:spPr>
-          <a:xfrm>
-            <a:off x="9001697" y="4095472"/>
-            <a:ext cx="60960" cy="60960"/>
-          </a:xfrm>
-          <a:prstGeom prst="ellipse">
-            <a:avLst/>
-          </a:prstGeom>
-          <a:solidFill>
-            <a:srgbClr val="CFCBC2"/>
-          </a:solidFill>
-          <a:ln/>
-        </p:spPr>
-      </p:sp>
-      <p:sp>
-        <p:nvSpPr>
-          <p:cNvPr id="59" name="Shape 56"/>
-          <p:cNvSpPr/>
-          <p:nvPr/>
-        </p:nvSpPr>
-        <p:spPr>
-          <a:xfrm>
-            <a:off x="9011126" y="4212896"/>
-            <a:ext cx="60960" cy="60960"/>
-          </a:xfrm>
-          <a:prstGeom prst="ellipse">
-            <a:avLst/>
-          </a:prstGeom>
-          <a:solidFill>
-            <a:srgbClr val="CFCBC2"/>
-          </a:solidFill>
-          <a:ln/>
-        </p:spPr>
-      </p:sp>
-      <p:sp>
-        <p:nvSpPr>
-          <p:cNvPr id="60" name="Shape 57"/>
-          <p:cNvSpPr/>
-          <p:nvPr/>
-        </p:nvSpPr>
-        <p:spPr>
-          <a:xfrm>
-            <a:off x="9067705" y="4249964"/>
-            <a:ext cx="60960" cy="60960"/>
-          </a:xfrm>
-          <a:prstGeom prst="ellipse">
-            <a:avLst/>
-          </a:prstGeom>
-          <a:solidFill>
-            <a:srgbClr val="CFCBC2"/>
-          </a:solidFill>
-          <a:ln/>
-        </p:spPr>
-      </p:sp>
-      <p:sp>
-        <p:nvSpPr>
-          <p:cNvPr id="61" name="Shape 58"/>
-          <p:cNvSpPr/>
-          <p:nvPr/>
-        </p:nvSpPr>
-        <p:spPr>
-          <a:xfrm>
-            <a:off x="9209151" y="4269417"/>
-            <a:ext cx="60960" cy="60960"/>
-          </a:xfrm>
-          <a:prstGeom prst="ellipse">
-            <a:avLst/>
-          </a:prstGeom>
-          <a:solidFill>
-            <a:srgbClr val="CFCBC2"/>
-          </a:solidFill>
-          <a:ln/>
-        </p:spPr>
-      </p:sp>
-      <p:sp>
-        <p:nvSpPr>
-          <p:cNvPr id="62" name="Shape 59"/>
-          <p:cNvSpPr/>
-          <p:nvPr/>
-        </p:nvSpPr>
-        <p:spPr>
-          <a:xfrm>
-            <a:off x="9218581" y="4239886"/>
-            <a:ext cx="60960" cy="60960"/>
-          </a:xfrm>
-          <a:prstGeom prst="ellipse">
-            <a:avLst/>
-          </a:prstGeom>
-          <a:solidFill>
-            <a:srgbClr val="CFCBC2"/>
-          </a:solidFill>
-          <a:ln/>
-        </p:spPr>
-      </p:sp>
-      <p:sp>
-        <p:nvSpPr>
-          <p:cNvPr id="63" name="Shape 60"/>
-          <p:cNvSpPr/>
-          <p:nvPr/>
-        </p:nvSpPr>
-        <p:spPr>
-          <a:xfrm>
-            <a:off x="9652349" y="4510137"/>
-            <a:ext cx="60960" cy="60960"/>
-          </a:xfrm>
-          <a:prstGeom prst="ellipse">
-            <a:avLst/>
-          </a:prstGeom>
-          <a:solidFill>
-            <a:srgbClr val="CFCBC2"/>
-          </a:solidFill>
-          <a:ln/>
-        </p:spPr>
-      </p:sp>
-      <p:sp>
-        <p:nvSpPr>
-          <p:cNvPr id="64" name="Shape 61"/>
-          <p:cNvSpPr/>
-          <p:nvPr/>
-        </p:nvSpPr>
-        <p:spPr>
-          <a:xfrm>
-            <a:off x="10010680" y="4924452"/>
-            <a:ext cx="60960" cy="60960"/>
-          </a:xfrm>
-          <a:prstGeom prst="ellipse">
-            <a:avLst/>
-          </a:prstGeom>
-          <a:solidFill>
-            <a:srgbClr val="CFCBC2"/>
-          </a:solidFill>
-          <a:ln/>
-        </p:spPr>
-      </p:sp>
-      <p:sp>
-        <p:nvSpPr>
-          <p:cNvPr id="65" name="Shape 62"/>
-          <p:cNvSpPr/>
-          <p:nvPr/>
-        </p:nvSpPr>
-        <p:spPr>
-          <a:xfrm>
-            <a:off x="10029539" y="5027417"/>
-            <a:ext cx="60960" cy="60960"/>
-          </a:xfrm>
-          <a:prstGeom prst="ellipse">
-            <a:avLst/>
-          </a:prstGeom>
-          <a:solidFill>
-            <a:srgbClr val="CFCBC2"/>
-          </a:solidFill>
-          <a:ln/>
-        </p:spPr>
-      </p:sp>
-      <p:sp>
-        <p:nvSpPr>
-          <p:cNvPr id="66" name="Shape 63"/>
-          <p:cNvSpPr/>
-          <p:nvPr/>
-        </p:nvSpPr>
-        <p:spPr>
-          <a:xfrm>
-            <a:off x="10038969" y="4790378"/>
-            <a:ext cx="60960" cy="60960"/>
-          </a:xfrm>
-          <a:prstGeom prst="ellipse">
-            <a:avLst/>
-          </a:prstGeom>
-          <a:solidFill>
-            <a:srgbClr val="CFCBC2"/>
-          </a:solidFill>
-          <a:ln/>
-        </p:spPr>
-      </p:sp>
-      <p:sp>
-        <p:nvSpPr>
-          <p:cNvPr id="67" name="Shape 64"/>
-          <p:cNvSpPr/>
-          <p:nvPr/>
-        </p:nvSpPr>
-        <p:spPr>
-          <a:xfrm>
-            <a:off x="10067258" y="4800981"/>
-            <a:ext cx="60960" cy="60960"/>
-          </a:xfrm>
-          <a:prstGeom prst="ellipse">
-            <a:avLst/>
-          </a:prstGeom>
-          <a:solidFill>
-            <a:srgbClr val="CFCBC2"/>
-          </a:solidFill>
-          <a:ln/>
-        </p:spPr>
-      </p:sp>
-      <p:sp>
-        <p:nvSpPr>
-          <p:cNvPr id="68" name="Shape 65"/>
-          <p:cNvSpPr/>
-          <p:nvPr/>
-        </p:nvSpPr>
-        <p:spPr>
-          <a:xfrm>
-            <a:off x="10227564" y="4973787"/>
-            <a:ext cx="60960" cy="60960"/>
-          </a:xfrm>
-          <a:prstGeom prst="ellipse">
-            <a:avLst/>
-          </a:prstGeom>
-          <a:solidFill>
-            <a:srgbClr val="CFCBC2"/>
-          </a:solidFill>
-          <a:ln/>
-        </p:spPr>
-      </p:sp>
-      <p:sp>
-        <p:nvSpPr>
-          <p:cNvPr id="69" name="Shape 66"/>
-          <p:cNvSpPr/>
-          <p:nvPr/>
-        </p:nvSpPr>
-        <p:spPr>
-          <a:xfrm>
-            <a:off x="10350151" y="5165084"/>
-            <a:ext cx="60960" cy="60960"/>
-          </a:xfrm>
-          <a:prstGeom prst="ellipse">
-            <a:avLst/>
-          </a:prstGeom>
-          <a:solidFill>
-            <a:srgbClr val="CFCBC2"/>
-          </a:solidFill>
-          <a:ln/>
-        </p:spPr>
-      </p:sp>
-      <p:sp>
-        <p:nvSpPr>
-          <p:cNvPr id="70" name="Shape 67"/>
-          <p:cNvSpPr/>
-          <p:nvPr/>
-        </p:nvSpPr>
-        <p:spPr>
-          <a:xfrm>
-            <a:off x="10491597" y="4880286"/>
-            <a:ext cx="60960" cy="60960"/>
-          </a:xfrm>
-          <a:prstGeom prst="ellipse">
-            <a:avLst/>
-          </a:prstGeom>
-          <a:solidFill>
-            <a:srgbClr val="CFCBC2"/>
-          </a:solidFill>
-          <a:ln/>
-        </p:spPr>
-      </p:sp>
-      <p:sp>
-        <p:nvSpPr>
-          <p:cNvPr id="71" name="Shape 68"/>
-          <p:cNvSpPr/>
-          <p:nvPr/>
-        </p:nvSpPr>
-        <p:spPr>
-          <a:xfrm>
-            <a:off x="10491597" y="4781615"/>
-            <a:ext cx="60960" cy="60960"/>
-          </a:xfrm>
-          <a:prstGeom prst="ellipse">
-            <a:avLst/>
-          </a:prstGeom>
-          <a:solidFill>
-            <a:srgbClr val="CFCBC2"/>
-          </a:solidFill>
-          <a:ln/>
-        </p:spPr>
-      </p:sp>
-      <p:sp>
-        <p:nvSpPr>
-          <p:cNvPr id="72" name="Shape 69"/>
-          <p:cNvSpPr/>
-          <p:nvPr/>
-        </p:nvSpPr>
-        <p:spPr>
-          <a:xfrm>
-            <a:off x="10538746" y="5041876"/>
-            <a:ext cx="60960" cy="60960"/>
-          </a:xfrm>
-          <a:prstGeom prst="ellipse">
-            <a:avLst/>
-          </a:prstGeom>
-          <a:solidFill>
-            <a:srgbClr val="CFCBC2"/>
-          </a:solidFill>
-          <a:ln/>
-        </p:spPr>
-      </p:sp>
-      <p:sp>
-        <p:nvSpPr>
-          <p:cNvPr id="73" name="Shape 70"/>
-          <p:cNvSpPr/>
-          <p:nvPr/>
-        </p:nvSpPr>
-        <p:spPr>
-          <a:xfrm>
-            <a:off x="10557605" y="5037231"/>
-            <a:ext cx="60960" cy="60960"/>
-          </a:xfrm>
-          <a:prstGeom prst="ellipse">
-            <a:avLst/>
-          </a:prstGeom>
-          <a:solidFill>
-            <a:srgbClr val="CFCBC2"/>
-          </a:solidFill>
-          <a:ln/>
-        </p:spPr>
-      </p:sp>
-      <p:sp>
-        <p:nvSpPr>
-          <p:cNvPr id="74" name="Shape 71"/>
-          <p:cNvSpPr/>
-          <p:nvPr/>
-        </p:nvSpPr>
-        <p:spPr>
-          <a:xfrm>
-            <a:off x="10633043" y="4816141"/>
-            <a:ext cx="60960" cy="60960"/>
-          </a:xfrm>
-          <a:prstGeom prst="ellipse">
-            <a:avLst/>
-          </a:prstGeom>
-          <a:solidFill>
-            <a:srgbClr val="CFCBC2"/>
-          </a:solidFill>
-          <a:ln/>
-        </p:spPr>
-      </p:sp>
-      <p:sp>
-        <p:nvSpPr>
-          <p:cNvPr id="75" name="Shape 72"/>
-          <p:cNvSpPr/>
-          <p:nvPr/>
-        </p:nvSpPr>
-        <p:spPr>
-          <a:xfrm>
-            <a:off x="10699052" y="4793971"/>
-            <a:ext cx="60960" cy="60960"/>
-          </a:xfrm>
-          <a:prstGeom prst="ellipse">
-            <a:avLst/>
-          </a:prstGeom>
-          <a:solidFill>
-            <a:srgbClr val="CFCBC2"/>
-          </a:solidFill>
-          <a:ln/>
-        </p:spPr>
-      </p:sp>
-      <p:sp>
-        <p:nvSpPr>
-          <p:cNvPr id="76" name="Shape 73"/>
-          <p:cNvSpPr/>
-          <p:nvPr/>
-        </p:nvSpPr>
-        <p:spPr>
-          <a:xfrm>
-            <a:off x="10727341" y="4962308"/>
-            <a:ext cx="60960" cy="60960"/>
-          </a:xfrm>
-          <a:prstGeom prst="ellipse">
-            <a:avLst/>
-          </a:prstGeom>
-          <a:solidFill>
-            <a:srgbClr val="CFCBC2"/>
-          </a:solidFill>
-          <a:ln/>
-        </p:spPr>
-      </p:sp>
-      <p:sp>
-        <p:nvSpPr>
-          <p:cNvPr id="77" name="Shape 74"/>
-          <p:cNvSpPr/>
-          <p:nvPr/>
-        </p:nvSpPr>
-        <p:spPr>
-          <a:xfrm>
-            <a:off x="10736771" y="4554653"/>
-            <a:ext cx="60960" cy="60960"/>
-          </a:xfrm>
-          <a:prstGeom prst="ellipse">
-            <a:avLst/>
-          </a:prstGeom>
-          <a:solidFill>
-            <a:srgbClr val="CFCBC2"/>
-          </a:solidFill>
-          <a:ln/>
-        </p:spPr>
-      </p:sp>
-      <p:sp>
-        <p:nvSpPr>
-          <p:cNvPr id="78" name="Shape 75"/>
-          <p:cNvSpPr/>
-          <p:nvPr/>
-        </p:nvSpPr>
-        <p:spPr>
-          <a:xfrm>
-            <a:off x="10736771" y="4617747"/>
-            <a:ext cx="60960" cy="60960"/>
-          </a:xfrm>
-          <a:prstGeom prst="ellipse">
-            <a:avLst/>
-          </a:prstGeom>
-          <a:solidFill>
-            <a:srgbClr val="CFCBC2"/>
-          </a:solidFill>
-          <a:ln/>
-        </p:spPr>
-      </p:sp>
-      <p:sp>
-        <p:nvSpPr>
-          <p:cNvPr id="79" name="Shape 76"/>
-          <p:cNvSpPr/>
-          <p:nvPr/>
-        </p:nvSpPr>
-        <p:spPr>
-          <a:xfrm>
-            <a:off x="10736771" y="4873977"/>
-            <a:ext cx="60960" cy="60960"/>
-          </a:xfrm>
-          <a:prstGeom prst="ellipse">
-            <a:avLst/>
-          </a:prstGeom>
-          <a:solidFill>
-            <a:srgbClr val="CFCBC2"/>
-          </a:solidFill>
-          <a:ln/>
-        </p:spPr>
-      </p:sp>
-      <p:sp>
-        <p:nvSpPr>
-          <p:cNvPr id="80" name="Shape 77"/>
-          <p:cNvSpPr/>
-          <p:nvPr/>
-        </p:nvSpPr>
-        <p:spPr>
-          <a:xfrm>
-            <a:off x="10812209" y="4680227"/>
-            <a:ext cx="60960" cy="60960"/>
-          </a:xfrm>
-          <a:prstGeom prst="ellipse">
-            <a:avLst/>
-          </a:prstGeom>
-          <a:solidFill>
-            <a:srgbClr val="CFCBC2"/>
-          </a:solidFill>
-          <a:ln/>
-        </p:spPr>
-      </p:sp>
-      <p:sp>
-        <p:nvSpPr>
-          <p:cNvPr id="81" name="Shape 78"/>
-          <p:cNvSpPr/>
-          <p:nvPr/>
-        </p:nvSpPr>
-        <p:spPr>
-          <a:xfrm>
-            <a:off x="10831068" y="4943555"/>
-            <a:ext cx="60960" cy="60960"/>
-          </a:xfrm>
-          <a:prstGeom prst="ellipse">
-            <a:avLst/>
-          </a:prstGeom>
-          <a:solidFill>
-            <a:srgbClr val="CFCBC2"/>
-          </a:solidFill>
-          <a:ln/>
-        </p:spPr>
-      </p:sp>
-      <p:sp>
-        <p:nvSpPr>
-          <p:cNvPr id="82" name="Shape 79"/>
-          <p:cNvSpPr/>
-          <p:nvPr/>
-        </p:nvSpPr>
-        <p:spPr>
-          <a:xfrm>
-            <a:off x="10906506" y="4674881"/>
-            <a:ext cx="60960" cy="60960"/>
-          </a:xfrm>
-          <a:prstGeom prst="ellipse">
-            <a:avLst/>
-          </a:prstGeom>
-          <a:solidFill>
-            <a:srgbClr val="CFCBC2"/>
-          </a:solidFill>
-          <a:ln/>
-        </p:spPr>
-      </p:sp>
-      <p:sp>
-        <p:nvSpPr>
-          <p:cNvPr id="83" name="Shape 80"/>
-          <p:cNvSpPr/>
-          <p:nvPr/>
-        </p:nvSpPr>
-        <p:spPr>
-          <a:xfrm>
-            <a:off x="11047952" y="4555617"/>
-            <a:ext cx="60960" cy="60960"/>
-          </a:xfrm>
-          <a:prstGeom prst="ellipse">
-            <a:avLst/>
-          </a:prstGeom>
-          <a:solidFill>
-            <a:srgbClr val="CFCBC2"/>
-          </a:solidFill>
-          <a:ln/>
-        </p:spPr>
-      </p:sp>
-      <p:sp>
-        <p:nvSpPr>
-          <p:cNvPr id="84" name="Shape 81"/>
-          <p:cNvSpPr/>
-          <p:nvPr/>
-        </p:nvSpPr>
-        <p:spPr>
-          <a:xfrm>
-            <a:off x="11217688" y="4614855"/>
-            <a:ext cx="60960" cy="60960"/>
-          </a:xfrm>
-          <a:prstGeom prst="ellipse">
-            <a:avLst/>
-          </a:prstGeom>
-          <a:solidFill>
-            <a:srgbClr val="CFCBC2"/>
-          </a:solidFill>
-          <a:ln/>
-        </p:spPr>
-      </p:sp>
-      <p:sp>
-        <p:nvSpPr>
-          <p:cNvPr id="85" name="Text 82"/>
-          <p:cNvSpPr txBox="1"/>
-          <p:nvPr/>
-        </p:nvSpPr>
-        <p:spPr>
-          <a:xfrm>
-            <a:off x="7162800" y="5543550"/>
-            <a:ext cx="4343400" cy="131445"/>
-          </a:xfrm>
-          <a:prstGeom prst="rect">
-            <a:avLst/>
-          </a:prstGeom>
-          <a:noFill/>
-          <a:ln/>
-        </p:spPr>
-        <p:txBody>
-          <a:bodyPr wrap="square" lIns="0" tIns="0" rIns="0" bIns="0" rtlCol="0" anchor="t"/>
-          <a:lstStyle/>
-          <a:p>
-            <a:pPr algn="l" indent="0" marL="0">
-              <a:lnSpc>
-                <a:spcPts val="1035"/>
-              </a:lnSpc>
-              <a:buNone/>
-            </a:pPr>
-            <a:r>
-              <a:rPr lang="en-US" sz="863" dirty="0">
-                <a:solidFill>
-                  <a:srgbClr val="8A8880"/>
-                </a:solidFill>
-                <a:latin typeface="Malgun Gothic" pitchFamily="34" charset="0"/>
-                <a:ea typeface="Malgun Gothic" pitchFamily="34" charset="-122"/>
-                <a:cs typeface="Malgun Gothic" pitchFamily="34" charset="-120"/>
-              </a:rPr>
-              <a:t>점 하나가 시험 한 번입니다.</a:t>
-            </a:r>
-            <a:endParaRPr lang="en-US" sz="863" dirty="0"/>
-          </a:p>
-        </p:txBody>
-      </p:sp>
-      <p:sp>
-        <p:nvSpPr>
-          <p:cNvPr id="86" name="Shape 83"/>
-          <p:cNvSpPr/>
-          <p:nvPr/>
-        </p:nvSpPr>
-        <p:spPr>
-          <a:xfrm>
-            <a:off x="685800" y="6057900"/>
-            <a:ext cx="10820400" cy="0"/>
-          </a:xfrm>
-          <a:prstGeom prst="line">
-            <a:avLst/>
-          </a:prstGeom>
-          <a:noFill/>
-          <a:ln w="12700">
-            <a:solidFill>
-              <a:srgbClr val="22354A"/>
-            </a:solidFill>
-            <a:prstDash val="solid"/>
-          </a:ln>
-        </p:spPr>
-      </p:sp>
-      <p:sp>
-        <p:nvSpPr>
-          <p:cNvPr id="87" name="Text 84"/>
-          <p:cNvSpPr txBox="1"/>
-          <p:nvPr/>
-        </p:nvSpPr>
-        <p:spPr>
-          <a:xfrm>
-            <a:off x="685800" y="6267450"/>
-            <a:ext cx="476250" cy="120015"/>
-          </a:xfrm>
-          <a:prstGeom prst="rect">
-            <a:avLst/>
-          </a:prstGeom>
-          <a:noFill/>
-          <a:ln/>
-        </p:spPr>
-        <p:txBody>
-          <a:bodyPr wrap="square" lIns="0" tIns="0" rIns="0" bIns="0" rtlCol="0" anchor="t"/>
-          <a:lstStyle/>
-          <a:p>
-            <a:pPr algn="l" indent="0" marL="0">
-              <a:lnSpc>
-                <a:spcPts val="945"/>
-              </a:lnSpc>
-              <a:buNone/>
-            </a:pPr>
-            <a:r>
-              <a:rPr lang="en-US" sz="788" b="1" spc="180" kern="0" dirty="0">
-                <a:solidFill>
-                  <a:srgbClr val="EFB13C"/>
-                </a:solidFill>
-                <a:latin typeface="Consolas" pitchFamily="34" charset="0"/>
-                <a:ea typeface="Consolas" pitchFamily="34" charset="-122"/>
-                <a:cs typeface="Consolas" pitchFamily="34" charset="-120"/>
-              </a:rPr>
-              <a:t>결론</a:t>
-            </a:r>
-            <a:endParaRPr lang="en-US" sz="788" dirty="0"/>
-          </a:p>
-        </p:txBody>
-      </p:sp>
-      <p:sp>
-        <p:nvSpPr>
-          <p:cNvPr id="88" name="Text 85"/>
-          <p:cNvSpPr txBox="1"/>
-          <p:nvPr/>
-        </p:nvSpPr>
-        <p:spPr>
-          <a:xfrm>
-            <a:off x="1219200" y="6229350"/>
-            <a:ext cx="10287000" cy="220027"/>
-          </a:xfrm>
-          <a:prstGeom prst="rect">
-            <a:avLst/>
-          </a:prstGeom>
-          <a:noFill/>
-          <a:ln/>
-        </p:spPr>
-        <p:txBody>
-          <a:bodyPr wrap="square" lIns="0" tIns="0" rIns="0" bIns="0" rtlCol="0" anchor="t"/>
-          <a:lstStyle/>
-          <a:p>
-            <a:pPr algn="l" indent="0" marL="0">
-              <a:lnSpc>
-                <a:spcPts val="1733"/>
-              </a:lnSpc>
-              <a:buNone/>
-            </a:pPr>
-            <a:r>
-              <a:rPr lang="en-US" sz="1238" dirty="0">
-                <a:solidFill>
-                  <a:srgbClr val="CFCBC2"/>
-                </a:solidFill>
-                <a:latin typeface="Malgun Gothic" pitchFamily="34" charset="0"/>
-                <a:ea typeface="Malgun Gothic" pitchFamily="34" charset="-122"/>
-                <a:cs typeface="Malgun Gothic" pitchFamily="34" charset="-120"/>
-              </a:rPr>
-              <a:t>날씨마다 다른 것을 하나로 맞추려니 맞을 수가 없었습니다.</a:t>
+              <a:t>온도마다 다른 것을 하나로 맞추려니 맞을 수가 없었습니다.</a:t>
             </a:r>
             <a:endParaRPr lang="en-US" sz="1238" dirty="0"/>
           </a:p>

--- a/docs/ppt/위례_공급가능용량_최종발표_v3.pptx
+++ b/docs/ppt/위례_공급가능용량_최종발표_v3.pptx
@@ -1278,8 +1278,8 @@
         </p:nvSpPr>
         <p:spPr>
           <a:xfrm>
-            <a:off x="685800" y="1809750"/>
-            <a:ext cx="10820400" cy="2343150"/>
+            <a:off x="685800" y="1771650"/>
+            <a:ext cx="10820400" cy="2286000"/>
           </a:xfrm>
           <a:prstGeom prst="rect">
             <a:avLst/>
@@ -1287,24 +1287,87 @@
           <a:solidFill>
             <a:srgbClr val="0A1320"/>
           </a:solidFill>
-          <a:ln w="12700">
-            <a:solidFill>
-              <a:srgbClr val="182838"/>
-            </a:solidFill>
-            <a:prstDash val="solid"/>
-          </a:ln>
-        </p:spPr>
-      </p:sp>
-      <p:sp>
-        <p:nvSpPr>
-          <p:cNvPr id="14" name="Text 12"/>
-          <p:cNvSpPr txBox="1"/>
-          <p:nvPr/>
-        </p:nvSpPr>
-        <p:spPr>
-          <a:xfrm>
-            <a:off x="914400" y="1905000"/>
-            <a:ext cx="1905000" cy="125016"/>
+          <a:ln w="15240">
+            <a:solidFill>
+              <a:srgbClr val="22354A"/>
+            </a:solidFill>
+            <a:prstDash val="solid"/>
+          </a:ln>
+        </p:spPr>
+      </p:sp>
+      <p:sp>
+        <p:nvSpPr>
+          <p:cNvPr id="14" name="Shape 12"/>
+          <p:cNvSpPr/>
+          <p:nvPr/>
+        </p:nvSpPr>
+        <p:spPr>
+          <a:xfrm>
+            <a:off x="695325" y="1781175"/>
+            <a:ext cx="10801350" cy="276225"/>
+          </a:xfrm>
+          <a:prstGeom prst="rect">
+            <a:avLst/>
+          </a:prstGeom>
+          <a:solidFill>
+            <a:srgbClr val="17283C"/>
+          </a:solidFill>
+          <a:ln/>
+        </p:spPr>
+      </p:sp>
+      <p:sp>
+        <p:nvSpPr>
+          <p:cNvPr id="15" name="Shape 13"/>
+          <p:cNvSpPr/>
+          <p:nvPr/>
+        </p:nvSpPr>
+        <p:spPr>
+          <a:xfrm>
+            <a:off x="685800" y="2057400"/>
+            <a:ext cx="10820400" cy="0"/>
+          </a:xfrm>
+          <a:prstGeom prst="line">
+            <a:avLst/>
+          </a:prstGeom>
+          <a:noFill/>
+          <a:ln w="15240">
+            <a:solidFill>
+              <a:srgbClr val="22354A"/>
+            </a:solidFill>
+            <a:prstDash val="solid"/>
+          </a:ln>
+        </p:spPr>
+      </p:sp>
+      <p:sp>
+        <p:nvSpPr>
+          <p:cNvPr id="16" name="Shape 14"/>
+          <p:cNvSpPr/>
+          <p:nvPr/>
+        </p:nvSpPr>
+        <p:spPr>
+          <a:xfrm>
+            <a:off x="695325" y="1781175"/>
+            <a:ext cx="38100" cy="276225"/>
+          </a:xfrm>
+          <a:prstGeom prst="rect">
+            <a:avLst/>
+          </a:prstGeom>
+          <a:solidFill>
+            <a:srgbClr val="EFB13C"/>
+          </a:solidFill>
+          <a:ln/>
+        </p:spPr>
+      </p:sp>
+      <p:sp>
+        <p:nvSpPr>
+          <p:cNvPr id="17" name="Text 15"/>
+          <p:cNvSpPr txBox="1"/>
+          <p:nvPr/>
+        </p:nvSpPr>
+        <p:spPr>
+          <a:xfrm>
+            <a:off x="857250" y="1847850"/>
+            <a:ext cx="171450" cy="148590"/>
           </a:xfrm>
           <a:prstGeom prst="rect">
             <a:avLst/>
@@ -1318,77 +1381,35 @@
           <a:p>
             <a:pPr algn="l" indent="0" marL="0">
               <a:lnSpc>
-                <a:spcPts val="984"/>
-              </a:lnSpc>
-              <a:buNone/>
-            </a:pPr>
-            <a:r>
-              <a:rPr lang="en-US" sz="788" b="1" spc="150" kern="0" dirty="0">
-                <a:solidFill>
-                  <a:srgbClr val="8A8880"/>
+                <a:spcPts val="1170"/>
+              </a:lnSpc>
+              <a:buNone/>
+            </a:pPr>
+            <a:r>
+              <a:rPr lang="en-US" sz="975" b="1" dirty="0">
+                <a:solidFill>
+                  <a:srgbClr val="EFB13C"/>
                 </a:solidFill>
                 <a:latin typeface="Consolas" pitchFamily="34" charset="0"/>
                 <a:ea typeface="Consolas" pitchFamily="34" charset="-122"/>
                 <a:cs typeface="Consolas" pitchFamily="34" charset="-120"/>
               </a:rPr>
-              <a:t>산정 절차</a:t>
-            </a:r>
-            <a:endParaRPr lang="en-US" sz="788" dirty="0"/>
-          </a:p>
-        </p:txBody>
-      </p:sp>
-      <p:sp>
-        <p:nvSpPr>
-          <p:cNvPr id="15" name="Text 13"/>
-          <p:cNvSpPr txBox="1"/>
-          <p:nvPr/>
-        </p:nvSpPr>
-        <p:spPr>
-          <a:xfrm>
-            <a:off x="8648700" y="1895475"/>
-            <a:ext cx="2667000" cy="125730"/>
-          </a:xfrm>
-          <a:prstGeom prst="rect">
-            <a:avLst/>
-          </a:prstGeom>
-          <a:noFill/>
-          <a:ln/>
-        </p:spPr>
-        <p:txBody>
-          <a:bodyPr wrap="square" lIns="0" tIns="0" rIns="0" bIns="0" rtlCol="0" anchor="t"/>
-          <a:lstStyle/>
-          <a:p>
-            <a:pPr algn="r" indent="0" marL="0">
-              <a:lnSpc>
-                <a:spcPts val="990"/>
-              </a:lnSpc>
-              <a:buNone/>
-            </a:pPr>
-            <a:r>
-              <a:rPr lang="en-US" sz="825" dirty="0">
-                <a:solidFill>
-                  <a:srgbClr val="8A8880"/>
-                </a:solidFill>
-                <a:latin typeface="Consolas" pitchFamily="34" charset="0"/>
-                <a:ea typeface="Consolas" pitchFamily="34" charset="-122"/>
-                <a:cs typeface="Consolas" pitchFamily="34" charset="-120"/>
-              </a:rPr>
-              <a:t>엑셀 파일 4개</a:t>
-            </a:r>
-            <a:endParaRPr lang="en-US" sz="825" dirty="0"/>
-          </a:p>
-        </p:txBody>
-      </p:sp>
-      <p:sp>
-        <p:nvSpPr>
-          <p:cNvPr id="16" name="Text 14"/>
-          <p:cNvSpPr txBox="1"/>
-          <p:nvPr/>
-        </p:nvSpPr>
-        <p:spPr>
-          <a:xfrm>
-            <a:off x="838200" y="2114550"/>
-            <a:ext cx="2457450" cy="167164"/>
+              <a:t>1</a:t>
+            </a:r>
+            <a:endParaRPr lang="en-US" sz="975" dirty="0"/>
+          </a:p>
+        </p:txBody>
+      </p:sp>
+      <p:sp>
+        <p:nvSpPr>
+          <p:cNvPr id="18" name="Text 16"/>
+          <p:cNvSpPr txBox="1"/>
+          <p:nvPr/>
+        </p:nvSpPr>
+        <p:spPr>
+          <a:xfrm>
+            <a:off x="1085850" y="1847850"/>
+            <a:ext cx="9420225" cy="154305"/>
           </a:xfrm>
           <a:prstGeom prst="rect">
             <a:avLst/>
@@ -1402,19 +1423,103 @@
           <a:p>
             <a:pPr algn="l" indent="0" marL="0">
               <a:lnSpc>
-                <a:spcPts val="1316"/>
-              </a:lnSpc>
-              <a:buNone/>
-            </a:pPr>
-            <a:r>
-              <a:rPr lang="en-US" sz="1013" b="1" dirty="0">
-                <a:solidFill>
-                  <a:srgbClr val="EFB13C"/>
+                <a:spcPts val="1215"/>
+              </a:lnSpc>
+              <a:buNone/>
+            </a:pPr>
+            <a:r>
+              <a:rPr lang="en-US" sz="1013" b="1" spc="30" kern="0" dirty="0">
+                <a:solidFill>
+                  <a:srgbClr val="EAE7E0"/>
                 </a:solidFill>
                 <a:latin typeface="Malgun Gothic" pitchFamily="34" charset="0"/>
                 <a:ea typeface="Malgun Gothic" pitchFamily="34" charset="-122"/>
                 <a:cs typeface="Malgun Gothic" pitchFamily="34" charset="-120"/>
               </a:rPr>
+              <a:t>산정 절차</a:t>
+            </a:r>
+            <a:endParaRPr lang="en-US" sz="1013" dirty="0"/>
+          </a:p>
+        </p:txBody>
+      </p:sp>
+      <p:sp>
+        <p:nvSpPr>
+          <p:cNvPr id="19" name="Text 17"/>
+          <p:cNvSpPr txBox="1"/>
+          <p:nvPr/>
+        </p:nvSpPr>
+        <p:spPr>
+          <a:xfrm>
+            <a:off x="10506075" y="1857375"/>
+            <a:ext cx="866775" cy="125730"/>
+          </a:xfrm>
+          <a:prstGeom prst="rect">
+            <a:avLst/>
+          </a:prstGeom>
+          <a:noFill/>
+          <a:ln/>
+        </p:spPr>
+        <p:txBody>
+          <a:bodyPr wrap="square" lIns="0" tIns="0" rIns="0" bIns="0" rtlCol="0" anchor="t"/>
+          <a:lstStyle/>
+          <a:p>
+            <a:pPr algn="r" indent="0" marL="0">
+              <a:lnSpc>
+                <a:spcPts val="990"/>
+              </a:lnSpc>
+              <a:buNone/>
+            </a:pPr>
+            <a:r>
+              <a:rPr lang="en-US" sz="825" dirty="0">
+                <a:solidFill>
+                  <a:srgbClr val="8A8880"/>
+                </a:solidFill>
+                <a:latin typeface="Malgun Gothic" pitchFamily="34" charset="0"/>
+                <a:ea typeface="Malgun Gothic" pitchFamily="34" charset="-122"/>
+                <a:cs typeface="Malgun Gothic" pitchFamily="34" charset="-120"/>
+              </a:rPr>
+              <a:t>엑셀 파일 4개</a:t>
+            </a:r>
+            <a:endParaRPr lang="en-US" sz="825" dirty="0"/>
+          </a:p>
+        </p:txBody>
+      </p:sp>
+      <p:sp>
+        <p:nvSpPr>
+          <p:cNvPr id="20" name="Text 18"/>
+          <p:cNvSpPr txBox="1"/>
+          <p:nvPr/>
+        </p:nvSpPr>
+        <p:spPr>
+          <a:xfrm>
+            <a:off x="838200" y="2171700"/>
+            <a:ext cx="2457450" cy="167164"/>
+          </a:xfrm>
+          <a:prstGeom prst="rect">
+            <a:avLst/>
+          </a:prstGeom>
+          <a:noFill/>
+          <a:ln/>
+        </p:spPr>
+        <p:txBody>
+          <a:bodyPr wrap="square" lIns="0" tIns="0" rIns="0" bIns="0" rtlCol="0" anchor="t"/>
+          <a:lstStyle/>
+          <a:p>
+            <a:pPr algn="l" indent="0" marL="0">
+              <a:lnSpc>
+                <a:spcPts val="1316"/>
+              </a:lnSpc>
+              <a:buNone/>
+            </a:pPr>
+            <a:r>
+              <a:rPr lang="en-US" sz="1013" b="1" dirty="0">
+                <a:solidFill>
+                  <a:srgbClr val="EFB13C"/>
+                </a:solidFill>
+                <a:latin typeface="Malgun Gothic" pitchFamily="34" charset="0"/>
+                <a:ea typeface="Malgun Gothic" pitchFamily="34" charset="-122"/>
+                <a:cs typeface="Malgun Gothic" pitchFamily="34" charset="-120"/>
+              </a:rPr>
               <a:t>① 시험 결과 받아오기</a:t>
             </a:r>
             <a:endParaRPr lang="en-US" sz="1013" dirty="0"/>
@@ -1423,14 +1528,14 @@
       </p:sp>
       <p:sp>
         <p:nvSpPr>
-          <p:cNvPr id="17" name="Shape 15"/>
-          <p:cNvSpPr/>
-          <p:nvPr/>
-        </p:nvSpPr>
-        <p:spPr>
-          <a:xfrm>
-            <a:off x="838200" y="2324100"/>
-            <a:ext cx="2457450" cy="1085850"/>
+          <p:cNvPr id="21" name="Shape 19"/>
+          <p:cNvSpPr/>
+          <p:nvPr/>
+        </p:nvSpPr>
+        <p:spPr>
+          <a:xfrm>
+            <a:off x="838200" y="2381250"/>
+            <a:ext cx="2457450" cy="1009650"/>
           </a:xfrm>
           <a:prstGeom prst="rect">
             <a:avLst/>
@@ -1445,7 +1550,7 @@
       </p:sp>
       <p:pic>
         <p:nvPicPr>
-          <p:cNvPr id="18" name="Image 0" descr="/home/user/Narae-AI/docs/ppt/assets/엑셀1-1_날짜, 시간 입력 후(RiMS 데이터 가져오기).png">    </p:cNvPr>
+          <p:cNvPr id="22" name="Image 0" descr="/home/user/Narae-AI/docs/ppt/assets/엑셀1-1_날짜, 시간 입력 후(RiMS 데이터 가져오기).png">    </p:cNvPr>
           <p:cNvPicPr>
             <a:picLocks noChangeAspect="1"/>
           </p:cNvPicPr>
@@ -1459,7 +1564,7 @@
         </p:blipFill>
         <p:spPr>
           <a:xfrm>
-            <a:off x="895350" y="2487570"/>
+            <a:off x="895350" y="2506620"/>
             <a:ext cx="2343150" cy="758909"/>
           </a:xfrm>
           <a:prstGeom prst="rect">
@@ -1469,13 +1574,13 @@
       </p:pic>
       <p:sp>
         <p:nvSpPr>
-          <p:cNvPr id="19" name="Shape 16"/>
-          <p:cNvSpPr/>
-          <p:nvPr/>
-        </p:nvSpPr>
-        <p:spPr>
-          <a:xfrm>
-            <a:off x="885825" y="2478045"/>
+          <p:cNvPr id="23" name="Shape 20"/>
+          <p:cNvSpPr/>
+          <p:nvPr/>
+        </p:nvSpPr>
+        <p:spPr>
+          <a:xfrm>
+            <a:off x="885825" y="2497095"/>
             <a:ext cx="2362200" cy="777959"/>
           </a:xfrm>
           <a:prstGeom prst="rect">
@@ -1491,13 +1596,13 @@
       </p:sp>
       <p:sp>
         <p:nvSpPr>
-          <p:cNvPr id="20" name="Text 17"/>
-          <p:cNvSpPr txBox="1"/>
-          <p:nvPr/>
-        </p:nvSpPr>
-        <p:spPr>
-          <a:xfrm>
-            <a:off x="838200" y="3505200"/>
+          <p:cNvPr id="24" name="Text 21"/>
+          <p:cNvSpPr txBox="1"/>
+          <p:nvPr/>
+        </p:nvSpPr>
+        <p:spPr>
+          <a:xfrm>
+            <a:off x="838200" y="3467100"/>
             <a:ext cx="2457450" cy="492919"/>
           </a:xfrm>
           <a:prstGeom prst="rect">
@@ -1533,13 +1638,13 @@
       </p:sp>
       <p:sp>
         <p:nvSpPr>
-          <p:cNvPr id="21" name="Text 18"/>
-          <p:cNvSpPr txBox="1"/>
-          <p:nvPr/>
-        </p:nvSpPr>
-        <p:spPr>
-          <a:xfrm>
-            <a:off x="3305175" y="2781300"/>
+          <p:cNvPr id="25" name="Text 22"/>
+          <p:cNvSpPr txBox="1"/>
+          <p:nvPr/>
+        </p:nvSpPr>
+        <p:spPr>
+          <a:xfrm>
+            <a:off x="3305175" y="2809875"/>
             <a:ext cx="190500" cy="148590"/>
           </a:xfrm>
           <a:prstGeom prst="rect">
@@ -1575,13 +1680,13 @@
       </p:sp>
       <p:sp>
         <p:nvSpPr>
-          <p:cNvPr id="22" name="Text 19"/>
-          <p:cNvSpPr txBox="1"/>
-          <p:nvPr/>
-        </p:nvSpPr>
-        <p:spPr>
-          <a:xfrm>
-            <a:off x="3486150" y="2114550"/>
+          <p:cNvPr id="26" name="Text 23"/>
+          <p:cNvSpPr txBox="1"/>
+          <p:nvPr/>
+        </p:nvSpPr>
+        <p:spPr>
+          <a:xfrm>
+            <a:off x="3486150" y="2171700"/>
             <a:ext cx="2457450" cy="167164"/>
           </a:xfrm>
           <a:prstGeom prst="rect">
@@ -1617,14 +1722,14 @@
       </p:sp>
       <p:sp>
         <p:nvSpPr>
-          <p:cNvPr id="23" name="Shape 20"/>
-          <p:cNvSpPr/>
-          <p:nvPr/>
-        </p:nvSpPr>
-        <p:spPr>
-          <a:xfrm>
-            <a:off x="3486150" y="2324100"/>
-            <a:ext cx="2457450" cy="1085850"/>
+          <p:cNvPr id="27" name="Shape 24"/>
+          <p:cNvSpPr/>
+          <p:nvPr/>
+        </p:nvSpPr>
+        <p:spPr>
+          <a:xfrm>
+            <a:off x="3486150" y="2381250"/>
+            <a:ext cx="2457450" cy="1009650"/>
           </a:xfrm>
           <a:prstGeom prst="rect">
             <a:avLst/>
@@ -1639,7 +1744,7 @@
       </p:sp>
       <p:pic>
         <p:nvPicPr>
-          <p:cNvPr id="24" name="Image 1" descr="/home/user/Narae-AI/docs/ppt/assets/엑셀2-1_G열 대기압 입력 후 온도별 이론값 생성.png">    </p:cNvPr>
+          <p:cNvPr id="28" name="Image 1" descr="/home/user/Narae-AI/docs/ppt/assets/엑셀2-1_G열 대기압 입력 후 온도별 이론값 생성.png">    </p:cNvPr>
           <p:cNvPicPr>
             <a:picLocks noChangeAspect="1"/>
           </p:cNvPicPr>
@@ -1653,8 +1758,8 @@
         </p:blipFill>
         <p:spPr>
           <a:xfrm>
-            <a:off x="4141152" y="2381250"/>
-            <a:ext cx="1147446" cy="971550"/>
+            <a:off x="4174900" y="2428875"/>
+            <a:ext cx="1079949" cy="914400"/>
           </a:xfrm>
           <a:prstGeom prst="rect">
             <a:avLst/>
@@ -1663,14 +1768,14 @@
       </p:pic>
       <p:sp>
         <p:nvSpPr>
-          <p:cNvPr id="25" name="Shape 21"/>
-          <p:cNvSpPr/>
-          <p:nvPr/>
-        </p:nvSpPr>
-        <p:spPr>
-          <a:xfrm>
-            <a:off x="4131627" y="2371725"/>
-            <a:ext cx="1166496" cy="990600"/>
+          <p:cNvPr id="29" name="Shape 25"/>
+          <p:cNvSpPr/>
+          <p:nvPr/>
+        </p:nvSpPr>
+        <p:spPr>
+          <a:xfrm>
+            <a:off x="4165375" y="2419350"/>
+            <a:ext cx="1098999" cy="933450"/>
           </a:xfrm>
           <a:prstGeom prst="rect">
             <a:avLst/>
@@ -1685,13 +1790,13 @@
       </p:sp>
       <p:sp>
         <p:nvSpPr>
-          <p:cNvPr id="26" name="Text 22"/>
-          <p:cNvSpPr txBox="1"/>
-          <p:nvPr/>
-        </p:nvSpPr>
-        <p:spPr>
-          <a:xfrm>
-            <a:off x="3486150" y="3505200"/>
+          <p:cNvPr id="30" name="Text 26"/>
+          <p:cNvSpPr txBox="1"/>
+          <p:nvPr/>
+        </p:nvSpPr>
+        <p:spPr>
+          <a:xfrm>
+            <a:off x="3486150" y="3467100"/>
             <a:ext cx="2457450" cy="492919"/>
           </a:xfrm>
           <a:prstGeom prst="rect">
@@ -1727,13 +1832,13 @@
       </p:sp>
       <p:sp>
         <p:nvSpPr>
-          <p:cNvPr id="27" name="Text 23"/>
-          <p:cNvSpPr txBox="1"/>
-          <p:nvPr/>
-        </p:nvSpPr>
-        <p:spPr>
-          <a:xfrm>
-            <a:off x="5953125" y="2781300"/>
+          <p:cNvPr id="31" name="Text 27"/>
+          <p:cNvSpPr txBox="1"/>
+          <p:nvPr/>
+        </p:nvSpPr>
+        <p:spPr>
+          <a:xfrm>
+            <a:off x="5953125" y="2809875"/>
             <a:ext cx="190500" cy="148590"/>
           </a:xfrm>
           <a:prstGeom prst="rect">
@@ -1769,13 +1874,13 @@
       </p:sp>
       <p:sp>
         <p:nvSpPr>
-          <p:cNvPr id="28" name="Text 24"/>
-          <p:cNvSpPr txBox="1"/>
-          <p:nvPr/>
-        </p:nvSpPr>
-        <p:spPr>
-          <a:xfrm>
-            <a:off x="6134100" y="2114550"/>
+          <p:cNvPr id="32" name="Text 28"/>
+          <p:cNvSpPr txBox="1"/>
+          <p:nvPr/>
+        </p:nvSpPr>
+        <p:spPr>
+          <a:xfrm>
+            <a:off x="6134100" y="2171700"/>
             <a:ext cx="2457450" cy="167164"/>
           </a:xfrm>
           <a:prstGeom prst="rect">
@@ -1811,14 +1916,14 @@
       </p:sp>
       <p:sp>
         <p:nvSpPr>
-          <p:cNvPr id="29" name="Shape 25"/>
-          <p:cNvSpPr/>
-          <p:nvPr/>
-        </p:nvSpPr>
-        <p:spPr>
-          <a:xfrm>
-            <a:off x="6134100" y="2324100"/>
-            <a:ext cx="2457450" cy="1085850"/>
+          <p:cNvPr id="33" name="Shape 29"/>
+          <p:cNvSpPr/>
+          <p:nvPr/>
+        </p:nvSpPr>
+        <p:spPr>
+          <a:xfrm>
+            <a:off x="6134100" y="2381250"/>
+            <a:ext cx="2457450" cy="1009650"/>
           </a:xfrm>
           <a:prstGeom prst="rect">
             <a:avLst/>
@@ -1833,7 +1938,7 @@
       </p:sp>
       <p:pic>
         <p:nvPicPr>
-          <p:cNvPr id="30" name="Image 2" descr="/home/user/Narae-AI/docs/ppt/assets/엑셀2-2_IGV Turn up 적용 및, 테스트 온도 지점의 실제 출력과 이론값 비교하여 BTL(보정값) 적용.png">    </p:cNvPr>
+          <p:cNvPr id="34" name="Image 2" descr="/home/user/Narae-AI/docs/ppt/assets/엑셀2-2_IGV Turn up 적용 및, 테스트 온도 지점의 실제 출력과 이론값 비교하여 BTL(보정값) 적용.png">    </p:cNvPr>
           <p:cNvPicPr>
             <a:picLocks noChangeAspect="1"/>
           </p:cNvPicPr>
@@ -1847,7 +1952,7 @@
         </p:blipFill>
         <p:spPr>
           <a:xfrm>
-            <a:off x="6191250" y="2617754"/>
+            <a:off x="6191250" y="2636804"/>
             <a:ext cx="2343150" cy="498543"/>
           </a:xfrm>
           <a:prstGeom prst="rect">
@@ -1857,13 +1962,13 @@
       </p:pic>
       <p:sp>
         <p:nvSpPr>
-          <p:cNvPr id="31" name="Shape 26"/>
-          <p:cNvSpPr/>
-          <p:nvPr/>
-        </p:nvSpPr>
-        <p:spPr>
-          <a:xfrm>
-            <a:off x="6181725" y="2608229"/>
+          <p:cNvPr id="35" name="Shape 30"/>
+          <p:cNvSpPr/>
+          <p:nvPr/>
+        </p:nvSpPr>
+        <p:spPr>
+          <a:xfrm>
+            <a:off x="6181725" y="2627279"/>
             <a:ext cx="2362200" cy="517593"/>
           </a:xfrm>
           <a:prstGeom prst="rect">
@@ -1879,13 +1984,13 @@
       </p:sp>
       <p:sp>
         <p:nvSpPr>
-          <p:cNvPr id="32" name="Text 27"/>
-          <p:cNvSpPr txBox="1"/>
-          <p:nvPr/>
-        </p:nvSpPr>
-        <p:spPr>
-          <a:xfrm>
-            <a:off x="6134100" y="3505200"/>
+          <p:cNvPr id="36" name="Text 31"/>
+          <p:cNvSpPr txBox="1"/>
+          <p:nvPr/>
+        </p:nvSpPr>
+        <p:spPr>
+          <a:xfrm>
+            <a:off x="6134100" y="3467100"/>
             <a:ext cx="2457450" cy="492919"/>
           </a:xfrm>
           <a:prstGeom prst="rect">
@@ -1921,13 +2026,13 @@
       </p:sp>
       <p:sp>
         <p:nvSpPr>
-          <p:cNvPr id="33" name="Text 28"/>
-          <p:cNvSpPr txBox="1"/>
-          <p:nvPr/>
-        </p:nvSpPr>
-        <p:spPr>
-          <a:xfrm>
-            <a:off x="8601075" y="2781300"/>
+          <p:cNvPr id="37" name="Text 32"/>
+          <p:cNvSpPr txBox="1"/>
+          <p:nvPr/>
+        </p:nvSpPr>
+        <p:spPr>
+          <a:xfrm>
+            <a:off x="8601075" y="2809875"/>
             <a:ext cx="190500" cy="148590"/>
           </a:xfrm>
           <a:prstGeom prst="rect">
@@ -1963,13 +2068,13 @@
       </p:sp>
       <p:sp>
         <p:nvSpPr>
-          <p:cNvPr id="34" name="Text 29"/>
-          <p:cNvSpPr txBox="1"/>
-          <p:nvPr/>
-        </p:nvSpPr>
-        <p:spPr>
-          <a:xfrm>
-            <a:off x="8782050" y="2114550"/>
+          <p:cNvPr id="38" name="Text 33"/>
+          <p:cNvSpPr txBox="1"/>
+          <p:nvPr/>
+        </p:nvSpPr>
+        <p:spPr>
+          <a:xfrm>
+            <a:off x="8782050" y="2171700"/>
             <a:ext cx="2457450" cy="167164"/>
           </a:xfrm>
           <a:prstGeom prst="rect">
@@ -2005,14 +2110,14 @@
       </p:sp>
       <p:sp>
         <p:nvSpPr>
-          <p:cNvPr id="35" name="Shape 30"/>
-          <p:cNvSpPr/>
-          <p:nvPr/>
-        </p:nvSpPr>
-        <p:spPr>
-          <a:xfrm>
-            <a:off x="8782050" y="2324100"/>
-            <a:ext cx="2457450" cy="1085850"/>
+          <p:cNvPr id="39" name="Shape 34"/>
+          <p:cNvSpPr/>
+          <p:nvPr/>
+        </p:nvSpPr>
+        <p:spPr>
+          <a:xfrm>
+            <a:off x="8782050" y="2381250"/>
+            <a:ext cx="2457450" cy="1009650"/>
           </a:xfrm>
           <a:prstGeom prst="rect">
             <a:avLst/>
@@ -2027,7 +2132,7 @@
       </p:sp>
       <p:pic>
         <p:nvPicPr>
-          <p:cNvPr id="36" name="Image 3" descr="/home/user/Narae-AI/docs/ppt/assets/xl_profile.png">    </p:cNvPr>
+          <p:cNvPr id="40" name="Image 3" descr="/home/user/Narae-AI/docs/ppt/assets/xl_profile.png">    </p:cNvPr>
           <p:cNvPicPr>
             <a:picLocks noChangeAspect="1"/>
           </p:cNvPicPr>
@@ -2041,8 +2146,8 @@
         </p:blipFill>
         <p:spPr>
           <a:xfrm>
-            <a:off x="9191030" y="2381250"/>
-            <a:ext cx="1639491" cy="971550"/>
+            <a:off x="9239250" y="2428875"/>
+            <a:ext cx="1543050" cy="914400"/>
           </a:xfrm>
           <a:prstGeom prst="rect">
             <a:avLst/>
@@ -2051,14 +2156,14 @@
       </p:pic>
       <p:sp>
         <p:nvSpPr>
-          <p:cNvPr id="37" name="Shape 31"/>
-          <p:cNvSpPr/>
-          <p:nvPr/>
-        </p:nvSpPr>
-        <p:spPr>
-          <a:xfrm>
-            <a:off x="9181505" y="2371725"/>
-            <a:ext cx="1658541" cy="990600"/>
+          <p:cNvPr id="41" name="Shape 35"/>
+          <p:cNvSpPr/>
+          <p:nvPr/>
+        </p:nvSpPr>
+        <p:spPr>
+          <a:xfrm>
+            <a:off x="9229725" y="2419350"/>
+            <a:ext cx="1562100" cy="933450"/>
           </a:xfrm>
           <a:prstGeom prst="rect">
             <a:avLst/>
@@ -2073,13 +2178,13 @@
       </p:sp>
       <p:sp>
         <p:nvSpPr>
-          <p:cNvPr id="38" name="Text 32"/>
-          <p:cNvSpPr txBox="1"/>
-          <p:nvPr/>
-        </p:nvSpPr>
-        <p:spPr>
-          <a:xfrm>
-            <a:off x="8782050" y="3505200"/>
+          <p:cNvPr id="42" name="Text 36"/>
+          <p:cNvSpPr txBox="1"/>
+          <p:nvPr/>
+        </p:nvSpPr>
+        <p:spPr>
+          <a:xfrm>
+            <a:off x="8782050" y="3467100"/>
             <a:ext cx="2457450" cy="492919"/>
           </a:xfrm>
           <a:prstGeom prst="rect">
@@ -2115,14 +2220,14 @@
       </p:sp>
       <p:sp>
         <p:nvSpPr>
-          <p:cNvPr id="39" name="Shape 33"/>
-          <p:cNvSpPr/>
-          <p:nvPr/>
-        </p:nvSpPr>
-        <p:spPr>
-          <a:xfrm>
-            <a:off x="685800" y="4267200"/>
-            <a:ext cx="10820400" cy="1676400"/>
+          <p:cNvPr id="43" name="Shape 37"/>
+          <p:cNvSpPr/>
+          <p:nvPr/>
+        </p:nvSpPr>
+        <p:spPr>
+          <a:xfrm>
+            <a:off x="685800" y="4171950"/>
+            <a:ext cx="10820400" cy="1771650"/>
           </a:xfrm>
           <a:prstGeom prst="rect">
             <a:avLst/>
@@ -2130,24 +2235,87 @@
           <a:solidFill>
             <a:srgbClr val="0A1320"/>
           </a:solidFill>
-          <a:ln w="12700">
-            <a:solidFill>
-              <a:srgbClr val="182838"/>
-            </a:solidFill>
-            <a:prstDash val="solid"/>
-          </a:ln>
-        </p:spPr>
-      </p:sp>
-      <p:sp>
-        <p:nvSpPr>
-          <p:cNvPr id="40" name="Text 34"/>
-          <p:cNvSpPr txBox="1"/>
-          <p:nvPr/>
-        </p:nvSpPr>
-        <p:spPr>
-          <a:xfrm>
-            <a:off x="914400" y="4362450"/>
-            <a:ext cx="2476500" cy="125016"/>
+          <a:ln w="15240">
+            <a:solidFill>
+              <a:srgbClr val="22354A"/>
+            </a:solidFill>
+            <a:prstDash val="solid"/>
+          </a:ln>
+        </p:spPr>
+      </p:sp>
+      <p:sp>
+        <p:nvSpPr>
+          <p:cNvPr id="44" name="Shape 38"/>
+          <p:cNvSpPr/>
+          <p:nvPr/>
+        </p:nvSpPr>
+        <p:spPr>
+          <a:xfrm>
+            <a:off x="695325" y="4181475"/>
+            <a:ext cx="10801350" cy="276225"/>
+          </a:xfrm>
+          <a:prstGeom prst="rect">
+            <a:avLst/>
+          </a:prstGeom>
+          <a:solidFill>
+            <a:srgbClr val="17283C"/>
+          </a:solidFill>
+          <a:ln/>
+        </p:spPr>
+      </p:sp>
+      <p:sp>
+        <p:nvSpPr>
+          <p:cNvPr id="45" name="Shape 39"/>
+          <p:cNvSpPr/>
+          <p:nvPr/>
+        </p:nvSpPr>
+        <p:spPr>
+          <a:xfrm>
+            <a:off x="685800" y="4457700"/>
+            <a:ext cx="10820400" cy="0"/>
+          </a:xfrm>
+          <a:prstGeom prst="line">
+            <a:avLst/>
+          </a:prstGeom>
+          <a:noFill/>
+          <a:ln w="15240">
+            <a:solidFill>
+              <a:srgbClr val="22354A"/>
+            </a:solidFill>
+            <a:prstDash val="solid"/>
+          </a:ln>
+        </p:spPr>
+      </p:sp>
+      <p:sp>
+        <p:nvSpPr>
+          <p:cNvPr id="46" name="Shape 40"/>
+          <p:cNvSpPr/>
+          <p:nvPr/>
+        </p:nvSpPr>
+        <p:spPr>
+          <a:xfrm>
+            <a:off x="695325" y="4181475"/>
+            <a:ext cx="38100" cy="276225"/>
+          </a:xfrm>
+          <a:prstGeom prst="rect">
+            <a:avLst/>
+          </a:prstGeom>
+          <a:solidFill>
+            <a:srgbClr val="EFB13C"/>
+          </a:solidFill>
+          <a:ln/>
+        </p:spPr>
+      </p:sp>
+      <p:sp>
+        <p:nvSpPr>
+          <p:cNvPr id="47" name="Text 41"/>
+          <p:cNvSpPr txBox="1"/>
+          <p:nvPr/>
+        </p:nvSpPr>
+        <p:spPr>
+          <a:xfrm>
+            <a:off x="857250" y="4248150"/>
+            <a:ext cx="171450" cy="148590"/>
           </a:xfrm>
           <a:prstGeom prst="rect">
             <a:avLst/>
@@ -2161,61 +2329,145 @@
           <a:p>
             <a:pPr algn="l" indent="0" marL="0">
               <a:lnSpc>
-                <a:spcPts val="984"/>
-              </a:lnSpc>
-              <a:buNone/>
-            </a:pPr>
-            <a:r>
-              <a:rPr lang="en-US" sz="788" b="1" spc="150" kern="0" dirty="0">
-                <a:solidFill>
-                  <a:srgbClr val="8A8880"/>
+                <a:spcPts val="1170"/>
+              </a:lnSpc>
+              <a:buNone/>
+            </a:pPr>
+            <a:r>
+              <a:rPr lang="en-US" sz="975" b="1" dirty="0">
+                <a:solidFill>
+                  <a:srgbClr val="EFB13C"/>
                 </a:solidFill>
                 <a:latin typeface="Consolas" pitchFamily="34" charset="0"/>
                 <a:ea typeface="Consolas" pitchFamily="34" charset="-122"/>
                 <a:cs typeface="Consolas" pitchFamily="34" charset="-120"/>
               </a:rPr>
-              <a:t>보정값을 정하는 방법</a:t>
-            </a:r>
-            <a:endParaRPr lang="en-US" sz="788" dirty="0"/>
-          </a:p>
-        </p:txBody>
-      </p:sp>
-      <p:sp>
-        <p:nvSpPr>
-          <p:cNvPr id="41" name="Text 35"/>
-          <p:cNvSpPr txBox="1"/>
-          <p:nvPr/>
-        </p:nvSpPr>
-        <p:spPr>
-          <a:xfrm>
-            <a:off x="3619500" y="4343400"/>
-            <a:ext cx="7696200" cy="160973"/>
-          </a:xfrm>
-          <a:prstGeom prst="rect">
-            <a:avLst/>
-          </a:prstGeom>
-          <a:noFill/>
-          <a:ln/>
-        </p:spPr>
-        <p:txBody>
-          <a:bodyPr wrap="square" lIns="0" tIns="0" rIns="0" bIns="0" rtlCol="0" anchor="t"/>
-          <a:lstStyle/>
-          <a:p>
-            <a:pPr algn="r" indent="0" marL="0">
-              <a:lnSpc>
-                <a:spcPts val="1268"/>
-              </a:lnSpc>
-              <a:buNone/>
-            </a:pPr>
-            <a:r>
-              <a:rPr lang="en-US" sz="975" dirty="0">
-                <a:solidFill>
-                  <a:srgbClr val="A9A79F"/>
+              <a:t>2</a:t>
+            </a:r>
+            <a:endParaRPr lang="en-US" sz="975" dirty="0"/>
+          </a:p>
+        </p:txBody>
+      </p:sp>
+      <p:sp>
+        <p:nvSpPr>
+          <p:cNvPr id="48" name="Text 42"/>
+          <p:cNvSpPr txBox="1"/>
+          <p:nvPr/>
+        </p:nvSpPr>
+        <p:spPr>
+          <a:xfrm>
+            <a:off x="1085850" y="4248150"/>
+            <a:ext cx="8934450" cy="154305"/>
+          </a:xfrm>
+          <a:prstGeom prst="rect">
+            <a:avLst/>
+          </a:prstGeom>
+          <a:noFill/>
+          <a:ln/>
+        </p:spPr>
+        <p:txBody>
+          <a:bodyPr wrap="square" lIns="0" tIns="0" rIns="0" bIns="0" rtlCol="0" anchor="t"/>
+          <a:lstStyle/>
+          <a:p>
+            <a:pPr algn="l" indent="0" marL="0">
+              <a:lnSpc>
+                <a:spcPts val="1215"/>
+              </a:lnSpc>
+              <a:buNone/>
+            </a:pPr>
+            <a:r>
+              <a:rPr lang="en-US" sz="1013" b="1" spc="30" kern="0" dirty="0">
+                <a:solidFill>
+                  <a:srgbClr val="EAE7E0"/>
                 </a:solidFill>
                 <a:latin typeface="Malgun Gothic" pitchFamily="34" charset="0"/>
                 <a:ea typeface="Malgun Gothic" pitchFamily="34" charset="-122"/>
                 <a:cs typeface="Malgun Gothic" pitchFamily="34" charset="-120"/>
               </a:rPr>
+              <a:t>보정값을 정하는 방법</a:t>
+            </a:r>
+            <a:endParaRPr lang="en-US" sz="1013" dirty="0"/>
+          </a:p>
+        </p:txBody>
+      </p:sp>
+      <p:sp>
+        <p:nvSpPr>
+          <p:cNvPr id="49" name="Text 43"/>
+          <p:cNvSpPr txBox="1"/>
+          <p:nvPr/>
+        </p:nvSpPr>
+        <p:spPr>
+          <a:xfrm>
+            <a:off x="10020300" y="4257675"/>
+            <a:ext cx="1352550" cy="125730"/>
+          </a:xfrm>
+          <a:prstGeom prst="rect">
+            <a:avLst/>
+          </a:prstGeom>
+          <a:noFill/>
+          <a:ln/>
+        </p:spPr>
+        <p:txBody>
+          <a:bodyPr wrap="square" lIns="0" tIns="0" rIns="0" bIns="0" rtlCol="0" anchor="t"/>
+          <a:lstStyle/>
+          <a:p>
+            <a:pPr algn="r" indent="0" marL="0">
+              <a:lnSpc>
+                <a:spcPts val="990"/>
+              </a:lnSpc>
+              <a:buNone/>
+            </a:pPr>
+            <a:r>
+              <a:rPr lang="en-US" sz="825" dirty="0">
+                <a:solidFill>
+                  <a:srgbClr val="8A8880"/>
+                </a:solidFill>
+                <a:latin typeface="Malgun Gothic" pitchFamily="34" charset="0"/>
+                <a:ea typeface="Malgun Gothic" pitchFamily="34" charset="-122"/>
+                <a:cs typeface="Malgun Gothic" pitchFamily="34" charset="-120"/>
+              </a:rPr>
+              <a:t>시험 1곳 → 61개 온도</a:t>
+            </a:r>
+            <a:endParaRPr lang="en-US" sz="825" dirty="0"/>
+          </a:p>
+        </p:txBody>
+      </p:sp>
+      <p:sp>
+        <p:nvSpPr>
+          <p:cNvPr id="50" name="Text 44"/>
+          <p:cNvSpPr txBox="1"/>
+          <p:nvPr/>
+        </p:nvSpPr>
+        <p:spPr>
+          <a:xfrm>
+            <a:off x="914400" y="4572000"/>
+            <a:ext cx="10363200" cy="160973"/>
+          </a:xfrm>
+          <a:prstGeom prst="rect">
+            <a:avLst/>
+          </a:prstGeom>
+          <a:noFill/>
+          <a:ln/>
+        </p:spPr>
+        <p:txBody>
+          <a:bodyPr wrap="square" lIns="0" tIns="0" rIns="0" bIns="0" rtlCol="0" anchor="t"/>
+          <a:lstStyle/>
+          <a:p>
+            <a:pPr algn="l" indent="0" marL="0">
+              <a:lnSpc>
+                <a:spcPts val="1268"/>
+              </a:lnSpc>
+              <a:buNone/>
+            </a:pPr>
+            <a:r>
+              <a:rPr lang="en-US" sz="975" dirty="0">
+                <a:solidFill>
+                  <a:srgbClr val="A9A79F"/>
+                </a:solidFill>
+                <a:latin typeface="Malgun Gothic" pitchFamily="34" charset="0"/>
+                <a:ea typeface="Malgun Gothic" pitchFamily="34" charset="-122"/>
+                <a:cs typeface="Malgun Gothic" pitchFamily="34" charset="-120"/>
+              </a:rPr>
               <a:t>시험은 하루에 한 곳에서만 합니다. 그 한 곳에서 나온 차이를 나머지 60개 온도에도 똑같이 더했습니다.</a:t>
             </a:r>
             <a:endParaRPr lang="en-US" sz="975" dirty="0"/>
@@ -2224,13 +2476,13 @@
       </p:sp>
       <p:sp>
         <p:nvSpPr>
-          <p:cNvPr id="42" name="Shape 36"/>
-          <p:cNvSpPr/>
-          <p:nvPr/>
-        </p:nvSpPr>
-        <p:spPr>
-          <a:xfrm>
-            <a:off x="1905000" y="5638800"/>
+          <p:cNvPr id="51" name="Shape 45"/>
+          <p:cNvSpPr/>
+          <p:nvPr/>
+        </p:nvSpPr>
+        <p:spPr>
+          <a:xfrm>
+            <a:off x="1905000" y="5676900"/>
             <a:ext cx="0" cy="57150"/>
           </a:xfrm>
           <a:prstGeom prst="line">
@@ -2247,13 +2499,13 @@
       </p:sp>
       <p:sp>
         <p:nvSpPr>
-          <p:cNvPr id="43" name="Shape 37"/>
-          <p:cNvSpPr/>
-          <p:nvPr/>
-        </p:nvSpPr>
-        <p:spPr>
-          <a:xfrm>
-            <a:off x="2051050" y="5638800"/>
+          <p:cNvPr id="52" name="Shape 46"/>
+          <p:cNvSpPr/>
+          <p:nvPr/>
+        </p:nvSpPr>
+        <p:spPr>
+          <a:xfrm>
+            <a:off x="2051050" y="5676900"/>
             <a:ext cx="0" cy="57150"/>
           </a:xfrm>
           <a:prstGeom prst="line">
@@ -2270,13 +2522,13 @@
       </p:sp>
       <p:sp>
         <p:nvSpPr>
-          <p:cNvPr id="44" name="Shape 38"/>
-          <p:cNvSpPr/>
-          <p:nvPr/>
-        </p:nvSpPr>
-        <p:spPr>
-          <a:xfrm>
-            <a:off x="2197100" y="5638800"/>
+          <p:cNvPr id="53" name="Shape 47"/>
+          <p:cNvSpPr/>
+          <p:nvPr/>
+        </p:nvSpPr>
+        <p:spPr>
+          <a:xfrm>
+            <a:off x="2197100" y="5676900"/>
             <a:ext cx="0" cy="57150"/>
           </a:xfrm>
           <a:prstGeom prst="line">
@@ -2293,13 +2545,13 @@
       </p:sp>
       <p:sp>
         <p:nvSpPr>
-          <p:cNvPr id="45" name="Shape 39"/>
-          <p:cNvSpPr/>
-          <p:nvPr/>
-        </p:nvSpPr>
-        <p:spPr>
-          <a:xfrm>
-            <a:off x="2343150" y="5638800"/>
+          <p:cNvPr id="54" name="Shape 48"/>
+          <p:cNvSpPr/>
+          <p:nvPr/>
+        </p:nvSpPr>
+        <p:spPr>
+          <a:xfrm>
+            <a:off x="2343150" y="5676900"/>
             <a:ext cx="0" cy="57150"/>
           </a:xfrm>
           <a:prstGeom prst="line">
@@ -2316,13 +2568,13 @@
       </p:sp>
       <p:sp>
         <p:nvSpPr>
-          <p:cNvPr id="46" name="Shape 40"/>
-          <p:cNvSpPr/>
-          <p:nvPr/>
-        </p:nvSpPr>
-        <p:spPr>
-          <a:xfrm>
-            <a:off x="2489200" y="5638800"/>
+          <p:cNvPr id="55" name="Shape 49"/>
+          <p:cNvSpPr/>
+          <p:nvPr/>
+        </p:nvSpPr>
+        <p:spPr>
+          <a:xfrm>
+            <a:off x="2489200" y="5676900"/>
             <a:ext cx="0" cy="57150"/>
           </a:xfrm>
           <a:prstGeom prst="line">
@@ -2339,13 +2591,13 @@
       </p:sp>
       <p:sp>
         <p:nvSpPr>
-          <p:cNvPr id="47" name="Shape 41"/>
-          <p:cNvSpPr/>
-          <p:nvPr/>
-        </p:nvSpPr>
-        <p:spPr>
-          <a:xfrm>
-            <a:off x="2635250" y="5638800"/>
+          <p:cNvPr id="56" name="Shape 50"/>
+          <p:cNvSpPr/>
+          <p:nvPr/>
+        </p:nvSpPr>
+        <p:spPr>
+          <a:xfrm>
+            <a:off x="2635250" y="5676900"/>
             <a:ext cx="0" cy="57150"/>
           </a:xfrm>
           <a:prstGeom prst="line">
@@ -2362,13 +2614,13 @@
       </p:sp>
       <p:sp>
         <p:nvSpPr>
-          <p:cNvPr id="48" name="Shape 42"/>
-          <p:cNvSpPr/>
-          <p:nvPr/>
-        </p:nvSpPr>
-        <p:spPr>
-          <a:xfrm>
-            <a:off x="2781300" y="5638800"/>
+          <p:cNvPr id="57" name="Shape 51"/>
+          <p:cNvSpPr/>
+          <p:nvPr/>
+        </p:nvSpPr>
+        <p:spPr>
+          <a:xfrm>
+            <a:off x="2781300" y="5676900"/>
             <a:ext cx="0" cy="57150"/>
           </a:xfrm>
           <a:prstGeom prst="line">
@@ -2385,13 +2637,13 @@
       </p:sp>
       <p:sp>
         <p:nvSpPr>
-          <p:cNvPr id="49" name="Shape 43"/>
-          <p:cNvSpPr/>
-          <p:nvPr/>
-        </p:nvSpPr>
-        <p:spPr>
-          <a:xfrm>
-            <a:off x="2927350" y="5638800"/>
+          <p:cNvPr id="58" name="Shape 52"/>
+          <p:cNvSpPr/>
+          <p:nvPr/>
+        </p:nvSpPr>
+        <p:spPr>
+          <a:xfrm>
+            <a:off x="2927350" y="5676900"/>
             <a:ext cx="0" cy="57150"/>
           </a:xfrm>
           <a:prstGeom prst="line">
@@ -2408,13 +2660,13 @@
       </p:sp>
       <p:sp>
         <p:nvSpPr>
-          <p:cNvPr id="50" name="Shape 44"/>
-          <p:cNvSpPr/>
-          <p:nvPr/>
-        </p:nvSpPr>
-        <p:spPr>
-          <a:xfrm>
-            <a:off x="3073400" y="5638800"/>
+          <p:cNvPr id="59" name="Shape 53"/>
+          <p:cNvSpPr/>
+          <p:nvPr/>
+        </p:nvSpPr>
+        <p:spPr>
+          <a:xfrm>
+            <a:off x="3073400" y="5676900"/>
             <a:ext cx="0" cy="57150"/>
           </a:xfrm>
           <a:prstGeom prst="line">
@@ -2431,13 +2683,13 @@
       </p:sp>
       <p:sp>
         <p:nvSpPr>
-          <p:cNvPr id="51" name="Shape 45"/>
-          <p:cNvSpPr/>
-          <p:nvPr/>
-        </p:nvSpPr>
-        <p:spPr>
-          <a:xfrm>
-            <a:off x="3219450" y="5638800"/>
+          <p:cNvPr id="60" name="Shape 54"/>
+          <p:cNvSpPr/>
+          <p:nvPr/>
+        </p:nvSpPr>
+        <p:spPr>
+          <a:xfrm>
+            <a:off x="3219450" y="5676900"/>
             <a:ext cx="0" cy="57150"/>
           </a:xfrm>
           <a:prstGeom prst="line">
@@ -2454,13 +2706,13 @@
       </p:sp>
       <p:sp>
         <p:nvSpPr>
-          <p:cNvPr id="52" name="Shape 46"/>
-          <p:cNvSpPr/>
-          <p:nvPr/>
-        </p:nvSpPr>
-        <p:spPr>
-          <a:xfrm>
-            <a:off x="3365500" y="5638800"/>
+          <p:cNvPr id="61" name="Shape 55"/>
+          <p:cNvSpPr/>
+          <p:nvPr/>
+        </p:nvSpPr>
+        <p:spPr>
+          <a:xfrm>
+            <a:off x="3365500" y="5676900"/>
             <a:ext cx="0" cy="57150"/>
           </a:xfrm>
           <a:prstGeom prst="line">
@@ -2477,13 +2729,13 @@
       </p:sp>
       <p:sp>
         <p:nvSpPr>
-          <p:cNvPr id="53" name="Shape 47"/>
-          <p:cNvSpPr/>
-          <p:nvPr/>
-        </p:nvSpPr>
-        <p:spPr>
-          <a:xfrm>
-            <a:off x="3511550" y="5638800"/>
+          <p:cNvPr id="62" name="Shape 56"/>
+          <p:cNvSpPr/>
+          <p:nvPr/>
+        </p:nvSpPr>
+        <p:spPr>
+          <a:xfrm>
+            <a:off x="3511550" y="5676900"/>
             <a:ext cx="0" cy="57150"/>
           </a:xfrm>
           <a:prstGeom prst="line">
@@ -2500,13 +2752,13 @@
       </p:sp>
       <p:sp>
         <p:nvSpPr>
-          <p:cNvPr id="54" name="Shape 48"/>
-          <p:cNvSpPr/>
-          <p:nvPr/>
-        </p:nvSpPr>
-        <p:spPr>
-          <a:xfrm>
-            <a:off x="3657600" y="5638800"/>
+          <p:cNvPr id="63" name="Shape 57"/>
+          <p:cNvSpPr/>
+          <p:nvPr/>
+        </p:nvSpPr>
+        <p:spPr>
+          <a:xfrm>
+            <a:off x="3657600" y="5676900"/>
             <a:ext cx="0" cy="57150"/>
           </a:xfrm>
           <a:prstGeom prst="line">
@@ -2523,13 +2775,13 @@
       </p:sp>
       <p:sp>
         <p:nvSpPr>
-          <p:cNvPr id="55" name="Shape 49"/>
-          <p:cNvSpPr/>
-          <p:nvPr/>
-        </p:nvSpPr>
-        <p:spPr>
-          <a:xfrm>
-            <a:off x="3803650" y="5638800"/>
+          <p:cNvPr id="64" name="Shape 58"/>
+          <p:cNvSpPr/>
+          <p:nvPr/>
+        </p:nvSpPr>
+        <p:spPr>
+          <a:xfrm>
+            <a:off x="3803650" y="5676900"/>
             <a:ext cx="0" cy="57150"/>
           </a:xfrm>
           <a:prstGeom prst="line">
@@ -2546,13 +2798,13 @@
       </p:sp>
       <p:sp>
         <p:nvSpPr>
-          <p:cNvPr id="56" name="Shape 50"/>
-          <p:cNvSpPr/>
-          <p:nvPr/>
-        </p:nvSpPr>
-        <p:spPr>
-          <a:xfrm>
-            <a:off x="3949700" y="5638800"/>
+          <p:cNvPr id="65" name="Shape 59"/>
+          <p:cNvSpPr/>
+          <p:nvPr/>
+        </p:nvSpPr>
+        <p:spPr>
+          <a:xfrm>
+            <a:off x="3949700" y="5676900"/>
             <a:ext cx="0" cy="57150"/>
           </a:xfrm>
           <a:prstGeom prst="line">
@@ -2569,13 +2821,13 @@
       </p:sp>
       <p:sp>
         <p:nvSpPr>
-          <p:cNvPr id="57" name="Shape 51"/>
-          <p:cNvSpPr/>
-          <p:nvPr/>
-        </p:nvSpPr>
-        <p:spPr>
-          <a:xfrm>
-            <a:off x="4095750" y="5638800"/>
+          <p:cNvPr id="66" name="Shape 60"/>
+          <p:cNvSpPr/>
+          <p:nvPr/>
+        </p:nvSpPr>
+        <p:spPr>
+          <a:xfrm>
+            <a:off x="4095750" y="5676900"/>
             <a:ext cx="0" cy="57150"/>
           </a:xfrm>
           <a:prstGeom prst="line">
@@ -2592,13 +2844,13 @@
       </p:sp>
       <p:sp>
         <p:nvSpPr>
-          <p:cNvPr id="58" name="Shape 52"/>
-          <p:cNvSpPr/>
-          <p:nvPr/>
-        </p:nvSpPr>
-        <p:spPr>
-          <a:xfrm>
-            <a:off x="4241800" y="5638800"/>
+          <p:cNvPr id="67" name="Shape 61"/>
+          <p:cNvSpPr/>
+          <p:nvPr/>
+        </p:nvSpPr>
+        <p:spPr>
+          <a:xfrm>
+            <a:off x="4241800" y="5676900"/>
             <a:ext cx="0" cy="57150"/>
           </a:xfrm>
           <a:prstGeom prst="line">
@@ -2615,13 +2867,13 @@
       </p:sp>
       <p:sp>
         <p:nvSpPr>
-          <p:cNvPr id="59" name="Shape 53"/>
-          <p:cNvSpPr/>
-          <p:nvPr/>
-        </p:nvSpPr>
-        <p:spPr>
-          <a:xfrm>
-            <a:off x="4387850" y="5638800"/>
+          <p:cNvPr id="68" name="Shape 62"/>
+          <p:cNvSpPr/>
+          <p:nvPr/>
+        </p:nvSpPr>
+        <p:spPr>
+          <a:xfrm>
+            <a:off x="4387850" y="5676900"/>
             <a:ext cx="0" cy="57150"/>
           </a:xfrm>
           <a:prstGeom prst="line">
@@ -2638,13 +2890,13 @@
       </p:sp>
       <p:sp>
         <p:nvSpPr>
-          <p:cNvPr id="60" name="Shape 54"/>
-          <p:cNvSpPr/>
-          <p:nvPr/>
-        </p:nvSpPr>
-        <p:spPr>
-          <a:xfrm>
-            <a:off x="4533900" y="5638800"/>
+          <p:cNvPr id="69" name="Shape 63"/>
+          <p:cNvSpPr/>
+          <p:nvPr/>
+        </p:nvSpPr>
+        <p:spPr>
+          <a:xfrm>
+            <a:off x="4533900" y="5676900"/>
             <a:ext cx="0" cy="57150"/>
           </a:xfrm>
           <a:prstGeom prst="line">
@@ -2661,13 +2913,13 @@
       </p:sp>
       <p:sp>
         <p:nvSpPr>
-          <p:cNvPr id="61" name="Shape 55"/>
-          <p:cNvSpPr/>
-          <p:nvPr/>
-        </p:nvSpPr>
-        <p:spPr>
-          <a:xfrm>
-            <a:off x="4679950" y="5638800"/>
+          <p:cNvPr id="70" name="Shape 64"/>
+          <p:cNvSpPr/>
+          <p:nvPr/>
+        </p:nvSpPr>
+        <p:spPr>
+          <a:xfrm>
+            <a:off x="4679950" y="5676900"/>
             <a:ext cx="0" cy="57150"/>
           </a:xfrm>
           <a:prstGeom prst="line">
@@ -2684,13 +2936,13 @@
       </p:sp>
       <p:sp>
         <p:nvSpPr>
-          <p:cNvPr id="62" name="Shape 56"/>
-          <p:cNvSpPr/>
-          <p:nvPr/>
-        </p:nvSpPr>
-        <p:spPr>
-          <a:xfrm>
-            <a:off x="4826000" y="5638800"/>
+          <p:cNvPr id="71" name="Shape 65"/>
+          <p:cNvSpPr/>
+          <p:nvPr/>
+        </p:nvSpPr>
+        <p:spPr>
+          <a:xfrm>
+            <a:off x="4826000" y="5676900"/>
             <a:ext cx="0" cy="57150"/>
           </a:xfrm>
           <a:prstGeom prst="line">
@@ -2707,13 +2959,13 @@
       </p:sp>
       <p:sp>
         <p:nvSpPr>
-          <p:cNvPr id="63" name="Shape 57"/>
-          <p:cNvSpPr/>
-          <p:nvPr/>
-        </p:nvSpPr>
-        <p:spPr>
-          <a:xfrm>
-            <a:off x="4972050" y="5638800"/>
+          <p:cNvPr id="72" name="Shape 66"/>
+          <p:cNvSpPr/>
+          <p:nvPr/>
+        </p:nvSpPr>
+        <p:spPr>
+          <a:xfrm>
+            <a:off x="4972050" y="5676900"/>
             <a:ext cx="0" cy="57150"/>
           </a:xfrm>
           <a:prstGeom prst="line">
@@ -2730,13 +2982,13 @@
       </p:sp>
       <p:sp>
         <p:nvSpPr>
-          <p:cNvPr id="64" name="Shape 58"/>
-          <p:cNvSpPr/>
-          <p:nvPr/>
-        </p:nvSpPr>
-        <p:spPr>
-          <a:xfrm>
-            <a:off x="5118100" y="5638800"/>
+          <p:cNvPr id="73" name="Shape 67"/>
+          <p:cNvSpPr/>
+          <p:nvPr/>
+        </p:nvSpPr>
+        <p:spPr>
+          <a:xfrm>
+            <a:off x="5118100" y="5676900"/>
             <a:ext cx="0" cy="57150"/>
           </a:xfrm>
           <a:prstGeom prst="line">
@@ -2753,13 +3005,13 @@
       </p:sp>
       <p:sp>
         <p:nvSpPr>
-          <p:cNvPr id="65" name="Shape 59"/>
-          <p:cNvSpPr/>
-          <p:nvPr/>
-        </p:nvSpPr>
-        <p:spPr>
-          <a:xfrm>
-            <a:off x="5264150" y="5638800"/>
+          <p:cNvPr id="74" name="Shape 68"/>
+          <p:cNvSpPr/>
+          <p:nvPr/>
+        </p:nvSpPr>
+        <p:spPr>
+          <a:xfrm>
+            <a:off x="5264150" y="5676900"/>
             <a:ext cx="0" cy="57150"/>
           </a:xfrm>
           <a:prstGeom prst="line">
@@ -2776,13 +3028,13 @@
       </p:sp>
       <p:sp>
         <p:nvSpPr>
-          <p:cNvPr id="66" name="Shape 60"/>
-          <p:cNvSpPr/>
-          <p:nvPr/>
-        </p:nvSpPr>
-        <p:spPr>
-          <a:xfrm>
-            <a:off x="5410200" y="5638800"/>
+          <p:cNvPr id="75" name="Shape 69"/>
+          <p:cNvSpPr/>
+          <p:nvPr/>
+        </p:nvSpPr>
+        <p:spPr>
+          <a:xfrm>
+            <a:off x="5410200" y="5676900"/>
             <a:ext cx="0" cy="57150"/>
           </a:xfrm>
           <a:prstGeom prst="line">
@@ -2799,13 +3051,13 @@
       </p:sp>
       <p:sp>
         <p:nvSpPr>
-          <p:cNvPr id="67" name="Shape 61"/>
-          <p:cNvSpPr/>
-          <p:nvPr/>
-        </p:nvSpPr>
-        <p:spPr>
-          <a:xfrm>
-            <a:off x="5556250" y="5638800"/>
+          <p:cNvPr id="76" name="Shape 70"/>
+          <p:cNvSpPr/>
+          <p:nvPr/>
+        </p:nvSpPr>
+        <p:spPr>
+          <a:xfrm>
+            <a:off x="5556250" y="5676900"/>
             <a:ext cx="0" cy="57150"/>
           </a:xfrm>
           <a:prstGeom prst="line">
@@ -2822,13 +3074,13 @@
       </p:sp>
       <p:sp>
         <p:nvSpPr>
-          <p:cNvPr id="68" name="Shape 62"/>
-          <p:cNvSpPr/>
-          <p:nvPr/>
-        </p:nvSpPr>
-        <p:spPr>
-          <a:xfrm>
-            <a:off x="5702300" y="5638800"/>
+          <p:cNvPr id="77" name="Shape 71"/>
+          <p:cNvSpPr/>
+          <p:nvPr/>
+        </p:nvSpPr>
+        <p:spPr>
+          <a:xfrm>
+            <a:off x="5702300" y="5676900"/>
             <a:ext cx="0" cy="57150"/>
           </a:xfrm>
           <a:prstGeom prst="line">
@@ -2845,13 +3097,13 @@
       </p:sp>
       <p:sp>
         <p:nvSpPr>
-          <p:cNvPr id="69" name="Shape 63"/>
-          <p:cNvSpPr/>
-          <p:nvPr/>
-        </p:nvSpPr>
-        <p:spPr>
-          <a:xfrm>
-            <a:off x="5848350" y="5638800"/>
+          <p:cNvPr id="78" name="Shape 72"/>
+          <p:cNvSpPr/>
+          <p:nvPr/>
+        </p:nvSpPr>
+        <p:spPr>
+          <a:xfrm>
+            <a:off x="5848350" y="5676900"/>
             <a:ext cx="0" cy="57150"/>
           </a:xfrm>
           <a:prstGeom prst="line">
@@ -2868,13 +3120,13 @@
       </p:sp>
       <p:sp>
         <p:nvSpPr>
-          <p:cNvPr id="70" name="Shape 64"/>
-          <p:cNvSpPr/>
-          <p:nvPr/>
-        </p:nvSpPr>
-        <p:spPr>
-          <a:xfrm>
-            <a:off x="5994400" y="5638800"/>
+          <p:cNvPr id="79" name="Shape 73"/>
+          <p:cNvSpPr/>
+          <p:nvPr/>
+        </p:nvSpPr>
+        <p:spPr>
+          <a:xfrm>
+            <a:off x="5994400" y="5676900"/>
             <a:ext cx="0" cy="57150"/>
           </a:xfrm>
           <a:prstGeom prst="line">
@@ -2891,13 +3143,13 @@
       </p:sp>
       <p:sp>
         <p:nvSpPr>
-          <p:cNvPr id="71" name="Shape 65"/>
-          <p:cNvSpPr/>
-          <p:nvPr/>
-        </p:nvSpPr>
-        <p:spPr>
-          <a:xfrm>
-            <a:off x="6140450" y="5638800"/>
+          <p:cNvPr id="80" name="Shape 74"/>
+          <p:cNvSpPr/>
+          <p:nvPr/>
+        </p:nvSpPr>
+        <p:spPr>
+          <a:xfrm>
+            <a:off x="6140450" y="5676900"/>
             <a:ext cx="0" cy="57150"/>
           </a:xfrm>
           <a:prstGeom prst="line">
@@ -2914,13 +3166,13 @@
       </p:sp>
       <p:sp>
         <p:nvSpPr>
-          <p:cNvPr id="72" name="Shape 66"/>
-          <p:cNvSpPr/>
-          <p:nvPr/>
-        </p:nvSpPr>
-        <p:spPr>
-          <a:xfrm>
-            <a:off x="6286500" y="5638800"/>
+          <p:cNvPr id="81" name="Shape 75"/>
+          <p:cNvSpPr/>
+          <p:nvPr/>
+        </p:nvSpPr>
+        <p:spPr>
+          <a:xfrm>
+            <a:off x="6286500" y="5676900"/>
             <a:ext cx="0" cy="57150"/>
           </a:xfrm>
           <a:prstGeom prst="line">
@@ -2937,13 +3189,13 @@
       </p:sp>
       <p:sp>
         <p:nvSpPr>
-          <p:cNvPr id="73" name="Shape 67"/>
-          <p:cNvSpPr/>
-          <p:nvPr/>
-        </p:nvSpPr>
-        <p:spPr>
-          <a:xfrm>
-            <a:off x="6432550" y="5638800"/>
+          <p:cNvPr id="82" name="Shape 76"/>
+          <p:cNvSpPr/>
+          <p:nvPr/>
+        </p:nvSpPr>
+        <p:spPr>
+          <a:xfrm>
+            <a:off x="6432550" y="5676900"/>
             <a:ext cx="0" cy="57150"/>
           </a:xfrm>
           <a:prstGeom prst="line">
@@ -2960,13 +3212,13 @@
       </p:sp>
       <p:sp>
         <p:nvSpPr>
-          <p:cNvPr id="74" name="Shape 68"/>
-          <p:cNvSpPr/>
-          <p:nvPr/>
-        </p:nvSpPr>
-        <p:spPr>
-          <a:xfrm>
-            <a:off x="6578600" y="5638800"/>
+          <p:cNvPr id="83" name="Shape 77"/>
+          <p:cNvSpPr/>
+          <p:nvPr/>
+        </p:nvSpPr>
+        <p:spPr>
+          <a:xfrm>
+            <a:off x="6578600" y="5676900"/>
             <a:ext cx="0" cy="57150"/>
           </a:xfrm>
           <a:prstGeom prst="line">
@@ -2983,13 +3235,13 @@
       </p:sp>
       <p:sp>
         <p:nvSpPr>
-          <p:cNvPr id="75" name="Shape 69"/>
-          <p:cNvSpPr/>
-          <p:nvPr/>
-        </p:nvSpPr>
-        <p:spPr>
-          <a:xfrm>
-            <a:off x="6724650" y="5638800"/>
+          <p:cNvPr id="84" name="Shape 78"/>
+          <p:cNvSpPr/>
+          <p:nvPr/>
+        </p:nvSpPr>
+        <p:spPr>
+          <a:xfrm>
+            <a:off x="6724650" y="5676900"/>
             <a:ext cx="0" cy="57150"/>
           </a:xfrm>
           <a:prstGeom prst="line">
@@ -3006,13 +3258,13 @@
       </p:sp>
       <p:sp>
         <p:nvSpPr>
-          <p:cNvPr id="76" name="Shape 70"/>
-          <p:cNvSpPr/>
-          <p:nvPr/>
-        </p:nvSpPr>
-        <p:spPr>
-          <a:xfrm>
-            <a:off x="6870700" y="5638800"/>
+          <p:cNvPr id="85" name="Shape 79"/>
+          <p:cNvSpPr/>
+          <p:nvPr/>
+        </p:nvSpPr>
+        <p:spPr>
+          <a:xfrm>
+            <a:off x="6870700" y="5676900"/>
             <a:ext cx="0" cy="57150"/>
           </a:xfrm>
           <a:prstGeom prst="line">
@@ -3029,13 +3281,13 @@
       </p:sp>
       <p:sp>
         <p:nvSpPr>
-          <p:cNvPr id="77" name="Shape 71"/>
-          <p:cNvSpPr/>
-          <p:nvPr/>
-        </p:nvSpPr>
-        <p:spPr>
-          <a:xfrm>
-            <a:off x="7016750" y="5638800"/>
+          <p:cNvPr id="86" name="Shape 80"/>
+          <p:cNvSpPr/>
+          <p:nvPr/>
+        </p:nvSpPr>
+        <p:spPr>
+          <a:xfrm>
+            <a:off x="7016750" y="5676900"/>
             <a:ext cx="0" cy="57150"/>
           </a:xfrm>
           <a:prstGeom prst="line">
@@ -3052,13 +3304,13 @@
       </p:sp>
       <p:sp>
         <p:nvSpPr>
-          <p:cNvPr id="78" name="Shape 72"/>
-          <p:cNvSpPr/>
-          <p:nvPr/>
-        </p:nvSpPr>
-        <p:spPr>
-          <a:xfrm>
-            <a:off x="7162800" y="5638800"/>
+          <p:cNvPr id="87" name="Shape 81"/>
+          <p:cNvSpPr/>
+          <p:nvPr/>
+        </p:nvSpPr>
+        <p:spPr>
+          <a:xfrm>
+            <a:off x="7162800" y="5676900"/>
             <a:ext cx="0" cy="57150"/>
           </a:xfrm>
           <a:prstGeom prst="line">
@@ -3075,13 +3327,13 @@
       </p:sp>
       <p:sp>
         <p:nvSpPr>
-          <p:cNvPr id="79" name="Shape 73"/>
-          <p:cNvSpPr/>
-          <p:nvPr/>
-        </p:nvSpPr>
-        <p:spPr>
-          <a:xfrm>
-            <a:off x="7308850" y="5638800"/>
+          <p:cNvPr id="88" name="Shape 82"/>
+          <p:cNvSpPr/>
+          <p:nvPr/>
+        </p:nvSpPr>
+        <p:spPr>
+          <a:xfrm>
+            <a:off x="7308850" y="5676900"/>
             <a:ext cx="0" cy="57150"/>
           </a:xfrm>
           <a:prstGeom prst="line">
@@ -3098,13 +3350,13 @@
       </p:sp>
       <p:sp>
         <p:nvSpPr>
-          <p:cNvPr id="80" name="Shape 74"/>
-          <p:cNvSpPr/>
-          <p:nvPr/>
-        </p:nvSpPr>
-        <p:spPr>
-          <a:xfrm>
-            <a:off x="7454900" y="5638800"/>
+          <p:cNvPr id="89" name="Shape 83"/>
+          <p:cNvSpPr/>
+          <p:nvPr/>
+        </p:nvSpPr>
+        <p:spPr>
+          <a:xfrm>
+            <a:off x="7454900" y="5676900"/>
             <a:ext cx="0" cy="57150"/>
           </a:xfrm>
           <a:prstGeom prst="line">
@@ -3121,13 +3373,13 @@
       </p:sp>
       <p:sp>
         <p:nvSpPr>
-          <p:cNvPr id="81" name="Shape 75"/>
-          <p:cNvSpPr/>
-          <p:nvPr/>
-        </p:nvSpPr>
-        <p:spPr>
-          <a:xfrm>
-            <a:off x="7600950" y="5638800"/>
+          <p:cNvPr id="90" name="Shape 84"/>
+          <p:cNvSpPr/>
+          <p:nvPr/>
+        </p:nvSpPr>
+        <p:spPr>
+          <a:xfrm>
+            <a:off x="7600950" y="5676900"/>
             <a:ext cx="0" cy="57150"/>
           </a:xfrm>
           <a:prstGeom prst="line">
@@ -3144,13 +3396,13 @@
       </p:sp>
       <p:sp>
         <p:nvSpPr>
-          <p:cNvPr id="82" name="Shape 76"/>
-          <p:cNvSpPr/>
-          <p:nvPr/>
-        </p:nvSpPr>
-        <p:spPr>
-          <a:xfrm>
-            <a:off x="7747000" y="5638800"/>
+          <p:cNvPr id="91" name="Shape 85"/>
+          <p:cNvSpPr/>
+          <p:nvPr/>
+        </p:nvSpPr>
+        <p:spPr>
+          <a:xfrm>
+            <a:off x="7747000" y="5676900"/>
             <a:ext cx="0" cy="57150"/>
           </a:xfrm>
           <a:prstGeom prst="line">
@@ -3167,13 +3419,13 @@
       </p:sp>
       <p:sp>
         <p:nvSpPr>
-          <p:cNvPr id="83" name="Shape 77"/>
-          <p:cNvSpPr/>
-          <p:nvPr/>
-        </p:nvSpPr>
-        <p:spPr>
-          <a:xfrm>
-            <a:off x="7893050" y="5638800"/>
+          <p:cNvPr id="92" name="Shape 86"/>
+          <p:cNvSpPr/>
+          <p:nvPr/>
+        </p:nvSpPr>
+        <p:spPr>
+          <a:xfrm>
+            <a:off x="7893050" y="5676900"/>
             <a:ext cx="0" cy="57150"/>
           </a:xfrm>
           <a:prstGeom prst="line">
@@ -3190,13 +3442,13 @@
       </p:sp>
       <p:sp>
         <p:nvSpPr>
-          <p:cNvPr id="84" name="Shape 78"/>
-          <p:cNvSpPr/>
-          <p:nvPr/>
-        </p:nvSpPr>
-        <p:spPr>
-          <a:xfrm>
-            <a:off x="8039100" y="5638800"/>
+          <p:cNvPr id="93" name="Shape 87"/>
+          <p:cNvSpPr/>
+          <p:nvPr/>
+        </p:nvSpPr>
+        <p:spPr>
+          <a:xfrm>
+            <a:off x="8039100" y="5676900"/>
             <a:ext cx="0" cy="57150"/>
           </a:xfrm>
           <a:prstGeom prst="line">
@@ -3213,13 +3465,13 @@
       </p:sp>
       <p:sp>
         <p:nvSpPr>
-          <p:cNvPr id="85" name="Shape 79"/>
-          <p:cNvSpPr/>
-          <p:nvPr/>
-        </p:nvSpPr>
-        <p:spPr>
-          <a:xfrm>
-            <a:off x="8185150" y="5638800"/>
+          <p:cNvPr id="94" name="Shape 88"/>
+          <p:cNvSpPr/>
+          <p:nvPr/>
+        </p:nvSpPr>
+        <p:spPr>
+          <a:xfrm>
+            <a:off x="8185150" y="5676900"/>
             <a:ext cx="0" cy="57150"/>
           </a:xfrm>
           <a:prstGeom prst="line">
@@ -3236,13 +3488,13 @@
       </p:sp>
       <p:sp>
         <p:nvSpPr>
-          <p:cNvPr id="86" name="Shape 80"/>
-          <p:cNvSpPr/>
-          <p:nvPr/>
-        </p:nvSpPr>
-        <p:spPr>
-          <a:xfrm>
-            <a:off x="8331200" y="5638800"/>
+          <p:cNvPr id="95" name="Shape 89"/>
+          <p:cNvSpPr/>
+          <p:nvPr/>
+        </p:nvSpPr>
+        <p:spPr>
+          <a:xfrm>
+            <a:off x="8331200" y="5676900"/>
             <a:ext cx="0" cy="57150"/>
           </a:xfrm>
           <a:prstGeom prst="line">
@@ -3259,13 +3511,13 @@
       </p:sp>
       <p:sp>
         <p:nvSpPr>
-          <p:cNvPr id="87" name="Shape 81"/>
-          <p:cNvSpPr/>
-          <p:nvPr/>
-        </p:nvSpPr>
-        <p:spPr>
-          <a:xfrm>
-            <a:off x="8477250" y="5562600"/>
+          <p:cNvPr id="96" name="Shape 90"/>
+          <p:cNvSpPr/>
+          <p:nvPr/>
+        </p:nvSpPr>
+        <p:spPr>
+          <a:xfrm>
+            <a:off x="8477250" y="5600700"/>
             <a:ext cx="0" cy="133350"/>
           </a:xfrm>
           <a:prstGeom prst="line">
@@ -3282,13 +3534,13 @@
       </p:sp>
       <p:sp>
         <p:nvSpPr>
-          <p:cNvPr id="88" name="Shape 82"/>
-          <p:cNvSpPr/>
-          <p:nvPr/>
-        </p:nvSpPr>
-        <p:spPr>
-          <a:xfrm>
-            <a:off x="8623300" y="5638800"/>
+          <p:cNvPr id="97" name="Shape 91"/>
+          <p:cNvSpPr/>
+          <p:nvPr/>
+        </p:nvSpPr>
+        <p:spPr>
+          <a:xfrm>
+            <a:off x="8623300" y="5676900"/>
             <a:ext cx="0" cy="57150"/>
           </a:xfrm>
           <a:prstGeom prst="line">
@@ -3305,13 +3557,13 @@
       </p:sp>
       <p:sp>
         <p:nvSpPr>
-          <p:cNvPr id="89" name="Shape 83"/>
-          <p:cNvSpPr/>
-          <p:nvPr/>
-        </p:nvSpPr>
-        <p:spPr>
-          <a:xfrm>
-            <a:off x="8769350" y="5638800"/>
+          <p:cNvPr id="98" name="Shape 92"/>
+          <p:cNvSpPr/>
+          <p:nvPr/>
+        </p:nvSpPr>
+        <p:spPr>
+          <a:xfrm>
+            <a:off x="8769350" y="5676900"/>
             <a:ext cx="0" cy="57150"/>
           </a:xfrm>
           <a:prstGeom prst="line">
@@ -3328,13 +3580,13 @@
       </p:sp>
       <p:sp>
         <p:nvSpPr>
-          <p:cNvPr id="90" name="Shape 84"/>
-          <p:cNvSpPr/>
-          <p:nvPr/>
-        </p:nvSpPr>
-        <p:spPr>
-          <a:xfrm>
-            <a:off x="8915400" y="5638800"/>
+          <p:cNvPr id="99" name="Shape 93"/>
+          <p:cNvSpPr/>
+          <p:nvPr/>
+        </p:nvSpPr>
+        <p:spPr>
+          <a:xfrm>
+            <a:off x="8915400" y="5676900"/>
             <a:ext cx="0" cy="57150"/>
           </a:xfrm>
           <a:prstGeom prst="line">
@@ -3351,13 +3603,13 @@
       </p:sp>
       <p:sp>
         <p:nvSpPr>
-          <p:cNvPr id="91" name="Shape 85"/>
-          <p:cNvSpPr/>
-          <p:nvPr/>
-        </p:nvSpPr>
-        <p:spPr>
-          <a:xfrm>
-            <a:off x="9061450" y="5638800"/>
+          <p:cNvPr id="100" name="Shape 94"/>
+          <p:cNvSpPr/>
+          <p:nvPr/>
+        </p:nvSpPr>
+        <p:spPr>
+          <a:xfrm>
+            <a:off x="9061450" y="5676900"/>
             <a:ext cx="0" cy="57150"/>
           </a:xfrm>
           <a:prstGeom prst="line">
@@ -3374,13 +3626,13 @@
       </p:sp>
       <p:sp>
         <p:nvSpPr>
-          <p:cNvPr id="92" name="Shape 86"/>
-          <p:cNvSpPr/>
-          <p:nvPr/>
-        </p:nvSpPr>
-        <p:spPr>
-          <a:xfrm>
-            <a:off x="9207500" y="5638800"/>
+          <p:cNvPr id="101" name="Shape 95"/>
+          <p:cNvSpPr/>
+          <p:nvPr/>
+        </p:nvSpPr>
+        <p:spPr>
+          <a:xfrm>
+            <a:off x="9207500" y="5676900"/>
             <a:ext cx="0" cy="57150"/>
           </a:xfrm>
           <a:prstGeom prst="line">
@@ -3397,13 +3649,13 @@
       </p:sp>
       <p:sp>
         <p:nvSpPr>
-          <p:cNvPr id="93" name="Shape 87"/>
-          <p:cNvSpPr/>
-          <p:nvPr/>
-        </p:nvSpPr>
-        <p:spPr>
-          <a:xfrm>
-            <a:off x="9353550" y="5638800"/>
+          <p:cNvPr id="102" name="Shape 96"/>
+          <p:cNvSpPr/>
+          <p:nvPr/>
+        </p:nvSpPr>
+        <p:spPr>
+          <a:xfrm>
+            <a:off x="9353550" y="5676900"/>
             <a:ext cx="0" cy="57150"/>
           </a:xfrm>
           <a:prstGeom prst="line">
@@ -3420,13 +3672,13 @@
       </p:sp>
       <p:sp>
         <p:nvSpPr>
-          <p:cNvPr id="94" name="Shape 88"/>
-          <p:cNvSpPr/>
-          <p:nvPr/>
-        </p:nvSpPr>
-        <p:spPr>
-          <a:xfrm>
-            <a:off x="9499600" y="5638800"/>
+          <p:cNvPr id="103" name="Shape 97"/>
+          <p:cNvSpPr/>
+          <p:nvPr/>
+        </p:nvSpPr>
+        <p:spPr>
+          <a:xfrm>
+            <a:off x="9499600" y="5676900"/>
             <a:ext cx="0" cy="57150"/>
           </a:xfrm>
           <a:prstGeom prst="line">
@@ -3443,13 +3695,13 @@
       </p:sp>
       <p:sp>
         <p:nvSpPr>
-          <p:cNvPr id="95" name="Shape 89"/>
-          <p:cNvSpPr/>
-          <p:nvPr/>
-        </p:nvSpPr>
-        <p:spPr>
-          <a:xfrm>
-            <a:off x="9645650" y="5638800"/>
+          <p:cNvPr id="104" name="Shape 98"/>
+          <p:cNvSpPr/>
+          <p:nvPr/>
+        </p:nvSpPr>
+        <p:spPr>
+          <a:xfrm>
+            <a:off x="9645650" y="5676900"/>
             <a:ext cx="0" cy="57150"/>
           </a:xfrm>
           <a:prstGeom prst="line">
@@ -3466,13 +3718,13 @@
       </p:sp>
       <p:sp>
         <p:nvSpPr>
-          <p:cNvPr id="96" name="Shape 90"/>
-          <p:cNvSpPr/>
-          <p:nvPr/>
-        </p:nvSpPr>
-        <p:spPr>
-          <a:xfrm>
-            <a:off x="9791700" y="5638800"/>
+          <p:cNvPr id="105" name="Shape 99"/>
+          <p:cNvSpPr/>
+          <p:nvPr/>
+        </p:nvSpPr>
+        <p:spPr>
+          <a:xfrm>
+            <a:off x="9791700" y="5676900"/>
             <a:ext cx="0" cy="57150"/>
           </a:xfrm>
           <a:prstGeom prst="line">
@@ -3489,13 +3741,13 @@
       </p:sp>
       <p:sp>
         <p:nvSpPr>
-          <p:cNvPr id="97" name="Shape 91"/>
-          <p:cNvSpPr/>
-          <p:nvPr/>
-        </p:nvSpPr>
-        <p:spPr>
-          <a:xfrm>
-            <a:off x="9937750" y="5638800"/>
+          <p:cNvPr id="106" name="Shape 100"/>
+          <p:cNvSpPr/>
+          <p:nvPr/>
+        </p:nvSpPr>
+        <p:spPr>
+          <a:xfrm>
+            <a:off x="9937750" y="5676900"/>
             <a:ext cx="0" cy="57150"/>
           </a:xfrm>
           <a:prstGeom prst="line">
@@ -3512,13 +3764,13 @@
       </p:sp>
       <p:sp>
         <p:nvSpPr>
-          <p:cNvPr id="98" name="Shape 92"/>
-          <p:cNvSpPr/>
-          <p:nvPr/>
-        </p:nvSpPr>
-        <p:spPr>
-          <a:xfrm>
-            <a:off x="10083800" y="5638800"/>
+          <p:cNvPr id="107" name="Shape 101"/>
+          <p:cNvSpPr/>
+          <p:nvPr/>
+        </p:nvSpPr>
+        <p:spPr>
+          <a:xfrm>
+            <a:off x="10083800" y="5676900"/>
             <a:ext cx="0" cy="57150"/>
           </a:xfrm>
           <a:prstGeom prst="line">
@@ -3535,13 +3787,13 @@
       </p:sp>
       <p:sp>
         <p:nvSpPr>
-          <p:cNvPr id="99" name="Shape 93"/>
-          <p:cNvSpPr/>
-          <p:nvPr/>
-        </p:nvSpPr>
-        <p:spPr>
-          <a:xfrm>
-            <a:off x="10229850" y="5638800"/>
+          <p:cNvPr id="108" name="Shape 102"/>
+          <p:cNvSpPr/>
+          <p:nvPr/>
+        </p:nvSpPr>
+        <p:spPr>
+          <a:xfrm>
+            <a:off x="10229850" y="5676900"/>
             <a:ext cx="0" cy="57150"/>
           </a:xfrm>
           <a:prstGeom prst="line">
@@ -3558,13 +3810,13 @@
       </p:sp>
       <p:sp>
         <p:nvSpPr>
-          <p:cNvPr id="100" name="Shape 94"/>
-          <p:cNvSpPr/>
-          <p:nvPr/>
-        </p:nvSpPr>
-        <p:spPr>
-          <a:xfrm>
-            <a:off x="10375900" y="5638800"/>
+          <p:cNvPr id="109" name="Shape 103"/>
+          <p:cNvSpPr/>
+          <p:nvPr/>
+        </p:nvSpPr>
+        <p:spPr>
+          <a:xfrm>
+            <a:off x="10375900" y="5676900"/>
             <a:ext cx="0" cy="57150"/>
           </a:xfrm>
           <a:prstGeom prst="line">
@@ -3581,13 +3833,13 @@
       </p:sp>
       <p:sp>
         <p:nvSpPr>
-          <p:cNvPr id="101" name="Shape 95"/>
-          <p:cNvSpPr/>
-          <p:nvPr/>
-        </p:nvSpPr>
-        <p:spPr>
-          <a:xfrm>
-            <a:off x="10521950" y="5638800"/>
+          <p:cNvPr id="110" name="Shape 104"/>
+          <p:cNvSpPr/>
+          <p:nvPr/>
+        </p:nvSpPr>
+        <p:spPr>
+          <a:xfrm>
+            <a:off x="10521950" y="5676900"/>
             <a:ext cx="0" cy="57150"/>
           </a:xfrm>
           <a:prstGeom prst="line">
@@ -3604,13 +3856,13 @@
       </p:sp>
       <p:sp>
         <p:nvSpPr>
-          <p:cNvPr id="102" name="Shape 96"/>
-          <p:cNvSpPr/>
-          <p:nvPr/>
-        </p:nvSpPr>
-        <p:spPr>
-          <a:xfrm>
-            <a:off x="10668000" y="5638800"/>
+          <p:cNvPr id="111" name="Shape 105"/>
+          <p:cNvSpPr/>
+          <p:nvPr/>
+        </p:nvSpPr>
+        <p:spPr>
+          <a:xfrm>
+            <a:off x="10668000" y="5676900"/>
             <a:ext cx="0" cy="57150"/>
           </a:xfrm>
           <a:prstGeom prst="line">
@@ -3627,13 +3879,13 @@
       </p:sp>
       <p:sp>
         <p:nvSpPr>
-          <p:cNvPr id="103" name="Shape 97"/>
-          <p:cNvSpPr/>
-          <p:nvPr/>
-        </p:nvSpPr>
-        <p:spPr>
-          <a:xfrm>
-            <a:off x="1828800" y="5695950"/>
+          <p:cNvPr id="112" name="Shape 106"/>
+          <p:cNvSpPr/>
+          <p:nvPr/>
+        </p:nvSpPr>
+        <p:spPr>
+          <a:xfrm>
+            <a:off x="1828800" y="5734050"/>
             <a:ext cx="8915400" cy="0"/>
           </a:xfrm>
           <a:prstGeom prst="line">
@@ -3650,13 +3902,13 @@
       </p:sp>
       <p:sp>
         <p:nvSpPr>
-          <p:cNvPr id="104" name="Text 98"/>
-          <p:cNvSpPr txBox="1"/>
-          <p:nvPr/>
-        </p:nvSpPr>
-        <p:spPr>
-          <a:xfrm>
-            <a:off x="1676400" y="5762625"/>
+          <p:cNvPr id="113" name="Text 107"/>
+          <p:cNvSpPr txBox="1"/>
+          <p:nvPr/>
+        </p:nvSpPr>
+        <p:spPr>
+          <a:xfrm>
+            <a:off x="1676400" y="5800725"/>
             <a:ext cx="457200" cy="120015"/>
           </a:xfrm>
           <a:prstGeom prst="rect">
@@ -3692,13 +3944,13 @@
       </p:sp>
       <p:sp>
         <p:nvSpPr>
-          <p:cNvPr id="105" name="Text 99"/>
-          <p:cNvSpPr txBox="1"/>
-          <p:nvPr/>
-        </p:nvSpPr>
-        <p:spPr>
-          <a:xfrm>
-            <a:off x="3136900" y="5762625"/>
+          <p:cNvPr id="114" name="Text 108"/>
+          <p:cNvSpPr txBox="1"/>
+          <p:nvPr/>
+        </p:nvSpPr>
+        <p:spPr>
+          <a:xfrm>
+            <a:off x="3136900" y="5800725"/>
             <a:ext cx="457200" cy="120015"/>
           </a:xfrm>
           <a:prstGeom prst="rect">
@@ -3734,13 +3986,13 @@
       </p:sp>
       <p:sp>
         <p:nvSpPr>
-          <p:cNvPr id="106" name="Text 100"/>
-          <p:cNvSpPr txBox="1"/>
-          <p:nvPr/>
-        </p:nvSpPr>
-        <p:spPr>
-          <a:xfrm>
-            <a:off x="4597400" y="5762625"/>
+          <p:cNvPr id="115" name="Text 109"/>
+          <p:cNvSpPr txBox="1"/>
+          <p:nvPr/>
+        </p:nvSpPr>
+        <p:spPr>
+          <a:xfrm>
+            <a:off x="4597400" y="5800725"/>
             <a:ext cx="457200" cy="120015"/>
           </a:xfrm>
           <a:prstGeom prst="rect">
@@ -3776,13 +4028,13 @@
       </p:sp>
       <p:sp>
         <p:nvSpPr>
-          <p:cNvPr id="107" name="Text 101"/>
-          <p:cNvSpPr txBox="1"/>
-          <p:nvPr/>
-        </p:nvSpPr>
-        <p:spPr>
-          <a:xfrm>
-            <a:off x="6057900" y="5762625"/>
+          <p:cNvPr id="116" name="Text 110"/>
+          <p:cNvSpPr txBox="1"/>
+          <p:nvPr/>
+        </p:nvSpPr>
+        <p:spPr>
+          <a:xfrm>
+            <a:off x="6057900" y="5800725"/>
             <a:ext cx="457200" cy="120015"/>
           </a:xfrm>
           <a:prstGeom prst="rect">
@@ -3818,13 +4070,13 @@
       </p:sp>
       <p:sp>
         <p:nvSpPr>
-          <p:cNvPr id="108" name="Text 102"/>
-          <p:cNvSpPr txBox="1"/>
-          <p:nvPr/>
-        </p:nvSpPr>
-        <p:spPr>
-          <a:xfrm>
-            <a:off x="7518400" y="5762625"/>
+          <p:cNvPr id="117" name="Text 111"/>
+          <p:cNvSpPr txBox="1"/>
+          <p:nvPr/>
+        </p:nvSpPr>
+        <p:spPr>
+          <a:xfrm>
+            <a:off x="7518400" y="5800725"/>
             <a:ext cx="457200" cy="120015"/>
           </a:xfrm>
           <a:prstGeom prst="rect">
@@ -3860,13 +4112,13 @@
       </p:sp>
       <p:sp>
         <p:nvSpPr>
-          <p:cNvPr id="109" name="Text 103"/>
-          <p:cNvSpPr txBox="1"/>
-          <p:nvPr/>
-        </p:nvSpPr>
-        <p:spPr>
-          <a:xfrm>
-            <a:off x="8978900" y="5762625"/>
+          <p:cNvPr id="118" name="Text 112"/>
+          <p:cNvSpPr txBox="1"/>
+          <p:nvPr/>
+        </p:nvSpPr>
+        <p:spPr>
+          <a:xfrm>
+            <a:off x="8978900" y="5800725"/>
             <a:ext cx="457200" cy="120015"/>
           </a:xfrm>
           <a:prstGeom prst="rect">
@@ -3902,13 +4154,13 @@
       </p:sp>
       <p:sp>
         <p:nvSpPr>
-          <p:cNvPr id="110" name="Text 104"/>
-          <p:cNvSpPr txBox="1"/>
-          <p:nvPr/>
-        </p:nvSpPr>
-        <p:spPr>
-          <a:xfrm>
-            <a:off x="10439400" y="5762625"/>
+          <p:cNvPr id="119" name="Text 113"/>
+          <p:cNvSpPr txBox="1"/>
+          <p:nvPr/>
+        </p:nvSpPr>
+        <p:spPr>
+          <a:xfrm>
+            <a:off x="10439400" y="5800725"/>
             <a:ext cx="457200" cy="120015"/>
           </a:xfrm>
           <a:prstGeom prst="rect">
@@ -3944,13 +4196,13 @@
       </p:sp>
       <p:sp>
         <p:nvSpPr>
-          <p:cNvPr id="111" name="Text 105"/>
-          <p:cNvSpPr txBox="1"/>
-          <p:nvPr/>
-        </p:nvSpPr>
-        <p:spPr>
-          <a:xfrm>
-            <a:off x="10915650" y="5762625"/>
+          <p:cNvPr id="120" name="Text 114"/>
+          <p:cNvSpPr txBox="1"/>
+          <p:nvPr/>
+        </p:nvSpPr>
+        <p:spPr>
+          <a:xfrm>
+            <a:off x="10915650" y="5800725"/>
             <a:ext cx="228600" cy="120015"/>
           </a:xfrm>
           <a:prstGeom prst="rect">
@@ -3986,13 +4238,13 @@
       </p:sp>
       <p:sp>
         <p:nvSpPr>
-          <p:cNvPr id="112" name="Shape 106"/>
-          <p:cNvSpPr/>
-          <p:nvPr/>
-        </p:nvSpPr>
-        <p:spPr>
-          <a:xfrm>
-            <a:off x="1905000" y="5029200"/>
+          <p:cNvPr id="121" name="Shape 115"/>
+          <p:cNvSpPr/>
+          <p:nvPr/>
+        </p:nvSpPr>
+        <p:spPr>
+          <a:xfrm>
+            <a:off x="1905000" y="5200650"/>
             <a:ext cx="8763000" cy="0"/>
           </a:xfrm>
           <a:prstGeom prst="line">
@@ -4009,13 +4261,13 @@
       </p:sp>
       <p:sp>
         <p:nvSpPr>
-          <p:cNvPr id="113" name="Shape 107"/>
-          <p:cNvSpPr/>
-          <p:nvPr/>
-        </p:nvSpPr>
-        <p:spPr>
-          <a:xfrm>
-            <a:off x="8410575" y="4962525"/>
+          <p:cNvPr id="122" name="Shape 116"/>
+          <p:cNvSpPr/>
+          <p:nvPr/>
+        </p:nvSpPr>
+        <p:spPr>
+          <a:xfrm>
+            <a:off x="8410575" y="5133975"/>
             <a:ext cx="133350" cy="133350"/>
           </a:xfrm>
           <a:prstGeom prst="ellipse">
@@ -4029,14 +4281,14 @@
       </p:sp>
       <p:sp>
         <p:nvSpPr>
-          <p:cNvPr id="114" name="Shape 108"/>
-          <p:cNvSpPr/>
-          <p:nvPr/>
-        </p:nvSpPr>
-        <p:spPr>
-          <a:xfrm>
-            <a:off x="8477250" y="5105400"/>
-            <a:ext cx="0" cy="457200"/>
+          <p:cNvPr id="123" name="Shape 117"/>
+          <p:cNvSpPr/>
+          <p:nvPr/>
+        </p:nvSpPr>
+        <p:spPr>
+          <a:xfrm>
+            <a:off x="8477250" y="5276850"/>
+            <a:ext cx="0" cy="323850"/>
           </a:xfrm>
           <a:prstGeom prst="line">
             <a:avLst/>
@@ -4052,13 +4304,13 @@
       </p:sp>
       <p:sp>
         <p:nvSpPr>
-          <p:cNvPr id="115" name="Text 109"/>
-          <p:cNvSpPr txBox="1"/>
-          <p:nvPr/>
-        </p:nvSpPr>
-        <p:spPr>
-          <a:xfrm>
-            <a:off x="7048500" y="4762500"/>
+          <p:cNvPr id="124" name="Text 118"/>
+          <p:cNvSpPr txBox="1"/>
+          <p:nvPr/>
+        </p:nvSpPr>
+        <p:spPr>
+          <a:xfrm>
+            <a:off x="7048500" y="4933950"/>
             <a:ext cx="2857500" cy="167164"/>
           </a:xfrm>
           <a:prstGeom prst="rect">
@@ -4094,13 +4346,13 @@
       </p:sp>
       <p:sp>
         <p:nvSpPr>
-          <p:cNvPr id="116" name="Text 110"/>
-          <p:cNvSpPr txBox="1"/>
-          <p:nvPr/>
-        </p:nvSpPr>
-        <p:spPr>
-          <a:xfrm>
-            <a:off x="914400" y="4933950"/>
+          <p:cNvPr id="125" name="Text 119"/>
+          <p:cNvSpPr txBox="1"/>
+          <p:nvPr/>
+        </p:nvSpPr>
+        <p:spPr>
+          <a:xfrm>
+            <a:off x="914400" y="5067300"/>
             <a:ext cx="914400" cy="297180"/>
           </a:xfrm>
           <a:prstGeom prst="rect">
@@ -4128,15 +4380,35 @@
                 <a:ea typeface="Malgun Gothic" pitchFamily="34" charset="-122"/>
                 <a:cs typeface="Malgun Gothic" pitchFamily="34" charset="-120"/>
               </a:rPr>
-              <a:t>신고 범위 61개 온도</a:t>
+              <a:t>신고 범위</a:t>
             </a:r>
             <a:endParaRPr lang="en-US" sz="900" dirty="0"/>
           </a:p>
-        </p:txBody>
-      </p:sp>
-      <p:sp>
-        <p:nvSpPr>
-          <p:cNvPr id="117" name="Shape 111"/>
+          <a:p>
+            <a:pPr algn="l" indent="0" marL="0">
+              <a:lnSpc>
+                <a:spcPts val="1170"/>
+              </a:lnSpc>
+              <a:buNone/>
+            </a:pPr>
+            <a:r>
+              <a:rPr lang="en-US" sz="900" b="1" dirty="0">
+                <a:solidFill>
+                  <a:srgbClr val="A8BCD1"/>
+                </a:solidFill>
+                <a:latin typeface="Malgun Gothic" pitchFamily="34" charset="0"/>
+                <a:ea typeface="Malgun Gothic" pitchFamily="34" charset="-122"/>
+                <a:cs typeface="Malgun Gothic" pitchFamily="34" charset="-120"/>
+              </a:rPr>
+              <a:t>61개 온도</a:t>
+            </a:r>
+            <a:endParaRPr lang="en-US" sz="900" dirty="0"/>
+          </a:p>
+        </p:txBody>
+      </p:sp>
+      <p:sp>
+        <p:nvSpPr>
+          <p:cNvPr id="126" name="Shape 120"/>
           <p:cNvSpPr/>
           <p:nvPr/>
         </p:nvSpPr>
@@ -4159,7 +4431,7 @@
       </p:sp>
       <p:sp>
         <p:nvSpPr>
-          <p:cNvPr id="118" name="Text 112"/>
+          <p:cNvPr id="127" name="Text 121"/>
           <p:cNvSpPr txBox="1"/>
           <p:nvPr/>
         </p:nvSpPr>
@@ -4201,7 +4473,7 @@
       </p:sp>
       <p:sp>
         <p:nvSpPr>
-          <p:cNvPr id="119" name="Text 113"/>
+          <p:cNvPr id="128" name="Text 122"/>
           <p:cNvSpPr txBox="1"/>
           <p:nvPr/>
         </p:nvSpPr>
@@ -4587,8 +4859,8 @@
         </p:nvSpPr>
         <p:spPr>
           <a:xfrm>
-            <a:off x="685800" y="1809750"/>
-            <a:ext cx="4476750" cy="4133850"/>
+            <a:off x="685800" y="1771650"/>
+            <a:ext cx="4476750" cy="4171950"/>
           </a:xfrm>
           <a:prstGeom prst="rect">
             <a:avLst/>
@@ -4596,24 +4868,87 @@
           <a:solidFill>
             <a:srgbClr val="0A1320"/>
           </a:solidFill>
-          <a:ln w="12700">
-            <a:solidFill>
-              <a:srgbClr val="182838"/>
-            </a:solidFill>
-            <a:prstDash val="solid"/>
-          </a:ln>
-        </p:spPr>
-      </p:sp>
-      <p:sp>
-        <p:nvSpPr>
-          <p:cNvPr id="14" name="Text 12"/>
-          <p:cNvSpPr txBox="1"/>
-          <p:nvPr/>
-        </p:nvSpPr>
-        <p:spPr>
-          <a:xfrm>
-            <a:off x="876300" y="1905000"/>
-            <a:ext cx="2476500" cy="125016"/>
+          <a:ln w="15240">
+            <a:solidFill>
+              <a:srgbClr val="22354A"/>
+            </a:solidFill>
+            <a:prstDash val="solid"/>
+          </a:ln>
+        </p:spPr>
+      </p:sp>
+      <p:sp>
+        <p:nvSpPr>
+          <p:cNvPr id="14" name="Shape 12"/>
+          <p:cNvSpPr/>
+          <p:nvPr/>
+        </p:nvSpPr>
+        <p:spPr>
+          <a:xfrm>
+            <a:off x="695325" y="1781175"/>
+            <a:ext cx="4457700" cy="276225"/>
+          </a:xfrm>
+          <a:prstGeom prst="rect">
+            <a:avLst/>
+          </a:prstGeom>
+          <a:solidFill>
+            <a:srgbClr val="17283C"/>
+          </a:solidFill>
+          <a:ln/>
+        </p:spPr>
+      </p:sp>
+      <p:sp>
+        <p:nvSpPr>
+          <p:cNvPr id="15" name="Shape 13"/>
+          <p:cNvSpPr/>
+          <p:nvPr/>
+        </p:nvSpPr>
+        <p:spPr>
+          <a:xfrm>
+            <a:off x="685800" y="2057400"/>
+            <a:ext cx="4476750" cy="0"/>
+          </a:xfrm>
+          <a:prstGeom prst="line">
+            <a:avLst/>
+          </a:prstGeom>
+          <a:noFill/>
+          <a:ln w="15240">
+            <a:solidFill>
+              <a:srgbClr val="22354A"/>
+            </a:solidFill>
+            <a:prstDash val="solid"/>
+          </a:ln>
+        </p:spPr>
+      </p:sp>
+      <p:sp>
+        <p:nvSpPr>
+          <p:cNvPr id="16" name="Shape 14"/>
+          <p:cNvSpPr/>
+          <p:nvPr/>
+        </p:nvSpPr>
+        <p:spPr>
+          <a:xfrm>
+            <a:off x="695325" y="1781175"/>
+            <a:ext cx="38100" cy="276225"/>
+          </a:xfrm>
+          <a:prstGeom prst="rect">
+            <a:avLst/>
+          </a:prstGeom>
+          <a:solidFill>
+            <a:srgbClr val="EFB13C"/>
+          </a:solidFill>
+          <a:ln/>
+        </p:spPr>
+      </p:sp>
+      <p:sp>
+        <p:nvSpPr>
+          <p:cNvPr id="17" name="Text 15"/>
+          <p:cNvSpPr txBox="1"/>
+          <p:nvPr/>
+        </p:nvSpPr>
+        <p:spPr>
+          <a:xfrm>
+            <a:off x="857250" y="1847850"/>
+            <a:ext cx="171450" cy="148590"/>
           </a:xfrm>
           <a:prstGeom prst="rect">
             <a:avLst/>
@@ -4627,78 +4962,35 @@
           <a:p>
             <a:pPr algn="l" indent="0" marL="0">
               <a:lnSpc>
-                <a:spcPts val="984"/>
-              </a:lnSpc>
-              <a:buNone/>
-            </a:pPr>
-            <a:r>
-              <a:rPr lang="en-US" sz="788" b="1" spc="150" kern="0" dirty="0">
-                <a:solidFill>
-                  <a:srgbClr val="8A8880"/>
+                <a:spcPts val="1170"/>
+              </a:lnSpc>
+              <a:buNone/>
+            </a:pPr>
+            <a:r>
+              <a:rPr lang="en-US" sz="975" b="1" dirty="0">
+                <a:solidFill>
+                  <a:srgbClr val="EFB13C"/>
                 </a:solidFill>
                 <a:latin typeface="Consolas" pitchFamily="34" charset="0"/>
                 <a:ea typeface="Consolas" pitchFamily="34" charset="-122"/>
                 <a:cs typeface="Consolas" pitchFamily="34" charset="-120"/>
               </a:rPr>
-              <a:t>기존 실적 시트 기록</a:t>
-            </a:r>
-            <a:endParaRPr lang="en-US" sz="788" dirty="0"/>
-          </a:p>
-        </p:txBody>
-      </p:sp>
-      <p:sp>
-        <p:nvSpPr>
-          <p:cNvPr id="15" name="Shape 13"/>
-          <p:cNvSpPr/>
-          <p:nvPr/>
-        </p:nvSpPr>
-        <p:spPr>
-          <a:xfrm>
-            <a:off x="952500" y="2152650"/>
-            <a:ext cx="3276600" cy="247650"/>
-          </a:xfrm>
-          <a:prstGeom prst="rect">
-            <a:avLst/>
-          </a:prstGeom>
-          <a:solidFill>
-            <a:srgbClr val="0A1320"/>
-          </a:solidFill>
-          <a:ln/>
-        </p:spPr>
-      </p:sp>
-      <p:sp>
-        <p:nvSpPr>
-          <p:cNvPr id="16" name="Shape 14"/>
-          <p:cNvSpPr/>
-          <p:nvPr/>
-        </p:nvSpPr>
-        <p:spPr>
-          <a:xfrm>
-            <a:off x="952500" y="2400300"/>
-            <a:ext cx="3276600" cy="0"/>
-          </a:xfrm>
-          <a:prstGeom prst="line">
-            <a:avLst/>
-          </a:prstGeom>
-          <a:noFill/>
-          <a:ln w="15240">
-            <a:solidFill>
-              <a:srgbClr val="22354A"/>
-            </a:solidFill>
-            <a:prstDash val="solid"/>
-          </a:ln>
-        </p:spPr>
-      </p:sp>
-      <p:sp>
-        <p:nvSpPr>
-          <p:cNvPr id="17" name="Text 15"/>
-          <p:cNvSpPr txBox="1"/>
-          <p:nvPr/>
-        </p:nvSpPr>
-        <p:spPr>
-          <a:xfrm>
-            <a:off x="1038225" y="2228850"/>
-            <a:ext cx="533400" cy="142875"/>
+              <a:t>1</a:t>
+            </a:r>
+            <a:endParaRPr lang="en-US" sz="975" dirty="0"/>
+          </a:p>
+        </p:txBody>
+      </p:sp>
+      <p:sp>
+        <p:nvSpPr>
+          <p:cNvPr id="18" name="Text 16"/>
+          <p:cNvSpPr txBox="1"/>
+          <p:nvPr/>
+        </p:nvSpPr>
+        <p:spPr>
+          <a:xfrm>
+            <a:off x="1085850" y="1847850"/>
+            <a:ext cx="2990850" cy="154305"/>
           </a:xfrm>
           <a:prstGeom prst="rect">
             <a:avLst/>
@@ -4712,19 +5004,146 @@
           <a:p>
             <a:pPr algn="l" indent="0" marL="0">
               <a:lnSpc>
-                <a:spcPts val="1125"/>
-              </a:lnSpc>
-              <a:buNone/>
-            </a:pPr>
-            <a:r>
-              <a:rPr lang="en-US" sz="938" dirty="0">
-                <a:solidFill>
-                  <a:srgbClr val="8A8880"/>
+                <a:spcPts val="1215"/>
+              </a:lnSpc>
+              <a:buNone/>
+            </a:pPr>
+            <a:r>
+              <a:rPr lang="en-US" sz="1013" b="1" spc="30" kern="0" dirty="0">
+                <a:solidFill>
+                  <a:srgbClr val="EAE7E0"/>
                 </a:solidFill>
                 <a:latin typeface="Malgun Gothic" pitchFamily="34" charset="0"/>
                 <a:ea typeface="Malgun Gothic" pitchFamily="34" charset="-122"/>
                 <a:cs typeface="Malgun Gothic" pitchFamily="34" charset="-120"/>
               </a:rPr>
+              <a:t>기존 실적 시트 기록</a:t>
+            </a:r>
+            <a:endParaRPr lang="en-US" sz="1013" dirty="0"/>
+          </a:p>
+        </p:txBody>
+      </p:sp>
+      <p:sp>
+        <p:nvSpPr>
+          <p:cNvPr id="19" name="Text 17"/>
+          <p:cNvSpPr txBox="1"/>
+          <p:nvPr/>
+        </p:nvSpPr>
+        <p:spPr>
+          <a:xfrm>
+            <a:off x="4076700" y="1857375"/>
+            <a:ext cx="952500" cy="125730"/>
+          </a:xfrm>
+          <a:prstGeom prst="rect">
+            <a:avLst/>
+          </a:prstGeom>
+          <a:noFill/>
+          <a:ln/>
+        </p:spPr>
+        <p:txBody>
+          <a:bodyPr wrap="square" lIns="0" tIns="0" rIns="0" bIns="0" rtlCol="0" anchor="t"/>
+          <a:lstStyle/>
+          <a:p>
+            <a:pPr algn="r" indent="0" marL="0">
+              <a:lnSpc>
+                <a:spcPts val="990"/>
+              </a:lnSpc>
+              <a:buNone/>
+            </a:pPr>
+            <a:r>
+              <a:rPr lang="en-US" sz="825" dirty="0">
+                <a:solidFill>
+                  <a:srgbClr val="8A8880"/>
+                </a:solidFill>
+                <a:latin typeface="Malgun Gothic" pitchFamily="34" charset="0"/>
+                <a:ea typeface="Malgun Gothic" pitchFamily="34" charset="-122"/>
+                <a:cs typeface="Malgun Gothic" pitchFamily="34" charset="-120"/>
+              </a:rPr>
+              <a:t>2월 ~ 4월 13회</a:t>
+            </a:r>
+            <a:endParaRPr lang="en-US" sz="825" dirty="0"/>
+          </a:p>
+        </p:txBody>
+      </p:sp>
+      <p:sp>
+        <p:nvSpPr>
+          <p:cNvPr id="20" name="Shape 18"/>
+          <p:cNvSpPr/>
+          <p:nvPr/>
+        </p:nvSpPr>
+        <p:spPr>
+          <a:xfrm>
+            <a:off x="952500" y="2209800"/>
+            <a:ext cx="3276600" cy="247650"/>
+          </a:xfrm>
+          <a:prstGeom prst="rect">
+            <a:avLst/>
+          </a:prstGeom>
+          <a:solidFill>
+            <a:srgbClr val="0A1320"/>
+          </a:solidFill>
+          <a:ln/>
+        </p:spPr>
+      </p:sp>
+      <p:sp>
+        <p:nvSpPr>
+          <p:cNvPr id="21" name="Shape 19"/>
+          <p:cNvSpPr/>
+          <p:nvPr/>
+        </p:nvSpPr>
+        <p:spPr>
+          <a:xfrm>
+            <a:off x="952500" y="2457450"/>
+            <a:ext cx="3276600" cy="0"/>
+          </a:xfrm>
+          <a:prstGeom prst="line">
+            <a:avLst/>
+          </a:prstGeom>
+          <a:noFill/>
+          <a:ln w="15240">
+            <a:solidFill>
+              <a:srgbClr val="22354A"/>
+            </a:solidFill>
+            <a:prstDash val="solid"/>
+          </a:ln>
+        </p:spPr>
+      </p:sp>
+      <p:sp>
+        <p:nvSpPr>
+          <p:cNvPr id="22" name="Text 20"/>
+          <p:cNvSpPr txBox="1"/>
+          <p:nvPr/>
+        </p:nvSpPr>
+        <p:spPr>
+          <a:xfrm>
+            <a:off x="1038225" y="2286000"/>
+            <a:ext cx="533400" cy="142875"/>
+          </a:xfrm>
+          <a:prstGeom prst="rect">
+            <a:avLst/>
+          </a:prstGeom>
+          <a:noFill/>
+          <a:ln/>
+        </p:spPr>
+        <p:txBody>
+          <a:bodyPr wrap="square" lIns="0" tIns="0" rIns="0" bIns="0" rtlCol="0" anchor="t"/>
+          <a:lstStyle/>
+          <a:p>
+            <a:pPr algn="l" indent="0" marL="0">
+              <a:lnSpc>
+                <a:spcPts val="1125"/>
+              </a:lnSpc>
+              <a:buNone/>
+            </a:pPr>
+            <a:r>
+              <a:rPr lang="en-US" sz="938" dirty="0">
+                <a:solidFill>
+                  <a:srgbClr val="8A8880"/>
+                </a:solidFill>
+                <a:latin typeface="Malgun Gothic" pitchFamily="34" charset="0"/>
+                <a:ea typeface="Malgun Gothic" pitchFamily="34" charset="-122"/>
+                <a:cs typeface="Malgun Gothic" pitchFamily="34" charset="-120"/>
+              </a:rPr>
               <a:t>날짜</a:t>
             </a:r>
             <a:endParaRPr lang="en-US" sz="938" dirty="0"/>
@@ -4733,13 +5152,13 @@
       </p:sp>
       <p:sp>
         <p:nvSpPr>
-          <p:cNvPr id="18" name="Text 16"/>
-          <p:cNvSpPr txBox="1"/>
-          <p:nvPr/>
-        </p:nvSpPr>
-        <p:spPr>
-          <a:xfrm>
-            <a:off x="1743075" y="2228850"/>
+          <p:cNvPr id="23" name="Text 21"/>
+          <p:cNvSpPr txBox="1"/>
+          <p:nvPr/>
+        </p:nvSpPr>
+        <p:spPr>
+          <a:xfrm>
+            <a:off x="1743075" y="2286000"/>
             <a:ext cx="990600" cy="142875"/>
           </a:xfrm>
           <a:prstGeom prst="rect">
@@ -4775,13 +5194,13 @@
       </p:sp>
       <p:sp>
         <p:nvSpPr>
-          <p:cNvPr id="19" name="Text 17"/>
-          <p:cNvSpPr txBox="1"/>
-          <p:nvPr/>
-        </p:nvSpPr>
-        <p:spPr>
-          <a:xfrm>
-            <a:off x="2905125" y="2228850"/>
+          <p:cNvPr id="24" name="Text 22"/>
+          <p:cNvSpPr txBox="1"/>
+          <p:nvPr/>
+        </p:nvSpPr>
+        <p:spPr>
+          <a:xfrm>
+            <a:off x="2905125" y="2286000"/>
             <a:ext cx="1238250" cy="142875"/>
           </a:xfrm>
           <a:prstGeom prst="rect">
@@ -4817,13 +5236,13 @@
       </p:sp>
       <p:sp>
         <p:nvSpPr>
-          <p:cNvPr id="20" name="Shape 18"/>
-          <p:cNvSpPr/>
-          <p:nvPr/>
-        </p:nvSpPr>
-        <p:spPr>
-          <a:xfrm>
-            <a:off x="952500" y="2609850"/>
+          <p:cNvPr id="25" name="Shape 23"/>
+          <p:cNvSpPr/>
+          <p:nvPr/>
+        </p:nvSpPr>
+        <p:spPr>
+          <a:xfrm>
+            <a:off x="952500" y="2667000"/>
             <a:ext cx="3276600" cy="0"/>
           </a:xfrm>
           <a:prstGeom prst="line">
@@ -4840,13 +5259,13 @@
       </p:sp>
       <p:sp>
         <p:nvSpPr>
-          <p:cNvPr id="21" name="Text 19"/>
-          <p:cNvSpPr txBox="1"/>
-          <p:nvPr/>
-        </p:nvSpPr>
-        <p:spPr>
-          <a:xfrm>
-            <a:off x="1038225" y="2433638"/>
+          <p:cNvPr id="26" name="Text 24"/>
+          <p:cNvSpPr txBox="1"/>
+          <p:nvPr/>
+        </p:nvSpPr>
+        <p:spPr>
+          <a:xfrm>
+            <a:off x="1038225" y="2490788"/>
             <a:ext cx="533400" cy="142875"/>
           </a:xfrm>
           <a:prstGeom prst="rect">
@@ -4882,13 +5301,13 @@
       </p:sp>
       <p:sp>
         <p:nvSpPr>
-          <p:cNvPr id="22" name="Text 20"/>
-          <p:cNvSpPr txBox="1"/>
-          <p:nvPr/>
-        </p:nvSpPr>
-        <p:spPr>
-          <a:xfrm>
-            <a:off x="1743075" y="2433638"/>
+          <p:cNvPr id="27" name="Text 25"/>
+          <p:cNvSpPr txBox="1"/>
+          <p:nvPr/>
+        </p:nvSpPr>
+        <p:spPr>
+          <a:xfrm>
+            <a:off x="1743075" y="2490788"/>
             <a:ext cx="990600" cy="142875"/>
           </a:xfrm>
           <a:prstGeom prst="rect">
@@ -4924,13 +5343,13 @@
       </p:sp>
       <p:sp>
         <p:nvSpPr>
-          <p:cNvPr id="23" name="Text 21"/>
-          <p:cNvSpPr txBox="1"/>
-          <p:nvPr/>
-        </p:nvSpPr>
-        <p:spPr>
-          <a:xfrm>
-            <a:off x="2905125" y="2433638"/>
+          <p:cNvPr id="28" name="Text 26"/>
+          <p:cNvSpPr txBox="1"/>
+          <p:nvPr/>
+        </p:nvSpPr>
+        <p:spPr>
+          <a:xfrm>
+            <a:off x="2905125" y="2490788"/>
             <a:ext cx="1238250" cy="142875"/>
           </a:xfrm>
           <a:prstGeom prst="rect">
@@ -4966,13 +5385,13 @@
       </p:sp>
       <p:sp>
         <p:nvSpPr>
-          <p:cNvPr id="24" name="Shape 22"/>
-          <p:cNvSpPr/>
-          <p:nvPr/>
-        </p:nvSpPr>
-        <p:spPr>
-          <a:xfrm>
-            <a:off x="952500" y="2609850"/>
+          <p:cNvPr id="29" name="Shape 27"/>
+          <p:cNvSpPr/>
+          <p:nvPr/>
+        </p:nvSpPr>
+        <p:spPr>
+          <a:xfrm>
+            <a:off x="952500" y="2667000"/>
             <a:ext cx="3276600" cy="209550"/>
           </a:xfrm>
           <a:prstGeom prst="rect">
@@ -4988,13 +5407,13 @@
       </p:sp>
       <p:sp>
         <p:nvSpPr>
-          <p:cNvPr id="25" name="Shape 23"/>
-          <p:cNvSpPr/>
-          <p:nvPr/>
-        </p:nvSpPr>
-        <p:spPr>
-          <a:xfrm>
-            <a:off x="952500" y="2819400"/>
+          <p:cNvPr id="30" name="Shape 28"/>
+          <p:cNvSpPr/>
+          <p:nvPr/>
+        </p:nvSpPr>
+        <p:spPr>
+          <a:xfrm>
+            <a:off x="952500" y="2876550"/>
             <a:ext cx="3276600" cy="0"/>
           </a:xfrm>
           <a:prstGeom prst="line">
@@ -5011,13 +5430,13 @@
       </p:sp>
       <p:sp>
         <p:nvSpPr>
-          <p:cNvPr id="26" name="Text 24"/>
-          <p:cNvSpPr txBox="1"/>
-          <p:nvPr/>
-        </p:nvSpPr>
-        <p:spPr>
-          <a:xfrm>
-            <a:off x="1038225" y="2643188"/>
+          <p:cNvPr id="31" name="Text 29"/>
+          <p:cNvSpPr txBox="1"/>
+          <p:nvPr/>
+        </p:nvSpPr>
+        <p:spPr>
+          <a:xfrm>
+            <a:off x="1038225" y="2700338"/>
             <a:ext cx="533400" cy="142875"/>
           </a:xfrm>
           <a:prstGeom prst="rect">
@@ -5053,13 +5472,13 @@
       </p:sp>
       <p:sp>
         <p:nvSpPr>
-          <p:cNvPr id="27" name="Text 25"/>
-          <p:cNvSpPr txBox="1"/>
-          <p:nvPr/>
-        </p:nvSpPr>
-        <p:spPr>
-          <a:xfrm>
-            <a:off x="1743075" y="2643188"/>
+          <p:cNvPr id="32" name="Text 30"/>
+          <p:cNvSpPr txBox="1"/>
+          <p:nvPr/>
+        </p:nvSpPr>
+        <p:spPr>
+          <a:xfrm>
+            <a:off x="1743075" y="2700338"/>
             <a:ext cx="990600" cy="142875"/>
           </a:xfrm>
           <a:prstGeom prst="rect">
@@ -5095,13 +5514,13 @@
       </p:sp>
       <p:sp>
         <p:nvSpPr>
-          <p:cNvPr id="28" name="Text 26"/>
-          <p:cNvSpPr txBox="1"/>
-          <p:nvPr/>
-        </p:nvSpPr>
-        <p:spPr>
-          <a:xfrm>
-            <a:off x="2905125" y="2643188"/>
+          <p:cNvPr id="33" name="Text 31"/>
+          <p:cNvSpPr txBox="1"/>
+          <p:nvPr/>
+        </p:nvSpPr>
+        <p:spPr>
+          <a:xfrm>
+            <a:off x="2905125" y="2700338"/>
             <a:ext cx="1238250" cy="142875"/>
           </a:xfrm>
           <a:prstGeom prst="rect">
@@ -5137,13 +5556,13 @@
       </p:sp>
       <p:sp>
         <p:nvSpPr>
-          <p:cNvPr id="29" name="Shape 27"/>
-          <p:cNvSpPr/>
-          <p:nvPr/>
-        </p:nvSpPr>
-        <p:spPr>
-          <a:xfrm>
-            <a:off x="952500" y="3028950"/>
+          <p:cNvPr id="34" name="Shape 32"/>
+          <p:cNvSpPr/>
+          <p:nvPr/>
+        </p:nvSpPr>
+        <p:spPr>
+          <a:xfrm>
+            <a:off x="952500" y="3086100"/>
             <a:ext cx="3276600" cy="0"/>
           </a:xfrm>
           <a:prstGeom prst="line">
@@ -5160,13 +5579,13 @@
       </p:sp>
       <p:sp>
         <p:nvSpPr>
-          <p:cNvPr id="30" name="Text 28"/>
-          <p:cNvSpPr txBox="1"/>
-          <p:nvPr/>
-        </p:nvSpPr>
-        <p:spPr>
-          <a:xfrm>
-            <a:off x="1038225" y="2852738"/>
+          <p:cNvPr id="35" name="Text 33"/>
+          <p:cNvSpPr txBox="1"/>
+          <p:nvPr/>
+        </p:nvSpPr>
+        <p:spPr>
+          <a:xfrm>
+            <a:off x="1038225" y="2909888"/>
             <a:ext cx="533400" cy="142875"/>
           </a:xfrm>
           <a:prstGeom prst="rect">
@@ -5202,13 +5621,13 @@
       </p:sp>
       <p:sp>
         <p:nvSpPr>
-          <p:cNvPr id="31" name="Text 29"/>
-          <p:cNvSpPr txBox="1"/>
-          <p:nvPr/>
-        </p:nvSpPr>
-        <p:spPr>
-          <a:xfrm>
-            <a:off x="1743075" y="2852738"/>
+          <p:cNvPr id="36" name="Text 34"/>
+          <p:cNvSpPr txBox="1"/>
+          <p:nvPr/>
+        </p:nvSpPr>
+        <p:spPr>
+          <a:xfrm>
+            <a:off x="1743075" y="2909888"/>
             <a:ext cx="990600" cy="142875"/>
           </a:xfrm>
           <a:prstGeom prst="rect">
@@ -5244,13 +5663,13 @@
       </p:sp>
       <p:sp>
         <p:nvSpPr>
-          <p:cNvPr id="32" name="Text 30"/>
-          <p:cNvSpPr txBox="1"/>
-          <p:nvPr/>
-        </p:nvSpPr>
-        <p:spPr>
-          <a:xfrm>
-            <a:off x="2905125" y="2852738"/>
+          <p:cNvPr id="37" name="Text 35"/>
+          <p:cNvSpPr txBox="1"/>
+          <p:nvPr/>
+        </p:nvSpPr>
+        <p:spPr>
+          <a:xfrm>
+            <a:off x="2905125" y="2909888"/>
             <a:ext cx="1238250" cy="142875"/>
           </a:xfrm>
           <a:prstGeom prst="rect">
@@ -5286,13 +5705,13 @@
       </p:sp>
       <p:sp>
         <p:nvSpPr>
-          <p:cNvPr id="33" name="Shape 31"/>
-          <p:cNvSpPr/>
-          <p:nvPr/>
-        </p:nvSpPr>
-        <p:spPr>
-          <a:xfrm>
-            <a:off x="952500" y="3028950"/>
+          <p:cNvPr id="38" name="Shape 36"/>
+          <p:cNvSpPr/>
+          <p:nvPr/>
+        </p:nvSpPr>
+        <p:spPr>
+          <a:xfrm>
+            <a:off x="952500" y="3086100"/>
             <a:ext cx="3276600" cy="209550"/>
           </a:xfrm>
           <a:prstGeom prst="rect">
@@ -5308,13 +5727,13 @@
       </p:sp>
       <p:sp>
         <p:nvSpPr>
-          <p:cNvPr id="34" name="Shape 32"/>
-          <p:cNvSpPr/>
-          <p:nvPr/>
-        </p:nvSpPr>
-        <p:spPr>
-          <a:xfrm>
-            <a:off x="952500" y="3238500"/>
+          <p:cNvPr id="39" name="Shape 37"/>
+          <p:cNvSpPr/>
+          <p:nvPr/>
+        </p:nvSpPr>
+        <p:spPr>
+          <a:xfrm>
+            <a:off x="952500" y="3295650"/>
             <a:ext cx="3276600" cy="0"/>
           </a:xfrm>
           <a:prstGeom prst="line">
@@ -5331,13 +5750,13 @@
       </p:sp>
       <p:sp>
         <p:nvSpPr>
-          <p:cNvPr id="35" name="Text 33"/>
-          <p:cNvSpPr txBox="1"/>
-          <p:nvPr/>
-        </p:nvSpPr>
-        <p:spPr>
-          <a:xfrm>
-            <a:off x="1038225" y="3062288"/>
+          <p:cNvPr id="40" name="Text 38"/>
+          <p:cNvSpPr txBox="1"/>
+          <p:nvPr/>
+        </p:nvSpPr>
+        <p:spPr>
+          <a:xfrm>
+            <a:off x="1038225" y="3119438"/>
             <a:ext cx="533400" cy="142875"/>
           </a:xfrm>
           <a:prstGeom prst="rect">
@@ -5373,13 +5792,13 @@
       </p:sp>
       <p:sp>
         <p:nvSpPr>
-          <p:cNvPr id="36" name="Text 34"/>
-          <p:cNvSpPr txBox="1"/>
-          <p:nvPr/>
-        </p:nvSpPr>
-        <p:spPr>
-          <a:xfrm>
-            <a:off x="1743075" y="3062288"/>
+          <p:cNvPr id="41" name="Text 39"/>
+          <p:cNvSpPr txBox="1"/>
+          <p:nvPr/>
+        </p:nvSpPr>
+        <p:spPr>
+          <a:xfrm>
+            <a:off x="1743075" y="3119438"/>
             <a:ext cx="990600" cy="142875"/>
           </a:xfrm>
           <a:prstGeom prst="rect">
@@ -5415,13 +5834,13 @@
       </p:sp>
       <p:sp>
         <p:nvSpPr>
-          <p:cNvPr id="37" name="Text 35"/>
-          <p:cNvSpPr txBox="1"/>
-          <p:nvPr/>
-        </p:nvSpPr>
-        <p:spPr>
-          <a:xfrm>
-            <a:off x="2905125" y="3062288"/>
+          <p:cNvPr id="42" name="Text 40"/>
+          <p:cNvSpPr txBox="1"/>
+          <p:nvPr/>
+        </p:nvSpPr>
+        <p:spPr>
+          <a:xfrm>
+            <a:off x="2905125" y="3119438"/>
             <a:ext cx="1238250" cy="142875"/>
           </a:xfrm>
           <a:prstGeom prst="rect">
@@ -5457,13 +5876,13 @@
       </p:sp>
       <p:sp>
         <p:nvSpPr>
-          <p:cNvPr id="38" name="Shape 36"/>
-          <p:cNvSpPr/>
-          <p:nvPr/>
-        </p:nvSpPr>
-        <p:spPr>
-          <a:xfrm>
-            <a:off x="952500" y="3448050"/>
+          <p:cNvPr id="43" name="Shape 41"/>
+          <p:cNvSpPr/>
+          <p:nvPr/>
+        </p:nvSpPr>
+        <p:spPr>
+          <a:xfrm>
+            <a:off x="952500" y="3505200"/>
             <a:ext cx="3276600" cy="0"/>
           </a:xfrm>
           <a:prstGeom prst="line">
@@ -5480,13 +5899,13 @@
       </p:sp>
       <p:sp>
         <p:nvSpPr>
-          <p:cNvPr id="39" name="Text 37"/>
-          <p:cNvSpPr txBox="1"/>
-          <p:nvPr/>
-        </p:nvSpPr>
-        <p:spPr>
-          <a:xfrm>
-            <a:off x="1038225" y="3271838"/>
+          <p:cNvPr id="44" name="Text 42"/>
+          <p:cNvSpPr txBox="1"/>
+          <p:nvPr/>
+        </p:nvSpPr>
+        <p:spPr>
+          <a:xfrm>
+            <a:off x="1038225" y="3328988"/>
             <a:ext cx="533400" cy="142875"/>
           </a:xfrm>
           <a:prstGeom prst="rect">
@@ -5522,13 +5941,13 @@
       </p:sp>
       <p:sp>
         <p:nvSpPr>
-          <p:cNvPr id="40" name="Text 38"/>
-          <p:cNvSpPr txBox="1"/>
-          <p:nvPr/>
-        </p:nvSpPr>
-        <p:spPr>
-          <a:xfrm>
-            <a:off x="1743075" y="3271838"/>
+          <p:cNvPr id="45" name="Text 43"/>
+          <p:cNvSpPr txBox="1"/>
+          <p:nvPr/>
+        </p:nvSpPr>
+        <p:spPr>
+          <a:xfrm>
+            <a:off x="1743075" y="3328988"/>
             <a:ext cx="990600" cy="142875"/>
           </a:xfrm>
           <a:prstGeom prst="rect">
@@ -5564,13 +5983,13 @@
       </p:sp>
       <p:sp>
         <p:nvSpPr>
-          <p:cNvPr id="41" name="Text 39"/>
-          <p:cNvSpPr txBox="1"/>
-          <p:nvPr/>
-        </p:nvSpPr>
-        <p:spPr>
-          <a:xfrm>
-            <a:off x="2905125" y="3271838"/>
+          <p:cNvPr id="46" name="Text 44"/>
+          <p:cNvSpPr txBox="1"/>
+          <p:nvPr/>
+        </p:nvSpPr>
+        <p:spPr>
+          <a:xfrm>
+            <a:off x="2905125" y="3328988"/>
             <a:ext cx="1238250" cy="142875"/>
           </a:xfrm>
           <a:prstGeom prst="rect">
@@ -5606,13 +6025,13 @@
       </p:sp>
       <p:sp>
         <p:nvSpPr>
-          <p:cNvPr id="42" name="Shape 40"/>
-          <p:cNvSpPr/>
-          <p:nvPr/>
-        </p:nvSpPr>
-        <p:spPr>
-          <a:xfrm>
-            <a:off x="952500" y="3448050"/>
+          <p:cNvPr id="47" name="Shape 45"/>
+          <p:cNvSpPr/>
+          <p:nvPr/>
+        </p:nvSpPr>
+        <p:spPr>
+          <a:xfrm>
+            <a:off x="952500" y="3505200"/>
             <a:ext cx="3276600" cy="209550"/>
           </a:xfrm>
           <a:prstGeom prst="rect">
@@ -5628,13 +6047,13 @@
       </p:sp>
       <p:sp>
         <p:nvSpPr>
-          <p:cNvPr id="43" name="Shape 41"/>
-          <p:cNvSpPr/>
-          <p:nvPr/>
-        </p:nvSpPr>
-        <p:spPr>
-          <a:xfrm>
-            <a:off x="952500" y="3657600"/>
+          <p:cNvPr id="48" name="Shape 46"/>
+          <p:cNvSpPr/>
+          <p:nvPr/>
+        </p:nvSpPr>
+        <p:spPr>
+          <a:xfrm>
+            <a:off x="952500" y="3714750"/>
             <a:ext cx="3276600" cy="0"/>
           </a:xfrm>
           <a:prstGeom prst="line">
@@ -5651,13 +6070,13 @@
       </p:sp>
       <p:sp>
         <p:nvSpPr>
-          <p:cNvPr id="44" name="Text 42"/>
-          <p:cNvSpPr txBox="1"/>
-          <p:nvPr/>
-        </p:nvSpPr>
-        <p:spPr>
-          <a:xfrm>
-            <a:off x="1038225" y="3481388"/>
+          <p:cNvPr id="49" name="Text 47"/>
+          <p:cNvSpPr txBox="1"/>
+          <p:nvPr/>
+        </p:nvSpPr>
+        <p:spPr>
+          <a:xfrm>
+            <a:off x="1038225" y="3538538"/>
             <a:ext cx="533400" cy="142875"/>
           </a:xfrm>
           <a:prstGeom prst="rect">
@@ -5693,13 +6112,13 @@
       </p:sp>
       <p:sp>
         <p:nvSpPr>
-          <p:cNvPr id="45" name="Text 43"/>
-          <p:cNvSpPr txBox="1"/>
-          <p:nvPr/>
-        </p:nvSpPr>
-        <p:spPr>
-          <a:xfrm>
-            <a:off x="1743075" y="3481388"/>
+          <p:cNvPr id="50" name="Text 48"/>
+          <p:cNvSpPr txBox="1"/>
+          <p:nvPr/>
+        </p:nvSpPr>
+        <p:spPr>
+          <a:xfrm>
+            <a:off x="1743075" y="3538538"/>
             <a:ext cx="990600" cy="142875"/>
           </a:xfrm>
           <a:prstGeom prst="rect">
@@ -5735,13 +6154,13 @@
       </p:sp>
       <p:sp>
         <p:nvSpPr>
-          <p:cNvPr id="46" name="Text 44"/>
-          <p:cNvSpPr txBox="1"/>
-          <p:nvPr/>
-        </p:nvSpPr>
-        <p:spPr>
-          <a:xfrm>
-            <a:off x="2905125" y="3481388"/>
+          <p:cNvPr id="51" name="Text 49"/>
+          <p:cNvSpPr txBox="1"/>
+          <p:nvPr/>
+        </p:nvSpPr>
+        <p:spPr>
+          <a:xfrm>
+            <a:off x="2905125" y="3538538"/>
             <a:ext cx="1238250" cy="142875"/>
           </a:xfrm>
           <a:prstGeom prst="rect">
@@ -5777,13 +6196,13 @@
       </p:sp>
       <p:sp>
         <p:nvSpPr>
-          <p:cNvPr id="47" name="Shape 45"/>
-          <p:cNvSpPr/>
-          <p:nvPr/>
-        </p:nvSpPr>
-        <p:spPr>
-          <a:xfrm>
-            <a:off x="952500" y="3867150"/>
+          <p:cNvPr id="52" name="Shape 50"/>
+          <p:cNvSpPr/>
+          <p:nvPr/>
+        </p:nvSpPr>
+        <p:spPr>
+          <a:xfrm>
+            <a:off x="952500" y="3924300"/>
             <a:ext cx="3276600" cy="0"/>
           </a:xfrm>
           <a:prstGeom prst="line">
@@ -5800,13 +6219,13 @@
       </p:sp>
       <p:sp>
         <p:nvSpPr>
-          <p:cNvPr id="48" name="Text 46"/>
-          <p:cNvSpPr txBox="1"/>
-          <p:nvPr/>
-        </p:nvSpPr>
-        <p:spPr>
-          <a:xfrm>
-            <a:off x="1038225" y="3690937"/>
+          <p:cNvPr id="53" name="Text 51"/>
+          <p:cNvSpPr txBox="1"/>
+          <p:nvPr/>
+        </p:nvSpPr>
+        <p:spPr>
+          <a:xfrm>
+            <a:off x="1038225" y="3748087"/>
             <a:ext cx="533400" cy="142875"/>
           </a:xfrm>
           <a:prstGeom prst="rect">
@@ -5842,13 +6261,13 @@
       </p:sp>
       <p:sp>
         <p:nvSpPr>
-          <p:cNvPr id="49" name="Text 47"/>
-          <p:cNvSpPr txBox="1"/>
-          <p:nvPr/>
-        </p:nvSpPr>
-        <p:spPr>
-          <a:xfrm>
-            <a:off x="1743075" y="3690937"/>
+          <p:cNvPr id="54" name="Text 52"/>
+          <p:cNvSpPr txBox="1"/>
+          <p:nvPr/>
+        </p:nvSpPr>
+        <p:spPr>
+          <a:xfrm>
+            <a:off x="1743075" y="3748087"/>
             <a:ext cx="990600" cy="142875"/>
           </a:xfrm>
           <a:prstGeom prst="rect">
@@ -5884,13 +6303,13 @@
       </p:sp>
       <p:sp>
         <p:nvSpPr>
-          <p:cNvPr id="50" name="Text 48"/>
-          <p:cNvSpPr txBox="1"/>
-          <p:nvPr/>
-        </p:nvSpPr>
-        <p:spPr>
-          <a:xfrm>
-            <a:off x="2905125" y="3690937"/>
+          <p:cNvPr id="55" name="Text 53"/>
+          <p:cNvSpPr txBox="1"/>
+          <p:nvPr/>
+        </p:nvSpPr>
+        <p:spPr>
+          <a:xfrm>
+            <a:off x="2905125" y="3748087"/>
             <a:ext cx="1238250" cy="142875"/>
           </a:xfrm>
           <a:prstGeom prst="rect">
@@ -5926,13 +6345,13 @@
       </p:sp>
       <p:sp>
         <p:nvSpPr>
-          <p:cNvPr id="51" name="Shape 49"/>
-          <p:cNvSpPr/>
-          <p:nvPr/>
-        </p:nvSpPr>
-        <p:spPr>
-          <a:xfrm>
-            <a:off x="952500" y="3867150"/>
+          <p:cNvPr id="56" name="Shape 54"/>
+          <p:cNvSpPr/>
+          <p:nvPr/>
+        </p:nvSpPr>
+        <p:spPr>
+          <a:xfrm>
+            <a:off x="952500" y="3924300"/>
             <a:ext cx="3276600" cy="209550"/>
           </a:xfrm>
           <a:prstGeom prst="rect">
@@ -5948,13 +6367,13 @@
       </p:sp>
       <p:sp>
         <p:nvSpPr>
-          <p:cNvPr id="52" name="Shape 50"/>
-          <p:cNvSpPr/>
-          <p:nvPr/>
-        </p:nvSpPr>
-        <p:spPr>
-          <a:xfrm>
-            <a:off x="952500" y="4076700"/>
+          <p:cNvPr id="57" name="Shape 55"/>
+          <p:cNvSpPr/>
+          <p:nvPr/>
+        </p:nvSpPr>
+        <p:spPr>
+          <a:xfrm>
+            <a:off x="952500" y="4133850"/>
             <a:ext cx="3276600" cy="0"/>
           </a:xfrm>
           <a:prstGeom prst="line">
@@ -5971,13 +6390,13 @@
       </p:sp>
       <p:sp>
         <p:nvSpPr>
-          <p:cNvPr id="53" name="Text 51"/>
-          <p:cNvSpPr txBox="1"/>
-          <p:nvPr/>
-        </p:nvSpPr>
-        <p:spPr>
-          <a:xfrm>
-            <a:off x="1038225" y="3900488"/>
+          <p:cNvPr id="58" name="Text 56"/>
+          <p:cNvSpPr txBox="1"/>
+          <p:nvPr/>
+        </p:nvSpPr>
+        <p:spPr>
+          <a:xfrm>
+            <a:off x="1038225" y="3957638"/>
             <a:ext cx="533400" cy="142875"/>
           </a:xfrm>
           <a:prstGeom prst="rect">
@@ -6013,13 +6432,13 @@
       </p:sp>
       <p:sp>
         <p:nvSpPr>
-          <p:cNvPr id="54" name="Text 52"/>
-          <p:cNvSpPr txBox="1"/>
-          <p:nvPr/>
-        </p:nvSpPr>
-        <p:spPr>
-          <a:xfrm>
-            <a:off x="1743075" y="3900488"/>
+          <p:cNvPr id="59" name="Text 57"/>
+          <p:cNvSpPr txBox="1"/>
+          <p:nvPr/>
+        </p:nvSpPr>
+        <p:spPr>
+          <a:xfrm>
+            <a:off x="1743075" y="3957638"/>
             <a:ext cx="990600" cy="142875"/>
           </a:xfrm>
           <a:prstGeom prst="rect">
@@ -6055,13 +6474,13 @@
       </p:sp>
       <p:sp>
         <p:nvSpPr>
-          <p:cNvPr id="55" name="Text 53"/>
-          <p:cNvSpPr txBox="1"/>
-          <p:nvPr/>
-        </p:nvSpPr>
-        <p:spPr>
-          <a:xfrm>
-            <a:off x="2905125" y="3900488"/>
+          <p:cNvPr id="60" name="Text 58"/>
+          <p:cNvSpPr txBox="1"/>
+          <p:nvPr/>
+        </p:nvSpPr>
+        <p:spPr>
+          <a:xfrm>
+            <a:off x="2905125" y="3957638"/>
             <a:ext cx="1238250" cy="142875"/>
           </a:xfrm>
           <a:prstGeom prst="rect">
@@ -6097,13 +6516,13 @@
       </p:sp>
       <p:sp>
         <p:nvSpPr>
-          <p:cNvPr id="56" name="Shape 54"/>
-          <p:cNvSpPr/>
-          <p:nvPr/>
-        </p:nvSpPr>
-        <p:spPr>
-          <a:xfrm>
-            <a:off x="952500" y="4286250"/>
+          <p:cNvPr id="61" name="Shape 59"/>
+          <p:cNvSpPr/>
+          <p:nvPr/>
+        </p:nvSpPr>
+        <p:spPr>
+          <a:xfrm>
+            <a:off x="952500" y="4343400"/>
             <a:ext cx="3276600" cy="0"/>
           </a:xfrm>
           <a:prstGeom prst="line">
@@ -6120,13 +6539,13 @@
       </p:sp>
       <p:sp>
         <p:nvSpPr>
-          <p:cNvPr id="57" name="Text 55"/>
-          <p:cNvSpPr txBox="1"/>
-          <p:nvPr/>
-        </p:nvSpPr>
-        <p:spPr>
-          <a:xfrm>
-            <a:off x="1038225" y="4110038"/>
+          <p:cNvPr id="62" name="Text 60"/>
+          <p:cNvSpPr txBox="1"/>
+          <p:nvPr/>
+        </p:nvSpPr>
+        <p:spPr>
+          <a:xfrm>
+            <a:off x="1038225" y="4167188"/>
             <a:ext cx="533400" cy="142875"/>
           </a:xfrm>
           <a:prstGeom prst="rect">
@@ -6162,13 +6581,13 @@
       </p:sp>
       <p:sp>
         <p:nvSpPr>
-          <p:cNvPr id="58" name="Text 56"/>
-          <p:cNvSpPr txBox="1"/>
-          <p:nvPr/>
-        </p:nvSpPr>
-        <p:spPr>
-          <a:xfrm>
-            <a:off x="1743075" y="4110038"/>
+          <p:cNvPr id="63" name="Text 61"/>
+          <p:cNvSpPr txBox="1"/>
+          <p:nvPr/>
+        </p:nvSpPr>
+        <p:spPr>
+          <a:xfrm>
+            <a:off x="1743075" y="4167188"/>
             <a:ext cx="990600" cy="142875"/>
           </a:xfrm>
           <a:prstGeom prst="rect">
@@ -6204,13 +6623,13 @@
       </p:sp>
       <p:sp>
         <p:nvSpPr>
-          <p:cNvPr id="59" name="Text 57"/>
-          <p:cNvSpPr txBox="1"/>
-          <p:nvPr/>
-        </p:nvSpPr>
-        <p:spPr>
-          <a:xfrm>
-            <a:off x="2905125" y="4110038"/>
+          <p:cNvPr id="64" name="Text 62"/>
+          <p:cNvSpPr txBox="1"/>
+          <p:nvPr/>
+        </p:nvSpPr>
+        <p:spPr>
+          <a:xfrm>
+            <a:off x="2905125" y="4167188"/>
             <a:ext cx="1238250" cy="142875"/>
           </a:xfrm>
           <a:prstGeom prst="rect">
@@ -6246,13 +6665,13 @@
       </p:sp>
       <p:sp>
         <p:nvSpPr>
-          <p:cNvPr id="60" name="Shape 58"/>
-          <p:cNvSpPr/>
-          <p:nvPr/>
-        </p:nvSpPr>
-        <p:spPr>
-          <a:xfrm>
-            <a:off x="952500" y="4286250"/>
+          <p:cNvPr id="65" name="Shape 63"/>
+          <p:cNvSpPr/>
+          <p:nvPr/>
+        </p:nvSpPr>
+        <p:spPr>
+          <a:xfrm>
+            <a:off x="952500" y="4343400"/>
             <a:ext cx="3276600" cy="209550"/>
           </a:xfrm>
           <a:prstGeom prst="rect">
@@ -6268,13 +6687,13 @@
       </p:sp>
       <p:sp>
         <p:nvSpPr>
-          <p:cNvPr id="61" name="Shape 59"/>
-          <p:cNvSpPr/>
-          <p:nvPr/>
-        </p:nvSpPr>
-        <p:spPr>
-          <a:xfrm>
-            <a:off x="952500" y="4495800"/>
+          <p:cNvPr id="66" name="Shape 64"/>
+          <p:cNvSpPr/>
+          <p:nvPr/>
+        </p:nvSpPr>
+        <p:spPr>
+          <a:xfrm>
+            <a:off x="952500" y="4552950"/>
             <a:ext cx="3276600" cy="0"/>
           </a:xfrm>
           <a:prstGeom prst="line">
@@ -6291,13 +6710,13 @@
       </p:sp>
       <p:sp>
         <p:nvSpPr>
-          <p:cNvPr id="62" name="Text 60"/>
-          <p:cNvSpPr txBox="1"/>
-          <p:nvPr/>
-        </p:nvSpPr>
-        <p:spPr>
-          <a:xfrm>
-            <a:off x="1038225" y="4319588"/>
+          <p:cNvPr id="67" name="Text 65"/>
+          <p:cNvSpPr txBox="1"/>
+          <p:nvPr/>
+        </p:nvSpPr>
+        <p:spPr>
+          <a:xfrm>
+            <a:off x="1038225" y="4376738"/>
             <a:ext cx="533400" cy="142875"/>
           </a:xfrm>
           <a:prstGeom prst="rect">
@@ -6333,13 +6752,13 @@
       </p:sp>
       <p:sp>
         <p:nvSpPr>
-          <p:cNvPr id="63" name="Text 61"/>
-          <p:cNvSpPr txBox="1"/>
-          <p:nvPr/>
-        </p:nvSpPr>
-        <p:spPr>
-          <a:xfrm>
-            <a:off x="1743075" y="4319588"/>
+          <p:cNvPr id="68" name="Text 66"/>
+          <p:cNvSpPr txBox="1"/>
+          <p:nvPr/>
+        </p:nvSpPr>
+        <p:spPr>
+          <a:xfrm>
+            <a:off x="1743075" y="4376738"/>
             <a:ext cx="990600" cy="142875"/>
           </a:xfrm>
           <a:prstGeom prst="rect">
@@ -6375,13 +6794,13 @@
       </p:sp>
       <p:sp>
         <p:nvSpPr>
-          <p:cNvPr id="64" name="Text 62"/>
-          <p:cNvSpPr txBox="1"/>
-          <p:nvPr/>
-        </p:nvSpPr>
-        <p:spPr>
-          <a:xfrm>
-            <a:off x="2905125" y="4319588"/>
+          <p:cNvPr id="69" name="Text 67"/>
+          <p:cNvSpPr txBox="1"/>
+          <p:nvPr/>
+        </p:nvSpPr>
+        <p:spPr>
+          <a:xfrm>
+            <a:off x="2905125" y="4376738"/>
             <a:ext cx="1238250" cy="142875"/>
           </a:xfrm>
           <a:prstGeom prst="rect">
@@ -6417,13 +6836,13 @@
       </p:sp>
       <p:sp>
         <p:nvSpPr>
-          <p:cNvPr id="65" name="Shape 63"/>
-          <p:cNvSpPr/>
-          <p:nvPr/>
-        </p:nvSpPr>
-        <p:spPr>
-          <a:xfrm>
-            <a:off x="952500" y="4705350"/>
+          <p:cNvPr id="70" name="Shape 68"/>
+          <p:cNvSpPr/>
+          <p:nvPr/>
+        </p:nvSpPr>
+        <p:spPr>
+          <a:xfrm>
+            <a:off x="952500" y="4762500"/>
             <a:ext cx="3276600" cy="0"/>
           </a:xfrm>
           <a:prstGeom prst="line">
@@ -6440,13 +6859,13 @@
       </p:sp>
       <p:sp>
         <p:nvSpPr>
-          <p:cNvPr id="66" name="Text 64"/>
-          <p:cNvSpPr txBox="1"/>
-          <p:nvPr/>
-        </p:nvSpPr>
-        <p:spPr>
-          <a:xfrm>
-            <a:off x="1038225" y="4529138"/>
+          <p:cNvPr id="71" name="Text 69"/>
+          <p:cNvSpPr txBox="1"/>
+          <p:nvPr/>
+        </p:nvSpPr>
+        <p:spPr>
+          <a:xfrm>
+            <a:off x="1038225" y="4586288"/>
             <a:ext cx="533400" cy="142875"/>
           </a:xfrm>
           <a:prstGeom prst="rect">
@@ -6482,13 +6901,13 @@
       </p:sp>
       <p:sp>
         <p:nvSpPr>
-          <p:cNvPr id="67" name="Text 65"/>
-          <p:cNvSpPr txBox="1"/>
-          <p:nvPr/>
-        </p:nvSpPr>
-        <p:spPr>
-          <a:xfrm>
-            <a:off x="1743075" y="4529138"/>
+          <p:cNvPr id="72" name="Text 70"/>
+          <p:cNvSpPr txBox="1"/>
+          <p:nvPr/>
+        </p:nvSpPr>
+        <p:spPr>
+          <a:xfrm>
+            <a:off x="1743075" y="4586288"/>
             <a:ext cx="990600" cy="142875"/>
           </a:xfrm>
           <a:prstGeom prst="rect">
@@ -6524,13 +6943,13 @@
       </p:sp>
       <p:sp>
         <p:nvSpPr>
-          <p:cNvPr id="68" name="Text 66"/>
-          <p:cNvSpPr txBox="1"/>
-          <p:nvPr/>
-        </p:nvSpPr>
-        <p:spPr>
-          <a:xfrm>
-            <a:off x="2905125" y="4529138"/>
+          <p:cNvPr id="73" name="Text 71"/>
+          <p:cNvSpPr txBox="1"/>
+          <p:nvPr/>
+        </p:nvSpPr>
+        <p:spPr>
+          <a:xfrm>
+            <a:off x="2905125" y="4586288"/>
             <a:ext cx="1238250" cy="142875"/>
           </a:xfrm>
           <a:prstGeom prst="rect">
@@ -6566,13 +6985,13 @@
       </p:sp>
       <p:sp>
         <p:nvSpPr>
-          <p:cNvPr id="69" name="Shape 67"/>
-          <p:cNvSpPr/>
-          <p:nvPr/>
-        </p:nvSpPr>
-        <p:spPr>
-          <a:xfrm>
-            <a:off x="952500" y="4705350"/>
+          <p:cNvPr id="74" name="Shape 72"/>
+          <p:cNvSpPr/>
+          <p:nvPr/>
+        </p:nvSpPr>
+        <p:spPr>
+          <a:xfrm>
+            <a:off x="952500" y="4762500"/>
             <a:ext cx="3276600" cy="209550"/>
           </a:xfrm>
           <a:prstGeom prst="rect">
@@ -6588,13 +7007,13 @@
       </p:sp>
       <p:sp>
         <p:nvSpPr>
-          <p:cNvPr id="70" name="Shape 68"/>
-          <p:cNvSpPr/>
-          <p:nvPr/>
-        </p:nvSpPr>
-        <p:spPr>
-          <a:xfrm>
-            <a:off x="952500" y="4914900"/>
+          <p:cNvPr id="75" name="Shape 73"/>
+          <p:cNvSpPr/>
+          <p:nvPr/>
+        </p:nvSpPr>
+        <p:spPr>
+          <a:xfrm>
+            <a:off x="952500" y="4972050"/>
             <a:ext cx="3276600" cy="0"/>
           </a:xfrm>
           <a:prstGeom prst="line">
@@ -6611,13 +7030,13 @@
       </p:sp>
       <p:sp>
         <p:nvSpPr>
-          <p:cNvPr id="71" name="Text 69"/>
-          <p:cNvSpPr txBox="1"/>
-          <p:nvPr/>
-        </p:nvSpPr>
-        <p:spPr>
-          <a:xfrm>
-            <a:off x="1038225" y="4738688"/>
+          <p:cNvPr id="76" name="Text 74"/>
+          <p:cNvSpPr txBox="1"/>
+          <p:nvPr/>
+        </p:nvSpPr>
+        <p:spPr>
+          <a:xfrm>
+            <a:off x="1038225" y="4795838"/>
             <a:ext cx="533400" cy="142875"/>
           </a:xfrm>
           <a:prstGeom prst="rect">
@@ -6653,13 +7072,13 @@
       </p:sp>
       <p:sp>
         <p:nvSpPr>
-          <p:cNvPr id="72" name="Text 70"/>
-          <p:cNvSpPr txBox="1"/>
-          <p:nvPr/>
-        </p:nvSpPr>
-        <p:spPr>
-          <a:xfrm>
-            <a:off x="1743075" y="4738688"/>
+          <p:cNvPr id="77" name="Text 75"/>
+          <p:cNvSpPr txBox="1"/>
+          <p:nvPr/>
+        </p:nvSpPr>
+        <p:spPr>
+          <a:xfrm>
+            <a:off x="1743075" y="4795838"/>
             <a:ext cx="990600" cy="142875"/>
           </a:xfrm>
           <a:prstGeom prst="rect">
@@ -6695,13 +7114,13 @@
       </p:sp>
       <p:sp>
         <p:nvSpPr>
-          <p:cNvPr id="73" name="Text 71"/>
-          <p:cNvSpPr txBox="1"/>
-          <p:nvPr/>
-        </p:nvSpPr>
-        <p:spPr>
-          <a:xfrm>
-            <a:off x="2905125" y="4738688"/>
+          <p:cNvPr id="78" name="Text 76"/>
+          <p:cNvSpPr txBox="1"/>
+          <p:nvPr/>
+        </p:nvSpPr>
+        <p:spPr>
+          <a:xfrm>
+            <a:off x="2905125" y="4795838"/>
             <a:ext cx="1238250" cy="142875"/>
           </a:xfrm>
           <a:prstGeom prst="rect">
@@ -6737,13 +7156,13 @@
       </p:sp>
       <p:sp>
         <p:nvSpPr>
-          <p:cNvPr id="74" name="Shape 72"/>
-          <p:cNvSpPr/>
-          <p:nvPr/>
-        </p:nvSpPr>
-        <p:spPr>
-          <a:xfrm>
-            <a:off x="952500" y="5124450"/>
+          <p:cNvPr id="79" name="Shape 77"/>
+          <p:cNvSpPr/>
+          <p:nvPr/>
+        </p:nvSpPr>
+        <p:spPr>
+          <a:xfrm>
+            <a:off x="952500" y="5181600"/>
             <a:ext cx="3276600" cy="0"/>
           </a:xfrm>
           <a:prstGeom prst="line">
@@ -6760,13 +7179,13 @@
       </p:sp>
       <p:sp>
         <p:nvSpPr>
-          <p:cNvPr id="75" name="Text 73"/>
-          <p:cNvSpPr txBox="1"/>
-          <p:nvPr/>
-        </p:nvSpPr>
-        <p:spPr>
-          <a:xfrm>
-            <a:off x="1038225" y="4948238"/>
+          <p:cNvPr id="80" name="Text 78"/>
+          <p:cNvSpPr txBox="1"/>
+          <p:nvPr/>
+        </p:nvSpPr>
+        <p:spPr>
+          <a:xfrm>
+            <a:off x="1038225" y="5005388"/>
             <a:ext cx="533400" cy="142875"/>
           </a:xfrm>
           <a:prstGeom prst="rect">
@@ -6802,13 +7221,13 @@
       </p:sp>
       <p:sp>
         <p:nvSpPr>
-          <p:cNvPr id="76" name="Text 74"/>
-          <p:cNvSpPr txBox="1"/>
-          <p:nvPr/>
-        </p:nvSpPr>
-        <p:spPr>
-          <a:xfrm>
-            <a:off x="1743075" y="4948238"/>
+          <p:cNvPr id="81" name="Text 79"/>
+          <p:cNvSpPr txBox="1"/>
+          <p:nvPr/>
+        </p:nvSpPr>
+        <p:spPr>
+          <a:xfrm>
+            <a:off x="1743075" y="5005388"/>
             <a:ext cx="990600" cy="142875"/>
           </a:xfrm>
           <a:prstGeom prst="rect">
@@ -6844,13 +7263,13 @@
       </p:sp>
       <p:sp>
         <p:nvSpPr>
-          <p:cNvPr id="77" name="Text 75"/>
-          <p:cNvSpPr txBox="1"/>
-          <p:nvPr/>
-        </p:nvSpPr>
-        <p:spPr>
-          <a:xfrm>
-            <a:off x="2905125" y="4948238"/>
+          <p:cNvPr id="82" name="Text 80"/>
+          <p:cNvSpPr txBox="1"/>
+          <p:nvPr/>
+        </p:nvSpPr>
+        <p:spPr>
+          <a:xfrm>
+            <a:off x="2905125" y="5005388"/>
             <a:ext cx="1238250" cy="142875"/>
           </a:xfrm>
           <a:prstGeom prst="rect">
@@ -6886,13 +7305,13 @@
       </p:sp>
       <p:sp>
         <p:nvSpPr>
-          <p:cNvPr id="78" name="Shape 76"/>
-          <p:cNvSpPr/>
-          <p:nvPr/>
-        </p:nvSpPr>
-        <p:spPr>
-          <a:xfrm>
-            <a:off x="952500" y="5124450"/>
+          <p:cNvPr id="83" name="Shape 81"/>
+          <p:cNvSpPr/>
+          <p:nvPr/>
+        </p:nvSpPr>
+        <p:spPr>
+          <a:xfrm>
+            <a:off x="952500" y="5181600"/>
             <a:ext cx="3276600" cy="0"/>
           </a:xfrm>
           <a:prstGeom prst="line">
@@ -6909,13 +7328,13 @@
       </p:sp>
       <p:sp>
         <p:nvSpPr>
-          <p:cNvPr id="79" name="Text 77"/>
-          <p:cNvSpPr txBox="1"/>
-          <p:nvPr/>
-        </p:nvSpPr>
-        <p:spPr>
-          <a:xfrm>
-            <a:off x="1038225" y="5176838"/>
+          <p:cNvPr id="84" name="Text 82"/>
+          <p:cNvSpPr txBox="1"/>
+          <p:nvPr/>
+        </p:nvSpPr>
+        <p:spPr>
+          <a:xfrm>
+            <a:off x="1038225" y="5233988"/>
             <a:ext cx="533400" cy="142875"/>
           </a:xfrm>
           <a:prstGeom prst="rect">
@@ -6951,13 +7370,13 @@
       </p:sp>
       <p:sp>
         <p:nvSpPr>
-          <p:cNvPr id="80" name="Text 78"/>
-          <p:cNvSpPr txBox="1"/>
-          <p:nvPr/>
-        </p:nvSpPr>
-        <p:spPr>
-          <a:xfrm>
-            <a:off x="1743075" y="5176838"/>
+          <p:cNvPr id="85" name="Text 83"/>
+          <p:cNvSpPr txBox="1"/>
+          <p:nvPr/>
+        </p:nvSpPr>
+        <p:spPr>
+          <a:xfrm>
+            <a:off x="1743075" y="5233988"/>
             <a:ext cx="990600" cy="142875"/>
           </a:xfrm>
           <a:prstGeom prst="rect">
@@ -6993,13 +7412,13 @@
       </p:sp>
       <p:sp>
         <p:nvSpPr>
-          <p:cNvPr id="81" name="Text 79"/>
-          <p:cNvSpPr txBox="1"/>
-          <p:nvPr/>
-        </p:nvSpPr>
-        <p:spPr>
-          <a:xfrm>
-            <a:off x="2905125" y="5176838"/>
+          <p:cNvPr id="86" name="Text 84"/>
+          <p:cNvSpPr txBox="1"/>
+          <p:nvPr/>
+        </p:nvSpPr>
+        <p:spPr>
+          <a:xfrm>
+            <a:off x="2905125" y="5233988"/>
             <a:ext cx="1238250" cy="142875"/>
           </a:xfrm>
           <a:prstGeom prst="rect">
@@ -7035,13 +7454,13 @@
       </p:sp>
       <p:sp>
         <p:nvSpPr>
-          <p:cNvPr id="82" name="Text 80"/>
-          <p:cNvSpPr txBox="1"/>
-          <p:nvPr/>
-        </p:nvSpPr>
-        <p:spPr>
-          <a:xfrm>
-            <a:off x="952500" y="5715000"/>
+          <p:cNvPr id="87" name="Text 85"/>
+          <p:cNvSpPr txBox="1"/>
+          <p:nvPr/>
+        </p:nvSpPr>
+        <p:spPr>
+          <a:xfrm>
+            <a:off x="952500" y="5695950"/>
             <a:ext cx="3276600" cy="120015"/>
           </a:xfrm>
           <a:prstGeom prst="rect">
@@ -7077,14 +7496,14 @@
       </p:sp>
       <p:sp>
         <p:nvSpPr>
-          <p:cNvPr id="83" name="Shape 81"/>
-          <p:cNvSpPr/>
-          <p:nvPr/>
-        </p:nvSpPr>
-        <p:spPr>
-          <a:xfrm>
-            <a:off x="5314950" y="1809750"/>
-            <a:ext cx="6191250" cy="4133850"/>
+          <p:cNvPr id="88" name="Shape 86"/>
+          <p:cNvSpPr/>
+          <p:nvPr/>
+        </p:nvSpPr>
+        <p:spPr>
+          <a:xfrm>
+            <a:off x="5314950" y="1771650"/>
+            <a:ext cx="6191250" cy="2228850"/>
           </a:xfrm>
           <a:prstGeom prst="rect">
             <a:avLst/>
@@ -7092,24 +7511,87 @@
           <a:solidFill>
             <a:srgbClr val="0A1320"/>
           </a:solidFill>
-          <a:ln w="12700">
-            <a:solidFill>
-              <a:srgbClr val="182838"/>
-            </a:solidFill>
-            <a:prstDash val="solid"/>
-          </a:ln>
-        </p:spPr>
-      </p:sp>
-      <p:sp>
-        <p:nvSpPr>
-          <p:cNvPr id="84" name="Text 82"/>
-          <p:cNvSpPr txBox="1"/>
-          <p:nvPr/>
-        </p:nvSpPr>
-        <p:spPr>
-          <a:xfrm>
-            <a:off x="5505450" y="1905000"/>
-            <a:ext cx="2286000" cy="125016"/>
+          <a:ln w="15240">
+            <a:solidFill>
+              <a:srgbClr val="22354A"/>
+            </a:solidFill>
+            <a:prstDash val="solid"/>
+          </a:ln>
+        </p:spPr>
+      </p:sp>
+      <p:sp>
+        <p:nvSpPr>
+          <p:cNvPr id="89" name="Shape 87"/>
+          <p:cNvSpPr/>
+          <p:nvPr/>
+        </p:nvSpPr>
+        <p:spPr>
+          <a:xfrm>
+            <a:off x="5324475" y="1781175"/>
+            <a:ext cx="6172200" cy="276225"/>
+          </a:xfrm>
+          <a:prstGeom prst="rect">
+            <a:avLst/>
+          </a:prstGeom>
+          <a:solidFill>
+            <a:srgbClr val="17283C"/>
+          </a:solidFill>
+          <a:ln/>
+        </p:spPr>
+      </p:sp>
+      <p:sp>
+        <p:nvSpPr>
+          <p:cNvPr id="90" name="Shape 88"/>
+          <p:cNvSpPr/>
+          <p:nvPr/>
+        </p:nvSpPr>
+        <p:spPr>
+          <a:xfrm>
+            <a:off x="5314950" y="2057400"/>
+            <a:ext cx="6191250" cy="0"/>
+          </a:xfrm>
+          <a:prstGeom prst="line">
+            <a:avLst/>
+          </a:prstGeom>
+          <a:noFill/>
+          <a:ln w="15240">
+            <a:solidFill>
+              <a:srgbClr val="22354A"/>
+            </a:solidFill>
+            <a:prstDash val="solid"/>
+          </a:ln>
+        </p:spPr>
+      </p:sp>
+      <p:sp>
+        <p:nvSpPr>
+          <p:cNvPr id="91" name="Shape 89"/>
+          <p:cNvSpPr/>
+          <p:nvPr/>
+        </p:nvSpPr>
+        <p:spPr>
+          <a:xfrm>
+            <a:off x="5324475" y="1781175"/>
+            <a:ext cx="38100" cy="276225"/>
+          </a:xfrm>
+          <a:prstGeom prst="rect">
+            <a:avLst/>
+          </a:prstGeom>
+          <a:solidFill>
+            <a:srgbClr val="EFB13C"/>
+          </a:solidFill>
+          <a:ln/>
+        </p:spPr>
+      </p:sp>
+      <p:sp>
+        <p:nvSpPr>
+          <p:cNvPr id="92" name="Text 90"/>
+          <p:cNvSpPr txBox="1"/>
+          <p:nvPr/>
+        </p:nvSpPr>
+        <p:spPr>
+          <a:xfrm>
+            <a:off x="5486400" y="1847850"/>
+            <a:ext cx="171450" cy="148590"/>
           </a:xfrm>
           <a:prstGeom prst="rect">
             <a:avLst/>
@@ -7123,76 +7605,118 @@
           <a:p>
             <a:pPr algn="l" indent="0" marL="0">
               <a:lnSpc>
-                <a:spcPts val="984"/>
-              </a:lnSpc>
-              <a:buNone/>
-            </a:pPr>
-            <a:r>
-              <a:rPr lang="en-US" sz="788" b="1" spc="150" kern="0" dirty="0">
-                <a:solidFill>
-                  <a:srgbClr val="8A8880"/>
+                <a:spcPts val="1170"/>
+              </a:lnSpc>
+              <a:buNone/>
+            </a:pPr>
+            <a:r>
+              <a:rPr lang="en-US" sz="975" b="1" dirty="0">
+                <a:solidFill>
+                  <a:srgbClr val="EFB13C"/>
                 </a:solidFill>
                 <a:latin typeface="Consolas" pitchFamily="34" charset="0"/>
                 <a:ea typeface="Consolas" pitchFamily="34" charset="-122"/>
                 <a:cs typeface="Consolas" pitchFamily="34" charset="-120"/>
               </a:rPr>
-              <a:t>시험 40회 전체</a:t>
-            </a:r>
-            <a:endParaRPr lang="en-US" sz="788" dirty="0"/>
-          </a:p>
-        </p:txBody>
-      </p:sp>
-      <p:sp>
-        <p:nvSpPr>
-          <p:cNvPr id="85" name="Text 83"/>
-          <p:cNvSpPr txBox="1"/>
-          <p:nvPr/>
-        </p:nvSpPr>
-        <p:spPr>
-          <a:xfrm>
-            <a:off x="8362950" y="1895475"/>
-            <a:ext cx="2952750" cy="120015"/>
-          </a:xfrm>
-          <a:prstGeom prst="rect">
-            <a:avLst/>
-          </a:prstGeom>
-          <a:noFill/>
-          <a:ln/>
-        </p:spPr>
-        <p:txBody>
-          <a:bodyPr wrap="square" lIns="0" tIns="0" rIns="0" bIns="0" rtlCol="0" anchor="t"/>
-          <a:lstStyle/>
-          <a:p>
-            <a:pPr algn="r" indent="0" marL="0">
-              <a:lnSpc>
-                <a:spcPts val="945"/>
-              </a:lnSpc>
-              <a:buNone/>
-            </a:pPr>
-            <a:r>
-              <a:rPr lang="en-US" sz="788" dirty="0">
-                <a:solidFill>
-                  <a:srgbClr val="8A8880"/>
+              <a:t>2</a:t>
+            </a:r>
+            <a:endParaRPr lang="en-US" sz="975" dirty="0"/>
+          </a:p>
+        </p:txBody>
+      </p:sp>
+      <p:sp>
+        <p:nvSpPr>
+          <p:cNvPr id="93" name="Text 91"/>
+          <p:cNvSpPr txBox="1"/>
+          <p:nvPr/>
+        </p:nvSpPr>
+        <p:spPr>
+          <a:xfrm>
+            <a:off x="5715000" y="1847850"/>
+            <a:ext cx="3429000" cy="154305"/>
+          </a:xfrm>
+          <a:prstGeom prst="rect">
+            <a:avLst/>
+          </a:prstGeom>
+          <a:noFill/>
+          <a:ln/>
+        </p:spPr>
+        <p:txBody>
+          <a:bodyPr wrap="square" lIns="0" tIns="0" rIns="0" bIns="0" rtlCol="0" anchor="t"/>
+          <a:lstStyle/>
+          <a:p>
+            <a:pPr algn="l" indent="0" marL="0">
+              <a:lnSpc>
+                <a:spcPts val="1215"/>
+              </a:lnSpc>
+              <a:buNone/>
+            </a:pPr>
+            <a:r>
+              <a:rPr lang="en-US" sz="1013" b="1" spc="30" kern="0" dirty="0">
+                <a:solidFill>
+                  <a:srgbClr val="EAE7E0"/>
                 </a:solidFill>
                 <a:latin typeface="Malgun Gothic" pitchFamily="34" charset="0"/>
                 <a:ea typeface="Malgun Gothic" pitchFamily="34" charset="-122"/>
                 <a:cs typeface="Malgun Gothic" pitchFamily="34" charset="-120"/>
               </a:rPr>
+              <a:t>시험 40회 전체</a:t>
+            </a:r>
+            <a:endParaRPr lang="en-US" sz="1013" dirty="0"/>
+          </a:p>
+        </p:txBody>
+      </p:sp>
+      <p:sp>
+        <p:nvSpPr>
+          <p:cNvPr id="94" name="Text 92"/>
+          <p:cNvSpPr txBox="1"/>
+          <p:nvPr/>
+        </p:nvSpPr>
+        <p:spPr>
+          <a:xfrm>
+            <a:off x="9144000" y="1857375"/>
+            <a:ext cx="2228850" cy="125730"/>
+          </a:xfrm>
+          <a:prstGeom prst="rect">
+            <a:avLst/>
+          </a:prstGeom>
+          <a:noFill/>
+          <a:ln/>
+        </p:spPr>
+        <p:txBody>
+          <a:bodyPr wrap="square" lIns="0" tIns="0" rIns="0" bIns="0" rtlCol="0" anchor="t"/>
+          <a:lstStyle/>
+          <a:p>
+            <a:pPr algn="r" indent="0" marL="0">
+              <a:lnSpc>
+                <a:spcPts val="990"/>
+              </a:lnSpc>
+              <a:buNone/>
+            </a:pPr>
+            <a:r>
+              <a:rPr lang="en-US" sz="825" dirty="0">
+                <a:solidFill>
+                  <a:srgbClr val="8A8880"/>
+                </a:solidFill>
+                <a:latin typeface="Malgun Gothic" pitchFamily="34" charset="0"/>
+                <a:ea typeface="Malgun Gothic" pitchFamily="34" charset="-122"/>
+                <a:cs typeface="Malgun Gothic" pitchFamily="34" charset="-120"/>
+              </a:rPr>
               <a:t>가로 외기온도 ℃ / 세로 실제 차이 MW</a:t>
             </a:r>
-            <a:endParaRPr lang="en-US" sz="788" dirty="0"/>
-          </a:p>
-        </p:txBody>
-      </p:sp>
-      <p:sp>
-        <p:nvSpPr>
-          <p:cNvPr id="86" name="Shape 84"/>
-          <p:cNvSpPr/>
-          <p:nvPr/>
-        </p:nvSpPr>
-        <p:spPr>
-          <a:xfrm>
-            <a:off x="5924550" y="2487930"/>
+            <a:endParaRPr lang="en-US" sz="825" dirty="0"/>
+          </a:p>
+        </p:txBody>
+      </p:sp>
+      <p:sp>
+        <p:nvSpPr>
+          <p:cNvPr id="95" name="Shape 93"/>
+          <p:cNvSpPr/>
+          <p:nvPr/>
+        </p:nvSpPr>
+        <p:spPr>
+          <a:xfrm>
+            <a:off x="5924550" y="2426970"/>
             <a:ext cx="5314950" cy="0"/>
           </a:xfrm>
           <a:prstGeom prst="line">
@@ -7209,13 +7733,13 @@
       </p:sp>
       <p:sp>
         <p:nvSpPr>
-          <p:cNvPr id="87" name="Shape 85"/>
-          <p:cNvSpPr/>
-          <p:nvPr/>
-        </p:nvSpPr>
-        <p:spPr>
-          <a:xfrm>
-            <a:off x="5924550" y="2891790"/>
+          <p:cNvPr id="96" name="Shape 94"/>
+          <p:cNvSpPr/>
+          <p:nvPr/>
+        </p:nvSpPr>
+        <p:spPr>
+          <a:xfrm>
+            <a:off x="5924550" y="2708910"/>
             <a:ext cx="5314950" cy="0"/>
           </a:xfrm>
           <a:prstGeom prst="line">
@@ -7232,13 +7756,13 @@
       </p:sp>
       <p:sp>
         <p:nvSpPr>
-          <p:cNvPr id="88" name="Shape 86"/>
-          <p:cNvSpPr/>
-          <p:nvPr/>
-        </p:nvSpPr>
-        <p:spPr>
-          <a:xfrm>
-            <a:off x="5924550" y="3295650"/>
+          <p:cNvPr id="97" name="Shape 95"/>
+          <p:cNvSpPr/>
+          <p:nvPr/>
+        </p:nvSpPr>
+        <p:spPr>
+          <a:xfrm>
+            <a:off x="5924550" y="2990850"/>
             <a:ext cx="5314950" cy="0"/>
           </a:xfrm>
           <a:prstGeom prst="line">
@@ -7255,13 +7779,13 @@
       </p:sp>
       <p:sp>
         <p:nvSpPr>
-          <p:cNvPr id="89" name="Shape 87"/>
-          <p:cNvSpPr/>
-          <p:nvPr/>
-        </p:nvSpPr>
-        <p:spPr>
-          <a:xfrm>
-            <a:off x="5924550" y="4103370"/>
+          <p:cNvPr id="98" name="Shape 96"/>
+          <p:cNvSpPr/>
+          <p:nvPr/>
+        </p:nvSpPr>
+        <p:spPr>
+          <a:xfrm>
+            <a:off x="5924550" y="3554730"/>
             <a:ext cx="5314950" cy="0"/>
           </a:xfrm>
           <a:prstGeom prst="line">
@@ -7278,13 +7802,13 @@
       </p:sp>
       <p:sp>
         <p:nvSpPr>
-          <p:cNvPr id="90" name="Shape 88"/>
-          <p:cNvSpPr/>
-          <p:nvPr/>
-        </p:nvSpPr>
-        <p:spPr>
-          <a:xfrm>
-            <a:off x="5924550" y="3699510"/>
+          <p:cNvPr id="99" name="Shape 97"/>
+          <p:cNvSpPr/>
+          <p:nvPr/>
+        </p:nvSpPr>
+        <p:spPr>
+          <a:xfrm>
+            <a:off x="5924550" y="3272790"/>
             <a:ext cx="5314950" cy="0"/>
           </a:xfrm>
           <a:prstGeom prst="line">
@@ -7301,13 +7825,13 @@
       </p:sp>
       <p:sp>
         <p:nvSpPr>
-          <p:cNvPr id="91" name="Text 89"/>
-          <p:cNvSpPr txBox="1"/>
-          <p:nvPr/>
-        </p:nvSpPr>
-        <p:spPr>
-          <a:xfrm>
-            <a:off x="5486400" y="2421255"/>
+          <p:cNvPr id="100" name="Text 98"/>
+          <p:cNvSpPr txBox="1"/>
+          <p:nvPr/>
+        </p:nvSpPr>
+        <p:spPr>
+          <a:xfrm>
+            <a:off x="5486400" y="2360295"/>
             <a:ext cx="342900" cy="114300"/>
           </a:xfrm>
           <a:prstGeom prst="rect">
@@ -7343,13 +7867,13 @@
       </p:sp>
       <p:sp>
         <p:nvSpPr>
-          <p:cNvPr id="92" name="Text 90"/>
-          <p:cNvSpPr txBox="1"/>
-          <p:nvPr/>
-        </p:nvSpPr>
-        <p:spPr>
-          <a:xfrm>
-            <a:off x="5486400" y="2825115"/>
+          <p:cNvPr id="101" name="Text 99"/>
+          <p:cNvSpPr txBox="1"/>
+          <p:nvPr/>
+        </p:nvSpPr>
+        <p:spPr>
+          <a:xfrm>
+            <a:off x="5486400" y="2642235"/>
             <a:ext cx="342900" cy="114300"/>
           </a:xfrm>
           <a:prstGeom prst="rect">
@@ -7385,13 +7909,13 @@
       </p:sp>
       <p:sp>
         <p:nvSpPr>
-          <p:cNvPr id="93" name="Text 91"/>
-          <p:cNvSpPr txBox="1"/>
-          <p:nvPr/>
-        </p:nvSpPr>
-        <p:spPr>
-          <a:xfrm>
-            <a:off x="5486400" y="3228975"/>
+          <p:cNvPr id="102" name="Text 100"/>
+          <p:cNvSpPr txBox="1"/>
+          <p:nvPr/>
+        </p:nvSpPr>
+        <p:spPr>
+          <a:xfrm>
+            <a:off x="5486400" y="2924175"/>
             <a:ext cx="342900" cy="114300"/>
           </a:xfrm>
           <a:prstGeom prst="rect">
@@ -7427,13 +7951,13 @@
       </p:sp>
       <p:sp>
         <p:nvSpPr>
-          <p:cNvPr id="94" name="Text 92"/>
-          <p:cNvSpPr txBox="1"/>
-          <p:nvPr/>
-        </p:nvSpPr>
-        <p:spPr>
-          <a:xfrm>
-            <a:off x="5486400" y="3632835"/>
+          <p:cNvPr id="103" name="Text 101"/>
+          <p:cNvSpPr txBox="1"/>
+          <p:nvPr/>
+        </p:nvSpPr>
+        <p:spPr>
+          <a:xfrm>
+            <a:off x="5486400" y="3206115"/>
             <a:ext cx="342900" cy="114300"/>
           </a:xfrm>
           <a:prstGeom prst="rect">
@@ -7469,13 +7993,13 @@
       </p:sp>
       <p:sp>
         <p:nvSpPr>
-          <p:cNvPr id="95" name="Text 93"/>
-          <p:cNvSpPr txBox="1"/>
-          <p:nvPr/>
-        </p:nvSpPr>
-        <p:spPr>
-          <a:xfrm>
-            <a:off x="5486400" y="4036695"/>
+          <p:cNvPr id="104" name="Text 102"/>
+          <p:cNvSpPr txBox="1"/>
+          <p:nvPr/>
+        </p:nvSpPr>
+        <p:spPr>
+          <a:xfrm>
+            <a:off x="5486400" y="3488055"/>
             <a:ext cx="342900" cy="114300"/>
           </a:xfrm>
           <a:prstGeom prst="rect">
@@ -7511,13 +8035,13 @@
       </p:sp>
       <p:sp>
         <p:nvSpPr>
-          <p:cNvPr id="96" name="Shape 94"/>
-          <p:cNvSpPr/>
-          <p:nvPr/>
-        </p:nvSpPr>
-        <p:spPr>
-          <a:xfrm>
-            <a:off x="6313170" y="4305300"/>
+          <p:cNvPr id="105" name="Shape 103"/>
+          <p:cNvSpPr/>
+          <p:nvPr/>
+        </p:nvSpPr>
+        <p:spPr>
+          <a:xfrm>
+            <a:off x="6313170" y="3695700"/>
             <a:ext cx="0" cy="47625"/>
           </a:xfrm>
           <a:prstGeom prst="line">
@@ -7534,13 +8058,13 @@
       </p:sp>
       <p:sp>
         <p:nvSpPr>
-          <p:cNvPr id="97" name="Text 95"/>
-          <p:cNvSpPr txBox="1"/>
-          <p:nvPr/>
-        </p:nvSpPr>
-        <p:spPr>
-          <a:xfrm>
-            <a:off x="6103620" y="4381500"/>
+          <p:cNvPr id="106" name="Text 104"/>
+          <p:cNvSpPr txBox="1"/>
+          <p:nvPr/>
+        </p:nvSpPr>
+        <p:spPr>
+          <a:xfrm>
+            <a:off x="6103620" y="3771900"/>
             <a:ext cx="419100" cy="114300"/>
           </a:xfrm>
           <a:prstGeom prst="rect">
@@ -7576,13 +8100,13 @@
       </p:sp>
       <p:sp>
         <p:nvSpPr>
-          <p:cNvPr id="98" name="Shape 96"/>
-          <p:cNvSpPr/>
-          <p:nvPr/>
-        </p:nvSpPr>
-        <p:spPr>
-          <a:xfrm>
-            <a:off x="7608570" y="4305300"/>
+          <p:cNvPr id="107" name="Shape 105"/>
+          <p:cNvSpPr/>
+          <p:nvPr/>
+        </p:nvSpPr>
+        <p:spPr>
+          <a:xfrm>
+            <a:off x="7608570" y="3695700"/>
             <a:ext cx="0" cy="47625"/>
           </a:xfrm>
           <a:prstGeom prst="line">
@@ -7599,13 +8123,13 @@
       </p:sp>
       <p:sp>
         <p:nvSpPr>
-          <p:cNvPr id="99" name="Text 97"/>
-          <p:cNvSpPr txBox="1"/>
-          <p:nvPr/>
-        </p:nvSpPr>
-        <p:spPr>
-          <a:xfrm>
-            <a:off x="7399020" y="4381500"/>
+          <p:cNvPr id="108" name="Text 106"/>
+          <p:cNvSpPr txBox="1"/>
+          <p:nvPr/>
+        </p:nvSpPr>
+        <p:spPr>
+          <a:xfrm>
+            <a:off x="7399020" y="3771900"/>
             <a:ext cx="419100" cy="114300"/>
           </a:xfrm>
           <a:prstGeom prst="rect">
@@ -7641,13 +8165,13 @@
       </p:sp>
       <p:sp>
         <p:nvSpPr>
-          <p:cNvPr id="100" name="Shape 98"/>
-          <p:cNvSpPr/>
-          <p:nvPr/>
-        </p:nvSpPr>
-        <p:spPr>
-          <a:xfrm>
-            <a:off x="8903970" y="4305300"/>
+          <p:cNvPr id="109" name="Shape 107"/>
+          <p:cNvSpPr/>
+          <p:nvPr/>
+        </p:nvSpPr>
+        <p:spPr>
+          <a:xfrm>
+            <a:off x="8903970" y="3695700"/>
             <a:ext cx="0" cy="47625"/>
           </a:xfrm>
           <a:prstGeom prst="line">
@@ -7664,13 +8188,13 @@
       </p:sp>
       <p:sp>
         <p:nvSpPr>
-          <p:cNvPr id="101" name="Text 99"/>
-          <p:cNvSpPr txBox="1"/>
-          <p:nvPr/>
-        </p:nvSpPr>
-        <p:spPr>
-          <a:xfrm>
-            <a:off x="8694420" y="4381500"/>
+          <p:cNvPr id="110" name="Text 108"/>
+          <p:cNvSpPr txBox="1"/>
+          <p:nvPr/>
+        </p:nvSpPr>
+        <p:spPr>
+          <a:xfrm>
+            <a:off x="8694420" y="3771900"/>
             <a:ext cx="419100" cy="114300"/>
           </a:xfrm>
           <a:prstGeom prst="rect">
@@ -7706,13 +8230,13 @@
       </p:sp>
       <p:sp>
         <p:nvSpPr>
-          <p:cNvPr id="102" name="Shape 100"/>
-          <p:cNvSpPr/>
-          <p:nvPr/>
-        </p:nvSpPr>
-        <p:spPr>
-          <a:xfrm>
-            <a:off x="10199370" y="4305300"/>
+          <p:cNvPr id="111" name="Shape 109"/>
+          <p:cNvSpPr/>
+          <p:nvPr/>
+        </p:nvSpPr>
+        <p:spPr>
+          <a:xfrm>
+            <a:off x="10199370" y="3695700"/>
             <a:ext cx="0" cy="47625"/>
           </a:xfrm>
           <a:prstGeom prst="line">
@@ -7729,13 +8253,13 @@
       </p:sp>
       <p:sp>
         <p:nvSpPr>
-          <p:cNvPr id="103" name="Text 101"/>
-          <p:cNvSpPr txBox="1"/>
-          <p:nvPr/>
-        </p:nvSpPr>
-        <p:spPr>
-          <a:xfrm>
-            <a:off x="9989820" y="4381500"/>
+          <p:cNvPr id="112" name="Text 110"/>
+          <p:cNvSpPr txBox="1"/>
+          <p:nvPr/>
+        </p:nvSpPr>
+        <p:spPr>
+          <a:xfrm>
+            <a:off x="9989820" y="3771900"/>
             <a:ext cx="419100" cy="114300"/>
           </a:xfrm>
           <a:prstGeom prst="rect">
@@ -7771,13 +8295,13 @@
       </p:sp>
       <p:sp>
         <p:nvSpPr>
-          <p:cNvPr id="104" name="Shape 102"/>
-          <p:cNvSpPr/>
-          <p:nvPr/>
-        </p:nvSpPr>
-        <p:spPr>
-          <a:xfrm>
-            <a:off x="5924550" y="3451641"/>
+          <p:cNvPr id="113" name="Shape 111"/>
+          <p:cNvSpPr/>
+          <p:nvPr/>
+        </p:nvSpPr>
+        <p:spPr>
+          <a:xfrm>
+            <a:off x="5924550" y="3099749"/>
             <a:ext cx="5314950" cy="0"/>
           </a:xfrm>
           <a:prstGeom prst="line">
@@ -7794,13 +8318,13 @@
       </p:sp>
       <p:sp>
         <p:nvSpPr>
-          <p:cNvPr id="105" name="Text 103"/>
-          <p:cNvSpPr txBox="1"/>
-          <p:nvPr/>
-        </p:nvSpPr>
-        <p:spPr>
-          <a:xfrm>
-            <a:off x="8903970" y="3270666"/>
+          <p:cNvPr id="114" name="Text 112"/>
+          <p:cNvSpPr txBox="1"/>
+          <p:nvPr/>
+        </p:nvSpPr>
+        <p:spPr>
+          <a:xfrm>
+            <a:off x="8903970" y="2918774"/>
             <a:ext cx="1714500" cy="131445"/>
           </a:xfrm>
           <a:prstGeom prst="rect">
@@ -7836,13 +8360,13 @@
       </p:sp>
       <p:sp>
         <p:nvSpPr>
-          <p:cNvPr id="106" name="Shape 104"/>
-          <p:cNvSpPr/>
-          <p:nvPr/>
-        </p:nvSpPr>
-        <p:spPr>
-          <a:xfrm>
-            <a:off x="6035612" y="2361086"/>
+          <p:cNvPr id="115" name="Shape 113"/>
+          <p:cNvSpPr/>
+          <p:nvPr/>
+        </p:nvSpPr>
+        <p:spPr>
+          <a:xfrm>
+            <a:off x="6035612" y="2328929"/>
             <a:ext cx="62865" cy="62865"/>
           </a:xfrm>
           <a:prstGeom prst="ellipse">
@@ -7856,13 +8380,13 @@
       </p:sp>
       <p:sp>
         <p:nvSpPr>
-          <p:cNvPr id="107" name="Shape 105"/>
-          <p:cNvSpPr/>
-          <p:nvPr/>
-        </p:nvSpPr>
-        <p:spPr>
-          <a:xfrm>
-            <a:off x="6093905" y="2408842"/>
+          <p:cNvPr id="116" name="Shape 114"/>
+          <p:cNvSpPr/>
+          <p:nvPr/>
+        </p:nvSpPr>
+        <p:spPr>
+          <a:xfrm>
+            <a:off x="6093905" y="2362269"/>
             <a:ext cx="62865" cy="62865"/>
           </a:xfrm>
           <a:prstGeom prst="ellipse">
@@ -7876,13 +8400,13 @@
       </p:sp>
       <p:sp>
         <p:nvSpPr>
-          <p:cNvPr id="108" name="Shape 106"/>
-          <p:cNvSpPr/>
-          <p:nvPr/>
-        </p:nvSpPr>
-        <p:spPr>
-          <a:xfrm>
-            <a:off x="6527864" y="2781302"/>
+          <p:cNvPr id="117" name="Shape 115"/>
+          <p:cNvSpPr/>
+          <p:nvPr/>
+        </p:nvSpPr>
+        <p:spPr>
+          <a:xfrm>
+            <a:off x="6527864" y="2622288"/>
             <a:ext cx="62865" cy="62865"/>
           </a:xfrm>
           <a:prstGeom prst="ellipse">
@@ -7896,13 +8420,13 @@
       </p:sp>
       <p:sp>
         <p:nvSpPr>
-          <p:cNvPr id="109" name="Shape 107"/>
-          <p:cNvSpPr/>
-          <p:nvPr/>
-        </p:nvSpPr>
-        <p:spPr>
-          <a:xfrm>
-            <a:off x="6786944" y="3091264"/>
+          <p:cNvPr id="118" name="Shape 116"/>
+          <p:cNvSpPr/>
+          <p:nvPr/>
+        </p:nvSpPr>
+        <p:spPr>
+          <a:xfrm>
+            <a:off x="6786944" y="2838677"/>
             <a:ext cx="62865" cy="62865"/>
           </a:xfrm>
           <a:prstGeom prst="ellipse">
@@ -7916,13 +8440,13 @@
       </p:sp>
       <p:sp>
         <p:nvSpPr>
-          <p:cNvPr id="110" name="Shape 108"/>
-          <p:cNvSpPr/>
-          <p:nvPr/>
-        </p:nvSpPr>
-        <p:spPr>
-          <a:xfrm>
-            <a:off x="7058978" y="3119434"/>
+          <p:cNvPr id="119" name="Shape 117"/>
+          <p:cNvSpPr/>
+          <p:nvPr/>
+        </p:nvSpPr>
+        <p:spPr>
+          <a:xfrm>
+            <a:off x="7058978" y="2858342"/>
             <a:ext cx="62865" cy="62865"/>
           </a:xfrm>
           <a:prstGeom prst="ellipse">
@@ -7936,13 +8460,13 @@
       </p:sp>
       <p:sp>
         <p:nvSpPr>
-          <p:cNvPr id="111" name="Shape 109"/>
-          <p:cNvSpPr/>
-          <p:nvPr/>
-        </p:nvSpPr>
-        <p:spPr>
-          <a:xfrm>
-            <a:off x="7188518" y="3165575"/>
+          <p:cNvPr id="120" name="Shape 118"/>
+          <p:cNvSpPr/>
+          <p:nvPr/>
+        </p:nvSpPr>
+        <p:spPr>
+          <a:xfrm>
+            <a:off x="7188518" y="2890554"/>
             <a:ext cx="62865" cy="62865"/>
           </a:xfrm>
           <a:prstGeom prst="ellipse">
@@ -7956,13 +8480,13 @@
       </p:sp>
       <p:sp>
         <p:nvSpPr>
-          <p:cNvPr id="112" name="Shape 110"/>
-          <p:cNvSpPr/>
-          <p:nvPr/>
-        </p:nvSpPr>
-        <p:spPr>
-          <a:xfrm>
-            <a:off x="7318058" y="3208384"/>
+          <p:cNvPr id="121" name="Shape 119"/>
+          <p:cNvSpPr/>
+          <p:nvPr/>
+        </p:nvSpPr>
+        <p:spPr>
+          <a:xfrm>
+            <a:off x="7318058" y="2920439"/>
             <a:ext cx="62865" cy="62865"/>
           </a:xfrm>
           <a:prstGeom prst="ellipse">
@@ -7976,13 +8500,13 @@
       </p:sp>
       <p:sp>
         <p:nvSpPr>
-          <p:cNvPr id="113" name="Shape 111"/>
-          <p:cNvSpPr/>
-          <p:nvPr/>
-        </p:nvSpPr>
-        <p:spPr>
-          <a:xfrm>
-            <a:off x="7434644" y="3038157"/>
+          <p:cNvPr id="122" name="Shape 120"/>
+          <p:cNvSpPr/>
+          <p:nvPr/>
+        </p:nvSpPr>
+        <p:spPr>
+          <a:xfrm>
+            <a:off x="7434644" y="2801602"/>
             <a:ext cx="62865" cy="62865"/>
           </a:xfrm>
           <a:prstGeom prst="ellipse">
@@ -7996,13 +8520,13 @@
       </p:sp>
       <p:sp>
         <p:nvSpPr>
-          <p:cNvPr id="114" name="Shape 112"/>
-          <p:cNvSpPr/>
-          <p:nvPr/>
-        </p:nvSpPr>
-        <p:spPr>
-          <a:xfrm>
-            <a:off x="7512368" y="3298848"/>
+          <p:cNvPr id="123" name="Shape 121"/>
+          <p:cNvSpPr/>
+          <p:nvPr/>
+        </p:nvSpPr>
+        <p:spPr>
+          <a:xfrm>
+            <a:off x="7512368" y="2983594"/>
             <a:ext cx="62865" cy="62865"/>
           </a:xfrm>
           <a:prstGeom prst="ellipse">
@@ -8016,13 +8540,13 @@
       </p:sp>
       <p:sp>
         <p:nvSpPr>
-          <p:cNvPr id="115" name="Shape 113"/>
-          <p:cNvSpPr/>
-          <p:nvPr/>
-        </p:nvSpPr>
-        <p:spPr>
-          <a:xfrm>
-            <a:off x="7732586" y="3148714"/>
+          <p:cNvPr id="124" name="Shape 122"/>
+          <p:cNvSpPr/>
+          <p:nvPr/>
+        </p:nvSpPr>
+        <p:spPr>
+          <a:xfrm>
+            <a:off x="7732586" y="2878783"/>
             <a:ext cx="62865" cy="62865"/>
           </a:xfrm>
           <a:prstGeom prst="ellipse">
@@ -8036,13 +8560,13 @@
       </p:sp>
       <p:sp>
         <p:nvSpPr>
-          <p:cNvPr id="116" name="Shape 114"/>
-          <p:cNvSpPr/>
-          <p:nvPr/>
-        </p:nvSpPr>
-        <p:spPr>
-          <a:xfrm>
-            <a:off x="7926896" y="3180013"/>
+          <p:cNvPr id="125" name="Shape 123"/>
+          <p:cNvSpPr/>
+          <p:nvPr/>
+        </p:nvSpPr>
+        <p:spPr>
+          <a:xfrm>
+            <a:off x="7926896" y="2900633"/>
             <a:ext cx="62865" cy="62865"/>
           </a:xfrm>
           <a:prstGeom prst="ellipse">
@@ -8056,13 +8580,13 @@
       </p:sp>
       <p:sp>
         <p:nvSpPr>
-          <p:cNvPr id="117" name="Shape 115"/>
-          <p:cNvSpPr/>
-          <p:nvPr/>
-        </p:nvSpPr>
-        <p:spPr>
-          <a:xfrm>
-            <a:off x="7965758" y="2968996"/>
+          <p:cNvPr id="126" name="Shape 124"/>
+          <p:cNvSpPr/>
+          <p:nvPr/>
+        </p:nvSpPr>
+        <p:spPr>
+          <a:xfrm>
+            <a:off x="7965758" y="2753319"/>
             <a:ext cx="62865" cy="62865"/>
           </a:xfrm>
           <a:prstGeom prst="ellipse">
@@ -8076,13 +8600,13 @@
       </p:sp>
       <p:sp>
         <p:nvSpPr>
-          <p:cNvPr id="118" name="Shape 116"/>
-          <p:cNvSpPr/>
-          <p:nvPr/>
-        </p:nvSpPr>
-        <p:spPr>
-          <a:xfrm>
-            <a:off x="8004620" y="3013925"/>
+          <p:cNvPr id="127" name="Shape 125"/>
+          <p:cNvSpPr/>
+          <p:nvPr/>
+        </p:nvSpPr>
+        <p:spPr>
+          <a:xfrm>
+            <a:off x="8004620" y="2784685"/>
             <a:ext cx="62865" cy="62865"/>
           </a:xfrm>
           <a:prstGeom prst="ellipse">
@@ -8096,13 +8620,13 @@
       </p:sp>
       <p:sp>
         <p:nvSpPr>
-          <p:cNvPr id="119" name="Shape 117"/>
-          <p:cNvSpPr/>
-          <p:nvPr/>
-        </p:nvSpPr>
-        <p:spPr>
-          <a:xfrm>
-            <a:off x="8147114" y="2925884"/>
+          <p:cNvPr id="128" name="Shape 126"/>
+          <p:cNvSpPr/>
+          <p:nvPr/>
+        </p:nvSpPr>
+        <p:spPr>
+          <a:xfrm>
+            <a:off x="8147114" y="2723222"/>
             <a:ext cx="62865" cy="62865"/>
           </a:xfrm>
           <a:prstGeom prst="ellipse">
@@ -8116,13 +8640,13 @@
       </p:sp>
       <p:sp>
         <p:nvSpPr>
-          <p:cNvPr id="120" name="Shape 118"/>
-          <p:cNvSpPr/>
-          <p:nvPr/>
-        </p:nvSpPr>
-        <p:spPr>
-          <a:xfrm>
-            <a:off x="8160068" y="3061177"/>
+          <p:cNvPr id="129" name="Shape 127"/>
+          <p:cNvSpPr/>
+          <p:nvPr/>
+        </p:nvSpPr>
+        <p:spPr>
+          <a:xfrm>
+            <a:off x="8160068" y="2817672"/>
             <a:ext cx="62865" cy="62865"/>
           </a:xfrm>
           <a:prstGeom prst="ellipse">
@@ -8136,13 +8660,13 @@
       </p:sp>
       <p:sp>
         <p:nvSpPr>
-          <p:cNvPr id="121" name="Shape 119"/>
-          <p:cNvSpPr/>
-          <p:nvPr/>
-        </p:nvSpPr>
-        <p:spPr>
-          <a:xfrm>
-            <a:off x="8237792" y="3103885"/>
+          <p:cNvPr id="130" name="Shape 128"/>
+          <p:cNvSpPr/>
+          <p:nvPr/>
+        </p:nvSpPr>
+        <p:spPr>
+          <a:xfrm>
+            <a:off x="8237792" y="2847487"/>
             <a:ext cx="62865" cy="62865"/>
           </a:xfrm>
           <a:prstGeom prst="ellipse">
@@ -8156,13 +8680,13 @@
       </p:sp>
       <p:sp>
         <p:nvSpPr>
-          <p:cNvPr id="122" name="Shape 120"/>
-          <p:cNvSpPr/>
-          <p:nvPr/>
-        </p:nvSpPr>
-        <p:spPr>
-          <a:xfrm>
-            <a:off x="8432102" y="3126299"/>
+          <p:cNvPr id="131" name="Shape 129"/>
+          <p:cNvSpPr/>
+          <p:nvPr/>
+        </p:nvSpPr>
+        <p:spPr>
+          <a:xfrm>
+            <a:off x="8432102" y="2863135"/>
             <a:ext cx="62865" cy="62865"/>
           </a:xfrm>
           <a:prstGeom prst="ellipse">
@@ -8176,13 +8700,13 @@
       </p:sp>
       <p:sp>
         <p:nvSpPr>
-          <p:cNvPr id="123" name="Shape 121"/>
-          <p:cNvSpPr/>
-          <p:nvPr/>
-        </p:nvSpPr>
-        <p:spPr>
-          <a:xfrm>
-            <a:off x="8445056" y="3092274"/>
+          <p:cNvPr id="132" name="Shape 130"/>
+          <p:cNvSpPr/>
+          <p:nvPr/>
+        </p:nvSpPr>
+        <p:spPr>
+          <a:xfrm>
+            <a:off x="8445056" y="2839382"/>
             <a:ext cx="62865" cy="62865"/>
           </a:xfrm>
           <a:prstGeom prst="ellipse">
@@ -8196,13 +8720,13 @@
       </p:sp>
       <p:sp>
         <p:nvSpPr>
-          <p:cNvPr id="124" name="Shape 122"/>
-          <p:cNvSpPr/>
-          <p:nvPr/>
-        </p:nvSpPr>
-        <p:spPr>
-          <a:xfrm>
-            <a:off x="9040940" y="3403650"/>
+          <p:cNvPr id="133" name="Shape 131"/>
+          <p:cNvSpPr/>
+          <p:nvPr/>
+        </p:nvSpPr>
+        <p:spPr>
+          <a:xfrm>
+            <a:off x="9040940" y="3056757"/>
             <a:ext cx="62865" cy="62865"/>
           </a:xfrm>
           <a:prstGeom prst="ellipse">
@@ -8216,13 +8740,13 @@
       </p:sp>
       <p:sp>
         <p:nvSpPr>
-          <p:cNvPr id="125" name="Shape 123"/>
-          <p:cNvSpPr/>
-          <p:nvPr/>
-        </p:nvSpPr>
-        <p:spPr>
-          <a:xfrm>
-            <a:off x="9533192" y="3881013"/>
+          <p:cNvPr id="134" name="Shape 132"/>
+          <p:cNvSpPr/>
+          <p:nvPr/>
+        </p:nvSpPr>
+        <p:spPr>
+          <a:xfrm>
+            <a:off x="9533192" y="3390010"/>
             <a:ext cx="62865" cy="62865"/>
           </a:xfrm>
           <a:prstGeom prst="ellipse">
@@ -8236,13 +8760,13 @@
       </p:sp>
       <p:sp>
         <p:nvSpPr>
-          <p:cNvPr id="126" name="Shape 124"/>
-          <p:cNvSpPr/>
-          <p:nvPr/>
-        </p:nvSpPr>
-        <p:spPr>
-          <a:xfrm>
-            <a:off x="9559100" y="3999647"/>
+          <p:cNvPr id="135" name="Shape 133"/>
+          <p:cNvSpPr/>
+          <p:nvPr/>
+        </p:nvSpPr>
+        <p:spPr>
+          <a:xfrm>
+            <a:off x="9559100" y="3472830"/>
             <a:ext cx="62865" cy="62865"/>
           </a:xfrm>
           <a:prstGeom prst="ellipse">
@@ -8256,13 +8780,13 @@
       </p:sp>
       <p:sp>
         <p:nvSpPr>
-          <p:cNvPr id="127" name="Shape 125"/>
-          <p:cNvSpPr/>
-          <p:nvPr/>
-        </p:nvSpPr>
-        <p:spPr>
-          <a:xfrm>
-            <a:off x="9572054" y="3726536"/>
+          <p:cNvPr id="136" name="Shape 134"/>
+          <p:cNvSpPr/>
+          <p:nvPr/>
+        </p:nvSpPr>
+        <p:spPr>
+          <a:xfrm>
+            <a:off x="9572054" y="3282168"/>
             <a:ext cx="62865" cy="62865"/>
           </a:xfrm>
           <a:prstGeom prst="ellipse">
@@ -8276,13 +8800,13 @@
       </p:sp>
       <p:sp>
         <p:nvSpPr>
-          <p:cNvPr id="128" name="Shape 126"/>
-          <p:cNvSpPr/>
-          <p:nvPr/>
-        </p:nvSpPr>
-        <p:spPr>
-          <a:xfrm>
-            <a:off x="9610916" y="3738753"/>
+          <p:cNvPr id="137" name="Shape 135"/>
+          <p:cNvSpPr/>
+          <p:nvPr/>
+        </p:nvSpPr>
+        <p:spPr>
+          <a:xfrm>
+            <a:off x="9610916" y="3290697"/>
             <a:ext cx="62865" cy="62865"/>
           </a:xfrm>
           <a:prstGeom prst="ellipse">
@@ -8296,13 +8820,13 @@
       </p:sp>
       <p:sp>
         <p:nvSpPr>
-          <p:cNvPr id="129" name="Shape 127"/>
-          <p:cNvSpPr/>
-          <p:nvPr/>
-        </p:nvSpPr>
-        <p:spPr>
-          <a:xfrm>
-            <a:off x="9831134" y="3937856"/>
+          <p:cNvPr id="138" name="Shape 136"/>
+          <p:cNvSpPr/>
+          <p:nvPr/>
+        </p:nvSpPr>
+        <p:spPr>
+          <a:xfrm>
+            <a:off x="9831134" y="3429693"/>
             <a:ext cx="62865" cy="62865"/>
           </a:xfrm>
           <a:prstGeom prst="ellipse">
@@ -8316,13 +8840,13 @@
       </p:sp>
       <p:sp>
         <p:nvSpPr>
-          <p:cNvPr id="130" name="Shape 128"/>
-          <p:cNvSpPr/>
-          <p:nvPr/>
-        </p:nvSpPr>
-        <p:spPr>
-          <a:xfrm>
-            <a:off x="9999536" y="4158263"/>
+          <p:cNvPr id="139" name="Shape 137"/>
+          <p:cNvSpPr/>
+          <p:nvPr/>
+        </p:nvSpPr>
+        <p:spPr>
+          <a:xfrm>
+            <a:off x="9999536" y="3583562"/>
             <a:ext cx="62865" cy="62865"/>
           </a:xfrm>
           <a:prstGeom prst="ellipse">
@@ -8336,13 +8860,13 @@
       </p:sp>
       <p:sp>
         <p:nvSpPr>
-          <p:cNvPr id="131" name="Shape 129"/>
-          <p:cNvSpPr/>
-          <p:nvPr/>
-        </p:nvSpPr>
-        <p:spPr>
-          <a:xfrm>
-            <a:off x="10193846" y="3830126"/>
+          <p:cNvPr id="140" name="Shape 138"/>
+          <p:cNvSpPr/>
+          <p:nvPr/>
+        </p:nvSpPr>
+        <p:spPr>
+          <a:xfrm>
+            <a:off x="10193846" y="3354486"/>
             <a:ext cx="62865" cy="62865"/>
           </a:xfrm>
           <a:prstGeom prst="ellipse">
@@ -8356,13 +8880,13 @@
       </p:sp>
       <p:sp>
         <p:nvSpPr>
-          <p:cNvPr id="132" name="Shape 130"/>
-          <p:cNvSpPr/>
-          <p:nvPr/>
-        </p:nvSpPr>
-        <p:spPr>
-          <a:xfrm>
-            <a:off x="10193846" y="3716440"/>
+          <p:cNvPr id="141" name="Shape 139"/>
+          <p:cNvSpPr/>
+          <p:nvPr/>
+        </p:nvSpPr>
+        <p:spPr>
+          <a:xfrm>
+            <a:off x="10193846" y="3275120"/>
             <a:ext cx="62865" cy="62865"/>
           </a:xfrm>
           <a:prstGeom prst="ellipse">
@@ -8376,13 +8900,13 @@
       </p:sp>
       <p:sp>
         <p:nvSpPr>
-          <p:cNvPr id="133" name="Shape 131"/>
-          <p:cNvSpPr/>
-          <p:nvPr/>
-        </p:nvSpPr>
-        <p:spPr>
-          <a:xfrm>
-            <a:off x="10258616" y="4016306"/>
+          <p:cNvPr id="142" name="Shape 140"/>
+          <p:cNvSpPr/>
+          <p:nvPr/>
+        </p:nvSpPr>
+        <p:spPr>
+          <a:xfrm>
+            <a:off x="10258616" y="3484460"/>
             <a:ext cx="62865" cy="62865"/>
           </a:xfrm>
           <a:prstGeom prst="ellipse">
@@ -8396,13 +8920,13 @@
       </p:sp>
       <p:sp>
         <p:nvSpPr>
-          <p:cNvPr id="134" name="Shape 132"/>
-          <p:cNvSpPr/>
-          <p:nvPr/>
-        </p:nvSpPr>
-        <p:spPr>
-          <a:xfrm>
-            <a:off x="10284524" y="4010955"/>
+          <p:cNvPr id="143" name="Shape 141"/>
+          <p:cNvSpPr/>
+          <p:nvPr/>
+        </p:nvSpPr>
+        <p:spPr>
+          <a:xfrm>
+            <a:off x="10284524" y="3480725"/>
             <a:ext cx="62865" cy="62865"/>
           </a:xfrm>
           <a:prstGeom prst="ellipse">
@@ -8416,13 +8940,13 @@
       </p:sp>
       <p:sp>
         <p:nvSpPr>
-          <p:cNvPr id="135" name="Shape 133"/>
-          <p:cNvSpPr/>
-          <p:nvPr/>
-        </p:nvSpPr>
-        <p:spPr>
-          <a:xfrm>
-            <a:off x="10388156" y="3756220"/>
+          <p:cNvPr id="144" name="Shape 142"/>
+          <p:cNvSpPr/>
+          <p:nvPr/>
+        </p:nvSpPr>
+        <p:spPr>
+          <a:xfrm>
+            <a:off x="10388156" y="3302891"/>
             <a:ext cx="62865" cy="62865"/>
           </a:xfrm>
           <a:prstGeom prst="ellipse">
@@ -8436,13 +8960,13 @@
       </p:sp>
       <p:sp>
         <p:nvSpPr>
-          <p:cNvPr id="136" name="Shape 134"/>
-          <p:cNvSpPr/>
-          <p:nvPr/>
-        </p:nvSpPr>
-        <p:spPr>
-          <a:xfrm>
-            <a:off x="10478834" y="3730676"/>
+          <p:cNvPr id="145" name="Shape 143"/>
+          <p:cNvSpPr/>
+          <p:nvPr/>
+        </p:nvSpPr>
+        <p:spPr>
+          <a:xfrm>
+            <a:off x="10478834" y="3285058"/>
             <a:ext cx="62865" cy="62865"/>
           </a:xfrm>
           <a:prstGeom prst="ellipse">
@@ -8456,13 +8980,13 @@
       </p:sp>
       <p:sp>
         <p:nvSpPr>
-          <p:cNvPr id="137" name="Shape 135"/>
-          <p:cNvSpPr/>
-          <p:nvPr/>
-        </p:nvSpPr>
-        <p:spPr>
-          <a:xfrm>
-            <a:off x="10517696" y="3924630"/>
+          <p:cNvPr id="146" name="Shape 144"/>
+          <p:cNvSpPr/>
+          <p:nvPr/>
+        </p:nvSpPr>
+        <p:spPr>
+          <a:xfrm>
+            <a:off x="10517696" y="3420460"/>
             <a:ext cx="62865" cy="62865"/>
           </a:xfrm>
           <a:prstGeom prst="ellipse">
@@ -8476,13 +9000,13 @@
       </p:sp>
       <p:sp>
         <p:nvSpPr>
-          <p:cNvPr id="138" name="Shape 136"/>
-          <p:cNvSpPr/>
-          <p:nvPr/>
-        </p:nvSpPr>
-        <p:spPr>
-          <a:xfrm>
-            <a:off x="10530650" y="3454940"/>
+          <p:cNvPr id="147" name="Shape 145"/>
+          <p:cNvSpPr/>
+          <p:nvPr/>
+        </p:nvSpPr>
+        <p:spPr>
+          <a:xfrm>
+            <a:off x="10530650" y="3092564"/>
             <a:ext cx="62865" cy="62865"/>
           </a:xfrm>
           <a:prstGeom prst="ellipse">
@@ -8496,13 +9020,13 @@
       </p:sp>
       <p:sp>
         <p:nvSpPr>
-          <p:cNvPr id="139" name="Shape 137"/>
-          <p:cNvSpPr/>
-          <p:nvPr/>
-        </p:nvSpPr>
-        <p:spPr>
-          <a:xfrm>
-            <a:off x="10530650" y="3527635"/>
+          <p:cNvPr id="148" name="Shape 146"/>
+          <p:cNvSpPr/>
+          <p:nvPr/>
+        </p:nvSpPr>
+        <p:spPr>
+          <a:xfrm>
+            <a:off x="10530650" y="3143313"/>
             <a:ext cx="62865" cy="62865"/>
           </a:xfrm>
           <a:prstGeom prst="ellipse">
@@ -8516,13 +9040,13 @@
       </p:sp>
       <p:sp>
         <p:nvSpPr>
-          <p:cNvPr id="140" name="Shape 138"/>
-          <p:cNvSpPr/>
-          <p:nvPr/>
-        </p:nvSpPr>
-        <p:spPr>
-          <a:xfrm>
-            <a:off x="10530650" y="3822857"/>
+          <p:cNvPr id="149" name="Shape 147"/>
+          <p:cNvSpPr/>
+          <p:nvPr/>
+        </p:nvSpPr>
+        <p:spPr>
+          <a:xfrm>
+            <a:off x="10530650" y="3349411"/>
             <a:ext cx="62865" cy="62865"/>
           </a:xfrm>
           <a:prstGeom prst="ellipse">
@@ -8536,13 +9060,13 @@
       </p:sp>
       <p:sp>
         <p:nvSpPr>
-          <p:cNvPr id="141" name="Shape 139"/>
-          <p:cNvSpPr/>
-          <p:nvPr/>
-        </p:nvSpPr>
-        <p:spPr>
-          <a:xfrm>
-            <a:off x="10634282" y="3599623"/>
+          <p:cNvPr id="150" name="Shape 148"/>
+          <p:cNvSpPr/>
+          <p:nvPr/>
+        </p:nvSpPr>
+        <p:spPr>
+          <a:xfrm>
+            <a:off x="10634282" y="3193569"/>
             <a:ext cx="62865" cy="62865"/>
           </a:xfrm>
           <a:prstGeom prst="ellipse">
@@ -8556,13 +9080,13 @@
       </p:sp>
       <p:sp>
         <p:nvSpPr>
-          <p:cNvPr id="142" name="Shape 140"/>
-          <p:cNvSpPr/>
-          <p:nvPr/>
-        </p:nvSpPr>
-        <p:spPr>
-          <a:xfrm>
-            <a:off x="10660190" y="3903023"/>
+          <p:cNvPr id="151" name="Shape 149"/>
+          <p:cNvSpPr/>
+          <p:nvPr/>
+        </p:nvSpPr>
+        <p:spPr>
+          <a:xfrm>
+            <a:off x="10660190" y="3405376"/>
             <a:ext cx="62865" cy="62865"/>
           </a:xfrm>
           <a:prstGeom prst="ellipse">
@@ -8576,13 +9100,13 @@
       </p:sp>
       <p:sp>
         <p:nvSpPr>
-          <p:cNvPr id="143" name="Shape 141"/>
-          <p:cNvSpPr/>
-          <p:nvPr/>
-        </p:nvSpPr>
-        <p:spPr>
-          <a:xfrm>
-            <a:off x="10763822" y="3593464"/>
+          <p:cNvPr id="152" name="Shape 150"/>
+          <p:cNvSpPr/>
+          <p:nvPr/>
+        </p:nvSpPr>
+        <p:spPr>
+          <a:xfrm>
+            <a:off x="10763822" y="3189269"/>
             <a:ext cx="62865" cy="62865"/>
           </a:xfrm>
           <a:prstGeom prst="ellipse">
@@ -8596,13 +9120,13 @@
       </p:sp>
       <p:sp>
         <p:nvSpPr>
-          <p:cNvPr id="144" name="Shape 142"/>
-          <p:cNvSpPr/>
-          <p:nvPr/>
-        </p:nvSpPr>
-        <p:spPr>
-          <a:xfrm>
-            <a:off x="10958132" y="3456051"/>
+          <p:cNvPr id="153" name="Shape 151"/>
+          <p:cNvSpPr/>
+          <p:nvPr/>
+        </p:nvSpPr>
+        <p:spPr>
+          <a:xfrm>
+            <a:off x="10958132" y="3093339"/>
             <a:ext cx="62865" cy="62865"/>
           </a:xfrm>
           <a:prstGeom prst="ellipse">
@@ -8616,13 +9140,13 @@
       </p:sp>
       <p:sp>
         <p:nvSpPr>
-          <p:cNvPr id="145" name="Shape 143"/>
-          <p:cNvSpPr/>
-          <p:nvPr/>
-        </p:nvSpPr>
-        <p:spPr>
-          <a:xfrm>
-            <a:off x="11191304" y="3524303"/>
+          <p:cNvPr id="154" name="Shape 152"/>
+          <p:cNvSpPr/>
+          <p:nvPr/>
+        </p:nvSpPr>
+        <p:spPr>
+          <a:xfrm>
+            <a:off x="11191304" y="3140987"/>
             <a:ext cx="62865" cy="62865"/>
           </a:xfrm>
           <a:prstGeom prst="ellipse">
@@ -8636,20 +9160,65 @@
       </p:sp>
       <p:sp>
         <p:nvSpPr>
-          <p:cNvPr id="146" name="Shape 144"/>
-          <p:cNvSpPr/>
-          <p:nvPr/>
-        </p:nvSpPr>
-        <p:spPr>
-          <a:xfrm>
-            <a:off x="5505450" y="4476750"/>
-            <a:ext cx="5810250" cy="0"/>
+          <p:cNvPr id="155" name="Shape 153"/>
+          <p:cNvSpPr/>
+          <p:nvPr/>
+        </p:nvSpPr>
+        <p:spPr>
+          <a:xfrm>
+            <a:off x="5314950" y="4114800"/>
+            <a:ext cx="6191250" cy="1828800"/>
+          </a:xfrm>
+          <a:prstGeom prst="rect">
+            <a:avLst/>
+          </a:prstGeom>
+          <a:solidFill>
+            <a:srgbClr val="0A1320"/>
+          </a:solidFill>
+          <a:ln w="15240">
+            <a:solidFill>
+              <a:srgbClr val="22354A"/>
+            </a:solidFill>
+            <a:prstDash val="solid"/>
+          </a:ln>
+        </p:spPr>
+      </p:sp>
+      <p:sp>
+        <p:nvSpPr>
+          <p:cNvPr id="156" name="Shape 154"/>
+          <p:cNvSpPr/>
+          <p:nvPr/>
+        </p:nvSpPr>
+        <p:spPr>
+          <a:xfrm>
+            <a:off x="5324475" y="4124325"/>
+            <a:ext cx="6172200" cy="276225"/>
+          </a:xfrm>
+          <a:prstGeom prst="rect">
+            <a:avLst/>
+          </a:prstGeom>
+          <a:solidFill>
+            <a:srgbClr val="17283C"/>
+          </a:solidFill>
+          <a:ln/>
+        </p:spPr>
+      </p:sp>
+      <p:sp>
+        <p:nvSpPr>
+          <p:cNvPr id="157" name="Shape 155"/>
+          <p:cNvSpPr/>
+          <p:nvPr/>
+        </p:nvSpPr>
+        <p:spPr>
+          <a:xfrm>
+            <a:off x="5314950" y="4400550"/>
+            <a:ext cx="6191250" cy="0"/>
           </a:xfrm>
           <a:prstGeom prst="line">
             <a:avLst/>
           </a:prstGeom>
           <a:noFill/>
-          <a:ln w="12700">
+          <a:ln w="15240">
             <a:solidFill>
               <a:srgbClr val="22354A"/>
             </a:solidFill>
@@ -8659,34 +9228,34 @@
       </p:sp>
       <p:sp>
         <p:nvSpPr>
-          <p:cNvPr id="147" name="Shape 145"/>
-          <p:cNvSpPr/>
-          <p:nvPr/>
-        </p:nvSpPr>
-        <p:spPr>
-          <a:xfrm>
-            <a:off x="5505450" y="4676775"/>
-            <a:ext cx="38100" cy="247650"/>
-          </a:xfrm>
-          <a:prstGeom prst="rect">
-            <a:avLst/>
-          </a:prstGeom>
-          <a:solidFill>
-            <a:srgbClr val="A8BCD1"/>
-          </a:solidFill>
-          <a:ln/>
-        </p:spPr>
-      </p:sp>
-      <p:sp>
-        <p:nvSpPr>
-          <p:cNvPr id="148" name="Text 146"/>
-          <p:cNvSpPr txBox="1"/>
-          <p:nvPr/>
-        </p:nvSpPr>
-        <p:spPr>
-          <a:xfrm>
-            <a:off x="5638800" y="4648200"/>
-            <a:ext cx="514350" cy="185738"/>
+          <p:cNvPr id="158" name="Shape 156"/>
+          <p:cNvSpPr/>
+          <p:nvPr/>
+        </p:nvSpPr>
+        <p:spPr>
+          <a:xfrm>
+            <a:off x="5324475" y="4124325"/>
+            <a:ext cx="38100" cy="276225"/>
+          </a:xfrm>
+          <a:prstGeom prst="rect">
+            <a:avLst/>
+          </a:prstGeom>
+          <a:solidFill>
+            <a:srgbClr val="EFB13C"/>
+          </a:solidFill>
+          <a:ln/>
+        </p:spPr>
+      </p:sp>
+      <p:sp>
+        <p:nvSpPr>
+          <p:cNvPr id="159" name="Text 157"/>
+          <p:cNvSpPr txBox="1"/>
+          <p:nvPr/>
+        </p:nvSpPr>
+        <p:spPr>
+          <a:xfrm>
+            <a:off x="5486400" y="4191000"/>
+            <a:ext cx="171450" cy="148590"/>
           </a:xfrm>
           <a:prstGeom prst="rect">
             <a:avLst/>
@@ -8700,96 +9269,138 @@
           <a:p>
             <a:pPr algn="l" indent="0" marL="0">
               <a:lnSpc>
-                <a:spcPts val="1463"/>
-              </a:lnSpc>
-              <a:buNone/>
-            </a:pPr>
-            <a:r>
-              <a:rPr lang="en-US" sz="1125" b="1" dirty="0">
-                <a:solidFill>
-                  <a:srgbClr val="A8BCD1"/>
+                <a:spcPts val="1170"/>
+              </a:lnSpc>
+              <a:buNone/>
+            </a:pPr>
+            <a:r>
+              <a:rPr lang="en-US" sz="975" b="1" dirty="0">
+                <a:solidFill>
+                  <a:srgbClr val="EFB13C"/>
+                </a:solidFill>
+                <a:latin typeface="Consolas" pitchFamily="34" charset="0"/>
+                <a:ea typeface="Consolas" pitchFamily="34" charset="-122"/>
+                <a:cs typeface="Consolas" pitchFamily="34" charset="-120"/>
+              </a:rPr>
+              <a:t>3</a:t>
+            </a:r>
+            <a:endParaRPr lang="en-US" sz="975" dirty="0"/>
+          </a:p>
+        </p:txBody>
+      </p:sp>
+      <p:sp>
+        <p:nvSpPr>
+          <p:cNvPr id="160" name="Text 158"/>
+          <p:cNvSpPr txBox="1"/>
+          <p:nvPr/>
+        </p:nvSpPr>
+        <p:spPr>
+          <a:xfrm>
+            <a:off x="5715000" y="4191000"/>
+            <a:ext cx="5019675" cy="154305"/>
+          </a:xfrm>
+          <a:prstGeom prst="rect">
+            <a:avLst/>
+          </a:prstGeom>
+          <a:noFill/>
+          <a:ln/>
+        </p:spPr>
+        <p:txBody>
+          <a:bodyPr wrap="square" lIns="0" tIns="0" rIns="0" bIns="0" rtlCol="0" anchor="t"/>
+          <a:lstStyle/>
+          <a:p>
+            <a:pPr algn="l" indent="0" marL="0">
+              <a:lnSpc>
+                <a:spcPts val="1215"/>
+              </a:lnSpc>
+              <a:buNone/>
+            </a:pPr>
+            <a:r>
+              <a:rPr lang="en-US" sz="1013" b="1" spc="30" kern="0" dirty="0">
+                <a:solidFill>
+                  <a:srgbClr val="EAE7E0"/>
                 </a:solidFill>
                 <a:latin typeface="Malgun Gothic" pitchFamily="34" charset="0"/>
                 <a:ea typeface="Malgun Gothic" pitchFamily="34" charset="-122"/>
                 <a:cs typeface="Malgun Gothic" pitchFamily="34" charset="-120"/>
               </a:rPr>
-              <a:t>겨울</a:t>
-            </a:r>
-            <a:endParaRPr lang="en-US" sz="1125" dirty="0"/>
-          </a:p>
-        </p:txBody>
-      </p:sp>
-      <p:sp>
-        <p:nvSpPr>
-          <p:cNvPr id="149" name="Text 147"/>
-          <p:cNvSpPr txBox="1"/>
-          <p:nvPr/>
-        </p:nvSpPr>
-        <p:spPr>
-          <a:xfrm>
-            <a:off x="6229350" y="4657725"/>
-            <a:ext cx="4895850" cy="372904"/>
-          </a:xfrm>
-          <a:prstGeom prst="rect">
-            <a:avLst/>
-          </a:prstGeom>
-          <a:noFill/>
-          <a:ln/>
-        </p:spPr>
-        <p:txBody>
-          <a:bodyPr wrap="square" lIns="0" tIns="0" rIns="0" bIns="0" rtlCol="0" anchor="t"/>
-          <a:lstStyle/>
-          <a:p>
-            <a:pPr algn="l" indent="0" marL="0">
-              <a:lnSpc>
-                <a:spcPts val="1468"/>
-              </a:lnSpc>
-              <a:buNone/>
-            </a:pPr>
-            <a:r>
-              <a:rPr lang="en-US" sz="1013" dirty="0">
-                <a:solidFill>
-                  <a:srgbClr val="CFCBC2"/>
+              <a:t>무엇이 문제인가</a:t>
+            </a:r>
+            <a:endParaRPr lang="en-US" sz="1013" dirty="0"/>
+          </a:p>
+        </p:txBody>
+      </p:sp>
+      <p:sp>
+        <p:nvSpPr>
+          <p:cNvPr id="161" name="Text 159"/>
+          <p:cNvSpPr txBox="1"/>
+          <p:nvPr/>
+        </p:nvSpPr>
+        <p:spPr>
+          <a:xfrm>
+            <a:off x="10734675" y="4200525"/>
+            <a:ext cx="638175" cy="125730"/>
+          </a:xfrm>
+          <a:prstGeom prst="rect">
+            <a:avLst/>
+          </a:prstGeom>
+          <a:noFill/>
+          <a:ln/>
+        </p:spPr>
+        <p:txBody>
+          <a:bodyPr wrap="square" lIns="0" tIns="0" rIns="0" bIns="0" rtlCol="0" anchor="t"/>
+          <a:lstStyle/>
+          <a:p>
+            <a:pPr algn="r" indent="0" marL="0">
+              <a:lnSpc>
+                <a:spcPts val="990"/>
+              </a:lnSpc>
+              <a:buNone/>
+            </a:pPr>
+            <a:r>
+              <a:rPr lang="en-US" sz="825" dirty="0">
+                <a:solidFill>
+                  <a:srgbClr val="8A8880"/>
                 </a:solidFill>
                 <a:latin typeface="Malgun Gothic" pitchFamily="34" charset="0"/>
                 <a:ea typeface="Malgun Gothic" pitchFamily="34" charset="-122"/>
                 <a:cs typeface="Malgun Gothic" pitchFamily="34" charset="-120"/>
               </a:rPr>
-              <a:t>더 낼 수 있는데 적게 신고했습니다. 팔 수 있는 양을 못 팔았습니다.</a:t>
-            </a:r>
-            <a:endParaRPr lang="en-US" sz="1013" dirty="0"/>
-          </a:p>
-        </p:txBody>
-      </p:sp>
-      <p:sp>
-        <p:nvSpPr>
-          <p:cNvPr id="150" name="Shape 148"/>
-          <p:cNvSpPr/>
-          <p:nvPr/>
-        </p:nvSpPr>
-        <p:spPr>
-          <a:xfrm>
-            <a:off x="5505450" y="5095875"/>
+              <a:t>미달 15회</a:t>
+            </a:r>
+            <a:endParaRPr lang="en-US" sz="825" dirty="0"/>
+          </a:p>
+        </p:txBody>
+      </p:sp>
+      <p:sp>
+        <p:nvSpPr>
+          <p:cNvPr id="162" name="Shape 160"/>
+          <p:cNvSpPr/>
+          <p:nvPr/>
+        </p:nvSpPr>
+        <p:spPr>
+          <a:xfrm>
+            <a:off x="5505450" y="4505325"/>
             <a:ext cx="38100" cy="247650"/>
           </a:xfrm>
           <a:prstGeom prst="rect">
             <a:avLst/>
           </a:prstGeom>
           <a:solidFill>
-            <a:srgbClr val="FF4D63"/>
-          </a:solidFill>
-          <a:ln/>
-        </p:spPr>
-      </p:sp>
-      <p:sp>
-        <p:nvSpPr>
-          <p:cNvPr id="151" name="Text 149"/>
-          <p:cNvSpPr txBox="1"/>
-          <p:nvPr/>
-        </p:nvSpPr>
-        <p:spPr>
-          <a:xfrm>
-            <a:off x="5638800" y="5067300"/>
+            <a:srgbClr val="A8BCD1"/>
+          </a:solidFill>
+          <a:ln/>
+        </p:spPr>
+      </p:sp>
+      <p:sp>
+        <p:nvSpPr>
+          <p:cNvPr id="163" name="Text 161"/>
+          <p:cNvSpPr txBox="1"/>
+          <p:nvPr/>
+        </p:nvSpPr>
+        <p:spPr>
+          <a:xfrm>
+            <a:off x="5638800" y="4476750"/>
             <a:ext cx="514350" cy="185738"/>
           </a:xfrm>
           <a:prstGeom prst="rect">
@@ -8811,13 +9422,13 @@
             <a:r>
               <a:rPr lang="en-US" sz="1125" b="1" dirty="0">
                 <a:solidFill>
-                  <a:srgbClr val="FF4D63"/>
+                  <a:srgbClr val="A8BCD1"/>
                 </a:solidFill>
                 <a:latin typeface="Malgun Gothic" pitchFamily="34" charset="0"/>
                 <a:ea typeface="Malgun Gothic" pitchFamily="34" charset="-122"/>
                 <a:cs typeface="Malgun Gothic" pitchFamily="34" charset="-120"/>
               </a:rPr>
-              <a:t>여름</a:t>
+              <a:t>겨울</a:t>
             </a:r>
             <a:endParaRPr lang="en-US" sz="1125" dirty="0"/>
           </a:p>
@@ -8825,14 +9436,14 @@
       </p:sp>
       <p:sp>
         <p:nvSpPr>
-          <p:cNvPr id="152" name="Text 150"/>
-          <p:cNvSpPr txBox="1"/>
-          <p:nvPr/>
-        </p:nvSpPr>
-        <p:spPr>
-          <a:xfrm>
-            <a:off x="6229350" y="5076825"/>
-            <a:ext cx="4895850" cy="372904"/>
+          <p:cNvPr id="164" name="Text 162"/>
+          <p:cNvSpPr txBox="1"/>
+          <p:nvPr/>
+        </p:nvSpPr>
+        <p:spPr>
+          <a:xfrm>
+            <a:off x="6229350" y="4486275"/>
+            <a:ext cx="4895850" cy="359092"/>
           </a:xfrm>
           <a:prstGeom prst="rect">
             <a:avLst/>
@@ -8846,12 +9457,12 @@
           <a:p>
             <a:pPr algn="l" indent="0" marL="0">
               <a:lnSpc>
-                <a:spcPts val="1468"/>
-              </a:lnSpc>
-              <a:buNone/>
-            </a:pPr>
-            <a:r>
-              <a:rPr lang="en-US" sz="1013" dirty="0">
+                <a:spcPts val="1414"/>
+              </a:lnSpc>
+              <a:buNone/>
+            </a:pPr>
+            <a:r>
+              <a:rPr lang="en-US" sz="975" dirty="0">
                 <a:solidFill>
                   <a:srgbClr val="CFCBC2"/>
                 </a:solidFill>
@@ -8859,41 +9470,41 @@
                 <a:ea typeface="Malgun Gothic" pitchFamily="34" charset="-122"/>
                 <a:cs typeface="Malgun Gothic" pitchFamily="34" charset="-120"/>
               </a:rPr>
-              <a:t>못 내는데 많이 신고했습니다. 신고값을 못 채우면 정산에서 불이익을 받습니다.</a:t>
-            </a:r>
-            <a:endParaRPr lang="en-US" sz="1013" dirty="0"/>
-          </a:p>
-        </p:txBody>
-      </p:sp>
-      <p:sp>
-        <p:nvSpPr>
-          <p:cNvPr id="153" name="Shape 151"/>
-          <p:cNvSpPr/>
-          <p:nvPr/>
-        </p:nvSpPr>
-        <p:spPr>
-          <a:xfrm>
-            <a:off x="5505450" y="5514975"/>
+              <a:t>더 낼 수 있는데 적게 신고했습니다. 팔 수 있는 양을 못 팔았습니다.</a:t>
+            </a:r>
+            <a:endParaRPr lang="en-US" sz="975" dirty="0"/>
+          </a:p>
+        </p:txBody>
+      </p:sp>
+      <p:sp>
+        <p:nvSpPr>
+          <p:cNvPr id="165" name="Shape 163"/>
+          <p:cNvSpPr/>
+          <p:nvPr/>
+        </p:nvSpPr>
+        <p:spPr>
+          <a:xfrm>
+            <a:off x="5505450" y="4981575"/>
             <a:ext cx="38100" cy="247650"/>
           </a:xfrm>
           <a:prstGeom prst="rect">
             <a:avLst/>
           </a:prstGeom>
           <a:solidFill>
-            <a:srgbClr val="EFB13C"/>
-          </a:solidFill>
-          <a:ln/>
-        </p:spPr>
-      </p:sp>
-      <p:sp>
-        <p:nvSpPr>
-          <p:cNvPr id="154" name="Text 152"/>
-          <p:cNvSpPr txBox="1"/>
-          <p:nvPr/>
-        </p:nvSpPr>
-        <p:spPr>
-          <a:xfrm>
-            <a:off x="5638800" y="5486400"/>
+            <a:srgbClr val="FF4D63"/>
+          </a:solidFill>
+          <a:ln/>
+        </p:spPr>
+      </p:sp>
+      <p:sp>
+        <p:nvSpPr>
+          <p:cNvPr id="166" name="Text 164"/>
+          <p:cNvSpPr txBox="1"/>
+          <p:nvPr/>
+        </p:nvSpPr>
+        <p:spPr>
+          <a:xfrm>
+            <a:off x="5638800" y="4953000"/>
             <a:ext cx="514350" cy="185738"/>
           </a:xfrm>
           <a:prstGeom prst="rect">
@@ -8915,13 +9526,13 @@
             <a:r>
               <a:rPr lang="en-US" sz="1125" b="1" dirty="0">
                 <a:solidFill>
-                  <a:srgbClr val="EFB13C"/>
+                  <a:srgbClr val="FF4D63"/>
                 </a:solidFill>
                 <a:latin typeface="Malgun Gothic" pitchFamily="34" charset="0"/>
                 <a:ea typeface="Malgun Gothic" pitchFamily="34" charset="-122"/>
                 <a:cs typeface="Malgun Gothic" pitchFamily="34" charset="-120"/>
               </a:rPr>
-              <a:t>결과</a:t>
+              <a:t>여름</a:t>
             </a:r>
             <a:endParaRPr lang="en-US" sz="1125" dirty="0"/>
           </a:p>
@@ -8929,14 +9540,14 @@
       </p:sp>
       <p:sp>
         <p:nvSpPr>
-          <p:cNvPr id="155" name="Text 153"/>
-          <p:cNvSpPr txBox="1"/>
-          <p:nvPr/>
-        </p:nvSpPr>
-        <p:spPr>
-          <a:xfrm>
-            <a:off x="6229350" y="5495925"/>
-            <a:ext cx="4895850" cy="372904"/>
+          <p:cNvPr id="167" name="Text 165"/>
+          <p:cNvSpPr txBox="1"/>
+          <p:nvPr/>
+        </p:nvSpPr>
+        <p:spPr>
+          <a:xfrm>
+            <a:off x="6229350" y="4962525"/>
+            <a:ext cx="4895850" cy="359092"/>
           </a:xfrm>
           <a:prstGeom prst="rect">
             <a:avLst/>
@@ -8950,12 +9561,12 @@
           <a:p>
             <a:pPr algn="l" indent="0" marL="0">
               <a:lnSpc>
-                <a:spcPts val="1468"/>
-              </a:lnSpc>
-              <a:buNone/>
-            </a:pPr>
-            <a:r>
-              <a:rPr lang="en-US" sz="1013" dirty="0">
+                <a:spcPts val="1414"/>
+              </a:lnSpc>
+              <a:buNone/>
+            </a:pPr>
+            <a:r>
+              <a:rPr lang="en-US" sz="975" dirty="0">
                 <a:solidFill>
                   <a:srgbClr val="CFCBC2"/>
                 </a:solidFill>
@@ -8963,15 +9574,119 @@
                 <a:ea typeface="Malgun Gothic" pitchFamily="34" charset="-122"/>
                 <a:cs typeface="Malgun Gothic" pitchFamily="34" charset="-120"/>
               </a:rPr>
+              <a:t>못 내는데 많이 신고했습니다. 신고값을 못 채우면 정산에서 불이익을 받습니다.</a:t>
+            </a:r>
+            <a:endParaRPr lang="en-US" sz="975" dirty="0"/>
+          </a:p>
+        </p:txBody>
+      </p:sp>
+      <p:sp>
+        <p:nvSpPr>
+          <p:cNvPr id="168" name="Shape 166"/>
+          <p:cNvSpPr/>
+          <p:nvPr/>
+        </p:nvSpPr>
+        <p:spPr>
+          <a:xfrm>
+            <a:off x="5505450" y="5457825"/>
+            <a:ext cx="38100" cy="247650"/>
+          </a:xfrm>
+          <a:prstGeom prst="rect">
+            <a:avLst/>
+          </a:prstGeom>
+          <a:solidFill>
+            <a:srgbClr val="EFB13C"/>
+          </a:solidFill>
+          <a:ln/>
+        </p:spPr>
+      </p:sp>
+      <p:sp>
+        <p:nvSpPr>
+          <p:cNvPr id="169" name="Text 167"/>
+          <p:cNvSpPr txBox="1"/>
+          <p:nvPr/>
+        </p:nvSpPr>
+        <p:spPr>
+          <a:xfrm>
+            <a:off x="5638800" y="5429250"/>
+            <a:ext cx="514350" cy="185738"/>
+          </a:xfrm>
+          <a:prstGeom prst="rect">
+            <a:avLst/>
+          </a:prstGeom>
+          <a:noFill/>
+          <a:ln/>
+        </p:spPr>
+        <p:txBody>
+          <a:bodyPr wrap="square" lIns="0" tIns="0" rIns="0" bIns="0" rtlCol="0" anchor="t"/>
+          <a:lstStyle/>
+          <a:p>
+            <a:pPr algn="l" indent="0" marL="0">
+              <a:lnSpc>
+                <a:spcPts val="1463"/>
+              </a:lnSpc>
+              <a:buNone/>
+            </a:pPr>
+            <a:r>
+              <a:rPr lang="en-US" sz="1125" b="1" dirty="0">
+                <a:solidFill>
+                  <a:srgbClr val="EFB13C"/>
+                </a:solidFill>
+                <a:latin typeface="Malgun Gothic" pitchFamily="34" charset="0"/>
+                <a:ea typeface="Malgun Gothic" pitchFamily="34" charset="-122"/>
+                <a:cs typeface="Malgun Gothic" pitchFamily="34" charset="-120"/>
+              </a:rPr>
+              <a:t>결과</a:t>
+            </a:r>
+            <a:endParaRPr lang="en-US" sz="1125" dirty="0"/>
+          </a:p>
+        </p:txBody>
+      </p:sp>
+      <p:sp>
+        <p:nvSpPr>
+          <p:cNvPr id="170" name="Text 168"/>
+          <p:cNvSpPr txBox="1"/>
+          <p:nvPr/>
+        </p:nvSpPr>
+        <p:spPr>
+          <a:xfrm>
+            <a:off x="6229350" y="5438775"/>
+            <a:ext cx="4895850" cy="359092"/>
+          </a:xfrm>
+          <a:prstGeom prst="rect">
+            <a:avLst/>
+          </a:prstGeom>
+          <a:noFill/>
+          <a:ln/>
+        </p:spPr>
+        <p:txBody>
+          <a:bodyPr wrap="square" lIns="0" tIns="0" rIns="0" bIns="0" rtlCol="0" anchor="t"/>
+          <a:lstStyle/>
+          <a:p>
+            <a:pPr algn="l" indent="0" marL="0">
+              <a:lnSpc>
+                <a:spcPts val="1414"/>
+              </a:lnSpc>
+              <a:buNone/>
+            </a:pPr>
+            <a:r>
+              <a:rPr lang="en-US" sz="975" dirty="0">
+                <a:solidFill>
+                  <a:srgbClr val="CFCBC2"/>
+                </a:solidFill>
+                <a:latin typeface="Malgun Gothic" pitchFamily="34" charset="0"/>
+                <a:ea typeface="Malgun Gothic" pitchFamily="34" charset="-122"/>
+                <a:cs typeface="Malgun Gothic" pitchFamily="34" charset="-120"/>
+              </a:rPr>
               <a:t>시험 40회 가운데 15회가 신고값을 못 채웠고, 가장 크게 어긋난 날은 10.8 MW 였습니다.</a:t>
             </a:r>
-            <a:endParaRPr lang="en-US" sz="1013" dirty="0"/>
-          </a:p>
-        </p:txBody>
-      </p:sp>
-      <p:sp>
-        <p:nvSpPr>
-          <p:cNvPr id="156" name="Shape 154"/>
+            <a:endParaRPr lang="en-US" sz="975" dirty="0"/>
+          </a:p>
+        </p:txBody>
+      </p:sp>
+      <p:sp>
+        <p:nvSpPr>
+          <p:cNvPr id="171" name="Shape 169"/>
           <p:cNvSpPr/>
           <p:nvPr/>
         </p:nvSpPr>
@@ -8994,7 +9709,7 @@
       </p:sp>
       <p:sp>
         <p:nvSpPr>
-          <p:cNvPr id="157" name="Text 155"/>
+          <p:cNvPr id="172" name="Text 170"/>
           <p:cNvSpPr txBox="1"/>
           <p:nvPr/>
         </p:nvSpPr>
@@ -9036,7 +9751,7 @@
       </p:sp>
       <p:sp>
         <p:nvSpPr>
-          <p:cNvPr id="158" name="Text 156"/>
+          <p:cNvPr id="173" name="Text 171"/>
           <p:cNvSpPr txBox="1"/>
           <p:nvPr/>
         </p:nvSpPr>

--- a/docs/ppt/위례_공급가능용량_최종발표_v3.pptx
+++ b/docs/ppt/위례_공급가능용량_최종발표_v3.pptx
@@ -1279,7 +1279,7 @@
         <p:spPr>
           <a:xfrm>
             <a:off x="685800" y="1771650"/>
-            <a:ext cx="10820400" cy="2286000"/>
+            <a:ext cx="10820400" cy="1962150"/>
           </a:xfrm>
           <a:prstGeom prst="rect">
             <a:avLst/>
@@ -1492,7 +1492,7 @@
         </p:nvSpPr>
         <p:spPr>
           <a:xfrm>
-            <a:off x="838200" y="2171700"/>
+            <a:off x="838200" y="2114550"/>
             <a:ext cx="2457450" cy="167164"/>
           </a:xfrm>
           <a:prstGeom prst="rect">
@@ -1534,8 +1534,8 @@
         </p:nvSpPr>
         <p:spPr>
           <a:xfrm>
-            <a:off x="838200" y="2381250"/>
-            <a:ext cx="2457450" cy="1009650"/>
+            <a:off x="838200" y="2305050"/>
+            <a:ext cx="2457450" cy="838200"/>
           </a:xfrm>
           <a:prstGeom prst="rect">
             <a:avLst/>
@@ -1564,7 +1564,7 @@
         </p:blipFill>
         <p:spPr>
           <a:xfrm>
-            <a:off x="895350" y="2506620"/>
+            <a:off x="895350" y="2344695"/>
             <a:ext cx="2343150" cy="758909"/>
           </a:xfrm>
           <a:prstGeom prst="rect">
@@ -1580,7 +1580,7 @@
         </p:nvSpPr>
         <p:spPr>
           <a:xfrm>
-            <a:off x="885825" y="2497095"/>
+            <a:off x="885825" y="2335170"/>
             <a:ext cx="2362200" cy="777959"/>
           </a:xfrm>
           <a:prstGeom prst="rect">
@@ -1602,7 +1602,7 @@
         </p:nvSpPr>
         <p:spPr>
           <a:xfrm>
-            <a:off x="838200" y="3467100"/>
+            <a:off x="838200" y="3219450"/>
             <a:ext cx="2457450" cy="492919"/>
           </a:xfrm>
           <a:prstGeom prst="rect">
@@ -1644,7 +1644,7 @@
         </p:nvSpPr>
         <p:spPr>
           <a:xfrm>
-            <a:off x="3305175" y="2809875"/>
+            <a:off x="3305175" y="2667000"/>
             <a:ext cx="190500" cy="148590"/>
           </a:xfrm>
           <a:prstGeom prst="rect">
@@ -1686,7 +1686,7 @@
         </p:nvSpPr>
         <p:spPr>
           <a:xfrm>
-            <a:off x="3486150" y="2171700"/>
+            <a:off x="3486150" y="2114550"/>
             <a:ext cx="2457450" cy="167164"/>
           </a:xfrm>
           <a:prstGeom prst="rect">
@@ -1728,8 +1728,8 @@
         </p:nvSpPr>
         <p:spPr>
           <a:xfrm>
-            <a:off x="3486150" y="2381250"/>
-            <a:ext cx="2457450" cy="1009650"/>
+            <a:off x="3486150" y="2305050"/>
+            <a:ext cx="2457450" cy="838200"/>
           </a:xfrm>
           <a:prstGeom prst="rect">
             <a:avLst/>
@@ -1758,8 +1758,8 @@
         </p:blipFill>
         <p:spPr>
           <a:xfrm>
-            <a:off x="4174900" y="2428875"/>
-            <a:ext cx="1079949" cy="914400"/>
+            <a:off x="4264896" y="2343150"/>
+            <a:ext cx="899958" cy="762000"/>
           </a:xfrm>
           <a:prstGeom prst="rect">
             <a:avLst/>
@@ -1774,8 +1774,8 @@
         </p:nvSpPr>
         <p:spPr>
           <a:xfrm>
-            <a:off x="4165375" y="2419350"/>
-            <a:ext cx="1098999" cy="933450"/>
+            <a:off x="4255371" y="2333625"/>
+            <a:ext cx="919008" cy="781050"/>
           </a:xfrm>
           <a:prstGeom prst="rect">
             <a:avLst/>
@@ -1796,7 +1796,7 @@
         </p:nvSpPr>
         <p:spPr>
           <a:xfrm>
-            <a:off x="3486150" y="3467100"/>
+            <a:off x="3486150" y="3219450"/>
             <a:ext cx="2457450" cy="492919"/>
           </a:xfrm>
           <a:prstGeom prst="rect">
@@ -1838,7 +1838,7 @@
         </p:nvSpPr>
         <p:spPr>
           <a:xfrm>
-            <a:off x="5953125" y="2809875"/>
+            <a:off x="5953125" y="2667000"/>
             <a:ext cx="190500" cy="148590"/>
           </a:xfrm>
           <a:prstGeom prst="rect">
@@ -1880,7 +1880,7 @@
         </p:nvSpPr>
         <p:spPr>
           <a:xfrm>
-            <a:off x="6134100" y="2171700"/>
+            <a:off x="6134100" y="2114550"/>
             <a:ext cx="2457450" cy="167164"/>
           </a:xfrm>
           <a:prstGeom prst="rect">
@@ -1922,8 +1922,8 @@
         </p:nvSpPr>
         <p:spPr>
           <a:xfrm>
-            <a:off x="6134100" y="2381250"/>
-            <a:ext cx="2457450" cy="1009650"/>
+            <a:off x="6134100" y="2305050"/>
+            <a:ext cx="2457450" cy="838200"/>
           </a:xfrm>
           <a:prstGeom prst="rect">
             <a:avLst/>
@@ -1952,7 +1952,7 @@
         </p:blipFill>
         <p:spPr>
           <a:xfrm>
-            <a:off x="6191250" y="2636804"/>
+            <a:off x="6191250" y="2474879"/>
             <a:ext cx="2343150" cy="498543"/>
           </a:xfrm>
           <a:prstGeom prst="rect">
@@ -1968,7 +1968,7 @@
         </p:nvSpPr>
         <p:spPr>
           <a:xfrm>
-            <a:off x="6181725" y="2627279"/>
+            <a:off x="6181725" y="2465354"/>
             <a:ext cx="2362200" cy="517593"/>
           </a:xfrm>
           <a:prstGeom prst="rect">
@@ -1990,7 +1990,7 @@
         </p:nvSpPr>
         <p:spPr>
           <a:xfrm>
-            <a:off x="6134100" y="3467100"/>
+            <a:off x="6134100" y="3219450"/>
             <a:ext cx="2457450" cy="492919"/>
           </a:xfrm>
           <a:prstGeom prst="rect">
@@ -2032,7 +2032,7 @@
         </p:nvSpPr>
         <p:spPr>
           <a:xfrm>
-            <a:off x="8601075" y="2809875"/>
+            <a:off x="8601075" y="2667000"/>
             <a:ext cx="190500" cy="148590"/>
           </a:xfrm>
           <a:prstGeom prst="rect">
@@ -2074,7 +2074,7 @@
         </p:nvSpPr>
         <p:spPr>
           <a:xfrm>
-            <a:off x="8782050" y="2171700"/>
+            <a:off x="8782050" y="2114550"/>
             <a:ext cx="2457450" cy="167164"/>
           </a:xfrm>
           <a:prstGeom prst="rect">
@@ -2116,8 +2116,8 @@
         </p:nvSpPr>
         <p:spPr>
           <a:xfrm>
-            <a:off x="8782050" y="2381250"/>
-            <a:ext cx="2457450" cy="1009650"/>
+            <a:off x="8782050" y="2305050"/>
+            <a:ext cx="2457450" cy="838200"/>
           </a:xfrm>
           <a:prstGeom prst="rect">
             <a:avLst/>
@@ -2146,8 +2146,8 @@
         </p:blipFill>
         <p:spPr>
           <a:xfrm>
-            <a:off x="9239250" y="2428875"/>
-            <a:ext cx="1543050" cy="914400"/>
+            <a:off x="9367838" y="2343150"/>
+            <a:ext cx="1285875" cy="762000"/>
           </a:xfrm>
           <a:prstGeom prst="rect">
             <a:avLst/>
@@ -2162,8 +2162,8 @@
         </p:nvSpPr>
         <p:spPr>
           <a:xfrm>
-            <a:off x="9229725" y="2419350"/>
-            <a:ext cx="1562100" cy="933450"/>
+            <a:off x="9358313" y="2333625"/>
+            <a:ext cx="1304925" cy="781050"/>
           </a:xfrm>
           <a:prstGeom prst="rect">
             <a:avLst/>
@@ -2184,7 +2184,7 @@
         </p:nvSpPr>
         <p:spPr>
           <a:xfrm>
-            <a:off x="8782050" y="3467100"/>
+            <a:off x="8782050" y="3219450"/>
             <a:ext cx="2457450" cy="492919"/>
           </a:xfrm>
           <a:prstGeom prst="rect">
@@ -2226,8 +2226,8 @@
         </p:nvSpPr>
         <p:spPr>
           <a:xfrm>
-            <a:off x="685800" y="4171950"/>
-            <a:ext cx="10820400" cy="1771650"/>
+            <a:off x="685800" y="3848100"/>
+            <a:ext cx="10820400" cy="2095500"/>
           </a:xfrm>
           <a:prstGeom prst="rect">
             <a:avLst/>
@@ -2251,7 +2251,7 @@
         </p:nvSpPr>
         <p:spPr>
           <a:xfrm>
-            <a:off x="695325" y="4181475"/>
+            <a:off x="695325" y="3857625"/>
             <a:ext cx="10801350" cy="276225"/>
           </a:xfrm>
           <a:prstGeom prst="rect">
@@ -2271,7 +2271,7 @@
         </p:nvSpPr>
         <p:spPr>
           <a:xfrm>
-            <a:off x="685800" y="4457700"/>
+            <a:off x="685800" y="4133850"/>
             <a:ext cx="10820400" cy="0"/>
           </a:xfrm>
           <a:prstGeom prst="line">
@@ -2294,7 +2294,7 @@
         </p:nvSpPr>
         <p:spPr>
           <a:xfrm>
-            <a:off x="695325" y="4181475"/>
+            <a:off x="695325" y="3857625"/>
             <a:ext cx="38100" cy="276225"/>
           </a:xfrm>
           <a:prstGeom prst="rect">
@@ -2314,7 +2314,7 @@
         </p:nvSpPr>
         <p:spPr>
           <a:xfrm>
-            <a:off x="857250" y="4248150"/>
+            <a:off x="857250" y="3924300"/>
             <a:ext cx="171450" cy="148590"/>
           </a:xfrm>
           <a:prstGeom prst="rect">
@@ -2356,7 +2356,7 @@
         </p:nvSpPr>
         <p:spPr>
           <a:xfrm>
-            <a:off x="1085850" y="4248150"/>
+            <a:off x="1085850" y="3924300"/>
             <a:ext cx="8934450" cy="154305"/>
           </a:xfrm>
           <a:prstGeom prst="rect">
@@ -2398,7 +2398,7 @@
         </p:nvSpPr>
         <p:spPr>
           <a:xfrm>
-            <a:off x="10020300" y="4257675"/>
+            <a:off x="10020300" y="3933825"/>
             <a:ext cx="1352550" cy="125730"/>
           </a:xfrm>
           <a:prstGeom prst="rect">
@@ -2440,8 +2440,8 @@
         </p:nvSpPr>
         <p:spPr>
           <a:xfrm>
-            <a:off x="914400" y="4572000"/>
-            <a:ext cx="10363200" cy="160973"/>
+            <a:off x="914400" y="4191000"/>
+            <a:ext cx="6667500" cy="160973"/>
           </a:xfrm>
           <a:prstGeom prst="rect">
             <a:avLst/>
@@ -2468,7 +2468,7 @@
                 <a:ea typeface="Malgun Gothic" pitchFamily="34" charset="-122"/>
                 <a:cs typeface="Malgun Gothic" pitchFamily="34" charset="-120"/>
               </a:rPr>
-              <a:t>시험은 하루에 한 곳에서만 합니다. 그 한 곳에서 나온 차이를 나머지 60개 온도에도 똑같이 더했습니다.</a:t>
+              <a:t>시험한 온도에서 나온 차이 하나를 61개 온도에 모두 같은 크기로 더했습니다.</a:t>
             </a:r>
             <a:endParaRPr lang="en-US" sz="975" dirty="0"/>
           </a:p>
@@ -2482,8 +2482,8 @@
         </p:nvSpPr>
         <p:spPr>
           <a:xfrm>
-            <a:off x="1905000" y="5676900"/>
-            <a:ext cx="0" cy="57150"/>
+            <a:off x="1866900" y="5524500"/>
+            <a:ext cx="8877300" cy="0"/>
           </a:xfrm>
           <a:prstGeom prst="line">
             <a:avLst/>
@@ -2499,14 +2499,1996 @@
       </p:sp>
       <p:sp>
         <p:nvSpPr>
-          <p:cNvPr id="52" name="Shape 46"/>
-          <p:cNvSpPr/>
-          <p:nvPr/>
-        </p:nvSpPr>
-        <p:spPr>
-          <a:xfrm>
-            <a:off x="2051050" y="5676900"/>
-            <a:ext cx="0" cy="57150"/>
+          <p:cNvPr id="52" name="Text 46"/>
+          <p:cNvSpPr txBox="1"/>
+          <p:nvPr/>
+        </p:nvSpPr>
+        <p:spPr>
+          <a:xfrm>
+            <a:off x="1428750" y="5457825"/>
+            <a:ext cx="342900" cy="120015"/>
+          </a:xfrm>
+          <a:prstGeom prst="rect">
+            <a:avLst/>
+          </a:prstGeom>
+          <a:noFill/>
+          <a:ln/>
+        </p:spPr>
+        <p:txBody>
+          <a:bodyPr wrap="square" lIns="0" tIns="0" rIns="0" bIns="0" rtlCol="0" anchor="t"/>
+          <a:lstStyle/>
+          <a:p>
+            <a:pPr algn="r" indent="0" marL="0">
+              <a:lnSpc>
+                <a:spcPts val="945"/>
+              </a:lnSpc>
+              <a:buNone/>
+            </a:pPr>
+            <a:r>
+              <a:rPr lang="en-US" sz="788" dirty="0">
+                <a:solidFill>
+                  <a:srgbClr val="8A8880"/>
+                </a:solidFill>
+                <a:latin typeface="Consolas" pitchFamily="34" charset="0"/>
+                <a:ea typeface="Consolas" pitchFamily="34" charset="-122"/>
+                <a:cs typeface="Consolas" pitchFamily="34" charset="-120"/>
+              </a:rPr>
+              <a:t>0</a:t>
+            </a:r>
+            <a:endParaRPr lang="en-US" sz="788" dirty="0"/>
+          </a:p>
+        </p:txBody>
+      </p:sp>
+      <p:sp>
+        <p:nvSpPr>
+          <p:cNvPr id="53" name="Shape 47"/>
+          <p:cNvSpPr/>
+          <p:nvPr/>
+        </p:nvSpPr>
+        <p:spPr>
+          <a:xfrm>
+            <a:off x="1866900" y="5181600"/>
+            <a:ext cx="8877300" cy="0"/>
+          </a:xfrm>
+          <a:prstGeom prst="line">
+            <a:avLst/>
+          </a:prstGeom>
+          <a:noFill/>
+          <a:ln w="12700">
+            <a:solidFill>
+              <a:srgbClr val="182838"/>
+            </a:solidFill>
+            <a:prstDash val="solid"/>
+          </a:ln>
+        </p:spPr>
+      </p:sp>
+      <p:sp>
+        <p:nvSpPr>
+          <p:cNvPr id="54" name="Text 48"/>
+          <p:cNvSpPr txBox="1"/>
+          <p:nvPr/>
+        </p:nvSpPr>
+        <p:spPr>
+          <a:xfrm>
+            <a:off x="1428750" y="5114925"/>
+            <a:ext cx="342900" cy="120015"/>
+          </a:xfrm>
+          <a:prstGeom prst="rect">
+            <a:avLst/>
+          </a:prstGeom>
+          <a:noFill/>
+          <a:ln/>
+        </p:spPr>
+        <p:txBody>
+          <a:bodyPr wrap="square" lIns="0" tIns="0" rIns="0" bIns="0" rtlCol="0" anchor="t"/>
+          <a:lstStyle/>
+          <a:p>
+            <a:pPr algn="r" indent="0" marL="0">
+              <a:lnSpc>
+                <a:spcPts val="945"/>
+              </a:lnSpc>
+              <a:buNone/>
+            </a:pPr>
+            <a:r>
+              <a:rPr lang="en-US" sz="788" dirty="0">
+                <a:solidFill>
+                  <a:srgbClr val="8A8880"/>
+                </a:solidFill>
+                <a:latin typeface="Consolas" pitchFamily="34" charset="0"/>
+                <a:ea typeface="Consolas" pitchFamily="34" charset="-122"/>
+                <a:cs typeface="Consolas" pitchFamily="34" charset="-120"/>
+              </a:rPr>
+              <a:t>2</a:t>
+            </a:r>
+            <a:endParaRPr lang="en-US" sz="788" dirty="0"/>
+          </a:p>
+        </p:txBody>
+      </p:sp>
+      <p:sp>
+        <p:nvSpPr>
+          <p:cNvPr id="55" name="Shape 49"/>
+          <p:cNvSpPr/>
+          <p:nvPr/>
+        </p:nvSpPr>
+        <p:spPr>
+          <a:xfrm>
+            <a:off x="1866900" y="4838700"/>
+            <a:ext cx="8877300" cy="0"/>
+          </a:xfrm>
+          <a:prstGeom prst="line">
+            <a:avLst/>
+          </a:prstGeom>
+          <a:noFill/>
+          <a:ln w="12700">
+            <a:solidFill>
+              <a:srgbClr val="182838"/>
+            </a:solidFill>
+            <a:prstDash val="solid"/>
+          </a:ln>
+        </p:spPr>
+      </p:sp>
+      <p:sp>
+        <p:nvSpPr>
+          <p:cNvPr id="56" name="Text 50"/>
+          <p:cNvSpPr txBox="1"/>
+          <p:nvPr/>
+        </p:nvSpPr>
+        <p:spPr>
+          <a:xfrm>
+            <a:off x="1428750" y="4772025"/>
+            <a:ext cx="342900" cy="120015"/>
+          </a:xfrm>
+          <a:prstGeom prst="rect">
+            <a:avLst/>
+          </a:prstGeom>
+          <a:noFill/>
+          <a:ln/>
+        </p:spPr>
+        <p:txBody>
+          <a:bodyPr wrap="square" lIns="0" tIns="0" rIns="0" bIns="0" rtlCol="0" anchor="t"/>
+          <a:lstStyle/>
+          <a:p>
+            <a:pPr algn="r" indent="0" marL="0">
+              <a:lnSpc>
+                <a:spcPts val="945"/>
+              </a:lnSpc>
+              <a:buNone/>
+            </a:pPr>
+            <a:r>
+              <a:rPr lang="en-US" sz="788" dirty="0">
+                <a:solidFill>
+                  <a:srgbClr val="8A8880"/>
+                </a:solidFill>
+                <a:latin typeface="Consolas" pitchFamily="34" charset="0"/>
+                <a:ea typeface="Consolas" pitchFamily="34" charset="-122"/>
+                <a:cs typeface="Consolas" pitchFamily="34" charset="-120"/>
+              </a:rPr>
+              <a:t>4</a:t>
+            </a:r>
+            <a:endParaRPr lang="en-US" sz="788" dirty="0"/>
+          </a:p>
+        </p:txBody>
+      </p:sp>
+      <p:sp>
+        <p:nvSpPr>
+          <p:cNvPr id="57" name="Shape 51"/>
+          <p:cNvSpPr/>
+          <p:nvPr/>
+        </p:nvSpPr>
+        <p:spPr>
+          <a:xfrm>
+            <a:off x="1866900" y="4495800"/>
+            <a:ext cx="8877300" cy="0"/>
+          </a:xfrm>
+          <a:prstGeom prst="line">
+            <a:avLst/>
+          </a:prstGeom>
+          <a:noFill/>
+          <a:ln w="12700">
+            <a:solidFill>
+              <a:srgbClr val="182838"/>
+            </a:solidFill>
+            <a:prstDash val="solid"/>
+          </a:ln>
+        </p:spPr>
+      </p:sp>
+      <p:sp>
+        <p:nvSpPr>
+          <p:cNvPr id="58" name="Text 52"/>
+          <p:cNvSpPr txBox="1"/>
+          <p:nvPr/>
+        </p:nvSpPr>
+        <p:spPr>
+          <a:xfrm>
+            <a:off x="1428750" y="4429125"/>
+            <a:ext cx="342900" cy="120015"/>
+          </a:xfrm>
+          <a:prstGeom prst="rect">
+            <a:avLst/>
+          </a:prstGeom>
+          <a:noFill/>
+          <a:ln/>
+        </p:spPr>
+        <p:txBody>
+          <a:bodyPr wrap="square" lIns="0" tIns="0" rIns="0" bIns="0" rtlCol="0" anchor="t"/>
+          <a:lstStyle/>
+          <a:p>
+            <a:pPr algn="r" indent="0" marL="0">
+              <a:lnSpc>
+                <a:spcPts val="945"/>
+              </a:lnSpc>
+              <a:buNone/>
+            </a:pPr>
+            <a:r>
+              <a:rPr lang="en-US" sz="788" dirty="0">
+                <a:solidFill>
+                  <a:srgbClr val="8A8880"/>
+                </a:solidFill>
+                <a:latin typeface="Consolas" pitchFamily="34" charset="0"/>
+                <a:ea typeface="Consolas" pitchFamily="34" charset="-122"/>
+                <a:cs typeface="Consolas" pitchFamily="34" charset="-120"/>
+              </a:rPr>
+              <a:t>6</a:t>
+            </a:r>
+            <a:endParaRPr lang="en-US" sz="788" dirty="0"/>
+          </a:p>
+        </p:txBody>
+      </p:sp>
+      <p:sp>
+        <p:nvSpPr>
+          <p:cNvPr id="59" name="Text 53"/>
+          <p:cNvSpPr txBox="1"/>
+          <p:nvPr/>
+        </p:nvSpPr>
+        <p:spPr>
+          <a:xfrm>
+            <a:off x="914400" y="4457700"/>
+            <a:ext cx="438150" cy="247650"/>
+          </a:xfrm>
+          <a:prstGeom prst="rect">
+            <a:avLst/>
+          </a:prstGeom>
+          <a:noFill/>
+          <a:ln/>
+        </p:spPr>
+        <p:txBody>
+          <a:bodyPr wrap="square" lIns="0" tIns="0" rIns="0" bIns="0" rtlCol="0" anchor="t"/>
+          <a:lstStyle/>
+          <a:p>
+            <a:pPr algn="r" indent="0" marL="0">
+              <a:lnSpc>
+                <a:spcPts val="975"/>
+              </a:lnSpc>
+              <a:buNone/>
+            </a:pPr>
+            <a:r>
+              <a:rPr lang="en-US" sz="750" dirty="0">
+                <a:solidFill>
+                  <a:srgbClr val="8A8880"/>
+                </a:solidFill>
+                <a:latin typeface="Malgun Gothic" pitchFamily="34" charset="0"/>
+                <a:ea typeface="Malgun Gothic" pitchFamily="34" charset="-122"/>
+                <a:cs typeface="Malgun Gothic" pitchFamily="34" charset="-120"/>
+              </a:rPr>
+              <a:t>더한 값</a:t>
+            </a:r>
+            <a:endParaRPr lang="en-US" sz="750" dirty="0"/>
+          </a:p>
+          <a:p>
+            <a:pPr algn="r" indent="0" marL="0">
+              <a:lnSpc>
+                <a:spcPts val="975"/>
+              </a:lnSpc>
+              <a:buNone/>
+            </a:pPr>
+            <a:r>
+              <a:rPr lang="en-US" sz="750" dirty="0">
+                <a:solidFill>
+                  <a:srgbClr val="8A8880"/>
+                </a:solidFill>
+                <a:latin typeface="Malgun Gothic" pitchFamily="34" charset="0"/>
+                <a:ea typeface="Malgun Gothic" pitchFamily="34" charset="-122"/>
+                <a:cs typeface="Malgun Gothic" pitchFamily="34" charset="-120"/>
+              </a:rPr>
+              <a:t>MW</a:t>
+            </a:r>
+            <a:endParaRPr lang="en-US" sz="750" dirty="0"/>
+          </a:p>
+        </p:txBody>
+      </p:sp>
+      <p:sp>
+        <p:nvSpPr>
+          <p:cNvPr id="60" name="Shape 54"/>
+          <p:cNvSpPr/>
+          <p:nvPr/>
+        </p:nvSpPr>
+        <p:spPr>
+          <a:xfrm>
+            <a:off x="1862138" y="4838700"/>
+            <a:ext cx="85725" cy="685800"/>
+          </a:xfrm>
+          <a:prstGeom prst="rect">
+            <a:avLst/>
+          </a:prstGeom>
+          <a:solidFill>
+            <a:srgbClr val="718BA6"/>
+          </a:solidFill>
+          <a:ln/>
+        </p:spPr>
+      </p:sp>
+      <p:sp>
+        <p:nvSpPr>
+          <p:cNvPr id="61" name="Shape 55"/>
+          <p:cNvSpPr/>
+          <p:nvPr/>
+        </p:nvSpPr>
+        <p:spPr>
+          <a:xfrm>
+            <a:off x="2008188" y="4838700"/>
+            <a:ext cx="85725" cy="685800"/>
+          </a:xfrm>
+          <a:prstGeom prst="rect">
+            <a:avLst/>
+          </a:prstGeom>
+          <a:solidFill>
+            <a:srgbClr val="718BA6"/>
+          </a:solidFill>
+          <a:ln/>
+        </p:spPr>
+      </p:sp>
+      <p:sp>
+        <p:nvSpPr>
+          <p:cNvPr id="62" name="Shape 56"/>
+          <p:cNvSpPr/>
+          <p:nvPr/>
+        </p:nvSpPr>
+        <p:spPr>
+          <a:xfrm>
+            <a:off x="2154238" y="4838700"/>
+            <a:ext cx="85725" cy="685800"/>
+          </a:xfrm>
+          <a:prstGeom prst="rect">
+            <a:avLst/>
+          </a:prstGeom>
+          <a:solidFill>
+            <a:srgbClr val="718BA6"/>
+          </a:solidFill>
+          <a:ln/>
+        </p:spPr>
+      </p:sp>
+      <p:sp>
+        <p:nvSpPr>
+          <p:cNvPr id="63" name="Shape 57"/>
+          <p:cNvSpPr/>
+          <p:nvPr/>
+        </p:nvSpPr>
+        <p:spPr>
+          <a:xfrm>
+            <a:off x="2300288" y="4838700"/>
+            <a:ext cx="85725" cy="685800"/>
+          </a:xfrm>
+          <a:prstGeom prst="rect">
+            <a:avLst/>
+          </a:prstGeom>
+          <a:solidFill>
+            <a:srgbClr val="718BA6"/>
+          </a:solidFill>
+          <a:ln/>
+        </p:spPr>
+      </p:sp>
+      <p:sp>
+        <p:nvSpPr>
+          <p:cNvPr id="64" name="Shape 58"/>
+          <p:cNvSpPr/>
+          <p:nvPr/>
+        </p:nvSpPr>
+        <p:spPr>
+          <a:xfrm>
+            <a:off x="2446337" y="4838700"/>
+            <a:ext cx="85725" cy="685800"/>
+          </a:xfrm>
+          <a:prstGeom prst="rect">
+            <a:avLst/>
+          </a:prstGeom>
+          <a:solidFill>
+            <a:srgbClr val="718BA6"/>
+          </a:solidFill>
+          <a:ln/>
+        </p:spPr>
+      </p:sp>
+      <p:sp>
+        <p:nvSpPr>
+          <p:cNvPr id="65" name="Shape 59"/>
+          <p:cNvSpPr/>
+          <p:nvPr/>
+        </p:nvSpPr>
+        <p:spPr>
+          <a:xfrm>
+            <a:off x="2592388" y="4838700"/>
+            <a:ext cx="85725" cy="685800"/>
+          </a:xfrm>
+          <a:prstGeom prst="rect">
+            <a:avLst/>
+          </a:prstGeom>
+          <a:solidFill>
+            <a:srgbClr val="718BA6"/>
+          </a:solidFill>
+          <a:ln/>
+        </p:spPr>
+      </p:sp>
+      <p:sp>
+        <p:nvSpPr>
+          <p:cNvPr id="66" name="Shape 60"/>
+          <p:cNvSpPr/>
+          <p:nvPr/>
+        </p:nvSpPr>
+        <p:spPr>
+          <a:xfrm>
+            <a:off x="2738438" y="4838700"/>
+            <a:ext cx="85725" cy="685800"/>
+          </a:xfrm>
+          <a:prstGeom prst="rect">
+            <a:avLst/>
+          </a:prstGeom>
+          <a:solidFill>
+            <a:srgbClr val="718BA6"/>
+          </a:solidFill>
+          <a:ln/>
+        </p:spPr>
+      </p:sp>
+      <p:sp>
+        <p:nvSpPr>
+          <p:cNvPr id="67" name="Shape 61"/>
+          <p:cNvSpPr/>
+          <p:nvPr/>
+        </p:nvSpPr>
+        <p:spPr>
+          <a:xfrm>
+            <a:off x="2884488" y="4838700"/>
+            <a:ext cx="85725" cy="685800"/>
+          </a:xfrm>
+          <a:prstGeom prst="rect">
+            <a:avLst/>
+          </a:prstGeom>
+          <a:solidFill>
+            <a:srgbClr val="718BA6"/>
+          </a:solidFill>
+          <a:ln/>
+        </p:spPr>
+      </p:sp>
+      <p:sp>
+        <p:nvSpPr>
+          <p:cNvPr id="68" name="Shape 62"/>
+          <p:cNvSpPr/>
+          <p:nvPr/>
+        </p:nvSpPr>
+        <p:spPr>
+          <a:xfrm>
+            <a:off x="3030538" y="4838700"/>
+            <a:ext cx="85725" cy="685800"/>
+          </a:xfrm>
+          <a:prstGeom prst="rect">
+            <a:avLst/>
+          </a:prstGeom>
+          <a:solidFill>
+            <a:srgbClr val="718BA6"/>
+          </a:solidFill>
+          <a:ln/>
+        </p:spPr>
+      </p:sp>
+      <p:sp>
+        <p:nvSpPr>
+          <p:cNvPr id="69" name="Shape 63"/>
+          <p:cNvSpPr/>
+          <p:nvPr/>
+        </p:nvSpPr>
+        <p:spPr>
+          <a:xfrm>
+            <a:off x="3176588" y="4838700"/>
+            <a:ext cx="85725" cy="685800"/>
+          </a:xfrm>
+          <a:prstGeom prst="rect">
+            <a:avLst/>
+          </a:prstGeom>
+          <a:solidFill>
+            <a:srgbClr val="718BA6"/>
+          </a:solidFill>
+          <a:ln/>
+        </p:spPr>
+      </p:sp>
+      <p:sp>
+        <p:nvSpPr>
+          <p:cNvPr id="70" name="Shape 64"/>
+          <p:cNvSpPr/>
+          <p:nvPr/>
+        </p:nvSpPr>
+        <p:spPr>
+          <a:xfrm>
+            <a:off x="3322638" y="4838700"/>
+            <a:ext cx="85725" cy="685800"/>
+          </a:xfrm>
+          <a:prstGeom prst="rect">
+            <a:avLst/>
+          </a:prstGeom>
+          <a:solidFill>
+            <a:srgbClr val="718BA6"/>
+          </a:solidFill>
+          <a:ln/>
+        </p:spPr>
+      </p:sp>
+      <p:sp>
+        <p:nvSpPr>
+          <p:cNvPr id="71" name="Shape 65"/>
+          <p:cNvSpPr/>
+          <p:nvPr/>
+        </p:nvSpPr>
+        <p:spPr>
+          <a:xfrm>
+            <a:off x="3468688" y="4838700"/>
+            <a:ext cx="85725" cy="685800"/>
+          </a:xfrm>
+          <a:prstGeom prst="rect">
+            <a:avLst/>
+          </a:prstGeom>
+          <a:solidFill>
+            <a:srgbClr val="718BA6"/>
+          </a:solidFill>
+          <a:ln/>
+        </p:spPr>
+      </p:sp>
+      <p:sp>
+        <p:nvSpPr>
+          <p:cNvPr id="72" name="Shape 66"/>
+          <p:cNvSpPr/>
+          <p:nvPr/>
+        </p:nvSpPr>
+        <p:spPr>
+          <a:xfrm>
+            <a:off x="3614738" y="4838700"/>
+            <a:ext cx="85725" cy="685800"/>
+          </a:xfrm>
+          <a:prstGeom prst="rect">
+            <a:avLst/>
+          </a:prstGeom>
+          <a:solidFill>
+            <a:srgbClr val="718BA6"/>
+          </a:solidFill>
+          <a:ln/>
+        </p:spPr>
+      </p:sp>
+      <p:sp>
+        <p:nvSpPr>
+          <p:cNvPr id="73" name="Shape 67"/>
+          <p:cNvSpPr/>
+          <p:nvPr/>
+        </p:nvSpPr>
+        <p:spPr>
+          <a:xfrm>
+            <a:off x="3760788" y="4838700"/>
+            <a:ext cx="85725" cy="685800"/>
+          </a:xfrm>
+          <a:prstGeom prst="rect">
+            <a:avLst/>
+          </a:prstGeom>
+          <a:solidFill>
+            <a:srgbClr val="718BA6"/>
+          </a:solidFill>
+          <a:ln/>
+        </p:spPr>
+      </p:sp>
+      <p:sp>
+        <p:nvSpPr>
+          <p:cNvPr id="74" name="Shape 68"/>
+          <p:cNvSpPr/>
+          <p:nvPr/>
+        </p:nvSpPr>
+        <p:spPr>
+          <a:xfrm>
+            <a:off x="3906838" y="4838700"/>
+            <a:ext cx="85725" cy="685800"/>
+          </a:xfrm>
+          <a:prstGeom prst="rect">
+            <a:avLst/>
+          </a:prstGeom>
+          <a:solidFill>
+            <a:srgbClr val="718BA6"/>
+          </a:solidFill>
+          <a:ln/>
+        </p:spPr>
+      </p:sp>
+      <p:sp>
+        <p:nvSpPr>
+          <p:cNvPr id="75" name="Shape 69"/>
+          <p:cNvSpPr/>
+          <p:nvPr/>
+        </p:nvSpPr>
+        <p:spPr>
+          <a:xfrm>
+            <a:off x="4052888" y="4838700"/>
+            <a:ext cx="85725" cy="685800"/>
+          </a:xfrm>
+          <a:prstGeom prst="rect">
+            <a:avLst/>
+          </a:prstGeom>
+          <a:solidFill>
+            <a:srgbClr val="718BA6"/>
+          </a:solidFill>
+          <a:ln/>
+        </p:spPr>
+      </p:sp>
+      <p:sp>
+        <p:nvSpPr>
+          <p:cNvPr id="76" name="Shape 70"/>
+          <p:cNvSpPr/>
+          <p:nvPr/>
+        </p:nvSpPr>
+        <p:spPr>
+          <a:xfrm>
+            <a:off x="4198938" y="4838700"/>
+            <a:ext cx="85725" cy="685800"/>
+          </a:xfrm>
+          <a:prstGeom prst="rect">
+            <a:avLst/>
+          </a:prstGeom>
+          <a:solidFill>
+            <a:srgbClr val="718BA6"/>
+          </a:solidFill>
+          <a:ln/>
+        </p:spPr>
+      </p:sp>
+      <p:sp>
+        <p:nvSpPr>
+          <p:cNvPr id="77" name="Shape 71"/>
+          <p:cNvSpPr/>
+          <p:nvPr/>
+        </p:nvSpPr>
+        <p:spPr>
+          <a:xfrm>
+            <a:off x="4344988" y="4838700"/>
+            <a:ext cx="85725" cy="685800"/>
+          </a:xfrm>
+          <a:prstGeom prst="rect">
+            <a:avLst/>
+          </a:prstGeom>
+          <a:solidFill>
+            <a:srgbClr val="718BA6"/>
+          </a:solidFill>
+          <a:ln/>
+        </p:spPr>
+      </p:sp>
+      <p:sp>
+        <p:nvSpPr>
+          <p:cNvPr id="78" name="Shape 72"/>
+          <p:cNvSpPr/>
+          <p:nvPr/>
+        </p:nvSpPr>
+        <p:spPr>
+          <a:xfrm>
+            <a:off x="4491038" y="4838700"/>
+            <a:ext cx="85725" cy="685800"/>
+          </a:xfrm>
+          <a:prstGeom prst="rect">
+            <a:avLst/>
+          </a:prstGeom>
+          <a:solidFill>
+            <a:srgbClr val="718BA6"/>
+          </a:solidFill>
+          <a:ln/>
+        </p:spPr>
+      </p:sp>
+      <p:sp>
+        <p:nvSpPr>
+          <p:cNvPr id="79" name="Shape 73"/>
+          <p:cNvSpPr/>
+          <p:nvPr/>
+        </p:nvSpPr>
+        <p:spPr>
+          <a:xfrm>
+            <a:off x="4637088" y="4838700"/>
+            <a:ext cx="85725" cy="685800"/>
+          </a:xfrm>
+          <a:prstGeom prst="rect">
+            <a:avLst/>
+          </a:prstGeom>
+          <a:solidFill>
+            <a:srgbClr val="718BA6"/>
+          </a:solidFill>
+          <a:ln/>
+        </p:spPr>
+      </p:sp>
+      <p:sp>
+        <p:nvSpPr>
+          <p:cNvPr id="80" name="Shape 74"/>
+          <p:cNvSpPr/>
+          <p:nvPr/>
+        </p:nvSpPr>
+        <p:spPr>
+          <a:xfrm>
+            <a:off x="4783138" y="4838700"/>
+            <a:ext cx="85725" cy="685800"/>
+          </a:xfrm>
+          <a:prstGeom prst="rect">
+            <a:avLst/>
+          </a:prstGeom>
+          <a:solidFill>
+            <a:srgbClr val="718BA6"/>
+          </a:solidFill>
+          <a:ln/>
+        </p:spPr>
+      </p:sp>
+      <p:sp>
+        <p:nvSpPr>
+          <p:cNvPr id="81" name="Shape 75"/>
+          <p:cNvSpPr/>
+          <p:nvPr/>
+        </p:nvSpPr>
+        <p:spPr>
+          <a:xfrm>
+            <a:off x="4929188" y="4838700"/>
+            <a:ext cx="85725" cy="685800"/>
+          </a:xfrm>
+          <a:prstGeom prst="rect">
+            <a:avLst/>
+          </a:prstGeom>
+          <a:solidFill>
+            <a:srgbClr val="718BA6"/>
+          </a:solidFill>
+          <a:ln/>
+        </p:spPr>
+      </p:sp>
+      <p:sp>
+        <p:nvSpPr>
+          <p:cNvPr id="82" name="Shape 76"/>
+          <p:cNvSpPr/>
+          <p:nvPr/>
+        </p:nvSpPr>
+        <p:spPr>
+          <a:xfrm>
+            <a:off x="5075238" y="4838700"/>
+            <a:ext cx="85725" cy="685800"/>
+          </a:xfrm>
+          <a:prstGeom prst="rect">
+            <a:avLst/>
+          </a:prstGeom>
+          <a:solidFill>
+            <a:srgbClr val="718BA6"/>
+          </a:solidFill>
+          <a:ln/>
+        </p:spPr>
+      </p:sp>
+      <p:sp>
+        <p:nvSpPr>
+          <p:cNvPr id="83" name="Shape 77"/>
+          <p:cNvSpPr/>
+          <p:nvPr/>
+        </p:nvSpPr>
+        <p:spPr>
+          <a:xfrm>
+            <a:off x="5221288" y="4838700"/>
+            <a:ext cx="85725" cy="685800"/>
+          </a:xfrm>
+          <a:prstGeom prst="rect">
+            <a:avLst/>
+          </a:prstGeom>
+          <a:solidFill>
+            <a:srgbClr val="718BA6"/>
+          </a:solidFill>
+          <a:ln/>
+        </p:spPr>
+      </p:sp>
+      <p:sp>
+        <p:nvSpPr>
+          <p:cNvPr id="84" name="Shape 78"/>
+          <p:cNvSpPr/>
+          <p:nvPr/>
+        </p:nvSpPr>
+        <p:spPr>
+          <a:xfrm>
+            <a:off x="5367338" y="4838700"/>
+            <a:ext cx="85725" cy="685800"/>
+          </a:xfrm>
+          <a:prstGeom prst="rect">
+            <a:avLst/>
+          </a:prstGeom>
+          <a:solidFill>
+            <a:srgbClr val="718BA6"/>
+          </a:solidFill>
+          <a:ln/>
+        </p:spPr>
+      </p:sp>
+      <p:sp>
+        <p:nvSpPr>
+          <p:cNvPr id="85" name="Shape 79"/>
+          <p:cNvSpPr/>
+          <p:nvPr/>
+        </p:nvSpPr>
+        <p:spPr>
+          <a:xfrm>
+            <a:off x="5513388" y="4838700"/>
+            <a:ext cx="85725" cy="685800"/>
+          </a:xfrm>
+          <a:prstGeom prst="rect">
+            <a:avLst/>
+          </a:prstGeom>
+          <a:solidFill>
+            <a:srgbClr val="718BA6"/>
+          </a:solidFill>
+          <a:ln/>
+        </p:spPr>
+      </p:sp>
+      <p:sp>
+        <p:nvSpPr>
+          <p:cNvPr id="86" name="Shape 80"/>
+          <p:cNvSpPr/>
+          <p:nvPr/>
+        </p:nvSpPr>
+        <p:spPr>
+          <a:xfrm>
+            <a:off x="5659438" y="4838700"/>
+            <a:ext cx="85725" cy="685800"/>
+          </a:xfrm>
+          <a:prstGeom prst="rect">
+            <a:avLst/>
+          </a:prstGeom>
+          <a:solidFill>
+            <a:srgbClr val="718BA6"/>
+          </a:solidFill>
+          <a:ln/>
+        </p:spPr>
+      </p:sp>
+      <p:sp>
+        <p:nvSpPr>
+          <p:cNvPr id="87" name="Shape 81"/>
+          <p:cNvSpPr/>
+          <p:nvPr/>
+        </p:nvSpPr>
+        <p:spPr>
+          <a:xfrm>
+            <a:off x="5805488" y="4838700"/>
+            <a:ext cx="85725" cy="685800"/>
+          </a:xfrm>
+          <a:prstGeom prst="rect">
+            <a:avLst/>
+          </a:prstGeom>
+          <a:solidFill>
+            <a:srgbClr val="718BA6"/>
+          </a:solidFill>
+          <a:ln/>
+        </p:spPr>
+      </p:sp>
+      <p:sp>
+        <p:nvSpPr>
+          <p:cNvPr id="88" name="Shape 82"/>
+          <p:cNvSpPr/>
+          <p:nvPr/>
+        </p:nvSpPr>
+        <p:spPr>
+          <a:xfrm>
+            <a:off x="5951538" y="4838700"/>
+            <a:ext cx="85725" cy="685800"/>
+          </a:xfrm>
+          <a:prstGeom prst="rect">
+            <a:avLst/>
+          </a:prstGeom>
+          <a:solidFill>
+            <a:srgbClr val="718BA6"/>
+          </a:solidFill>
+          <a:ln/>
+        </p:spPr>
+      </p:sp>
+      <p:sp>
+        <p:nvSpPr>
+          <p:cNvPr id="89" name="Shape 83"/>
+          <p:cNvSpPr/>
+          <p:nvPr/>
+        </p:nvSpPr>
+        <p:spPr>
+          <a:xfrm>
+            <a:off x="6097588" y="4838700"/>
+            <a:ext cx="85725" cy="685800"/>
+          </a:xfrm>
+          <a:prstGeom prst="rect">
+            <a:avLst/>
+          </a:prstGeom>
+          <a:solidFill>
+            <a:srgbClr val="718BA6"/>
+          </a:solidFill>
+          <a:ln/>
+        </p:spPr>
+      </p:sp>
+      <p:sp>
+        <p:nvSpPr>
+          <p:cNvPr id="90" name="Shape 84"/>
+          <p:cNvSpPr/>
+          <p:nvPr/>
+        </p:nvSpPr>
+        <p:spPr>
+          <a:xfrm>
+            <a:off x="6243638" y="4838700"/>
+            <a:ext cx="85725" cy="685800"/>
+          </a:xfrm>
+          <a:prstGeom prst="rect">
+            <a:avLst/>
+          </a:prstGeom>
+          <a:solidFill>
+            <a:srgbClr val="718BA6"/>
+          </a:solidFill>
+          <a:ln/>
+        </p:spPr>
+      </p:sp>
+      <p:sp>
+        <p:nvSpPr>
+          <p:cNvPr id="91" name="Shape 85"/>
+          <p:cNvSpPr/>
+          <p:nvPr/>
+        </p:nvSpPr>
+        <p:spPr>
+          <a:xfrm>
+            <a:off x="6389688" y="4838700"/>
+            <a:ext cx="85725" cy="685800"/>
+          </a:xfrm>
+          <a:prstGeom prst="rect">
+            <a:avLst/>
+          </a:prstGeom>
+          <a:solidFill>
+            <a:srgbClr val="718BA6"/>
+          </a:solidFill>
+          <a:ln/>
+        </p:spPr>
+      </p:sp>
+      <p:sp>
+        <p:nvSpPr>
+          <p:cNvPr id="92" name="Shape 86"/>
+          <p:cNvSpPr/>
+          <p:nvPr/>
+        </p:nvSpPr>
+        <p:spPr>
+          <a:xfrm>
+            <a:off x="6535738" y="4838700"/>
+            <a:ext cx="85725" cy="685800"/>
+          </a:xfrm>
+          <a:prstGeom prst="rect">
+            <a:avLst/>
+          </a:prstGeom>
+          <a:solidFill>
+            <a:srgbClr val="718BA6"/>
+          </a:solidFill>
+          <a:ln/>
+        </p:spPr>
+      </p:sp>
+      <p:sp>
+        <p:nvSpPr>
+          <p:cNvPr id="93" name="Shape 87"/>
+          <p:cNvSpPr/>
+          <p:nvPr/>
+        </p:nvSpPr>
+        <p:spPr>
+          <a:xfrm>
+            <a:off x="6681788" y="4838700"/>
+            <a:ext cx="85725" cy="685800"/>
+          </a:xfrm>
+          <a:prstGeom prst="rect">
+            <a:avLst/>
+          </a:prstGeom>
+          <a:solidFill>
+            <a:srgbClr val="718BA6"/>
+          </a:solidFill>
+          <a:ln/>
+        </p:spPr>
+      </p:sp>
+      <p:sp>
+        <p:nvSpPr>
+          <p:cNvPr id="94" name="Shape 88"/>
+          <p:cNvSpPr/>
+          <p:nvPr/>
+        </p:nvSpPr>
+        <p:spPr>
+          <a:xfrm>
+            <a:off x="6827838" y="4838700"/>
+            <a:ext cx="85725" cy="685800"/>
+          </a:xfrm>
+          <a:prstGeom prst="rect">
+            <a:avLst/>
+          </a:prstGeom>
+          <a:solidFill>
+            <a:srgbClr val="718BA6"/>
+          </a:solidFill>
+          <a:ln/>
+        </p:spPr>
+      </p:sp>
+      <p:sp>
+        <p:nvSpPr>
+          <p:cNvPr id="95" name="Shape 89"/>
+          <p:cNvSpPr/>
+          <p:nvPr/>
+        </p:nvSpPr>
+        <p:spPr>
+          <a:xfrm>
+            <a:off x="6973888" y="4838700"/>
+            <a:ext cx="85725" cy="685800"/>
+          </a:xfrm>
+          <a:prstGeom prst="rect">
+            <a:avLst/>
+          </a:prstGeom>
+          <a:solidFill>
+            <a:srgbClr val="718BA6"/>
+          </a:solidFill>
+          <a:ln/>
+        </p:spPr>
+      </p:sp>
+      <p:sp>
+        <p:nvSpPr>
+          <p:cNvPr id="96" name="Shape 90"/>
+          <p:cNvSpPr/>
+          <p:nvPr/>
+        </p:nvSpPr>
+        <p:spPr>
+          <a:xfrm>
+            <a:off x="7119938" y="4838700"/>
+            <a:ext cx="85725" cy="685800"/>
+          </a:xfrm>
+          <a:prstGeom prst="rect">
+            <a:avLst/>
+          </a:prstGeom>
+          <a:solidFill>
+            <a:srgbClr val="718BA6"/>
+          </a:solidFill>
+          <a:ln/>
+        </p:spPr>
+      </p:sp>
+      <p:sp>
+        <p:nvSpPr>
+          <p:cNvPr id="97" name="Shape 91"/>
+          <p:cNvSpPr/>
+          <p:nvPr/>
+        </p:nvSpPr>
+        <p:spPr>
+          <a:xfrm>
+            <a:off x="7265988" y="4838700"/>
+            <a:ext cx="85725" cy="685800"/>
+          </a:xfrm>
+          <a:prstGeom prst="rect">
+            <a:avLst/>
+          </a:prstGeom>
+          <a:solidFill>
+            <a:srgbClr val="718BA6"/>
+          </a:solidFill>
+          <a:ln/>
+        </p:spPr>
+      </p:sp>
+      <p:sp>
+        <p:nvSpPr>
+          <p:cNvPr id="98" name="Shape 92"/>
+          <p:cNvSpPr/>
+          <p:nvPr/>
+        </p:nvSpPr>
+        <p:spPr>
+          <a:xfrm>
+            <a:off x="7412038" y="4838700"/>
+            <a:ext cx="85725" cy="685800"/>
+          </a:xfrm>
+          <a:prstGeom prst="rect">
+            <a:avLst/>
+          </a:prstGeom>
+          <a:solidFill>
+            <a:srgbClr val="718BA6"/>
+          </a:solidFill>
+          <a:ln/>
+        </p:spPr>
+      </p:sp>
+      <p:sp>
+        <p:nvSpPr>
+          <p:cNvPr id="99" name="Shape 93"/>
+          <p:cNvSpPr/>
+          <p:nvPr/>
+        </p:nvSpPr>
+        <p:spPr>
+          <a:xfrm>
+            <a:off x="7558088" y="4838700"/>
+            <a:ext cx="85725" cy="685800"/>
+          </a:xfrm>
+          <a:prstGeom prst="rect">
+            <a:avLst/>
+          </a:prstGeom>
+          <a:solidFill>
+            <a:srgbClr val="718BA6"/>
+          </a:solidFill>
+          <a:ln/>
+        </p:spPr>
+      </p:sp>
+      <p:sp>
+        <p:nvSpPr>
+          <p:cNvPr id="100" name="Shape 94"/>
+          <p:cNvSpPr/>
+          <p:nvPr/>
+        </p:nvSpPr>
+        <p:spPr>
+          <a:xfrm>
+            <a:off x="7704138" y="4838700"/>
+            <a:ext cx="85725" cy="685800"/>
+          </a:xfrm>
+          <a:prstGeom prst="rect">
+            <a:avLst/>
+          </a:prstGeom>
+          <a:solidFill>
+            <a:srgbClr val="718BA6"/>
+          </a:solidFill>
+          <a:ln/>
+        </p:spPr>
+      </p:sp>
+      <p:sp>
+        <p:nvSpPr>
+          <p:cNvPr id="101" name="Shape 95"/>
+          <p:cNvSpPr/>
+          <p:nvPr/>
+        </p:nvSpPr>
+        <p:spPr>
+          <a:xfrm>
+            <a:off x="7850188" y="4838700"/>
+            <a:ext cx="85725" cy="685800"/>
+          </a:xfrm>
+          <a:prstGeom prst="rect">
+            <a:avLst/>
+          </a:prstGeom>
+          <a:solidFill>
+            <a:srgbClr val="718BA6"/>
+          </a:solidFill>
+          <a:ln/>
+        </p:spPr>
+      </p:sp>
+      <p:sp>
+        <p:nvSpPr>
+          <p:cNvPr id="102" name="Shape 96"/>
+          <p:cNvSpPr/>
+          <p:nvPr/>
+        </p:nvSpPr>
+        <p:spPr>
+          <a:xfrm>
+            <a:off x="7996237" y="4838700"/>
+            <a:ext cx="85725" cy="685800"/>
+          </a:xfrm>
+          <a:prstGeom prst="rect">
+            <a:avLst/>
+          </a:prstGeom>
+          <a:solidFill>
+            <a:srgbClr val="718BA6"/>
+          </a:solidFill>
+          <a:ln/>
+        </p:spPr>
+      </p:sp>
+      <p:sp>
+        <p:nvSpPr>
+          <p:cNvPr id="103" name="Shape 97"/>
+          <p:cNvSpPr/>
+          <p:nvPr/>
+        </p:nvSpPr>
+        <p:spPr>
+          <a:xfrm>
+            <a:off x="8142288" y="4838700"/>
+            <a:ext cx="85725" cy="685800"/>
+          </a:xfrm>
+          <a:prstGeom prst="rect">
+            <a:avLst/>
+          </a:prstGeom>
+          <a:solidFill>
+            <a:srgbClr val="718BA6"/>
+          </a:solidFill>
+          <a:ln/>
+        </p:spPr>
+      </p:sp>
+      <p:sp>
+        <p:nvSpPr>
+          <p:cNvPr id="104" name="Shape 98"/>
+          <p:cNvSpPr/>
+          <p:nvPr/>
+        </p:nvSpPr>
+        <p:spPr>
+          <a:xfrm>
+            <a:off x="8288338" y="4838700"/>
+            <a:ext cx="85725" cy="685800"/>
+          </a:xfrm>
+          <a:prstGeom prst="rect">
+            <a:avLst/>
+          </a:prstGeom>
+          <a:solidFill>
+            <a:srgbClr val="718BA6"/>
+          </a:solidFill>
+          <a:ln/>
+        </p:spPr>
+      </p:sp>
+      <p:sp>
+        <p:nvSpPr>
+          <p:cNvPr id="105" name="Shape 99"/>
+          <p:cNvSpPr/>
+          <p:nvPr/>
+        </p:nvSpPr>
+        <p:spPr>
+          <a:xfrm>
+            <a:off x="8434388" y="4838700"/>
+            <a:ext cx="85725" cy="685800"/>
+          </a:xfrm>
+          <a:prstGeom prst="rect">
+            <a:avLst/>
+          </a:prstGeom>
+          <a:solidFill>
+            <a:srgbClr val="EFB13C"/>
+          </a:solidFill>
+          <a:ln/>
+        </p:spPr>
+      </p:sp>
+      <p:sp>
+        <p:nvSpPr>
+          <p:cNvPr id="106" name="Shape 100"/>
+          <p:cNvSpPr/>
+          <p:nvPr/>
+        </p:nvSpPr>
+        <p:spPr>
+          <a:xfrm>
+            <a:off x="8580438" y="4838700"/>
+            <a:ext cx="85725" cy="685800"/>
+          </a:xfrm>
+          <a:prstGeom prst="rect">
+            <a:avLst/>
+          </a:prstGeom>
+          <a:solidFill>
+            <a:srgbClr val="718BA6"/>
+          </a:solidFill>
+          <a:ln/>
+        </p:spPr>
+      </p:sp>
+      <p:sp>
+        <p:nvSpPr>
+          <p:cNvPr id="107" name="Shape 101"/>
+          <p:cNvSpPr/>
+          <p:nvPr/>
+        </p:nvSpPr>
+        <p:spPr>
+          <a:xfrm>
+            <a:off x="8726488" y="4838700"/>
+            <a:ext cx="85725" cy="685800"/>
+          </a:xfrm>
+          <a:prstGeom prst="rect">
+            <a:avLst/>
+          </a:prstGeom>
+          <a:solidFill>
+            <a:srgbClr val="718BA6"/>
+          </a:solidFill>
+          <a:ln/>
+        </p:spPr>
+      </p:sp>
+      <p:sp>
+        <p:nvSpPr>
+          <p:cNvPr id="108" name="Shape 102"/>
+          <p:cNvSpPr/>
+          <p:nvPr/>
+        </p:nvSpPr>
+        <p:spPr>
+          <a:xfrm>
+            <a:off x="8872538" y="4838700"/>
+            <a:ext cx="85725" cy="685800"/>
+          </a:xfrm>
+          <a:prstGeom prst="rect">
+            <a:avLst/>
+          </a:prstGeom>
+          <a:solidFill>
+            <a:srgbClr val="718BA6"/>
+          </a:solidFill>
+          <a:ln/>
+        </p:spPr>
+      </p:sp>
+      <p:sp>
+        <p:nvSpPr>
+          <p:cNvPr id="109" name="Shape 103"/>
+          <p:cNvSpPr/>
+          <p:nvPr/>
+        </p:nvSpPr>
+        <p:spPr>
+          <a:xfrm>
+            <a:off x="9018588" y="4838700"/>
+            <a:ext cx="85725" cy="685800"/>
+          </a:xfrm>
+          <a:prstGeom prst="rect">
+            <a:avLst/>
+          </a:prstGeom>
+          <a:solidFill>
+            <a:srgbClr val="718BA6"/>
+          </a:solidFill>
+          <a:ln/>
+        </p:spPr>
+      </p:sp>
+      <p:sp>
+        <p:nvSpPr>
+          <p:cNvPr id="110" name="Shape 104"/>
+          <p:cNvSpPr/>
+          <p:nvPr/>
+        </p:nvSpPr>
+        <p:spPr>
+          <a:xfrm>
+            <a:off x="9164638" y="4838700"/>
+            <a:ext cx="85725" cy="685800"/>
+          </a:xfrm>
+          <a:prstGeom prst="rect">
+            <a:avLst/>
+          </a:prstGeom>
+          <a:solidFill>
+            <a:srgbClr val="718BA6"/>
+          </a:solidFill>
+          <a:ln/>
+        </p:spPr>
+      </p:sp>
+      <p:sp>
+        <p:nvSpPr>
+          <p:cNvPr id="111" name="Shape 105"/>
+          <p:cNvSpPr/>
+          <p:nvPr/>
+        </p:nvSpPr>
+        <p:spPr>
+          <a:xfrm>
+            <a:off x="9310688" y="4838700"/>
+            <a:ext cx="85725" cy="685800"/>
+          </a:xfrm>
+          <a:prstGeom prst="rect">
+            <a:avLst/>
+          </a:prstGeom>
+          <a:solidFill>
+            <a:srgbClr val="718BA6"/>
+          </a:solidFill>
+          <a:ln/>
+        </p:spPr>
+      </p:sp>
+      <p:sp>
+        <p:nvSpPr>
+          <p:cNvPr id="112" name="Shape 106"/>
+          <p:cNvSpPr/>
+          <p:nvPr/>
+        </p:nvSpPr>
+        <p:spPr>
+          <a:xfrm>
+            <a:off x="9456738" y="4838700"/>
+            <a:ext cx="85725" cy="685800"/>
+          </a:xfrm>
+          <a:prstGeom prst="rect">
+            <a:avLst/>
+          </a:prstGeom>
+          <a:solidFill>
+            <a:srgbClr val="718BA6"/>
+          </a:solidFill>
+          <a:ln/>
+        </p:spPr>
+      </p:sp>
+      <p:sp>
+        <p:nvSpPr>
+          <p:cNvPr id="113" name="Shape 107"/>
+          <p:cNvSpPr/>
+          <p:nvPr/>
+        </p:nvSpPr>
+        <p:spPr>
+          <a:xfrm>
+            <a:off x="9602788" y="4838700"/>
+            <a:ext cx="85725" cy="685800"/>
+          </a:xfrm>
+          <a:prstGeom prst="rect">
+            <a:avLst/>
+          </a:prstGeom>
+          <a:solidFill>
+            <a:srgbClr val="718BA6"/>
+          </a:solidFill>
+          <a:ln/>
+        </p:spPr>
+      </p:sp>
+      <p:sp>
+        <p:nvSpPr>
+          <p:cNvPr id="114" name="Shape 108"/>
+          <p:cNvSpPr/>
+          <p:nvPr/>
+        </p:nvSpPr>
+        <p:spPr>
+          <a:xfrm>
+            <a:off x="9748838" y="4838700"/>
+            <a:ext cx="85725" cy="685800"/>
+          </a:xfrm>
+          <a:prstGeom prst="rect">
+            <a:avLst/>
+          </a:prstGeom>
+          <a:solidFill>
+            <a:srgbClr val="718BA6"/>
+          </a:solidFill>
+          <a:ln/>
+        </p:spPr>
+      </p:sp>
+      <p:sp>
+        <p:nvSpPr>
+          <p:cNvPr id="115" name="Shape 109"/>
+          <p:cNvSpPr/>
+          <p:nvPr/>
+        </p:nvSpPr>
+        <p:spPr>
+          <a:xfrm>
+            <a:off x="9894888" y="4838700"/>
+            <a:ext cx="85725" cy="685800"/>
+          </a:xfrm>
+          <a:prstGeom prst="rect">
+            <a:avLst/>
+          </a:prstGeom>
+          <a:solidFill>
+            <a:srgbClr val="718BA6"/>
+          </a:solidFill>
+          <a:ln/>
+        </p:spPr>
+      </p:sp>
+      <p:sp>
+        <p:nvSpPr>
+          <p:cNvPr id="116" name="Shape 110"/>
+          <p:cNvSpPr/>
+          <p:nvPr/>
+        </p:nvSpPr>
+        <p:spPr>
+          <a:xfrm>
+            <a:off x="10040938" y="4838700"/>
+            <a:ext cx="85725" cy="685800"/>
+          </a:xfrm>
+          <a:prstGeom prst="rect">
+            <a:avLst/>
+          </a:prstGeom>
+          <a:solidFill>
+            <a:srgbClr val="718BA6"/>
+          </a:solidFill>
+          <a:ln/>
+        </p:spPr>
+      </p:sp>
+      <p:sp>
+        <p:nvSpPr>
+          <p:cNvPr id="117" name="Shape 111"/>
+          <p:cNvSpPr/>
+          <p:nvPr/>
+        </p:nvSpPr>
+        <p:spPr>
+          <a:xfrm>
+            <a:off x="10186988" y="4838700"/>
+            <a:ext cx="85725" cy="685800"/>
+          </a:xfrm>
+          <a:prstGeom prst="rect">
+            <a:avLst/>
+          </a:prstGeom>
+          <a:solidFill>
+            <a:srgbClr val="718BA6"/>
+          </a:solidFill>
+          <a:ln/>
+        </p:spPr>
+      </p:sp>
+      <p:sp>
+        <p:nvSpPr>
+          <p:cNvPr id="118" name="Shape 112"/>
+          <p:cNvSpPr/>
+          <p:nvPr/>
+        </p:nvSpPr>
+        <p:spPr>
+          <a:xfrm>
+            <a:off x="10333038" y="4838700"/>
+            <a:ext cx="85725" cy="685800"/>
+          </a:xfrm>
+          <a:prstGeom prst="rect">
+            <a:avLst/>
+          </a:prstGeom>
+          <a:solidFill>
+            <a:srgbClr val="718BA6"/>
+          </a:solidFill>
+          <a:ln/>
+        </p:spPr>
+      </p:sp>
+      <p:sp>
+        <p:nvSpPr>
+          <p:cNvPr id="119" name="Shape 113"/>
+          <p:cNvSpPr/>
+          <p:nvPr/>
+        </p:nvSpPr>
+        <p:spPr>
+          <a:xfrm>
+            <a:off x="10479088" y="4838700"/>
+            <a:ext cx="85725" cy="685800"/>
+          </a:xfrm>
+          <a:prstGeom prst="rect">
+            <a:avLst/>
+          </a:prstGeom>
+          <a:solidFill>
+            <a:srgbClr val="718BA6"/>
+          </a:solidFill>
+          <a:ln/>
+        </p:spPr>
+      </p:sp>
+      <p:sp>
+        <p:nvSpPr>
+          <p:cNvPr id="120" name="Shape 114"/>
+          <p:cNvSpPr/>
+          <p:nvPr/>
+        </p:nvSpPr>
+        <p:spPr>
+          <a:xfrm>
+            <a:off x="10625138" y="4838700"/>
+            <a:ext cx="85725" cy="685800"/>
+          </a:xfrm>
+          <a:prstGeom prst="rect">
+            <a:avLst/>
+          </a:prstGeom>
+          <a:solidFill>
+            <a:srgbClr val="718BA6"/>
+          </a:solidFill>
+          <a:ln/>
+        </p:spPr>
+      </p:sp>
+      <p:sp>
+        <p:nvSpPr>
+          <p:cNvPr id="121" name="Text 115"/>
+          <p:cNvSpPr txBox="1"/>
+          <p:nvPr/>
+        </p:nvSpPr>
+        <p:spPr>
+          <a:xfrm>
+            <a:off x="1676400" y="5581650"/>
+            <a:ext cx="457200" cy="120015"/>
+          </a:xfrm>
+          <a:prstGeom prst="rect">
+            <a:avLst/>
+          </a:prstGeom>
+          <a:noFill/>
+          <a:ln/>
+        </p:spPr>
+        <p:txBody>
+          <a:bodyPr wrap="square" lIns="0" tIns="0" rIns="0" bIns="0" rtlCol="0" anchor="t"/>
+          <a:lstStyle/>
+          <a:p>
+            <a:pPr algn="ctr" indent="0" marL="0">
+              <a:lnSpc>
+                <a:spcPts val="945"/>
+              </a:lnSpc>
+              <a:buNone/>
+            </a:pPr>
+            <a:r>
+              <a:rPr lang="en-US" sz="788" dirty="0">
+                <a:solidFill>
+                  <a:srgbClr val="8A8880"/>
+                </a:solidFill>
+                <a:latin typeface="Consolas" pitchFamily="34" charset="0"/>
+                <a:ea typeface="Consolas" pitchFamily="34" charset="-122"/>
+                <a:cs typeface="Consolas" pitchFamily="34" charset="-120"/>
+              </a:rPr>
+              <a:t>-20</a:t>
+            </a:r>
+            <a:endParaRPr lang="en-US" sz="788" dirty="0"/>
+          </a:p>
+        </p:txBody>
+      </p:sp>
+      <p:sp>
+        <p:nvSpPr>
+          <p:cNvPr id="122" name="Text 116"/>
+          <p:cNvSpPr txBox="1"/>
+          <p:nvPr/>
+        </p:nvSpPr>
+        <p:spPr>
+          <a:xfrm>
+            <a:off x="3136900" y="5581650"/>
+            <a:ext cx="457200" cy="120015"/>
+          </a:xfrm>
+          <a:prstGeom prst="rect">
+            <a:avLst/>
+          </a:prstGeom>
+          <a:noFill/>
+          <a:ln/>
+        </p:spPr>
+        <p:txBody>
+          <a:bodyPr wrap="square" lIns="0" tIns="0" rIns="0" bIns="0" rtlCol="0" anchor="t"/>
+          <a:lstStyle/>
+          <a:p>
+            <a:pPr algn="ctr" indent="0" marL="0">
+              <a:lnSpc>
+                <a:spcPts val="945"/>
+              </a:lnSpc>
+              <a:buNone/>
+            </a:pPr>
+            <a:r>
+              <a:rPr lang="en-US" sz="788" dirty="0">
+                <a:solidFill>
+                  <a:srgbClr val="8A8880"/>
+                </a:solidFill>
+                <a:latin typeface="Consolas" pitchFamily="34" charset="0"/>
+                <a:ea typeface="Consolas" pitchFamily="34" charset="-122"/>
+                <a:cs typeface="Consolas" pitchFamily="34" charset="-120"/>
+              </a:rPr>
+              <a:t>-10</a:t>
+            </a:r>
+            <a:endParaRPr lang="en-US" sz="788" dirty="0"/>
+          </a:p>
+        </p:txBody>
+      </p:sp>
+      <p:sp>
+        <p:nvSpPr>
+          <p:cNvPr id="123" name="Text 117"/>
+          <p:cNvSpPr txBox="1"/>
+          <p:nvPr/>
+        </p:nvSpPr>
+        <p:spPr>
+          <a:xfrm>
+            <a:off x="4597400" y="5581650"/>
+            <a:ext cx="457200" cy="120015"/>
+          </a:xfrm>
+          <a:prstGeom prst="rect">
+            <a:avLst/>
+          </a:prstGeom>
+          <a:noFill/>
+          <a:ln/>
+        </p:spPr>
+        <p:txBody>
+          <a:bodyPr wrap="square" lIns="0" tIns="0" rIns="0" bIns="0" rtlCol="0" anchor="t"/>
+          <a:lstStyle/>
+          <a:p>
+            <a:pPr algn="ctr" indent="0" marL="0">
+              <a:lnSpc>
+                <a:spcPts val="945"/>
+              </a:lnSpc>
+              <a:buNone/>
+            </a:pPr>
+            <a:r>
+              <a:rPr lang="en-US" sz="788" dirty="0">
+                <a:solidFill>
+                  <a:srgbClr val="8A8880"/>
+                </a:solidFill>
+                <a:latin typeface="Consolas" pitchFamily="34" charset="0"/>
+                <a:ea typeface="Consolas" pitchFamily="34" charset="-122"/>
+                <a:cs typeface="Consolas" pitchFamily="34" charset="-120"/>
+              </a:rPr>
+              <a:t>0</a:t>
+            </a:r>
+            <a:endParaRPr lang="en-US" sz="788" dirty="0"/>
+          </a:p>
+        </p:txBody>
+      </p:sp>
+      <p:sp>
+        <p:nvSpPr>
+          <p:cNvPr id="124" name="Text 118"/>
+          <p:cNvSpPr txBox="1"/>
+          <p:nvPr/>
+        </p:nvSpPr>
+        <p:spPr>
+          <a:xfrm>
+            <a:off x="6057900" y="5581650"/>
+            <a:ext cx="457200" cy="120015"/>
+          </a:xfrm>
+          <a:prstGeom prst="rect">
+            <a:avLst/>
+          </a:prstGeom>
+          <a:noFill/>
+          <a:ln/>
+        </p:spPr>
+        <p:txBody>
+          <a:bodyPr wrap="square" lIns="0" tIns="0" rIns="0" bIns="0" rtlCol="0" anchor="t"/>
+          <a:lstStyle/>
+          <a:p>
+            <a:pPr algn="ctr" indent="0" marL="0">
+              <a:lnSpc>
+                <a:spcPts val="945"/>
+              </a:lnSpc>
+              <a:buNone/>
+            </a:pPr>
+            <a:r>
+              <a:rPr lang="en-US" sz="788" dirty="0">
+                <a:solidFill>
+                  <a:srgbClr val="8A8880"/>
+                </a:solidFill>
+                <a:latin typeface="Consolas" pitchFamily="34" charset="0"/>
+                <a:ea typeface="Consolas" pitchFamily="34" charset="-122"/>
+                <a:cs typeface="Consolas" pitchFamily="34" charset="-120"/>
+              </a:rPr>
+              <a:t>+10</a:t>
+            </a:r>
+            <a:endParaRPr lang="en-US" sz="788" dirty="0"/>
+          </a:p>
+        </p:txBody>
+      </p:sp>
+      <p:sp>
+        <p:nvSpPr>
+          <p:cNvPr id="125" name="Text 119"/>
+          <p:cNvSpPr txBox="1"/>
+          <p:nvPr/>
+        </p:nvSpPr>
+        <p:spPr>
+          <a:xfrm>
+            <a:off x="7518400" y="5581650"/>
+            <a:ext cx="457200" cy="120015"/>
+          </a:xfrm>
+          <a:prstGeom prst="rect">
+            <a:avLst/>
+          </a:prstGeom>
+          <a:noFill/>
+          <a:ln/>
+        </p:spPr>
+        <p:txBody>
+          <a:bodyPr wrap="square" lIns="0" tIns="0" rIns="0" bIns="0" rtlCol="0" anchor="t"/>
+          <a:lstStyle/>
+          <a:p>
+            <a:pPr algn="ctr" indent="0" marL="0">
+              <a:lnSpc>
+                <a:spcPts val="945"/>
+              </a:lnSpc>
+              <a:buNone/>
+            </a:pPr>
+            <a:r>
+              <a:rPr lang="en-US" sz="788" dirty="0">
+                <a:solidFill>
+                  <a:srgbClr val="8A8880"/>
+                </a:solidFill>
+                <a:latin typeface="Consolas" pitchFamily="34" charset="0"/>
+                <a:ea typeface="Consolas" pitchFamily="34" charset="-122"/>
+                <a:cs typeface="Consolas" pitchFamily="34" charset="-120"/>
+              </a:rPr>
+              <a:t>+20</a:t>
+            </a:r>
+            <a:endParaRPr lang="en-US" sz="788" dirty="0"/>
+          </a:p>
+        </p:txBody>
+      </p:sp>
+      <p:sp>
+        <p:nvSpPr>
+          <p:cNvPr id="126" name="Text 120"/>
+          <p:cNvSpPr txBox="1"/>
+          <p:nvPr/>
+        </p:nvSpPr>
+        <p:spPr>
+          <a:xfrm>
+            <a:off x="8978900" y="5581650"/>
+            <a:ext cx="457200" cy="120015"/>
+          </a:xfrm>
+          <a:prstGeom prst="rect">
+            <a:avLst/>
+          </a:prstGeom>
+          <a:noFill/>
+          <a:ln/>
+        </p:spPr>
+        <p:txBody>
+          <a:bodyPr wrap="square" lIns="0" tIns="0" rIns="0" bIns="0" rtlCol="0" anchor="t"/>
+          <a:lstStyle/>
+          <a:p>
+            <a:pPr algn="ctr" indent="0" marL="0">
+              <a:lnSpc>
+                <a:spcPts val="945"/>
+              </a:lnSpc>
+              <a:buNone/>
+            </a:pPr>
+            <a:r>
+              <a:rPr lang="en-US" sz="788" dirty="0">
+                <a:solidFill>
+                  <a:srgbClr val="8A8880"/>
+                </a:solidFill>
+                <a:latin typeface="Consolas" pitchFamily="34" charset="0"/>
+                <a:ea typeface="Consolas" pitchFamily="34" charset="-122"/>
+                <a:cs typeface="Consolas" pitchFamily="34" charset="-120"/>
+              </a:rPr>
+              <a:t>+30</a:t>
+            </a:r>
+            <a:endParaRPr lang="en-US" sz="788" dirty="0"/>
+          </a:p>
+        </p:txBody>
+      </p:sp>
+      <p:sp>
+        <p:nvSpPr>
+          <p:cNvPr id="127" name="Text 121"/>
+          <p:cNvSpPr txBox="1"/>
+          <p:nvPr/>
+        </p:nvSpPr>
+        <p:spPr>
+          <a:xfrm>
+            <a:off x="10439400" y="5581650"/>
+            <a:ext cx="457200" cy="120015"/>
+          </a:xfrm>
+          <a:prstGeom prst="rect">
+            <a:avLst/>
+          </a:prstGeom>
+          <a:noFill/>
+          <a:ln/>
+        </p:spPr>
+        <p:txBody>
+          <a:bodyPr wrap="square" lIns="0" tIns="0" rIns="0" bIns="0" rtlCol="0" anchor="t"/>
+          <a:lstStyle/>
+          <a:p>
+            <a:pPr algn="ctr" indent="0" marL="0">
+              <a:lnSpc>
+                <a:spcPts val="945"/>
+              </a:lnSpc>
+              <a:buNone/>
+            </a:pPr>
+            <a:r>
+              <a:rPr lang="en-US" sz="788" dirty="0">
+                <a:solidFill>
+                  <a:srgbClr val="8A8880"/>
+                </a:solidFill>
+                <a:latin typeface="Consolas" pitchFamily="34" charset="0"/>
+                <a:ea typeface="Consolas" pitchFamily="34" charset="-122"/>
+                <a:cs typeface="Consolas" pitchFamily="34" charset="-120"/>
+              </a:rPr>
+              <a:t>+40</a:t>
+            </a:r>
+            <a:endParaRPr lang="en-US" sz="788" dirty="0"/>
+          </a:p>
+        </p:txBody>
+      </p:sp>
+      <p:sp>
+        <p:nvSpPr>
+          <p:cNvPr id="128" name="Text 122"/>
+          <p:cNvSpPr txBox="1"/>
+          <p:nvPr/>
+        </p:nvSpPr>
+        <p:spPr>
+          <a:xfrm>
+            <a:off x="10915650" y="5581650"/>
+            <a:ext cx="228600" cy="120015"/>
+          </a:xfrm>
+          <a:prstGeom prst="rect">
+            <a:avLst/>
+          </a:prstGeom>
+          <a:noFill/>
+          <a:ln/>
+        </p:spPr>
+        <p:txBody>
+          <a:bodyPr wrap="square" lIns="0" tIns="0" rIns="0" bIns="0" rtlCol="0" anchor="t"/>
+          <a:lstStyle/>
+          <a:p>
+            <a:pPr algn="l" indent="0" marL="0">
+              <a:lnSpc>
+                <a:spcPts val="945"/>
+              </a:lnSpc>
+              <a:buNone/>
+            </a:pPr>
+            <a:r>
+              <a:rPr lang="en-US" sz="788" dirty="0">
+                <a:solidFill>
+                  <a:srgbClr val="8A8880"/>
+                </a:solidFill>
+                <a:latin typeface="Malgun Gothic" pitchFamily="34" charset="0"/>
+                <a:ea typeface="Malgun Gothic" pitchFamily="34" charset="-122"/>
+                <a:cs typeface="Malgun Gothic" pitchFamily="34" charset="-120"/>
+              </a:rPr>
+              <a:t>℃</a:t>
+            </a:r>
+            <a:endParaRPr lang="en-US" sz="788" dirty="0"/>
+          </a:p>
+        </p:txBody>
+      </p:sp>
+      <p:sp>
+        <p:nvSpPr>
+          <p:cNvPr id="129" name="Shape 123"/>
+          <p:cNvSpPr/>
+          <p:nvPr/>
+        </p:nvSpPr>
+        <p:spPr>
+          <a:xfrm>
+            <a:off x="8477250" y="4610100"/>
+            <a:ext cx="0" cy="190500"/>
+          </a:xfrm>
+          <a:prstGeom prst="line">
+            <a:avLst/>
+          </a:prstGeom>
+          <a:noFill/>
+          <a:ln w="12700">
+            <a:solidFill>
+              <a:srgbClr val="EFB13C"/>
+            </a:solidFill>
+            <a:prstDash val="solid"/>
+          </a:ln>
+        </p:spPr>
+      </p:sp>
+      <p:sp>
+        <p:nvSpPr>
+          <p:cNvPr id="130" name="Text 124"/>
+          <p:cNvSpPr txBox="1"/>
+          <p:nvPr/>
+        </p:nvSpPr>
+        <p:spPr>
+          <a:xfrm>
+            <a:off x="7048500" y="4438650"/>
+            <a:ext cx="2857500" cy="160973"/>
+          </a:xfrm>
+          <a:prstGeom prst="rect">
+            <a:avLst/>
+          </a:prstGeom>
+          <a:noFill/>
+          <a:ln/>
+        </p:spPr>
+        <p:txBody>
+          <a:bodyPr wrap="square" lIns="0" tIns="0" rIns="0" bIns="0" rtlCol="0" anchor="t"/>
+          <a:lstStyle/>
+          <a:p>
+            <a:pPr algn="ctr" indent="0" marL="0">
+              <a:lnSpc>
+                <a:spcPts val="1268"/>
+              </a:lnSpc>
+              <a:buNone/>
+            </a:pPr>
+            <a:r>
+              <a:rPr lang="en-US" sz="975" b="1" dirty="0">
+                <a:solidFill>
+                  <a:srgbClr val="EFB13C"/>
+                </a:solidFill>
+                <a:latin typeface="Malgun Gothic" pitchFamily="34" charset="0"/>
+                <a:ea typeface="Malgun Gothic" pitchFamily="34" charset="-122"/>
+                <a:cs typeface="Malgun Gothic" pitchFamily="34" charset="-120"/>
+              </a:rPr>
+              <a:t>이 온도만 실제로 시험</a:t>
+            </a:r>
+            <a:endParaRPr lang="en-US" sz="975" dirty="0"/>
+          </a:p>
+        </p:txBody>
+      </p:sp>
+      <p:sp>
+        <p:nvSpPr>
+          <p:cNvPr id="131" name="Shape 125"/>
+          <p:cNvSpPr/>
+          <p:nvPr/>
+        </p:nvSpPr>
+        <p:spPr>
+          <a:xfrm>
+            <a:off x="2000250" y="4514850"/>
+            <a:ext cx="133350" cy="66675"/>
+          </a:xfrm>
+          <a:prstGeom prst="rect">
+            <a:avLst/>
+          </a:prstGeom>
+          <a:solidFill>
+            <a:srgbClr val="718BA6"/>
+          </a:solidFill>
+          <a:ln/>
+        </p:spPr>
+      </p:sp>
+      <p:sp>
+        <p:nvSpPr>
+          <p:cNvPr id="132" name="Text 126"/>
+          <p:cNvSpPr txBox="1"/>
+          <p:nvPr/>
+        </p:nvSpPr>
+        <p:spPr>
+          <a:xfrm>
+            <a:off x="2190750" y="4476750"/>
+            <a:ext cx="3810000" cy="154781"/>
+          </a:xfrm>
+          <a:prstGeom prst="rect">
+            <a:avLst/>
+          </a:prstGeom>
+          <a:noFill/>
+          <a:ln/>
+        </p:spPr>
+        <p:txBody>
+          <a:bodyPr wrap="square" lIns="0" tIns="0" rIns="0" bIns="0" rtlCol="0" anchor="t"/>
+          <a:lstStyle/>
+          <a:p>
+            <a:pPr algn="l" indent="0" marL="0">
+              <a:lnSpc>
+                <a:spcPts val="1219"/>
+              </a:lnSpc>
+              <a:buNone/>
+            </a:pPr>
+            <a:r>
+              <a:rPr lang="en-US" sz="938" dirty="0">
+                <a:solidFill>
+                  <a:srgbClr val="A8BCD1"/>
+                </a:solidFill>
+                <a:latin typeface="Malgun Gothic" pitchFamily="34" charset="0"/>
+                <a:ea typeface="Malgun Gothic" pitchFamily="34" charset="-122"/>
+                <a:cs typeface="Malgun Gothic" pitchFamily="34" charset="-120"/>
+              </a:rPr>
+              <a:t>나머지 60개 온도는 시험하지 않고 같은 값</a:t>
+            </a:r>
+            <a:endParaRPr lang="en-US" sz="938" dirty="0"/>
+          </a:p>
+        </p:txBody>
+      </p:sp>
+      <p:sp>
+        <p:nvSpPr>
+          <p:cNvPr id="133" name="Shape 127"/>
+          <p:cNvSpPr/>
+          <p:nvPr/>
+        </p:nvSpPr>
+        <p:spPr>
+          <a:xfrm>
+            <a:off x="685800" y="6057900"/>
+            <a:ext cx="10820400" cy="0"/>
           </a:xfrm>
           <a:prstGeom prst="line">
             <a:avLst/>
@@ -2522,1421 +4504,41 @@
       </p:sp>
       <p:sp>
         <p:nvSpPr>
-          <p:cNvPr id="53" name="Shape 47"/>
-          <p:cNvSpPr/>
-          <p:nvPr/>
-        </p:nvSpPr>
-        <p:spPr>
-          <a:xfrm>
-            <a:off x="2197100" y="5676900"/>
-            <a:ext cx="0" cy="57150"/>
-          </a:xfrm>
-          <a:prstGeom prst="line">
-            <a:avLst/>
-          </a:prstGeom>
-          <a:noFill/>
-          <a:ln w="12700">
-            <a:solidFill>
-              <a:srgbClr val="22354A"/>
-            </a:solidFill>
-            <a:prstDash val="solid"/>
-          </a:ln>
-        </p:spPr>
-      </p:sp>
-      <p:sp>
-        <p:nvSpPr>
-          <p:cNvPr id="54" name="Shape 48"/>
-          <p:cNvSpPr/>
-          <p:nvPr/>
-        </p:nvSpPr>
-        <p:spPr>
-          <a:xfrm>
-            <a:off x="2343150" y="5676900"/>
-            <a:ext cx="0" cy="57150"/>
-          </a:xfrm>
-          <a:prstGeom prst="line">
-            <a:avLst/>
-          </a:prstGeom>
-          <a:noFill/>
-          <a:ln w="12700">
-            <a:solidFill>
-              <a:srgbClr val="22354A"/>
-            </a:solidFill>
-            <a:prstDash val="solid"/>
-          </a:ln>
-        </p:spPr>
-      </p:sp>
-      <p:sp>
-        <p:nvSpPr>
-          <p:cNvPr id="55" name="Shape 49"/>
-          <p:cNvSpPr/>
-          <p:nvPr/>
-        </p:nvSpPr>
-        <p:spPr>
-          <a:xfrm>
-            <a:off x="2489200" y="5676900"/>
-            <a:ext cx="0" cy="57150"/>
-          </a:xfrm>
-          <a:prstGeom prst="line">
-            <a:avLst/>
-          </a:prstGeom>
-          <a:noFill/>
-          <a:ln w="12700">
-            <a:solidFill>
-              <a:srgbClr val="22354A"/>
-            </a:solidFill>
-            <a:prstDash val="solid"/>
-          </a:ln>
-        </p:spPr>
-      </p:sp>
-      <p:sp>
-        <p:nvSpPr>
-          <p:cNvPr id="56" name="Shape 50"/>
-          <p:cNvSpPr/>
-          <p:nvPr/>
-        </p:nvSpPr>
-        <p:spPr>
-          <a:xfrm>
-            <a:off x="2635250" y="5676900"/>
-            <a:ext cx="0" cy="57150"/>
-          </a:xfrm>
-          <a:prstGeom prst="line">
-            <a:avLst/>
-          </a:prstGeom>
-          <a:noFill/>
-          <a:ln w="12700">
-            <a:solidFill>
-              <a:srgbClr val="22354A"/>
-            </a:solidFill>
-            <a:prstDash val="solid"/>
-          </a:ln>
-        </p:spPr>
-      </p:sp>
-      <p:sp>
-        <p:nvSpPr>
-          <p:cNvPr id="57" name="Shape 51"/>
-          <p:cNvSpPr/>
-          <p:nvPr/>
-        </p:nvSpPr>
-        <p:spPr>
-          <a:xfrm>
-            <a:off x="2781300" y="5676900"/>
-            <a:ext cx="0" cy="57150"/>
-          </a:xfrm>
-          <a:prstGeom prst="line">
-            <a:avLst/>
-          </a:prstGeom>
-          <a:noFill/>
-          <a:ln w="12700">
-            <a:solidFill>
-              <a:srgbClr val="22354A"/>
-            </a:solidFill>
-            <a:prstDash val="solid"/>
-          </a:ln>
-        </p:spPr>
-      </p:sp>
-      <p:sp>
-        <p:nvSpPr>
-          <p:cNvPr id="58" name="Shape 52"/>
-          <p:cNvSpPr/>
-          <p:nvPr/>
-        </p:nvSpPr>
-        <p:spPr>
-          <a:xfrm>
-            <a:off x="2927350" y="5676900"/>
-            <a:ext cx="0" cy="57150"/>
-          </a:xfrm>
-          <a:prstGeom prst="line">
-            <a:avLst/>
-          </a:prstGeom>
-          <a:noFill/>
-          <a:ln w="12700">
-            <a:solidFill>
-              <a:srgbClr val="22354A"/>
-            </a:solidFill>
-            <a:prstDash val="solid"/>
-          </a:ln>
-        </p:spPr>
-      </p:sp>
-      <p:sp>
-        <p:nvSpPr>
-          <p:cNvPr id="59" name="Shape 53"/>
-          <p:cNvSpPr/>
-          <p:nvPr/>
-        </p:nvSpPr>
-        <p:spPr>
-          <a:xfrm>
-            <a:off x="3073400" y="5676900"/>
-            <a:ext cx="0" cy="57150"/>
-          </a:xfrm>
-          <a:prstGeom prst="line">
-            <a:avLst/>
-          </a:prstGeom>
-          <a:noFill/>
-          <a:ln w="12700">
-            <a:solidFill>
-              <a:srgbClr val="22354A"/>
-            </a:solidFill>
-            <a:prstDash val="solid"/>
-          </a:ln>
-        </p:spPr>
-      </p:sp>
-      <p:sp>
-        <p:nvSpPr>
-          <p:cNvPr id="60" name="Shape 54"/>
-          <p:cNvSpPr/>
-          <p:nvPr/>
-        </p:nvSpPr>
-        <p:spPr>
-          <a:xfrm>
-            <a:off x="3219450" y="5676900"/>
-            <a:ext cx="0" cy="57150"/>
-          </a:xfrm>
-          <a:prstGeom prst="line">
-            <a:avLst/>
-          </a:prstGeom>
-          <a:noFill/>
-          <a:ln w="12700">
-            <a:solidFill>
-              <a:srgbClr val="22354A"/>
-            </a:solidFill>
-            <a:prstDash val="solid"/>
-          </a:ln>
-        </p:spPr>
-      </p:sp>
-      <p:sp>
-        <p:nvSpPr>
-          <p:cNvPr id="61" name="Shape 55"/>
-          <p:cNvSpPr/>
-          <p:nvPr/>
-        </p:nvSpPr>
-        <p:spPr>
-          <a:xfrm>
-            <a:off x="3365500" y="5676900"/>
-            <a:ext cx="0" cy="57150"/>
-          </a:xfrm>
-          <a:prstGeom prst="line">
-            <a:avLst/>
-          </a:prstGeom>
-          <a:noFill/>
-          <a:ln w="12700">
-            <a:solidFill>
-              <a:srgbClr val="22354A"/>
-            </a:solidFill>
-            <a:prstDash val="solid"/>
-          </a:ln>
-        </p:spPr>
-      </p:sp>
-      <p:sp>
-        <p:nvSpPr>
-          <p:cNvPr id="62" name="Shape 56"/>
-          <p:cNvSpPr/>
-          <p:nvPr/>
-        </p:nvSpPr>
-        <p:spPr>
-          <a:xfrm>
-            <a:off x="3511550" y="5676900"/>
-            <a:ext cx="0" cy="57150"/>
-          </a:xfrm>
-          <a:prstGeom prst="line">
-            <a:avLst/>
-          </a:prstGeom>
-          <a:noFill/>
-          <a:ln w="12700">
-            <a:solidFill>
-              <a:srgbClr val="22354A"/>
-            </a:solidFill>
-            <a:prstDash val="solid"/>
-          </a:ln>
-        </p:spPr>
-      </p:sp>
-      <p:sp>
-        <p:nvSpPr>
-          <p:cNvPr id="63" name="Shape 57"/>
-          <p:cNvSpPr/>
-          <p:nvPr/>
-        </p:nvSpPr>
-        <p:spPr>
-          <a:xfrm>
-            <a:off x="3657600" y="5676900"/>
-            <a:ext cx="0" cy="57150"/>
-          </a:xfrm>
-          <a:prstGeom prst="line">
-            <a:avLst/>
-          </a:prstGeom>
-          <a:noFill/>
-          <a:ln w="12700">
-            <a:solidFill>
-              <a:srgbClr val="22354A"/>
-            </a:solidFill>
-            <a:prstDash val="solid"/>
-          </a:ln>
-        </p:spPr>
-      </p:sp>
-      <p:sp>
-        <p:nvSpPr>
-          <p:cNvPr id="64" name="Shape 58"/>
-          <p:cNvSpPr/>
-          <p:nvPr/>
-        </p:nvSpPr>
-        <p:spPr>
-          <a:xfrm>
-            <a:off x="3803650" y="5676900"/>
-            <a:ext cx="0" cy="57150"/>
-          </a:xfrm>
-          <a:prstGeom prst="line">
-            <a:avLst/>
-          </a:prstGeom>
-          <a:noFill/>
-          <a:ln w="12700">
-            <a:solidFill>
-              <a:srgbClr val="22354A"/>
-            </a:solidFill>
-            <a:prstDash val="solid"/>
-          </a:ln>
-        </p:spPr>
-      </p:sp>
-      <p:sp>
-        <p:nvSpPr>
-          <p:cNvPr id="65" name="Shape 59"/>
-          <p:cNvSpPr/>
-          <p:nvPr/>
-        </p:nvSpPr>
-        <p:spPr>
-          <a:xfrm>
-            <a:off x="3949700" y="5676900"/>
-            <a:ext cx="0" cy="57150"/>
-          </a:xfrm>
-          <a:prstGeom prst="line">
-            <a:avLst/>
-          </a:prstGeom>
-          <a:noFill/>
-          <a:ln w="12700">
-            <a:solidFill>
-              <a:srgbClr val="22354A"/>
-            </a:solidFill>
-            <a:prstDash val="solid"/>
-          </a:ln>
-        </p:spPr>
-      </p:sp>
-      <p:sp>
-        <p:nvSpPr>
-          <p:cNvPr id="66" name="Shape 60"/>
-          <p:cNvSpPr/>
-          <p:nvPr/>
-        </p:nvSpPr>
-        <p:spPr>
-          <a:xfrm>
-            <a:off x="4095750" y="5676900"/>
-            <a:ext cx="0" cy="57150"/>
-          </a:xfrm>
-          <a:prstGeom prst="line">
-            <a:avLst/>
-          </a:prstGeom>
-          <a:noFill/>
-          <a:ln w="12700">
-            <a:solidFill>
-              <a:srgbClr val="22354A"/>
-            </a:solidFill>
-            <a:prstDash val="solid"/>
-          </a:ln>
-        </p:spPr>
-      </p:sp>
-      <p:sp>
-        <p:nvSpPr>
-          <p:cNvPr id="67" name="Shape 61"/>
-          <p:cNvSpPr/>
-          <p:nvPr/>
-        </p:nvSpPr>
-        <p:spPr>
-          <a:xfrm>
-            <a:off x="4241800" y="5676900"/>
-            <a:ext cx="0" cy="57150"/>
-          </a:xfrm>
-          <a:prstGeom prst="line">
-            <a:avLst/>
-          </a:prstGeom>
-          <a:noFill/>
-          <a:ln w="12700">
-            <a:solidFill>
-              <a:srgbClr val="22354A"/>
-            </a:solidFill>
-            <a:prstDash val="solid"/>
-          </a:ln>
-        </p:spPr>
-      </p:sp>
-      <p:sp>
-        <p:nvSpPr>
-          <p:cNvPr id="68" name="Shape 62"/>
-          <p:cNvSpPr/>
-          <p:nvPr/>
-        </p:nvSpPr>
-        <p:spPr>
-          <a:xfrm>
-            <a:off x="4387850" y="5676900"/>
-            <a:ext cx="0" cy="57150"/>
-          </a:xfrm>
-          <a:prstGeom prst="line">
-            <a:avLst/>
-          </a:prstGeom>
-          <a:noFill/>
-          <a:ln w="12700">
-            <a:solidFill>
-              <a:srgbClr val="22354A"/>
-            </a:solidFill>
-            <a:prstDash val="solid"/>
-          </a:ln>
-        </p:spPr>
-      </p:sp>
-      <p:sp>
-        <p:nvSpPr>
-          <p:cNvPr id="69" name="Shape 63"/>
-          <p:cNvSpPr/>
-          <p:nvPr/>
-        </p:nvSpPr>
-        <p:spPr>
-          <a:xfrm>
-            <a:off x="4533900" y="5676900"/>
-            <a:ext cx="0" cy="57150"/>
-          </a:xfrm>
-          <a:prstGeom prst="line">
-            <a:avLst/>
-          </a:prstGeom>
-          <a:noFill/>
-          <a:ln w="12700">
-            <a:solidFill>
-              <a:srgbClr val="22354A"/>
-            </a:solidFill>
-            <a:prstDash val="solid"/>
-          </a:ln>
-        </p:spPr>
-      </p:sp>
-      <p:sp>
-        <p:nvSpPr>
-          <p:cNvPr id="70" name="Shape 64"/>
-          <p:cNvSpPr/>
-          <p:nvPr/>
-        </p:nvSpPr>
-        <p:spPr>
-          <a:xfrm>
-            <a:off x="4679950" y="5676900"/>
-            <a:ext cx="0" cy="57150"/>
-          </a:xfrm>
-          <a:prstGeom prst="line">
-            <a:avLst/>
-          </a:prstGeom>
-          <a:noFill/>
-          <a:ln w="12700">
-            <a:solidFill>
-              <a:srgbClr val="22354A"/>
-            </a:solidFill>
-            <a:prstDash val="solid"/>
-          </a:ln>
-        </p:spPr>
-      </p:sp>
-      <p:sp>
-        <p:nvSpPr>
-          <p:cNvPr id="71" name="Shape 65"/>
-          <p:cNvSpPr/>
-          <p:nvPr/>
-        </p:nvSpPr>
-        <p:spPr>
-          <a:xfrm>
-            <a:off x="4826000" y="5676900"/>
-            <a:ext cx="0" cy="57150"/>
-          </a:xfrm>
-          <a:prstGeom prst="line">
-            <a:avLst/>
-          </a:prstGeom>
-          <a:noFill/>
-          <a:ln w="12700">
-            <a:solidFill>
-              <a:srgbClr val="22354A"/>
-            </a:solidFill>
-            <a:prstDash val="solid"/>
-          </a:ln>
-        </p:spPr>
-      </p:sp>
-      <p:sp>
-        <p:nvSpPr>
-          <p:cNvPr id="72" name="Shape 66"/>
-          <p:cNvSpPr/>
-          <p:nvPr/>
-        </p:nvSpPr>
-        <p:spPr>
-          <a:xfrm>
-            <a:off x="4972050" y="5676900"/>
-            <a:ext cx="0" cy="57150"/>
-          </a:xfrm>
-          <a:prstGeom prst="line">
-            <a:avLst/>
-          </a:prstGeom>
-          <a:noFill/>
-          <a:ln w="12700">
-            <a:solidFill>
-              <a:srgbClr val="22354A"/>
-            </a:solidFill>
-            <a:prstDash val="solid"/>
-          </a:ln>
-        </p:spPr>
-      </p:sp>
-      <p:sp>
-        <p:nvSpPr>
-          <p:cNvPr id="73" name="Shape 67"/>
-          <p:cNvSpPr/>
-          <p:nvPr/>
-        </p:nvSpPr>
-        <p:spPr>
-          <a:xfrm>
-            <a:off x="5118100" y="5676900"/>
-            <a:ext cx="0" cy="57150"/>
-          </a:xfrm>
-          <a:prstGeom prst="line">
-            <a:avLst/>
-          </a:prstGeom>
-          <a:noFill/>
-          <a:ln w="12700">
-            <a:solidFill>
-              <a:srgbClr val="22354A"/>
-            </a:solidFill>
-            <a:prstDash val="solid"/>
-          </a:ln>
-        </p:spPr>
-      </p:sp>
-      <p:sp>
-        <p:nvSpPr>
-          <p:cNvPr id="74" name="Shape 68"/>
-          <p:cNvSpPr/>
-          <p:nvPr/>
-        </p:nvSpPr>
-        <p:spPr>
-          <a:xfrm>
-            <a:off x="5264150" y="5676900"/>
-            <a:ext cx="0" cy="57150"/>
-          </a:xfrm>
-          <a:prstGeom prst="line">
-            <a:avLst/>
-          </a:prstGeom>
-          <a:noFill/>
-          <a:ln w="12700">
-            <a:solidFill>
-              <a:srgbClr val="22354A"/>
-            </a:solidFill>
-            <a:prstDash val="solid"/>
-          </a:ln>
-        </p:spPr>
-      </p:sp>
-      <p:sp>
-        <p:nvSpPr>
-          <p:cNvPr id="75" name="Shape 69"/>
-          <p:cNvSpPr/>
-          <p:nvPr/>
-        </p:nvSpPr>
-        <p:spPr>
-          <a:xfrm>
-            <a:off x="5410200" y="5676900"/>
-            <a:ext cx="0" cy="57150"/>
-          </a:xfrm>
-          <a:prstGeom prst="line">
-            <a:avLst/>
-          </a:prstGeom>
-          <a:noFill/>
-          <a:ln w="12700">
-            <a:solidFill>
-              <a:srgbClr val="22354A"/>
-            </a:solidFill>
-            <a:prstDash val="solid"/>
-          </a:ln>
-        </p:spPr>
-      </p:sp>
-      <p:sp>
-        <p:nvSpPr>
-          <p:cNvPr id="76" name="Shape 70"/>
-          <p:cNvSpPr/>
-          <p:nvPr/>
-        </p:nvSpPr>
-        <p:spPr>
-          <a:xfrm>
-            <a:off x="5556250" y="5676900"/>
-            <a:ext cx="0" cy="57150"/>
-          </a:xfrm>
-          <a:prstGeom prst="line">
-            <a:avLst/>
-          </a:prstGeom>
-          <a:noFill/>
-          <a:ln w="12700">
-            <a:solidFill>
-              <a:srgbClr val="22354A"/>
-            </a:solidFill>
-            <a:prstDash val="solid"/>
-          </a:ln>
-        </p:spPr>
-      </p:sp>
-      <p:sp>
-        <p:nvSpPr>
-          <p:cNvPr id="77" name="Shape 71"/>
-          <p:cNvSpPr/>
-          <p:nvPr/>
-        </p:nvSpPr>
-        <p:spPr>
-          <a:xfrm>
-            <a:off x="5702300" y="5676900"/>
-            <a:ext cx="0" cy="57150"/>
-          </a:xfrm>
-          <a:prstGeom prst="line">
-            <a:avLst/>
-          </a:prstGeom>
-          <a:noFill/>
-          <a:ln w="12700">
-            <a:solidFill>
-              <a:srgbClr val="22354A"/>
-            </a:solidFill>
-            <a:prstDash val="solid"/>
-          </a:ln>
-        </p:spPr>
-      </p:sp>
-      <p:sp>
-        <p:nvSpPr>
-          <p:cNvPr id="78" name="Shape 72"/>
-          <p:cNvSpPr/>
-          <p:nvPr/>
-        </p:nvSpPr>
-        <p:spPr>
-          <a:xfrm>
-            <a:off x="5848350" y="5676900"/>
-            <a:ext cx="0" cy="57150"/>
-          </a:xfrm>
-          <a:prstGeom prst="line">
-            <a:avLst/>
-          </a:prstGeom>
-          <a:noFill/>
-          <a:ln w="12700">
-            <a:solidFill>
-              <a:srgbClr val="22354A"/>
-            </a:solidFill>
-            <a:prstDash val="solid"/>
-          </a:ln>
-        </p:spPr>
-      </p:sp>
-      <p:sp>
-        <p:nvSpPr>
-          <p:cNvPr id="79" name="Shape 73"/>
-          <p:cNvSpPr/>
-          <p:nvPr/>
-        </p:nvSpPr>
-        <p:spPr>
-          <a:xfrm>
-            <a:off x="5994400" y="5676900"/>
-            <a:ext cx="0" cy="57150"/>
-          </a:xfrm>
-          <a:prstGeom prst="line">
-            <a:avLst/>
-          </a:prstGeom>
-          <a:noFill/>
-          <a:ln w="12700">
-            <a:solidFill>
-              <a:srgbClr val="22354A"/>
-            </a:solidFill>
-            <a:prstDash val="solid"/>
-          </a:ln>
-        </p:spPr>
-      </p:sp>
-      <p:sp>
-        <p:nvSpPr>
-          <p:cNvPr id="80" name="Shape 74"/>
-          <p:cNvSpPr/>
-          <p:nvPr/>
-        </p:nvSpPr>
-        <p:spPr>
-          <a:xfrm>
-            <a:off x="6140450" y="5676900"/>
-            <a:ext cx="0" cy="57150"/>
-          </a:xfrm>
-          <a:prstGeom prst="line">
-            <a:avLst/>
-          </a:prstGeom>
-          <a:noFill/>
-          <a:ln w="12700">
-            <a:solidFill>
-              <a:srgbClr val="22354A"/>
-            </a:solidFill>
-            <a:prstDash val="solid"/>
-          </a:ln>
-        </p:spPr>
-      </p:sp>
-      <p:sp>
-        <p:nvSpPr>
-          <p:cNvPr id="81" name="Shape 75"/>
-          <p:cNvSpPr/>
-          <p:nvPr/>
-        </p:nvSpPr>
-        <p:spPr>
-          <a:xfrm>
-            <a:off x="6286500" y="5676900"/>
-            <a:ext cx="0" cy="57150"/>
-          </a:xfrm>
-          <a:prstGeom prst="line">
-            <a:avLst/>
-          </a:prstGeom>
-          <a:noFill/>
-          <a:ln w="12700">
-            <a:solidFill>
-              <a:srgbClr val="22354A"/>
-            </a:solidFill>
-            <a:prstDash val="solid"/>
-          </a:ln>
-        </p:spPr>
-      </p:sp>
-      <p:sp>
-        <p:nvSpPr>
-          <p:cNvPr id="82" name="Shape 76"/>
-          <p:cNvSpPr/>
-          <p:nvPr/>
-        </p:nvSpPr>
-        <p:spPr>
-          <a:xfrm>
-            <a:off x="6432550" y="5676900"/>
-            <a:ext cx="0" cy="57150"/>
-          </a:xfrm>
-          <a:prstGeom prst="line">
-            <a:avLst/>
-          </a:prstGeom>
-          <a:noFill/>
-          <a:ln w="12700">
-            <a:solidFill>
-              <a:srgbClr val="22354A"/>
-            </a:solidFill>
-            <a:prstDash val="solid"/>
-          </a:ln>
-        </p:spPr>
-      </p:sp>
-      <p:sp>
-        <p:nvSpPr>
-          <p:cNvPr id="83" name="Shape 77"/>
-          <p:cNvSpPr/>
-          <p:nvPr/>
-        </p:nvSpPr>
-        <p:spPr>
-          <a:xfrm>
-            <a:off x="6578600" y="5676900"/>
-            <a:ext cx="0" cy="57150"/>
-          </a:xfrm>
-          <a:prstGeom prst="line">
-            <a:avLst/>
-          </a:prstGeom>
-          <a:noFill/>
-          <a:ln w="12700">
-            <a:solidFill>
-              <a:srgbClr val="22354A"/>
-            </a:solidFill>
-            <a:prstDash val="solid"/>
-          </a:ln>
-        </p:spPr>
-      </p:sp>
-      <p:sp>
-        <p:nvSpPr>
-          <p:cNvPr id="84" name="Shape 78"/>
-          <p:cNvSpPr/>
-          <p:nvPr/>
-        </p:nvSpPr>
-        <p:spPr>
-          <a:xfrm>
-            <a:off x="6724650" y="5676900"/>
-            <a:ext cx="0" cy="57150"/>
-          </a:xfrm>
-          <a:prstGeom prst="line">
-            <a:avLst/>
-          </a:prstGeom>
-          <a:noFill/>
-          <a:ln w="12700">
-            <a:solidFill>
-              <a:srgbClr val="22354A"/>
-            </a:solidFill>
-            <a:prstDash val="solid"/>
-          </a:ln>
-        </p:spPr>
-      </p:sp>
-      <p:sp>
-        <p:nvSpPr>
-          <p:cNvPr id="85" name="Shape 79"/>
-          <p:cNvSpPr/>
-          <p:nvPr/>
-        </p:nvSpPr>
-        <p:spPr>
-          <a:xfrm>
-            <a:off x="6870700" y="5676900"/>
-            <a:ext cx="0" cy="57150"/>
-          </a:xfrm>
-          <a:prstGeom prst="line">
-            <a:avLst/>
-          </a:prstGeom>
-          <a:noFill/>
-          <a:ln w="12700">
-            <a:solidFill>
-              <a:srgbClr val="22354A"/>
-            </a:solidFill>
-            <a:prstDash val="solid"/>
-          </a:ln>
-        </p:spPr>
-      </p:sp>
-      <p:sp>
-        <p:nvSpPr>
-          <p:cNvPr id="86" name="Shape 80"/>
-          <p:cNvSpPr/>
-          <p:nvPr/>
-        </p:nvSpPr>
-        <p:spPr>
-          <a:xfrm>
-            <a:off x="7016750" y="5676900"/>
-            <a:ext cx="0" cy="57150"/>
-          </a:xfrm>
-          <a:prstGeom prst="line">
-            <a:avLst/>
-          </a:prstGeom>
-          <a:noFill/>
-          <a:ln w="12700">
-            <a:solidFill>
-              <a:srgbClr val="22354A"/>
-            </a:solidFill>
-            <a:prstDash val="solid"/>
-          </a:ln>
-        </p:spPr>
-      </p:sp>
-      <p:sp>
-        <p:nvSpPr>
-          <p:cNvPr id="87" name="Shape 81"/>
-          <p:cNvSpPr/>
-          <p:nvPr/>
-        </p:nvSpPr>
-        <p:spPr>
-          <a:xfrm>
-            <a:off x="7162800" y="5676900"/>
-            <a:ext cx="0" cy="57150"/>
-          </a:xfrm>
-          <a:prstGeom prst="line">
-            <a:avLst/>
-          </a:prstGeom>
-          <a:noFill/>
-          <a:ln w="12700">
-            <a:solidFill>
-              <a:srgbClr val="22354A"/>
-            </a:solidFill>
-            <a:prstDash val="solid"/>
-          </a:ln>
-        </p:spPr>
-      </p:sp>
-      <p:sp>
-        <p:nvSpPr>
-          <p:cNvPr id="88" name="Shape 82"/>
-          <p:cNvSpPr/>
-          <p:nvPr/>
-        </p:nvSpPr>
-        <p:spPr>
-          <a:xfrm>
-            <a:off x="7308850" y="5676900"/>
-            <a:ext cx="0" cy="57150"/>
-          </a:xfrm>
-          <a:prstGeom prst="line">
-            <a:avLst/>
-          </a:prstGeom>
-          <a:noFill/>
-          <a:ln w="12700">
-            <a:solidFill>
-              <a:srgbClr val="22354A"/>
-            </a:solidFill>
-            <a:prstDash val="solid"/>
-          </a:ln>
-        </p:spPr>
-      </p:sp>
-      <p:sp>
-        <p:nvSpPr>
-          <p:cNvPr id="89" name="Shape 83"/>
-          <p:cNvSpPr/>
-          <p:nvPr/>
-        </p:nvSpPr>
-        <p:spPr>
-          <a:xfrm>
-            <a:off x="7454900" y="5676900"/>
-            <a:ext cx="0" cy="57150"/>
-          </a:xfrm>
-          <a:prstGeom prst="line">
-            <a:avLst/>
-          </a:prstGeom>
-          <a:noFill/>
-          <a:ln w="12700">
-            <a:solidFill>
-              <a:srgbClr val="22354A"/>
-            </a:solidFill>
-            <a:prstDash val="solid"/>
-          </a:ln>
-        </p:spPr>
-      </p:sp>
-      <p:sp>
-        <p:nvSpPr>
-          <p:cNvPr id="90" name="Shape 84"/>
-          <p:cNvSpPr/>
-          <p:nvPr/>
-        </p:nvSpPr>
-        <p:spPr>
-          <a:xfrm>
-            <a:off x="7600950" y="5676900"/>
-            <a:ext cx="0" cy="57150"/>
-          </a:xfrm>
-          <a:prstGeom prst="line">
-            <a:avLst/>
-          </a:prstGeom>
-          <a:noFill/>
-          <a:ln w="12700">
-            <a:solidFill>
-              <a:srgbClr val="22354A"/>
-            </a:solidFill>
-            <a:prstDash val="solid"/>
-          </a:ln>
-        </p:spPr>
-      </p:sp>
-      <p:sp>
-        <p:nvSpPr>
-          <p:cNvPr id="91" name="Shape 85"/>
-          <p:cNvSpPr/>
-          <p:nvPr/>
-        </p:nvSpPr>
-        <p:spPr>
-          <a:xfrm>
-            <a:off x="7747000" y="5676900"/>
-            <a:ext cx="0" cy="57150"/>
-          </a:xfrm>
-          <a:prstGeom prst="line">
-            <a:avLst/>
-          </a:prstGeom>
-          <a:noFill/>
-          <a:ln w="12700">
-            <a:solidFill>
-              <a:srgbClr val="22354A"/>
-            </a:solidFill>
-            <a:prstDash val="solid"/>
-          </a:ln>
-        </p:spPr>
-      </p:sp>
-      <p:sp>
-        <p:nvSpPr>
-          <p:cNvPr id="92" name="Shape 86"/>
-          <p:cNvSpPr/>
-          <p:nvPr/>
-        </p:nvSpPr>
-        <p:spPr>
-          <a:xfrm>
-            <a:off x="7893050" y="5676900"/>
-            <a:ext cx="0" cy="57150"/>
-          </a:xfrm>
-          <a:prstGeom prst="line">
-            <a:avLst/>
-          </a:prstGeom>
-          <a:noFill/>
-          <a:ln w="12700">
-            <a:solidFill>
-              <a:srgbClr val="22354A"/>
-            </a:solidFill>
-            <a:prstDash val="solid"/>
-          </a:ln>
-        </p:spPr>
-      </p:sp>
-      <p:sp>
-        <p:nvSpPr>
-          <p:cNvPr id="93" name="Shape 87"/>
-          <p:cNvSpPr/>
-          <p:nvPr/>
-        </p:nvSpPr>
-        <p:spPr>
-          <a:xfrm>
-            <a:off x="8039100" y="5676900"/>
-            <a:ext cx="0" cy="57150"/>
-          </a:xfrm>
-          <a:prstGeom prst="line">
-            <a:avLst/>
-          </a:prstGeom>
-          <a:noFill/>
-          <a:ln w="12700">
-            <a:solidFill>
-              <a:srgbClr val="22354A"/>
-            </a:solidFill>
-            <a:prstDash val="solid"/>
-          </a:ln>
-        </p:spPr>
-      </p:sp>
-      <p:sp>
-        <p:nvSpPr>
-          <p:cNvPr id="94" name="Shape 88"/>
-          <p:cNvSpPr/>
-          <p:nvPr/>
-        </p:nvSpPr>
-        <p:spPr>
-          <a:xfrm>
-            <a:off x="8185150" y="5676900"/>
-            <a:ext cx="0" cy="57150"/>
-          </a:xfrm>
-          <a:prstGeom prst="line">
-            <a:avLst/>
-          </a:prstGeom>
-          <a:noFill/>
-          <a:ln w="12700">
-            <a:solidFill>
-              <a:srgbClr val="22354A"/>
-            </a:solidFill>
-            <a:prstDash val="solid"/>
-          </a:ln>
-        </p:spPr>
-      </p:sp>
-      <p:sp>
-        <p:nvSpPr>
-          <p:cNvPr id="95" name="Shape 89"/>
-          <p:cNvSpPr/>
-          <p:nvPr/>
-        </p:nvSpPr>
-        <p:spPr>
-          <a:xfrm>
-            <a:off x="8331200" y="5676900"/>
-            <a:ext cx="0" cy="57150"/>
-          </a:xfrm>
-          <a:prstGeom prst="line">
-            <a:avLst/>
-          </a:prstGeom>
-          <a:noFill/>
-          <a:ln w="12700">
-            <a:solidFill>
-              <a:srgbClr val="22354A"/>
-            </a:solidFill>
-            <a:prstDash val="solid"/>
-          </a:ln>
-        </p:spPr>
-      </p:sp>
-      <p:sp>
-        <p:nvSpPr>
-          <p:cNvPr id="96" name="Shape 90"/>
-          <p:cNvSpPr/>
-          <p:nvPr/>
-        </p:nvSpPr>
-        <p:spPr>
-          <a:xfrm>
-            <a:off x="8477250" y="5600700"/>
-            <a:ext cx="0" cy="133350"/>
-          </a:xfrm>
-          <a:prstGeom prst="line">
-            <a:avLst/>
-          </a:prstGeom>
-          <a:noFill/>
-          <a:ln w="25400">
-            <a:solidFill>
-              <a:srgbClr val="EFB13C"/>
-            </a:solidFill>
-            <a:prstDash val="solid"/>
-          </a:ln>
-        </p:spPr>
-      </p:sp>
-      <p:sp>
-        <p:nvSpPr>
-          <p:cNvPr id="97" name="Shape 91"/>
-          <p:cNvSpPr/>
-          <p:nvPr/>
-        </p:nvSpPr>
-        <p:spPr>
-          <a:xfrm>
-            <a:off x="8623300" y="5676900"/>
-            <a:ext cx="0" cy="57150"/>
-          </a:xfrm>
-          <a:prstGeom prst="line">
-            <a:avLst/>
-          </a:prstGeom>
-          <a:noFill/>
-          <a:ln w="12700">
-            <a:solidFill>
-              <a:srgbClr val="22354A"/>
-            </a:solidFill>
-            <a:prstDash val="solid"/>
-          </a:ln>
-        </p:spPr>
-      </p:sp>
-      <p:sp>
-        <p:nvSpPr>
-          <p:cNvPr id="98" name="Shape 92"/>
-          <p:cNvSpPr/>
-          <p:nvPr/>
-        </p:nvSpPr>
-        <p:spPr>
-          <a:xfrm>
-            <a:off x="8769350" y="5676900"/>
-            <a:ext cx="0" cy="57150"/>
-          </a:xfrm>
-          <a:prstGeom prst="line">
-            <a:avLst/>
-          </a:prstGeom>
-          <a:noFill/>
-          <a:ln w="12700">
-            <a:solidFill>
-              <a:srgbClr val="22354A"/>
-            </a:solidFill>
-            <a:prstDash val="solid"/>
-          </a:ln>
-        </p:spPr>
-      </p:sp>
-      <p:sp>
-        <p:nvSpPr>
-          <p:cNvPr id="99" name="Shape 93"/>
-          <p:cNvSpPr/>
-          <p:nvPr/>
-        </p:nvSpPr>
-        <p:spPr>
-          <a:xfrm>
-            <a:off x="8915400" y="5676900"/>
-            <a:ext cx="0" cy="57150"/>
-          </a:xfrm>
-          <a:prstGeom prst="line">
-            <a:avLst/>
-          </a:prstGeom>
-          <a:noFill/>
-          <a:ln w="12700">
-            <a:solidFill>
-              <a:srgbClr val="22354A"/>
-            </a:solidFill>
-            <a:prstDash val="solid"/>
-          </a:ln>
-        </p:spPr>
-      </p:sp>
-      <p:sp>
-        <p:nvSpPr>
-          <p:cNvPr id="100" name="Shape 94"/>
-          <p:cNvSpPr/>
-          <p:nvPr/>
-        </p:nvSpPr>
-        <p:spPr>
-          <a:xfrm>
-            <a:off x="9061450" y="5676900"/>
-            <a:ext cx="0" cy="57150"/>
-          </a:xfrm>
-          <a:prstGeom prst="line">
-            <a:avLst/>
-          </a:prstGeom>
-          <a:noFill/>
-          <a:ln w="12700">
-            <a:solidFill>
-              <a:srgbClr val="22354A"/>
-            </a:solidFill>
-            <a:prstDash val="solid"/>
-          </a:ln>
-        </p:spPr>
-      </p:sp>
-      <p:sp>
-        <p:nvSpPr>
-          <p:cNvPr id="101" name="Shape 95"/>
-          <p:cNvSpPr/>
-          <p:nvPr/>
-        </p:nvSpPr>
-        <p:spPr>
-          <a:xfrm>
-            <a:off x="9207500" y="5676900"/>
-            <a:ext cx="0" cy="57150"/>
-          </a:xfrm>
-          <a:prstGeom prst="line">
-            <a:avLst/>
-          </a:prstGeom>
-          <a:noFill/>
-          <a:ln w="12700">
-            <a:solidFill>
-              <a:srgbClr val="22354A"/>
-            </a:solidFill>
-            <a:prstDash val="solid"/>
-          </a:ln>
-        </p:spPr>
-      </p:sp>
-      <p:sp>
-        <p:nvSpPr>
-          <p:cNvPr id="102" name="Shape 96"/>
-          <p:cNvSpPr/>
-          <p:nvPr/>
-        </p:nvSpPr>
-        <p:spPr>
-          <a:xfrm>
-            <a:off x="9353550" y="5676900"/>
-            <a:ext cx="0" cy="57150"/>
-          </a:xfrm>
-          <a:prstGeom prst="line">
-            <a:avLst/>
-          </a:prstGeom>
-          <a:noFill/>
-          <a:ln w="12700">
-            <a:solidFill>
-              <a:srgbClr val="22354A"/>
-            </a:solidFill>
-            <a:prstDash val="solid"/>
-          </a:ln>
-        </p:spPr>
-      </p:sp>
-      <p:sp>
-        <p:nvSpPr>
-          <p:cNvPr id="103" name="Shape 97"/>
-          <p:cNvSpPr/>
-          <p:nvPr/>
-        </p:nvSpPr>
-        <p:spPr>
-          <a:xfrm>
-            <a:off x="9499600" y="5676900"/>
-            <a:ext cx="0" cy="57150"/>
-          </a:xfrm>
-          <a:prstGeom prst="line">
-            <a:avLst/>
-          </a:prstGeom>
-          <a:noFill/>
-          <a:ln w="12700">
-            <a:solidFill>
-              <a:srgbClr val="22354A"/>
-            </a:solidFill>
-            <a:prstDash val="solid"/>
-          </a:ln>
-        </p:spPr>
-      </p:sp>
-      <p:sp>
-        <p:nvSpPr>
-          <p:cNvPr id="104" name="Shape 98"/>
-          <p:cNvSpPr/>
-          <p:nvPr/>
-        </p:nvSpPr>
-        <p:spPr>
-          <a:xfrm>
-            <a:off x="9645650" y="5676900"/>
-            <a:ext cx="0" cy="57150"/>
-          </a:xfrm>
-          <a:prstGeom prst="line">
-            <a:avLst/>
-          </a:prstGeom>
-          <a:noFill/>
-          <a:ln w="12700">
-            <a:solidFill>
-              <a:srgbClr val="22354A"/>
-            </a:solidFill>
-            <a:prstDash val="solid"/>
-          </a:ln>
-        </p:spPr>
-      </p:sp>
-      <p:sp>
-        <p:nvSpPr>
-          <p:cNvPr id="105" name="Shape 99"/>
-          <p:cNvSpPr/>
-          <p:nvPr/>
-        </p:nvSpPr>
-        <p:spPr>
-          <a:xfrm>
-            <a:off x="9791700" y="5676900"/>
-            <a:ext cx="0" cy="57150"/>
-          </a:xfrm>
-          <a:prstGeom prst="line">
-            <a:avLst/>
-          </a:prstGeom>
-          <a:noFill/>
-          <a:ln w="12700">
-            <a:solidFill>
-              <a:srgbClr val="22354A"/>
-            </a:solidFill>
-            <a:prstDash val="solid"/>
-          </a:ln>
-        </p:spPr>
-      </p:sp>
-      <p:sp>
-        <p:nvSpPr>
-          <p:cNvPr id="106" name="Shape 100"/>
-          <p:cNvSpPr/>
-          <p:nvPr/>
-        </p:nvSpPr>
-        <p:spPr>
-          <a:xfrm>
-            <a:off x="9937750" y="5676900"/>
-            <a:ext cx="0" cy="57150"/>
-          </a:xfrm>
-          <a:prstGeom prst="line">
-            <a:avLst/>
-          </a:prstGeom>
-          <a:noFill/>
-          <a:ln w="12700">
-            <a:solidFill>
-              <a:srgbClr val="22354A"/>
-            </a:solidFill>
-            <a:prstDash val="solid"/>
-          </a:ln>
-        </p:spPr>
-      </p:sp>
-      <p:sp>
-        <p:nvSpPr>
-          <p:cNvPr id="107" name="Shape 101"/>
-          <p:cNvSpPr/>
-          <p:nvPr/>
-        </p:nvSpPr>
-        <p:spPr>
-          <a:xfrm>
-            <a:off x="10083800" y="5676900"/>
-            <a:ext cx="0" cy="57150"/>
-          </a:xfrm>
-          <a:prstGeom prst="line">
-            <a:avLst/>
-          </a:prstGeom>
-          <a:noFill/>
-          <a:ln w="12700">
-            <a:solidFill>
-              <a:srgbClr val="22354A"/>
-            </a:solidFill>
-            <a:prstDash val="solid"/>
-          </a:ln>
-        </p:spPr>
-      </p:sp>
-      <p:sp>
-        <p:nvSpPr>
-          <p:cNvPr id="108" name="Shape 102"/>
-          <p:cNvSpPr/>
-          <p:nvPr/>
-        </p:nvSpPr>
-        <p:spPr>
-          <a:xfrm>
-            <a:off x="10229850" y="5676900"/>
-            <a:ext cx="0" cy="57150"/>
-          </a:xfrm>
-          <a:prstGeom prst="line">
-            <a:avLst/>
-          </a:prstGeom>
-          <a:noFill/>
-          <a:ln w="12700">
-            <a:solidFill>
-              <a:srgbClr val="22354A"/>
-            </a:solidFill>
-            <a:prstDash val="solid"/>
-          </a:ln>
-        </p:spPr>
-      </p:sp>
-      <p:sp>
-        <p:nvSpPr>
-          <p:cNvPr id="109" name="Shape 103"/>
-          <p:cNvSpPr/>
-          <p:nvPr/>
-        </p:nvSpPr>
-        <p:spPr>
-          <a:xfrm>
-            <a:off x="10375900" y="5676900"/>
-            <a:ext cx="0" cy="57150"/>
-          </a:xfrm>
-          <a:prstGeom prst="line">
-            <a:avLst/>
-          </a:prstGeom>
-          <a:noFill/>
-          <a:ln w="12700">
-            <a:solidFill>
-              <a:srgbClr val="22354A"/>
-            </a:solidFill>
-            <a:prstDash val="solid"/>
-          </a:ln>
-        </p:spPr>
-      </p:sp>
-      <p:sp>
-        <p:nvSpPr>
-          <p:cNvPr id="110" name="Shape 104"/>
-          <p:cNvSpPr/>
-          <p:nvPr/>
-        </p:nvSpPr>
-        <p:spPr>
-          <a:xfrm>
-            <a:off x="10521950" y="5676900"/>
-            <a:ext cx="0" cy="57150"/>
-          </a:xfrm>
-          <a:prstGeom prst="line">
-            <a:avLst/>
-          </a:prstGeom>
-          <a:noFill/>
-          <a:ln w="12700">
-            <a:solidFill>
-              <a:srgbClr val="22354A"/>
-            </a:solidFill>
-            <a:prstDash val="solid"/>
-          </a:ln>
-        </p:spPr>
-      </p:sp>
-      <p:sp>
-        <p:nvSpPr>
-          <p:cNvPr id="111" name="Shape 105"/>
-          <p:cNvSpPr/>
-          <p:nvPr/>
-        </p:nvSpPr>
-        <p:spPr>
-          <a:xfrm>
-            <a:off x="10668000" y="5676900"/>
-            <a:ext cx="0" cy="57150"/>
-          </a:xfrm>
-          <a:prstGeom prst="line">
-            <a:avLst/>
-          </a:prstGeom>
-          <a:noFill/>
-          <a:ln w="12700">
-            <a:solidFill>
-              <a:srgbClr val="22354A"/>
-            </a:solidFill>
-            <a:prstDash val="solid"/>
-          </a:ln>
-        </p:spPr>
-      </p:sp>
-      <p:sp>
-        <p:nvSpPr>
-          <p:cNvPr id="112" name="Shape 106"/>
-          <p:cNvSpPr/>
-          <p:nvPr/>
-        </p:nvSpPr>
-        <p:spPr>
-          <a:xfrm>
-            <a:off x="1828800" y="5734050"/>
-            <a:ext cx="8915400" cy="0"/>
-          </a:xfrm>
-          <a:prstGeom prst="line">
-            <a:avLst/>
-          </a:prstGeom>
-          <a:noFill/>
-          <a:ln w="12700">
-            <a:solidFill>
-              <a:srgbClr val="22354A"/>
-            </a:solidFill>
-            <a:prstDash val="solid"/>
-          </a:ln>
-        </p:spPr>
-      </p:sp>
-      <p:sp>
-        <p:nvSpPr>
-          <p:cNvPr id="113" name="Text 107"/>
-          <p:cNvSpPr txBox="1"/>
-          <p:nvPr/>
-        </p:nvSpPr>
-        <p:spPr>
-          <a:xfrm>
-            <a:off x="1676400" y="5800725"/>
-            <a:ext cx="457200" cy="120015"/>
-          </a:xfrm>
-          <a:prstGeom prst="rect">
-            <a:avLst/>
-          </a:prstGeom>
-          <a:noFill/>
-          <a:ln/>
-        </p:spPr>
-        <p:txBody>
-          <a:bodyPr wrap="square" lIns="0" tIns="0" rIns="0" bIns="0" rtlCol="0" anchor="t"/>
-          <a:lstStyle/>
-          <a:p>
-            <a:pPr algn="ctr" indent="0" marL="0">
+          <p:cNvPr id="134" name="Text 128"/>
+          <p:cNvSpPr txBox="1"/>
+          <p:nvPr/>
+        </p:nvSpPr>
+        <p:spPr>
+          <a:xfrm>
+            <a:off x="685800" y="6267450"/>
+            <a:ext cx="476250" cy="120015"/>
+          </a:xfrm>
+          <a:prstGeom prst="rect">
+            <a:avLst/>
+          </a:prstGeom>
+          <a:noFill/>
+          <a:ln/>
+        </p:spPr>
+        <p:txBody>
+          <a:bodyPr wrap="square" lIns="0" tIns="0" rIns="0" bIns="0" rtlCol="0" anchor="t"/>
+          <a:lstStyle/>
+          <a:p>
+            <a:pPr algn="l" indent="0" marL="0">
               <a:lnSpc>
                 <a:spcPts val="945"/>
               </a:lnSpc>
               <a:buNone/>
             </a:pPr>
             <a:r>
-              <a:rPr lang="en-US" sz="788" dirty="0">
-                <a:solidFill>
-                  <a:srgbClr val="8A8880"/>
+              <a:rPr lang="en-US" sz="788" b="1" spc="180" kern="0" dirty="0">
+                <a:solidFill>
+                  <a:srgbClr val="EFB13C"/>
                 </a:solidFill>
                 <a:latin typeface="Consolas" pitchFamily="34" charset="0"/>
                 <a:ea typeface="Consolas" pitchFamily="34" charset="-122"/>
                 <a:cs typeface="Consolas" pitchFamily="34" charset="-120"/>
               </a:rPr>
-              <a:t>-20</a:t>
+              <a:t>결론</a:t>
             </a:r>
             <a:endParaRPr lang="en-US" sz="788" dirty="0"/>
           </a:p>
@@ -3944,536 +4546,7 @@
       </p:sp>
       <p:sp>
         <p:nvSpPr>
-          <p:cNvPr id="114" name="Text 108"/>
-          <p:cNvSpPr txBox="1"/>
-          <p:nvPr/>
-        </p:nvSpPr>
-        <p:spPr>
-          <a:xfrm>
-            <a:off x="3136900" y="5800725"/>
-            <a:ext cx="457200" cy="120015"/>
-          </a:xfrm>
-          <a:prstGeom prst="rect">
-            <a:avLst/>
-          </a:prstGeom>
-          <a:noFill/>
-          <a:ln/>
-        </p:spPr>
-        <p:txBody>
-          <a:bodyPr wrap="square" lIns="0" tIns="0" rIns="0" bIns="0" rtlCol="0" anchor="t"/>
-          <a:lstStyle/>
-          <a:p>
-            <a:pPr algn="ctr" indent="0" marL="0">
-              <a:lnSpc>
-                <a:spcPts val="945"/>
-              </a:lnSpc>
-              <a:buNone/>
-            </a:pPr>
-            <a:r>
-              <a:rPr lang="en-US" sz="788" dirty="0">
-                <a:solidFill>
-                  <a:srgbClr val="8A8880"/>
-                </a:solidFill>
-                <a:latin typeface="Consolas" pitchFamily="34" charset="0"/>
-                <a:ea typeface="Consolas" pitchFamily="34" charset="-122"/>
-                <a:cs typeface="Consolas" pitchFamily="34" charset="-120"/>
-              </a:rPr>
-              <a:t>-10</a:t>
-            </a:r>
-            <a:endParaRPr lang="en-US" sz="788" dirty="0"/>
-          </a:p>
-        </p:txBody>
-      </p:sp>
-      <p:sp>
-        <p:nvSpPr>
-          <p:cNvPr id="115" name="Text 109"/>
-          <p:cNvSpPr txBox="1"/>
-          <p:nvPr/>
-        </p:nvSpPr>
-        <p:spPr>
-          <a:xfrm>
-            <a:off x="4597400" y="5800725"/>
-            <a:ext cx="457200" cy="120015"/>
-          </a:xfrm>
-          <a:prstGeom prst="rect">
-            <a:avLst/>
-          </a:prstGeom>
-          <a:noFill/>
-          <a:ln/>
-        </p:spPr>
-        <p:txBody>
-          <a:bodyPr wrap="square" lIns="0" tIns="0" rIns="0" bIns="0" rtlCol="0" anchor="t"/>
-          <a:lstStyle/>
-          <a:p>
-            <a:pPr algn="ctr" indent="0" marL="0">
-              <a:lnSpc>
-                <a:spcPts val="945"/>
-              </a:lnSpc>
-              <a:buNone/>
-            </a:pPr>
-            <a:r>
-              <a:rPr lang="en-US" sz="788" dirty="0">
-                <a:solidFill>
-                  <a:srgbClr val="8A8880"/>
-                </a:solidFill>
-                <a:latin typeface="Consolas" pitchFamily="34" charset="0"/>
-                <a:ea typeface="Consolas" pitchFamily="34" charset="-122"/>
-                <a:cs typeface="Consolas" pitchFamily="34" charset="-120"/>
-              </a:rPr>
-              <a:t>0</a:t>
-            </a:r>
-            <a:endParaRPr lang="en-US" sz="788" dirty="0"/>
-          </a:p>
-        </p:txBody>
-      </p:sp>
-      <p:sp>
-        <p:nvSpPr>
-          <p:cNvPr id="116" name="Text 110"/>
-          <p:cNvSpPr txBox="1"/>
-          <p:nvPr/>
-        </p:nvSpPr>
-        <p:spPr>
-          <a:xfrm>
-            <a:off x="6057900" y="5800725"/>
-            <a:ext cx="457200" cy="120015"/>
-          </a:xfrm>
-          <a:prstGeom prst="rect">
-            <a:avLst/>
-          </a:prstGeom>
-          <a:noFill/>
-          <a:ln/>
-        </p:spPr>
-        <p:txBody>
-          <a:bodyPr wrap="square" lIns="0" tIns="0" rIns="0" bIns="0" rtlCol="0" anchor="t"/>
-          <a:lstStyle/>
-          <a:p>
-            <a:pPr algn="ctr" indent="0" marL="0">
-              <a:lnSpc>
-                <a:spcPts val="945"/>
-              </a:lnSpc>
-              <a:buNone/>
-            </a:pPr>
-            <a:r>
-              <a:rPr lang="en-US" sz="788" dirty="0">
-                <a:solidFill>
-                  <a:srgbClr val="8A8880"/>
-                </a:solidFill>
-                <a:latin typeface="Consolas" pitchFamily="34" charset="0"/>
-                <a:ea typeface="Consolas" pitchFamily="34" charset="-122"/>
-                <a:cs typeface="Consolas" pitchFamily="34" charset="-120"/>
-              </a:rPr>
-              <a:t>+10</a:t>
-            </a:r>
-            <a:endParaRPr lang="en-US" sz="788" dirty="0"/>
-          </a:p>
-        </p:txBody>
-      </p:sp>
-      <p:sp>
-        <p:nvSpPr>
-          <p:cNvPr id="117" name="Text 111"/>
-          <p:cNvSpPr txBox="1"/>
-          <p:nvPr/>
-        </p:nvSpPr>
-        <p:spPr>
-          <a:xfrm>
-            <a:off x="7518400" y="5800725"/>
-            <a:ext cx="457200" cy="120015"/>
-          </a:xfrm>
-          <a:prstGeom prst="rect">
-            <a:avLst/>
-          </a:prstGeom>
-          <a:noFill/>
-          <a:ln/>
-        </p:spPr>
-        <p:txBody>
-          <a:bodyPr wrap="square" lIns="0" tIns="0" rIns="0" bIns="0" rtlCol="0" anchor="t"/>
-          <a:lstStyle/>
-          <a:p>
-            <a:pPr algn="ctr" indent="0" marL="0">
-              <a:lnSpc>
-                <a:spcPts val="945"/>
-              </a:lnSpc>
-              <a:buNone/>
-            </a:pPr>
-            <a:r>
-              <a:rPr lang="en-US" sz="788" dirty="0">
-                <a:solidFill>
-                  <a:srgbClr val="8A8880"/>
-                </a:solidFill>
-                <a:latin typeface="Consolas" pitchFamily="34" charset="0"/>
-                <a:ea typeface="Consolas" pitchFamily="34" charset="-122"/>
-                <a:cs typeface="Consolas" pitchFamily="34" charset="-120"/>
-              </a:rPr>
-              <a:t>+20</a:t>
-            </a:r>
-            <a:endParaRPr lang="en-US" sz="788" dirty="0"/>
-          </a:p>
-        </p:txBody>
-      </p:sp>
-      <p:sp>
-        <p:nvSpPr>
-          <p:cNvPr id="118" name="Text 112"/>
-          <p:cNvSpPr txBox="1"/>
-          <p:nvPr/>
-        </p:nvSpPr>
-        <p:spPr>
-          <a:xfrm>
-            <a:off x="8978900" y="5800725"/>
-            <a:ext cx="457200" cy="120015"/>
-          </a:xfrm>
-          <a:prstGeom prst="rect">
-            <a:avLst/>
-          </a:prstGeom>
-          <a:noFill/>
-          <a:ln/>
-        </p:spPr>
-        <p:txBody>
-          <a:bodyPr wrap="square" lIns="0" tIns="0" rIns="0" bIns="0" rtlCol="0" anchor="t"/>
-          <a:lstStyle/>
-          <a:p>
-            <a:pPr algn="ctr" indent="0" marL="0">
-              <a:lnSpc>
-                <a:spcPts val="945"/>
-              </a:lnSpc>
-              <a:buNone/>
-            </a:pPr>
-            <a:r>
-              <a:rPr lang="en-US" sz="788" dirty="0">
-                <a:solidFill>
-                  <a:srgbClr val="8A8880"/>
-                </a:solidFill>
-                <a:latin typeface="Consolas" pitchFamily="34" charset="0"/>
-                <a:ea typeface="Consolas" pitchFamily="34" charset="-122"/>
-                <a:cs typeface="Consolas" pitchFamily="34" charset="-120"/>
-              </a:rPr>
-              <a:t>+30</a:t>
-            </a:r>
-            <a:endParaRPr lang="en-US" sz="788" dirty="0"/>
-          </a:p>
-        </p:txBody>
-      </p:sp>
-      <p:sp>
-        <p:nvSpPr>
-          <p:cNvPr id="119" name="Text 113"/>
-          <p:cNvSpPr txBox="1"/>
-          <p:nvPr/>
-        </p:nvSpPr>
-        <p:spPr>
-          <a:xfrm>
-            <a:off x="10439400" y="5800725"/>
-            <a:ext cx="457200" cy="120015"/>
-          </a:xfrm>
-          <a:prstGeom prst="rect">
-            <a:avLst/>
-          </a:prstGeom>
-          <a:noFill/>
-          <a:ln/>
-        </p:spPr>
-        <p:txBody>
-          <a:bodyPr wrap="square" lIns="0" tIns="0" rIns="0" bIns="0" rtlCol="0" anchor="t"/>
-          <a:lstStyle/>
-          <a:p>
-            <a:pPr algn="ctr" indent="0" marL="0">
-              <a:lnSpc>
-                <a:spcPts val="945"/>
-              </a:lnSpc>
-              <a:buNone/>
-            </a:pPr>
-            <a:r>
-              <a:rPr lang="en-US" sz="788" dirty="0">
-                <a:solidFill>
-                  <a:srgbClr val="8A8880"/>
-                </a:solidFill>
-                <a:latin typeface="Consolas" pitchFamily="34" charset="0"/>
-                <a:ea typeface="Consolas" pitchFamily="34" charset="-122"/>
-                <a:cs typeface="Consolas" pitchFamily="34" charset="-120"/>
-              </a:rPr>
-              <a:t>+40</a:t>
-            </a:r>
-            <a:endParaRPr lang="en-US" sz="788" dirty="0"/>
-          </a:p>
-        </p:txBody>
-      </p:sp>
-      <p:sp>
-        <p:nvSpPr>
-          <p:cNvPr id="120" name="Text 114"/>
-          <p:cNvSpPr txBox="1"/>
-          <p:nvPr/>
-        </p:nvSpPr>
-        <p:spPr>
-          <a:xfrm>
-            <a:off x="10915650" y="5800725"/>
-            <a:ext cx="228600" cy="120015"/>
-          </a:xfrm>
-          <a:prstGeom prst="rect">
-            <a:avLst/>
-          </a:prstGeom>
-          <a:noFill/>
-          <a:ln/>
-        </p:spPr>
-        <p:txBody>
-          <a:bodyPr wrap="square" lIns="0" tIns="0" rIns="0" bIns="0" rtlCol="0" anchor="t"/>
-          <a:lstStyle/>
-          <a:p>
-            <a:pPr algn="l" indent="0" marL="0">
-              <a:lnSpc>
-                <a:spcPts val="945"/>
-              </a:lnSpc>
-              <a:buNone/>
-            </a:pPr>
-            <a:r>
-              <a:rPr lang="en-US" sz="788" dirty="0">
-                <a:solidFill>
-                  <a:srgbClr val="8A8880"/>
-                </a:solidFill>
-                <a:latin typeface="Malgun Gothic" pitchFamily="34" charset="0"/>
-                <a:ea typeface="Malgun Gothic" pitchFamily="34" charset="-122"/>
-                <a:cs typeface="Malgun Gothic" pitchFamily="34" charset="-120"/>
-              </a:rPr>
-              <a:t>℃</a:t>
-            </a:r>
-            <a:endParaRPr lang="en-US" sz="788" dirty="0"/>
-          </a:p>
-        </p:txBody>
-      </p:sp>
-      <p:sp>
-        <p:nvSpPr>
-          <p:cNvPr id="121" name="Shape 115"/>
-          <p:cNvSpPr/>
-          <p:nvPr/>
-        </p:nvSpPr>
-        <p:spPr>
-          <a:xfrm>
-            <a:off x="1905000" y="5200650"/>
-            <a:ext cx="8763000" cy="0"/>
-          </a:xfrm>
-          <a:prstGeom prst="line">
-            <a:avLst/>
-          </a:prstGeom>
-          <a:noFill/>
-          <a:ln w="17780">
-            <a:solidFill>
-              <a:srgbClr val="A8BCD1"/>
-            </a:solidFill>
-            <a:prstDash val="dash"/>
-          </a:ln>
-        </p:spPr>
-      </p:sp>
-      <p:sp>
-        <p:nvSpPr>
-          <p:cNvPr id="122" name="Shape 116"/>
-          <p:cNvSpPr/>
-          <p:nvPr/>
-        </p:nvSpPr>
-        <p:spPr>
-          <a:xfrm>
-            <a:off x="8410575" y="5133975"/>
-            <a:ext cx="133350" cy="133350"/>
-          </a:xfrm>
-          <a:prstGeom prst="ellipse">
-            <a:avLst/>
-          </a:prstGeom>
-          <a:solidFill>
-            <a:srgbClr val="EFB13C"/>
-          </a:solidFill>
-          <a:ln/>
-        </p:spPr>
-      </p:sp>
-      <p:sp>
-        <p:nvSpPr>
-          <p:cNvPr id="123" name="Shape 117"/>
-          <p:cNvSpPr/>
-          <p:nvPr/>
-        </p:nvSpPr>
-        <p:spPr>
-          <a:xfrm>
-            <a:off x="8477250" y="5276850"/>
-            <a:ext cx="0" cy="323850"/>
-          </a:xfrm>
-          <a:prstGeom prst="line">
-            <a:avLst/>
-          </a:prstGeom>
-          <a:noFill/>
-          <a:ln w="12700">
-            <a:solidFill>
-              <a:srgbClr val="EFB13C"/>
-            </a:solidFill>
-            <a:prstDash val="dash"/>
-          </a:ln>
-        </p:spPr>
-      </p:sp>
-      <p:sp>
-        <p:nvSpPr>
-          <p:cNvPr id="124" name="Text 118"/>
-          <p:cNvSpPr txBox="1"/>
-          <p:nvPr/>
-        </p:nvSpPr>
-        <p:spPr>
-          <a:xfrm>
-            <a:off x="7048500" y="4933950"/>
-            <a:ext cx="2857500" cy="167164"/>
-          </a:xfrm>
-          <a:prstGeom prst="rect">
-            <a:avLst/>
-          </a:prstGeom>
-          <a:noFill/>
-          <a:ln/>
-        </p:spPr>
-        <p:txBody>
-          <a:bodyPr wrap="square" lIns="0" tIns="0" rIns="0" bIns="0" rtlCol="0" anchor="t"/>
-          <a:lstStyle/>
-          <a:p>
-            <a:pPr algn="ctr" indent="0" marL="0">
-              <a:lnSpc>
-                <a:spcPts val="1316"/>
-              </a:lnSpc>
-              <a:buNone/>
-            </a:pPr>
-            <a:r>
-              <a:rPr lang="en-US" sz="1013" b="1" dirty="0">
-                <a:solidFill>
-                  <a:srgbClr val="EFB13C"/>
-                </a:solidFill>
-                <a:latin typeface="Malgun Gothic" pitchFamily="34" charset="0"/>
-                <a:ea typeface="Malgun Gothic" pitchFamily="34" charset="-122"/>
-                <a:cs typeface="Malgun Gothic" pitchFamily="34" charset="-120"/>
-              </a:rPr>
-              <a:t>시험한 온도 1곳</a:t>
-            </a:r>
-            <a:endParaRPr lang="en-US" sz="1013" dirty="0"/>
-          </a:p>
-        </p:txBody>
-      </p:sp>
-      <p:sp>
-        <p:nvSpPr>
-          <p:cNvPr id="125" name="Text 119"/>
-          <p:cNvSpPr txBox="1"/>
-          <p:nvPr/>
-        </p:nvSpPr>
-        <p:spPr>
-          <a:xfrm>
-            <a:off x="914400" y="5067300"/>
-            <a:ext cx="914400" cy="297180"/>
-          </a:xfrm>
-          <a:prstGeom prst="rect">
-            <a:avLst/>
-          </a:prstGeom>
-          <a:noFill/>
-          <a:ln/>
-        </p:spPr>
-        <p:txBody>
-          <a:bodyPr wrap="square" lIns="0" tIns="0" rIns="0" bIns="0" rtlCol="0" anchor="t"/>
-          <a:lstStyle/>
-          <a:p>
-            <a:pPr algn="l" indent="0" marL="0">
-              <a:lnSpc>
-                <a:spcPts val="1170"/>
-              </a:lnSpc>
-              <a:buNone/>
-            </a:pPr>
-            <a:r>
-              <a:rPr lang="en-US" sz="900" b="1" dirty="0">
-                <a:solidFill>
-                  <a:srgbClr val="A8BCD1"/>
-                </a:solidFill>
-                <a:latin typeface="Malgun Gothic" pitchFamily="34" charset="0"/>
-                <a:ea typeface="Malgun Gothic" pitchFamily="34" charset="-122"/>
-                <a:cs typeface="Malgun Gothic" pitchFamily="34" charset="-120"/>
-              </a:rPr>
-              <a:t>신고 범위</a:t>
-            </a:r>
-            <a:endParaRPr lang="en-US" sz="900" dirty="0"/>
-          </a:p>
-          <a:p>
-            <a:pPr algn="l" indent="0" marL="0">
-              <a:lnSpc>
-                <a:spcPts val="1170"/>
-              </a:lnSpc>
-              <a:buNone/>
-            </a:pPr>
-            <a:r>
-              <a:rPr lang="en-US" sz="900" b="1" dirty="0">
-                <a:solidFill>
-                  <a:srgbClr val="A8BCD1"/>
-                </a:solidFill>
-                <a:latin typeface="Malgun Gothic" pitchFamily="34" charset="0"/>
-                <a:ea typeface="Malgun Gothic" pitchFamily="34" charset="-122"/>
-                <a:cs typeface="Malgun Gothic" pitchFamily="34" charset="-120"/>
-              </a:rPr>
-              <a:t>61개 온도</a:t>
-            </a:r>
-            <a:endParaRPr lang="en-US" sz="900" dirty="0"/>
-          </a:p>
-        </p:txBody>
-      </p:sp>
-      <p:sp>
-        <p:nvSpPr>
-          <p:cNvPr id="126" name="Shape 120"/>
-          <p:cNvSpPr/>
-          <p:nvPr/>
-        </p:nvSpPr>
-        <p:spPr>
-          <a:xfrm>
-            <a:off x="685800" y="6057900"/>
-            <a:ext cx="10820400" cy="0"/>
-          </a:xfrm>
-          <a:prstGeom prst="line">
-            <a:avLst/>
-          </a:prstGeom>
-          <a:noFill/>
-          <a:ln w="12700">
-            <a:solidFill>
-              <a:srgbClr val="22354A"/>
-            </a:solidFill>
-            <a:prstDash val="solid"/>
-          </a:ln>
-        </p:spPr>
-      </p:sp>
-      <p:sp>
-        <p:nvSpPr>
-          <p:cNvPr id="127" name="Text 121"/>
-          <p:cNvSpPr txBox="1"/>
-          <p:nvPr/>
-        </p:nvSpPr>
-        <p:spPr>
-          <a:xfrm>
-            <a:off x="685800" y="6267450"/>
-            <a:ext cx="476250" cy="120015"/>
-          </a:xfrm>
-          <a:prstGeom prst="rect">
-            <a:avLst/>
-          </a:prstGeom>
-          <a:noFill/>
-          <a:ln/>
-        </p:spPr>
-        <p:txBody>
-          <a:bodyPr wrap="square" lIns="0" tIns="0" rIns="0" bIns="0" rtlCol="0" anchor="t"/>
-          <a:lstStyle/>
-          <a:p>
-            <a:pPr algn="l" indent="0" marL="0">
-              <a:lnSpc>
-                <a:spcPts val="945"/>
-              </a:lnSpc>
-              <a:buNone/>
-            </a:pPr>
-            <a:r>
-              <a:rPr lang="en-US" sz="788" b="1" spc="180" kern="0" dirty="0">
-                <a:solidFill>
-                  <a:srgbClr val="EFB13C"/>
-                </a:solidFill>
-                <a:latin typeface="Consolas" pitchFamily="34" charset="0"/>
-                <a:ea typeface="Consolas" pitchFamily="34" charset="-122"/>
-                <a:cs typeface="Consolas" pitchFamily="34" charset="-120"/>
-              </a:rPr>
-              <a:t>결론</a:t>
-            </a:r>
-            <a:endParaRPr lang="en-US" sz="788" dirty="0"/>
-          </a:p>
-        </p:txBody>
-      </p:sp>
-      <p:sp>
-        <p:nvSpPr>
-          <p:cNvPr id="128" name="Text 122"/>
+          <p:cNvPr id="135" name="Text 129"/>
           <p:cNvSpPr txBox="1"/>
           <p:nvPr/>
         </p:nvSpPr>
@@ -4845,7 +4918,7 @@
                 <a:ea typeface="Malgun Gothic" pitchFamily="34" charset="-122"/>
                 <a:cs typeface="Malgun Gothic" pitchFamily="34" charset="-120"/>
               </a:rPr>
-              <a:t>시험 결과는 회차마다 달랐지만, 더해 주는 보정값은 거의 하나로 고정돼 있었습니다.</a:t>
+              <a:t>문제는 세 가지였습니다. 절차가 번거롭고, 보정값이 하나로 고정되며, 그래서 예측이 어긋났습니다.</a:t>
             </a:r>
             <a:endParaRPr lang="en-US" sz="1350" dirty="0"/>
           </a:p>
@@ -4860,7 +4933,7 @@
         <p:spPr>
           <a:xfrm>
             <a:off x="685800" y="1771650"/>
-            <a:ext cx="4476750" cy="4171950"/>
+            <a:ext cx="10820400" cy="876300"/>
           </a:xfrm>
           <a:prstGeom prst="rect">
             <a:avLst/>
@@ -4885,7 +4958,7 @@
         <p:spPr>
           <a:xfrm>
             <a:off x="695325" y="1781175"/>
-            <a:ext cx="4457700" cy="276225"/>
+            <a:ext cx="10801350" cy="276225"/>
           </a:xfrm>
           <a:prstGeom prst="rect">
             <a:avLst/>
@@ -4905,7 +4978,7 @@
         <p:spPr>
           <a:xfrm>
             <a:off x="685800" y="2057400"/>
-            <a:ext cx="4476750" cy="0"/>
+            <a:ext cx="10820400" cy="0"/>
           </a:xfrm>
           <a:prstGeom prst="line">
             <a:avLst/>
@@ -4990,7 +5063,7 @@
         <p:spPr>
           <a:xfrm>
             <a:off x="1085850" y="1847850"/>
-            <a:ext cx="2990850" cy="154305"/>
+            <a:ext cx="9134475" cy="154305"/>
           </a:xfrm>
           <a:prstGeom prst="rect">
             <a:avLst/>
@@ -5017,7 +5090,7 @@
                 <a:ea typeface="Malgun Gothic" pitchFamily="34" charset="-122"/>
                 <a:cs typeface="Malgun Gothic" pitchFamily="34" charset="-120"/>
               </a:rPr>
-              <a:t>기존 실적 시트 기록</a:t>
+              <a:t>번거로운 절차</a:t>
             </a:r>
             <a:endParaRPr lang="en-US" sz="1013" dirty="0"/>
           </a:p>
@@ -5031,8 +5104,8 @@
         </p:nvSpPr>
         <p:spPr>
           <a:xfrm>
-            <a:off x="4076700" y="1857375"/>
-            <a:ext cx="952500" cy="125730"/>
+            <a:off x="10220325" y="1857375"/>
+            <a:ext cx="1152525" cy="125730"/>
           </a:xfrm>
           <a:prstGeom prst="rect">
             <a:avLst/>
@@ -5059,7 +5132,7 @@
                 <a:ea typeface="Malgun Gothic" pitchFamily="34" charset="-122"/>
                 <a:cs typeface="Malgun Gothic" pitchFamily="34" charset="-120"/>
               </a:rPr>
-              <a:t>2월 ~ 4월 13회</a:t>
+              <a:t>한 회차마다 되풀이</a:t>
             </a:r>
             <a:endParaRPr lang="en-US" sz="825" dirty="0"/>
           </a:p>
@@ -5067,14 +5140,587 @@
       </p:sp>
       <p:sp>
         <p:nvSpPr>
-          <p:cNvPr id="20" name="Shape 18"/>
-          <p:cNvSpPr/>
-          <p:nvPr/>
-        </p:nvSpPr>
-        <p:spPr>
-          <a:xfrm>
-            <a:off x="952500" y="2209800"/>
-            <a:ext cx="3276600" cy="247650"/>
+          <p:cNvPr id="20" name="Text 18"/>
+          <p:cNvSpPr txBox="1"/>
+          <p:nvPr/>
+        </p:nvSpPr>
+        <p:spPr>
+          <a:xfrm>
+            <a:off x="914400" y="2152650"/>
+            <a:ext cx="1809750" cy="137160"/>
+          </a:xfrm>
+          <a:prstGeom prst="rect">
+            <a:avLst/>
+          </a:prstGeom>
+          <a:noFill/>
+          <a:ln/>
+        </p:spPr>
+        <p:txBody>
+          <a:bodyPr wrap="square" lIns="0" tIns="0" rIns="0" bIns="0" rtlCol="0" anchor="t"/>
+          <a:lstStyle/>
+          <a:p>
+            <a:pPr algn="l" indent="0" marL="0">
+              <a:lnSpc>
+                <a:spcPts val="1080"/>
+              </a:lnSpc>
+              <a:buNone/>
+            </a:pPr>
+            <a:r>
+              <a:rPr lang="en-US" sz="900" dirty="0">
+                <a:solidFill>
+                  <a:srgbClr val="8A8880"/>
+                </a:solidFill>
+                <a:latin typeface="Malgun Gothic" pitchFamily="34" charset="0"/>
+                <a:ea typeface="Malgun Gothic" pitchFamily="34" charset="-122"/>
+                <a:cs typeface="Malgun Gothic" pitchFamily="34" charset="-120"/>
+              </a:rPr>
+              <a:t>엑셀 파일</a:t>
+            </a:r>
+            <a:endParaRPr lang="en-US" sz="900" dirty="0"/>
+          </a:p>
+        </p:txBody>
+      </p:sp>
+      <p:sp>
+        <p:nvSpPr>
+          <p:cNvPr id="21" name="Text 19"/>
+          <p:cNvSpPr txBox="1"/>
+          <p:nvPr/>
+        </p:nvSpPr>
+        <p:spPr>
+          <a:xfrm>
+            <a:off x="914400" y="2286000"/>
+            <a:ext cx="190500" cy="284798"/>
+          </a:xfrm>
+          <a:prstGeom prst="rect">
+            <a:avLst/>
+          </a:prstGeom>
+          <a:noFill/>
+          <a:ln/>
+        </p:spPr>
+        <p:txBody>
+          <a:bodyPr wrap="square" lIns="0" tIns="0" rIns="0" bIns="0" rtlCol="0" anchor="t"/>
+          <a:lstStyle/>
+          <a:p>
+            <a:pPr algn="l" indent="0" marL="0">
+              <a:lnSpc>
+                <a:spcPts val="2242"/>
+              </a:lnSpc>
+              <a:buNone/>
+            </a:pPr>
+            <a:r>
+              <a:rPr lang="en-US" sz="1950" b="1" dirty="0">
+                <a:solidFill>
+                  <a:srgbClr val="EFB13C"/>
+                </a:solidFill>
+                <a:latin typeface="Consolas" pitchFamily="34" charset="0"/>
+                <a:ea typeface="Consolas" pitchFamily="34" charset="-122"/>
+                <a:cs typeface="Consolas" pitchFamily="34" charset="-120"/>
+              </a:rPr>
+              <a:t>4</a:t>
+            </a:r>
+            <a:endParaRPr lang="en-US" sz="1950" dirty="0"/>
+          </a:p>
+        </p:txBody>
+      </p:sp>
+      <p:sp>
+        <p:nvSpPr>
+          <p:cNvPr id="22" name="Text 20"/>
+          <p:cNvSpPr txBox="1"/>
+          <p:nvPr/>
+        </p:nvSpPr>
+        <p:spPr>
+          <a:xfrm>
+            <a:off x="1143000" y="2381250"/>
+            <a:ext cx="381000" cy="142875"/>
+          </a:xfrm>
+          <a:prstGeom prst="rect">
+            <a:avLst/>
+          </a:prstGeom>
+          <a:noFill/>
+          <a:ln/>
+        </p:spPr>
+        <p:txBody>
+          <a:bodyPr wrap="square" lIns="0" tIns="0" rIns="0" bIns="0" rtlCol="0" anchor="t"/>
+          <a:lstStyle/>
+          <a:p>
+            <a:pPr algn="l" indent="0" marL="0">
+              <a:lnSpc>
+                <a:spcPts val="1125"/>
+              </a:lnSpc>
+              <a:buNone/>
+            </a:pPr>
+            <a:r>
+              <a:rPr lang="en-US" sz="938" dirty="0">
+                <a:solidFill>
+                  <a:srgbClr val="A9A79F"/>
+                </a:solidFill>
+                <a:latin typeface="Malgun Gothic" pitchFamily="34" charset="0"/>
+                <a:ea typeface="Malgun Gothic" pitchFamily="34" charset="-122"/>
+                <a:cs typeface="Malgun Gothic" pitchFamily="34" charset="-120"/>
+              </a:rPr>
+              <a:t>개</a:t>
+            </a:r>
+            <a:endParaRPr lang="en-US" sz="938" dirty="0"/>
+          </a:p>
+        </p:txBody>
+      </p:sp>
+      <p:sp>
+        <p:nvSpPr>
+          <p:cNvPr id="23" name="Shape 21"/>
+          <p:cNvSpPr/>
+          <p:nvPr/>
+        </p:nvSpPr>
+        <p:spPr>
+          <a:xfrm>
+            <a:off x="3295650" y="2133600"/>
+            <a:ext cx="0" cy="400050"/>
+          </a:xfrm>
+          <a:prstGeom prst="line">
+            <a:avLst/>
+          </a:prstGeom>
+          <a:noFill/>
+          <a:ln w="12700">
+            <a:solidFill>
+              <a:srgbClr val="182838"/>
+            </a:solidFill>
+            <a:prstDash val="solid"/>
+          </a:ln>
+        </p:spPr>
+      </p:sp>
+      <p:sp>
+        <p:nvSpPr>
+          <p:cNvPr id="24" name="Text 22"/>
+          <p:cNvSpPr txBox="1"/>
+          <p:nvPr/>
+        </p:nvSpPr>
+        <p:spPr>
+          <a:xfrm>
+            <a:off x="3562350" y="2152650"/>
+            <a:ext cx="1809750" cy="137160"/>
+          </a:xfrm>
+          <a:prstGeom prst="rect">
+            <a:avLst/>
+          </a:prstGeom>
+          <a:noFill/>
+          <a:ln/>
+        </p:spPr>
+        <p:txBody>
+          <a:bodyPr wrap="square" lIns="0" tIns="0" rIns="0" bIns="0" rtlCol="0" anchor="t"/>
+          <a:lstStyle/>
+          <a:p>
+            <a:pPr algn="l" indent="0" marL="0">
+              <a:lnSpc>
+                <a:spcPts val="1080"/>
+              </a:lnSpc>
+              <a:buNone/>
+            </a:pPr>
+            <a:r>
+              <a:rPr lang="en-US" sz="900" dirty="0">
+                <a:solidFill>
+                  <a:srgbClr val="8A8880"/>
+                </a:solidFill>
+                <a:latin typeface="Malgun Gothic" pitchFamily="34" charset="0"/>
+                <a:ea typeface="Malgun Gothic" pitchFamily="34" charset="-122"/>
+                <a:cs typeface="Malgun Gothic" pitchFamily="34" charset="-120"/>
+              </a:rPr>
+              <a:t>손으로 옮기는 값</a:t>
+            </a:r>
+            <a:endParaRPr lang="en-US" sz="900" dirty="0"/>
+          </a:p>
+        </p:txBody>
+      </p:sp>
+      <p:sp>
+        <p:nvSpPr>
+          <p:cNvPr id="25" name="Text 23"/>
+          <p:cNvSpPr txBox="1"/>
+          <p:nvPr/>
+        </p:nvSpPr>
+        <p:spPr>
+          <a:xfrm>
+            <a:off x="3562350" y="2286000"/>
+            <a:ext cx="342900" cy="284798"/>
+          </a:xfrm>
+          <a:prstGeom prst="rect">
+            <a:avLst/>
+          </a:prstGeom>
+          <a:noFill/>
+          <a:ln/>
+        </p:spPr>
+        <p:txBody>
+          <a:bodyPr wrap="square" lIns="0" tIns="0" rIns="0" bIns="0" rtlCol="0" anchor="t"/>
+          <a:lstStyle/>
+          <a:p>
+            <a:pPr algn="l" indent="0" marL="0">
+              <a:lnSpc>
+                <a:spcPts val="2242"/>
+              </a:lnSpc>
+              <a:buNone/>
+            </a:pPr>
+            <a:r>
+              <a:rPr lang="en-US" sz="1950" b="1" dirty="0">
+                <a:solidFill>
+                  <a:srgbClr val="EFB13C"/>
+                </a:solidFill>
+                <a:latin typeface="Consolas" pitchFamily="34" charset="0"/>
+                <a:ea typeface="Consolas" pitchFamily="34" charset="-122"/>
+                <a:cs typeface="Consolas" pitchFamily="34" charset="-120"/>
+              </a:rPr>
+              <a:t>61</a:t>
+            </a:r>
+            <a:endParaRPr lang="en-US" sz="1950" dirty="0"/>
+          </a:p>
+        </p:txBody>
+      </p:sp>
+      <p:sp>
+        <p:nvSpPr>
+          <p:cNvPr id="26" name="Text 24"/>
+          <p:cNvSpPr txBox="1"/>
+          <p:nvPr/>
+        </p:nvSpPr>
+        <p:spPr>
+          <a:xfrm>
+            <a:off x="3943350" y="2381250"/>
+            <a:ext cx="381000" cy="142875"/>
+          </a:xfrm>
+          <a:prstGeom prst="rect">
+            <a:avLst/>
+          </a:prstGeom>
+          <a:noFill/>
+          <a:ln/>
+        </p:spPr>
+        <p:txBody>
+          <a:bodyPr wrap="square" lIns="0" tIns="0" rIns="0" bIns="0" rtlCol="0" anchor="t"/>
+          <a:lstStyle/>
+          <a:p>
+            <a:pPr algn="l" indent="0" marL="0">
+              <a:lnSpc>
+                <a:spcPts val="1125"/>
+              </a:lnSpc>
+              <a:buNone/>
+            </a:pPr>
+            <a:r>
+              <a:rPr lang="en-US" sz="938" dirty="0">
+                <a:solidFill>
+                  <a:srgbClr val="A9A79F"/>
+                </a:solidFill>
+                <a:latin typeface="Malgun Gothic" pitchFamily="34" charset="0"/>
+                <a:ea typeface="Malgun Gothic" pitchFamily="34" charset="-122"/>
+                <a:cs typeface="Malgun Gothic" pitchFamily="34" charset="-120"/>
+              </a:rPr>
+              <a:t>개</a:t>
+            </a:r>
+            <a:endParaRPr lang="en-US" sz="938" dirty="0"/>
+          </a:p>
+        </p:txBody>
+      </p:sp>
+      <p:sp>
+        <p:nvSpPr>
+          <p:cNvPr id="27" name="Shape 25"/>
+          <p:cNvSpPr/>
+          <p:nvPr/>
+        </p:nvSpPr>
+        <p:spPr>
+          <a:xfrm>
+            <a:off x="5943600" y="2133600"/>
+            <a:ext cx="0" cy="400050"/>
+          </a:xfrm>
+          <a:prstGeom prst="line">
+            <a:avLst/>
+          </a:prstGeom>
+          <a:noFill/>
+          <a:ln w="12700">
+            <a:solidFill>
+              <a:srgbClr val="182838"/>
+            </a:solidFill>
+            <a:prstDash val="solid"/>
+          </a:ln>
+        </p:spPr>
+      </p:sp>
+      <p:sp>
+        <p:nvSpPr>
+          <p:cNvPr id="28" name="Text 26"/>
+          <p:cNvSpPr txBox="1"/>
+          <p:nvPr/>
+        </p:nvSpPr>
+        <p:spPr>
+          <a:xfrm>
+            <a:off x="6210300" y="2152650"/>
+            <a:ext cx="1809750" cy="137160"/>
+          </a:xfrm>
+          <a:prstGeom prst="rect">
+            <a:avLst/>
+          </a:prstGeom>
+          <a:noFill/>
+          <a:ln/>
+        </p:spPr>
+        <p:txBody>
+          <a:bodyPr wrap="square" lIns="0" tIns="0" rIns="0" bIns="0" rtlCol="0" anchor="t"/>
+          <a:lstStyle/>
+          <a:p>
+            <a:pPr algn="l" indent="0" marL="0">
+              <a:lnSpc>
+                <a:spcPts val="1080"/>
+              </a:lnSpc>
+              <a:buNone/>
+            </a:pPr>
+            <a:r>
+              <a:rPr lang="en-US" sz="900" dirty="0">
+                <a:solidFill>
+                  <a:srgbClr val="8A8880"/>
+                </a:solidFill>
+                <a:latin typeface="Malgun Gothic" pitchFamily="34" charset="0"/>
+                <a:ea typeface="Malgun Gothic" pitchFamily="34" charset="-122"/>
+                <a:cs typeface="Malgun Gothic" pitchFamily="34" charset="-120"/>
+              </a:rPr>
+              <a:t>사람이 넣는 값</a:t>
+            </a:r>
+            <a:endParaRPr lang="en-US" sz="900" dirty="0"/>
+          </a:p>
+        </p:txBody>
+      </p:sp>
+      <p:sp>
+        <p:nvSpPr>
+          <p:cNvPr id="29" name="Text 27"/>
+          <p:cNvSpPr txBox="1"/>
+          <p:nvPr/>
+        </p:nvSpPr>
+        <p:spPr>
+          <a:xfrm>
+            <a:off x="6210300" y="2286000"/>
+            <a:ext cx="190500" cy="284798"/>
+          </a:xfrm>
+          <a:prstGeom prst="rect">
+            <a:avLst/>
+          </a:prstGeom>
+          <a:noFill/>
+          <a:ln/>
+        </p:spPr>
+        <p:txBody>
+          <a:bodyPr wrap="square" lIns="0" tIns="0" rIns="0" bIns="0" rtlCol="0" anchor="t"/>
+          <a:lstStyle/>
+          <a:p>
+            <a:pPr algn="l" indent="0" marL="0">
+              <a:lnSpc>
+                <a:spcPts val="2242"/>
+              </a:lnSpc>
+              <a:buNone/>
+            </a:pPr>
+            <a:r>
+              <a:rPr lang="en-US" sz="1950" b="1" dirty="0">
+                <a:solidFill>
+                  <a:srgbClr val="EFB13C"/>
+                </a:solidFill>
+                <a:latin typeface="Consolas" pitchFamily="34" charset="0"/>
+                <a:ea typeface="Consolas" pitchFamily="34" charset="-122"/>
+                <a:cs typeface="Consolas" pitchFamily="34" charset="-120"/>
+              </a:rPr>
+              <a:t>3</a:t>
+            </a:r>
+            <a:endParaRPr lang="en-US" sz="1950" dirty="0"/>
+          </a:p>
+        </p:txBody>
+      </p:sp>
+      <p:sp>
+        <p:nvSpPr>
+          <p:cNvPr id="30" name="Text 28"/>
+          <p:cNvSpPr txBox="1"/>
+          <p:nvPr/>
+        </p:nvSpPr>
+        <p:spPr>
+          <a:xfrm>
+            <a:off x="6438900" y="2381250"/>
+            <a:ext cx="381000" cy="142875"/>
+          </a:xfrm>
+          <a:prstGeom prst="rect">
+            <a:avLst/>
+          </a:prstGeom>
+          <a:noFill/>
+          <a:ln/>
+        </p:spPr>
+        <p:txBody>
+          <a:bodyPr wrap="square" lIns="0" tIns="0" rIns="0" bIns="0" rtlCol="0" anchor="t"/>
+          <a:lstStyle/>
+          <a:p>
+            <a:pPr algn="l" indent="0" marL="0">
+              <a:lnSpc>
+                <a:spcPts val="1125"/>
+              </a:lnSpc>
+              <a:buNone/>
+            </a:pPr>
+            <a:r>
+              <a:rPr lang="en-US" sz="938" dirty="0">
+                <a:solidFill>
+                  <a:srgbClr val="A9A79F"/>
+                </a:solidFill>
+                <a:latin typeface="Malgun Gothic" pitchFamily="34" charset="0"/>
+                <a:ea typeface="Malgun Gothic" pitchFamily="34" charset="-122"/>
+                <a:cs typeface="Malgun Gothic" pitchFamily="34" charset="-120"/>
+              </a:rPr>
+              <a:t>곳</a:t>
+            </a:r>
+            <a:endParaRPr lang="en-US" sz="938" dirty="0"/>
+          </a:p>
+        </p:txBody>
+      </p:sp>
+      <p:sp>
+        <p:nvSpPr>
+          <p:cNvPr id="31" name="Shape 29"/>
+          <p:cNvSpPr/>
+          <p:nvPr/>
+        </p:nvSpPr>
+        <p:spPr>
+          <a:xfrm>
+            <a:off x="8591550" y="2133600"/>
+            <a:ext cx="0" cy="400050"/>
+          </a:xfrm>
+          <a:prstGeom prst="line">
+            <a:avLst/>
+          </a:prstGeom>
+          <a:noFill/>
+          <a:ln w="12700">
+            <a:solidFill>
+              <a:srgbClr val="182838"/>
+            </a:solidFill>
+            <a:prstDash val="solid"/>
+          </a:ln>
+        </p:spPr>
+      </p:sp>
+      <p:sp>
+        <p:nvSpPr>
+          <p:cNvPr id="32" name="Text 30"/>
+          <p:cNvSpPr txBox="1"/>
+          <p:nvPr/>
+        </p:nvSpPr>
+        <p:spPr>
+          <a:xfrm>
+            <a:off x="8858250" y="2152650"/>
+            <a:ext cx="1809750" cy="137160"/>
+          </a:xfrm>
+          <a:prstGeom prst="rect">
+            <a:avLst/>
+          </a:prstGeom>
+          <a:noFill/>
+          <a:ln/>
+        </p:spPr>
+        <p:txBody>
+          <a:bodyPr wrap="square" lIns="0" tIns="0" rIns="0" bIns="0" rtlCol="0" anchor="t"/>
+          <a:lstStyle/>
+          <a:p>
+            <a:pPr algn="l" indent="0" marL="0">
+              <a:lnSpc>
+                <a:spcPts val="1080"/>
+              </a:lnSpc>
+              <a:buNone/>
+            </a:pPr>
+            <a:r>
+              <a:rPr lang="en-US" sz="900" dirty="0">
+                <a:solidFill>
+                  <a:srgbClr val="8A8880"/>
+                </a:solidFill>
+                <a:latin typeface="Malgun Gothic" pitchFamily="34" charset="0"/>
+                <a:ea typeface="Malgun Gothic" pitchFamily="34" charset="-122"/>
+                <a:cs typeface="Malgun Gothic" pitchFamily="34" charset="-120"/>
+              </a:rPr>
+              <a:t>자동으로 되는 것</a:t>
+            </a:r>
+            <a:endParaRPr lang="en-US" sz="900" dirty="0"/>
+          </a:p>
+        </p:txBody>
+      </p:sp>
+      <p:sp>
+        <p:nvSpPr>
+          <p:cNvPr id="33" name="Text 31"/>
+          <p:cNvSpPr txBox="1"/>
+          <p:nvPr/>
+        </p:nvSpPr>
+        <p:spPr>
+          <a:xfrm>
+            <a:off x="8858250" y="2286000"/>
+            <a:ext cx="190500" cy="284798"/>
+          </a:xfrm>
+          <a:prstGeom prst="rect">
+            <a:avLst/>
+          </a:prstGeom>
+          <a:noFill/>
+          <a:ln/>
+        </p:spPr>
+        <p:txBody>
+          <a:bodyPr wrap="square" lIns="0" tIns="0" rIns="0" bIns="0" rtlCol="0" anchor="t"/>
+          <a:lstStyle/>
+          <a:p>
+            <a:pPr algn="l" indent="0" marL="0">
+              <a:lnSpc>
+                <a:spcPts val="2242"/>
+              </a:lnSpc>
+              <a:buNone/>
+            </a:pPr>
+            <a:r>
+              <a:rPr lang="en-US" sz="1950" b="1" dirty="0">
+                <a:solidFill>
+                  <a:srgbClr val="EFB13C"/>
+                </a:solidFill>
+                <a:latin typeface="Consolas" pitchFamily="34" charset="0"/>
+                <a:ea typeface="Consolas" pitchFamily="34" charset="-122"/>
+                <a:cs typeface="Consolas" pitchFamily="34" charset="-120"/>
+              </a:rPr>
+              <a:t>0</a:t>
+            </a:r>
+            <a:endParaRPr lang="en-US" sz="1950" dirty="0"/>
+          </a:p>
+        </p:txBody>
+      </p:sp>
+      <p:sp>
+        <p:nvSpPr>
+          <p:cNvPr id="34" name="Text 32"/>
+          <p:cNvSpPr txBox="1"/>
+          <p:nvPr/>
+        </p:nvSpPr>
+        <p:spPr>
+          <a:xfrm>
+            <a:off x="9086850" y="2381250"/>
+            <a:ext cx="381000" cy="142875"/>
+          </a:xfrm>
+          <a:prstGeom prst="rect">
+            <a:avLst/>
+          </a:prstGeom>
+          <a:noFill/>
+          <a:ln/>
+        </p:spPr>
+        <p:txBody>
+          <a:bodyPr wrap="square" lIns="0" tIns="0" rIns="0" bIns="0" rtlCol="0" anchor="t"/>
+          <a:lstStyle/>
+          <a:p>
+            <a:pPr algn="l" indent="0" marL="0">
+              <a:lnSpc>
+                <a:spcPts val="1125"/>
+              </a:lnSpc>
+              <a:buNone/>
+            </a:pPr>
+            <a:r>
+              <a:rPr lang="en-US" sz="938" dirty="0">
+                <a:solidFill>
+                  <a:srgbClr val="A9A79F"/>
+                </a:solidFill>
+                <a:latin typeface="Malgun Gothic" pitchFamily="34" charset="0"/>
+                <a:ea typeface="Malgun Gothic" pitchFamily="34" charset="-122"/>
+                <a:cs typeface="Malgun Gothic" pitchFamily="34" charset="-120"/>
+              </a:rPr>
+              <a:t>개</a:t>
+            </a:r>
+            <a:endParaRPr lang="en-US" sz="938" dirty="0"/>
+          </a:p>
+        </p:txBody>
+      </p:sp>
+      <p:sp>
+        <p:nvSpPr>
+          <p:cNvPr id="35" name="Shape 33"/>
+          <p:cNvSpPr/>
+          <p:nvPr/>
+        </p:nvSpPr>
+        <p:spPr>
+          <a:xfrm>
+            <a:off x="685800" y="2762250"/>
+            <a:ext cx="4476750" cy="3181350"/>
           </a:xfrm>
           <a:prstGeom prst="rect">
             <a:avLst/>
@@ -5082,24 +5728,6 @@
           <a:solidFill>
             <a:srgbClr val="0A1320"/>
           </a:solidFill>
-          <a:ln/>
-        </p:spPr>
-      </p:sp>
-      <p:sp>
-        <p:nvSpPr>
-          <p:cNvPr id="21" name="Shape 19"/>
-          <p:cNvSpPr/>
-          <p:nvPr/>
-        </p:nvSpPr>
-        <p:spPr>
-          <a:xfrm>
-            <a:off x="952500" y="2457450"/>
-            <a:ext cx="3276600" cy="0"/>
-          </a:xfrm>
-          <a:prstGeom prst="line">
-            <a:avLst/>
-          </a:prstGeom>
-          <a:noFill/>
           <a:ln w="15240">
             <a:solidFill>
               <a:srgbClr val="22354A"/>
@@ -5110,14 +5738,77 @@
       </p:sp>
       <p:sp>
         <p:nvSpPr>
-          <p:cNvPr id="22" name="Text 20"/>
-          <p:cNvSpPr txBox="1"/>
-          <p:nvPr/>
-        </p:nvSpPr>
-        <p:spPr>
-          <a:xfrm>
-            <a:off x="1038225" y="2286000"/>
-            <a:ext cx="533400" cy="142875"/>
+          <p:cNvPr id="36" name="Shape 34"/>
+          <p:cNvSpPr/>
+          <p:nvPr/>
+        </p:nvSpPr>
+        <p:spPr>
+          <a:xfrm>
+            <a:off x="695325" y="2771775"/>
+            <a:ext cx="4457700" cy="276225"/>
+          </a:xfrm>
+          <a:prstGeom prst="rect">
+            <a:avLst/>
+          </a:prstGeom>
+          <a:solidFill>
+            <a:srgbClr val="17283C"/>
+          </a:solidFill>
+          <a:ln/>
+        </p:spPr>
+      </p:sp>
+      <p:sp>
+        <p:nvSpPr>
+          <p:cNvPr id="37" name="Shape 35"/>
+          <p:cNvSpPr/>
+          <p:nvPr/>
+        </p:nvSpPr>
+        <p:spPr>
+          <a:xfrm>
+            <a:off x="685800" y="3048000"/>
+            <a:ext cx="4476750" cy="0"/>
+          </a:xfrm>
+          <a:prstGeom prst="line">
+            <a:avLst/>
+          </a:prstGeom>
+          <a:noFill/>
+          <a:ln w="15240">
+            <a:solidFill>
+              <a:srgbClr val="22354A"/>
+            </a:solidFill>
+            <a:prstDash val="solid"/>
+          </a:ln>
+        </p:spPr>
+      </p:sp>
+      <p:sp>
+        <p:nvSpPr>
+          <p:cNvPr id="38" name="Shape 36"/>
+          <p:cNvSpPr/>
+          <p:nvPr/>
+        </p:nvSpPr>
+        <p:spPr>
+          <a:xfrm>
+            <a:off x="695325" y="2771775"/>
+            <a:ext cx="38100" cy="276225"/>
+          </a:xfrm>
+          <a:prstGeom prst="rect">
+            <a:avLst/>
+          </a:prstGeom>
+          <a:solidFill>
+            <a:srgbClr val="EFB13C"/>
+          </a:solidFill>
+          <a:ln/>
+        </p:spPr>
+      </p:sp>
+      <p:sp>
+        <p:nvSpPr>
+          <p:cNvPr id="39" name="Text 37"/>
+          <p:cNvSpPr txBox="1"/>
+          <p:nvPr/>
+        </p:nvSpPr>
+        <p:spPr>
+          <a:xfrm>
+            <a:off x="857250" y="2838450"/>
+            <a:ext cx="171450" cy="148590"/>
           </a:xfrm>
           <a:prstGeom prst="rect">
             <a:avLst/>
@@ -5131,19 +5822,188 @@
           <a:p>
             <a:pPr algn="l" indent="0" marL="0">
               <a:lnSpc>
-                <a:spcPts val="1125"/>
-              </a:lnSpc>
-              <a:buNone/>
-            </a:pPr>
-            <a:r>
-              <a:rPr lang="en-US" sz="938" dirty="0">
-                <a:solidFill>
-                  <a:srgbClr val="8A8880"/>
+                <a:spcPts val="1170"/>
+              </a:lnSpc>
+              <a:buNone/>
+            </a:pPr>
+            <a:r>
+              <a:rPr lang="en-US" sz="975" b="1" dirty="0">
+                <a:solidFill>
+                  <a:srgbClr val="EFB13C"/>
+                </a:solidFill>
+                <a:latin typeface="Consolas" pitchFamily="34" charset="0"/>
+                <a:ea typeface="Consolas" pitchFamily="34" charset="-122"/>
+                <a:cs typeface="Consolas" pitchFamily="34" charset="-120"/>
+              </a:rPr>
+              <a:t>2</a:t>
+            </a:r>
+            <a:endParaRPr lang="en-US" sz="975" dirty="0"/>
+          </a:p>
+        </p:txBody>
+      </p:sp>
+      <p:sp>
+        <p:nvSpPr>
+          <p:cNvPr id="40" name="Text 38"/>
+          <p:cNvSpPr txBox="1"/>
+          <p:nvPr/>
+        </p:nvSpPr>
+        <p:spPr>
+          <a:xfrm>
+            <a:off x="1085850" y="2838450"/>
+            <a:ext cx="2381250" cy="154305"/>
+          </a:xfrm>
+          <a:prstGeom prst="rect">
+            <a:avLst/>
+          </a:prstGeom>
+          <a:noFill/>
+          <a:ln/>
+        </p:spPr>
+        <p:txBody>
+          <a:bodyPr wrap="square" lIns="0" tIns="0" rIns="0" bIns="0" rtlCol="0" anchor="t"/>
+          <a:lstStyle/>
+          <a:p>
+            <a:pPr algn="l" indent="0" marL="0">
+              <a:lnSpc>
+                <a:spcPts val="1215"/>
+              </a:lnSpc>
+              <a:buNone/>
+            </a:pPr>
+            <a:r>
+              <a:rPr lang="en-US" sz="1013" b="1" spc="30" kern="0" dirty="0">
+                <a:solidFill>
+                  <a:srgbClr val="EAE7E0"/>
                 </a:solidFill>
                 <a:latin typeface="Malgun Gothic" pitchFamily="34" charset="0"/>
                 <a:ea typeface="Malgun Gothic" pitchFamily="34" charset="-122"/>
                 <a:cs typeface="Malgun Gothic" pitchFamily="34" charset="-120"/>
               </a:rPr>
+              <a:t>일괄 보정</a:t>
+            </a:r>
+            <a:endParaRPr lang="en-US" sz="1013" dirty="0"/>
+          </a:p>
+        </p:txBody>
+      </p:sp>
+      <p:sp>
+        <p:nvSpPr>
+          <p:cNvPr id="41" name="Text 39"/>
+          <p:cNvSpPr txBox="1"/>
+          <p:nvPr/>
+        </p:nvSpPr>
+        <p:spPr>
+          <a:xfrm>
+            <a:off x="3467100" y="2847975"/>
+            <a:ext cx="1562100" cy="125730"/>
+          </a:xfrm>
+          <a:prstGeom prst="rect">
+            <a:avLst/>
+          </a:prstGeom>
+          <a:noFill/>
+          <a:ln/>
+        </p:spPr>
+        <p:txBody>
+          <a:bodyPr wrap="square" lIns="0" tIns="0" rIns="0" bIns="0" rtlCol="0" anchor="t"/>
+          <a:lstStyle/>
+          <a:p>
+            <a:pPr algn="r" indent="0" marL="0">
+              <a:lnSpc>
+                <a:spcPts val="990"/>
+              </a:lnSpc>
+              <a:buNone/>
+            </a:pPr>
+            <a:r>
+              <a:rPr lang="en-US" sz="825" dirty="0">
+                <a:solidFill>
+                  <a:srgbClr val="8A8880"/>
+                </a:solidFill>
+                <a:latin typeface="Malgun Gothic" pitchFamily="34" charset="0"/>
+                <a:ea typeface="Malgun Gothic" pitchFamily="34" charset="-122"/>
+                <a:cs typeface="Malgun Gothic" pitchFamily="34" charset="-120"/>
+              </a:rPr>
+              <a:t>2월 ~ 4월 13회 · 단위 MW</a:t>
+            </a:r>
+            <a:endParaRPr lang="en-US" sz="825" dirty="0"/>
+          </a:p>
+        </p:txBody>
+      </p:sp>
+      <p:sp>
+        <p:nvSpPr>
+          <p:cNvPr id="42" name="Shape 40"/>
+          <p:cNvSpPr/>
+          <p:nvPr/>
+        </p:nvSpPr>
+        <p:spPr>
+          <a:xfrm>
+            <a:off x="952500" y="3124200"/>
+            <a:ext cx="3276600" cy="228600"/>
+          </a:xfrm>
+          <a:prstGeom prst="rect">
+            <a:avLst/>
+          </a:prstGeom>
+          <a:solidFill>
+            <a:srgbClr val="0A1320"/>
+          </a:solidFill>
+          <a:ln/>
+        </p:spPr>
+      </p:sp>
+      <p:sp>
+        <p:nvSpPr>
+          <p:cNvPr id="43" name="Shape 41"/>
+          <p:cNvSpPr/>
+          <p:nvPr/>
+        </p:nvSpPr>
+        <p:spPr>
+          <a:xfrm>
+            <a:off x="952500" y="3352800"/>
+            <a:ext cx="3276600" cy="0"/>
+          </a:xfrm>
+          <a:prstGeom prst="line">
+            <a:avLst/>
+          </a:prstGeom>
+          <a:noFill/>
+          <a:ln w="15240">
+            <a:solidFill>
+              <a:srgbClr val="22354A"/>
+            </a:solidFill>
+            <a:prstDash val="solid"/>
+          </a:ln>
+        </p:spPr>
+      </p:sp>
+      <p:sp>
+        <p:nvSpPr>
+          <p:cNvPr id="44" name="Text 42"/>
+          <p:cNvSpPr txBox="1"/>
+          <p:nvPr/>
+        </p:nvSpPr>
+        <p:spPr>
+          <a:xfrm>
+            <a:off x="1038225" y="3200400"/>
+            <a:ext cx="533400" cy="142875"/>
+          </a:xfrm>
+          <a:prstGeom prst="rect">
+            <a:avLst/>
+          </a:prstGeom>
+          <a:noFill/>
+          <a:ln/>
+        </p:spPr>
+        <p:txBody>
+          <a:bodyPr wrap="square" lIns="0" tIns="0" rIns="0" bIns="0" rtlCol="0" anchor="t"/>
+          <a:lstStyle/>
+          <a:p>
+            <a:pPr algn="l" indent="0" marL="0">
+              <a:lnSpc>
+                <a:spcPts val="1125"/>
+              </a:lnSpc>
+              <a:buNone/>
+            </a:pPr>
+            <a:r>
+              <a:rPr lang="en-US" sz="938" dirty="0">
+                <a:solidFill>
+                  <a:srgbClr val="8A8880"/>
+                </a:solidFill>
+                <a:latin typeface="Malgun Gothic" pitchFamily="34" charset="0"/>
+                <a:ea typeface="Malgun Gothic" pitchFamily="34" charset="-122"/>
+                <a:cs typeface="Malgun Gothic" pitchFamily="34" charset="-120"/>
+              </a:rPr>
               <a:t>날짜</a:t>
             </a:r>
             <a:endParaRPr lang="en-US" sz="938" dirty="0"/>
@@ -5152,13 +6012,13 @@
       </p:sp>
       <p:sp>
         <p:nvSpPr>
-          <p:cNvPr id="23" name="Text 21"/>
-          <p:cNvSpPr txBox="1"/>
-          <p:nvPr/>
-        </p:nvSpPr>
-        <p:spPr>
-          <a:xfrm>
-            <a:off x="1743075" y="2286000"/>
+          <p:cNvPr id="45" name="Text 43"/>
+          <p:cNvSpPr txBox="1"/>
+          <p:nvPr/>
+        </p:nvSpPr>
+        <p:spPr>
+          <a:xfrm>
+            <a:off x="1743075" y="3200400"/>
             <a:ext cx="990600" cy="142875"/>
           </a:xfrm>
           <a:prstGeom prst="rect">
@@ -5194,13 +6054,13 @@
       </p:sp>
       <p:sp>
         <p:nvSpPr>
-          <p:cNvPr id="24" name="Text 22"/>
-          <p:cNvSpPr txBox="1"/>
-          <p:nvPr/>
-        </p:nvSpPr>
-        <p:spPr>
-          <a:xfrm>
-            <a:off x="2905125" y="2286000"/>
+          <p:cNvPr id="46" name="Text 44"/>
+          <p:cNvSpPr txBox="1"/>
+          <p:nvPr/>
+        </p:nvSpPr>
+        <p:spPr>
+          <a:xfrm>
+            <a:off x="2905125" y="3200400"/>
             <a:ext cx="1238250" cy="142875"/>
           </a:xfrm>
           <a:prstGeom prst="rect">
@@ -5236,13 +6096,13 @@
       </p:sp>
       <p:sp>
         <p:nvSpPr>
-          <p:cNvPr id="25" name="Shape 23"/>
-          <p:cNvSpPr/>
-          <p:nvPr/>
-        </p:nvSpPr>
-        <p:spPr>
-          <a:xfrm>
-            <a:off x="952500" y="2667000"/>
+          <p:cNvPr id="47" name="Shape 45"/>
+          <p:cNvSpPr/>
+          <p:nvPr/>
+        </p:nvSpPr>
+        <p:spPr>
+          <a:xfrm>
+            <a:off x="952500" y="3533775"/>
             <a:ext cx="3276600" cy="0"/>
           </a:xfrm>
           <a:prstGeom prst="line">
@@ -5259,13 +6119,13 @@
       </p:sp>
       <p:sp>
         <p:nvSpPr>
-          <p:cNvPr id="26" name="Text 24"/>
-          <p:cNvSpPr txBox="1"/>
-          <p:nvPr/>
-        </p:nvSpPr>
-        <p:spPr>
-          <a:xfrm>
-            <a:off x="1038225" y="2490788"/>
+          <p:cNvPr id="48" name="Text 46"/>
+          <p:cNvSpPr txBox="1"/>
+          <p:nvPr/>
+        </p:nvSpPr>
+        <p:spPr>
+          <a:xfrm>
+            <a:off x="1038225" y="3371850"/>
             <a:ext cx="533400" cy="142875"/>
           </a:xfrm>
           <a:prstGeom prst="rect">
@@ -5301,14 +6161,14 @@
       </p:sp>
       <p:sp>
         <p:nvSpPr>
-          <p:cNvPr id="27" name="Text 25"/>
-          <p:cNvSpPr txBox="1"/>
-          <p:nvPr/>
-        </p:nvSpPr>
-        <p:spPr>
-          <a:xfrm>
-            <a:off x="1743075" y="2490788"/>
-            <a:ext cx="990600" cy="142875"/>
+          <p:cNvPr id="49" name="Text 47"/>
+          <p:cNvSpPr txBox="1"/>
+          <p:nvPr/>
+        </p:nvSpPr>
+        <p:spPr>
+          <a:xfrm>
+            <a:off x="1743075" y="3371850"/>
+            <a:ext cx="990600" cy="131445"/>
           </a:xfrm>
           <a:prstGeom prst="rect">
             <a:avLst/>
@@ -5322,12 +6182,12 @@
           <a:p>
             <a:pPr algn="r" indent="0" marL="0">
               <a:lnSpc>
-                <a:spcPts val="1125"/>
-              </a:lnSpc>
-              <a:buNone/>
-            </a:pPr>
-            <a:r>
-              <a:rPr lang="en-US" sz="938" b="1" dirty="0">
+                <a:spcPts val="1035"/>
+              </a:lnSpc>
+              <a:buNone/>
+            </a:pPr>
+            <a:r>
+              <a:rPr lang="en-US" sz="863" b="1" dirty="0">
                 <a:solidFill>
                   <a:srgbClr val="EFB13C"/>
                 </a:solidFill>
@@ -5337,20 +6197,20 @@
               </a:rPr>
               <a:t>11.3</a:t>
             </a:r>
-            <a:endParaRPr lang="en-US" sz="938" dirty="0"/>
-          </a:p>
-        </p:txBody>
-      </p:sp>
-      <p:sp>
-        <p:nvSpPr>
-          <p:cNvPr id="28" name="Text 26"/>
-          <p:cNvSpPr txBox="1"/>
-          <p:nvPr/>
-        </p:nvSpPr>
-        <p:spPr>
-          <a:xfrm>
-            <a:off x="2905125" y="2490788"/>
-            <a:ext cx="1238250" cy="142875"/>
+            <a:endParaRPr lang="en-US" sz="863" dirty="0"/>
+          </a:p>
+        </p:txBody>
+      </p:sp>
+      <p:sp>
+        <p:nvSpPr>
+          <p:cNvPr id="50" name="Text 48"/>
+          <p:cNvSpPr txBox="1"/>
+          <p:nvPr/>
+        </p:nvSpPr>
+        <p:spPr>
+          <a:xfrm>
+            <a:off x="2905125" y="3371850"/>
+            <a:ext cx="1238250" cy="131445"/>
           </a:xfrm>
           <a:prstGeom prst="rect">
             <a:avLst/>
@@ -5364,12 +6224,12 @@
           <a:p>
             <a:pPr algn="r" indent="0" marL="0">
               <a:lnSpc>
-                <a:spcPts val="1125"/>
-              </a:lnSpc>
-              <a:buNone/>
-            </a:pPr>
-            <a:r>
-              <a:rPr lang="en-US" sz="938" dirty="0">
+                <a:spcPts val="1035"/>
+              </a:lnSpc>
+              <a:buNone/>
+            </a:pPr>
+            <a:r>
+              <a:rPr lang="en-US" sz="863" dirty="0">
                 <a:solidFill>
                   <a:srgbClr val="A8BCD1"/>
                 </a:solidFill>
@@ -5379,20 +6239,20 @@
               </a:rPr>
               <a:t>4</a:t>
             </a:r>
-            <a:endParaRPr lang="en-US" sz="938" dirty="0"/>
-          </a:p>
-        </p:txBody>
-      </p:sp>
-      <p:sp>
-        <p:nvSpPr>
-          <p:cNvPr id="29" name="Shape 27"/>
-          <p:cNvSpPr/>
-          <p:nvPr/>
-        </p:nvSpPr>
-        <p:spPr>
-          <a:xfrm>
-            <a:off x="952500" y="2667000"/>
-            <a:ext cx="3276600" cy="209550"/>
+            <a:endParaRPr lang="en-US" sz="863" dirty="0"/>
+          </a:p>
+        </p:txBody>
+      </p:sp>
+      <p:sp>
+        <p:nvSpPr>
+          <p:cNvPr id="51" name="Shape 49"/>
+          <p:cNvSpPr/>
+          <p:nvPr/>
+        </p:nvSpPr>
+        <p:spPr>
+          <a:xfrm>
+            <a:off x="952500" y="3533775"/>
+            <a:ext cx="3276600" cy="180975"/>
           </a:xfrm>
           <a:prstGeom prst="rect">
             <a:avLst/>
@@ -5407,13 +6267,13 @@
       </p:sp>
       <p:sp>
         <p:nvSpPr>
-          <p:cNvPr id="30" name="Shape 28"/>
-          <p:cNvSpPr/>
-          <p:nvPr/>
-        </p:nvSpPr>
-        <p:spPr>
-          <a:xfrm>
-            <a:off x="952500" y="2876550"/>
+          <p:cNvPr id="52" name="Shape 50"/>
+          <p:cNvSpPr/>
+          <p:nvPr/>
+        </p:nvSpPr>
+        <p:spPr>
+          <a:xfrm>
+            <a:off x="952500" y="3714750"/>
             <a:ext cx="3276600" cy="0"/>
           </a:xfrm>
           <a:prstGeom prst="line">
@@ -5430,13 +6290,13 @@
       </p:sp>
       <p:sp>
         <p:nvSpPr>
-          <p:cNvPr id="31" name="Text 29"/>
-          <p:cNvSpPr txBox="1"/>
-          <p:nvPr/>
-        </p:nvSpPr>
-        <p:spPr>
-          <a:xfrm>
-            <a:off x="1038225" y="2700338"/>
+          <p:cNvPr id="53" name="Text 51"/>
+          <p:cNvSpPr txBox="1"/>
+          <p:nvPr/>
+        </p:nvSpPr>
+        <p:spPr>
+          <a:xfrm>
+            <a:off x="1038225" y="3552825"/>
             <a:ext cx="533400" cy="142875"/>
           </a:xfrm>
           <a:prstGeom prst="rect">
@@ -5472,14 +6332,14 @@
       </p:sp>
       <p:sp>
         <p:nvSpPr>
-          <p:cNvPr id="32" name="Text 30"/>
-          <p:cNvSpPr txBox="1"/>
-          <p:nvPr/>
-        </p:nvSpPr>
-        <p:spPr>
-          <a:xfrm>
-            <a:off x="1743075" y="2700338"/>
-            <a:ext cx="990600" cy="142875"/>
+          <p:cNvPr id="54" name="Text 52"/>
+          <p:cNvSpPr txBox="1"/>
+          <p:nvPr/>
+        </p:nvSpPr>
+        <p:spPr>
+          <a:xfrm>
+            <a:off x="1743075" y="3552825"/>
+            <a:ext cx="990600" cy="131445"/>
           </a:xfrm>
           <a:prstGeom prst="rect">
             <a:avLst/>
@@ -5493,12 +6353,12 @@
           <a:p>
             <a:pPr algn="r" indent="0" marL="0">
               <a:lnSpc>
-                <a:spcPts val="1125"/>
-              </a:lnSpc>
-              <a:buNone/>
-            </a:pPr>
-            <a:r>
-              <a:rPr lang="en-US" sz="938" b="1" dirty="0">
+                <a:spcPts val="1035"/>
+              </a:lnSpc>
+              <a:buNone/>
+            </a:pPr>
+            <a:r>
+              <a:rPr lang="en-US" sz="863" b="1" dirty="0">
                 <a:solidFill>
                   <a:srgbClr val="EFB13C"/>
                 </a:solidFill>
@@ -5508,20 +6368,20 @@
               </a:rPr>
               <a:t>6.0</a:t>
             </a:r>
-            <a:endParaRPr lang="en-US" sz="938" dirty="0"/>
-          </a:p>
-        </p:txBody>
-      </p:sp>
-      <p:sp>
-        <p:nvSpPr>
-          <p:cNvPr id="33" name="Text 31"/>
-          <p:cNvSpPr txBox="1"/>
-          <p:nvPr/>
-        </p:nvSpPr>
-        <p:spPr>
-          <a:xfrm>
-            <a:off x="2905125" y="2700338"/>
-            <a:ext cx="1238250" cy="142875"/>
+            <a:endParaRPr lang="en-US" sz="863" dirty="0"/>
+          </a:p>
+        </p:txBody>
+      </p:sp>
+      <p:sp>
+        <p:nvSpPr>
+          <p:cNvPr id="55" name="Text 53"/>
+          <p:cNvSpPr txBox="1"/>
+          <p:nvPr/>
+        </p:nvSpPr>
+        <p:spPr>
+          <a:xfrm>
+            <a:off x="2905125" y="3552825"/>
+            <a:ext cx="1238250" cy="131445"/>
           </a:xfrm>
           <a:prstGeom prst="rect">
             <a:avLst/>
@@ -5535,12 +6395,12 @@
           <a:p>
             <a:pPr algn="r" indent="0" marL="0">
               <a:lnSpc>
-                <a:spcPts val="1125"/>
-              </a:lnSpc>
-              <a:buNone/>
-            </a:pPr>
-            <a:r>
-              <a:rPr lang="en-US" sz="938" dirty="0">
+                <a:spcPts val="1035"/>
+              </a:lnSpc>
+              <a:buNone/>
+            </a:pPr>
+            <a:r>
+              <a:rPr lang="en-US" sz="863" dirty="0">
                 <a:solidFill>
                   <a:srgbClr val="A8BCD1"/>
                 </a:solidFill>
@@ -5550,19 +6410,19 @@
               </a:rPr>
               <a:t>4</a:t>
             </a:r>
-            <a:endParaRPr lang="en-US" sz="938" dirty="0"/>
-          </a:p>
-        </p:txBody>
-      </p:sp>
-      <p:sp>
-        <p:nvSpPr>
-          <p:cNvPr id="34" name="Shape 32"/>
-          <p:cNvSpPr/>
-          <p:nvPr/>
-        </p:nvSpPr>
-        <p:spPr>
-          <a:xfrm>
-            <a:off x="952500" y="3086100"/>
+            <a:endParaRPr lang="en-US" sz="863" dirty="0"/>
+          </a:p>
+        </p:txBody>
+      </p:sp>
+      <p:sp>
+        <p:nvSpPr>
+          <p:cNvPr id="56" name="Shape 54"/>
+          <p:cNvSpPr/>
+          <p:nvPr/>
+        </p:nvSpPr>
+        <p:spPr>
+          <a:xfrm>
+            <a:off x="952500" y="3895725"/>
             <a:ext cx="3276600" cy="0"/>
           </a:xfrm>
           <a:prstGeom prst="line">
@@ -5579,13 +6439,13 @@
       </p:sp>
       <p:sp>
         <p:nvSpPr>
-          <p:cNvPr id="35" name="Text 33"/>
-          <p:cNvSpPr txBox="1"/>
-          <p:nvPr/>
-        </p:nvSpPr>
-        <p:spPr>
-          <a:xfrm>
-            <a:off x="1038225" y="2909888"/>
+          <p:cNvPr id="57" name="Text 55"/>
+          <p:cNvSpPr txBox="1"/>
+          <p:nvPr/>
+        </p:nvSpPr>
+        <p:spPr>
+          <a:xfrm>
+            <a:off x="1038225" y="3733800"/>
             <a:ext cx="533400" cy="142875"/>
           </a:xfrm>
           <a:prstGeom prst="rect">
@@ -5621,14 +6481,14 @@
       </p:sp>
       <p:sp>
         <p:nvSpPr>
-          <p:cNvPr id="36" name="Text 34"/>
-          <p:cNvSpPr txBox="1"/>
-          <p:nvPr/>
-        </p:nvSpPr>
-        <p:spPr>
-          <a:xfrm>
-            <a:off x="1743075" y="2909888"/>
-            <a:ext cx="990600" cy="142875"/>
+          <p:cNvPr id="58" name="Text 56"/>
+          <p:cNvSpPr txBox="1"/>
+          <p:nvPr/>
+        </p:nvSpPr>
+        <p:spPr>
+          <a:xfrm>
+            <a:off x="1743075" y="3733800"/>
+            <a:ext cx="990600" cy="131445"/>
           </a:xfrm>
           <a:prstGeom prst="rect">
             <a:avLst/>
@@ -5642,12 +6502,12 @@
           <a:p>
             <a:pPr algn="r" indent="0" marL="0">
               <a:lnSpc>
-                <a:spcPts val="1125"/>
-              </a:lnSpc>
-              <a:buNone/>
-            </a:pPr>
-            <a:r>
-              <a:rPr lang="en-US" sz="938" b="1" dirty="0">
+                <a:spcPts val="1035"/>
+              </a:lnSpc>
+              <a:buNone/>
+            </a:pPr>
+            <a:r>
+              <a:rPr lang="en-US" sz="863" b="1" dirty="0">
                 <a:solidFill>
                   <a:srgbClr val="EFB13C"/>
                 </a:solidFill>
@@ -5657,20 +6517,20 @@
               </a:rPr>
               <a:t>11.0</a:t>
             </a:r>
-            <a:endParaRPr lang="en-US" sz="938" dirty="0"/>
-          </a:p>
-        </p:txBody>
-      </p:sp>
-      <p:sp>
-        <p:nvSpPr>
-          <p:cNvPr id="37" name="Text 35"/>
-          <p:cNvSpPr txBox="1"/>
-          <p:nvPr/>
-        </p:nvSpPr>
-        <p:spPr>
-          <a:xfrm>
-            <a:off x="2905125" y="2909888"/>
-            <a:ext cx="1238250" cy="142875"/>
+            <a:endParaRPr lang="en-US" sz="863" dirty="0"/>
+          </a:p>
+        </p:txBody>
+      </p:sp>
+      <p:sp>
+        <p:nvSpPr>
+          <p:cNvPr id="59" name="Text 57"/>
+          <p:cNvSpPr txBox="1"/>
+          <p:nvPr/>
+        </p:nvSpPr>
+        <p:spPr>
+          <a:xfrm>
+            <a:off x="2905125" y="3733800"/>
+            <a:ext cx="1238250" cy="131445"/>
           </a:xfrm>
           <a:prstGeom prst="rect">
             <a:avLst/>
@@ -5684,12 +6544,12 @@
           <a:p>
             <a:pPr algn="r" indent="0" marL="0">
               <a:lnSpc>
-                <a:spcPts val="1125"/>
-              </a:lnSpc>
-              <a:buNone/>
-            </a:pPr>
-            <a:r>
-              <a:rPr lang="en-US" sz="938" dirty="0">
+                <a:spcPts val="1035"/>
+              </a:lnSpc>
+              <a:buNone/>
+            </a:pPr>
+            <a:r>
+              <a:rPr lang="en-US" sz="863" dirty="0">
                 <a:solidFill>
                   <a:srgbClr val="A8BCD1"/>
                 </a:solidFill>
@@ -5699,20 +6559,20 @@
               </a:rPr>
               <a:t>4</a:t>
             </a:r>
-            <a:endParaRPr lang="en-US" sz="938" dirty="0"/>
-          </a:p>
-        </p:txBody>
-      </p:sp>
-      <p:sp>
-        <p:nvSpPr>
-          <p:cNvPr id="38" name="Shape 36"/>
-          <p:cNvSpPr/>
-          <p:nvPr/>
-        </p:nvSpPr>
-        <p:spPr>
-          <a:xfrm>
-            <a:off x="952500" y="3086100"/>
-            <a:ext cx="3276600" cy="209550"/>
+            <a:endParaRPr lang="en-US" sz="863" dirty="0"/>
+          </a:p>
+        </p:txBody>
+      </p:sp>
+      <p:sp>
+        <p:nvSpPr>
+          <p:cNvPr id="60" name="Shape 58"/>
+          <p:cNvSpPr/>
+          <p:nvPr/>
+        </p:nvSpPr>
+        <p:spPr>
+          <a:xfrm>
+            <a:off x="952500" y="3895725"/>
+            <a:ext cx="3276600" cy="180975"/>
           </a:xfrm>
           <a:prstGeom prst="rect">
             <a:avLst/>
@@ -5727,13 +6587,13 @@
       </p:sp>
       <p:sp>
         <p:nvSpPr>
-          <p:cNvPr id="39" name="Shape 37"/>
-          <p:cNvSpPr/>
-          <p:nvPr/>
-        </p:nvSpPr>
-        <p:spPr>
-          <a:xfrm>
-            <a:off x="952500" y="3295650"/>
+          <p:cNvPr id="61" name="Shape 59"/>
+          <p:cNvSpPr/>
+          <p:nvPr/>
+        </p:nvSpPr>
+        <p:spPr>
+          <a:xfrm>
+            <a:off x="952500" y="4076700"/>
             <a:ext cx="3276600" cy="0"/>
           </a:xfrm>
           <a:prstGeom prst="line">
@@ -5750,13 +6610,13 @@
       </p:sp>
       <p:sp>
         <p:nvSpPr>
-          <p:cNvPr id="40" name="Text 38"/>
-          <p:cNvSpPr txBox="1"/>
-          <p:nvPr/>
-        </p:nvSpPr>
-        <p:spPr>
-          <a:xfrm>
-            <a:off x="1038225" y="3119438"/>
+          <p:cNvPr id="62" name="Text 60"/>
+          <p:cNvSpPr txBox="1"/>
+          <p:nvPr/>
+        </p:nvSpPr>
+        <p:spPr>
+          <a:xfrm>
+            <a:off x="1038225" y="3914775"/>
             <a:ext cx="533400" cy="142875"/>
           </a:xfrm>
           <a:prstGeom prst="rect">
@@ -5792,14 +6652,14 @@
       </p:sp>
       <p:sp>
         <p:nvSpPr>
-          <p:cNvPr id="41" name="Text 39"/>
-          <p:cNvSpPr txBox="1"/>
-          <p:nvPr/>
-        </p:nvSpPr>
-        <p:spPr>
-          <a:xfrm>
-            <a:off x="1743075" y="3119438"/>
-            <a:ext cx="990600" cy="142875"/>
+          <p:cNvPr id="63" name="Text 61"/>
+          <p:cNvSpPr txBox="1"/>
+          <p:nvPr/>
+        </p:nvSpPr>
+        <p:spPr>
+          <a:xfrm>
+            <a:off x="1743075" y="3914775"/>
+            <a:ext cx="990600" cy="131445"/>
           </a:xfrm>
           <a:prstGeom prst="rect">
             <a:avLst/>
@@ -5813,12 +6673,12 @@
           <a:p>
             <a:pPr algn="r" indent="0" marL="0">
               <a:lnSpc>
-                <a:spcPts val="1125"/>
-              </a:lnSpc>
-              <a:buNone/>
-            </a:pPr>
-            <a:r>
-              <a:rPr lang="en-US" sz="938" b="1" dirty="0">
+                <a:spcPts val="1035"/>
+              </a:lnSpc>
+              <a:buNone/>
+            </a:pPr>
+            <a:r>
+              <a:rPr lang="en-US" sz="863" b="1" dirty="0">
                 <a:solidFill>
                   <a:srgbClr val="EFB13C"/>
                 </a:solidFill>
@@ -5828,20 +6688,20 @@
               </a:rPr>
               <a:t>8.0</a:t>
             </a:r>
-            <a:endParaRPr lang="en-US" sz="938" dirty="0"/>
-          </a:p>
-        </p:txBody>
-      </p:sp>
-      <p:sp>
-        <p:nvSpPr>
-          <p:cNvPr id="42" name="Text 40"/>
-          <p:cNvSpPr txBox="1"/>
-          <p:nvPr/>
-        </p:nvSpPr>
-        <p:spPr>
-          <a:xfrm>
-            <a:off x="2905125" y="3119438"/>
-            <a:ext cx="1238250" cy="142875"/>
+            <a:endParaRPr lang="en-US" sz="863" dirty="0"/>
+          </a:p>
+        </p:txBody>
+      </p:sp>
+      <p:sp>
+        <p:nvSpPr>
+          <p:cNvPr id="64" name="Text 62"/>
+          <p:cNvSpPr txBox="1"/>
+          <p:nvPr/>
+        </p:nvSpPr>
+        <p:spPr>
+          <a:xfrm>
+            <a:off x="2905125" y="3914775"/>
+            <a:ext cx="1238250" cy="131445"/>
           </a:xfrm>
           <a:prstGeom prst="rect">
             <a:avLst/>
@@ -5855,12 +6715,12 @@
           <a:p>
             <a:pPr algn="r" indent="0" marL="0">
               <a:lnSpc>
-                <a:spcPts val="1125"/>
-              </a:lnSpc>
-              <a:buNone/>
-            </a:pPr>
-            <a:r>
-              <a:rPr lang="en-US" sz="938" dirty="0">
+                <a:spcPts val="1035"/>
+              </a:lnSpc>
+              <a:buNone/>
+            </a:pPr>
+            <a:r>
+              <a:rPr lang="en-US" sz="863" dirty="0">
                 <a:solidFill>
                   <a:srgbClr val="A8BCD1"/>
                 </a:solidFill>
@@ -5870,19 +6730,19 @@
               </a:rPr>
               <a:t>4</a:t>
             </a:r>
-            <a:endParaRPr lang="en-US" sz="938" dirty="0"/>
-          </a:p>
-        </p:txBody>
-      </p:sp>
-      <p:sp>
-        <p:nvSpPr>
-          <p:cNvPr id="43" name="Shape 41"/>
-          <p:cNvSpPr/>
-          <p:nvPr/>
-        </p:nvSpPr>
-        <p:spPr>
-          <a:xfrm>
-            <a:off x="952500" y="3505200"/>
+            <a:endParaRPr lang="en-US" sz="863" dirty="0"/>
+          </a:p>
+        </p:txBody>
+      </p:sp>
+      <p:sp>
+        <p:nvSpPr>
+          <p:cNvPr id="65" name="Shape 63"/>
+          <p:cNvSpPr/>
+          <p:nvPr/>
+        </p:nvSpPr>
+        <p:spPr>
+          <a:xfrm>
+            <a:off x="952500" y="4257675"/>
             <a:ext cx="3276600" cy="0"/>
           </a:xfrm>
           <a:prstGeom prst="line">
@@ -5899,13 +6759,13 @@
       </p:sp>
       <p:sp>
         <p:nvSpPr>
-          <p:cNvPr id="44" name="Text 42"/>
-          <p:cNvSpPr txBox="1"/>
-          <p:nvPr/>
-        </p:nvSpPr>
-        <p:spPr>
-          <a:xfrm>
-            <a:off x="1038225" y="3328988"/>
+          <p:cNvPr id="66" name="Text 64"/>
+          <p:cNvSpPr txBox="1"/>
+          <p:nvPr/>
+        </p:nvSpPr>
+        <p:spPr>
+          <a:xfrm>
+            <a:off x="1038225" y="4095750"/>
             <a:ext cx="533400" cy="142875"/>
           </a:xfrm>
           <a:prstGeom prst="rect">
@@ -5941,14 +6801,14 @@
       </p:sp>
       <p:sp>
         <p:nvSpPr>
-          <p:cNvPr id="45" name="Text 43"/>
-          <p:cNvSpPr txBox="1"/>
-          <p:nvPr/>
-        </p:nvSpPr>
-        <p:spPr>
-          <a:xfrm>
-            <a:off x="1743075" y="3328988"/>
-            <a:ext cx="990600" cy="142875"/>
+          <p:cNvPr id="67" name="Text 65"/>
+          <p:cNvSpPr txBox="1"/>
+          <p:nvPr/>
+        </p:nvSpPr>
+        <p:spPr>
+          <a:xfrm>
+            <a:off x="1743075" y="4095750"/>
+            <a:ext cx="990600" cy="131445"/>
           </a:xfrm>
           <a:prstGeom prst="rect">
             <a:avLst/>
@@ -5962,12 +6822,12 @@
           <a:p>
             <a:pPr algn="r" indent="0" marL="0">
               <a:lnSpc>
-                <a:spcPts val="1125"/>
-              </a:lnSpc>
-              <a:buNone/>
-            </a:pPr>
-            <a:r>
-              <a:rPr lang="en-US" sz="938" b="1" dirty="0">
+                <a:spcPts val="1035"/>
+              </a:lnSpc>
+              <a:buNone/>
+            </a:pPr>
+            <a:r>
+              <a:rPr lang="en-US" sz="863" b="1" dirty="0">
                 <a:solidFill>
                   <a:srgbClr val="EFB13C"/>
                 </a:solidFill>
@@ -5977,20 +6837,20 @@
               </a:rPr>
               <a:t>11.5</a:t>
             </a:r>
-            <a:endParaRPr lang="en-US" sz="938" dirty="0"/>
-          </a:p>
-        </p:txBody>
-      </p:sp>
-      <p:sp>
-        <p:nvSpPr>
-          <p:cNvPr id="46" name="Text 44"/>
-          <p:cNvSpPr txBox="1"/>
-          <p:nvPr/>
-        </p:nvSpPr>
-        <p:spPr>
-          <a:xfrm>
-            <a:off x="2905125" y="3328988"/>
-            <a:ext cx="1238250" cy="142875"/>
+            <a:endParaRPr lang="en-US" sz="863" dirty="0"/>
+          </a:p>
+        </p:txBody>
+      </p:sp>
+      <p:sp>
+        <p:nvSpPr>
+          <p:cNvPr id="68" name="Text 66"/>
+          <p:cNvSpPr txBox="1"/>
+          <p:nvPr/>
+        </p:nvSpPr>
+        <p:spPr>
+          <a:xfrm>
+            <a:off x="2905125" y="4095750"/>
+            <a:ext cx="1238250" cy="131445"/>
           </a:xfrm>
           <a:prstGeom prst="rect">
             <a:avLst/>
@@ -6004,12 +6864,12 @@
           <a:p>
             <a:pPr algn="r" indent="0" marL="0">
               <a:lnSpc>
-                <a:spcPts val="1125"/>
-              </a:lnSpc>
-              <a:buNone/>
-            </a:pPr>
-            <a:r>
-              <a:rPr lang="en-US" sz="938" dirty="0">
+                <a:spcPts val="1035"/>
+              </a:lnSpc>
+              <a:buNone/>
+            </a:pPr>
+            <a:r>
+              <a:rPr lang="en-US" sz="863" dirty="0">
                 <a:solidFill>
                   <a:srgbClr val="A8BCD1"/>
                 </a:solidFill>
@@ -6019,20 +6879,20 @@
               </a:rPr>
               <a:t>4</a:t>
             </a:r>
-            <a:endParaRPr lang="en-US" sz="938" dirty="0"/>
-          </a:p>
-        </p:txBody>
-      </p:sp>
-      <p:sp>
-        <p:nvSpPr>
-          <p:cNvPr id="47" name="Shape 45"/>
-          <p:cNvSpPr/>
-          <p:nvPr/>
-        </p:nvSpPr>
-        <p:spPr>
-          <a:xfrm>
-            <a:off x="952500" y="3505200"/>
-            <a:ext cx="3276600" cy="209550"/>
+            <a:endParaRPr lang="en-US" sz="863" dirty="0"/>
+          </a:p>
+        </p:txBody>
+      </p:sp>
+      <p:sp>
+        <p:nvSpPr>
+          <p:cNvPr id="69" name="Shape 67"/>
+          <p:cNvSpPr/>
+          <p:nvPr/>
+        </p:nvSpPr>
+        <p:spPr>
+          <a:xfrm>
+            <a:off x="952500" y="4257675"/>
+            <a:ext cx="3276600" cy="180975"/>
           </a:xfrm>
           <a:prstGeom prst="rect">
             <a:avLst/>
@@ -6047,13 +6907,13 @@
       </p:sp>
       <p:sp>
         <p:nvSpPr>
-          <p:cNvPr id="48" name="Shape 46"/>
-          <p:cNvSpPr/>
-          <p:nvPr/>
-        </p:nvSpPr>
-        <p:spPr>
-          <a:xfrm>
-            <a:off x="952500" y="3714750"/>
+          <p:cNvPr id="70" name="Shape 68"/>
+          <p:cNvSpPr/>
+          <p:nvPr/>
+        </p:nvSpPr>
+        <p:spPr>
+          <a:xfrm>
+            <a:off x="952500" y="4438650"/>
             <a:ext cx="3276600" cy="0"/>
           </a:xfrm>
           <a:prstGeom prst="line">
@@ -6070,13 +6930,13 @@
       </p:sp>
       <p:sp>
         <p:nvSpPr>
-          <p:cNvPr id="49" name="Text 47"/>
-          <p:cNvSpPr txBox="1"/>
-          <p:nvPr/>
-        </p:nvSpPr>
-        <p:spPr>
-          <a:xfrm>
-            <a:off x="1038225" y="3538538"/>
+          <p:cNvPr id="71" name="Text 69"/>
+          <p:cNvSpPr txBox="1"/>
+          <p:nvPr/>
+        </p:nvSpPr>
+        <p:spPr>
+          <a:xfrm>
+            <a:off x="1038225" y="4276725"/>
             <a:ext cx="533400" cy="142875"/>
           </a:xfrm>
           <a:prstGeom prst="rect">
@@ -6112,14 +6972,14 @@
       </p:sp>
       <p:sp>
         <p:nvSpPr>
-          <p:cNvPr id="50" name="Text 48"/>
-          <p:cNvSpPr txBox="1"/>
-          <p:nvPr/>
-        </p:nvSpPr>
-        <p:spPr>
-          <a:xfrm>
-            <a:off x="1743075" y="3538538"/>
-            <a:ext cx="990600" cy="142875"/>
+          <p:cNvPr id="72" name="Text 70"/>
+          <p:cNvSpPr txBox="1"/>
+          <p:nvPr/>
+        </p:nvSpPr>
+        <p:spPr>
+          <a:xfrm>
+            <a:off x="1743075" y="4276725"/>
+            <a:ext cx="990600" cy="131445"/>
           </a:xfrm>
           <a:prstGeom prst="rect">
             <a:avLst/>
@@ -6133,12 +6993,12 @@
           <a:p>
             <a:pPr algn="r" indent="0" marL="0">
               <a:lnSpc>
-                <a:spcPts val="1125"/>
-              </a:lnSpc>
-              <a:buNone/>
-            </a:pPr>
-            <a:r>
-              <a:rPr lang="en-US" sz="938" b="1" dirty="0">
+                <a:spcPts val="1035"/>
+              </a:lnSpc>
+              <a:buNone/>
+            </a:pPr>
+            <a:r>
+              <a:rPr lang="en-US" sz="863" b="1" dirty="0">
                 <a:solidFill>
                   <a:srgbClr val="EFB13C"/>
                 </a:solidFill>
@@ -6148,20 +7008,20 @@
               </a:rPr>
               <a:t>6.9</a:t>
             </a:r>
-            <a:endParaRPr lang="en-US" sz="938" dirty="0"/>
-          </a:p>
-        </p:txBody>
-      </p:sp>
-      <p:sp>
-        <p:nvSpPr>
-          <p:cNvPr id="51" name="Text 49"/>
-          <p:cNvSpPr txBox="1"/>
-          <p:nvPr/>
-        </p:nvSpPr>
-        <p:spPr>
-          <a:xfrm>
-            <a:off x="2905125" y="3538538"/>
-            <a:ext cx="1238250" cy="142875"/>
+            <a:endParaRPr lang="en-US" sz="863" dirty="0"/>
+          </a:p>
+        </p:txBody>
+      </p:sp>
+      <p:sp>
+        <p:nvSpPr>
+          <p:cNvPr id="73" name="Text 71"/>
+          <p:cNvSpPr txBox="1"/>
+          <p:nvPr/>
+        </p:nvSpPr>
+        <p:spPr>
+          <a:xfrm>
+            <a:off x="2905125" y="4276725"/>
+            <a:ext cx="1238250" cy="131445"/>
           </a:xfrm>
           <a:prstGeom prst="rect">
             <a:avLst/>
@@ -6175,12 +7035,12 @@
           <a:p>
             <a:pPr algn="r" indent="0" marL="0">
               <a:lnSpc>
-                <a:spcPts val="1125"/>
-              </a:lnSpc>
-              <a:buNone/>
-            </a:pPr>
-            <a:r>
-              <a:rPr lang="en-US" sz="938" dirty="0">
+                <a:spcPts val="1035"/>
+              </a:lnSpc>
+              <a:buNone/>
+            </a:pPr>
+            <a:r>
+              <a:rPr lang="en-US" sz="863" dirty="0">
                 <a:solidFill>
                   <a:srgbClr val="A8BCD1"/>
                 </a:solidFill>
@@ -6190,19 +7050,19 @@
               </a:rPr>
               <a:t>4</a:t>
             </a:r>
-            <a:endParaRPr lang="en-US" sz="938" dirty="0"/>
-          </a:p>
-        </p:txBody>
-      </p:sp>
-      <p:sp>
-        <p:nvSpPr>
-          <p:cNvPr id="52" name="Shape 50"/>
-          <p:cNvSpPr/>
-          <p:nvPr/>
-        </p:nvSpPr>
-        <p:spPr>
-          <a:xfrm>
-            <a:off x="952500" y="3924300"/>
+            <a:endParaRPr lang="en-US" sz="863" dirty="0"/>
+          </a:p>
+        </p:txBody>
+      </p:sp>
+      <p:sp>
+        <p:nvSpPr>
+          <p:cNvPr id="74" name="Shape 72"/>
+          <p:cNvSpPr/>
+          <p:nvPr/>
+        </p:nvSpPr>
+        <p:spPr>
+          <a:xfrm>
+            <a:off x="952500" y="4619625"/>
             <a:ext cx="3276600" cy="0"/>
           </a:xfrm>
           <a:prstGeom prst="line">
@@ -6219,13 +7079,13 @@
       </p:sp>
       <p:sp>
         <p:nvSpPr>
-          <p:cNvPr id="53" name="Text 51"/>
-          <p:cNvSpPr txBox="1"/>
-          <p:nvPr/>
-        </p:nvSpPr>
-        <p:spPr>
-          <a:xfrm>
-            <a:off x="1038225" y="3748087"/>
+          <p:cNvPr id="75" name="Text 73"/>
+          <p:cNvSpPr txBox="1"/>
+          <p:nvPr/>
+        </p:nvSpPr>
+        <p:spPr>
+          <a:xfrm>
+            <a:off x="1038225" y="4457700"/>
             <a:ext cx="533400" cy="142875"/>
           </a:xfrm>
           <a:prstGeom prst="rect">
@@ -6261,14 +7121,14 @@
       </p:sp>
       <p:sp>
         <p:nvSpPr>
-          <p:cNvPr id="54" name="Text 52"/>
-          <p:cNvSpPr txBox="1"/>
-          <p:nvPr/>
-        </p:nvSpPr>
-        <p:spPr>
-          <a:xfrm>
-            <a:off x="1743075" y="3748087"/>
-            <a:ext cx="990600" cy="142875"/>
+          <p:cNvPr id="76" name="Text 74"/>
+          <p:cNvSpPr txBox="1"/>
+          <p:nvPr/>
+        </p:nvSpPr>
+        <p:spPr>
+          <a:xfrm>
+            <a:off x="1743075" y="4457700"/>
+            <a:ext cx="990600" cy="131445"/>
           </a:xfrm>
           <a:prstGeom prst="rect">
             <a:avLst/>
@@ -6282,12 +7142,12 @@
           <a:p>
             <a:pPr algn="r" indent="0" marL="0">
               <a:lnSpc>
-                <a:spcPts val="1125"/>
-              </a:lnSpc>
-              <a:buNone/>
-            </a:pPr>
-            <a:r>
-              <a:rPr lang="en-US" sz="938" b="1" dirty="0">
+                <a:spcPts val="1035"/>
+              </a:lnSpc>
+              <a:buNone/>
+            </a:pPr>
+            <a:r>
+              <a:rPr lang="en-US" sz="863" b="1" dirty="0">
                 <a:solidFill>
                   <a:srgbClr val="EFB13C"/>
                 </a:solidFill>
@@ -6297,20 +7157,20 @@
               </a:rPr>
               <a:t>9.5</a:t>
             </a:r>
-            <a:endParaRPr lang="en-US" sz="938" dirty="0"/>
-          </a:p>
-        </p:txBody>
-      </p:sp>
-      <p:sp>
-        <p:nvSpPr>
-          <p:cNvPr id="55" name="Text 53"/>
-          <p:cNvSpPr txBox="1"/>
-          <p:nvPr/>
-        </p:nvSpPr>
-        <p:spPr>
-          <a:xfrm>
-            <a:off x="2905125" y="3748087"/>
-            <a:ext cx="1238250" cy="142875"/>
+            <a:endParaRPr lang="en-US" sz="863" dirty="0"/>
+          </a:p>
+        </p:txBody>
+      </p:sp>
+      <p:sp>
+        <p:nvSpPr>
+          <p:cNvPr id="77" name="Text 75"/>
+          <p:cNvSpPr txBox="1"/>
+          <p:nvPr/>
+        </p:nvSpPr>
+        <p:spPr>
+          <a:xfrm>
+            <a:off x="2905125" y="4457700"/>
+            <a:ext cx="1238250" cy="131445"/>
           </a:xfrm>
           <a:prstGeom prst="rect">
             <a:avLst/>
@@ -6324,12 +7184,12 @@
           <a:p>
             <a:pPr algn="r" indent="0" marL="0">
               <a:lnSpc>
-                <a:spcPts val="1125"/>
-              </a:lnSpc>
-              <a:buNone/>
-            </a:pPr>
-            <a:r>
-              <a:rPr lang="en-US" sz="938" dirty="0">
+                <a:spcPts val="1035"/>
+              </a:lnSpc>
+              <a:buNone/>
+            </a:pPr>
+            <a:r>
+              <a:rPr lang="en-US" sz="863" dirty="0">
                 <a:solidFill>
                   <a:srgbClr val="A8BCD1"/>
                 </a:solidFill>
@@ -6339,20 +7199,20 @@
               </a:rPr>
               <a:t>4</a:t>
             </a:r>
-            <a:endParaRPr lang="en-US" sz="938" dirty="0"/>
-          </a:p>
-        </p:txBody>
-      </p:sp>
-      <p:sp>
-        <p:nvSpPr>
-          <p:cNvPr id="56" name="Shape 54"/>
-          <p:cNvSpPr/>
-          <p:nvPr/>
-        </p:nvSpPr>
-        <p:spPr>
-          <a:xfrm>
-            <a:off x="952500" y="3924300"/>
-            <a:ext cx="3276600" cy="209550"/>
+            <a:endParaRPr lang="en-US" sz="863" dirty="0"/>
+          </a:p>
+        </p:txBody>
+      </p:sp>
+      <p:sp>
+        <p:nvSpPr>
+          <p:cNvPr id="78" name="Shape 76"/>
+          <p:cNvSpPr/>
+          <p:nvPr/>
+        </p:nvSpPr>
+        <p:spPr>
+          <a:xfrm>
+            <a:off x="952500" y="4619625"/>
+            <a:ext cx="3276600" cy="180975"/>
           </a:xfrm>
           <a:prstGeom prst="rect">
             <a:avLst/>
@@ -6367,13 +7227,13 @@
       </p:sp>
       <p:sp>
         <p:nvSpPr>
-          <p:cNvPr id="57" name="Shape 55"/>
-          <p:cNvSpPr/>
-          <p:nvPr/>
-        </p:nvSpPr>
-        <p:spPr>
-          <a:xfrm>
-            <a:off x="952500" y="4133850"/>
+          <p:cNvPr id="79" name="Shape 77"/>
+          <p:cNvSpPr/>
+          <p:nvPr/>
+        </p:nvSpPr>
+        <p:spPr>
+          <a:xfrm>
+            <a:off x="952500" y="4800600"/>
             <a:ext cx="3276600" cy="0"/>
           </a:xfrm>
           <a:prstGeom prst="line">
@@ -6390,13 +7250,13 @@
       </p:sp>
       <p:sp>
         <p:nvSpPr>
-          <p:cNvPr id="58" name="Text 56"/>
-          <p:cNvSpPr txBox="1"/>
-          <p:nvPr/>
-        </p:nvSpPr>
-        <p:spPr>
-          <a:xfrm>
-            <a:off x="1038225" y="3957638"/>
+          <p:cNvPr id="80" name="Text 78"/>
+          <p:cNvSpPr txBox="1"/>
+          <p:nvPr/>
+        </p:nvSpPr>
+        <p:spPr>
+          <a:xfrm>
+            <a:off x="1038225" y="4638675"/>
             <a:ext cx="533400" cy="142875"/>
           </a:xfrm>
           <a:prstGeom prst="rect">
@@ -6432,14 +7292,14 @@
       </p:sp>
       <p:sp>
         <p:nvSpPr>
-          <p:cNvPr id="59" name="Text 57"/>
-          <p:cNvSpPr txBox="1"/>
-          <p:nvPr/>
-        </p:nvSpPr>
-        <p:spPr>
-          <a:xfrm>
-            <a:off x="1743075" y="3957638"/>
-            <a:ext cx="990600" cy="142875"/>
+          <p:cNvPr id="81" name="Text 79"/>
+          <p:cNvSpPr txBox="1"/>
+          <p:nvPr/>
+        </p:nvSpPr>
+        <p:spPr>
+          <a:xfrm>
+            <a:off x="1743075" y="4638675"/>
+            <a:ext cx="990600" cy="131445"/>
           </a:xfrm>
           <a:prstGeom prst="rect">
             <a:avLst/>
@@ -6453,12 +7313,12 @@
           <a:p>
             <a:pPr algn="r" indent="0" marL="0">
               <a:lnSpc>
-                <a:spcPts val="1125"/>
-              </a:lnSpc>
-              <a:buNone/>
-            </a:pPr>
-            <a:r>
-              <a:rPr lang="en-US" sz="938" b="1" dirty="0">
+                <a:spcPts val="1035"/>
+              </a:lnSpc>
+              <a:buNone/>
+            </a:pPr>
+            <a:r>
+              <a:rPr lang="en-US" sz="863" b="1" dirty="0">
                 <a:solidFill>
                   <a:srgbClr val="EFB13C"/>
                 </a:solidFill>
@@ -6468,20 +7328,20 @@
               </a:rPr>
               <a:t>3.8</a:t>
             </a:r>
-            <a:endParaRPr lang="en-US" sz="938" dirty="0"/>
-          </a:p>
-        </p:txBody>
-      </p:sp>
-      <p:sp>
-        <p:nvSpPr>
-          <p:cNvPr id="60" name="Text 58"/>
-          <p:cNvSpPr txBox="1"/>
-          <p:nvPr/>
-        </p:nvSpPr>
-        <p:spPr>
-          <a:xfrm>
-            <a:off x="2905125" y="3957638"/>
-            <a:ext cx="1238250" cy="142875"/>
+            <a:endParaRPr lang="en-US" sz="863" dirty="0"/>
+          </a:p>
+        </p:txBody>
+      </p:sp>
+      <p:sp>
+        <p:nvSpPr>
+          <p:cNvPr id="82" name="Text 80"/>
+          <p:cNvSpPr txBox="1"/>
+          <p:nvPr/>
+        </p:nvSpPr>
+        <p:spPr>
+          <a:xfrm>
+            <a:off x="2905125" y="4638675"/>
+            <a:ext cx="1238250" cy="131445"/>
           </a:xfrm>
           <a:prstGeom prst="rect">
             <a:avLst/>
@@ -6495,12 +7355,12 @@
           <a:p>
             <a:pPr algn="r" indent="0" marL="0">
               <a:lnSpc>
-                <a:spcPts val="1125"/>
-              </a:lnSpc>
-              <a:buNone/>
-            </a:pPr>
-            <a:r>
-              <a:rPr lang="en-US" sz="938" dirty="0">
+                <a:spcPts val="1035"/>
+              </a:lnSpc>
+              <a:buNone/>
+            </a:pPr>
+            <a:r>
+              <a:rPr lang="en-US" sz="863" dirty="0">
                 <a:solidFill>
                   <a:srgbClr val="A8BCD1"/>
                 </a:solidFill>
@@ -6510,19 +7370,19 @@
               </a:rPr>
               <a:t>4</a:t>
             </a:r>
-            <a:endParaRPr lang="en-US" sz="938" dirty="0"/>
-          </a:p>
-        </p:txBody>
-      </p:sp>
-      <p:sp>
-        <p:nvSpPr>
-          <p:cNvPr id="61" name="Shape 59"/>
-          <p:cNvSpPr/>
-          <p:nvPr/>
-        </p:nvSpPr>
-        <p:spPr>
-          <a:xfrm>
-            <a:off x="952500" y="4343400"/>
+            <a:endParaRPr lang="en-US" sz="863" dirty="0"/>
+          </a:p>
+        </p:txBody>
+      </p:sp>
+      <p:sp>
+        <p:nvSpPr>
+          <p:cNvPr id="83" name="Shape 81"/>
+          <p:cNvSpPr/>
+          <p:nvPr/>
+        </p:nvSpPr>
+        <p:spPr>
+          <a:xfrm>
+            <a:off x="952500" y="4981575"/>
             <a:ext cx="3276600" cy="0"/>
           </a:xfrm>
           <a:prstGeom prst="line">
@@ -6539,13 +7399,13 @@
       </p:sp>
       <p:sp>
         <p:nvSpPr>
-          <p:cNvPr id="62" name="Text 60"/>
-          <p:cNvSpPr txBox="1"/>
-          <p:nvPr/>
-        </p:nvSpPr>
-        <p:spPr>
-          <a:xfrm>
-            <a:off x="1038225" y="4167188"/>
+          <p:cNvPr id="84" name="Text 82"/>
+          <p:cNvSpPr txBox="1"/>
+          <p:nvPr/>
+        </p:nvSpPr>
+        <p:spPr>
+          <a:xfrm>
+            <a:off x="1038225" y="4819650"/>
             <a:ext cx="533400" cy="142875"/>
           </a:xfrm>
           <a:prstGeom prst="rect">
@@ -6581,14 +7441,14 @@
       </p:sp>
       <p:sp>
         <p:nvSpPr>
-          <p:cNvPr id="63" name="Text 61"/>
-          <p:cNvSpPr txBox="1"/>
-          <p:nvPr/>
-        </p:nvSpPr>
-        <p:spPr>
-          <a:xfrm>
-            <a:off x="1743075" y="4167188"/>
-            <a:ext cx="990600" cy="142875"/>
+          <p:cNvPr id="85" name="Text 83"/>
+          <p:cNvSpPr txBox="1"/>
+          <p:nvPr/>
+        </p:nvSpPr>
+        <p:spPr>
+          <a:xfrm>
+            <a:off x="1743075" y="4819650"/>
+            <a:ext cx="990600" cy="131445"/>
           </a:xfrm>
           <a:prstGeom prst="rect">
             <a:avLst/>
@@ -6602,12 +7462,12 @@
           <a:p>
             <a:pPr algn="r" indent="0" marL="0">
               <a:lnSpc>
-                <a:spcPts val="1125"/>
-              </a:lnSpc>
-              <a:buNone/>
-            </a:pPr>
-            <a:r>
-              <a:rPr lang="en-US" sz="938" b="1" dirty="0">
+                <a:spcPts val="1035"/>
+              </a:lnSpc>
+              <a:buNone/>
+            </a:pPr>
+            <a:r>
+              <a:rPr lang="en-US" sz="863" b="1" dirty="0">
                 <a:solidFill>
                   <a:srgbClr val="EFB13C"/>
                 </a:solidFill>
@@ -6617,20 +7477,20 @@
               </a:rPr>
               <a:t>9.7</a:t>
             </a:r>
-            <a:endParaRPr lang="en-US" sz="938" dirty="0"/>
-          </a:p>
-        </p:txBody>
-      </p:sp>
-      <p:sp>
-        <p:nvSpPr>
-          <p:cNvPr id="64" name="Text 62"/>
-          <p:cNvSpPr txBox="1"/>
-          <p:nvPr/>
-        </p:nvSpPr>
-        <p:spPr>
-          <a:xfrm>
-            <a:off x="2905125" y="4167188"/>
-            <a:ext cx="1238250" cy="142875"/>
+            <a:endParaRPr lang="en-US" sz="863" dirty="0"/>
+          </a:p>
+        </p:txBody>
+      </p:sp>
+      <p:sp>
+        <p:nvSpPr>
+          <p:cNvPr id="86" name="Text 84"/>
+          <p:cNvSpPr txBox="1"/>
+          <p:nvPr/>
+        </p:nvSpPr>
+        <p:spPr>
+          <a:xfrm>
+            <a:off x="2905125" y="4819650"/>
+            <a:ext cx="1238250" cy="131445"/>
           </a:xfrm>
           <a:prstGeom prst="rect">
             <a:avLst/>
@@ -6644,12 +7504,12 @@
           <a:p>
             <a:pPr algn="r" indent="0" marL="0">
               <a:lnSpc>
-                <a:spcPts val="1125"/>
-              </a:lnSpc>
-              <a:buNone/>
-            </a:pPr>
-            <a:r>
-              <a:rPr lang="en-US" sz="938" dirty="0">
+                <a:spcPts val="1035"/>
+              </a:lnSpc>
+              <a:buNone/>
+            </a:pPr>
+            <a:r>
+              <a:rPr lang="en-US" sz="863" dirty="0">
                 <a:solidFill>
                   <a:srgbClr val="A8BCD1"/>
                 </a:solidFill>
@@ -6659,20 +7519,20 @@
               </a:rPr>
               <a:t>4</a:t>
             </a:r>
-            <a:endParaRPr lang="en-US" sz="938" dirty="0"/>
-          </a:p>
-        </p:txBody>
-      </p:sp>
-      <p:sp>
-        <p:nvSpPr>
-          <p:cNvPr id="65" name="Shape 63"/>
-          <p:cNvSpPr/>
-          <p:nvPr/>
-        </p:nvSpPr>
-        <p:spPr>
-          <a:xfrm>
-            <a:off x="952500" y="4343400"/>
-            <a:ext cx="3276600" cy="209550"/>
+            <a:endParaRPr lang="en-US" sz="863" dirty="0"/>
+          </a:p>
+        </p:txBody>
+      </p:sp>
+      <p:sp>
+        <p:nvSpPr>
+          <p:cNvPr id="87" name="Shape 85"/>
+          <p:cNvSpPr/>
+          <p:nvPr/>
+        </p:nvSpPr>
+        <p:spPr>
+          <a:xfrm>
+            <a:off x="952500" y="4981575"/>
+            <a:ext cx="3276600" cy="180975"/>
           </a:xfrm>
           <a:prstGeom prst="rect">
             <a:avLst/>
@@ -6687,13 +7547,13 @@
       </p:sp>
       <p:sp>
         <p:nvSpPr>
-          <p:cNvPr id="66" name="Shape 64"/>
-          <p:cNvSpPr/>
-          <p:nvPr/>
-        </p:nvSpPr>
-        <p:spPr>
-          <a:xfrm>
-            <a:off x="952500" y="4552950"/>
+          <p:cNvPr id="88" name="Shape 86"/>
+          <p:cNvSpPr/>
+          <p:nvPr/>
+        </p:nvSpPr>
+        <p:spPr>
+          <a:xfrm>
+            <a:off x="952500" y="5162550"/>
             <a:ext cx="3276600" cy="0"/>
           </a:xfrm>
           <a:prstGeom prst="line">
@@ -6710,13 +7570,13 @@
       </p:sp>
       <p:sp>
         <p:nvSpPr>
-          <p:cNvPr id="67" name="Text 65"/>
-          <p:cNvSpPr txBox="1"/>
-          <p:nvPr/>
-        </p:nvSpPr>
-        <p:spPr>
-          <a:xfrm>
-            <a:off x="1038225" y="4376738"/>
+          <p:cNvPr id="89" name="Text 87"/>
+          <p:cNvSpPr txBox="1"/>
+          <p:nvPr/>
+        </p:nvSpPr>
+        <p:spPr>
+          <a:xfrm>
+            <a:off x="1038225" y="5000625"/>
             <a:ext cx="533400" cy="142875"/>
           </a:xfrm>
           <a:prstGeom prst="rect">
@@ -6752,14 +7612,14 @@
       </p:sp>
       <p:sp>
         <p:nvSpPr>
-          <p:cNvPr id="68" name="Text 66"/>
-          <p:cNvSpPr txBox="1"/>
-          <p:nvPr/>
-        </p:nvSpPr>
-        <p:spPr>
-          <a:xfrm>
-            <a:off x="1743075" y="4376738"/>
-            <a:ext cx="990600" cy="142875"/>
+          <p:cNvPr id="90" name="Text 88"/>
+          <p:cNvSpPr txBox="1"/>
+          <p:nvPr/>
+        </p:nvSpPr>
+        <p:spPr>
+          <a:xfrm>
+            <a:off x="1743075" y="5000625"/>
+            <a:ext cx="990600" cy="131445"/>
           </a:xfrm>
           <a:prstGeom prst="rect">
             <a:avLst/>
@@ -6773,12 +7633,12 @@
           <a:p>
             <a:pPr algn="r" indent="0" marL="0">
               <a:lnSpc>
-                <a:spcPts val="1125"/>
-              </a:lnSpc>
-              <a:buNone/>
-            </a:pPr>
-            <a:r>
-              <a:rPr lang="en-US" sz="938" b="1" dirty="0">
+                <a:spcPts val="1035"/>
+              </a:lnSpc>
+              <a:buNone/>
+            </a:pPr>
+            <a:r>
+              <a:rPr lang="en-US" sz="863" b="1" dirty="0">
                 <a:solidFill>
                   <a:srgbClr val="EFB13C"/>
                 </a:solidFill>
@@ -6788,20 +7648,20 @@
               </a:rPr>
               <a:t>4.6</a:t>
             </a:r>
-            <a:endParaRPr lang="en-US" sz="938" dirty="0"/>
-          </a:p>
-        </p:txBody>
-      </p:sp>
-      <p:sp>
-        <p:nvSpPr>
-          <p:cNvPr id="69" name="Text 67"/>
-          <p:cNvSpPr txBox="1"/>
-          <p:nvPr/>
-        </p:nvSpPr>
-        <p:spPr>
-          <a:xfrm>
-            <a:off x="2905125" y="4376738"/>
-            <a:ext cx="1238250" cy="142875"/>
+            <a:endParaRPr lang="en-US" sz="863" dirty="0"/>
+          </a:p>
+        </p:txBody>
+      </p:sp>
+      <p:sp>
+        <p:nvSpPr>
+          <p:cNvPr id="91" name="Text 89"/>
+          <p:cNvSpPr txBox="1"/>
+          <p:nvPr/>
+        </p:nvSpPr>
+        <p:spPr>
+          <a:xfrm>
+            <a:off x="2905125" y="5000625"/>
+            <a:ext cx="1238250" cy="131445"/>
           </a:xfrm>
           <a:prstGeom prst="rect">
             <a:avLst/>
@@ -6815,12 +7675,12 @@
           <a:p>
             <a:pPr algn="r" indent="0" marL="0">
               <a:lnSpc>
-                <a:spcPts val="1125"/>
-              </a:lnSpc>
-              <a:buNone/>
-            </a:pPr>
-            <a:r>
-              <a:rPr lang="en-US" sz="938" dirty="0">
+                <a:spcPts val="1035"/>
+              </a:lnSpc>
+              <a:buNone/>
+            </a:pPr>
+            <a:r>
+              <a:rPr lang="en-US" sz="863" dirty="0">
                 <a:solidFill>
                   <a:srgbClr val="A8BCD1"/>
                 </a:solidFill>
@@ -6830,19 +7690,19 @@
               </a:rPr>
               <a:t>5</a:t>
             </a:r>
-            <a:endParaRPr lang="en-US" sz="938" dirty="0"/>
-          </a:p>
-        </p:txBody>
-      </p:sp>
-      <p:sp>
-        <p:nvSpPr>
-          <p:cNvPr id="70" name="Shape 68"/>
-          <p:cNvSpPr/>
-          <p:nvPr/>
-        </p:nvSpPr>
-        <p:spPr>
-          <a:xfrm>
-            <a:off x="952500" y="4762500"/>
+            <a:endParaRPr lang="en-US" sz="863" dirty="0"/>
+          </a:p>
+        </p:txBody>
+      </p:sp>
+      <p:sp>
+        <p:nvSpPr>
+          <p:cNvPr id="92" name="Shape 90"/>
+          <p:cNvSpPr/>
+          <p:nvPr/>
+        </p:nvSpPr>
+        <p:spPr>
+          <a:xfrm>
+            <a:off x="952500" y="5343525"/>
             <a:ext cx="3276600" cy="0"/>
           </a:xfrm>
           <a:prstGeom prst="line">
@@ -6859,13 +7719,13 @@
       </p:sp>
       <p:sp>
         <p:nvSpPr>
-          <p:cNvPr id="71" name="Text 69"/>
-          <p:cNvSpPr txBox="1"/>
-          <p:nvPr/>
-        </p:nvSpPr>
-        <p:spPr>
-          <a:xfrm>
-            <a:off x="1038225" y="4586288"/>
+          <p:cNvPr id="93" name="Text 91"/>
+          <p:cNvSpPr txBox="1"/>
+          <p:nvPr/>
+        </p:nvSpPr>
+        <p:spPr>
+          <a:xfrm>
+            <a:off x="1038225" y="5181600"/>
             <a:ext cx="533400" cy="142875"/>
           </a:xfrm>
           <a:prstGeom prst="rect">
@@ -6901,14 +7761,14 @@
       </p:sp>
       <p:sp>
         <p:nvSpPr>
-          <p:cNvPr id="72" name="Text 70"/>
-          <p:cNvSpPr txBox="1"/>
-          <p:nvPr/>
-        </p:nvSpPr>
-        <p:spPr>
-          <a:xfrm>
-            <a:off x="1743075" y="4586288"/>
-            <a:ext cx="990600" cy="142875"/>
+          <p:cNvPr id="94" name="Text 92"/>
+          <p:cNvSpPr txBox="1"/>
+          <p:nvPr/>
+        </p:nvSpPr>
+        <p:spPr>
+          <a:xfrm>
+            <a:off x="1743075" y="5181600"/>
+            <a:ext cx="990600" cy="131445"/>
           </a:xfrm>
           <a:prstGeom prst="rect">
             <a:avLst/>
@@ -6922,12 +7782,12 @@
           <a:p>
             <a:pPr algn="r" indent="0" marL="0">
               <a:lnSpc>
-                <a:spcPts val="1125"/>
-              </a:lnSpc>
-              <a:buNone/>
-            </a:pPr>
-            <a:r>
-              <a:rPr lang="en-US" sz="938" b="1" dirty="0">
+                <a:spcPts val="1035"/>
+              </a:lnSpc>
+              <a:buNone/>
+            </a:pPr>
+            <a:r>
+              <a:rPr lang="en-US" sz="863" b="1" dirty="0">
                 <a:solidFill>
                   <a:srgbClr val="EFB13C"/>
                 </a:solidFill>
@@ -6937,20 +7797,20 @@
               </a:rPr>
               <a:t>10.2</a:t>
             </a:r>
-            <a:endParaRPr lang="en-US" sz="938" dirty="0"/>
-          </a:p>
-        </p:txBody>
-      </p:sp>
-      <p:sp>
-        <p:nvSpPr>
-          <p:cNvPr id="73" name="Text 71"/>
-          <p:cNvSpPr txBox="1"/>
-          <p:nvPr/>
-        </p:nvSpPr>
-        <p:spPr>
-          <a:xfrm>
-            <a:off x="2905125" y="4586288"/>
-            <a:ext cx="1238250" cy="142875"/>
+            <a:endParaRPr lang="en-US" sz="863" dirty="0"/>
+          </a:p>
+        </p:txBody>
+      </p:sp>
+      <p:sp>
+        <p:nvSpPr>
+          <p:cNvPr id="95" name="Text 93"/>
+          <p:cNvSpPr txBox="1"/>
+          <p:nvPr/>
+        </p:nvSpPr>
+        <p:spPr>
+          <a:xfrm>
+            <a:off x="2905125" y="5181600"/>
+            <a:ext cx="1238250" cy="131445"/>
           </a:xfrm>
           <a:prstGeom prst="rect">
             <a:avLst/>
@@ -6964,12 +7824,12 @@
           <a:p>
             <a:pPr algn="r" indent="0" marL="0">
               <a:lnSpc>
-                <a:spcPts val="1125"/>
-              </a:lnSpc>
-              <a:buNone/>
-            </a:pPr>
-            <a:r>
-              <a:rPr lang="en-US" sz="938" dirty="0">
+                <a:spcPts val="1035"/>
+              </a:lnSpc>
+              <a:buNone/>
+            </a:pPr>
+            <a:r>
+              <a:rPr lang="en-US" sz="863" dirty="0">
                 <a:solidFill>
                   <a:srgbClr val="A8BCD1"/>
                 </a:solidFill>
@@ -6979,20 +7839,20 @@
               </a:rPr>
               <a:t>5</a:t>
             </a:r>
-            <a:endParaRPr lang="en-US" sz="938" dirty="0"/>
-          </a:p>
-        </p:txBody>
-      </p:sp>
-      <p:sp>
-        <p:nvSpPr>
-          <p:cNvPr id="74" name="Shape 72"/>
-          <p:cNvSpPr/>
-          <p:nvPr/>
-        </p:nvSpPr>
-        <p:spPr>
-          <a:xfrm>
-            <a:off x="952500" y="4762500"/>
-            <a:ext cx="3276600" cy="209550"/>
+            <a:endParaRPr lang="en-US" sz="863" dirty="0"/>
+          </a:p>
+        </p:txBody>
+      </p:sp>
+      <p:sp>
+        <p:nvSpPr>
+          <p:cNvPr id="96" name="Shape 94"/>
+          <p:cNvSpPr/>
+          <p:nvPr/>
+        </p:nvSpPr>
+        <p:spPr>
+          <a:xfrm>
+            <a:off x="952500" y="5343525"/>
+            <a:ext cx="3276600" cy="180975"/>
           </a:xfrm>
           <a:prstGeom prst="rect">
             <a:avLst/>
@@ -7007,13 +7867,13 @@
       </p:sp>
       <p:sp>
         <p:nvSpPr>
-          <p:cNvPr id="75" name="Shape 73"/>
-          <p:cNvSpPr/>
-          <p:nvPr/>
-        </p:nvSpPr>
-        <p:spPr>
-          <a:xfrm>
-            <a:off x="952500" y="4972050"/>
+          <p:cNvPr id="97" name="Shape 95"/>
+          <p:cNvSpPr/>
+          <p:nvPr/>
+        </p:nvSpPr>
+        <p:spPr>
+          <a:xfrm>
+            <a:off x="952500" y="5524500"/>
             <a:ext cx="3276600" cy="0"/>
           </a:xfrm>
           <a:prstGeom prst="line">
@@ -7030,13 +7890,13 @@
       </p:sp>
       <p:sp>
         <p:nvSpPr>
-          <p:cNvPr id="76" name="Text 74"/>
-          <p:cNvSpPr txBox="1"/>
-          <p:nvPr/>
-        </p:nvSpPr>
-        <p:spPr>
-          <a:xfrm>
-            <a:off x="1038225" y="4795838"/>
+          <p:cNvPr id="98" name="Text 96"/>
+          <p:cNvSpPr txBox="1"/>
+          <p:nvPr/>
+        </p:nvSpPr>
+        <p:spPr>
+          <a:xfrm>
+            <a:off x="1038225" y="5362575"/>
             <a:ext cx="533400" cy="142875"/>
           </a:xfrm>
           <a:prstGeom prst="rect">
@@ -7072,14 +7932,14 @@
       </p:sp>
       <p:sp>
         <p:nvSpPr>
-          <p:cNvPr id="77" name="Text 75"/>
-          <p:cNvSpPr txBox="1"/>
-          <p:nvPr/>
-        </p:nvSpPr>
-        <p:spPr>
-          <a:xfrm>
-            <a:off x="1743075" y="4795838"/>
-            <a:ext cx="990600" cy="142875"/>
+          <p:cNvPr id="99" name="Text 97"/>
+          <p:cNvSpPr txBox="1"/>
+          <p:nvPr/>
+        </p:nvSpPr>
+        <p:spPr>
+          <a:xfrm>
+            <a:off x="1743075" y="5362575"/>
+            <a:ext cx="990600" cy="131445"/>
           </a:xfrm>
           <a:prstGeom prst="rect">
             <a:avLst/>
@@ -7093,12 +7953,12 @@
           <a:p>
             <a:pPr algn="r" indent="0" marL="0">
               <a:lnSpc>
-                <a:spcPts val="1125"/>
-              </a:lnSpc>
-              <a:buNone/>
-            </a:pPr>
-            <a:r>
-              <a:rPr lang="en-US" sz="938" b="1" dirty="0">
+                <a:spcPts val="1035"/>
+              </a:lnSpc>
+              <a:buNone/>
+            </a:pPr>
+            <a:r>
+              <a:rPr lang="en-US" sz="863" b="1" dirty="0">
                 <a:solidFill>
                   <a:srgbClr val="FF4D63"/>
                 </a:solidFill>
@@ -7108,20 +7968,20 @@
               </a:rPr>
               <a:t>-4.6</a:t>
             </a:r>
-            <a:endParaRPr lang="en-US" sz="938" dirty="0"/>
-          </a:p>
-        </p:txBody>
-      </p:sp>
-      <p:sp>
-        <p:nvSpPr>
-          <p:cNvPr id="78" name="Text 76"/>
-          <p:cNvSpPr txBox="1"/>
-          <p:nvPr/>
-        </p:nvSpPr>
-        <p:spPr>
-          <a:xfrm>
-            <a:off x="2905125" y="4795838"/>
-            <a:ext cx="1238250" cy="142875"/>
+            <a:endParaRPr lang="en-US" sz="863" dirty="0"/>
+          </a:p>
+        </p:txBody>
+      </p:sp>
+      <p:sp>
+        <p:nvSpPr>
+          <p:cNvPr id="100" name="Text 98"/>
+          <p:cNvSpPr txBox="1"/>
+          <p:nvPr/>
+        </p:nvSpPr>
+        <p:spPr>
+          <a:xfrm>
+            <a:off x="2905125" y="5362575"/>
+            <a:ext cx="1238250" cy="131445"/>
           </a:xfrm>
           <a:prstGeom prst="rect">
             <a:avLst/>
@@ -7135,12 +7995,12 @@
           <a:p>
             <a:pPr algn="r" indent="0" marL="0">
               <a:lnSpc>
-                <a:spcPts val="1125"/>
-              </a:lnSpc>
-              <a:buNone/>
-            </a:pPr>
-            <a:r>
-              <a:rPr lang="en-US" sz="938" dirty="0">
+                <a:spcPts val="1035"/>
+              </a:lnSpc>
+              <a:buNone/>
+            </a:pPr>
+            <a:r>
+              <a:rPr lang="en-US" sz="863" dirty="0">
                 <a:solidFill>
                   <a:srgbClr val="A8BCD1"/>
                 </a:solidFill>
@@ -7150,19 +8010,19 @@
               </a:rPr>
               <a:t>2</a:t>
             </a:r>
-            <a:endParaRPr lang="en-US" sz="938" dirty="0"/>
-          </a:p>
-        </p:txBody>
-      </p:sp>
-      <p:sp>
-        <p:nvSpPr>
-          <p:cNvPr id="79" name="Shape 77"/>
-          <p:cNvSpPr/>
-          <p:nvPr/>
-        </p:nvSpPr>
-        <p:spPr>
-          <a:xfrm>
-            <a:off x="952500" y="5181600"/>
+            <a:endParaRPr lang="en-US" sz="863" dirty="0"/>
+          </a:p>
+        </p:txBody>
+      </p:sp>
+      <p:sp>
+        <p:nvSpPr>
+          <p:cNvPr id="101" name="Shape 99"/>
+          <p:cNvSpPr/>
+          <p:nvPr/>
+        </p:nvSpPr>
+        <p:spPr>
+          <a:xfrm>
+            <a:off x="952500" y="5705475"/>
             <a:ext cx="3276600" cy="0"/>
           </a:xfrm>
           <a:prstGeom prst="line">
@@ -7179,13 +8039,13 @@
       </p:sp>
       <p:sp>
         <p:nvSpPr>
-          <p:cNvPr id="80" name="Text 78"/>
-          <p:cNvSpPr txBox="1"/>
-          <p:nvPr/>
-        </p:nvSpPr>
-        <p:spPr>
-          <a:xfrm>
-            <a:off x="1038225" y="5005388"/>
+          <p:cNvPr id="102" name="Text 100"/>
+          <p:cNvSpPr txBox="1"/>
+          <p:nvPr/>
+        </p:nvSpPr>
+        <p:spPr>
+          <a:xfrm>
+            <a:off x="1038225" y="5543550"/>
             <a:ext cx="533400" cy="142875"/>
           </a:xfrm>
           <a:prstGeom prst="rect">
@@ -7221,14 +8081,14 @@
       </p:sp>
       <p:sp>
         <p:nvSpPr>
-          <p:cNvPr id="81" name="Text 79"/>
-          <p:cNvSpPr txBox="1"/>
-          <p:nvPr/>
-        </p:nvSpPr>
-        <p:spPr>
-          <a:xfrm>
-            <a:off x="1743075" y="5005388"/>
-            <a:ext cx="990600" cy="142875"/>
+          <p:cNvPr id="103" name="Text 101"/>
+          <p:cNvSpPr txBox="1"/>
+          <p:nvPr/>
+        </p:nvSpPr>
+        <p:spPr>
+          <a:xfrm>
+            <a:off x="1743075" y="5543550"/>
+            <a:ext cx="990600" cy="131445"/>
           </a:xfrm>
           <a:prstGeom prst="rect">
             <a:avLst/>
@@ -7242,12 +8102,12 @@
           <a:p>
             <a:pPr algn="r" indent="0" marL="0">
               <a:lnSpc>
-                <a:spcPts val="1125"/>
-              </a:lnSpc>
-              <a:buNone/>
-            </a:pPr>
-            <a:r>
-              <a:rPr lang="en-US" sz="938" b="1" dirty="0">
+                <a:spcPts val="1035"/>
+              </a:lnSpc>
+              <a:buNone/>
+            </a:pPr>
+            <a:r>
+              <a:rPr lang="en-US" sz="863" b="1" dirty="0">
                 <a:solidFill>
                   <a:srgbClr val="EFB13C"/>
                 </a:solidFill>
@@ -7257,20 +8117,20 @@
               </a:rPr>
               <a:t>3.2</a:t>
             </a:r>
-            <a:endParaRPr lang="en-US" sz="938" dirty="0"/>
-          </a:p>
-        </p:txBody>
-      </p:sp>
-      <p:sp>
-        <p:nvSpPr>
-          <p:cNvPr id="82" name="Text 80"/>
-          <p:cNvSpPr txBox="1"/>
-          <p:nvPr/>
-        </p:nvSpPr>
-        <p:spPr>
-          <a:xfrm>
-            <a:off x="2905125" y="5005388"/>
-            <a:ext cx="1238250" cy="142875"/>
+            <a:endParaRPr lang="en-US" sz="863" dirty="0"/>
+          </a:p>
+        </p:txBody>
+      </p:sp>
+      <p:sp>
+        <p:nvSpPr>
+          <p:cNvPr id="104" name="Text 102"/>
+          <p:cNvSpPr txBox="1"/>
+          <p:nvPr/>
+        </p:nvSpPr>
+        <p:spPr>
+          <a:xfrm>
+            <a:off x="2905125" y="5543550"/>
+            <a:ext cx="1238250" cy="131445"/>
           </a:xfrm>
           <a:prstGeom prst="rect">
             <a:avLst/>
@@ -7284,12 +8144,12 @@
           <a:p>
             <a:pPr algn="r" indent="0" marL="0">
               <a:lnSpc>
-                <a:spcPts val="1125"/>
-              </a:lnSpc>
-              <a:buNone/>
-            </a:pPr>
-            <a:r>
-              <a:rPr lang="en-US" sz="938" dirty="0">
+                <a:spcPts val="1035"/>
+              </a:lnSpc>
+              <a:buNone/>
+            </a:pPr>
+            <a:r>
+              <a:rPr lang="en-US" sz="863" dirty="0">
                 <a:solidFill>
                   <a:srgbClr val="A8BCD1"/>
                 </a:solidFill>
@@ -7299,19 +8159,19 @@
               </a:rPr>
               <a:t>2</a:t>
             </a:r>
-            <a:endParaRPr lang="en-US" sz="938" dirty="0"/>
-          </a:p>
-        </p:txBody>
-      </p:sp>
-      <p:sp>
-        <p:nvSpPr>
-          <p:cNvPr id="83" name="Shape 81"/>
-          <p:cNvSpPr/>
-          <p:nvPr/>
-        </p:nvSpPr>
-        <p:spPr>
-          <a:xfrm>
-            <a:off x="952500" y="5181600"/>
+            <a:endParaRPr lang="en-US" sz="863" dirty="0"/>
+          </a:p>
+        </p:txBody>
+      </p:sp>
+      <p:sp>
+        <p:nvSpPr>
+          <p:cNvPr id="105" name="Shape 103"/>
+          <p:cNvSpPr/>
+          <p:nvPr/>
+        </p:nvSpPr>
+        <p:spPr>
+          <a:xfrm>
+            <a:off x="952500" y="5705475"/>
             <a:ext cx="3276600" cy="0"/>
           </a:xfrm>
           <a:prstGeom prst="line">
@@ -7328,13 +8188,13 @@
       </p:sp>
       <p:sp>
         <p:nvSpPr>
-          <p:cNvPr id="84" name="Text 82"/>
-          <p:cNvSpPr txBox="1"/>
-          <p:nvPr/>
-        </p:nvSpPr>
-        <p:spPr>
-          <a:xfrm>
-            <a:off x="1038225" y="5233988"/>
+          <p:cNvPr id="106" name="Text 104"/>
+          <p:cNvSpPr txBox="1"/>
+          <p:nvPr/>
+        </p:nvSpPr>
+        <p:spPr>
+          <a:xfrm>
+            <a:off x="1038225" y="5743575"/>
             <a:ext cx="533400" cy="142875"/>
           </a:xfrm>
           <a:prstGeom prst="rect">
@@ -7370,14 +8230,14 @@
       </p:sp>
       <p:sp>
         <p:nvSpPr>
-          <p:cNvPr id="85" name="Text 83"/>
-          <p:cNvSpPr txBox="1"/>
-          <p:nvPr/>
-        </p:nvSpPr>
-        <p:spPr>
-          <a:xfrm>
-            <a:off x="1743075" y="5233988"/>
-            <a:ext cx="990600" cy="142875"/>
+          <p:cNvPr id="107" name="Text 105"/>
+          <p:cNvSpPr txBox="1"/>
+          <p:nvPr/>
+        </p:nvSpPr>
+        <p:spPr>
+          <a:xfrm>
+            <a:off x="1743075" y="5743575"/>
+            <a:ext cx="990600" cy="131445"/>
           </a:xfrm>
           <a:prstGeom prst="rect">
             <a:avLst/>
@@ -7391,12 +8251,12 @@
           <a:p>
             <a:pPr algn="r" indent="0" marL="0">
               <a:lnSpc>
-                <a:spcPts val="1125"/>
-              </a:lnSpc>
-              <a:buNone/>
-            </a:pPr>
-            <a:r>
-              <a:rPr lang="en-US" sz="938" b="1" dirty="0">
+                <a:spcPts val="1035"/>
+              </a:lnSpc>
+              <a:buNone/>
+            </a:pPr>
+            <a:r>
+              <a:rPr lang="en-US" sz="863" b="1" dirty="0">
                 <a:solidFill>
                   <a:srgbClr val="A9A79F"/>
                 </a:solidFill>
@@ -7406,20 +8266,20 @@
               </a:rPr>
               <a:t>-4.6 ~ 11.5</a:t>
             </a:r>
-            <a:endParaRPr lang="en-US" sz="938" dirty="0"/>
-          </a:p>
-        </p:txBody>
-      </p:sp>
-      <p:sp>
-        <p:nvSpPr>
-          <p:cNvPr id="86" name="Text 84"/>
-          <p:cNvSpPr txBox="1"/>
-          <p:nvPr/>
-        </p:nvSpPr>
-        <p:spPr>
-          <a:xfrm>
-            <a:off x="2905125" y="5233988"/>
-            <a:ext cx="1238250" cy="142875"/>
+            <a:endParaRPr lang="en-US" sz="863" dirty="0"/>
+          </a:p>
+        </p:txBody>
+      </p:sp>
+      <p:sp>
+        <p:nvSpPr>
+          <p:cNvPr id="108" name="Text 106"/>
+          <p:cNvSpPr txBox="1"/>
+          <p:nvPr/>
+        </p:nvSpPr>
+        <p:spPr>
+          <a:xfrm>
+            <a:off x="2905125" y="5743575"/>
+            <a:ext cx="1238250" cy="131445"/>
           </a:xfrm>
           <a:prstGeom prst="rect">
             <a:avLst/>
@@ -7433,12 +8293,12 @@
           <a:p>
             <a:pPr algn="r" indent="0" marL="0">
               <a:lnSpc>
-                <a:spcPts val="1125"/>
-              </a:lnSpc>
-              <a:buNone/>
-            </a:pPr>
-            <a:r>
-              <a:rPr lang="en-US" sz="938" dirty="0">
+                <a:spcPts val="1035"/>
+              </a:lnSpc>
+              <a:buNone/>
+            </a:pPr>
+            <a:r>
+              <a:rPr lang="en-US" sz="863" dirty="0">
                 <a:solidFill>
                   <a:srgbClr val="A9A79F"/>
                 </a:solidFill>
@@ -7448,62 +8308,20 @@
               </a:rPr>
               <a:t>2 ~ 5</a:t>
             </a:r>
-            <a:endParaRPr lang="en-US" sz="938" dirty="0"/>
-          </a:p>
-        </p:txBody>
-      </p:sp>
-      <p:sp>
-        <p:nvSpPr>
-          <p:cNvPr id="87" name="Text 85"/>
-          <p:cNvSpPr txBox="1"/>
-          <p:nvPr/>
-        </p:nvSpPr>
-        <p:spPr>
-          <a:xfrm>
-            <a:off x="952500" y="5695950"/>
-            <a:ext cx="3276600" cy="120015"/>
-          </a:xfrm>
-          <a:prstGeom prst="rect">
-            <a:avLst/>
-          </a:prstGeom>
-          <a:noFill/>
-          <a:ln/>
-        </p:spPr>
-        <p:txBody>
-          <a:bodyPr wrap="square" lIns="0" tIns="0" rIns="0" bIns="0" rtlCol="0" anchor="t"/>
-          <a:lstStyle/>
-          <a:p>
-            <a:pPr algn="l" indent="0" marL="0">
-              <a:lnSpc>
-                <a:spcPts val="945"/>
-              </a:lnSpc>
-              <a:buNone/>
-            </a:pPr>
-            <a:r>
-              <a:rPr lang="en-US" sz="788" dirty="0">
-                <a:solidFill>
-                  <a:srgbClr val="8A8880"/>
-                </a:solidFill>
-                <a:latin typeface="Malgun Gothic" pitchFamily="34" charset="0"/>
-                <a:ea typeface="Malgun Gothic" pitchFamily="34" charset="-122"/>
-                <a:cs typeface="Malgun Gothic" pitchFamily="34" charset="-120"/>
-              </a:rPr>
-              <a:t>단위 MW. 기존 실적 시트에서 옮겨 적었습니다.</a:t>
-            </a:r>
-            <a:endParaRPr lang="en-US" sz="788" dirty="0"/>
-          </a:p>
-        </p:txBody>
-      </p:sp>
-      <p:sp>
-        <p:nvSpPr>
-          <p:cNvPr id="88" name="Shape 86"/>
-          <p:cNvSpPr/>
-          <p:nvPr/>
-        </p:nvSpPr>
-        <p:spPr>
-          <a:xfrm>
-            <a:off x="5314950" y="1771650"/>
-            <a:ext cx="6191250" cy="2228850"/>
+            <a:endParaRPr lang="en-US" sz="863" dirty="0"/>
+          </a:p>
+        </p:txBody>
+      </p:sp>
+      <p:sp>
+        <p:nvSpPr>
+          <p:cNvPr id="109" name="Shape 107"/>
+          <p:cNvSpPr/>
+          <p:nvPr/>
+        </p:nvSpPr>
+        <p:spPr>
+          <a:xfrm>
+            <a:off x="5314950" y="2762250"/>
+            <a:ext cx="6191250" cy="3181350"/>
           </a:xfrm>
           <a:prstGeom prst="rect">
             <a:avLst/>
@@ -7521,13 +8339,13 @@
       </p:sp>
       <p:sp>
         <p:nvSpPr>
-          <p:cNvPr id="89" name="Shape 87"/>
-          <p:cNvSpPr/>
-          <p:nvPr/>
-        </p:nvSpPr>
-        <p:spPr>
-          <a:xfrm>
-            <a:off x="5324475" y="1781175"/>
+          <p:cNvPr id="110" name="Shape 108"/>
+          <p:cNvSpPr/>
+          <p:nvPr/>
+        </p:nvSpPr>
+        <p:spPr>
+          <a:xfrm>
+            <a:off x="5324475" y="2771775"/>
             <a:ext cx="6172200" cy="276225"/>
           </a:xfrm>
           <a:prstGeom prst="rect">
@@ -7541,13 +8359,13 @@
       </p:sp>
       <p:sp>
         <p:nvSpPr>
-          <p:cNvPr id="90" name="Shape 88"/>
-          <p:cNvSpPr/>
-          <p:nvPr/>
-        </p:nvSpPr>
-        <p:spPr>
-          <a:xfrm>
-            <a:off x="5314950" y="2057400"/>
+          <p:cNvPr id="111" name="Shape 109"/>
+          <p:cNvSpPr/>
+          <p:nvPr/>
+        </p:nvSpPr>
+        <p:spPr>
+          <a:xfrm>
+            <a:off x="5314950" y="3048000"/>
             <a:ext cx="6191250" cy="0"/>
           </a:xfrm>
           <a:prstGeom prst="line">
@@ -7564,13 +8382,13 @@
       </p:sp>
       <p:sp>
         <p:nvSpPr>
-          <p:cNvPr id="91" name="Shape 89"/>
-          <p:cNvSpPr/>
-          <p:nvPr/>
-        </p:nvSpPr>
-        <p:spPr>
-          <a:xfrm>
-            <a:off x="5324475" y="1781175"/>
+          <p:cNvPr id="112" name="Shape 110"/>
+          <p:cNvSpPr/>
+          <p:nvPr/>
+        </p:nvSpPr>
+        <p:spPr>
+          <a:xfrm>
+            <a:off x="5324475" y="2771775"/>
             <a:ext cx="38100" cy="276225"/>
           </a:xfrm>
           <a:prstGeom prst="rect">
@@ -7584,13 +8402,13 @@
       </p:sp>
       <p:sp>
         <p:nvSpPr>
-          <p:cNvPr id="92" name="Text 90"/>
-          <p:cNvSpPr txBox="1"/>
-          <p:nvPr/>
-        </p:nvSpPr>
-        <p:spPr>
-          <a:xfrm>
-            <a:off x="5486400" y="1847850"/>
+          <p:cNvPr id="113" name="Text 111"/>
+          <p:cNvSpPr txBox="1"/>
+          <p:nvPr/>
+        </p:nvSpPr>
+        <p:spPr>
+          <a:xfrm>
+            <a:off x="5486400" y="2838450"/>
             <a:ext cx="171450" cy="148590"/>
           </a:xfrm>
           <a:prstGeom prst="rect">
@@ -7618,7 +8436,7 @@
                 <a:ea typeface="Consolas" pitchFamily="34" charset="-122"/>
                 <a:cs typeface="Consolas" pitchFamily="34" charset="-120"/>
               </a:rPr>
-              <a:t>2</a:t>
+              <a:t>3</a:t>
             </a:r>
             <a:endParaRPr lang="en-US" sz="975" dirty="0"/>
           </a:p>
@@ -7626,14 +8444,14 @@
       </p:sp>
       <p:sp>
         <p:nvSpPr>
-          <p:cNvPr id="93" name="Text 91"/>
-          <p:cNvSpPr txBox="1"/>
-          <p:nvPr/>
-        </p:nvSpPr>
-        <p:spPr>
-          <a:xfrm>
-            <a:off x="5715000" y="1847850"/>
-            <a:ext cx="3429000" cy="154305"/>
+          <p:cNvPr id="114" name="Text 112"/>
+          <p:cNvSpPr txBox="1"/>
+          <p:nvPr/>
+        </p:nvSpPr>
+        <p:spPr>
+          <a:xfrm>
+            <a:off x="5715000" y="2838450"/>
+            <a:ext cx="3724275" cy="154305"/>
           </a:xfrm>
           <a:prstGeom prst="rect">
             <a:avLst/>
@@ -7660,7 +8478,7 @@
                 <a:ea typeface="Malgun Gothic" pitchFamily="34" charset="-122"/>
                 <a:cs typeface="Malgun Gothic" pitchFamily="34" charset="-120"/>
               </a:rPr>
-              <a:t>시험 40회 전체</a:t>
+              <a:t>예측값 오차</a:t>
             </a:r>
             <a:endParaRPr lang="en-US" sz="1013" dirty="0"/>
           </a:p>
@@ -7668,14 +8486,14 @@
       </p:sp>
       <p:sp>
         <p:nvSpPr>
-          <p:cNvPr id="94" name="Text 92"/>
-          <p:cNvSpPr txBox="1"/>
-          <p:nvPr/>
-        </p:nvSpPr>
-        <p:spPr>
-          <a:xfrm>
-            <a:off x="9144000" y="1857375"/>
-            <a:ext cx="2228850" cy="125730"/>
+          <p:cNvPr id="115" name="Text 113"/>
+          <p:cNvSpPr txBox="1"/>
+          <p:nvPr/>
+        </p:nvSpPr>
+        <p:spPr>
+          <a:xfrm>
+            <a:off x="9439275" y="2847975"/>
+            <a:ext cx="1933575" cy="125730"/>
           </a:xfrm>
           <a:prstGeom prst="rect">
             <a:avLst/>
@@ -7702,7 +8520,7 @@
                 <a:ea typeface="Malgun Gothic" pitchFamily="34" charset="-122"/>
                 <a:cs typeface="Malgun Gothic" pitchFamily="34" charset="-120"/>
               </a:rPr>
-              <a:t>가로 외기온도 ℃ / 세로 실제 차이 MW</a:t>
+              <a:t>가로 외기온도 ℃ / 세로 차이 MW</a:t>
             </a:r>
             <a:endParaRPr lang="en-US" sz="825" dirty="0"/>
           </a:p>
@@ -7710,13 +8528,13 @@
       </p:sp>
       <p:sp>
         <p:nvSpPr>
-          <p:cNvPr id="95" name="Shape 93"/>
-          <p:cNvSpPr/>
-          <p:nvPr/>
-        </p:nvSpPr>
-        <p:spPr>
-          <a:xfrm>
-            <a:off x="5924550" y="2426970"/>
+          <p:cNvPr id="116" name="Shape 114"/>
+          <p:cNvSpPr/>
+          <p:nvPr/>
+        </p:nvSpPr>
+        <p:spPr>
+          <a:xfrm>
+            <a:off x="5924550" y="3276600"/>
             <a:ext cx="5314950" cy="0"/>
           </a:xfrm>
           <a:prstGeom prst="line">
@@ -7733,13 +8551,13 @@
       </p:sp>
       <p:sp>
         <p:nvSpPr>
-          <p:cNvPr id="96" name="Shape 94"/>
-          <p:cNvSpPr/>
-          <p:nvPr/>
-        </p:nvSpPr>
-        <p:spPr>
-          <a:xfrm>
-            <a:off x="5924550" y="2708910"/>
+          <p:cNvPr id="117" name="Shape 115"/>
+          <p:cNvSpPr/>
+          <p:nvPr/>
+        </p:nvSpPr>
+        <p:spPr>
+          <a:xfrm>
+            <a:off x="5924550" y="3543300"/>
             <a:ext cx="5314950" cy="0"/>
           </a:xfrm>
           <a:prstGeom prst="line">
@@ -7756,13 +8574,13 @@
       </p:sp>
       <p:sp>
         <p:nvSpPr>
-          <p:cNvPr id="97" name="Shape 95"/>
-          <p:cNvSpPr/>
-          <p:nvPr/>
-        </p:nvSpPr>
-        <p:spPr>
-          <a:xfrm>
-            <a:off x="5924550" y="2990850"/>
+          <p:cNvPr id="118" name="Shape 116"/>
+          <p:cNvSpPr/>
+          <p:nvPr/>
+        </p:nvSpPr>
+        <p:spPr>
+          <a:xfrm>
+            <a:off x="5924550" y="3810000"/>
             <a:ext cx="5314950" cy="0"/>
           </a:xfrm>
           <a:prstGeom prst="line">
@@ -7779,13 +8597,13 @@
       </p:sp>
       <p:sp>
         <p:nvSpPr>
-          <p:cNvPr id="98" name="Shape 96"/>
-          <p:cNvSpPr/>
-          <p:nvPr/>
-        </p:nvSpPr>
-        <p:spPr>
-          <a:xfrm>
-            <a:off x="5924550" y="3554730"/>
+          <p:cNvPr id="119" name="Shape 117"/>
+          <p:cNvSpPr/>
+          <p:nvPr/>
+        </p:nvSpPr>
+        <p:spPr>
+          <a:xfrm>
+            <a:off x="5924550" y="4343400"/>
             <a:ext cx="5314950" cy="0"/>
           </a:xfrm>
           <a:prstGeom prst="line">
@@ -7802,13 +8620,13 @@
       </p:sp>
       <p:sp>
         <p:nvSpPr>
-          <p:cNvPr id="99" name="Shape 97"/>
-          <p:cNvSpPr/>
-          <p:nvPr/>
-        </p:nvSpPr>
-        <p:spPr>
-          <a:xfrm>
-            <a:off x="5924550" y="3272790"/>
+          <p:cNvPr id="120" name="Shape 118"/>
+          <p:cNvSpPr/>
+          <p:nvPr/>
+        </p:nvSpPr>
+        <p:spPr>
+          <a:xfrm>
+            <a:off x="5924550" y="4076700"/>
             <a:ext cx="5314950" cy="0"/>
           </a:xfrm>
           <a:prstGeom prst="line">
@@ -7825,13 +8643,13 @@
       </p:sp>
       <p:sp>
         <p:nvSpPr>
-          <p:cNvPr id="100" name="Text 98"/>
-          <p:cNvSpPr txBox="1"/>
-          <p:nvPr/>
-        </p:nvSpPr>
-        <p:spPr>
-          <a:xfrm>
-            <a:off x="5486400" y="2360295"/>
+          <p:cNvPr id="121" name="Text 119"/>
+          <p:cNvSpPr txBox="1"/>
+          <p:nvPr/>
+        </p:nvSpPr>
+        <p:spPr>
+          <a:xfrm>
+            <a:off x="5486400" y="3209925"/>
             <a:ext cx="342900" cy="114300"/>
           </a:xfrm>
           <a:prstGeom prst="rect">
@@ -7867,13 +8685,13 @@
       </p:sp>
       <p:sp>
         <p:nvSpPr>
-          <p:cNvPr id="101" name="Text 99"/>
-          <p:cNvSpPr txBox="1"/>
-          <p:nvPr/>
-        </p:nvSpPr>
-        <p:spPr>
-          <a:xfrm>
-            <a:off x="5486400" y="2642235"/>
+          <p:cNvPr id="122" name="Text 120"/>
+          <p:cNvSpPr txBox="1"/>
+          <p:nvPr/>
+        </p:nvSpPr>
+        <p:spPr>
+          <a:xfrm>
+            <a:off x="5486400" y="3743325"/>
             <a:ext cx="342900" cy="114300"/>
           </a:xfrm>
           <a:prstGeom prst="rect">
@@ -7901,7 +8719,7 @@
                 <a:ea typeface="Consolas" pitchFamily="34" charset="-122"/>
                 <a:cs typeface="Consolas" pitchFamily="34" charset="-120"/>
               </a:rPr>
-              <a:t>+8</a:t>
+              <a:t>+4</a:t>
             </a:r>
             <a:endParaRPr lang="en-US" sz="750" dirty="0"/>
           </a:p>
@@ -7909,13 +8727,13 @@
       </p:sp>
       <p:sp>
         <p:nvSpPr>
-          <p:cNvPr id="102" name="Text 100"/>
-          <p:cNvSpPr txBox="1"/>
-          <p:nvPr/>
-        </p:nvSpPr>
-        <p:spPr>
-          <a:xfrm>
-            <a:off x="5486400" y="2924175"/>
+          <p:cNvPr id="123" name="Text 121"/>
+          <p:cNvSpPr txBox="1"/>
+          <p:nvPr/>
+        </p:nvSpPr>
+        <p:spPr>
+          <a:xfrm>
+            <a:off x="5486400" y="4010025"/>
             <a:ext cx="342900" cy="114300"/>
           </a:xfrm>
           <a:prstGeom prst="rect">
@@ -7943,7 +8761,7 @@
                 <a:ea typeface="Consolas" pitchFamily="34" charset="-122"/>
                 <a:cs typeface="Consolas" pitchFamily="34" charset="-120"/>
               </a:rPr>
-              <a:t>+4</a:t>
+              <a:t>0</a:t>
             </a:r>
             <a:endParaRPr lang="en-US" sz="750" dirty="0"/>
           </a:p>
@@ -7951,13 +8769,13 @@
       </p:sp>
       <p:sp>
         <p:nvSpPr>
-          <p:cNvPr id="103" name="Text 101"/>
-          <p:cNvSpPr txBox="1"/>
-          <p:nvPr/>
-        </p:nvSpPr>
-        <p:spPr>
-          <a:xfrm>
-            <a:off x="5486400" y="3206115"/>
+          <p:cNvPr id="124" name="Text 122"/>
+          <p:cNvSpPr txBox="1"/>
+          <p:nvPr/>
+        </p:nvSpPr>
+        <p:spPr>
+          <a:xfrm>
+            <a:off x="5486400" y="4276725"/>
             <a:ext cx="342900" cy="114300"/>
           </a:xfrm>
           <a:prstGeom prst="rect">
@@ -7985,7 +8803,7 @@
                 <a:ea typeface="Consolas" pitchFamily="34" charset="-122"/>
                 <a:cs typeface="Consolas" pitchFamily="34" charset="-120"/>
               </a:rPr>
-              <a:t>0</a:t>
+              <a:t>-4</a:t>
             </a:r>
             <a:endParaRPr lang="en-US" sz="750" dirty="0"/>
           </a:p>
@@ -7993,56 +8811,14 @@
       </p:sp>
       <p:sp>
         <p:nvSpPr>
-          <p:cNvPr id="104" name="Text 102"/>
-          <p:cNvSpPr txBox="1"/>
-          <p:nvPr/>
-        </p:nvSpPr>
-        <p:spPr>
-          <a:xfrm>
-            <a:off x="5486400" y="3488055"/>
-            <a:ext cx="342900" cy="114300"/>
-          </a:xfrm>
-          <a:prstGeom prst="rect">
-            <a:avLst/>
-          </a:prstGeom>
-          <a:noFill/>
-          <a:ln/>
-        </p:spPr>
-        <p:txBody>
-          <a:bodyPr wrap="square" lIns="0" tIns="0" rIns="0" bIns="0" rtlCol="0" anchor="t"/>
-          <a:lstStyle/>
-          <a:p>
-            <a:pPr algn="r" indent="0" marL="0">
-              <a:lnSpc>
-                <a:spcPts val="900"/>
-              </a:lnSpc>
-              <a:buNone/>
-            </a:pPr>
-            <a:r>
-              <a:rPr lang="en-US" sz="750" dirty="0">
-                <a:solidFill>
-                  <a:srgbClr val="8A8880"/>
-                </a:solidFill>
-                <a:latin typeface="Consolas" pitchFamily="34" charset="0"/>
-                <a:ea typeface="Consolas" pitchFamily="34" charset="-122"/>
-                <a:cs typeface="Consolas" pitchFamily="34" charset="-120"/>
-              </a:rPr>
-              <a:t>-4</a:t>
-            </a:r>
-            <a:endParaRPr lang="en-US" sz="750" dirty="0"/>
-          </a:p>
-        </p:txBody>
-      </p:sp>
-      <p:sp>
-        <p:nvSpPr>
-          <p:cNvPr id="105" name="Shape 103"/>
-          <p:cNvSpPr/>
-          <p:nvPr/>
-        </p:nvSpPr>
-        <p:spPr>
-          <a:xfrm>
-            <a:off x="6313170" y="3695700"/>
-            <a:ext cx="0" cy="47625"/>
+          <p:cNvPr id="125" name="Shape 123"/>
+          <p:cNvSpPr/>
+          <p:nvPr/>
+        </p:nvSpPr>
+        <p:spPr>
+          <a:xfrm>
+            <a:off x="6313170" y="4476750"/>
+            <a:ext cx="0" cy="38100"/>
           </a:xfrm>
           <a:prstGeom prst="line">
             <a:avLst/>
@@ -8058,13 +8834,13 @@
       </p:sp>
       <p:sp>
         <p:nvSpPr>
-          <p:cNvPr id="106" name="Text 104"/>
-          <p:cNvSpPr txBox="1"/>
-          <p:nvPr/>
-        </p:nvSpPr>
-        <p:spPr>
-          <a:xfrm>
-            <a:off x="6103620" y="3771900"/>
+          <p:cNvPr id="126" name="Text 124"/>
+          <p:cNvSpPr txBox="1"/>
+          <p:nvPr/>
+        </p:nvSpPr>
+        <p:spPr>
+          <a:xfrm>
+            <a:off x="6103620" y="4533900"/>
             <a:ext cx="419100" cy="114300"/>
           </a:xfrm>
           <a:prstGeom prst="rect">
@@ -8100,14 +8876,14 @@
       </p:sp>
       <p:sp>
         <p:nvSpPr>
-          <p:cNvPr id="107" name="Shape 105"/>
-          <p:cNvSpPr/>
-          <p:nvPr/>
-        </p:nvSpPr>
-        <p:spPr>
-          <a:xfrm>
-            <a:off x="7608570" y="3695700"/>
-            <a:ext cx="0" cy="47625"/>
+          <p:cNvPr id="127" name="Shape 125"/>
+          <p:cNvSpPr/>
+          <p:nvPr/>
+        </p:nvSpPr>
+        <p:spPr>
+          <a:xfrm>
+            <a:off x="7608570" y="4476750"/>
+            <a:ext cx="0" cy="38100"/>
           </a:xfrm>
           <a:prstGeom prst="line">
             <a:avLst/>
@@ -8123,13 +8899,13 @@
       </p:sp>
       <p:sp>
         <p:nvSpPr>
-          <p:cNvPr id="108" name="Text 106"/>
-          <p:cNvSpPr txBox="1"/>
-          <p:nvPr/>
-        </p:nvSpPr>
-        <p:spPr>
-          <a:xfrm>
-            <a:off x="7399020" y="3771900"/>
+          <p:cNvPr id="128" name="Text 126"/>
+          <p:cNvSpPr txBox="1"/>
+          <p:nvPr/>
+        </p:nvSpPr>
+        <p:spPr>
+          <a:xfrm>
+            <a:off x="7399020" y="4533900"/>
             <a:ext cx="419100" cy="114300"/>
           </a:xfrm>
           <a:prstGeom prst="rect">
@@ -8165,14 +8941,14 @@
       </p:sp>
       <p:sp>
         <p:nvSpPr>
-          <p:cNvPr id="109" name="Shape 107"/>
-          <p:cNvSpPr/>
-          <p:nvPr/>
-        </p:nvSpPr>
-        <p:spPr>
-          <a:xfrm>
-            <a:off x="8903970" y="3695700"/>
-            <a:ext cx="0" cy="47625"/>
+          <p:cNvPr id="129" name="Shape 127"/>
+          <p:cNvSpPr/>
+          <p:nvPr/>
+        </p:nvSpPr>
+        <p:spPr>
+          <a:xfrm>
+            <a:off x="8903970" y="4476750"/>
+            <a:ext cx="0" cy="38100"/>
           </a:xfrm>
           <a:prstGeom prst="line">
             <a:avLst/>
@@ -8188,13 +8964,13 @@
       </p:sp>
       <p:sp>
         <p:nvSpPr>
-          <p:cNvPr id="110" name="Text 108"/>
-          <p:cNvSpPr txBox="1"/>
-          <p:nvPr/>
-        </p:nvSpPr>
-        <p:spPr>
-          <a:xfrm>
-            <a:off x="8694420" y="3771900"/>
+          <p:cNvPr id="130" name="Text 128"/>
+          <p:cNvSpPr txBox="1"/>
+          <p:nvPr/>
+        </p:nvSpPr>
+        <p:spPr>
+          <a:xfrm>
+            <a:off x="8694420" y="4533900"/>
             <a:ext cx="419100" cy="114300"/>
           </a:xfrm>
           <a:prstGeom prst="rect">
@@ -8230,14 +9006,14 @@
       </p:sp>
       <p:sp>
         <p:nvSpPr>
-          <p:cNvPr id="111" name="Shape 109"/>
-          <p:cNvSpPr/>
-          <p:nvPr/>
-        </p:nvSpPr>
-        <p:spPr>
-          <a:xfrm>
-            <a:off x="10199370" y="3695700"/>
-            <a:ext cx="0" cy="47625"/>
+          <p:cNvPr id="131" name="Shape 129"/>
+          <p:cNvSpPr/>
+          <p:nvPr/>
+        </p:nvSpPr>
+        <p:spPr>
+          <a:xfrm>
+            <a:off x="10199370" y="4476750"/>
+            <a:ext cx="0" cy="38100"/>
           </a:xfrm>
           <a:prstGeom prst="line">
             <a:avLst/>
@@ -8253,13 +9029,13 @@
       </p:sp>
       <p:sp>
         <p:nvSpPr>
-          <p:cNvPr id="112" name="Text 110"/>
-          <p:cNvSpPr txBox="1"/>
-          <p:nvPr/>
-        </p:nvSpPr>
-        <p:spPr>
-          <a:xfrm>
-            <a:off x="9989820" y="3771900"/>
+          <p:cNvPr id="132" name="Text 130"/>
+          <p:cNvSpPr txBox="1"/>
+          <p:nvPr/>
+        </p:nvSpPr>
+        <p:spPr>
+          <a:xfrm>
+            <a:off x="9989820" y="4533900"/>
             <a:ext cx="419100" cy="114300"/>
           </a:xfrm>
           <a:prstGeom prst="rect">
@@ -8295,13 +9071,13 @@
       </p:sp>
       <p:sp>
         <p:nvSpPr>
-          <p:cNvPr id="113" name="Shape 111"/>
-          <p:cNvSpPr/>
-          <p:nvPr/>
-        </p:nvSpPr>
-        <p:spPr>
-          <a:xfrm>
-            <a:off x="5924550" y="3099749"/>
+          <p:cNvPr id="133" name="Shape 131"/>
+          <p:cNvSpPr/>
+          <p:nvPr/>
+        </p:nvSpPr>
+        <p:spPr>
+          <a:xfrm>
+            <a:off x="5924550" y="3913013"/>
             <a:ext cx="5314950" cy="0"/>
           </a:xfrm>
           <a:prstGeom prst="line">
@@ -8318,14 +9094,14 @@
       </p:sp>
       <p:sp>
         <p:nvSpPr>
-          <p:cNvPr id="114" name="Text 112"/>
-          <p:cNvSpPr txBox="1"/>
-          <p:nvPr/>
-        </p:nvSpPr>
-        <p:spPr>
-          <a:xfrm>
-            <a:off x="8903970" y="2918774"/>
-            <a:ext cx="1714500" cy="131445"/>
+          <p:cNvPr id="134" name="Text 132"/>
+          <p:cNvSpPr txBox="1"/>
+          <p:nvPr/>
+        </p:nvSpPr>
+        <p:spPr>
+          <a:xfrm>
+            <a:off x="9033510" y="3741563"/>
+            <a:ext cx="1714500" cy="125730"/>
           </a:xfrm>
           <a:prstGeom prst="rect">
             <a:avLst/>
@@ -8339,12 +9115,12 @@
           <a:p>
             <a:pPr algn="r" indent="0" marL="0">
               <a:lnSpc>
-                <a:spcPts val="1035"/>
-              </a:lnSpc>
-              <a:buNone/>
-            </a:pPr>
-            <a:r>
-              <a:rPr lang="en-US" sz="863" b="1" dirty="0">
+                <a:spcPts val="990"/>
+              </a:lnSpc>
+              <a:buNone/>
+            </a:pPr>
+            <a:r>
+              <a:rPr lang="en-US" sz="825" b="1" dirty="0">
                 <a:solidFill>
                   <a:srgbClr val="A8BCD1"/>
                 </a:solidFill>
@@ -8354,20 +9130,20 @@
               </a:rPr>
               <a:t>적용한 보정값</a:t>
             </a:r>
-            <a:endParaRPr lang="en-US" sz="863" dirty="0"/>
-          </a:p>
-        </p:txBody>
-      </p:sp>
-      <p:sp>
-        <p:nvSpPr>
-          <p:cNvPr id="115" name="Shape 113"/>
-          <p:cNvSpPr/>
-          <p:nvPr/>
-        </p:nvSpPr>
-        <p:spPr>
-          <a:xfrm>
-            <a:off x="6035612" y="2328929"/>
-            <a:ext cx="62865" cy="62865"/>
+            <a:endParaRPr lang="en-US" sz="825" dirty="0"/>
+          </a:p>
+        </p:txBody>
+      </p:sp>
+      <p:sp>
+        <p:nvSpPr>
+          <p:cNvPr id="135" name="Shape 133"/>
+          <p:cNvSpPr/>
+          <p:nvPr/>
+        </p:nvSpPr>
+        <p:spPr>
+          <a:xfrm>
+            <a:off x="6039422" y="3185970"/>
+            <a:ext cx="55245" cy="55245"/>
           </a:xfrm>
           <a:prstGeom prst="ellipse">
             <a:avLst/>
@@ -8380,14 +9156,14 @@
       </p:sp>
       <p:sp>
         <p:nvSpPr>
-          <p:cNvPr id="116" name="Shape 114"/>
-          <p:cNvSpPr/>
-          <p:nvPr/>
-        </p:nvSpPr>
-        <p:spPr>
-          <a:xfrm>
-            <a:off x="6093905" y="2362269"/>
-            <a:ext cx="62865" cy="62865"/>
+          <p:cNvPr id="136" name="Shape 134"/>
+          <p:cNvSpPr/>
+          <p:nvPr/>
+        </p:nvSpPr>
+        <p:spPr>
+          <a:xfrm>
+            <a:off x="6097715" y="3217507"/>
+            <a:ext cx="55245" cy="55245"/>
           </a:xfrm>
           <a:prstGeom prst="ellipse">
             <a:avLst/>
@@ -8400,14 +9176,14 @@
       </p:sp>
       <p:sp>
         <p:nvSpPr>
-          <p:cNvPr id="117" name="Shape 115"/>
-          <p:cNvSpPr/>
-          <p:nvPr/>
-        </p:nvSpPr>
-        <p:spPr>
-          <a:xfrm>
-            <a:off x="6527864" y="2622288"/>
-            <a:ext cx="62865" cy="62865"/>
+          <p:cNvPr id="137" name="Shape 135"/>
+          <p:cNvSpPr/>
+          <p:nvPr/>
+        </p:nvSpPr>
+        <p:spPr>
+          <a:xfrm>
+            <a:off x="6531674" y="3463471"/>
+            <a:ext cx="55245" cy="55245"/>
           </a:xfrm>
           <a:prstGeom prst="ellipse">
             <a:avLst/>
@@ -8420,14 +9196,14 @@
       </p:sp>
       <p:sp>
         <p:nvSpPr>
-          <p:cNvPr id="118" name="Shape 116"/>
-          <p:cNvSpPr/>
-          <p:nvPr/>
-        </p:nvSpPr>
-        <p:spPr>
-          <a:xfrm>
-            <a:off x="6786944" y="2838677"/>
-            <a:ext cx="62865" cy="62865"/>
+          <p:cNvPr id="138" name="Shape 136"/>
+          <p:cNvSpPr/>
+          <p:nvPr/>
+        </p:nvSpPr>
+        <p:spPr>
+          <a:xfrm>
+            <a:off x="6790754" y="3668163"/>
+            <a:ext cx="55245" cy="55245"/>
           </a:xfrm>
           <a:prstGeom prst="ellipse">
             <a:avLst/>
@@ -8440,14 +9216,14 @@
       </p:sp>
       <p:sp>
         <p:nvSpPr>
-          <p:cNvPr id="119" name="Shape 117"/>
-          <p:cNvSpPr/>
-          <p:nvPr/>
-        </p:nvSpPr>
-        <p:spPr>
-          <a:xfrm>
-            <a:off x="7058978" y="2858342"/>
-            <a:ext cx="62865" cy="62865"/>
+          <p:cNvPr id="139" name="Shape 137"/>
+          <p:cNvSpPr/>
+          <p:nvPr/>
+        </p:nvSpPr>
+        <p:spPr>
+          <a:xfrm>
+            <a:off x="7062788" y="3686766"/>
+            <a:ext cx="55245" cy="55245"/>
           </a:xfrm>
           <a:prstGeom prst="ellipse">
             <a:avLst/>
@@ -8460,14 +9236,14 @@
       </p:sp>
       <p:sp>
         <p:nvSpPr>
-          <p:cNvPr id="120" name="Shape 118"/>
-          <p:cNvSpPr/>
-          <p:nvPr/>
-        </p:nvSpPr>
-        <p:spPr>
-          <a:xfrm>
-            <a:off x="7188518" y="2890554"/>
-            <a:ext cx="62865" cy="62865"/>
+          <p:cNvPr id="140" name="Shape 138"/>
+          <p:cNvSpPr/>
+          <p:nvPr/>
+        </p:nvSpPr>
+        <p:spPr>
+          <a:xfrm>
+            <a:off x="7192328" y="3717236"/>
+            <a:ext cx="55245" cy="55245"/>
           </a:xfrm>
           <a:prstGeom prst="ellipse">
             <a:avLst/>
@@ -8480,14 +9256,14 @@
       </p:sp>
       <p:sp>
         <p:nvSpPr>
-          <p:cNvPr id="121" name="Shape 119"/>
-          <p:cNvSpPr/>
-          <p:nvPr/>
-        </p:nvSpPr>
-        <p:spPr>
-          <a:xfrm>
-            <a:off x="7318058" y="2920439"/>
-            <a:ext cx="62865" cy="62865"/>
+          <p:cNvPr id="141" name="Shape 139"/>
+          <p:cNvSpPr/>
+          <p:nvPr/>
+        </p:nvSpPr>
+        <p:spPr>
+          <a:xfrm>
+            <a:off x="7321868" y="3745506"/>
+            <a:ext cx="55245" cy="55245"/>
           </a:xfrm>
           <a:prstGeom prst="ellipse">
             <a:avLst/>
@@ -8500,14 +9276,14 @@
       </p:sp>
       <p:sp>
         <p:nvSpPr>
-          <p:cNvPr id="122" name="Shape 120"/>
-          <p:cNvSpPr/>
-          <p:nvPr/>
-        </p:nvSpPr>
-        <p:spPr>
-          <a:xfrm>
-            <a:off x="7434644" y="2801602"/>
-            <a:ext cx="62865" cy="62865"/>
+          <p:cNvPr id="142" name="Shape 140"/>
+          <p:cNvSpPr/>
+          <p:nvPr/>
+        </p:nvSpPr>
+        <p:spPr>
+          <a:xfrm>
+            <a:off x="7438454" y="3633092"/>
+            <a:ext cx="55245" cy="55245"/>
           </a:xfrm>
           <a:prstGeom prst="ellipse">
             <a:avLst/>
@@ -8520,14 +9296,14 @@
       </p:sp>
       <p:sp>
         <p:nvSpPr>
-          <p:cNvPr id="123" name="Shape 121"/>
-          <p:cNvSpPr/>
-          <p:nvPr/>
-        </p:nvSpPr>
-        <p:spPr>
-          <a:xfrm>
-            <a:off x="7512368" y="2983594"/>
-            <a:ext cx="62865" cy="62865"/>
+          <p:cNvPr id="143" name="Shape 141"/>
+          <p:cNvSpPr/>
+          <p:nvPr/>
+        </p:nvSpPr>
+        <p:spPr>
+          <a:xfrm>
+            <a:off x="7516178" y="3805247"/>
+            <a:ext cx="55245" cy="55245"/>
           </a:xfrm>
           <a:prstGeom prst="ellipse">
             <a:avLst/>
@@ -8540,14 +9316,14 @@
       </p:sp>
       <p:sp>
         <p:nvSpPr>
-          <p:cNvPr id="124" name="Shape 122"/>
-          <p:cNvSpPr/>
-          <p:nvPr/>
-        </p:nvSpPr>
-        <p:spPr>
-          <a:xfrm>
-            <a:off x="7732586" y="2878783"/>
-            <a:ext cx="62865" cy="62865"/>
+          <p:cNvPr id="144" name="Shape 142"/>
+          <p:cNvSpPr/>
+          <p:nvPr/>
+        </p:nvSpPr>
+        <p:spPr>
+          <a:xfrm>
+            <a:off x="7736396" y="3706101"/>
+            <a:ext cx="55245" cy="55245"/>
           </a:xfrm>
           <a:prstGeom prst="ellipse">
             <a:avLst/>
@@ -8560,14 +9336,14 @@
       </p:sp>
       <p:sp>
         <p:nvSpPr>
-          <p:cNvPr id="125" name="Shape 123"/>
-          <p:cNvSpPr/>
-          <p:nvPr/>
-        </p:nvSpPr>
-        <p:spPr>
-          <a:xfrm>
-            <a:off x="7926896" y="2900633"/>
-            <a:ext cx="62865" cy="62865"/>
+          <p:cNvPr id="145" name="Shape 143"/>
+          <p:cNvSpPr/>
+          <p:nvPr/>
+        </p:nvSpPr>
+        <p:spPr>
+          <a:xfrm>
+            <a:off x="7930706" y="3726771"/>
+            <a:ext cx="55245" cy="55245"/>
           </a:xfrm>
           <a:prstGeom prst="ellipse">
             <a:avLst/>
@@ -8580,14 +9356,14 @@
       </p:sp>
       <p:sp>
         <p:nvSpPr>
-          <p:cNvPr id="126" name="Shape 124"/>
-          <p:cNvSpPr/>
-          <p:nvPr/>
-        </p:nvSpPr>
-        <p:spPr>
-          <a:xfrm>
-            <a:off x="7965758" y="2753319"/>
-            <a:ext cx="62865" cy="62865"/>
+          <p:cNvPr id="146" name="Shape 144"/>
+          <p:cNvSpPr/>
+          <p:nvPr/>
+        </p:nvSpPr>
+        <p:spPr>
+          <a:xfrm>
+            <a:off x="7969568" y="3587420"/>
+            <a:ext cx="55245" cy="55245"/>
           </a:xfrm>
           <a:prstGeom prst="ellipse">
             <a:avLst/>
@@ -8600,14 +9376,14 @@
       </p:sp>
       <p:sp>
         <p:nvSpPr>
-          <p:cNvPr id="127" name="Shape 125"/>
-          <p:cNvSpPr/>
-          <p:nvPr/>
-        </p:nvSpPr>
-        <p:spPr>
-          <a:xfrm>
-            <a:off x="8004620" y="2784685"/>
-            <a:ext cx="62865" cy="62865"/>
+          <p:cNvPr id="147" name="Shape 145"/>
+          <p:cNvSpPr/>
+          <p:nvPr/>
+        </p:nvSpPr>
+        <p:spPr>
+          <a:xfrm>
+            <a:off x="8008430" y="3617090"/>
+            <a:ext cx="55245" cy="55245"/>
           </a:xfrm>
           <a:prstGeom prst="ellipse">
             <a:avLst/>
@@ -8620,14 +9396,14 @@
       </p:sp>
       <p:sp>
         <p:nvSpPr>
-          <p:cNvPr id="128" name="Shape 126"/>
-          <p:cNvSpPr/>
-          <p:nvPr/>
-        </p:nvSpPr>
-        <p:spPr>
-          <a:xfrm>
-            <a:off x="8147114" y="2723222"/>
-            <a:ext cx="62865" cy="62865"/>
+          <p:cNvPr id="148" name="Shape 146"/>
+          <p:cNvSpPr/>
+          <p:nvPr/>
+        </p:nvSpPr>
+        <p:spPr>
+          <a:xfrm>
+            <a:off x="8150924" y="3558950"/>
+            <a:ext cx="55245" cy="55245"/>
           </a:xfrm>
           <a:prstGeom prst="ellipse">
             <a:avLst/>
@@ -8640,14 +9416,14 @@
       </p:sp>
       <p:sp>
         <p:nvSpPr>
-          <p:cNvPr id="129" name="Shape 127"/>
-          <p:cNvSpPr/>
-          <p:nvPr/>
-        </p:nvSpPr>
-        <p:spPr>
-          <a:xfrm>
-            <a:off x="8160068" y="2817672"/>
-            <a:ext cx="62865" cy="62865"/>
+          <p:cNvPr id="149" name="Shape 147"/>
+          <p:cNvSpPr/>
+          <p:nvPr/>
+        </p:nvSpPr>
+        <p:spPr>
+          <a:xfrm>
+            <a:off x="8163878" y="3648294"/>
+            <a:ext cx="55245" cy="55245"/>
           </a:xfrm>
           <a:prstGeom prst="ellipse">
             <a:avLst/>
@@ -8660,14 +9436,14 @@
       </p:sp>
       <p:sp>
         <p:nvSpPr>
-          <p:cNvPr id="130" name="Shape 128"/>
-          <p:cNvSpPr/>
-          <p:nvPr/>
-        </p:nvSpPr>
-        <p:spPr>
-          <a:xfrm>
-            <a:off x="8237792" y="2847487"/>
-            <a:ext cx="62865" cy="62865"/>
+          <p:cNvPr id="150" name="Shape 148"/>
+          <p:cNvSpPr/>
+          <p:nvPr/>
+        </p:nvSpPr>
+        <p:spPr>
+          <a:xfrm>
+            <a:off x="8241602" y="3676498"/>
+            <a:ext cx="55245" cy="55245"/>
           </a:xfrm>
           <a:prstGeom prst="ellipse">
             <a:avLst/>
@@ -8680,14 +9456,14 @@
       </p:sp>
       <p:sp>
         <p:nvSpPr>
-          <p:cNvPr id="131" name="Shape 129"/>
-          <p:cNvSpPr/>
-          <p:nvPr/>
-        </p:nvSpPr>
-        <p:spPr>
-          <a:xfrm>
-            <a:off x="8432102" y="2863135"/>
-            <a:ext cx="62865" cy="62865"/>
+          <p:cNvPr id="151" name="Shape 149"/>
+          <p:cNvSpPr/>
+          <p:nvPr/>
+        </p:nvSpPr>
+        <p:spPr>
+          <a:xfrm>
+            <a:off x="8435912" y="3691299"/>
+            <a:ext cx="55245" cy="55245"/>
           </a:xfrm>
           <a:prstGeom prst="ellipse">
             <a:avLst/>
@@ -8700,14 +9476,14 @@
       </p:sp>
       <p:sp>
         <p:nvSpPr>
-          <p:cNvPr id="132" name="Shape 130"/>
-          <p:cNvSpPr/>
-          <p:nvPr/>
-        </p:nvSpPr>
-        <p:spPr>
-          <a:xfrm>
-            <a:off x="8445056" y="2839382"/>
-            <a:ext cx="62865" cy="62865"/>
+          <p:cNvPr id="152" name="Shape 150"/>
+          <p:cNvSpPr/>
+          <p:nvPr/>
+        </p:nvSpPr>
+        <p:spPr>
+          <a:xfrm>
+            <a:off x="8448866" y="3668830"/>
+            <a:ext cx="55245" cy="55245"/>
           </a:xfrm>
           <a:prstGeom prst="ellipse">
             <a:avLst/>
@@ -8720,14 +9496,14 @@
       </p:sp>
       <p:sp>
         <p:nvSpPr>
-          <p:cNvPr id="133" name="Shape 131"/>
-          <p:cNvSpPr/>
-          <p:nvPr/>
-        </p:nvSpPr>
-        <p:spPr>
-          <a:xfrm>
-            <a:off x="9040940" y="3056757"/>
-            <a:ext cx="62865" cy="62865"/>
+          <p:cNvPr id="153" name="Shape 151"/>
+          <p:cNvSpPr/>
+          <p:nvPr/>
+        </p:nvSpPr>
+        <p:spPr>
+          <a:xfrm>
+            <a:off x="9044750" y="3874456"/>
+            <a:ext cx="55245" cy="55245"/>
           </a:xfrm>
           <a:prstGeom prst="ellipse">
             <a:avLst/>
@@ -8740,14 +9516,14 @@
       </p:sp>
       <p:sp>
         <p:nvSpPr>
-          <p:cNvPr id="134" name="Shape 132"/>
-          <p:cNvSpPr/>
-          <p:nvPr/>
-        </p:nvSpPr>
-        <p:spPr>
-          <a:xfrm>
-            <a:off x="9533192" y="3390010"/>
-            <a:ext cx="62865" cy="62865"/>
+          <p:cNvPr id="154" name="Shape 152"/>
+          <p:cNvSpPr/>
+          <p:nvPr/>
+        </p:nvSpPr>
+        <p:spPr>
+          <a:xfrm>
+            <a:off x="9537002" y="4189695"/>
+            <a:ext cx="55245" cy="55245"/>
           </a:xfrm>
           <a:prstGeom prst="ellipse">
             <a:avLst/>
@@ -8760,14 +9536,14 @@
       </p:sp>
       <p:sp>
         <p:nvSpPr>
-          <p:cNvPr id="135" name="Shape 133"/>
-          <p:cNvSpPr/>
-          <p:nvPr/>
-        </p:nvSpPr>
-        <p:spPr>
-          <a:xfrm>
-            <a:off x="9559100" y="3472830"/>
-            <a:ext cx="62865" cy="62865"/>
+          <p:cNvPr id="155" name="Shape 153"/>
+          <p:cNvSpPr/>
+          <p:nvPr/>
+        </p:nvSpPr>
+        <p:spPr>
+          <a:xfrm>
+            <a:off x="9562910" y="4268038"/>
+            <a:ext cx="55245" cy="55245"/>
           </a:xfrm>
           <a:prstGeom prst="ellipse">
             <a:avLst/>
@@ -8780,14 +9556,14 @@
       </p:sp>
       <p:sp>
         <p:nvSpPr>
-          <p:cNvPr id="136" name="Shape 134"/>
-          <p:cNvSpPr/>
-          <p:nvPr/>
-        </p:nvSpPr>
-        <p:spPr>
-          <a:xfrm>
-            <a:off x="9572054" y="3282168"/>
-            <a:ext cx="62865" cy="62865"/>
+          <p:cNvPr id="156" name="Shape 154"/>
+          <p:cNvSpPr/>
+          <p:nvPr/>
+        </p:nvSpPr>
+        <p:spPr>
+          <a:xfrm>
+            <a:off x="9575864" y="4087682"/>
+            <a:ext cx="55245" cy="55245"/>
           </a:xfrm>
           <a:prstGeom prst="ellipse">
             <a:avLst/>
@@ -8800,14 +9576,14 @@
       </p:sp>
       <p:sp>
         <p:nvSpPr>
-          <p:cNvPr id="137" name="Shape 135"/>
-          <p:cNvSpPr/>
-          <p:nvPr/>
-        </p:nvSpPr>
-        <p:spPr>
-          <a:xfrm>
-            <a:off x="9610916" y="3290697"/>
-            <a:ext cx="62865" cy="62865"/>
+          <p:cNvPr id="157" name="Shape 155"/>
+          <p:cNvSpPr/>
+          <p:nvPr/>
+        </p:nvSpPr>
+        <p:spPr>
+          <a:xfrm>
+            <a:off x="9614726" y="4095750"/>
+            <a:ext cx="55245" cy="55245"/>
           </a:xfrm>
           <a:prstGeom prst="ellipse">
             <a:avLst/>
@@ -8820,14 +9596,14 @@
       </p:sp>
       <p:sp>
         <p:nvSpPr>
-          <p:cNvPr id="138" name="Shape 136"/>
-          <p:cNvSpPr/>
-          <p:nvPr/>
-        </p:nvSpPr>
-        <p:spPr>
-          <a:xfrm>
-            <a:off x="9831134" y="3429693"/>
-            <a:ext cx="62865" cy="62865"/>
+          <p:cNvPr id="158" name="Shape 156"/>
+          <p:cNvSpPr/>
+          <p:nvPr/>
+        </p:nvSpPr>
+        <p:spPr>
+          <a:xfrm>
+            <a:off x="9834944" y="4227233"/>
+            <a:ext cx="55245" cy="55245"/>
           </a:xfrm>
           <a:prstGeom prst="ellipse">
             <a:avLst/>
@@ -8840,14 +9616,14 @@
       </p:sp>
       <p:sp>
         <p:nvSpPr>
-          <p:cNvPr id="139" name="Shape 137"/>
-          <p:cNvSpPr/>
-          <p:nvPr/>
-        </p:nvSpPr>
-        <p:spPr>
-          <a:xfrm>
-            <a:off x="9999536" y="3583562"/>
-            <a:ext cx="62865" cy="62865"/>
+          <p:cNvPr id="159" name="Shape 157"/>
+          <p:cNvSpPr/>
+          <p:nvPr/>
+        </p:nvSpPr>
+        <p:spPr>
+          <a:xfrm>
+            <a:off x="10003345" y="4372785"/>
+            <a:ext cx="55245" cy="55245"/>
           </a:xfrm>
           <a:prstGeom prst="ellipse">
             <a:avLst/>
@@ -8860,14 +9636,14 @@
       </p:sp>
       <p:sp>
         <p:nvSpPr>
-          <p:cNvPr id="140" name="Shape 138"/>
-          <p:cNvSpPr/>
-          <p:nvPr/>
-        </p:nvSpPr>
-        <p:spPr>
-          <a:xfrm>
-            <a:off x="10193846" y="3354486"/>
-            <a:ext cx="62865" cy="62865"/>
+          <p:cNvPr id="160" name="Shape 158"/>
+          <p:cNvSpPr/>
+          <p:nvPr/>
+        </p:nvSpPr>
+        <p:spPr>
+          <a:xfrm>
+            <a:off x="10197655" y="4156091"/>
+            <a:ext cx="55245" cy="55245"/>
           </a:xfrm>
           <a:prstGeom prst="ellipse">
             <a:avLst/>
@@ -8880,14 +9656,14 @@
       </p:sp>
       <p:sp>
         <p:nvSpPr>
-          <p:cNvPr id="141" name="Shape 139"/>
-          <p:cNvSpPr/>
-          <p:nvPr/>
-        </p:nvSpPr>
-        <p:spPr>
-          <a:xfrm>
-            <a:off x="10193846" y="3275120"/>
-            <a:ext cx="62865" cy="62865"/>
+          <p:cNvPr id="161" name="Shape 159"/>
+          <p:cNvSpPr/>
+          <p:nvPr/>
+        </p:nvSpPr>
+        <p:spPr>
+          <a:xfrm>
+            <a:off x="10197655" y="4081015"/>
+            <a:ext cx="55245" cy="55245"/>
           </a:xfrm>
           <a:prstGeom prst="ellipse">
             <a:avLst/>
@@ -8900,14 +9676,14 @@
       </p:sp>
       <p:sp>
         <p:nvSpPr>
-          <p:cNvPr id="142" name="Shape 140"/>
-          <p:cNvSpPr/>
-          <p:nvPr/>
-        </p:nvSpPr>
-        <p:spPr>
-          <a:xfrm>
-            <a:off x="10258616" y="3484460"/>
-            <a:ext cx="62865" cy="62865"/>
+          <p:cNvPr id="162" name="Shape 160"/>
+          <p:cNvSpPr/>
+          <p:nvPr/>
+        </p:nvSpPr>
+        <p:spPr>
+          <a:xfrm>
+            <a:off x="10262426" y="4279040"/>
+            <a:ext cx="55245" cy="55245"/>
           </a:xfrm>
           <a:prstGeom prst="ellipse">
             <a:avLst/>
@@ -8920,14 +9696,14 @@
       </p:sp>
       <p:sp>
         <p:nvSpPr>
-          <p:cNvPr id="143" name="Shape 141"/>
-          <p:cNvSpPr/>
-          <p:nvPr/>
-        </p:nvSpPr>
-        <p:spPr>
-          <a:xfrm>
-            <a:off x="10284524" y="3480725"/>
-            <a:ext cx="62865" cy="62865"/>
+          <p:cNvPr id="163" name="Shape 161"/>
+          <p:cNvSpPr/>
+          <p:nvPr/>
+        </p:nvSpPr>
+        <p:spPr>
+          <a:xfrm>
+            <a:off x="10288333" y="4275506"/>
+            <a:ext cx="55245" cy="55245"/>
           </a:xfrm>
           <a:prstGeom prst="ellipse">
             <a:avLst/>
@@ -8940,14 +9716,14 @@
       </p:sp>
       <p:sp>
         <p:nvSpPr>
-          <p:cNvPr id="144" name="Shape 142"/>
-          <p:cNvSpPr/>
-          <p:nvPr/>
-        </p:nvSpPr>
-        <p:spPr>
-          <a:xfrm>
-            <a:off x="10388156" y="3302891"/>
-            <a:ext cx="62865" cy="62865"/>
+          <p:cNvPr id="164" name="Shape 162"/>
+          <p:cNvSpPr/>
+          <p:nvPr/>
+        </p:nvSpPr>
+        <p:spPr>
+          <a:xfrm>
+            <a:off x="10391966" y="4107285"/>
+            <a:ext cx="55245" cy="55245"/>
           </a:xfrm>
           <a:prstGeom prst="ellipse">
             <a:avLst/>
@@ -8960,14 +9736,14 @@
       </p:sp>
       <p:sp>
         <p:nvSpPr>
-          <p:cNvPr id="145" name="Shape 143"/>
-          <p:cNvSpPr/>
-          <p:nvPr/>
-        </p:nvSpPr>
-        <p:spPr>
-          <a:xfrm>
-            <a:off x="10478834" y="3285058"/>
-            <a:ext cx="62865" cy="62865"/>
+          <p:cNvPr id="165" name="Shape 163"/>
+          <p:cNvSpPr/>
+          <p:nvPr/>
+        </p:nvSpPr>
+        <p:spPr>
+          <a:xfrm>
+            <a:off x="10482644" y="4090416"/>
+            <a:ext cx="55245" cy="55245"/>
           </a:xfrm>
           <a:prstGeom prst="ellipse">
             <a:avLst/>
@@ -8980,14 +9756,14 @@
       </p:sp>
       <p:sp>
         <p:nvSpPr>
-          <p:cNvPr id="146" name="Shape 144"/>
-          <p:cNvSpPr/>
-          <p:nvPr/>
-        </p:nvSpPr>
-        <p:spPr>
-          <a:xfrm>
-            <a:off x="10517696" y="3420460"/>
-            <a:ext cx="62865" cy="62865"/>
+          <p:cNvPr id="166" name="Shape 164"/>
+          <p:cNvSpPr/>
+          <p:nvPr/>
+        </p:nvSpPr>
+        <p:spPr>
+          <a:xfrm>
+            <a:off x="10521506" y="4218499"/>
+            <a:ext cx="55245" cy="55245"/>
           </a:xfrm>
           <a:prstGeom prst="ellipse">
             <a:avLst/>
@@ -9000,14 +9776,14 @@
       </p:sp>
       <p:sp>
         <p:nvSpPr>
-          <p:cNvPr id="147" name="Shape 145"/>
-          <p:cNvSpPr/>
-          <p:nvPr/>
-        </p:nvSpPr>
-        <p:spPr>
-          <a:xfrm>
-            <a:off x="10530650" y="3092564"/>
-            <a:ext cx="62865" cy="62865"/>
+          <p:cNvPr id="167" name="Shape 165"/>
+          <p:cNvSpPr/>
+          <p:nvPr/>
+        </p:nvSpPr>
+        <p:spPr>
+          <a:xfrm>
+            <a:off x="10534459" y="3908327"/>
+            <a:ext cx="55245" cy="55245"/>
           </a:xfrm>
           <a:prstGeom prst="ellipse">
             <a:avLst/>
@@ -9020,14 +9796,14 @@
       </p:sp>
       <p:sp>
         <p:nvSpPr>
-          <p:cNvPr id="148" name="Shape 146"/>
-          <p:cNvSpPr/>
-          <p:nvPr/>
-        </p:nvSpPr>
-        <p:spPr>
-          <a:xfrm>
-            <a:off x="10530650" y="3143313"/>
-            <a:ext cx="62865" cy="62865"/>
+          <p:cNvPr id="168" name="Shape 166"/>
+          <p:cNvSpPr/>
+          <p:nvPr/>
+        </p:nvSpPr>
+        <p:spPr>
+          <a:xfrm>
+            <a:off x="10534459" y="3956333"/>
+            <a:ext cx="55245" cy="55245"/>
           </a:xfrm>
           <a:prstGeom prst="ellipse">
             <a:avLst/>
@@ -9040,14 +9816,14 @@
       </p:sp>
       <p:sp>
         <p:nvSpPr>
-          <p:cNvPr id="149" name="Shape 147"/>
-          <p:cNvSpPr/>
-          <p:nvPr/>
-        </p:nvSpPr>
-        <p:spPr>
-          <a:xfrm>
-            <a:off x="10530650" y="3349411"/>
-            <a:ext cx="62865" cy="62865"/>
+          <p:cNvPr id="169" name="Shape 167"/>
+          <p:cNvSpPr/>
+          <p:nvPr/>
+        </p:nvSpPr>
+        <p:spPr>
+          <a:xfrm>
+            <a:off x="10534459" y="4151290"/>
+            <a:ext cx="55245" cy="55245"/>
           </a:xfrm>
           <a:prstGeom prst="ellipse">
             <a:avLst/>
@@ -9060,14 +9836,14 @@
       </p:sp>
       <p:sp>
         <p:nvSpPr>
-          <p:cNvPr id="150" name="Shape 148"/>
-          <p:cNvSpPr/>
-          <p:nvPr/>
-        </p:nvSpPr>
-        <p:spPr>
-          <a:xfrm>
-            <a:off x="10634282" y="3193569"/>
-            <a:ext cx="62865" cy="62865"/>
+          <p:cNvPr id="170" name="Shape 168"/>
+          <p:cNvSpPr/>
+          <p:nvPr/>
+        </p:nvSpPr>
+        <p:spPr>
+          <a:xfrm>
+            <a:off x="10638091" y="4003872"/>
+            <a:ext cx="55245" cy="55245"/>
           </a:xfrm>
           <a:prstGeom prst="ellipse">
             <a:avLst/>
@@ -9080,14 +9856,14 @@
       </p:sp>
       <p:sp>
         <p:nvSpPr>
-          <p:cNvPr id="151" name="Shape 149"/>
-          <p:cNvSpPr/>
-          <p:nvPr/>
-        </p:nvSpPr>
-        <p:spPr>
-          <a:xfrm>
-            <a:off x="10660190" y="3405376"/>
-            <a:ext cx="62865" cy="62865"/>
+          <p:cNvPr id="171" name="Shape 169"/>
+          <p:cNvSpPr/>
+          <p:nvPr/>
+        </p:nvSpPr>
+        <p:spPr>
+          <a:xfrm>
+            <a:off x="10664000" y="4204230"/>
+            <a:ext cx="55245" cy="55245"/>
           </a:xfrm>
           <a:prstGeom prst="ellipse">
             <a:avLst/>
@@ -9100,14 +9876,14 @@
       </p:sp>
       <p:sp>
         <p:nvSpPr>
-          <p:cNvPr id="152" name="Shape 150"/>
-          <p:cNvSpPr/>
-          <p:nvPr/>
-        </p:nvSpPr>
-        <p:spPr>
-          <a:xfrm>
-            <a:off x="10763822" y="3189269"/>
-            <a:ext cx="62865" cy="62865"/>
+          <p:cNvPr id="172" name="Shape 170"/>
+          <p:cNvSpPr/>
+          <p:nvPr/>
+        </p:nvSpPr>
+        <p:spPr>
+          <a:xfrm>
+            <a:off x="10767632" y="3999805"/>
+            <a:ext cx="55245" cy="55245"/>
           </a:xfrm>
           <a:prstGeom prst="ellipse">
             <a:avLst/>
@@ -9120,14 +9896,14 @@
       </p:sp>
       <p:sp>
         <p:nvSpPr>
-          <p:cNvPr id="153" name="Shape 151"/>
-          <p:cNvSpPr/>
-          <p:nvPr/>
-        </p:nvSpPr>
-        <p:spPr>
-          <a:xfrm>
-            <a:off x="10958132" y="3093339"/>
-            <a:ext cx="62865" cy="62865"/>
+          <p:cNvPr id="173" name="Shape 171"/>
+          <p:cNvSpPr/>
+          <p:nvPr/>
+        </p:nvSpPr>
+        <p:spPr>
+          <a:xfrm>
+            <a:off x="10961941" y="3909060"/>
+            <a:ext cx="55245" cy="55245"/>
           </a:xfrm>
           <a:prstGeom prst="ellipse">
             <a:avLst/>
@@ -9140,14 +9916,14 @@
       </p:sp>
       <p:sp>
         <p:nvSpPr>
-          <p:cNvPr id="154" name="Shape 152"/>
-          <p:cNvSpPr/>
-          <p:nvPr/>
-        </p:nvSpPr>
-        <p:spPr>
-          <a:xfrm>
-            <a:off x="11191304" y="3140987"/>
-            <a:ext cx="62865" cy="62865"/>
+          <p:cNvPr id="174" name="Shape 172"/>
+          <p:cNvSpPr/>
+          <p:nvPr/>
+        </p:nvSpPr>
+        <p:spPr>
+          <a:xfrm>
+            <a:off x="11195114" y="3954132"/>
+            <a:ext cx="55245" cy="55245"/>
           </a:xfrm>
           <a:prstGeom prst="ellipse">
             <a:avLst/>
@@ -9160,102 +9936,34 @@
       </p:sp>
       <p:sp>
         <p:nvSpPr>
-          <p:cNvPr id="155" name="Shape 153"/>
-          <p:cNvSpPr/>
-          <p:nvPr/>
-        </p:nvSpPr>
-        <p:spPr>
-          <a:xfrm>
-            <a:off x="5314950" y="4114800"/>
-            <a:ext cx="6191250" cy="1828800"/>
-          </a:xfrm>
-          <a:prstGeom prst="rect">
-            <a:avLst/>
-          </a:prstGeom>
-          <a:solidFill>
-            <a:srgbClr val="0A1320"/>
-          </a:solidFill>
-          <a:ln w="15240">
-            <a:solidFill>
-              <a:srgbClr val="22354A"/>
-            </a:solidFill>
-            <a:prstDash val="solid"/>
-          </a:ln>
-        </p:spPr>
-      </p:sp>
-      <p:sp>
-        <p:nvSpPr>
-          <p:cNvPr id="156" name="Shape 154"/>
-          <p:cNvSpPr/>
-          <p:nvPr/>
-        </p:nvSpPr>
-        <p:spPr>
-          <a:xfrm>
-            <a:off x="5324475" y="4124325"/>
-            <a:ext cx="6172200" cy="276225"/>
-          </a:xfrm>
-          <a:prstGeom prst="rect">
-            <a:avLst/>
-          </a:prstGeom>
-          <a:solidFill>
-            <a:srgbClr val="17283C"/>
-          </a:solidFill>
-          <a:ln/>
-        </p:spPr>
-      </p:sp>
-      <p:sp>
-        <p:nvSpPr>
-          <p:cNvPr id="157" name="Shape 155"/>
-          <p:cNvSpPr/>
-          <p:nvPr/>
-        </p:nvSpPr>
-        <p:spPr>
-          <a:xfrm>
-            <a:off x="5314950" y="4400550"/>
-            <a:ext cx="6191250" cy="0"/>
-          </a:xfrm>
-          <a:prstGeom prst="line">
-            <a:avLst/>
-          </a:prstGeom>
-          <a:noFill/>
-          <a:ln w="15240">
-            <a:solidFill>
-              <a:srgbClr val="22354A"/>
-            </a:solidFill>
-            <a:prstDash val="solid"/>
-          </a:ln>
-        </p:spPr>
-      </p:sp>
-      <p:sp>
-        <p:nvSpPr>
-          <p:cNvPr id="158" name="Shape 156"/>
-          <p:cNvSpPr/>
-          <p:nvPr/>
-        </p:nvSpPr>
-        <p:spPr>
-          <a:xfrm>
-            <a:off x="5324475" y="4124325"/>
-            <a:ext cx="38100" cy="276225"/>
-          </a:xfrm>
-          <a:prstGeom prst="rect">
-            <a:avLst/>
-          </a:prstGeom>
-          <a:solidFill>
-            <a:srgbClr val="EFB13C"/>
-          </a:solidFill>
-          <a:ln/>
-        </p:spPr>
-      </p:sp>
-      <p:sp>
-        <p:nvSpPr>
-          <p:cNvPr id="159" name="Text 157"/>
-          <p:cNvSpPr txBox="1"/>
-          <p:nvPr/>
-        </p:nvSpPr>
-        <p:spPr>
-          <a:xfrm>
-            <a:off x="5486400" y="4191000"/>
-            <a:ext cx="171450" cy="148590"/>
+          <p:cNvPr id="175" name="Shape 173"/>
+          <p:cNvSpPr/>
+          <p:nvPr/>
+        </p:nvSpPr>
+        <p:spPr>
+          <a:xfrm>
+            <a:off x="5505450" y="4752975"/>
+            <a:ext cx="38100" cy="247650"/>
+          </a:xfrm>
+          <a:prstGeom prst="rect">
+            <a:avLst/>
+          </a:prstGeom>
+          <a:solidFill>
+            <a:srgbClr val="A8BCD1"/>
+          </a:solidFill>
+          <a:ln/>
+        </p:spPr>
+      </p:sp>
+      <p:sp>
+        <p:nvSpPr>
+          <p:cNvPr id="176" name="Text 174"/>
+          <p:cNvSpPr txBox="1"/>
+          <p:nvPr/>
+        </p:nvSpPr>
+        <p:spPr>
+          <a:xfrm>
+            <a:off x="5638800" y="4724400"/>
+            <a:ext cx="514350" cy="179546"/>
           </a:xfrm>
           <a:prstGeom prst="rect">
             <a:avLst/>
@@ -9269,139 +9977,97 @@
           <a:p>
             <a:pPr algn="l" indent="0" marL="0">
               <a:lnSpc>
-                <a:spcPts val="1170"/>
-              </a:lnSpc>
-              <a:buNone/>
-            </a:pPr>
-            <a:r>
-              <a:rPr lang="en-US" sz="975" b="1" dirty="0">
-                <a:solidFill>
-                  <a:srgbClr val="EFB13C"/>
-                </a:solidFill>
-                <a:latin typeface="Consolas" pitchFamily="34" charset="0"/>
-                <a:ea typeface="Consolas" pitchFamily="34" charset="-122"/>
-                <a:cs typeface="Consolas" pitchFamily="34" charset="-120"/>
-              </a:rPr>
-              <a:t>3</a:t>
-            </a:r>
-            <a:endParaRPr lang="en-US" sz="975" dirty="0"/>
-          </a:p>
-        </p:txBody>
-      </p:sp>
-      <p:sp>
-        <p:nvSpPr>
-          <p:cNvPr id="160" name="Text 158"/>
-          <p:cNvSpPr txBox="1"/>
-          <p:nvPr/>
-        </p:nvSpPr>
-        <p:spPr>
-          <a:xfrm>
-            <a:off x="5715000" y="4191000"/>
-            <a:ext cx="5019675" cy="154305"/>
-          </a:xfrm>
-          <a:prstGeom prst="rect">
-            <a:avLst/>
-          </a:prstGeom>
-          <a:noFill/>
-          <a:ln/>
-        </p:spPr>
-        <p:txBody>
-          <a:bodyPr wrap="square" lIns="0" tIns="0" rIns="0" bIns="0" rtlCol="0" anchor="t"/>
-          <a:lstStyle/>
-          <a:p>
-            <a:pPr algn="l" indent="0" marL="0">
-              <a:lnSpc>
-                <a:spcPts val="1215"/>
-              </a:lnSpc>
-              <a:buNone/>
-            </a:pPr>
-            <a:r>
-              <a:rPr lang="en-US" sz="1013" b="1" spc="30" kern="0" dirty="0">
-                <a:solidFill>
-                  <a:srgbClr val="EAE7E0"/>
+                <a:spcPts val="1414"/>
+              </a:lnSpc>
+              <a:buNone/>
+            </a:pPr>
+            <a:r>
+              <a:rPr lang="en-US" sz="1088" b="1" dirty="0">
+                <a:solidFill>
+                  <a:srgbClr val="A8BCD1"/>
                 </a:solidFill>
                 <a:latin typeface="Malgun Gothic" pitchFamily="34" charset="0"/>
                 <a:ea typeface="Malgun Gothic" pitchFamily="34" charset="-122"/>
                 <a:cs typeface="Malgun Gothic" pitchFamily="34" charset="-120"/>
               </a:rPr>
-              <a:t>무엇이 문제인가</a:t>
-            </a:r>
-            <a:endParaRPr lang="en-US" sz="1013" dirty="0"/>
-          </a:p>
-        </p:txBody>
-      </p:sp>
-      <p:sp>
-        <p:nvSpPr>
-          <p:cNvPr id="161" name="Text 159"/>
-          <p:cNvSpPr txBox="1"/>
-          <p:nvPr/>
-        </p:nvSpPr>
-        <p:spPr>
-          <a:xfrm>
-            <a:off x="10734675" y="4200525"/>
-            <a:ext cx="638175" cy="125730"/>
-          </a:xfrm>
-          <a:prstGeom prst="rect">
-            <a:avLst/>
-          </a:prstGeom>
-          <a:noFill/>
-          <a:ln/>
-        </p:spPr>
-        <p:txBody>
-          <a:bodyPr wrap="square" lIns="0" tIns="0" rIns="0" bIns="0" rtlCol="0" anchor="t"/>
-          <a:lstStyle/>
-          <a:p>
-            <a:pPr algn="r" indent="0" marL="0">
-              <a:lnSpc>
-                <a:spcPts val="990"/>
-              </a:lnSpc>
-              <a:buNone/>
-            </a:pPr>
-            <a:r>
-              <a:rPr lang="en-US" sz="825" dirty="0">
-                <a:solidFill>
-                  <a:srgbClr val="8A8880"/>
+              <a:t>겨울</a:t>
+            </a:r>
+            <a:endParaRPr lang="en-US" sz="1088" dirty="0"/>
+          </a:p>
+        </p:txBody>
+      </p:sp>
+      <p:sp>
+        <p:nvSpPr>
+          <p:cNvPr id="177" name="Text 175"/>
+          <p:cNvSpPr txBox="1"/>
+          <p:nvPr/>
+        </p:nvSpPr>
+        <p:spPr>
+          <a:xfrm>
+            <a:off x="6210300" y="4733925"/>
+            <a:ext cx="4914900" cy="345281"/>
+          </a:xfrm>
+          <a:prstGeom prst="rect">
+            <a:avLst/>
+          </a:prstGeom>
+          <a:noFill/>
+          <a:ln/>
+        </p:spPr>
+        <p:txBody>
+          <a:bodyPr wrap="square" lIns="0" tIns="0" rIns="0" bIns="0" rtlCol="0" anchor="t"/>
+          <a:lstStyle/>
+          <a:p>
+            <a:pPr algn="l" indent="0" marL="0">
+              <a:lnSpc>
+                <a:spcPts val="1359"/>
+              </a:lnSpc>
+              <a:buNone/>
+            </a:pPr>
+            <a:r>
+              <a:rPr lang="en-US" sz="938" dirty="0">
+                <a:solidFill>
+                  <a:srgbClr val="CFCBC2"/>
                 </a:solidFill>
                 <a:latin typeface="Malgun Gothic" pitchFamily="34" charset="0"/>
                 <a:ea typeface="Malgun Gothic" pitchFamily="34" charset="-122"/>
                 <a:cs typeface="Malgun Gothic" pitchFamily="34" charset="-120"/>
               </a:rPr>
-              <a:t>미달 15회</a:t>
-            </a:r>
-            <a:endParaRPr lang="en-US" sz="825" dirty="0"/>
-          </a:p>
-        </p:txBody>
-      </p:sp>
-      <p:sp>
-        <p:nvSpPr>
-          <p:cNvPr id="162" name="Shape 160"/>
-          <p:cNvSpPr/>
-          <p:nvPr/>
-        </p:nvSpPr>
-        <p:spPr>
-          <a:xfrm>
-            <a:off x="5505450" y="4505325"/>
+              <a:t>더 낼 수 있는데 적게 신고했습니다. 팔 수 있는 양을 못 팔았습니다.</a:t>
+            </a:r>
+            <a:endParaRPr lang="en-US" sz="938" dirty="0"/>
+          </a:p>
+        </p:txBody>
+      </p:sp>
+      <p:sp>
+        <p:nvSpPr>
+          <p:cNvPr id="178" name="Shape 176"/>
+          <p:cNvSpPr/>
+          <p:nvPr/>
+        </p:nvSpPr>
+        <p:spPr>
+          <a:xfrm>
+            <a:off x="5505450" y="5172075"/>
             <a:ext cx="38100" cy="247650"/>
           </a:xfrm>
           <a:prstGeom prst="rect">
             <a:avLst/>
           </a:prstGeom>
           <a:solidFill>
-            <a:srgbClr val="A8BCD1"/>
-          </a:solidFill>
-          <a:ln/>
-        </p:spPr>
-      </p:sp>
-      <p:sp>
-        <p:nvSpPr>
-          <p:cNvPr id="163" name="Text 161"/>
-          <p:cNvSpPr txBox="1"/>
-          <p:nvPr/>
-        </p:nvSpPr>
-        <p:spPr>
-          <a:xfrm>
-            <a:off x="5638800" y="4476750"/>
-            <a:ext cx="514350" cy="185738"/>
+            <a:srgbClr val="FF4D63"/>
+          </a:solidFill>
+          <a:ln/>
+        </p:spPr>
+      </p:sp>
+      <p:sp>
+        <p:nvSpPr>
+          <p:cNvPr id="179" name="Text 177"/>
+          <p:cNvSpPr txBox="1"/>
+          <p:nvPr/>
+        </p:nvSpPr>
+        <p:spPr>
+          <a:xfrm>
+            <a:off x="5638800" y="5143500"/>
+            <a:ext cx="514350" cy="179546"/>
           </a:xfrm>
           <a:prstGeom prst="rect">
             <a:avLst/>
@@ -9415,35 +10081,35 @@
           <a:p>
             <a:pPr algn="l" indent="0" marL="0">
               <a:lnSpc>
-                <a:spcPts val="1463"/>
-              </a:lnSpc>
-              <a:buNone/>
-            </a:pPr>
-            <a:r>
-              <a:rPr lang="en-US" sz="1125" b="1" dirty="0">
-                <a:solidFill>
-                  <a:srgbClr val="A8BCD1"/>
+                <a:spcPts val="1414"/>
+              </a:lnSpc>
+              <a:buNone/>
+            </a:pPr>
+            <a:r>
+              <a:rPr lang="en-US" sz="1088" b="1" dirty="0">
+                <a:solidFill>
+                  <a:srgbClr val="FF4D63"/>
                 </a:solidFill>
                 <a:latin typeface="Malgun Gothic" pitchFamily="34" charset="0"/>
                 <a:ea typeface="Malgun Gothic" pitchFamily="34" charset="-122"/>
                 <a:cs typeface="Malgun Gothic" pitchFamily="34" charset="-120"/>
               </a:rPr>
-              <a:t>겨울</a:t>
-            </a:r>
-            <a:endParaRPr lang="en-US" sz="1125" dirty="0"/>
-          </a:p>
-        </p:txBody>
-      </p:sp>
-      <p:sp>
-        <p:nvSpPr>
-          <p:cNvPr id="164" name="Text 162"/>
-          <p:cNvSpPr txBox="1"/>
-          <p:nvPr/>
-        </p:nvSpPr>
-        <p:spPr>
-          <a:xfrm>
-            <a:off x="6229350" y="4486275"/>
-            <a:ext cx="4895850" cy="359092"/>
+              <a:t>여름</a:t>
+            </a:r>
+            <a:endParaRPr lang="en-US" sz="1088" dirty="0"/>
+          </a:p>
+        </p:txBody>
+      </p:sp>
+      <p:sp>
+        <p:nvSpPr>
+          <p:cNvPr id="180" name="Text 178"/>
+          <p:cNvSpPr txBox="1"/>
+          <p:nvPr/>
+        </p:nvSpPr>
+        <p:spPr>
+          <a:xfrm>
+            <a:off x="6210300" y="5153025"/>
+            <a:ext cx="4914900" cy="345281"/>
           </a:xfrm>
           <a:prstGeom prst="rect">
             <a:avLst/>
@@ -9457,12 +10123,12 @@
           <a:p>
             <a:pPr algn="l" indent="0" marL="0">
               <a:lnSpc>
-                <a:spcPts val="1414"/>
-              </a:lnSpc>
-              <a:buNone/>
-            </a:pPr>
-            <a:r>
-              <a:rPr lang="en-US" sz="975" dirty="0">
+                <a:spcPts val="1359"/>
+              </a:lnSpc>
+              <a:buNone/>
+            </a:pPr>
+            <a:r>
+              <a:rPr lang="en-US" sz="938" dirty="0">
                 <a:solidFill>
                   <a:srgbClr val="CFCBC2"/>
                 </a:solidFill>
@@ -9470,42 +10136,42 @@
                 <a:ea typeface="Malgun Gothic" pitchFamily="34" charset="-122"/>
                 <a:cs typeface="Malgun Gothic" pitchFamily="34" charset="-120"/>
               </a:rPr>
-              <a:t>더 낼 수 있는데 적게 신고했습니다. 팔 수 있는 양을 못 팔았습니다.</a:t>
-            </a:r>
-            <a:endParaRPr lang="en-US" sz="975" dirty="0"/>
-          </a:p>
-        </p:txBody>
-      </p:sp>
-      <p:sp>
-        <p:nvSpPr>
-          <p:cNvPr id="165" name="Shape 163"/>
-          <p:cNvSpPr/>
-          <p:nvPr/>
-        </p:nvSpPr>
-        <p:spPr>
-          <a:xfrm>
-            <a:off x="5505450" y="4981575"/>
+              <a:t>못 내는데 많이 신고했습니다. 신고값을 못 채우면 정산에서 불이익을 받습니다.</a:t>
+            </a:r>
+            <a:endParaRPr lang="en-US" sz="938" dirty="0"/>
+          </a:p>
+        </p:txBody>
+      </p:sp>
+      <p:sp>
+        <p:nvSpPr>
+          <p:cNvPr id="181" name="Shape 179"/>
+          <p:cNvSpPr/>
+          <p:nvPr/>
+        </p:nvSpPr>
+        <p:spPr>
+          <a:xfrm>
+            <a:off x="5505450" y="5591175"/>
             <a:ext cx="38100" cy="247650"/>
           </a:xfrm>
           <a:prstGeom prst="rect">
             <a:avLst/>
           </a:prstGeom>
           <a:solidFill>
-            <a:srgbClr val="FF4D63"/>
-          </a:solidFill>
-          <a:ln/>
-        </p:spPr>
-      </p:sp>
-      <p:sp>
-        <p:nvSpPr>
-          <p:cNvPr id="166" name="Text 164"/>
-          <p:cNvSpPr txBox="1"/>
-          <p:nvPr/>
-        </p:nvSpPr>
-        <p:spPr>
-          <a:xfrm>
-            <a:off x="5638800" y="4953000"/>
-            <a:ext cx="514350" cy="185738"/>
+            <a:srgbClr val="EFB13C"/>
+          </a:solidFill>
+          <a:ln/>
+        </p:spPr>
+      </p:sp>
+      <p:sp>
+        <p:nvSpPr>
+          <p:cNvPr id="182" name="Text 180"/>
+          <p:cNvSpPr txBox="1"/>
+          <p:nvPr/>
+        </p:nvSpPr>
+        <p:spPr>
+          <a:xfrm>
+            <a:off x="5638800" y="5562600"/>
+            <a:ext cx="514350" cy="179546"/>
           </a:xfrm>
           <a:prstGeom prst="rect">
             <a:avLst/>
@@ -9519,35 +10185,35 @@
           <a:p>
             <a:pPr algn="l" indent="0" marL="0">
               <a:lnSpc>
-                <a:spcPts val="1463"/>
-              </a:lnSpc>
-              <a:buNone/>
-            </a:pPr>
-            <a:r>
-              <a:rPr lang="en-US" sz="1125" b="1" dirty="0">
-                <a:solidFill>
-                  <a:srgbClr val="FF4D63"/>
+                <a:spcPts val="1414"/>
+              </a:lnSpc>
+              <a:buNone/>
+            </a:pPr>
+            <a:r>
+              <a:rPr lang="en-US" sz="1088" b="1" dirty="0">
+                <a:solidFill>
+                  <a:srgbClr val="EFB13C"/>
                 </a:solidFill>
                 <a:latin typeface="Malgun Gothic" pitchFamily="34" charset="0"/>
                 <a:ea typeface="Malgun Gothic" pitchFamily="34" charset="-122"/>
                 <a:cs typeface="Malgun Gothic" pitchFamily="34" charset="-120"/>
               </a:rPr>
-              <a:t>여름</a:t>
-            </a:r>
-            <a:endParaRPr lang="en-US" sz="1125" dirty="0"/>
-          </a:p>
-        </p:txBody>
-      </p:sp>
-      <p:sp>
-        <p:nvSpPr>
-          <p:cNvPr id="167" name="Text 165"/>
-          <p:cNvSpPr txBox="1"/>
-          <p:nvPr/>
-        </p:nvSpPr>
-        <p:spPr>
-          <a:xfrm>
-            <a:off x="6229350" y="4962525"/>
-            <a:ext cx="4895850" cy="359092"/>
+              <a:t>결과</a:t>
+            </a:r>
+            <a:endParaRPr lang="en-US" sz="1088" dirty="0"/>
+          </a:p>
+        </p:txBody>
+      </p:sp>
+      <p:sp>
+        <p:nvSpPr>
+          <p:cNvPr id="183" name="Text 181"/>
+          <p:cNvSpPr txBox="1"/>
+          <p:nvPr/>
+        </p:nvSpPr>
+        <p:spPr>
+          <a:xfrm>
+            <a:off x="6210300" y="5572125"/>
+            <a:ext cx="4914900" cy="345281"/>
           </a:xfrm>
           <a:prstGeom prst="rect">
             <a:avLst/>
@@ -9561,12 +10227,12 @@
           <a:p>
             <a:pPr algn="l" indent="0" marL="0">
               <a:lnSpc>
-                <a:spcPts val="1414"/>
-              </a:lnSpc>
-              <a:buNone/>
-            </a:pPr>
-            <a:r>
-              <a:rPr lang="en-US" sz="975" dirty="0">
+                <a:spcPts val="1359"/>
+              </a:lnSpc>
+              <a:buNone/>
+            </a:pPr>
+            <a:r>
+              <a:rPr lang="en-US" sz="938" dirty="0">
                 <a:solidFill>
                   <a:srgbClr val="CFCBC2"/>
                 </a:solidFill>
@@ -9574,119 +10240,15 @@
                 <a:ea typeface="Malgun Gothic" pitchFamily="34" charset="-122"/>
                 <a:cs typeface="Malgun Gothic" pitchFamily="34" charset="-120"/>
               </a:rPr>
-              <a:t>못 내는데 많이 신고했습니다. 신고값을 못 채우면 정산에서 불이익을 받습니다.</a:t>
-            </a:r>
-            <a:endParaRPr lang="en-US" sz="975" dirty="0"/>
-          </a:p>
-        </p:txBody>
-      </p:sp>
-      <p:sp>
-        <p:nvSpPr>
-          <p:cNvPr id="168" name="Shape 166"/>
-          <p:cNvSpPr/>
-          <p:nvPr/>
-        </p:nvSpPr>
-        <p:spPr>
-          <a:xfrm>
-            <a:off x="5505450" y="5457825"/>
-            <a:ext cx="38100" cy="247650"/>
-          </a:xfrm>
-          <a:prstGeom prst="rect">
-            <a:avLst/>
-          </a:prstGeom>
-          <a:solidFill>
-            <a:srgbClr val="EFB13C"/>
-          </a:solidFill>
-          <a:ln/>
-        </p:spPr>
-      </p:sp>
-      <p:sp>
-        <p:nvSpPr>
-          <p:cNvPr id="169" name="Text 167"/>
-          <p:cNvSpPr txBox="1"/>
-          <p:nvPr/>
-        </p:nvSpPr>
-        <p:spPr>
-          <a:xfrm>
-            <a:off x="5638800" y="5429250"/>
-            <a:ext cx="514350" cy="185738"/>
-          </a:xfrm>
-          <a:prstGeom prst="rect">
-            <a:avLst/>
-          </a:prstGeom>
-          <a:noFill/>
-          <a:ln/>
-        </p:spPr>
-        <p:txBody>
-          <a:bodyPr wrap="square" lIns="0" tIns="0" rIns="0" bIns="0" rtlCol="0" anchor="t"/>
-          <a:lstStyle/>
-          <a:p>
-            <a:pPr algn="l" indent="0" marL="0">
-              <a:lnSpc>
-                <a:spcPts val="1463"/>
-              </a:lnSpc>
-              <a:buNone/>
-            </a:pPr>
-            <a:r>
-              <a:rPr lang="en-US" sz="1125" b="1" dirty="0">
-                <a:solidFill>
-                  <a:srgbClr val="EFB13C"/>
-                </a:solidFill>
-                <a:latin typeface="Malgun Gothic" pitchFamily="34" charset="0"/>
-                <a:ea typeface="Malgun Gothic" pitchFamily="34" charset="-122"/>
-                <a:cs typeface="Malgun Gothic" pitchFamily="34" charset="-120"/>
-              </a:rPr>
-              <a:t>결과</a:t>
-            </a:r>
-            <a:endParaRPr lang="en-US" sz="1125" dirty="0"/>
-          </a:p>
-        </p:txBody>
-      </p:sp>
-      <p:sp>
-        <p:nvSpPr>
-          <p:cNvPr id="170" name="Text 168"/>
-          <p:cNvSpPr txBox="1"/>
-          <p:nvPr/>
-        </p:nvSpPr>
-        <p:spPr>
-          <a:xfrm>
-            <a:off x="6229350" y="5438775"/>
-            <a:ext cx="4895850" cy="359092"/>
-          </a:xfrm>
-          <a:prstGeom prst="rect">
-            <a:avLst/>
-          </a:prstGeom>
-          <a:noFill/>
-          <a:ln/>
-        </p:spPr>
-        <p:txBody>
-          <a:bodyPr wrap="square" lIns="0" tIns="0" rIns="0" bIns="0" rtlCol="0" anchor="t"/>
-          <a:lstStyle/>
-          <a:p>
-            <a:pPr algn="l" indent="0" marL="0">
-              <a:lnSpc>
-                <a:spcPts val="1414"/>
-              </a:lnSpc>
-              <a:buNone/>
-            </a:pPr>
-            <a:r>
-              <a:rPr lang="en-US" sz="975" dirty="0">
-                <a:solidFill>
-                  <a:srgbClr val="CFCBC2"/>
-                </a:solidFill>
-                <a:latin typeface="Malgun Gothic" pitchFamily="34" charset="0"/>
-                <a:ea typeface="Malgun Gothic" pitchFamily="34" charset="-122"/>
-                <a:cs typeface="Malgun Gothic" pitchFamily="34" charset="-120"/>
-              </a:rPr>
               <a:t>시험 40회 가운데 15회가 신고값을 못 채웠고, 가장 크게 어긋난 날은 10.8 MW 였습니다.</a:t>
             </a:r>
-            <a:endParaRPr lang="en-US" sz="975" dirty="0"/>
-          </a:p>
-        </p:txBody>
-      </p:sp>
-      <p:sp>
-        <p:nvSpPr>
-          <p:cNvPr id="171" name="Shape 169"/>
+            <a:endParaRPr lang="en-US" sz="938" dirty="0"/>
+          </a:p>
+        </p:txBody>
+      </p:sp>
+      <p:sp>
+        <p:nvSpPr>
+          <p:cNvPr id="184" name="Shape 182"/>
           <p:cNvSpPr/>
           <p:nvPr/>
         </p:nvSpPr>
@@ -9709,7 +10271,7 @@
       </p:sp>
       <p:sp>
         <p:nvSpPr>
-          <p:cNvPr id="172" name="Text 170"/>
+          <p:cNvPr id="185" name="Text 183"/>
           <p:cNvSpPr txBox="1"/>
           <p:nvPr/>
         </p:nvSpPr>
@@ -9751,7 +10313,7 @@
       </p:sp>
       <p:sp>
         <p:nvSpPr>
-          <p:cNvPr id="173" name="Text 171"/>
+          <p:cNvPr id="186" name="Text 184"/>
           <p:cNvSpPr txBox="1"/>
           <p:nvPr/>
         </p:nvSpPr>
@@ -9785,7 +10347,7 @@
                 <a:ea typeface="Malgun Gothic" pitchFamily="34" charset="-122"/>
                 <a:cs typeface="Malgun Gothic" pitchFamily="34" charset="-120"/>
               </a:rPr>
-              <a:t>온도마다 다른 것을 하나로 맞추려니 맞을 수가 없었습니다.</a:t>
+              <a:t>절차는 번거롭고, 온도마다 다른 것을 하나로 맞추려니 맞을 수가 없었습니다.</a:t>
             </a:r>
             <a:endParaRPr lang="en-US" sz="1238" dirty="0"/>
           </a:p>

--- a/docs/ppt/위례_공급가능용량_최종발표_v3.pptx
+++ b/docs/ppt/위례_공급가능용량_최종발표_v3.pptx
@@ -2957,7 +2957,7 @@
                 <a:ea typeface="Malgun Gothic" pitchFamily="34" charset="-122"/>
                 <a:cs typeface="Malgun Gothic" pitchFamily="34" charset="-120"/>
               </a:rPr>
-              <a:t>사람이 다시 계산하지 않습니다. 시험 결과를 넣으면 곡선이 스스로 다시 배웁니다.</a:t>
+              <a:t>사람이 다시 계산하지 않습니다. 시험 결과를 넣으면 도구가 스스로 다시 배웁니다.</a:t>
             </a:r>
             <a:endParaRPr lang="en-US" sz="1350" dirty="0"/>
           </a:p>
@@ -4253,7 +4253,7 @@
                 <a:ea typeface="Malgun Gothic" pitchFamily="34" charset="-122"/>
                 <a:cs typeface="Malgun Gothic" pitchFamily="34" charset="-120"/>
               </a:rPr>
-              <a:t>앞에서 결론을 뒤집게 만든 그 회차입니다.</a:t>
+              <a:t>결론을 뒤집게 만든 그 시험입니다.</a:t>
             </a:r>
             <a:endParaRPr lang="en-US" sz="863" dirty="0"/>
           </a:p>
@@ -4399,7 +4399,7 @@
                 <a:ea typeface="Malgun Gothic" pitchFamily="34" charset="-122"/>
                 <a:cs typeface="Malgun Gothic" pitchFamily="34" charset="-120"/>
               </a:rPr>
-              <a:t>배우지 않은 구간을 멋대로 늘려 쓰지 않습니다.</a:t>
+              <a:t>배우지 않은 구간은 늘려 쓰지 않습니다.</a:t>
             </a:r>
             <a:endParaRPr lang="en-US" sz="863" dirty="0"/>
           </a:p>
@@ -4990,7 +4990,7 @@
                 <a:ea typeface="Malgun Gothic" pitchFamily="34" charset="-122"/>
                 <a:cs typeface="Malgun Gothic" pitchFamily="34" charset="-120"/>
               </a:rPr>
-              <a:t>시험은 계속합니다. 회차가 쌓이면 예측은 더 정확해집니다. 이미 그러고 있습니다.</a:t>
+              <a:t>시험은 계속합니다. 쌓이면 더 정확해집니다. 이미 그러고 있습니다.</a:t>
             </a:r>
             <a:endParaRPr lang="en-US" sz="1350" dirty="0"/>
           </a:p>
@@ -5727,7 +5727,7 @@
                 <a:ea typeface="Malgun Gothic" pitchFamily="34" charset="-122"/>
                 <a:cs typeface="Malgun Gothic" pitchFamily="34" charset="-120"/>
               </a:rPr>
-              <a:t>처음 구간 2.26 에서 1.19 로 47% 줄었습니다. 시험이 늘어난 것 말고 바뀐 것은 없습니다.</a:t>
+              <a:t>시험이 늘어난 것 말고 바뀐 것은 없습니다.</a:t>
             </a:r>
             <a:endParaRPr lang="en-US" sz="975" dirty="0"/>
           </a:p>
@@ -5769,7 +5769,7 @@
                 <a:ea typeface="Malgun Gothic" pitchFamily="34" charset="-122"/>
                 <a:cs typeface="Malgun Gothic" pitchFamily="34" charset="-120"/>
               </a:rPr>
-              <a:t>마지막 구간이 그 앞보다 조금 올라간 것은 겨울 회차가 적게 섞인 탓입니다. 있는 대로 적었습니다.</a:t>
+              <a:t>마지막 구간이 조금 올라간 것은 겨울 시험이 적게 섞인 탓입니다. 있는 대로 적었습니다.</a:t>
             </a:r>
             <a:endParaRPr lang="en-US" sz="863" dirty="0"/>
           </a:p>
@@ -6067,7 +6067,7 @@
                 <a:ea typeface="Malgun Gothic" pitchFamily="34" charset="-122"/>
                 <a:cs typeface="Malgun Gothic" pitchFamily="34" charset="-120"/>
               </a:rPr>
-              <a:t>2주마다 시험하고 그 결과를 도구에 넣습니다. 회차가 쌓이는 만큼 곡선이 좋아집니다.</a:t>
+              <a:t>2주마다 시험하고 결과를 도구에 넣습니다.</a:t>
             </a:r>
             <a:endParaRPr lang="en-US" sz="938" dirty="0"/>
           </a:p>
@@ -6216,7 +6216,7 @@
                 <a:ea typeface="Malgun Gothic" pitchFamily="34" charset="-122"/>
                 <a:cs typeface="Malgun Gothic" pitchFamily="34" charset="-120"/>
               </a:rPr>
-              <a:t>계산식은 손대지 않았으니 그대로 옮겨 쓸 수 있습니다. 그 사업소의 시험 결과만 따로 쌓으면 됩니다.</a:t>
+              <a:t>계산식을 손대지 않았으니 그대로 옮길 수 있습니다.</a:t>
             </a:r>
             <a:endParaRPr lang="en-US" sz="938" dirty="0"/>
           </a:p>
@@ -6472,7 +6472,7 @@
                 <a:ea typeface="Malgun Gothic" pitchFamily="34" charset="-122"/>
                 <a:cs typeface="Malgun Gothic" pitchFamily="34" charset="-120"/>
               </a:rPr>
-              <a:t>한 번 만들고 끝나는 도구가 아니라, 쓸수록 나아지는 도구입니다.</a:t>
+              <a:t>한 번 만들고 끝나는 도구가 아닙니다. 쓸수록 나아집니다.</a:t>
             </a:r>
             <a:endParaRPr lang="en-US" sz="1238" dirty="0"/>
           </a:p>
@@ -11809,7 +11809,7 @@
                 <a:ea typeface="Malgun Gothic" pitchFamily="34" charset="-122"/>
                 <a:cs typeface="Malgun Gothic" pitchFamily="34" charset="-120"/>
               </a:rPr>
-              <a:t>발전소는 전기를 만들어 팝니다. 팔기 전에 얼마나 낼 수 있는지 미리 알려 줘야 합니다.</a:t>
+              <a:t>발전소는 전기를 만들어 팝니다. 팔기 전에 얼마나 낼 수 있는지 미리 알려야 합니다.</a:t>
             </a:r>
             <a:endParaRPr lang="en-US" sz="1350" dirty="0"/>
           </a:p>
@@ -12233,7 +12233,7 @@
                 <a:ea typeface="Malgun Gothic" pitchFamily="34" charset="-122"/>
                 <a:cs typeface="Malgun Gothic" pitchFamily="34" charset="-120"/>
               </a:rPr>
-              <a:t>얼마나 낼 수 있다고 알린다</a:t>
+              <a:t>얼마나 낼 수 있는지 알린다</a:t>
             </a:r>
             <a:endParaRPr lang="en-US" sz="1088" dirty="0"/>
           </a:p>
@@ -12275,7 +12275,7 @@
                 <a:ea typeface="Malgun Gothic" pitchFamily="34" charset="-122"/>
                 <a:cs typeface="Malgun Gothic" pitchFamily="34" charset="-120"/>
               </a:rPr>
-              <a:t>하루 전에 숫자를 냅니다.</a:t>
+              <a:t>하루 전에 알립니다.</a:t>
             </a:r>
             <a:endParaRPr lang="en-US" sz="900" dirty="0"/>
           </a:p>
@@ -12401,7 +12401,7 @@
                 <a:ea typeface="Malgun Gothic" pitchFamily="34" charset="-122"/>
                 <a:cs typeface="Malgun Gothic" pitchFamily="34" charset="-120"/>
               </a:rPr>
-              <a:t>그만큼 팔린다</a:t>
+              <a:t>그 숫자로 팔린다</a:t>
             </a:r>
             <a:endParaRPr lang="en-US" sz="1088" dirty="0"/>
           </a:p>
@@ -12443,7 +12443,7 @@
                 <a:ea typeface="Malgun Gothic" pitchFamily="34" charset="-122"/>
                 <a:cs typeface="Malgun Gothic" pitchFamily="34" charset="-120"/>
               </a:rPr>
-              <a:t>알린 숫자가 기준이 됩니다.</a:t>
+              <a:t>알린 만큼만 팔립니다.</a:t>
             </a:r>
             <a:endParaRPr lang="en-US" sz="900" dirty="0"/>
           </a:p>
@@ -13669,26 +13669,26 @@
         <p:spPr>
           <a:xfrm>
             <a:off x="876300" y="3429000"/>
-            <a:ext cx="4914900" cy="193357"/>
-          </a:xfrm>
-          <a:prstGeom prst="rect">
-            <a:avLst/>
-          </a:prstGeom>
-          <a:noFill/>
-          <a:ln/>
-        </p:spPr>
-        <p:txBody>
-          <a:bodyPr wrap="square" lIns="0" tIns="0" rIns="0" bIns="0" rtlCol="0" anchor="t"/>
-          <a:lstStyle/>
-          <a:p>
-            <a:pPr algn="l" indent="0" marL="0">
-              <a:lnSpc>
-                <a:spcPts val="1522"/>
-              </a:lnSpc>
-              <a:buNone/>
-            </a:pPr>
-            <a:r>
-              <a:rPr lang="en-US" sz="1088" dirty="0">
+            <a:ext cx="4914900" cy="206693"/>
+          </a:xfrm>
+          <a:prstGeom prst="rect">
+            <a:avLst/>
+          </a:prstGeom>
+          <a:noFill/>
+          <a:ln/>
+        </p:spPr>
+        <p:txBody>
+          <a:bodyPr wrap="square" lIns="0" tIns="0" rIns="0" bIns="0" rtlCol="0" anchor="t"/>
+          <a:lstStyle/>
+          <a:p>
+            <a:pPr algn="l" indent="0" marL="0">
+              <a:lnSpc>
+                <a:spcPts val="1627"/>
+              </a:lnSpc>
+              <a:buNone/>
+            </a:pPr>
+            <a:r>
+              <a:rPr lang="en-US" sz="1163" dirty="0">
                 <a:solidFill>
                   <a:srgbClr val="CFCBC2"/>
                 </a:solidFill>
@@ -13696,9 +13696,9 @@
                 <a:ea typeface="Malgun Gothic" pitchFamily="34" charset="-122"/>
                 <a:cs typeface="Malgun Gothic" pitchFamily="34" charset="-120"/>
               </a:rPr>
-              <a:t>추운 날은 많이 낼 수 있고, 더운 날은 적게 낼 수 있습니다.</a:t>
-            </a:r>
-            <a:endParaRPr lang="en-US" sz="1088" dirty="0"/>
+              <a:t>추우면 많이 나옵니다. 더우면 적게 나옵니다.</a:t>
+            </a:r>
+            <a:endParaRPr lang="en-US" sz="1163" dirty="0"/>
           </a:p>
         </p:txBody>
       </p:sp>
@@ -13711,26 +13711,26 @@
         <p:spPr>
           <a:xfrm>
             <a:off x="876300" y="5353050"/>
-            <a:ext cx="4914900" cy="166688"/>
-          </a:xfrm>
-          <a:prstGeom prst="rect">
-            <a:avLst/>
-          </a:prstGeom>
-          <a:noFill/>
-          <a:ln/>
-        </p:spPr>
-        <p:txBody>
-          <a:bodyPr wrap="square" lIns="0" tIns="0" rIns="0" bIns="0" rtlCol="0" anchor="t"/>
-          <a:lstStyle/>
-          <a:p>
-            <a:pPr algn="l" indent="0" marL="0">
-              <a:lnSpc>
-                <a:spcPts val="1313"/>
-              </a:lnSpc>
-              <a:buNone/>
-            </a:pPr>
-            <a:r>
-              <a:rPr lang="en-US" sz="938" dirty="0">
+            <a:ext cx="4914900" cy="173355"/>
+          </a:xfrm>
+          <a:prstGeom prst="rect">
+            <a:avLst/>
+          </a:prstGeom>
+          <a:noFill/>
+          <a:ln/>
+        </p:spPr>
+        <p:txBody>
+          <a:bodyPr wrap="square" lIns="0" tIns="0" rIns="0" bIns="0" rtlCol="0" anchor="t"/>
+          <a:lstStyle/>
+          <a:p>
+            <a:pPr algn="l" indent="0" marL="0">
+              <a:lnSpc>
+                <a:spcPts val="1365"/>
+              </a:lnSpc>
+              <a:buNone/>
+            </a:pPr>
+            <a:r>
+              <a:rPr lang="en-US" sz="975" dirty="0">
                 <a:solidFill>
                   <a:srgbClr val="A9A79F"/>
                 </a:solidFill>
@@ -13738,9 +13738,9 @@
                 <a:ea typeface="Malgun Gothic" pitchFamily="34" charset="-122"/>
                 <a:cs typeface="Malgun Gothic" pitchFamily="34" charset="-120"/>
               </a:rPr>
-              <a:t>그래서 하나의 숫자로는 안 되고, 온도마다 따로 알려 줘야 합니다.</a:t>
-            </a:r>
-            <a:endParaRPr lang="en-US" sz="938" dirty="0"/>
+              <a:t>그래서 온도마다 숫자가 다릅니다.</a:t>
+            </a:r>
+            <a:endParaRPr lang="en-US" sz="975" dirty="0"/>
           </a:p>
         </p:txBody>
       </p:sp>
@@ -13967,26 +13967,26 @@
         <p:spPr>
           <a:xfrm>
             <a:off x="6324600" y="3429000"/>
-            <a:ext cx="4991100" cy="193357"/>
-          </a:xfrm>
-          <a:prstGeom prst="rect">
-            <a:avLst/>
-          </a:prstGeom>
-          <a:noFill/>
-          <a:ln/>
-        </p:spPr>
-        <p:txBody>
-          <a:bodyPr wrap="square" lIns="0" tIns="0" rIns="0" bIns="0" rtlCol="0" anchor="t"/>
-          <a:lstStyle/>
-          <a:p>
-            <a:pPr algn="l" indent="0" marL="0">
-              <a:lnSpc>
-                <a:spcPts val="1522"/>
-              </a:lnSpc>
-              <a:buNone/>
-            </a:pPr>
-            <a:r>
-              <a:rPr lang="en-US" sz="1088" dirty="0">
+            <a:ext cx="4991100" cy="206693"/>
+          </a:xfrm>
+          <a:prstGeom prst="rect">
+            <a:avLst/>
+          </a:prstGeom>
+          <a:noFill/>
+          <a:ln/>
+        </p:spPr>
+        <p:txBody>
+          <a:bodyPr wrap="square" lIns="0" tIns="0" rIns="0" bIns="0" rtlCol="0" anchor="t"/>
+          <a:lstStyle/>
+          <a:p>
+            <a:pPr algn="l" indent="0" marL="0">
+              <a:lnSpc>
+                <a:spcPts val="1627"/>
+              </a:lnSpc>
+              <a:buNone/>
+            </a:pPr>
+            <a:r>
+              <a:rPr lang="en-US" sz="1163" dirty="0">
                 <a:solidFill>
                   <a:srgbClr val="CFCBC2"/>
                 </a:solidFill>
@@ -13994,9 +13994,9 @@
                 <a:ea typeface="Malgun Gothic" pitchFamily="34" charset="-122"/>
                 <a:cs typeface="Malgun Gothic" pitchFamily="34" charset="-120"/>
               </a:rPr>
-              <a:t>미리 알린 숫자와 실제가 어긋나면 두 가지로 손해가 납니다.</a:t>
-            </a:r>
-            <a:endParaRPr lang="en-US" sz="1088" dirty="0"/>
+              <a:t>알린 숫자가 실제와 어긋나면 손해가 납니다.</a:t>
+            </a:r>
+            <a:endParaRPr lang="en-US" sz="1163" dirty="0"/>
           </a:p>
         </p:txBody>
       </p:sp>
@@ -14120,7 +14120,7 @@
                 <a:ea typeface="Malgun Gothic" pitchFamily="34" charset="-122"/>
                 <a:cs typeface="Malgun Gothic" pitchFamily="34" charset="-120"/>
               </a:rPr>
-              <a:t>알린 만큼 못 내면 벌칙을 받습니다.</a:t>
+              <a:t>벌칙을 받습니다.</a:t>
             </a:r>
             <a:endParaRPr lang="en-US" sz="975" dirty="0"/>
           </a:p>
@@ -14246,7 +14246,7 @@
                 <a:ea typeface="Malgun Gothic" pitchFamily="34" charset="-122"/>
                 <a:cs typeface="Malgun Gothic" pitchFamily="34" charset="-120"/>
               </a:rPr>
-              <a:t>팔 수 있는 양을 못 팔았습니다.</a:t>
+              <a:t>팔 기회를 놓칩니다.</a:t>
             </a:r>
             <a:endParaRPr lang="en-US" sz="975" dirty="0"/>
           </a:p>
@@ -14261,26 +14261,26 @@
         <p:spPr>
           <a:xfrm>
             <a:off x="6324600" y="5715000"/>
-            <a:ext cx="4991100" cy="154781"/>
-          </a:xfrm>
-          <a:prstGeom prst="rect">
-            <a:avLst/>
-          </a:prstGeom>
-          <a:noFill/>
-          <a:ln/>
-        </p:spPr>
-        <p:txBody>
-          <a:bodyPr wrap="square" lIns="0" tIns="0" rIns="0" bIns="0" rtlCol="0" anchor="t"/>
-          <a:lstStyle/>
-          <a:p>
-            <a:pPr algn="l" indent="0" marL="0">
-              <a:lnSpc>
-                <a:spcPts val="1219"/>
-              </a:lnSpc>
-              <a:buNone/>
-            </a:pPr>
-            <a:r>
-              <a:rPr lang="en-US" sz="938" dirty="0">
+            <a:ext cx="4991100" cy="160973"/>
+          </a:xfrm>
+          <a:prstGeom prst="rect">
+            <a:avLst/>
+          </a:prstGeom>
+          <a:noFill/>
+          <a:ln/>
+        </p:spPr>
+        <p:txBody>
+          <a:bodyPr wrap="square" lIns="0" tIns="0" rIns="0" bIns="0" rtlCol="0" anchor="t"/>
+          <a:lstStyle/>
+          <a:p>
+            <a:pPr algn="l" indent="0" marL="0">
+              <a:lnSpc>
+                <a:spcPts val="1268"/>
+              </a:lnSpc>
+              <a:buNone/>
+            </a:pPr>
+            <a:r>
+              <a:rPr lang="en-US" sz="975" dirty="0">
                 <a:solidFill>
                   <a:srgbClr val="8A8880"/>
                 </a:solidFill>
@@ -14288,9 +14288,9 @@
                 <a:ea typeface="Malgun Gothic" pitchFamily="34" charset="-122"/>
                 <a:cs typeface="Malgun Gothic" pitchFamily="34" charset="-120"/>
               </a:rPr>
-              <a:t>어느 쪽이든 손해입니다. 그래서 숫자를 잘 맞히는 일이 중요합니다.</a:t>
-            </a:r>
-            <a:endParaRPr lang="en-US" sz="938" dirty="0"/>
+              <a:t>그래서 이 숫자를 잘 맞혀야 합니다.</a:t>
+            </a:r>
+            <a:endParaRPr lang="en-US" sz="975" dirty="0"/>
           </a:p>
         </p:txBody>
       </p:sp>
@@ -14395,7 +14395,7 @@
                 <a:ea typeface="Malgun Gothic" pitchFamily="34" charset="-122"/>
                 <a:cs typeface="Malgun Gothic" pitchFamily="34" charset="-120"/>
               </a:rPr>
-              <a:t>이 과제는 그 숫자를 더 잘 맞히려고 한 일입니다.</a:t>
+              <a:t>이 숫자를 만드는 일을 바꿨습니다.</a:t>
             </a:r>
             <a:endParaRPr lang="en-US" sz="1238" dirty="0"/>
           </a:p>
@@ -14733,7 +14733,7 @@
                 <a:ea typeface="Malgun Gothic" pitchFamily="34" charset="-122"/>
                 <a:cs typeface="Malgun Gothic" pitchFamily="34" charset="-120"/>
               </a:rPr>
-              <a:t>시험 결과를 엑셀 네 개에 차례로 옮겨 담아 알릴 숫자를 만들었습니다.</a:t>
+              <a:t>엑셀 네 개를 차례로 열어야 했습니다. 값은 손으로 옮겼습니다.</a:t>
             </a:r>
             <a:endParaRPr lang="en-US" sz="1350" dirty="0"/>
           </a:p>
@@ -15099,7 +15099,7 @@
                 <a:ea typeface="Malgun Gothic" pitchFamily="34" charset="-122"/>
                 <a:cs typeface="Malgun Gothic" pitchFamily="34" charset="-120"/>
               </a:rPr>
-              <a:t>날짜와 시각을 넣으면 온도와 압력 같은 값 14개를 끌어옵니다.</a:t>
+              <a:t>시험한 날의 계측값을 받아옵니다.</a:t>
             </a:r>
             <a:endParaRPr lang="en-US" sz="863" dirty="0"/>
           </a:p>
@@ -15293,7 +15293,7 @@
                 <a:ea typeface="Malgun Gothic" pitchFamily="34" charset="-122"/>
                 <a:cs typeface="Malgun Gothic" pitchFamily="34" charset="-120"/>
               </a:rPr>
-              <a:t>공기 압력을 넣으면 영하 20도부터 40도까지 61개 값이 나옵니다.</a:t>
+              <a:t>온도별로 계산값이 나옵니다.</a:t>
             </a:r>
             <a:endParaRPr lang="en-US" sz="863" dirty="0"/>
           </a:p>
@@ -15487,7 +15487,7 @@
                 <a:ea typeface="Malgun Gothic" pitchFamily="34" charset="-122"/>
                 <a:cs typeface="Malgun Gothic" pitchFamily="34" charset="-120"/>
               </a:rPr>
-              <a:t>시험한 온도에서 생긴 차이를 61개 값에 모두 더합니다.</a:t>
+              <a:t>시험 결과와의 차이를 더합니다.</a:t>
             </a:r>
             <a:endParaRPr lang="en-US" sz="863" dirty="0"/>
           </a:p>
@@ -15681,7 +15681,7 @@
                 <a:ea typeface="Malgun Gothic" pitchFamily="34" charset="-122"/>
                 <a:cs typeface="Malgun Gothic" pitchFamily="34" charset="-120"/>
               </a:rPr>
-              <a:t>이 표를 그대로 옮겨 붙이면 그날 알릴 숫자가 됩니다.</a:t>
+              <a:t>옮겨 붙이면 끝입니다.</a:t>
             </a:r>
             <a:endParaRPr lang="en-US" sz="863" dirty="0"/>
           </a:p>
@@ -15909,37 +15909,37 @@
         </p:nvSpPr>
         <p:spPr>
           <a:xfrm>
-            <a:off x="914400" y="4191000"/>
-            <a:ext cx="6667500" cy="160973"/>
-          </a:xfrm>
-          <a:prstGeom prst="rect">
-            <a:avLst/>
-          </a:prstGeom>
-          <a:noFill/>
-          <a:ln/>
-        </p:spPr>
-        <p:txBody>
-          <a:bodyPr wrap="square" lIns="0" tIns="0" rIns="0" bIns="0" rtlCol="0" anchor="t"/>
-          <a:lstStyle/>
-          <a:p>
-            <a:pPr algn="l" indent="0" marL="0">
-              <a:lnSpc>
-                <a:spcPts val="1268"/>
-              </a:lnSpc>
-              <a:buNone/>
-            </a:pPr>
-            <a:r>
-              <a:rPr lang="en-US" sz="975" dirty="0">
-                <a:solidFill>
-                  <a:srgbClr val="A9A79F"/>
+            <a:off x="914400" y="4171950"/>
+            <a:ext cx="6667500" cy="173355"/>
+          </a:xfrm>
+          <a:prstGeom prst="rect">
+            <a:avLst/>
+          </a:prstGeom>
+          <a:noFill/>
+          <a:ln/>
+        </p:spPr>
+        <p:txBody>
+          <a:bodyPr wrap="square" lIns="0" tIns="0" rIns="0" bIns="0" rtlCol="0" anchor="t"/>
+          <a:lstStyle/>
+          <a:p>
+            <a:pPr algn="l" indent="0" marL="0">
+              <a:lnSpc>
+                <a:spcPts val="1365"/>
+              </a:lnSpc>
+              <a:buNone/>
+            </a:pPr>
+            <a:r>
+              <a:rPr lang="en-US" sz="1050" dirty="0">
+                <a:solidFill>
+                  <a:srgbClr val="CFCBC2"/>
                 </a:solidFill>
                 <a:latin typeface="Malgun Gothic" pitchFamily="34" charset="0"/>
                 <a:ea typeface="Malgun Gothic" pitchFamily="34" charset="-122"/>
                 <a:cs typeface="Malgun Gothic" pitchFamily="34" charset="-120"/>
               </a:rPr>
-              <a:t>시험한 온도에서 나온 차이 하나를 61개 온도에 모두 같은 크기로 더했습니다.</a:t>
-            </a:r>
-            <a:endParaRPr lang="en-US" sz="975" dirty="0"/>
+              <a:t>시험은 하루에 한 번뿐입니다. 나머지 온도는 시험해 본 적이 없었습니다.</a:t>
+            </a:r>
+            <a:endParaRPr lang="en-US" sz="1050" dirty="0"/>
           </a:p>
         </p:txBody>
       </p:sp>
@@ -17880,7 +17880,7 @@
                 <a:ea typeface="Malgun Gothic" pitchFamily="34" charset="-122"/>
                 <a:cs typeface="Malgun Gothic" pitchFamily="34" charset="-120"/>
               </a:rPr>
-              <a:t>이 온도만 실제로 시험</a:t>
+              <a:t>이 온도만 시험했습니다</a:t>
             </a:r>
             <a:endParaRPr lang="en-US" sz="975" dirty="0"/>
           </a:p>
@@ -17942,7 +17942,7 @@
                 <a:ea typeface="Malgun Gothic" pitchFamily="34" charset="-122"/>
                 <a:cs typeface="Malgun Gothic" pitchFamily="34" charset="-120"/>
               </a:rPr>
-              <a:t>나머지 60개 온도는 시험하지 않고 같은 값</a:t>
+              <a:t>나머지는 같은 값을 썼습니다</a:t>
             </a:r>
             <a:endParaRPr lang="en-US" sz="938" dirty="0"/>
           </a:p>
@@ -18387,7 +18387,7 @@
                 <a:ea typeface="Malgun Gothic" pitchFamily="34" charset="-122"/>
                 <a:cs typeface="Malgun Gothic" pitchFamily="34" charset="-120"/>
               </a:rPr>
-              <a:t>문제는 세 가지였습니다. 절차가 번거롭고, 더하는 값이 하나로 고정되며, 그래서 숫자가 어긋났습니다.</a:t>
+              <a:t>불편한 점이 세 가지 있었습니다.</a:t>
             </a:r>
             <a:endParaRPr lang="en-US" sz="1350" dirty="0"/>
           </a:p>
@@ -23501,7 +23501,7 @@
                 <a:ea typeface="Malgun Gothic" pitchFamily="34" charset="-122"/>
                 <a:cs typeface="Malgun Gothic" pitchFamily="34" charset="-120"/>
               </a:rPr>
-              <a:t>더 낼 수 있는데 적게 알렸습니다. 팔 수 있는 양을 못 팔았습니다.</a:t>
+              <a:t>더 낼 수 있었는데 적게 알렸습니다.</a:t>
             </a:r>
             <a:endParaRPr lang="en-US" sz="938" dirty="0"/>
           </a:p>
@@ -23605,7 +23605,7 @@
                 <a:ea typeface="Malgun Gothic" pitchFamily="34" charset="-122"/>
                 <a:cs typeface="Malgun Gothic" pitchFamily="34" charset="-120"/>
               </a:rPr>
-              <a:t>못 내는데 많이 알렸습니다. 알린 만큼 못 내면 벌칙을 받습니다.</a:t>
+              <a:t>못 내는데 많이 알렸습니다.</a:t>
             </a:r>
             <a:endParaRPr lang="en-US" sz="938" dirty="0"/>
           </a:p>
@@ -23816,7 +23816,7 @@
                 <a:ea typeface="Malgun Gothic" pitchFamily="34" charset="-122"/>
                 <a:cs typeface="Malgun Gothic" pitchFamily="34" charset="-120"/>
               </a:rPr>
-              <a:t>온도마다 다른 것을 하나로 맞추려니 맞을 수가 없었습니다.</a:t>
+              <a:t>하나의 숫자로는 맞출 수가 없었습니다.</a:t>
             </a:r>
             <a:endParaRPr lang="en-US" sz="1238" dirty="0"/>
           </a:p>
@@ -24154,7 +24154,7 @@
                 <a:ea typeface="Malgun Gothic" pitchFamily="34" charset="-122"/>
                 <a:cs typeface="Malgun Gothic" pitchFamily="34" charset="-120"/>
               </a:rPr>
-              <a:t>영향을 줄 만한 것 네 가지를 놓고 하나씩 넣어 봤습니다. 남은 것은 바깥 온도 하나였습니다.</a:t>
+              <a:t>무엇 때문인지 하나씩 확인했습니다. 결국 온도였습니다.</a:t>
             </a:r>
             <a:endParaRPr lang="en-US" sz="1350" dirty="0"/>
           </a:p>
@@ -24432,7 +24432,7 @@
                 <a:ea typeface="Malgun Gothic" pitchFamily="34" charset="-122"/>
                 <a:cs typeface="Malgun Gothic" pitchFamily="34" charset="-120"/>
               </a:rPr>
-              <a:t>바깥 온도</a:t>
+              <a:t>외기 온도</a:t>
             </a:r>
             <a:endParaRPr lang="en-US" sz="1275" dirty="0"/>
           </a:p>
@@ -24516,7 +24516,7 @@
                 <a:ea typeface="Malgun Gothic" pitchFamily="34" charset="-122"/>
                 <a:cs typeface="Malgun Gothic" pitchFamily="34" charset="-120"/>
               </a:rPr>
-              <a:t>이것만으로 거의 다 설명됐습니다.</a:t>
+              <a:t>이것만 보면 됐습니다.</a:t>
             </a:r>
             <a:endParaRPr lang="en-US" sz="900" dirty="0"/>
           </a:p>
@@ -24583,7 +24583,7 @@
                 <a:ea typeface="Malgun Gothic" pitchFamily="34" charset="-122"/>
                 <a:cs typeface="Malgun Gothic" pitchFamily="34" charset="-120"/>
               </a:rPr>
-              <a:t>복수기 진공</a:t>
+              <a:t>복수기 진공도</a:t>
             </a:r>
             <a:endParaRPr lang="en-US" sz="1275" dirty="0"/>
           </a:p>
@@ -24598,7 +24598,7 @@
         <p:spPr>
           <a:xfrm>
             <a:off x="3619500" y="2438400"/>
-            <a:ext cx="1045702" cy="0"/>
+            <a:ext cx="1223820" cy="0"/>
           </a:xfrm>
           <a:prstGeom prst="line">
             <a:avLst/>
@@ -24690,7 +24690,7 @@
                 <a:ea typeface="Malgun Gothic" pitchFamily="34" charset="-122"/>
                 <a:cs typeface="Malgun Gothic" pitchFamily="34" charset="-120"/>
               </a:rPr>
-              <a:t>증기를 식히는 장치의 압력입니다. 온도를 빼면 사라졌습니다.</a:t>
+              <a:t>온도를 빼면 남는 게 없었습니다.</a:t>
             </a:r>
             <a:endParaRPr lang="en-US" sz="900" dirty="0"/>
           </a:p>
@@ -24757,7 +24757,7 @@
                 <a:ea typeface="Malgun Gothic" pitchFamily="34" charset="-122"/>
                 <a:cs typeface="Malgun Gothic" pitchFamily="34" charset="-120"/>
               </a:rPr>
-              <a:t>공기 압력</a:t>
+              <a:t>대기압</a:t>
             </a:r>
             <a:endParaRPr lang="en-US" sz="1275" dirty="0"/>
           </a:p>
@@ -24772,7 +24772,7 @@
         <p:spPr>
           <a:xfrm>
             <a:off x="6267450" y="2438400"/>
-            <a:ext cx="867585" cy="0"/>
+            <a:ext cx="591503" cy="0"/>
           </a:xfrm>
           <a:prstGeom prst="line">
             <a:avLst/>
@@ -24931,7 +24931,7 @@
                 <a:ea typeface="Malgun Gothic" pitchFamily="34" charset="-122"/>
                 <a:cs typeface="Malgun Gothic" pitchFamily="34" charset="-120"/>
               </a:rPr>
-              <a:t>습도</a:t>
+              <a:t>상대 습도</a:t>
             </a:r>
             <a:endParaRPr lang="en-US" sz="1275" dirty="0"/>
           </a:p>
@@ -24946,7 +24946,7 @@
         <p:spPr>
           <a:xfrm>
             <a:off x="8915400" y="2438400"/>
-            <a:ext cx="413385" cy="0"/>
+            <a:ext cx="867585" cy="0"/>
           </a:xfrm>
           <a:prstGeom prst="line">
             <a:avLst/>
@@ -25038,7 +25038,7 @@
                 <a:ea typeface="Malgun Gothic" pitchFamily="34" charset="-122"/>
                 <a:cs typeface="Malgun Gothic" pitchFamily="34" charset="-120"/>
               </a:rPr>
-              <a:t>넣어도 더 잘 맞히지 못했습니다.</a:t>
+              <a:t>넣어도 나아지지 않았습니다.</a:t>
             </a:r>
             <a:endParaRPr lang="en-US" sz="900" dirty="0"/>
           </a:p>
@@ -25252,42 +25252,64 @@
                 <a:ea typeface="Malgun Gothic" pitchFamily="34" charset="-122"/>
                 <a:cs typeface="Malgun Gothic" pitchFamily="34" charset="-120"/>
               </a:rPr>
-              <a:t>여름에 복수기 진공이 나빠지면 전기가 덜 나옵니다. 그럴듯했습니다.</a:t>
+              <a:t>복수기 진공도를 의심했습니다. 여름에 나빠지니 그럴듯했습니다.</a:t>
             </a:r>
             <a:endParaRPr lang="en-US" sz="975" dirty="0"/>
           </a:p>
-          <a:p>
-            <a:pPr algn="l" indent="0" marL="0">
-              <a:lnSpc>
-                <a:spcPts val="1511"/>
-              </a:lnSpc>
-              <a:buNone/>
-            </a:pPr>
-            <a:r>
-              <a:rPr lang="en-US" sz="975" dirty="0">
-                <a:solidFill>
-                  <a:srgbClr val="CFCBC2"/>
+        </p:txBody>
+      </p:sp>
+      <p:sp>
+        <p:nvSpPr>
+          <p:cNvPr id="46" name="Text 44"/>
+          <p:cNvSpPr txBox="1"/>
+          <p:nvPr/>
+        </p:nvSpPr>
+        <p:spPr>
+          <a:xfrm>
+            <a:off x="876300" y="4762500"/>
+            <a:ext cx="647700" cy="154781"/>
+          </a:xfrm>
+          <a:prstGeom prst="rect">
+            <a:avLst/>
+          </a:prstGeom>
+          <a:noFill/>
+          <a:ln/>
+        </p:spPr>
+        <p:txBody>
+          <a:bodyPr wrap="square" lIns="0" tIns="0" rIns="0" bIns="0" rtlCol="0" anchor="t"/>
+          <a:lstStyle/>
+          <a:p>
+            <a:pPr algn="l" indent="0" marL="0">
+              <a:lnSpc>
+                <a:spcPts val="1219"/>
+              </a:lnSpc>
+              <a:buNone/>
+            </a:pPr>
+            <a:r>
+              <a:rPr lang="en-US" sz="938" b="1" dirty="0">
+                <a:solidFill>
+                  <a:srgbClr val="A8BCD1"/>
                 </a:solidFill>
                 <a:latin typeface="Malgun Gothic" pitchFamily="34" charset="0"/>
                 <a:ea typeface="Malgun Gothic" pitchFamily="34" charset="-122"/>
                 <a:cs typeface="Malgun Gothic" pitchFamily="34" charset="-120"/>
               </a:rPr>
-              <a:t>그래서 세 번 다르게 확인했습니다.</a:t>
-            </a:r>
-            <a:endParaRPr lang="en-US" sz="975" dirty="0"/>
-          </a:p>
-        </p:txBody>
-      </p:sp>
-      <p:sp>
-        <p:nvSpPr>
-          <p:cNvPr id="46" name="Text 44"/>
-          <p:cNvSpPr txBox="1"/>
-          <p:nvPr/>
-        </p:nvSpPr>
-        <p:spPr>
-          <a:xfrm>
-            <a:off x="876300" y="4762500"/>
-            <a:ext cx="647700" cy="154781"/>
+              <a:t>첫 번째</a:t>
+            </a:r>
+            <a:endParaRPr lang="en-US" sz="938" dirty="0"/>
+          </a:p>
+        </p:txBody>
+      </p:sp>
+      <p:sp>
+        <p:nvSpPr>
+          <p:cNvPr id="47" name="Text 45"/>
+          <p:cNvSpPr txBox="1"/>
+          <p:nvPr/>
+        </p:nvSpPr>
+        <p:spPr>
+          <a:xfrm>
+            <a:off x="1600200" y="4762500"/>
+            <a:ext cx="2857500" cy="154781"/>
           </a:xfrm>
           <a:prstGeom prst="rect">
             <a:avLst/>
@@ -25306,15 +25328,15 @@
               <a:buNone/>
             </a:pPr>
             <a:r>
-              <a:rPr lang="en-US" sz="938" b="1" dirty="0">
-                <a:solidFill>
-                  <a:srgbClr val="A8BCD1"/>
+              <a:rPr lang="en-US" sz="938" dirty="0">
+                <a:solidFill>
+                  <a:srgbClr val="CFCBC2"/>
                 </a:solidFill>
                 <a:latin typeface="Malgun Gothic" pitchFamily="34" charset="0"/>
                 <a:ea typeface="Malgun Gothic" pitchFamily="34" charset="-122"/>
                 <a:cs typeface="Malgun Gothic" pitchFamily="34" charset="-120"/>
               </a:rPr>
-              <a:t>첫 번째</a:t>
+              <a:t>계절 탓인지 설비 탓인지 갈라 봤습니다.</a:t>
             </a:r>
             <a:endParaRPr lang="en-US" sz="938" dirty="0"/>
           </a:p>
@@ -25322,41 +25344,41 @@
       </p:sp>
       <p:sp>
         <p:nvSpPr>
-          <p:cNvPr id="47" name="Text 45"/>
-          <p:cNvSpPr txBox="1"/>
-          <p:nvPr/>
-        </p:nvSpPr>
-        <p:spPr>
-          <a:xfrm>
-            <a:off x="1600200" y="4762500"/>
-            <a:ext cx="2857500" cy="154781"/>
-          </a:xfrm>
-          <a:prstGeom prst="rect">
-            <a:avLst/>
-          </a:prstGeom>
-          <a:noFill/>
-          <a:ln/>
-        </p:spPr>
-        <p:txBody>
-          <a:bodyPr wrap="square" lIns="0" tIns="0" rIns="0" bIns="0" rtlCol="0" anchor="t"/>
-          <a:lstStyle/>
-          <a:p>
-            <a:pPr algn="l" indent="0" marL="0">
+          <p:cNvPr id="48" name="Text 46"/>
+          <p:cNvSpPr txBox="1"/>
+          <p:nvPr/>
+        </p:nvSpPr>
+        <p:spPr>
+          <a:xfrm>
+            <a:off x="4495800" y="4762500"/>
+            <a:ext cx="1295400" cy="154781"/>
+          </a:xfrm>
+          <a:prstGeom prst="rect">
+            <a:avLst/>
+          </a:prstGeom>
+          <a:noFill/>
+          <a:ln/>
+        </p:spPr>
+        <p:txBody>
+          <a:bodyPr wrap="square" lIns="0" tIns="0" rIns="0" bIns="0" rtlCol="0" anchor="t"/>
+          <a:lstStyle/>
+          <a:p>
+            <a:pPr algn="r" indent="0" marL="0">
               <a:lnSpc>
                 <a:spcPts val="1219"/>
               </a:lnSpc>
               <a:buNone/>
             </a:pPr>
             <a:r>
-              <a:rPr lang="en-US" sz="938" dirty="0">
-                <a:solidFill>
-                  <a:srgbClr val="CFCBC2"/>
+              <a:rPr lang="en-US" sz="938" b="1" dirty="0">
+                <a:solidFill>
+                  <a:srgbClr val="FF4D63"/>
                 </a:solidFill>
                 <a:latin typeface="Malgun Gothic" pitchFamily="34" charset="0"/>
                 <a:ea typeface="Malgun Gothic" pitchFamily="34" charset="-122"/>
                 <a:cs typeface="Malgun Gothic" pitchFamily="34" charset="-120"/>
               </a:rPr>
-              <a:t>계절 탓인지 설비 탓인지 갈라 봤습니다.</a:t>
+              <a:t>아니었습니다</a:t>
             </a:r>
             <a:endParaRPr lang="en-US" sz="938" dirty="0"/>
           </a:p>
@@ -25364,26 +25386,26 @@
       </p:sp>
       <p:sp>
         <p:nvSpPr>
-          <p:cNvPr id="48" name="Text 46"/>
-          <p:cNvSpPr txBox="1"/>
-          <p:nvPr/>
-        </p:nvSpPr>
-        <p:spPr>
-          <a:xfrm>
-            <a:off x="4495800" y="4762500"/>
-            <a:ext cx="1295400" cy="154781"/>
-          </a:xfrm>
-          <a:prstGeom prst="rect">
-            <a:avLst/>
-          </a:prstGeom>
-          <a:noFill/>
-          <a:ln/>
-        </p:spPr>
-        <p:txBody>
-          <a:bodyPr wrap="square" lIns="0" tIns="0" rIns="0" bIns="0" rtlCol="0" anchor="t"/>
-          <a:lstStyle/>
-          <a:p>
-            <a:pPr algn="r" indent="0" marL="0">
+          <p:cNvPr id="49" name="Text 47"/>
+          <p:cNvSpPr txBox="1"/>
+          <p:nvPr/>
+        </p:nvSpPr>
+        <p:spPr>
+          <a:xfrm>
+            <a:off x="876300" y="5086350"/>
+            <a:ext cx="647700" cy="154781"/>
+          </a:xfrm>
+          <a:prstGeom prst="rect">
+            <a:avLst/>
+          </a:prstGeom>
+          <a:noFill/>
+          <a:ln/>
+        </p:spPr>
+        <p:txBody>
+          <a:bodyPr wrap="square" lIns="0" tIns="0" rIns="0" bIns="0" rtlCol="0" anchor="t"/>
+          <a:lstStyle/>
+          <a:p>
+            <a:pPr algn="l" indent="0" marL="0">
               <a:lnSpc>
                 <a:spcPts val="1219"/>
               </a:lnSpc>
@@ -25392,13 +25414,13 @@
             <a:r>
               <a:rPr lang="en-US" sz="938" b="1" dirty="0">
                 <a:solidFill>
-                  <a:srgbClr val="FF4D63"/>
+                  <a:srgbClr val="A8BCD1"/>
                 </a:solidFill>
                 <a:latin typeface="Malgun Gothic" pitchFamily="34" charset="0"/>
                 <a:ea typeface="Malgun Gothic" pitchFamily="34" charset="-122"/>
                 <a:cs typeface="Malgun Gothic" pitchFamily="34" charset="-120"/>
               </a:rPr>
-              <a:t>아니었습니다</a:t>
+              <a:t>두 번째</a:t>
             </a:r>
             <a:endParaRPr lang="en-US" sz="938" dirty="0"/>
           </a:p>
@@ -25406,14 +25428,14 @@
       </p:sp>
       <p:sp>
         <p:nvSpPr>
-          <p:cNvPr id="49" name="Text 47"/>
-          <p:cNvSpPr txBox="1"/>
-          <p:nvPr/>
-        </p:nvSpPr>
-        <p:spPr>
-          <a:xfrm>
-            <a:off x="876300" y="5086350"/>
-            <a:ext cx="647700" cy="154781"/>
+          <p:cNvPr id="50" name="Text 48"/>
+          <p:cNvSpPr txBox="1"/>
+          <p:nvPr/>
+        </p:nvSpPr>
+        <p:spPr>
+          <a:xfrm>
+            <a:off x="1600200" y="5086350"/>
+            <a:ext cx="2857500" cy="154781"/>
           </a:xfrm>
           <a:prstGeom prst="rect">
             <a:avLst/>
@@ -25432,15 +25454,15 @@
               <a:buNone/>
             </a:pPr>
             <a:r>
-              <a:rPr lang="en-US" sz="938" b="1" dirty="0">
-                <a:solidFill>
-                  <a:srgbClr val="A8BCD1"/>
+              <a:rPr lang="en-US" sz="938" dirty="0">
+                <a:solidFill>
+                  <a:srgbClr val="CFCBC2"/>
                 </a:solidFill>
                 <a:latin typeface="Malgun Gothic" pitchFamily="34" charset="0"/>
                 <a:ea typeface="Malgun Gothic" pitchFamily="34" charset="-122"/>
                 <a:cs typeface="Malgun Gothic" pitchFamily="34" charset="-120"/>
               </a:rPr>
-              <a:t>두 번째</a:t>
+              <a:t>연도를 나눠 봤습니다.</a:t>
             </a:r>
             <a:endParaRPr lang="en-US" sz="938" dirty="0"/>
           </a:p>
@@ -25448,41 +25470,41 @@
       </p:sp>
       <p:sp>
         <p:nvSpPr>
-          <p:cNvPr id="50" name="Text 48"/>
-          <p:cNvSpPr txBox="1"/>
-          <p:nvPr/>
-        </p:nvSpPr>
-        <p:spPr>
-          <a:xfrm>
-            <a:off x="1600200" y="5086350"/>
-            <a:ext cx="2857500" cy="154781"/>
-          </a:xfrm>
-          <a:prstGeom prst="rect">
-            <a:avLst/>
-          </a:prstGeom>
-          <a:noFill/>
-          <a:ln/>
-        </p:spPr>
-        <p:txBody>
-          <a:bodyPr wrap="square" lIns="0" tIns="0" rIns="0" bIns="0" rtlCol="0" anchor="t"/>
-          <a:lstStyle/>
-          <a:p>
-            <a:pPr algn="l" indent="0" marL="0">
+          <p:cNvPr id="51" name="Text 49"/>
+          <p:cNvSpPr txBox="1"/>
+          <p:nvPr/>
+        </p:nvSpPr>
+        <p:spPr>
+          <a:xfrm>
+            <a:off x="4495800" y="5086350"/>
+            <a:ext cx="1295400" cy="154781"/>
+          </a:xfrm>
+          <a:prstGeom prst="rect">
+            <a:avLst/>
+          </a:prstGeom>
+          <a:noFill/>
+          <a:ln/>
+        </p:spPr>
+        <p:txBody>
+          <a:bodyPr wrap="square" lIns="0" tIns="0" rIns="0" bIns="0" rtlCol="0" anchor="t"/>
+          <a:lstStyle/>
+          <a:p>
+            <a:pPr algn="r" indent="0" marL="0">
               <a:lnSpc>
                 <a:spcPts val="1219"/>
               </a:lnSpc>
               <a:buNone/>
             </a:pPr>
             <a:r>
-              <a:rPr lang="en-US" sz="938" dirty="0">
-                <a:solidFill>
-                  <a:srgbClr val="CFCBC2"/>
+              <a:rPr lang="en-US" sz="938" b="1" dirty="0">
+                <a:solidFill>
+                  <a:srgbClr val="FF4D63"/>
                 </a:solidFill>
                 <a:latin typeface="Malgun Gothic" pitchFamily="34" charset="0"/>
                 <a:ea typeface="Malgun Gothic" pitchFamily="34" charset="-122"/>
                 <a:cs typeface="Malgun Gothic" pitchFamily="34" charset="-120"/>
               </a:rPr>
-              <a:t>연도를 나눠 봤습니다.</a:t>
+              <a:t>한 해만 그랬습니다</a:t>
             </a:r>
             <a:endParaRPr lang="en-US" sz="938" dirty="0"/>
           </a:p>
@@ -25490,26 +25512,26 @@
       </p:sp>
       <p:sp>
         <p:nvSpPr>
-          <p:cNvPr id="51" name="Text 49"/>
-          <p:cNvSpPr txBox="1"/>
-          <p:nvPr/>
-        </p:nvSpPr>
-        <p:spPr>
-          <a:xfrm>
-            <a:off x="4495800" y="5086350"/>
-            <a:ext cx="1295400" cy="154781"/>
-          </a:xfrm>
-          <a:prstGeom prst="rect">
-            <a:avLst/>
-          </a:prstGeom>
-          <a:noFill/>
-          <a:ln/>
-        </p:spPr>
-        <p:txBody>
-          <a:bodyPr wrap="square" lIns="0" tIns="0" rIns="0" bIns="0" rtlCol="0" anchor="t"/>
-          <a:lstStyle/>
-          <a:p>
-            <a:pPr algn="r" indent="0" marL="0">
+          <p:cNvPr id="52" name="Text 50"/>
+          <p:cNvSpPr txBox="1"/>
+          <p:nvPr/>
+        </p:nvSpPr>
+        <p:spPr>
+          <a:xfrm>
+            <a:off x="876300" y="5410200"/>
+            <a:ext cx="647700" cy="154781"/>
+          </a:xfrm>
+          <a:prstGeom prst="rect">
+            <a:avLst/>
+          </a:prstGeom>
+          <a:noFill/>
+          <a:ln/>
+        </p:spPr>
+        <p:txBody>
+          <a:bodyPr wrap="square" lIns="0" tIns="0" rIns="0" bIns="0" rtlCol="0" anchor="t"/>
+          <a:lstStyle/>
+          <a:p>
+            <a:pPr algn="l" indent="0" marL="0">
               <a:lnSpc>
                 <a:spcPts val="1219"/>
               </a:lnSpc>
@@ -25518,13 +25540,13 @@
             <a:r>
               <a:rPr lang="en-US" sz="938" b="1" dirty="0">
                 <a:solidFill>
-                  <a:srgbClr val="FF4D63"/>
+                  <a:srgbClr val="A8BCD1"/>
                 </a:solidFill>
                 <a:latin typeface="Malgun Gothic" pitchFamily="34" charset="0"/>
                 <a:ea typeface="Malgun Gothic" pitchFamily="34" charset="-122"/>
                 <a:cs typeface="Malgun Gothic" pitchFamily="34" charset="-120"/>
               </a:rPr>
-              <a:t>한 해만 그랬습니다</a:t>
+              <a:t>세 번째</a:t>
             </a:r>
             <a:endParaRPr lang="en-US" sz="938" dirty="0"/>
           </a:p>
@@ -25532,14 +25554,14 @@
       </p:sp>
       <p:sp>
         <p:nvSpPr>
-          <p:cNvPr id="52" name="Text 50"/>
-          <p:cNvSpPr txBox="1"/>
-          <p:nvPr/>
-        </p:nvSpPr>
-        <p:spPr>
-          <a:xfrm>
-            <a:off x="876300" y="5410200"/>
-            <a:ext cx="647700" cy="154781"/>
+          <p:cNvPr id="53" name="Text 51"/>
+          <p:cNvSpPr txBox="1"/>
+          <p:nvPr/>
+        </p:nvSpPr>
+        <p:spPr>
+          <a:xfrm>
+            <a:off x="1600200" y="5410200"/>
+            <a:ext cx="2857500" cy="154781"/>
           </a:xfrm>
           <a:prstGeom prst="rect">
             <a:avLst/>
@@ -25558,15 +25580,15 @@
               <a:buNone/>
             </a:pPr>
             <a:r>
-              <a:rPr lang="en-US" sz="938" b="1" dirty="0">
-                <a:solidFill>
-                  <a:srgbClr val="A8BCD1"/>
+              <a:rPr lang="en-US" sz="938" dirty="0">
+                <a:solidFill>
+                  <a:srgbClr val="CFCBC2"/>
                 </a:solidFill>
                 <a:latin typeface="Malgun Gothic" pitchFamily="34" charset="0"/>
                 <a:ea typeface="Malgun Gothic" pitchFamily="34" charset="-122"/>
                 <a:cs typeface="Malgun Gothic" pitchFamily="34" charset="-120"/>
               </a:rPr>
-              <a:t>세 번째</a:t>
+              <a:t>온도를 걷어내고 다시 봤습니다.</a:t>
             </a:r>
             <a:endParaRPr lang="en-US" sz="938" dirty="0"/>
           </a:p>
@@ -25574,41 +25596,41 @@
       </p:sp>
       <p:sp>
         <p:nvSpPr>
-          <p:cNvPr id="53" name="Text 51"/>
-          <p:cNvSpPr txBox="1"/>
-          <p:nvPr/>
-        </p:nvSpPr>
-        <p:spPr>
-          <a:xfrm>
-            <a:off x="1600200" y="5410200"/>
-            <a:ext cx="2857500" cy="154781"/>
-          </a:xfrm>
-          <a:prstGeom prst="rect">
-            <a:avLst/>
-          </a:prstGeom>
-          <a:noFill/>
-          <a:ln/>
-        </p:spPr>
-        <p:txBody>
-          <a:bodyPr wrap="square" lIns="0" tIns="0" rIns="0" bIns="0" rtlCol="0" anchor="t"/>
-          <a:lstStyle/>
-          <a:p>
-            <a:pPr algn="l" indent="0" marL="0">
+          <p:cNvPr id="54" name="Text 52"/>
+          <p:cNvSpPr txBox="1"/>
+          <p:nvPr/>
+        </p:nvSpPr>
+        <p:spPr>
+          <a:xfrm>
+            <a:off x="4495800" y="5410200"/>
+            <a:ext cx="1295400" cy="154781"/>
+          </a:xfrm>
+          <a:prstGeom prst="rect">
+            <a:avLst/>
+          </a:prstGeom>
+          <a:noFill/>
+          <a:ln/>
+        </p:spPr>
+        <p:txBody>
+          <a:bodyPr wrap="square" lIns="0" tIns="0" rIns="0" bIns="0" rtlCol="0" anchor="t"/>
+          <a:lstStyle/>
+          <a:p>
+            <a:pPr algn="r" indent="0" marL="0">
               <a:lnSpc>
                 <a:spcPts val="1219"/>
               </a:lnSpc>
               <a:buNone/>
             </a:pPr>
             <a:r>
-              <a:rPr lang="en-US" sz="938" dirty="0">
-                <a:solidFill>
-                  <a:srgbClr val="CFCBC2"/>
+              <a:rPr lang="en-US" sz="938" b="1" dirty="0">
+                <a:solidFill>
+                  <a:srgbClr val="FF4D63"/>
                 </a:solidFill>
                 <a:latin typeface="Malgun Gothic" pitchFamily="34" charset="0"/>
                 <a:ea typeface="Malgun Gothic" pitchFamily="34" charset="-122"/>
                 <a:cs typeface="Malgun Gothic" pitchFamily="34" charset="-120"/>
               </a:rPr>
-              <a:t>온도를 걷어내고 다시 봤습니다.</a:t>
+              <a:t>사라졌습니다</a:t>
             </a:r>
             <a:endParaRPr lang="en-US" sz="938" dirty="0"/>
           </a:p>
@@ -25616,85 +25638,43 @@
       </p:sp>
       <p:sp>
         <p:nvSpPr>
-          <p:cNvPr id="54" name="Text 52"/>
-          <p:cNvSpPr txBox="1"/>
-          <p:nvPr/>
-        </p:nvSpPr>
-        <p:spPr>
-          <a:xfrm>
-            <a:off x="4495800" y="5410200"/>
-            <a:ext cx="1295400" cy="154781"/>
-          </a:xfrm>
-          <a:prstGeom prst="rect">
-            <a:avLst/>
-          </a:prstGeom>
-          <a:noFill/>
-          <a:ln/>
-        </p:spPr>
-        <p:txBody>
-          <a:bodyPr wrap="square" lIns="0" tIns="0" rIns="0" bIns="0" rtlCol="0" anchor="t"/>
-          <a:lstStyle/>
-          <a:p>
-            <a:pPr algn="r" indent="0" marL="0">
-              <a:lnSpc>
-                <a:spcPts val="1219"/>
-              </a:lnSpc>
-              <a:buNone/>
-            </a:pPr>
-            <a:r>
-              <a:rPr lang="en-US" sz="938" b="1" dirty="0">
-                <a:solidFill>
-                  <a:srgbClr val="FF4D63"/>
+          <p:cNvPr id="55" name="Text 53"/>
+          <p:cNvSpPr txBox="1"/>
+          <p:nvPr/>
+        </p:nvSpPr>
+        <p:spPr>
+          <a:xfrm>
+            <a:off x="876300" y="5734050"/>
+            <a:ext cx="4914900" cy="160973"/>
+          </a:xfrm>
+          <a:prstGeom prst="rect">
+            <a:avLst/>
+          </a:prstGeom>
+          <a:noFill/>
+          <a:ln/>
+        </p:spPr>
+        <p:txBody>
+          <a:bodyPr wrap="square" lIns="0" tIns="0" rIns="0" bIns="0" rtlCol="0" anchor="t"/>
+          <a:lstStyle/>
+          <a:p>
+            <a:pPr algn="l" indent="0" marL="0">
+              <a:lnSpc>
+                <a:spcPts val="1268"/>
+              </a:lnSpc>
+              <a:buNone/>
+            </a:pPr>
+            <a:r>
+              <a:rPr lang="en-US" sz="975" dirty="0">
+                <a:solidFill>
+                  <a:srgbClr val="8A8880"/>
                 </a:solidFill>
                 <a:latin typeface="Malgun Gothic" pitchFamily="34" charset="0"/>
                 <a:ea typeface="Malgun Gothic" pitchFamily="34" charset="-122"/>
                 <a:cs typeface="Malgun Gothic" pitchFamily="34" charset="-120"/>
               </a:rPr>
-              <a:t>사라졌습니다</a:t>
-            </a:r>
-            <a:endParaRPr lang="en-US" sz="938" dirty="0"/>
-          </a:p>
-        </p:txBody>
-      </p:sp>
-      <p:sp>
-        <p:nvSpPr>
-          <p:cNvPr id="55" name="Text 53"/>
-          <p:cNvSpPr txBox="1"/>
-          <p:nvPr/>
-        </p:nvSpPr>
-        <p:spPr>
-          <a:xfrm>
-            <a:off x="876300" y="5753100"/>
-            <a:ext cx="4914900" cy="142399"/>
-          </a:xfrm>
-          <a:prstGeom prst="rect">
-            <a:avLst/>
-          </a:prstGeom>
-          <a:noFill/>
-          <a:ln/>
-        </p:spPr>
-        <p:txBody>
-          <a:bodyPr wrap="square" lIns="0" tIns="0" rIns="0" bIns="0" rtlCol="0" anchor="t"/>
-          <a:lstStyle/>
-          <a:p>
-            <a:pPr algn="l" indent="0" marL="0">
-              <a:lnSpc>
-                <a:spcPts val="1121"/>
-              </a:lnSpc>
-              <a:buNone/>
-            </a:pPr>
-            <a:r>
-              <a:rPr lang="en-US" sz="863" dirty="0">
-                <a:solidFill>
-                  <a:srgbClr val="8A8880"/>
-                </a:solidFill>
-                <a:latin typeface="Malgun Gothic" pitchFamily="34" charset="0"/>
-                <a:ea typeface="Malgun Gothic" pitchFamily="34" charset="-122"/>
-                <a:cs typeface="Malgun Gothic" pitchFamily="34" charset="-120"/>
-              </a:rPr>
-              <a:t>세 번 다 일부 회차만 골라 보면 그렇게 보이는 것이었습니다.</a:t>
-            </a:r>
-            <a:endParaRPr lang="en-US" sz="863" dirty="0"/>
+              <a:t>세 번 다 착각이었습니다.</a:t>
+            </a:r>
+            <a:endParaRPr lang="en-US" sz="975" dirty="0"/>
           </a:p>
         </p:txBody>
       </p:sp>
@@ -25906,114 +25886,114 @@
                 <a:ea typeface="Malgun Gothic" pitchFamily="34" charset="-122"/>
                 <a:cs typeface="Malgun Gothic" pitchFamily="34" charset="-120"/>
               </a:rPr>
-              <a:t>2025년 봄 시험이 유별나게 낮았습니다. 설비가 오래돼서라고 결론내고</a:t>
+              <a:t>2025년 봄 시험이 유별나게 낮았습니다. 설비가 오래됐다고 보고 문서까지 썼습니다.</a:t>
             </a:r>
             <a:endParaRPr lang="en-US" sz="975" dirty="0"/>
           </a:p>
-          <a:p>
-            <a:pPr algn="l" indent="0" marL="0">
-              <a:lnSpc>
-                <a:spcPts val="1511"/>
-              </a:lnSpc>
-              <a:buNone/>
-            </a:pPr>
-            <a:r>
-              <a:rPr lang="en-US" sz="975" dirty="0">
-                <a:solidFill>
-                  <a:srgbClr val="CFCBC2"/>
+        </p:txBody>
+      </p:sp>
+      <p:sp>
+        <p:nvSpPr>
+          <p:cNvPr id="63" name="Shape 61"/>
+          <p:cNvSpPr/>
+          <p:nvPr/>
+        </p:nvSpPr>
+        <p:spPr>
+          <a:xfrm>
+            <a:off x="6324600" y="4762500"/>
+            <a:ext cx="38100" cy="876300"/>
+          </a:xfrm>
+          <a:prstGeom prst="rect">
+            <a:avLst/>
+          </a:prstGeom>
+          <a:solidFill>
+            <a:srgbClr val="FF4D63"/>
+          </a:solidFill>
+          <a:ln/>
+        </p:spPr>
+      </p:sp>
+      <p:sp>
+        <p:nvSpPr>
+          <p:cNvPr id="64" name="Text 62"/>
+          <p:cNvSpPr txBox="1"/>
+          <p:nvPr/>
+        </p:nvSpPr>
+        <p:spPr>
+          <a:xfrm>
+            <a:off x="6515100" y="4762500"/>
+            <a:ext cx="4800600" cy="193357"/>
+          </a:xfrm>
+          <a:prstGeom prst="rect">
+            <a:avLst/>
+          </a:prstGeom>
+          <a:noFill/>
+          <a:ln/>
+        </p:spPr>
+        <p:txBody>
+          <a:bodyPr wrap="square" lIns="0" tIns="0" rIns="0" bIns="0" rtlCol="0" anchor="t"/>
+          <a:lstStyle/>
+          <a:p>
+            <a:pPr algn="l" indent="0" marL="0">
+              <a:lnSpc>
+                <a:spcPts val="1522"/>
+              </a:lnSpc>
+              <a:buNone/>
+            </a:pPr>
+            <a:r>
+              <a:rPr lang="en-US" sz="1088" b="1" dirty="0">
+                <a:solidFill>
+                  <a:srgbClr val="EAE7E0"/>
                 </a:solidFill>
                 <a:latin typeface="Malgun Gothic" pitchFamily="34" charset="0"/>
                 <a:ea typeface="Malgun Gothic" pitchFamily="34" charset="-122"/>
                 <a:cs typeface="Malgun Gothic" pitchFamily="34" charset="-120"/>
               </a:rPr>
-              <a:t>문서까지 썼습니다.</a:t>
-            </a:r>
-            <a:endParaRPr lang="en-US" sz="975" dirty="0"/>
-          </a:p>
-        </p:txBody>
-      </p:sp>
-      <p:sp>
-        <p:nvSpPr>
-          <p:cNvPr id="63" name="Shape 61"/>
-          <p:cNvSpPr/>
-          <p:nvPr/>
-        </p:nvSpPr>
-        <p:spPr>
-          <a:xfrm>
-            <a:off x="6324600" y="4762500"/>
-            <a:ext cx="38100" cy="876300"/>
-          </a:xfrm>
-          <a:prstGeom prst="rect">
-            <a:avLst/>
-          </a:prstGeom>
-          <a:solidFill>
-            <a:srgbClr val="FF4D63"/>
-          </a:solidFill>
-          <a:ln/>
-        </p:spPr>
-      </p:sp>
-      <p:sp>
-        <p:nvSpPr>
-          <p:cNvPr id="64" name="Text 62"/>
-          <p:cNvSpPr txBox="1"/>
-          <p:nvPr/>
-        </p:nvSpPr>
-        <p:spPr>
-          <a:xfrm>
-            <a:off x="6515100" y="4762500"/>
-            <a:ext cx="4800600" cy="193357"/>
-          </a:xfrm>
-          <a:prstGeom prst="rect">
-            <a:avLst/>
-          </a:prstGeom>
-          <a:noFill/>
-          <a:ln/>
-        </p:spPr>
-        <p:txBody>
-          <a:bodyPr wrap="square" lIns="0" tIns="0" rIns="0" bIns="0" rtlCol="0" anchor="t"/>
-          <a:lstStyle/>
-          <a:p>
-            <a:pPr algn="l" indent="0" marL="0">
-              <a:lnSpc>
-                <a:spcPts val="1522"/>
-              </a:lnSpc>
-              <a:buNone/>
-            </a:pPr>
-            <a:r>
-              <a:rPr lang="en-US" sz="1088" b="1" dirty="0">
-                <a:solidFill>
-                  <a:srgbClr val="EAE7E0"/>
+              <a:t>다시 파 보니 원인이 달랐습니다.</a:t>
+            </a:r>
+            <a:endParaRPr lang="en-US" sz="1088" dirty="0"/>
+          </a:p>
+        </p:txBody>
+      </p:sp>
+      <p:sp>
+        <p:nvSpPr>
+          <p:cNvPr id="65" name="Text 63"/>
+          <p:cNvSpPr txBox="1"/>
+          <p:nvPr/>
+        </p:nvSpPr>
+        <p:spPr>
+          <a:xfrm>
+            <a:off x="6515100" y="5010150"/>
+            <a:ext cx="4800600" cy="767715"/>
+          </a:xfrm>
+          <a:prstGeom prst="rect">
+            <a:avLst/>
+          </a:prstGeom>
+          <a:noFill/>
+          <a:ln/>
+        </p:spPr>
+        <p:txBody>
+          <a:bodyPr wrap="square" lIns="0" tIns="0" rIns="0" bIns="0" rtlCol="0" anchor="t"/>
+          <a:lstStyle/>
+          <a:p>
+            <a:pPr algn="l" indent="0" marL="0">
+              <a:lnSpc>
+                <a:spcPts val="1511"/>
+              </a:lnSpc>
+              <a:buNone/>
+            </a:pPr>
+            <a:r>
+              <a:rPr lang="en-US" sz="975" dirty="0">
+                <a:solidFill>
+                  <a:srgbClr val="A9A79F"/>
                 </a:solidFill>
                 <a:latin typeface="Malgun Gothic" pitchFamily="34" charset="0"/>
                 <a:ea typeface="Malgun Gothic" pitchFamily="34" charset="-122"/>
                 <a:cs typeface="Malgun Gothic" pitchFamily="34" charset="-120"/>
               </a:rPr>
-              <a:t>다시 파 보니 원인이 달랐습니다.</a:t>
-            </a:r>
-            <a:endParaRPr lang="en-US" sz="1088" dirty="0"/>
-          </a:p>
-        </p:txBody>
-      </p:sp>
-      <p:sp>
-        <p:nvSpPr>
-          <p:cNvPr id="65" name="Text 63"/>
-          <p:cNvSpPr txBox="1"/>
-          <p:nvPr/>
-        </p:nvSpPr>
-        <p:spPr>
-          <a:xfrm>
-            <a:off x="6515100" y="5010150"/>
-            <a:ext cx="4800600" cy="767715"/>
-          </a:xfrm>
-          <a:prstGeom prst="rect">
-            <a:avLst/>
-          </a:prstGeom>
-          <a:noFill/>
-          <a:ln/>
-        </p:spPr>
-        <p:txBody>
-          <a:bodyPr wrap="square" lIns="0" tIns="0" rIns="0" bIns="0" rtlCol="0" anchor="t"/>
-          <a:lstStyle/>
+              <a:t>IGV 를 올리지 않고 시험한 날이었습니다. 결론을 거뒀습니다.</a:t>
+            </a:r>
+            <a:endParaRPr lang="en-US" sz="975" dirty="0"/>
+          </a:p>
           <a:p>
             <a:pPr algn="l" indent="0" marL="0">
               <a:lnSpc>
@@ -26030,27 +26010,7 @@
                 <a:ea typeface="Malgun Gothic" pitchFamily="34" charset="-122"/>
                 <a:cs typeface="Malgun Gothic" pitchFamily="34" charset="-120"/>
               </a:rPr>
-              <a:t>공기를 더 넣어 주는 조작(IGV)을 하지 않고 시험한 날이었습니다.</a:t>
-            </a:r>
-            <a:endParaRPr lang="en-US" sz="975" dirty="0"/>
-          </a:p>
-          <a:p>
-            <a:pPr algn="l" indent="0" marL="0">
-              <a:lnSpc>
-                <a:spcPts val="1511"/>
-              </a:lnSpc>
-              <a:buNone/>
-            </a:pPr>
-            <a:r>
-              <a:rPr lang="en-US" sz="975" dirty="0">
-                <a:solidFill>
-                  <a:srgbClr val="A9A79F"/>
-                </a:solidFill>
-                <a:latin typeface="Malgun Gothic" pitchFamily="34" charset="0"/>
-                <a:ea typeface="Malgun Gothic" pitchFamily="34" charset="-122"/>
-                <a:cs typeface="Malgun Gothic" pitchFamily="34" charset="-120"/>
-              </a:rPr>
-              <a:t>그래서 전기가 4~6 MW 덜 나왔습니다. 결론을 거두고, 지금은 이런 날의 시험은 도구가 아예 쓰지 않습니다.</a:t>
+              <a:t>이제 이런 날의 시험은 도구가 걸러냅니다.</a:t>
             </a:r>
             <a:endParaRPr lang="en-US" sz="975" dirty="0"/>
           </a:p>
@@ -26157,7 +26117,7 @@
                 <a:ea typeface="Malgun Gothic" pitchFamily="34" charset="-122"/>
                 <a:cs typeface="Malgun Gothic" pitchFamily="34" charset="-120"/>
               </a:rPr>
-              <a:t>그럴듯해 보이는 것을 하나씩 무너뜨린 끝에 온도만 남았습니다.</a:t>
+              <a:t>의심을 하나씩 접고 나니 온도만 남았습니다.</a:t>
             </a:r>
             <a:endParaRPr lang="en-US" sz="1238" dirty="0"/>
           </a:p>
@@ -26453,7 +26413,7 @@
                 <a:ea typeface="Malgun Gothic" pitchFamily="34" charset="-122"/>
                 <a:cs typeface="Malgun Gothic" pitchFamily="34" charset="-120"/>
               </a:rPr>
-              <a:t>온도마다 다르게 배우기</a:t>
+              <a:t>바꾼 것 두 가지</a:t>
             </a:r>
             <a:endParaRPr lang="en-US" sz="2475" dirty="0"/>
           </a:p>
@@ -26495,7 +26455,7 @@
                 <a:ea typeface="Malgun Gothic" pitchFamily="34" charset="-122"/>
                 <a:cs typeface="Malgun Gothic" pitchFamily="34" charset="-120"/>
               </a:rPr>
-              <a:t>계산식은 그대로 두고, 계산한 값과 실제의 차이만 온도마다 따로 배우게 했습니다.</a:t>
+              <a:t>하나는 흩어진 과정을 합친 것입니다. 다른 하나는 숫자를 온도마다 다르게 한 것입니다.</a:t>
             </a:r>
             <a:endParaRPr lang="en-US" sz="1350" dirty="0"/>
           </a:p>
@@ -26667,7 +26627,7 @@
                 <a:ea typeface="Malgun Gothic" pitchFamily="34" charset="-122"/>
                 <a:cs typeface="Malgun Gothic" pitchFamily="34" charset="-120"/>
               </a:rPr>
-              <a:t>바꾼 것과 두고 온 것</a:t>
+              <a:t>무엇을 바꿨나</a:t>
             </a:r>
             <a:endParaRPr lang="en-US" sz="1013" dirty="0"/>
           </a:p>
@@ -26682,17 +26642,15 @@
         <p:spPr>
           <a:xfrm>
             <a:off x="876300" y="2152650"/>
-            <a:ext cx="3429000" cy="704850"/>
-          </a:xfrm>
-          <a:prstGeom prst="rect">
-            <a:avLst/>
-          </a:prstGeom>
-          <a:ln w="17780">
-            <a:solidFill>
-              <a:srgbClr val="718BA6"/>
-            </a:solidFill>
-            <a:prstDash val="solid"/>
-          </a:ln>
+            <a:ext cx="38100" cy="590550"/>
+          </a:xfrm>
+          <a:prstGeom prst="rect">
+            <a:avLst/>
+          </a:prstGeom>
+          <a:solidFill>
+            <a:srgbClr val="EFB13C"/>
+          </a:solidFill>
+          <a:ln/>
         </p:spPr>
       </p:sp>
       <p:sp>
@@ -26703,92 +26661,134 @@
         </p:nvSpPr>
         <p:spPr>
           <a:xfrm>
-            <a:off x="1009650" y="2247900"/>
-            <a:ext cx="1905000" cy="131445"/>
-          </a:xfrm>
-          <a:prstGeom prst="rect">
-            <a:avLst/>
-          </a:prstGeom>
-          <a:noFill/>
-          <a:ln/>
-        </p:spPr>
-        <p:txBody>
-          <a:bodyPr wrap="square" lIns="0" tIns="0" rIns="0" bIns="0" rtlCol="0" anchor="t"/>
-          <a:lstStyle/>
-          <a:p>
-            <a:pPr algn="l" indent="0" marL="0">
-              <a:lnSpc>
-                <a:spcPts val="1035"/>
-              </a:lnSpc>
-              <a:buNone/>
-            </a:pPr>
-            <a:r>
-              <a:rPr lang="en-US" sz="863" b="1" dirty="0">
-                <a:solidFill>
-                  <a:srgbClr val="A8BCD1"/>
+            <a:off x="1028700" y="2152650"/>
+            <a:ext cx="190500" cy="148590"/>
+          </a:xfrm>
+          <a:prstGeom prst="rect">
+            <a:avLst/>
+          </a:prstGeom>
+          <a:noFill/>
+          <a:ln/>
+        </p:spPr>
+        <p:txBody>
+          <a:bodyPr wrap="square" lIns="0" tIns="0" rIns="0" bIns="0" rtlCol="0" anchor="t"/>
+          <a:lstStyle/>
+          <a:p>
+            <a:pPr algn="l" indent="0" marL="0">
+              <a:lnSpc>
+                <a:spcPts val="1170"/>
+              </a:lnSpc>
+              <a:buNone/>
+            </a:pPr>
+            <a:r>
+              <a:rPr lang="en-US" sz="975" b="1" dirty="0">
+                <a:solidFill>
+                  <a:srgbClr val="EFB13C"/>
+                </a:solidFill>
+                <a:latin typeface="Consolas" pitchFamily="34" charset="0"/>
+                <a:ea typeface="Consolas" pitchFamily="34" charset="-122"/>
+                <a:cs typeface="Consolas" pitchFamily="34" charset="-120"/>
+              </a:rPr>
+              <a:t>1</a:t>
+            </a:r>
+            <a:endParaRPr lang="en-US" sz="975" dirty="0"/>
+          </a:p>
+        </p:txBody>
+      </p:sp>
+      <p:sp>
+        <p:nvSpPr>
+          <p:cNvPr id="21" name="Text 19"/>
+          <p:cNvSpPr txBox="1"/>
+          <p:nvPr/>
+        </p:nvSpPr>
+        <p:spPr>
+          <a:xfrm>
+            <a:off x="1257300" y="2133600"/>
+            <a:ext cx="2914650" cy="216694"/>
+          </a:xfrm>
+          <a:prstGeom prst="rect">
+            <a:avLst/>
+          </a:prstGeom>
+          <a:noFill/>
+          <a:ln/>
+        </p:spPr>
+        <p:txBody>
+          <a:bodyPr wrap="square" lIns="0" tIns="0" rIns="0" bIns="0" rtlCol="0" anchor="t"/>
+          <a:lstStyle/>
+          <a:p>
+            <a:pPr algn="l" indent="0" marL="0">
+              <a:lnSpc>
+                <a:spcPts val="1706"/>
+              </a:lnSpc>
+              <a:buNone/>
+            </a:pPr>
+            <a:r>
+              <a:rPr lang="en-US" sz="1313" b="1" dirty="0">
+                <a:solidFill>
+                  <a:srgbClr val="EAE7E0"/>
                 </a:solidFill>
                 <a:latin typeface="Malgun Gothic" pitchFamily="34" charset="0"/>
                 <a:ea typeface="Malgun Gothic" pitchFamily="34" charset="-122"/>
                 <a:cs typeface="Malgun Gothic" pitchFamily="34" charset="-120"/>
               </a:rPr>
-              <a:t>그대로 둔 것</a:t>
-            </a:r>
-            <a:endParaRPr lang="en-US" sz="863" dirty="0"/>
-          </a:p>
-        </p:txBody>
-      </p:sp>
-      <p:sp>
-        <p:nvSpPr>
-          <p:cNvPr id="21" name="Text 19"/>
-          <p:cNvSpPr txBox="1"/>
-          <p:nvPr/>
-        </p:nvSpPr>
-        <p:spPr>
-          <a:xfrm>
-            <a:off x="1009650" y="2438400"/>
-            <a:ext cx="3143250" cy="210503"/>
-          </a:xfrm>
-          <a:prstGeom prst="rect">
-            <a:avLst/>
-          </a:prstGeom>
-          <a:noFill/>
-          <a:ln/>
-        </p:spPr>
-        <p:txBody>
-          <a:bodyPr wrap="square" lIns="0" tIns="0" rIns="0" bIns="0" rtlCol="0" anchor="t"/>
-          <a:lstStyle/>
-          <a:p>
-            <a:pPr algn="l" indent="0" marL="0">
-              <a:lnSpc>
-                <a:spcPts val="1658"/>
-              </a:lnSpc>
-              <a:buNone/>
-            </a:pPr>
-            <a:r>
-              <a:rPr lang="en-US" sz="1275" b="1" dirty="0">
-                <a:solidFill>
-                  <a:srgbClr val="EAE7E0"/>
+              <a:t>흩어진 과정을 합쳤다</a:t>
+            </a:r>
+            <a:endParaRPr lang="en-US" sz="1313" dirty="0"/>
+          </a:p>
+        </p:txBody>
+      </p:sp>
+      <p:sp>
+        <p:nvSpPr>
+          <p:cNvPr id="22" name="Text 20"/>
+          <p:cNvSpPr txBox="1"/>
+          <p:nvPr/>
+        </p:nvSpPr>
+        <p:spPr>
+          <a:xfrm>
+            <a:off x="1257300" y="2438400"/>
+            <a:ext cx="685800" cy="178594"/>
+          </a:xfrm>
+          <a:prstGeom prst="rect">
+            <a:avLst/>
+          </a:prstGeom>
+          <a:noFill/>
+          <a:ln/>
+        </p:spPr>
+        <p:txBody>
+          <a:bodyPr wrap="square" lIns="0" tIns="0" rIns="0" bIns="0" rtlCol="0" anchor="t"/>
+          <a:lstStyle/>
+          <a:p>
+            <a:pPr algn="l" indent="0" marL="0">
+              <a:lnSpc>
+                <a:spcPts val="1406"/>
+              </a:lnSpc>
+              <a:buNone/>
+            </a:pPr>
+            <a:r>
+              <a:rPr lang="en-US" sz="1125" dirty="0">
+                <a:solidFill>
+                  <a:srgbClr val="A8BCD1"/>
                 </a:solidFill>
                 <a:latin typeface="Malgun Gothic" pitchFamily="34" charset="0"/>
                 <a:ea typeface="Malgun Gothic" pitchFamily="34" charset="-122"/>
                 <a:cs typeface="Malgun Gothic" pitchFamily="34" charset="-120"/>
               </a:rPr>
-              <a:t>제작사 계산식</a:t>
-            </a:r>
-            <a:endParaRPr lang="en-US" sz="1275" dirty="0"/>
-          </a:p>
-        </p:txBody>
-      </p:sp>
-      <p:sp>
-        <p:nvSpPr>
-          <p:cNvPr id="22" name="Text 20"/>
-          <p:cNvSpPr txBox="1"/>
-          <p:nvPr/>
-        </p:nvSpPr>
-        <p:spPr>
-          <a:xfrm>
-            <a:off x="1009650" y="2647950"/>
-            <a:ext cx="3143250" cy="148590"/>
+              <a:t>엑셀 4개</a:t>
+            </a:r>
+            <a:endParaRPr lang="en-US" sz="1125" dirty="0"/>
+          </a:p>
+        </p:txBody>
+      </p:sp>
+      <p:sp>
+        <p:nvSpPr>
+          <p:cNvPr id="23" name="Text 21"/>
+          <p:cNvSpPr txBox="1"/>
+          <p:nvPr/>
+        </p:nvSpPr>
+        <p:spPr>
+          <a:xfrm>
+            <a:off x="2019300" y="2457450"/>
+            <a:ext cx="209550" cy="148590"/>
           </a:xfrm>
           <a:prstGeom prst="rect">
             <a:avLst/>
@@ -26807,49 +26807,49 @@
               <a:buNone/>
             </a:pPr>
             <a:r>
-              <a:rPr lang="en-US" sz="900" dirty="0">
-                <a:solidFill>
-                  <a:srgbClr val="A9A79F"/>
+              <a:rPr lang="en-US" sz="975" dirty="0">
+                <a:solidFill>
+                  <a:srgbClr val="8A8880"/>
                 </a:solidFill>
                 <a:latin typeface="Malgun Gothic" pitchFamily="34" charset="0"/>
                 <a:ea typeface="Malgun Gothic" pitchFamily="34" charset="-122"/>
                 <a:cs typeface="Malgun Gothic" pitchFamily="34" charset="-120"/>
               </a:rPr>
-              <a:t>검증된 식입니다. 손대지 않았습니다.</a:t>
-            </a:r>
-            <a:endParaRPr lang="en-US" sz="900" dirty="0"/>
-          </a:p>
-        </p:txBody>
-      </p:sp>
-      <p:sp>
-        <p:nvSpPr>
-          <p:cNvPr id="23" name="Text 21"/>
-          <p:cNvSpPr txBox="1"/>
-          <p:nvPr/>
-        </p:nvSpPr>
-        <p:spPr>
-          <a:xfrm>
-            <a:off x="876300" y="2914650"/>
-            <a:ext cx="285750" cy="205740"/>
-          </a:xfrm>
-          <a:prstGeom prst="rect">
-            <a:avLst/>
-          </a:prstGeom>
-          <a:noFill/>
-          <a:ln/>
-        </p:spPr>
-        <p:txBody>
-          <a:bodyPr wrap="square" lIns="0" tIns="0" rIns="0" bIns="0" rtlCol="0" anchor="t"/>
-          <a:lstStyle/>
-          <a:p>
-            <a:pPr algn="l" indent="0" marL="0">
-              <a:lnSpc>
-                <a:spcPts val="1620"/>
-              </a:lnSpc>
-              <a:buNone/>
-            </a:pPr>
-            <a:r>
-              <a:rPr lang="en-US" sz="1350" dirty="0">
+              <a:t>→</a:t>
+            </a:r>
+            <a:endParaRPr lang="en-US" sz="975" dirty="0"/>
+          </a:p>
+        </p:txBody>
+      </p:sp>
+      <p:sp>
+        <p:nvSpPr>
+          <p:cNvPr id="24" name="Text 22"/>
+          <p:cNvSpPr txBox="1"/>
+          <p:nvPr/>
+        </p:nvSpPr>
+        <p:spPr>
+          <a:xfrm>
+            <a:off x="2266950" y="2419350"/>
+            <a:ext cx="2038350" cy="202406"/>
+          </a:xfrm>
+          <a:prstGeom prst="rect">
+            <a:avLst/>
+          </a:prstGeom>
+          <a:noFill/>
+          <a:ln/>
+        </p:spPr>
+        <p:txBody>
+          <a:bodyPr wrap="square" lIns="0" tIns="0" rIns="0" bIns="0" rtlCol="0" anchor="t"/>
+          <a:lstStyle/>
+          <a:p>
+            <a:pPr algn="l" indent="0" marL="0">
+              <a:lnSpc>
+                <a:spcPts val="1594"/>
+              </a:lnSpc>
+              <a:buNone/>
+            </a:pPr>
+            <a:r>
+              <a:rPr lang="en-US" sz="1275" b="1" dirty="0">
                 <a:solidFill>
                   <a:srgbClr val="EFB13C"/>
                 </a:solidFill>
@@ -26857,22 +26857,42 @@
                 <a:ea typeface="Malgun Gothic" pitchFamily="34" charset="-122"/>
                 <a:cs typeface="Malgun Gothic" pitchFamily="34" charset="-120"/>
               </a:rPr>
-              <a:t>↓</a:t>
-            </a:r>
-            <a:endParaRPr lang="en-US" sz="1350" dirty="0"/>
-          </a:p>
-        </p:txBody>
-      </p:sp>
-      <p:sp>
-        <p:nvSpPr>
-          <p:cNvPr id="24" name="Text 22"/>
-          <p:cNvSpPr txBox="1"/>
-          <p:nvPr/>
-        </p:nvSpPr>
-        <p:spPr>
-          <a:xfrm>
-            <a:off x="1181100" y="2952750"/>
-            <a:ext cx="3048000" cy="148590"/>
+              <a:t>도구 1개</a:t>
+            </a:r>
+            <a:endParaRPr lang="en-US" sz="1275" dirty="0"/>
+          </a:p>
+        </p:txBody>
+      </p:sp>
+      <p:sp>
+        <p:nvSpPr>
+          <p:cNvPr id="25" name="Shape 23"/>
+          <p:cNvSpPr/>
+          <p:nvPr/>
+        </p:nvSpPr>
+        <p:spPr>
+          <a:xfrm>
+            <a:off x="876300" y="2990850"/>
+            <a:ext cx="38100" cy="590550"/>
+          </a:xfrm>
+          <a:prstGeom prst="rect">
+            <a:avLst/>
+          </a:prstGeom>
+          <a:solidFill>
+            <a:srgbClr val="EFB13C"/>
+          </a:solidFill>
+          <a:ln/>
+        </p:spPr>
+      </p:sp>
+      <p:sp>
+        <p:nvSpPr>
+          <p:cNvPr id="26" name="Text 24"/>
+          <p:cNvSpPr txBox="1"/>
+          <p:nvPr/>
+        </p:nvSpPr>
+        <p:spPr>
+          <a:xfrm>
+            <a:off x="1028700" y="2990850"/>
+            <a:ext cx="190500" cy="148590"/>
           </a:xfrm>
           <a:prstGeom prst="rect">
             <a:avLst/>
@@ -26891,171 +26911,233 @@
               <a:buNone/>
             </a:pPr>
             <a:r>
-              <a:rPr lang="en-US" sz="900" dirty="0">
-                <a:solidFill>
-                  <a:srgbClr val="A9A79F"/>
+              <a:rPr lang="en-US" sz="975" b="1" dirty="0">
+                <a:solidFill>
+                  <a:srgbClr val="EFB13C"/>
+                </a:solidFill>
+                <a:latin typeface="Consolas" pitchFamily="34" charset="0"/>
+                <a:ea typeface="Consolas" pitchFamily="34" charset="-122"/>
+                <a:cs typeface="Consolas" pitchFamily="34" charset="-120"/>
+              </a:rPr>
+              <a:t>2</a:t>
+            </a:r>
+            <a:endParaRPr lang="en-US" sz="975" dirty="0"/>
+          </a:p>
+        </p:txBody>
+      </p:sp>
+      <p:sp>
+        <p:nvSpPr>
+          <p:cNvPr id="27" name="Text 25"/>
+          <p:cNvSpPr txBox="1"/>
+          <p:nvPr/>
+        </p:nvSpPr>
+        <p:spPr>
+          <a:xfrm>
+            <a:off x="1257300" y="2971800"/>
+            <a:ext cx="2914650" cy="216694"/>
+          </a:xfrm>
+          <a:prstGeom prst="rect">
+            <a:avLst/>
+          </a:prstGeom>
+          <a:noFill/>
+          <a:ln/>
+        </p:spPr>
+        <p:txBody>
+          <a:bodyPr wrap="square" lIns="0" tIns="0" rIns="0" bIns="0" rtlCol="0" anchor="t"/>
+          <a:lstStyle/>
+          <a:p>
+            <a:pPr algn="l" indent="0" marL="0">
+              <a:lnSpc>
+                <a:spcPts val="1706"/>
+              </a:lnSpc>
+              <a:buNone/>
+            </a:pPr>
+            <a:r>
+              <a:rPr lang="en-US" sz="1313" b="1" dirty="0">
+                <a:solidFill>
+                  <a:srgbClr val="EAE7E0"/>
                 </a:solidFill>
                 <a:latin typeface="Malgun Gothic" pitchFamily="34" charset="0"/>
                 <a:ea typeface="Malgun Gothic" pitchFamily="34" charset="-122"/>
                 <a:cs typeface="Malgun Gothic" pitchFamily="34" charset="-120"/>
               </a:rPr>
-              <a:t>계산한 값과 실제의 차이만 넘깁니다</a:t>
-            </a:r>
-            <a:endParaRPr lang="en-US" sz="900" dirty="0"/>
-          </a:p>
-        </p:txBody>
-      </p:sp>
-      <p:sp>
-        <p:nvSpPr>
-          <p:cNvPr id="25" name="Shape 23"/>
-          <p:cNvSpPr/>
-          <p:nvPr/>
-        </p:nvSpPr>
-        <p:spPr>
-          <a:xfrm>
-            <a:off x="876300" y="3219450"/>
-            <a:ext cx="3429000" cy="704850"/>
-          </a:xfrm>
-          <a:prstGeom prst="rect">
-            <a:avLst/>
-          </a:prstGeom>
-          <a:ln w="20320">
-            <a:solidFill>
-              <a:srgbClr val="EFB13C"/>
-            </a:solidFill>
-            <a:prstDash val="solid"/>
-          </a:ln>
-        </p:spPr>
-      </p:sp>
-      <p:sp>
-        <p:nvSpPr>
-          <p:cNvPr id="26" name="Text 24"/>
-          <p:cNvSpPr txBox="1"/>
-          <p:nvPr/>
-        </p:nvSpPr>
-        <p:spPr>
-          <a:xfrm>
-            <a:off x="1009650" y="3314700"/>
-            <a:ext cx="1905000" cy="131445"/>
-          </a:xfrm>
-          <a:prstGeom prst="rect">
-            <a:avLst/>
-          </a:prstGeom>
-          <a:noFill/>
-          <a:ln/>
-        </p:spPr>
-        <p:txBody>
-          <a:bodyPr wrap="square" lIns="0" tIns="0" rIns="0" bIns="0" rtlCol="0" anchor="t"/>
-          <a:lstStyle/>
-          <a:p>
-            <a:pPr algn="l" indent="0" marL="0">
-              <a:lnSpc>
-                <a:spcPts val="1035"/>
-              </a:lnSpc>
-              <a:buNone/>
-            </a:pPr>
-            <a:r>
-              <a:rPr lang="en-US" sz="863" b="1" dirty="0">
-                <a:solidFill>
-                  <a:srgbClr val="EFB13C"/>
+              <a:t>숫자를 온도마다 다르게</a:t>
+            </a:r>
+            <a:endParaRPr lang="en-US" sz="1313" dirty="0"/>
+          </a:p>
+        </p:txBody>
+      </p:sp>
+      <p:sp>
+        <p:nvSpPr>
+          <p:cNvPr id="28" name="Text 26"/>
+          <p:cNvSpPr txBox="1"/>
+          <p:nvPr/>
+        </p:nvSpPr>
+        <p:spPr>
+          <a:xfrm>
+            <a:off x="1257300" y="3276600"/>
+            <a:ext cx="533400" cy="178594"/>
+          </a:xfrm>
+          <a:prstGeom prst="rect">
+            <a:avLst/>
+          </a:prstGeom>
+          <a:noFill/>
+          <a:ln/>
+        </p:spPr>
+        <p:txBody>
+          <a:bodyPr wrap="square" lIns="0" tIns="0" rIns="0" bIns="0" rtlCol="0" anchor="t"/>
+          <a:lstStyle/>
+          <a:p>
+            <a:pPr algn="l" indent="0" marL="0">
+              <a:lnSpc>
+                <a:spcPts val="1406"/>
+              </a:lnSpc>
+              <a:buNone/>
+            </a:pPr>
+            <a:r>
+              <a:rPr lang="en-US" sz="1125" dirty="0">
+                <a:solidFill>
+                  <a:srgbClr val="A8BCD1"/>
                 </a:solidFill>
                 <a:latin typeface="Malgun Gothic" pitchFamily="34" charset="0"/>
                 <a:ea typeface="Malgun Gothic" pitchFamily="34" charset="-122"/>
                 <a:cs typeface="Malgun Gothic" pitchFamily="34" charset="-120"/>
               </a:rPr>
-              <a:t>새로 만든 것</a:t>
-            </a:r>
-            <a:endParaRPr lang="en-US" sz="863" dirty="0"/>
-          </a:p>
-        </p:txBody>
-      </p:sp>
-      <p:sp>
-        <p:nvSpPr>
-          <p:cNvPr id="27" name="Text 25"/>
-          <p:cNvSpPr txBox="1"/>
-          <p:nvPr/>
-        </p:nvSpPr>
-        <p:spPr>
-          <a:xfrm>
-            <a:off x="1009650" y="3505200"/>
-            <a:ext cx="3143250" cy="210503"/>
-          </a:xfrm>
-          <a:prstGeom prst="rect">
-            <a:avLst/>
-          </a:prstGeom>
-          <a:noFill/>
-          <a:ln/>
-        </p:spPr>
-        <p:txBody>
-          <a:bodyPr wrap="square" lIns="0" tIns="0" rIns="0" bIns="0" rtlCol="0" anchor="t"/>
-          <a:lstStyle/>
-          <a:p>
-            <a:pPr algn="l" indent="0" marL="0">
-              <a:lnSpc>
-                <a:spcPts val="1658"/>
-              </a:lnSpc>
-              <a:buNone/>
-            </a:pPr>
-            <a:r>
-              <a:rPr lang="en-US" sz="1275" b="1" dirty="0">
-                <a:solidFill>
-                  <a:srgbClr val="EAE7E0"/>
+              <a:t>값 1개</a:t>
+            </a:r>
+            <a:endParaRPr lang="en-US" sz="1125" dirty="0"/>
+          </a:p>
+        </p:txBody>
+      </p:sp>
+      <p:sp>
+        <p:nvSpPr>
+          <p:cNvPr id="29" name="Text 27"/>
+          <p:cNvSpPr txBox="1"/>
+          <p:nvPr/>
+        </p:nvSpPr>
+        <p:spPr>
+          <a:xfrm>
+            <a:off x="1866900" y="3295650"/>
+            <a:ext cx="209550" cy="148590"/>
+          </a:xfrm>
+          <a:prstGeom prst="rect">
+            <a:avLst/>
+          </a:prstGeom>
+          <a:noFill/>
+          <a:ln/>
+        </p:spPr>
+        <p:txBody>
+          <a:bodyPr wrap="square" lIns="0" tIns="0" rIns="0" bIns="0" rtlCol="0" anchor="t"/>
+          <a:lstStyle/>
+          <a:p>
+            <a:pPr algn="l" indent="0" marL="0">
+              <a:lnSpc>
+                <a:spcPts val="1170"/>
+              </a:lnSpc>
+              <a:buNone/>
+            </a:pPr>
+            <a:r>
+              <a:rPr lang="en-US" sz="975" dirty="0">
+                <a:solidFill>
+                  <a:srgbClr val="8A8880"/>
                 </a:solidFill>
                 <a:latin typeface="Malgun Gothic" pitchFamily="34" charset="0"/>
                 <a:ea typeface="Malgun Gothic" pitchFamily="34" charset="-122"/>
                 <a:cs typeface="Malgun Gothic" pitchFamily="34" charset="-120"/>
               </a:rPr>
-              <a:t>온도마다 다른 값</a:t>
-            </a:r>
-            <a:endParaRPr lang="en-US" sz="1275" dirty="0"/>
-          </a:p>
-        </p:txBody>
-      </p:sp>
-      <p:sp>
-        <p:nvSpPr>
-          <p:cNvPr id="28" name="Text 26"/>
-          <p:cNvSpPr txBox="1"/>
-          <p:nvPr/>
-        </p:nvSpPr>
-        <p:spPr>
-          <a:xfrm>
-            <a:off x="1009650" y="3714750"/>
-            <a:ext cx="3143250" cy="148590"/>
-          </a:xfrm>
-          <a:prstGeom prst="rect">
-            <a:avLst/>
-          </a:prstGeom>
-          <a:noFill/>
-          <a:ln/>
-        </p:spPr>
-        <p:txBody>
-          <a:bodyPr wrap="square" lIns="0" tIns="0" rIns="0" bIns="0" rtlCol="0" anchor="t"/>
-          <a:lstStyle/>
-          <a:p>
-            <a:pPr algn="l" indent="0" marL="0">
-              <a:lnSpc>
-                <a:spcPts val="1170"/>
-              </a:lnSpc>
-              <a:buNone/>
-            </a:pPr>
-            <a:r>
-              <a:rPr lang="en-US" sz="900" dirty="0">
-                <a:solidFill>
-                  <a:srgbClr val="A9A79F"/>
+              <a:t>→</a:t>
+            </a:r>
+            <a:endParaRPr lang="en-US" sz="975" dirty="0"/>
+          </a:p>
+        </p:txBody>
+      </p:sp>
+      <p:sp>
+        <p:nvSpPr>
+          <p:cNvPr id="30" name="Text 28"/>
+          <p:cNvSpPr txBox="1"/>
+          <p:nvPr/>
+        </p:nvSpPr>
+        <p:spPr>
+          <a:xfrm>
+            <a:off x="2114550" y="3257550"/>
+            <a:ext cx="2190750" cy="202406"/>
+          </a:xfrm>
+          <a:prstGeom prst="rect">
+            <a:avLst/>
+          </a:prstGeom>
+          <a:noFill/>
+          <a:ln/>
+        </p:spPr>
+        <p:txBody>
+          <a:bodyPr wrap="square" lIns="0" tIns="0" rIns="0" bIns="0" rtlCol="0" anchor="t"/>
+          <a:lstStyle/>
+          <a:p>
+            <a:pPr algn="l" indent="0" marL="0">
+              <a:lnSpc>
+                <a:spcPts val="1594"/>
+              </a:lnSpc>
+              <a:buNone/>
+            </a:pPr>
+            <a:r>
+              <a:rPr lang="en-US" sz="1275" b="1" dirty="0">
+                <a:solidFill>
+                  <a:srgbClr val="EFB13C"/>
                 </a:solidFill>
                 <a:latin typeface="Malgun Gothic" pitchFamily="34" charset="0"/>
                 <a:ea typeface="Malgun Gothic" pitchFamily="34" charset="-122"/>
                 <a:cs typeface="Malgun Gothic" pitchFamily="34" charset="-120"/>
               </a:rPr>
-              <a:t>시험 40회를 학습해 온도마다 다른 값을 줍니다.</a:t>
-            </a:r>
-            <a:endParaRPr lang="en-US" sz="900" dirty="0"/>
-          </a:p>
-        </p:txBody>
-      </p:sp>
-      <p:sp>
-        <p:nvSpPr>
-          <p:cNvPr id="29" name="Shape 27"/>
+              <a:t>온도별 곡선</a:t>
+            </a:r>
+            <a:endParaRPr lang="en-US" sz="1275" dirty="0"/>
+          </a:p>
+        </p:txBody>
+      </p:sp>
+      <p:sp>
+        <p:nvSpPr>
+          <p:cNvPr id="31" name="Text 29"/>
+          <p:cNvSpPr txBox="1"/>
+          <p:nvPr/>
+        </p:nvSpPr>
+        <p:spPr>
+          <a:xfrm>
+            <a:off x="876300" y="3733800"/>
+            <a:ext cx="3429000" cy="160973"/>
+          </a:xfrm>
+          <a:prstGeom prst="rect">
+            <a:avLst/>
+          </a:prstGeom>
+          <a:noFill/>
+          <a:ln/>
+        </p:spPr>
+        <p:txBody>
+          <a:bodyPr wrap="square" lIns="0" tIns="0" rIns="0" bIns="0" rtlCol="0" anchor="t"/>
+          <a:lstStyle/>
+          <a:p>
+            <a:pPr algn="l" indent="0" marL="0">
+              <a:lnSpc>
+                <a:spcPts val="1268"/>
+              </a:lnSpc>
+              <a:buNone/>
+            </a:pPr>
+            <a:r>
+              <a:rPr lang="en-US" sz="975" dirty="0">
+                <a:solidFill>
+                  <a:srgbClr val="A9A79F"/>
+                </a:solidFill>
+                <a:latin typeface="Malgun Gothic" pitchFamily="34" charset="0"/>
+                <a:ea typeface="Malgun Gothic" pitchFamily="34" charset="-122"/>
+                <a:cs typeface="Malgun Gothic" pitchFamily="34" charset="-120"/>
+              </a:rPr>
+              <a:t>제작사 계산식은 손대지 않았습니다.</a:t>
+            </a:r>
+            <a:endParaRPr lang="en-US" sz="975" dirty="0"/>
+          </a:p>
+        </p:txBody>
+      </p:sp>
+      <p:sp>
+        <p:nvSpPr>
+          <p:cNvPr id="32" name="Shape 30"/>
           <p:cNvSpPr/>
           <p:nvPr/>
         </p:nvSpPr>
@@ -27080,7 +27162,7 @@
       </p:sp>
       <p:sp>
         <p:nvSpPr>
-          <p:cNvPr id="30" name="Shape 28"/>
+          <p:cNvPr id="33" name="Shape 31"/>
           <p:cNvSpPr/>
           <p:nvPr/>
         </p:nvSpPr>
@@ -27100,7 +27182,7 @@
       </p:sp>
       <p:sp>
         <p:nvSpPr>
-          <p:cNvPr id="31" name="Shape 29"/>
+          <p:cNvPr id="34" name="Shape 32"/>
           <p:cNvSpPr/>
           <p:nvPr/>
         </p:nvSpPr>
@@ -27123,7 +27205,7 @@
       </p:sp>
       <p:sp>
         <p:nvSpPr>
-          <p:cNvPr id="32" name="Shape 30"/>
+          <p:cNvPr id="35" name="Shape 33"/>
           <p:cNvSpPr/>
           <p:nvPr/>
         </p:nvSpPr>
@@ -27143,7 +27225,7 @@
       </p:sp>
       <p:sp>
         <p:nvSpPr>
-          <p:cNvPr id="33" name="Text 31"/>
+          <p:cNvPr id="36" name="Text 34"/>
           <p:cNvSpPr txBox="1"/>
           <p:nvPr/>
         </p:nvSpPr>
@@ -27185,7 +27267,7 @@
       </p:sp>
       <p:sp>
         <p:nvSpPr>
-          <p:cNvPr id="34" name="Text 32"/>
+          <p:cNvPr id="37" name="Text 35"/>
           <p:cNvSpPr txBox="1"/>
           <p:nvPr/>
         </p:nvSpPr>
@@ -27227,7 +27309,7 @@
       </p:sp>
       <p:sp>
         <p:nvSpPr>
-          <p:cNvPr id="35" name="Text 33"/>
+          <p:cNvPr id="38" name="Text 36"/>
           <p:cNvSpPr txBox="1"/>
           <p:nvPr/>
         </p:nvSpPr>
@@ -27269,7 +27351,7 @@
       </p:sp>
       <p:pic>
         <p:nvPicPr>
-          <p:cNvPr id="36" name="Image 0" descr="/home/user/Narae-AI/docs/ppt/assets/tool_gap.png">    </p:cNvPr>
+          <p:cNvPr id="39" name="Image 0" descr="/home/user/Narae-AI/docs/ppt/assets/tool_gap.png">    </p:cNvPr>
           <p:cNvPicPr>
             <a:picLocks noChangeAspect="1"/>
           </p:cNvPicPr>
@@ -27293,7 +27375,7 @@
       </p:pic>
       <p:sp>
         <p:nvSpPr>
-          <p:cNvPr id="37" name="Shape 34"/>
+          <p:cNvPr id="40" name="Shape 37"/>
           <p:cNvSpPr/>
           <p:nvPr/>
         </p:nvSpPr>
@@ -27315,49 +27397,49 @@
       </p:sp>
       <p:sp>
         <p:nvSpPr>
-          <p:cNvPr id="38" name="Text 35"/>
+          <p:cNvPr id="41" name="Text 38"/>
           <p:cNvSpPr txBox="1"/>
           <p:nvPr/>
         </p:nvSpPr>
         <p:spPr>
           <a:xfrm>
             <a:off x="4762500" y="3733800"/>
-            <a:ext cx="6629400" cy="148590"/>
-          </a:xfrm>
-          <a:prstGeom prst="rect">
-            <a:avLst/>
-          </a:prstGeom>
-          <a:noFill/>
-          <a:ln/>
-        </p:spPr>
-        <p:txBody>
-          <a:bodyPr wrap="square" lIns="0" tIns="0" rIns="0" bIns="0" rtlCol="0" anchor="t"/>
-          <a:lstStyle/>
-          <a:p>
-            <a:pPr algn="l" indent="0" marL="0">
-              <a:lnSpc>
-                <a:spcPts val="1170"/>
-              </a:lnSpc>
-              <a:buNone/>
-            </a:pPr>
-            <a:r>
-              <a:rPr lang="en-US" sz="900" dirty="0">
-                <a:solidFill>
-                  <a:srgbClr val="8A8880"/>
+            <a:ext cx="6629400" cy="160973"/>
+          </a:xfrm>
+          <a:prstGeom prst="rect">
+            <a:avLst/>
+          </a:prstGeom>
+          <a:noFill/>
+          <a:ln/>
+        </p:spPr>
+        <p:txBody>
+          <a:bodyPr wrap="square" lIns="0" tIns="0" rIns="0" bIns="0" rtlCol="0" anchor="t"/>
+          <a:lstStyle/>
+          <a:p>
+            <a:pPr algn="l" indent="0" marL="0">
+              <a:lnSpc>
+                <a:spcPts val="1268"/>
+              </a:lnSpc>
+              <a:buNone/>
+            </a:pPr>
+            <a:r>
+              <a:rPr lang="en-US" sz="975" dirty="0">
+                <a:solidFill>
+                  <a:srgbClr val="A9A79F"/>
                 </a:solidFill>
                 <a:latin typeface="Malgun Gothic" pitchFamily="34" charset="0"/>
                 <a:ea typeface="Malgun Gothic" pitchFamily="34" charset="-122"/>
                 <a:cs typeface="Malgun Gothic" pitchFamily="34" charset="-120"/>
               </a:rPr>
-              <a:t>온도마다 더할 값이 다릅니다. 흰 점이 실제 시험 결과이고, 주황 선이 도구가 배운 값입니다.</a:t>
-            </a:r>
-            <a:endParaRPr lang="en-US" sz="900" dirty="0"/>
-          </a:p>
-        </p:txBody>
-      </p:sp>
-      <p:sp>
-        <p:nvSpPr>
-          <p:cNvPr id="39" name="Shape 36"/>
+              <a:t>온도마다 더할 값이 다릅니다.</a:t>
+            </a:r>
+            <a:endParaRPr lang="en-US" sz="975" dirty="0"/>
+          </a:p>
+        </p:txBody>
+      </p:sp>
+      <p:sp>
+        <p:nvSpPr>
+          <p:cNvPr id="42" name="Shape 39"/>
           <p:cNvSpPr/>
           <p:nvPr/>
         </p:nvSpPr>
@@ -27382,7 +27464,7 @@
       </p:sp>
       <p:sp>
         <p:nvSpPr>
-          <p:cNvPr id="40" name="Shape 37"/>
+          <p:cNvPr id="43" name="Shape 40"/>
           <p:cNvSpPr/>
           <p:nvPr/>
         </p:nvSpPr>
@@ -27402,7 +27484,7 @@
       </p:sp>
       <p:sp>
         <p:nvSpPr>
-          <p:cNvPr id="41" name="Shape 38"/>
+          <p:cNvPr id="44" name="Shape 41"/>
           <p:cNvSpPr/>
           <p:nvPr/>
         </p:nvSpPr>
@@ -27425,7 +27507,7 @@
       </p:sp>
       <p:sp>
         <p:nvSpPr>
-          <p:cNvPr id="42" name="Shape 39"/>
+          <p:cNvPr id="45" name="Shape 42"/>
           <p:cNvSpPr/>
           <p:nvPr/>
         </p:nvSpPr>
@@ -27445,7 +27527,7 @@
       </p:sp>
       <p:sp>
         <p:nvSpPr>
-          <p:cNvPr id="43" name="Text 40"/>
+          <p:cNvPr id="46" name="Text 43"/>
           <p:cNvSpPr txBox="1"/>
           <p:nvPr/>
         </p:nvSpPr>
@@ -27487,7 +27569,7 @@
       </p:sp>
       <p:sp>
         <p:nvSpPr>
-          <p:cNvPr id="44" name="Text 41"/>
+          <p:cNvPr id="47" name="Text 44"/>
           <p:cNvSpPr txBox="1"/>
           <p:nvPr/>
         </p:nvSpPr>
@@ -27529,7 +27611,7 @@
       </p:sp>
       <p:sp>
         <p:nvSpPr>
-          <p:cNvPr id="45" name="Text 42"/>
+          <p:cNvPr id="48" name="Text 45"/>
           <p:cNvSpPr txBox="1"/>
           <p:nvPr/>
         </p:nvSpPr>
@@ -27571,33 +27653,33 @@
       </p:sp>
       <p:sp>
         <p:nvSpPr>
-          <p:cNvPr id="46" name="Text 43"/>
-          <p:cNvSpPr txBox="1"/>
-          <p:nvPr/>
-        </p:nvSpPr>
-        <p:spPr>
-          <a:xfrm>
-            <a:off x="876300" y="4476750"/>
-            <a:ext cx="4476750" cy="792480"/>
-          </a:xfrm>
-          <a:prstGeom prst="rect">
-            <a:avLst/>
-          </a:prstGeom>
-          <a:noFill/>
-          <a:ln/>
-        </p:spPr>
-        <p:txBody>
-          <a:bodyPr wrap="square" lIns="0" tIns="0" rIns="0" bIns="0" rtlCol="0" anchor="t"/>
-          <a:lstStyle/>
-          <a:p>
-            <a:pPr algn="l" indent="0" marL="0">
-              <a:lnSpc>
-                <a:spcPts val="1560"/>
-              </a:lnSpc>
-              <a:buNone/>
-            </a:pPr>
-            <a:r>
-              <a:rPr lang="en-US" sz="975" dirty="0">
+          <p:cNvPr id="49" name="Text 46"/>
+          <p:cNvSpPr txBox="1"/>
+          <p:nvPr/>
+        </p:nvSpPr>
+        <p:spPr>
+          <a:xfrm>
+            <a:off x="876300" y="4495800"/>
+            <a:ext cx="4476750" cy="822960"/>
+          </a:xfrm>
+          <a:prstGeom prst="rect">
+            <a:avLst/>
+          </a:prstGeom>
+          <a:noFill/>
+          <a:ln/>
+        </p:spPr>
+        <p:txBody>
+          <a:bodyPr wrap="square" lIns="0" tIns="0" rIns="0" bIns="0" rtlCol="0" anchor="t"/>
+          <a:lstStyle/>
+          <a:p>
+            <a:pPr algn="l" indent="0" marL="0">
+              <a:lnSpc>
+                <a:spcPts val="1620"/>
+              </a:lnSpc>
+              <a:buNone/>
+            </a:pPr>
+            <a:r>
+              <a:rPr lang="en-US" sz="1013" dirty="0">
                 <a:solidFill>
                   <a:srgbClr val="CFCBC2"/>
                 </a:solidFill>
@@ -27605,19 +27687,19 @@
                 <a:ea typeface="Malgun Gothic" pitchFamily="34" charset="-122"/>
                 <a:cs typeface="Malgun Gothic" pitchFamily="34" charset="-120"/>
               </a:rPr>
-              <a:t>이런 예측을 처음 다뤘습니다. 무엇을 써야 하는지 몰라서 후보 일곱 가지를 늘어놓고 같은 데이터로 겨루게 했습니다.</a:t>
-            </a:r>
-            <a:endParaRPr lang="en-US" sz="975" dirty="0"/>
-          </a:p>
-          <a:p>
-            <a:pPr algn="l" indent="0" marL="0">
-              <a:lnSpc>
-                <a:spcPts val="1560"/>
-              </a:lnSpc>
-              <a:buNone/>
-            </a:pPr>
-            <a:r>
-              <a:rPr lang="en-US" sz="975" dirty="0">
+              <a:t>이런 예측을 해 본 적이 없었습니다. 그래서 후보 일곱 가지를 늘어놓고 같은 데이터로 겨루게 했습니다.</a:t>
+            </a:r>
+            <a:endParaRPr lang="en-US" sz="1013" dirty="0"/>
+          </a:p>
+          <a:p>
+            <a:pPr algn="l" indent="0" marL="0">
+              <a:lnSpc>
+                <a:spcPts val="1620"/>
+              </a:lnSpc>
+              <a:buNone/>
+            </a:pPr>
+            <a:r>
+              <a:rPr lang="en-US" sz="1013" dirty="0">
                 <a:solidFill>
                   <a:srgbClr val="CFCBC2"/>
                 </a:solidFill>
@@ -27627,13 +27709,13 @@
               </a:rPr>
               <a:t>한 회를 가리고 나머지로 그 회를 맞혀 봅니다. 사람이 아니라 성적이 골랐습니다.</a:t>
             </a:r>
-            <a:endParaRPr lang="en-US" sz="975" dirty="0"/>
-          </a:p>
-        </p:txBody>
-      </p:sp>
-      <p:sp>
-        <p:nvSpPr>
-          <p:cNvPr id="47" name="Text 44"/>
+            <a:endParaRPr lang="en-US" sz="1013" dirty="0"/>
+          </a:p>
+        </p:txBody>
+      </p:sp>
+      <p:sp>
+        <p:nvSpPr>
+          <p:cNvPr id="50" name="Text 47"/>
           <p:cNvSpPr txBox="1"/>
           <p:nvPr/>
         </p:nvSpPr>
@@ -27675,7 +27757,7 @@
       </p:sp>
       <p:sp>
         <p:nvSpPr>
-          <p:cNvPr id="48" name="Shape 45"/>
+          <p:cNvPr id="51" name="Shape 48"/>
           <p:cNvSpPr/>
           <p:nvPr/>
         </p:nvSpPr>
@@ -27695,7 +27777,7 @@
       </p:sp>
       <p:sp>
         <p:nvSpPr>
-          <p:cNvPr id="49" name="Text 46"/>
+          <p:cNvPr id="52" name="Text 49"/>
           <p:cNvSpPr txBox="1"/>
           <p:nvPr/>
         </p:nvSpPr>
@@ -27737,7 +27819,7 @@
       </p:sp>
       <p:sp>
         <p:nvSpPr>
-          <p:cNvPr id="50" name="Text 47"/>
+          <p:cNvPr id="53" name="Text 50"/>
           <p:cNvSpPr txBox="1"/>
           <p:nvPr/>
         </p:nvSpPr>
@@ -27771,7 +27853,7 @@
                 <a:ea typeface="Malgun Gothic" pitchFamily="34" charset="-122"/>
                 <a:cs typeface="Malgun Gothic" pitchFamily="34" charset="-120"/>
               </a:rPr>
-              <a:t>← 1위. 이것을 씁니다</a:t>
+              <a:t>← 이것을 씁니다</a:t>
             </a:r>
             <a:endParaRPr lang="en-US" sz="863" dirty="0"/>
           </a:p>
@@ -27779,7 +27861,7 @@
       </p:sp>
       <p:sp>
         <p:nvSpPr>
-          <p:cNvPr id="51" name="Text 48"/>
+          <p:cNvPr id="54" name="Text 51"/>
           <p:cNvSpPr txBox="1"/>
           <p:nvPr/>
         </p:nvSpPr>
@@ -27821,7 +27903,7 @@
       </p:sp>
       <p:sp>
         <p:nvSpPr>
-          <p:cNvPr id="52" name="Shape 49"/>
+          <p:cNvPr id="55" name="Shape 52"/>
           <p:cNvSpPr/>
           <p:nvPr/>
         </p:nvSpPr>
@@ -27841,7 +27923,7 @@
       </p:sp>
       <p:sp>
         <p:nvSpPr>
-          <p:cNvPr id="53" name="Text 50"/>
+          <p:cNvPr id="56" name="Text 53"/>
           <p:cNvSpPr txBox="1"/>
           <p:nvPr/>
         </p:nvSpPr>
@@ -27883,7 +27965,7 @@
       </p:sp>
       <p:sp>
         <p:nvSpPr>
-          <p:cNvPr id="54" name="Text 51"/>
+          <p:cNvPr id="57" name="Text 54"/>
           <p:cNvSpPr txBox="1"/>
           <p:nvPr/>
         </p:nvSpPr>
@@ -27925,7 +28007,7 @@
       </p:sp>
       <p:sp>
         <p:nvSpPr>
-          <p:cNvPr id="55" name="Shape 52"/>
+          <p:cNvPr id="58" name="Shape 55"/>
           <p:cNvSpPr/>
           <p:nvPr/>
         </p:nvSpPr>
@@ -27945,7 +28027,7 @@
       </p:sp>
       <p:sp>
         <p:nvSpPr>
-          <p:cNvPr id="56" name="Text 53"/>
+          <p:cNvPr id="59" name="Text 56"/>
           <p:cNvSpPr txBox="1"/>
           <p:nvPr/>
         </p:nvSpPr>
@@ -27987,7 +28069,7 @@
       </p:sp>
       <p:sp>
         <p:nvSpPr>
-          <p:cNvPr id="57" name="Text 54"/>
+          <p:cNvPr id="60" name="Text 57"/>
           <p:cNvSpPr txBox="1"/>
           <p:nvPr/>
         </p:nvSpPr>
@@ -28029,7 +28111,7 @@
       </p:sp>
       <p:sp>
         <p:nvSpPr>
-          <p:cNvPr id="58" name="Shape 55"/>
+          <p:cNvPr id="61" name="Shape 58"/>
           <p:cNvSpPr/>
           <p:nvPr/>
         </p:nvSpPr>
@@ -28049,7 +28131,7 @@
       </p:sp>
       <p:sp>
         <p:nvSpPr>
-          <p:cNvPr id="59" name="Text 56"/>
+          <p:cNvPr id="62" name="Text 59"/>
           <p:cNvSpPr txBox="1"/>
           <p:nvPr/>
         </p:nvSpPr>
@@ -28091,7 +28173,7 @@
       </p:sp>
       <p:sp>
         <p:nvSpPr>
-          <p:cNvPr id="60" name="Text 57"/>
+          <p:cNvPr id="63" name="Text 60"/>
           <p:cNvSpPr txBox="1"/>
           <p:nvPr/>
         </p:nvSpPr>
@@ -28133,7 +28215,7 @@
       </p:sp>
       <p:sp>
         <p:nvSpPr>
-          <p:cNvPr id="61" name="Shape 58"/>
+          <p:cNvPr id="64" name="Shape 61"/>
           <p:cNvSpPr/>
           <p:nvPr/>
         </p:nvSpPr>
@@ -28153,7 +28235,7 @@
       </p:sp>
       <p:sp>
         <p:nvSpPr>
-          <p:cNvPr id="62" name="Text 59"/>
+          <p:cNvPr id="65" name="Text 62"/>
           <p:cNvSpPr txBox="1"/>
           <p:nvPr/>
         </p:nvSpPr>
@@ -28195,7 +28277,7 @@
       </p:sp>
       <p:sp>
         <p:nvSpPr>
-          <p:cNvPr id="63" name="Text 60"/>
+          <p:cNvPr id="66" name="Text 63"/>
           <p:cNvSpPr txBox="1"/>
           <p:nvPr/>
         </p:nvSpPr>
@@ -28237,7 +28319,7 @@
       </p:sp>
       <p:sp>
         <p:nvSpPr>
-          <p:cNvPr id="64" name="Shape 61"/>
+          <p:cNvPr id="67" name="Shape 64"/>
           <p:cNvSpPr/>
           <p:nvPr/>
         </p:nvSpPr>
@@ -28257,7 +28339,7 @@
       </p:sp>
       <p:sp>
         <p:nvSpPr>
-          <p:cNvPr id="65" name="Text 62"/>
+          <p:cNvPr id="68" name="Text 65"/>
           <p:cNvSpPr txBox="1"/>
           <p:nvPr/>
         </p:nvSpPr>
@@ -28299,7 +28381,7 @@
       </p:sp>
       <p:sp>
         <p:nvSpPr>
-          <p:cNvPr id="66" name="Text 63"/>
+          <p:cNvPr id="69" name="Text 66"/>
           <p:cNvSpPr txBox="1"/>
           <p:nvPr/>
         </p:nvSpPr>
@@ -28341,7 +28423,7 @@
       </p:sp>
       <p:sp>
         <p:nvSpPr>
-          <p:cNvPr id="67" name="Shape 64"/>
+          <p:cNvPr id="70" name="Shape 67"/>
           <p:cNvSpPr/>
           <p:nvPr/>
         </p:nvSpPr>
@@ -28361,7 +28443,7 @@
       </p:sp>
       <p:sp>
         <p:nvSpPr>
-          <p:cNvPr id="68" name="Text 65"/>
+          <p:cNvPr id="71" name="Text 68"/>
           <p:cNvSpPr txBox="1"/>
           <p:nvPr/>
         </p:nvSpPr>
@@ -28403,7 +28485,7 @@
       </p:sp>
       <p:sp>
         <p:nvSpPr>
-          <p:cNvPr id="69" name="Text 66"/>
+          <p:cNvPr id="72" name="Text 69"/>
           <p:cNvSpPr txBox="1"/>
           <p:nvPr/>
         </p:nvSpPr>
@@ -28445,7 +28527,7 @@
       </p:sp>
       <p:sp>
         <p:nvSpPr>
-          <p:cNvPr id="70" name="Shape 67"/>
+          <p:cNvPr id="73" name="Shape 70"/>
           <p:cNvSpPr/>
           <p:nvPr/>
         </p:nvSpPr>
@@ -28468,7 +28550,7 @@
       </p:sp>
       <p:sp>
         <p:nvSpPr>
-          <p:cNvPr id="71" name="Text 68"/>
+          <p:cNvPr id="74" name="Text 71"/>
           <p:cNvSpPr txBox="1"/>
           <p:nvPr/>
         </p:nvSpPr>
@@ -28510,7 +28592,7 @@
       </p:sp>
       <p:sp>
         <p:nvSpPr>
-          <p:cNvPr id="72" name="Text 69"/>
+          <p:cNvPr id="75" name="Text 72"/>
           <p:cNvSpPr txBox="1"/>
           <p:nvPr/>
         </p:nvSpPr>
@@ -28544,7 +28626,7 @@
                 <a:ea typeface="Malgun Gothic" pitchFamily="34" charset="-122"/>
                 <a:cs typeface="Malgun Gothic" pitchFamily="34" charset="-120"/>
               </a:rPr>
-              <a:t>계산식은 그대로 두었으니, 다른 발전소로도 그대로 옮길 수 있습니다.</a:t>
+              <a:t>계산식을 그대로 두었으니 다른 발전소에도 옮겨 쓸 수 있습니다.</a:t>
             </a:r>
             <a:endParaRPr lang="en-US" sz="1238" dirty="0"/>
           </a:p>
@@ -28882,7 +28964,7 @@
                 <a:ea typeface="Malgun Gothic" pitchFamily="34" charset="-122"/>
                 <a:cs typeface="Malgun Gothic" pitchFamily="34" charset="-120"/>
               </a:rPr>
-              <a:t>시험 40회에 예전 방법과 새 방법을 각각 써 보고 채점한 결과입니다.</a:t>
+              <a:t>같은 시험 40회에 예전 방법과 새 방법을 각각 써 봤습니다.</a:t>
             </a:r>
             <a:endParaRPr lang="en-US" sz="1350" dirty="0"/>
           </a:p>
@@ -30186,27 +30268,7 @@
                 <a:ea typeface="Malgun Gothic" pitchFamily="34" charset="-122"/>
                 <a:cs typeface="Malgun Gothic" pitchFamily="34" charset="-120"/>
               </a:rPr>
-              <a:t>한 회를 가리고 나머지로 그 회를 맞혀 보는 방식으로 채점했습니다.</a:t>
-            </a:r>
-            <a:endParaRPr lang="en-US" sz="863" dirty="0"/>
-          </a:p>
-          <a:p>
-            <a:pPr algn="l" indent="0" marL="0">
-              <a:lnSpc>
-                <a:spcPts val="1121"/>
-              </a:lnSpc>
-              <a:buNone/>
-            </a:pPr>
-            <a:r>
-              <a:rPr lang="en-US" sz="863" dirty="0">
-                <a:solidFill>
-                  <a:srgbClr val="8A8880"/>
-                </a:solidFill>
-                <a:latin typeface="Malgun Gothic" pitchFamily="34" charset="0"/>
-                <a:ea typeface="Malgun Gothic" pitchFamily="34" charset="-122"/>
-                <a:cs typeface="Malgun Gothic" pitchFamily="34" charset="-120"/>
-              </a:rPr>
-              <a:t>실제로 알린 기록이 아니라, 같은 데이터에 두 방법을 써 본 값입니다.</a:t>
+              <a:t>실제로 알린 기록이 아닙니다. 같은 데이터에 두 방법을 써 본 값입니다.</a:t>
             </a:r>
             <a:endParaRPr lang="en-US" sz="863" dirty="0"/>
           </a:p>
@@ -31012,7 +31074,7 @@
                 <a:ea typeface="Malgun Gothic" pitchFamily="34" charset="-122"/>
                 <a:cs typeface="Malgun Gothic" pitchFamily="34" charset="-120"/>
               </a:rPr>
-              <a:t>날짜와 시각을 넣고 실행하면 끝납니다.</a:t>
+              <a:t>날짜와 시각만 넣으면 끝납니다.</a:t>
             </a:r>
             <a:endParaRPr lang="en-US" sz="900" dirty="0"/>
           </a:p>
@@ -31226,7 +31288,7 @@
                 <a:ea typeface="Malgun Gothic" pitchFamily="34" charset="-122"/>
                 <a:cs typeface="Malgun Gothic" pitchFamily="34" charset="-120"/>
               </a:rPr>
-              <a:t>도구가 기존 엑셀과 같은 답을 내는지 맞춰 보다가 드러났습니다.</a:t>
+              <a:t>도구가 엑셀과 같은 답을 내는지 맞춰 보다가 드러났습니다.</a:t>
             </a:r>
             <a:endParaRPr lang="en-US" sz="1013" dirty="0"/>
           </a:p>
@@ -31246,7 +31308,7 @@
                 <a:ea typeface="Malgun Gothic" pitchFamily="34" charset="-122"/>
                 <a:cs typeface="Malgun Gothic" pitchFamily="34" charset="-120"/>
               </a:rPr>
-              <a:t>공기 압력을 우리는 7일 평균으로 쓰고 있었는데, 엑셀 수식은 5일 평균이었습니다.</a:t>
+              <a:t>대기압을 우리는 7일 평균으로 썼는데, 엑셀은 5일 평균이었습니다.</a:t>
             </a:r>
             <a:endParaRPr lang="en-US" sz="1013" dirty="0"/>
           </a:p>
@@ -31281,26 +31343,26 @@
         <p:spPr>
           <a:xfrm>
             <a:off x="6515100" y="4438650"/>
-            <a:ext cx="4800600" cy="192881"/>
-          </a:xfrm>
-          <a:prstGeom prst="rect">
-            <a:avLst/>
-          </a:prstGeom>
-          <a:noFill/>
-          <a:ln/>
-        </p:spPr>
-        <p:txBody>
-          <a:bodyPr wrap="square" lIns="0" tIns="0" rIns="0" bIns="0" rtlCol="0" anchor="t"/>
-          <a:lstStyle/>
-          <a:p>
-            <a:pPr algn="l" indent="0" marL="0">
-              <a:lnSpc>
-                <a:spcPts val="1519"/>
-              </a:lnSpc>
-              <a:buNone/>
-            </a:pPr>
-            <a:r>
-              <a:rPr lang="en-US" sz="1125" b="1" dirty="0">
+            <a:ext cx="4800600" cy="199311"/>
+          </a:xfrm>
+          <a:prstGeom prst="rect">
+            <a:avLst/>
+          </a:prstGeom>
+          <a:noFill/>
+          <a:ln/>
+        </p:spPr>
+        <p:txBody>
+          <a:bodyPr wrap="square" lIns="0" tIns="0" rIns="0" bIns="0" rtlCol="0" anchor="t"/>
+          <a:lstStyle/>
+          <a:p>
+            <a:pPr algn="l" indent="0" marL="0">
+              <a:lnSpc>
+                <a:spcPts val="1569"/>
+              </a:lnSpc>
+              <a:buNone/>
+            </a:pPr>
+            <a:r>
+              <a:rPr lang="en-US" sz="1163" b="1" dirty="0">
                 <a:solidFill>
                   <a:srgbClr val="EAE7E0"/>
                 </a:solidFill>
@@ -31308,9 +31370,9 @@
                 <a:ea typeface="Malgun Gothic" pitchFamily="34" charset="-122"/>
                 <a:cs typeface="Malgun Gothic" pitchFamily="34" charset="-120"/>
               </a:rPr>
-              <a:t>처방도 한 번 틀렸습니다.</a:t>
-            </a:r>
-            <a:endParaRPr lang="en-US" sz="1125" dirty="0"/>
+              <a:t>고치는 방법도 한 번 틀렸습니다.</a:t>
+            </a:r>
+            <a:endParaRPr lang="en-US" sz="1163" dirty="0"/>
           </a:p>
         </p:txBody>
       </p:sp>
@@ -31350,7 +31412,7 @@
                 <a:ea typeface="Malgun Gothic" pitchFamily="34" charset="-122"/>
                 <a:cs typeface="Malgun Gothic" pitchFamily="34" charset="-120"/>
               </a:rPr>
-              <a:t>처음에는 "고를 수 있게 만들자" 고 했습니다. 그런데 실무는 하나로 정해져 있어 고를 여지가 없었습니다.</a:t>
+              <a:t>처음에는 골라 쓰게 만들려 했습니다. 그런데 현장은 하나로 정해져 있었습니다.</a:t>
             </a:r>
             <a:endParaRPr lang="en-US" sz="975" dirty="0"/>
           </a:p>
@@ -31477,7 +31539,7 @@
                 <a:ea typeface="Malgun Gothic" pitchFamily="34" charset="-122"/>
                 <a:cs typeface="Malgun Gothic" pitchFamily="34" charset="-120"/>
               </a:rPr>
-              <a:t>숫자가 좋아진 것보다, 왜 그 숫자인지 말할 수 있게 된 것이 더 큽니다.</a:t>
+              <a:t>일은 줄고 숫자는 맞았습니다. 처음에 바라던 두 가지입니다.</a:t>
             </a:r>
             <a:endParaRPr lang="en-US" sz="1238" dirty="0"/>
           </a:p>
@@ -32243,7 +32305,7 @@
                 <a:ea typeface="Malgun Gothic" pitchFamily="34" charset="-122"/>
                 <a:cs typeface="Malgun Gothic" pitchFamily="34" charset="-120"/>
               </a:rPr>
-              <a:t>값이 늦게 오는 문제, 뽑는 방법에 따라 값이 다른 문제가 또 있었습니다. 32회분을 양쪽으로 뽑아 맞는 쪽을 정했습니다.</a:t>
+              <a:t>값이 늦게 오는 문제가 또 있었습니다. 뽑는 방법에 따라 값이 다르기도 했습니다. 32회분을 양쪽으로 뽑아 맞는 쪽을 정했습니다.</a:t>
             </a:r>
             <a:endParaRPr lang="en-US" sz="863" dirty="0"/>
           </a:p>

--- a/docs/ppt/위례_공급가능용량_최종발표_v3.pptx
+++ b/docs/ppt/위례_공급가능용량_최종발표_v3.pptx
@@ -2693,7 +2693,7 @@
                 <a:ea typeface="Consolas" pitchFamily="34" charset="-122"/>
                 <a:cs typeface="Consolas" pitchFamily="34" charset="-120"/>
               </a:rPr>
-              <a:t>08   </a:t>
+              <a:t>07   </a:t>
             </a:r>
             <a:pPr algn="l" indent="0" marL="0">
               <a:lnSpc>
@@ -2844,14 +2844,14 @@
         </p:nvSpPr>
         <p:spPr>
           <a:xfrm>
-            <a:off x="11468100" y="485775"/>
-            <a:ext cx="38100" cy="76200"/>
+            <a:off x="11468100" y="419100"/>
+            <a:ext cx="38100" cy="142875"/>
           </a:xfrm>
           <a:prstGeom prst="rect">
             <a:avLst/>
           </a:prstGeom>
           <a:solidFill>
-            <a:srgbClr val="8A8880"/>
+            <a:srgbClr val="EFB13C"/>
           </a:solidFill>
           <a:ln/>
         </p:spPr>

--- a/docs/ppt/위례_공급가능용량_최종발표_v3.pptx
+++ b/docs/ppt/위례_공급가능용량_최종발표_v3.pptx
@@ -4677,7 +4677,7 @@
                 <a:ea typeface="Malgun Gothic" pitchFamily="34" charset="-122"/>
                 <a:cs typeface="Malgun Gothic" pitchFamily="34" charset="-120"/>
               </a:rPr>
-              <a:t>두 가지입니다. 실적을 쌓아 더 정확하게, 그리고 다른 발전소로.</a:t>
+              <a:t>실적을 쌓아 더 정확하게 만들고, 입찰을 하는 다른 사업소로 넓힙니다.</a:t>
             </a:r>
             <a:endParaRPr lang="en-US" sz="1275" dirty="0"/>
           </a:p>
@@ -4691,8 +4691,8 @@
         </p:nvSpPr>
         <p:spPr>
           <a:xfrm>
-            <a:off x="685800" y="1781175"/>
-            <a:ext cx="5295900" cy="2733675"/>
+            <a:off x="685800" y="1724025"/>
+            <a:ext cx="10820400" cy="1514475"/>
           </a:xfrm>
           <a:prstGeom prst="rect">
             <a:avLst/>
@@ -4716,8 +4716,8 @@
         </p:nvSpPr>
         <p:spPr>
           <a:xfrm>
-            <a:off x="685800" y="1657350"/>
-            <a:ext cx="2171700" cy="247650"/>
+            <a:off x="685800" y="1600200"/>
+            <a:ext cx="2028825" cy="247650"/>
           </a:xfrm>
           <a:prstGeom prst="rect">
             <a:avLst>
@@ -4738,7 +4738,7 @@
         </p:nvSpPr>
         <p:spPr>
           <a:xfrm>
-            <a:off x="819150" y="1714500"/>
+            <a:off x="819150" y="1657350"/>
             <a:ext cx="152400" cy="142875"/>
           </a:xfrm>
           <a:prstGeom prst="rect">
@@ -4780,8 +4780,8 @@
         </p:nvSpPr>
         <p:spPr>
           <a:xfrm>
-            <a:off x="1009650" y="1714500"/>
-            <a:ext cx="1733550" cy="154305"/>
+            <a:off x="1009650" y="1657350"/>
+            <a:ext cx="1590675" cy="154305"/>
           </a:xfrm>
           <a:prstGeom prst="rect">
             <a:avLst/>
@@ -4808,7 +4808,7 @@
                 <a:ea typeface="Malgun Gothic" pitchFamily="34" charset="-122"/>
                 <a:cs typeface="Malgun Gothic" pitchFamily="34" charset="-120"/>
               </a:rPr>
-              <a:t>실적을 쌓아 더 정확하게</a:t>
+              <a:t>지금 어디가 비어 있나</a:t>
             </a:r>
             <a:endParaRPr lang="en-US" sz="1013" dirty="0"/>
           </a:p>
@@ -4822,8 +4822,8 @@
         </p:nvSpPr>
         <p:spPr>
           <a:xfrm>
-            <a:off x="4067175" y="1847850"/>
-            <a:ext cx="1800225" cy="125730"/>
+            <a:off x="9515475" y="1790700"/>
+            <a:ext cx="1876425" cy="125730"/>
           </a:xfrm>
           <a:prstGeom prst="rect">
             <a:avLst/>
@@ -4850,7 +4850,7 @@
                 <a:ea typeface="Malgun Gothic" pitchFamily="34" charset="-122"/>
                 <a:cs typeface="Malgun Gothic" pitchFamily="34" charset="-120"/>
               </a:rPr>
-              <a:t>앞부터 배워 뒤를 맞혀 본 결과</a:t>
+              <a:t>누적 40회 · 온도대별 시험 횟수</a:t>
             </a:r>
             <a:endParaRPr lang="en-US" sz="825" dirty="0"/>
           </a:p>
@@ -4864,424 +4864,8 @@
         </p:nvSpPr>
         <p:spPr>
           <a:xfrm>
-            <a:off x="1104900" y="2514600"/>
-            <a:ext cx="838200" cy="1028700"/>
-          </a:xfrm>
-          <a:prstGeom prst="rect">
-            <a:avLst/>
-          </a:prstGeom>
-          <a:solidFill>
-            <a:srgbClr val="9AA3AC"/>
-          </a:solidFill>
-          <a:ln/>
-        </p:spPr>
-      </p:sp>
-      <p:sp>
-        <p:nvSpPr>
-          <p:cNvPr id="21" name="Text 19"/>
-          <p:cNvSpPr txBox="1"/>
-          <p:nvPr/>
-        </p:nvSpPr>
-        <p:spPr>
-          <a:xfrm>
-            <a:off x="1104900" y="2305050"/>
-            <a:ext cx="838200" cy="171450"/>
-          </a:xfrm>
-          <a:prstGeom prst="rect">
-            <a:avLst/>
-          </a:prstGeom>
-          <a:noFill/>
-          <a:ln/>
-        </p:spPr>
-        <p:txBody>
-          <a:bodyPr wrap="square" lIns="0" tIns="0" rIns="0" bIns="0" rtlCol="0" anchor="t"/>
-          <a:lstStyle/>
-          <a:p>
-            <a:pPr algn="ctr" indent="0" marL="0">
-              <a:lnSpc>
-                <a:spcPts val="1350"/>
-              </a:lnSpc>
-              <a:buNone/>
-            </a:pPr>
-            <a:r>
-              <a:rPr lang="en-US" sz="1125" b="1" dirty="0">
-                <a:solidFill>
-                  <a:srgbClr val="6E7780"/>
-                </a:solidFill>
-                <a:latin typeface="Consolas" pitchFamily="34" charset="0"/>
-                <a:ea typeface="Consolas" pitchFamily="34" charset="-122"/>
-                <a:cs typeface="Consolas" pitchFamily="34" charset="-120"/>
-              </a:rPr>
-              <a:t>2.26</a:t>
-            </a:r>
-            <a:endParaRPr lang="en-US" sz="1125" dirty="0"/>
-          </a:p>
-        </p:txBody>
-      </p:sp>
-      <p:sp>
-        <p:nvSpPr>
-          <p:cNvPr id="22" name="Text 20"/>
-          <p:cNvSpPr txBox="1"/>
-          <p:nvPr/>
-        </p:nvSpPr>
-        <p:spPr>
-          <a:xfrm>
-            <a:off x="1104900" y="3619500"/>
-            <a:ext cx="838200" cy="130969"/>
-          </a:xfrm>
-          <a:prstGeom prst="rect">
-            <a:avLst/>
-          </a:prstGeom>
-          <a:noFill/>
-          <a:ln/>
-        </p:spPr>
-        <p:txBody>
-          <a:bodyPr wrap="square" lIns="0" tIns="0" rIns="0" bIns="0" rtlCol="0" anchor="t"/>
-          <a:lstStyle/>
-          <a:p>
-            <a:pPr algn="ctr" indent="0" marL="0">
-              <a:lnSpc>
-                <a:spcPts val="1031"/>
-              </a:lnSpc>
-              <a:buNone/>
-            </a:pPr>
-            <a:r>
-              <a:rPr lang="en-US" sz="825" dirty="0">
-                <a:solidFill>
-                  <a:srgbClr val="5A5A5A"/>
-                </a:solidFill>
-                <a:latin typeface="Malgun Gothic" pitchFamily="34" charset="0"/>
-                <a:ea typeface="Malgun Gothic" pitchFamily="34" charset="-122"/>
-                <a:cs typeface="Malgun Gothic" pitchFamily="34" charset="-120"/>
-              </a:rPr>
-              <a:t>13~19회</a:t>
-            </a:r>
-            <a:endParaRPr lang="en-US" sz="825" dirty="0"/>
-          </a:p>
-        </p:txBody>
-      </p:sp>
-      <p:sp>
-        <p:nvSpPr>
-          <p:cNvPr id="23" name="Shape 21"/>
-          <p:cNvSpPr/>
-          <p:nvPr/>
-        </p:nvSpPr>
-        <p:spPr>
-          <a:xfrm>
-            <a:off x="2209800" y="2514600"/>
-            <a:ext cx="838200" cy="1028700"/>
-          </a:xfrm>
-          <a:prstGeom prst="rect">
-            <a:avLst/>
-          </a:prstGeom>
-          <a:solidFill>
-            <a:srgbClr val="9AA3AC"/>
-          </a:solidFill>
-          <a:ln/>
-        </p:spPr>
-      </p:sp>
-      <p:sp>
-        <p:nvSpPr>
-          <p:cNvPr id="24" name="Text 22"/>
-          <p:cNvSpPr txBox="1"/>
-          <p:nvPr/>
-        </p:nvSpPr>
-        <p:spPr>
-          <a:xfrm>
-            <a:off x="2209800" y="2305050"/>
-            <a:ext cx="838200" cy="171450"/>
-          </a:xfrm>
-          <a:prstGeom prst="rect">
-            <a:avLst/>
-          </a:prstGeom>
-          <a:noFill/>
-          <a:ln/>
-        </p:spPr>
-        <p:txBody>
-          <a:bodyPr wrap="square" lIns="0" tIns="0" rIns="0" bIns="0" rtlCol="0" anchor="t"/>
-          <a:lstStyle/>
-          <a:p>
-            <a:pPr algn="ctr" indent="0" marL="0">
-              <a:lnSpc>
-                <a:spcPts val="1350"/>
-              </a:lnSpc>
-              <a:buNone/>
-            </a:pPr>
-            <a:r>
-              <a:rPr lang="en-US" sz="1125" b="1" dirty="0">
-                <a:solidFill>
-                  <a:srgbClr val="6E7780"/>
-                </a:solidFill>
-                <a:latin typeface="Consolas" pitchFamily="34" charset="0"/>
-                <a:ea typeface="Consolas" pitchFamily="34" charset="-122"/>
-                <a:cs typeface="Consolas" pitchFamily="34" charset="-120"/>
-              </a:rPr>
-              <a:t>2.26</a:t>
-            </a:r>
-            <a:endParaRPr lang="en-US" sz="1125" dirty="0"/>
-          </a:p>
-        </p:txBody>
-      </p:sp>
-      <p:sp>
-        <p:nvSpPr>
-          <p:cNvPr id="25" name="Text 23"/>
-          <p:cNvSpPr txBox="1"/>
-          <p:nvPr/>
-        </p:nvSpPr>
-        <p:spPr>
-          <a:xfrm>
-            <a:off x="2209800" y="3619500"/>
-            <a:ext cx="838200" cy="130969"/>
-          </a:xfrm>
-          <a:prstGeom prst="rect">
-            <a:avLst/>
-          </a:prstGeom>
-          <a:noFill/>
-          <a:ln/>
-        </p:spPr>
-        <p:txBody>
-          <a:bodyPr wrap="square" lIns="0" tIns="0" rIns="0" bIns="0" rtlCol="0" anchor="t"/>
-          <a:lstStyle/>
-          <a:p>
-            <a:pPr algn="ctr" indent="0" marL="0">
-              <a:lnSpc>
-                <a:spcPts val="1031"/>
-              </a:lnSpc>
-              <a:buNone/>
-            </a:pPr>
-            <a:r>
-              <a:rPr lang="en-US" sz="825" dirty="0">
-                <a:solidFill>
-                  <a:srgbClr val="5A5A5A"/>
-                </a:solidFill>
-                <a:latin typeface="Malgun Gothic" pitchFamily="34" charset="0"/>
-                <a:ea typeface="Malgun Gothic" pitchFamily="34" charset="-122"/>
-                <a:cs typeface="Malgun Gothic" pitchFamily="34" charset="-120"/>
-              </a:rPr>
-              <a:t>20~26회</a:t>
-            </a:r>
-            <a:endParaRPr lang="en-US" sz="825" dirty="0"/>
-          </a:p>
-        </p:txBody>
-      </p:sp>
-      <p:sp>
-        <p:nvSpPr>
-          <p:cNvPr id="26" name="Shape 24"/>
-          <p:cNvSpPr/>
-          <p:nvPr/>
-        </p:nvSpPr>
-        <p:spPr>
-          <a:xfrm>
-            <a:off x="3314700" y="3133725"/>
-            <a:ext cx="838200" cy="409575"/>
-          </a:xfrm>
-          <a:prstGeom prst="rect">
-            <a:avLst/>
-          </a:prstGeom>
-          <a:solidFill>
-            <a:srgbClr val="EA002C"/>
-          </a:solidFill>
-          <a:ln/>
-        </p:spPr>
-      </p:sp>
-      <p:sp>
-        <p:nvSpPr>
-          <p:cNvPr id="27" name="Text 25"/>
-          <p:cNvSpPr txBox="1"/>
-          <p:nvPr/>
-        </p:nvSpPr>
-        <p:spPr>
-          <a:xfrm>
-            <a:off x="3314700" y="2924175"/>
-            <a:ext cx="838200" cy="171450"/>
-          </a:xfrm>
-          <a:prstGeom prst="rect">
-            <a:avLst/>
-          </a:prstGeom>
-          <a:noFill/>
-          <a:ln/>
-        </p:spPr>
-        <p:txBody>
-          <a:bodyPr wrap="square" lIns="0" tIns="0" rIns="0" bIns="0" rtlCol="0" anchor="t"/>
-          <a:lstStyle/>
-          <a:p>
-            <a:pPr algn="ctr" indent="0" marL="0">
-              <a:lnSpc>
-                <a:spcPts val="1350"/>
-              </a:lnSpc>
-              <a:buNone/>
-            </a:pPr>
-            <a:r>
-              <a:rPr lang="en-US" sz="1125" b="1" dirty="0">
-                <a:solidFill>
-                  <a:srgbClr val="EA002C"/>
-                </a:solidFill>
-                <a:latin typeface="Consolas" pitchFamily="34" charset="0"/>
-                <a:ea typeface="Consolas" pitchFamily="34" charset="-122"/>
-                <a:cs typeface="Consolas" pitchFamily="34" charset="-120"/>
-              </a:rPr>
-              <a:t>0.91</a:t>
-            </a:r>
-            <a:endParaRPr lang="en-US" sz="1125" dirty="0"/>
-          </a:p>
-        </p:txBody>
-      </p:sp>
-      <p:sp>
-        <p:nvSpPr>
-          <p:cNvPr id="28" name="Text 26"/>
-          <p:cNvSpPr txBox="1"/>
-          <p:nvPr/>
-        </p:nvSpPr>
-        <p:spPr>
-          <a:xfrm>
-            <a:off x="3314700" y="3619500"/>
-            <a:ext cx="838200" cy="130969"/>
-          </a:xfrm>
-          <a:prstGeom prst="rect">
-            <a:avLst/>
-          </a:prstGeom>
-          <a:noFill/>
-          <a:ln/>
-        </p:spPr>
-        <p:txBody>
-          <a:bodyPr wrap="square" lIns="0" tIns="0" rIns="0" bIns="0" rtlCol="0" anchor="t"/>
-          <a:lstStyle/>
-          <a:p>
-            <a:pPr algn="ctr" indent="0" marL="0">
-              <a:lnSpc>
-                <a:spcPts val="1031"/>
-              </a:lnSpc>
-              <a:buNone/>
-            </a:pPr>
-            <a:r>
-              <a:rPr lang="en-US" sz="825" dirty="0">
-                <a:solidFill>
-                  <a:srgbClr val="5A5A5A"/>
-                </a:solidFill>
-                <a:latin typeface="Malgun Gothic" pitchFamily="34" charset="0"/>
-                <a:ea typeface="Malgun Gothic" pitchFamily="34" charset="-122"/>
-                <a:cs typeface="Malgun Gothic" pitchFamily="34" charset="-120"/>
-              </a:rPr>
-              <a:t>27~33회</a:t>
-            </a:r>
-            <a:endParaRPr lang="en-US" sz="825" dirty="0"/>
-          </a:p>
-        </p:txBody>
-      </p:sp>
-      <p:sp>
-        <p:nvSpPr>
-          <p:cNvPr id="29" name="Shape 27"/>
-          <p:cNvSpPr/>
-          <p:nvPr/>
-        </p:nvSpPr>
-        <p:spPr>
-          <a:xfrm>
-            <a:off x="4419600" y="3000375"/>
-            <a:ext cx="838200" cy="542925"/>
-          </a:xfrm>
-          <a:prstGeom prst="rect">
-            <a:avLst/>
-          </a:prstGeom>
-          <a:solidFill>
-            <a:srgbClr val="EA002C"/>
-          </a:solidFill>
-          <a:ln/>
-        </p:spPr>
-      </p:sp>
-      <p:sp>
-        <p:nvSpPr>
-          <p:cNvPr id="30" name="Text 28"/>
-          <p:cNvSpPr txBox="1"/>
-          <p:nvPr/>
-        </p:nvSpPr>
-        <p:spPr>
-          <a:xfrm>
-            <a:off x="4419600" y="2790825"/>
-            <a:ext cx="838200" cy="171450"/>
-          </a:xfrm>
-          <a:prstGeom prst="rect">
-            <a:avLst/>
-          </a:prstGeom>
-          <a:noFill/>
-          <a:ln/>
-        </p:spPr>
-        <p:txBody>
-          <a:bodyPr wrap="square" lIns="0" tIns="0" rIns="0" bIns="0" rtlCol="0" anchor="t"/>
-          <a:lstStyle/>
-          <a:p>
-            <a:pPr algn="ctr" indent="0" marL="0">
-              <a:lnSpc>
-                <a:spcPts val="1350"/>
-              </a:lnSpc>
-              <a:buNone/>
-            </a:pPr>
-            <a:r>
-              <a:rPr lang="en-US" sz="1125" b="1" dirty="0">
-                <a:solidFill>
-                  <a:srgbClr val="EA002C"/>
-                </a:solidFill>
-                <a:latin typeface="Consolas" pitchFamily="34" charset="0"/>
-                <a:ea typeface="Consolas" pitchFamily="34" charset="-122"/>
-                <a:cs typeface="Consolas" pitchFamily="34" charset="-120"/>
-              </a:rPr>
-              <a:t>1.19</a:t>
-            </a:r>
-            <a:endParaRPr lang="en-US" sz="1125" dirty="0"/>
-          </a:p>
-        </p:txBody>
-      </p:sp>
-      <p:sp>
-        <p:nvSpPr>
-          <p:cNvPr id="31" name="Text 29"/>
-          <p:cNvSpPr txBox="1"/>
-          <p:nvPr/>
-        </p:nvSpPr>
-        <p:spPr>
-          <a:xfrm>
-            <a:off x="4419600" y="3619500"/>
-            <a:ext cx="838200" cy="130969"/>
-          </a:xfrm>
-          <a:prstGeom prst="rect">
-            <a:avLst/>
-          </a:prstGeom>
-          <a:noFill/>
-          <a:ln/>
-        </p:spPr>
-        <p:txBody>
-          <a:bodyPr wrap="square" lIns="0" tIns="0" rIns="0" bIns="0" rtlCol="0" anchor="t"/>
-          <a:lstStyle/>
-          <a:p>
-            <a:pPr algn="ctr" indent="0" marL="0">
-              <a:lnSpc>
-                <a:spcPts val="1031"/>
-              </a:lnSpc>
-              <a:buNone/>
-            </a:pPr>
-            <a:r>
-              <a:rPr lang="en-US" sz="825" dirty="0">
-                <a:solidFill>
-                  <a:srgbClr val="5A5A5A"/>
-                </a:solidFill>
-                <a:latin typeface="Malgun Gothic" pitchFamily="34" charset="0"/>
-                <a:ea typeface="Malgun Gothic" pitchFamily="34" charset="-122"/>
-                <a:cs typeface="Malgun Gothic" pitchFamily="34" charset="-120"/>
-              </a:rPr>
-              <a:t>34~40회</a:t>
-            </a:r>
-            <a:endParaRPr lang="en-US" sz="825" dirty="0"/>
-          </a:p>
-        </p:txBody>
-      </p:sp>
-      <p:sp>
-        <p:nvSpPr>
-          <p:cNvPr id="32" name="Shape 30"/>
-          <p:cNvSpPr/>
-          <p:nvPr/>
-        </p:nvSpPr>
-        <p:spPr>
-          <a:xfrm>
-            <a:off x="914400" y="3543300"/>
-            <a:ext cx="4876800" cy="0"/>
+            <a:off x="876300" y="2819400"/>
+            <a:ext cx="10382250" cy="0"/>
           </a:xfrm>
           <a:prstGeom prst="line">
             <a:avLst/>
@@ -5297,41 +4881,907 @@
       </p:sp>
       <p:sp>
         <p:nvSpPr>
-          <p:cNvPr id="33" name="Text 31"/>
-          <p:cNvSpPr txBox="1"/>
-          <p:nvPr/>
-        </p:nvSpPr>
-        <p:spPr>
-          <a:xfrm>
-            <a:off x="876300" y="2019300"/>
-            <a:ext cx="2857500" cy="125016"/>
-          </a:xfrm>
-          <a:prstGeom prst="rect">
-            <a:avLst/>
-          </a:prstGeom>
-          <a:noFill/>
-          <a:ln/>
-        </p:spPr>
-        <p:txBody>
-          <a:bodyPr wrap="square" lIns="0" tIns="0" rIns="0" bIns="0" rtlCol="0" anchor="t"/>
-          <a:lstStyle/>
-          <a:p>
-            <a:pPr algn="l" indent="0" marL="0">
-              <a:lnSpc>
-                <a:spcPts val="984"/>
+          <p:cNvPr id="21" name="Shape 19"/>
+          <p:cNvSpPr/>
+          <p:nvPr/>
+        </p:nvSpPr>
+        <p:spPr>
+          <a:xfrm>
+            <a:off x="1276350" y="2743200"/>
+            <a:ext cx="419100" cy="76200"/>
+          </a:xfrm>
+          <a:prstGeom prst="rect">
+            <a:avLst/>
+          </a:prstGeom>
+          <a:solidFill>
+            <a:srgbClr val="FF6F0F"/>
+          </a:solidFill>
+          <a:ln/>
+        </p:spPr>
+      </p:sp>
+      <p:sp>
+        <p:nvSpPr>
+          <p:cNvPr id="22" name="Text 20"/>
+          <p:cNvSpPr txBox="1"/>
+          <p:nvPr/>
+        </p:nvSpPr>
+        <p:spPr>
+          <a:xfrm>
+            <a:off x="876300" y="2552700"/>
+            <a:ext cx="1219200" cy="171450"/>
+          </a:xfrm>
+          <a:prstGeom prst="rect">
+            <a:avLst/>
+          </a:prstGeom>
+          <a:noFill/>
+          <a:ln/>
+        </p:spPr>
+        <p:txBody>
+          <a:bodyPr wrap="square" lIns="0" tIns="0" rIns="0" bIns="0" rtlCol="0" anchor="t"/>
+          <a:lstStyle/>
+          <a:p>
+            <a:pPr algn="ctr" indent="0" marL="0">
+              <a:lnSpc>
+                <a:spcPts val="1350"/>
+              </a:lnSpc>
+              <a:buNone/>
+            </a:pPr>
+            <a:r>
+              <a:rPr lang="en-US" sz="1125" b="1" dirty="0">
+                <a:solidFill>
+                  <a:srgbClr val="FF6F0F"/>
+                </a:solidFill>
+                <a:latin typeface="Consolas" pitchFamily="34" charset="0"/>
+                <a:ea typeface="Consolas" pitchFamily="34" charset="-122"/>
+                <a:cs typeface="Consolas" pitchFamily="34" charset="-120"/>
+              </a:rPr>
+              <a:t>2회</a:t>
+            </a:r>
+            <a:endParaRPr lang="en-US" sz="1125" dirty="0"/>
+          </a:p>
+        </p:txBody>
+      </p:sp>
+      <p:sp>
+        <p:nvSpPr>
+          <p:cNvPr id="23" name="Text 21"/>
+          <p:cNvSpPr txBox="1"/>
+          <p:nvPr/>
+        </p:nvSpPr>
+        <p:spPr>
+          <a:xfrm>
+            <a:off x="876300" y="2895600"/>
+            <a:ext cx="1219200" cy="120015"/>
+          </a:xfrm>
+          <a:prstGeom prst="rect">
+            <a:avLst/>
+          </a:prstGeom>
+          <a:noFill/>
+          <a:ln/>
+        </p:spPr>
+        <p:txBody>
+          <a:bodyPr wrap="square" lIns="0" tIns="0" rIns="0" bIns="0" rtlCol="0" anchor="t"/>
+          <a:lstStyle/>
+          <a:p>
+            <a:pPr algn="ctr" indent="0" marL="0">
+              <a:lnSpc>
+                <a:spcPts val="945"/>
               </a:lnSpc>
               <a:buNone/>
             </a:pPr>
             <a:r>
               <a:rPr lang="en-US" sz="788" dirty="0">
                 <a:solidFill>
+                  <a:srgbClr val="5A5A5A"/>
+                </a:solidFill>
+                <a:latin typeface="Malgun Gothic" pitchFamily="34" charset="0"/>
+                <a:ea typeface="Malgun Gothic" pitchFamily="34" charset="-122"/>
+                <a:cs typeface="Malgun Gothic" pitchFamily="34" charset="-120"/>
+              </a:rPr>
+              <a:t>−14 ~ 0℃</a:t>
+            </a:r>
+            <a:endParaRPr lang="en-US" sz="788" dirty="0"/>
+          </a:p>
+        </p:txBody>
+      </p:sp>
+      <p:sp>
+        <p:nvSpPr>
+          <p:cNvPr id="24" name="Shape 22"/>
+          <p:cNvSpPr/>
+          <p:nvPr/>
+        </p:nvSpPr>
+        <p:spPr>
+          <a:xfrm>
+            <a:off x="2095500" y="2133600"/>
+            <a:ext cx="0" cy="647700"/>
+          </a:xfrm>
+          <a:prstGeom prst="line">
+            <a:avLst/>
+          </a:prstGeom>
+          <a:noFill/>
+          <a:ln w="12700">
+            <a:solidFill>
+              <a:srgbClr val="DEE3E9"/>
+            </a:solidFill>
+            <a:prstDash val="solid"/>
+          </a:ln>
+        </p:spPr>
+      </p:sp>
+      <p:sp>
+        <p:nvSpPr>
+          <p:cNvPr id="25" name="Shape 23"/>
+          <p:cNvSpPr/>
+          <p:nvPr/>
+        </p:nvSpPr>
+        <p:spPr>
+          <a:xfrm>
+            <a:off x="2762250" y="2543175"/>
+            <a:ext cx="419100" cy="276225"/>
+          </a:xfrm>
+          <a:prstGeom prst="rect">
+            <a:avLst/>
+          </a:prstGeom>
+          <a:solidFill>
+            <a:srgbClr val="EA002C"/>
+          </a:solidFill>
+          <a:ln/>
+        </p:spPr>
+      </p:sp>
+      <p:sp>
+        <p:nvSpPr>
+          <p:cNvPr id="26" name="Text 24"/>
+          <p:cNvSpPr txBox="1"/>
+          <p:nvPr/>
+        </p:nvSpPr>
+        <p:spPr>
+          <a:xfrm>
+            <a:off x="2362200" y="2352675"/>
+            <a:ext cx="1219200" cy="171450"/>
+          </a:xfrm>
+          <a:prstGeom prst="rect">
+            <a:avLst/>
+          </a:prstGeom>
+          <a:noFill/>
+          <a:ln/>
+        </p:spPr>
+        <p:txBody>
+          <a:bodyPr wrap="square" lIns="0" tIns="0" rIns="0" bIns="0" rtlCol="0" anchor="t"/>
+          <a:lstStyle/>
+          <a:p>
+            <a:pPr algn="ctr" indent="0" marL="0">
+              <a:lnSpc>
+                <a:spcPts val="1350"/>
+              </a:lnSpc>
+              <a:buNone/>
+            </a:pPr>
+            <a:r>
+              <a:rPr lang="en-US" sz="1125" b="1" dirty="0">
+                <a:solidFill>
+                  <a:srgbClr val="EA002C"/>
+                </a:solidFill>
+                <a:latin typeface="Consolas" pitchFamily="34" charset="0"/>
+                <a:ea typeface="Consolas" pitchFamily="34" charset="-122"/>
+                <a:cs typeface="Consolas" pitchFamily="34" charset="-120"/>
+              </a:rPr>
+              <a:t>7회</a:t>
+            </a:r>
+            <a:endParaRPr lang="en-US" sz="1125" dirty="0"/>
+          </a:p>
+        </p:txBody>
+      </p:sp>
+      <p:sp>
+        <p:nvSpPr>
+          <p:cNvPr id="27" name="Text 25"/>
+          <p:cNvSpPr txBox="1"/>
+          <p:nvPr/>
+        </p:nvSpPr>
+        <p:spPr>
+          <a:xfrm>
+            <a:off x="2362200" y="2895600"/>
+            <a:ext cx="1219200" cy="120015"/>
+          </a:xfrm>
+          <a:prstGeom prst="rect">
+            <a:avLst/>
+          </a:prstGeom>
+          <a:noFill/>
+          <a:ln/>
+        </p:spPr>
+        <p:txBody>
+          <a:bodyPr wrap="square" lIns="0" tIns="0" rIns="0" bIns="0" rtlCol="0" anchor="t"/>
+          <a:lstStyle/>
+          <a:p>
+            <a:pPr algn="ctr" indent="0" marL="0">
+              <a:lnSpc>
+                <a:spcPts val="945"/>
+              </a:lnSpc>
+              <a:buNone/>
+            </a:pPr>
+            <a:r>
+              <a:rPr lang="en-US" sz="788" dirty="0">
+                <a:solidFill>
+                  <a:srgbClr val="5A5A5A"/>
+                </a:solidFill>
+                <a:latin typeface="Malgun Gothic" pitchFamily="34" charset="0"/>
+                <a:ea typeface="Malgun Gothic" pitchFamily="34" charset="-122"/>
+                <a:cs typeface="Malgun Gothic" pitchFamily="34" charset="-120"/>
+              </a:rPr>
+              <a:t>0 ~ 10℃</a:t>
+            </a:r>
+            <a:endParaRPr lang="en-US" sz="788" dirty="0"/>
+          </a:p>
+        </p:txBody>
+      </p:sp>
+      <p:sp>
+        <p:nvSpPr>
+          <p:cNvPr id="28" name="Shape 26"/>
+          <p:cNvSpPr/>
+          <p:nvPr/>
+        </p:nvSpPr>
+        <p:spPr>
+          <a:xfrm>
+            <a:off x="3581400" y="2133600"/>
+            <a:ext cx="0" cy="647700"/>
+          </a:xfrm>
+          <a:prstGeom prst="line">
+            <a:avLst/>
+          </a:prstGeom>
+          <a:noFill/>
+          <a:ln w="12700">
+            <a:solidFill>
+              <a:srgbClr val="DEE3E9"/>
+            </a:solidFill>
+            <a:prstDash val="solid"/>
+          </a:ln>
+        </p:spPr>
+      </p:sp>
+      <p:sp>
+        <p:nvSpPr>
+          <p:cNvPr id="29" name="Shape 27"/>
+          <p:cNvSpPr/>
+          <p:nvPr/>
+        </p:nvSpPr>
+        <p:spPr>
+          <a:xfrm>
+            <a:off x="4248150" y="2581275"/>
+            <a:ext cx="419100" cy="238125"/>
+          </a:xfrm>
+          <a:prstGeom prst="rect">
+            <a:avLst/>
+          </a:prstGeom>
+          <a:solidFill>
+            <a:srgbClr val="EA002C"/>
+          </a:solidFill>
+          <a:ln/>
+        </p:spPr>
+      </p:sp>
+      <p:sp>
+        <p:nvSpPr>
+          <p:cNvPr id="30" name="Text 28"/>
+          <p:cNvSpPr txBox="1"/>
+          <p:nvPr/>
+        </p:nvSpPr>
+        <p:spPr>
+          <a:xfrm>
+            <a:off x="3848100" y="2390775"/>
+            <a:ext cx="1219200" cy="171450"/>
+          </a:xfrm>
+          <a:prstGeom prst="rect">
+            <a:avLst/>
+          </a:prstGeom>
+          <a:noFill/>
+          <a:ln/>
+        </p:spPr>
+        <p:txBody>
+          <a:bodyPr wrap="square" lIns="0" tIns="0" rIns="0" bIns="0" rtlCol="0" anchor="t"/>
+          <a:lstStyle/>
+          <a:p>
+            <a:pPr algn="ctr" indent="0" marL="0">
+              <a:lnSpc>
+                <a:spcPts val="1350"/>
+              </a:lnSpc>
+              <a:buNone/>
+            </a:pPr>
+            <a:r>
+              <a:rPr lang="en-US" sz="1125" b="1" dirty="0">
+                <a:solidFill>
+                  <a:srgbClr val="EA002C"/>
+                </a:solidFill>
+                <a:latin typeface="Consolas" pitchFamily="34" charset="0"/>
+                <a:ea typeface="Consolas" pitchFamily="34" charset="-122"/>
+                <a:cs typeface="Consolas" pitchFamily="34" charset="-120"/>
+              </a:rPr>
+              <a:t>6회</a:t>
+            </a:r>
+            <a:endParaRPr lang="en-US" sz="1125" dirty="0"/>
+          </a:p>
+        </p:txBody>
+      </p:sp>
+      <p:sp>
+        <p:nvSpPr>
+          <p:cNvPr id="31" name="Text 29"/>
+          <p:cNvSpPr txBox="1"/>
+          <p:nvPr/>
+        </p:nvSpPr>
+        <p:spPr>
+          <a:xfrm>
+            <a:off x="3848100" y="2895600"/>
+            <a:ext cx="1219200" cy="120015"/>
+          </a:xfrm>
+          <a:prstGeom prst="rect">
+            <a:avLst/>
+          </a:prstGeom>
+          <a:noFill/>
+          <a:ln/>
+        </p:spPr>
+        <p:txBody>
+          <a:bodyPr wrap="square" lIns="0" tIns="0" rIns="0" bIns="0" rtlCol="0" anchor="t"/>
+          <a:lstStyle/>
+          <a:p>
+            <a:pPr algn="ctr" indent="0" marL="0">
+              <a:lnSpc>
+                <a:spcPts val="945"/>
+              </a:lnSpc>
+              <a:buNone/>
+            </a:pPr>
+            <a:r>
+              <a:rPr lang="en-US" sz="788" dirty="0">
+                <a:solidFill>
+                  <a:srgbClr val="5A5A5A"/>
+                </a:solidFill>
+                <a:latin typeface="Malgun Gothic" pitchFamily="34" charset="0"/>
+                <a:ea typeface="Malgun Gothic" pitchFamily="34" charset="-122"/>
+                <a:cs typeface="Malgun Gothic" pitchFamily="34" charset="-120"/>
+              </a:rPr>
+              <a:t>10 ~ 15℃</a:t>
+            </a:r>
+            <a:endParaRPr lang="en-US" sz="788" dirty="0"/>
+          </a:p>
+        </p:txBody>
+      </p:sp>
+      <p:sp>
+        <p:nvSpPr>
+          <p:cNvPr id="32" name="Shape 30"/>
+          <p:cNvSpPr/>
+          <p:nvPr/>
+        </p:nvSpPr>
+        <p:spPr>
+          <a:xfrm>
+            <a:off x="5067300" y="2133600"/>
+            <a:ext cx="0" cy="647700"/>
+          </a:xfrm>
+          <a:prstGeom prst="line">
+            <a:avLst/>
+          </a:prstGeom>
+          <a:noFill/>
+          <a:ln w="12700">
+            <a:solidFill>
+              <a:srgbClr val="DEE3E9"/>
+            </a:solidFill>
+            <a:prstDash val="solid"/>
+          </a:ln>
+        </p:spPr>
+      </p:sp>
+      <p:sp>
+        <p:nvSpPr>
+          <p:cNvPr id="33" name="Shape 31"/>
+          <p:cNvSpPr/>
+          <p:nvPr/>
+        </p:nvSpPr>
+        <p:spPr>
+          <a:xfrm>
+            <a:off x="5734050" y="2705100"/>
+            <a:ext cx="419100" cy="114300"/>
+          </a:xfrm>
+          <a:prstGeom prst="rect">
+            <a:avLst/>
+          </a:prstGeom>
+          <a:solidFill>
+            <a:srgbClr val="FF6F0F"/>
+          </a:solidFill>
+          <a:ln/>
+        </p:spPr>
+      </p:sp>
+      <p:sp>
+        <p:nvSpPr>
+          <p:cNvPr id="34" name="Text 32"/>
+          <p:cNvSpPr txBox="1"/>
+          <p:nvPr/>
+        </p:nvSpPr>
+        <p:spPr>
+          <a:xfrm>
+            <a:off x="5334000" y="2514600"/>
+            <a:ext cx="1219200" cy="171450"/>
+          </a:xfrm>
+          <a:prstGeom prst="rect">
+            <a:avLst/>
+          </a:prstGeom>
+          <a:noFill/>
+          <a:ln/>
+        </p:spPr>
+        <p:txBody>
+          <a:bodyPr wrap="square" lIns="0" tIns="0" rIns="0" bIns="0" rtlCol="0" anchor="t"/>
+          <a:lstStyle/>
+          <a:p>
+            <a:pPr algn="ctr" indent="0" marL="0">
+              <a:lnSpc>
+                <a:spcPts val="1350"/>
+              </a:lnSpc>
+              <a:buNone/>
+            </a:pPr>
+            <a:r>
+              <a:rPr lang="en-US" sz="1125" b="1" dirty="0">
+                <a:solidFill>
+                  <a:srgbClr val="FF6F0F"/>
+                </a:solidFill>
+                <a:latin typeface="Consolas" pitchFamily="34" charset="0"/>
+                <a:ea typeface="Consolas" pitchFamily="34" charset="-122"/>
+                <a:cs typeface="Consolas" pitchFamily="34" charset="-120"/>
+              </a:rPr>
+              <a:t>3회</a:t>
+            </a:r>
+            <a:endParaRPr lang="en-US" sz="1125" dirty="0"/>
+          </a:p>
+        </p:txBody>
+      </p:sp>
+      <p:sp>
+        <p:nvSpPr>
+          <p:cNvPr id="35" name="Text 33"/>
+          <p:cNvSpPr txBox="1"/>
+          <p:nvPr/>
+        </p:nvSpPr>
+        <p:spPr>
+          <a:xfrm>
+            <a:off x="5334000" y="2895600"/>
+            <a:ext cx="1219200" cy="120015"/>
+          </a:xfrm>
+          <a:prstGeom prst="rect">
+            <a:avLst/>
+          </a:prstGeom>
+          <a:noFill/>
+          <a:ln/>
+        </p:spPr>
+        <p:txBody>
+          <a:bodyPr wrap="square" lIns="0" tIns="0" rIns="0" bIns="0" rtlCol="0" anchor="t"/>
+          <a:lstStyle/>
+          <a:p>
+            <a:pPr algn="ctr" indent="0" marL="0">
+              <a:lnSpc>
+                <a:spcPts val="945"/>
+              </a:lnSpc>
+              <a:buNone/>
+            </a:pPr>
+            <a:r>
+              <a:rPr lang="en-US" sz="788" dirty="0">
+                <a:solidFill>
+                  <a:srgbClr val="5A5A5A"/>
+                </a:solidFill>
+                <a:latin typeface="Malgun Gothic" pitchFamily="34" charset="0"/>
+                <a:ea typeface="Malgun Gothic" pitchFamily="34" charset="-122"/>
+                <a:cs typeface="Malgun Gothic" pitchFamily="34" charset="-120"/>
+              </a:rPr>
+              <a:t>15 ~ 20℃</a:t>
+            </a:r>
+            <a:endParaRPr lang="en-US" sz="788" dirty="0"/>
+          </a:p>
+        </p:txBody>
+      </p:sp>
+      <p:sp>
+        <p:nvSpPr>
+          <p:cNvPr id="36" name="Shape 34"/>
+          <p:cNvSpPr/>
+          <p:nvPr/>
+        </p:nvSpPr>
+        <p:spPr>
+          <a:xfrm>
+            <a:off x="6553200" y="2133600"/>
+            <a:ext cx="0" cy="647700"/>
+          </a:xfrm>
+          <a:prstGeom prst="line">
+            <a:avLst/>
+          </a:prstGeom>
+          <a:noFill/>
+          <a:ln w="12700">
+            <a:solidFill>
+              <a:srgbClr val="DEE3E9"/>
+            </a:solidFill>
+            <a:prstDash val="solid"/>
+          </a:ln>
+        </p:spPr>
+      </p:sp>
+      <p:sp>
+        <p:nvSpPr>
+          <p:cNvPr id="37" name="Shape 35"/>
+          <p:cNvSpPr/>
+          <p:nvPr/>
+        </p:nvSpPr>
+        <p:spPr>
+          <a:xfrm>
+            <a:off x="7219950" y="2781300"/>
+            <a:ext cx="419100" cy="38100"/>
+          </a:xfrm>
+          <a:prstGeom prst="rect">
+            <a:avLst/>
+          </a:prstGeom>
+          <a:solidFill>
+            <a:srgbClr val="FF6F0F"/>
+          </a:solidFill>
+          <a:ln/>
+        </p:spPr>
+      </p:sp>
+      <p:sp>
+        <p:nvSpPr>
+          <p:cNvPr id="38" name="Text 36"/>
+          <p:cNvSpPr txBox="1"/>
+          <p:nvPr/>
+        </p:nvSpPr>
+        <p:spPr>
+          <a:xfrm>
+            <a:off x="6819900" y="2590800"/>
+            <a:ext cx="1219200" cy="171450"/>
+          </a:xfrm>
+          <a:prstGeom prst="rect">
+            <a:avLst/>
+          </a:prstGeom>
+          <a:noFill/>
+          <a:ln/>
+        </p:spPr>
+        <p:txBody>
+          <a:bodyPr wrap="square" lIns="0" tIns="0" rIns="0" bIns="0" rtlCol="0" anchor="t"/>
+          <a:lstStyle/>
+          <a:p>
+            <a:pPr algn="ctr" indent="0" marL="0">
+              <a:lnSpc>
+                <a:spcPts val="1350"/>
+              </a:lnSpc>
+              <a:buNone/>
+            </a:pPr>
+            <a:r>
+              <a:rPr lang="en-US" sz="1125" b="1" dirty="0">
+                <a:solidFill>
+                  <a:srgbClr val="FF6F0F"/>
+                </a:solidFill>
+                <a:latin typeface="Consolas" pitchFamily="34" charset="0"/>
+                <a:ea typeface="Consolas" pitchFamily="34" charset="-122"/>
+                <a:cs typeface="Consolas" pitchFamily="34" charset="-120"/>
+              </a:rPr>
+              <a:t>1회</a:t>
+            </a:r>
+            <a:endParaRPr lang="en-US" sz="1125" dirty="0"/>
+          </a:p>
+        </p:txBody>
+      </p:sp>
+      <p:sp>
+        <p:nvSpPr>
+          <p:cNvPr id="39" name="Text 37"/>
+          <p:cNvSpPr txBox="1"/>
+          <p:nvPr/>
+        </p:nvSpPr>
+        <p:spPr>
+          <a:xfrm>
+            <a:off x="6819900" y="2895600"/>
+            <a:ext cx="1219200" cy="120015"/>
+          </a:xfrm>
+          <a:prstGeom prst="rect">
+            <a:avLst/>
+          </a:prstGeom>
+          <a:noFill/>
+          <a:ln/>
+        </p:spPr>
+        <p:txBody>
+          <a:bodyPr wrap="square" lIns="0" tIns="0" rIns="0" bIns="0" rtlCol="0" anchor="t"/>
+          <a:lstStyle/>
+          <a:p>
+            <a:pPr algn="ctr" indent="0" marL="0">
+              <a:lnSpc>
+                <a:spcPts val="945"/>
+              </a:lnSpc>
+              <a:buNone/>
+            </a:pPr>
+            <a:r>
+              <a:rPr lang="en-US" sz="788" dirty="0">
+                <a:solidFill>
+                  <a:srgbClr val="5A5A5A"/>
+                </a:solidFill>
+                <a:latin typeface="Malgun Gothic" pitchFamily="34" charset="0"/>
+                <a:ea typeface="Malgun Gothic" pitchFamily="34" charset="-122"/>
+                <a:cs typeface="Malgun Gothic" pitchFamily="34" charset="-120"/>
+              </a:rPr>
+              <a:t>20 ~ 25℃</a:t>
+            </a:r>
+            <a:endParaRPr lang="en-US" sz="788" dirty="0"/>
+          </a:p>
+        </p:txBody>
+      </p:sp>
+      <p:sp>
+        <p:nvSpPr>
+          <p:cNvPr id="40" name="Shape 38"/>
+          <p:cNvSpPr/>
+          <p:nvPr/>
+        </p:nvSpPr>
+        <p:spPr>
+          <a:xfrm>
+            <a:off x="8039100" y="2133600"/>
+            <a:ext cx="0" cy="647700"/>
+          </a:xfrm>
+          <a:prstGeom prst="line">
+            <a:avLst/>
+          </a:prstGeom>
+          <a:noFill/>
+          <a:ln w="12700">
+            <a:solidFill>
+              <a:srgbClr val="DEE3E9"/>
+            </a:solidFill>
+            <a:prstDash val="solid"/>
+          </a:ln>
+        </p:spPr>
+      </p:sp>
+      <p:sp>
+        <p:nvSpPr>
+          <p:cNvPr id="41" name="Shape 39"/>
+          <p:cNvSpPr/>
+          <p:nvPr/>
+        </p:nvSpPr>
+        <p:spPr>
+          <a:xfrm>
+            <a:off x="8705850" y="2581275"/>
+            <a:ext cx="419100" cy="238125"/>
+          </a:xfrm>
+          <a:prstGeom prst="rect">
+            <a:avLst/>
+          </a:prstGeom>
+          <a:solidFill>
+            <a:srgbClr val="EA002C"/>
+          </a:solidFill>
+          <a:ln/>
+        </p:spPr>
+      </p:sp>
+      <p:sp>
+        <p:nvSpPr>
+          <p:cNvPr id="42" name="Text 40"/>
+          <p:cNvSpPr txBox="1"/>
+          <p:nvPr/>
+        </p:nvSpPr>
+        <p:spPr>
+          <a:xfrm>
+            <a:off x="8305800" y="2390775"/>
+            <a:ext cx="1219200" cy="171450"/>
+          </a:xfrm>
+          <a:prstGeom prst="rect">
+            <a:avLst/>
+          </a:prstGeom>
+          <a:noFill/>
+          <a:ln/>
+        </p:spPr>
+        <p:txBody>
+          <a:bodyPr wrap="square" lIns="0" tIns="0" rIns="0" bIns="0" rtlCol="0" anchor="t"/>
+          <a:lstStyle/>
+          <a:p>
+            <a:pPr algn="ctr" indent="0" marL="0">
+              <a:lnSpc>
+                <a:spcPts val="1350"/>
+              </a:lnSpc>
+              <a:buNone/>
+            </a:pPr>
+            <a:r>
+              <a:rPr lang="en-US" sz="1125" b="1" dirty="0">
+                <a:solidFill>
+                  <a:srgbClr val="EA002C"/>
+                </a:solidFill>
+                <a:latin typeface="Consolas" pitchFamily="34" charset="0"/>
+                <a:ea typeface="Consolas" pitchFamily="34" charset="-122"/>
+                <a:cs typeface="Consolas" pitchFamily="34" charset="-120"/>
+              </a:rPr>
+              <a:t>6회</a:t>
+            </a:r>
+            <a:endParaRPr lang="en-US" sz="1125" dirty="0"/>
+          </a:p>
+        </p:txBody>
+      </p:sp>
+      <p:sp>
+        <p:nvSpPr>
+          <p:cNvPr id="43" name="Text 41"/>
+          <p:cNvSpPr txBox="1"/>
+          <p:nvPr/>
+        </p:nvSpPr>
+        <p:spPr>
+          <a:xfrm>
+            <a:off x="8305800" y="2895600"/>
+            <a:ext cx="1219200" cy="120015"/>
+          </a:xfrm>
+          <a:prstGeom prst="rect">
+            <a:avLst/>
+          </a:prstGeom>
+          <a:noFill/>
+          <a:ln/>
+        </p:spPr>
+        <p:txBody>
+          <a:bodyPr wrap="square" lIns="0" tIns="0" rIns="0" bIns="0" rtlCol="0" anchor="t"/>
+          <a:lstStyle/>
+          <a:p>
+            <a:pPr algn="ctr" indent="0" marL="0">
+              <a:lnSpc>
+                <a:spcPts val="945"/>
+              </a:lnSpc>
+              <a:buNone/>
+            </a:pPr>
+            <a:r>
+              <a:rPr lang="en-US" sz="788" dirty="0">
+                <a:solidFill>
+                  <a:srgbClr val="5A5A5A"/>
+                </a:solidFill>
+                <a:latin typeface="Malgun Gothic" pitchFamily="34" charset="0"/>
+                <a:ea typeface="Malgun Gothic" pitchFamily="34" charset="-122"/>
+                <a:cs typeface="Malgun Gothic" pitchFamily="34" charset="-120"/>
+              </a:rPr>
+              <a:t>25 ~ 30℃</a:t>
+            </a:r>
+            <a:endParaRPr lang="en-US" sz="788" dirty="0"/>
+          </a:p>
+        </p:txBody>
+      </p:sp>
+      <p:sp>
+        <p:nvSpPr>
+          <p:cNvPr id="44" name="Shape 42"/>
+          <p:cNvSpPr/>
+          <p:nvPr/>
+        </p:nvSpPr>
+        <p:spPr>
+          <a:xfrm>
+            <a:off x="9525000" y="2133600"/>
+            <a:ext cx="0" cy="647700"/>
+          </a:xfrm>
+          <a:prstGeom prst="line">
+            <a:avLst/>
+          </a:prstGeom>
+          <a:noFill/>
+          <a:ln w="12700">
+            <a:solidFill>
+              <a:srgbClr val="DEE3E9"/>
+            </a:solidFill>
+            <a:prstDash val="solid"/>
+          </a:ln>
+        </p:spPr>
+      </p:sp>
+      <p:sp>
+        <p:nvSpPr>
+          <p:cNvPr id="45" name="Shape 43"/>
+          <p:cNvSpPr/>
+          <p:nvPr/>
+        </p:nvSpPr>
+        <p:spPr>
+          <a:xfrm>
+            <a:off x="10191750" y="2228850"/>
+            <a:ext cx="419100" cy="590550"/>
+          </a:xfrm>
+          <a:prstGeom prst="rect">
+            <a:avLst/>
+          </a:prstGeom>
+          <a:solidFill>
+            <a:srgbClr val="EA002C"/>
+          </a:solidFill>
+          <a:ln/>
+        </p:spPr>
+      </p:sp>
+      <p:sp>
+        <p:nvSpPr>
+          <p:cNvPr id="46" name="Text 44"/>
+          <p:cNvSpPr txBox="1"/>
+          <p:nvPr/>
+        </p:nvSpPr>
+        <p:spPr>
+          <a:xfrm>
+            <a:off x="9791700" y="2038350"/>
+            <a:ext cx="1219200" cy="171450"/>
+          </a:xfrm>
+          <a:prstGeom prst="rect">
+            <a:avLst/>
+          </a:prstGeom>
+          <a:noFill/>
+          <a:ln/>
+        </p:spPr>
+        <p:txBody>
+          <a:bodyPr wrap="square" lIns="0" tIns="0" rIns="0" bIns="0" rtlCol="0" anchor="t"/>
+          <a:lstStyle/>
+          <a:p>
+            <a:pPr algn="ctr" indent="0" marL="0">
+              <a:lnSpc>
+                <a:spcPts val="1350"/>
+              </a:lnSpc>
+              <a:buNone/>
+            </a:pPr>
+            <a:r>
+              <a:rPr lang="en-US" sz="1125" b="1" dirty="0">
+                <a:solidFill>
+                  <a:srgbClr val="EA002C"/>
+                </a:solidFill>
+                <a:latin typeface="Consolas" pitchFamily="34" charset="0"/>
+                <a:ea typeface="Consolas" pitchFamily="34" charset="-122"/>
+                <a:cs typeface="Consolas" pitchFamily="34" charset="-120"/>
+              </a:rPr>
+              <a:t>15회</a:t>
+            </a:r>
+            <a:endParaRPr lang="en-US" sz="1125" dirty="0"/>
+          </a:p>
+        </p:txBody>
+      </p:sp>
+      <p:sp>
+        <p:nvSpPr>
+          <p:cNvPr id="47" name="Text 45"/>
+          <p:cNvSpPr txBox="1"/>
+          <p:nvPr/>
+        </p:nvSpPr>
+        <p:spPr>
+          <a:xfrm>
+            <a:off x="9791700" y="2895600"/>
+            <a:ext cx="1219200" cy="120015"/>
+          </a:xfrm>
+          <a:prstGeom prst="rect">
+            <a:avLst/>
+          </a:prstGeom>
+          <a:noFill/>
+          <a:ln/>
+        </p:spPr>
+        <p:txBody>
+          <a:bodyPr wrap="square" lIns="0" tIns="0" rIns="0" bIns="0" rtlCol="0" anchor="t"/>
+          <a:lstStyle/>
+          <a:p>
+            <a:pPr algn="ctr" indent="0" marL="0">
+              <a:lnSpc>
+                <a:spcPts val="945"/>
+              </a:lnSpc>
+              <a:buNone/>
+            </a:pPr>
+            <a:r>
+              <a:rPr lang="en-US" sz="788" dirty="0">
+                <a:solidFill>
+                  <a:srgbClr val="5A5A5A"/>
+                </a:solidFill>
+                <a:latin typeface="Malgun Gothic" pitchFamily="34" charset="0"/>
+                <a:ea typeface="Malgun Gothic" pitchFamily="34" charset="-122"/>
+                <a:cs typeface="Malgun Gothic" pitchFamily="34" charset="-120"/>
+              </a:rPr>
+              <a:t>30 ~ 41℃</a:t>
+            </a:r>
+            <a:endParaRPr lang="en-US" sz="788" dirty="0"/>
+          </a:p>
+        </p:txBody>
+      </p:sp>
+      <p:sp>
+        <p:nvSpPr>
+          <p:cNvPr id="48" name="Text 46"/>
+          <p:cNvSpPr txBox="1"/>
+          <p:nvPr/>
+        </p:nvSpPr>
+        <p:spPr>
+          <a:xfrm>
+            <a:off x="876300" y="3028950"/>
+            <a:ext cx="10382250" cy="130016"/>
+          </a:xfrm>
+          <a:prstGeom prst="rect">
+            <a:avLst/>
+          </a:prstGeom>
+          <a:noFill/>
+          <a:ln/>
+        </p:spPr>
+        <p:txBody>
+          <a:bodyPr wrap="square" lIns="0" tIns="0" rIns="0" bIns="0" rtlCol="0" anchor="t"/>
+          <a:lstStyle/>
+          <a:p>
+            <a:pPr algn="l" indent="0" marL="0">
+              <a:lnSpc>
+                <a:spcPts val="1024"/>
+              </a:lnSpc>
+              <a:buNone/>
+            </a:pPr>
+            <a:r>
+              <a:rPr lang="en-US" sz="788" dirty="0">
+                <a:solidFill>
                   <a:srgbClr val="8C8C8C"/>
                 </a:solidFill>
                 <a:latin typeface="Malgun Gothic" pitchFamily="34" charset="0"/>
                 <a:ea typeface="Malgun Gothic" pitchFamily="34" charset="-122"/>
                 <a:cs typeface="Malgun Gothic" pitchFamily="34" charset="-120"/>
               </a:rPr>
-              <a:t>세로 — 틀리는 폭 (MW, 작을수록 좋다)</a:t>
+              <a:t>주황은 3회 이하 — 더 쌓아야 하는 온도대입니다. 신고는 −20 ~ 40℃ 전부인데 실적은 −1.9 ~ 37.9℃ 뿐이라, 그 밖은 끝값을 그대로 씁니다.</a:t>
             </a:r>
             <a:endParaRPr lang="en-US" sz="788" dirty="0"/>
           </a:p>
@@ -5339,250 +5789,14 @@
       </p:sp>
       <p:sp>
         <p:nvSpPr>
-          <p:cNvPr id="34" name="Text 32"/>
-          <p:cNvSpPr txBox="1"/>
-          <p:nvPr/>
-        </p:nvSpPr>
-        <p:spPr>
-          <a:xfrm>
-            <a:off x="876300" y="3752850"/>
-            <a:ext cx="4914900" cy="172641"/>
-          </a:xfrm>
-          <a:prstGeom prst="rect">
-            <a:avLst/>
-          </a:prstGeom>
-          <a:noFill/>
-          <a:ln/>
-        </p:spPr>
-        <p:txBody>
-          <a:bodyPr wrap="square" lIns="0" tIns="0" rIns="0" bIns="0" rtlCol="0" anchor="t"/>
-          <a:lstStyle/>
-          <a:p>
-            <a:pPr algn="l" indent="0" marL="0">
-              <a:lnSpc>
-                <a:spcPts val="1359"/>
-              </a:lnSpc>
-              <a:buNone/>
-            </a:pPr>
-            <a:r>
-              <a:rPr lang="en-US" sz="938" dirty="0">
-                <a:solidFill>
-                  <a:srgbClr val="333333"/>
-                </a:solidFill>
-                <a:latin typeface="Malgun Gothic" pitchFamily="34" charset="0"/>
-                <a:ea typeface="Malgun Gothic" pitchFamily="34" charset="-122"/>
-                <a:cs typeface="Malgun Gothic" pitchFamily="34" charset="-120"/>
-              </a:rPr>
-              <a:t>시험이 늘어난 것 말고 바꾼 것은 없습니다.</a:t>
-            </a:r>
-            <a:endParaRPr lang="en-US" sz="938" dirty="0"/>
-          </a:p>
-        </p:txBody>
-      </p:sp>
-      <p:sp>
-        <p:nvSpPr>
-          <p:cNvPr id="35" name="Text 33"/>
-          <p:cNvSpPr txBox="1"/>
-          <p:nvPr/>
-        </p:nvSpPr>
-        <p:spPr>
-          <a:xfrm>
-            <a:off x="876300" y="3943350"/>
-            <a:ext cx="4914900" cy="172641"/>
-          </a:xfrm>
-          <a:prstGeom prst="rect">
-            <a:avLst/>
-          </a:prstGeom>
-          <a:noFill/>
-          <a:ln/>
-        </p:spPr>
-        <p:txBody>
-          <a:bodyPr wrap="square" lIns="0" tIns="0" rIns="0" bIns="0" rtlCol="0" anchor="t"/>
-          <a:lstStyle/>
-          <a:p>
-            <a:pPr algn="l" indent="0" marL="0">
-              <a:lnSpc>
-                <a:spcPts val="1359"/>
-              </a:lnSpc>
-              <a:buNone/>
-            </a:pPr>
-            <a:r>
-              <a:rPr lang="en-US" sz="938" dirty="0">
-                <a:solidFill>
-                  <a:srgbClr val="333333"/>
-                </a:solidFill>
-                <a:latin typeface="Malgun Gothic" pitchFamily="34" charset="0"/>
-                <a:ea typeface="Malgun Gothic" pitchFamily="34" charset="-122"/>
-                <a:cs typeface="Malgun Gothic" pitchFamily="34" charset="-120"/>
-              </a:rPr>
-              <a:t>처음에는 평균 </a:t>
-            </a:r>
-            <a:pPr algn="l" indent="0" marL="0">
-              <a:lnSpc>
-                <a:spcPts val="1359"/>
-              </a:lnSpc>
-              <a:buNone/>
-            </a:pPr>
-            <a:r>
-              <a:rPr lang="en-US" sz="938" b="1" dirty="0">
-                <a:solidFill>
-                  <a:srgbClr val="EA002C"/>
-                </a:solidFill>
-                <a:latin typeface="Malgun Gothic" pitchFamily="34" charset="0"/>
-                <a:ea typeface="Malgun Gothic" pitchFamily="34" charset="-122"/>
-                <a:cs typeface="Malgun Gothic" pitchFamily="34" charset="-120"/>
-              </a:rPr>
-              <a:t>2.26 MW</a:t>
-            </a:r>
-            <a:pPr algn="l" indent="0" marL="0">
-              <a:lnSpc>
-                <a:spcPts val="1359"/>
-              </a:lnSpc>
-              <a:buNone/>
-            </a:pPr>
-            <a:r>
-              <a:rPr lang="en-US" sz="938" dirty="0">
-                <a:solidFill>
-                  <a:srgbClr val="333333"/>
-                </a:solidFill>
-                <a:latin typeface="Malgun Gothic" pitchFamily="34" charset="0"/>
-                <a:ea typeface="Malgun Gothic" pitchFamily="34" charset="-122"/>
-                <a:cs typeface="Malgun Gothic" pitchFamily="34" charset="-120"/>
-              </a:rPr>
-              <a:t> 틀렸고, 지금은 </a:t>
-            </a:r>
-            <a:pPr algn="l" indent="0" marL="0">
-              <a:lnSpc>
-                <a:spcPts val="1359"/>
-              </a:lnSpc>
-              <a:buNone/>
-            </a:pPr>
-            <a:r>
-              <a:rPr lang="en-US" sz="938" b="1" dirty="0">
-                <a:solidFill>
-                  <a:srgbClr val="EA002C"/>
-                </a:solidFill>
-                <a:latin typeface="Malgun Gothic" pitchFamily="34" charset="0"/>
-                <a:ea typeface="Malgun Gothic" pitchFamily="34" charset="-122"/>
-                <a:cs typeface="Malgun Gothic" pitchFamily="34" charset="-120"/>
-              </a:rPr>
-              <a:t>1.19 MW</a:t>
-            </a:r>
-            <a:pPr algn="l" indent="0" marL="0">
-              <a:lnSpc>
-                <a:spcPts val="1359"/>
-              </a:lnSpc>
-              <a:buNone/>
-            </a:pPr>
-            <a:r>
-              <a:rPr lang="en-US" sz="938" dirty="0">
-                <a:solidFill>
-                  <a:srgbClr val="333333"/>
-                </a:solidFill>
-                <a:latin typeface="Malgun Gothic" pitchFamily="34" charset="0"/>
-                <a:ea typeface="Malgun Gothic" pitchFamily="34" charset="-122"/>
-                <a:cs typeface="Malgun Gothic" pitchFamily="34" charset="-120"/>
-              </a:rPr>
-              <a:t> 입니다.</a:t>
-            </a:r>
-            <a:endParaRPr lang="en-US" sz="938" dirty="0"/>
-          </a:p>
-        </p:txBody>
-      </p:sp>
-      <p:sp>
-        <p:nvSpPr>
-          <p:cNvPr id="36" name="Text 34"/>
-          <p:cNvSpPr txBox="1"/>
-          <p:nvPr/>
-        </p:nvSpPr>
-        <p:spPr>
-          <a:xfrm>
-            <a:off x="876300" y="4133850"/>
-            <a:ext cx="4914900" cy="172641"/>
-          </a:xfrm>
-          <a:prstGeom prst="rect">
-            <a:avLst/>
-          </a:prstGeom>
-          <a:noFill/>
-          <a:ln/>
-        </p:spPr>
-        <p:txBody>
-          <a:bodyPr wrap="square" lIns="0" tIns="0" rIns="0" bIns="0" rtlCol="0" anchor="t"/>
-          <a:lstStyle/>
-          <a:p>
-            <a:pPr algn="l" indent="0" marL="0">
-              <a:lnSpc>
-                <a:spcPts val="1359"/>
-              </a:lnSpc>
-              <a:buNone/>
-            </a:pPr>
-            <a:r>
-              <a:rPr lang="en-US" sz="938" dirty="0">
-                <a:solidFill>
-                  <a:srgbClr val="333333"/>
-                </a:solidFill>
-                <a:latin typeface="Malgun Gothic" pitchFamily="34" charset="0"/>
-                <a:ea typeface="Malgun Gothic" pitchFamily="34" charset="-122"/>
-                <a:cs typeface="Malgun Gothic" pitchFamily="34" charset="-120"/>
-              </a:rPr>
-              <a:t>앞으로도 2주마다 한 회씩 쌓입니다.</a:t>
-            </a:r>
-            <a:endParaRPr lang="en-US" sz="938" dirty="0"/>
-          </a:p>
-        </p:txBody>
-      </p:sp>
-      <p:sp>
-        <p:nvSpPr>
-          <p:cNvPr id="37" name="Text 35"/>
-          <p:cNvSpPr txBox="1"/>
-          <p:nvPr/>
-        </p:nvSpPr>
-        <p:spPr>
-          <a:xfrm>
-            <a:off x="876300" y="4343400"/>
-            <a:ext cx="4914900" cy="130016"/>
-          </a:xfrm>
-          <a:prstGeom prst="rect">
-            <a:avLst/>
-          </a:prstGeom>
-          <a:noFill/>
-          <a:ln/>
-        </p:spPr>
-        <p:txBody>
-          <a:bodyPr wrap="square" lIns="0" tIns="0" rIns="0" bIns="0" rtlCol="0" anchor="t"/>
-          <a:lstStyle/>
-          <a:p>
-            <a:pPr algn="l" indent="0" marL="0">
-              <a:lnSpc>
-                <a:spcPts val="1024"/>
-              </a:lnSpc>
-              <a:buNone/>
-            </a:pPr>
-            <a:r>
-              <a:rPr lang="en-US" sz="788" dirty="0">
-                <a:solidFill>
-                  <a:srgbClr val="8C8C8C"/>
-                </a:solidFill>
-                <a:latin typeface="Malgun Gothic" pitchFamily="34" charset="0"/>
-                <a:ea typeface="Malgun Gothic" pitchFamily="34" charset="-122"/>
-                <a:cs typeface="Malgun Gothic" pitchFamily="34" charset="-120"/>
-              </a:rPr>
-              <a:t>마지막 구간이 조금 올라간 것은 겨울 시험이 적게 섞인 탓입니다. 있는 대로 적었습니다.</a:t>
-            </a:r>
-            <a:endParaRPr lang="en-US" sz="788" dirty="0"/>
-          </a:p>
-        </p:txBody>
-      </p:sp>
-      <p:sp>
-        <p:nvSpPr>
-          <p:cNvPr id="38" name="Shape 36"/>
-          <p:cNvSpPr/>
-          <p:nvPr/>
-        </p:nvSpPr>
-        <p:spPr>
-          <a:xfrm>
-            <a:off x="6134100" y="1781175"/>
-            <a:ext cx="5372100" cy="2733675"/>
+          <p:cNvPr id="49" name="Shape 47"/>
+          <p:cNvSpPr/>
+          <p:nvPr/>
+        </p:nvSpPr>
+        <p:spPr>
+          <a:xfrm>
+            <a:off x="685800" y="3476625"/>
+            <a:ext cx="10820400" cy="2619375"/>
           </a:xfrm>
           <a:prstGeom prst="rect">
             <a:avLst/>
@@ -5600,14 +5814,14 @@
       </p:sp>
       <p:sp>
         <p:nvSpPr>
-          <p:cNvPr id="39" name="Shape 37"/>
-          <p:cNvSpPr/>
-          <p:nvPr/>
-        </p:nvSpPr>
-        <p:spPr>
-          <a:xfrm>
-            <a:off x="6134100" y="1657350"/>
-            <a:ext cx="1447800" cy="247650"/>
+          <p:cNvPr id="50" name="Shape 48"/>
+          <p:cNvSpPr/>
+          <p:nvPr/>
+        </p:nvSpPr>
+        <p:spPr>
+          <a:xfrm>
+            <a:off x="685800" y="3352800"/>
+            <a:ext cx="1304925" cy="247650"/>
           </a:xfrm>
           <a:prstGeom prst="rect">
             <a:avLst>
@@ -5622,13 +5836,13 @@
       </p:sp>
       <p:sp>
         <p:nvSpPr>
-          <p:cNvPr id="40" name="Text 38"/>
-          <p:cNvSpPr txBox="1"/>
-          <p:nvPr/>
-        </p:nvSpPr>
-        <p:spPr>
-          <a:xfrm>
-            <a:off x="6267450" y="1714500"/>
+          <p:cNvPr id="51" name="Text 49"/>
+          <p:cNvSpPr txBox="1"/>
+          <p:nvPr/>
+        </p:nvSpPr>
+        <p:spPr>
+          <a:xfrm>
+            <a:off x="819150" y="3409950"/>
             <a:ext cx="152400" cy="142875"/>
           </a:xfrm>
           <a:prstGeom prst="rect">
@@ -5664,14 +5878,14 @@
       </p:sp>
       <p:sp>
         <p:nvSpPr>
-          <p:cNvPr id="41" name="Text 39"/>
-          <p:cNvSpPr txBox="1"/>
-          <p:nvPr/>
-        </p:nvSpPr>
-        <p:spPr>
-          <a:xfrm>
-            <a:off x="6457950" y="1714500"/>
-            <a:ext cx="1009650" cy="154305"/>
+          <p:cNvPr id="52" name="Text 50"/>
+          <p:cNvSpPr txBox="1"/>
+          <p:nvPr/>
+        </p:nvSpPr>
+        <p:spPr>
+          <a:xfrm>
+            <a:off x="1009650" y="3409950"/>
+            <a:ext cx="866775" cy="154305"/>
           </a:xfrm>
           <a:prstGeom prst="rect">
             <a:avLst/>
@@ -5698,7 +5912,7 @@
                 <a:ea typeface="Malgun Gothic" pitchFamily="34" charset="-122"/>
                 <a:cs typeface="Malgun Gothic" pitchFamily="34" charset="-120"/>
               </a:rPr>
-              <a:t>다른 발전소로</a:t>
+              <a:t>단계별 계획</a:t>
             </a:r>
             <a:endParaRPr lang="en-US" sz="1013" dirty="0"/>
           </a:p>
@@ -5706,14 +5920,14 @@
       </p:sp>
       <p:sp>
         <p:nvSpPr>
-          <p:cNvPr id="42" name="Text 40"/>
-          <p:cNvSpPr txBox="1"/>
-          <p:nvPr/>
-        </p:nvSpPr>
-        <p:spPr>
-          <a:xfrm>
-            <a:off x="10125075" y="1847850"/>
-            <a:ext cx="1266825" cy="125730"/>
+          <p:cNvPr id="53" name="Text 51"/>
+          <p:cNvSpPr txBox="1"/>
+          <p:nvPr/>
+        </p:nvSpPr>
+        <p:spPr>
+          <a:xfrm>
+            <a:off x="10134600" y="3543300"/>
+            <a:ext cx="1257300" cy="125730"/>
           </a:xfrm>
           <a:prstGeom prst="rect">
             <a:avLst/>
@@ -5740,7 +5954,7 @@
                 <a:ea typeface="Malgun Gothic" pitchFamily="34" charset="-122"/>
                 <a:cs typeface="Malgun Gothic" pitchFamily="34" charset="-120"/>
               </a:rPr>
-              <a:t>기종이 달라도 됩니다</a:t>
+              <a:t>2026 하반기 → 2028</a:t>
             </a:r>
             <a:endParaRPr lang="en-US" sz="825" dirty="0"/>
           </a:p>
@@ -5748,537 +5962,19 @@
       </p:sp>
       <p:sp>
         <p:nvSpPr>
-          <p:cNvPr id="43" name="Text 41"/>
-          <p:cNvSpPr txBox="1"/>
-          <p:nvPr/>
-        </p:nvSpPr>
-        <p:spPr>
-          <a:xfrm>
-            <a:off x="6324600" y="2019300"/>
-            <a:ext cx="4991100" cy="166688"/>
-          </a:xfrm>
-          <a:prstGeom prst="rect">
-            <a:avLst/>
-          </a:prstGeom>
-          <a:noFill/>
-          <a:ln/>
-        </p:spPr>
-        <p:txBody>
-          <a:bodyPr wrap="square" lIns="0" tIns="0" rIns="0" bIns="0" rtlCol="0" anchor="t"/>
-          <a:lstStyle/>
-          <a:p>
-            <a:pPr algn="l" indent="0" marL="0">
-              <a:lnSpc>
-                <a:spcPts val="1313"/>
-              </a:lnSpc>
-              <a:buNone/>
-            </a:pPr>
-            <a:r>
-              <a:rPr lang="en-US" sz="938" dirty="0">
-                <a:solidFill>
-                  <a:srgbClr val="5A5A5A"/>
-                </a:solidFill>
-                <a:latin typeface="Malgun Gothic" pitchFamily="34" charset="0"/>
-                <a:ea typeface="Malgun Gothic" pitchFamily="34" charset="-122"/>
-                <a:cs typeface="Malgun Gothic" pitchFamily="34" charset="-120"/>
-              </a:rPr>
-              <a:t>다른 발전소는 기종이 달라 특성 곡선이 다릅니다.</a:t>
-            </a:r>
-            <a:endParaRPr lang="en-US" sz="938" dirty="0"/>
-          </a:p>
-        </p:txBody>
-      </p:sp>
-      <p:sp>
-        <p:nvSpPr>
-          <p:cNvPr id="44" name="Shape 42"/>
-          <p:cNvSpPr/>
-          <p:nvPr/>
-        </p:nvSpPr>
-        <p:spPr>
-          <a:xfrm>
-            <a:off x="6324600" y="2266950"/>
-            <a:ext cx="38100" cy="228600"/>
-          </a:xfrm>
-          <a:prstGeom prst="rect">
-            <a:avLst/>
-          </a:prstGeom>
-          <a:solidFill>
-            <a:srgbClr val="EA002C"/>
-          </a:solidFill>
-          <a:ln/>
-        </p:spPr>
-      </p:sp>
-      <p:sp>
-        <p:nvSpPr>
-          <p:cNvPr id="45" name="Text 43"/>
-          <p:cNvSpPr txBox="1"/>
-          <p:nvPr/>
-        </p:nvSpPr>
-        <p:spPr>
-          <a:xfrm>
-            <a:off x="6496050" y="2247900"/>
-            <a:ext cx="4819650" cy="191929"/>
-          </a:xfrm>
-          <a:prstGeom prst="rect">
-            <a:avLst/>
-          </a:prstGeom>
-          <a:noFill/>
-          <a:ln/>
-        </p:spPr>
-        <p:txBody>
-          <a:bodyPr wrap="square" lIns="0" tIns="0" rIns="0" bIns="0" rtlCol="0" anchor="t"/>
-          <a:lstStyle/>
-          <a:p>
-            <a:pPr algn="l" indent="0" marL="0">
-              <a:lnSpc>
-                <a:spcPts val="1511"/>
-              </a:lnSpc>
-              <a:buNone/>
-            </a:pPr>
-            <a:r>
-              <a:rPr lang="en-US" sz="1163" b="1" dirty="0">
-                <a:solidFill>
-                  <a:srgbClr val="1A1A1A"/>
-                </a:solidFill>
-                <a:latin typeface="Malgun Gothic" pitchFamily="34" charset="0"/>
-                <a:ea typeface="Malgun Gothic" pitchFamily="34" charset="-122"/>
-                <a:cs typeface="Malgun Gothic" pitchFamily="34" charset="-120"/>
-              </a:rPr>
-              <a:t>옮겨 가는 것은 곡선이 아니라 </a:t>
-            </a:r>
-            <a:pPr algn="l" indent="0" marL="0">
-              <a:lnSpc>
-                <a:spcPts val="1511"/>
-              </a:lnSpc>
-              <a:buNone/>
-            </a:pPr>
-            <a:r>
-              <a:rPr lang="en-US" sz="1163" b="1" dirty="0">
-                <a:solidFill>
-                  <a:srgbClr val="EA002C"/>
-                </a:solidFill>
-                <a:latin typeface="Malgun Gothic" pitchFamily="34" charset="0"/>
-                <a:ea typeface="Malgun Gothic" pitchFamily="34" charset="-122"/>
-                <a:cs typeface="Malgun Gothic" pitchFamily="34" charset="-120"/>
-              </a:rPr>
-              <a:t>절차</a:t>
-            </a:r>
-            <a:pPr algn="l" indent="0" marL="0">
-              <a:lnSpc>
-                <a:spcPts val="1511"/>
-              </a:lnSpc>
-              <a:buNone/>
-            </a:pPr>
-            <a:r>
-              <a:rPr lang="en-US" sz="1163" b="1" dirty="0">
-                <a:solidFill>
-                  <a:srgbClr val="1A1A1A"/>
-                </a:solidFill>
-                <a:latin typeface="Malgun Gothic" pitchFamily="34" charset="0"/>
-                <a:ea typeface="Malgun Gothic" pitchFamily="34" charset="-122"/>
-                <a:cs typeface="Malgun Gothic" pitchFamily="34" charset="-120"/>
-              </a:rPr>
-              <a:t>입니다.</a:t>
-            </a:r>
-            <a:endParaRPr lang="en-US" sz="1163" dirty="0"/>
-          </a:p>
-        </p:txBody>
-      </p:sp>
-      <p:sp>
-        <p:nvSpPr>
-          <p:cNvPr id="46" name="Text 44"/>
-          <p:cNvSpPr txBox="1"/>
-          <p:nvPr/>
-        </p:nvSpPr>
-        <p:spPr>
-          <a:xfrm>
-            <a:off x="6324600" y="2571750"/>
-            <a:ext cx="152400" cy="131445"/>
-          </a:xfrm>
-          <a:prstGeom prst="rect">
-            <a:avLst/>
-          </a:prstGeom>
-          <a:noFill/>
-          <a:ln/>
-        </p:spPr>
-        <p:txBody>
-          <a:bodyPr wrap="square" lIns="0" tIns="0" rIns="0" bIns="0" rtlCol="0" anchor="t"/>
-          <a:lstStyle/>
-          <a:p>
-            <a:pPr algn="l" indent="0" marL="0">
-              <a:lnSpc>
-                <a:spcPts val="1035"/>
-              </a:lnSpc>
-              <a:buNone/>
-            </a:pPr>
-            <a:r>
-              <a:rPr lang="en-US" sz="863" b="1" dirty="0">
-                <a:solidFill>
-                  <a:srgbClr val="EA002C"/>
-                </a:solidFill>
-                <a:latin typeface="Consolas" pitchFamily="34" charset="0"/>
-                <a:ea typeface="Consolas" pitchFamily="34" charset="-122"/>
-                <a:cs typeface="Consolas" pitchFamily="34" charset="-120"/>
-              </a:rPr>
-              <a:t>1</a:t>
-            </a:r>
-            <a:endParaRPr lang="en-US" sz="863" dirty="0"/>
-          </a:p>
-        </p:txBody>
-      </p:sp>
-      <p:sp>
-        <p:nvSpPr>
-          <p:cNvPr id="47" name="Text 45"/>
-          <p:cNvSpPr txBox="1"/>
-          <p:nvPr/>
-        </p:nvSpPr>
-        <p:spPr>
-          <a:xfrm>
-            <a:off x="6534150" y="2552700"/>
-            <a:ext cx="4781550" cy="160734"/>
-          </a:xfrm>
-          <a:prstGeom prst="rect">
-            <a:avLst/>
-          </a:prstGeom>
-          <a:noFill/>
-          <a:ln/>
-        </p:spPr>
-        <p:txBody>
-          <a:bodyPr wrap="square" lIns="0" tIns="0" rIns="0" bIns="0" rtlCol="0" anchor="t"/>
-          <a:lstStyle/>
-          <a:p>
-            <a:pPr algn="l" indent="0" marL="0">
-              <a:lnSpc>
-                <a:spcPts val="1266"/>
-              </a:lnSpc>
-              <a:buNone/>
-            </a:pPr>
-            <a:r>
-              <a:rPr lang="en-US" sz="1013" b="1" dirty="0">
-                <a:solidFill>
-                  <a:srgbClr val="1A1A1A"/>
-                </a:solidFill>
-                <a:latin typeface="Malgun Gothic" pitchFamily="34" charset="0"/>
-                <a:ea typeface="Malgun Gothic" pitchFamily="34" charset="-122"/>
-                <a:cs typeface="Malgun Gothic" pitchFamily="34" charset="-120"/>
-              </a:rPr>
-              <a:t>특성 곡선은 표 파일로 읽는다</a:t>
-            </a:r>
-            <a:endParaRPr lang="en-US" sz="1013" dirty="0"/>
-          </a:p>
-        </p:txBody>
-      </p:sp>
-      <p:sp>
-        <p:nvSpPr>
-          <p:cNvPr id="48" name="Text 46"/>
-          <p:cNvSpPr txBox="1"/>
-          <p:nvPr/>
-        </p:nvSpPr>
-        <p:spPr>
-          <a:xfrm>
-            <a:off x="6534150" y="2743200"/>
-            <a:ext cx="4781550" cy="443627"/>
-          </a:xfrm>
-          <a:prstGeom prst="rect">
-            <a:avLst/>
-          </a:prstGeom>
-          <a:noFill/>
-          <a:ln/>
-        </p:spPr>
-        <p:txBody>
-          <a:bodyPr wrap="square" lIns="0" tIns="0" rIns="0" bIns="0" rtlCol="0" anchor="t"/>
-          <a:lstStyle/>
-          <a:p>
-            <a:pPr algn="l" indent="0" marL="0">
-              <a:lnSpc>
-                <a:spcPts val="1164"/>
-              </a:lnSpc>
-              <a:buNone/>
-            </a:pPr>
-            <a:r>
-              <a:rPr lang="en-US" sz="863" dirty="0">
-                <a:solidFill>
-                  <a:srgbClr val="5A5A5A"/>
-                </a:solidFill>
-                <a:latin typeface="Malgun Gothic" pitchFamily="34" charset="0"/>
-                <a:ea typeface="Malgun Gothic" pitchFamily="34" charset="-122"/>
-                <a:cs typeface="Malgun Gothic" pitchFamily="34" charset="-120"/>
-              </a:rPr>
-              <a:t>도구가 곡선을 품고 있지 않습니다. 온도 61줄 표를 읽어 씁니다. 그 발전소 표로 바꿔 넣으면 됩니다 — 제작사 계산식은 손대지 않았습니다.</a:t>
-            </a:r>
-            <a:endParaRPr lang="en-US" sz="863" dirty="0"/>
-          </a:p>
-        </p:txBody>
-      </p:sp>
-      <p:sp>
-        <p:nvSpPr>
-          <p:cNvPr id="49" name="Text 47"/>
-          <p:cNvSpPr txBox="1"/>
-          <p:nvPr/>
-        </p:nvSpPr>
-        <p:spPr>
-          <a:xfrm>
-            <a:off x="6324600" y="3219450"/>
-            <a:ext cx="152400" cy="131445"/>
-          </a:xfrm>
-          <a:prstGeom prst="rect">
-            <a:avLst/>
-          </a:prstGeom>
-          <a:noFill/>
-          <a:ln/>
-        </p:spPr>
-        <p:txBody>
-          <a:bodyPr wrap="square" lIns="0" tIns="0" rIns="0" bIns="0" rtlCol="0" anchor="t"/>
-          <a:lstStyle/>
-          <a:p>
-            <a:pPr algn="l" indent="0" marL="0">
-              <a:lnSpc>
-                <a:spcPts val="1035"/>
-              </a:lnSpc>
-              <a:buNone/>
-            </a:pPr>
-            <a:r>
-              <a:rPr lang="en-US" sz="863" b="1" dirty="0">
-                <a:solidFill>
-                  <a:srgbClr val="EA002C"/>
-                </a:solidFill>
-                <a:latin typeface="Consolas" pitchFamily="34" charset="0"/>
-                <a:ea typeface="Consolas" pitchFamily="34" charset="-122"/>
-                <a:cs typeface="Consolas" pitchFamily="34" charset="-120"/>
-              </a:rPr>
-              <a:t>2</a:t>
-            </a:r>
-            <a:endParaRPr lang="en-US" sz="863" dirty="0"/>
-          </a:p>
-        </p:txBody>
-      </p:sp>
-      <p:sp>
-        <p:nvSpPr>
-          <p:cNvPr id="50" name="Text 48"/>
-          <p:cNvSpPr txBox="1"/>
-          <p:nvPr/>
-        </p:nvSpPr>
-        <p:spPr>
-          <a:xfrm>
-            <a:off x="6534150" y="3200400"/>
-            <a:ext cx="4781550" cy="160734"/>
-          </a:xfrm>
-          <a:prstGeom prst="rect">
-            <a:avLst/>
-          </a:prstGeom>
-          <a:noFill/>
-          <a:ln/>
-        </p:spPr>
-        <p:txBody>
-          <a:bodyPr wrap="square" lIns="0" tIns="0" rIns="0" bIns="0" rtlCol="0" anchor="t"/>
-          <a:lstStyle/>
-          <a:p>
-            <a:pPr algn="l" indent="0" marL="0">
-              <a:lnSpc>
-                <a:spcPts val="1266"/>
-              </a:lnSpc>
-              <a:buNone/>
-            </a:pPr>
-            <a:r>
-              <a:rPr lang="en-US" sz="1013" b="1" dirty="0">
-                <a:solidFill>
-                  <a:srgbClr val="1A1A1A"/>
-                </a:solidFill>
-                <a:latin typeface="Malgun Gothic" pitchFamily="34" charset="0"/>
-                <a:ea typeface="Malgun Gothic" pitchFamily="34" charset="-122"/>
-                <a:cs typeface="Malgun Gothic" pitchFamily="34" charset="-120"/>
-              </a:rPr>
-              <a:t>보정 곡선은 새로 쌓는다</a:t>
-            </a:r>
-            <a:endParaRPr lang="en-US" sz="1013" dirty="0"/>
-          </a:p>
-        </p:txBody>
-      </p:sp>
-      <p:sp>
-        <p:nvSpPr>
-          <p:cNvPr id="51" name="Text 49"/>
-          <p:cNvSpPr txBox="1"/>
-          <p:nvPr/>
-        </p:nvSpPr>
-        <p:spPr>
-          <a:xfrm>
-            <a:off x="6534150" y="3390900"/>
-            <a:ext cx="4781550" cy="443627"/>
-          </a:xfrm>
-          <a:prstGeom prst="rect">
-            <a:avLst/>
-          </a:prstGeom>
-          <a:noFill/>
-          <a:ln/>
-        </p:spPr>
-        <p:txBody>
-          <a:bodyPr wrap="square" lIns="0" tIns="0" rIns="0" bIns="0" rtlCol="0" anchor="t"/>
-          <a:lstStyle/>
-          <a:p>
-            <a:pPr algn="l" indent="0" marL="0">
-              <a:lnSpc>
-                <a:spcPts val="1164"/>
-              </a:lnSpc>
-              <a:buNone/>
-            </a:pPr>
-            <a:r>
-              <a:rPr lang="en-US" sz="863" dirty="0">
-                <a:solidFill>
-                  <a:srgbClr val="5A5A5A"/>
-                </a:solidFill>
-                <a:latin typeface="Malgun Gothic" pitchFamily="34" charset="0"/>
-                <a:ea typeface="Malgun Gothic" pitchFamily="34" charset="-122"/>
-                <a:cs typeface="Malgun Gothic" pitchFamily="34" charset="-120"/>
-              </a:rPr>
-              <a:t>위례가 시험 40회로 만든 것처럼, 그 발전소는 그 발전소 실적으로 만듭니다.</a:t>
-            </a:r>
-            <a:endParaRPr lang="en-US" sz="863" dirty="0"/>
-          </a:p>
-        </p:txBody>
-      </p:sp>
-      <p:sp>
-        <p:nvSpPr>
-          <p:cNvPr id="52" name="Text 50"/>
-          <p:cNvSpPr txBox="1"/>
-          <p:nvPr/>
-        </p:nvSpPr>
-        <p:spPr>
-          <a:xfrm>
-            <a:off x="6324600" y="3867150"/>
-            <a:ext cx="152400" cy="131445"/>
-          </a:xfrm>
-          <a:prstGeom prst="rect">
-            <a:avLst/>
-          </a:prstGeom>
-          <a:noFill/>
-          <a:ln/>
-        </p:spPr>
-        <p:txBody>
-          <a:bodyPr wrap="square" lIns="0" tIns="0" rIns="0" bIns="0" rtlCol="0" anchor="t"/>
-          <a:lstStyle/>
-          <a:p>
-            <a:pPr algn="l" indent="0" marL="0">
-              <a:lnSpc>
-                <a:spcPts val="1035"/>
-              </a:lnSpc>
-              <a:buNone/>
-            </a:pPr>
-            <a:r>
-              <a:rPr lang="en-US" sz="863" b="1" dirty="0">
-                <a:solidFill>
-                  <a:srgbClr val="EA002C"/>
-                </a:solidFill>
-                <a:latin typeface="Consolas" pitchFamily="34" charset="0"/>
-                <a:ea typeface="Consolas" pitchFamily="34" charset="-122"/>
-                <a:cs typeface="Consolas" pitchFamily="34" charset="-120"/>
-              </a:rPr>
-              <a:t>3</a:t>
-            </a:r>
-            <a:endParaRPr lang="en-US" sz="863" dirty="0"/>
-          </a:p>
-        </p:txBody>
-      </p:sp>
-      <p:sp>
-        <p:nvSpPr>
-          <p:cNvPr id="53" name="Text 51"/>
-          <p:cNvSpPr txBox="1"/>
-          <p:nvPr/>
-        </p:nvSpPr>
-        <p:spPr>
-          <a:xfrm>
-            <a:off x="6534150" y="3848100"/>
-            <a:ext cx="4781550" cy="160734"/>
-          </a:xfrm>
-          <a:prstGeom prst="rect">
-            <a:avLst/>
-          </a:prstGeom>
-          <a:noFill/>
-          <a:ln/>
-        </p:spPr>
-        <p:txBody>
-          <a:bodyPr wrap="square" lIns="0" tIns="0" rIns="0" bIns="0" rtlCol="0" anchor="t"/>
-          <a:lstStyle/>
-          <a:p>
-            <a:pPr algn="l" indent="0" marL="0">
-              <a:lnSpc>
-                <a:spcPts val="1266"/>
-              </a:lnSpc>
-              <a:buNone/>
-            </a:pPr>
-            <a:r>
-              <a:rPr lang="en-US" sz="1013" b="1" dirty="0">
-                <a:solidFill>
-                  <a:srgbClr val="1A1A1A"/>
-                </a:solidFill>
-                <a:latin typeface="Malgun Gothic" pitchFamily="34" charset="0"/>
-                <a:ea typeface="Malgun Gothic" pitchFamily="34" charset="-122"/>
-                <a:cs typeface="Malgun Gothic" pitchFamily="34" charset="-120"/>
-              </a:rPr>
-              <a:t>그래서 필요한 것은 셋</a:t>
-            </a:r>
-            <a:endParaRPr lang="en-US" sz="1013" dirty="0"/>
-          </a:p>
-        </p:txBody>
-      </p:sp>
-      <p:sp>
-        <p:nvSpPr>
-          <p:cNvPr id="54" name="Text 52"/>
-          <p:cNvSpPr txBox="1"/>
-          <p:nvPr/>
-        </p:nvSpPr>
-        <p:spPr>
-          <a:xfrm>
-            <a:off x="6534150" y="4038600"/>
-            <a:ext cx="4781550" cy="443627"/>
-          </a:xfrm>
-          <a:prstGeom prst="rect">
-            <a:avLst/>
-          </a:prstGeom>
-          <a:noFill/>
-          <a:ln/>
-        </p:spPr>
-        <p:txBody>
-          <a:bodyPr wrap="square" lIns="0" tIns="0" rIns="0" bIns="0" rtlCol="0" anchor="t"/>
-          <a:lstStyle/>
-          <a:p>
-            <a:pPr algn="l" indent="0" marL="0">
-              <a:lnSpc>
-                <a:spcPts val="1164"/>
-              </a:lnSpc>
-              <a:buNone/>
-            </a:pPr>
-            <a:r>
-              <a:rPr lang="en-US" sz="863" dirty="0">
-                <a:solidFill>
-                  <a:srgbClr val="5A5A5A"/>
-                </a:solidFill>
-                <a:latin typeface="Malgun Gothic" pitchFamily="34" charset="0"/>
-                <a:ea typeface="Malgun Gothic" pitchFamily="34" charset="-122"/>
-                <a:cs typeface="Malgun Gothic" pitchFamily="34" charset="-120"/>
-              </a:rPr>
-              <a:t>도구 · 그 발전소 특성 곡선표 · 그 발전소 시험 실적.</a:t>
-            </a:r>
-            <a:endParaRPr lang="en-US" sz="863" dirty="0"/>
-          </a:p>
-        </p:txBody>
-      </p:sp>
-      <p:sp>
-        <p:nvSpPr>
-          <p:cNvPr id="55" name="Shape 53"/>
-          <p:cNvSpPr/>
-          <p:nvPr/>
-        </p:nvSpPr>
-        <p:spPr>
-          <a:xfrm>
-            <a:off x="685800" y="4752975"/>
-            <a:ext cx="10820400" cy="1343025"/>
-          </a:xfrm>
-          <a:prstGeom prst="rect">
-            <a:avLst/>
-          </a:prstGeom>
-          <a:solidFill>
-            <a:srgbClr val="FFFFFF"/>
-          </a:solidFill>
+          <p:cNvPr id="54" name="Shape 52"/>
+          <p:cNvSpPr/>
+          <p:nvPr/>
+        </p:nvSpPr>
+        <p:spPr>
+          <a:xfrm>
+            <a:off x="2076450" y="3752850"/>
+            <a:ext cx="0" cy="2324100"/>
+          </a:xfrm>
+          <a:prstGeom prst="line">
+            <a:avLst/>
+          </a:prstGeom>
+          <a:noFill/>
           <a:ln w="12700">
             <a:solidFill>
               <a:srgbClr val="C9D0D8"/>
@@ -6289,19 +5985,59 @@
       </p:sp>
       <p:sp>
         <p:nvSpPr>
+          <p:cNvPr id="55" name="Text 53"/>
+          <p:cNvSpPr txBox="1"/>
+          <p:nvPr/>
+        </p:nvSpPr>
+        <p:spPr>
+          <a:xfrm>
+            <a:off x="876300" y="3733800"/>
+            <a:ext cx="1047750" cy="131445"/>
+          </a:xfrm>
+          <a:prstGeom prst="rect">
+            <a:avLst/>
+          </a:prstGeom>
+          <a:noFill/>
+          <a:ln/>
+        </p:spPr>
+        <p:txBody>
+          <a:bodyPr wrap="square" lIns="0" tIns="0" rIns="0" bIns="0" rtlCol="0" anchor="t"/>
+          <a:lstStyle/>
+          <a:p>
+            <a:pPr algn="r" indent="0" marL="0">
+              <a:lnSpc>
+                <a:spcPts val="1035"/>
+              </a:lnSpc>
+              <a:buNone/>
+            </a:pPr>
+            <a:r>
+              <a:rPr lang="en-US" sz="863" b="1" dirty="0">
+                <a:solidFill>
+                  <a:srgbClr val="EA002C"/>
+                </a:solidFill>
+                <a:latin typeface="Consolas" pitchFamily="34" charset="0"/>
+                <a:ea typeface="Consolas" pitchFamily="34" charset="-122"/>
+                <a:cs typeface="Consolas" pitchFamily="34" charset="-120"/>
+              </a:rPr>
+              <a:t>2026 하반기</a:t>
+            </a:r>
+            <a:endParaRPr lang="en-US" sz="863" dirty="0"/>
+          </a:p>
+        </p:txBody>
+      </p:sp>
+      <p:sp>
+        <p:nvSpPr>
           <p:cNvPr id="56" name="Shape 54"/>
           <p:cNvSpPr/>
           <p:nvPr/>
         </p:nvSpPr>
         <p:spPr>
           <a:xfrm>
-            <a:off x="685800" y="4629150"/>
-            <a:ext cx="1304925" cy="247650"/>
-          </a:xfrm>
-          <a:prstGeom prst="rect">
-            <a:avLst>
-              <a:gd name="adj" fmla="val 44308"/>
-            </a:avLst>
+            <a:off x="2033588" y="3767138"/>
+            <a:ext cx="85725" cy="85725"/>
+          </a:xfrm>
+          <a:prstGeom prst="ellipse">
+            <a:avLst/>
           </a:prstGeom>
           <a:solidFill>
             <a:srgbClr val="EA002C"/>
@@ -6317,111 +6053,257 @@
         </p:nvSpPr>
         <p:spPr>
           <a:xfrm>
-            <a:off x="819150" y="4686300"/>
-            <a:ext cx="152400" cy="142875"/>
-          </a:xfrm>
-          <a:prstGeom prst="rect">
-            <a:avLst/>
-          </a:prstGeom>
-          <a:noFill/>
-          <a:ln/>
-        </p:spPr>
-        <p:txBody>
-          <a:bodyPr wrap="square" lIns="0" tIns="0" rIns="0" bIns="0" rtlCol="0" anchor="t"/>
-          <a:lstStyle/>
-          <a:p>
-            <a:pPr algn="l" indent="0" marL="0">
-              <a:lnSpc>
-                <a:spcPts val="1125"/>
-              </a:lnSpc>
-              <a:buNone/>
-            </a:pPr>
-            <a:r>
-              <a:rPr lang="en-US" sz="938" b="1" dirty="0">
-                <a:solidFill>
-                  <a:srgbClr val="FFFFFF"/>
+            <a:off x="2286000" y="3714750"/>
+            <a:ext cx="8972550" cy="178594"/>
+          </a:xfrm>
+          <a:prstGeom prst="rect">
+            <a:avLst/>
+          </a:prstGeom>
+          <a:noFill/>
+          <a:ln/>
+        </p:spPr>
+        <p:txBody>
+          <a:bodyPr wrap="square" lIns="0" tIns="0" rIns="0" bIns="0" rtlCol="0" anchor="t"/>
+          <a:lstStyle/>
+          <a:p>
+            <a:pPr algn="l" indent="0" marL="0">
+              <a:lnSpc>
+                <a:spcPts val="1406"/>
+              </a:lnSpc>
+              <a:buNone/>
+            </a:pPr>
+            <a:r>
+              <a:rPr lang="en-US" sz="1125" b="1" dirty="0">
+                <a:solidFill>
+                  <a:srgbClr val="1A1A1A"/>
+                </a:solidFill>
+                <a:latin typeface="Malgun Gothic" pitchFamily="34" charset="0"/>
+                <a:ea typeface="Malgun Gothic" pitchFamily="34" charset="-122"/>
+                <a:cs typeface="Malgun Gothic" pitchFamily="34" charset="-120"/>
+              </a:rPr>
+              <a:t>위례 정착 · 빈 온도대 채우기</a:t>
+            </a:r>
+            <a:endParaRPr lang="en-US" sz="1125" dirty="0"/>
+          </a:p>
+        </p:txBody>
+      </p:sp>
+      <p:sp>
+        <p:nvSpPr>
+          <p:cNvPr id="58" name="Text 56"/>
+          <p:cNvSpPr txBox="1"/>
+          <p:nvPr/>
+        </p:nvSpPr>
+        <p:spPr>
+          <a:xfrm>
+            <a:off x="2286000" y="3924300"/>
+            <a:ext cx="8972550" cy="306705"/>
+          </a:xfrm>
+          <a:prstGeom prst="rect">
+            <a:avLst/>
+          </a:prstGeom>
+          <a:noFill/>
+          <a:ln/>
+        </p:spPr>
+        <p:txBody>
+          <a:bodyPr wrap="square" lIns="0" tIns="0" rIns="0" bIns="0" rtlCol="0" anchor="t"/>
+          <a:lstStyle/>
+          <a:p>
+            <a:pPr algn="l" indent="0" marL="0">
+              <a:lnSpc>
+                <a:spcPts val="1208"/>
+              </a:lnSpc>
+              <a:buNone/>
+            </a:pPr>
+            <a:r>
+              <a:rPr lang="en-US" sz="863" dirty="0">
+                <a:solidFill>
+                  <a:srgbClr val="5A5A5A"/>
+                </a:solidFill>
+                <a:latin typeface="Malgun Gothic" pitchFamily="34" charset="0"/>
+                <a:ea typeface="Malgun Gothic" pitchFamily="34" charset="-122"/>
+                <a:cs typeface="Malgun Gothic" pitchFamily="34" charset="-120"/>
+              </a:rPr>
+              <a:t>2주마다 시험하고 결과를 도구에 넣습니다. 실적이 얇은 온도대부터 채웁니다 — 20~25℃ 는 1회, 15~20℃ 는 3회뿐입니다. 표본이 붙는 만큼 그 온도의 오차가 줄어듭니다.</a:t>
+            </a:r>
+            <a:endParaRPr lang="en-US" sz="863" dirty="0"/>
+          </a:p>
+        </p:txBody>
+      </p:sp>
+      <p:sp>
+        <p:nvSpPr>
+          <p:cNvPr id="59" name="Text 57"/>
+          <p:cNvSpPr txBox="1"/>
+          <p:nvPr/>
+        </p:nvSpPr>
+        <p:spPr>
+          <a:xfrm>
+            <a:off x="876300" y="4343400"/>
+            <a:ext cx="1047750" cy="131445"/>
+          </a:xfrm>
+          <a:prstGeom prst="rect">
+            <a:avLst/>
+          </a:prstGeom>
+          <a:noFill/>
+          <a:ln/>
+        </p:spPr>
+        <p:txBody>
+          <a:bodyPr wrap="square" lIns="0" tIns="0" rIns="0" bIns="0" rtlCol="0" anchor="t"/>
+          <a:lstStyle/>
+          <a:p>
+            <a:pPr algn="r" indent="0" marL="0">
+              <a:lnSpc>
+                <a:spcPts val="1035"/>
+              </a:lnSpc>
+              <a:buNone/>
+            </a:pPr>
+            <a:r>
+              <a:rPr lang="en-US" sz="863" b="1" dirty="0">
+                <a:solidFill>
+                  <a:srgbClr val="EA002C"/>
                 </a:solidFill>
                 <a:latin typeface="Consolas" pitchFamily="34" charset="0"/>
                 <a:ea typeface="Consolas" pitchFamily="34" charset="-122"/>
                 <a:cs typeface="Consolas" pitchFamily="34" charset="-120"/>
               </a:rPr>
-              <a:t>3</a:t>
-            </a:r>
-            <a:endParaRPr lang="en-US" sz="938" dirty="0"/>
-          </a:p>
-        </p:txBody>
-      </p:sp>
-      <p:sp>
-        <p:nvSpPr>
-          <p:cNvPr id="58" name="Text 56"/>
-          <p:cNvSpPr txBox="1"/>
-          <p:nvPr/>
-        </p:nvSpPr>
-        <p:spPr>
-          <a:xfrm>
-            <a:off x="1009650" y="4686300"/>
-            <a:ext cx="866775" cy="154305"/>
-          </a:xfrm>
-          <a:prstGeom prst="rect">
-            <a:avLst/>
-          </a:prstGeom>
-          <a:noFill/>
-          <a:ln/>
-        </p:spPr>
-        <p:txBody>
-          <a:bodyPr wrap="square" lIns="0" tIns="0" rIns="0" bIns="0" rtlCol="0" anchor="t"/>
-          <a:lstStyle/>
-          <a:p>
-            <a:pPr algn="l" indent="0" marL="0">
-              <a:lnSpc>
-                <a:spcPts val="1215"/>
-              </a:lnSpc>
-              <a:buNone/>
-            </a:pPr>
-            <a:r>
-              <a:rPr lang="en-US" sz="1013" b="1" dirty="0">
-                <a:solidFill>
-                  <a:srgbClr val="FFFFFF"/>
-                </a:solidFill>
-                <a:latin typeface="Malgun Gothic" pitchFamily="34" charset="0"/>
-                <a:ea typeface="Malgun Gothic" pitchFamily="34" charset="-122"/>
-                <a:cs typeface="Malgun Gothic" pitchFamily="34" charset="-120"/>
-              </a:rPr>
-              <a:t>언제 무엇을</a:t>
-            </a:r>
-            <a:endParaRPr lang="en-US" sz="1013" dirty="0"/>
-          </a:p>
-        </p:txBody>
-      </p:sp>
-      <p:sp>
-        <p:nvSpPr>
-          <p:cNvPr id="59" name="Text 57"/>
-          <p:cNvSpPr txBox="1"/>
-          <p:nvPr/>
-        </p:nvSpPr>
-        <p:spPr>
-          <a:xfrm>
-            <a:off x="876300" y="4991100"/>
-            <a:ext cx="857250" cy="125730"/>
-          </a:xfrm>
-          <a:prstGeom prst="rect">
-            <a:avLst/>
-          </a:prstGeom>
-          <a:noFill/>
-          <a:ln/>
-        </p:spPr>
-        <p:txBody>
-          <a:bodyPr wrap="square" lIns="0" tIns="0" rIns="0" bIns="0" rtlCol="0" anchor="t"/>
-          <a:lstStyle/>
-          <a:p>
-            <a:pPr algn="l" indent="0" marL="0">
-              <a:lnSpc>
-                <a:spcPts val="990"/>
-              </a:lnSpc>
-              <a:buNone/>
-            </a:pPr>
-            <a:r>
-              <a:rPr lang="en-US" sz="825" b="1" spc="120" kern="0" dirty="0">
+              <a:t>2027 상반기</a:t>
+            </a:r>
+            <a:endParaRPr lang="en-US" sz="863" dirty="0"/>
+          </a:p>
+        </p:txBody>
+      </p:sp>
+      <p:sp>
+        <p:nvSpPr>
+          <p:cNvPr id="60" name="Shape 58"/>
+          <p:cNvSpPr/>
+          <p:nvPr/>
+        </p:nvSpPr>
+        <p:spPr>
+          <a:xfrm>
+            <a:off x="2033588" y="4376738"/>
+            <a:ext cx="85725" cy="85725"/>
+          </a:xfrm>
+          <a:prstGeom prst="ellipse">
+            <a:avLst/>
+          </a:prstGeom>
+          <a:solidFill>
+            <a:srgbClr val="EA002C"/>
+          </a:solidFill>
+          <a:ln/>
+        </p:spPr>
+      </p:sp>
+      <p:sp>
+        <p:nvSpPr>
+          <p:cNvPr id="61" name="Text 59"/>
+          <p:cNvSpPr txBox="1"/>
+          <p:nvPr/>
+        </p:nvSpPr>
+        <p:spPr>
+          <a:xfrm>
+            <a:off x="2286000" y="4324350"/>
+            <a:ext cx="8972550" cy="178594"/>
+          </a:xfrm>
+          <a:prstGeom prst="rect">
+            <a:avLst/>
+          </a:prstGeom>
+          <a:noFill/>
+          <a:ln/>
+        </p:spPr>
+        <p:txBody>
+          <a:bodyPr wrap="square" lIns="0" tIns="0" rIns="0" bIns="0" rtlCol="0" anchor="t"/>
+          <a:lstStyle/>
+          <a:p>
+            <a:pPr algn="l" indent="0" marL="0">
+              <a:lnSpc>
+                <a:spcPts val="1406"/>
+              </a:lnSpc>
+              <a:buNone/>
+            </a:pPr>
+            <a:r>
+              <a:rPr lang="en-US" sz="1125" b="1" dirty="0">
+                <a:solidFill>
+                  <a:srgbClr val="1A1A1A"/>
+                </a:solidFill>
+                <a:latin typeface="Malgun Gothic" pitchFamily="34" charset="0"/>
+                <a:ea typeface="Malgun Gothic" pitchFamily="34" charset="-122"/>
+                <a:cs typeface="Malgun Gothic" pitchFamily="34" charset="-120"/>
+              </a:rPr>
+              <a:t>신고 구간 전체 실적 확보 · 회귀 모델 재선정</a:t>
+            </a:r>
+            <a:endParaRPr lang="en-US" sz="1125" dirty="0"/>
+          </a:p>
+        </p:txBody>
+      </p:sp>
+      <p:sp>
+        <p:nvSpPr>
+          <p:cNvPr id="62" name="Text 60"/>
+          <p:cNvSpPr txBox="1"/>
+          <p:nvPr/>
+        </p:nvSpPr>
+        <p:spPr>
+          <a:xfrm>
+            <a:off x="2286000" y="4533900"/>
+            <a:ext cx="8972550" cy="306705"/>
+          </a:xfrm>
+          <a:prstGeom prst="rect">
+            <a:avLst/>
+          </a:prstGeom>
+          <a:noFill/>
+          <a:ln/>
+        </p:spPr>
+        <p:txBody>
+          <a:bodyPr wrap="square" lIns="0" tIns="0" rIns="0" bIns="0" rtlCol="0" anchor="t"/>
+          <a:lstStyle/>
+          <a:p>
+            <a:pPr algn="l" indent="0" marL="0">
+              <a:lnSpc>
+                <a:spcPts val="1208"/>
+              </a:lnSpc>
+              <a:buNone/>
+            </a:pPr>
+            <a:r>
+              <a:rPr lang="en-US" sz="863" dirty="0">
+                <a:solidFill>
+                  <a:srgbClr val="5A5A5A"/>
+                </a:solidFill>
+                <a:latin typeface="Malgun Gothic" pitchFamily="34" charset="0"/>
+                <a:ea typeface="Malgun Gothic" pitchFamily="34" charset="-122"/>
+                <a:cs typeface="Malgun Gothic" pitchFamily="34" charset="-120"/>
+              </a:rPr>
+              <a:t>겨울과 여름이 한 번 더 지나면 신고 구간 전체에 실적이 붙습니다. 그 데이터로 후보 7가지를 다시 채점(LOOCV)해 최적 회귀 모델을 다시 고릅니다 — 지금 1등이 계속 1등일 필요는 없습니다.</a:t>
+            </a:r>
+            <a:endParaRPr lang="en-US" sz="863" dirty="0"/>
+          </a:p>
+        </p:txBody>
+      </p:sp>
+      <p:sp>
+        <p:nvSpPr>
+          <p:cNvPr id="63" name="Text 61"/>
+          <p:cNvSpPr txBox="1"/>
+          <p:nvPr/>
+        </p:nvSpPr>
+        <p:spPr>
+          <a:xfrm>
+            <a:off x="876300" y="4953000"/>
+            <a:ext cx="1047750" cy="131445"/>
+          </a:xfrm>
+          <a:prstGeom prst="rect">
+            <a:avLst/>
+          </a:prstGeom>
+          <a:noFill/>
+          <a:ln/>
+        </p:spPr>
+        <p:txBody>
+          <a:bodyPr wrap="square" lIns="0" tIns="0" rIns="0" bIns="0" rtlCol="0" anchor="t"/>
+          <a:lstStyle/>
+          <a:p>
+            <a:pPr algn="r" indent="0" marL="0">
+              <a:lnSpc>
+                <a:spcPts val="1035"/>
+              </a:lnSpc>
+              <a:buNone/>
+            </a:pPr>
+            <a:r>
+              <a:rPr lang="en-US" sz="863" b="1" dirty="0">
                 <a:solidFill>
                   <a:srgbClr val="EA002C"/>
                 </a:solidFill>
@@ -6429,41 +6311,61 @@
                 <a:ea typeface="Consolas" pitchFamily="34" charset="-122"/>
                 <a:cs typeface="Consolas" pitchFamily="34" charset="-120"/>
               </a:rPr>
-              <a:t>지금</a:t>
-            </a:r>
-            <a:endParaRPr lang="en-US" sz="825" dirty="0"/>
-          </a:p>
-        </p:txBody>
-      </p:sp>
-      <p:sp>
-        <p:nvSpPr>
-          <p:cNvPr id="60" name="Text 58"/>
-          <p:cNvSpPr txBox="1"/>
-          <p:nvPr/>
-        </p:nvSpPr>
-        <p:spPr>
-          <a:xfrm>
-            <a:off x="876300" y="5162550"/>
-            <a:ext cx="3238500" cy="184547"/>
-          </a:xfrm>
-          <a:prstGeom prst="rect">
-            <a:avLst/>
-          </a:prstGeom>
-          <a:noFill/>
-          <a:ln/>
-        </p:spPr>
-        <p:txBody>
-          <a:bodyPr wrap="square" lIns="0" tIns="0" rIns="0" bIns="0" rtlCol="0" anchor="t"/>
-          <a:lstStyle/>
-          <a:p>
-            <a:pPr algn="l" indent="0" marL="0">
-              <a:lnSpc>
-                <a:spcPts val="1453"/>
-              </a:lnSpc>
-              <a:buNone/>
-            </a:pPr>
-            <a:r>
-              <a:rPr lang="en-US" sz="1163" b="1" dirty="0">
+              <a:t>2027 하반기</a:t>
+            </a:r>
+            <a:endParaRPr lang="en-US" sz="863" dirty="0"/>
+          </a:p>
+        </p:txBody>
+      </p:sp>
+      <p:sp>
+        <p:nvSpPr>
+          <p:cNvPr id="64" name="Shape 62"/>
+          <p:cNvSpPr/>
+          <p:nvPr/>
+        </p:nvSpPr>
+        <p:spPr>
+          <a:xfrm>
+            <a:off x="2033588" y="4986338"/>
+            <a:ext cx="85725" cy="85725"/>
+          </a:xfrm>
+          <a:prstGeom prst="ellipse">
+            <a:avLst/>
+          </a:prstGeom>
+          <a:solidFill>
+            <a:srgbClr val="EA002C"/>
+          </a:solidFill>
+          <a:ln/>
+        </p:spPr>
+      </p:sp>
+      <p:sp>
+        <p:nvSpPr>
+          <p:cNvPr id="65" name="Text 63"/>
+          <p:cNvSpPr txBox="1"/>
+          <p:nvPr/>
+        </p:nvSpPr>
+        <p:spPr>
+          <a:xfrm>
+            <a:off x="2286000" y="4933950"/>
+            <a:ext cx="8972550" cy="178594"/>
+          </a:xfrm>
+          <a:prstGeom prst="rect">
+            <a:avLst/>
+          </a:prstGeom>
+          <a:noFill/>
+          <a:ln/>
+        </p:spPr>
+        <p:txBody>
+          <a:bodyPr wrap="square" lIns="0" tIns="0" rIns="0" bIns="0" rtlCol="0" anchor="t"/>
+          <a:lstStyle/>
+          <a:p>
+            <a:pPr algn="l" indent="0" marL="0">
+              <a:lnSpc>
+                <a:spcPts val="1406"/>
+              </a:lnSpc>
+              <a:buNone/>
+            </a:pPr>
+            <a:r>
+              <a:rPr lang="en-US" sz="1125" b="1" dirty="0">
                 <a:solidFill>
                   <a:srgbClr val="1A1A1A"/>
                 </a:solidFill>
@@ -6471,36 +6373,36 @@
                 <a:ea typeface="Malgun Gothic" pitchFamily="34" charset="-122"/>
                 <a:cs typeface="Malgun Gothic" pitchFamily="34" charset="-120"/>
               </a:rPr>
-              <a:t>위례에 정착</a:t>
-            </a:r>
-            <a:endParaRPr lang="en-US" sz="1163" dirty="0"/>
-          </a:p>
-        </p:txBody>
-      </p:sp>
-      <p:sp>
-        <p:nvSpPr>
-          <p:cNvPr id="61" name="Text 59"/>
-          <p:cNvSpPr txBox="1"/>
-          <p:nvPr/>
-        </p:nvSpPr>
-        <p:spPr>
-          <a:xfrm>
-            <a:off x="876300" y="5391150"/>
-            <a:ext cx="3238500" cy="443627"/>
-          </a:xfrm>
-          <a:prstGeom prst="rect">
-            <a:avLst/>
-          </a:prstGeom>
-          <a:noFill/>
-          <a:ln/>
-        </p:spPr>
-        <p:txBody>
-          <a:bodyPr wrap="square" lIns="0" tIns="0" rIns="0" bIns="0" rtlCol="0" anchor="t"/>
-          <a:lstStyle/>
-          <a:p>
-            <a:pPr algn="l" indent="0" marL="0">
-              <a:lnSpc>
-                <a:spcPts val="1164"/>
+              <a:t>입찰하는 다른 사업소로 · 파주 · 여주 · 하남</a:t>
+            </a:r>
+            <a:endParaRPr lang="en-US" sz="1125" dirty="0"/>
+          </a:p>
+        </p:txBody>
+      </p:sp>
+      <p:sp>
+        <p:nvSpPr>
+          <p:cNvPr id="66" name="Text 64"/>
+          <p:cNvSpPr txBox="1"/>
+          <p:nvPr/>
+        </p:nvSpPr>
+        <p:spPr>
+          <a:xfrm>
+            <a:off x="2286000" y="5143500"/>
+            <a:ext cx="8972550" cy="306705"/>
+          </a:xfrm>
+          <a:prstGeom prst="rect">
+            <a:avLst/>
+          </a:prstGeom>
+          <a:noFill/>
+          <a:ln/>
+        </p:spPr>
+        <p:txBody>
+          <a:bodyPr wrap="square" lIns="0" tIns="0" rIns="0" bIns="0" rtlCol="0" anchor="t"/>
+          <a:lstStyle/>
+          <a:p>
+            <a:pPr algn="l" indent="0" marL="0">
+              <a:lnSpc>
+                <a:spcPts val="1208"/>
               </a:lnSpc>
               <a:buNone/>
             </a:pPr>
@@ -6513,7 +6415,7 @@
                 <a:ea typeface="Malgun Gothic" pitchFamily="34" charset="-122"/>
                 <a:cs typeface="Malgun Gothic" pitchFamily="34" charset="-120"/>
               </a:rPr>
-              <a:t>2주마다 시험하고 결과를 넣습니다. 쌓일수록 곡선이 촘촘해집니다.</a:t>
+              <a:t>도구와 절차는 그대로 옮깁니다. 특성 곡선표만 그 사업소 것으로 바꿔 넣으면 됩니다 — 곡선은 코드가 아니라 온도 61줄 표 파일로 읽습니다. 보정 곡선은 그 사업소 시험 실적으로 새로 쌓습니다(위례 곡선을 베껴 쓰지 않습니다).</a:t>
             </a:r>
             <a:endParaRPr lang="en-US" sz="863" dirty="0"/>
           </a:p>
@@ -6521,56 +6423,33 @@
       </p:sp>
       <p:sp>
         <p:nvSpPr>
-          <p:cNvPr id="62" name="Shape 60"/>
-          <p:cNvSpPr/>
-          <p:nvPr/>
-        </p:nvSpPr>
-        <p:spPr>
-          <a:xfrm>
-            <a:off x="4229100" y="4972050"/>
-            <a:ext cx="0" cy="952500"/>
-          </a:xfrm>
-          <a:prstGeom prst="line">
-            <a:avLst/>
-          </a:prstGeom>
-          <a:noFill/>
-          <a:ln w="12700">
-            <a:solidFill>
-              <a:srgbClr val="DEE3E9"/>
-            </a:solidFill>
-            <a:prstDash val="solid"/>
-          </a:ln>
-        </p:spPr>
-      </p:sp>
-      <p:sp>
-        <p:nvSpPr>
-          <p:cNvPr id="63" name="Text 61"/>
-          <p:cNvSpPr txBox="1"/>
-          <p:nvPr/>
-        </p:nvSpPr>
-        <p:spPr>
-          <a:xfrm>
-            <a:off x="4381500" y="4991100"/>
-            <a:ext cx="857250" cy="125730"/>
-          </a:xfrm>
-          <a:prstGeom prst="rect">
-            <a:avLst/>
-          </a:prstGeom>
-          <a:noFill/>
-          <a:ln/>
-        </p:spPr>
-        <p:txBody>
-          <a:bodyPr wrap="square" lIns="0" tIns="0" rIns="0" bIns="0" rtlCol="0" anchor="t"/>
-          <a:lstStyle/>
-          <a:p>
-            <a:pPr algn="l" indent="0" marL="0">
-              <a:lnSpc>
-                <a:spcPts val="990"/>
-              </a:lnSpc>
-              <a:buNone/>
-            </a:pPr>
-            <a:r>
-              <a:rPr lang="en-US" sz="825" b="1" spc="120" kern="0" dirty="0">
+          <p:cNvPr id="67" name="Text 65"/>
+          <p:cNvSpPr txBox="1"/>
+          <p:nvPr/>
+        </p:nvSpPr>
+        <p:spPr>
+          <a:xfrm>
+            <a:off x="876300" y="5562600"/>
+            <a:ext cx="1047750" cy="131445"/>
+          </a:xfrm>
+          <a:prstGeom prst="rect">
+            <a:avLst/>
+          </a:prstGeom>
+          <a:noFill/>
+          <a:ln/>
+        </p:spPr>
+        <p:txBody>
+          <a:bodyPr wrap="square" lIns="0" tIns="0" rIns="0" bIns="0" rtlCol="0" anchor="t"/>
+          <a:lstStyle/>
+          <a:p>
+            <a:pPr algn="r" indent="0" marL="0">
+              <a:lnSpc>
+                <a:spcPts val="1035"/>
+              </a:lnSpc>
+              <a:buNone/>
+            </a:pPr>
+            <a:r>
+              <a:rPr lang="en-US" sz="863" b="1" dirty="0">
                 <a:solidFill>
                   <a:srgbClr val="EA002C"/>
                 </a:solidFill>
@@ -6578,41 +6457,61 @@
                 <a:ea typeface="Consolas" pitchFamily="34" charset="-122"/>
                 <a:cs typeface="Consolas" pitchFamily="34" charset="-120"/>
               </a:rPr>
-              <a:t>다음</a:t>
-            </a:r>
-            <a:endParaRPr lang="en-US" sz="825" dirty="0"/>
-          </a:p>
-        </p:txBody>
-      </p:sp>
-      <p:sp>
-        <p:nvSpPr>
-          <p:cNvPr id="64" name="Text 62"/>
-          <p:cNvSpPr txBox="1"/>
-          <p:nvPr/>
-        </p:nvSpPr>
-        <p:spPr>
-          <a:xfrm>
-            <a:off x="4381500" y="5162550"/>
-            <a:ext cx="3238500" cy="184547"/>
-          </a:xfrm>
-          <a:prstGeom prst="rect">
-            <a:avLst/>
-          </a:prstGeom>
-          <a:noFill/>
-          <a:ln/>
-        </p:spPr>
-        <p:txBody>
-          <a:bodyPr wrap="square" lIns="0" tIns="0" rIns="0" bIns="0" rtlCol="0" anchor="t"/>
-          <a:lstStyle/>
-          <a:p>
-            <a:pPr algn="l" indent="0" marL="0">
-              <a:lnSpc>
-                <a:spcPts val="1453"/>
-              </a:lnSpc>
-              <a:buNone/>
-            </a:pPr>
-            <a:r>
-              <a:rPr lang="en-US" sz="1163" b="1" dirty="0">
+              <a:t>2028</a:t>
+            </a:r>
+            <a:endParaRPr lang="en-US" sz="863" dirty="0"/>
+          </a:p>
+        </p:txBody>
+      </p:sp>
+      <p:sp>
+        <p:nvSpPr>
+          <p:cNvPr id="68" name="Shape 66"/>
+          <p:cNvSpPr/>
+          <p:nvPr/>
+        </p:nvSpPr>
+        <p:spPr>
+          <a:xfrm>
+            <a:off x="2033588" y="5595938"/>
+            <a:ext cx="85725" cy="85725"/>
+          </a:xfrm>
+          <a:prstGeom prst="ellipse">
+            <a:avLst/>
+          </a:prstGeom>
+          <a:solidFill>
+            <a:srgbClr val="EA002C"/>
+          </a:solidFill>
+          <a:ln/>
+        </p:spPr>
+      </p:sp>
+      <p:sp>
+        <p:nvSpPr>
+          <p:cNvPr id="69" name="Text 67"/>
+          <p:cNvSpPr txBox="1"/>
+          <p:nvPr/>
+        </p:nvSpPr>
+        <p:spPr>
+          <a:xfrm>
+            <a:off x="2286000" y="5543550"/>
+            <a:ext cx="8972550" cy="178594"/>
+          </a:xfrm>
+          <a:prstGeom prst="rect">
+            <a:avLst/>
+          </a:prstGeom>
+          <a:noFill/>
+          <a:ln/>
+        </p:spPr>
+        <p:txBody>
+          <a:bodyPr wrap="square" lIns="0" tIns="0" rIns="0" bIns="0" rtlCol="0" anchor="t"/>
+          <a:lstStyle/>
+          <a:p>
+            <a:pPr algn="l" indent="0" marL="0">
+              <a:lnSpc>
+                <a:spcPts val="1406"/>
+              </a:lnSpc>
+              <a:buNone/>
+            </a:pPr>
+            <a:r>
+              <a:rPr lang="en-US" sz="1125" b="1" dirty="0">
                 <a:solidFill>
                   <a:srgbClr val="1A1A1A"/>
                 </a:solidFill>
@@ -6620,36 +6519,36 @@
                 <a:ea typeface="Malgun Gothic" pitchFamily="34" charset="-122"/>
                 <a:cs typeface="Malgun Gothic" pitchFamily="34" charset="-120"/>
               </a:rPr>
-              <a:t>같은 구조 발전소로</a:t>
-            </a:r>
-            <a:endParaRPr lang="en-US" sz="1163" dirty="0"/>
-          </a:p>
-        </p:txBody>
-      </p:sp>
-      <p:sp>
-        <p:nvSpPr>
-          <p:cNvPr id="65" name="Text 63"/>
-          <p:cNvSpPr txBox="1"/>
-          <p:nvPr/>
-        </p:nvSpPr>
-        <p:spPr>
-          <a:xfrm>
-            <a:off x="4381500" y="5391150"/>
-            <a:ext cx="3238500" cy="443627"/>
-          </a:xfrm>
-          <a:prstGeom prst="rect">
-            <a:avLst/>
-          </a:prstGeom>
-          <a:noFill/>
-          <a:ln/>
-        </p:spPr>
-        <p:txBody>
-          <a:bodyPr wrap="square" lIns="0" tIns="0" rIns="0" bIns="0" rtlCol="0" anchor="t"/>
-          <a:lstStyle/>
-          <a:p>
-            <a:pPr algn="l" indent="0" marL="0">
-              <a:lnSpc>
-                <a:spcPts val="1164"/>
+              <a:t>사업소 표준 절차로</a:t>
+            </a:r>
+            <a:endParaRPr lang="en-US" sz="1125" dirty="0"/>
+          </a:p>
+        </p:txBody>
+      </p:sp>
+      <p:sp>
+        <p:nvSpPr>
+          <p:cNvPr id="70" name="Text 68"/>
+          <p:cNvSpPr txBox="1"/>
+          <p:nvPr/>
+        </p:nvSpPr>
+        <p:spPr>
+          <a:xfrm>
+            <a:off x="2286000" y="5753100"/>
+            <a:ext cx="8972550" cy="306705"/>
+          </a:xfrm>
+          <a:prstGeom prst="rect">
+            <a:avLst/>
+          </a:prstGeom>
+          <a:noFill/>
+          <a:ln/>
+        </p:spPr>
+        <p:txBody>
+          <a:bodyPr wrap="square" lIns="0" tIns="0" rIns="0" bIns="0" rtlCol="0" anchor="t"/>
+          <a:lstStyle/>
+          <a:p>
+            <a:pPr algn="l" indent="0" marL="0">
+              <a:lnSpc>
+                <a:spcPts val="1208"/>
               </a:lnSpc>
               <a:buNone/>
             </a:pPr>
@@ -6662,7 +6561,7 @@
                 <a:ea typeface="Malgun Gothic" pitchFamily="34" charset="-122"/>
                 <a:cs typeface="Malgun Gothic" pitchFamily="34" charset="-120"/>
               </a:rPr>
-              <a:t>곡선표를 그 발전소 것으로 바꿔 넣고, 그 발전소 실적으로 보정 곡선을 새로 쌓습니다.</a:t>
+              <a:t>시험부터 신고까지의 순서를 표준 절차서로 정리합니다. 담당자가 바뀌어도 같은 숫자가 나오게 하는 것이 마지막 단계입니다.</a:t>
             </a:r>
             <a:endParaRPr lang="en-US" sz="863" dirty="0"/>
           </a:p>
@@ -6670,156 +6569,7 @@
       </p:sp>
       <p:sp>
         <p:nvSpPr>
-          <p:cNvPr id="66" name="Shape 64"/>
-          <p:cNvSpPr/>
-          <p:nvPr/>
-        </p:nvSpPr>
-        <p:spPr>
-          <a:xfrm>
-            <a:off x="7734300" y="4972050"/>
-            <a:ext cx="0" cy="952500"/>
-          </a:xfrm>
-          <a:prstGeom prst="line">
-            <a:avLst/>
-          </a:prstGeom>
-          <a:noFill/>
-          <a:ln w="12700">
-            <a:solidFill>
-              <a:srgbClr val="DEE3E9"/>
-            </a:solidFill>
-            <a:prstDash val="solid"/>
-          </a:ln>
-        </p:spPr>
-      </p:sp>
-      <p:sp>
-        <p:nvSpPr>
-          <p:cNvPr id="67" name="Text 65"/>
-          <p:cNvSpPr txBox="1"/>
-          <p:nvPr/>
-        </p:nvSpPr>
-        <p:spPr>
-          <a:xfrm>
-            <a:off x="7886700" y="4991100"/>
-            <a:ext cx="857250" cy="125730"/>
-          </a:xfrm>
-          <a:prstGeom prst="rect">
-            <a:avLst/>
-          </a:prstGeom>
-          <a:noFill/>
-          <a:ln/>
-        </p:spPr>
-        <p:txBody>
-          <a:bodyPr wrap="square" lIns="0" tIns="0" rIns="0" bIns="0" rtlCol="0" anchor="t"/>
-          <a:lstStyle/>
-          <a:p>
-            <a:pPr algn="l" indent="0" marL="0">
-              <a:lnSpc>
-                <a:spcPts val="990"/>
-              </a:lnSpc>
-              <a:buNone/>
-            </a:pPr>
-            <a:r>
-              <a:rPr lang="en-US" sz="825" b="1" spc="120" kern="0" dirty="0">
-                <a:solidFill>
-                  <a:srgbClr val="EA002C"/>
-                </a:solidFill>
-                <a:latin typeface="Consolas" pitchFamily="34" charset="0"/>
-                <a:ea typeface="Consolas" pitchFamily="34" charset="-122"/>
-                <a:cs typeface="Consolas" pitchFamily="34" charset="-120"/>
-              </a:rPr>
-              <a:t>그다음</a:t>
-            </a:r>
-            <a:endParaRPr lang="en-US" sz="825" dirty="0"/>
-          </a:p>
-        </p:txBody>
-      </p:sp>
-      <p:sp>
-        <p:nvSpPr>
-          <p:cNvPr id="68" name="Text 66"/>
-          <p:cNvSpPr txBox="1"/>
-          <p:nvPr/>
-        </p:nvSpPr>
-        <p:spPr>
-          <a:xfrm>
-            <a:off x="7886700" y="5162550"/>
-            <a:ext cx="3238500" cy="184547"/>
-          </a:xfrm>
-          <a:prstGeom prst="rect">
-            <a:avLst/>
-          </a:prstGeom>
-          <a:noFill/>
-          <a:ln/>
-        </p:spPr>
-        <p:txBody>
-          <a:bodyPr wrap="square" lIns="0" tIns="0" rIns="0" bIns="0" rtlCol="0" anchor="t"/>
-          <a:lstStyle/>
-          <a:p>
-            <a:pPr algn="l" indent="0" marL="0">
-              <a:lnSpc>
-                <a:spcPts val="1453"/>
-              </a:lnSpc>
-              <a:buNone/>
-            </a:pPr>
-            <a:r>
-              <a:rPr lang="en-US" sz="1163" b="1" dirty="0">
-                <a:solidFill>
-                  <a:srgbClr val="1A1A1A"/>
-                </a:solidFill>
-                <a:latin typeface="Malgun Gothic" pitchFamily="34" charset="0"/>
-                <a:ea typeface="Malgun Gothic" pitchFamily="34" charset="-122"/>
-                <a:cs typeface="Malgun Gothic" pitchFamily="34" charset="-120"/>
-              </a:rPr>
-              <a:t>절차로 굳히기</a:t>
-            </a:r>
-            <a:endParaRPr lang="en-US" sz="1163" dirty="0"/>
-          </a:p>
-        </p:txBody>
-      </p:sp>
-      <p:sp>
-        <p:nvSpPr>
-          <p:cNvPr id="69" name="Text 67"/>
-          <p:cNvSpPr txBox="1"/>
-          <p:nvPr/>
-        </p:nvSpPr>
-        <p:spPr>
-          <a:xfrm>
-            <a:off x="7886700" y="5391150"/>
-            <a:ext cx="3238500" cy="443627"/>
-          </a:xfrm>
-          <a:prstGeom prst="rect">
-            <a:avLst/>
-          </a:prstGeom>
-          <a:noFill/>
-          <a:ln/>
-        </p:spPr>
-        <p:txBody>
-          <a:bodyPr wrap="square" lIns="0" tIns="0" rIns="0" bIns="0" rtlCol="0" anchor="t"/>
-          <a:lstStyle/>
-          <a:p>
-            <a:pPr algn="l" indent="0" marL="0">
-              <a:lnSpc>
-                <a:spcPts val="1164"/>
-              </a:lnSpc>
-              <a:buNone/>
-            </a:pPr>
-            <a:r>
-              <a:rPr lang="en-US" sz="863" dirty="0">
-                <a:solidFill>
-                  <a:srgbClr val="5A5A5A"/>
-                </a:solidFill>
-                <a:latin typeface="Malgun Gothic" pitchFamily="34" charset="0"/>
-                <a:ea typeface="Malgun Gothic" pitchFamily="34" charset="-122"/>
-                <a:cs typeface="Malgun Gothic" pitchFamily="34" charset="-120"/>
-              </a:rPr>
-              <a:t>신고 숫자를 내는 순서를 사업소 표준으로 정리합니다.</a:t>
-            </a:r>
-            <a:endParaRPr lang="en-US" sz="863" dirty="0"/>
-          </a:p>
-        </p:txBody>
-      </p:sp>
-      <p:sp>
-        <p:nvSpPr>
-          <p:cNvPr id="70" name="Shape 68"/>
+          <p:cNvPr id="71" name="Shape 69"/>
           <p:cNvSpPr/>
           <p:nvPr/>
         </p:nvSpPr>
@@ -6842,7 +6592,7 @@
       </p:sp>
       <p:sp>
         <p:nvSpPr>
-          <p:cNvPr id="71" name="Shape 69"/>
+          <p:cNvPr id="72" name="Shape 70"/>
           <p:cNvSpPr/>
           <p:nvPr/>
         </p:nvSpPr>
@@ -6864,7 +6614,7 @@
       </p:sp>
       <p:sp>
         <p:nvSpPr>
-          <p:cNvPr id="72" name="Text 70"/>
+          <p:cNvPr id="73" name="Text 71"/>
           <p:cNvSpPr txBox="1"/>
           <p:nvPr/>
         </p:nvSpPr>
@@ -6906,7 +6656,7 @@
       </p:sp>
       <p:sp>
         <p:nvSpPr>
-          <p:cNvPr id="73" name="Text 71"/>
+          <p:cNvPr id="74" name="Text 72"/>
           <p:cNvSpPr txBox="1"/>
           <p:nvPr/>
         </p:nvSpPr>
@@ -6940,7 +6690,7 @@
                 <a:ea typeface="Malgun Gothic" pitchFamily="34" charset="-122"/>
                 <a:cs typeface="Malgun Gothic" pitchFamily="34" charset="-120"/>
               </a:rPr>
-              <a:t>한 번 만들고 끝나는 도구가 아닙니다. 쓸수록 촘촘해지고, 옮겨 심을 수 있습니다.</a:t>
+              <a:t>한 번 만들고 끝나는 도구가 아닙니다. 쌓일수록 촘촘해지고, 옮겨 심을 수 있습니다.</a:t>
             </a:r>
             <a:endParaRPr lang="en-US" sz="1163" dirty="0"/>
           </a:p>

--- a/docs/ppt/위례_공급가능용량_최종발표_v3.pptx
+++ b/docs/ppt/위례_공급가능용량_최종발표_v3.pptx
@@ -4692,7 +4692,7 @@
         <p:spPr>
           <a:xfrm>
             <a:off x="685800" y="1724025"/>
-            <a:ext cx="10820400" cy="1514475"/>
+            <a:ext cx="10820400" cy="1362075"/>
           </a:xfrm>
           <a:prstGeom prst="rect">
             <a:avLst/>
@@ -4864,7 +4864,7 @@
         </p:nvSpPr>
         <p:spPr>
           <a:xfrm>
-            <a:off x="876300" y="2819400"/>
+            <a:off x="876300" y="2705100"/>
             <a:ext cx="10382250" cy="0"/>
           </a:xfrm>
           <a:prstGeom prst="line">
@@ -4887,8 +4887,8 @@
         </p:nvSpPr>
         <p:spPr>
           <a:xfrm>
-            <a:off x="1276350" y="2743200"/>
-            <a:ext cx="419100" cy="76200"/>
+            <a:off x="1276350" y="2638425"/>
+            <a:ext cx="419100" cy="66675"/>
           </a:xfrm>
           <a:prstGeom prst="rect">
             <a:avLst/>
@@ -4907,8 +4907,8 @@
         </p:nvSpPr>
         <p:spPr>
           <a:xfrm>
-            <a:off x="876300" y="2552700"/>
-            <a:ext cx="1219200" cy="171450"/>
+            <a:off x="876300" y="2457450"/>
+            <a:ext cx="1219200" cy="165735"/>
           </a:xfrm>
           <a:prstGeom prst="rect">
             <a:avLst/>
@@ -4922,12 +4922,12 @@
           <a:p>
             <a:pPr algn="ctr" indent="0" marL="0">
               <a:lnSpc>
-                <a:spcPts val="1350"/>
-              </a:lnSpc>
-              <a:buNone/>
-            </a:pPr>
-            <a:r>
-              <a:rPr lang="en-US" sz="1125" b="1" dirty="0">
+                <a:spcPts val="1305"/>
+              </a:lnSpc>
+              <a:buNone/>
+            </a:pPr>
+            <a:r>
+              <a:rPr lang="en-US" sz="1088" b="1" dirty="0">
                 <a:solidFill>
                   <a:srgbClr val="FF6F0F"/>
                 </a:solidFill>
@@ -4937,7 +4937,7 @@
               </a:rPr>
               <a:t>2회</a:t>
             </a:r>
-            <a:endParaRPr lang="en-US" sz="1125" dirty="0"/>
+            <a:endParaRPr lang="en-US" sz="1088" dirty="0"/>
           </a:p>
         </p:txBody>
       </p:sp>
@@ -4949,7 +4949,7 @@
         </p:nvSpPr>
         <p:spPr>
           <a:xfrm>
-            <a:off x="876300" y="2895600"/>
+            <a:off x="876300" y="2781300"/>
             <a:ext cx="1219200" cy="120015"/>
           </a:xfrm>
           <a:prstGeom prst="rect">
@@ -4991,8 +4991,8 @@
         </p:nvSpPr>
         <p:spPr>
           <a:xfrm>
-            <a:off x="2095500" y="2133600"/>
-            <a:ext cx="0" cy="647700"/>
+            <a:off x="2095500" y="2114550"/>
+            <a:ext cx="0" cy="571500"/>
           </a:xfrm>
           <a:prstGeom prst="line">
             <a:avLst/>
@@ -5014,8 +5014,8 @@
         </p:nvSpPr>
         <p:spPr>
           <a:xfrm>
-            <a:off x="2762250" y="2543175"/>
-            <a:ext cx="419100" cy="276225"/>
+            <a:off x="2762250" y="2457450"/>
+            <a:ext cx="419100" cy="247650"/>
           </a:xfrm>
           <a:prstGeom prst="rect">
             <a:avLst/>
@@ -5034,8 +5034,8 @@
         </p:nvSpPr>
         <p:spPr>
           <a:xfrm>
-            <a:off x="2362200" y="2352675"/>
-            <a:ext cx="1219200" cy="171450"/>
+            <a:off x="2362200" y="2276475"/>
+            <a:ext cx="1219200" cy="165735"/>
           </a:xfrm>
           <a:prstGeom prst="rect">
             <a:avLst/>
@@ -5049,12 +5049,12 @@
           <a:p>
             <a:pPr algn="ctr" indent="0" marL="0">
               <a:lnSpc>
-                <a:spcPts val="1350"/>
-              </a:lnSpc>
-              <a:buNone/>
-            </a:pPr>
-            <a:r>
-              <a:rPr lang="en-US" sz="1125" b="1" dirty="0">
+                <a:spcPts val="1305"/>
+              </a:lnSpc>
+              <a:buNone/>
+            </a:pPr>
+            <a:r>
+              <a:rPr lang="en-US" sz="1088" b="1" dirty="0">
                 <a:solidFill>
                   <a:srgbClr val="EA002C"/>
                 </a:solidFill>
@@ -5064,7 +5064,7 @@
               </a:rPr>
               <a:t>7회</a:t>
             </a:r>
-            <a:endParaRPr lang="en-US" sz="1125" dirty="0"/>
+            <a:endParaRPr lang="en-US" sz="1088" dirty="0"/>
           </a:p>
         </p:txBody>
       </p:sp>
@@ -5076,7 +5076,7 @@
         </p:nvSpPr>
         <p:spPr>
           <a:xfrm>
-            <a:off x="2362200" y="2895600"/>
+            <a:off x="2362200" y="2781300"/>
             <a:ext cx="1219200" cy="120015"/>
           </a:xfrm>
           <a:prstGeom prst="rect">
@@ -5118,8 +5118,8 @@
         </p:nvSpPr>
         <p:spPr>
           <a:xfrm>
-            <a:off x="3581400" y="2133600"/>
-            <a:ext cx="0" cy="647700"/>
+            <a:off x="3581400" y="2114550"/>
+            <a:ext cx="0" cy="571500"/>
           </a:xfrm>
           <a:prstGeom prst="line">
             <a:avLst/>
@@ -5141,8 +5141,8 @@
         </p:nvSpPr>
         <p:spPr>
           <a:xfrm>
-            <a:off x="4248150" y="2581275"/>
-            <a:ext cx="419100" cy="238125"/>
+            <a:off x="4248150" y="2495550"/>
+            <a:ext cx="419100" cy="209550"/>
           </a:xfrm>
           <a:prstGeom prst="rect">
             <a:avLst/>
@@ -5161,8 +5161,8 @@
         </p:nvSpPr>
         <p:spPr>
           <a:xfrm>
-            <a:off x="3848100" y="2390775"/>
-            <a:ext cx="1219200" cy="171450"/>
+            <a:off x="3848100" y="2314575"/>
+            <a:ext cx="1219200" cy="165735"/>
           </a:xfrm>
           <a:prstGeom prst="rect">
             <a:avLst/>
@@ -5176,12 +5176,12 @@
           <a:p>
             <a:pPr algn="ctr" indent="0" marL="0">
               <a:lnSpc>
-                <a:spcPts val="1350"/>
-              </a:lnSpc>
-              <a:buNone/>
-            </a:pPr>
-            <a:r>
-              <a:rPr lang="en-US" sz="1125" b="1" dirty="0">
+                <a:spcPts val="1305"/>
+              </a:lnSpc>
+              <a:buNone/>
+            </a:pPr>
+            <a:r>
+              <a:rPr lang="en-US" sz="1088" b="1" dirty="0">
                 <a:solidFill>
                   <a:srgbClr val="EA002C"/>
                 </a:solidFill>
@@ -5191,7 +5191,7 @@
               </a:rPr>
               <a:t>6회</a:t>
             </a:r>
-            <a:endParaRPr lang="en-US" sz="1125" dirty="0"/>
+            <a:endParaRPr lang="en-US" sz="1088" dirty="0"/>
           </a:p>
         </p:txBody>
       </p:sp>
@@ -5203,7 +5203,7 @@
         </p:nvSpPr>
         <p:spPr>
           <a:xfrm>
-            <a:off x="3848100" y="2895600"/>
+            <a:off x="3848100" y="2781300"/>
             <a:ext cx="1219200" cy="120015"/>
           </a:xfrm>
           <a:prstGeom prst="rect">
@@ -5245,8 +5245,8 @@
         </p:nvSpPr>
         <p:spPr>
           <a:xfrm>
-            <a:off x="5067300" y="2133600"/>
-            <a:ext cx="0" cy="647700"/>
+            <a:off x="5067300" y="2114550"/>
+            <a:ext cx="0" cy="571500"/>
           </a:xfrm>
           <a:prstGeom prst="line">
             <a:avLst/>
@@ -5268,8 +5268,8 @@
         </p:nvSpPr>
         <p:spPr>
           <a:xfrm>
-            <a:off x="5734050" y="2705100"/>
-            <a:ext cx="419100" cy="114300"/>
+            <a:off x="5734050" y="2600325"/>
+            <a:ext cx="419100" cy="104775"/>
           </a:xfrm>
           <a:prstGeom prst="rect">
             <a:avLst/>
@@ -5288,8 +5288,8 @@
         </p:nvSpPr>
         <p:spPr>
           <a:xfrm>
-            <a:off x="5334000" y="2514600"/>
-            <a:ext cx="1219200" cy="171450"/>
+            <a:off x="5334000" y="2419350"/>
+            <a:ext cx="1219200" cy="165735"/>
           </a:xfrm>
           <a:prstGeom prst="rect">
             <a:avLst/>
@@ -5303,12 +5303,12 @@
           <a:p>
             <a:pPr algn="ctr" indent="0" marL="0">
               <a:lnSpc>
-                <a:spcPts val="1350"/>
-              </a:lnSpc>
-              <a:buNone/>
-            </a:pPr>
-            <a:r>
-              <a:rPr lang="en-US" sz="1125" b="1" dirty="0">
+                <a:spcPts val="1305"/>
+              </a:lnSpc>
+              <a:buNone/>
+            </a:pPr>
+            <a:r>
+              <a:rPr lang="en-US" sz="1088" b="1" dirty="0">
                 <a:solidFill>
                   <a:srgbClr val="FF6F0F"/>
                 </a:solidFill>
@@ -5318,7 +5318,7 @@
               </a:rPr>
               <a:t>3회</a:t>
             </a:r>
-            <a:endParaRPr lang="en-US" sz="1125" dirty="0"/>
+            <a:endParaRPr lang="en-US" sz="1088" dirty="0"/>
           </a:p>
         </p:txBody>
       </p:sp>
@@ -5330,7 +5330,7 @@
         </p:nvSpPr>
         <p:spPr>
           <a:xfrm>
-            <a:off x="5334000" y="2895600"/>
+            <a:off x="5334000" y="2781300"/>
             <a:ext cx="1219200" cy="120015"/>
           </a:xfrm>
           <a:prstGeom prst="rect">
@@ -5372,8 +5372,8 @@
         </p:nvSpPr>
         <p:spPr>
           <a:xfrm>
-            <a:off x="6553200" y="2133600"/>
-            <a:ext cx="0" cy="647700"/>
+            <a:off x="6553200" y="2114550"/>
+            <a:ext cx="0" cy="571500"/>
           </a:xfrm>
           <a:prstGeom prst="line">
             <a:avLst/>
@@ -5395,7 +5395,7 @@
         </p:nvSpPr>
         <p:spPr>
           <a:xfrm>
-            <a:off x="7219950" y="2781300"/>
+            <a:off x="7219950" y="2667000"/>
             <a:ext cx="419100" cy="38100"/>
           </a:xfrm>
           <a:prstGeom prst="rect">
@@ -5415,8 +5415,8 @@
         </p:nvSpPr>
         <p:spPr>
           <a:xfrm>
-            <a:off x="6819900" y="2590800"/>
-            <a:ext cx="1219200" cy="171450"/>
+            <a:off x="6819900" y="2486025"/>
+            <a:ext cx="1219200" cy="165735"/>
           </a:xfrm>
           <a:prstGeom prst="rect">
             <a:avLst/>
@@ -5430,12 +5430,12 @@
           <a:p>
             <a:pPr algn="ctr" indent="0" marL="0">
               <a:lnSpc>
-                <a:spcPts val="1350"/>
-              </a:lnSpc>
-              <a:buNone/>
-            </a:pPr>
-            <a:r>
-              <a:rPr lang="en-US" sz="1125" b="1" dirty="0">
+                <a:spcPts val="1305"/>
+              </a:lnSpc>
+              <a:buNone/>
+            </a:pPr>
+            <a:r>
+              <a:rPr lang="en-US" sz="1088" b="1" dirty="0">
                 <a:solidFill>
                   <a:srgbClr val="FF6F0F"/>
                 </a:solidFill>
@@ -5445,7 +5445,7 @@
               </a:rPr>
               <a:t>1회</a:t>
             </a:r>
-            <a:endParaRPr lang="en-US" sz="1125" dirty="0"/>
+            <a:endParaRPr lang="en-US" sz="1088" dirty="0"/>
           </a:p>
         </p:txBody>
       </p:sp>
@@ -5457,7 +5457,7 @@
         </p:nvSpPr>
         <p:spPr>
           <a:xfrm>
-            <a:off x="6819900" y="2895600"/>
+            <a:off x="6819900" y="2781300"/>
             <a:ext cx="1219200" cy="120015"/>
           </a:xfrm>
           <a:prstGeom prst="rect">
@@ -5499,8 +5499,8 @@
         </p:nvSpPr>
         <p:spPr>
           <a:xfrm>
-            <a:off x="8039100" y="2133600"/>
-            <a:ext cx="0" cy="647700"/>
+            <a:off x="8039100" y="2114550"/>
+            <a:ext cx="0" cy="571500"/>
           </a:xfrm>
           <a:prstGeom prst="line">
             <a:avLst/>
@@ -5522,8 +5522,8 @@
         </p:nvSpPr>
         <p:spPr>
           <a:xfrm>
-            <a:off x="8705850" y="2581275"/>
-            <a:ext cx="419100" cy="238125"/>
+            <a:off x="8705850" y="2495550"/>
+            <a:ext cx="419100" cy="209550"/>
           </a:xfrm>
           <a:prstGeom prst="rect">
             <a:avLst/>
@@ -5542,8 +5542,8 @@
         </p:nvSpPr>
         <p:spPr>
           <a:xfrm>
-            <a:off x="8305800" y="2390775"/>
-            <a:ext cx="1219200" cy="171450"/>
+            <a:off x="8305800" y="2314575"/>
+            <a:ext cx="1219200" cy="165735"/>
           </a:xfrm>
           <a:prstGeom prst="rect">
             <a:avLst/>
@@ -5557,12 +5557,12 @@
           <a:p>
             <a:pPr algn="ctr" indent="0" marL="0">
               <a:lnSpc>
-                <a:spcPts val="1350"/>
-              </a:lnSpc>
-              <a:buNone/>
-            </a:pPr>
-            <a:r>
-              <a:rPr lang="en-US" sz="1125" b="1" dirty="0">
+                <a:spcPts val="1305"/>
+              </a:lnSpc>
+              <a:buNone/>
+            </a:pPr>
+            <a:r>
+              <a:rPr lang="en-US" sz="1088" b="1" dirty="0">
                 <a:solidFill>
                   <a:srgbClr val="EA002C"/>
                 </a:solidFill>
@@ -5572,7 +5572,7 @@
               </a:rPr>
               <a:t>6회</a:t>
             </a:r>
-            <a:endParaRPr lang="en-US" sz="1125" dirty="0"/>
+            <a:endParaRPr lang="en-US" sz="1088" dirty="0"/>
           </a:p>
         </p:txBody>
       </p:sp>
@@ -5584,7 +5584,7 @@
         </p:nvSpPr>
         <p:spPr>
           <a:xfrm>
-            <a:off x="8305800" y="2895600"/>
+            <a:off x="8305800" y="2781300"/>
             <a:ext cx="1219200" cy="120015"/>
           </a:xfrm>
           <a:prstGeom prst="rect">
@@ -5626,8 +5626,8 @@
         </p:nvSpPr>
         <p:spPr>
           <a:xfrm>
-            <a:off x="9525000" y="2133600"/>
-            <a:ext cx="0" cy="647700"/>
+            <a:off x="9525000" y="2114550"/>
+            <a:ext cx="0" cy="571500"/>
           </a:xfrm>
           <a:prstGeom prst="line">
             <a:avLst/>
@@ -5649,8 +5649,8 @@
         </p:nvSpPr>
         <p:spPr>
           <a:xfrm>
-            <a:off x="10191750" y="2228850"/>
-            <a:ext cx="419100" cy="590550"/>
+            <a:off x="10191750" y="2171700"/>
+            <a:ext cx="419100" cy="533400"/>
           </a:xfrm>
           <a:prstGeom prst="rect">
             <a:avLst/>
@@ -5669,8 +5669,8 @@
         </p:nvSpPr>
         <p:spPr>
           <a:xfrm>
-            <a:off x="9791700" y="2038350"/>
-            <a:ext cx="1219200" cy="171450"/>
+            <a:off x="9791700" y="1990725"/>
+            <a:ext cx="1219200" cy="165735"/>
           </a:xfrm>
           <a:prstGeom prst="rect">
             <a:avLst/>
@@ -5684,12 +5684,12 @@
           <a:p>
             <a:pPr algn="ctr" indent="0" marL="0">
               <a:lnSpc>
-                <a:spcPts val="1350"/>
-              </a:lnSpc>
-              <a:buNone/>
-            </a:pPr>
-            <a:r>
-              <a:rPr lang="en-US" sz="1125" b="1" dirty="0">
+                <a:spcPts val="1305"/>
+              </a:lnSpc>
+              <a:buNone/>
+            </a:pPr>
+            <a:r>
+              <a:rPr lang="en-US" sz="1088" b="1" dirty="0">
                 <a:solidFill>
                   <a:srgbClr val="EA002C"/>
                 </a:solidFill>
@@ -5699,7 +5699,7 @@
               </a:rPr>
               <a:t>15회</a:t>
             </a:r>
-            <a:endParaRPr lang="en-US" sz="1125" dirty="0"/>
+            <a:endParaRPr lang="en-US" sz="1088" dirty="0"/>
           </a:p>
         </p:txBody>
       </p:sp>
@@ -5711,7 +5711,7 @@
         </p:nvSpPr>
         <p:spPr>
           <a:xfrm>
-            <a:off x="9791700" y="2895600"/>
+            <a:off x="9791700" y="2781300"/>
             <a:ext cx="1219200" cy="120015"/>
           </a:xfrm>
           <a:prstGeom prst="rect">
@@ -5753,7 +5753,7 @@
         </p:nvSpPr>
         <p:spPr>
           <a:xfrm>
-            <a:off x="876300" y="3028950"/>
+            <a:off x="876300" y="2952750"/>
             <a:ext cx="10382250" cy="130016"/>
           </a:xfrm>
           <a:prstGeom prst="rect">
@@ -5795,8 +5795,8 @@
         </p:nvSpPr>
         <p:spPr>
           <a:xfrm>
-            <a:off x="685800" y="3476625"/>
-            <a:ext cx="10820400" cy="2619375"/>
+            <a:off x="685800" y="3324225"/>
+            <a:ext cx="10820400" cy="2771775"/>
           </a:xfrm>
           <a:prstGeom prst="rect">
             <a:avLst/>
@@ -5820,7 +5820,7 @@
         </p:nvSpPr>
         <p:spPr>
           <a:xfrm>
-            <a:off x="685800" y="3352800"/>
+            <a:off x="685800" y="3200400"/>
             <a:ext cx="1304925" cy="247650"/>
           </a:xfrm>
           <a:prstGeom prst="rect">
@@ -5842,7 +5842,7 @@
         </p:nvSpPr>
         <p:spPr>
           <a:xfrm>
-            <a:off x="819150" y="3409950"/>
+            <a:off x="819150" y="3257550"/>
             <a:ext cx="152400" cy="142875"/>
           </a:xfrm>
           <a:prstGeom prst="rect">
@@ -5884,7 +5884,7 @@
         </p:nvSpPr>
         <p:spPr>
           <a:xfrm>
-            <a:off x="1009650" y="3409950"/>
+            <a:off x="1009650" y="3257550"/>
             <a:ext cx="866775" cy="154305"/>
           </a:xfrm>
           <a:prstGeom prst="rect">
@@ -5926,7 +5926,7 @@
         </p:nvSpPr>
         <p:spPr>
           <a:xfrm>
-            <a:off x="10134600" y="3543300"/>
+            <a:off x="10134600" y="3390900"/>
             <a:ext cx="1257300" cy="125730"/>
           </a:xfrm>
           <a:prstGeom prst="rect">
@@ -5968,8 +5968,8 @@
         </p:nvSpPr>
         <p:spPr>
           <a:xfrm>
-            <a:off x="2076450" y="3752850"/>
-            <a:ext cx="0" cy="2324100"/>
+            <a:off x="2076450" y="3600450"/>
+            <a:ext cx="0" cy="2438400"/>
           </a:xfrm>
           <a:prstGeom prst="line">
             <a:avLst/>
@@ -5991,7 +5991,7 @@
         </p:nvSpPr>
         <p:spPr>
           <a:xfrm>
-            <a:off x="876300" y="3733800"/>
+            <a:off x="876300" y="3581400"/>
             <a:ext cx="1047750" cy="131445"/>
           </a:xfrm>
           <a:prstGeom prst="rect">
@@ -6033,7 +6033,7 @@
         </p:nvSpPr>
         <p:spPr>
           <a:xfrm>
-            <a:off x="2033588" y="3767138"/>
+            <a:off x="2033588" y="3605213"/>
             <a:ext cx="85725" cy="85725"/>
           </a:xfrm>
           <a:prstGeom prst="ellipse">
@@ -6053,27 +6053,27 @@
         </p:nvSpPr>
         <p:spPr>
           <a:xfrm>
-            <a:off x="2286000" y="3714750"/>
-            <a:ext cx="8972550" cy="178594"/>
-          </a:xfrm>
-          <a:prstGeom prst="rect">
-            <a:avLst/>
-          </a:prstGeom>
-          <a:noFill/>
-          <a:ln/>
-        </p:spPr>
-        <p:txBody>
-          <a:bodyPr wrap="square" lIns="0" tIns="0" rIns="0" bIns="0" rtlCol="0" anchor="t"/>
-          <a:lstStyle/>
-          <a:p>
-            <a:pPr algn="l" indent="0" marL="0">
-              <a:lnSpc>
-                <a:spcPts val="1406"/>
-              </a:lnSpc>
-              <a:buNone/>
-            </a:pPr>
-            <a:r>
-              <a:rPr lang="en-US" sz="1125" b="1" dirty="0">
+            <a:off x="2286000" y="3562350"/>
+            <a:ext cx="8972550" cy="172641"/>
+          </a:xfrm>
+          <a:prstGeom prst="rect">
+            <a:avLst/>
+          </a:prstGeom>
+          <a:noFill/>
+          <a:ln/>
+        </p:spPr>
+        <p:txBody>
+          <a:bodyPr wrap="square" lIns="0" tIns="0" rIns="0" bIns="0" rtlCol="0" anchor="t"/>
+          <a:lstStyle/>
+          <a:p>
+            <a:pPr algn="l" indent="0" marL="0">
+              <a:lnSpc>
+                <a:spcPts val="1359"/>
+              </a:lnSpc>
+              <a:buNone/>
+            </a:pPr>
+            <a:r>
+              <a:rPr lang="en-US" sz="1088" b="1" dirty="0">
                 <a:solidFill>
                   <a:srgbClr val="1A1A1A"/>
                 </a:solidFill>
@@ -6083,7 +6083,7 @@
               </a:rPr>
               <a:t>위례 정착 · 빈 온도대 채우기</a:t>
             </a:r>
-            <a:endParaRPr lang="en-US" sz="1125" dirty="0"/>
+            <a:endParaRPr lang="en-US" sz="1088" dirty="0"/>
           </a:p>
         </p:txBody>
       </p:sp>
@@ -6095,27 +6095,131 @@
         </p:nvSpPr>
         <p:spPr>
           <a:xfrm>
+            <a:off x="2286000" y="3752850"/>
+            <a:ext cx="8972550" cy="151924"/>
+          </a:xfrm>
+          <a:prstGeom prst="rect">
+            <a:avLst/>
+          </a:prstGeom>
+          <a:noFill/>
+          <a:ln/>
+        </p:spPr>
+        <p:txBody>
+          <a:bodyPr wrap="square" lIns="0" tIns="0" rIns="0" bIns="0" rtlCol="0" anchor="t"/>
+          <a:lstStyle/>
+          <a:p>
+            <a:pPr algn="l" indent="0" marL="0">
+              <a:lnSpc>
+                <a:spcPts val="1196"/>
+              </a:lnSpc>
+              <a:buNone/>
+            </a:pPr>
+            <a:r>
+              <a:rPr lang="en-US" sz="825" dirty="0">
+                <a:solidFill>
+                  <a:srgbClr val="5A5A5A"/>
+                </a:solidFill>
+                <a:latin typeface="Malgun Gothic" pitchFamily="34" charset="0"/>
+                <a:ea typeface="Malgun Gothic" pitchFamily="34" charset="-122"/>
+                <a:cs typeface="Malgun Gothic" pitchFamily="34" charset="-120"/>
+              </a:rPr>
+              <a:t>2주마다 시험하고 결과를 도구에 넣습니다. 20~25℃ 1회, 15~20℃ 3회처럼 얇은 온도대부터 채웁니다.</a:t>
+            </a:r>
+            <a:endParaRPr lang="en-US" sz="825" dirty="0"/>
+          </a:p>
+        </p:txBody>
+      </p:sp>
+      <p:sp>
+        <p:nvSpPr>
+          <p:cNvPr id="59" name="Shape 57"/>
+          <p:cNvSpPr/>
+          <p:nvPr/>
+        </p:nvSpPr>
+        <p:spPr>
+          <a:xfrm>
+            <a:off x="2047875" y="3981450"/>
+            <a:ext cx="57150" cy="57150"/>
+          </a:xfrm>
+          <a:prstGeom prst="ellipse">
+            <a:avLst/>
+          </a:prstGeom>
+          <a:solidFill>
+            <a:srgbClr val="C4CAD1"/>
+          </a:solidFill>
+          <a:ln/>
+        </p:spPr>
+      </p:sp>
+      <p:sp>
+        <p:nvSpPr>
+          <p:cNvPr id="60" name="Text 58"/>
+          <p:cNvSpPr txBox="1"/>
+          <p:nvPr/>
+        </p:nvSpPr>
+        <p:spPr>
+          <a:xfrm>
             <a:off x="2286000" y="3924300"/>
-            <a:ext cx="8972550" cy="306705"/>
-          </a:xfrm>
-          <a:prstGeom prst="rect">
-            <a:avLst/>
-          </a:prstGeom>
-          <a:noFill/>
-          <a:ln/>
-        </p:spPr>
-        <p:txBody>
-          <a:bodyPr wrap="square" lIns="0" tIns="0" rIns="0" bIns="0" rtlCol="0" anchor="t"/>
-          <a:lstStyle/>
-          <a:p>
-            <a:pPr algn="l" indent="0" marL="0">
-              <a:lnSpc>
-                <a:spcPts val="1208"/>
-              </a:lnSpc>
-              <a:buNone/>
-            </a:pPr>
-            <a:r>
-              <a:rPr lang="en-US" sz="863" dirty="0">
+            <a:ext cx="8972550" cy="172641"/>
+          </a:xfrm>
+          <a:prstGeom prst="rect">
+            <a:avLst/>
+          </a:prstGeom>
+          <a:noFill/>
+          <a:ln/>
+        </p:spPr>
+        <p:txBody>
+          <a:bodyPr wrap="square" lIns="0" tIns="0" rIns="0" bIns="0" rtlCol="0" anchor="t"/>
+          <a:lstStyle/>
+          <a:p>
+            <a:pPr algn="l" indent="0" marL="0">
+              <a:lnSpc>
+                <a:spcPts val="1359"/>
+              </a:lnSpc>
+              <a:buNone/>
+            </a:pPr>
+            <a:r>
+              <a:rPr lang="en-US" sz="1088" b="1" dirty="0">
+                <a:solidFill>
+                  <a:srgbClr val="1A1A1A"/>
+                </a:solidFill>
+                <a:latin typeface="Malgun Gothic" pitchFamily="34" charset="0"/>
+                <a:ea typeface="Malgun Gothic" pitchFamily="34" charset="-122"/>
+                <a:cs typeface="Malgun Gothic" pitchFamily="34" charset="-120"/>
+              </a:rPr>
+              <a:t>대기압 예보 자동 취득</a:t>
+            </a:r>
+            <a:endParaRPr lang="en-US" sz="1088" dirty="0"/>
+          </a:p>
+        </p:txBody>
+      </p:sp>
+      <p:sp>
+        <p:nvSpPr>
+          <p:cNvPr id="61" name="Text 59"/>
+          <p:cNvSpPr txBox="1"/>
+          <p:nvPr/>
+        </p:nvSpPr>
+        <p:spPr>
+          <a:xfrm>
+            <a:off x="2286000" y="4114800"/>
+            <a:ext cx="8972550" cy="151924"/>
+          </a:xfrm>
+          <a:prstGeom prst="rect">
+            <a:avLst/>
+          </a:prstGeom>
+          <a:noFill/>
+          <a:ln/>
+        </p:spPr>
+        <p:txBody>
+          <a:bodyPr wrap="square" lIns="0" tIns="0" rIns="0" bIns="0" rtlCol="0" anchor="t"/>
+          <a:lstStyle/>
+          <a:p>
+            <a:pPr algn="l" indent="0" marL="0">
+              <a:lnSpc>
+                <a:spcPts val="1196"/>
+              </a:lnSpc>
+              <a:buNone/>
+            </a:pPr>
+            <a:r>
+              <a:rPr lang="en-US" sz="825" dirty="0">
                 <a:solidFill>
                   <a:srgbClr val="5A5A5A"/>
                 </a:solidFill>
@@ -6123,21 +6227,44 @@
                 <a:ea typeface="Malgun Gothic" pitchFamily="34" charset="-122"/>
                 <a:cs typeface="Malgun Gothic" pitchFamily="34" charset="-120"/>
               </a:rPr>
-              <a:t>2주마다 시험하고 결과를 도구에 넣습니다. 실적이 얇은 온도대부터 채웁니다 — 20~25℃ 는 1회, 15~20℃ 는 3회뿐입니다. 표본이 붙는 만큼 그 온도의 오차가 줄어듭니다.</a:t>
-            </a:r>
-            <a:endParaRPr lang="en-US" sz="863" dirty="0"/>
-          </a:p>
-        </p:txBody>
-      </p:sp>
-      <p:sp>
-        <p:nvSpPr>
-          <p:cNvPr id="59" name="Text 57"/>
-          <p:cNvSpPr txBox="1"/>
-          <p:nvPr/>
-        </p:nvSpPr>
-        <p:spPr>
-          <a:xfrm>
-            <a:off x="876300" y="4343400"/>
+              <a:t>지금은 예보 파일을 손으로 올립니다. 이 한 단계를 자동화하면 날짜만 넣으면 끝입니다.</a:t>
+            </a:r>
+            <a:endParaRPr lang="en-US" sz="825" dirty="0"/>
+          </a:p>
+        </p:txBody>
+      </p:sp>
+      <p:sp>
+        <p:nvSpPr>
+          <p:cNvPr id="62" name="Shape 60"/>
+          <p:cNvSpPr/>
+          <p:nvPr/>
+        </p:nvSpPr>
+        <p:spPr>
+          <a:xfrm>
+            <a:off x="2286000" y="4210050"/>
+            <a:ext cx="8972550" cy="0"/>
+          </a:xfrm>
+          <a:prstGeom prst="line">
+            <a:avLst/>
+          </a:prstGeom>
+          <a:noFill/>
+          <a:ln w="12700">
+            <a:solidFill>
+              <a:srgbClr val="DEE3E9"/>
+            </a:solidFill>
+            <a:prstDash val="solid"/>
+          </a:ln>
+        </p:spPr>
+      </p:sp>
+      <p:sp>
+        <p:nvSpPr>
+          <p:cNvPr id="63" name="Text 61"/>
+          <p:cNvSpPr txBox="1"/>
+          <p:nvPr/>
+        </p:nvSpPr>
+        <p:spPr>
+          <a:xfrm>
+            <a:off x="876300" y="4305300"/>
             <a:ext cx="1047750" cy="131445"/>
           </a:xfrm>
           <a:prstGeom prst="rect">
@@ -6173,13 +6300,13 @@
       </p:sp>
       <p:sp>
         <p:nvSpPr>
-          <p:cNvPr id="60" name="Shape 58"/>
-          <p:cNvSpPr/>
-          <p:nvPr/>
-        </p:nvSpPr>
-        <p:spPr>
-          <a:xfrm>
-            <a:off x="2033588" y="4376738"/>
+          <p:cNvPr id="64" name="Shape 62"/>
+          <p:cNvSpPr/>
+          <p:nvPr/>
+        </p:nvSpPr>
+        <p:spPr>
+          <a:xfrm>
+            <a:off x="2033588" y="4329113"/>
             <a:ext cx="85725" cy="85725"/>
           </a:xfrm>
           <a:prstGeom prst="ellipse">
@@ -6193,33 +6320,33 @@
       </p:sp>
       <p:sp>
         <p:nvSpPr>
-          <p:cNvPr id="61" name="Text 59"/>
-          <p:cNvSpPr txBox="1"/>
-          <p:nvPr/>
-        </p:nvSpPr>
-        <p:spPr>
-          <a:xfrm>
-            <a:off x="2286000" y="4324350"/>
-            <a:ext cx="8972550" cy="178594"/>
-          </a:xfrm>
-          <a:prstGeom prst="rect">
-            <a:avLst/>
-          </a:prstGeom>
-          <a:noFill/>
-          <a:ln/>
-        </p:spPr>
-        <p:txBody>
-          <a:bodyPr wrap="square" lIns="0" tIns="0" rIns="0" bIns="0" rtlCol="0" anchor="t"/>
-          <a:lstStyle/>
-          <a:p>
-            <a:pPr algn="l" indent="0" marL="0">
-              <a:lnSpc>
-                <a:spcPts val="1406"/>
-              </a:lnSpc>
-              <a:buNone/>
-            </a:pPr>
-            <a:r>
-              <a:rPr lang="en-US" sz="1125" b="1" dirty="0">
+          <p:cNvPr id="65" name="Text 63"/>
+          <p:cNvSpPr txBox="1"/>
+          <p:nvPr/>
+        </p:nvSpPr>
+        <p:spPr>
+          <a:xfrm>
+            <a:off x="2286000" y="4286250"/>
+            <a:ext cx="8972550" cy="172641"/>
+          </a:xfrm>
+          <a:prstGeom prst="rect">
+            <a:avLst/>
+          </a:prstGeom>
+          <a:noFill/>
+          <a:ln/>
+        </p:spPr>
+        <p:txBody>
+          <a:bodyPr wrap="square" lIns="0" tIns="0" rIns="0" bIns="0" rtlCol="0" anchor="t"/>
+          <a:lstStyle/>
+          <a:p>
+            <a:pPr algn="l" indent="0" marL="0">
+              <a:lnSpc>
+                <a:spcPts val="1359"/>
+              </a:lnSpc>
+              <a:buNone/>
+            </a:pPr>
+            <a:r>
+              <a:rPr lang="en-US" sz="1088" b="1" dirty="0">
                 <a:solidFill>
                   <a:srgbClr val="1A1A1A"/>
                 </a:solidFill>
@@ -6229,39 +6356,39 @@
               </a:rPr>
               <a:t>신고 구간 전체 실적 확보 · 회귀 모델 재선정</a:t>
             </a:r>
-            <a:endParaRPr lang="en-US" sz="1125" dirty="0"/>
-          </a:p>
-        </p:txBody>
-      </p:sp>
-      <p:sp>
-        <p:nvSpPr>
-          <p:cNvPr id="62" name="Text 60"/>
-          <p:cNvSpPr txBox="1"/>
-          <p:nvPr/>
-        </p:nvSpPr>
-        <p:spPr>
-          <a:xfrm>
-            <a:off x="2286000" y="4533900"/>
-            <a:ext cx="8972550" cy="306705"/>
-          </a:xfrm>
-          <a:prstGeom prst="rect">
-            <a:avLst/>
-          </a:prstGeom>
-          <a:noFill/>
-          <a:ln/>
-        </p:spPr>
-        <p:txBody>
-          <a:bodyPr wrap="square" lIns="0" tIns="0" rIns="0" bIns="0" rtlCol="0" anchor="t"/>
-          <a:lstStyle/>
-          <a:p>
-            <a:pPr algn="l" indent="0" marL="0">
-              <a:lnSpc>
-                <a:spcPts val="1208"/>
-              </a:lnSpc>
-              <a:buNone/>
-            </a:pPr>
-            <a:r>
-              <a:rPr lang="en-US" sz="863" dirty="0">
+            <a:endParaRPr lang="en-US" sz="1088" dirty="0"/>
+          </a:p>
+        </p:txBody>
+      </p:sp>
+      <p:sp>
+        <p:nvSpPr>
+          <p:cNvPr id="66" name="Text 64"/>
+          <p:cNvSpPr txBox="1"/>
+          <p:nvPr/>
+        </p:nvSpPr>
+        <p:spPr>
+          <a:xfrm>
+            <a:off x="2286000" y="4476750"/>
+            <a:ext cx="8972550" cy="303848"/>
+          </a:xfrm>
+          <a:prstGeom prst="rect">
+            <a:avLst/>
+          </a:prstGeom>
+          <a:noFill/>
+          <a:ln/>
+        </p:spPr>
+        <p:txBody>
+          <a:bodyPr wrap="square" lIns="0" tIns="0" rIns="0" bIns="0" rtlCol="0" anchor="t"/>
+          <a:lstStyle/>
+          <a:p>
+            <a:pPr algn="l" indent="0" marL="0">
+              <a:lnSpc>
+                <a:spcPts val="1196"/>
+              </a:lnSpc>
+              <a:buNone/>
+            </a:pPr>
+            <a:r>
+              <a:rPr lang="en-US" sz="825" dirty="0">
                 <a:solidFill>
                   <a:srgbClr val="5A5A5A"/>
                 </a:solidFill>
@@ -6271,19 +6398,42 @@
               </a:rPr>
               <a:t>겨울과 여름이 한 번 더 지나면 신고 구간 전체에 실적이 붙습니다. 그 데이터로 후보 7가지를 다시 채점(LOOCV)해 최적 회귀 모델을 다시 고릅니다 — 지금 1등이 계속 1등일 필요는 없습니다.</a:t>
             </a:r>
-            <a:endParaRPr lang="en-US" sz="863" dirty="0"/>
-          </a:p>
-        </p:txBody>
-      </p:sp>
-      <p:sp>
-        <p:nvSpPr>
-          <p:cNvPr id="63" name="Text 61"/>
-          <p:cNvSpPr txBox="1"/>
-          <p:nvPr/>
-        </p:nvSpPr>
-        <p:spPr>
-          <a:xfrm>
-            <a:off x="876300" y="4953000"/>
+            <a:endParaRPr lang="en-US" sz="825" dirty="0"/>
+          </a:p>
+        </p:txBody>
+      </p:sp>
+      <p:sp>
+        <p:nvSpPr>
+          <p:cNvPr id="67" name="Shape 65"/>
+          <p:cNvSpPr/>
+          <p:nvPr/>
+        </p:nvSpPr>
+        <p:spPr>
+          <a:xfrm>
+            <a:off x="2286000" y="4724400"/>
+            <a:ext cx="8972550" cy="0"/>
+          </a:xfrm>
+          <a:prstGeom prst="line">
+            <a:avLst/>
+          </a:prstGeom>
+          <a:noFill/>
+          <a:ln w="12700">
+            <a:solidFill>
+              <a:srgbClr val="DEE3E9"/>
+            </a:solidFill>
+            <a:prstDash val="solid"/>
+          </a:ln>
+        </p:spPr>
+      </p:sp>
+      <p:sp>
+        <p:nvSpPr>
+          <p:cNvPr id="68" name="Text 66"/>
+          <p:cNvSpPr txBox="1"/>
+          <p:nvPr/>
+        </p:nvSpPr>
+        <p:spPr>
+          <a:xfrm>
+            <a:off x="876300" y="4819650"/>
             <a:ext cx="1047750" cy="131445"/>
           </a:xfrm>
           <a:prstGeom prst="rect">
@@ -6319,13 +6469,13 @@
       </p:sp>
       <p:sp>
         <p:nvSpPr>
-          <p:cNvPr id="64" name="Shape 62"/>
-          <p:cNvSpPr/>
-          <p:nvPr/>
-        </p:nvSpPr>
-        <p:spPr>
-          <a:xfrm>
-            <a:off x="2033588" y="4986338"/>
+          <p:cNvPr id="69" name="Shape 67"/>
+          <p:cNvSpPr/>
+          <p:nvPr/>
+        </p:nvSpPr>
+        <p:spPr>
+          <a:xfrm>
+            <a:off x="2033588" y="4843463"/>
             <a:ext cx="85725" cy="85725"/>
           </a:xfrm>
           <a:prstGeom prst="ellipse">
@@ -6339,33 +6489,33 @@
       </p:sp>
       <p:sp>
         <p:nvSpPr>
-          <p:cNvPr id="65" name="Text 63"/>
-          <p:cNvSpPr txBox="1"/>
-          <p:nvPr/>
-        </p:nvSpPr>
-        <p:spPr>
-          <a:xfrm>
-            <a:off x="2286000" y="4933950"/>
-            <a:ext cx="8972550" cy="178594"/>
-          </a:xfrm>
-          <a:prstGeom prst="rect">
-            <a:avLst/>
-          </a:prstGeom>
-          <a:noFill/>
-          <a:ln/>
-        </p:spPr>
-        <p:txBody>
-          <a:bodyPr wrap="square" lIns="0" tIns="0" rIns="0" bIns="0" rtlCol="0" anchor="t"/>
-          <a:lstStyle/>
-          <a:p>
-            <a:pPr algn="l" indent="0" marL="0">
-              <a:lnSpc>
-                <a:spcPts val="1406"/>
-              </a:lnSpc>
-              <a:buNone/>
-            </a:pPr>
-            <a:r>
-              <a:rPr lang="en-US" sz="1125" b="1" dirty="0">
+          <p:cNvPr id="70" name="Text 68"/>
+          <p:cNvSpPr txBox="1"/>
+          <p:nvPr/>
+        </p:nvSpPr>
+        <p:spPr>
+          <a:xfrm>
+            <a:off x="2286000" y="4800600"/>
+            <a:ext cx="8972550" cy="172641"/>
+          </a:xfrm>
+          <a:prstGeom prst="rect">
+            <a:avLst/>
+          </a:prstGeom>
+          <a:noFill/>
+          <a:ln/>
+        </p:spPr>
+        <p:txBody>
+          <a:bodyPr wrap="square" lIns="0" tIns="0" rIns="0" bIns="0" rtlCol="0" anchor="t"/>
+          <a:lstStyle/>
+          <a:p>
+            <a:pPr algn="l" indent="0" marL="0">
+              <a:lnSpc>
+                <a:spcPts val="1359"/>
+              </a:lnSpc>
+              <a:buNone/>
+            </a:pPr>
+            <a:r>
+              <a:rPr lang="en-US" sz="1088" b="1" dirty="0">
                 <a:solidFill>
                   <a:srgbClr val="1A1A1A"/>
                 </a:solidFill>
@@ -6375,39 +6525,39 @@
               </a:rPr>
               <a:t>입찰하는 다른 사업소로 · 파주 · 여주 · 하남</a:t>
             </a:r>
-            <a:endParaRPr lang="en-US" sz="1125" dirty="0"/>
-          </a:p>
-        </p:txBody>
-      </p:sp>
-      <p:sp>
-        <p:nvSpPr>
-          <p:cNvPr id="66" name="Text 64"/>
-          <p:cNvSpPr txBox="1"/>
-          <p:nvPr/>
-        </p:nvSpPr>
-        <p:spPr>
-          <a:xfrm>
-            <a:off x="2286000" y="5143500"/>
-            <a:ext cx="8972550" cy="306705"/>
-          </a:xfrm>
-          <a:prstGeom prst="rect">
-            <a:avLst/>
-          </a:prstGeom>
-          <a:noFill/>
-          <a:ln/>
-        </p:spPr>
-        <p:txBody>
-          <a:bodyPr wrap="square" lIns="0" tIns="0" rIns="0" bIns="0" rtlCol="0" anchor="t"/>
-          <a:lstStyle/>
-          <a:p>
-            <a:pPr algn="l" indent="0" marL="0">
-              <a:lnSpc>
-                <a:spcPts val="1208"/>
-              </a:lnSpc>
-              <a:buNone/>
-            </a:pPr>
-            <a:r>
-              <a:rPr lang="en-US" sz="863" dirty="0">
+            <a:endParaRPr lang="en-US" sz="1088" dirty="0"/>
+          </a:p>
+        </p:txBody>
+      </p:sp>
+      <p:sp>
+        <p:nvSpPr>
+          <p:cNvPr id="71" name="Text 69"/>
+          <p:cNvSpPr txBox="1"/>
+          <p:nvPr/>
+        </p:nvSpPr>
+        <p:spPr>
+          <a:xfrm>
+            <a:off x="2286000" y="4991100"/>
+            <a:ext cx="8972550" cy="303848"/>
+          </a:xfrm>
+          <a:prstGeom prst="rect">
+            <a:avLst/>
+          </a:prstGeom>
+          <a:noFill/>
+          <a:ln/>
+        </p:spPr>
+        <p:txBody>
+          <a:bodyPr wrap="square" lIns="0" tIns="0" rIns="0" bIns="0" rtlCol="0" anchor="t"/>
+          <a:lstStyle/>
+          <a:p>
+            <a:pPr algn="l" indent="0" marL="0">
+              <a:lnSpc>
+                <a:spcPts val="1196"/>
+              </a:lnSpc>
+              <a:buNone/>
+            </a:pPr>
+            <a:r>
+              <a:rPr lang="en-US" sz="825" dirty="0">
                 <a:solidFill>
                   <a:srgbClr val="5A5A5A"/>
                 </a:solidFill>
@@ -6415,21 +6565,44 @@
                 <a:ea typeface="Malgun Gothic" pitchFamily="34" charset="-122"/>
                 <a:cs typeface="Malgun Gothic" pitchFamily="34" charset="-120"/>
               </a:rPr>
-              <a:t>도구와 절차는 그대로 옮깁니다. 특성 곡선표만 그 사업소 것으로 바꿔 넣으면 됩니다 — 곡선은 코드가 아니라 온도 61줄 표 파일로 읽습니다. 보정 곡선은 그 사업소 시험 실적으로 새로 쌓습니다(위례 곡선을 베껴 쓰지 않습니다).</a:t>
-            </a:r>
-            <a:endParaRPr lang="en-US" sz="863" dirty="0"/>
-          </a:p>
-        </p:txBody>
-      </p:sp>
-      <p:sp>
-        <p:nvSpPr>
-          <p:cNvPr id="67" name="Text 65"/>
-          <p:cNvSpPr txBox="1"/>
-          <p:nvPr/>
-        </p:nvSpPr>
-        <p:spPr>
-          <a:xfrm>
-            <a:off x="876300" y="5562600"/>
+              <a:t>도구와 절차는 그대로 옮기고 특성 곡선표만 그 사업소 것으로 바꿔 넣습니다 — 곡선은 코드가 아니라 온도 61줄 표 파일로 읽습니다. 보정 곡선은 그 사업소 실적으로 새로 쌓습니다.</a:t>
+            </a:r>
+            <a:endParaRPr lang="en-US" sz="825" dirty="0"/>
+          </a:p>
+        </p:txBody>
+      </p:sp>
+      <p:sp>
+        <p:nvSpPr>
+          <p:cNvPr id="72" name="Shape 70"/>
+          <p:cNvSpPr/>
+          <p:nvPr/>
+        </p:nvSpPr>
+        <p:spPr>
+          <a:xfrm>
+            <a:off x="2286000" y="5238750"/>
+            <a:ext cx="8972550" cy="0"/>
+          </a:xfrm>
+          <a:prstGeom prst="line">
+            <a:avLst/>
+          </a:prstGeom>
+          <a:noFill/>
+          <a:ln w="12700">
+            <a:solidFill>
+              <a:srgbClr val="DEE3E9"/>
+            </a:solidFill>
+            <a:prstDash val="solid"/>
+          </a:ln>
+        </p:spPr>
+      </p:sp>
+      <p:sp>
+        <p:nvSpPr>
+          <p:cNvPr id="73" name="Text 71"/>
+          <p:cNvSpPr txBox="1"/>
+          <p:nvPr/>
+        </p:nvSpPr>
+        <p:spPr>
+          <a:xfrm>
+            <a:off x="876300" y="5334000"/>
             <a:ext cx="1047750" cy="131445"/>
           </a:xfrm>
           <a:prstGeom prst="rect">
@@ -6465,13 +6638,13 @@
       </p:sp>
       <p:sp>
         <p:nvSpPr>
-          <p:cNvPr id="68" name="Shape 66"/>
-          <p:cNvSpPr/>
-          <p:nvPr/>
-        </p:nvSpPr>
-        <p:spPr>
-          <a:xfrm>
-            <a:off x="2033588" y="5595938"/>
+          <p:cNvPr id="74" name="Shape 72"/>
+          <p:cNvSpPr/>
+          <p:nvPr/>
+        </p:nvSpPr>
+        <p:spPr>
+          <a:xfrm>
+            <a:off x="2033588" y="5357813"/>
             <a:ext cx="85725" cy="85725"/>
           </a:xfrm>
           <a:prstGeom prst="ellipse">
@@ -6485,33 +6658,33 @@
       </p:sp>
       <p:sp>
         <p:nvSpPr>
-          <p:cNvPr id="69" name="Text 67"/>
-          <p:cNvSpPr txBox="1"/>
-          <p:nvPr/>
-        </p:nvSpPr>
-        <p:spPr>
-          <a:xfrm>
-            <a:off x="2286000" y="5543550"/>
-            <a:ext cx="8972550" cy="178594"/>
-          </a:xfrm>
-          <a:prstGeom prst="rect">
-            <a:avLst/>
-          </a:prstGeom>
-          <a:noFill/>
-          <a:ln/>
-        </p:spPr>
-        <p:txBody>
-          <a:bodyPr wrap="square" lIns="0" tIns="0" rIns="0" bIns="0" rtlCol="0" anchor="t"/>
-          <a:lstStyle/>
-          <a:p>
-            <a:pPr algn="l" indent="0" marL="0">
-              <a:lnSpc>
-                <a:spcPts val="1406"/>
-              </a:lnSpc>
-              <a:buNone/>
-            </a:pPr>
-            <a:r>
-              <a:rPr lang="en-US" sz="1125" b="1" dirty="0">
+          <p:cNvPr id="75" name="Text 73"/>
+          <p:cNvSpPr txBox="1"/>
+          <p:nvPr/>
+        </p:nvSpPr>
+        <p:spPr>
+          <a:xfrm>
+            <a:off x="2286000" y="5314950"/>
+            <a:ext cx="8972550" cy="172641"/>
+          </a:xfrm>
+          <a:prstGeom prst="rect">
+            <a:avLst/>
+          </a:prstGeom>
+          <a:noFill/>
+          <a:ln/>
+        </p:spPr>
+        <p:txBody>
+          <a:bodyPr wrap="square" lIns="0" tIns="0" rIns="0" bIns="0" rtlCol="0" anchor="t"/>
+          <a:lstStyle/>
+          <a:p>
+            <a:pPr algn="l" indent="0" marL="0">
+              <a:lnSpc>
+                <a:spcPts val="1359"/>
+              </a:lnSpc>
+              <a:buNone/>
+            </a:pPr>
+            <a:r>
+              <a:rPr lang="en-US" sz="1088" b="1" dirty="0">
                 <a:solidFill>
                   <a:srgbClr val="1A1A1A"/>
                 </a:solidFill>
@@ -6519,41 +6692,145 @@
                 <a:ea typeface="Malgun Gothic" pitchFamily="34" charset="-122"/>
                 <a:cs typeface="Malgun Gothic" pitchFamily="34" charset="-120"/>
               </a:rPr>
+              <a:t>대정비 전후 구분</a:t>
+            </a:r>
+            <a:endParaRPr lang="en-US" sz="1088" dirty="0"/>
+          </a:p>
+        </p:txBody>
+      </p:sp>
+      <p:sp>
+        <p:nvSpPr>
+          <p:cNvPr id="76" name="Text 74"/>
+          <p:cNvSpPr txBox="1"/>
+          <p:nvPr/>
+        </p:nvSpPr>
+        <p:spPr>
+          <a:xfrm>
+            <a:off x="2286000" y="5505450"/>
+            <a:ext cx="8972550" cy="151924"/>
+          </a:xfrm>
+          <a:prstGeom prst="rect">
+            <a:avLst/>
+          </a:prstGeom>
+          <a:noFill/>
+          <a:ln/>
+        </p:spPr>
+        <p:txBody>
+          <a:bodyPr wrap="square" lIns="0" tIns="0" rIns="0" bIns="0" rtlCol="0" anchor="t"/>
+          <a:lstStyle/>
+          <a:p>
+            <a:pPr algn="l" indent="0" marL="0">
+              <a:lnSpc>
+                <a:spcPts val="1196"/>
+              </a:lnSpc>
+              <a:buNone/>
+            </a:pPr>
+            <a:r>
+              <a:rPr lang="en-US" sz="825" dirty="0">
+                <a:solidFill>
+                  <a:srgbClr val="5A5A5A"/>
+                </a:solidFill>
+                <a:latin typeface="Malgun Gothic" pitchFamily="34" charset="0"/>
+                <a:ea typeface="Malgun Gothic" pitchFamily="34" charset="-122"/>
+                <a:cs typeface="Malgun Gothic" pitchFamily="34" charset="-120"/>
+              </a:rPr>
+              <a:t>대정비를 하면 출력 특성이 달라집니다. 정비 이력을 회차에 표시해 두고 정비 뒤 실적으로 곡선을 다시 세웁니다.</a:t>
+            </a:r>
+            <a:endParaRPr lang="en-US" sz="825" dirty="0"/>
+          </a:p>
+        </p:txBody>
+      </p:sp>
+      <p:sp>
+        <p:nvSpPr>
+          <p:cNvPr id="77" name="Shape 75"/>
+          <p:cNvSpPr/>
+          <p:nvPr/>
+        </p:nvSpPr>
+        <p:spPr>
+          <a:xfrm>
+            <a:off x="2047875" y="5734050"/>
+            <a:ext cx="57150" cy="57150"/>
+          </a:xfrm>
+          <a:prstGeom prst="ellipse">
+            <a:avLst/>
+          </a:prstGeom>
+          <a:solidFill>
+            <a:srgbClr val="C4CAD1"/>
+          </a:solidFill>
+          <a:ln/>
+        </p:spPr>
+      </p:sp>
+      <p:sp>
+        <p:nvSpPr>
+          <p:cNvPr id="78" name="Text 76"/>
+          <p:cNvSpPr txBox="1"/>
+          <p:nvPr/>
+        </p:nvSpPr>
+        <p:spPr>
+          <a:xfrm>
+            <a:off x="2286000" y="5676900"/>
+            <a:ext cx="8972550" cy="172641"/>
+          </a:xfrm>
+          <a:prstGeom prst="rect">
+            <a:avLst/>
+          </a:prstGeom>
+          <a:noFill/>
+          <a:ln/>
+        </p:spPr>
+        <p:txBody>
+          <a:bodyPr wrap="square" lIns="0" tIns="0" rIns="0" bIns="0" rtlCol="0" anchor="t"/>
+          <a:lstStyle/>
+          <a:p>
+            <a:pPr algn="l" indent="0" marL="0">
+              <a:lnSpc>
+                <a:spcPts val="1359"/>
+              </a:lnSpc>
+              <a:buNone/>
+            </a:pPr>
+            <a:r>
+              <a:rPr lang="en-US" sz="1088" b="1" dirty="0">
+                <a:solidFill>
+                  <a:srgbClr val="1A1A1A"/>
+                </a:solidFill>
+                <a:latin typeface="Malgun Gothic" pitchFamily="34" charset="0"/>
+                <a:ea typeface="Malgun Gothic" pitchFamily="34" charset="-122"/>
+                <a:cs typeface="Malgun Gothic" pitchFamily="34" charset="-120"/>
+              </a:rPr>
               <a:t>사업소 표준 절차로</a:t>
             </a:r>
-            <a:endParaRPr lang="en-US" sz="1125" dirty="0"/>
-          </a:p>
-        </p:txBody>
-      </p:sp>
-      <p:sp>
-        <p:nvSpPr>
-          <p:cNvPr id="70" name="Text 68"/>
-          <p:cNvSpPr txBox="1"/>
-          <p:nvPr/>
-        </p:nvSpPr>
-        <p:spPr>
-          <a:xfrm>
-            <a:off x="2286000" y="5753100"/>
-            <a:ext cx="8972550" cy="306705"/>
-          </a:xfrm>
-          <a:prstGeom prst="rect">
-            <a:avLst/>
-          </a:prstGeom>
-          <a:noFill/>
-          <a:ln/>
-        </p:spPr>
-        <p:txBody>
-          <a:bodyPr wrap="square" lIns="0" tIns="0" rIns="0" bIns="0" rtlCol="0" anchor="t"/>
-          <a:lstStyle/>
-          <a:p>
-            <a:pPr algn="l" indent="0" marL="0">
-              <a:lnSpc>
-                <a:spcPts val="1208"/>
-              </a:lnSpc>
-              <a:buNone/>
-            </a:pPr>
-            <a:r>
-              <a:rPr lang="en-US" sz="863" dirty="0">
+            <a:endParaRPr lang="en-US" sz="1088" dirty="0"/>
+          </a:p>
+        </p:txBody>
+      </p:sp>
+      <p:sp>
+        <p:nvSpPr>
+          <p:cNvPr id="79" name="Text 77"/>
+          <p:cNvSpPr txBox="1"/>
+          <p:nvPr/>
+        </p:nvSpPr>
+        <p:spPr>
+          <a:xfrm>
+            <a:off x="2286000" y="5867400"/>
+            <a:ext cx="8972550" cy="151924"/>
+          </a:xfrm>
+          <a:prstGeom prst="rect">
+            <a:avLst/>
+          </a:prstGeom>
+          <a:noFill/>
+          <a:ln/>
+        </p:spPr>
+        <p:txBody>
+          <a:bodyPr wrap="square" lIns="0" tIns="0" rIns="0" bIns="0" rtlCol="0" anchor="t"/>
+          <a:lstStyle/>
+          <a:p>
+            <a:pPr algn="l" indent="0" marL="0">
+              <a:lnSpc>
+                <a:spcPts val="1196"/>
+              </a:lnSpc>
+              <a:buNone/>
+            </a:pPr>
+            <a:r>
+              <a:rPr lang="en-US" sz="825" dirty="0">
                 <a:solidFill>
                   <a:srgbClr val="5A5A5A"/>
                 </a:solidFill>
@@ -6561,15 +6838,15 @@
                 <a:ea typeface="Malgun Gothic" pitchFamily="34" charset="-122"/>
                 <a:cs typeface="Malgun Gothic" pitchFamily="34" charset="-120"/>
               </a:rPr>
-              <a:t>시험부터 신고까지의 순서를 표준 절차서로 정리합니다. 담당자가 바뀌어도 같은 숫자가 나오게 하는 것이 마지막 단계입니다.</a:t>
-            </a:r>
-            <a:endParaRPr lang="en-US" sz="863" dirty="0"/>
-          </a:p>
-        </p:txBody>
-      </p:sp>
-      <p:sp>
-        <p:nvSpPr>
-          <p:cNvPr id="71" name="Shape 69"/>
+              <a:t>시험부터 신고까지의 순서를 표준 절차서로 정리합니다. 담당자가 바뀌어도 같은 숫자가 나오게 합니다.</a:t>
+            </a:r>
+            <a:endParaRPr lang="en-US" sz="825" dirty="0"/>
+          </a:p>
+        </p:txBody>
+      </p:sp>
+      <p:sp>
+        <p:nvSpPr>
+          <p:cNvPr id="80" name="Shape 78"/>
           <p:cNvSpPr/>
           <p:nvPr/>
         </p:nvSpPr>
@@ -6592,7 +6869,7 @@
       </p:sp>
       <p:sp>
         <p:nvSpPr>
-          <p:cNvPr id="72" name="Shape 70"/>
+          <p:cNvPr id="81" name="Shape 79"/>
           <p:cNvSpPr/>
           <p:nvPr/>
         </p:nvSpPr>
@@ -6614,7 +6891,7 @@
       </p:sp>
       <p:sp>
         <p:nvSpPr>
-          <p:cNvPr id="73" name="Text 71"/>
+          <p:cNvPr id="82" name="Text 80"/>
           <p:cNvSpPr txBox="1"/>
           <p:nvPr/>
         </p:nvSpPr>
@@ -6656,7 +6933,7 @@
       </p:sp>
       <p:sp>
         <p:nvSpPr>
-          <p:cNvPr id="74" name="Text 72"/>
+          <p:cNvPr id="83" name="Text 81"/>
           <p:cNvSpPr txBox="1"/>
           <p:nvPr/>
         </p:nvSpPr>

--- a/docs/ppt/위례_공급가능용량_최종발표_v3.pptx
+++ b/docs/ppt/위례_공급가능용량_최종발표_v3.pptx
@@ -3342,7 +3342,7 @@
                 <a:ea typeface="Malgun Gothic" pitchFamily="34" charset="-122"/>
                 <a:cs typeface="Malgun Gothic" pitchFamily="34" charset="-120"/>
               </a:rPr>
-              <a:t>온도와 대기압을 넣으면 그 조건의 이론값 · 더할 값 · 신고값이 한 번에 나옵니다.</a:t>
+              <a:t>온도와 대기압을 넣으면 그 조건의 이론값 · 더하는 값 · 신고값이 한 번에 나옵니다.</a:t>
             </a:r>
             <a:endParaRPr lang="en-US" sz="900" dirty="0"/>
           </a:p>
@@ -3556,7 +3556,7 @@
                 <a:ea typeface="Malgun Gothic" pitchFamily="34" charset="-122"/>
                 <a:cs typeface="Malgun Gothic" pitchFamily="34" charset="-120"/>
               </a:rPr>
-              <a:t>시험 전에 미리 대 봅니다.</a:t>
+              <a:t>시험 전에 미리 계산해 봅니다.</a:t>
             </a:r>
             <a:endParaRPr lang="en-US" sz="825" dirty="0"/>
           </a:p>
@@ -4977,7 +4977,7 @@
                 <a:ea typeface="Malgun Gothic" pitchFamily="34" charset="-122"/>
                 <a:cs typeface="Malgun Gothic" pitchFamily="34" charset="-120"/>
               </a:rPr>
-              <a:t>−14 ~ 0℃</a:t>
+              <a:t>0℃ 이하</a:t>
             </a:r>
             <a:endParaRPr lang="en-US" sz="788" dirty="0"/>
           </a:p>
@@ -6396,7 +6396,7 @@
                 <a:ea typeface="Malgun Gothic" pitchFamily="34" charset="-122"/>
                 <a:cs typeface="Malgun Gothic" pitchFamily="34" charset="-120"/>
               </a:rPr>
-              <a:t>겨울과 여름이 한 번 더 지나면 신고 구간 전체에 실적이 붙습니다. 그 데이터로 후보 7가지를 다시 채점(LOOCV)해 최적 회귀 모델을 다시 고릅니다 — 지금 1등이 계속 1등일 필요는 없습니다.</a:t>
+              <a:t>겨울과 여름이 한 번 더 지나면 신고 구간 전체에 실적이 붙습니다. 그 데이터로 후보 7가지를 다시 채점(LOOCV)해 최적 회귀 모델을 다시 고릅니다 — 지금 1등이 계속 1등이라는 보장은 없습니다.</a:t>
             </a:r>
             <a:endParaRPr lang="en-US" sz="825" dirty="0"/>
           </a:p>
@@ -6967,7 +6967,7 @@
                 <a:ea typeface="Malgun Gothic" pitchFamily="34" charset="-122"/>
                 <a:cs typeface="Malgun Gothic" pitchFamily="34" charset="-120"/>
               </a:rPr>
-              <a:t>한 번 만들고 끝나는 도구가 아닙니다. 쌓일수록 촘촘해지고, 옮겨 심을 수 있습니다.</a:t>
+              <a:t>한 번 만들고 끝나는 도구가 아닙니다. 쌓일수록 촘촘해지고, 다른 사업소로 넓힐 수 있습니다.</a:t>
             </a:r>
             <a:endParaRPr lang="en-US" sz="1163" dirty="0"/>
           </a:p>
@@ -7736,7 +7736,7 @@
         <p:spPr>
           <a:xfrm>
             <a:off x="6477000" y="2400300"/>
-            <a:ext cx="2247900" cy="565785"/>
+            <a:ext cx="2247900" cy="424339"/>
           </a:xfrm>
           <a:prstGeom prst="rect">
             <a:avLst/>
@@ -7905,7 +7905,7 @@
         <p:spPr>
           <a:xfrm>
             <a:off x="9086850" y="2400300"/>
-            <a:ext cx="2247900" cy="565785"/>
+            <a:ext cx="2247900" cy="424339"/>
           </a:xfrm>
           <a:prstGeom prst="rect">
             <a:avLst/>
@@ -8077,8 +8077,8 @@
         </p:nvSpPr>
         <p:spPr>
           <a:xfrm>
-            <a:off x="9696450" y="3181350"/>
-            <a:ext cx="1695450" cy="125730"/>
+            <a:off x="9582150" y="3181350"/>
+            <a:ext cx="1809750" cy="125730"/>
           </a:xfrm>
           <a:prstGeom prst="rect">
             <a:avLst/>
@@ -8105,7 +8105,7 @@
                 <a:ea typeface="Malgun Gothic" pitchFamily="34" charset="-122"/>
                 <a:cs typeface="Malgun Gothic" pitchFamily="34" charset="-120"/>
               </a:rPr>
-              <a:t>막힌 것 → 한 일 → 남은 것</a:t>
+              <a:t>막혔던 것 → 한 일 → 남은 것</a:t>
             </a:r>
             <a:endParaRPr lang="en-US" sz="825" dirty="0"/>
           </a:p>
@@ -9508,8 +9508,8 @@
         </p:nvSpPr>
         <p:spPr>
           <a:xfrm>
-            <a:off x="9572625" y="2514600"/>
-            <a:ext cx="1819275" cy="125730"/>
+            <a:off x="9277350" y="2514600"/>
+            <a:ext cx="2114550" cy="125730"/>
           </a:xfrm>
           <a:prstGeom prst="rect">
             <a:avLst/>
@@ -9536,7 +9536,7 @@
                 <a:ea typeface="Malgun Gothic" pitchFamily="34" charset="-122"/>
                 <a:cs typeface="Malgun Gothic" pitchFamily="34" charset="-120"/>
               </a:rPr>
-              <a:t>단위 MW · 검은 점은 실제 시험</a:t>
+              <a:t>단위 MW · 검은 점이 실제 시험 결과</a:t>
             </a:r>
             <a:endParaRPr lang="en-US" sz="825" dirty="0"/>
           </a:p>
@@ -13398,202 +13398,160 @@
         </p:nvSpPr>
         <p:spPr>
           <a:xfrm>
-            <a:off x="685800" y="3552825"/>
-            <a:ext cx="419100" cy="182880"/>
-          </a:xfrm>
-          <a:prstGeom prst="rect">
-            <a:avLst/>
-          </a:prstGeom>
-          <a:noFill/>
-          <a:ln/>
-        </p:spPr>
-        <p:txBody>
-          <a:bodyPr wrap="square" lIns="0" tIns="0" rIns="0" bIns="0" rtlCol="0" anchor="t"/>
-          <a:lstStyle/>
-          <a:p>
-            <a:pPr algn="l" indent="0" marL="0">
-              <a:lnSpc>
-                <a:spcPts val="1440"/>
-              </a:lnSpc>
-              <a:buNone/>
-            </a:pPr>
-            <a:r>
-              <a:rPr lang="en-US" sz="1200" b="1" dirty="0">
-                <a:solidFill>
-                  <a:srgbClr val="EA002C"/>
+            <a:off x="1257300" y="3514725"/>
+            <a:ext cx="2000250" cy="247650"/>
+          </a:xfrm>
+          <a:prstGeom prst="rect">
+            <a:avLst/>
+          </a:prstGeom>
+          <a:noFill/>
+          <a:ln/>
+        </p:spPr>
+        <p:txBody>
+          <a:bodyPr wrap="square" lIns="0" tIns="0" rIns="0" bIns="0" rtlCol="0" anchor="t"/>
+          <a:lstStyle/>
+          <a:p>
+            <a:pPr algn="l" indent="0" marL="0">
+              <a:lnSpc>
+                <a:spcPts val="1950"/>
+              </a:lnSpc>
+              <a:buNone/>
+            </a:pPr>
+            <a:r>
+              <a:rPr lang="en-US" sz="1500" b="1" dirty="0">
+                <a:solidFill>
+                  <a:srgbClr val="1A1A1A"/>
+                </a:solidFill>
+                <a:latin typeface="Malgun Gothic" pitchFamily="34" charset="0"/>
+                <a:ea typeface="Malgun Gothic" pitchFamily="34" charset="-122"/>
+                <a:cs typeface="Malgun Gothic" pitchFamily="34" charset="-120"/>
+              </a:rPr>
+              <a:t>해결 방안</a:t>
+            </a:r>
+            <a:endParaRPr lang="en-US" sz="1500" dirty="0"/>
+          </a:p>
+        </p:txBody>
+      </p:sp>
+      <p:sp>
+        <p:nvSpPr>
+          <p:cNvPr id="31" name="Text 29"/>
+          <p:cNvSpPr txBox="1"/>
+          <p:nvPr/>
+        </p:nvSpPr>
+        <p:spPr>
+          <a:xfrm>
+            <a:off x="3448050" y="3562350"/>
+            <a:ext cx="4191000" cy="167164"/>
+          </a:xfrm>
+          <a:prstGeom prst="rect">
+            <a:avLst/>
+          </a:prstGeom>
+          <a:noFill/>
+          <a:ln/>
+        </p:spPr>
+        <p:txBody>
+          <a:bodyPr wrap="square" lIns="0" tIns="0" rIns="0" bIns="0" rtlCol="0" anchor="t"/>
+          <a:lstStyle/>
+          <a:p>
+            <a:pPr algn="l" indent="0" marL="0">
+              <a:lnSpc>
+                <a:spcPts val="1316"/>
+              </a:lnSpc>
+              <a:buNone/>
+            </a:pPr>
+            <a:r>
+              <a:rPr lang="en-US" sz="1013" dirty="0">
+                <a:solidFill>
+                  <a:srgbClr val="5A5A5A"/>
+                </a:solidFill>
+                <a:latin typeface="Malgun Gothic" pitchFamily="34" charset="0"/>
+                <a:ea typeface="Malgun Gothic" pitchFamily="34" charset="-122"/>
+                <a:cs typeface="Malgun Gothic" pitchFamily="34" charset="-120"/>
+              </a:rPr>
+              <a:t>회귀 모델 선정</a:t>
+            </a:r>
+            <a:endParaRPr lang="en-US" sz="1013" dirty="0"/>
+          </a:p>
+        </p:txBody>
+      </p:sp>
+      <p:sp>
+        <p:nvSpPr>
+          <p:cNvPr id="32" name="Text 30"/>
+          <p:cNvSpPr txBox="1"/>
+          <p:nvPr/>
+        </p:nvSpPr>
+        <p:spPr>
+          <a:xfrm>
+            <a:off x="8058150" y="3571875"/>
+            <a:ext cx="2762250" cy="136208"/>
+          </a:xfrm>
+          <a:prstGeom prst="rect">
+            <a:avLst/>
+          </a:prstGeom>
+          <a:noFill/>
+          <a:ln/>
+        </p:spPr>
+        <p:txBody>
+          <a:bodyPr wrap="square" lIns="0" tIns="0" rIns="0" bIns="0" rtlCol="0" anchor="t"/>
+          <a:lstStyle/>
+          <a:p>
+            <a:pPr algn="r" indent="0" marL="0">
+              <a:lnSpc>
+                <a:spcPts val="1073"/>
+              </a:lnSpc>
+              <a:buNone/>
+            </a:pPr>
+            <a:r>
+              <a:rPr lang="en-US" sz="825" dirty="0">
+                <a:solidFill>
+                  <a:srgbClr val="8C8C8C"/>
+                </a:solidFill>
+                <a:latin typeface="Malgun Gothic" pitchFamily="34" charset="0"/>
+                <a:ea typeface="Malgun Gothic" pitchFamily="34" charset="-122"/>
+                <a:cs typeface="Malgun Gothic" pitchFamily="34" charset="-120"/>
+              </a:rPr>
+              <a:t>④ 예측/보정 모델 개발</a:t>
+            </a:r>
+            <a:endParaRPr lang="en-US" sz="825" dirty="0"/>
+          </a:p>
+        </p:txBody>
+      </p:sp>
+      <p:sp>
+        <p:nvSpPr>
+          <p:cNvPr id="33" name="Text 31"/>
+          <p:cNvSpPr txBox="1"/>
+          <p:nvPr/>
+        </p:nvSpPr>
+        <p:spPr>
+          <a:xfrm>
+            <a:off x="10972800" y="3552825"/>
+            <a:ext cx="533400" cy="173355"/>
+          </a:xfrm>
+          <a:prstGeom prst="rect">
+            <a:avLst/>
+          </a:prstGeom>
+          <a:noFill/>
+          <a:ln/>
+        </p:spPr>
+        <p:txBody>
+          <a:bodyPr wrap="square" lIns="0" tIns="0" rIns="0" bIns="0" rtlCol="0" anchor="t"/>
+          <a:lstStyle/>
+          <a:p>
+            <a:pPr algn="r" indent="0" marL="0">
+              <a:lnSpc>
+                <a:spcPts val="1365"/>
+              </a:lnSpc>
+              <a:buNone/>
+            </a:pPr>
+            <a:r>
+              <a:rPr lang="en-US" sz="1050" dirty="0">
+                <a:solidFill>
+                  <a:srgbClr val="6E7780"/>
                 </a:solidFill>
                 <a:latin typeface="Consolas" pitchFamily="34" charset="0"/>
                 <a:ea typeface="Consolas" pitchFamily="34" charset="-122"/>
                 <a:cs typeface="Consolas" pitchFamily="34" charset="-120"/>
               </a:rPr>
-              <a:t>05</a:t>
-            </a:r>
-            <a:endParaRPr lang="en-US" sz="1200" dirty="0"/>
-          </a:p>
-        </p:txBody>
-      </p:sp>
-      <p:sp>
-        <p:nvSpPr>
-          <p:cNvPr id="31" name="Text 29"/>
-          <p:cNvSpPr txBox="1"/>
-          <p:nvPr/>
-        </p:nvSpPr>
-        <p:spPr>
-          <a:xfrm>
-            <a:off x="1257300" y="3514725"/>
-            <a:ext cx="2000250" cy="247650"/>
-          </a:xfrm>
-          <a:prstGeom prst="rect">
-            <a:avLst/>
-          </a:prstGeom>
-          <a:noFill/>
-          <a:ln/>
-        </p:spPr>
-        <p:txBody>
-          <a:bodyPr wrap="square" lIns="0" tIns="0" rIns="0" bIns="0" rtlCol="0" anchor="t"/>
-          <a:lstStyle/>
-          <a:p>
-            <a:pPr algn="l" indent="0" marL="0">
-              <a:lnSpc>
-                <a:spcPts val="1950"/>
-              </a:lnSpc>
-              <a:buNone/>
-            </a:pPr>
-            <a:r>
-              <a:rPr lang="en-US" sz="1500" b="1" dirty="0">
-                <a:solidFill>
-                  <a:srgbClr val="1A1A1A"/>
-                </a:solidFill>
-                <a:latin typeface="Malgun Gothic" pitchFamily="34" charset="0"/>
-                <a:ea typeface="Malgun Gothic" pitchFamily="34" charset="-122"/>
-                <a:cs typeface="Malgun Gothic" pitchFamily="34" charset="-120"/>
-              </a:rPr>
-              <a:t>해결 방안</a:t>
-            </a:r>
-            <a:endParaRPr lang="en-US" sz="1500" dirty="0"/>
-          </a:p>
-        </p:txBody>
-      </p:sp>
-      <p:sp>
-        <p:nvSpPr>
-          <p:cNvPr id="32" name="Text 30"/>
-          <p:cNvSpPr txBox="1"/>
-          <p:nvPr/>
-        </p:nvSpPr>
-        <p:spPr>
-          <a:xfrm>
-            <a:off x="3448050" y="3562350"/>
-            <a:ext cx="4191000" cy="167164"/>
-          </a:xfrm>
-          <a:prstGeom prst="rect">
-            <a:avLst/>
-          </a:prstGeom>
-          <a:noFill/>
-          <a:ln/>
-        </p:spPr>
-        <p:txBody>
-          <a:bodyPr wrap="square" lIns="0" tIns="0" rIns="0" bIns="0" rtlCol="0" anchor="t"/>
-          <a:lstStyle/>
-          <a:p>
-            <a:pPr algn="l" indent="0" marL="0">
-              <a:lnSpc>
-                <a:spcPts val="1316"/>
-              </a:lnSpc>
-              <a:buNone/>
-            </a:pPr>
-            <a:r>
-              <a:rPr lang="en-US" sz="1013" dirty="0">
-                <a:solidFill>
-                  <a:srgbClr val="5A5A5A"/>
-                </a:solidFill>
-                <a:latin typeface="Malgun Gothic" pitchFamily="34" charset="0"/>
-                <a:ea typeface="Malgun Gothic" pitchFamily="34" charset="-122"/>
-                <a:cs typeface="Malgun Gothic" pitchFamily="34" charset="-120"/>
-              </a:rPr>
-              <a:t>회귀 모델 선정</a:t>
-            </a:r>
-            <a:endParaRPr lang="en-US" sz="1013" dirty="0"/>
-          </a:p>
-        </p:txBody>
-      </p:sp>
-      <p:sp>
-        <p:nvSpPr>
-          <p:cNvPr id="33" name="Text 31"/>
-          <p:cNvSpPr txBox="1"/>
-          <p:nvPr/>
-        </p:nvSpPr>
-        <p:spPr>
-          <a:xfrm>
-            <a:off x="8058150" y="3571875"/>
-            <a:ext cx="2762250" cy="136208"/>
-          </a:xfrm>
-          <a:prstGeom prst="rect">
-            <a:avLst/>
-          </a:prstGeom>
-          <a:noFill/>
-          <a:ln/>
-        </p:spPr>
-        <p:txBody>
-          <a:bodyPr wrap="square" lIns="0" tIns="0" rIns="0" bIns="0" rtlCol="0" anchor="t"/>
-          <a:lstStyle/>
-          <a:p>
-            <a:pPr algn="r" indent="0" marL="0">
-              <a:lnSpc>
-                <a:spcPts val="1073"/>
-              </a:lnSpc>
-              <a:buNone/>
-            </a:pPr>
-            <a:r>
-              <a:rPr lang="en-US" sz="825" dirty="0">
-                <a:solidFill>
-                  <a:srgbClr val="8C8C8C"/>
-                </a:solidFill>
-                <a:latin typeface="Malgun Gothic" pitchFamily="34" charset="0"/>
-                <a:ea typeface="Malgun Gothic" pitchFamily="34" charset="-122"/>
-                <a:cs typeface="Malgun Gothic" pitchFamily="34" charset="-120"/>
-              </a:rPr>
-              <a:t>④ 예측/보정 모델 개발</a:t>
-            </a:r>
-            <a:endParaRPr lang="en-US" sz="825" dirty="0"/>
-          </a:p>
-        </p:txBody>
-      </p:sp>
-      <p:sp>
-        <p:nvSpPr>
-          <p:cNvPr id="34" name="Text 32"/>
-          <p:cNvSpPr txBox="1"/>
-          <p:nvPr/>
-        </p:nvSpPr>
-        <p:spPr>
-          <a:xfrm>
-            <a:off x="10972800" y="3552825"/>
-            <a:ext cx="533400" cy="173355"/>
-          </a:xfrm>
-          <a:prstGeom prst="rect">
-            <a:avLst/>
-          </a:prstGeom>
-          <a:noFill/>
-          <a:ln/>
-        </p:spPr>
-        <p:txBody>
-          <a:bodyPr wrap="square" lIns="0" tIns="0" rIns="0" bIns="0" rtlCol="0" anchor="t"/>
-          <a:lstStyle/>
-          <a:p>
-            <a:pPr algn="r" indent="0" marL="0">
-              <a:lnSpc>
-                <a:spcPts val="1365"/>
-              </a:lnSpc>
-              <a:buNone/>
-            </a:pPr>
-            <a:r>
-              <a:rPr lang="en-US" sz="1050" dirty="0">
-                <a:solidFill>
-                  <a:srgbClr val="6E7780"/>
-                </a:solidFill>
-                <a:latin typeface="Consolas" pitchFamily="34" charset="0"/>
-                <a:ea typeface="Consolas" pitchFamily="34" charset="-122"/>
-                <a:cs typeface="Consolas" pitchFamily="34" charset="-120"/>
-              </a:rPr>
               <a:t>07</a:t>
             </a:r>
             <a:endParaRPr lang="en-US" sz="1050" dirty="0"/>
@@ -13602,7 +13560,7 @@
       </p:sp>
       <p:sp>
         <p:nvSpPr>
-          <p:cNvPr id="35" name="Shape 33"/>
+          <p:cNvPr id="34" name="Shape 32"/>
           <p:cNvSpPr/>
           <p:nvPr/>
         </p:nvSpPr>
@@ -13625,7 +13583,7 @@
       </p:sp>
       <p:sp>
         <p:nvSpPr>
-          <p:cNvPr id="36" name="Text 34"/>
+          <p:cNvPr id="35" name="Text 33"/>
           <p:cNvSpPr txBox="1"/>
           <p:nvPr/>
         </p:nvSpPr>
@@ -13659,7 +13617,7 @@
                 <a:ea typeface="Consolas" pitchFamily="34" charset="-122"/>
                 <a:cs typeface="Consolas" pitchFamily="34" charset="-120"/>
               </a:rPr>
-              <a:t>06</a:t>
+              <a:t>05</a:t>
             </a:r>
             <a:endParaRPr lang="en-US" sz="1200" dirty="0"/>
           </a:p>
@@ -13667,7 +13625,7 @@
       </p:sp>
       <p:sp>
         <p:nvSpPr>
-          <p:cNvPr id="37" name="Text 35"/>
+          <p:cNvPr id="36" name="Text 34"/>
           <p:cNvSpPr txBox="1"/>
           <p:nvPr/>
         </p:nvSpPr>
@@ -13709,7 +13667,7 @@
       </p:sp>
       <p:sp>
         <p:nvSpPr>
-          <p:cNvPr id="38" name="Text 36"/>
+          <p:cNvPr id="37" name="Text 35"/>
           <p:cNvSpPr txBox="1"/>
           <p:nvPr/>
         </p:nvSpPr>
@@ -13751,7 +13709,7 @@
       </p:sp>
       <p:sp>
         <p:nvSpPr>
-          <p:cNvPr id="39" name="Text 37"/>
+          <p:cNvPr id="38" name="Text 36"/>
           <p:cNvSpPr txBox="1"/>
           <p:nvPr/>
         </p:nvSpPr>
@@ -13793,7 +13751,7 @@
       </p:sp>
       <p:sp>
         <p:nvSpPr>
-          <p:cNvPr id="40" name="Text 38"/>
+          <p:cNvPr id="39" name="Text 37"/>
           <p:cNvSpPr txBox="1"/>
           <p:nvPr/>
         </p:nvSpPr>
@@ -13835,7 +13793,7 @@
       </p:sp>
       <p:sp>
         <p:nvSpPr>
-          <p:cNvPr id="41" name="Shape 39"/>
+          <p:cNvPr id="40" name="Shape 38"/>
           <p:cNvSpPr/>
           <p:nvPr/>
         </p:nvSpPr>
@@ -13858,7 +13816,7 @@
       </p:sp>
       <p:sp>
         <p:nvSpPr>
-          <p:cNvPr id="42" name="Text 40"/>
+          <p:cNvPr id="41" name="Text 39"/>
           <p:cNvSpPr txBox="1"/>
           <p:nvPr/>
         </p:nvSpPr>
@@ -13892,7 +13850,7 @@
                 <a:ea typeface="Consolas" pitchFamily="34" charset="-122"/>
                 <a:cs typeface="Consolas" pitchFamily="34" charset="-120"/>
               </a:rPr>
-              <a:t>07</a:t>
+              <a:t>06</a:t>
             </a:r>
             <a:endParaRPr lang="en-US" sz="1200" dirty="0"/>
           </a:p>
@@ -13900,7 +13858,7 @@
       </p:sp>
       <p:sp>
         <p:nvSpPr>
-          <p:cNvPr id="43" name="Text 41"/>
+          <p:cNvPr id="42" name="Text 40"/>
           <p:cNvSpPr txBox="1"/>
           <p:nvPr/>
         </p:nvSpPr>
@@ -13942,7 +13900,7 @@
       </p:sp>
       <p:sp>
         <p:nvSpPr>
-          <p:cNvPr id="44" name="Text 42"/>
+          <p:cNvPr id="43" name="Text 41"/>
           <p:cNvSpPr txBox="1"/>
           <p:nvPr/>
         </p:nvSpPr>
@@ -13984,7 +13942,7 @@
       </p:sp>
       <p:sp>
         <p:nvSpPr>
-          <p:cNvPr id="45" name="Text 43"/>
+          <p:cNvPr id="44" name="Text 42"/>
           <p:cNvSpPr txBox="1"/>
           <p:nvPr/>
         </p:nvSpPr>
@@ -14026,7 +13984,7 @@
       </p:sp>
       <p:sp>
         <p:nvSpPr>
-          <p:cNvPr id="46" name="Text 44"/>
+          <p:cNvPr id="45" name="Text 43"/>
           <p:cNvSpPr txBox="1"/>
           <p:nvPr/>
         </p:nvSpPr>
@@ -14068,7 +14026,7 @@
       </p:sp>
       <p:sp>
         <p:nvSpPr>
-          <p:cNvPr id="47" name="Shape 45"/>
+          <p:cNvPr id="46" name="Shape 44"/>
           <p:cNvSpPr/>
           <p:nvPr/>
         </p:nvSpPr>
@@ -14091,208 +14049,166 @@
       </p:sp>
       <p:sp>
         <p:nvSpPr>
+          <p:cNvPr id="47" name="Text 45"/>
+          <p:cNvSpPr txBox="1"/>
+          <p:nvPr/>
+        </p:nvSpPr>
+        <p:spPr>
+          <a:xfrm>
+            <a:off x="1257300" y="4714875"/>
+            <a:ext cx="2000250" cy="247650"/>
+          </a:xfrm>
+          <a:prstGeom prst="rect">
+            <a:avLst/>
+          </a:prstGeom>
+          <a:noFill/>
+          <a:ln/>
+        </p:spPr>
+        <p:txBody>
+          <a:bodyPr wrap="square" lIns="0" tIns="0" rIns="0" bIns="0" rtlCol="0" anchor="t"/>
+          <a:lstStyle/>
+          <a:p>
+            <a:pPr algn="l" indent="0" marL="0">
+              <a:lnSpc>
+                <a:spcPts val="1950"/>
+              </a:lnSpc>
+              <a:buNone/>
+            </a:pPr>
+            <a:r>
+              <a:rPr lang="en-US" sz="1500" b="1" dirty="0">
+                <a:solidFill>
+                  <a:srgbClr val="1A1A1A"/>
+                </a:solidFill>
+                <a:latin typeface="Malgun Gothic" pitchFamily="34" charset="0"/>
+                <a:ea typeface="Malgun Gothic" pitchFamily="34" charset="-122"/>
+                <a:cs typeface="Malgun Gothic" pitchFamily="34" charset="-120"/>
+              </a:rPr>
+              <a:t>개선효과</a:t>
+            </a:r>
+            <a:endParaRPr lang="en-US" sz="1500" dirty="0"/>
+          </a:p>
+        </p:txBody>
+      </p:sp>
+      <p:sp>
+        <p:nvSpPr>
           <p:cNvPr id="48" name="Text 46"/>
           <p:cNvSpPr txBox="1"/>
           <p:nvPr/>
         </p:nvSpPr>
         <p:spPr>
           <a:xfrm>
-            <a:off x="685800" y="4752975"/>
-            <a:ext cx="419100" cy="182880"/>
-          </a:xfrm>
-          <a:prstGeom prst="rect">
-            <a:avLst/>
-          </a:prstGeom>
-          <a:noFill/>
-          <a:ln/>
-        </p:spPr>
-        <p:txBody>
-          <a:bodyPr wrap="square" lIns="0" tIns="0" rIns="0" bIns="0" rtlCol="0" anchor="t"/>
-          <a:lstStyle/>
-          <a:p>
-            <a:pPr algn="l" indent="0" marL="0">
-              <a:lnSpc>
-                <a:spcPts val="1440"/>
-              </a:lnSpc>
-              <a:buNone/>
-            </a:pPr>
-            <a:r>
-              <a:rPr lang="en-US" sz="1200" b="1" dirty="0">
-                <a:solidFill>
-                  <a:srgbClr val="EA002C"/>
+            <a:off x="3448050" y="4762500"/>
+            <a:ext cx="4191000" cy="167164"/>
+          </a:xfrm>
+          <a:prstGeom prst="rect">
+            <a:avLst/>
+          </a:prstGeom>
+          <a:noFill/>
+          <a:ln/>
+        </p:spPr>
+        <p:txBody>
+          <a:bodyPr wrap="square" lIns="0" tIns="0" rIns="0" bIns="0" rtlCol="0" anchor="t"/>
+          <a:lstStyle/>
+          <a:p>
+            <a:pPr algn="l" indent="0" marL="0">
+              <a:lnSpc>
+                <a:spcPts val="1316"/>
+              </a:lnSpc>
+              <a:buNone/>
+            </a:pPr>
+            <a:r>
+              <a:rPr lang="en-US" sz="1013" dirty="0">
+                <a:solidFill>
+                  <a:srgbClr val="5A5A5A"/>
+                </a:solidFill>
+                <a:latin typeface="Malgun Gothic" pitchFamily="34" charset="0"/>
+                <a:ea typeface="Malgun Gothic" pitchFamily="34" charset="-122"/>
+                <a:cs typeface="Malgun Gothic" pitchFamily="34" charset="-120"/>
+              </a:rPr>
+              <a:t>정성 — 일하는 방식</a:t>
+            </a:r>
+            <a:endParaRPr lang="en-US" sz="1013" dirty="0"/>
+          </a:p>
+        </p:txBody>
+      </p:sp>
+      <p:sp>
+        <p:nvSpPr>
+          <p:cNvPr id="49" name="Text 47"/>
+          <p:cNvSpPr txBox="1"/>
+          <p:nvPr/>
+        </p:nvSpPr>
+        <p:spPr>
+          <a:xfrm>
+            <a:off x="8058150" y="4772025"/>
+            <a:ext cx="2762250" cy="136208"/>
+          </a:xfrm>
+          <a:prstGeom prst="rect">
+            <a:avLst/>
+          </a:prstGeom>
+          <a:noFill/>
+          <a:ln/>
+        </p:spPr>
+        <p:txBody>
+          <a:bodyPr wrap="square" lIns="0" tIns="0" rIns="0" bIns="0" rtlCol="0" anchor="t"/>
+          <a:lstStyle/>
+          <a:p>
+            <a:pPr algn="r" indent="0" marL="0">
+              <a:lnSpc>
+                <a:spcPts val="1073"/>
+              </a:lnSpc>
+              <a:buNone/>
+            </a:pPr>
+            <a:r>
+              <a:rPr lang="en-US" sz="825" dirty="0">
+                <a:solidFill>
+                  <a:srgbClr val="8C8C8C"/>
+                </a:solidFill>
+                <a:latin typeface="Malgun Gothic" pitchFamily="34" charset="0"/>
+                <a:ea typeface="Malgun Gothic" pitchFamily="34" charset="-122"/>
+                <a:cs typeface="Malgun Gothic" pitchFamily="34" charset="-120"/>
+              </a:rPr>
+              <a:t>⑥ 개선효과 (정성)</a:t>
+            </a:r>
+            <a:endParaRPr lang="en-US" sz="825" dirty="0"/>
+          </a:p>
+        </p:txBody>
+      </p:sp>
+      <p:sp>
+        <p:nvSpPr>
+          <p:cNvPr id="50" name="Text 48"/>
+          <p:cNvSpPr txBox="1"/>
+          <p:nvPr/>
+        </p:nvSpPr>
+        <p:spPr>
+          <a:xfrm>
+            <a:off x="10972800" y="4752975"/>
+            <a:ext cx="533400" cy="173355"/>
+          </a:xfrm>
+          <a:prstGeom prst="rect">
+            <a:avLst/>
+          </a:prstGeom>
+          <a:noFill/>
+          <a:ln/>
+        </p:spPr>
+        <p:txBody>
+          <a:bodyPr wrap="square" lIns="0" tIns="0" rIns="0" bIns="0" rtlCol="0" anchor="t"/>
+          <a:lstStyle/>
+          <a:p>
+            <a:pPr algn="r" indent="0" marL="0">
+              <a:lnSpc>
+                <a:spcPts val="1365"/>
+              </a:lnSpc>
+              <a:buNone/>
+            </a:pPr>
+            <a:r>
+              <a:rPr lang="en-US" sz="1050" dirty="0">
+                <a:solidFill>
+                  <a:srgbClr val="6E7780"/>
                 </a:solidFill>
                 <a:latin typeface="Consolas" pitchFamily="34" charset="0"/>
                 <a:ea typeface="Consolas" pitchFamily="34" charset="-122"/>
                 <a:cs typeface="Consolas" pitchFamily="34" charset="-120"/>
               </a:rPr>
-              <a:t>08</a:t>
-            </a:r>
-            <a:endParaRPr lang="en-US" sz="1200" dirty="0"/>
-          </a:p>
-        </p:txBody>
-      </p:sp>
-      <p:sp>
-        <p:nvSpPr>
-          <p:cNvPr id="49" name="Text 47"/>
-          <p:cNvSpPr txBox="1"/>
-          <p:nvPr/>
-        </p:nvSpPr>
-        <p:spPr>
-          <a:xfrm>
-            <a:off x="1257300" y="4714875"/>
-            <a:ext cx="2000250" cy="247650"/>
-          </a:xfrm>
-          <a:prstGeom prst="rect">
-            <a:avLst/>
-          </a:prstGeom>
-          <a:noFill/>
-          <a:ln/>
-        </p:spPr>
-        <p:txBody>
-          <a:bodyPr wrap="square" lIns="0" tIns="0" rIns="0" bIns="0" rtlCol="0" anchor="t"/>
-          <a:lstStyle/>
-          <a:p>
-            <a:pPr algn="l" indent="0" marL="0">
-              <a:lnSpc>
-                <a:spcPts val="1950"/>
-              </a:lnSpc>
-              <a:buNone/>
-            </a:pPr>
-            <a:r>
-              <a:rPr lang="en-US" sz="1500" b="1" dirty="0">
-                <a:solidFill>
-                  <a:srgbClr val="1A1A1A"/>
-                </a:solidFill>
-                <a:latin typeface="Malgun Gothic" pitchFamily="34" charset="0"/>
-                <a:ea typeface="Malgun Gothic" pitchFamily="34" charset="-122"/>
-                <a:cs typeface="Malgun Gothic" pitchFamily="34" charset="-120"/>
-              </a:rPr>
-              <a:t>개선효과</a:t>
-            </a:r>
-            <a:endParaRPr lang="en-US" sz="1500" dirty="0"/>
-          </a:p>
-        </p:txBody>
-      </p:sp>
-      <p:sp>
-        <p:nvSpPr>
-          <p:cNvPr id="50" name="Text 48"/>
-          <p:cNvSpPr txBox="1"/>
-          <p:nvPr/>
-        </p:nvSpPr>
-        <p:spPr>
-          <a:xfrm>
-            <a:off x="3448050" y="4762500"/>
-            <a:ext cx="4191000" cy="167164"/>
-          </a:xfrm>
-          <a:prstGeom prst="rect">
-            <a:avLst/>
-          </a:prstGeom>
-          <a:noFill/>
-          <a:ln/>
-        </p:spPr>
-        <p:txBody>
-          <a:bodyPr wrap="square" lIns="0" tIns="0" rIns="0" bIns="0" rtlCol="0" anchor="t"/>
-          <a:lstStyle/>
-          <a:p>
-            <a:pPr algn="l" indent="0" marL="0">
-              <a:lnSpc>
-                <a:spcPts val="1316"/>
-              </a:lnSpc>
-              <a:buNone/>
-            </a:pPr>
-            <a:r>
-              <a:rPr lang="en-US" sz="1013" dirty="0">
-                <a:solidFill>
-                  <a:srgbClr val="5A5A5A"/>
-                </a:solidFill>
-                <a:latin typeface="Malgun Gothic" pitchFamily="34" charset="0"/>
-                <a:ea typeface="Malgun Gothic" pitchFamily="34" charset="-122"/>
-                <a:cs typeface="Malgun Gothic" pitchFamily="34" charset="-120"/>
-              </a:rPr>
-              <a:t>정성 — 일하는 방식</a:t>
-            </a:r>
-            <a:endParaRPr lang="en-US" sz="1013" dirty="0"/>
-          </a:p>
-        </p:txBody>
-      </p:sp>
-      <p:sp>
-        <p:nvSpPr>
-          <p:cNvPr id="51" name="Text 49"/>
-          <p:cNvSpPr txBox="1"/>
-          <p:nvPr/>
-        </p:nvSpPr>
-        <p:spPr>
-          <a:xfrm>
-            <a:off x="8058150" y="4772025"/>
-            <a:ext cx="2762250" cy="136208"/>
-          </a:xfrm>
-          <a:prstGeom prst="rect">
-            <a:avLst/>
-          </a:prstGeom>
-          <a:noFill/>
-          <a:ln/>
-        </p:spPr>
-        <p:txBody>
-          <a:bodyPr wrap="square" lIns="0" tIns="0" rIns="0" bIns="0" rtlCol="0" anchor="t"/>
-          <a:lstStyle/>
-          <a:p>
-            <a:pPr algn="r" indent="0" marL="0">
-              <a:lnSpc>
-                <a:spcPts val="1073"/>
-              </a:lnSpc>
-              <a:buNone/>
-            </a:pPr>
-            <a:r>
-              <a:rPr lang="en-US" sz="825" dirty="0">
-                <a:solidFill>
-                  <a:srgbClr val="8C8C8C"/>
-                </a:solidFill>
-                <a:latin typeface="Malgun Gothic" pitchFamily="34" charset="0"/>
-                <a:ea typeface="Malgun Gothic" pitchFamily="34" charset="-122"/>
-                <a:cs typeface="Malgun Gothic" pitchFamily="34" charset="-120"/>
-              </a:rPr>
-              <a:t>⑥ 개선효과 (정성)</a:t>
-            </a:r>
-            <a:endParaRPr lang="en-US" sz="825" dirty="0"/>
-          </a:p>
-        </p:txBody>
-      </p:sp>
-      <p:sp>
-        <p:nvSpPr>
-          <p:cNvPr id="52" name="Text 50"/>
-          <p:cNvSpPr txBox="1"/>
-          <p:nvPr/>
-        </p:nvSpPr>
-        <p:spPr>
-          <a:xfrm>
-            <a:off x="10972800" y="4752975"/>
-            <a:ext cx="533400" cy="173355"/>
-          </a:xfrm>
-          <a:prstGeom prst="rect">
-            <a:avLst/>
-          </a:prstGeom>
-          <a:noFill/>
-          <a:ln/>
-        </p:spPr>
-        <p:txBody>
-          <a:bodyPr wrap="square" lIns="0" tIns="0" rIns="0" bIns="0" rtlCol="0" anchor="t"/>
-          <a:lstStyle/>
-          <a:p>
-            <a:pPr algn="r" indent="0" marL="0">
-              <a:lnSpc>
-                <a:spcPts val="1365"/>
-              </a:lnSpc>
-              <a:buNone/>
-            </a:pPr>
-            <a:r>
-              <a:rPr lang="en-US" sz="1050" dirty="0">
-                <a:solidFill>
-                  <a:srgbClr val="6E7780"/>
-                </a:solidFill>
-                <a:latin typeface="Consolas" pitchFamily="34" charset="0"/>
-                <a:ea typeface="Consolas" pitchFamily="34" charset="-122"/>
-                <a:cs typeface="Consolas" pitchFamily="34" charset="-120"/>
-              </a:rPr>
               <a:t>10</a:t>
             </a:r>
             <a:endParaRPr lang="en-US" sz="1050" dirty="0"/>
@@ -14301,7 +14217,7 @@
       </p:sp>
       <p:sp>
         <p:nvSpPr>
-          <p:cNvPr id="53" name="Shape 51"/>
+          <p:cNvPr id="51" name="Shape 49"/>
           <p:cNvSpPr/>
           <p:nvPr/>
         </p:nvSpPr>
@@ -14324,7 +14240,7 @@
       </p:sp>
       <p:sp>
         <p:nvSpPr>
-          <p:cNvPr id="54" name="Text 52"/>
+          <p:cNvPr id="52" name="Text 50"/>
           <p:cNvSpPr txBox="1"/>
           <p:nvPr/>
         </p:nvSpPr>
@@ -14358,7 +14274,7 @@
                 <a:ea typeface="Consolas" pitchFamily="34" charset="-122"/>
                 <a:cs typeface="Consolas" pitchFamily="34" charset="-120"/>
               </a:rPr>
-              <a:t>09</a:t>
+              <a:t>07</a:t>
             </a:r>
             <a:endParaRPr lang="en-US" sz="1200" dirty="0"/>
           </a:p>
@@ -14366,7 +14282,7 @@
       </p:sp>
       <p:sp>
         <p:nvSpPr>
-          <p:cNvPr id="55" name="Text 53"/>
+          <p:cNvPr id="53" name="Text 51"/>
           <p:cNvSpPr txBox="1"/>
           <p:nvPr/>
         </p:nvSpPr>
@@ -14408,7 +14324,7 @@
       </p:sp>
       <p:sp>
         <p:nvSpPr>
-          <p:cNvPr id="56" name="Text 54"/>
+          <p:cNvPr id="54" name="Text 52"/>
           <p:cNvSpPr txBox="1"/>
           <p:nvPr/>
         </p:nvSpPr>
@@ -14450,7 +14366,7 @@
       </p:sp>
       <p:sp>
         <p:nvSpPr>
-          <p:cNvPr id="57" name="Text 55"/>
+          <p:cNvPr id="55" name="Text 53"/>
           <p:cNvSpPr txBox="1"/>
           <p:nvPr/>
         </p:nvSpPr>
@@ -14492,7 +14408,7 @@
       </p:sp>
       <p:sp>
         <p:nvSpPr>
-          <p:cNvPr id="58" name="Text 56"/>
+          <p:cNvPr id="56" name="Text 54"/>
           <p:cNvSpPr txBox="1"/>
           <p:nvPr/>
         </p:nvSpPr>
@@ -14534,7 +14450,7 @@
       </p:sp>
       <p:sp>
         <p:nvSpPr>
-          <p:cNvPr id="59" name="Shape 57"/>
+          <p:cNvPr id="57" name="Shape 55"/>
           <p:cNvSpPr/>
           <p:nvPr/>
         </p:nvSpPr>
@@ -14557,7 +14473,7 @@
       </p:sp>
       <p:sp>
         <p:nvSpPr>
-          <p:cNvPr id="60" name="Text 58"/>
+          <p:cNvPr id="58" name="Text 56"/>
           <p:cNvSpPr txBox="1"/>
           <p:nvPr/>
         </p:nvSpPr>
@@ -14599,7 +14515,7 @@
       </p:sp>
       <p:sp>
         <p:nvSpPr>
-          <p:cNvPr id="61" name="Text 59"/>
+          <p:cNvPr id="59" name="Text 57"/>
           <p:cNvSpPr txBox="1"/>
           <p:nvPr/>
         </p:nvSpPr>
@@ -14641,7 +14557,7 @@
       </p:sp>
       <p:sp>
         <p:nvSpPr>
-          <p:cNvPr id="62" name="Text 60"/>
+          <p:cNvPr id="60" name="Text 58"/>
           <p:cNvSpPr txBox="1"/>
           <p:nvPr/>
         </p:nvSpPr>
@@ -14683,7 +14599,7 @@
       </p:sp>
       <p:sp>
         <p:nvSpPr>
-          <p:cNvPr id="63" name="Text 61"/>
+          <p:cNvPr id="61" name="Text 59"/>
           <p:cNvSpPr txBox="1"/>
           <p:nvPr/>
         </p:nvSpPr>
@@ -14725,7 +14641,7 @@
       </p:sp>
       <p:sp>
         <p:nvSpPr>
-          <p:cNvPr id="64" name="Shape 62"/>
+          <p:cNvPr id="62" name="Shape 60"/>
           <p:cNvSpPr/>
           <p:nvPr/>
         </p:nvSpPr>
@@ -14748,7 +14664,7 @@
       </p:sp>
       <p:sp>
         <p:nvSpPr>
-          <p:cNvPr id="65" name="Text 63"/>
+          <p:cNvPr id="63" name="Text 61"/>
           <p:cNvSpPr txBox="1"/>
           <p:nvPr/>
         </p:nvSpPr>
@@ -15388,7 +15304,7 @@
         </p:nvSpPr>
         <p:spPr>
           <a:xfrm>
-            <a:off x="704850" y="2038350"/>
+            <a:off x="876300" y="2038350"/>
             <a:ext cx="3810000" cy="114300"/>
           </a:xfrm>
           <a:prstGeom prst="rect">
@@ -16901,7 +16817,7 @@
         <p:spPr>
           <a:xfrm>
             <a:off x="876300" y="3848100"/>
-            <a:ext cx="4914900" cy="308610"/>
+            <a:ext cx="4914900" cy="154305"/>
           </a:xfrm>
           <a:prstGeom prst="rect">
             <a:avLst/>
@@ -16928,7 +16844,7 @@
                 <a:ea typeface="Malgun Gothic" pitchFamily="34" charset="-122"/>
                 <a:cs typeface="Malgun Gothic" pitchFamily="34" charset="-120"/>
               </a:rPr>
-              <a:t>업무를 줄이는 것만 생각했다면 엑셀을 손보고 끝냈을 것입니다.</a:t>
+              <a:t>남의 팀 업무인데도 과제로 잡은 이유가 셋 있습니다.</a:t>
             </a:r>
             <a:endParaRPr lang="en-US" sz="900" dirty="0"/>
           </a:p>
@@ -18150,7 +18066,7 @@
                 <a:ea typeface="Malgun Gothic" pitchFamily="34" charset="-122"/>
                 <a:cs typeface="Malgun Gothic" pitchFamily="34" charset="-120"/>
               </a:rPr>
-              <a:t>해 본 적 없는 분야를 공부해 보고 싶었고, 마침 눈에 보이던 비효율이 그 대상이었습니다.</a:t>
+              <a:t>배워 보고 싶은 분야와, 곁에서 보이던 낭비가 같은 자리에 있었습니다.</a:t>
             </a:r>
             <a:endParaRPr lang="en-US" sz="1163" dirty="0"/>
           </a:p>
@@ -18569,7 +18485,7 @@
                 <a:ea typeface="Malgun Gothic" pitchFamily="34" charset="-122"/>
                 <a:cs typeface="Malgun Gothic" pitchFamily="34" charset="-120"/>
               </a:rPr>
-              <a:t>절차가 번거로웠고, 더하는 값을 하나로 끝냈습니다. 그래서 신고한 숫자가 어긋났습니다.</a:t>
+              <a:t>절차가 번거로웠고, 더하는 값은 하나로 정해 두고 그대로 썼습니다. 그래서 신고한 숫자가 어긋났습니다.</a:t>
             </a:r>
             <a:endParaRPr lang="en-US" sz="1275" dirty="0"/>
           </a:p>
@@ -22312,7 +22228,7 @@
                 <a:ea typeface="Consolas" pitchFamily="34" charset="-122"/>
                 <a:cs typeface="Consolas" pitchFamily="34" charset="-120"/>
               </a:rPr>
-              <a:t>-4</a:t>
+              <a:t>−4</a:t>
             </a:r>
             <a:endParaRPr lang="en-US" sz="750" dirty="0"/>
           </a:p>
@@ -23402,7 +23318,7 @@
         <p:spPr>
           <a:xfrm>
             <a:off x="4838700" y="5111115"/>
-            <a:ext cx="5334000" cy="120015"/>
+            <a:ext cx="6419850" cy="120015"/>
           </a:xfrm>
           <a:prstGeom prst="rect">
             <a:avLst/>
@@ -23429,7 +23345,7 @@
                 <a:ea typeface="Malgun Gothic" pitchFamily="34" charset="-122"/>
                 <a:cs typeface="Malgun Gothic" pitchFamily="34" charset="-120"/>
               </a:rPr>
-              <a:t>가로 외기온도 ℃ · 세로 실제 차이 MW · 점 하나가 시험 한 번</a:t>
+              <a:t>가로 외기온도 ℃ · 세로 실제 차이 MW · 점 하나가 시험 한 번(누적 40회) · 채점 39회(까닭은 9장 각주)</a:t>
             </a:r>
             <a:endParaRPr lang="en-US" sz="788" dirty="0"/>
           </a:p>
@@ -23533,7 +23449,7 @@
                 <a:ea typeface="Malgun Gothic" pitchFamily="34" charset="-122"/>
                 <a:cs typeface="Malgun Gothic" pitchFamily="34" charset="-120"/>
               </a:rPr>
-              <a:t>시험 40회 가운데 </a:t>
+              <a:t>채점한 시험 39회 가운데 </a:t>
             </a:r>
             <a:pPr algn="l" indent="0" marL="0">
               <a:lnSpc>
@@ -25578,7 +25494,7 @@
                 <a:ea typeface="Malgun Gothic" pitchFamily="34" charset="-122"/>
                 <a:cs typeface="Malgun Gothic" pitchFamily="34" charset="-120"/>
               </a:rPr>
-              <a:t>온도와 같이 움직입니다 (겹침 0.95)</a:t>
+              <a:t>온도와 거의 같이 움직입니다 (0.95)</a:t>
             </a:r>
             <a:endParaRPr lang="en-US" sz="863" dirty="0"/>
           </a:p>
@@ -26276,7 +26192,7 @@
                 <a:ea typeface="Malgun Gothic" pitchFamily="34" charset="-122"/>
                 <a:cs typeface="Malgun Gothic" pitchFamily="34" charset="-120"/>
               </a:rPr>
-              <a:t>온도와 차이가 반대로 움직입니다 (겹침 0.84). 네 후보 가운데 가장 뚜렷합니다.</a:t>
+              <a:t>온도가 오르면 차이가 내려갑니다 (반대 방향 0.84). 네 후보 가운데 가장 뚜렷합니다.</a:t>
             </a:r>
             <a:endParaRPr lang="en-US" sz="863" dirty="0"/>
           </a:p>
@@ -26748,7 +26664,7 @@
         <p:spPr>
           <a:xfrm>
             <a:off x="6324600" y="5810250"/>
-            <a:ext cx="4991100" cy="308610"/>
+            <a:ext cx="4991100" cy="154305"/>
           </a:xfrm>
           <a:prstGeom prst="rect">
             <a:avLst/>
@@ -29570,7 +29486,7 @@
                 <a:ea typeface="Malgun Gothic" pitchFamily="34" charset="-122"/>
                 <a:cs typeface="Malgun Gothic" pitchFamily="34" charset="-120"/>
               </a:rPr>
-              <a:t>여러 굵기의 파동을 섞은 곡선</a:t>
+              <a:t>완만한 물결과 급한 물결을 섞은 곡선</a:t>
             </a:r>
             <a:endParaRPr lang="en-US" sz="825" dirty="0"/>
           </a:p>
@@ -29758,7 +29674,7 @@
                 <a:ea typeface="Malgun Gothic" pitchFamily="34" charset="-122"/>
                 <a:cs typeface="Malgun Gothic" pitchFamily="34" charset="-120"/>
               </a:rPr>
-              <a:t>조금 덜 부드러운 곡선</a:t>
+              <a:t>거의 부드러운 곡선</a:t>
             </a:r>
             <a:endParaRPr lang="en-US" sz="825" dirty="0"/>
           </a:p>
@@ -29946,7 +29862,7 @@
                 <a:ea typeface="Malgun Gothic" pitchFamily="34" charset="-122"/>
                 <a:cs typeface="Malgun Gothic" pitchFamily="34" charset="-120"/>
               </a:rPr>
-              <a:t>더 덜 부드러운 곡선</a:t>
+              <a:t>살짝 각이 지는 곡선</a:t>
             </a:r>
             <a:endParaRPr lang="en-US" sz="825" dirty="0"/>
           </a:p>
@@ -30510,7 +30426,7 @@
                 <a:ea typeface="Malgun Gothic" pitchFamily="34" charset="-122"/>
                 <a:cs typeface="Malgun Gothic" pitchFamily="34" charset="-120"/>
               </a:rPr>
-              <a:t>온도 구간을 나눠 그 안의 평균을 씀 — 가장 단순</a:t>
+              <a:t>온도 구간별 평균 — 가장 단순한 방법</a:t>
             </a:r>
             <a:endParaRPr lang="en-US" sz="825" dirty="0"/>
           </a:p>
@@ -30524,7 +30440,7 @@
         </p:nvSpPr>
         <p:spPr>
           <a:xfrm>
-            <a:off x="876300" y="3238500"/>
+            <a:off x="876300" y="3200400"/>
             <a:ext cx="10382250" cy="123825"/>
           </a:xfrm>
           <a:prstGeom prst="rect">
@@ -30552,7 +30468,7 @@
                 <a:ea typeface="Malgun Gothic" pitchFamily="34" charset="-122"/>
                 <a:cs typeface="Malgun Gothic" pitchFamily="34" charset="-120"/>
               </a:rPr>
-              <a:t>세로 이름 · 막대는 1등과의 차이(오른쪽으로 갈수록 더 틀린 것) · 가운데 숫자가 평균 오차 · 채점은 시험 39회를 한 회씩 가려 맞혀 보는 방식</a:t>
+              <a:t>막대는 1등과의 차이(오른쪽으로 갈수록 더 틀린 것) · 가운데 숫자가 평균 오차 · 채점은 한 회씩 가려 맞혀 보는 방식으로, 누적 40회 가운데 39회를 썼습니다(한 회차는 구간평균이 답을 못 내 빠집니다)</a:t>
             </a:r>
             <a:endParaRPr lang="en-US" sz="750" dirty="0"/>
           </a:p>
@@ -30566,7 +30482,7 @@
         </p:nvSpPr>
         <p:spPr>
           <a:xfrm>
-            <a:off x="876300" y="3409950"/>
+            <a:off x="876300" y="3352800"/>
             <a:ext cx="10382250" cy="123825"/>
           </a:xfrm>
           <a:prstGeom prst="rect">
@@ -30790,7 +30706,7 @@
         <p:spPr>
           <a:xfrm>
             <a:off x="876300" y="3981450"/>
-            <a:ext cx="7410450" cy="2152650"/>
+            <a:ext cx="7210425" cy="2095500"/>
           </a:xfrm>
           <a:prstGeom prst="rect">
             <a:avLst/>
@@ -30806,7 +30722,7 @@
         <p:spPr>
           <a:xfrm>
             <a:off x="866775" y="3971925"/>
-            <a:ext cx="7429500" cy="2171700"/>
+            <a:ext cx="7229475" cy="2114550"/>
           </a:xfrm>
           <a:prstGeom prst="rect">
             <a:avLst/>
@@ -30827,8 +30743,8 @@
         </p:nvSpPr>
         <p:spPr>
           <a:xfrm>
-            <a:off x="8572500" y="3981450"/>
-            <a:ext cx="2686050" cy="131445"/>
+            <a:off x="8382000" y="3981450"/>
+            <a:ext cx="2876550" cy="131445"/>
           </a:xfrm>
           <a:prstGeom prst="rect">
             <a:avLst/>
@@ -30869,8 +30785,8 @@
         </p:nvSpPr>
         <p:spPr>
           <a:xfrm>
-            <a:off x="8572500" y="4152900"/>
-            <a:ext cx="2686050" cy="565785"/>
+            <a:off x="8382000" y="4152900"/>
+            <a:ext cx="2876550" cy="424339"/>
           </a:xfrm>
           <a:prstGeom prst="rect">
             <a:avLst/>
@@ -30911,8 +30827,8 @@
         </p:nvSpPr>
         <p:spPr>
           <a:xfrm>
-            <a:off x="8572500" y="4705350"/>
-            <a:ext cx="2686050" cy="131445"/>
+            <a:off x="8382000" y="4705350"/>
+            <a:ext cx="2876550" cy="131445"/>
           </a:xfrm>
           <a:prstGeom prst="rect">
             <a:avLst/>
@@ -30953,8 +30869,8 @@
         </p:nvSpPr>
         <p:spPr>
           <a:xfrm>
-            <a:off x="8572500" y="4876800"/>
-            <a:ext cx="2686050" cy="565785"/>
+            <a:off x="8382000" y="4876800"/>
+            <a:ext cx="2876550" cy="424339"/>
           </a:xfrm>
           <a:prstGeom prst="rect">
             <a:avLst/>
@@ -30995,8 +30911,8 @@
         </p:nvSpPr>
         <p:spPr>
           <a:xfrm>
-            <a:off x="8572500" y="5429250"/>
-            <a:ext cx="2686050" cy="131445"/>
+            <a:off x="8382000" y="5429250"/>
+            <a:ext cx="2876550" cy="131445"/>
           </a:xfrm>
           <a:prstGeom prst="rect">
             <a:avLst/>
@@ -31037,8 +30953,8 @@
         </p:nvSpPr>
         <p:spPr>
           <a:xfrm>
-            <a:off x="8572500" y="5600700"/>
-            <a:ext cx="2686050" cy="565785"/>
+            <a:off x="8382000" y="5600700"/>
+            <a:ext cx="2876550" cy="424339"/>
           </a:xfrm>
           <a:prstGeom prst="rect">
             <a:avLst/>
@@ -32759,7 +32675,7 @@
                 <a:ea typeface="Malgun Gothic" pitchFamily="34" charset="-122"/>
                 <a:cs typeface="Malgun Gothic" pitchFamily="34" charset="-120"/>
               </a:rPr>
-              <a:t>, 치우침은 -0.04 MW 로 한쪽으로 쏠리지 않았습니다.</a:t>
+              <a:t>, 치우침은 −0.04 MW 로 한쪽으로 쏠리지 않았습니다.</a:t>
             </a:r>
             <a:endParaRPr lang="en-US" sz="938" dirty="0"/>
           </a:p>
@@ -34282,8 +34198,8 @@
         </p:nvSpPr>
         <p:spPr>
           <a:xfrm>
-            <a:off x="876300" y="2933700"/>
-            <a:ext cx="4914900" cy="321469"/>
+            <a:off x="876300" y="2895600"/>
+            <a:ext cx="4914900" cy="160734"/>
           </a:xfrm>
           <a:prstGeom prst="rect">
             <a:avLst/>
@@ -34310,7 +34226,7 @@
                 <a:ea typeface="Malgun Gothic" pitchFamily="34" charset="-122"/>
                 <a:cs typeface="Malgun Gothic" pitchFamily="34" charset="-120"/>
               </a:rPr>
-              <a:t>엑셀 4개를 오가며 61개 값을 옮기던 일이, 날짜와 시각을 넣는 일로 바뀌었습니다.</a:t>
+              <a:t>엑셀 4개를 오가던 일이 날짜·시각 입력으로 바뀌었습니다.</a:t>
             </a:r>
             <a:endParaRPr lang="en-US" sz="938" dirty="0"/>
           </a:p>
@@ -35299,8 +35215,8 @@
         </p:nvSpPr>
         <p:spPr>
           <a:xfrm>
-            <a:off x="685800" y="3324225"/>
-            <a:ext cx="10820400" cy="942975"/>
+            <a:off x="685800" y="3267075"/>
+            <a:ext cx="10820400" cy="1057275"/>
           </a:xfrm>
           <a:prstGeom prst="rect">
             <a:avLst/>
@@ -35324,7 +35240,7 @@
         </p:nvSpPr>
         <p:spPr>
           <a:xfrm>
-            <a:off x="685800" y="3200400"/>
+            <a:off x="685800" y="3143250"/>
             <a:ext cx="1943100" cy="247650"/>
           </a:xfrm>
           <a:prstGeom prst="rect">
@@ -35346,7 +35262,7 @@
         </p:nvSpPr>
         <p:spPr>
           <a:xfrm>
-            <a:off x="819150" y="3257550"/>
+            <a:off x="819150" y="3200400"/>
             <a:ext cx="152400" cy="142875"/>
           </a:xfrm>
           <a:prstGeom prst="rect">
@@ -35388,7 +35304,7 @@
         </p:nvSpPr>
         <p:spPr>
           <a:xfrm>
-            <a:off x="1009650" y="3257550"/>
+            <a:off x="1009650" y="3200400"/>
             <a:ext cx="1504950" cy="154305"/>
           </a:xfrm>
           <a:prstGeom prst="rect">
@@ -35430,7 +35346,7 @@
         </p:nvSpPr>
         <p:spPr>
           <a:xfrm>
-            <a:off x="8486775" y="3390900"/>
+            <a:off x="8486775" y="3333750"/>
             <a:ext cx="2905125" cy="125730"/>
           </a:xfrm>
           <a:prstGeom prst="rect">
@@ -35472,7 +35388,7 @@
         </p:nvSpPr>
         <p:spPr>
           <a:xfrm>
-            <a:off x="876300" y="3562350"/>
+            <a:off x="876300" y="3505200"/>
             <a:ext cx="152400" cy="137160"/>
           </a:xfrm>
           <a:prstGeom prst="rect">
@@ -35514,7 +35430,7 @@
         </p:nvSpPr>
         <p:spPr>
           <a:xfrm>
-            <a:off x="1066800" y="3543300"/>
+            <a:off x="1066800" y="3486150"/>
             <a:ext cx="2209800" cy="154781"/>
           </a:xfrm>
           <a:prstGeom prst="rect">
@@ -35556,7 +35472,7 @@
         </p:nvSpPr>
         <p:spPr>
           <a:xfrm>
-            <a:off x="1066800" y="3733800"/>
+            <a:off x="1066800" y="3676650"/>
             <a:ext cx="2209800" cy="260033"/>
           </a:xfrm>
           <a:prstGeom prst="rect">
@@ -35598,7 +35514,7 @@
         </p:nvSpPr>
         <p:spPr>
           <a:xfrm>
-            <a:off x="3295650" y="3562350"/>
+            <a:off x="3295650" y="3505200"/>
             <a:ext cx="171450" cy="137160"/>
           </a:xfrm>
           <a:prstGeom prst="rect">
@@ -35640,7 +35556,7 @@
         </p:nvSpPr>
         <p:spPr>
           <a:xfrm>
-            <a:off x="3505200" y="3562350"/>
+            <a:off x="3505200" y="3505200"/>
             <a:ext cx="152400" cy="137160"/>
           </a:xfrm>
           <a:prstGeom prst="rect">
@@ -35682,7 +35598,7 @@
         </p:nvSpPr>
         <p:spPr>
           <a:xfrm>
-            <a:off x="3695700" y="3543300"/>
+            <a:off x="3695700" y="3486150"/>
             <a:ext cx="2209800" cy="154781"/>
           </a:xfrm>
           <a:prstGeom prst="rect">
@@ -35724,7 +35640,7 @@
         </p:nvSpPr>
         <p:spPr>
           <a:xfrm>
-            <a:off x="3695700" y="3733800"/>
+            <a:off x="3695700" y="3676650"/>
             <a:ext cx="2209800" cy="260033"/>
           </a:xfrm>
           <a:prstGeom prst="rect">
@@ -35766,7 +35682,7 @@
         </p:nvSpPr>
         <p:spPr>
           <a:xfrm>
-            <a:off x="5924550" y="3562350"/>
+            <a:off x="5924550" y="3505200"/>
             <a:ext cx="171450" cy="137160"/>
           </a:xfrm>
           <a:prstGeom prst="rect">
@@ -35808,7 +35724,7 @@
         </p:nvSpPr>
         <p:spPr>
           <a:xfrm>
-            <a:off x="6134100" y="3562350"/>
+            <a:off x="6134100" y="3505200"/>
             <a:ext cx="152400" cy="137160"/>
           </a:xfrm>
           <a:prstGeom prst="rect">
@@ -35850,7 +35766,7 @@
         </p:nvSpPr>
         <p:spPr>
           <a:xfrm>
-            <a:off x="6324600" y="3543300"/>
+            <a:off x="6324600" y="3486150"/>
             <a:ext cx="2209800" cy="154781"/>
           </a:xfrm>
           <a:prstGeom prst="rect">
@@ -35892,7 +35808,7 @@
         </p:nvSpPr>
         <p:spPr>
           <a:xfrm>
-            <a:off x="6324600" y="3733800"/>
+            <a:off x="6324600" y="3676650"/>
             <a:ext cx="2209800" cy="260033"/>
           </a:xfrm>
           <a:prstGeom prst="rect">
@@ -35934,7 +35850,7 @@
         </p:nvSpPr>
         <p:spPr>
           <a:xfrm>
-            <a:off x="8553450" y="3562350"/>
+            <a:off x="8553450" y="3505200"/>
             <a:ext cx="171450" cy="137160"/>
           </a:xfrm>
           <a:prstGeom prst="rect">
@@ -35976,7 +35892,7 @@
         </p:nvSpPr>
         <p:spPr>
           <a:xfrm>
-            <a:off x="8763000" y="3562350"/>
+            <a:off x="8763000" y="3505200"/>
             <a:ext cx="152400" cy="137160"/>
           </a:xfrm>
           <a:prstGeom prst="rect">
@@ -36018,7 +35934,7 @@
         </p:nvSpPr>
         <p:spPr>
           <a:xfrm>
-            <a:off x="8953500" y="3543300"/>
+            <a:off x="8953500" y="3486150"/>
             <a:ext cx="2209800" cy="154781"/>
           </a:xfrm>
           <a:prstGeom prst="rect">
@@ -36060,7 +35976,7 @@
         </p:nvSpPr>
         <p:spPr>
           <a:xfrm>
-            <a:off x="8953500" y="3733800"/>
+            <a:off x="8953500" y="3676650"/>
             <a:ext cx="2209800" cy="260033"/>
           </a:xfrm>
           <a:prstGeom prst="rect">
@@ -36102,7 +36018,7 @@
         </p:nvSpPr>
         <p:spPr>
           <a:xfrm>
-            <a:off x="876300" y="4095750"/>
+            <a:off x="876300" y="4057650"/>
             <a:ext cx="10382250" cy="257175"/>
           </a:xfrm>
           <a:prstGeom prst="rect">
@@ -36144,8 +36060,8 @@
         </p:nvSpPr>
         <p:spPr>
           <a:xfrm>
-            <a:off x="685800" y="4505325"/>
-            <a:ext cx="10820400" cy="1590675"/>
+            <a:off x="685800" y="4562475"/>
+            <a:ext cx="10820400" cy="1533525"/>
           </a:xfrm>
           <a:prstGeom prst="rect">
             <a:avLst/>
@@ -36169,7 +36085,7 @@
         </p:nvSpPr>
         <p:spPr>
           <a:xfrm>
-            <a:off x="685800" y="4381500"/>
+            <a:off x="685800" y="4438650"/>
             <a:ext cx="1304925" cy="247650"/>
           </a:xfrm>
           <a:prstGeom prst="rect">
@@ -36191,7 +36107,7 @@
         </p:nvSpPr>
         <p:spPr>
           <a:xfrm>
-            <a:off x="819150" y="4438650"/>
+            <a:off x="819150" y="4495800"/>
             <a:ext cx="152400" cy="142875"/>
           </a:xfrm>
           <a:prstGeom prst="rect">
@@ -36233,7 +36149,7 @@
         </p:nvSpPr>
         <p:spPr>
           <a:xfrm>
-            <a:off x="1009650" y="4438650"/>
+            <a:off x="1009650" y="4495800"/>
             <a:ext cx="866775" cy="154305"/>
           </a:xfrm>
           <a:prstGeom prst="rect">
@@ -36275,7 +36191,7 @@
         </p:nvSpPr>
         <p:spPr>
           <a:xfrm>
-            <a:off x="10534650" y="4572000"/>
+            <a:off x="10534650" y="4629150"/>
             <a:ext cx="857250" cy="125730"/>
           </a:xfrm>
           <a:prstGeom prst="rect">
@@ -36317,7 +36233,7 @@
         </p:nvSpPr>
         <p:spPr>
           <a:xfrm>
-            <a:off x="876300" y="4743450"/>
+            <a:off x="876300" y="4800600"/>
             <a:ext cx="4000500" cy="148590"/>
           </a:xfrm>
           <a:prstGeom prst="rect">
@@ -36359,7 +36275,7 @@
         </p:nvSpPr>
         <p:spPr>
           <a:xfrm>
-            <a:off x="876300" y="4933950"/>
+            <a:off x="876300" y="4991100"/>
             <a:ext cx="1714500" cy="240982"/>
           </a:xfrm>
           <a:prstGeom prst="rect">
@@ -36401,7 +36317,7 @@
         </p:nvSpPr>
         <p:spPr>
           <a:xfrm>
-            <a:off x="2647950" y="5010150"/>
+            <a:off x="2647950" y="5067300"/>
             <a:ext cx="266700" cy="171450"/>
           </a:xfrm>
           <a:prstGeom prst="rect">
@@ -36443,7 +36359,7 @@
         </p:nvSpPr>
         <p:spPr>
           <a:xfrm>
-            <a:off x="2990850" y="4895850"/>
+            <a:off x="2990850" y="4953000"/>
             <a:ext cx="2095500" cy="306705"/>
           </a:xfrm>
           <a:prstGeom prst="rect">
@@ -36485,7 +36401,7 @@
         </p:nvSpPr>
         <p:spPr>
           <a:xfrm>
-            <a:off x="876300" y="5334000"/>
+            <a:off x="876300" y="5391150"/>
             <a:ext cx="38100" cy="419100"/>
           </a:xfrm>
           <a:prstGeom prst="rect">
@@ -36505,7 +36421,7 @@
         </p:nvSpPr>
         <p:spPr>
           <a:xfrm>
-            <a:off x="1047750" y="5314950"/>
+            <a:off x="1047750" y="5372100"/>
             <a:ext cx="4191000" cy="235267"/>
           </a:xfrm>
           <a:prstGeom prst="rect">
@@ -36547,7 +36463,7 @@
         </p:nvSpPr>
         <p:spPr>
           <a:xfrm>
-            <a:off x="1047750" y="5581650"/>
+            <a:off x="1047750" y="5638800"/>
             <a:ext cx="4191000" cy="142399"/>
           </a:xfrm>
           <a:prstGeom prst="rect">
@@ -36589,7 +36505,7 @@
         </p:nvSpPr>
         <p:spPr>
           <a:xfrm>
-            <a:off x="5772150" y="4724400"/>
+            <a:off x="5772150" y="4781550"/>
             <a:ext cx="0" cy="1143000"/>
           </a:xfrm>
           <a:prstGeom prst="line">
@@ -36612,7 +36528,7 @@
         </p:nvSpPr>
         <p:spPr>
           <a:xfrm>
-            <a:off x="6096000" y="4743450"/>
+            <a:off x="6096000" y="4800600"/>
             <a:ext cx="1714500" cy="131445"/>
           </a:xfrm>
           <a:prstGeom prst="rect">
@@ -36654,7 +36570,7 @@
         </p:nvSpPr>
         <p:spPr>
           <a:xfrm>
-            <a:off x="7905750" y="4743450"/>
+            <a:off x="7905750" y="4800600"/>
             <a:ext cx="3409950" cy="137160"/>
           </a:xfrm>
           <a:prstGeom prst="rect">
@@ -36696,7 +36612,7 @@
         </p:nvSpPr>
         <p:spPr>
           <a:xfrm>
-            <a:off x="6096000" y="4991100"/>
+            <a:off x="6096000" y="5048250"/>
             <a:ext cx="1714500" cy="131445"/>
           </a:xfrm>
           <a:prstGeom prst="rect">
@@ -36738,7 +36654,7 @@
         </p:nvSpPr>
         <p:spPr>
           <a:xfrm>
-            <a:off x="7905750" y="4991100"/>
+            <a:off x="7905750" y="5048250"/>
             <a:ext cx="3409950" cy="137160"/>
           </a:xfrm>
           <a:prstGeom prst="rect">
@@ -36780,7 +36696,7 @@
         </p:nvSpPr>
         <p:spPr>
           <a:xfrm>
-            <a:off x="6096000" y="5238750"/>
+            <a:off x="6096000" y="5295900"/>
             <a:ext cx="1714500" cy="131445"/>
           </a:xfrm>
           <a:prstGeom prst="rect">
@@ -36822,7 +36738,7 @@
         </p:nvSpPr>
         <p:spPr>
           <a:xfrm>
-            <a:off x="7905750" y="5238750"/>
+            <a:off x="7905750" y="5295900"/>
             <a:ext cx="3409950" cy="137160"/>
           </a:xfrm>
           <a:prstGeom prst="rect">
@@ -36864,7 +36780,7 @@
         </p:nvSpPr>
         <p:spPr>
           <a:xfrm>
-            <a:off x="6096000" y="5486400"/>
+            <a:off x="6096000" y="5543550"/>
             <a:ext cx="1714500" cy="131445"/>
           </a:xfrm>
           <a:prstGeom prst="rect">
@@ -36906,7 +36822,7 @@
         </p:nvSpPr>
         <p:spPr>
           <a:xfrm>
-            <a:off x="7905750" y="5486400"/>
+            <a:off x="7905750" y="5543550"/>
             <a:ext cx="3409950" cy="137160"/>
           </a:xfrm>
           <a:prstGeom prst="rect">
@@ -36948,7 +36864,7 @@
         </p:nvSpPr>
         <p:spPr>
           <a:xfrm>
-            <a:off x="6096000" y="5791200"/>
+            <a:off x="6096000" y="5848350"/>
             <a:ext cx="5219700" cy="123825"/>
           </a:xfrm>
           <a:prstGeom prst="rect">
@@ -37105,7 +37021,7 @@
                 <a:ea typeface="Malgun Gothic" pitchFamily="34" charset="-122"/>
                 <a:cs typeface="Malgun Gothic" pitchFamily="34" charset="-120"/>
               </a:rPr>
-              <a:t>일은 줄고 숫자는 맞았습니다. 처음에 세운 목표 두 가지입니다.</a:t>
+              <a:t>일은 줄고 숫자는 정확해졌습니다. 처음에 세운 목표 두 가지입니다.</a:t>
             </a:r>
             <a:endParaRPr lang="en-US" sz="1163" dirty="0"/>
           </a:p>

--- a/docs/ppt/위례_공급가능용량_최종발표_v3.pptx
+++ b/docs/ppt/위례_공급가능용량_최종발표_v3.pptx
@@ -13277,7 +13277,7 @@
                 <a:ea typeface="Malgun Gothic" pitchFamily="34" charset="-122"/>
                 <a:cs typeface="Malgun Gothic" pitchFamily="34" charset="-120"/>
               </a:rPr>
-              <a:t>개선 방안</a:t>
+              <a:t>해결 방안 도출</a:t>
             </a:r>
             <a:endParaRPr lang="en-US" sz="1013" dirty="0"/>
           </a:p>
@@ -13468,7 +13468,7 @@
                 <a:ea typeface="Malgun Gothic" pitchFamily="34" charset="-122"/>
                 <a:cs typeface="Malgun Gothic" pitchFamily="34" charset="-120"/>
               </a:rPr>
-              <a:t>회귀 모델 선정</a:t>
+              <a:t>예측 · 보정 모델 개발</a:t>
             </a:r>
             <a:endParaRPr lang="en-US" sz="1013" dirty="0"/>
           </a:p>
@@ -13701,7 +13701,7 @@
                 <a:ea typeface="Malgun Gothic" pitchFamily="34" charset="-122"/>
                 <a:cs typeface="Malgun Gothic" pitchFamily="34" charset="-120"/>
               </a:rPr>
-              <a:t>넉 달 병행 운전</a:t>
+              <a:t>넉 달 병행 운전 · 모델 재검증</a:t>
             </a:r>
             <a:endParaRPr lang="en-US" sz="1013" dirty="0"/>
           </a:p>
@@ -26931,7 +26931,7 @@
                 <a:ea typeface="Malgun Gothic" pitchFamily="34" charset="-122"/>
                 <a:cs typeface="Malgun Gothic" pitchFamily="34" charset="-120"/>
               </a:rPr>
-              <a:t>개선 방안</a:t>
+              <a:t>해결 방안</a:t>
             </a:r>
             <a:endParaRPr lang="en-US" sz="975" dirty="0"/>
           </a:p>
@@ -27197,7 +27197,7 @@
                 <a:ea typeface="Malgun Gothic" pitchFamily="34" charset="-122"/>
                 <a:cs typeface="Malgun Gothic" pitchFamily="34" charset="-120"/>
               </a:rPr>
-              <a:t>개선 방안</a:t>
+              <a:t>해결 방안 도출</a:t>
             </a:r>
             <a:endParaRPr lang="en-US" sz="2475" dirty="0"/>
           </a:p>
@@ -27239,7 +27239,7 @@
                 <a:ea typeface="Malgun Gothic" pitchFamily="34" charset="-122"/>
                 <a:cs typeface="Malgun Gothic" pitchFamily="34" charset="-120"/>
               </a:rPr>
-              <a:t>하나는 흩어진 과정을 도구 하나로 합친 것입니다. 다른 하나는 더하는 값을 온도마다 다르게 한 것입니다.</a:t>
+              <a:t>목표가 둘이었습니다. 각각 무엇으로 풀지 정했습니다.</a:t>
             </a:r>
             <a:endParaRPr lang="en-US" sz="1275" dirty="0"/>
           </a:p>
@@ -27254,7 +27254,7 @@
         <p:spPr>
           <a:xfrm>
             <a:off x="685800" y="1724025"/>
-            <a:ext cx="10820400" cy="638175"/>
+            <a:ext cx="5295900" cy="1933575"/>
           </a:xfrm>
           <a:prstGeom prst="rect">
             <a:avLst/>
@@ -27279,7 +27279,7 @@
         <p:spPr>
           <a:xfrm>
             <a:off x="685800" y="1600200"/>
-            <a:ext cx="1600200" cy="247650"/>
+            <a:ext cx="2028825" cy="247650"/>
           </a:xfrm>
           <a:prstGeom prst="rect">
             <a:avLst>
@@ -27343,7 +27343,7 @@
         <p:spPr>
           <a:xfrm>
             <a:off x="1009650" y="1657350"/>
-            <a:ext cx="1162050" cy="154305"/>
+            <a:ext cx="1590675" cy="154305"/>
           </a:xfrm>
           <a:prstGeom prst="rect">
             <a:avLst/>
@@ -27370,7 +27370,7 @@
                 <a:ea typeface="Malgun Gothic" pitchFamily="34" charset="-122"/>
                 <a:cs typeface="Malgun Gothic" pitchFamily="34" charset="-120"/>
               </a:rPr>
-              <a:t>바꾼 것 두 가지</a:t>
+              <a:t>목표 ① 절차를 하나로</a:t>
             </a:r>
             <a:endParaRPr lang="en-US" sz="1013" dirty="0"/>
           </a:p>
@@ -27384,8 +27384,8 @@
         </p:nvSpPr>
         <p:spPr>
           <a:xfrm>
-            <a:off x="9372600" y="1790700"/>
-            <a:ext cx="2019300" cy="125730"/>
+            <a:off x="4429125" y="1790700"/>
+            <a:ext cx="1438275" cy="125730"/>
           </a:xfrm>
           <a:prstGeom prst="rect">
             <a:avLst/>
@@ -27412,7 +27412,7 @@
                 <a:ea typeface="Malgun Gothic" pitchFamily="34" charset="-122"/>
                 <a:cs typeface="Malgun Gothic" pitchFamily="34" charset="-120"/>
               </a:rPr>
-              <a:t>제작사 계산식은 손대지 않았습니다</a:t>
+              <a:t>왜 도구를 새로 만들었나</a:t>
             </a:r>
             <a:endParaRPr lang="en-US" sz="825" dirty="0"/>
           </a:p>
@@ -27426,8 +27426,8 @@
         </p:nvSpPr>
         <p:spPr>
           <a:xfrm>
-            <a:off x="876300" y="1962150"/>
-            <a:ext cx="38100" cy="228600"/>
+            <a:off x="876300" y="1981200"/>
+            <a:ext cx="38100" cy="342900"/>
           </a:xfrm>
           <a:prstGeom prst="rect">
             <a:avLst/>
@@ -27446,37 +27446,37 @@
         </p:nvSpPr>
         <p:spPr>
           <a:xfrm>
-            <a:off x="1028700" y="1981200"/>
-            <a:ext cx="190500" cy="137160"/>
-          </a:xfrm>
-          <a:prstGeom prst="rect">
-            <a:avLst/>
-          </a:prstGeom>
-          <a:noFill/>
-          <a:ln/>
-        </p:spPr>
-        <p:txBody>
-          <a:bodyPr wrap="square" lIns="0" tIns="0" rIns="0" bIns="0" rtlCol="0" anchor="t"/>
-          <a:lstStyle/>
-          <a:p>
-            <a:pPr algn="l" indent="0" marL="0">
-              <a:lnSpc>
-                <a:spcPts val="1080"/>
-              </a:lnSpc>
-              <a:buNone/>
-            </a:pPr>
-            <a:r>
-              <a:rPr lang="en-US" sz="900" b="1" dirty="0">
-                <a:solidFill>
-                  <a:srgbClr val="EA002C"/>
-                </a:solidFill>
-                <a:latin typeface="Consolas" pitchFamily="34" charset="0"/>
-                <a:ea typeface="Consolas" pitchFamily="34" charset="-122"/>
-                <a:cs typeface="Consolas" pitchFamily="34" charset="-120"/>
-              </a:rPr>
-              <a:t>1</a:t>
-            </a:r>
-            <a:endParaRPr lang="en-US" sz="900" dirty="0"/>
+            <a:off x="1047750" y="1962150"/>
+            <a:ext cx="4743450" cy="154781"/>
+          </a:xfrm>
+          <a:prstGeom prst="rect">
+            <a:avLst/>
+          </a:prstGeom>
+          <a:noFill/>
+          <a:ln/>
+        </p:spPr>
+        <p:txBody>
+          <a:bodyPr wrap="square" lIns="0" tIns="0" rIns="0" bIns="0" rtlCol="0" anchor="t"/>
+          <a:lstStyle/>
+          <a:p>
+            <a:pPr algn="l" indent="0" marL="0">
+              <a:lnSpc>
+                <a:spcPts val="1219"/>
+              </a:lnSpc>
+              <a:buNone/>
+            </a:pPr>
+            <a:r>
+              <a:rPr lang="en-US" sz="975" b="1" dirty="0">
+                <a:solidFill>
+                  <a:srgbClr val="1A1A1A"/>
+                </a:solidFill>
+                <a:latin typeface="Malgun Gothic" pitchFamily="34" charset="0"/>
+                <a:ea typeface="Malgun Gothic" pitchFamily="34" charset="-122"/>
+                <a:cs typeface="Malgun Gothic" pitchFamily="34" charset="-120"/>
+              </a:rPr>
+              <a:t>엑셀 4개는 손으로 이어야 한다</a:t>
+            </a:r>
+            <a:endParaRPr lang="en-US" sz="975" dirty="0"/>
           </a:p>
         </p:txBody>
       </p:sp>
@@ -27488,199 +27488,50 @@
         </p:nvSpPr>
         <p:spPr>
           <a:xfrm>
-            <a:off x="1257300" y="1962150"/>
-            <a:ext cx="2381250" cy="178594"/>
-          </a:xfrm>
-          <a:prstGeom prst="rect">
-            <a:avLst/>
-          </a:prstGeom>
-          <a:noFill/>
-          <a:ln/>
-        </p:spPr>
-        <p:txBody>
-          <a:bodyPr wrap="square" lIns="0" tIns="0" rIns="0" bIns="0" rtlCol="0" anchor="t"/>
-          <a:lstStyle/>
-          <a:p>
-            <a:pPr algn="l" indent="0" marL="0">
-              <a:lnSpc>
-                <a:spcPts val="1406"/>
-              </a:lnSpc>
-              <a:buNone/>
-            </a:pPr>
-            <a:r>
-              <a:rPr lang="en-US" sz="1125" b="1" dirty="0">
-                <a:solidFill>
-                  <a:srgbClr val="1A1A1A"/>
-                </a:solidFill>
-                <a:latin typeface="Malgun Gothic" pitchFamily="34" charset="0"/>
-                <a:ea typeface="Malgun Gothic" pitchFamily="34" charset="-122"/>
-                <a:cs typeface="Malgun Gothic" pitchFamily="34" charset="-120"/>
-              </a:rPr>
-              <a:t>흩어진 과정을 합쳤다</a:t>
-            </a:r>
-            <a:endParaRPr lang="en-US" sz="1125" dirty="0"/>
-          </a:p>
-        </p:txBody>
-      </p:sp>
-      <p:sp>
-        <p:nvSpPr>
-          <p:cNvPr id="23" name="Text 21"/>
-          <p:cNvSpPr txBox="1"/>
-          <p:nvPr/>
-        </p:nvSpPr>
-        <p:spPr>
-          <a:xfrm>
-            <a:off x="3714750" y="1990725"/>
-            <a:ext cx="600075" cy="154781"/>
-          </a:xfrm>
-          <a:prstGeom prst="rect">
-            <a:avLst/>
-          </a:prstGeom>
-          <a:noFill/>
-          <a:ln/>
-        </p:spPr>
-        <p:txBody>
-          <a:bodyPr wrap="square" lIns="0" tIns="0" rIns="0" bIns="0" rtlCol="0" anchor="t"/>
-          <a:lstStyle/>
-          <a:p>
-            <a:pPr algn="l" indent="0" marL="0">
-              <a:lnSpc>
-                <a:spcPts val="1219"/>
-              </a:lnSpc>
-              <a:buNone/>
-            </a:pPr>
-            <a:r>
-              <a:rPr lang="en-US" sz="975" dirty="0">
-                <a:solidFill>
-                  <a:srgbClr val="6E7780"/>
-                </a:solidFill>
-                <a:latin typeface="Malgun Gothic" pitchFamily="34" charset="0"/>
-                <a:ea typeface="Malgun Gothic" pitchFamily="34" charset="-122"/>
-                <a:cs typeface="Malgun Gothic" pitchFamily="34" charset="-120"/>
-              </a:rPr>
-              <a:t>엑셀 4개</a:t>
-            </a:r>
-            <a:endParaRPr lang="en-US" sz="975" dirty="0"/>
-          </a:p>
-        </p:txBody>
-      </p:sp>
-      <p:sp>
-        <p:nvSpPr>
-          <p:cNvPr id="24" name="Text 22"/>
-          <p:cNvSpPr txBox="1"/>
-          <p:nvPr/>
-        </p:nvSpPr>
-        <p:spPr>
-          <a:xfrm>
-            <a:off x="4371975" y="1990725"/>
-            <a:ext cx="190500" cy="137160"/>
-          </a:xfrm>
-          <a:prstGeom prst="rect">
-            <a:avLst/>
-          </a:prstGeom>
-          <a:noFill/>
-          <a:ln/>
-        </p:spPr>
-        <p:txBody>
-          <a:bodyPr wrap="square" lIns="0" tIns="0" rIns="0" bIns="0" rtlCol="0" anchor="t"/>
-          <a:lstStyle/>
-          <a:p>
-            <a:pPr algn="l" indent="0" marL="0">
-              <a:lnSpc>
-                <a:spcPts val="1080"/>
-              </a:lnSpc>
-              <a:buNone/>
-            </a:pPr>
-            <a:r>
-              <a:rPr lang="en-US" sz="900" dirty="0">
-                <a:solidFill>
-                  <a:srgbClr val="8C8C8C"/>
-                </a:solidFill>
-                <a:latin typeface="Malgun Gothic" pitchFamily="34" charset="0"/>
-                <a:ea typeface="Malgun Gothic" pitchFamily="34" charset="-122"/>
-                <a:cs typeface="Malgun Gothic" pitchFamily="34" charset="-120"/>
-              </a:rPr>
-              <a:t>→</a:t>
-            </a:r>
-            <a:endParaRPr lang="en-US" sz="900" dirty="0"/>
-          </a:p>
-        </p:txBody>
-      </p:sp>
-      <p:sp>
-        <p:nvSpPr>
-          <p:cNvPr id="25" name="Text 23"/>
-          <p:cNvSpPr txBox="1"/>
-          <p:nvPr/>
-        </p:nvSpPr>
-        <p:spPr>
-          <a:xfrm>
-            <a:off x="4600575" y="1971675"/>
-            <a:ext cx="1238250" cy="172641"/>
-          </a:xfrm>
-          <a:prstGeom prst="rect">
-            <a:avLst/>
-          </a:prstGeom>
-          <a:noFill/>
-          <a:ln/>
-        </p:spPr>
-        <p:txBody>
-          <a:bodyPr wrap="square" lIns="0" tIns="0" rIns="0" bIns="0" rtlCol="0" anchor="t"/>
-          <a:lstStyle/>
-          <a:p>
-            <a:pPr algn="l" indent="0" marL="0">
-              <a:lnSpc>
-                <a:spcPts val="1359"/>
-              </a:lnSpc>
-              <a:buNone/>
-            </a:pPr>
-            <a:r>
-              <a:rPr lang="en-US" sz="1088" b="1" dirty="0">
-                <a:solidFill>
-                  <a:srgbClr val="EA002C"/>
-                </a:solidFill>
-                <a:latin typeface="Malgun Gothic" pitchFamily="34" charset="0"/>
-                <a:ea typeface="Malgun Gothic" pitchFamily="34" charset="-122"/>
-                <a:cs typeface="Malgun Gothic" pitchFamily="34" charset="-120"/>
-              </a:rPr>
-              <a:t>도구 1개</a:t>
-            </a:r>
-            <a:endParaRPr lang="en-US" sz="1088" dirty="0"/>
-          </a:p>
-        </p:txBody>
-      </p:sp>
-      <p:sp>
-        <p:nvSpPr>
-          <p:cNvPr id="26" name="Shape 24"/>
-          <p:cNvSpPr/>
-          <p:nvPr/>
-        </p:nvSpPr>
-        <p:spPr>
-          <a:xfrm>
-            <a:off x="5981700" y="1943100"/>
-            <a:ext cx="0" cy="323850"/>
-          </a:xfrm>
-          <a:prstGeom prst="line">
-            <a:avLst/>
-          </a:prstGeom>
-          <a:noFill/>
-          <a:ln w="12700">
-            <a:solidFill>
-              <a:srgbClr val="DEE3E9"/>
-            </a:solidFill>
-            <a:prstDash val="solid"/>
-          </a:ln>
-        </p:spPr>
-      </p:sp>
-      <p:sp>
-        <p:nvSpPr>
-          <p:cNvPr id="27" name="Shape 25"/>
-          <p:cNvSpPr/>
-          <p:nvPr/>
-        </p:nvSpPr>
-        <p:spPr>
-          <a:xfrm>
-            <a:off x="6172200" y="1962150"/>
-            <a:ext cx="38100" cy="228600"/>
+            <a:off x="1047750" y="2133600"/>
+            <a:ext cx="4743450" cy="270034"/>
+          </a:xfrm>
+          <a:prstGeom prst="rect">
+            <a:avLst/>
+          </a:prstGeom>
+          <a:noFill/>
+          <a:ln/>
+        </p:spPr>
+        <p:txBody>
+          <a:bodyPr wrap="square" lIns="0" tIns="0" rIns="0" bIns="0" rtlCol="0" anchor="t"/>
+          <a:lstStyle/>
+          <a:p>
+            <a:pPr algn="l" indent="0" marL="0">
+              <a:lnSpc>
+                <a:spcPts val="1063"/>
+              </a:lnSpc>
+              <a:buNone/>
+            </a:pPr>
+            <a:r>
+              <a:rPr lang="en-US" sz="788" dirty="0">
+                <a:solidFill>
+                  <a:srgbClr val="5A5A5A"/>
+                </a:solidFill>
+                <a:latin typeface="Malgun Gothic" pitchFamily="34" charset="0"/>
+                <a:ea typeface="Malgun Gothic" pitchFamily="34" charset="-122"/>
+                <a:cs typeface="Malgun Gothic" pitchFamily="34" charset="-120"/>
+              </a:rPr>
+              <a:t>파일 사이를 사람이 값으로 잇습니다. 한곳에 넣으면 옮겨 적을 일이 없어집니다.</a:t>
+            </a:r>
+            <a:endParaRPr lang="en-US" sz="788" dirty="0"/>
+          </a:p>
+        </p:txBody>
+      </p:sp>
+      <p:sp>
+        <p:nvSpPr>
+          <p:cNvPr id="23" name="Shape 21"/>
+          <p:cNvSpPr/>
+          <p:nvPr/>
+        </p:nvSpPr>
+        <p:spPr>
+          <a:xfrm>
+            <a:off x="876300" y="2438400"/>
+            <a:ext cx="38100" cy="342900"/>
           </a:xfrm>
           <a:prstGeom prst="rect">
             <a:avLst/>
@@ -27693,85 +27544,265 @@
       </p:sp>
       <p:sp>
         <p:nvSpPr>
+          <p:cNvPr id="24" name="Text 22"/>
+          <p:cNvSpPr txBox="1"/>
+          <p:nvPr/>
+        </p:nvSpPr>
+        <p:spPr>
+          <a:xfrm>
+            <a:off x="1047750" y="2419350"/>
+            <a:ext cx="4743450" cy="154781"/>
+          </a:xfrm>
+          <a:prstGeom prst="rect">
+            <a:avLst/>
+          </a:prstGeom>
+          <a:noFill/>
+          <a:ln/>
+        </p:spPr>
+        <p:txBody>
+          <a:bodyPr wrap="square" lIns="0" tIns="0" rIns="0" bIns="0" rtlCol="0" anchor="t"/>
+          <a:lstStyle/>
+          <a:p>
+            <a:pPr algn="l" indent="0" marL="0">
+              <a:lnSpc>
+                <a:spcPts val="1219"/>
+              </a:lnSpc>
+              <a:buNone/>
+            </a:pPr>
+            <a:r>
+              <a:rPr lang="en-US" sz="975" b="1" dirty="0">
+                <a:solidFill>
+                  <a:srgbClr val="1A1A1A"/>
+                </a:solidFill>
+                <a:latin typeface="Malgun Gothic" pitchFamily="34" charset="0"/>
+                <a:ea typeface="Malgun Gothic" pitchFamily="34" charset="-122"/>
+                <a:cs typeface="Malgun Gothic" pitchFamily="34" charset="-120"/>
+              </a:rPr>
+              <a:t>곡선을 배우는 계산은 수식으로 어렵다</a:t>
+            </a:r>
+            <a:endParaRPr lang="en-US" sz="975" dirty="0"/>
+          </a:p>
+        </p:txBody>
+      </p:sp>
+      <p:sp>
+        <p:nvSpPr>
+          <p:cNvPr id="25" name="Text 23"/>
+          <p:cNvSpPr txBox="1"/>
+          <p:nvPr/>
+        </p:nvSpPr>
+        <p:spPr>
+          <a:xfrm>
+            <a:off x="1047750" y="2590800"/>
+            <a:ext cx="4743450" cy="270034"/>
+          </a:xfrm>
+          <a:prstGeom prst="rect">
+            <a:avLst/>
+          </a:prstGeom>
+          <a:noFill/>
+          <a:ln/>
+        </p:spPr>
+        <p:txBody>
+          <a:bodyPr wrap="square" lIns="0" tIns="0" rIns="0" bIns="0" rtlCol="0" anchor="t"/>
+          <a:lstStyle/>
+          <a:p>
+            <a:pPr algn="l" indent="0" marL="0">
+              <a:lnSpc>
+                <a:spcPts val="1063"/>
+              </a:lnSpc>
+              <a:buNone/>
+            </a:pPr>
+            <a:r>
+              <a:rPr lang="en-US" sz="788" dirty="0">
+                <a:solidFill>
+                  <a:srgbClr val="5A5A5A"/>
+                </a:solidFill>
+                <a:latin typeface="Malgun Gothic" pitchFamily="34" charset="0"/>
+                <a:ea typeface="Malgun Gothic" pitchFamily="34" charset="-122"/>
+                <a:cs typeface="Malgun Gothic" pitchFamily="34" charset="-120"/>
+              </a:rPr>
+              <a:t>온도별 보정 곡선을 찾는 계산은 엑셀 수식으로 짜기 어렵습니다.</a:t>
+            </a:r>
+            <a:endParaRPr lang="en-US" sz="788" dirty="0"/>
+          </a:p>
+        </p:txBody>
+      </p:sp>
+      <p:sp>
+        <p:nvSpPr>
+          <p:cNvPr id="26" name="Shape 24"/>
+          <p:cNvSpPr/>
+          <p:nvPr/>
+        </p:nvSpPr>
+        <p:spPr>
+          <a:xfrm>
+            <a:off x="876300" y="2895600"/>
+            <a:ext cx="38100" cy="342900"/>
+          </a:xfrm>
+          <a:prstGeom prst="rect">
+            <a:avLst/>
+          </a:prstGeom>
+          <a:solidFill>
+            <a:srgbClr val="EA002C"/>
+          </a:solidFill>
+          <a:ln/>
+        </p:spPr>
+      </p:sp>
+      <p:sp>
+        <p:nvSpPr>
+          <p:cNvPr id="27" name="Text 25"/>
+          <p:cNvSpPr txBox="1"/>
+          <p:nvPr/>
+        </p:nvSpPr>
+        <p:spPr>
+          <a:xfrm>
+            <a:off x="1047750" y="2876550"/>
+            <a:ext cx="4743450" cy="154781"/>
+          </a:xfrm>
+          <a:prstGeom prst="rect">
+            <a:avLst/>
+          </a:prstGeom>
+          <a:noFill/>
+          <a:ln/>
+        </p:spPr>
+        <p:txBody>
+          <a:bodyPr wrap="square" lIns="0" tIns="0" rIns="0" bIns="0" rtlCol="0" anchor="t"/>
+          <a:lstStyle/>
+          <a:p>
+            <a:pPr algn="l" indent="0" marL="0">
+              <a:lnSpc>
+                <a:spcPts val="1219"/>
+              </a:lnSpc>
+              <a:buNone/>
+            </a:pPr>
+            <a:r>
+              <a:rPr lang="en-US" sz="975" b="1" dirty="0">
+                <a:solidFill>
+                  <a:srgbClr val="1A1A1A"/>
+                </a:solidFill>
+                <a:latin typeface="Malgun Gothic" pitchFamily="34" charset="0"/>
+                <a:ea typeface="Malgun Gothic" pitchFamily="34" charset="-122"/>
+                <a:cs typeface="Malgun Gothic" pitchFamily="34" charset="-120"/>
+              </a:rPr>
+              <a:t>실적을 쌓아 다시 배우려면 저장소가 필요하다</a:t>
+            </a:r>
+            <a:endParaRPr lang="en-US" sz="975" dirty="0"/>
+          </a:p>
+        </p:txBody>
+      </p:sp>
+      <p:sp>
+        <p:nvSpPr>
           <p:cNvPr id="28" name="Text 26"/>
           <p:cNvSpPr txBox="1"/>
           <p:nvPr/>
         </p:nvSpPr>
         <p:spPr>
           <a:xfrm>
-            <a:off x="6324600" y="1981200"/>
-            <a:ext cx="190500" cy="137160"/>
-          </a:xfrm>
-          <a:prstGeom prst="rect">
-            <a:avLst/>
-          </a:prstGeom>
-          <a:noFill/>
-          <a:ln/>
-        </p:spPr>
-        <p:txBody>
-          <a:bodyPr wrap="square" lIns="0" tIns="0" rIns="0" bIns="0" rtlCol="0" anchor="t"/>
-          <a:lstStyle/>
-          <a:p>
-            <a:pPr algn="l" indent="0" marL="0">
-              <a:lnSpc>
-                <a:spcPts val="1080"/>
-              </a:lnSpc>
-              <a:buNone/>
-            </a:pPr>
-            <a:r>
-              <a:rPr lang="en-US" sz="900" b="1" dirty="0">
+            <a:off x="1047750" y="3048000"/>
+            <a:ext cx="4743450" cy="270034"/>
+          </a:xfrm>
+          <a:prstGeom prst="rect">
+            <a:avLst/>
+          </a:prstGeom>
+          <a:noFill/>
+          <a:ln/>
+        </p:spPr>
+        <p:txBody>
+          <a:bodyPr wrap="square" lIns="0" tIns="0" rIns="0" bIns="0" rtlCol="0" anchor="t"/>
+          <a:lstStyle/>
+          <a:p>
+            <a:pPr algn="l" indent="0" marL="0">
+              <a:lnSpc>
+                <a:spcPts val="1063"/>
+              </a:lnSpc>
+              <a:buNone/>
+            </a:pPr>
+            <a:r>
+              <a:rPr lang="en-US" sz="788" dirty="0">
+                <a:solidFill>
+                  <a:srgbClr val="5A5A5A"/>
+                </a:solidFill>
+                <a:latin typeface="Malgun Gothic" pitchFamily="34" charset="0"/>
+                <a:ea typeface="Malgun Gothic" pitchFamily="34" charset="-122"/>
+                <a:cs typeface="Malgun Gothic" pitchFamily="34" charset="-120"/>
+              </a:rPr>
+              <a:t>회차를 쌓아 두고 늘 때마다 다시 배워야 합니다. 파일로는 관리가 되지 않습니다.</a:t>
+            </a:r>
+            <a:endParaRPr lang="en-US" sz="788" dirty="0"/>
+          </a:p>
+        </p:txBody>
+      </p:sp>
+      <p:sp>
+        <p:nvSpPr>
+          <p:cNvPr id="29" name="Text 27"/>
+          <p:cNvSpPr txBox="1"/>
+          <p:nvPr/>
+        </p:nvSpPr>
+        <p:spPr>
+          <a:xfrm>
+            <a:off x="876300" y="3371850"/>
+            <a:ext cx="4914900" cy="147876"/>
+          </a:xfrm>
+          <a:prstGeom prst="rect">
+            <a:avLst/>
+          </a:prstGeom>
+          <a:noFill/>
+          <a:ln/>
+        </p:spPr>
+        <p:txBody>
+          <a:bodyPr wrap="square" lIns="0" tIns="0" rIns="0" bIns="0" rtlCol="0" anchor="t"/>
+          <a:lstStyle/>
+          <a:p>
+            <a:pPr algn="l" indent="0" marL="0">
+              <a:lnSpc>
+                <a:spcPts val="1164"/>
+              </a:lnSpc>
+              <a:buNone/>
+            </a:pPr>
+            <a:r>
+              <a:rPr lang="en-US" sz="863" dirty="0">
+                <a:solidFill>
+                  <a:srgbClr val="333333"/>
+                </a:solidFill>
+                <a:latin typeface="Malgun Gothic" pitchFamily="34" charset="0"/>
+                <a:ea typeface="Malgun Gothic" pitchFamily="34" charset="-122"/>
+                <a:cs typeface="Malgun Gothic" pitchFamily="34" charset="-120"/>
+              </a:rPr>
+              <a:t>그래서 엑셀을 고치는 대신 </a:t>
+            </a:r>
+            <a:pPr algn="l" indent="0" marL="0">
+              <a:lnSpc>
+                <a:spcPts val="1164"/>
+              </a:lnSpc>
+              <a:buNone/>
+            </a:pPr>
+            <a:r>
+              <a:rPr lang="en-US" sz="863" b="1" dirty="0">
                 <a:solidFill>
                   <a:srgbClr val="EA002C"/>
                 </a:solidFill>
-                <a:latin typeface="Consolas" pitchFamily="34" charset="0"/>
-                <a:ea typeface="Consolas" pitchFamily="34" charset="-122"/>
-                <a:cs typeface="Consolas" pitchFamily="34" charset="-120"/>
-              </a:rPr>
-              <a:t>2</a:t>
-            </a:r>
-            <a:endParaRPr lang="en-US" sz="900" dirty="0"/>
-          </a:p>
-        </p:txBody>
-      </p:sp>
-      <p:sp>
-        <p:nvSpPr>
-          <p:cNvPr id="29" name="Text 27"/>
-          <p:cNvSpPr txBox="1"/>
-          <p:nvPr/>
-        </p:nvSpPr>
-        <p:spPr>
-          <a:xfrm>
-            <a:off x="6553200" y="1962150"/>
-            <a:ext cx="2381250" cy="178594"/>
-          </a:xfrm>
-          <a:prstGeom prst="rect">
-            <a:avLst/>
-          </a:prstGeom>
-          <a:noFill/>
-          <a:ln/>
-        </p:spPr>
-        <p:txBody>
-          <a:bodyPr wrap="square" lIns="0" tIns="0" rIns="0" bIns="0" rtlCol="0" anchor="t"/>
-          <a:lstStyle/>
-          <a:p>
-            <a:pPr algn="l" indent="0" marL="0">
-              <a:lnSpc>
-                <a:spcPts val="1406"/>
-              </a:lnSpc>
-              <a:buNone/>
-            </a:pPr>
-            <a:r>
-              <a:rPr lang="en-US" sz="1125" b="1" dirty="0">
-                <a:solidFill>
-                  <a:srgbClr val="1A1A1A"/>
-                </a:solidFill>
-                <a:latin typeface="Malgun Gothic" pitchFamily="34" charset="0"/>
-                <a:ea typeface="Malgun Gothic" pitchFamily="34" charset="-122"/>
-                <a:cs typeface="Malgun Gothic" pitchFamily="34" charset="-120"/>
-              </a:rPr>
-              <a:t>더하는 값을 온도마다 다르게</a:t>
-            </a:r>
-            <a:endParaRPr lang="en-US" sz="1125" dirty="0"/>
+                <a:latin typeface="Malgun Gothic" pitchFamily="34" charset="0"/>
+                <a:ea typeface="Malgun Gothic" pitchFamily="34" charset="-122"/>
+                <a:cs typeface="Malgun Gothic" pitchFamily="34" charset="-120"/>
+              </a:rPr>
+              <a:t>도구 하나로 합쳤습니다</a:t>
+            </a:r>
+            <a:pPr algn="l" indent="0" marL="0">
+              <a:lnSpc>
+                <a:spcPts val="1164"/>
+              </a:lnSpc>
+              <a:buNone/>
+            </a:pPr>
+            <a:r>
+              <a:rPr lang="en-US" sz="863" dirty="0">
+                <a:solidFill>
+                  <a:srgbClr val="333333"/>
+                </a:solidFill>
+                <a:latin typeface="Malgun Gothic" pitchFamily="34" charset="0"/>
+                <a:ea typeface="Malgun Gothic" pitchFamily="34" charset="-122"/>
+                <a:cs typeface="Malgun Gothic" pitchFamily="34" charset="-120"/>
+              </a:rPr>
+              <a:t>.</a:t>
+            </a:r>
+            <a:endParaRPr lang="en-US" sz="863" dirty="0"/>
           </a:p>
         </p:txBody>
       </p:sp>
@@ -27783,134 +27814,50 @@
         </p:nvSpPr>
         <p:spPr>
           <a:xfrm>
-            <a:off x="9010650" y="1990725"/>
-            <a:ext cx="466725" cy="154781"/>
-          </a:xfrm>
-          <a:prstGeom prst="rect">
-            <a:avLst/>
-          </a:prstGeom>
-          <a:noFill/>
-          <a:ln/>
-        </p:spPr>
-        <p:txBody>
-          <a:bodyPr wrap="square" lIns="0" tIns="0" rIns="0" bIns="0" rtlCol="0" anchor="t"/>
-          <a:lstStyle/>
-          <a:p>
-            <a:pPr algn="l" indent="0" marL="0">
-              <a:lnSpc>
-                <a:spcPts val="1219"/>
-              </a:lnSpc>
-              <a:buNone/>
-            </a:pPr>
-            <a:r>
-              <a:rPr lang="en-US" sz="975" dirty="0">
-                <a:solidFill>
-                  <a:srgbClr val="6E7780"/>
-                </a:solidFill>
-                <a:latin typeface="Malgun Gothic" pitchFamily="34" charset="0"/>
-                <a:ea typeface="Malgun Gothic" pitchFamily="34" charset="-122"/>
-                <a:cs typeface="Malgun Gothic" pitchFamily="34" charset="-120"/>
-              </a:rPr>
-              <a:t>값 1개</a:t>
-            </a:r>
-            <a:endParaRPr lang="en-US" sz="975" dirty="0"/>
-          </a:p>
-        </p:txBody>
-      </p:sp>
-      <p:sp>
-        <p:nvSpPr>
-          <p:cNvPr id="31" name="Text 29"/>
-          <p:cNvSpPr txBox="1"/>
-          <p:nvPr/>
-        </p:nvSpPr>
-        <p:spPr>
-          <a:xfrm>
-            <a:off x="9534525" y="1990725"/>
-            <a:ext cx="190500" cy="137160"/>
-          </a:xfrm>
-          <a:prstGeom prst="rect">
-            <a:avLst/>
-          </a:prstGeom>
-          <a:noFill/>
-          <a:ln/>
-        </p:spPr>
-        <p:txBody>
-          <a:bodyPr wrap="square" lIns="0" tIns="0" rIns="0" bIns="0" rtlCol="0" anchor="t"/>
-          <a:lstStyle/>
-          <a:p>
-            <a:pPr algn="l" indent="0" marL="0">
-              <a:lnSpc>
-                <a:spcPts val="1080"/>
-              </a:lnSpc>
-              <a:buNone/>
-            </a:pPr>
-            <a:r>
-              <a:rPr lang="en-US" sz="900" dirty="0">
-                <a:solidFill>
-                  <a:srgbClr val="8C8C8C"/>
-                </a:solidFill>
-                <a:latin typeface="Malgun Gothic" pitchFamily="34" charset="0"/>
-                <a:ea typeface="Malgun Gothic" pitchFamily="34" charset="-122"/>
-                <a:cs typeface="Malgun Gothic" pitchFamily="34" charset="-120"/>
-              </a:rPr>
-              <a:t>→</a:t>
-            </a:r>
-            <a:endParaRPr lang="en-US" sz="900" dirty="0"/>
-          </a:p>
-        </p:txBody>
-      </p:sp>
-      <p:sp>
-        <p:nvSpPr>
-          <p:cNvPr id="32" name="Text 30"/>
-          <p:cNvSpPr txBox="1"/>
-          <p:nvPr/>
-        </p:nvSpPr>
-        <p:spPr>
-          <a:xfrm>
-            <a:off x="9763125" y="1971675"/>
-            <a:ext cx="1504950" cy="172641"/>
-          </a:xfrm>
-          <a:prstGeom prst="rect">
-            <a:avLst/>
-          </a:prstGeom>
-          <a:noFill/>
-          <a:ln/>
-        </p:spPr>
-        <p:txBody>
-          <a:bodyPr wrap="square" lIns="0" tIns="0" rIns="0" bIns="0" rtlCol="0" anchor="t"/>
-          <a:lstStyle/>
-          <a:p>
-            <a:pPr algn="l" indent="0" marL="0">
-              <a:lnSpc>
-                <a:spcPts val="1359"/>
-              </a:lnSpc>
-              <a:buNone/>
-            </a:pPr>
-            <a:r>
-              <a:rPr lang="en-US" sz="1088" b="1" dirty="0">
-                <a:solidFill>
-                  <a:srgbClr val="EA002C"/>
-                </a:solidFill>
-                <a:latin typeface="Malgun Gothic" pitchFamily="34" charset="0"/>
-                <a:ea typeface="Malgun Gothic" pitchFamily="34" charset="-122"/>
-                <a:cs typeface="Malgun Gothic" pitchFamily="34" charset="-120"/>
-              </a:rPr>
-              <a:t>온도별 곡선</a:t>
-            </a:r>
-            <a:endParaRPr lang="en-US" sz="1088" dirty="0"/>
-          </a:p>
-        </p:txBody>
-      </p:sp>
-      <p:sp>
-        <p:nvSpPr>
-          <p:cNvPr id="33" name="Shape 31"/>
-          <p:cNvSpPr/>
-          <p:nvPr/>
-        </p:nvSpPr>
-        <p:spPr>
-          <a:xfrm>
-            <a:off x="685800" y="2600325"/>
-            <a:ext cx="10820400" cy="3495675"/>
+            <a:off x="876300" y="3524250"/>
+            <a:ext cx="4914900" cy="136208"/>
+          </a:xfrm>
+          <a:prstGeom prst="rect">
+            <a:avLst/>
+          </a:prstGeom>
+          <a:noFill/>
+          <a:ln/>
+        </p:spPr>
+        <p:txBody>
+          <a:bodyPr wrap="square" lIns="0" tIns="0" rIns="0" bIns="0" rtlCol="0" anchor="t"/>
+          <a:lstStyle/>
+          <a:p>
+            <a:pPr algn="l" indent="0" marL="0">
+              <a:lnSpc>
+                <a:spcPts val="1073"/>
+              </a:lnSpc>
+              <a:buNone/>
+            </a:pPr>
+            <a:r>
+              <a:rPr lang="en-US" sz="825" dirty="0">
+                <a:solidFill>
+                  <a:srgbClr val="5A5A5A"/>
+                </a:solidFill>
+                <a:latin typeface="Malgun Gothic" pitchFamily="34" charset="0"/>
+                <a:ea typeface="Malgun Gothic" pitchFamily="34" charset="-122"/>
+                <a:cs typeface="Malgun Gothic" pitchFamily="34" charset="-120"/>
+              </a:rPr>
+              <a:t>제작사 계산식과 RiMS 취득 방식은 기존 엑셀 것을 그대로 옮겼습니다.</a:t>
+            </a:r>
+            <a:endParaRPr lang="en-US" sz="825" dirty="0"/>
+          </a:p>
+        </p:txBody>
+      </p:sp>
+      <p:sp>
+        <p:nvSpPr>
+          <p:cNvPr id="31" name="Shape 29"/>
+          <p:cNvSpPr/>
+          <p:nvPr/>
+        </p:nvSpPr>
+        <p:spPr>
+          <a:xfrm>
+            <a:off x="6134100" y="1724025"/>
+            <a:ext cx="5372100" cy="1933575"/>
           </a:xfrm>
           <a:prstGeom prst="rect">
             <a:avLst/>
@@ -27928,14 +27875,14 @@
       </p:sp>
       <p:sp>
         <p:nvSpPr>
-          <p:cNvPr id="34" name="Shape 32"/>
-          <p:cNvSpPr/>
-          <p:nvPr/>
-        </p:nvSpPr>
-        <p:spPr>
-          <a:xfrm>
-            <a:off x="685800" y="2476500"/>
-            <a:ext cx="2324100" cy="247650"/>
+          <p:cNvPr id="32" name="Shape 30"/>
+          <p:cNvSpPr/>
+          <p:nvPr/>
+        </p:nvSpPr>
+        <p:spPr>
+          <a:xfrm>
+            <a:off x="6134100" y="1600200"/>
+            <a:ext cx="2028825" cy="247650"/>
           </a:xfrm>
           <a:prstGeom prst="rect">
             <a:avLst>
@@ -27950,13 +27897,13 @@
       </p:sp>
       <p:sp>
         <p:nvSpPr>
-          <p:cNvPr id="35" name="Text 33"/>
-          <p:cNvSpPr txBox="1"/>
-          <p:nvPr/>
-        </p:nvSpPr>
-        <p:spPr>
-          <a:xfrm>
-            <a:off x="819150" y="2533650"/>
+          <p:cNvPr id="33" name="Text 31"/>
+          <p:cNvSpPr txBox="1"/>
+          <p:nvPr/>
+        </p:nvSpPr>
+        <p:spPr>
+          <a:xfrm>
+            <a:off x="6267450" y="1657350"/>
             <a:ext cx="152400" cy="142875"/>
           </a:xfrm>
           <a:prstGeom prst="rect">
@@ -27992,14 +27939,3036 @@
       </p:sp>
       <p:sp>
         <p:nvSpPr>
+          <p:cNvPr id="34" name="Text 32"/>
+          <p:cNvSpPr txBox="1"/>
+          <p:nvPr/>
+        </p:nvSpPr>
+        <p:spPr>
+          <a:xfrm>
+            <a:off x="6457950" y="1657350"/>
+            <a:ext cx="1590675" cy="154305"/>
+          </a:xfrm>
+          <a:prstGeom prst="rect">
+            <a:avLst/>
+          </a:prstGeom>
+          <a:noFill/>
+          <a:ln/>
+        </p:spPr>
+        <p:txBody>
+          <a:bodyPr wrap="square" lIns="0" tIns="0" rIns="0" bIns="0" rtlCol="0" anchor="t"/>
+          <a:lstStyle/>
+          <a:p>
+            <a:pPr algn="l" indent="0" marL="0">
+              <a:lnSpc>
+                <a:spcPts val="1215"/>
+              </a:lnSpc>
+              <a:buNone/>
+            </a:pPr>
+            <a:r>
+              <a:rPr lang="en-US" sz="1013" b="1" dirty="0">
+                <a:solidFill>
+                  <a:srgbClr val="FFFFFF"/>
+                </a:solidFill>
+                <a:latin typeface="Malgun Gothic" pitchFamily="34" charset="0"/>
+                <a:ea typeface="Malgun Gothic" pitchFamily="34" charset="-122"/>
+                <a:cs typeface="Malgun Gothic" pitchFamily="34" charset="-120"/>
+              </a:rPr>
+              <a:t>목표 ② 온도별 보정값</a:t>
+            </a:r>
+            <a:endParaRPr lang="en-US" sz="1013" dirty="0"/>
+          </a:p>
+        </p:txBody>
+      </p:sp>
+      <p:sp>
+        <p:nvSpPr>
+          <p:cNvPr id="35" name="Text 33"/>
+          <p:cNvSpPr txBox="1"/>
+          <p:nvPr/>
+        </p:nvSpPr>
+        <p:spPr>
+          <a:xfrm>
+            <a:off x="10344150" y="1790700"/>
+            <a:ext cx="1047750" cy="125730"/>
+          </a:xfrm>
+          <a:prstGeom prst="rect">
+            <a:avLst/>
+          </a:prstGeom>
+          <a:noFill/>
+          <a:ln/>
+        </p:spPr>
+        <p:txBody>
+          <a:bodyPr wrap="square" lIns="0" tIns="0" rIns="0" bIns="0" rtlCol="0" anchor="t"/>
+          <a:lstStyle/>
+          <a:p>
+            <a:pPr algn="r" indent="0" marL="0">
+              <a:lnSpc>
+                <a:spcPts val="990"/>
+              </a:lnSpc>
+              <a:buNone/>
+            </a:pPr>
+            <a:r>
+              <a:rPr lang="en-US" sz="825" dirty="0">
+                <a:solidFill>
+                  <a:srgbClr val="8C8C8C"/>
+                </a:solidFill>
+                <a:latin typeface="Malgun Gothic" pitchFamily="34" charset="0"/>
+                <a:ea typeface="Malgun Gothic" pitchFamily="34" charset="-122"/>
+                <a:cs typeface="Malgun Gothic" pitchFamily="34" charset="-120"/>
+              </a:rPr>
+              <a:t>점 → 곡선 → 표</a:t>
+            </a:r>
+            <a:endParaRPr lang="en-US" sz="825" dirty="0"/>
+          </a:p>
+        </p:txBody>
+      </p:sp>
+      <p:sp>
+        <p:nvSpPr>
           <p:cNvPr id="36" name="Text 34"/>
           <p:cNvSpPr txBox="1"/>
           <p:nvPr/>
         </p:nvSpPr>
         <p:spPr>
           <a:xfrm>
-            <a:off x="1009650" y="2533650"/>
-            <a:ext cx="1885950" cy="154305"/>
+            <a:off x="6324600" y="1962150"/>
+            <a:ext cx="1581150" cy="148828"/>
+          </a:xfrm>
+          <a:prstGeom prst="rect">
+            <a:avLst/>
+          </a:prstGeom>
+          <a:noFill/>
+          <a:ln/>
+        </p:spPr>
+        <p:txBody>
+          <a:bodyPr wrap="square" lIns="0" tIns="0" rIns="0" bIns="0" rtlCol="0" anchor="t"/>
+          <a:lstStyle/>
+          <a:p>
+            <a:pPr algn="l" indent="0" marL="0">
+              <a:lnSpc>
+                <a:spcPts val="1172"/>
+              </a:lnSpc>
+              <a:buNone/>
+            </a:pPr>
+            <a:r>
+              <a:rPr lang="en-US" sz="938" b="1" dirty="0">
+                <a:solidFill>
+                  <a:srgbClr val="1A1A1A"/>
+                </a:solidFill>
+                <a:latin typeface="Malgun Gothic" pitchFamily="34" charset="0"/>
+                <a:ea typeface="Malgun Gothic" pitchFamily="34" charset="-122"/>
+                <a:cs typeface="Malgun Gothic" pitchFamily="34" charset="-120"/>
+              </a:rPr>
+              <a:t>① 점을 모은다</a:t>
+            </a:r>
+            <a:endParaRPr lang="en-US" sz="938" dirty="0"/>
+          </a:p>
+        </p:txBody>
+      </p:sp>
+      <p:sp>
+        <p:nvSpPr>
+          <p:cNvPr id="37" name="Shape 35"/>
+          <p:cNvSpPr/>
+          <p:nvPr/>
+        </p:nvSpPr>
+        <p:spPr>
+          <a:xfrm>
+            <a:off x="6324600" y="2171700"/>
+            <a:ext cx="1428750" cy="476250"/>
+          </a:xfrm>
+          <a:prstGeom prst="rect">
+            <a:avLst/>
+          </a:prstGeom>
+          <a:ln w="12700">
+            <a:solidFill>
+              <a:srgbClr val="DEE3E9"/>
+            </a:solidFill>
+            <a:prstDash val="solid"/>
+          </a:ln>
+        </p:spPr>
+      </p:sp>
+      <p:sp>
+        <p:nvSpPr>
+          <p:cNvPr id="38" name="Shape 36"/>
+          <p:cNvSpPr/>
+          <p:nvPr/>
+        </p:nvSpPr>
+        <p:spPr>
+          <a:xfrm>
+            <a:off x="6381750" y="2489835"/>
+            <a:ext cx="1314450" cy="0"/>
+          </a:xfrm>
+          <a:prstGeom prst="line">
+            <a:avLst/>
+          </a:prstGeom>
+          <a:noFill/>
+          <a:ln w="12700">
+            <a:solidFill>
+              <a:srgbClr val="DEE3E9"/>
+            </a:solidFill>
+            <a:prstDash val="solid"/>
+          </a:ln>
+        </p:spPr>
+      </p:sp>
+      <p:sp>
+        <p:nvSpPr>
+          <p:cNvPr id="39" name="Shape 37"/>
+          <p:cNvSpPr/>
+          <p:nvPr/>
+        </p:nvSpPr>
+        <p:spPr>
+          <a:xfrm>
+            <a:off x="6429375" y="2218520"/>
+            <a:ext cx="24765" cy="24765"/>
+          </a:xfrm>
+          <a:prstGeom prst="ellipse">
+            <a:avLst/>
+          </a:prstGeom>
+          <a:solidFill>
+            <a:srgbClr val="333333"/>
+          </a:solidFill>
+          <a:ln/>
+        </p:spPr>
+      </p:sp>
+      <p:sp>
+        <p:nvSpPr>
+          <p:cNvPr id="40" name="Shape 38"/>
+          <p:cNvSpPr/>
+          <p:nvPr/>
+        </p:nvSpPr>
+        <p:spPr>
+          <a:xfrm>
+            <a:off x="6442234" y="2227981"/>
+            <a:ext cx="24765" cy="24765"/>
+          </a:xfrm>
+          <a:prstGeom prst="ellipse">
+            <a:avLst/>
+          </a:prstGeom>
+          <a:solidFill>
+            <a:srgbClr val="333333"/>
+          </a:solidFill>
+          <a:ln/>
+        </p:spPr>
+      </p:sp>
+      <p:sp>
+        <p:nvSpPr>
+          <p:cNvPr id="41" name="Shape 39"/>
+          <p:cNvSpPr/>
+          <p:nvPr/>
+        </p:nvSpPr>
+        <p:spPr>
+          <a:xfrm>
+            <a:off x="6537960" y="2301771"/>
+            <a:ext cx="24765" cy="24765"/>
+          </a:xfrm>
+          <a:prstGeom prst="ellipse">
+            <a:avLst/>
+          </a:prstGeom>
+          <a:solidFill>
+            <a:srgbClr val="333333"/>
+          </a:solidFill>
+          <a:ln/>
+        </p:spPr>
+      </p:sp>
+      <p:sp>
+        <p:nvSpPr>
+          <p:cNvPr id="42" name="Shape 40"/>
+          <p:cNvSpPr/>
+          <p:nvPr/>
+        </p:nvSpPr>
+        <p:spPr>
+          <a:xfrm>
+            <a:off x="6595110" y="2363178"/>
+            <a:ext cx="24765" cy="24765"/>
+          </a:xfrm>
+          <a:prstGeom prst="ellipse">
+            <a:avLst/>
+          </a:prstGeom>
+          <a:solidFill>
+            <a:srgbClr val="333333"/>
+          </a:solidFill>
+          <a:ln/>
+        </p:spPr>
+      </p:sp>
+      <p:sp>
+        <p:nvSpPr>
+          <p:cNvPr id="43" name="Shape 41"/>
+          <p:cNvSpPr/>
+          <p:nvPr/>
+        </p:nvSpPr>
+        <p:spPr>
+          <a:xfrm>
+            <a:off x="6655118" y="2368759"/>
+            <a:ext cx="24765" cy="24765"/>
+          </a:xfrm>
+          <a:prstGeom prst="ellipse">
+            <a:avLst/>
+          </a:prstGeom>
+          <a:solidFill>
+            <a:srgbClr val="333333"/>
+          </a:solidFill>
+          <a:ln/>
+        </p:spPr>
+      </p:sp>
+      <p:sp>
+        <p:nvSpPr>
+          <p:cNvPr id="44" name="Shape 42"/>
+          <p:cNvSpPr/>
+          <p:nvPr/>
+        </p:nvSpPr>
+        <p:spPr>
+          <a:xfrm>
+            <a:off x="6683693" y="2377900"/>
+            <a:ext cx="24765" cy="24765"/>
+          </a:xfrm>
+          <a:prstGeom prst="ellipse">
+            <a:avLst/>
+          </a:prstGeom>
+          <a:solidFill>
+            <a:srgbClr val="333333"/>
+          </a:solidFill>
+          <a:ln/>
+        </p:spPr>
+      </p:sp>
+      <p:sp>
+        <p:nvSpPr>
+          <p:cNvPr id="45" name="Shape 43"/>
+          <p:cNvSpPr/>
+          <p:nvPr/>
+        </p:nvSpPr>
+        <p:spPr>
+          <a:xfrm>
+            <a:off x="6712268" y="2386381"/>
+            <a:ext cx="24765" cy="24765"/>
+          </a:xfrm>
+          <a:prstGeom prst="ellipse">
+            <a:avLst/>
+          </a:prstGeom>
+          <a:solidFill>
+            <a:srgbClr val="333333"/>
+          </a:solidFill>
+          <a:ln/>
+        </p:spPr>
+      </p:sp>
+      <p:sp>
+        <p:nvSpPr>
+          <p:cNvPr id="46" name="Shape 44"/>
+          <p:cNvSpPr/>
+          <p:nvPr/>
+        </p:nvSpPr>
+        <p:spPr>
+          <a:xfrm>
+            <a:off x="6737985" y="2352657"/>
+            <a:ext cx="24765" cy="24765"/>
+          </a:xfrm>
+          <a:prstGeom prst="ellipse">
+            <a:avLst/>
+          </a:prstGeom>
+          <a:solidFill>
+            <a:srgbClr val="333333"/>
+          </a:solidFill>
+          <a:ln/>
+        </p:spPr>
+      </p:sp>
+      <p:sp>
+        <p:nvSpPr>
+          <p:cNvPr id="47" name="Shape 45"/>
+          <p:cNvSpPr/>
+          <p:nvPr/>
+        </p:nvSpPr>
+        <p:spPr>
+          <a:xfrm>
+            <a:off x="6755130" y="2404303"/>
+            <a:ext cx="24765" cy="24765"/>
+          </a:xfrm>
+          <a:prstGeom prst="ellipse">
+            <a:avLst/>
+          </a:prstGeom>
+          <a:solidFill>
+            <a:srgbClr val="333333"/>
+          </a:solidFill>
+          <a:ln/>
+        </p:spPr>
+      </p:sp>
+      <p:sp>
+        <p:nvSpPr>
+          <p:cNvPr id="48" name="Shape 46"/>
+          <p:cNvSpPr/>
+          <p:nvPr/>
+        </p:nvSpPr>
+        <p:spPr>
+          <a:xfrm>
+            <a:off x="6803708" y="2374560"/>
+            <a:ext cx="24765" cy="24765"/>
+          </a:xfrm>
+          <a:prstGeom prst="ellipse">
+            <a:avLst/>
+          </a:prstGeom>
+          <a:solidFill>
+            <a:srgbClr val="333333"/>
+          </a:solidFill>
+          <a:ln/>
+        </p:spPr>
+      </p:sp>
+      <p:sp>
+        <p:nvSpPr>
+          <p:cNvPr id="49" name="Shape 47"/>
+          <p:cNvSpPr/>
+          <p:nvPr/>
+        </p:nvSpPr>
+        <p:spPr>
+          <a:xfrm>
+            <a:off x="6846570" y="2380760"/>
+            <a:ext cx="24765" cy="24765"/>
+          </a:xfrm>
+          <a:prstGeom prst="ellipse">
+            <a:avLst/>
+          </a:prstGeom>
+          <a:solidFill>
+            <a:srgbClr val="333333"/>
+          </a:solidFill>
+          <a:ln/>
+        </p:spPr>
+      </p:sp>
+      <p:sp>
+        <p:nvSpPr>
+          <p:cNvPr id="50" name="Shape 48"/>
+          <p:cNvSpPr/>
+          <p:nvPr/>
+        </p:nvSpPr>
+        <p:spPr>
+          <a:xfrm>
+            <a:off x="6855143" y="2338955"/>
+            <a:ext cx="24765" cy="24765"/>
+          </a:xfrm>
+          <a:prstGeom prst="ellipse">
+            <a:avLst/>
+          </a:prstGeom>
+          <a:solidFill>
+            <a:srgbClr val="333333"/>
+          </a:solidFill>
+          <a:ln/>
+        </p:spPr>
+      </p:sp>
+      <p:sp>
+        <p:nvSpPr>
+          <p:cNvPr id="51" name="Shape 49"/>
+          <p:cNvSpPr/>
+          <p:nvPr/>
+        </p:nvSpPr>
+        <p:spPr>
+          <a:xfrm>
+            <a:off x="6863715" y="2347856"/>
+            <a:ext cx="24765" cy="24765"/>
+          </a:xfrm>
+          <a:prstGeom prst="ellipse">
+            <a:avLst/>
+          </a:prstGeom>
+          <a:solidFill>
+            <a:srgbClr val="333333"/>
+          </a:solidFill>
+          <a:ln/>
+        </p:spPr>
+      </p:sp>
+      <p:sp>
+        <p:nvSpPr>
+          <p:cNvPr id="52" name="Shape 50"/>
+          <p:cNvSpPr/>
+          <p:nvPr/>
+        </p:nvSpPr>
+        <p:spPr>
+          <a:xfrm>
+            <a:off x="6895148" y="2330414"/>
+            <a:ext cx="24765" cy="24765"/>
+          </a:xfrm>
+          <a:prstGeom prst="ellipse">
+            <a:avLst/>
+          </a:prstGeom>
+          <a:solidFill>
+            <a:srgbClr val="333333"/>
+          </a:solidFill>
+          <a:ln/>
+        </p:spPr>
+      </p:sp>
+      <p:sp>
+        <p:nvSpPr>
+          <p:cNvPr id="53" name="Shape 51"/>
+          <p:cNvSpPr/>
+          <p:nvPr/>
+        </p:nvSpPr>
+        <p:spPr>
+          <a:xfrm>
+            <a:off x="6898005" y="2357217"/>
+            <a:ext cx="24765" cy="24765"/>
+          </a:xfrm>
+          <a:prstGeom prst="ellipse">
+            <a:avLst/>
+          </a:prstGeom>
+          <a:solidFill>
+            <a:srgbClr val="333333"/>
+          </a:solidFill>
+          <a:ln/>
+        </p:spPr>
+      </p:sp>
+      <p:sp>
+        <p:nvSpPr>
+          <p:cNvPr id="54" name="Shape 52"/>
+          <p:cNvSpPr/>
+          <p:nvPr/>
+        </p:nvSpPr>
+        <p:spPr>
+          <a:xfrm>
+            <a:off x="6915150" y="2365679"/>
+            <a:ext cx="24765" cy="24765"/>
+          </a:xfrm>
+          <a:prstGeom prst="ellipse">
+            <a:avLst/>
+          </a:prstGeom>
+          <a:solidFill>
+            <a:srgbClr val="333333"/>
+          </a:solidFill>
+          <a:ln/>
+        </p:spPr>
+      </p:sp>
+      <p:sp>
+        <p:nvSpPr>
+          <p:cNvPr id="55" name="Shape 53"/>
+          <p:cNvSpPr/>
+          <p:nvPr/>
+        </p:nvSpPr>
+        <p:spPr>
+          <a:xfrm>
+            <a:off x="6958013" y="2370119"/>
+            <a:ext cx="24765" cy="24765"/>
+          </a:xfrm>
+          <a:prstGeom prst="ellipse">
+            <a:avLst/>
+          </a:prstGeom>
+          <a:solidFill>
+            <a:srgbClr val="333333"/>
+          </a:solidFill>
+          <a:ln/>
+        </p:spPr>
+      </p:sp>
+      <p:sp>
+        <p:nvSpPr>
+          <p:cNvPr id="56" name="Shape 54"/>
+          <p:cNvSpPr/>
+          <p:nvPr/>
+        </p:nvSpPr>
+        <p:spPr>
+          <a:xfrm>
+            <a:off x="6960870" y="2363378"/>
+            <a:ext cx="24765" cy="24765"/>
+          </a:xfrm>
+          <a:prstGeom prst="ellipse">
+            <a:avLst/>
+          </a:prstGeom>
+          <a:solidFill>
+            <a:srgbClr val="333333"/>
+          </a:solidFill>
+          <a:ln/>
+        </p:spPr>
+      </p:sp>
+      <p:sp>
+        <p:nvSpPr>
+          <p:cNvPr id="57" name="Shape 55"/>
+          <p:cNvSpPr/>
+          <p:nvPr/>
+        </p:nvSpPr>
+        <p:spPr>
+          <a:xfrm>
+            <a:off x="7092315" y="2425066"/>
+            <a:ext cx="24765" cy="24765"/>
+          </a:xfrm>
+          <a:prstGeom prst="ellipse">
+            <a:avLst/>
+          </a:prstGeom>
+          <a:solidFill>
+            <a:srgbClr val="333333"/>
+          </a:solidFill>
+          <a:ln/>
+        </p:spPr>
+      </p:sp>
+      <p:sp>
+        <p:nvSpPr>
+          <p:cNvPr id="58" name="Shape 56"/>
+          <p:cNvSpPr/>
+          <p:nvPr/>
+        </p:nvSpPr>
+        <p:spPr>
+          <a:xfrm>
+            <a:off x="7200900" y="2519638"/>
+            <a:ext cx="24765" cy="24765"/>
+          </a:xfrm>
+          <a:prstGeom prst="ellipse">
+            <a:avLst/>
+          </a:prstGeom>
+          <a:solidFill>
+            <a:srgbClr val="333333"/>
+          </a:solidFill>
+          <a:ln/>
+        </p:spPr>
+      </p:sp>
+      <p:sp>
+        <p:nvSpPr>
+          <p:cNvPr id="59" name="Shape 57"/>
+          <p:cNvSpPr/>
+          <p:nvPr/>
+        </p:nvSpPr>
+        <p:spPr>
+          <a:xfrm>
+            <a:off x="7206615" y="2543141"/>
+            <a:ext cx="24765" cy="24765"/>
+          </a:xfrm>
+          <a:prstGeom prst="ellipse">
+            <a:avLst/>
+          </a:prstGeom>
+          <a:solidFill>
+            <a:srgbClr val="333333"/>
+          </a:solidFill>
+          <a:ln/>
+        </p:spPr>
+      </p:sp>
+      <p:sp>
+        <p:nvSpPr>
+          <p:cNvPr id="60" name="Shape 58"/>
+          <p:cNvSpPr/>
+          <p:nvPr/>
+        </p:nvSpPr>
+        <p:spPr>
+          <a:xfrm>
+            <a:off x="7209473" y="2489034"/>
+            <a:ext cx="24765" cy="24765"/>
+          </a:xfrm>
+          <a:prstGeom prst="ellipse">
+            <a:avLst/>
+          </a:prstGeom>
+          <a:solidFill>
+            <a:srgbClr val="333333"/>
+          </a:solidFill>
+          <a:ln/>
+        </p:spPr>
+      </p:sp>
+      <p:sp>
+        <p:nvSpPr>
+          <p:cNvPr id="61" name="Shape 59"/>
+          <p:cNvSpPr/>
+          <p:nvPr/>
+        </p:nvSpPr>
+        <p:spPr>
+          <a:xfrm>
+            <a:off x="7218045" y="2491454"/>
+            <a:ext cx="24765" cy="24765"/>
+          </a:xfrm>
+          <a:prstGeom prst="ellipse">
+            <a:avLst/>
+          </a:prstGeom>
+          <a:solidFill>
+            <a:srgbClr val="333333"/>
+          </a:solidFill>
+          <a:ln/>
+        </p:spPr>
+      </p:sp>
+      <p:sp>
+        <p:nvSpPr>
+          <p:cNvPr id="62" name="Shape 60"/>
+          <p:cNvSpPr/>
+          <p:nvPr/>
+        </p:nvSpPr>
+        <p:spPr>
+          <a:xfrm>
+            <a:off x="7266623" y="2530899"/>
+            <a:ext cx="24765" cy="24765"/>
+          </a:xfrm>
+          <a:prstGeom prst="ellipse">
+            <a:avLst/>
+          </a:prstGeom>
+          <a:solidFill>
+            <a:srgbClr val="333333"/>
+          </a:solidFill>
+          <a:ln/>
+        </p:spPr>
+      </p:sp>
+      <p:sp>
+        <p:nvSpPr>
+          <p:cNvPr id="63" name="Shape 61"/>
+          <p:cNvSpPr/>
+          <p:nvPr/>
+        </p:nvSpPr>
+        <p:spPr>
+          <a:xfrm>
+            <a:off x="7303770" y="2574565"/>
+            <a:ext cx="24765" cy="24765"/>
+          </a:xfrm>
+          <a:prstGeom prst="ellipse">
+            <a:avLst/>
+          </a:prstGeom>
+          <a:solidFill>
+            <a:srgbClr val="333333"/>
+          </a:solidFill>
+          <a:ln/>
+        </p:spPr>
+      </p:sp>
+      <p:sp>
+        <p:nvSpPr>
+          <p:cNvPr id="64" name="Shape 62"/>
+          <p:cNvSpPr/>
+          <p:nvPr/>
+        </p:nvSpPr>
+        <p:spPr>
+          <a:xfrm>
+            <a:off x="7346633" y="2509557"/>
+            <a:ext cx="24765" cy="24765"/>
+          </a:xfrm>
+          <a:prstGeom prst="ellipse">
+            <a:avLst/>
+          </a:prstGeom>
+          <a:solidFill>
+            <a:srgbClr val="333333"/>
+          </a:solidFill>
+          <a:ln/>
+        </p:spPr>
+      </p:sp>
+      <p:sp>
+        <p:nvSpPr>
+          <p:cNvPr id="65" name="Shape 63"/>
+          <p:cNvSpPr/>
+          <p:nvPr/>
+        </p:nvSpPr>
+        <p:spPr>
+          <a:xfrm>
+            <a:off x="7346633" y="2487034"/>
+            <a:ext cx="24765" cy="24765"/>
+          </a:xfrm>
+          <a:prstGeom prst="ellipse">
+            <a:avLst/>
+          </a:prstGeom>
+          <a:solidFill>
+            <a:srgbClr val="333333"/>
+          </a:solidFill>
+          <a:ln/>
+        </p:spPr>
+      </p:sp>
+      <p:sp>
+        <p:nvSpPr>
+          <p:cNvPr id="66" name="Shape 64"/>
+          <p:cNvSpPr/>
+          <p:nvPr/>
+        </p:nvSpPr>
+        <p:spPr>
+          <a:xfrm>
+            <a:off x="7360920" y="2546441"/>
+            <a:ext cx="24765" cy="24765"/>
+          </a:xfrm>
+          <a:prstGeom prst="ellipse">
+            <a:avLst/>
+          </a:prstGeom>
+          <a:solidFill>
+            <a:srgbClr val="333333"/>
+          </a:solidFill>
+          <a:ln/>
+        </p:spPr>
+      </p:sp>
+      <p:sp>
+        <p:nvSpPr>
+          <p:cNvPr id="67" name="Shape 65"/>
+          <p:cNvSpPr/>
+          <p:nvPr/>
+        </p:nvSpPr>
+        <p:spPr>
+          <a:xfrm>
+            <a:off x="7366635" y="2545381"/>
+            <a:ext cx="24765" cy="24765"/>
+          </a:xfrm>
+          <a:prstGeom prst="ellipse">
+            <a:avLst/>
+          </a:prstGeom>
+          <a:solidFill>
+            <a:srgbClr val="333333"/>
+          </a:solidFill>
+          <a:ln/>
+        </p:spPr>
+      </p:sp>
+      <p:sp>
+        <p:nvSpPr>
+          <p:cNvPr id="68" name="Shape 66"/>
+          <p:cNvSpPr/>
+          <p:nvPr/>
+        </p:nvSpPr>
+        <p:spPr>
+          <a:xfrm>
+            <a:off x="7389495" y="2494915"/>
+            <a:ext cx="24765" cy="24765"/>
+          </a:xfrm>
+          <a:prstGeom prst="ellipse">
+            <a:avLst/>
+          </a:prstGeom>
+          <a:solidFill>
+            <a:srgbClr val="333333"/>
+          </a:solidFill>
+          <a:ln/>
+        </p:spPr>
+      </p:sp>
+      <p:sp>
+        <p:nvSpPr>
+          <p:cNvPr id="69" name="Shape 67"/>
+          <p:cNvSpPr/>
+          <p:nvPr/>
+        </p:nvSpPr>
+        <p:spPr>
+          <a:xfrm>
+            <a:off x="7409498" y="2489854"/>
+            <a:ext cx="24765" cy="24765"/>
+          </a:xfrm>
+          <a:prstGeom prst="ellipse">
+            <a:avLst/>
+          </a:prstGeom>
+          <a:solidFill>
+            <a:srgbClr val="333333"/>
+          </a:solidFill>
+          <a:ln/>
+        </p:spPr>
+      </p:sp>
+      <p:sp>
+        <p:nvSpPr>
+          <p:cNvPr id="70" name="Shape 68"/>
+          <p:cNvSpPr/>
+          <p:nvPr/>
+        </p:nvSpPr>
+        <p:spPr>
+          <a:xfrm>
+            <a:off x="7418070" y="2528279"/>
+            <a:ext cx="24765" cy="24765"/>
+          </a:xfrm>
+          <a:prstGeom prst="ellipse">
+            <a:avLst/>
+          </a:prstGeom>
+          <a:solidFill>
+            <a:srgbClr val="333333"/>
+          </a:solidFill>
+          <a:ln/>
+        </p:spPr>
+      </p:sp>
+      <p:sp>
+        <p:nvSpPr>
+          <p:cNvPr id="71" name="Shape 69"/>
+          <p:cNvSpPr/>
+          <p:nvPr/>
+        </p:nvSpPr>
+        <p:spPr>
+          <a:xfrm>
+            <a:off x="7420928" y="2435227"/>
+            <a:ext cx="24765" cy="24765"/>
+          </a:xfrm>
+          <a:prstGeom prst="ellipse">
+            <a:avLst/>
+          </a:prstGeom>
+          <a:solidFill>
+            <a:srgbClr val="333333"/>
+          </a:solidFill>
+          <a:ln/>
+        </p:spPr>
+      </p:sp>
+      <p:sp>
+        <p:nvSpPr>
+          <p:cNvPr id="72" name="Shape 70"/>
+          <p:cNvSpPr/>
+          <p:nvPr/>
+        </p:nvSpPr>
+        <p:spPr>
+          <a:xfrm>
+            <a:off x="7420928" y="2449629"/>
+            <a:ext cx="24765" cy="24765"/>
+          </a:xfrm>
+          <a:prstGeom prst="ellipse">
+            <a:avLst/>
+          </a:prstGeom>
+          <a:solidFill>
+            <a:srgbClr val="333333"/>
+          </a:solidFill>
+          <a:ln/>
+        </p:spPr>
+      </p:sp>
+      <p:sp>
+        <p:nvSpPr>
+          <p:cNvPr id="73" name="Shape 71"/>
+          <p:cNvSpPr/>
+          <p:nvPr/>
+        </p:nvSpPr>
+        <p:spPr>
+          <a:xfrm>
+            <a:off x="7420928" y="2508116"/>
+            <a:ext cx="24765" cy="24765"/>
+          </a:xfrm>
+          <a:prstGeom prst="ellipse">
+            <a:avLst/>
+          </a:prstGeom>
+          <a:solidFill>
+            <a:srgbClr val="333333"/>
+          </a:solidFill>
+          <a:ln/>
+        </p:spPr>
+      </p:sp>
+      <p:sp>
+        <p:nvSpPr>
+          <p:cNvPr id="74" name="Shape 72"/>
+          <p:cNvSpPr/>
+          <p:nvPr/>
+        </p:nvSpPr>
+        <p:spPr>
+          <a:xfrm>
+            <a:off x="7443788" y="2463891"/>
+            <a:ext cx="24765" cy="24765"/>
+          </a:xfrm>
+          <a:prstGeom prst="ellipse">
+            <a:avLst/>
+          </a:prstGeom>
+          <a:solidFill>
+            <a:srgbClr val="333333"/>
+          </a:solidFill>
+          <a:ln/>
+        </p:spPr>
+      </p:sp>
+      <p:sp>
+        <p:nvSpPr>
+          <p:cNvPr id="75" name="Shape 73"/>
+          <p:cNvSpPr/>
+          <p:nvPr/>
+        </p:nvSpPr>
+        <p:spPr>
+          <a:xfrm>
+            <a:off x="7449503" y="2523998"/>
+            <a:ext cx="24765" cy="24765"/>
+          </a:xfrm>
+          <a:prstGeom prst="ellipse">
+            <a:avLst/>
+          </a:prstGeom>
+          <a:solidFill>
+            <a:srgbClr val="333333"/>
+          </a:solidFill>
+          <a:ln/>
+        </p:spPr>
+      </p:sp>
+      <p:sp>
+        <p:nvSpPr>
+          <p:cNvPr id="76" name="Shape 74"/>
+          <p:cNvSpPr/>
+          <p:nvPr/>
+        </p:nvSpPr>
+        <p:spPr>
+          <a:xfrm>
+            <a:off x="7472363" y="2462671"/>
+            <a:ext cx="24765" cy="24765"/>
+          </a:xfrm>
+          <a:prstGeom prst="ellipse">
+            <a:avLst/>
+          </a:prstGeom>
+          <a:solidFill>
+            <a:srgbClr val="333333"/>
+          </a:solidFill>
+          <a:ln/>
+        </p:spPr>
+      </p:sp>
+      <p:sp>
+        <p:nvSpPr>
+          <p:cNvPr id="77" name="Shape 75"/>
+          <p:cNvSpPr/>
+          <p:nvPr/>
+        </p:nvSpPr>
+        <p:spPr>
+          <a:xfrm>
+            <a:off x="7515225" y="2435447"/>
+            <a:ext cx="24765" cy="24765"/>
+          </a:xfrm>
+          <a:prstGeom prst="ellipse">
+            <a:avLst/>
+          </a:prstGeom>
+          <a:solidFill>
+            <a:srgbClr val="333333"/>
+          </a:solidFill>
+          <a:ln/>
+        </p:spPr>
+      </p:sp>
+      <p:sp>
+        <p:nvSpPr>
+          <p:cNvPr id="78" name="Shape 76"/>
+          <p:cNvSpPr/>
+          <p:nvPr/>
+        </p:nvSpPr>
+        <p:spPr>
+          <a:xfrm>
+            <a:off x="7566660" y="2448969"/>
+            <a:ext cx="24765" cy="24765"/>
+          </a:xfrm>
+          <a:prstGeom prst="ellipse">
+            <a:avLst/>
+          </a:prstGeom>
+          <a:solidFill>
+            <a:srgbClr val="333333"/>
+          </a:solidFill>
+          <a:ln/>
+        </p:spPr>
+      </p:sp>
+      <p:sp>
+        <p:nvSpPr>
+          <p:cNvPr id="79" name="Text 77"/>
+          <p:cNvSpPr txBox="1"/>
+          <p:nvPr/>
+        </p:nvSpPr>
+        <p:spPr>
+          <a:xfrm>
+            <a:off x="6324600" y="2705100"/>
+            <a:ext cx="1581150" cy="405051"/>
+          </a:xfrm>
+          <a:prstGeom prst="rect">
+            <a:avLst/>
+          </a:prstGeom>
+          <a:noFill/>
+          <a:ln/>
+        </p:spPr>
+        <p:txBody>
+          <a:bodyPr wrap="square" lIns="0" tIns="0" rIns="0" bIns="0" rtlCol="0" anchor="t"/>
+          <a:lstStyle/>
+          <a:p>
+            <a:pPr algn="l" indent="0" marL="0">
+              <a:lnSpc>
+                <a:spcPts val="1063"/>
+              </a:lnSpc>
+              <a:buNone/>
+            </a:pPr>
+            <a:r>
+              <a:rPr lang="en-US" sz="788" dirty="0">
+                <a:solidFill>
+                  <a:srgbClr val="5A5A5A"/>
+                </a:solidFill>
+                <a:latin typeface="Malgun Gothic" pitchFamily="34" charset="0"/>
+                <a:ea typeface="Malgun Gothic" pitchFamily="34" charset="-122"/>
+                <a:cs typeface="Malgun Gothic" pitchFamily="34" charset="-120"/>
+              </a:rPr>
+              <a:t>시험마다 점 하나가 생깁니다. 가로는 그날 외기온도, 세로는 실제와 계산값의 차이입니다.</a:t>
+            </a:r>
+            <a:endParaRPr lang="en-US" sz="788" dirty="0"/>
+          </a:p>
+        </p:txBody>
+      </p:sp>
+      <p:sp>
+        <p:nvSpPr>
+          <p:cNvPr id="80" name="Text 78"/>
+          <p:cNvSpPr txBox="1"/>
+          <p:nvPr/>
+        </p:nvSpPr>
+        <p:spPr>
+          <a:xfrm>
+            <a:off x="7791450" y="2343150"/>
+            <a:ext cx="228600" cy="148590"/>
+          </a:xfrm>
+          <a:prstGeom prst="rect">
+            <a:avLst/>
+          </a:prstGeom>
+          <a:noFill/>
+          <a:ln/>
+        </p:spPr>
+        <p:txBody>
+          <a:bodyPr wrap="square" lIns="0" tIns="0" rIns="0" bIns="0" rtlCol="0" anchor="t"/>
+          <a:lstStyle/>
+          <a:p>
+            <a:pPr algn="ctr" indent="0" marL="0">
+              <a:lnSpc>
+                <a:spcPts val="1170"/>
+              </a:lnSpc>
+              <a:buNone/>
+            </a:pPr>
+            <a:r>
+              <a:rPr lang="en-US" sz="975" dirty="0">
+                <a:solidFill>
+                  <a:srgbClr val="8C8C8C"/>
+                </a:solidFill>
+                <a:latin typeface="Malgun Gothic" pitchFamily="34" charset="0"/>
+                <a:ea typeface="Malgun Gothic" pitchFamily="34" charset="-122"/>
+                <a:cs typeface="Malgun Gothic" pitchFamily="34" charset="-120"/>
+              </a:rPr>
+              <a:t>→</a:t>
+            </a:r>
+            <a:endParaRPr lang="en-US" sz="975" dirty="0"/>
+          </a:p>
+        </p:txBody>
+      </p:sp>
+      <p:sp>
+        <p:nvSpPr>
+          <p:cNvPr id="81" name="Text 79"/>
+          <p:cNvSpPr txBox="1"/>
+          <p:nvPr/>
+        </p:nvSpPr>
+        <p:spPr>
+          <a:xfrm>
+            <a:off x="8058150" y="1962150"/>
+            <a:ext cx="1581150" cy="148828"/>
+          </a:xfrm>
+          <a:prstGeom prst="rect">
+            <a:avLst/>
+          </a:prstGeom>
+          <a:noFill/>
+          <a:ln/>
+        </p:spPr>
+        <p:txBody>
+          <a:bodyPr wrap="square" lIns="0" tIns="0" rIns="0" bIns="0" rtlCol="0" anchor="t"/>
+          <a:lstStyle/>
+          <a:p>
+            <a:pPr algn="l" indent="0" marL="0">
+              <a:lnSpc>
+                <a:spcPts val="1172"/>
+              </a:lnSpc>
+              <a:buNone/>
+            </a:pPr>
+            <a:r>
+              <a:rPr lang="en-US" sz="938" b="1" dirty="0">
+                <a:solidFill>
+                  <a:srgbClr val="1A1A1A"/>
+                </a:solidFill>
+                <a:latin typeface="Malgun Gothic" pitchFamily="34" charset="0"/>
+                <a:ea typeface="Malgun Gothic" pitchFamily="34" charset="-122"/>
+                <a:cs typeface="Malgun Gothic" pitchFamily="34" charset="-120"/>
+              </a:rPr>
+              <a:t>② 곡선을 배운다</a:t>
+            </a:r>
+            <a:endParaRPr lang="en-US" sz="938" dirty="0"/>
+          </a:p>
+        </p:txBody>
+      </p:sp>
+      <p:sp>
+        <p:nvSpPr>
+          <p:cNvPr id="82" name="Shape 80"/>
+          <p:cNvSpPr/>
+          <p:nvPr/>
+        </p:nvSpPr>
+        <p:spPr>
+          <a:xfrm>
+            <a:off x="8058150" y="2171700"/>
+            <a:ext cx="1428750" cy="476250"/>
+          </a:xfrm>
+          <a:prstGeom prst="rect">
+            <a:avLst/>
+          </a:prstGeom>
+          <a:ln w="12700">
+            <a:solidFill>
+              <a:srgbClr val="DEE3E9"/>
+            </a:solidFill>
+            <a:prstDash val="solid"/>
+          </a:ln>
+        </p:spPr>
+      </p:sp>
+      <p:sp>
+        <p:nvSpPr>
+          <p:cNvPr id="83" name="Shape 81"/>
+          <p:cNvSpPr/>
+          <p:nvPr/>
+        </p:nvSpPr>
+        <p:spPr>
+          <a:xfrm>
+            <a:off x="8115300" y="2489835"/>
+            <a:ext cx="1314450" cy="0"/>
+          </a:xfrm>
+          <a:prstGeom prst="line">
+            <a:avLst/>
+          </a:prstGeom>
+          <a:noFill/>
+          <a:ln w="12700">
+            <a:solidFill>
+              <a:srgbClr val="DEE3E9"/>
+            </a:solidFill>
+            <a:prstDash val="solid"/>
+          </a:ln>
+        </p:spPr>
+      </p:sp>
+      <p:sp>
+        <p:nvSpPr>
+          <p:cNvPr id="84" name="Shape 82"/>
+          <p:cNvSpPr/>
+          <p:nvPr/>
+        </p:nvSpPr>
+        <p:spPr>
+          <a:xfrm>
+            <a:off x="8229600" y="2340216"/>
+            <a:ext cx="57150" cy="1000"/>
+          </a:xfrm>
+          <a:prstGeom prst="line">
+            <a:avLst/>
+          </a:prstGeom>
+          <a:noFill/>
+          <a:ln w="22860">
+            <a:solidFill>
+              <a:srgbClr val="EA002C"/>
+            </a:solidFill>
+            <a:prstDash val="solid"/>
+          </a:ln>
+        </p:spPr>
+      </p:sp>
+      <p:sp>
+        <p:nvSpPr>
+          <p:cNvPr id="85" name="Shape 83"/>
+          <p:cNvSpPr/>
+          <p:nvPr/>
+        </p:nvSpPr>
+        <p:spPr>
+          <a:xfrm>
+            <a:off x="8286750" y="2341216"/>
+            <a:ext cx="57150" cy="22203"/>
+          </a:xfrm>
+          <a:prstGeom prst="line">
+            <a:avLst/>
+          </a:prstGeom>
+          <a:noFill/>
+          <a:ln w="22860">
+            <a:solidFill>
+              <a:srgbClr val="EA002C"/>
+            </a:solidFill>
+            <a:prstDash val="solid"/>
+          </a:ln>
+        </p:spPr>
+      </p:sp>
+      <p:sp>
+        <p:nvSpPr>
+          <p:cNvPr id="86" name="Shape 84"/>
+          <p:cNvSpPr/>
+          <p:nvPr/>
+        </p:nvSpPr>
+        <p:spPr>
+          <a:xfrm>
+            <a:off x="8343900" y="2363419"/>
+            <a:ext cx="57150" cy="17802"/>
+          </a:xfrm>
+          <a:prstGeom prst="line">
+            <a:avLst/>
+          </a:prstGeom>
+          <a:noFill/>
+          <a:ln w="22860">
+            <a:solidFill>
+              <a:srgbClr val="EA002C"/>
+            </a:solidFill>
+            <a:prstDash val="solid"/>
+          </a:ln>
+        </p:spPr>
+      </p:sp>
+      <p:sp>
+        <p:nvSpPr>
+          <p:cNvPr id="87" name="Shape 85"/>
+          <p:cNvSpPr/>
+          <p:nvPr/>
+        </p:nvSpPr>
+        <p:spPr>
+          <a:xfrm>
+            <a:off x="8401050" y="2381221"/>
+            <a:ext cx="57150" cy="8001"/>
+          </a:xfrm>
+          <a:prstGeom prst="line">
+            <a:avLst/>
+          </a:prstGeom>
+          <a:noFill/>
+          <a:ln w="22860">
+            <a:solidFill>
+              <a:srgbClr val="EA002C"/>
+            </a:solidFill>
+            <a:prstDash val="solid"/>
+          </a:ln>
+        </p:spPr>
+      </p:sp>
+      <p:sp>
+        <p:nvSpPr>
+          <p:cNvPr id="88" name="Shape 86"/>
+          <p:cNvSpPr/>
+          <p:nvPr/>
+        </p:nvSpPr>
+        <p:spPr>
+          <a:xfrm flipV="1">
+            <a:off x="8458200" y="2386422"/>
+            <a:ext cx="57150" cy="2800"/>
+          </a:xfrm>
+          <a:prstGeom prst="line">
+            <a:avLst/>
+          </a:prstGeom>
+          <a:noFill/>
+          <a:ln w="22860">
+            <a:solidFill>
+              <a:srgbClr val="EA002C"/>
+            </a:solidFill>
+            <a:prstDash val="solid"/>
+          </a:ln>
+        </p:spPr>
+      </p:sp>
+      <p:sp>
+        <p:nvSpPr>
+          <p:cNvPr id="89" name="Shape 87"/>
+          <p:cNvSpPr/>
+          <p:nvPr/>
+        </p:nvSpPr>
+        <p:spPr>
+          <a:xfrm flipV="1">
+            <a:off x="8515350" y="2377021"/>
+            <a:ext cx="57150" cy="9401"/>
+          </a:xfrm>
+          <a:prstGeom prst="line">
+            <a:avLst/>
+          </a:prstGeom>
+          <a:noFill/>
+          <a:ln w="22860">
+            <a:solidFill>
+              <a:srgbClr val="EA002C"/>
+            </a:solidFill>
+            <a:prstDash val="solid"/>
+          </a:ln>
+        </p:spPr>
+      </p:sp>
+      <p:sp>
+        <p:nvSpPr>
+          <p:cNvPr id="90" name="Shape 88"/>
+          <p:cNvSpPr/>
+          <p:nvPr/>
+        </p:nvSpPr>
+        <p:spPr>
+          <a:xfrm flipV="1">
+            <a:off x="8572500" y="2369220"/>
+            <a:ext cx="57150" cy="7801"/>
+          </a:xfrm>
+          <a:prstGeom prst="line">
+            <a:avLst/>
+          </a:prstGeom>
+          <a:noFill/>
+          <a:ln w="22860">
+            <a:solidFill>
+              <a:srgbClr val="EA002C"/>
+            </a:solidFill>
+            <a:prstDash val="solid"/>
+          </a:ln>
+        </p:spPr>
+      </p:sp>
+      <p:sp>
+        <p:nvSpPr>
+          <p:cNvPr id="91" name="Shape 89"/>
+          <p:cNvSpPr/>
+          <p:nvPr/>
+        </p:nvSpPr>
+        <p:spPr>
+          <a:xfrm>
+            <a:off x="8629650" y="2369220"/>
+            <a:ext cx="57150" cy="2200"/>
+          </a:xfrm>
+          <a:prstGeom prst="line">
+            <a:avLst/>
+          </a:prstGeom>
+          <a:noFill/>
+          <a:ln w="22860">
+            <a:solidFill>
+              <a:srgbClr val="EA002C"/>
+            </a:solidFill>
+            <a:prstDash val="solid"/>
+          </a:ln>
+        </p:spPr>
+      </p:sp>
+      <p:sp>
+        <p:nvSpPr>
+          <p:cNvPr id="92" name="Shape 90"/>
+          <p:cNvSpPr/>
+          <p:nvPr/>
+        </p:nvSpPr>
+        <p:spPr>
+          <a:xfrm>
+            <a:off x="8686800" y="2371420"/>
+            <a:ext cx="57150" cy="17402"/>
+          </a:xfrm>
+          <a:prstGeom prst="line">
+            <a:avLst/>
+          </a:prstGeom>
+          <a:noFill/>
+          <a:ln w="22860">
+            <a:solidFill>
+              <a:srgbClr val="EA002C"/>
+            </a:solidFill>
+            <a:prstDash val="solid"/>
+          </a:ln>
+        </p:spPr>
+      </p:sp>
+      <p:sp>
+        <p:nvSpPr>
+          <p:cNvPr id="93" name="Shape 91"/>
+          <p:cNvSpPr/>
+          <p:nvPr/>
+        </p:nvSpPr>
+        <p:spPr>
+          <a:xfrm>
+            <a:off x="8743950" y="2388822"/>
+            <a:ext cx="57150" cy="32404"/>
+          </a:xfrm>
+          <a:prstGeom prst="line">
+            <a:avLst/>
+          </a:prstGeom>
+          <a:noFill/>
+          <a:ln w="22860">
+            <a:solidFill>
+              <a:srgbClr val="EA002C"/>
+            </a:solidFill>
+            <a:prstDash val="solid"/>
+          </a:ln>
+        </p:spPr>
+      </p:sp>
+      <p:sp>
+        <p:nvSpPr>
+          <p:cNvPr id="94" name="Shape 92"/>
+          <p:cNvSpPr/>
+          <p:nvPr/>
+        </p:nvSpPr>
+        <p:spPr>
+          <a:xfrm>
+            <a:off x="8801100" y="2421226"/>
+            <a:ext cx="57150" cy="41405"/>
+          </a:xfrm>
+          <a:prstGeom prst="line">
+            <a:avLst/>
+          </a:prstGeom>
+          <a:noFill/>
+          <a:ln w="22860">
+            <a:solidFill>
+              <a:srgbClr val="EA002C"/>
+            </a:solidFill>
+            <a:prstDash val="solid"/>
+          </a:ln>
+        </p:spPr>
+      </p:sp>
+      <p:sp>
+        <p:nvSpPr>
+          <p:cNvPr id="95" name="Shape 93"/>
+          <p:cNvSpPr/>
+          <p:nvPr/>
+        </p:nvSpPr>
+        <p:spPr>
+          <a:xfrm>
+            <a:off x="8858250" y="2462632"/>
+            <a:ext cx="57150" cy="40205"/>
+          </a:xfrm>
+          <a:prstGeom prst="line">
+            <a:avLst/>
+          </a:prstGeom>
+          <a:noFill/>
+          <a:ln w="22860">
+            <a:solidFill>
+              <a:srgbClr val="EA002C"/>
+            </a:solidFill>
+            <a:prstDash val="solid"/>
+          </a:ln>
+        </p:spPr>
+      </p:sp>
+      <p:sp>
+        <p:nvSpPr>
+          <p:cNvPr id="96" name="Shape 94"/>
+          <p:cNvSpPr/>
+          <p:nvPr/>
+        </p:nvSpPr>
+        <p:spPr>
+          <a:xfrm>
+            <a:off x="8915400" y="2502837"/>
+            <a:ext cx="57150" cy="29004"/>
+          </a:xfrm>
+          <a:prstGeom prst="line">
+            <a:avLst/>
+          </a:prstGeom>
+          <a:noFill/>
+          <a:ln w="22860">
+            <a:solidFill>
+              <a:srgbClr val="EA002C"/>
+            </a:solidFill>
+            <a:prstDash val="solid"/>
+          </a:ln>
+        </p:spPr>
+      </p:sp>
+      <p:sp>
+        <p:nvSpPr>
+          <p:cNvPr id="97" name="Shape 95"/>
+          <p:cNvSpPr/>
+          <p:nvPr/>
+        </p:nvSpPr>
+        <p:spPr>
+          <a:xfrm>
+            <a:off x="8972550" y="2531840"/>
+            <a:ext cx="57150" cy="11201"/>
+          </a:xfrm>
+          <a:prstGeom prst="line">
+            <a:avLst/>
+          </a:prstGeom>
+          <a:noFill/>
+          <a:ln w="22860">
+            <a:solidFill>
+              <a:srgbClr val="EA002C"/>
+            </a:solidFill>
+            <a:prstDash val="solid"/>
+          </a:ln>
+        </p:spPr>
+      </p:sp>
+      <p:sp>
+        <p:nvSpPr>
+          <p:cNvPr id="98" name="Shape 96"/>
+          <p:cNvSpPr/>
+          <p:nvPr/>
+        </p:nvSpPr>
+        <p:spPr>
+          <a:xfrm flipV="1">
+            <a:off x="9029700" y="2535641"/>
+            <a:ext cx="57150" cy="7401"/>
+          </a:xfrm>
+          <a:prstGeom prst="line">
+            <a:avLst/>
+          </a:prstGeom>
+          <a:noFill/>
+          <a:ln w="22860">
+            <a:solidFill>
+              <a:srgbClr val="EA002C"/>
+            </a:solidFill>
+            <a:prstDash val="solid"/>
+          </a:ln>
+        </p:spPr>
+      </p:sp>
+      <p:sp>
+        <p:nvSpPr>
+          <p:cNvPr id="99" name="Shape 97"/>
+          <p:cNvSpPr/>
+          <p:nvPr/>
+        </p:nvSpPr>
+        <p:spPr>
+          <a:xfrm flipV="1">
+            <a:off x="9086850" y="2514638"/>
+            <a:ext cx="57150" cy="21003"/>
+          </a:xfrm>
+          <a:prstGeom prst="line">
+            <a:avLst/>
+          </a:prstGeom>
+          <a:noFill/>
+          <a:ln w="22860">
+            <a:solidFill>
+              <a:srgbClr val="EA002C"/>
+            </a:solidFill>
+            <a:prstDash val="solid"/>
+          </a:ln>
+        </p:spPr>
+      </p:sp>
+      <p:sp>
+        <p:nvSpPr>
+          <p:cNvPr id="100" name="Shape 98"/>
+          <p:cNvSpPr/>
+          <p:nvPr/>
+        </p:nvSpPr>
+        <p:spPr>
+          <a:xfrm flipV="1">
+            <a:off x="9144000" y="2487635"/>
+            <a:ext cx="57150" cy="27003"/>
+          </a:xfrm>
+          <a:prstGeom prst="line">
+            <a:avLst/>
+          </a:prstGeom>
+          <a:noFill/>
+          <a:ln w="22860">
+            <a:solidFill>
+              <a:srgbClr val="EA002C"/>
+            </a:solidFill>
+            <a:prstDash val="solid"/>
+          </a:ln>
+        </p:spPr>
+      </p:sp>
+      <p:sp>
+        <p:nvSpPr>
+          <p:cNvPr id="101" name="Shape 99"/>
+          <p:cNvSpPr/>
+          <p:nvPr/>
+        </p:nvSpPr>
+        <p:spPr>
+          <a:xfrm flipV="1">
+            <a:off x="9201150" y="2463432"/>
+            <a:ext cx="57150" cy="24203"/>
+          </a:xfrm>
+          <a:prstGeom prst="line">
+            <a:avLst/>
+          </a:prstGeom>
+          <a:noFill/>
+          <a:ln w="22860">
+            <a:solidFill>
+              <a:srgbClr val="EA002C"/>
+            </a:solidFill>
+            <a:prstDash val="solid"/>
+          </a:ln>
+        </p:spPr>
+      </p:sp>
+      <p:sp>
+        <p:nvSpPr>
+          <p:cNvPr id="102" name="Shape 100"/>
+          <p:cNvSpPr/>
+          <p:nvPr/>
+        </p:nvSpPr>
+        <p:spPr>
+          <a:xfrm flipV="1">
+            <a:off x="9258300" y="2447630"/>
+            <a:ext cx="57150" cy="15802"/>
+          </a:xfrm>
+          <a:prstGeom prst="line">
+            <a:avLst/>
+          </a:prstGeom>
+          <a:noFill/>
+          <a:ln w="22860">
+            <a:solidFill>
+              <a:srgbClr val="EA002C"/>
+            </a:solidFill>
+            <a:prstDash val="solid"/>
+          </a:ln>
+        </p:spPr>
+      </p:sp>
+      <p:sp>
+        <p:nvSpPr>
+          <p:cNvPr id="103" name="Shape 101"/>
+          <p:cNvSpPr/>
+          <p:nvPr/>
+        </p:nvSpPr>
+        <p:spPr>
+          <a:xfrm>
+            <a:off x="9315450" y="2447630"/>
+            <a:ext cx="57150" cy="0"/>
+          </a:xfrm>
+          <a:prstGeom prst="line">
+            <a:avLst/>
+          </a:prstGeom>
+          <a:noFill/>
+          <a:ln w="22860">
+            <a:solidFill>
+              <a:srgbClr val="EA002C"/>
+            </a:solidFill>
+            <a:prstDash val="solid"/>
+          </a:ln>
+        </p:spPr>
+      </p:sp>
+      <p:sp>
+        <p:nvSpPr>
+          <p:cNvPr id="104" name="Shape 102"/>
+          <p:cNvSpPr/>
+          <p:nvPr/>
+        </p:nvSpPr>
+        <p:spPr>
+          <a:xfrm>
+            <a:off x="8162925" y="2218520"/>
+            <a:ext cx="24765" cy="24765"/>
+          </a:xfrm>
+          <a:prstGeom prst="ellipse">
+            <a:avLst/>
+          </a:prstGeom>
+          <a:solidFill>
+            <a:srgbClr val="6E7780"/>
+          </a:solidFill>
+          <a:ln/>
+        </p:spPr>
+      </p:sp>
+      <p:sp>
+        <p:nvSpPr>
+          <p:cNvPr id="105" name="Shape 103"/>
+          <p:cNvSpPr/>
+          <p:nvPr/>
+        </p:nvSpPr>
+        <p:spPr>
+          <a:xfrm>
+            <a:off x="8175784" y="2227981"/>
+            <a:ext cx="24765" cy="24765"/>
+          </a:xfrm>
+          <a:prstGeom prst="ellipse">
+            <a:avLst/>
+          </a:prstGeom>
+          <a:solidFill>
+            <a:srgbClr val="6E7780"/>
+          </a:solidFill>
+          <a:ln/>
+        </p:spPr>
+      </p:sp>
+      <p:sp>
+        <p:nvSpPr>
+          <p:cNvPr id="106" name="Shape 104"/>
+          <p:cNvSpPr/>
+          <p:nvPr/>
+        </p:nvSpPr>
+        <p:spPr>
+          <a:xfrm>
+            <a:off x="8271510" y="2301771"/>
+            <a:ext cx="24765" cy="24765"/>
+          </a:xfrm>
+          <a:prstGeom prst="ellipse">
+            <a:avLst/>
+          </a:prstGeom>
+          <a:solidFill>
+            <a:srgbClr val="6E7780"/>
+          </a:solidFill>
+          <a:ln/>
+        </p:spPr>
+      </p:sp>
+      <p:sp>
+        <p:nvSpPr>
+          <p:cNvPr id="107" name="Shape 105"/>
+          <p:cNvSpPr/>
+          <p:nvPr/>
+        </p:nvSpPr>
+        <p:spPr>
+          <a:xfrm>
+            <a:off x="8328660" y="2363178"/>
+            <a:ext cx="24765" cy="24765"/>
+          </a:xfrm>
+          <a:prstGeom prst="ellipse">
+            <a:avLst/>
+          </a:prstGeom>
+          <a:solidFill>
+            <a:srgbClr val="6E7780"/>
+          </a:solidFill>
+          <a:ln/>
+        </p:spPr>
+      </p:sp>
+      <p:sp>
+        <p:nvSpPr>
+          <p:cNvPr id="108" name="Shape 106"/>
+          <p:cNvSpPr/>
+          <p:nvPr/>
+        </p:nvSpPr>
+        <p:spPr>
+          <a:xfrm>
+            <a:off x="8388668" y="2368759"/>
+            <a:ext cx="24765" cy="24765"/>
+          </a:xfrm>
+          <a:prstGeom prst="ellipse">
+            <a:avLst/>
+          </a:prstGeom>
+          <a:solidFill>
+            <a:srgbClr val="6E7780"/>
+          </a:solidFill>
+          <a:ln/>
+        </p:spPr>
+      </p:sp>
+      <p:sp>
+        <p:nvSpPr>
+          <p:cNvPr id="109" name="Shape 107"/>
+          <p:cNvSpPr/>
+          <p:nvPr/>
+        </p:nvSpPr>
+        <p:spPr>
+          <a:xfrm>
+            <a:off x="8417243" y="2377900"/>
+            <a:ext cx="24765" cy="24765"/>
+          </a:xfrm>
+          <a:prstGeom prst="ellipse">
+            <a:avLst/>
+          </a:prstGeom>
+          <a:solidFill>
+            <a:srgbClr val="6E7780"/>
+          </a:solidFill>
+          <a:ln/>
+        </p:spPr>
+      </p:sp>
+      <p:sp>
+        <p:nvSpPr>
+          <p:cNvPr id="110" name="Shape 108"/>
+          <p:cNvSpPr/>
+          <p:nvPr/>
+        </p:nvSpPr>
+        <p:spPr>
+          <a:xfrm>
+            <a:off x="8445818" y="2386381"/>
+            <a:ext cx="24765" cy="24765"/>
+          </a:xfrm>
+          <a:prstGeom prst="ellipse">
+            <a:avLst/>
+          </a:prstGeom>
+          <a:solidFill>
+            <a:srgbClr val="6E7780"/>
+          </a:solidFill>
+          <a:ln/>
+        </p:spPr>
+      </p:sp>
+      <p:sp>
+        <p:nvSpPr>
+          <p:cNvPr id="111" name="Shape 109"/>
+          <p:cNvSpPr/>
+          <p:nvPr/>
+        </p:nvSpPr>
+        <p:spPr>
+          <a:xfrm>
+            <a:off x="8471535" y="2352657"/>
+            <a:ext cx="24765" cy="24765"/>
+          </a:xfrm>
+          <a:prstGeom prst="ellipse">
+            <a:avLst/>
+          </a:prstGeom>
+          <a:solidFill>
+            <a:srgbClr val="6E7780"/>
+          </a:solidFill>
+          <a:ln/>
+        </p:spPr>
+      </p:sp>
+      <p:sp>
+        <p:nvSpPr>
+          <p:cNvPr id="112" name="Shape 110"/>
+          <p:cNvSpPr/>
+          <p:nvPr/>
+        </p:nvSpPr>
+        <p:spPr>
+          <a:xfrm>
+            <a:off x="8488680" y="2404303"/>
+            <a:ext cx="24765" cy="24765"/>
+          </a:xfrm>
+          <a:prstGeom prst="ellipse">
+            <a:avLst/>
+          </a:prstGeom>
+          <a:solidFill>
+            <a:srgbClr val="6E7780"/>
+          </a:solidFill>
+          <a:ln/>
+        </p:spPr>
+      </p:sp>
+      <p:sp>
+        <p:nvSpPr>
+          <p:cNvPr id="113" name="Shape 111"/>
+          <p:cNvSpPr/>
+          <p:nvPr/>
+        </p:nvSpPr>
+        <p:spPr>
+          <a:xfrm>
+            <a:off x="8537258" y="2374560"/>
+            <a:ext cx="24765" cy="24765"/>
+          </a:xfrm>
+          <a:prstGeom prst="ellipse">
+            <a:avLst/>
+          </a:prstGeom>
+          <a:solidFill>
+            <a:srgbClr val="6E7780"/>
+          </a:solidFill>
+          <a:ln/>
+        </p:spPr>
+      </p:sp>
+      <p:sp>
+        <p:nvSpPr>
+          <p:cNvPr id="114" name="Shape 112"/>
+          <p:cNvSpPr/>
+          <p:nvPr/>
+        </p:nvSpPr>
+        <p:spPr>
+          <a:xfrm>
+            <a:off x="8580120" y="2380760"/>
+            <a:ext cx="24765" cy="24765"/>
+          </a:xfrm>
+          <a:prstGeom prst="ellipse">
+            <a:avLst/>
+          </a:prstGeom>
+          <a:solidFill>
+            <a:srgbClr val="6E7780"/>
+          </a:solidFill>
+          <a:ln/>
+        </p:spPr>
+      </p:sp>
+      <p:sp>
+        <p:nvSpPr>
+          <p:cNvPr id="115" name="Shape 113"/>
+          <p:cNvSpPr/>
+          <p:nvPr/>
+        </p:nvSpPr>
+        <p:spPr>
+          <a:xfrm>
+            <a:off x="8588693" y="2338955"/>
+            <a:ext cx="24765" cy="24765"/>
+          </a:xfrm>
+          <a:prstGeom prst="ellipse">
+            <a:avLst/>
+          </a:prstGeom>
+          <a:solidFill>
+            <a:srgbClr val="6E7780"/>
+          </a:solidFill>
+          <a:ln/>
+        </p:spPr>
+      </p:sp>
+      <p:sp>
+        <p:nvSpPr>
+          <p:cNvPr id="116" name="Shape 114"/>
+          <p:cNvSpPr/>
+          <p:nvPr/>
+        </p:nvSpPr>
+        <p:spPr>
+          <a:xfrm>
+            <a:off x="8597265" y="2347856"/>
+            <a:ext cx="24765" cy="24765"/>
+          </a:xfrm>
+          <a:prstGeom prst="ellipse">
+            <a:avLst/>
+          </a:prstGeom>
+          <a:solidFill>
+            <a:srgbClr val="6E7780"/>
+          </a:solidFill>
+          <a:ln/>
+        </p:spPr>
+      </p:sp>
+      <p:sp>
+        <p:nvSpPr>
+          <p:cNvPr id="117" name="Shape 115"/>
+          <p:cNvSpPr/>
+          <p:nvPr/>
+        </p:nvSpPr>
+        <p:spPr>
+          <a:xfrm>
+            <a:off x="8628698" y="2330414"/>
+            <a:ext cx="24765" cy="24765"/>
+          </a:xfrm>
+          <a:prstGeom prst="ellipse">
+            <a:avLst/>
+          </a:prstGeom>
+          <a:solidFill>
+            <a:srgbClr val="6E7780"/>
+          </a:solidFill>
+          <a:ln/>
+        </p:spPr>
+      </p:sp>
+      <p:sp>
+        <p:nvSpPr>
+          <p:cNvPr id="118" name="Shape 116"/>
+          <p:cNvSpPr/>
+          <p:nvPr/>
+        </p:nvSpPr>
+        <p:spPr>
+          <a:xfrm>
+            <a:off x="8631555" y="2357217"/>
+            <a:ext cx="24765" cy="24765"/>
+          </a:xfrm>
+          <a:prstGeom prst="ellipse">
+            <a:avLst/>
+          </a:prstGeom>
+          <a:solidFill>
+            <a:srgbClr val="6E7780"/>
+          </a:solidFill>
+          <a:ln/>
+        </p:spPr>
+      </p:sp>
+      <p:sp>
+        <p:nvSpPr>
+          <p:cNvPr id="119" name="Shape 117"/>
+          <p:cNvSpPr/>
+          <p:nvPr/>
+        </p:nvSpPr>
+        <p:spPr>
+          <a:xfrm>
+            <a:off x="8648700" y="2365679"/>
+            <a:ext cx="24765" cy="24765"/>
+          </a:xfrm>
+          <a:prstGeom prst="ellipse">
+            <a:avLst/>
+          </a:prstGeom>
+          <a:solidFill>
+            <a:srgbClr val="6E7780"/>
+          </a:solidFill>
+          <a:ln/>
+        </p:spPr>
+      </p:sp>
+      <p:sp>
+        <p:nvSpPr>
+          <p:cNvPr id="120" name="Shape 118"/>
+          <p:cNvSpPr/>
+          <p:nvPr/>
+        </p:nvSpPr>
+        <p:spPr>
+          <a:xfrm>
+            <a:off x="8691563" y="2370119"/>
+            <a:ext cx="24765" cy="24765"/>
+          </a:xfrm>
+          <a:prstGeom prst="ellipse">
+            <a:avLst/>
+          </a:prstGeom>
+          <a:solidFill>
+            <a:srgbClr val="6E7780"/>
+          </a:solidFill>
+          <a:ln/>
+        </p:spPr>
+      </p:sp>
+      <p:sp>
+        <p:nvSpPr>
+          <p:cNvPr id="121" name="Shape 119"/>
+          <p:cNvSpPr/>
+          <p:nvPr/>
+        </p:nvSpPr>
+        <p:spPr>
+          <a:xfrm>
+            <a:off x="8694420" y="2363378"/>
+            <a:ext cx="24765" cy="24765"/>
+          </a:xfrm>
+          <a:prstGeom prst="ellipse">
+            <a:avLst/>
+          </a:prstGeom>
+          <a:solidFill>
+            <a:srgbClr val="6E7780"/>
+          </a:solidFill>
+          <a:ln/>
+        </p:spPr>
+      </p:sp>
+      <p:sp>
+        <p:nvSpPr>
+          <p:cNvPr id="122" name="Shape 120"/>
+          <p:cNvSpPr/>
+          <p:nvPr/>
+        </p:nvSpPr>
+        <p:spPr>
+          <a:xfrm>
+            <a:off x="8825865" y="2425066"/>
+            <a:ext cx="24765" cy="24765"/>
+          </a:xfrm>
+          <a:prstGeom prst="ellipse">
+            <a:avLst/>
+          </a:prstGeom>
+          <a:solidFill>
+            <a:srgbClr val="6E7780"/>
+          </a:solidFill>
+          <a:ln/>
+        </p:spPr>
+      </p:sp>
+      <p:sp>
+        <p:nvSpPr>
+          <p:cNvPr id="123" name="Shape 121"/>
+          <p:cNvSpPr/>
+          <p:nvPr/>
+        </p:nvSpPr>
+        <p:spPr>
+          <a:xfrm>
+            <a:off x="8934450" y="2519638"/>
+            <a:ext cx="24765" cy="24765"/>
+          </a:xfrm>
+          <a:prstGeom prst="ellipse">
+            <a:avLst/>
+          </a:prstGeom>
+          <a:solidFill>
+            <a:srgbClr val="6E7780"/>
+          </a:solidFill>
+          <a:ln/>
+        </p:spPr>
+      </p:sp>
+      <p:sp>
+        <p:nvSpPr>
+          <p:cNvPr id="124" name="Shape 122"/>
+          <p:cNvSpPr/>
+          <p:nvPr/>
+        </p:nvSpPr>
+        <p:spPr>
+          <a:xfrm>
+            <a:off x="8940165" y="2543141"/>
+            <a:ext cx="24765" cy="24765"/>
+          </a:xfrm>
+          <a:prstGeom prst="ellipse">
+            <a:avLst/>
+          </a:prstGeom>
+          <a:solidFill>
+            <a:srgbClr val="6E7780"/>
+          </a:solidFill>
+          <a:ln/>
+        </p:spPr>
+      </p:sp>
+      <p:sp>
+        <p:nvSpPr>
+          <p:cNvPr id="125" name="Shape 123"/>
+          <p:cNvSpPr/>
+          <p:nvPr/>
+        </p:nvSpPr>
+        <p:spPr>
+          <a:xfrm>
+            <a:off x="8943023" y="2489034"/>
+            <a:ext cx="24765" cy="24765"/>
+          </a:xfrm>
+          <a:prstGeom prst="ellipse">
+            <a:avLst/>
+          </a:prstGeom>
+          <a:solidFill>
+            <a:srgbClr val="6E7780"/>
+          </a:solidFill>
+          <a:ln/>
+        </p:spPr>
+      </p:sp>
+      <p:sp>
+        <p:nvSpPr>
+          <p:cNvPr id="126" name="Shape 124"/>
+          <p:cNvSpPr/>
+          <p:nvPr/>
+        </p:nvSpPr>
+        <p:spPr>
+          <a:xfrm>
+            <a:off x="8951595" y="2491454"/>
+            <a:ext cx="24765" cy="24765"/>
+          </a:xfrm>
+          <a:prstGeom prst="ellipse">
+            <a:avLst/>
+          </a:prstGeom>
+          <a:solidFill>
+            <a:srgbClr val="6E7780"/>
+          </a:solidFill>
+          <a:ln/>
+        </p:spPr>
+      </p:sp>
+      <p:sp>
+        <p:nvSpPr>
+          <p:cNvPr id="127" name="Shape 125"/>
+          <p:cNvSpPr/>
+          <p:nvPr/>
+        </p:nvSpPr>
+        <p:spPr>
+          <a:xfrm>
+            <a:off x="9000173" y="2530899"/>
+            <a:ext cx="24765" cy="24765"/>
+          </a:xfrm>
+          <a:prstGeom prst="ellipse">
+            <a:avLst/>
+          </a:prstGeom>
+          <a:solidFill>
+            <a:srgbClr val="6E7780"/>
+          </a:solidFill>
+          <a:ln/>
+        </p:spPr>
+      </p:sp>
+      <p:sp>
+        <p:nvSpPr>
+          <p:cNvPr id="128" name="Shape 126"/>
+          <p:cNvSpPr/>
+          <p:nvPr/>
+        </p:nvSpPr>
+        <p:spPr>
+          <a:xfrm>
+            <a:off x="9037320" y="2574565"/>
+            <a:ext cx="24765" cy="24765"/>
+          </a:xfrm>
+          <a:prstGeom prst="ellipse">
+            <a:avLst/>
+          </a:prstGeom>
+          <a:solidFill>
+            <a:srgbClr val="6E7780"/>
+          </a:solidFill>
+          <a:ln/>
+        </p:spPr>
+      </p:sp>
+      <p:sp>
+        <p:nvSpPr>
+          <p:cNvPr id="129" name="Shape 127"/>
+          <p:cNvSpPr/>
+          <p:nvPr/>
+        </p:nvSpPr>
+        <p:spPr>
+          <a:xfrm>
+            <a:off x="9080183" y="2509557"/>
+            <a:ext cx="24765" cy="24765"/>
+          </a:xfrm>
+          <a:prstGeom prst="ellipse">
+            <a:avLst/>
+          </a:prstGeom>
+          <a:solidFill>
+            <a:srgbClr val="6E7780"/>
+          </a:solidFill>
+          <a:ln/>
+        </p:spPr>
+      </p:sp>
+      <p:sp>
+        <p:nvSpPr>
+          <p:cNvPr id="130" name="Shape 128"/>
+          <p:cNvSpPr/>
+          <p:nvPr/>
+        </p:nvSpPr>
+        <p:spPr>
+          <a:xfrm>
+            <a:off x="9080183" y="2487034"/>
+            <a:ext cx="24765" cy="24765"/>
+          </a:xfrm>
+          <a:prstGeom prst="ellipse">
+            <a:avLst/>
+          </a:prstGeom>
+          <a:solidFill>
+            <a:srgbClr val="6E7780"/>
+          </a:solidFill>
+          <a:ln/>
+        </p:spPr>
+      </p:sp>
+      <p:sp>
+        <p:nvSpPr>
+          <p:cNvPr id="131" name="Shape 129"/>
+          <p:cNvSpPr/>
+          <p:nvPr/>
+        </p:nvSpPr>
+        <p:spPr>
+          <a:xfrm>
+            <a:off x="9094470" y="2546441"/>
+            <a:ext cx="24765" cy="24765"/>
+          </a:xfrm>
+          <a:prstGeom prst="ellipse">
+            <a:avLst/>
+          </a:prstGeom>
+          <a:solidFill>
+            <a:srgbClr val="6E7780"/>
+          </a:solidFill>
+          <a:ln/>
+        </p:spPr>
+      </p:sp>
+      <p:sp>
+        <p:nvSpPr>
+          <p:cNvPr id="132" name="Shape 130"/>
+          <p:cNvSpPr/>
+          <p:nvPr/>
+        </p:nvSpPr>
+        <p:spPr>
+          <a:xfrm>
+            <a:off x="9100185" y="2545381"/>
+            <a:ext cx="24765" cy="24765"/>
+          </a:xfrm>
+          <a:prstGeom prst="ellipse">
+            <a:avLst/>
+          </a:prstGeom>
+          <a:solidFill>
+            <a:srgbClr val="6E7780"/>
+          </a:solidFill>
+          <a:ln/>
+        </p:spPr>
+      </p:sp>
+      <p:sp>
+        <p:nvSpPr>
+          <p:cNvPr id="133" name="Shape 131"/>
+          <p:cNvSpPr/>
+          <p:nvPr/>
+        </p:nvSpPr>
+        <p:spPr>
+          <a:xfrm>
+            <a:off x="9123045" y="2494915"/>
+            <a:ext cx="24765" cy="24765"/>
+          </a:xfrm>
+          <a:prstGeom prst="ellipse">
+            <a:avLst/>
+          </a:prstGeom>
+          <a:solidFill>
+            <a:srgbClr val="6E7780"/>
+          </a:solidFill>
+          <a:ln/>
+        </p:spPr>
+      </p:sp>
+      <p:sp>
+        <p:nvSpPr>
+          <p:cNvPr id="134" name="Shape 132"/>
+          <p:cNvSpPr/>
+          <p:nvPr/>
+        </p:nvSpPr>
+        <p:spPr>
+          <a:xfrm>
+            <a:off x="9143048" y="2489854"/>
+            <a:ext cx="24765" cy="24765"/>
+          </a:xfrm>
+          <a:prstGeom prst="ellipse">
+            <a:avLst/>
+          </a:prstGeom>
+          <a:solidFill>
+            <a:srgbClr val="6E7780"/>
+          </a:solidFill>
+          <a:ln/>
+        </p:spPr>
+      </p:sp>
+      <p:sp>
+        <p:nvSpPr>
+          <p:cNvPr id="135" name="Shape 133"/>
+          <p:cNvSpPr/>
+          <p:nvPr/>
+        </p:nvSpPr>
+        <p:spPr>
+          <a:xfrm>
+            <a:off x="9151620" y="2528279"/>
+            <a:ext cx="24765" cy="24765"/>
+          </a:xfrm>
+          <a:prstGeom prst="ellipse">
+            <a:avLst/>
+          </a:prstGeom>
+          <a:solidFill>
+            <a:srgbClr val="6E7780"/>
+          </a:solidFill>
+          <a:ln/>
+        </p:spPr>
+      </p:sp>
+      <p:sp>
+        <p:nvSpPr>
+          <p:cNvPr id="136" name="Shape 134"/>
+          <p:cNvSpPr/>
+          <p:nvPr/>
+        </p:nvSpPr>
+        <p:spPr>
+          <a:xfrm>
+            <a:off x="9154478" y="2435227"/>
+            <a:ext cx="24765" cy="24765"/>
+          </a:xfrm>
+          <a:prstGeom prst="ellipse">
+            <a:avLst/>
+          </a:prstGeom>
+          <a:solidFill>
+            <a:srgbClr val="6E7780"/>
+          </a:solidFill>
+          <a:ln/>
+        </p:spPr>
+      </p:sp>
+      <p:sp>
+        <p:nvSpPr>
+          <p:cNvPr id="137" name="Shape 135"/>
+          <p:cNvSpPr/>
+          <p:nvPr/>
+        </p:nvSpPr>
+        <p:spPr>
+          <a:xfrm>
+            <a:off x="9154478" y="2449629"/>
+            <a:ext cx="24765" cy="24765"/>
+          </a:xfrm>
+          <a:prstGeom prst="ellipse">
+            <a:avLst/>
+          </a:prstGeom>
+          <a:solidFill>
+            <a:srgbClr val="6E7780"/>
+          </a:solidFill>
+          <a:ln/>
+        </p:spPr>
+      </p:sp>
+      <p:sp>
+        <p:nvSpPr>
+          <p:cNvPr id="138" name="Shape 136"/>
+          <p:cNvSpPr/>
+          <p:nvPr/>
+        </p:nvSpPr>
+        <p:spPr>
+          <a:xfrm>
+            <a:off x="9154478" y="2508116"/>
+            <a:ext cx="24765" cy="24765"/>
+          </a:xfrm>
+          <a:prstGeom prst="ellipse">
+            <a:avLst/>
+          </a:prstGeom>
+          <a:solidFill>
+            <a:srgbClr val="6E7780"/>
+          </a:solidFill>
+          <a:ln/>
+        </p:spPr>
+      </p:sp>
+      <p:sp>
+        <p:nvSpPr>
+          <p:cNvPr id="139" name="Shape 137"/>
+          <p:cNvSpPr/>
+          <p:nvPr/>
+        </p:nvSpPr>
+        <p:spPr>
+          <a:xfrm>
+            <a:off x="9177338" y="2463891"/>
+            <a:ext cx="24765" cy="24765"/>
+          </a:xfrm>
+          <a:prstGeom prst="ellipse">
+            <a:avLst/>
+          </a:prstGeom>
+          <a:solidFill>
+            <a:srgbClr val="6E7780"/>
+          </a:solidFill>
+          <a:ln/>
+        </p:spPr>
+      </p:sp>
+      <p:sp>
+        <p:nvSpPr>
+          <p:cNvPr id="140" name="Shape 138"/>
+          <p:cNvSpPr/>
+          <p:nvPr/>
+        </p:nvSpPr>
+        <p:spPr>
+          <a:xfrm>
+            <a:off x="9183053" y="2523998"/>
+            <a:ext cx="24765" cy="24765"/>
+          </a:xfrm>
+          <a:prstGeom prst="ellipse">
+            <a:avLst/>
+          </a:prstGeom>
+          <a:solidFill>
+            <a:srgbClr val="6E7780"/>
+          </a:solidFill>
+          <a:ln/>
+        </p:spPr>
+      </p:sp>
+      <p:sp>
+        <p:nvSpPr>
+          <p:cNvPr id="141" name="Shape 139"/>
+          <p:cNvSpPr/>
+          <p:nvPr/>
+        </p:nvSpPr>
+        <p:spPr>
+          <a:xfrm>
+            <a:off x="9205913" y="2462671"/>
+            <a:ext cx="24765" cy="24765"/>
+          </a:xfrm>
+          <a:prstGeom prst="ellipse">
+            <a:avLst/>
+          </a:prstGeom>
+          <a:solidFill>
+            <a:srgbClr val="6E7780"/>
+          </a:solidFill>
+          <a:ln/>
+        </p:spPr>
+      </p:sp>
+      <p:sp>
+        <p:nvSpPr>
+          <p:cNvPr id="142" name="Shape 140"/>
+          <p:cNvSpPr/>
+          <p:nvPr/>
+        </p:nvSpPr>
+        <p:spPr>
+          <a:xfrm>
+            <a:off x="9248775" y="2435447"/>
+            <a:ext cx="24765" cy="24765"/>
+          </a:xfrm>
+          <a:prstGeom prst="ellipse">
+            <a:avLst/>
+          </a:prstGeom>
+          <a:solidFill>
+            <a:srgbClr val="6E7780"/>
+          </a:solidFill>
+          <a:ln/>
+        </p:spPr>
+      </p:sp>
+      <p:sp>
+        <p:nvSpPr>
+          <p:cNvPr id="143" name="Shape 141"/>
+          <p:cNvSpPr/>
+          <p:nvPr/>
+        </p:nvSpPr>
+        <p:spPr>
+          <a:xfrm>
+            <a:off x="9300210" y="2448969"/>
+            <a:ext cx="24765" cy="24765"/>
+          </a:xfrm>
+          <a:prstGeom prst="ellipse">
+            <a:avLst/>
+          </a:prstGeom>
+          <a:solidFill>
+            <a:srgbClr val="6E7780"/>
+          </a:solidFill>
+          <a:ln/>
+        </p:spPr>
+      </p:sp>
+      <p:sp>
+        <p:nvSpPr>
+          <p:cNvPr id="144" name="Text 142"/>
+          <p:cNvSpPr txBox="1"/>
+          <p:nvPr/>
+        </p:nvSpPr>
+        <p:spPr>
+          <a:xfrm>
+            <a:off x="8058150" y="2705100"/>
+            <a:ext cx="1581150" cy="405051"/>
+          </a:xfrm>
+          <a:prstGeom prst="rect">
+            <a:avLst/>
+          </a:prstGeom>
+          <a:noFill/>
+          <a:ln/>
+        </p:spPr>
+        <p:txBody>
+          <a:bodyPr wrap="square" lIns="0" tIns="0" rIns="0" bIns="0" rtlCol="0" anchor="t"/>
+          <a:lstStyle/>
+          <a:p>
+            <a:pPr algn="l" indent="0" marL="0">
+              <a:lnSpc>
+                <a:spcPts val="1063"/>
+              </a:lnSpc>
+              <a:buNone/>
+            </a:pPr>
+            <a:r>
+              <a:rPr lang="en-US" sz="788" dirty="0">
+                <a:solidFill>
+                  <a:srgbClr val="5A5A5A"/>
+                </a:solidFill>
+                <a:latin typeface="Malgun Gothic" pitchFamily="34" charset="0"/>
+                <a:ea typeface="Malgun Gothic" pitchFamily="34" charset="-122"/>
+                <a:cs typeface="Malgun Gothic" pitchFamily="34" charset="-120"/>
+              </a:rPr>
+              <a:t>쌓인 점을 가장 잘 지나는 곡선을 찾습니다. 점이 없는 온도의 값도 이 곡선이 메웁니다.</a:t>
+            </a:r>
+            <a:endParaRPr lang="en-US" sz="788" dirty="0"/>
+          </a:p>
+        </p:txBody>
+      </p:sp>
+      <p:sp>
+        <p:nvSpPr>
+          <p:cNvPr id="145" name="Text 143"/>
+          <p:cNvSpPr txBox="1"/>
+          <p:nvPr/>
+        </p:nvSpPr>
+        <p:spPr>
+          <a:xfrm>
+            <a:off x="9525000" y="2343150"/>
+            <a:ext cx="228600" cy="148590"/>
+          </a:xfrm>
+          <a:prstGeom prst="rect">
+            <a:avLst/>
+          </a:prstGeom>
+          <a:noFill/>
+          <a:ln/>
+        </p:spPr>
+        <p:txBody>
+          <a:bodyPr wrap="square" lIns="0" tIns="0" rIns="0" bIns="0" rtlCol="0" anchor="t"/>
+          <a:lstStyle/>
+          <a:p>
+            <a:pPr algn="ctr" indent="0" marL="0">
+              <a:lnSpc>
+                <a:spcPts val="1170"/>
+              </a:lnSpc>
+              <a:buNone/>
+            </a:pPr>
+            <a:r>
+              <a:rPr lang="en-US" sz="975" dirty="0">
+                <a:solidFill>
+                  <a:srgbClr val="8C8C8C"/>
+                </a:solidFill>
+                <a:latin typeface="Malgun Gothic" pitchFamily="34" charset="0"/>
+                <a:ea typeface="Malgun Gothic" pitchFamily="34" charset="-122"/>
+                <a:cs typeface="Malgun Gothic" pitchFamily="34" charset="-120"/>
+              </a:rPr>
+              <a:t>→</a:t>
+            </a:r>
+            <a:endParaRPr lang="en-US" sz="975" dirty="0"/>
+          </a:p>
+        </p:txBody>
+      </p:sp>
+      <p:sp>
+        <p:nvSpPr>
+          <p:cNvPr id="146" name="Text 144"/>
+          <p:cNvSpPr txBox="1"/>
+          <p:nvPr/>
+        </p:nvSpPr>
+        <p:spPr>
+          <a:xfrm>
+            <a:off x="9791700" y="1962150"/>
+            <a:ext cx="1581150" cy="148828"/>
+          </a:xfrm>
+          <a:prstGeom prst="rect">
+            <a:avLst/>
+          </a:prstGeom>
+          <a:noFill/>
+          <a:ln/>
+        </p:spPr>
+        <p:txBody>
+          <a:bodyPr wrap="square" lIns="0" tIns="0" rIns="0" bIns="0" rtlCol="0" anchor="t"/>
+          <a:lstStyle/>
+          <a:p>
+            <a:pPr algn="l" indent="0" marL="0">
+              <a:lnSpc>
+                <a:spcPts val="1172"/>
+              </a:lnSpc>
+              <a:buNone/>
+            </a:pPr>
+            <a:r>
+              <a:rPr lang="en-US" sz="938" b="1" dirty="0">
+                <a:solidFill>
+                  <a:srgbClr val="1A1A1A"/>
+                </a:solidFill>
+                <a:latin typeface="Malgun Gothic" pitchFamily="34" charset="0"/>
+                <a:ea typeface="Malgun Gothic" pitchFamily="34" charset="-122"/>
+                <a:cs typeface="Malgun Gothic" pitchFamily="34" charset="-120"/>
+              </a:rPr>
+              <a:t>③ 표를 만든다</a:t>
+            </a:r>
+            <a:endParaRPr lang="en-US" sz="938" dirty="0"/>
+          </a:p>
+        </p:txBody>
+      </p:sp>
+      <p:sp>
+        <p:nvSpPr>
+          <p:cNvPr id="147" name="Shape 145"/>
+          <p:cNvSpPr/>
+          <p:nvPr/>
+        </p:nvSpPr>
+        <p:spPr>
+          <a:xfrm>
+            <a:off x="9791700" y="2171700"/>
+            <a:ext cx="1428750" cy="476250"/>
+          </a:xfrm>
+          <a:prstGeom prst="rect">
+            <a:avLst/>
+          </a:prstGeom>
+          <a:ln w="12700">
+            <a:solidFill>
+              <a:srgbClr val="DEE3E9"/>
+            </a:solidFill>
+            <a:prstDash val="solid"/>
+          </a:ln>
+        </p:spPr>
+      </p:sp>
+      <p:sp>
+        <p:nvSpPr>
+          <p:cNvPr id="148" name="Shape 146"/>
+          <p:cNvSpPr/>
+          <p:nvPr/>
+        </p:nvSpPr>
+        <p:spPr>
+          <a:xfrm>
+            <a:off x="10287000" y="2209800"/>
+            <a:ext cx="0" cy="400050"/>
+          </a:xfrm>
+          <a:prstGeom prst="line">
+            <a:avLst/>
+          </a:prstGeom>
+          <a:noFill/>
+          <a:ln w="12700">
+            <a:solidFill>
+              <a:srgbClr val="DEE3E9"/>
+            </a:solidFill>
+            <a:prstDash val="solid"/>
+          </a:ln>
+        </p:spPr>
+      </p:sp>
+      <p:sp>
+        <p:nvSpPr>
+          <p:cNvPr id="149" name="Shape 147"/>
+          <p:cNvSpPr/>
+          <p:nvPr/>
+        </p:nvSpPr>
+        <p:spPr>
+          <a:xfrm>
+            <a:off x="9886950" y="2247900"/>
+            <a:ext cx="361950" cy="0"/>
+          </a:xfrm>
+          <a:prstGeom prst="line">
+            <a:avLst/>
+          </a:prstGeom>
+          <a:noFill/>
+          <a:ln w="12700">
+            <a:solidFill>
+              <a:srgbClr val="C4CAD1"/>
+            </a:solidFill>
+            <a:prstDash val="solid"/>
+          </a:ln>
+        </p:spPr>
+      </p:sp>
+      <p:sp>
+        <p:nvSpPr>
+          <p:cNvPr id="150" name="Shape 148"/>
+          <p:cNvSpPr/>
+          <p:nvPr/>
+        </p:nvSpPr>
+        <p:spPr>
+          <a:xfrm>
+            <a:off x="10344150" y="2247900"/>
+            <a:ext cx="800100" cy="0"/>
+          </a:xfrm>
+          <a:prstGeom prst="line">
+            <a:avLst/>
+          </a:prstGeom>
+          <a:noFill/>
+          <a:ln w="12700">
+            <a:solidFill>
+              <a:srgbClr val="EA002C"/>
+            </a:solidFill>
+            <a:prstDash val="solid"/>
+          </a:ln>
+        </p:spPr>
+      </p:sp>
+      <p:sp>
+        <p:nvSpPr>
+          <p:cNvPr id="151" name="Shape 149"/>
+          <p:cNvSpPr/>
+          <p:nvPr/>
+        </p:nvSpPr>
+        <p:spPr>
+          <a:xfrm>
+            <a:off x="9886950" y="2314575"/>
+            <a:ext cx="361950" cy="0"/>
+          </a:xfrm>
+          <a:prstGeom prst="line">
+            <a:avLst/>
+          </a:prstGeom>
+          <a:noFill/>
+          <a:ln w="12700">
+            <a:solidFill>
+              <a:srgbClr val="C4CAD1"/>
+            </a:solidFill>
+            <a:prstDash val="solid"/>
+          </a:ln>
+        </p:spPr>
+      </p:sp>
+      <p:sp>
+        <p:nvSpPr>
+          <p:cNvPr id="152" name="Shape 150"/>
+          <p:cNvSpPr/>
+          <p:nvPr/>
+        </p:nvSpPr>
+        <p:spPr>
+          <a:xfrm>
+            <a:off x="10344150" y="2314575"/>
+            <a:ext cx="800100" cy="0"/>
+          </a:xfrm>
+          <a:prstGeom prst="line">
+            <a:avLst/>
+          </a:prstGeom>
+          <a:noFill/>
+          <a:ln w="12700">
+            <a:solidFill>
+              <a:srgbClr val="C4CAD1"/>
+            </a:solidFill>
+            <a:prstDash val="solid"/>
+          </a:ln>
+        </p:spPr>
+      </p:sp>
+      <p:sp>
+        <p:nvSpPr>
+          <p:cNvPr id="153" name="Shape 151"/>
+          <p:cNvSpPr/>
+          <p:nvPr/>
+        </p:nvSpPr>
+        <p:spPr>
+          <a:xfrm>
+            <a:off x="9886950" y="2381250"/>
+            <a:ext cx="361950" cy="0"/>
+          </a:xfrm>
+          <a:prstGeom prst="line">
+            <a:avLst/>
+          </a:prstGeom>
+          <a:noFill/>
+          <a:ln w="12700">
+            <a:solidFill>
+              <a:srgbClr val="C4CAD1"/>
+            </a:solidFill>
+            <a:prstDash val="solid"/>
+          </a:ln>
+        </p:spPr>
+      </p:sp>
+      <p:sp>
+        <p:nvSpPr>
+          <p:cNvPr id="154" name="Shape 152"/>
+          <p:cNvSpPr/>
+          <p:nvPr/>
+        </p:nvSpPr>
+        <p:spPr>
+          <a:xfrm>
+            <a:off x="10344150" y="2381250"/>
+            <a:ext cx="800100" cy="0"/>
+          </a:xfrm>
+          <a:prstGeom prst="line">
+            <a:avLst/>
+          </a:prstGeom>
+          <a:noFill/>
+          <a:ln w="12700">
+            <a:solidFill>
+              <a:srgbClr val="C4CAD1"/>
+            </a:solidFill>
+            <a:prstDash val="solid"/>
+          </a:ln>
+        </p:spPr>
+      </p:sp>
+      <p:sp>
+        <p:nvSpPr>
+          <p:cNvPr id="155" name="Shape 153"/>
+          <p:cNvSpPr/>
+          <p:nvPr/>
+        </p:nvSpPr>
+        <p:spPr>
+          <a:xfrm>
+            <a:off x="9886950" y="2447925"/>
+            <a:ext cx="361950" cy="0"/>
+          </a:xfrm>
+          <a:prstGeom prst="line">
+            <a:avLst/>
+          </a:prstGeom>
+          <a:noFill/>
+          <a:ln w="12700">
+            <a:solidFill>
+              <a:srgbClr val="C4CAD1"/>
+            </a:solidFill>
+            <a:prstDash val="solid"/>
+          </a:ln>
+        </p:spPr>
+      </p:sp>
+      <p:sp>
+        <p:nvSpPr>
+          <p:cNvPr id="156" name="Shape 154"/>
+          <p:cNvSpPr/>
+          <p:nvPr/>
+        </p:nvSpPr>
+        <p:spPr>
+          <a:xfrm>
+            <a:off x="10344150" y="2447925"/>
+            <a:ext cx="800100" cy="0"/>
+          </a:xfrm>
+          <a:prstGeom prst="line">
+            <a:avLst/>
+          </a:prstGeom>
+          <a:noFill/>
+          <a:ln w="12700">
+            <a:solidFill>
+              <a:srgbClr val="C4CAD1"/>
+            </a:solidFill>
+            <a:prstDash val="solid"/>
+          </a:ln>
+        </p:spPr>
+      </p:sp>
+      <p:sp>
+        <p:nvSpPr>
+          <p:cNvPr id="157" name="Shape 155"/>
+          <p:cNvSpPr/>
+          <p:nvPr/>
+        </p:nvSpPr>
+        <p:spPr>
+          <a:xfrm>
+            <a:off x="9886950" y="2514600"/>
+            <a:ext cx="361950" cy="0"/>
+          </a:xfrm>
+          <a:prstGeom prst="line">
+            <a:avLst/>
+          </a:prstGeom>
+          <a:noFill/>
+          <a:ln w="12700">
+            <a:solidFill>
+              <a:srgbClr val="C4CAD1"/>
+            </a:solidFill>
+            <a:prstDash val="solid"/>
+          </a:ln>
+        </p:spPr>
+      </p:sp>
+      <p:sp>
+        <p:nvSpPr>
+          <p:cNvPr id="158" name="Shape 156"/>
+          <p:cNvSpPr/>
+          <p:nvPr/>
+        </p:nvSpPr>
+        <p:spPr>
+          <a:xfrm>
+            <a:off x="10344150" y="2514600"/>
+            <a:ext cx="800100" cy="0"/>
+          </a:xfrm>
+          <a:prstGeom prst="line">
+            <a:avLst/>
+          </a:prstGeom>
+          <a:noFill/>
+          <a:ln w="12700">
+            <a:solidFill>
+              <a:srgbClr val="C4CAD1"/>
+            </a:solidFill>
+            <a:prstDash val="solid"/>
+          </a:ln>
+        </p:spPr>
+      </p:sp>
+      <p:sp>
+        <p:nvSpPr>
+          <p:cNvPr id="159" name="Shape 157"/>
+          <p:cNvSpPr/>
+          <p:nvPr/>
+        </p:nvSpPr>
+        <p:spPr>
+          <a:xfrm>
+            <a:off x="9886950" y="2581275"/>
+            <a:ext cx="361950" cy="0"/>
+          </a:xfrm>
+          <a:prstGeom prst="line">
+            <a:avLst/>
+          </a:prstGeom>
+          <a:noFill/>
+          <a:ln w="12700">
+            <a:solidFill>
+              <a:srgbClr val="C4CAD1"/>
+            </a:solidFill>
+            <a:prstDash val="solid"/>
+          </a:ln>
+        </p:spPr>
+      </p:sp>
+      <p:sp>
+        <p:nvSpPr>
+          <p:cNvPr id="160" name="Shape 158"/>
+          <p:cNvSpPr/>
+          <p:nvPr/>
+        </p:nvSpPr>
+        <p:spPr>
+          <a:xfrm>
+            <a:off x="10344150" y="2581275"/>
+            <a:ext cx="800100" cy="0"/>
+          </a:xfrm>
+          <a:prstGeom prst="line">
+            <a:avLst/>
+          </a:prstGeom>
+          <a:noFill/>
+          <a:ln w="12700">
+            <a:solidFill>
+              <a:srgbClr val="C4CAD1"/>
+            </a:solidFill>
+            <a:prstDash val="solid"/>
+          </a:ln>
+        </p:spPr>
+      </p:sp>
+      <p:sp>
+        <p:nvSpPr>
+          <p:cNvPr id="161" name="Text 159"/>
+          <p:cNvSpPr txBox="1"/>
+          <p:nvPr/>
+        </p:nvSpPr>
+        <p:spPr>
+          <a:xfrm>
+            <a:off x="9791700" y="2705100"/>
+            <a:ext cx="1581150" cy="405051"/>
+          </a:xfrm>
+          <a:prstGeom prst="rect">
+            <a:avLst/>
+          </a:prstGeom>
+          <a:noFill/>
+          <a:ln/>
+        </p:spPr>
+        <p:txBody>
+          <a:bodyPr wrap="square" lIns="0" tIns="0" rIns="0" bIns="0" rtlCol="0" anchor="t"/>
+          <a:lstStyle/>
+          <a:p>
+            <a:pPr algn="l" indent="0" marL="0">
+              <a:lnSpc>
+                <a:spcPts val="1063"/>
+              </a:lnSpc>
+              <a:buNone/>
+            </a:pPr>
+            <a:r>
+              <a:rPr lang="en-US" sz="788" dirty="0">
+                <a:solidFill>
+                  <a:srgbClr val="5A5A5A"/>
+                </a:solidFill>
+                <a:latin typeface="Malgun Gothic" pitchFamily="34" charset="0"/>
+                <a:ea typeface="Malgun Gothic" pitchFamily="34" charset="-122"/>
+                <a:cs typeface="Malgun Gothic" pitchFamily="34" charset="-120"/>
+              </a:rPr>
+              <a:t>곡선에서 영하 20도부터 40도까지 61개 값을 읽어 신고 표를 만듭니다.</a:t>
+            </a:r>
+            <a:endParaRPr lang="en-US" sz="788" dirty="0"/>
+          </a:p>
+        </p:txBody>
+      </p:sp>
+      <p:sp>
+        <p:nvSpPr>
+          <p:cNvPr id="162" name="Text 160"/>
+          <p:cNvSpPr txBox="1"/>
+          <p:nvPr/>
+        </p:nvSpPr>
+        <p:spPr>
+          <a:xfrm>
+            <a:off x="6324600" y="3200400"/>
+            <a:ext cx="4991100" cy="295751"/>
+          </a:xfrm>
+          <a:prstGeom prst="rect">
+            <a:avLst/>
+          </a:prstGeom>
+          <a:noFill/>
+          <a:ln/>
+        </p:spPr>
+        <p:txBody>
+          <a:bodyPr wrap="square" lIns="0" tIns="0" rIns="0" bIns="0" rtlCol="0" anchor="t"/>
+          <a:lstStyle/>
+          <a:p>
+            <a:pPr algn="l" indent="0" marL="0">
+              <a:lnSpc>
+                <a:spcPts val="1164"/>
+              </a:lnSpc>
+              <a:buNone/>
+            </a:pPr>
+            <a:r>
+              <a:rPr lang="en-US" sz="863" dirty="0">
+                <a:solidFill>
+                  <a:srgbClr val="333333"/>
+                </a:solidFill>
+                <a:latin typeface="Malgun Gothic" pitchFamily="34" charset="0"/>
+                <a:ea typeface="Malgun Gothic" pitchFamily="34" charset="-122"/>
+                <a:cs typeface="Malgun Gothic" pitchFamily="34" charset="-120"/>
+              </a:rPr>
+              <a:t>어떤 곡선을 쓸지는 여기서 정하지 않았습니다 — 후보 회귀 모델 7가지를 겨루게 한 결과가 다음 장입니다.</a:t>
+            </a:r>
+            <a:endParaRPr lang="en-US" sz="863" dirty="0"/>
+          </a:p>
+        </p:txBody>
+      </p:sp>
+      <p:sp>
+        <p:nvSpPr>
+          <p:cNvPr id="163" name="Shape 161"/>
+          <p:cNvSpPr/>
+          <p:nvPr/>
+        </p:nvSpPr>
+        <p:spPr>
+          <a:xfrm>
+            <a:off x="685800" y="3895725"/>
+            <a:ext cx="10820400" cy="2200275"/>
+          </a:xfrm>
+          <a:prstGeom prst="rect">
+            <a:avLst/>
+          </a:prstGeom>
+          <a:solidFill>
+            <a:srgbClr val="FFFFFF"/>
+          </a:solidFill>
+          <a:ln w="12700">
+            <a:solidFill>
+              <a:srgbClr val="C9D0D8"/>
+            </a:solidFill>
+            <a:prstDash val="solid"/>
+          </a:ln>
+        </p:spPr>
+      </p:sp>
+      <p:sp>
+        <p:nvSpPr>
+          <p:cNvPr id="164" name="Shape 162"/>
+          <p:cNvSpPr/>
+          <p:nvPr/>
+        </p:nvSpPr>
+        <p:spPr>
+          <a:xfrm>
+            <a:off x="685800" y="3771900"/>
+            <a:ext cx="2609850" cy="247650"/>
+          </a:xfrm>
+          <a:prstGeom prst="rect">
+            <a:avLst>
+              <a:gd name="adj" fmla="val 44308"/>
+            </a:avLst>
+          </a:prstGeom>
+          <a:solidFill>
+            <a:srgbClr val="EA002C"/>
+          </a:solidFill>
+          <a:ln/>
+        </p:spPr>
+      </p:sp>
+      <p:sp>
+        <p:nvSpPr>
+          <p:cNvPr id="165" name="Text 163"/>
+          <p:cNvSpPr txBox="1"/>
+          <p:nvPr/>
+        </p:nvSpPr>
+        <p:spPr>
+          <a:xfrm>
+            <a:off x="819150" y="3829050"/>
+            <a:ext cx="152400" cy="142875"/>
+          </a:xfrm>
+          <a:prstGeom prst="rect">
+            <a:avLst/>
+          </a:prstGeom>
+          <a:noFill/>
+          <a:ln/>
+        </p:spPr>
+        <p:txBody>
+          <a:bodyPr wrap="square" lIns="0" tIns="0" rIns="0" bIns="0" rtlCol="0" anchor="t"/>
+          <a:lstStyle/>
+          <a:p>
+            <a:pPr algn="l" indent="0" marL="0">
+              <a:lnSpc>
+                <a:spcPts val="1125"/>
+              </a:lnSpc>
+              <a:buNone/>
+            </a:pPr>
+            <a:r>
+              <a:rPr lang="en-US" sz="938" b="1" dirty="0">
+                <a:solidFill>
+                  <a:srgbClr val="FFFFFF"/>
+                </a:solidFill>
+                <a:latin typeface="Consolas" pitchFamily="34" charset="0"/>
+                <a:ea typeface="Consolas" pitchFamily="34" charset="-122"/>
+                <a:cs typeface="Consolas" pitchFamily="34" charset="-120"/>
+              </a:rPr>
+              <a:t>3</a:t>
+            </a:r>
+            <a:endParaRPr lang="en-US" sz="938" dirty="0"/>
+          </a:p>
+        </p:txBody>
+      </p:sp>
+      <p:sp>
+        <p:nvSpPr>
+          <p:cNvPr id="166" name="Text 164"/>
+          <p:cNvSpPr txBox="1"/>
+          <p:nvPr/>
+        </p:nvSpPr>
+        <p:spPr>
+          <a:xfrm>
+            <a:off x="1009650" y="3829050"/>
+            <a:ext cx="2171700" cy="154305"/>
           </a:xfrm>
           <a:prstGeom prst="rect">
             <a:avLst/>
@@ -28026,15 +30995,57 @@
                 <a:ea typeface="Malgun Gothic" pitchFamily="34" charset="-122"/>
                 <a:cs typeface="Malgun Gothic" pitchFamily="34" charset="-120"/>
               </a:rPr>
-              <a:t>도구 화면 · 출력곡선 비교</a:t>
+              <a:t>도구 화면 · 공급가능용량 산정</a:t>
             </a:r>
             <a:endParaRPr lang="en-US" sz="1013" dirty="0"/>
+          </a:p>
+        </p:txBody>
+      </p:sp>
+      <p:sp>
+        <p:nvSpPr>
+          <p:cNvPr id="167" name="Text 165"/>
+          <p:cNvSpPr txBox="1"/>
+          <p:nvPr/>
+        </p:nvSpPr>
+        <p:spPr>
+          <a:xfrm>
+            <a:off x="9658350" y="3962400"/>
+            <a:ext cx="1733550" cy="125730"/>
+          </a:xfrm>
+          <a:prstGeom prst="rect">
+            <a:avLst/>
+          </a:prstGeom>
+          <a:noFill/>
+          <a:ln/>
+        </p:spPr>
+        <p:txBody>
+          <a:bodyPr wrap="square" lIns="0" tIns="0" rIns="0" bIns="0" rtlCol="0" anchor="t"/>
+          <a:lstStyle/>
+          <a:p>
+            <a:pPr algn="r" indent="0" marL="0">
+              <a:lnSpc>
+                <a:spcPts val="990"/>
+              </a:lnSpc>
+              <a:buNone/>
+            </a:pPr>
+            <a:r>
+              <a:rPr lang="en-US" sz="825" dirty="0">
+                <a:solidFill>
+                  <a:srgbClr val="8C8C8C"/>
+                </a:solidFill>
+                <a:latin typeface="Malgun Gothic" pitchFamily="34" charset="0"/>
+                <a:ea typeface="Malgun Gothic" pitchFamily="34" charset="-122"/>
+                <a:cs typeface="Malgun Gothic" pitchFamily="34" charset="-120"/>
+              </a:rPr>
+              <a:t>날짜와 시각만 넣고 누른 결과</a:t>
+            </a:r>
+            <a:endParaRPr lang="en-US" sz="825" dirty="0"/>
           </a:p>
         </p:txBody>
       </p:sp>
       <p:pic>
         <p:nvPicPr>
-          <p:cNvPr id="37" name="Image 0" descr="/home/user/Narae-AI/docs/ppt/assets/tool_win_curve_s.png">    </p:cNvPr>
+          <p:cNvPr id="168" name="Image 0" descr="/home/user/Narae-AI/docs/ppt/assets/tool_win_run_t.png">    </p:cNvPr>
           <p:cNvPicPr>
             <a:picLocks noChangeAspect="1"/>
           </p:cNvPicPr>
@@ -28048,8 +31059,8 @@
         </p:blipFill>
         <p:spPr>
           <a:xfrm>
-            <a:off x="876300" y="2838450"/>
-            <a:ext cx="8572500" cy="3009900"/>
+            <a:off x="876300" y="4133850"/>
+            <a:ext cx="6791325" cy="1962150"/>
           </a:xfrm>
           <a:prstGeom prst="rect">
             <a:avLst/>
@@ -28058,14 +31069,14 @@
       </p:pic>
       <p:sp>
         <p:nvSpPr>
-          <p:cNvPr id="38" name="Shape 35"/>
-          <p:cNvSpPr/>
-          <p:nvPr/>
-        </p:nvSpPr>
-        <p:spPr>
-          <a:xfrm>
-            <a:off x="866775" y="2828925"/>
-            <a:ext cx="8591550" cy="3028950"/>
+          <p:cNvPr id="169" name="Shape 166"/>
+          <p:cNvSpPr/>
+          <p:nvPr/>
+        </p:nvSpPr>
+        <p:spPr>
+          <a:xfrm>
+            <a:off x="866775" y="4124325"/>
+            <a:ext cx="6810375" cy="1981200"/>
           </a:xfrm>
           <a:prstGeom prst="rect">
             <a:avLst/>
@@ -28080,33 +31091,33 @@
       </p:sp>
       <p:sp>
         <p:nvSpPr>
-          <p:cNvPr id="39" name="Text 36"/>
-          <p:cNvSpPr txBox="1"/>
-          <p:nvPr/>
-        </p:nvSpPr>
-        <p:spPr>
-          <a:xfrm>
-            <a:off x="9639300" y="2838450"/>
-            <a:ext cx="1619250" cy="125730"/>
-          </a:xfrm>
-          <a:prstGeom prst="rect">
-            <a:avLst/>
-          </a:prstGeom>
-          <a:noFill/>
-          <a:ln/>
-        </p:spPr>
-        <p:txBody>
-          <a:bodyPr wrap="square" lIns="0" tIns="0" rIns="0" bIns="0" rtlCol="0" anchor="t"/>
-          <a:lstStyle/>
-          <a:p>
-            <a:pPr algn="l" indent="0" marL="0">
-              <a:lnSpc>
-                <a:spcPts val="990"/>
-              </a:lnSpc>
-              <a:buNone/>
-            </a:pPr>
-            <a:r>
-              <a:rPr lang="en-US" sz="825" b="1" dirty="0">
+          <p:cNvPr id="170" name="Text 167"/>
+          <p:cNvSpPr txBox="1"/>
+          <p:nvPr/>
+        </p:nvSpPr>
+        <p:spPr>
+          <a:xfrm>
+            <a:off x="7858125" y="4133850"/>
+            <a:ext cx="3400425" cy="131445"/>
+          </a:xfrm>
+          <a:prstGeom prst="rect">
+            <a:avLst/>
+          </a:prstGeom>
+          <a:noFill/>
+          <a:ln/>
+        </p:spPr>
+        <p:txBody>
+          <a:bodyPr wrap="square" lIns="0" tIns="0" rIns="0" bIns="0" rtlCol="0" anchor="t"/>
+          <a:lstStyle/>
+          <a:p>
+            <a:pPr algn="l" indent="0" marL="0">
+              <a:lnSpc>
+                <a:spcPts val="1035"/>
+              </a:lnSpc>
+              <a:buNone/>
+            </a:pPr>
+            <a:r>
+              <a:rPr lang="en-US" sz="863" b="1" dirty="0">
                 <a:solidFill>
                   <a:srgbClr val="EA002C"/>
                 </a:solidFill>
@@ -28114,7 +31125,49 @@
                 <a:ea typeface="Malgun Gothic" pitchFamily="34" charset="-122"/>
                 <a:cs typeface="Malgun Gothic" pitchFamily="34" charset="-120"/>
               </a:rPr>
-              <a:t>위 칸</a:t>
+              <a:t>한 화면</a:t>
+            </a:r>
+            <a:endParaRPr lang="en-US" sz="863" dirty="0"/>
+          </a:p>
+        </p:txBody>
+      </p:sp>
+      <p:sp>
+        <p:nvSpPr>
+          <p:cNvPr id="171" name="Text 168"/>
+          <p:cNvSpPr txBox="1"/>
+          <p:nvPr/>
+        </p:nvSpPr>
+        <p:spPr>
+          <a:xfrm>
+            <a:off x="7858125" y="4305300"/>
+            <a:ext cx="3400425" cy="424339"/>
+          </a:xfrm>
+          <a:prstGeom prst="rect">
+            <a:avLst/>
+          </a:prstGeom>
+          <a:noFill/>
+          <a:ln/>
+        </p:spPr>
+        <p:txBody>
+          <a:bodyPr wrap="square" lIns="0" tIns="0" rIns="0" bIns="0" rtlCol="0" anchor="t"/>
+          <a:lstStyle/>
+          <a:p>
+            <a:pPr algn="l" indent="0" marL="0">
+              <a:lnSpc>
+                <a:spcPts val="1114"/>
+              </a:lnSpc>
+              <a:buNone/>
+            </a:pPr>
+            <a:r>
+              <a:rPr lang="en-US" sz="825" dirty="0">
+                <a:solidFill>
+                  <a:srgbClr val="5A5A5A"/>
+                </a:solidFill>
+                <a:latin typeface="Malgun Gothic" pitchFamily="34" charset="0"/>
+                <a:ea typeface="Malgun Gothic" pitchFamily="34" charset="-122"/>
+                <a:cs typeface="Malgun Gothic" pitchFamily="34" charset="-120"/>
+              </a:rPr>
+              <a:t>엑셀 4개를 오가던 일이 이 화면 하나로 끝납니다.</a:t>
             </a:r>
             <a:endParaRPr lang="en-US" sz="825" dirty="0"/>
           </a:p>
@@ -28122,28 +31175,70 @@
       </p:sp>
       <p:sp>
         <p:nvSpPr>
-          <p:cNvPr id="40" name="Text 37"/>
-          <p:cNvSpPr txBox="1"/>
-          <p:nvPr/>
-        </p:nvSpPr>
-        <p:spPr>
-          <a:xfrm>
-            <a:off x="9639300" y="3009900"/>
-            <a:ext cx="1619250" cy="586740"/>
-          </a:xfrm>
-          <a:prstGeom prst="rect">
-            <a:avLst/>
-          </a:prstGeom>
-          <a:noFill/>
-          <a:ln/>
-        </p:spPr>
-        <p:txBody>
-          <a:bodyPr wrap="square" lIns="0" tIns="0" rIns="0" bIns="0" rtlCol="0" anchor="t"/>
-          <a:lstStyle/>
-          <a:p>
-            <a:pPr algn="l" indent="0" marL="0">
-              <a:lnSpc>
-                <a:spcPts val="1155"/>
+          <p:cNvPr id="172" name="Text 169"/>
+          <p:cNvSpPr txBox="1"/>
+          <p:nvPr/>
+        </p:nvSpPr>
+        <p:spPr>
+          <a:xfrm>
+            <a:off x="7858125" y="4800600"/>
+            <a:ext cx="3400425" cy="131445"/>
+          </a:xfrm>
+          <a:prstGeom prst="rect">
+            <a:avLst/>
+          </a:prstGeom>
+          <a:noFill/>
+          <a:ln/>
+        </p:spPr>
+        <p:txBody>
+          <a:bodyPr wrap="square" lIns="0" tIns="0" rIns="0" bIns="0" rtlCol="0" anchor="t"/>
+          <a:lstStyle/>
+          <a:p>
+            <a:pPr algn="l" indent="0" marL="0">
+              <a:lnSpc>
+                <a:spcPts val="1035"/>
+              </a:lnSpc>
+              <a:buNone/>
+            </a:pPr>
+            <a:r>
+              <a:rPr lang="en-US" sz="863" b="1" dirty="0">
+                <a:solidFill>
+                  <a:srgbClr val="EA002C"/>
+                </a:solidFill>
+                <a:latin typeface="Malgun Gothic" pitchFamily="34" charset="0"/>
+                <a:ea typeface="Malgun Gothic" pitchFamily="34" charset="-122"/>
+                <a:cs typeface="Malgun Gothic" pitchFamily="34" charset="-120"/>
+              </a:rPr>
+              <a:t>이론값 · 보정값 · 현실화</a:t>
+            </a:r>
+            <a:endParaRPr lang="en-US" sz="863" dirty="0"/>
+          </a:p>
+        </p:txBody>
+      </p:sp>
+      <p:sp>
+        <p:nvSpPr>
+          <p:cNvPr id="173" name="Text 170"/>
+          <p:cNvSpPr txBox="1"/>
+          <p:nvPr/>
+        </p:nvSpPr>
+        <p:spPr>
+          <a:xfrm>
+            <a:off x="7858125" y="4972050"/>
+            <a:ext cx="3400425" cy="424339"/>
+          </a:xfrm>
+          <a:prstGeom prst="rect">
+            <a:avLst/>
+          </a:prstGeom>
+          <a:noFill/>
+          <a:ln/>
+        </p:spPr>
+        <p:txBody>
+          <a:bodyPr wrap="square" lIns="0" tIns="0" rIns="0" bIns="0" rtlCol="0" anchor="t"/>
+          <a:lstStyle/>
+          <a:p>
+            <a:pPr algn="l" indent="0" marL="0">
+              <a:lnSpc>
+                <a:spcPts val="1114"/>
               </a:lnSpc>
               <a:buNone/>
             </a:pPr>
@@ -28156,7 +31251,7 @@
                 <a:ea typeface="Malgun Gothic" pitchFamily="34" charset="-122"/>
                 <a:cs typeface="Malgun Gothic" pitchFamily="34" charset="-120"/>
               </a:rPr>
-              <a:t>이론값(점선)과 도구가 신고하는 값(빨간 선)</a:t>
+              <a:t>제작사 계산식으로 낸 값, 온도마다 다른 더하는 값, 실제로 신고하는 값.</a:t>
             </a:r>
             <a:endParaRPr lang="en-US" sz="825" dirty="0"/>
           </a:p>
@@ -28164,33 +31259,33 @@
       </p:sp>
       <p:sp>
         <p:nvSpPr>
-          <p:cNvPr id="41" name="Text 38"/>
-          <p:cNvSpPr txBox="1"/>
-          <p:nvPr/>
-        </p:nvSpPr>
-        <p:spPr>
-          <a:xfrm>
-            <a:off x="9639300" y="3752850"/>
-            <a:ext cx="1619250" cy="125730"/>
-          </a:xfrm>
-          <a:prstGeom prst="rect">
-            <a:avLst/>
-          </a:prstGeom>
-          <a:noFill/>
-          <a:ln/>
-        </p:spPr>
-        <p:txBody>
-          <a:bodyPr wrap="square" lIns="0" tIns="0" rIns="0" bIns="0" rtlCol="0" anchor="t"/>
-          <a:lstStyle/>
-          <a:p>
-            <a:pPr algn="l" indent="0" marL="0">
-              <a:lnSpc>
-                <a:spcPts val="990"/>
-              </a:lnSpc>
-              <a:buNone/>
-            </a:pPr>
-            <a:r>
-              <a:rPr lang="en-US" sz="825" b="1" dirty="0">
+          <p:cNvPr id="174" name="Text 171"/>
+          <p:cNvSpPr txBox="1"/>
+          <p:nvPr/>
+        </p:nvSpPr>
+        <p:spPr>
+          <a:xfrm>
+            <a:off x="7858125" y="5467350"/>
+            <a:ext cx="3400425" cy="131445"/>
+          </a:xfrm>
+          <a:prstGeom prst="rect">
+            <a:avLst/>
+          </a:prstGeom>
+          <a:noFill/>
+          <a:ln/>
+        </p:spPr>
+        <p:txBody>
+          <a:bodyPr wrap="square" lIns="0" tIns="0" rIns="0" bIns="0" rtlCol="0" anchor="t"/>
+          <a:lstStyle/>
+          <a:p>
+            <a:pPr algn="l" indent="0" marL="0">
+              <a:lnSpc>
+                <a:spcPts val="1035"/>
+              </a:lnSpc>
+              <a:buNone/>
+            </a:pPr>
+            <a:r>
+              <a:rPr lang="en-US" sz="863" b="1" dirty="0">
                 <a:solidFill>
                   <a:srgbClr val="EA002C"/>
                 </a:solidFill>
@@ -28198,7 +31293,49 @@
                 <a:ea typeface="Malgun Gothic" pitchFamily="34" charset="-122"/>
                 <a:cs typeface="Malgun Gothic" pitchFamily="34" charset="-120"/>
               </a:rPr>
-              <a:t>아래 칸</a:t>
+              <a:t>온도 61구간</a:t>
+            </a:r>
+            <a:endParaRPr lang="en-US" sz="863" dirty="0"/>
+          </a:p>
+        </p:txBody>
+      </p:sp>
+      <p:sp>
+        <p:nvSpPr>
+          <p:cNvPr id="175" name="Text 172"/>
+          <p:cNvSpPr txBox="1"/>
+          <p:nvPr/>
+        </p:nvSpPr>
+        <p:spPr>
+          <a:xfrm>
+            <a:off x="7858125" y="5638800"/>
+            <a:ext cx="3400425" cy="424339"/>
+          </a:xfrm>
+          <a:prstGeom prst="rect">
+            <a:avLst/>
+          </a:prstGeom>
+          <a:noFill/>
+          <a:ln/>
+        </p:spPr>
+        <p:txBody>
+          <a:bodyPr wrap="square" lIns="0" tIns="0" rIns="0" bIns="0" rtlCol="0" anchor="t"/>
+          <a:lstStyle/>
+          <a:p>
+            <a:pPr algn="l" indent="0" marL="0">
+              <a:lnSpc>
+                <a:spcPts val="1114"/>
+              </a:lnSpc>
+              <a:buNone/>
+            </a:pPr>
+            <a:r>
+              <a:rPr lang="en-US" sz="825" dirty="0">
+                <a:solidFill>
+                  <a:srgbClr val="5A5A5A"/>
+                </a:solidFill>
+                <a:latin typeface="Malgun Gothic" pitchFamily="34" charset="0"/>
+                <a:ea typeface="Malgun Gothic" pitchFamily="34" charset="-122"/>
+                <a:cs typeface="Malgun Gothic" pitchFamily="34" charset="-120"/>
+              </a:rPr>
+              <a:t>표를 그대로 입찰에 씁니다. 손으로 옮기는 값은 없습니다.</a:t>
             </a:r>
             <a:endParaRPr lang="en-US" sz="825" dirty="0"/>
           </a:p>
@@ -28206,175 +31343,7 @@
       </p:sp>
       <p:sp>
         <p:nvSpPr>
-          <p:cNvPr id="42" name="Text 39"/>
-          <p:cNvSpPr txBox="1"/>
-          <p:nvPr/>
-        </p:nvSpPr>
-        <p:spPr>
-          <a:xfrm>
-            <a:off x="9639300" y="3924300"/>
-            <a:ext cx="1619250" cy="586740"/>
-          </a:xfrm>
-          <a:prstGeom prst="rect">
-            <a:avLst/>
-          </a:prstGeom>
-          <a:noFill/>
-          <a:ln/>
-        </p:spPr>
-        <p:txBody>
-          <a:bodyPr wrap="square" lIns="0" tIns="0" rIns="0" bIns="0" rtlCol="0" anchor="t"/>
-          <a:lstStyle/>
-          <a:p>
-            <a:pPr algn="l" indent="0" marL="0">
-              <a:lnSpc>
-                <a:spcPts val="1155"/>
-              </a:lnSpc>
-              <a:buNone/>
-            </a:pPr>
-            <a:r>
-              <a:rPr lang="en-US" sz="825" dirty="0">
-                <a:solidFill>
-                  <a:srgbClr val="5A5A5A"/>
-                </a:solidFill>
-                <a:latin typeface="Malgun Gothic" pitchFamily="34" charset="0"/>
-                <a:ea typeface="Malgun Gothic" pitchFamily="34" charset="-122"/>
-                <a:cs typeface="Malgun Gothic" pitchFamily="34" charset="-120"/>
-              </a:rPr>
-              <a:t>온도마다 더할 값(보정값)과 시험 실적 점</a:t>
-            </a:r>
-            <a:endParaRPr lang="en-US" sz="825" dirty="0"/>
-          </a:p>
-        </p:txBody>
-      </p:sp>
-      <p:sp>
-        <p:nvSpPr>
-          <p:cNvPr id="43" name="Text 40"/>
-          <p:cNvSpPr txBox="1"/>
-          <p:nvPr/>
-        </p:nvSpPr>
-        <p:spPr>
-          <a:xfrm>
-            <a:off x="9639300" y="4667250"/>
-            <a:ext cx="1619250" cy="125730"/>
-          </a:xfrm>
-          <a:prstGeom prst="rect">
-            <a:avLst/>
-          </a:prstGeom>
-          <a:noFill/>
-          <a:ln/>
-        </p:spPr>
-        <p:txBody>
-          <a:bodyPr wrap="square" lIns="0" tIns="0" rIns="0" bIns="0" rtlCol="0" anchor="t"/>
-          <a:lstStyle/>
-          <a:p>
-            <a:pPr algn="l" indent="0" marL="0">
-              <a:lnSpc>
-                <a:spcPts val="990"/>
-              </a:lnSpc>
-              <a:buNone/>
-            </a:pPr>
-            <a:r>
-              <a:rPr lang="en-US" sz="825" b="1" dirty="0">
-                <a:solidFill>
-                  <a:srgbClr val="EA002C"/>
-                </a:solidFill>
-                <a:latin typeface="Malgun Gothic" pitchFamily="34" charset="0"/>
-                <a:ea typeface="Malgun Gothic" pitchFamily="34" charset="-122"/>
-                <a:cs typeface="Malgun Gothic" pitchFamily="34" charset="-120"/>
-              </a:rPr>
-              <a:t>읽는 법</a:t>
-            </a:r>
-            <a:endParaRPr lang="en-US" sz="825" dirty="0"/>
-          </a:p>
-        </p:txBody>
-      </p:sp>
-      <p:sp>
-        <p:nvSpPr>
-          <p:cNvPr id="44" name="Text 41"/>
-          <p:cNvSpPr txBox="1"/>
-          <p:nvPr/>
-        </p:nvSpPr>
-        <p:spPr>
-          <a:xfrm>
-            <a:off x="9639300" y="4838700"/>
-            <a:ext cx="1619250" cy="586740"/>
-          </a:xfrm>
-          <a:prstGeom prst="rect">
-            <a:avLst/>
-          </a:prstGeom>
-          <a:noFill/>
-          <a:ln/>
-        </p:spPr>
-        <p:txBody>
-          <a:bodyPr wrap="square" lIns="0" tIns="0" rIns="0" bIns="0" rtlCol="0" anchor="t"/>
-          <a:lstStyle/>
-          <a:p>
-            <a:pPr algn="l" indent="0" marL="0">
-              <a:lnSpc>
-                <a:spcPts val="1155"/>
-              </a:lnSpc>
-              <a:buNone/>
-            </a:pPr>
-            <a:r>
-              <a:rPr lang="en-US" sz="825" dirty="0">
-                <a:solidFill>
-                  <a:srgbClr val="5A5A5A"/>
-                </a:solidFill>
-                <a:latin typeface="Malgun Gothic" pitchFamily="34" charset="0"/>
-                <a:ea typeface="Malgun Gothic" pitchFamily="34" charset="-122"/>
-                <a:cs typeface="Malgun Gothic" pitchFamily="34" charset="-120"/>
-              </a:rPr>
-              <a:t>두 선이 벌어진 만큼이 그 온도에서 더하는 값입니다</a:t>
-            </a:r>
-            <a:endParaRPr lang="en-US" sz="825" dirty="0"/>
-          </a:p>
-        </p:txBody>
-      </p:sp>
-      <p:sp>
-        <p:nvSpPr>
-          <p:cNvPr id="45" name="Text 42"/>
-          <p:cNvSpPr txBox="1"/>
-          <p:nvPr/>
-        </p:nvSpPr>
-        <p:spPr>
-          <a:xfrm>
-            <a:off x="876300" y="5905500"/>
-            <a:ext cx="10382250" cy="128588"/>
-          </a:xfrm>
-          <a:prstGeom prst="rect">
-            <a:avLst/>
-          </a:prstGeom>
-          <a:noFill/>
-          <a:ln/>
-        </p:spPr>
-        <p:txBody>
-          <a:bodyPr wrap="square" lIns="0" tIns="0" rIns="0" bIns="0" rtlCol="0" anchor="t"/>
-          <a:lstStyle/>
-          <a:p>
-            <a:pPr algn="l" indent="0" marL="0">
-              <a:lnSpc>
-                <a:spcPts val="1013"/>
-              </a:lnSpc>
-              <a:buNone/>
-            </a:pPr>
-            <a:r>
-              <a:rPr lang="en-US" sz="750" dirty="0">
-                <a:solidFill>
-                  <a:srgbClr val="8C8C8C"/>
-                </a:solidFill>
-                <a:latin typeface="Malgun Gothic" pitchFamily="34" charset="0"/>
-                <a:ea typeface="Malgun Gothic" pitchFamily="34" charset="-122"/>
-                <a:cs typeface="Malgun Gothic" pitchFamily="34" charset="-120"/>
-              </a:rPr>
-              <a:t>* 이 보정 곡선을 무엇으로 그리는지 — 후보 회귀 모델 7가지를 겨루게 해서 고른 과정은 다음 장에 있습니다.</a:t>
-            </a:r>
-            <a:endParaRPr lang="en-US" sz="750" dirty="0"/>
-          </a:p>
-        </p:txBody>
-      </p:sp>
-      <p:sp>
-        <p:nvSpPr>
-          <p:cNvPr id="46" name="Shape 43"/>
+          <p:cNvPr id="176" name="Shape 173"/>
           <p:cNvSpPr/>
           <p:nvPr/>
         </p:nvSpPr>
@@ -28397,7 +31366,7 @@
       </p:sp>
       <p:sp>
         <p:nvSpPr>
-          <p:cNvPr id="47" name="Shape 44"/>
+          <p:cNvPr id="177" name="Shape 174"/>
           <p:cNvSpPr/>
           <p:nvPr/>
         </p:nvSpPr>
@@ -28419,7 +31388,7 @@
       </p:sp>
       <p:sp>
         <p:nvSpPr>
-          <p:cNvPr id="48" name="Text 45"/>
+          <p:cNvPr id="178" name="Text 175"/>
           <p:cNvSpPr txBox="1"/>
           <p:nvPr/>
         </p:nvSpPr>
@@ -28461,7 +31430,7 @@
       </p:sp>
       <p:sp>
         <p:nvSpPr>
-          <p:cNvPr id="49" name="Text 46"/>
+          <p:cNvPr id="179" name="Text 176"/>
           <p:cNvSpPr txBox="1"/>
           <p:nvPr/>
         </p:nvSpPr>
@@ -28495,7 +31464,7 @@
                 <a:ea typeface="Malgun Gothic" pitchFamily="34" charset="-122"/>
                 <a:cs typeface="Malgun Gothic" pitchFamily="34" charset="-120"/>
               </a:rPr>
-              <a:t>제작사 계산식을 그대로 두었으니 다른 발전소에도 옮겨 심을 수 있습니다.</a:t>
+              <a:t>절차는 도구 하나로 합치고, 보정값은 온도별 곡선으로 내기로 정했습니다.</a:t>
             </a:r>
             <a:endParaRPr lang="en-US" sz="1163" dirty="0"/>
           </a:p>
@@ -28872,7 +31841,7 @@
                 <a:ea typeface="Malgun Gothic" pitchFamily="34" charset="-122"/>
                 <a:cs typeface="Malgun Gothic" pitchFamily="34" charset="-120"/>
               </a:rPr>
-              <a:t>회귀 모델 선정</a:t>
+              <a:t>예측 · 보정 모델 개발</a:t>
             </a:r>
             <a:endParaRPr lang="en-US" sz="2475" dirty="0"/>
           </a:p>
@@ -28914,7 +31883,7 @@
                 <a:ea typeface="Malgun Gothic" pitchFamily="34" charset="-122"/>
                 <a:cs typeface="Malgun Gothic" pitchFamily="34" charset="-120"/>
               </a:rPr>
-              <a:t>어떤 회귀 모델을 써야 하는지 우리가 정할 수 없었습니다. 후보 7가지를 같은 데이터로 겨루게 했습니다.</a:t>
+              <a:t>온도별 곡선을 어떤 회귀 모델로 그릴지 정했습니다. 후보 7가지를 같은 데이터로 겨루게 했습니다.</a:t>
             </a:r>
             <a:endParaRPr lang="en-US" sz="1275" dirty="0"/>
           </a:p>
@@ -28929,7 +31898,7 @@
         <p:spPr>
           <a:xfrm>
             <a:off x="685800" y="1724025"/>
-            <a:ext cx="10820400" cy="1781175"/>
+            <a:ext cx="10820400" cy="1685925"/>
           </a:xfrm>
           <a:prstGeom prst="rect">
             <a:avLst/>
@@ -29102,7 +32071,7 @@
         <p:spPr>
           <a:xfrm>
             <a:off x="2495550" y="1981200"/>
-            <a:ext cx="0" cy="1219200"/>
+            <a:ext cx="0" cy="1066800"/>
           </a:xfrm>
           <a:prstGeom prst="line">
             <a:avLst/>
@@ -29124,8 +32093,8 @@
         </p:nvSpPr>
         <p:spPr>
           <a:xfrm>
-            <a:off x="876300" y="2000250"/>
-            <a:ext cx="1504950" cy="131445"/>
+            <a:off x="876300" y="1981200"/>
+            <a:ext cx="1504950" cy="125730"/>
           </a:xfrm>
           <a:prstGeom prst="rect">
             <a:avLst/>
@@ -29139,12 +32108,12 @@
           <a:p>
             <a:pPr algn="r" indent="0" marL="0">
               <a:lnSpc>
-                <a:spcPts val="1035"/>
-              </a:lnSpc>
-              <a:buNone/>
-            </a:pPr>
-            <a:r>
-              <a:rPr lang="en-US" sz="863" b="1" dirty="0">
+                <a:spcPts val="990"/>
+              </a:lnSpc>
+              <a:buNone/>
+            </a:pPr>
+            <a:r>
+              <a:rPr lang="en-US" sz="825" b="1" dirty="0">
                 <a:solidFill>
                   <a:srgbClr val="EA002C"/>
                 </a:solidFill>
@@ -29154,7 +32123,7 @@
               </a:rPr>
               <a:t>GP · RBF</a:t>
             </a:r>
-            <a:endParaRPr lang="en-US" sz="863" dirty="0"/>
+            <a:endParaRPr lang="en-US" sz="825" dirty="0"/>
           </a:p>
         </p:txBody>
       </p:sp>
@@ -29166,7 +32135,7 @@
         </p:nvSpPr>
         <p:spPr>
           <a:xfrm>
-            <a:off x="2495550" y="2028825"/>
+            <a:off x="2495550" y="2000250"/>
             <a:ext cx="47625" cy="85725"/>
           </a:xfrm>
           <a:prstGeom prst="rect">
@@ -29186,8 +32155,8 @@
         </p:nvSpPr>
         <p:spPr>
           <a:xfrm>
-            <a:off x="5486400" y="2000250"/>
-            <a:ext cx="552450" cy="125730"/>
+            <a:off x="5486400" y="1981200"/>
+            <a:ext cx="552450" cy="120015"/>
           </a:xfrm>
           <a:prstGeom prst="rect">
             <a:avLst/>
@@ -29201,12 +32170,12 @@
           <a:p>
             <a:pPr algn="r" indent="0" marL="0">
               <a:lnSpc>
-                <a:spcPts val="990"/>
-              </a:lnSpc>
-              <a:buNone/>
-            </a:pPr>
-            <a:r>
-              <a:rPr lang="en-US" sz="825" b="1" dirty="0">
+                <a:spcPts val="945"/>
+              </a:lnSpc>
+              <a:buNone/>
+            </a:pPr>
+            <a:r>
+              <a:rPr lang="en-US" sz="788" b="1" dirty="0">
                 <a:solidFill>
                   <a:srgbClr val="EA002C"/>
                 </a:solidFill>
@@ -29216,7 +32185,7 @@
               </a:rPr>
               <a:t>1.301</a:t>
             </a:r>
-            <a:endParaRPr lang="en-US" sz="825" dirty="0"/>
+            <a:endParaRPr lang="en-US" sz="788" dirty="0"/>
           </a:p>
         </p:txBody>
       </p:sp>
@@ -29228,8 +32197,8 @@
         </p:nvSpPr>
         <p:spPr>
           <a:xfrm>
-            <a:off x="6115050" y="2000250"/>
-            <a:ext cx="590550" cy="125730"/>
+            <a:off x="6115050" y="1981200"/>
+            <a:ext cx="590550" cy="120015"/>
           </a:xfrm>
           <a:prstGeom prst="rect">
             <a:avLst/>
@@ -29243,12 +32212,12 @@
           <a:p>
             <a:pPr algn="r" indent="0" marL="0">
               <a:lnSpc>
-                <a:spcPts val="990"/>
-              </a:lnSpc>
-              <a:buNone/>
-            </a:pPr>
-            <a:r>
-              <a:rPr lang="en-US" sz="825" dirty="0">
+                <a:spcPts val="945"/>
+              </a:lnSpc>
+              <a:buNone/>
+            </a:pPr>
+            <a:r>
+              <a:rPr lang="en-US" sz="788" dirty="0">
                 <a:solidFill>
                   <a:srgbClr val="8C8C8C"/>
                 </a:solidFill>
@@ -29258,103 +32227,103 @@
               </a:rPr>
               <a:t>기준</a:t>
             </a:r>
+            <a:endParaRPr lang="en-US" sz="788" dirty="0"/>
+          </a:p>
+        </p:txBody>
+      </p:sp>
+      <p:sp>
+        <p:nvSpPr>
+          <p:cNvPr id="25" name="Text 23"/>
+          <p:cNvSpPr txBox="1"/>
+          <p:nvPr/>
+        </p:nvSpPr>
+        <p:spPr>
+          <a:xfrm>
+            <a:off x="6838950" y="1981200"/>
+            <a:ext cx="4419600" cy="120015"/>
+          </a:xfrm>
+          <a:prstGeom prst="rect">
+            <a:avLst/>
+          </a:prstGeom>
+          <a:noFill/>
+          <a:ln/>
+        </p:spPr>
+        <p:txBody>
+          <a:bodyPr wrap="square" lIns="0" tIns="0" rIns="0" bIns="0" rtlCol="0" anchor="t"/>
+          <a:lstStyle/>
+          <a:p>
+            <a:pPr algn="l" indent="0" marL="0">
+              <a:lnSpc>
+                <a:spcPts val="945"/>
+              </a:lnSpc>
+              <a:buNone/>
+            </a:pPr>
+            <a:r>
+              <a:rPr lang="en-US" sz="788" b="1" dirty="0">
+                <a:solidFill>
+                  <a:srgbClr val="EA002C"/>
+                </a:solidFill>
+                <a:latin typeface="Malgun Gothic" pitchFamily="34" charset="0"/>
+                <a:ea typeface="Malgun Gothic" pitchFamily="34" charset="-122"/>
+                <a:cs typeface="Malgun Gothic" pitchFamily="34" charset="-120"/>
+              </a:rPr>
+              <a:t>★ 선정 · 가장 부드러운 곡선</a:t>
+            </a:r>
+            <a:endParaRPr lang="en-US" sz="788" dirty="0"/>
+          </a:p>
+        </p:txBody>
+      </p:sp>
+      <p:sp>
+        <p:nvSpPr>
+          <p:cNvPr id="26" name="Text 24"/>
+          <p:cNvSpPr txBox="1"/>
+          <p:nvPr/>
+        </p:nvSpPr>
+        <p:spPr>
+          <a:xfrm>
+            <a:off x="876300" y="2133600"/>
+            <a:ext cx="1504950" cy="125730"/>
+          </a:xfrm>
+          <a:prstGeom prst="rect">
+            <a:avLst/>
+          </a:prstGeom>
+          <a:noFill/>
+          <a:ln/>
+        </p:spPr>
+        <p:txBody>
+          <a:bodyPr wrap="square" lIns="0" tIns="0" rIns="0" bIns="0" rtlCol="0" anchor="t"/>
+          <a:lstStyle/>
+          <a:p>
+            <a:pPr algn="r" indent="0" marL="0">
+              <a:lnSpc>
+                <a:spcPts val="990"/>
+              </a:lnSpc>
+              <a:buNone/>
+            </a:pPr>
+            <a:r>
+              <a:rPr lang="en-US" sz="825" dirty="0">
+                <a:solidFill>
+                  <a:srgbClr val="333333"/>
+                </a:solidFill>
+                <a:latin typeface="Malgun Gothic" pitchFamily="34" charset="0"/>
+                <a:ea typeface="Malgun Gothic" pitchFamily="34" charset="-122"/>
+                <a:cs typeface="Malgun Gothic" pitchFamily="34" charset="-120"/>
+              </a:rPr>
+              <a:t>GP · RQ</a:t>
+            </a:r>
             <a:endParaRPr lang="en-US" sz="825" dirty="0"/>
           </a:p>
         </p:txBody>
       </p:sp>
       <p:sp>
         <p:nvSpPr>
-          <p:cNvPr id="25" name="Text 23"/>
-          <p:cNvSpPr txBox="1"/>
-          <p:nvPr/>
-        </p:nvSpPr>
-        <p:spPr>
-          <a:xfrm>
-            <a:off x="6858000" y="2000250"/>
-            <a:ext cx="4000500" cy="125730"/>
-          </a:xfrm>
-          <a:prstGeom prst="rect">
-            <a:avLst/>
-          </a:prstGeom>
-          <a:noFill/>
-          <a:ln/>
-        </p:spPr>
-        <p:txBody>
-          <a:bodyPr wrap="square" lIns="0" tIns="0" rIns="0" bIns="0" rtlCol="0" anchor="t"/>
-          <a:lstStyle/>
-          <a:p>
-            <a:pPr algn="l" indent="0" marL="0">
-              <a:lnSpc>
-                <a:spcPts val="990"/>
-              </a:lnSpc>
-              <a:buNone/>
-            </a:pPr>
-            <a:r>
-              <a:rPr lang="en-US" sz="825" b="1" dirty="0">
-                <a:solidFill>
-                  <a:srgbClr val="EA002C"/>
-                </a:solidFill>
-                <a:latin typeface="Malgun Gothic" pitchFamily="34" charset="0"/>
-                <a:ea typeface="Malgun Gothic" pitchFamily="34" charset="-122"/>
-                <a:cs typeface="Malgun Gothic" pitchFamily="34" charset="-120"/>
-              </a:rPr>
-              <a:t>★ 선정</a:t>
-            </a:r>
-            <a:endParaRPr lang="en-US" sz="825" dirty="0"/>
-          </a:p>
-        </p:txBody>
-      </p:sp>
-      <p:sp>
-        <p:nvSpPr>
-          <p:cNvPr id="26" name="Text 24"/>
-          <p:cNvSpPr txBox="1"/>
-          <p:nvPr/>
-        </p:nvSpPr>
-        <p:spPr>
-          <a:xfrm>
-            <a:off x="876300" y="2171700"/>
-            <a:ext cx="1504950" cy="131445"/>
-          </a:xfrm>
-          <a:prstGeom prst="rect">
-            <a:avLst/>
-          </a:prstGeom>
-          <a:noFill/>
-          <a:ln/>
-        </p:spPr>
-        <p:txBody>
-          <a:bodyPr wrap="square" lIns="0" tIns="0" rIns="0" bIns="0" rtlCol="0" anchor="t"/>
-          <a:lstStyle/>
-          <a:p>
-            <a:pPr algn="r" indent="0" marL="0">
-              <a:lnSpc>
-                <a:spcPts val="1035"/>
-              </a:lnSpc>
-              <a:buNone/>
-            </a:pPr>
-            <a:r>
-              <a:rPr lang="en-US" sz="863" dirty="0">
-                <a:solidFill>
-                  <a:srgbClr val="333333"/>
-                </a:solidFill>
-                <a:latin typeface="Malgun Gothic" pitchFamily="34" charset="0"/>
-                <a:ea typeface="Malgun Gothic" pitchFamily="34" charset="-122"/>
-                <a:cs typeface="Malgun Gothic" pitchFamily="34" charset="-120"/>
-              </a:rPr>
-              <a:t>GP · RQ</a:t>
-            </a:r>
-            <a:endParaRPr lang="en-US" sz="863" dirty="0"/>
-          </a:p>
-        </p:txBody>
-      </p:sp>
-      <p:sp>
-        <p:nvSpPr>
           <p:cNvPr id="27" name="Shape 25"/>
           <p:cNvSpPr/>
           <p:nvPr/>
         </p:nvSpPr>
         <p:spPr>
           <a:xfrm>
-            <a:off x="2505075" y="2209800"/>
+            <a:off x="2505075" y="2162175"/>
             <a:ext cx="66675" cy="66675"/>
           </a:xfrm>
           <a:prstGeom prst="rect">
@@ -29374,8 +32343,8 @@
         </p:nvSpPr>
         <p:spPr>
           <a:xfrm>
-            <a:off x="5486400" y="2171700"/>
-            <a:ext cx="552450" cy="125730"/>
+            <a:off x="5486400" y="2133600"/>
+            <a:ext cx="552450" cy="120015"/>
           </a:xfrm>
           <a:prstGeom prst="rect">
             <a:avLst/>
@@ -29389,12 +32358,12 @@
           <a:p>
             <a:pPr algn="r" indent="0" marL="0">
               <a:lnSpc>
-                <a:spcPts val="990"/>
-              </a:lnSpc>
-              <a:buNone/>
-            </a:pPr>
-            <a:r>
-              <a:rPr lang="en-US" sz="825" dirty="0">
+                <a:spcPts val="945"/>
+              </a:lnSpc>
+              <a:buNone/>
+            </a:pPr>
+            <a:r>
+              <a:rPr lang="en-US" sz="788" dirty="0">
                 <a:solidFill>
                   <a:srgbClr val="5A5A5A"/>
                 </a:solidFill>
@@ -29404,7 +32373,7 @@
               </a:rPr>
               <a:t>1.305</a:t>
             </a:r>
-            <a:endParaRPr lang="en-US" sz="825" dirty="0"/>
+            <a:endParaRPr lang="en-US" sz="788" dirty="0"/>
           </a:p>
         </p:txBody>
       </p:sp>
@@ -29416,8 +32385,8 @@
         </p:nvSpPr>
         <p:spPr>
           <a:xfrm>
-            <a:off x="6115050" y="2171700"/>
-            <a:ext cx="590550" cy="125730"/>
+            <a:off x="6115050" y="2133600"/>
+            <a:ext cx="590550" cy="120015"/>
           </a:xfrm>
           <a:prstGeom prst="rect">
             <a:avLst/>
@@ -29431,12 +32400,12 @@
           <a:p>
             <a:pPr algn="r" indent="0" marL="0">
               <a:lnSpc>
-                <a:spcPts val="990"/>
-              </a:lnSpc>
-              <a:buNone/>
-            </a:pPr>
-            <a:r>
-              <a:rPr lang="en-US" sz="825" dirty="0">
+                <a:spcPts val="945"/>
+              </a:lnSpc>
+              <a:buNone/>
+            </a:pPr>
+            <a:r>
+              <a:rPr lang="en-US" sz="788" dirty="0">
                 <a:solidFill>
                   <a:srgbClr val="FF6F0F"/>
                 </a:solidFill>
@@ -29446,103 +32415,103 @@
               </a:rPr>
               <a:t>+0.004</a:t>
             </a:r>
+            <a:endParaRPr lang="en-US" sz="788" dirty="0"/>
+          </a:p>
+        </p:txBody>
+      </p:sp>
+      <p:sp>
+        <p:nvSpPr>
+          <p:cNvPr id="30" name="Text 28"/>
+          <p:cNvSpPr txBox="1"/>
+          <p:nvPr/>
+        </p:nvSpPr>
+        <p:spPr>
+          <a:xfrm>
+            <a:off x="6838950" y="2133600"/>
+            <a:ext cx="4419600" cy="120015"/>
+          </a:xfrm>
+          <a:prstGeom prst="rect">
+            <a:avLst/>
+          </a:prstGeom>
+          <a:noFill/>
+          <a:ln/>
+        </p:spPr>
+        <p:txBody>
+          <a:bodyPr wrap="square" lIns="0" tIns="0" rIns="0" bIns="0" rtlCol="0" anchor="t"/>
+          <a:lstStyle/>
+          <a:p>
+            <a:pPr algn="l" indent="0" marL="0">
+              <a:lnSpc>
+                <a:spcPts val="945"/>
+              </a:lnSpc>
+              <a:buNone/>
+            </a:pPr>
+            <a:r>
+              <a:rPr lang="en-US" sz="788" dirty="0">
+                <a:solidFill>
+                  <a:srgbClr val="5A5A5A"/>
+                </a:solidFill>
+                <a:latin typeface="Malgun Gothic" pitchFamily="34" charset="0"/>
+                <a:ea typeface="Malgun Gothic" pitchFamily="34" charset="-122"/>
+                <a:cs typeface="Malgun Gothic" pitchFamily="34" charset="-120"/>
+              </a:rPr>
+              <a:t>완만한 물결과 급한 물결을 섞은 곡선</a:t>
+            </a:r>
+            <a:endParaRPr lang="en-US" sz="788" dirty="0"/>
+          </a:p>
+        </p:txBody>
+      </p:sp>
+      <p:sp>
+        <p:nvSpPr>
+          <p:cNvPr id="31" name="Text 29"/>
+          <p:cNvSpPr txBox="1"/>
+          <p:nvPr/>
+        </p:nvSpPr>
+        <p:spPr>
+          <a:xfrm>
+            <a:off x="876300" y="2286000"/>
+            <a:ext cx="1504950" cy="125730"/>
+          </a:xfrm>
+          <a:prstGeom prst="rect">
+            <a:avLst/>
+          </a:prstGeom>
+          <a:noFill/>
+          <a:ln/>
+        </p:spPr>
+        <p:txBody>
+          <a:bodyPr wrap="square" lIns="0" tIns="0" rIns="0" bIns="0" rtlCol="0" anchor="t"/>
+          <a:lstStyle/>
+          <a:p>
+            <a:pPr algn="r" indent="0" marL="0">
+              <a:lnSpc>
+                <a:spcPts val="990"/>
+              </a:lnSpc>
+              <a:buNone/>
+            </a:pPr>
+            <a:r>
+              <a:rPr lang="en-US" sz="825" dirty="0">
+                <a:solidFill>
+                  <a:srgbClr val="333333"/>
+                </a:solidFill>
+                <a:latin typeface="Malgun Gothic" pitchFamily="34" charset="0"/>
+                <a:ea typeface="Malgun Gothic" pitchFamily="34" charset="-122"/>
+                <a:cs typeface="Malgun Gothic" pitchFamily="34" charset="-120"/>
+              </a:rPr>
+              <a:t>GP · Matérn 5/2</a:t>
+            </a:r>
             <a:endParaRPr lang="en-US" sz="825" dirty="0"/>
           </a:p>
         </p:txBody>
       </p:sp>
       <p:sp>
         <p:nvSpPr>
-          <p:cNvPr id="30" name="Text 28"/>
-          <p:cNvSpPr txBox="1"/>
-          <p:nvPr/>
-        </p:nvSpPr>
-        <p:spPr>
-          <a:xfrm>
-            <a:off x="6858000" y="2171700"/>
-            <a:ext cx="4000500" cy="125730"/>
-          </a:xfrm>
-          <a:prstGeom prst="rect">
-            <a:avLst/>
-          </a:prstGeom>
-          <a:noFill/>
-          <a:ln/>
-        </p:spPr>
-        <p:txBody>
-          <a:bodyPr wrap="square" lIns="0" tIns="0" rIns="0" bIns="0" rtlCol="0" anchor="t"/>
-          <a:lstStyle/>
-          <a:p>
-            <a:pPr algn="l" indent="0" marL="0">
-              <a:lnSpc>
-                <a:spcPts val="990"/>
-              </a:lnSpc>
-              <a:buNone/>
-            </a:pPr>
-            <a:r>
-              <a:rPr lang="en-US" sz="825" dirty="0">
-                <a:solidFill>
-                  <a:srgbClr val="5A5A5A"/>
-                </a:solidFill>
-                <a:latin typeface="Malgun Gothic" pitchFamily="34" charset="0"/>
-                <a:ea typeface="Malgun Gothic" pitchFamily="34" charset="-122"/>
-                <a:cs typeface="Malgun Gothic" pitchFamily="34" charset="-120"/>
-              </a:rPr>
-              <a:t>완만한 물결과 급한 물결을 섞은 곡선</a:t>
-            </a:r>
-            <a:endParaRPr lang="en-US" sz="825" dirty="0"/>
-          </a:p>
-        </p:txBody>
-      </p:sp>
-      <p:sp>
-        <p:nvSpPr>
-          <p:cNvPr id="31" name="Text 29"/>
-          <p:cNvSpPr txBox="1"/>
-          <p:nvPr/>
-        </p:nvSpPr>
-        <p:spPr>
-          <a:xfrm>
-            <a:off x="876300" y="2343150"/>
-            <a:ext cx="1504950" cy="131445"/>
-          </a:xfrm>
-          <a:prstGeom prst="rect">
-            <a:avLst/>
-          </a:prstGeom>
-          <a:noFill/>
-          <a:ln/>
-        </p:spPr>
-        <p:txBody>
-          <a:bodyPr wrap="square" lIns="0" tIns="0" rIns="0" bIns="0" rtlCol="0" anchor="t"/>
-          <a:lstStyle/>
-          <a:p>
-            <a:pPr algn="r" indent="0" marL="0">
-              <a:lnSpc>
-                <a:spcPts val="1035"/>
-              </a:lnSpc>
-              <a:buNone/>
-            </a:pPr>
-            <a:r>
-              <a:rPr lang="en-US" sz="863" dirty="0">
-                <a:solidFill>
-                  <a:srgbClr val="333333"/>
-                </a:solidFill>
-                <a:latin typeface="Malgun Gothic" pitchFamily="34" charset="0"/>
-                <a:ea typeface="Malgun Gothic" pitchFamily="34" charset="-122"/>
-                <a:cs typeface="Malgun Gothic" pitchFamily="34" charset="-120"/>
-              </a:rPr>
-              <a:t>GP · Matérn 5/2</a:t>
-            </a:r>
-            <a:endParaRPr lang="en-US" sz="863" dirty="0"/>
-          </a:p>
-        </p:txBody>
-      </p:sp>
-      <p:sp>
-        <p:nvSpPr>
           <p:cNvPr id="32" name="Shape 30"/>
           <p:cNvSpPr/>
           <p:nvPr/>
         </p:nvSpPr>
         <p:spPr>
           <a:xfrm>
-            <a:off x="2505075" y="2381250"/>
+            <a:off x="2505075" y="2314575"/>
             <a:ext cx="152400" cy="66675"/>
           </a:xfrm>
           <a:prstGeom prst="rect">
@@ -29562,8 +32531,8 @@
         </p:nvSpPr>
         <p:spPr>
           <a:xfrm>
-            <a:off x="5486400" y="2343150"/>
-            <a:ext cx="552450" cy="125730"/>
+            <a:off x="5486400" y="2286000"/>
+            <a:ext cx="552450" cy="120015"/>
           </a:xfrm>
           <a:prstGeom prst="rect">
             <a:avLst/>
@@ -29577,12 +32546,12 @@
           <a:p>
             <a:pPr algn="r" indent="0" marL="0">
               <a:lnSpc>
-                <a:spcPts val="990"/>
-              </a:lnSpc>
-              <a:buNone/>
-            </a:pPr>
-            <a:r>
-              <a:rPr lang="en-US" sz="825" dirty="0">
+                <a:spcPts val="945"/>
+              </a:lnSpc>
+              <a:buNone/>
+            </a:pPr>
+            <a:r>
+              <a:rPr lang="en-US" sz="788" dirty="0">
                 <a:solidFill>
                   <a:srgbClr val="5A5A5A"/>
                 </a:solidFill>
@@ -29592,7 +32561,7 @@
               </a:rPr>
               <a:t>1.310</a:t>
             </a:r>
-            <a:endParaRPr lang="en-US" sz="825" dirty="0"/>
+            <a:endParaRPr lang="en-US" sz="788" dirty="0"/>
           </a:p>
         </p:txBody>
       </p:sp>
@@ -29604,8 +32573,8 @@
         </p:nvSpPr>
         <p:spPr>
           <a:xfrm>
-            <a:off x="6115050" y="2343150"/>
-            <a:ext cx="590550" cy="125730"/>
+            <a:off x="6115050" y="2286000"/>
+            <a:ext cx="590550" cy="120015"/>
           </a:xfrm>
           <a:prstGeom prst="rect">
             <a:avLst/>
@@ -29619,12 +32588,12 @@
           <a:p>
             <a:pPr algn="r" indent="0" marL="0">
               <a:lnSpc>
-                <a:spcPts val="990"/>
-              </a:lnSpc>
-              <a:buNone/>
-            </a:pPr>
-            <a:r>
-              <a:rPr lang="en-US" sz="825" dirty="0">
+                <a:spcPts val="945"/>
+              </a:lnSpc>
+              <a:buNone/>
+            </a:pPr>
+            <a:r>
+              <a:rPr lang="en-US" sz="788" dirty="0">
                 <a:solidFill>
                   <a:srgbClr val="FF6F0F"/>
                 </a:solidFill>
@@ -29634,103 +32603,103 @@
               </a:rPr>
               <a:t>+0.009</a:t>
             </a:r>
+            <a:endParaRPr lang="en-US" sz="788" dirty="0"/>
+          </a:p>
+        </p:txBody>
+      </p:sp>
+      <p:sp>
+        <p:nvSpPr>
+          <p:cNvPr id="35" name="Text 33"/>
+          <p:cNvSpPr txBox="1"/>
+          <p:nvPr/>
+        </p:nvSpPr>
+        <p:spPr>
+          <a:xfrm>
+            <a:off x="6838950" y="2286000"/>
+            <a:ext cx="4419600" cy="120015"/>
+          </a:xfrm>
+          <a:prstGeom prst="rect">
+            <a:avLst/>
+          </a:prstGeom>
+          <a:noFill/>
+          <a:ln/>
+        </p:spPr>
+        <p:txBody>
+          <a:bodyPr wrap="square" lIns="0" tIns="0" rIns="0" bIns="0" rtlCol="0" anchor="t"/>
+          <a:lstStyle/>
+          <a:p>
+            <a:pPr algn="l" indent="0" marL="0">
+              <a:lnSpc>
+                <a:spcPts val="945"/>
+              </a:lnSpc>
+              <a:buNone/>
+            </a:pPr>
+            <a:r>
+              <a:rPr lang="en-US" sz="788" dirty="0">
+                <a:solidFill>
+                  <a:srgbClr val="5A5A5A"/>
+                </a:solidFill>
+                <a:latin typeface="Malgun Gothic" pitchFamily="34" charset="0"/>
+                <a:ea typeface="Malgun Gothic" pitchFamily="34" charset="-122"/>
+                <a:cs typeface="Malgun Gothic" pitchFamily="34" charset="-120"/>
+              </a:rPr>
+              <a:t>거의 부드러운 곡선</a:t>
+            </a:r>
+            <a:endParaRPr lang="en-US" sz="788" dirty="0"/>
+          </a:p>
+        </p:txBody>
+      </p:sp>
+      <p:sp>
+        <p:nvSpPr>
+          <p:cNvPr id="36" name="Text 34"/>
+          <p:cNvSpPr txBox="1"/>
+          <p:nvPr/>
+        </p:nvSpPr>
+        <p:spPr>
+          <a:xfrm>
+            <a:off x="876300" y="2438400"/>
+            <a:ext cx="1504950" cy="125730"/>
+          </a:xfrm>
+          <a:prstGeom prst="rect">
+            <a:avLst/>
+          </a:prstGeom>
+          <a:noFill/>
+          <a:ln/>
+        </p:spPr>
+        <p:txBody>
+          <a:bodyPr wrap="square" lIns="0" tIns="0" rIns="0" bIns="0" rtlCol="0" anchor="t"/>
+          <a:lstStyle/>
+          <a:p>
+            <a:pPr algn="r" indent="0" marL="0">
+              <a:lnSpc>
+                <a:spcPts val="990"/>
+              </a:lnSpc>
+              <a:buNone/>
+            </a:pPr>
+            <a:r>
+              <a:rPr lang="en-US" sz="825" dirty="0">
+                <a:solidFill>
+                  <a:srgbClr val="333333"/>
+                </a:solidFill>
+                <a:latin typeface="Malgun Gothic" pitchFamily="34" charset="0"/>
+                <a:ea typeface="Malgun Gothic" pitchFamily="34" charset="-122"/>
+                <a:cs typeface="Malgun Gothic" pitchFamily="34" charset="-120"/>
+              </a:rPr>
+              <a:t>GP · Matérn 3/2</a:t>
+            </a:r>
             <a:endParaRPr lang="en-US" sz="825" dirty="0"/>
           </a:p>
         </p:txBody>
       </p:sp>
       <p:sp>
         <p:nvSpPr>
-          <p:cNvPr id="35" name="Text 33"/>
-          <p:cNvSpPr txBox="1"/>
-          <p:nvPr/>
-        </p:nvSpPr>
-        <p:spPr>
-          <a:xfrm>
-            <a:off x="6858000" y="2343150"/>
-            <a:ext cx="4000500" cy="125730"/>
-          </a:xfrm>
-          <a:prstGeom prst="rect">
-            <a:avLst/>
-          </a:prstGeom>
-          <a:noFill/>
-          <a:ln/>
-        </p:spPr>
-        <p:txBody>
-          <a:bodyPr wrap="square" lIns="0" tIns="0" rIns="0" bIns="0" rtlCol="0" anchor="t"/>
-          <a:lstStyle/>
-          <a:p>
-            <a:pPr algn="l" indent="0" marL="0">
-              <a:lnSpc>
-                <a:spcPts val="990"/>
-              </a:lnSpc>
-              <a:buNone/>
-            </a:pPr>
-            <a:r>
-              <a:rPr lang="en-US" sz="825" dirty="0">
-                <a:solidFill>
-                  <a:srgbClr val="5A5A5A"/>
-                </a:solidFill>
-                <a:latin typeface="Malgun Gothic" pitchFamily="34" charset="0"/>
-                <a:ea typeface="Malgun Gothic" pitchFamily="34" charset="-122"/>
-                <a:cs typeface="Malgun Gothic" pitchFamily="34" charset="-120"/>
-              </a:rPr>
-              <a:t>거의 부드러운 곡선</a:t>
-            </a:r>
-            <a:endParaRPr lang="en-US" sz="825" dirty="0"/>
-          </a:p>
-        </p:txBody>
-      </p:sp>
-      <p:sp>
-        <p:nvSpPr>
-          <p:cNvPr id="36" name="Text 34"/>
-          <p:cNvSpPr txBox="1"/>
-          <p:nvPr/>
-        </p:nvSpPr>
-        <p:spPr>
-          <a:xfrm>
-            <a:off x="876300" y="2514600"/>
-            <a:ext cx="1504950" cy="131445"/>
-          </a:xfrm>
-          <a:prstGeom prst="rect">
-            <a:avLst/>
-          </a:prstGeom>
-          <a:noFill/>
-          <a:ln/>
-        </p:spPr>
-        <p:txBody>
-          <a:bodyPr wrap="square" lIns="0" tIns="0" rIns="0" bIns="0" rtlCol="0" anchor="t"/>
-          <a:lstStyle/>
-          <a:p>
-            <a:pPr algn="r" indent="0" marL="0">
-              <a:lnSpc>
-                <a:spcPts val="1035"/>
-              </a:lnSpc>
-              <a:buNone/>
-            </a:pPr>
-            <a:r>
-              <a:rPr lang="en-US" sz="863" dirty="0">
-                <a:solidFill>
-                  <a:srgbClr val="333333"/>
-                </a:solidFill>
-                <a:latin typeface="Malgun Gothic" pitchFamily="34" charset="0"/>
-                <a:ea typeface="Malgun Gothic" pitchFamily="34" charset="-122"/>
-                <a:cs typeface="Malgun Gothic" pitchFamily="34" charset="-120"/>
-              </a:rPr>
-              <a:t>GP · Matérn 3/2</a:t>
-            </a:r>
-            <a:endParaRPr lang="en-US" sz="863" dirty="0"/>
-          </a:p>
-        </p:txBody>
-      </p:sp>
-      <p:sp>
-        <p:nvSpPr>
           <p:cNvPr id="37" name="Shape 35"/>
           <p:cNvSpPr/>
           <p:nvPr/>
         </p:nvSpPr>
         <p:spPr>
           <a:xfrm>
-            <a:off x="2505075" y="2552700"/>
+            <a:off x="2505075" y="2466975"/>
             <a:ext cx="342900" cy="66675"/>
           </a:xfrm>
           <a:prstGeom prst="rect">
@@ -29750,8 +32719,8 @@
         </p:nvSpPr>
         <p:spPr>
           <a:xfrm>
-            <a:off x="5486400" y="2514600"/>
-            <a:ext cx="552450" cy="125730"/>
+            <a:off x="5486400" y="2438400"/>
+            <a:ext cx="552450" cy="120015"/>
           </a:xfrm>
           <a:prstGeom prst="rect">
             <a:avLst/>
@@ -29765,12 +32734,12 @@
           <a:p>
             <a:pPr algn="r" indent="0" marL="0">
               <a:lnSpc>
-                <a:spcPts val="990"/>
-              </a:lnSpc>
-              <a:buNone/>
-            </a:pPr>
-            <a:r>
-              <a:rPr lang="en-US" sz="825" dirty="0">
+                <a:spcPts val="945"/>
+              </a:lnSpc>
+              <a:buNone/>
+            </a:pPr>
+            <a:r>
+              <a:rPr lang="en-US" sz="788" dirty="0">
                 <a:solidFill>
                   <a:srgbClr val="5A5A5A"/>
                 </a:solidFill>
@@ -29780,7 +32749,7 @@
               </a:rPr>
               <a:t>1.322</a:t>
             </a:r>
-            <a:endParaRPr lang="en-US" sz="825" dirty="0"/>
+            <a:endParaRPr lang="en-US" sz="788" dirty="0"/>
           </a:p>
         </p:txBody>
       </p:sp>
@@ -29792,8 +32761,8 @@
         </p:nvSpPr>
         <p:spPr>
           <a:xfrm>
-            <a:off x="6115050" y="2514600"/>
-            <a:ext cx="590550" cy="125730"/>
+            <a:off x="6115050" y="2438400"/>
+            <a:ext cx="590550" cy="120015"/>
           </a:xfrm>
           <a:prstGeom prst="rect">
             <a:avLst/>
@@ -29807,12 +32776,12 @@
           <a:p>
             <a:pPr algn="r" indent="0" marL="0">
               <a:lnSpc>
-                <a:spcPts val="990"/>
-              </a:lnSpc>
-              <a:buNone/>
-            </a:pPr>
-            <a:r>
-              <a:rPr lang="en-US" sz="825" dirty="0">
+                <a:spcPts val="945"/>
+              </a:lnSpc>
+              <a:buNone/>
+            </a:pPr>
+            <a:r>
+              <a:rPr lang="en-US" sz="788" dirty="0">
                 <a:solidFill>
                   <a:srgbClr val="FF6F0F"/>
                 </a:solidFill>
@@ -29822,103 +32791,103 @@
               </a:rPr>
               <a:t>+0.021</a:t>
             </a:r>
+            <a:endParaRPr lang="en-US" sz="788" dirty="0"/>
+          </a:p>
+        </p:txBody>
+      </p:sp>
+      <p:sp>
+        <p:nvSpPr>
+          <p:cNvPr id="40" name="Text 38"/>
+          <p:cNvSpPr txBox="1"/>
+          <p:nvPr/>
+        </p:nvSpPr>
+        <p:spPr>
+          <a:xfrm>
+            <a:off x="6838950" y="2438400"/>
+            <a:ext cx="4419600" cy="120015"/>
+          </a:xfrm>
+          <a:prstGeom prst="rect">
+            <a:avLst/>
+          </a:prstGeom>
+          <a:noFill/>
+          <a:ln/>
+        </p:spPr>
+        <p:txBody>
+          <a:bodyPr wrap="square" lIns="0" tIns="0" rIns="0" bIns="0" rtlCol="0" anchor="t"/>
+          <a:lstStyle/>
+          <a:p>
+            <a:pPr algn="l" indent="0" marL="0">
+              <a:lnSpc>
+                <a:spcPts val="945"/>
+              </a:lnSpc>
+              <a:buNone/>
+            </a:pPr>
+            <a:r>
+              <a:rPr lang="en-US" sz="788" dirty="0">
+                <a:solidFill>
+                  <a:srgbClr val="5A5A5A"/>
+                </a:solidFill>
+                <a:latin typeface="Malgun Gothic" pitchFamily="34" charset="0"/>
+                <a:ea typeface="Malgun Gothic" pitchFamily="34" charset="-122"/>
+                <a:cs typeface="Malgun Gothic" pitchFamily="34" charset="-120"/>
+              </a:rPr>
+              <a:t>살짝 각이 지는 곡선</a:t>
+            </a:r>
+            <a:endParaRPr lang="en-US" sz="788" dirty="0"/>
+          </a:p>
+        </p:txBody>
+      </p:sp>
+      <p:sp>
+        <p:nvSpPr>
+          <p:cNvPr id="41" name="Text 39"/>
+          <p:cNvSpPr txBox="1"/>
+          <p:nvPr/>
+        </p:nvSpPr>
+        <p:spPr>
+          <a:xfrm>
+            <a:off x="876300" y="2590800"/>
+            <a:ext cx="1504950" cy="125730"/>
+          </a:xfrm>
+          <a:prstGeom prst="rect">
+            <a:avLst/>
+          </a:prstGeom>
+          <a:noFill/>
+          <a:ln/>
+        </p:spPr>
+        <p:txBody>
+          <a:bodyPr wrap="square" lIns="0" tIns="0" rIns="0" bIns="0" rtlCol="0" anchor="t"/>
+          <a:lstStyle/>
+          <a:p>
+            <a:pPr algn="r" indent="0" marL="0">
+              <a:lnSpc>
+                <a:spcPts val="990"/>
+              </a:lnSpc>
+              <a:buNone/>
+            </a:pPr>
+            <a:r>
+              <a:rPr lang="en-US" sz="825" dirty="0">
+                <a:solidFill>
+                  <a:srgbClr val="333333"/>
+                </a:solidFill>
+                <a:latin typeface="Malgun Gothic" pitchFamily="34" charset="0"/>
+                <a:ea typeface="Malgun Gothic" pitchFamily="34" charset="-122"/>
+                <a:cs typeface="Malgun Gothic" pitchFamily="34" charset="-120"/>
+              </a:rPr>
+              <a:t>GP · 지수</a:t>
+            </a:r>
             <a:endParaRPr lang="en-US" sz="825" dirty="0"/>
           </a:p>
         </p:txBody>
       </p:sp>
       <p:sp>
         <p:nvSpPr>
-          <p:cNvPr id="40" name="Text 38"/>
-          <p:cNvSpPr txBox="1"/>
-          <p:nvPr/>
-        </p:nvSpPr>
-        <p:spPr>
-          <a:xfrm>
-            <a:off x="6858000" y="2514600"/>
-            <a:ext cx="4000500" cy="125730"/>
-          </a:xfrm>
-          <a:prstGeom prst="rect">
-            <a:avLst/>
-          </a:prstGeom>
-          <a:noFill/>
-          <a:ln/>
-        </p:spPr>
-        <p:txBody>
-          <a:bodyPr wrap="square" lIns="0" tIns="0" rIns="0" bIns="0" rtlCol="0" anchor="t"/>
-          <a:lstStyle/>
-          <a:p>
-            <a:pPr algn="l" indent="0" marL="0">
-              <a:lnSpc>
-                <a:spcPts val="990"/>
-              </a:lnSpc>
-              <a:buNone/>
-            </a:pPr>
-            <a:r>
-              <a:rPr lang="en-US" sz="825" dirty="0">
-                <a:solidFill>
-                  <a:srgbClr val="5A5A5A"/>
-                </a:solidFill>
-                <a:latin typeface="Malgun Gothic" pitchFamily="34" charset="0"/>
-                <a:ea typeface="Malgun Gothic" pitchFamily="34" charset="-122"/>
-                <a:cs typeface="Malgun Gothic" pitchFamily="34" charset="-120"/>
-              </a:rPr>
-              <a:t>살짝 각이 지는 곡선</a:t>
-            </a:r>
-            <a:endParaRPr lang="en-US" sz="825" dirty="0"/>
-          </a:p>
-        </p:txBody>
-      </p:sp>
-      <p:sp>
-        <p:nvSpPr>
-          <p:cNvPr id="41" name="Text 39"/>
-          <p:cNvSpPr txBox="1"/>
-          <p:nvPr/>
-        </p:nvSpPr>
-        <p:spPr>
-          <a:xfrm>
-            <a:off x="876300" y="2686050"/>
-            <a:ext cx="1504950" cy="131445"/>
-          </a:xfrm>
-          <a:prstGeom prst="rect">
-            <a:avLst/>
-          </a:prstGeom>
-          <a:noFill/>
-          <a:ln/>
-        </p:spPr>
-        <p:txBody>
-          <a:bodyPr wrap="square" lIns="0" tIns="0" rIns="0" bIns="0" rtlCol="0" anchor="t"/>
-          <a:lstStyle/>
-          <a:p>
-            <a:pPr algn="r" indent="0" marL="0">
-              <a:lnSpc>
-                <a:spcPts val="1035"/>
-              </a:lnSpc>
-              <a:buNone/>
-            </a:pPr>
-            <a:r>
-              <a:rPr lang="en-US" sz="863" dirty="0">
-                <a:solidFill>
-                  <a:srgbClr val="333333"/>
-                </a:solidFill>
-                <a:latin typeface="Malgun Gothic" pitchFamily="34" charset="0"/>
-                <a:ea typeface="Malgun Gothic" pitchFamily="34" charset="-122"/>
-                <a:cs typeface="Malgun Gothic" pitchFamily="34" charset="-120"/>
-              </a:rPr>
-              <a:t>GP · 지수</a:t>
-            </a:r>
-            <a:endParaRPr lang="en-US" sz="863" dirty="0"/>
-          </a:p>
-        </p:txBody>
-      </p:sp>
-      <p:sp>
-        <p:nvSpPr>
           <p:cNvPr id="42" name="Shape 40"/>
           <p:cNvSpPr/>
           <p:nvPr/>
         </p:nvSpPr>
         <p:spPr>
           <a:xfrm>
-            <a:off x="2505075" y="2724150"/>
+            <a:off x="2505075" y="2619375"/>
             <a:ext cx="1047750" cy="66675"/>
           </a:xfrm>
           <a:prstGeom prst="rect">
@@ -29938,8 +32907,8 @@
         </p:nvSpPr>
         <p:spPr>
           <a:xfrm>
-            <a:off x="5486400" y="2686050"/>
-            <a:ext cx="552450" cy="125730"/>
+            <a:off x="5486400" y="2590800"/>
+            <a:ext cx="552450" cy="120015"/>
           </a:xfrm>
           <a:prstGeom prst="rect">
             <a:avLst/>
@@ -29953,12 +32922,12 @@
           <a:p>
             <a:pPr algn="r" indent="0" marL="0">
               <a:lnSpc>
-                <a:spcPts val="990"/>
-              </a:lnSpc>
-              <a:buNone/>
-            </a:pPr>
-            <a:r>
-              <a:rPr lang="en-US" sz="825" dirty="0">
+                <a:spcPts val="945"/>
+              </a:lnSpc>
+              <a:buNone/>
+            </a:pPr>
+            <a:r>
+              <a:rPr lang="en-US" sz="788" dirty="0">
                 <a:solidFill>
                   <a:srgbClr val="5A5A5A"/>
                 </a:solidFill>
@@ -29968,7 +32937,7 @@
               </a:rPr>
               <a:t>1.365</a:t>
             </a:r>
-            <a:endParaRPr lang="en-US" sz="825" dirty="0"/>
+            <a:endParaRPr lang="en-US" sz="788" dirty="0"/>
           </a:p>
         </p:txBody>
       </p:sp>
@@ -29980,8 +32949,8 @@
         </p:nvSpPr>
         <p:spPr>
           <a:xfrm>
-            <a:off x="6115050" y="2686050"/>
-            <a:ext cx="590550" cy="125730"/>
+            <a:off x="6115050" y="2590800"/>
+            <a:ext cx="590550" cy="120015"/>
           </a:xfrm>
           <a:prstGeom prst="rect">
             <a:avLst/>
@@ -29995,12 +32964,12 @@
           <a:p>
             <a:pPr algn="r" indent="0" marL="0">
               <a:lnSpc>
-                <a:spcPts val="990"/>
-              </a:lnSpc>
-              <a:buNone/>
-            </a:pPr>
-            <a:r>
-              <a:rPr lang="en-US" sz="825" dirty="0">
+                <a:spcPts val="945"/>
+              </a:lnSpc>
+              <a:buNone/>
+            </a:pPr>
+            <a:r>
+              <a:rPr lang="en-US" sz="788" dirty="0">
                 <a:solidFill>
                   <a:srgbClr val="FF6F0F"/>
                 </a:solidFill>
@@ -30010,103 +32979,103 @@
               </a:rPr>
               <a:t>+0.064</a:t>
             </a:r>
+            <a:endParaRPr lang="en-US" sz="788" dirty="0"/>
+          </a:p>
+        </p:txBody>
+      </p:sp>
+      <p:sp>
+        <p:nvSpPr>
+          <p:cNvPr id="45" name="Text 43"/>
+          <p:cNvSpPr txBox="1"/>
+          <p:nvPr/>
+        </p:nvSpPr>
+        <p:spPr>
+          <a:xfrm>
+            <a:off x="6838950" y="2590800"/>
+            <a:ext cx="4419600" cy="120015"/>
+          </a:xfrm>
+          <a:prstGeom prst="rect">
+            <a:avLst/>
+          </a:prstGeom>
+          <a:noFill/>
+          <a:ln/>
+        </p:spPr>
+        <p:txBody>
+          <a:bodyPr wrap="square" lIns="0" tIns="0" rIns="0" bIns="0" rtlCol="0" anchor="t"/>
+          <a:lstStyle/>
+          <a:p>
+            <a:pPr algn="l" indent="0" marL="0">
+              <a:lnSpc>
+                <a:spcPts val="945"/>
+              </a:lnSpc>
+              <a:buNone/>
+            </a:pPr>
+            <a:r>
+              <a:rPr lang="en-US" sz="788" dirty="0">
+                <a:solidFill>
+                  <a:srgbClr val="5A5A5A"/>
+                </a:solidFill>
+                <a:latin typeface="Malgun Gothic" pitchFamily="34" charset="0"/>
+                <a:ea typeface="Malgun Gothic" pitchFamily="34" charset="-122"/>
+                <a:cs typeface="Malgun Gothic" pitchFamily="34" charset="-120"/>
+              </a:rPr>
+              <a:t>꺾임을 허용하는 곡선</a:t>
+            </a:r>
+            <a:endParaRPr lang="en-US" sz="788" dirty="0"/>
+          </a:p>
+        </p:txBody>
+      </p:sp>
+      <p:sp>
+        <p:nvSpPr>
+          <p:cNvPr id="46" name="Text 44"/>
+          <p:cNvSpPr txBox="1"/>
+          <p:nvPr/>
+        </p:nvSpPr>
+        <p:spPr>
+          <a:xfrm>
+            <a:off x="876300" y="2743200"/>
+            <a:ext cx="1504950" cy="125730"/>
+          </a:xfrm>
+          <a:prstGeom prst="rect">
+            <a:avLst/>
+          </a:prstGeom>
+          <a:noFill/>
+          <a:ln/>
+        </p:spPr>
+        <p:txBody>
+          <a:bodyPr wrap="square" lIns="0" tIns="0" rIns="0" bIns="0" rtlCol="0" anchor="t"/>
+          <a:lstStyle/>
+          <a:p>
+            <a:pPr algn="r" indent="0" marL="0">
+              <a:lnSpc>
+                <a:spcPts val="990"/>
+              </a:lnSpc>
+              <a:buNone/>
+            </a:pPr>
+            <a:r>
+              <a:rPr lang="en-US" sz="825" dirty="0">
+                <a:solidFill>
+                  <a:srgbClr val="333333"/>
+                </a:solidFill>
+                <a:latin typeface="Malgun Gothic" pitchFamily="34" charset="0"/>
+                <a:ea typeface="Malgun Gothic" pitchFamily="34" charset="-122"/>
+                <a:cs typeface="Malgun Gothic" pitchFamily="34" charset="-120"/>
+              </a:rPr>
+              <a:t>커널회귀</a:t>
+            </a:r>
             <a:endParaRPr lang="en-US" sz="825" dirty="0"/>
           </a:p>
         </p:txBody>
       </p:sp>
       <p:sp>
         <p:nvSpPr>
-          <p:cNvPr id="45" name="Text 43"/>
-          <p:cNvSpPr txBox="1"/>
-          <p:nvPr/>
-        </p:nvSpPr>
-        <p:spPr>
-          <a:xfrm>
-            <a:off x="6858000" y="2686050"/>
-            <a:ext cx="4000500" cy="125730"/>
-          </a:xfrm>
-          <a:prstGeom prst="rect">
-            <a:avLst/>
-          </a:prstGeom>
-          <a:noFill/>
-          <a:ln/>
-        </p:spPr>
-        <p:txBody>
-          <a:bodyPr wrap="square" lIns="0" tIns="0" rIns="0" bIns="0" rtlCol="0" anchor="t"/>
-          <a:lstStyle/>
-          <a:p>
-            <a:pPr algn="l" indent="0" marL="0">
-              <a:lnSpc>
-                <a:spcPts val="990"/>
-              </a:lnSpc>
-              <a:buNone/>
-            </a:pPr>
-            <a:r>
-              <a:rPr lang="en-US" sz="825" dirty="0">
-                <a:solidFill>
-                  <a:srgbClr val="5A5A5A"/>
-                </a:solidFill>
-                <a:latin typeface="Malgun Gothic" pitchFamily="34" charset="0"/>
-                <a:ea typeface="Malgun Gothic" pitchFamily="34" charset="-122"/>
-                <a:cs typeface="Malgun Gothic" pitchFamily="34" charset="-120"/>
-              </a:rPr>
-              <a:t>꺾임을 허용하는 곡선</a:t>
-            </a:r>
-            <a:endParaRPr lang="en-US" sz="825" dirty="0"/>
-          </a:p>
-        </p:txBody>
-      </p:sp>
-      <p:sp>
-        <p:nvSpPr>
-          <p:cNvPr id="46" name="Text 44"/>
-          <p:cNvSpPr txBox="1"/>
-          <p:nvPr/>
-        </p:nvSpPr>
-        <p:spPr>
-          <a:xfrm>
-            <a:off x="876300" y="2857500"/>
-            <a:ext cx="1504950" cy="131445"/>
-          </a:xfrm>
-          <a:prstGeom prst="rect">
-            <a:avLst/>
-          </a:prstGeom>
-          <a:noFill/>
-          <a:ln/>
-        </p:spPr>
-        <p:txBody>
-          <a:bodyPr wrap="square" lIns="0" tIns="0" rIns="0" bIns="0" rtlCol="0" anchor="t"/>
-          <a:lstStyle/>
-          <a:p>
-            <a:pPr algn="r" indent="0" marL="0">
-              <a:lnSpc>
-                <a:spcPts val="1035"/>
-              </a:lnSpc>
-              <a:buNone/>
-            </a:pPr>
-            <a:r>
-              <a:rPr lang="en-US" sz="863" dirty="0">
-                <a:solidFill>
-                  <a:srgbClr val="333333"/>
-                </a:solidFill>
-                <a:latin typeface="Malgun Gothic" pitchFamily="34" charset="0"/>
-                <a:ea typeface="Malgun Gothic" pitchFamily="34" charset="-122"/>
-                <a:cs typeface="Malgun Gothic" pitchFamily="34" charset="-120"/>
-              </a:rPr>
-              <a:t>커널회귀</a:t>
-            </a:r>
-            <a:endParaRPr lang="en-US" sz="863" dirty="0"/>
-          </a:p>
-        </p:txBody>
-      </p:sp>
-      <p:sp>
-        <p:nvSpPr>
           <p:cNvPr id="47" name="Shape 45"/>
           <p:cNvSpPr/>
           <p:nvPr/>
         </p:nvSpPr>
         <p:spPr>
           <a:xfrm>
-            <a:off x="2505075" y="2895600"/>
+            <a:off x="2505075" y="2771775"/>
             <a:ext cx="1933575" cy="66675"/>
           </a:xfrm>
           <a:prstGeom prst="rect">
@@ -30126,8 +33095,8 @@
         </p:nvSpPr>
         <p:spPr>
           <a:xfrm>
-            <a:off x="5486400" y="2857500"/>
-            <a:ext cx="552450" cy="125730"/>
+            <a:off x="5486400" y="2743200"/>
+            <a:ext cx="552450" cy="120015"/>
           </a:xfrm>
           <a:prstGeom prst="rect">
             <a:avLst/>
@@ -30141,12 +33110,12 @@
           <a:p>
             <a:pPr algn="r" indent="0" marL="0">
               <a:lnSpc>
-                <a:spcPts val="990"/>
-              </a:lnSpc>
-              <a:buNone/>
-            </a:pPr>
-            <a:r>
-              <a:rPr lang="en-US" sz="825" dirty="0">
+                <a:spcPts val="945"/>
+              </a:lnSpc>
+              <a:buNone/>
+            </a:pPr>
+            <a:r>
+              <a:rPr lang="en-US" sz="788" dirty="0">
                 <a:solidFill>
                   <a:srgbClr val="5A5A5A"/>
                 </a:solidFill>
@@ -30156,7 +33125,7 @@
               </a:rPr>
               <a:t>1.419</a:t>
             </a:r>
-            <a:endParaRPr lang="en-US" sz="825" dirty="0"/>
+            <a:endParaRPr lang="en-US" sz="788" dirty="0"/>
           </a:p>
         </p:txBody>
       </p:sp>
@@ -30168,8 +33137,8 @@
         </p:nvSpPr>
         <p:spPr>
           <a:xfrm>
-            <a:off x="6115050" y="2857500"/>
-            <a:ext cx="590550" cy="125730"/>
+            <a:off x="6115050" y="2743200"/>
+            <a:ext cx="590550" cy="120015"/>
           </a:xfrm>
           <a:prstGeom prst="rect">
             <a:avLst/>
@@ -30183,12 +33152,12 @@
           <a:p>
             <a:pPr algn="r" indent="0" marL="0">
               <a:lnSpc>
-                <a:spcPts val="990"/>
-              </a:lnSpc>
-              <a:buNone/>
-            </a:pPr>
-            <a:r>
-              <a:rPr lang="en-US" sz="825" dirty="0">
+                <a:spcPts val="945"/>
+              </a:lnSpc>
+              <a:buNone/>
+            </a:pPr>
+            <a:r>
+              <a:rPr lang="en-US" sz="788" dirty="0">
                 <a:solidFill>
                   <a:srgbClr val="FF6F0F"/>
                 </a:solidFill>
@@ -30198,103 +33167,103 @@
               </a:rPr>
               <a:t>+0.118</a:t>
             </a:r>
+            <a:endParaRPr lang="en-US" sz="788" dirty="0"/>
+          </a:p>
+        </p:txBody>
+      </p:sp>
+      <p:sp>
+        <p:nvSpPr>
+          <p:cNvPr id="50" name="Text 48"/>
+          <p:cNvSpPr txBox="1"/>
+          <p:nvPr/>
+        </p:nvSpPr>
+        <p:spPr>
+          <a:xfrm>
+            <a:off x="6838950" y="2743200"/>
+            <a:ext cx="4419600" cy="120015"/>
+          </a:xfrm>
+          <a:prstGeom prst="rect">
+            <a:avLst/>
+          </a:prstGeom>
+          <a:noFill/>
+          <a:ln/>
+        </p:spPr>
+        <p:txBody>
+          <a:bodyPr wrap="square" lIns="0" tIns="0" rIns="0" bIns="0" rtlCol="0" anchor="t"/>
+          <a:lstStyle/>
+          <a:p>
+            <a:pPr algn="l" indent="0" marL="0">
+              <a:lnSpc>
+                <a:spcPts val="945"/>
+              </a:lnSpc>
+              <a:buNone/>
+            </a:pPr>
+            <a:r>
+              <a:rPr lang="en-US" sz="788" dirty="0">
+                <a:solidFill>
+                  <a:srgbClr val="5A5A5A"/>
+                </a:solidFill>
+                <a:latin typeface="Malgun Gothic" pitchFamily="34" charset="0"/>
+                <a:ea typeface="Malgun Gothic" pitchFamily="34" charset="-122"/>
+                <a:cs typeface="Malgun Gothic" pitchFamily="34" charset="-120"/>
+              </a:rPr>
+              <a:t>가까운 시험에 무게를 더 주는 평균</a:t>
+            </a:r>
+            <a:endParaRPr lang="en-US" sz="788" dirty="0"/>
+          </a:p>
+        </p:txBody>
+      </p:sp>
+      <p:sp>
+        <p:nvSpPr>
+          <p:cNvPr id="51" name="Text 49"/>
+          <p:cNvSpPr txBox="1"/>
+          <p:nvPr/>
+        </p:nvSpPr>
+        <p:spPr>
+          <a:xfrm>
+            <a:off x="876300" y="2895600"/>
+            <a:ext cx="1504950" cy="125730"/>
+          </a:xfrm>
+          <a:prstGeom prst="rect">
+            <a:avLst/>
+          </a:prstGeom>
+          <a:noFill/>
+          <a:ln/>
+        </p:spPr>
+        <p:txBody>
+          <a:bodyPr wrap="square" lIns="0" tIns="0" rIns="0" bIns="0" rtlCol="0" anchor="t"/>
+          <a:lstStyle/>
+          <a:p>
+            <a:pPr algn="r" indent="0" marL="0">
+              <a:lnSpc>
+                <a:spcPts val="990"/>
+              </a:lnSpc>
+              <a:buNone/>
+            </a:pPr>
+            <a:r>
+              <a:rPr lang="en-US" sz="825" dirty="0">
+                <a:solidFill>
+                  <a:srgbClr val="333333"/>
+                </a:solidFill>
+                <a:latin typeface="Malgun Gothic" pitchFamily="34" charset="0"/>
+                <a:ea typeface="Malgun Gothic" pitchFamily="34" charset="-122"/>
+                <a:cs typeface="Malgun Gothic" pitchFamily="34" charset="-120"/>
+              </a:rPr>
+              <a:t>구간평균</a:t>
+            </a:r>
             <a:endParaRPr lang="en-US" sz="825" dirty="0"/>
           </a:p>
         </p:txBody>
       </p:sp>
       <p:sp>
         <p:nvSpPr>
-          <p:cNvPr id="50" name="Text 48"/>
-          <p:cNvSpPr txBox="1"/>
-          <p:nvPr/>
-        </p:nvSpPr>
-        <p:spPr>
-          <a:xfrm>
-            <a:off x="6858000" y="2857500"/>
-            <a:ext cx="4000500" cy="125730"/>
-          </a:xfrm>
-          <a:prstGeom prst="rect">
-            <a:avLst/>
-          </a:prstGeom>
-          <a:noFill/>
-          <a:ln/>
-        </p:spPr>
-        <p:txBody>
-          <a:bodyPr wrap="square" lIns="0" tIns="0" rIns="0" bIns="0" rtlCol="0" anchor="t"/>
-          <a:lstStyle/>
-          <a:p>
-            <a:pPr algn="l" indent="0" marL="0">
-              <a:lnSpc>
-                <a:spcPts val="990"/>
-              </a:lnSpc>
-              <a:buNone/>
-            </a:pPr>
-            <a:r>
-              <a:rPr lang="en-US" sz="825" dirty="0">
-                <a:solidFill>
-                  <a:srgbClr val="5A5A5A"/>
-                </a:solidFill>
-                <a:latin typeface="Malgun Gothic" pitchFamily="34" charset="0"/>
-                <a:ea typeface="Malgun Gothic" pitchFamily="34" charset="-122"/>
-                <a:cs typeface="Malgun Gothic" pitchFamily="34" charset="-120"/>
-              </a:rPr>
-              <a:t>가까운 시험에 무게를 더 주는 평균</a:t>
-            </a:r>
-            <a:endParaRPr lang="en-US" sz="825" dirty="0"/>
-          </a:p>
-        </p:txBody>
-      </p:sp>
-      <p:sp>
-        <p:nvSpPr>
-          <p:cNvPr id="51" name="Text 49"/>
-          <p:cNvSpPr txBox="1"/>
-          <p:nvPr/>
-        </p:nvSpPr>
-        <p:spPr>
-          <a:xfrm>
-            <a:off x="876300" y="3028950"/>
-            <a:ext cx="1504950" cy="131445"/>
-          </a:xfrm>
-          <a:prstGeom prst="rect">
-            <a:avLst/>
-          </a:prstGeom>
-          <a:noFill/>
-          <a:ln/>
-        </p:spPr>
-        <p:txBody>
-          <a:bodyPr wrap="square" lIns="0" tIns="0" rIns="0" bIns="0" rtlCol="0" anchor="t"/>
-          <a:lstStyle/>
-          <a:p>
-            <a:pPr algn="r" indent="0" marL="0">
-              <a:lnSpc>
-                <a:spcPts val="1035"/>
-              </a:lnSpc>
-              <a:buNone/>
-            </a:pPr>
-            <a:r>
-              <a:rPr lang="en-US" sz="863" dirty="0">
-                <a:solidFill>
-                  <a:srgbClr val="333333"/>
-                </a:solidFill>
-                <a:latin typeface="Malgun Gothic" pitchFamily="34" charset="0"/>
-                <a:ea typeface="Malgun Gothic" pitchFamily="34" charset="-122"/>
-                <a:cs typeface="Malgun Gothic" pitchFamily="34" charset="-120"/>
-              </a:rPr>
-              <a:t>구간평균</a:t>
-            </a:r>
-            <a:endParaRPr lang="en-US" sz="863" dirty="0"/>
-          </a:p>
-        </p:txBody>
-      </p:sp>
-      <p:sp>
-        <p:nvSpPr>
           <p:cNvPr id="52" name="Shape 50"/>
           <p:cNvSpPr/>
           <p:nvPr/>
         </p:nvSpPr>
         <p:spPr>
           <a:xfrm>
-            <a:off x="2505075" y="3067050"/>
+            <a:off x="2505075" y="2924175"/>
             <a:ext cx="2857500" cy="66675"/>
           </a:xfrm>
           <a:prstGeom prst="rect">
@@ -30314,8 +33283,8 @@
         </p:nvSpPr>
         <p:spPr>
           <a:xfrm>
-            <a:off x="5486400" y="3028950"/>
-            <a:ext cx="552450" cy="125730"/>
+            <a:off x="5486400" y="2895600"/>
+            <a:ext cx="552450" cy="120015"/>
           </a:xfrm>
           <a:prstGeom prst="rect">
             <a:avLst/>
@@ -30329,12 +33298,12 @@
           <a:p>
             <a:pPr algn="r" indent="0" marL="0">
               <a:lnSpc>
-                <a:spcPts val="990"/>
-              </a:lnSpc>
-              <a:buNone/>
-            </a:pPr>
-            <a:r>
-              <a:rPr lang="en-US" sz="825" dirty="0">
+                <a:spcPts val="945"/>
+              </a:lnSpc>
+              <a:buNone/>
+            </a:pPr>
+            <a:r>
+              <a:rPr lang="en-US" sz="788" dirty="0">
                 <a:solidFill>
                   <a:srgbClr val="5A5A5A"/>
                 </a:solidFill>
@@ -30344,7 +33313,7 @@
               </a:rPr>
               <a:t>1.475</a:t>
             </a:r>
-            <a:endParaRPr lang="en-US" sz="825" dirty="0"/>
+            <a:endParaRPr lang="en-US" sz="788" dirty="0"/>
           </a:p>
         </p:txBody>
       </p:sp>
@@ -30356,8 +33325,8 @@
         </p:nvSpPr>
         <p:spPr>
           <a:xfrm>
-            <a:off x="6115050" y="3028950"/>
-            <a:ext cx="590550" cy="125730"/>
+            <a:off x="6115050" y="2895600"/>
+            <a:ext cx="590550" cy="120015"/>
           </a:xfrm>
           <a:prstGeom prst="rect">
             <a:avLst/>
@@ -30371,12 +33340,12 @@
           <a:p>
             <a:pPr algn="r" indent="0" marL="0">
               <a:lnSpc>
-                <a:spcPts val="990"/>
-              </a:lnSpc>
-              <a:buNone/>
-            </a:pPr>
-            <a:r>
-              <a:rPr lang="en-US" sz="825" dirty="0">
+                <a:spcPts val="945"/>
+              </a:lnSpc>
+              <a:buNone/>
+            </a:pPr>
+            <a:r>
+              <a:rPr lang="en-US" sz="788" dirty="0">
                 <a:solidFill>
                   <a:srgbClr val="FF6F0F"/>
                 </a:solidFill>
@@ -30386,7 +33355,7 @@
               </a:rPr>
               <a:t>+0.174</a:t>
             </a:r>
-            <a:endParaRPr lang="en-US" sz="825" dirty="0"/>
+            <a:endParaRPr lang="en-US" sz="788" dirty="0"/>
           </a:p>
         </p:txBody>
       </p:sp>
@@ -30398,27 +33367,27 @@
         </p:nvSpPr>
         <p:spPr>
           <a:xfrm>
-            <a:off x="6858000" y="3028950"/>
-            <a:ext cx="4000500" cy="125730"/>
-          </a:xfrm>
-          <a:prstGeom prst="rect">
-            <a:avLst/>
-          </a:prstGeom>
-          <a:noFill/>
-          <a:ln/>
-        </p:spPr>
-        <p:txBody>
-          <a:bodyPr wrap="square" lIns="0" tIns="0" rIns="0" bIns="0" rtlCol="0" anchor="t"/>
-          <a:lstStyle/>
-          <a:p>
-            <a:pPr algn="l" indent="0" marL="0">
-              <a:lnSpc>
-                <a:spcPts val="990"/>
-              </a:lnSpc>
-              <a:buNone/>
-            </a:pPr>
-            <a:r>
-              <a:rPr lang="en-US" sz="825" dirty="0">
+            <a:off x="6838950" y="2895600"/>
+            <a:ext cx="4419600" cy="120015"/>
+          </a:xfrm>
+          <a:prstGeom prst="rect">
+            <a:avLst/>
+          </a:prstGeom>
+          <a:noFill/>
+          <a:ln/>
+        </p:spPr>
+        <p:txBody>
+          <a:bodyPr wrap="square" lIns="0" tIns="0" rIns="0" bIns="0" rtlCol="0" anchor="t"/>
+          <a:lstStyle/>
+          <a:p>
+            <a:pPr algn="l" indent="0" marL="0">
+              <a:lnSpc>
+                <a:spcPts val="945"/>
+              </a:lnSpc>
+              <a:buNone/>
+            </a:pPr>
+            <a:r>
+              <a:rPr lang="en-US" sz="788" dirty="0">
                 <a:solidFill>
                   <a:srgbClr val="5A5A5A"/>
                 </a:solidFill>
@@ -30428,7 +33397,7 @@
               </a:rPr>
               <a:t>온도 구간별 평균 — 가장 단순한 방법</a:t>
             </a:r>
-            <a:endParaRPr lang="en-US" sz="825" dirty="0"/>
+            <a:endParaRPr lang="en-US" sz="788" dirty="0"/>
           </a:p>
         </p:txBody>
       </p:sp>
@@ -30440,7 +33409,7 @@
         </p:nvSpPr>
         <p:spPr>
           <a:xfrm>
-            <a:off x="876300" y="3200400"/>
+            <a:off x="876300" y="3086100"/>
             <a:ext cx="10382250" cy="123825"/>
           </a:xfrm>
           <a:prstGeom prst="rect">
@@ -30468,7 +33437,7 @@
                 <a:ea typeface="Malgun Gothic" pitchFamily="34" charset="-122"/>
                 <a:cs typeface="Malgun Gothic" pitchFamily="34" charset="-120"/>
               </a:rPr>
-              <a:t>막대는 1등과의 차이(오른쪽으로 갈수록 더 틀린 것) · 가운데 숫자가 평균 오차 · 채점은 한 회씩 가려 맞혀 보는 방식으로, 누적 40회 가운데 39회를 썼습니다(한 회차는 구간평균이 답을 못 내 빠집니다)</a:t>
+              <a:t>* 막대는 1등과의 차이 · 가운데 숫자가 평균 오차 · 한 회씩 가려 맞혀 보는 방식으로 누적 40회 가운데 39회를 썼습니다(한 회차는 구간평균이 답을 못 내 빠집니다).</a:t>
             </a:r>
             <a:endParaRPr lang="en-US" sz="750" dirty="0"/>
           </a:p>
@@ -30482,7 +33451,7 @@
         </p:nvSpPr>
         <p:spPr>
           <a:xfrm>
-            <a:off x="876300" y="3352800"/>
+            <a:off x="876300" y="3219450"/>
             <a:ext cx="10382250" cy="123825"/>
           </a:xfrm>
           <a:prstGeom prst="rect">
@@ -30510,7 +33479,7 @@
                 <a:ea typeface="Malgun Gothic" pitchFamily="34" charset="-122"/>
                 <a:cs typeface="Malgun Gothic" pitchFamily="34" charset="-120"/>
               </a:rPr>
-              <a:t>* GP = 가우시안 프로세스. 값 하나를 내는 것이 아니라 곡선 전체를 후보로 두고 실적에 가장 잘 맞는 곡선을 고릅니다. 뒤에 붙은 이름(RBF · Matérn …)은 곡선이 얼마나 부드러운지를 정하는 설정입니다.</a:t>
+              <a:t>* GP = 가우시안 프로세스 — 값 하나가 아니라 곡선 전체를 후보로 두고 실적에 가장 잘 맞는 곡선을 고릅니다. 뒤에 붙은 이름은 곡선이 얼마나 부드러운지를 정하는 설정입니다.</a:t>
             </a:r>
             <a:endParaRPr lang="en-US" sz="750" dirty="0"/>
           </a:p>
@@ -30524,8 +33493,8 @@
         </p:nvSpPr>
         <p:spPr>
           <a:xfrm>
-            <a:off x="685800" y="3743325"/>
-            <a:ext cx="10820400" cy="2352675"/>
+            <a:off x="685800" y="3648075"/>
+            <a:ext cx="10820400" cy="2447925"/>
           </a:xfrm>
           <a:prstGeom prst="rect">
             <a:avLst/>
@@ -30549,8 +33518,8 @@
         </p:nvSpPr>
         <p:spPr>
           <a:xfrm>
-            <a:off x="685800" y="3619500"/>
-            <a:ext cx="1943100" cy="247650"/>
+            <a:off x="685800" y="3524250"/>
+            <a:ext cx="2324100" cy="247650"/>
           </a:xfrm>
           <a:prstGeom prst="rect">
             <a:avLst>
@@ -30571,7 +33540,7 @@
         </p:nvSpPr>
         <p:spPr>
           <a:xfrm>
-            <a:off x="819150" y="3676650"/>
+            <a:off x="819150" y="3581400"/>
             <a:ext cx="152400" cy="142875"/>
           </a:xfrm>
           <a:prstGeom prst="rect">
@@ -30613,8 +33582,8 @@
         </p:nvSpPr>
         <p:spPr>
           <a:xfrm>
-            <a:off x="1009650" y="3676650"/>
-            <a:ext cx="1504950" cy="154305"/>
+            <a:off x="1009650" y="3581400"/>
+            <a:ext cx="1885950" cy="154305"/>
           </a:xfrm>
           <a:prstGeom prst="rect">
             <a:avLst/>
@@ -30641,7 +33610,7 @@
                 <a:ea typeface="Malgun Gothic" pitchFamily="34" charset="-122"/>
                 <a:cs typeface="Malgun Gothic" pitchFamily="34" charset="-120"/>
               </a:rPr>
-              <a:t>도구 안에서 고릅니다</a:t>
+              <a:t>도구 화면 · 출력곡선 비교</a:t>
             </a:r>
             <a:endParaRPr lang="en-US" sz="1013" dirty="0"/>
           </a:p>
@@ -30655,8 +33624,8 @@
         </p:nvSpPr>
         <p:spPr>
           <a:xfrm>
-            <a:off x="8943975" y="3810000"/>
-            <a:ext cx="2447925" cy="125730"/>
+            <a:off x="10020300" y="3714750"/>
+            <a:ext cx="1371600" cy="125730"/>
           </a:xfrm>
           <a:prstGeom prst="rect">
             <a:avLst/>
@@ -30683,7 +33652,7 @@
                 <a:ea typeface="Malgun Gothic" pitchFamily="34" charset="-122"/>
                 <a:cs typeface="Malgun Gothic" pitchFamily="34" charset="-120"/>
               </a:rPr>
-              <a:t>모델 선정 화면 · 위 표와 같은 숫자입니다</a:t>
+              <a:t>GP · RBF 로 그린 결과</a:t>
             </a:r>
             <a:endParaRPr lang="en-US" sz="825" dirty="0"/>
           </a:p>
@@ -30691,7 +33660,7 @@
       </p:sp>
       <p:pic>
         <p:nvPicPr>
-          <p:cNvPr id="63" name="Image 0" descr="/home/user/Narae-AI/docs/ppt/assets/tool_win_sel_t.png">    </p:cNvPr>
+          <p:cNvPr id="63" name="Image 0" descr="/home/user/Narae-AI/docs/ppt/assets/tool_win_curve_s.png">    </p:cNvPr>
           <p:cNvPicPr>
             <a:picLocks noChangeAspect="1"/>
           </p:cNvPicPr>
@@ -30705,8 +33674,8 @@
         </p:blipFill>
         <p:spPr>
           <a:xfrm>
-            <a:off x="876300" y="3981450"/>
-            <a:ext cx="7210425" cy="2095500"/>
+            <a:off x="876300" y="3886200"/>
+            <a:ext cx="6296025" cy="2209800"/>
           </a:xfrm>
           <a:prstGeom prst="rect">
             <a:avLst/>
@@ -30721,8 +33690,8 @@
         </p:nvSpPr>
         <p:spPr>
           <a:xfrm>
-            <a:off x="866775" y="3971925"/>
-            <a:ext cx="7229475" cy="2114550"/>
+            <a:off x="866775" y="3876675"/>
+            <a:ext cx="6315075" cy="2228850"/>
           </a:xfrm>
           <a:prstGeom prst="rect">
             <a:avLst/>
@@ -30743,8 +33712,8 @@
         </p:nvSpPr>
         <p:spPr>
           <a:xfrm>
-            <a:off x="8382000" y="3981450"/>
-            <a:ext cx="2876550" cy="131445"/>
+            <a:off x="7362825" y="3886200"/>
+            <a:ext cx="3895725" cy="131445"/>
           </a:xfrm>
           <a:prstGeom prst="rect">
             <a:avLst/>
@@ -30771,7 +33740,7 @@
                 <a:ea typeface="Malgun Gothic" pitchFamily="34" charset="-122"/>
                 <a:cs typeface="Malgun Gothic" pitchFamily="34" charset="-120"/>
               </a:rPr>
-              <a:t>왜 도구에 넣었나</a:t>
+              <a:t>위 칸</a:t>
             </a:r>
             <a:endParaRPr lang="en-US" sz="863" dirty="0"/>
           </a:p>
@@ -30785,8 +33754,8 @@
         </p:nvSpPr>
         <p:spPr>
           <a:xfrm>
-            <a:off x="8382000" y="4152900"/>
-            <a:ext cx="2876550" cy="424339"/>
+            <a:off x="7362825" y="4057650"/>
+            <a:ext cx="3895725" cy="424339"/>
           </a:xfrm>
           <a:prstGeom prst="rect">
             <a:avLst/>
@@ -30813,7 +33782,7 @@
                 <a:ea typeface="Malgun Gothic" pitchFamily="34" charset="-122"/>
                 <a:cs typeface="Malgun Gothic" pitchFamily="34" charset="-120"/>
               </a:rPr>
-              <a:t>시험이 40회뿐입니다. 실적이 늘면 성적이 바뀔 수 있어 그때마다 다시 채점해야 합니다.</a:t>
+              <a:t>이론값(점선)과 도구가 신고하는 값(빨간 선). 두 선이 벌어진 만큼이 그 온도에서 더하는 값입니다.</a:t>
             </a:r>
             <a:endParaRPr lang="en-US" sz="825" dirty="0"/>
           </a:p>
@@ -30827,8 +33796,8 @@
         </p:nvSpPr>
         <p:spPr>
           <a:xfrm>
-            <a:off x="8382000" y="4705350"/>
-            <a:ext cx="2876550" cy="131445"/>
+            <a:off x="7362825" y="4629150"/>
+            <a:ext cx="3895725" cy="131445"/>
           </a:xfrm>
           <a:prstGeom prst="rect">
             <a:avLst/>
@@ -30855,7 +33824,7 @@
                 <a:ea typeface="Malgun Gothic" pitchFamily="34" charset="-122"/>
                 <a:cs typeface="Malgun Gothic" pitchFamily="34" charset="-120"/>
               </a:rPr>
-              <a:t>어떻게 채점하나</a:t>
+              <a:t>아래 칸</a:t>
             </a:r>
             <a:endParaRPr lang="en-US" sz="863" dirty="0"/>
           </a:p>
@@ -30869,8 +33838,8 @@
         </p:nvSpPr>
         <p:spPr>
           <a:xfrm>
-            <a:off x="8382000" y="4876800"/>
-            <a:ext cx="2876550" cy="424339"/>
+            <a:off x="7362825" y="4800600"/>
+            <a:ext cx="3895725" cy="424339"/>
           </a:xfrm>
           <a:prstGeom prst="rect">
             <a:avLst/>
@@ -30897,7 +33866,7 @@
                 <a:ea typeface="Malgun Gothic" pitchFamily="34" charset="-122"/>
                 <a:cs typeface="Malgun Gothic" pitchFamily="34" charset="-120"/>
               </a:rPr>
-              <a:t>한 회를 가리고 나머지로 그 회를 맞혀 봅니다. 전 회차를 돌아가며 반복해 평균을 냅니다.</a:t>
+              <a:t>온도마다 더하는 값과 시험 실적 점. 연한 띠는 도구가 함께 내는 90% 범위입니다.</a:t>
             </a:r>
             <a:endParaRPr lang="en-US" sz="825" dirty="0"/>
           </a:p>
@@ -30911,8 +33880,8 @@
         </p:nvSpPr>
         <p:spPr>
           <a:xfrm>
-            <a:off x="8382000" y="5429250"/>
-            <a:ext cx="2876550" cy="131445"/>
+            <a:off x="7362825" y="5372100"/>
+            <a:ext cx="3895725" cy="131445"/>
           </a:xfrm>
           <a:prstGeom prst="rect">
             <a:avLst/>
@@ -30939,7 +33908,7 @@
                 <a:ea typeface="Malgun Gothic" pitchFamily="34" charset="-122"/>
                 <a:cs typeface="Malgun Gothic" pitchFamily="34" charset="-120"/>
               </a:rPr>
-              <a:t>앞서면 바꾼다</a:t>
+              <a:t>점이 없는 온도</a:t>
             </a:r>
             <a:endParaRPr lang="en-US" sz="863" dirty="0"/>
           </a:p>
@@ -30953,8 +33922,8 @@
         </p:nvSpPr>
         <p:spPr>
           <a:xfrm>
-            <a:off x="8382000" y="5600700"/>
-            <a:ext cx="2876550" cy="424339"/>
+            <a:off x="7362825" y="5543550"/>
+            <a:ext cx="3895725" cy="424339"/>
           </a:xfrm>
           <a:prstGeom prst="rect">
             <a:avLst/>
@@ -30981,7 +33950,7 @@
                 <a:ea typeface="Malgun Gothic" pitchFamily="34" charset="-122"/>
                 <a:cs typeface="Malgun Gothic" pitchFamily="34" charset="-120"/>
               </a:rPr>
-              <a:t>다른 모델이 앞서면 그때 바꿉니다. 지금은 GP·RBF 가 앞섭니다.</a:t>
+              <a:t>곡선이 메웁니다. 다만 시험한 범위를 벗어나면 끝값을 그대로 씁니다.</a:t>
             </a:r>
             <a:endParaRPr lang="en-US" sz="825" dirty="0"/>
           </a:p>
@@ -31110,7 +34079,7 @@
                 <a:ea typeface="Malgun Gothic" pitchFamily="34" charset="-122"/>
                 <a:cs typeface="Malgun Gothic" pitchFamily="34" charset="-120"/>
               </a:rPr>
-              <a:t>사람이 고른 것이 아니라 성적이 골랐습니다. 그 채점이 도구 안에 들어 있습니다.</a:t>
+              <a:t>사람이 고른 것이 아니라 성적이 골랐습니다. 그 곡선이 신고 숫자를 만듭니다.</a:t>
             </a:r>
             <a:endParaRPr lang="en-US" sz="1163" dirty="0"/>
           </a:p>
@@ -32715,7 +35684,7 @@
         <p:spPr>
           <a:xfrm>
             <a:off x="685800" y="2933700"/>
-            <a:ext cx="1743075" cy="247650"/>
+            <a:ext cx="1943100" cy="247650"/>
           </a:xfrm>
           <a:prstGeom prst="rect">
             <a:avLst>
@@ -32779,7 +35748,7 @@
         <p:spPr>
           <a:xfrm>
             <a:off x="1009650" y="2990850"/>
-            <a:ext cx="1304925" cy="154305"/>
+            <a:ext cx="1504950" cy="154305"/>
           </a:xfrm>
           <a:prstGeom prst="rect">
             <a:avLst/>
@@ -32806,7 +35775,7 @@
                 <a:ea typeface="Malgun Gothic" pitchFamily="34" charset="-122"/>
                 <a:cs typeface="Malgun Gothic" pitchFamily="34" charset="-120"/>
               </a:rPr>
-              <a:t>한 회를 돌린 결과</a:t>
+              <a:t>모델을 계속 지켜본다</a:t>
             </a:r>
             <a:endParaRPr lang="en-US" sz="1013" dirty="0"/>
           </a:p>
@@ -32820,8 +35789,8 @@
         </p:nvSpPr>
         <p:spPr>
           <a:xfrm>
-            <a:off x="8534400" y="3124200"/>
-            <a:ext cx="2857500" cy="125730"/>
+            <a:off x="10048875" y="3124200"/>
+            <a:ext cx="1343025" cy="125730"/>
           </a:xfrm>
           <a:prstGeom prst="rect">
             <a:avLst/>
@@ -32848,15 +35817,133 @@
                 <a:ea typeface="Malgun Gothic" pitchFamily="34" charset="-122"/>
                 <a:cs typeface="Malgun Gothic" pitchFamily="34" charset="-120"/>
               </a:rPr>
-              <a:t>도구 화면 · 날짜와 시각만 넣고 산정을 누른 결과</a:t>
+              <a:t>도구 화면 · 모델 선정</a:t>
             </a:r>
             <a:endParaRPr lang="en-US" sz="825" dirty="0"/>
+          </a:p>
+        </p:txBody>
+      </p:sp>
+      <p:sp>
+        <p:nvSpPr>
+          <p:cNvPr id="47" name="Text 45"/>
+          <p:cNvSpPr txBox="1"/>
+          <p:nvPr/>
+        </p:nvSpPr>
+        <p:spPr>
+          <a:xfrm>
+            <a:off x="876300" y="3295650"/>
+            <a:ext cx="10382250" cy="154781"/>
+          </a:xfrm>
+          <a:prstGeom prst="rect">
+            <a:avLst/>
+          </a:prstGeom>
+          <a:noFill/>
+          <a:ln/>
+        </p:spPr>
+        <p:txBody>
+          <a:bodyPr wrap="square" lIns="0" tIns="0" rIns="0" bIns="0" rtlCol="0" anchor="t"/>
+          <a:lstStyle/>
+          <a:p>
+            <a:pPr algn="l" indent="0" marL="0">
+              <a:lnSpc>
+                <a:spcPts val="1219"/>
+              </a:lnSpc>
+              <a:buNone/>
+            </a:pPr>
+            <a:r>
+              <a:rPr lang="en-US" sz="938" b="1" dirty="0">
+                <a:solidFill>
+                  <a:srgbClr val="EA002C"/>
+                </a:solidFill>
+                <a:latin typeface="Malgun Gothic" pitchFamily="34" charset="0"/>
+                <a:ea typeface="Malgun Gothic" pitchFamily="34" charset="-122"/>
+                <a:cs typeface="Malgun Gothic" pitchFamily="34" charset="-120"/>
+              </a:rPr>
+              <a:t>왜</a:t>
+            </a:r>
+            <a:pPr algn="l" indent="0" marL="0">
+              <a:lnSpc>
+                <a:spcPts val="1219"/>
+              </a:lnSpc>
+              <a:buNone/>
+            </a:pPr>
+            <a:r>
+              <a:rPr lang="en-US" sz="938" dirty="0">
+                <a:solidFill>
+                  <a:srgbClr val="333333"/>
+                </a:solidFill>
+                <a:latin typeface="Malgun Gothic" pitchFamily="34" charset="0"/>
+                <a:ea typeface="Malgun Gothic" pitchFamily="34" charset="-122"/>
+                <a:cs typeface="Malgun Gothic" pitchFamily="34" charset="-120"/>
+              </a:rPr>
+              <a:t> 지켜보나 — 시험이 40회뿐입니다. 표본이 적으면 한 번 고른 곡선을 계속 믿을 수 없고, 실적이 늘면 성적이 바뀔 수 있습니다.</a:t>
+            </a:r>
+            <a:endParaRPr lang="en-US" sz="938" dirty="0"/>
+          </a:p>
+        </p:txBody>
+      </p:sp>
+      <p:sp>
+        <p:nvSpPr>
+          <p:cNvPr id="48" name="Text 46"/>
+          <p:cNvSpPr txBox="1"/>
+          <p:nvPr/>
+        </p:nvSpPr>
+        <p:spPr>
+          <a:xfrm>
+            <a:off x="876300" y="3486150"/>
+            <a:ext cx="10382250" cy="154781"/>
+          </a:xfrm>
+          <a:prstGeom prst="rect">
+            <a:avLst/>
+          </a:prstGeom>
+          <a:noFill/>
+          <a:ln/>
+        </p:spPr>
+        <p:txBody>
+          <a:bodyPr wrap="square" lIns="0" tIns="0" rIns="0" bIns="0" rtlCol="0" anchor="t"/>
+          <a:lstStyle/>
+          <a:p>
+            <a:pPr algn="l" indent="0" marL="0">
+              <a:lnSpc>
+                <a:spcPts val="1219"/>
+              </a:lnSpc>
+              <a:buNone/>
+            </a:pPr>
+            <a:r>
+              <a:rPr lang="en-US" sz="938" b="1" dirty="0">
+                <a:solidFill>
+                  <a:srgbClr val="EA002C"/>
+                </a:solidFill>
+                <a:latin typeface="Malgun Gothic" pitchFamily="34" charset="0"/>
+                <a:ea typeface="Malgun Gothic" pitchFamily="34" charset="-122"/>
+                <a:cs typeface="Malgun Gothic" pitchFamily="34" charset="-120"/>
+              </a:rPr>
+              <a:t>어떻게</a:t>
+            </a:r>
+            <a:pPr algn="l" indent="0" marL="0">
+              <a:lnSpc>
+                <a:spcPts val="1219"/>
+              </a:lnSpc>
+              <a:buNone/>
+            </a:pPr>
+            <a:r>
+              <a:rPr lang="en-US" sz="938" dirty="0">
+                <a:solidFill>
+                  <a:srgbClr val="333333"/>
+                </a:solidFill>
+                <a:latin typeface="Malgun Gothic" pitchFamily="34" charset="0"/>
+                <a:ea typeface="Malgun Gothic" pitchFamily="34" charset="-122"/>
+                <a:cs typeface="Malgun Gothic" pitchFamily="34" charset="-120"/>
+              </a:rPr>
+              <a:t> 지켜보나 — 한 회를 가리고 나머지로 그 회를 맞혀 보는 채점을 후보 7가지에 모두 다시 돌려 성적을 새로 매깁니다. 앞서는 모델이 바뀌면 그때 바꿉니다.</a:t>
+            </a:r>
+            <a:endParaRPr lang="en-US" sz="938" dirty="0"/>
           </a:p>
         </p:txBody>
       </p:sp>
       <p:pic>
         <p:nvPicPr>
-          <p:cNvPr id="47" name="Image 0" descr="/home/user/Narae-AI/docs/ppt/assets/tool_win_run_t.png">    </p:cNvPr>
+          <p:cNvPr id="49" name="Image 0" descr="/home/user/Narae-AI/docs/ppt/assets/tool_win_sel_t.png">    </p:cNvPr>
           <p:cNvPicPr>
             <a:picLocks noChangeAspect="1"/>
           </p:cNvPicPr>
@@ -32870,8 +35957,8 @@
         </p:blipFill>
         <p:spPr>
           <a:xfrm>
-            <a:off x="876300" y="3295650"/>
-            <a:ext cx="8953500" cy="2581275"/>
+            <a:off x="876300" y="3733800"/>
+            <a:ext cx="7924800" cy="2305050"/>
           </a:xfrm>
           <a:prstGeom prst="rect">
             <a:avLst/>
@@ -32880,14 +35967,14 @@
       </p:pic>
       <p:sp>
         <p:nvSpPr>
-          <p:cNvPr id="48" name="Shape 45"/>
-          <p:cNvSpPr/>
-          <p:nvPr/>
-        </p:nvSpPr>
-        <p:spPr>
-          <a:xfrm>
-            <a:off x="866775" y="3286125"/>
-            <a:ext cx="8972550" cy="2600325"/>
+          <p:cNvPr id="50" name="Shape 47"/>
+          <p:cNvSpPr/>
+          <p:nvPr/>
+        </p:nvSpPr>
+        <p:spPr>
+          <a:xfrm>
+            <a:off x="866775" y="3724275"/>
+            <a:ext cx="7943850" cy="2324100"/>
           </a:xfrm>
           <a:prstGeom prst="rect">
             <a:avLst/>
@@ -32902,33 +35989,33 @@
       </p:sp>
       <p:sp>
         <p:nvSpPr>
-          <p:cNvPr id="49" name="Text 46"/>
-          <p:cNvSpPr txBox="1"/>
-          <p:nvPr/>
-        </p:nvSpPr>
-        <p:spPr>
-          <a:xfrm>
-            <a:off x="9963150" y="3352800"/>
-            <a:ext cx="1295400" cy="131445"/>
-          </a:xfrm>
-          <a:prstGeom prst="rect">
-            <a:avLst/>
-          </a:prstGeom>
-          <a:noFill/>
-          <a:ln/>
-        </p:spPr>
-        <p:txBody>
-          <a:bodyPr wrap="square" lIns="0" tIns="0" rIns="0" bIns="0" rtlCol="0" anchor="t"/>
-          <a:lstStyle/>
-          <a:p>
-            <a:pPr algn="l" indent="0" marL="0">
-              <a:lnSpc>
-                <a:spcPts val="1035"/>
-              </a:lnSpc>
-              <a:buNone/>
-            </a:pPr>
-            <a:r>
-              <a:rPr lang="en-US" sz="863" b="1" dirty="0">
+          <p:cNvPr id="51" name="Text 48"/>
+          <p:cNvSpPr txBox="1"/>
+          <p:nvPr/>
+        </p:nvSpPr>
+        <p:spPr>
+          <a:xfrm>
+            <a:off x="9010650" y="3771900"/>
+            <a:ext cx="2247900" cy="125730"/>
+          </a:xfrm>
+          <a:prstGeom prst="rect">
+            <a:avLst/>
+          </a:prstGeom>
+          <a:noFill/>
+          <a:ln/>
+        </p:spPr>
+        <p:txBody>
+          <a:bodyPr wrap="square" lIns="0" tIns="0" rIns="0" bIns="0" rtlCol="0" anchor="t"/>
+          <a:lstStyle/>
+          <a:p>
+            <a:pPr algn="l" indent="0" marL="0">
+              <a:lnSpc>
+                <a:spcPts val="990"/>
+              </a:lnSpc>
+              <a:buNone/>
+            </a:pPr>
+            <a:r>
+              <a:rPr lang="en-US" sz="825" b="1" dirty="0">
                 <a:solidFill>
                   <a:srgbClr val="EA002C"/>
                 </a:solidFill>
@@ -32936,41 +36023,41 @@
                 <a:ea typeface="Malgun Gothic" pitchFamily="34" charset="-122"/>
                 <a:cs typeface="Malgun Gothic" pitchFamily="34" charset="-120"/>
               </a:rPr>
-              <a:t>이론값</a:t>
-            </a:r>
-            <a:endParaRPr lang="en-US" sz="863" dirty="0"/>
-          </a:p>
-        </p:txBody>
-      </p:sp>
-      <p:sp>
-        <p:nvSpPr>
-          <p:cNvPr id="50" name="Text 47"/>
-          <p:cNvSpPr txBox="1"/>
-          <p:nvPr/>
-        </p:nvSpPr>
-        <p:spPr>
-          <a:xfrm>
-            <a:off x="9963150" y="3524250"/>
-            <a:ext cx="1295400" cy="424339"/>
-          </a:xfrm>
-          <a:prstGeom prst="rect">
-            <a:avLst/>
-          </a:prstGeom>
-          <a:noFill/>
-          <a:ln/>
-        </p:spPr>
-        <p:txBody>
-          <a:bodyPr wrap="square" lIns="0" tIns="0" rIns="0" bIns="0" rtlCol="0" anchor="t"/>
-          <a:lstStyle/>
-          <a:p>
-            <a:pPr algn="l" indent="0" marL="0">
-              <a:lnSpc>
-                <a:spcPts val="1114"/>
-              </a:lnSpc>
-              <a:buNone/>
-            </a:pPr>
-            <a:r>
-              <a:rPr lang="en-US" sz="825" dirty="0">
+              <a:t>★ 선정</a:t>
+            </a:r>
+            <a:endParaRPr lang="en-US" sz="825" dirty="0"/>
+          </a:p>
+        </p:txBody>
+      </p:sp>
+      <p:sp>
+        <p:nvSpPr>
+          <p:cNvPr id="52" name="Text 49"/>
+          <p:cNvSpPr txBox="1"/>
+          <p:nvPr/>
+        </p:nvSpPr>
+        <p:spPr>
+          <a:xfrm>
+            <a:off x="9010650" y="3924300"/>
+            <a:ext cx="2247900" cy="540068"/>
+          </a:xfrm>
+          <a:prstGeom prst="rect">
+            <a:avLst/>
+          </a:prstGeom>
+          <a:noFill/>
+          <a:ln/>
+        </p:spPr>
+        <p:txBody>
+          <a:bodyPr wrap="square" lIns="0" tIns="0" rIns="0" bIns="0" rtlCol="0" anchor="t"/>
+          <a:lstStyle/>
+          <a:p>
+            <a:pPr algn="l" indent="0" marL="0">
+              <a:lnSpc>
+                <a:spcPts val="1063"/>
+              </a:lnSpc>
+              <a:buNone/>
+            </a:pPr>
+            <a:r>
+              <a:rPr lang="en-US" sz="788" dirty="0">
                 <a:solidFill>
                   <a:srgbClr val="5A5A5A"/>
                 </a:solidFill>
@@ -32978,7 +36065,49 @@
                 <a:ea typeface="Malgun Gothic" pitchFamily="34" charset="-122"/>
                 <a:cs typeface="Malgun Gothic" pitchFamily="34" charset="-120"/>
               </a:rPr>
-              <a:t>제작사 계산식으로 낸 값</a:t>
+              <a:t>성적이 가장 좋은 모델에 도구가 표시합니다.</a:t>
+            </a:r>
+            <a:endParaRPr lang="en-US" sz="788" dirty="0"/>
+          </a:p>
+        </p:txBody>
+      </p:sp>
+      <p:sp>
+        <p:nvSpPr>
+          <p:cNvPr id="53" name="Text 50"/>
+          <p:cNvSpPr txBox="1"/>
+          <p:nvPr/>
+        </p:nvSpPr>
+        <p:spPr>
+          <a:xfrm>
+            <a:off x="9010650" y="4533900"/>
+            <a:ext cx="2247900" cy="125730"/>
+          </a:xfrm>
+          <a:prstGeom prst="rect">
+            <a:avLst/>
+          </a:prstGeom>
+          <a:noFill/>
+          <a:ln/>
+        </p:spPr>
+        <p:txBody>
+          <a:bodyPr wrap="square" lIns="0" tIns="0" rIns="0" bIns="0" rtlCol="0" anchor="t"/>
+          <a:lstStyle/>
+          <a:p>
+            <a:pPr algn="l" indent="0" marL="0">
+              <a:lnSpc>
+                <a:spcPts val="990"/>
+              </a:lnSpc>
+              <a:buNone/>
+            </a:pPr>
+            <a:r>
+              <a:rPr lang="en-US" sz="825" b="1" dirty="0">
+                <a:solidFill>
+                  <a:srgbClr val="EA002C"/>
+                </a:solidFill>
+                <a:latin typeface="Malgun Gothic" pitchFamily="34" charset="0"/>
+                <a:ea typeface="Malgun Gothic" pitchFamily="34" charset="-122"/>
+                <a:cs typeface="Malgun Gothic" pitchFamily="34" charset="-120"/>
+              </a:rPr>
+              <a:t>판정 열</a:t>
             </a:r>
             <a:endParaRPr lang="en-US" sz="825" dirty="0"/>
           </a:p>
@@ -32986,33 +36115,75 @@
       </p:sp>
       <p:sp>
         <p:nvSpPr>
-          <p:cNvPr id="51" name="Text 48"/>
-          <p:cNvSpPr txBox="1"/>
-          <p:nvPr/>
-        </p:nvSpPr>
-        <p:spPr>
-          <a:xfrm>
-            <a:off x="9963150" y="4114800"/>
-            <a:ext cx="1295400" cy="131445"/>
-          </a:xfrm>
-          <a:prstGeom prst="rect">
-            <a:avLst/>
-          </a:prstGeom>
-          <a:noFill/>
-          <a:ln/>
-        </p:spPr>
-        <p:txBody>
-          <a:bodyPr wrap="square" lIns="0" tIns="0" rIns="0" bIns="0" rtlCol="0" anchor="t"/>
-          <a:lstStyle/>
-          <a:p>
-            <a:pPr algn="l" indent="0" marL="0">
-              <a:lnSpc>
-                <a:spcPts val="1035"/>
-              </a:lnSpc>
-              <a:buNone/>
-            </a:pPr>
-            <a:r>
-              <a:rPr lang="en-US" sz="863" b="1" dirty="0">
+          <p:cNvPr id="54" name="Text 51"/>
+          <p:cNvSpPr txBox="1"/>
+          <p:nvPr/>
+        </p:nvSpPr>
+        <p:spPr>
+          <a:xfrm>
+            <a:off x="9010650" y="4686300"/>
+            <a:ext cx="2247900" cy="540068"/>
+          </a:xfrm>
+          <a:prstGeom prst="rect">
+            <a:avLst/>
+          </a:prstGeom>
+          <a:noFill/>
+          <a:ln/>
+        </p:spPr>
+        <p:txBody>
+          <a:bodyPr wrap="square" lIns="0" tIns="0" rIns="0" bIns="0" rtlCol="0" anchor="t"/>
+          <a:lstStyle/>
+          <a:p>
+            <a:pPr algn="l" indent="0" marL="0">
+              <a:lnSpc>
+                <a:spcPts val="1063"/>
+              </a:lnSpc>
+              <a:buNone/>
+            </a:pPr>
+            <a:r>
+              <a:rPr lang="en-US" sz="788" dirty="0">
+                <a:solidFill>
+                  <a:srgbClr val="5A5A5A"/>
+                </a:solidFill>
+                <a:latin typeface="Malgun Gothic" pitchFamily="34" charset="0"/>
+                <a:ea typeface="Malgun Gothic" pitchFamily="34" charset="-122"/>
+                <a:cs typeface="Malgun Gothic" pitchFamily="34" charset="-120"/>
+              </a:rPr>
+              <a:t>MAE · RMSE · R² · 편차 · 과대 신고 건수를 한자리에서 봅니다.</a:t>
+            </a:r>
+            <a:endParaRPr lang="en-US" sz="788" dirty="0"/>
+          </a:p>
+        </p:txBody>
+      </p:sp>
+      <p:sp>
+        <p:nvSpPr>
+          <p:cNvPr id="55" name="Text 52"/>
+          <p:cNvSpPr txBox="1"/>
+          <p:nvPr/>
+        </p:nvSpPr>
+        <p:spPr>
+          <a:xfrm>
+            <a:off x="9010650" y="5295900"/>
+            <a:ext cx="2247900" cy="125730"/>
+          </a:xfrm>
+          <a:prstGeom prst="rect">
+            <a:avLst/>
+          </a:prstGeom>
+          <a:noFill/>
+          <a:ln/>
+        </p:spPr>
+        <p:txBody>
+          <a:bodyPr wrap="square" lIns="0" tIns="0" rIns="0" bIns="0" rtlCol="0" anchor="t"/>
+          <a:lstStyle/>
+          <a:p>
+            <a:pPr algn="l" indent="0" marL="0">
+              <a:lnSpc>
+                <a:spcPts val="990"/>
+              </a:lnSpc>
+              <a:buNone/>
+            </a:pPr>
+            <a:r>
+              <a:rPr lang="en-US" sz="825" b="1" dirty="0">
                 <a:solidFill>
                   <a:srgbClr val="EA002C"/>
                 </a:solidFill>
@@ -33020,41 +36191,41 @@
                 <a:ea typeface="Malgun Gothic" pitchFamily="34" charset="-122"/>
                 <a:cs typeface="Malgun Gothic" pitchFamily="34" charset="-120"/>
               </a:rPr>
-              <a:t>보정값</a:t>
-            </a:r>
-            <a:endParaRPr lang="en-US" sz="863" dirty="0"/>
-          </a:p>
-        </p:txBody>
-      </p:sp>
-      <p:sp>
-        <p:nvSpPr>
-          <p:cNvPr id="52" name="Text 49"/>
-          <p:cNvSpPr txBox="1"/>
-          <p:nvPr/>
-        </p:nvSpPr>
-        <p:spPr>
-          <a:xfrm>
-            <a:off x="9963150" y="4286250"/>
-            <a:ext cx="1295400" cy="424339"/>
-          </a:xfrm>
-          <a:prstGeom prst="rect">
-            <a:avLst/>
-          </a:prstGeom>
-          <a:noFill/>
-          <a:ln/>
-        </p:spPr>
-        <p:txBody>
-          <a:bodyPr wrap="square" lIns="0" tIns="0" rIns="0" bIns="0" rtlCol="0" anchor="t"/>
-          <a:lstStyle/>
-          <a:p>
-            <a:pPr algn="l" indent="0" marL="0">
-              <a:lnSpc>
-                <a:spcPts val="1114"/>
-              </a:lnSpc>
-              <a:buNone/>
-            </a:pPr>
-            <a:r>
-              <a:rPr lang="en-US" sz="825" dirty="0">
+              <a:t>지금</a:t>
+            </a:r>
+            <a:endParaRPr lang="en-US" sz="825" dirty="0"/>
+          </a:p>
+        </p:txBody>
+      </p:sp>
+      <p:sp>
+        <p:nvSpPr>
+          <p:cNvPr id="56" name="Text 53"/>
+          <p:cNvSpPr txBox="1"/>
+          <p:nvPr/>
+        </p:nvSpPr>
+        <p:spPr>
+          <a:xfrm>
+            <a:off x="9010650" y="5448300"/>
+            <a:ext cx="2247900" cy="540068"/>
+          </a:xfrm>
+          <a:prstGeom prst="rect">
+            <a:avLst/>
+          </a:prstGeom>
+          <a:noFill/>
+          <a:ln/>
+        </p:spPr>
+        <p:txBody>
+          <a:bodyPr wrap="square" lIns="0" tIns="0" rIns="0" bIns="0" rtlCol="0" anchor="t"/>
+          <a:lstStyle/>
+          <a:p>
+            <a:pPr algn="l" indent="0" marL="0">
+              <a:lnSpc>
+                <a:spcPts val="1063"/>
+              </a:lnSpc>
+              <a:buNone/>
+            </a:pPr>
+            <a:r>
+              <a:rPr lang="en-US" sz="788" dirty="0">
                 <a:solidFill>
                   <a:srgbClr val="5A5A5A"/>
                 </a:solidFill>
@@ -33062,141 +36233,15 @@
                 <a:ea typeface="Malgun Gothic" pitchFamily="34" charset="-122"/>
                 <a:cs typeface="Malgun Gothic" pitchFamily="34" charset="-120"/>
               </a:rPr>
-              <a:t>온도마다 다른 더할 값</a:t>
-            </a:r>
-            <a:endParaRPr lang="en-US" sz="825" dirty="0"/>
-          </a:p>
-        </p:txBody>
-      </p:sp>
-      <p:sp>
-        <p:nvSpPr>
-          <p:cNvPr id="53" name="Text 50"/>
-          <p:cNvSpPr txBox="1"/>
-          <p:nvPr/>
-        </p:nvSpPr>
-        <p:spPr>
-          <a:xfrm>
-            <a:off x="9963150" y="4876800"/>
-            <a:ext cx="1295400" cy="131445"/>
-          </a:xfrm>
-          <a:prstGeom prst="rect">
-            <a:avLst/>
-          </a:prstGeom>
-          <a:noFill/>
-          <a:ln/>
-        </p:spPr>
-        <p:txBody>
-          <a:bodyPr wrap="square" lIns="0" tIns="0" rIns="0" bIns="0" rtlCol="0" anchor="t"/>
-          <a:lstStyle/>
-          <a:p>
-            <a:pPr algn="l" indent="0" marL="0">
-              <a:lnSpc>
-                <a:spcPts val="1035"/>
-              </a:lnSpc>
-              <a:buNone/>
-            </a:pPr>
-            <a:r>
-              <a:rPr lang="en-US" sz="863" b="1" dirty="0">
-                <a:solidFill>
-                  <a:srgbClr val="EA002C"/>
-                </a:solidFill>
-                <a:latin typeface="Malgun Gothic" pitchFamily="34" charset="0"/>
-                <a:ea typeface="Malgun Gothic" pitchFamily="34" charset="-122"/>
-                <a:cs typeface="Malgun Gothic" pitchFamily="34" charset="-120"/>
-              </a:rPr>
-              <a:t>현실화</a:t>
-            </a:r>
-            <a:endParaRPr lang="en-US" sz="863" dirty="0"/>
-          </a:p>
-        </p:txBody>
-      </p:sp>
-      <p:sp>
-        <p:nvSpPr>
-          <p:cNvPr id="54" name="Text 51"/>
-          <p:cNvSpPr txBox="1"/>
-          <p:nvPr/>
-        </p:nvSpPr>
-        <p:spPr>
-          <a:xfrm>
-            <a:off x="9963150" y="5048250"/>
-            <a:ext cx="1295400" cy="424339"/>
-          </a:xfrm>
-          <a:prstGeom prst="rect">
-            <a:avLst/>
-          </a:prstGeom>
-          <a:noFill/>
-          <a:ln/>
-        </p:spPr>
-        <p:txBody>
-          <a:bodyPr wrap="square" lIns="0" tIns="0" rIns="0" bIns="0" rtlCol="0" anchor="t"/>
-          <a:lstStyle/>
-          <a:p>
-            <a:pPr algn="l" indent="0" marL="0">
-              <a:lnSpc>
-                <a:spcPts val="1114"/>
-              </a:lnSpc>
-              <a:buNone/>
-            </a:pPr>
-            <a:r>
-              <a:rPr lang="en-US" sz="825" dirty="0">
-                <a:solidFill>
-                  <a:srgbClr val="5A5A5A"/>
-                </a:solidFill>
-                <a:latin typeface="Malgun Gothic" pitchFamily="34" charset="0"/>
-                <a:ea typeface="Malgun Gothic" pitchFamily="34" charset="-122"/>
-                <a:cs typeface="Malgun Gothic" pitchFamily="34" charset="-120"/>
-              </a:rPr>
-              <a:t>실제로 신고하는 값</a:t>
-            </a:r>
-            <a:endParaRPr lang="en-US" sz="825" dirty="0"/>
-          </a:p>
-        </p:txBody>
-      </p:sp>
-      <p:sp>
-        <p:nvSpPr>
-          <p:cNvPr id="55" name="Text 52"/>
-          <p:cNvSpPr txBox="1"/>
-          <p:nvPr/>
-        </p:nvSpPr>
-        <p:spPr>
-          <a:xfrm>
-            <a:off x="876300" y="5943600"/>
-            <a:ext cx="10382250" cy="136208"/>
-          </a:xfrm>
-          <a:prstGeom prst="rect">
-            <a:avLst/>
-          </a:prstGeom>
-          <a:noFill/>
-          <a:ln/>
-        </p:spPr>
-        <p:txBody>
-          <a:bodyPr wrap="square" lIns="0" tIns="0" rIns="0" bIns="0" rtlCol="0" anchor="t"/>
-          <a:lstStyle/>
-          <a:p>
-            <a:pPr algn="l" indent="0" marL="0">
-              <a:lnSpc>
-                <a:spcPts val="1073"/>
-              </a:lnSpc>
-              <a:buNone/>
-            </a:pPr>
-            <a:r>
-              <a:rPr lang="en-US" sz="825" dirty="0">
-                <a:solidFill>
-                  <a:srgbClr val="8C8C8C"/>
-                </a:solidFill>
-                <a:latin typeface="Malgun Gothic" pitchFamily="34" charset="0"/>
-                <a:ea typeface="Malgun Gothic" pitchFamily="34" charset="-122"/>
-                <a:cs typeface="Malgun Gothic" pitchFamily="34" charset="-120"/>
-              </a:rPr>
-              <a:t>온도 61구간이 한 표에 나옵니다. 이 표를 그대로 입찰에 씁니다. 쌓인 실적으로 곡선을 다시 고르는 화면은 7장에 있습니다.</a:t>
-            </a:r>
-            <a:endParaRPr lang="en-US" sz="825" dirty="0"/>
-          </a:p>
-        </p:txBody>
-      </p:sp>
-      <p:sp>
-        <p:nvSpPr>
-          <p:cNvPr id="56" name="Shape 53"/>
+              <a:t>GP · RBF 가 앞섭니다. 이 표가 다음 회차에 다시 계산됩니다.</a:t>
+            </a:r>
+            <a:endParaRPr lang="en-US" sz="788" dirty="0"/>
+          </a:p>
+        </p:txBody>
+      </p:sp>
+      <p:sp>
+        <p:nvSpPr>
+          <p:cNvPr id="57" name="Shape 54"/>
           <p:cNvSpPr/>
           <p:nvPr/>
         </p:nvSpPr>
@@ -33219,7 +36264,7 @@
       </p:sp>
       <p:sp>
         <p:nvSpPr>
-          <p:cNvPr id="57" name="Shape 54"/>
+          <p:cNvPr id="58" name="Shape 55"/>
           <p:cNvSpPr/>
           <p:nvPr/>
         </p:nvSpPr>
@@ -33241,7 +36286,7 @@
       </p:sp>
       <p:sp>
         <p:nvSpPr>
-          <p:cNvPr id="58" name="Text 55"/>
+          <p:cNvPr id="59" name="Text 56"/>
           <p:cNvSpPr txBox="1"/>
           <p:nvPr/>
         </p:nvSpPr>
@@ -33283,7 +36328,7 @@
       </p:sp>
       <p:sp>
         <p:nvSpPr>
-          <p:cNvPr id="59" name="Text 56"/>
+          <p:cNvPr id="60" name="Text 57"/>
           <p:cNvSpPr txBox="1"/>
           <p:nvPr/>
         </p:nvSpPr>
@@ -33317,7 +36362,7 @@
                 <a:ea typeface="Malgun Gothic" pitchFamily="34" charset="-122"/>
                 <a:cs typeface="Malgun Gothic" pitchFamily="34" charset="-120"/>
               </a:rPr>
-              <a:t>책상 계산이 아니라, 넉 달을 기존 방식과 나란히 돌려 확인한 결과입니다.</a:t>
+              <a:t>넉 달을 나란히 돌려 확인했고, 실적이 늘 때마다 도구가 스스로 다시 채점합니다.</a:t>
             </a:r>
             <a:endParaRPr lang="en-US" sz="1163" dirty="0"/>
           </a:p>

--- a/docs/ppt/위례_공급가능용량_최종발표_v3.pptx
+++ b/docs/ppt/위례_공급가능용량_최종발표_v3.pptx
@@ -13701,7 +13701,7 @@
                 <a:ea typeface="Malgun Gothic" pitchFamily="34" charset="-122"/>
                 <a:cs typeface="Malgun Gothic" pitchFamily="34" charset="-120"/>
               </a:rPr>
-              <a:t>넉 달 병행 운전 · 모델 재검증</a:t>
+              <a:t>계속 확인하는 구조</a:t>
             </a:r>
             <a:endParaRPr lang="en-US" sz="1013" dirty="0"/>
           </a:p>
@@ -34456,7 +34456,7 @@
                 <a:ea typeface="Malgun Gothic" pitchFamily="34" charset="-122"/>
                 <a:cs typeface="Malgun Gothic" pitchFamily="34" charset="-120"/>
               </a:rPr>
-              <a:t>넉 달 병행 운전</a:t>
+              <a:t>계속 확인하는 구조</a:t>
             </a:r>
             <a:endParaRPr lang="en-US" sz="2475" dirty="0"/>
           </a:p>
@@ -34498,7 +34498,7 @@
                 <a:ea typeface="Malgun Gothic" pitchFamily="34" charset="-122"/>
                 <a:cs typeface="Malgun Gothic" pitchFamily="34" charset="-120"/>
               </a:rPr>
-              <a:t>기존 방식과 나란히 돌렸습니다. 예측을 먼저 적어 두고 시험이 끝난 뒤 실제와 맞춰 봤습니다.</a:t>
+              <a:t>한 번 만들고 끝나지 않습니다. 돌리고 · 대 보고 · 다시 채점하는 순서를 만들어 두었습니다.</a:t>
             </a:r>
             <a:endParaRPr lang="en-US" sz="1275" dirty="0"/>
           </a:p>
@@ -35684,7 +35684,7 @@
         <p:spPr>
           <a:xfrm>
             <a:off x="685800" y="2933700"/>
-            <a:ext cx="1943100" cy="247650"/>
+            <a:ext cx="2305050" cy="247650"/>
           </a:xfrm>
           <a:prstGeom prst="rect">
             <a:avLst>
@@ -35748,7 +35748,7 @@
         <p:spPr>
           <a:xfrm>
             <a:off x="1009650" y="2990850"/>
-            <a:ext cx="1504950" cy="154305"/>
+            <a:ext cx="1866900" cy="154305"/>
           </a:xfrm>
           <a:prstGeom prst="rect">
             <a:avLst/>
@@ -35775,7 +35775,7 @@
                 <a:ea typeface="Malgun Gothic" pitchFamily="34" charset="-122"/>
                 <a:cs typeface="Malgun Gothic" pitchFamily="34" charset="-120"/>
               </a:rPr>
-              <a:t>모델을 계속 지켜본다</a:t>
+              <a:t>실적이 늘면 다시 채점한다</a:t>
             </a:r>
             <a:endParaRPr lang="en-US" sz="1013" dirty="0"/>
           </a:p>
@@ -35876,7 +35876,7 @@
                 <a:ea typeface="Malgun Gothic" pitchFamily="34" charset="-122"/>
                 <a:cs typeface="Malgun Gothic" pitchFamily="34" charset="-120"/>
               </a:rPr>
-              <a:t> 지켜보나 — 시험이 40회뿐입니다. 표본이 적으면 한 번 고른 곡선을 계속 믿을 수 없고, 실적이 늘면 성적이 바뀔 수 있습니다.</a:t>
+              <a:t> 다시 채점하나 — 시험이 40회뿐입니다. 표본이 적으면 한 번 고른 곡선을 계속 믿을 수 없고, 실적이 늘면 성적이 바뀔 수 있습니다.</a:t>
             </a:r>
             <a:endParaRPr lang="en-US" sz="938" dirty="0"/>
           </a:p>
@@ -35935,7 +35935,7 @@
                 <a:ea typeface="Malgun Gothic" pitchFamily="34" charset="-122"/>
                 <a:cs typeface="Malgun Gothic" pitchFamily="34" charset="-120"/>
               </a:rPr>
-              <a:t> 지켜보나 — 한 회를 가리고 나머지로 그 회를 맞혀 보는 채점을 후보 7가지에 모두 다시 돌려 성적을 새로 매깁니다. 앞서는 모델이 바뀌면 그때 바꿉니다.</a:t>
+              <a:t> 채점하나 — 한 회를 가리고 나머지로 그 회를 맞혀 보는 채점을 후보 7가지에 모두 다시 돌려 성적을 새로 매깁니다. 앞서는 모델이 바뀌면 그때 바꿉니다.</a:t>
             </a:r>
             <a:endParaRPr lang="en-US" sz="938" dirty="0"/>
           </a:p>

--- a/docs/ppt/위례_공급가능용량_최종발표_v3.pptx
+++ b/docs/ppt/위례_공급가능용량_최종발표_v3.pptx
@@ -9329,105 +9329,19 @@
       </p:sp>
       <p:sp>
         <p:nvSpPr>
-          <p:cNvPr id="4" name="Text 2"/>
-          <p:cNvSpPr txBox="1"/>
-          <p:nvPr/>
-        </p:nvSpPr>
-        <p:spPr>
-          <a:xfrm>
-            <a:off x="685800" y="1009650"/>
-            <a:ext cx="6667500" cy="672084"/>
-          </a:xfrm>
-          <a:prstGeom prst="rect">
-            <a:avLst/>
-          </a:prstGeom>
-          <a:noFill/>
-          <a:ln/>
-        </p:spPr>
-        <p:txBody>
-          <a:bodyPr wrap="square" lIns="0" tIns="0" rIns="0" bIns="0" rtlCol="0" anchor="t"/>
-          <a:lstStyle/>
-          <a:p>
-            <a:pPr algn="l" indent="0" marL="0">
-              <a:lnSpc>
-                <a:spcPts val="5292"/>
-              </a:lnSpc>
-              <a:buNone/>
-            </a:pPr>
-            <a:r>
-              <a:rPr lang="en-US" sz="4200" b="1" dirty="0">
-                <a:solidFill>
-                  <a:srgbClr val="1A1A1A"/>
-                </a:solidFill>
-                <a:latin typeface="Malgun Gothic" pitchFamily="34" charset="0"/>
-                <a:ea typeface="Malgun Gothic" pitchFamily="34" charset="-122"/>
-                <a:cs typeface="Malgun Gothic" pitchFamily="34" charset="-120"/>
-              </a:rPr>
-              <a:t>감사합니다</a:t>
-            </a:r>
-            <a:endParaRPr lang="en-US" sz="4200" dirty="0"/>
-          </a:p>
-        </p:txBody>
-      </p:sp>
-      <p:sp>
-        <p:nvSpPr>
-          <p:cNvPr id="5" name="Text 3"/>
-          <p:cNvSpPr txBox="1"/>
-          <p:nvPr/>
-        </p:nvSpPr>
-        <p:spPr>
-          <a:xfrm>
-            <a:off x="685800" y="1809750"/>
-            <a:ext cx="8572500" cy="226695"/>
-          </a:xfrm>
-          <a:prstGeom prst="rect">
-            <a:avLst/>
-          </a:prstGeom>
-          <a:noFill/>
-          <a:ln/>
-        </p:spPr>
-        <p:txBody>
-          <a:bodyPr wrap="square" lIns="0" tIns="0" rIns="0" bIns="0" rtlCol="0" anchor="t"/>
-          <a:lstStyle/>
-          <a:p>
-            <a:pPr algn="l" indent="0" marL="0">
-              <a:lnSpc>
-                <a:spcPts val="1785"/>
-              </a:lnSpc>
-              <a:buNone/>
-            </a:pPr>
-            <a:r>
-              <a:rPr lang="en-US" sz="1275" dirty="0">
-                <a:solidFill>
-                  <a:srgbClr val="333333"/>
-                </a:solidFill>
-                <a:latin typeface="Malgun Gothic" pitchFamily="34" charset="0"/>
-                <a:ea typeface="Malgun Gothic" pitchFamily="34" charset="-122"/>
-                <a:cs typeface="Malgun Gothic" pitchFamily="34" charset="-120"/>
-              </a:rPr>
-              <a:t>시험 40회가 만든 곡선입니다.</a:t>
-            </a:r>
-            <a:endParaRPr lang="en-US" sz="1275" dirty="0"/>
-          </a:p>
-        </p:txBody>
-      </p:sp>
-      <p:sp>
-        <p:nvSpPr>
-          <p:cNvPr id="6" name="Shape 4"/>
-          <p:cNvSpPr/>
-          <p:nvPr/>
-        </p:nvSpPr>
-        <p:spPr>
-          <a:xfrm>
-            <a:off x="685800" y="2447925"/>
-            <a:ext cx="10820400" cy="2886075"/>
-          </a:xfrm>
-          <a:prstGeom prst="rect">
-            <a:avLst/>
-          </a:prstGeom>
-          <a:solidFill>
-            <a:srgbClr val="FFFFFF"/>
-          </a:solidFill>
+          <p:cNvPr id="4" name="Shape 2"/>
+          <p:cNvSpPr/>
+          <p:nvPr/>
+        </p:nvSpPr>
+        <p:spPr>
+          <a:xfrm>
+            <a:off x="685800" y="1428750"/>
+            <a:ext cx="10820400" cy="0"/>
+          </a:xfrm>
+          <a:prstGeom prst="line">
+            <a:avLst/>
+          </a:prstGeom>
+          <a:noFill/>
           <a:ln w="12700">
             <a:solidFill>
               <a:srgbClr val="C9D0D8"/>
@@ -9438,19 +9352,17 @@
       </p:sp>
       <p:sp>
         <p:nvSpPr>
-          <p:cNvPr id="7" name="Shape 5"/>
-          <p:cNvSpPr/>
-          <p:nvPr/>
-        </p:nvSpPr>
-        <p:spPr>
-          <a:xfrm>
-            <a:off x="685800" y="2324100"/>
-            <a:ext cx="1714500" cy="247650"/>
-          </a:xfrm>
-          <a:prstGeom prst="rect">
-            <a:avLst>
-              <a:gd name="adj" fmla="val 44308"/>
-            </a:avLst>
+          <p:cNvPr id="5" name="Shape 3"/>
+          <p:cNvSpPr/>
+          <p:nvPr/>
+        </p:nvSpPr>
+        <p:spPr>
+          <a:xfrm>
+            <a:off x="685800" y="2152650"/>
+            <a:ext cx="438150" cy="28575"/>
+          </a:xfrm>
+          <a:prstGeom prst="rect">
+            <a:avLst/>
           </a:prstGeom>
           <a:solidFill>
             <a:srgbClr val="EA002C"/>
@@ -9460,2706 +9372,163 @@
       </p:sp>
       <p:sp>
         <p:nvSpPr>
-          <p:cNvPr id="8" name="Text 6"/>
-          <p:cNvSpPr txBox="1"/>
-          <p:nvPr/>
-        </p:nvSpPr>
-        <p:spPr>
-          <a:xfrm>
-            <a:off x="819150" y="2381250"/>
-            <a:ext cx="1466850" cy="154305"/>
-          </a:xfrm>
-          <a:prstGeom prst="rect">
-            <a:avLst/>
-          </a:prstGeom>
-          <a:noFill/>
-          <a:ln/>
-        </p:spPr>
-        <p:txBody>
-          <a:bodyPr wrap="square" lIns="0" tIns="0" rIns="0" bIns="0" rtlCol="0" anchor="t"/>
-          <a:lstStyle/>
-          <a:p>
-            <a:pPr algn="l" indent="0" marL="0">
-              <a:lnSpc>
-                <a:spcPts val="1215"/>
-              </a:lnSpc>
-              <a:buNone/>
-            </a:pPr>
-            <a:r>
-              <a:rPr lang="en-US" sz="1013" b="1" dirty="0">
-                <a:solidFill>
-                  <a:srgbClr val="FFFFFF"/>
-                </a:solidFill>
-                <a:latin typeface="Malgun Gothic" pitchFamily="34" charset="0"/>
-                <a:ea typeface="Malgun Gothic" pitchFamily="34" charset="-122"/>
-                <a:cs typeface="Malgun Gothic" pitchFamily="34" charset="-120"/>
-              </a:rPr>
-              <a:t>외기온도별 신고 출력</a:t>
-            </a:r>
-            <a:endParaRPr lang="en-US" sz="1013" dirty="0"/>
-          </a:p>
-        </p:txBody>
-      </p:sp>
-      <p:sp>
-        <p:nvSpPr>
-          <p:cNvPr id="9" name="Text 7"/>
-          <p:cNvSpPr txBox="1"/>
-          <p:nvPr/>
-        </p:nvSpPr>
-        <p:spPr>
-          <a:xfrm>
-            <a:off x="9277350" y="2514600"/>
-            <a:ext cx="2114550" cy="125730"/>
-          </a:xfrm>
-          <a:prstGeom prst="rect">
-            <a:avLst/>
-          </a:prstGeom>
-          <a:noFill/>
-          <a:ln/>
-        </p:spPr>
-        <p:txBody>
-          <a:bodyPr wrap="square" lIns="0" tIns="0" rIns="0" bIns="0" rtlCol="0" anchor="t"/>
-          <a:lstStyle/>
-          <a:p>
-            <a:pPr algn="r" indent="0" marL="0">
-              <a:lnSpc>
-                <a:spcPts val="990"/>
-              </a:lnSpc>
-              <a:buNone/>
-            </a:pPr>
-            <a:r>
-              <a:rPr lang="en-US" sz="825" dirty="0">
-                <a:solidFill>
-                  <a:srgbClr val="8C8C8C"/>
-                </a:solidFill>
-                <a:latin typeface="Malgun Gothic" pitchFamily="34" charset="0"/>
-                <a:ea typeface="Malgun Gothic" pitchFamily="34" charset="-122"/>
-                <a:cs typeface="Malgun Gothic" pitchFamily="34" charset="-120"/>
-              </a:rPr>
-              <a:t>단위 MW · 검은 점이 실제 시험 결과</a:t>
-            </a:r>
-            <a:endParaRPr lang="en-US" sz="825" dirty="0"/>
-          </a:p>
-        </p:txBody>
-      </p:sp>
-      <p:sp>
-        <p:nvSpPr>
-          <p:cNvPr id="10" name="Shape 8"/>
-          <p:cNvSpPr/>
-          <p:nvPr/>
-        </p:nvSpPr>
-        <p:spPr>
-          <a:xfrm>
-            <a:off x="1676400" y="4953000"/>
-            <a:ext cx="9601200" cy="0"/>
-          </a:xfrm>
-          <a:prstGeom prst="line">
-            <a:avLst/>
-          </a:prstGeom>
-          <a:noFill/>
-          <a:ln w="12700">
-            <a:solidFill>
-              <a:srgbClr val="DEE3E9"/>
-            </a:solidFill>
-            <a:prstDash val="solid"/>
-          </a:ln>
-        </p:spPr>
-      </p:sp>
-      <p:sp>
-        <p:nvSpPr>
-          <p:cNvPr id="11" name="Text 9"/>
-          <p:cNvSpPr txBox="1"/>
-          <p:nvPr/>
-        </p:nvSpPr>
-        <p:spPr>
-          <a:xfrm>
-            <a:off x="1143000" y="4886325"/>
-            <a:ext cx="438150" cy="120015"/>
-          </a:xfrm>
-          <a:prstGeom prst="rect">
-            <a:avLst/>
-          </a:prstGeom>
-          <a:noFill/>
-          <a:ln/>
-        </p:spPr>
-        <p:txBody>
-          <a:bodyPr wrap="square" lIns="0" tIns="0" rIns="0" bIns="0" rtlCol="0" anchor="t"/>
-          <a:lstStyle/>
-          <a:p>
-            <a:pPr algn="r" indent="0" marL="0">
-              <a:lnSpc>
-                <a:spcPts val="945"/>
-              </a:lnSpc>
-              <a:buNone/>
-            </a:pPr>
-            <a:r>
-              <a:rPr lang="en-US" sz="788" dirty="0">
-                <a:solidFill>
-                  <a:srgbClr val="8C8C8C"/>
+          <p:cNvPr id="6" name="Text 4"/>
+          <p:cNvSpPr txBox="1"/>
+          <p:nvPr/>
+        </p:nvSpPr>
+        <p:spPr>
+          <a:xfrm>
+            <a:off x="685800" y="2419350"/>
+            <a:ext cx="8572500" cy="662940"/>
+          </a:xfrm>
+          <a:prstGeom prst="rect">
+            <a:avLst/>
+          </a:prstGeom>
+          <a:noFill/>
+          <a:ln/>
+        </p:spPr>
+        <p:txBody>
+          <a:bodyPr wrap="square" lIns="0" tIns="0" rIns="0" bIns="0" rtlCol="0" anchor="t"/>
+          <a:lstStyle/>
+          <a:p>
+            <a:pPr algn="l" indent="0" marL="0">
+              <a:lnSpc>
+                <a:spcPts val="5220"/>
+              </a:lnSpc>
+              <a:buNone/>
+            </a:pPr>
+            <a:r>
+              <a:rPr lang="en-US" sz="4350" b="1" dirty="0">
+                <a:solidFill>
+                  <a:srgbClr val="1A1A1A"/>
+                </a:solidFill>
+                <a:latin typeface="Malgun Gothic" pitchFamily="34" charset="0"/>
+                <a:ea typeface="Malgun Gothic" pitchFamily="34" charset="-122"/>
+                <a:cs typeface="Malgun Gothic" pitchFamily="34" charset="-120"/>
+              </a:rPr>
+              <a:t>감사합니다</a:t>
+            </a:r>
+            <a:endParaRPr lang="en-US" sz="4350" dirty="0"/>
+          </a:p>
+        </p:txBody>
+      </p:sp>
+      <p:sp>
+        <p:nvSpPr>
+          <p:cNvPr id="7" name="Text 5"/>
+          <p:cNvSpPr txBox="1"/>
+          <p:nvPr/>
+        </p:nvSpPr>
+        <p:spPr>
+          <a:xfrm>
+            <a:off x="685800" y="3314700"/>
+            <a:ext cx="3810000" cy="354330"/>
+          </a:xfrm>
+          <a:prstGeom prst="rect">
+            <a:avLst/>
+          </a:prstGeom>
+          <a:noFill/>
+          <a:ln/>
+        </p:spPr>
+        <p:txBody>
+          <a:bodyPr wrap="square" lIns="0" tIns="0" rIns="0" bIns="0" rtlCol="0" anchor="t"/>
+          <a:lstStyle/>
+          <a:p>
+            <a:pPr algn="l" indent="0" marL="0">
+              <a:lnSpc>
+                <a:spcPts val="2790"/>
+              </a:lnSpc>
+              <a:buNone/>
+            </a:pPr>
+            <a:r>
+              <a:rPr lang="en-US" sz="2325" b="1" spc="200" kern="0" dirty="0">
+                <a:solidFill>
+                  <a:srgbClr val="EA002C"/>
                 </a:solidFill>
                 <a:latin typeface="Consolas" pitchFamily="34" charset="0"/>
                 <a:ea typeface="Consolas" pitchFamily="34" charset="-122"/>
                 <a:cs typeface="Consolas" pitchFamily="34" charset="-120"/>
               </a:rPr>
-              <a:t>350</a:t>
-            </a:r>
-            <a:endParaRPr lang="en-US" sz="788" dirty="0"/>
-          </a:p>
-        </p:txBody>
-      </p:sp>
-      <p:sp>
-        <p:nvSpPr>
-          <p:cNvPr id="12" name="Shape 10"/>
-          <p:cNvSpPr/>
-          <p:nvPr/>
-        </p:nvSpPr>
-        <p:spPr>
-          <a:xfrm>
-            <a:off x="1676400" y="4516438"/>
-            <a:ext cx="9601200" cy="0"/>
-          </a:xfrm>
-          <a:prstGeom prst="line">
-            <a:avLst/>
-          </a:prstGeom>
-          <a:noFill/>
-          <a:ln w="12700">
-            <a:solidFill>
-              <a:srgbClr val="DEE3E9"/>
-            </a:solidFill>
-            <a:prstDash val="solid"/>
-          </a:ln>
-        </p:spPr>
-      </p:sp>
-      <p:sp>
-        <p:nvSpPr>
-          <p:cNvPr id="13" name="Text 11"/>
-          <p:cNvSpPr txBox="1"/>
-          <p:nvPr/>
-        </p:nvSpPr>
-        <p:spPr>
-          <a:xfrm>
-            <a:off x="1143000" y="4449763"/>
-            <a:ext cx="438150" cy="120015"/>
-          </a:xfrm>
-          <a:prstGeom prst="rect">
-            <a:avLst/>
-          </a:prstGeom>
-          <a:noFill/>
-          <a:ln/>
-        </p:spPr>
-        <p:txBody>
-          <a:bodyPr wrap="square" lIns="0" tIns="0" rIns="0" bIns="0" rtlCol="0" anchor="t"/>
-          <a:lstStyle/>
-          <a:p>
-            <a:pPr algn="r" indent="0" marL="0">
-              <a:lnSpc>
-                <a:spcPts val="945"/>
-              </a:lnSpc>
-              <a:buNone/>
-            </a:pPr>
-            <a:r>
-              <a:rPr lang="en-US" sz="788" dirty="0">
-                <a:solidFill>
-                  <a:srgbClr val="8C8C8C"/>
-                </a:solidFill>
-                <a:latin typeface="Consolas" pitchFamily="34" charset="0"/>
-                <a:ea typeface="Consolas" pitchFamily="34" charset="-122"/>
-                <a:cs typeface="Consolas" pitchFamily="34" charset="-120"/>
-              </a:rPr>
-              <a:t>375</a:t>
-            </a:r>
-            <a:endParaRPr lang="en-US" sz="788" dirty="0"/>
-          </a:p>
-        </p:txBody>
-      </p:sp>
-      <p:sp>
-        <p:nvSpPr>
-          <p:cNvPr id="14" name="Shape 12"/>
-          <p:cNvSpPr/>
-          <p:nvPr/>
-        </p:nvSpPr>
-        <p:spPr>
-          <a:xfrm>
-            <a:off x="1676400" y="4079875"/>
-            <a:ext cx="9601200" cy="0"/>
-          </a:xfrm>
-          <a:prstGeom prst="line">
-            <a:avLst/>
-          </a:prstGeom>
-          <a:noFill/>
-          <a:ln w="12700">
-            <a:solidFill>
-              <a:srgbClr val="DEE3E9"/>
-            </a:solidFill>
-            <a:prstDash val="solid"/>
-          </a:ln>
-        </p:spPr>
-      </p:sp>
-      <p:sp>
-        <p:nvSpPr>
-          <p:cNvPr id="15" name="Text 13"/>
-          <p:cNvSpPr txBox="1"/>
-          <p:nvPr/>
-        </p:nvSpPr>
-        <p:spPr>
-          <a:xfrm>
-            <a:off x="1143000" y="4013200"/>
-            <a:ext cx="438150" cy="120015"/>
-          </a:xfrm>
-          <a:prstGeom prst="rect">
-            <a:avLst/>
-          </a:prstGeom>
-          <a:noFill/>
-          <a:ln/>
-        </p:spPr>
-        <p:txBody>
-          <a:bodyPr wrap="square" lIns="0" tIns="0" rIns="0" bIns="0" rtlCol="0" anchor="t"/>
-          <a:lstStyle/>
-          <a:p>
-            <a:pPr algn="r" indent="0" marL="0">
-              <a:lnSpc>
-                <a:spcPts val="945"/>
-              </a:lnSpc>
-              <a:buNone/>
-            </a:pPr>
-            <a:r>
-              <a:rPr lang="en-US" sz="788" dirty="0">
-                <a:solidFill>
-                  <a:srgbClr val="8C8C8C"/>
-                </a:solidFill>
-                <a:latin typeface="Consolas" pitchFamily="34" charset="0"/>
-                <a:ea typeface="Consolas" pitchFamily="34" charset="-122"/>
-                <a:cs typeface="Consolas" pitchFamily="34" charset="-120"/>
-              </a:rPr>
-              <a:t>400</a:t>
-            </a:r>
-            <a:endParaRPr lang="en-US" sz="788" dirty="0"/>
-          </a:p>
-        </p:txBody>
-      </p:sp>
-      <p:sp>
-        <p:nvSpPr>
-          <p:cNvPr id="16" name="Shape 14"/>
-          <p:cNvSpPr/>
-          <p:nvPr/>
-        </p:nvSpPr>
-        <p:spPr>
-          <a:xfrm>
-            <a:off x="1676400" y="3643313"/>
-            <a:ext cx="9601200" cy="0"/>
-          </a:xfrm>
-          <a:prstGeom prst="line">
-            <a:avLst/>
-          </a:prstGeom>
-          <a:noFill/>
-          <a:ln w="12700">
-            <a:solidFill>
-              <a:srgbClr val="DEE3E9"/>
-            </a:solidFill>
-            <a:prstDash val="solid"/>
-          </a:ln>
-        </p:spPr>
-      </p:sp>
-      <p:sp>
-        <p:nvSpPr>
-          <p:cNvPr id="17" name="Text 15"/>
-          <p:cNvSpPr txBox="1"/>
-          <p:nvPr/>
-        </p:nvSpPr>
-        <p:spPr>
-          <a:xfrm>
-            <a:off x="1143000" y="3576638"/>
-            <a:ext cx="438150" cy="120015"/>
-          </a:xfrm>
-          <a:prstGeom prst="rect">
-            <a:avLst/>
-          </a:prstGeom>
-          <a:noFill/>
-          <a:ln/>
-        </p:spPr>
-        <p:txBody>
-          <a:bodyPr wrap="square" lIns="0" tIns="0" rIns="0" bIns="0" rtlCol="0" anchor="t"/>
-          <a:lstStyle/>
-          <a:p>
-            <a:pPr algn="r" indent="0" marL="0">
-              <a:lnSpc>
-                <a:spcPts val="945"/>
-              </a:lnSpc>
-              <a:buNone/>
-            </a:pPr>
-            <a:r>
-              <a:rPr lang="en-US" sz="788" dirty="0">
-                <a:solidFill>
-                  <a:srgbClr val="8C8C8C"/>
-                </a:solidFill>
-                <a:latin typeface="Consolas" pitchFamily="34" charset="0"/>
-                <a:ea typeface="Consolas" pitchFamily="34" charset="-122"/>
-                <a:cs typeface="Consolas" pitchFamily="34" charset="-120"/>
-              </a:rPr>
-              <a:t>425</a:t>
-            </a:r>
-            <a:endParaRPr lang="en-US" sz="788" dirty="0"/>
-          </a:p>
-        </p:txBody>
-      </p:sp>
-      <p:sp>
-        <p:nvSpPr>
-          <p:cNvPr id="18" name="Shape 16"/>
-          <p:cNvSpPr/>
-          <p:nvPr/>
-        </p:nvSpPr>
-        <p:spPr>
-          <a:xfrm>
-            <a:off x="1676400" y="3206750"/>
-            <a:ext cx="9601200" cy="0"/>
-          </a:xfrm>
-          <a:prstGeom prst="line">
-            <a:avLst/>
-          </a:prstGeom>
-          <a:noFill/>
-          <a:ln w="12700">
-            <a:solidFill>
-              <a:srgbClr val="DEE3E9"/>
-            </a:solidFill>
-            <a:prstDash val="solid"/>
-          </a:ln>
-        </p:spPr>
-      </p:sp>
-      <p:sp>
-        <p:nvSpPr>
-          <p:cNvPr id="19" name="Text 17"/>
-          <p:cNvSpPr txBox="1"/>
-          <p:nvPr/>
-        </p:nvSpPr>
-        <p:spPr>
-          <a:xfrm>
-            <a:off x="1143000" y="3140075"/>
-            <a:ext cx="438150" cy="120015"/>
-          </a:xfrm>
-          <a:prstGeom prst="rect">
-            <a:avLst/>
-          </a:prstGeom>
-          <a:noFill/>
-          <a:ln/>
-        </p:spPr>
-        <p:txBody>
-          <a:bodyPr wrap="square" lIns="0" tIns="0" rIns="0" bIns="0" rtlCol="0" anchor="t"/>
-          <a:lstStyle/>
-          <a:p>
-            <a:pPr algn="r" indent="0" marL="0">
-              <a:lnSpc>
-                <a:spcPts val="945"/>
-              </a:lnSpc>
-              <a:buNone/>
-            </a:pPr>
-            <a:r>
-              <a:rPr lang="en-US" sz="788" dirty="0">
-                <a:solidFill>
-                  <a:srgbClr val="8C8C8C"/>
-                </a:solidFill>
-                <a:latin typeface="Consolas" pitchFamily="34" charset="0"/>
-                <a:ea typeface="Consolas" pitchFamily="34" charset="-122"/>
-                <a:cs typeface="Consolas" pitchFamily="34" charset="-120"/>
-              </a:rPr>
-              <a:t>450</a:t>
-            </a:r>
-            <a:endParaRPr lang="en-US" sz="788" dirty="0"/>
-          </a:p>
-        </p:txBody>
-      </p:sp>
-      <p:sp>
-        <p:nvSpPr>
-          <p:cNvPr id="20" name="Text 18"/>
-          <p:cNvSpPr txBox="1"/>
-          <p:nvPr/>
-        </p:nvSpPr>
-        <p:spPr>
-          <a:xfrm>
-            <a:off x="3371850" y="5029200"/>
-            <a:ext cx="457200" cy="120015"/>
-          </a:xfrm>
-          <a:prstGeom prst="rect">
-            <a:avLst/>
-          </a:prstGeom>
-          <a:noFill/>
-          <a:ln/>
-        </p:spPr>
-        <p:txBody>
-          <a:bodyPr wrap="square" lIns="0" tIns="0" rIns="0" bIns="0" rtlCol="0" anchor="t"/>
-          <a:lstStyle/>
-          <a:p>
-            <a:pPr algn="ctr" indent="0" marL="0">
-              <a:lnSpc>
-                <a:spcPts val="945"/>
-              </a:lnSpc>
-              <a:buNone/>
-            </a:pPr>
-            <a:r>
-              <a:rPr lang="en-US" sz="788" dirty="0">
-                <a:solidFill>
-                  <a:srgbClr val="8C8C8C"/>
-                </a:solidFill>
-                <a:latin typeface="Consolas" pitchFamily="34" charset="0"/>
-                <a:ea typeface="Consolas" pitchFamily="34" charset="-122"/>
-                <a:cs typeface="Consolas" pitchFamily="34" charset="-120"/>
-              </a:rPr>
-              <a:t>0℃</a:t>
-            </a:r>
-            <a:endParaRPr lang="en-US" sz="788" dirty="0"/>
-          </a:p>
-        </p:txBody>
-      </p:sp>
-      <p:sp>
-        <p:nvSpPr>
-          <p:cNvPr id="21" name="Text 19"/>
-          <p:cNvSpPr txBox="1"/>
-          <p:nvPr/>
-        </p:nvSpPr>
-        <p:spPr>
-          <a:xfrm>
-            <a:off x="5257800" y="5029200"/>
-            <a:ext cx="457200" cy="120015"/>
-          </a:xfrm>
-          <a:prstGeom prst="rect">
-            <a:avLst/>
-          </a:prstGeom>
-          <a:noFill/>
-          <a:ln/>
-        </p:spPr>
-        <p:txBody>
-          <a:bodyPr wrap="square" lIns="0" tIns="0" rIns="0" bIns="0" rtlCol="0" anchor="t"/>
-          <a:lstStyle/>
-          <a:p>
-            <a:pPr algn="ctr" indent="0" marL="0">
-              <a:lnSpc>
-                <a:spcPts val="945"/>
-              </a:lnSpc>
-              <a:buNone/>
-            </a:pPr>
-            <a:r>
-              <a:rPr lang="en-US" sz="788" dirty="0">
-                <a:solidFill>
-                  <a:srgbClr val="8C8C8C"/>
-                </a:solidFill>
-                <a:latin typeface="Consolas" pitchFamily="34" charset="0"/>
-                <a:ea typeface="Consolas" pitchFamily="34" charset="-122"/>
-                <a:cs typeface="Consolas" pitchFamily="34" charset="-120"/>
-              </a:rPr>
-              <a:t>10</a:t>
-            </a:r>
-            <a:endParaRPr lang="en-US" sz="788" dirty="0"/>
-          </a:p>
-        </p:txBody>
-      </p:sp>
-      <p:sp>
-        <p:nvSpPr>
-          <p:cNvPr id="22" name="Text 20"/>
-          <p:cNvSpPr txBox="1"/>
-          <p:nvPr/>
-        </p:nvSpPr>
-        <p:spPr>
-          <a:xfrm>
-            <a:off x="7143750" y="5029200"/>
-            <a:ext cx="457200" cy="120015"/>
-          </a:xfrm>
-          <a:prstGeom prst="rect">
-            <a:avLst/>
-          </a:prstGeom>
-          <a:noFill/>
-          <a:ln/>
-        </p:spPr>
-        <p:txBody>
-          <a:bodyPr wrap="square" lIns="0" tIns="0" rIns="0" bIns="0" rtlCol="0" anchor="t"/>
-          <a:lstStyle/>
-          <a:p>
-            <a:pPr algn="ctr" indent="0" marL="0">
-              <a:lnSpc>
-                <a:spcPts val="945"/>
-              </a:lnSpc>
-              <a:buNone/>
-            </a:pPr>
-            <a:r>
-              <a:rPr lang="en-US" sz="788" dirty="0">
-                <a:solidFill>
-                  <a:srgbClr val="8C8C8C"/>
-                </a:solidFill>
-                <a:latin typeface="Consolas" pitchFamily="34" charset="0"/>
-                <a:ea typeface="Consolas" pitchFamily="34" charset="-122"/>
-                <a:cs typeface="Consolas" pitchFamily="34" charset="-120"/>
-              </a:rPr>
-              <a:t>20</a:t>
-            </a:r>
-            <a:endParaRPr lang="en-US" sz="788" dirty="0"/>
-          </a:p>
-        </p:txBody>
-      </p:sp>
-      <p:sp>
-        <p:nvSpPr>
-          <p:cNvPr id="23" name="Text 21"/>
-          <p:cNvSpPr txBox="1"/>
-          <p:nvPr/>
-        </p:nvSpPr>
-        <p:spPr>
-          <a:xfrm>
-            <a:off x="9029700" y="5029200"/>
-            <a:ext cx="457200" cy="120015"/>
-          </a:xfrm>
-          <a:prstGeom prst="rect">
-            <a:avLst/>
-          </a:prstGeom>
-          <a:noFill/>
-          <a:ln/>
-        </p:spPr>
-        <p:txBody>
-          <a:bodyPr wrap="square" lIns="0" tIns="0" rIns="0" bIns="0" rtlCol="0" anchor="t"/>
-          <a:lstStyle/>
-          <a:p>
-            <a:pPr algn="ctr" indent="0" marL="0">
-              <a:lnSpc>
-                <a:spcPts val="945"/>
-              </a:lnSpc>
-              <a:buNone/>
-            </a:pPr>
-            <a:r>
-              <a:rPr lang="en-US" sz="788" dirty="0">
-                <a:solidFill>
-                  <a:srgbClr val="8C8C8C"/>
-                </a:solidFill>
-                <a:latin typeface="Consolas" pitchFamily="34" charset="0"/>
-                <a:ea typeface="Consolas" pitchFamily="34" charset="-122"/>
-                <a:cs typeface="Consolas" pitchFamily="34" charset="-120"/>
-              </a:rPr>
-              <a:t>30</a:t>
-            </a:r>
-            <a:endParaRPr lang="en-US" sz="788" dirty="0"/>
-          </a:p>
-        </p:txBody>
-      </p:sp>
-      <p:sp>
-        <p:nvSpPr>
-          <p:cNvPr id="24" name="Text 22"/>
-          <p:cNvSpPr txBox="1"/>
-          <p:nvPr/>
-        </p:nvSpPr>
-        <p:spPr>
-          <a:xfrm>
-            <a:off x="10915650" y="5029200"/>
-            <a:ext cx="457200" cy="120015"/>
-          </a:xfrm>
-          <a:prstGeom prst="rect">
-            <a:avLst/>
-          </a:prstGeom>
-          <a:noFill/>
-          <a:ln/>
-        </p:spPr>
-        <p:txBody>
-          <a:bodyPr wrap="square" lIns="0" tIns="0" rIns="0" bIns="0" rtlCol="0" anchor="t"/>
-          <a:lstStyle/>
-          <a:p>
-            <a:pPr algn="ctr" indent="0" marL="0">
-              <a:lnSpc>
-                <a:spcPts val="945"/>
-              </a:lnSpc>
-              <a:buNone/>
-            </a:pPr>
-            <a:r>
-              <a:rPr lang="en-US" sz="788" dirty="0">
-                <a:solidFill>
-                  <a:srgbClr val="8C8C8C"/>
-                </a:solidFill>
-                <a:latin typeface="Consolas" pitchFamily="34" charset="0"/>
-                <a:ea typeface="Consolas" pitchFamily="34" charset="-122"/>
-                <a:cs typeface="Consolas" pitchFamily="34" charset="-120"/>
-              </a:rPr>
-              <a:t>40</a:t>
-            </a:r>
-            <a:endParaRPr lang="en-US" sz="788" dirty="0"/>
-          </a:p>
-        </p:txBody>
-      </p:sp>
-      <p:sp>
-        <p:nvSpPr>
-          <p:cNvPr id="25" name="Shape 23"/>
-          <p:cNvSpPr/>
-          <p:nvPr/>
-        </p:nvSpPr>
-        <p:spPr>
-          <a:xfrm flipV="1">
-            <a:off x="1714500" y="3131487"/>
-            <a:ext cx="377190" cy="21653"/>
-          </a:xfrm>
-          <a:prstGeom prst="line">
-            <a:avLst/>
-          </a:prstGeom>
-          <a:noFill/>
-          <a:ln w="17780">
-            <a:solidFill>
-              <a:srgbClr val="6E7780"/>
-            </a:solidFill>
-            <a:prstDash val="dash"/>
-          </a:ln>
-        </p:spPr>
-      </p:sp>
-      <p:sp>
-        <p:nvSpPr>
-          <p:cNvPr id="26" name="Shape 24"/>
-          <p:cNvSpPr/>
-          <p:nvPr/>
-        </p:nvSpPr>
-        <p:spPr>
-          <a:xfrm flipV="1">
-            <a:off x="1714500" y="2978166"/>
-            <a:ext cx="377190" cy="21653"/>
-          </a:xfrm>
-          <a:prstGeom prst="line">
-            <a:avLst/>
-          </a:prstGeom>
-          <a:noFill/>
-          <a:ln w="22860">
-            <a:solidFill>
-              <a:srgbClr val="EA002C"/>
-            </a:solidFill>
-            <a:prstDash val="solid"/>
-          </a:ln>
-        </p:spPr>
-      </p:sp>
-      <p:sp>
-        <p:nvSpPr>
-          <p:cNvPr id="27" name="Shape 25"/>
-          <p:cNvSpPr/>
-          <p:nvPr/>
-        </p:nvSpPr>
-        <p:spPr>
-          <a:xfrm flipV="1">
-            <a:off x="2091690" y="3114548"/>
-            <a:ext cx="377190" cy="16939"/>
-          </a:xfrm>
-          <a:prstGeom prst="line">
-            <a:avLst/>
-          </a:prstGeom>
-          <a:noFill/>
-          <a:ln w="17780">
-            <a:solidFill>
-              <a:srgbClr val="6E7780"/>
-            </a:solidFill>
-            <a:prstDash val="dash"/>
-          </a:ln>
-        </p:spPr>
-      </p:sp>
-      <p:sp>
-        <p:nvSpPr>
-          <p:cNvPr id="28" name="Shape 26"/>
-          <p:cNvSpPr/>
-          <p:nvPr/>
-        </p:nvSpPr>
-        <p:spPr>
-          <a:xfrm flipV="1">
-            <a:off x="2091690" y="2961227"/>
-            <a:ext cx="377190" cy="16939"/>
-          </a:xfrm>
-          <a:prstGeom prst="line">
-            <a:avLst/>
-          </a:prstGeom>
-          <a:noFill/>
-          <a:ln w="22860">
-            <a:solidFill>
-              <a:srgbClr val="EA002C"/>
-            </a:solidFill>
-            <a:prstDash val="solid"/>
-          </a:ln>
-        </p:spPr>
-      </p:sp>
-      <p:sp>
-        <p:nvSpPr>
-          <p:cNvPr id="29" name="Shape 27"/>
-          <p:cNvSpPr/>
-          <p:nvPr/>
-        </p:nvSpPr>
-        <p:spPr>
-          <a:xfrm flipV="1">
-            <a:off x="2468880" y="3103023"/>
-            <a:ext cx="377190" cy="11525"/>
-          </a:xfrm>
-          <a:prstGeom prst="line">
-            <a:avLst/>
-          </a:prstGeom>
-          <a:noFill/>
-          <a:ln w="17780">
-            <a:solidFill>
-              <a:srgbClr val="6E7780"/>
-            </a:solidFill>
-            <a:prstDash val="dash"/>
-          </a:ln>
-        </p:spPr>
-      </p:sp>
-      <p:sp>
-        <p:nvSpPr>
-          <p:cNvPr id="30" name="Shape 28"/>
-          <p:cNvSpPr/>
-          <p:nvPr/>
-        </p:nvSpPr>
-        <p:spPr>
-          <a:xfrm flipV="1">
-            <a:off x="2468880" y="2949702"/>
-            <a:ext cx="377190" cy="11525"/>
-          </a:xfrm>
-          <a:prstGeom prst="line">
-            <a:avLst/>
-          </a:prstGeom>
-          <a:noFill/>
-          <a:ln w="22860">
-            <a:solidFill>
-              <a:srgbClr val="EA002C"/>
-            </a:solidFill>
-            <a:prstDash val="solid"/>
-          </a:ln>
-        </p:spPr>
-      </p:sp>
-      <p:sp>
-        <p:nvSpPr>
-          <p:cNvPr id="31" name="Shape 29"/>
-          <p:cNvSpPr/>
-          <p:nvPr/>
-        </p:nvSpPr>
-        <p:spPr>
-          <a:xfrm flipV="1">
-            <a:off x="2846070" y="3067749"/>
-            <a:ext cx="377190" cy="35274"/>
-          </a:xfrm>
-          <a:prstGeom prst="line">
-            <a:avLst/>
-          </a:prstGeom>
-          <a:noFill/>
-          <a:ln w="17780">
-            <a:solidFill>
-              <a:srgbClr val="6E7780"/>
-            </a:solidFill>
-            <a:prstDash val="dash"/>
-          </a:ln>
-        </p:spPr>
-      </p:sp>
-      <p:sp>
-        <p:nvSpPr>
-          <p:cNvPr id="32" name="Shape 30"/>
-          <p:cNvSpPr/>
-          <p:nvPr/>
-        </p:nvSpPr>
-        <p:spPr>
-          <a:xfrm flipV="1">
-            <a:off x="2846070" y="2914428"/>
-            <a:ext cx="377190" cy="35274"/>
-          </a:xfrm>
-          <a:prstGeom prst="line">
-            <a:avLst/>
-          </a:prstGeom>
-          <a:noFill/>
-          <a:ln w="22860">
-            <a:solidFill>
-              <a:srgbClr val="EA002C"/>
-            </a:solidFill>
-            <a:prstDash val="solid"/>
-          </a:ln>
-        </p:spPr>
-      </p:sp>
-      <p:sp>
-        <p:nvSpPr>
-          <p:cNvPr id="33" name="Shape 31"/>
-          <p:cNvSpPr/>
-          <p:nvPr/>
-        </p:nvSpPr>
-        <p:spPr>
-          <a:xfrm flipV="1">
-            <a:off x="3223260" y="3025315"/>
-            <a:ext cx="377190" cy="42434"/>
-          </a:xfrm>
-          <a:prstGeom prst="line">
-            <a:avLst/>
-          </a:prstGeom>
-          <a:noFill/>
-          <a:ln w="17780">
-            <a:solidFill>
-              <a:srgbClr val="6E7780"/>
-            </a:solidFill>
-            <a:prstDash val="dash"/>
-          </a:ln>
-        </p:spPr>
-      </p:sp>
-      <p:sp>
-        <p:nvSpPr>
-          <p:cNvPr id="34" name="Shape 32"/>
-          <p:cNvSpPr/>
-          <p:nvPr/>
-        </p:nvSpPr>
-        <p:spPr>
-          <a:xfrm flipV="1">
-            <a:off x="3223260" y="2894695"/>
-            <a:ext cx="377190" cy="19733"/>
-          </a:xfrm>
-          <a:prstGeom prst="line">
-            <a:avLst/>
-          </a:prstGeom>
-          <a:noFill/>
-          <a:ln w="22860">
-            <a:solidFill>
-              <a:srgbClr val="EA002C"/>
-            </a:solidFill>
-            <a:prstDash val="solid"/>
-          </a:ln>
-        </p:spPr>
-      </p:sp>
-      <p:sp>
-        <p:nvSpPr>
-          <p:cNvPr id="35" name="Shape 33"/>
-          <p:cNvSpPr/>
-          <p:nvPr/>
-        </p:nvSpPr>
-        <p:spPr>
-          <a:xfrm>
-            <a:off x="3600450" y="3025315"/>
-            <a:ext cx="377190" cy="29337"/>
-          </a:xfrm>
-          <a:prstGeom prst="line">
-            <a:avLst/>
-          </a:prstGeom>
-          <a:noFill/>
-          <a:ln w="17780">
-            <a:solidFill>
-              <a:srgbClr val="6E7780"/>
-            </a:solidFill>
-            <a:prstDash val="dash"/>
-          </a:ln>
-        </p:spPr>
-      </p:sp>
-      <p:sp>
-        <p:nvSpPr>
-          <p:cNvPr id="36" name="Shape 34"/>
-          <p:cNvSpPr/>
-          <p:nvPr/>
-        </p:nvSpPr>
-        <p:spPr>
-          <a:xfrm>
-            <a:off x="3600450" y="2894695"/>
-            <a:ext cx="377190" cy="30385"/>
-          </a:xfrm>
-          <a:prstGeom prst="line">
-            <a:avLst/>
-          </a:prstGeom>
-          <a:noFill/>
-          <a:ln w="22860">
-            <a:solidFill>
-              <a:srgbClr val="EA002C"/>
-            </a:solidFill>
-            <a:prstDash val="solid"/>
-          </a:ln>
-        </p:spPr>
-      </p:sp>
-      <p:sp>
-        <p:nvSpPr>
-          <p:cNvPr id="37" name="Shape 35"/>
-          <p:cNvSpPr/>
-          <p:nvPr/>
-        </p:nvSpPr>
-        <p:spPr>
-          <a:xfrm>
-            <a:off x="3977640" y="3054652"/>
-            <a:ext cx="377190" cy="31956"/>
-          </a:xfrm>
-          <a:prstGeom prst="line">
-            <a:avLst/>
-          </a:prstGeom>
-          <a:noFill/>
-          <a:ln w="17780">
-            <a:solidFill>
-              <a:srgbClr val="6E7780"/>
-            </a:solidFill>
-            <a:prstDash val="dash"/>
-          </a:ln>
-        </p:spPr>
-      </p:sp>
-      <p:sp>
-        <p:nvSpPr>
-          <p:cNvPr id="38" name="Shape 36"/>
-          <p:cNvSpPr/>
-          <p:nvPr/>
-        </p:nvSpPr>
-        <p:spPr>
-          <a:xfrm>
-            <a:off x="3977640" y="2925080"/>
-            <a:ext cx="377190" cy="51165"/>
-          </a:xfrm>
-          <a:prstGeom prst="line">
-            <a:avLst/>
-          </a:prstGeom>
-          <a:noFill/>
-          <a:ln w="22860">
-            <a:solidFill>
-              <a:srgbClr val="EA002C"/>
-            </a:solidFill>
-            <a:prstDash val="solid"/>
-          </a:ln>
-        </p:spPr>
-      </p:sp>
-      <p:sp>
-        <p:nvSpPr>
-          <p:cNvPr id="39" name="Shape 37"/>
-          <p:cNvSpPr/>
-          <p:nvPr/>
-        </p:nvSpPr>
-        <p:spPr>
-          <a:xfrm>
-            <a:off x="4354830" y="3086608"/>
-            <a:ext cx="377190" cy="35798"/>
-          </a:xfrm>
-          <a:prstGeom prst="line">
-            <a:avLst/>
-          </a:prstGeom>
-          <a:noFill/>
-          <a:ln w="17780">
-            <a:solidFill>
-              <a:srgbClr val="6E7780"/>
-            </a:solidFill>
-            <a:prstDash val="dash"/>
-          </a:ln>
-        </p:spPr>
-      </p:sp>
-      <p:sp>
-        <p:nvSpPr>
-          <p:cNvPr id="40" name="Shape 38"/>
-          <p:cNvSpPr/>
-          <p:nvPr/>
-        </p:nvSpPr>
-        <p:spPr>
-          <a:xfrm>
-            <a:off x="4354830" y="2976245"/>
-            <a:ext cx="377190" cy="51340"/>
-          </a:xfrm>
-          <a:prstGeom prst="line">
-            <a:avLst/>
-          </a:prstGeom>
-          <a:noFill/>
-          <a:ln w="22860">
-            <a:solidFill>
-              <a:srgbClr val="EA002C"/>
-            </a:solidFill>
-            <a:prstDash val="solid"/>
-          </a:ln>
-        </p:spPr>
-      </p:sp>
-      <p:sp>
-        <p:nvSpPr>
-          <p:cNvPr id="41" name="Shape 39"/>
-          <p:cNvSpPr/>
-          <p:nvPr/>
-        </p:nvSpPr>
-        <p:spPr>
-          <a:xfrm>
-            <a:off x="4732020" y="3122406"/>
-            <a:ext cx="377190" cy="40688"/>
-          </a:xfrm>
-          <a:prstGeom prst="line">
-            <a:avLst/>
-          </a:prstGeom>
-          <a:noFill/>
-          <a:ln w="17780">
-            <a:solidFill>
-              <a:srgbClr val="6E7780"/>
-            </a:solidFill>
-            <a:prstDash val="dash"/>
-          </a:ln>
-        </p:spPr>
-      </p:sp>
-      <p:sp>
-        <p:nvSpPr>
-          <p:cNvPr id="42" name="Shape 40"/>
-          <p:cNvSpPr/>
-          <p:nvPr/>
-        </p:nvSpPr>
-        <p:spPr>
-          <a:xfrm>
-            <a:off x="4732020" y="3027585"/>
-            <a:ext cx="377190" cy="47673"/>
-          </a:xfrm>
-          <a:prstGeom prst="line">
-            <a:avLst/>
-          </a:prstGeom>
-          <a:noFill/>
-          <a:ln w="22860">
-            <a:solidFill>
-              <a:srgbClr val="EA002C"/>
-            </a:solidFill>
-            <a:prstDash val="solid"/>
-          </a:ln>
-        </p:spPr>
-      </p:sp>
-      <p:sp>
-        <p:nvSpPr>
-          <p:cNvPr id="43" name="Shape 41"/>
-          <p:cNvSpPr/>
-          <p:nvPr/>
-        </p:nvSpPr>
-        <p:spPr>
-          <a:xfrm>
-            <a:off x="5109210" y="3163094"/>
-            <a:ext cx="377190" cy="44704"/>
-          </a:xfrm>
-          <a:prstGeom prst="line">
-            <a:avLst/>
-          </a:prstGeom>
-          <a:noFill/>
-          <a:ln w="17780">
-            <a:solidFill>
-              <a:srgbClr val="6E7780"/>
-            </a:solidFill>
-            <a:prstDash val="dash"/>
-          </a:ln>
-        </p:spPr>
-      </p:sp>
-      <p:sp>
-        <p:nvSpPr>
-          <p:cNvPr id="44" name="Shape 42"/>
-          <p:cNvSpPr/>
-          <p:nvPr/>
-        </p:nvSpPr>
-        <p:spPr>
-          <a:xfrm>
-            <a:off x="5109210" y="3075257"/>
-            <a:ext cx="377190" cy="42259"/>
-          </a:xfrm>
-          <a:prstGeom prst="line">
-            <a:avLst/>
-          </a:prstGeom>
-          <a:noFill/>
-          <a:ln w="22860">
-            <a:solidFill>
-              <a:srgbClr val="EA002C"/>
-            </a:solidFill>
-            <a:prstDash val="solid"/>
-          </a:ln>
-        </p:spPr>
-      </p:sp>
-      <p:sp>
-        <p:nvSpPr>
-          <p:cNvPr id="45" name="Shape 43"/>
-          <p:cNvSpPr/>
-          <p:nvPr/>
-        </p:nvSpPr>
-        <p:spPr>
-          <a:xfrm>
-            <a:off x="5486400" y="3207798"/>
-            <a:ext cx="377190" cy="49419"/>
-          </a:xfrm>
-          <a:prstGeom prst="line">
-            <a:avLst/>
-          </a:prstGeom>
-          <a:noFill/>
-          <a:ln w="17780">
-            <a:solidFill>
-              <a:srgbClr val="6E7780"/>
-            </a:solidFill>
-            <a:prstDash val="dash"/>
-          </a:ln>
-        </p:spPr>
-      </p:sp>
-      <p:sp>
-        <p:nvSpPr>
-          <p:cNvPr id="46" name="Shape 44"/>
-          <p:cNvSpPr/>
-          <p:nvPr/>
-        </p:nvSpPr>
-        <p:spPr>
-          <a:xfrm>
-            <a:off x="5486400" y="3117517"/>
-            <a:ext cx="377190" cy="41212"/>
-          </a:xfrm>
-          <a:prstGeom prst="line">
-            <a:avLst/>
-          </a:prstGeom>
-          <a:noFill/>
-          <a:ln w="22860">
-            <a:solidFill>
-              <a:srgbClr val="EA002C"/>
-            </a:solidFill>
-            <a:prstDash val="solid"/>
-          </a:ln>
-        </p:spPr>
-      </p:sp>
-      <p:sp>
-        <p:nvSpPr>
-          <p:cNvPr id="47" name="Shape 45"/>
-          <p:cNvSpPr/>
-          <p:nvPr/>
-        </p:nvSpPr>
-        <p:spPr>
-          <a:xfrm>
-            <a:off x="5863590" y="3257217"/>
-            <a:ext cx="377190" cy="66357"/>
-          </a:xfrm>
-          <a:prstGeom prst="line">
-            <a:avLst/>
-          </a:prstGeom>
-          <a:noFill/>
-          <a:ln w="17780">
-            <a:solidFill>
-              <a:srgbClr val="6E7780"/>
-            </a:solidFill>
-            <a:prstDash val="dash"/>
-          </a:ln>
-        </p:spPr>
-      </p:sp>
-      <p:sp>
-        <p:nvSpPr>
-          <p:cNvPr id="48" name="Shape 46"/>
-          <p:cNvSpPr/>
-          <p:nvPr/>
-        </p:nvSpPr>
-        <p:spPr>
-          <a:xfrm>
-            <a:off x="5863590" y="3158728"/>
-            <a:ext cx="377190" cy="59547"/>
-          </a:xfrm>
-          <a:prstGeom prst="line">
-            <a:avLst/>
-          </a:prstGeom>
-          <a:noFill/>
-          <a:ln w="22860">
-            <a:solidFill>
-              <a:srgbClr val="EA002C"/>
-            </a:solidFill>
-            <a:prstDash val="solid"/>
-          </a:ln>
-        </p:spPr>
-      </p:sp>
-      <p:sp>
-        <p:nvSpPr>
-          <p:cNvPr id="49" name="Shape 47"/>
-          <p:cNvSpPr/>
-          <p:nvPr/>
-        </p:nvSpPr>
-        <p:spPr>
-          <a:xfrm>
-            <a:off x="6240780" y="3323574"/>
-            <a:ext cx="377190" cy="72469"/>
-          </a:xfrm>
-          <a:prstGeom prst="line">
-            <a:avLst/>
-          </a:prstGeom>
-          <a:noFill/>
-          <a:ln w="17780">
-            <a:solidFill>
-              <a:srgbClr val="6E7780"/>
-            </a:solidFill>
-            <a:prstDash val="dash"/>
-          </a:ln>
-        </p:spPr>
-      </p:sp>
-      <p:sp>
-        <p:nvSpPr>
-          <p:cNvPr id="50" name="Shape 48"/>
-          <p:cNvSpPr/>
-          <p:nvPr/>
-        </p:nvSpPr>
-        <p:spPr>
-          <a:xfrm>
-            <a:off x="6240780" y="3218275"/>
-            <a:ext cx="377190" cy="74216"/>
-          </a:xfrm>
-          <a:prstGeom prst="line">
-            <a:avLst/>
-          </a:prstGeom>
-          <a:noFill/>
-          <a:ln w="22860">
-            <a:solidFill>
-              <a:srgbClr val="EA002C"/>
-            </a:solidFill>
-            <a:prstDash val="solid"/>
-          </a:ln>
-        </p:spPr>
-      </p:sp>
-      <p:sp>
-        <p:nvSpPr>
-          <p:cNvPr id="51" name="Shape 49"/>
-          <p:cNvSpPr/>
-          <p:nvPr/>
-        </p:nvSpPr>
-        <p:spPr>
-          <a:xfrm>
-            <a:off x="6617970" y="3396043"/>
-            <a:ext cx="377190" cy="76311"/>
-          </a:xfrm>
-          <a:prstGeom prst="line">
-            <a:avLst/>
-          </a:prstGeom>
-          <a:noFill/>
-          <a:ln w="17780">
-            <a:solidFill>
-              <a:srgbClr val="6E7780"/>
-            </a:solidFill>
-            <a:prstDash val="dash"/>
-          </a:ln>
-        </p:spPr>
-      </p:sp>
-      <p:sp>
-        <p:nvSpPr>
-          <p:cNvPr id="52" name="Shape 50"/>
-          <p:cNvSpPr/>
-          <p:nvPr/>
-        </p:nvSpPr>
-        <p:spPr>
-          <a:xfrm>
-            <a:off x="6617970" y="3292491"/>
-            <a:ext cx="377190" cy="91503"/>
-          </a:xfrm>
-          <a:prstGeom prst="line">
-            <a:avLst/>
-          </a:prstGeom>
-          <a:noFill/>
-          <a:ln w="22860">
-            <a:solidFill>
-              <a:srgbClr val="EA002C"/>
-            </a:solidFill>
-            <a:prstDash val="solid"/>
-          </a:ln>
-        </p:spPr>
-      </p:sp>
-      <p:sp>
-        <p:nvSpPr>
-          <p:cNvPr id="53" name="Shape 51"/>
-          <p:cNvSpPr/>
-          <p:nvPr/>
-        </p:nvSpPr>
-        <p:spPr>
-          <a:xfrm>
-            <a:off x="6995160" y="3472355"/>
-            <a:ext cx="377190" cy="83122"/>
-          </a:xfrm>
-          <a:prstGeom prst="line">
-            <a:avLst/>
-          </a:prstGeom>
-          <a:noFill/>
-          <a:ln w="17780">
-            <a:solidFill>
-              <a:srgbClr val="6E7780"/>
-            </a:solidFill>
-            <a:prstDash val="dash"/>
-          </a:ln>
-        </p:spPr>
-      </p:sp>
-      <p:sp>
-        <p:nvSpPr>
-          <p:cNvPr id="54" name="Shape 52"/>
-          <p:cNvSpPr/>
-          <p:nvPr/>
-        </p:nvSpPr>
-        <p:spPr>
-          <a:xfrm>
-            <a:off x="6995160" y="3383994"/>
-            <a:ext cx="377190" cy="111585"/>
-          </a:xfrm>
-          <a:prstGeom prst="line">
-            <a:avLst/>
-          </a:prstGeom>
-          <a:noFill/>
-          <a:ln w="22860">
-            <a:solidFill>
-              <a:srgbClr val="EA002C"/>
-            </a:solidFill>
-            <a:prstDash val="solid"/>
-          </a:ln>
-        </p:spPr>
-      </p:sp>
-      <p:sp>
-        <p:nvSpPr>
-          <p:cNvPr id="55" name="Shape 53"/>
-          <p:cNvSpPr/>
-          <p:nvPr/>
-        </p:nvSpPr>
-        <p:spPr>
-          <a:xfrm>
-            <a:off x="7372350" y="3555476"/>
-            <a:ext cx="377190" cy="90456"/>
-          </a:xfrm>
-          <a:prstGeom prst="line">
-            <a:avLst/>
-          </a:prstGeom>
-          <a:noFill/>
-          <a:ln w="17780">
-            <a:solidFill>
-              <a:srgbClr val="6E7780"/>
-            </a:solidFill>
-            <a:prstDash val="dash"/>
-          </a:ln>
-        </p:spPr>
-      </p:sp>
-      <p:sp>
-        <p:nvSpPr>
-          <p:cNvPr id="56" name="Shape 54"/>
-          <p:cNvSpPr/>
-          <p:nvPr/>
-        </p:nvSpPr>
-        <p:spPr>
-          <a:xfrm>
-            <a:off x="7372350" y="3495580"/>
-            <a:ext cx="377190" cy="126428"/>
-          </a:xfrm>
-          <a:prstGeom prst="line">
-            <a:avLst/>
-          </a:prstGeom>
-          <a:noFill/>
-          <a:ln w="22860">
-            <a:solidFill>
-              <a:srgbClr val="EA002C"/>
-            </a:solidFill>
-            <a:prstDash val="solid"/>
-          </a:ln>
-        </p:spPr>
-      </p:sp>
-      <p:sp>
-        <p:nvSpPr>
-          <p:cNvPr id="57" name="Shape 55"/>
-          <p:cNvSpPr/>
-          <p:nvPr/>
-        </p:nvSpPr>
-        <p:spPr>
-          <a:xfrm>
-            <a:off x="7749540" y="3645932"/>
-            <a:ext cx="377190" cy="97615"/>
-          </a:xfrm>
-          <a:prstGeom prst="line">
-            <a:avLst/>
-          </a:prstGeom>
-          <a:noFill/>
-          <a:ln w="17780">
-            <a:solidFill>
-              <a:srgbClr val="6E7780"/>
-            </a:solidFill>
-            <a:prstDash val="dash"/>
-          </a:ln>
-        </p:spPr>
-      </p:sp>
-      <p:sp>
-        <p:nvSpPr>
-          <p:cNvPr id="58" name="Shape 56"/>
-          <p:cNvSpPr/>
-          <p:nvPr/>
-        </p:nvSpPr>
-        <p:spPr>
-          <a:xfrm>
-            <a:off x="7749540" y="3622008"/>
-            <a:ext cx="377190" cy="132890"/>
-          </a:xfrm>
-          <a:prstGeom prst="line">
-            <a:avLst/>
-          </a:prstGeom>
-          <a:noFill/>
-          <a:ln w="22860">
-            <a:solidFill>
-              <a:srgbClr val="EA002C"/>
-            </a:solidFill>
-            <a:prstDash val="solid"/>
-          </a:ln>
-        </p:spPr>
-      </p:sp>
-      <p:sp>
-        <p:nvSpPr>
-          <p:cNvPr id="59" name="Shape 57"/>
-          <p:cNvSpPr/>
-          <p:nvPr/>
-        </p:nvSpPr>
-        <p:spPr>
-          <a:xfrm>
-            <a:off x="8126730" y="3743547"/>
-            <a:ext cx="377190" cy="78756"/>
-          </a:xfrm>
-          <a:prstGeom prst="line">
-            <a:avLst/>
-          </a:prstGeom>
-          <a:noFill/>
-          <a:ln w="17780">
-            <a:solidFill>
-              <a:srgbClr val="6E7780"/>
-            </a:solidFill>
-            <a:prstDash val="dash"/>
-          </a:ln>
-        </p:spPr>
-      </p:sp>
-      <p:sp>
-        <p:nvSpPr>
-          <p:cNvPr id="60" name="Shape 58"/>
-          <p:cNvSpPr/>
-          <p:nvPr/>
-        </p:nvSpPr>
-        <p:spPr>
-          <a:xfrm>
-            <a:off x="8126730" y="3754898"/>
-            <a:ext cx="377190" cy="104077"/>
-          </a:xfrm>
-          <a:prstGeom prst="line">
-            <a:avLst/>
-          </a:prstGeom>
-          <a:noFill/>
-          <a:ln w="22860">
-            <a:solidFill>
-              <a:srgbClr val="EA002C"/>
-            </a:solidFill>
-            <a:prstDash val="solid"/>
-          </a:ln>
-        </p:spPr>
-      </p:sp>
-      <p:sp>
-        <p:nvSpPr>
-          <p:cNvPr id="61" name="Shape 59"/>
-          <p:cNvSpPr/>
-          <p:nvPr/>
-        </p:nvSpPr>
-        <p:spPr>
-          <a:xfrm>
-            <a:off x="8503920" y="3822303"/>
-            <a:ext cx="377190" cy="109839"/>
-          </a:xfrm>
-          <a:prstGeom prst="line">
-            <a:avLst/>
-          </a:prstGeom>
-          <a:noFill/>
-          <a:ln w="17780">
-            <a:solidFill>
-              <a:srgbClr val="6E7780"/>
-            </a:solidFill>
-            <a:prstDash val="dash"/>
-          </a:ln>
-        </p:spPr>
-      </p:sp>
-      <p:sp>
-        <p:nvSpPr>
-          <p:cNvPr id="62" name="Shape 60"/>
-          <p:cNvSpPr/>
-          <p:nvPr/>
-        </p:nvSpPr>
-        <p:spPr>
-          <a:xfrm>
-            <a:off x="8503920" y="3858974"/>
-            <a:ext cx="377190" cy="119618"/>
-          </a:xfrm>
-          <a:prstGeom prst="line">
-            <a:avLst/>
-          </a:prstGeom>
-          <a:noFill/>
-          <a:ln w="22860">
-            <a:solidFill>
-              <a:srgbClr val="EA002C"/>
-            </a:solidFill>
-            <a:prstDash val="solid"/>
-          </a:ln>
-        </p:spPr>
-      </p:sp>
-      <p:sp>
-        <p:nvSpPr>
-          <p:cNvPr id="63" name="Shape 61"/>
-          <p:cNvSpPr/>
-          <p:nvPr/>
-        </p:nvSpPr>
-        <p:spPr>
-          <a:xfrm>
-            <a:off x="8881110" y="3932142"/>
-            <a:ext cx="377190" cy="118745"/>
-          </a:xfrm>
-          <a:prstGeom prst="line">
-            <a:avLst/>
-          </a:prstGeom>
-          <a:noFill/>
-          <a:ln w="17780">
-            <a:solidFill>
-              <a:srgbClr val="6E7780"/>
-            </a:solidFill>
-            <a:prstDash val="dash"/>
-          </a:ln>
-        </p:spPr>
-      </p:sp>
-      <p:sp>
-        <p:nvSpPr>
-          <p:cNvPr id="64" name="Shape 62"/>
-          <p:cNvSpPr/>
-          <p:nvPr/>
-        </p:nvSpPr>
-        <p:spPr>
-          <a:xfrm>
-            <a:off x="8881110" y="3978592"/>
-            <a:ext cx="377190" cy="112284"/>
-          </a:xfrm>
-          <a:prstGeom prst="line">
-            <a:avLst/>
-          </a:prstGeom>
-          <a:noFill/>
-          <a:ln w="22860">
-            <a:solidFill>
-              <a:srgbClr val="EA002C"/>
-            </a:solidFill>
-            <a:prstDash val="solid"/>
-          </a:ln>
-        </p:spPr>
-      </p:sp>
-      <p:sp>
-        <p:nvSpPr>
-          <p:cNvPr id="65" name="Shape 63"/>
-          <p:cNvSpPr/>
-          <p:nvPr/>
-        </p:nvSpPr>
-        <p:spPr>
-          <a:xfrm>
-            <a:off x="9258300" y="4050887"/>
-            <a:ext cx="377190" cy="131143"/>
-          </a:xfrm>
-          <a:prstGeom prst="line">
-            <a:avLst/>
-          </a:prstGeom>
-          <a:noFill/>
-          <a:ln w="17780">
-            <a:solidFill>
-              <a:srgbClr val="6E7780"/>
-            </a:solidFill>
-            <a:prstDash val="dash"/>
-          </a:ln>
-        </p:spPr>
-      </p:sp>
-      <p:sp>
-        <p:nvSpPr>
-          <p:cNvPr id="66" name="Shape 64"/>
-          <p:cNvSpPr/>
-          <p:nvPr/>
-        </p:nvSpPr>
-        <p:spPr>
-          <a:xfrm>
-            <a:off x="9258300" y="4090876"/>
-            <a:ext cx="377190" cy="112808"/>
-          </a:xfrm>
-          <a:prstGeom prst="line">
-            <a:avLst/>
-          </a:prstGeom>
-          <a:noFill/>
-          <a:ln w="22860">
-            <a:solidFill>
-              <a:srgbClr val="EA002C"/>
-            </a:solidFill>
-            <a:prstDash val="solid"/>
-          </a:ln>
-        </p:spPr>
-      </p:sp>
-      <p:sp>
-        <p:nvSpPr>
-          <p:cNvPr id="67" name="Shape 65"/>
-          <p:cNvSpPr/>
-          <p:nvPr/>
-        </p:nvSpPr>
-        <p:spPr>
-          <a:xfrm>
-            <a:off x="9635490" y="4182031"/>
-            <a:ext cx="377190" cy="141621"/>
-          </a:xfrm>
-          <a:prstGeom prst="line">
-            <a:avLst/>
-          </a:prstGeom>
-          <a:noFill/>
-          <a:ln w="17780">
-            <a:solidFill>
-              <a:srgbClr val="6E7780"/>
-            </a:solidFill>
-            <a:prstDash val="dash"/>
-          </a:ln>
-        </p:spPr>
-      </p:sp>
-      <p:sp>
-        <p:nvSpPr>
-          <p:cNvPr id="68" name="Shape 66"/>
-          <p:cNvSpPr/>
-          <p:nvPr/>
-        </p:nvSpPr>
-        <p:spPr>
-          <a:xfrm>
-            <a:off x="9635490" y="4203684"/>
-            <a:ext cx="377190" cy="118221"/>
-          </a:xfrm>
-          <a:prstGeom prst="line">
-            <a:avLst/>
-          </a:prstGeom>
-          <a:noFill/>
-          <a:ln w="22860">
-            <a:solidFill>
-              <a:srgbClr val="EA002C"/>
-            </a:solidFill>
-            <a:prstDash val="solid"/>
-          </a:ln>
-        </p:spPr>
-      </p:sp>
-      <p:sp>
-        <p:nvSpPr>
-          <p:cNvPr id="69" name="Shape 67"/>
-          <p:cNvSpPr/>
-          <p:nvPr/>
-        </p:nvSpPr>
-        <p:spPr>
-          <a:xfrm>
-            <a:off x="10012680" y="4323652"/>
-            <a:ext cx="377190" cy="148257"/>
-          </a:xfrm>
-          <a:prstGeom prst="line">
-            <a:avLst/>
-          </a:prstGeom>
-          <a:noFill/>
-          <a:ln w="17780">
-            <a:solidFill>
-              <a:srgbClr val="6E7780"/>
-            </a:solidFill>
-            <a:prstDash val="dash"/>
-          </a:ln>
-        </p:spPr>
-      </p:sp>
-      <p:sp>
-        <p:nvSpPr>
-          <p:cNvPr id="70" name="Shape 68"/>
-          <p:cNvSpPr/>
-          <p:nvPr/>
-        </p:nvSpPr>
-        <p:spPr>
-          <a:xfrm>
-            <a:off x="10012680" y="4321905"/>
-            <a:ext cx="377190" cy="126778"/>
-          </a:xfrm>
-          <a:prstGeom prst="line">
-            <a:avLst/>
-          </a:prstGeom>
-          <a:noFill/>
-          <a:ln w="22860">
-            <a:solidFill>
-              <a:srgbClr val="EA002C"/>
-            </a:solidFill>
-            <a:prstDash val="solid"/>
-          </a:ln>
-        </p:spPr>
-      </p:sp>
-      <p:sp>
-        <p:nvSpPr>
-          <p:cNvPr id="71" name="Shape 69"/>
-          <p:cNvSpPr/>
-          <p:nvPr/>
-        </p:nvSpPr>
-        <p:spPr>
-          <a:xfrm>
-            <a:off x="10389870" y="4471908"/>
-            <a:ext cx="377190" cy="150876"/>
-          </a:xfrm>
-          <a:prstGeom prst="line">
-            <a:avLst/>
-          </a:prstGeom>
-          <a:noFill/>
-          <a:ln w="17780">
-            <a:solidFill>
-              <a:srgbClr val="6E7780"/>
-            </a:solidFill>
-            <a:prstDash val="dash"/>
-          </a:ln>
-        </p:spPr>
-      </p:sp>
-      <p:sp>
-        <p:nvSpPr>
-          <p:cNvPr id="72" name="Shape 70"/>
-          <p:cNvSpPr/>
-          <p:nvPr/>
-        </p:nvSpPr>
-        <p:spPr>
-          <a:xfrm>
-            <a:off x="10389870" y="4448683"/>
-            <a:ext cx="377190" cy="137430"/>
-          </a:xfrm>
-          <a:prstGeom prst="line">
-            <a:avLst/>
-          </a:prstGeom>
-          <a:noFill/>
-          <a:ln w="22860">
-            <a:solidFill>
-              <a:srgbClr val="EA002C"/>
-            </a:solidFill>
-            <a:prstDash val="solid"/>
-          </a:ln>
-        </p:spPr>
-      </p:sp>
-      <p:sp>
-        <p:nvSpPr>
-          <p:cNvPr id="73" name="Shape 71"/>
-          <p:cNvSpPr/>
-          <p:nvPr/>
-        </p:nvSpPr>
-        <p:spPr>
-          <a:xfrm>
-            <a:off x="10767060" y="4622784"/>
-            <a:ext cx="377190" cy="165719"/>
-          </a:xfrm>
-          <a:prstGeom prst="line">
-            <a:avLst/>
-          </a:prstGeom>
-          <a:noFill/>
-          <a:ln w="17780">
-            <a:solidFill>
-              <a:srgbClr val="6E7780"/>
-            </a:solidFill>
-            <a:prstDash val="dash"/>
-          </a:ln>
-        </p:spPr>
-      </p:sp>
-      <p:sp>
-        <p:nvSpPr>
-          <p:cNvPr id="74" name="Shape 72"/>
-          <p:cNvSpPr/>
-          <p:nvPr/>
-        </p:nvSpPr>
-        <p:spPr>
-          <a:xfrm>
-            <a:off x="10767060" y="4586113"/>
-            <a:ext cx="377190" cy="165545"/>
-          </a:xfrm>
-          <a:prstGeom prst="line">
-            <a:avLst/>
-          </a:prstGeom>
-          <a:noFill/>
-          <a:ln w="22860">
-            <a:solidFill>
-              <a:srgbClr val="EA002C"/>
-            </a:solidFill>
-            <a:prstDash val="solid"/>
-          </a:ln>
-        </p:spPr>
-      </p:sp>
-      <p:sp>
-        <p:nvSpPr>
-          <p:cNvPr id="75" name="Shape 73"/>
-          <p:cNvSpPr/>
-          <p:nvPr/>
-        </p:nvSpPr>
-        <p:spPr>
-          <a:xfrm>
-            <a:off x="3211640" y="2811216"/>
-            <a:ext cx="60960" cy="60960"/>
-          </a:xfrm>
-          <a:prstGeom prst="ellipse">
-            <a:avLst/>
-          </a:prstGeom>
-          <a:solidFill>
-            <a:srgbClr val="333333"/>
-          </a:solidFill>
-          <a:ln/>
-        </p:spPr>
-      </p:sp>
-      <p:sp>
-        <p:nvSpPr>
-          <p:cNvPr id="76" name="Shape 74"/>
-          <p:cNvSpPr/>
-          <p:nvPr/>
-        </p:nvSpPr>
-        <p:spPr>
-          <a:xfrm>
-            <a:off x="3296507" y="2819476"/>
-            <a:ext cx="60960" cy="60960"/>
-          </a:xfrm>
-          <a:prstGeom prst="ellipse">
-            <a:avLst/>
-          </a:prstGeom>
-          <a:solidFill>
-            <a:srgbClr val="333333"/>
-          </a:solidFill>
-          <a:ln/>
-        </p:spPr>
-      </p:sp>
-      <p:sp>
-        <p:nvSpPr>
-          <p:cNvPr id="77" name="Shape 75"/>
-          <p:cNvSpPr/>
-          <p:nvPr/>
-        </p:nvSpPr>
-        <p:spPr>
-          <a:xfrm>
-            <a:off x="3928301" y="2870798"/>
-            <a:ext cx="60960" cy="60960"/>
-          </a:xfrm>
-          <a:prstGeom prst="ellipse">
-            <a:avLst/>
-          </a:prstGeom>
-          <a:solidFill>
-            <a:srgbClr val="333333"/>
-          </a:solidFill>
-          <a:ln/>
-        </p:spPr>
-      </p:sp>
-      <p:sp>
-        <p:nvSpPr>
-          <p:cNvPr id="78" name="Shape 76"/>
-          <p:cNvSpPr/>
-          <p:nvPr/>
-        </p:nvSpPr>
-        <p:spPr>
-          <a:xfrm>
-            <a:off x="4305491" y="2956365"/>
-            <a:ext cx="60960" cy="60960"/>
-          </a:xfrm>
-          <a:prstGeom prst="ellipse">
-            <a:avLst/>
-          </a:prstGeom>
-          <a:solidFill>
-            <a:srgbClr val="333333"/>
-          </a:solidFill>
-          <a:ln/>
-        </p:spPr>
-      </p:sp>
-      <p:sp>
-        <p:nvSpPr>
-          <p:cNvPr id="79" name="Shape 77"/>
-          <p:cNvSpPr/>
-          <p:nvPr/>
-        </p:nvSpPr>
-        <p:spPr>
-          <a:xfrm>
-            <a:off x="4701540" y="2997035"/>
-            <a:ext cx="60960" cy="60960"/>
-          </a:xfrm>
-          <a:prstGeom prst="ellipse">
-            <a:avLst/>
-          </a:prstGeom>
-          <a:solidFill>
-            <a:srgbClr val="333333"/>
-          </a:solidFill>
-          <a:ln/>
-        </p:spPr>
-      </p:sp>
-      <p:sp>
-        <p:nvSpPr>
-          <p:cNvPr id="80" name="Shape 78"/>
-          <p:cNvSpPr/>
-          <p:nvPr/>
-        </p:nvSpPr>
-        <p:spPr>
-          <a:xfrm>
-            <a:off x="4890135" y="3005015"/>
-            <a:ext cx="60960" cy="60960"/>
-          </a:xfrm>
-          <a:prstGeom prst="ellipse">
-            <a:avLst/>
-          </a:prstGeom>
-          <a:solidFill>
-            <a:srgbClr val="333333"/>
-          </a:solidFill>
-          <a:ln/>
-        </p:spPr>
-      </p:sp>
-      <p:sp>
-        <p:nvSpPr>
-          <p:cNvPr id="81" name="Shape 79"/>
-          <p:cNvSpPr/>
-          <p:nvPr/>
-        </p:nvSpPr>
-        <p:spPr>
-          <a:xfrm>
-            <a:off x="5078730" y="3053107"/>
-            <a:ext cx="60960" cy="60960"/>
-          </a:xfrm>
-          <a:prstGeom prst="ellipse">
-            <a:avLst/>
-          </a:prstGeom>
-          <a:solidFill>
-            <a:srgbClr val="333333"/>
-          </a:solidFill>
-          <a:ln/>
-        </p:spPr>
-      </p:sp>
-      <p:sp>
-        <p:nvSpPr>
-          <p:cNvPr id="82" name="Shape 80"/>
-          <p:cNvSpPr/>
-          <p:nvPr/>
-        </p:nvSpPr>
-        <p:spPr>
-          <a:xfrm>
-            <a:off x="5248466" y="3023665"/>
-            <a:ext cx="60960" cy="60960"/>
-          </a:xfrm>
-          <a:prstGeom prst="ellipse">
-            <a:avLst/>
-          </a:prstGeom>
-          <a:solidFill>
-            <a:srgbClr val="333333"/>
-          </a:solidFill>
-          <a:ln/>
-        </p:spPr>
-      </p:sp>
-      <p:sp>
-        <p:nvSpPr>
-          <p:cNvPr id="83" name="Shape 81"/>
-          <p:cNvSpPr/>
-          <p:nvPr/>
-        </p:nvSpPr>
-        <p:spPr>
-          <a:xfrm>
-            <a:off x="5361623" y="3113457"/>
-            <a:ext cx="60960" cy="60960"/>
-          </a:xfrm>
-          <a:prstGeom prst="ellipse">
-            <a:avLst/>
-          </a:prstGeom>
-          <a:solidFill>
-            <a:srgbClr val="333333"/>
-          </a:solidFill>
-          <a:ln/>
-        </p:spPr>
-      </p:sp>
-      <p:sp>
-        <p:nvSpPr>
-          <p:cNvPr id="84" name="Shape 82"/>
-          <p:cNvSpPr/>
-          <p:nvPr/>
-        </p:nvSpPr>
-        <p:spPr>
-          <a:xfrm>
-            <a:off x="5682234" y="3136910"/>
-            <a:ext cx="60960" cy="60960"/>
-          </a:xfrm>
-          <a:prstGeom prst="ellipse">
-            <a:avLst/>
-          </a:prstGeom>
-          <a:solidFill>
-            <a:srgbClr val="333333"/>
-          </a:solidFill>
-          <a:ln/>
-        </p:spPr>
-      </p:sp>
-      <p:sp>
-        <p:nvSpPr>
-          <p:cNvPr id="85" name="Shape 83"/>
-          <p:cNvSpPr/>
-          <p:nvPr/>
-        </p:nvSpPr>
-        <p:spPr>
-          <a:xfrm>
-            <a:off x="5965127" y="3142323"/>
-            <a:ext cx="60960" cy="60960"/>
-          </a:xfrm>
-          <a:prstGeom prst="ellipse">
-            <a:avLst/>
-          </a:prstGeom>
-          <a:solidFill>
-            <a:srgbClr val="333333"/>
-          </a:solidFill>
-          <a:ln/>
-        </p:spPr>
-      </p:sp>
-      <p:sp>
-        <p:nvSpPr>
-          <p:cNvPr id="86" name="Shape 84"/>
-          <p:cNvSpPr/>
-          <p:nvPr/>
-        </p:nvSpPr>
-        <p:spPr>
-          <a:xfrm>
-            <a:off x="6021705" y="3105826"/>
-            <a:ext cx="60960" cy="60960"/>
-          </a:xfrm>
-          <a:prstGeom prst="ellipse">
-            <a:avLst/>
-          </a:prstGeom>
-          <a:solidFill>
-            <a:srgbClr val="333333"/>
-          </a:solidFill>
-          <a:ln/>
-        </p:spPr>
-      </p:sp>
-      <p:sp>
-        <p:nvSpPr>
-          <p:cNvPr id="87" name="Shape 85"/>
-          <p:cNvSpPr/>
-          <p:nvPr/>
-        </p:nvSpPr>
-        <p:spPr>
-          <a:xfrm>
-            <a:off x="6078284" y="3179955"/>
-            <a:ext cx="60960" cy="60960"/>
-          </a:xfrm>
-          <a:prstGeom prst="ellipse">
-            <a:avLst/>
-          </a:prstGeom>
-          <a:solidFill>
-            <a:srgbClr val="333333"/>
-          </a:solidFill>
-          <a:ln/>
-        </p:spPr>
-      </p:sp>
-      <p:sp>
-        <p:nvSpPr>
-          <p:cNvPr id="88" name="Shape 86"/>
-          <p:cNvSpPr/>
-          <p:nvPr/>
-        </p:nvSpPr>
-        <p:spPr>
-          <a:xfrm>
-            <a:off x="6285738" y="3164727"/>
-            <a:ext cx="60960" cy="60960"/>
-          </a:xfrm>
-          <a:prstGeom prst="ellipse">
-            <a:avLst/>
-          </a:prstGeom>
-          <a:solidFill>
-            <a:srgbClr val="333333"/>
-          </a:solidFill>
-          <a:ln/>
-        </p:spPr>
-      </p:sp>
-      <p:sp>
-        <p:nvSpPr>
-          <p:cNvPr id="89" name="Shape 87"/>
-          <p:cNvSpPr/>
-          <p:nvPr/>
-        </p:nvSpPr>
-        <p:spPr>
-          <a:xfrm>
-            <a:off x="6304598" y="3188127"/>
-            <a:ext cx="60960" cy="60960"/>
-          </a:xfrm>
-          <a:prstGeom prst="ellipse">
-            <a:avLst/>
-          </a:prstGeom>
-          <a:solidFill>
-            <a:srgbClr val="333333"/>
-          </a:solidFill>
-          <a:ln/>
-        </p:spPr>
-      </p:sp>
-      <p:sp>
-        <p:nvSpPr>
-          <p:cNvPr id="90" name="Shape 88"/>
-          <p:cNvSpPr/>
-          <p:nvPr/>
-        </p:nvSpPr>
-        <p:spPr>
-          <a:xfrm>
-            <a:off x="6417755" y="3267983"/>
-            <a:ext cx="60960" cy="60960"/>
-          </a:xfrm>
-          <a:prstGeom prst="ellipse">
-            <a:avLst/>
-          </a:prstGeom>
-          <a:solidFill>
-            <a:srgbClr val="333333"/>
-          </a:solidFill>
-          <a:ln/>
-        </p:spPr>
-      </p:sp>
-      <p:sp>
-        <p:nvSpPr>
-          <p:cNvPr id="91" name="Shape 89"/>
-          <p:cNvSpPr/>
-          <p:nvPr/>
-        </p:nvSpPr>
-        <p:spPr>
-          <a:xfrm>
-            <a:off x="6700647" y="3271860"/>
-            <a:ext cx="60960" cy="60960"/>
-          </a:xfrm>
-          <a:prstGeom prst="ellipse">
-            <a:avLst/>
-          </a:prstGeom>
-          <a:solidFill>
-            <a:srgbClr val="333333"/>
-          </a:solidFill>
-          <a:ln/>
-        </p:spPr>
-      </p:sp>
-      <p:sp>
-        <p:nvSpPr>
-          <p:cNvPr id="92" name="Shape 90"/>
-          <p:cNvSpPr/>
-          <p:nvPr/>
-        </p:nvSpPr>
-        <p:spPr>
-          <a:xfrm>
-            <a:off x="6719506" y="3265975"/>
-            <a:ext cx="60960" cy="60960"/>
-          </a:xfrm>
-          <a:prstGeom prst="ellipse">
-            <a:avLst/>
-          </a:prstGeom>
-          <a:solidFill>
-            <a:srgbClr val="333333"/>
-          </a:solidFill>
-          <a:ln/>
-        </p:spPr>
-      </p:sp>
-      <p:sp>
-        <p:nvSpPr>
-          <p:cNvPr id="93" name="Shape 91"/>
-          <p:cNvSpPr/>
-          <p:nvPr/>
-        </p:nvSpPr>
-        <p:spPr>
-          <a:xfrm>
-            <a:off x="7587044" y="3569718"/>
-            <a:ext cx="60960" cy="60960"/>
-          </a:xfrm>
-          <a:prstGeom prst="ellipse">
-            <a:avLst/>
-          </a:prstGeom>
-          <a:solidFill>
-            <a:srgbClr val="333333"/>
-          </a:solidFill>
-          <a:ln/>
-        </p:spPr>
-      </p:sp>
-      <p:sp>
-        <p:nvSpPr>
-          <p:cNvPr id="94" name="Shape 92"/>
-          <p:cNvSpPr/>
-          <p:nvPr/>
-        </p:nvSpPr>
-        <p:spPr>
-          <a:xfrm>
-            <a:off x="8303704" y="3828652"/>
-            <a:ext cx="60960" cy="60960"/>
-          </a:xfrm>
-          <a:prstGeom prst="ellipse">
-            <a:avLst/>
-          </a:prstGeom>
-          <a:solidFill>
-            <a:srgbClr val="333333"/>
-          </a:solidFill>
-          <a:ln/>
-        </p:spPr>
-      </p:sp>
-      <p:sp>
-        <p:nvSpPr>
-          <p:cNvPr id="95" name="Shape 93"/>
-          <p:cNvSpPr/>
-          <p:nvPr/>
-        </p:nvSpPr>
-        <p:spPr>
-          <a:xfrm>
-            <a:off x="8341423" y="3849170"/>
-            <a:ext cx="60960" cy="60960"/>
-          </a:xfrm>
-          <a:prstGeom prst="ellipse">
-            <a:avLst/>
-          </a:prstGeom>
-          <a:solidFill>
-            <a:srgbClr val="333333"/>
-          </a:solidFill>
-          <a:ln/>
-        </p:spPr>
-      </p:sp>
-      <p:sp>
-        <p:nvSpPr>
-          <p:cNvPr id="96" name="Shape 94"/>
-          <p:cNvSpPr/>
-          <p:nvPr/>
-        </p:nvSpPr>
-        <p:spPr>
-          <a:xfrm>
-            <a:off x="8360283" y="3801934"/>
-            <a:ext cx="60960" cy="60960"/>
-          </a:xfrm>
-          <a:prstGeom prst="ellipse">
-            <a:avLst/>
-          </a:prstGeom>
-          <a:solidFill>
-            <a:srgbClr val="333333"/>
-          </a:solidFill>
-          <a:ln/>
-        </p:spPr>
-      </p:sp>
-      <p:sp>
-        <p:nvSpPr>
-          <p:cNvPr id="97" name="Shape 95"/>
-          <p:cNvSpPr/>
-          <p:nvPr/>
-        </p:nvSpPr>
-        <p:spPr>
-          <a:xfrm>
-            <a:off x="8416862" y="3804047"/>
-            <a:ext cx="60960" cy="60960"/>
-          </a:xfrm>
-          <a:prstGeom prst="ellipse">
-            <a:avLst/>
-          </a:prstGeom>
-          <a:solidFill>
-            <a:srgbClr val="333333"/>
-          </a:solidFill>
-          <a:ln/>
-        </p:spPr>
-      </p:sp>
-      <p:sp>
-        <p:nvSpPr>
-          <p:cNvPr id="98" name="Shape 96"/>
-          <p:cNvSpPr/>
-          <p:nvPr/>
-        </p:nvSpPr>
-        <p:spPr>
-          <a:xfrm>
-            <a:off x="8737473" y="3948322"/>
-            <a:ext cx="60960" cy="60960"/>
-          </a:xfrm>
-          <a:prstGeom prst="ellipse">
-            <a:avLst/>
-          </a:prstGeom>
-          <a:solidFill>
-            <a:srgbClr val="333333"/>
-          </a:solidFill>
-          <a:ln/>
-        </p:spPr>
-      </p:sp>
-      <p:sp>
-        <p:nvSpPr>
-          <p:cNvPr id="99" name="Shape 97"/>
-          <p:cNvSpPr/>
-          <p:nvPr/>
-        </p:nvSpPr>
-        <p:spPr>
-          <a:xfrm>
-            <a:off x="8982647" y="3986443"/>
-            <a:ext cx="60960" cy="60960"/>
-          </a:xfrm>
-          <a:prstGeom prst="ellipse">
-            <a:avLst/>
-          </a:prstGeom>
-          <a:solidFill>
-            <a:srgbClr val="333333"/>
-          </a:solidFill>
-          <a:ln/>
-        </p:spPr>
-      </p:sp>
-      <p:sp>
-        <p:nvSpPr>
-          <p:cNvPr id="100" name="Shape 98"/>
-          <p:cNvSpPr/>
-          <p:nvPr/>
-        </p:nvSpPr>
-        <p:spPr>
-          <a:xfrm>
-            <a:off x="9265539" y="4048435"/>
-            <a:ext cx="60960" cy="60960"/>
-          </a:xfrm>
-          <a:prstGeom prst="ellipse">
-            <a:avLst/>
-          </a:prstGeom>
-          <a:solidFill>
-            <a:srgbClr val="333333"/>
-          </a:solidFill>
-          <a:ln/>
-        </p:spPr>
-      </p:sp>
-      <p:sp>
-        <p:nvSpPr>
-          <p:cNvPr id="101" name="Shape 99"/>
-          <p:cNvSpPr/>
-          <p:nvPr/>
-        </p:nvSpPr>
-        <p:spPr>
-          <a:xfrm>
-            <a:off x="9265539" y="4028772"/>
-            <a:ext cx="60960" cy="60960"/>
-          </a:xfrm>
-          <a:prstGeom prst="ellipse">
-            <a:avLst/>
-          </a:prstGeom>
-          <a:solidFill>
-            <a:srgbClr val="333333"/>
-          </a:solidFill>
-          <a:ln/>
-        </p:spPr>
-      </p:sp>
-      <p:sp>
-        <p:nvSpPr>
-          <p:cNvPr id="102" name="Shape 100"/>
-          <p:cNvSpPr/>
-          <p:nvPr/>
-        </p:nvSpPr>
-        <p:spPr>
-          <a:xfrm>
-            <a:off x="9359837" y="4080635"/>
-            <a:ext cx="60960" cy="60960"/>
-          </a:xfrm>
-          <a:prstGeom prst="ellipse">
-            <a:avLst/>
-          </a:prstGeom>
-          <a:solidFill>
-            <a:srgbClr val="333333"/>
-          </a:solidFill>
-          <a:ln/>
-        </p:spPr>
-      </p:sp>
-      <p:sp>
-        <p:nvSpPr>
-          <p:cNvPr id="103" name="Shape 101"/>
-          <p:cNvSpPr/>
-          <p:nvPr/>
-        </p:nvSpPr>
-        <p:spPr>
-          <a:xfrm>
-            <a:off x="9397556" y="4079710"/>
-            <a:ext cx="60960" cy="60960"/>
-          </a:xfrm>
-          <a:prstGeom prst="ellipse">
-            <a:avLst/>
-          </a:prstGeom>
-          <a:solidFill>
-            <a:srgbClr val="333333"/>
-          </a:solidFill>
-          <a:ln/>
-        </p:spPr>
-      </p:sp>
-      <p:sp>
-        <p:nvSpPr>
-          <p:cNvPr id="104" name="Shape 102"/>
-          <p:cNvSpPr/>
-          <p:nvPr/>
-        </p:nvSpPr>
-        <p:spPr>
-          <a:xfrm>
-            <a:off x="9548432" y="4166795"/>
-            <a:ext cx="60960" cy="60960"/>
-          </a:xfrm>
-          <a:prstGeom prst="ellipse">
-            <a:avLst/>
-          </a:prstGeom>
-          <a:solidFill>
-            <a:srgbClr val="333333"/>
-          </a:solidFill>
-          <a:ln/>
-        </p:spPr>
-      </p:sp>
-      <p:sp>
-        <p:nvSpPr>
-          <p:cNvPr id="105" name="Shape 103"/>
-          <p:cNvSpPr/>
-          <p:nvPr/>
-        </p:nvSpPr>
-        <p:spPr>
-          <a:xfrm>
-            <a:off x="9680448" y="4162377"/>
-            <a:ext cx="60960" cy="60960"/>
-          </a:xfrm>
-          <a:prstGeom prst="ellipse">
-            <a:avLst/>
-          </a:prstGeom>
-          <a:solidFill>
-            <a:srgbClr val="333333"/>
-          </a:solidFill>
-          <a:ln/>
-        </p:spPr>
-      </p:sp>
-      <p:sp>
-        <p:nvSpPr>
-          <p:cNvPr id="106" name="Shape 104"/>
-          <p:cNvSpPr/>
-          <p:nvPr/>
-        </p:nvSpPr>
-        <p:spPr>
-          <a:xfrm>
-            <a:off x="9737027" y="4195923"/>
-            <a:ext cx="60960" cy="60960"/>
-          </a:xfrm>
-          <a:prstGeom prst="ellipse">
-            <a:avLst/>
-          </a:prstGeom>
-          <a:solidFill>
-            <a:srgbClr val="333333"/>
-          </a:solidFill>
-          <a:ln/>
-        </p:spPr>
-      </p:sp>
-      <p:sp>
-        <p:nvSpPr>
-          <p:cNvPr id="107" name="Shape 105"/>
-          <p:cNvSpPr/>
-          <p:nvPr/>
-        </p:nvSpPr>
-        <p:spPr>
-          <a:xfrm>
-            <a:off x="9755886" y="4114687"/>
-            <a:ext cx="60960" cy="60960"/>
-          </a:xfrm>
-          <a:prstGeom prst="ellipse">
-            <a:avLst/>
-          </a:prstGeom>
-          <a:solidFill>
-            <a:srgbClr val="333333"/>
-          </a:solidFill>
-          <a:ln/>
-        </p:spPr>
-      </p:sp>
-      <p:sp>
-        <p:nvSpPr>
-          <p:cNvPr id="108" name="Shape 106"/>
-          <p:cNvSpPr/>
-          <p:nvPr/>
-        </p:nvSpPr>
-        <p:spPr>
-          <a:xfrm>
-            <a:off x="9755886" y="4127260"/>
-            <a:ext cx="60960" cy="60960"/>
-          </a:xfrm>
-          <a:prstGeom prst="ellipse">
-            <a:avLst/>
-          </a:prstGeom>
-          <a:solidFill>
-            <a:srgbClr val="333333"/>
-          </a:solidFill>
-          <a:ln/>
-        </p:spPr>
-      </p:sp>
-      <p:sp>
-        <p:nvSpPr>
-          <p:cNvPr id="109" name="Shape 107"/>
-          <p:cNvSpPr/>
-          <p:nvPr/>
-        </p:nvSpPr>
-        <p:spPr>
-          <a:xfrm>
-            <a:off x="9755886" y="4178321"/>
-            <a:ext cx="60960" cy="60960"/>
-          </a:xfrm>
-          <a:prstGeom prst="ellipse">
-            <a:avLst/>
-          </a:prstGeom>
-          <a:solidFill>
-            <a:srgbClr val="333333"/>
-          </a:solidFill>
-          <a:ln/>
-        </p:spPr>
-      </p:sp>
-      <p:sp>
-        <p:nvSpPr>
-          <p:cNvPr id="110" name="Shape 108"/>
-          <p:cNvSpPr/>
-          <p:nvPr/>
-        </p:nvSpPr>
-        <p:spPr>
-          <a:xfrm>
-            <a:off x="9906762" y="4281332"/>
-            <a:ext cx="60960" cy="60960"/>
-          </a:xfrm>
-          <a:prstGeom prst="ellipse">
-            <a:avLst/>
-          </a:prstGeom>
-          <a:solidFill>
-            <a:srgbClr val="333333"/>
-          </a:solidFill>
-          <a:ln/>
-        </p:spPr>
-      </p:sp>
-      <p:sp>
-        <p:nvSpPr>
-          <p:cNvPr id="111" name="Shape 109"/>
-          <p:cNvSpPr/>
-          <p:nvPr/>
-        </p:nvSpPr>
-        <p:spPr>
-          <a:xfrm>
-            <a:off x="9944481" y="4333807"/>
-            <a:ext cx="60960" cy="60960"/>
-          </a:xfrm>
-          <a:prstGeom prst="ellipse">
-            <a:avLst/>
-          </a:prstGeom>
-          <a:solidFill>
-            <a:srgbClr val="333333"/>
-          </a:solidFill>
-          <a:ln/>
-        </p:spPr>
-      </p:sp>
-      <p:sp>
-        <p:nvSpPr>
-          <p:cNvPr id="112" name="Shape 110"/>
-          <p:cNvSpPr/>
-          <p:nvPr/>
-        </p:nvSpPr>
-        <p:spPr>
-          <a:xfrm>
-            <a:off x="10095357" y="4280267"/>
-            <a:ext cx="60960" cy="60960"/>
-          </a:xfrm>
-          <a:prstGeom prst="ellipse">
-            <a:avLst/>
-          </a:prstGeom>
-          <a:solidFill>
-            <a:srgbClr val="333333"/>
-          </a:solidFill>
-          <a:ln/>
-        </p:spPr>
-      </p:sp>
-      <p:sp>
-        <p:nvSpPr>
-          <p:cNvPr id="113" name="Shape 111"/>
-          <p:cNvSpPr/>
-          <p:nvPr/>
-        </p:nvSpPr>
-        <p:spPr>
-          <a:xfrm>
-            <a:off x="10378250" y="4404757"/>
-            <a:ext cx="60960" cy="60960"/>
-          </a:xfrm>
-          <a:prstGeom prst="ellipse">
-            <a:avLst/>
-          </a:prstGeom>
-          <a:solidFill>
-            <a:srgbClr val="333333"/>
-          </a:solidFill>
-          <a:ln/>
-        </p:spPr>
-      </p:sp>
-      <p:sp>
-        <p:nvSpPr>
-          <p:cNvPr id="114" name="Shape 112"/>
-          <p:cNvSpPr/>
-          <p:nvPr/>
-        </p:nvSpPr>
-        <p:spPr>
-          <a:xfrm>
-            <a:off x="10717721" y="4567438"/>
-            <a:ext cx="60960" cy="60960"/>
-          </a:xfrm>
-          <a:prstGeom prst="ellipse">
-            <a:avLst/>
-          </a:prstGeom>
-          <a:solidFill>
-            <a:srgbClr val="333333"/>
-          </a:solidFill>
-          <a:ln/>
-        </p:spPr>
-      </p:sp>
-      <p:sp>
-        <p:nvSpPr>
-          <p:cNvPr id="115" name="Shape 113"/>
-          <p:cNvSpPr/>
-          <p:nvPr/>
-        </p:nvSpPr>
-        <p:spPr>
-          <a:xfrm>
-            <a:off x="1866900" y="2628900"/>
-            <a:ext cx="171450" cy="28575"/>
-          </a:xfrm>
-          <a:prstGeom prst="rect">
-            <a:avLst/>
-          </a:prstGeom>
-          <a:solidFill>
-            <a:srgbClr val="6E7780"/>
-          </a:solidFill>
-          <a:ln/>
-        </p:spPr>
-      </p:sp>
-      <p:sp>
-        <p:nvSpPr>
-          <p:cNvPr id="116" name="Text 114"/>
-          <p:cNvSpPr txBox="1"/>
-          <p:nvPr/>
-        </p:nvSpPr>
-        <p:spPr>
-          <a:xfrm>
-            <a:off x="2114550" y="2562225"/>
-            <a:ext cx="857250" cy="137160"/>
-          </a:xfrm>
-          <a:prstGeom prst="rect">
-            <a:avLst/>
-          </a:prstGeom>
-          <a:noFill/>
-          <a:ln/>
-        </p:spPr>
-        <p:txBody>
-          <a:bodyPr wrap="square" lIns="0" tIns="0" rIns="0" bIns="0" rtlCol="0" anchor="t"/>
-          <a:lstStyle/>
-          <a:p>
-            <a:pPr algn="l" indent="0" marL="0">
-              <a:lnSpc>
-                <a:spcPts val="1080"/>
-              </a:lnSpc>
-              <a:buNone/>
-            </a:pPr>
-            <a:r>
-              <a:rPr lang="en-US" sz="900" dirty="0">
-                <a:solidFill>
-                  <a:srgbClr val="6E7780"/>
-                </a:solidFill>
-                <a:latin typeface="Malgun Gothic" pitchFamily="34" charset="0"/>
-                <a:ea typeface="Malgun Gothic" pitchFamily="34" charset="-122"/>
-                <a:cs typeface="Malgun Gothic" pitchFamily="34" charset="-120"/>
-              </a:rPr>
-              <a:t>계산값</a:t>
-            </a:r>
-            <a:endParaRPr lang="en-US" sz="900" dirty="0"/>
-          </a:p>
-        </p:txBody>
-      </p:sp>
-      <p:sp>
-        <p:nvSpPr>
-          <p:cNvPr id="117" name="Shape 115"/>
-          <p:cNvSpPr/>
-          <p:nvPr/>
-        </p:nvSpPr>
-        <p:spPr>
-          <a:xfrm>
-            <a:off x="2952750" y="2628900"/>
-            <a:ext cx="171450" cy="28575"/>
-          </a:xfrm>
-          <a:prstGeom prst="rect">
-            <a:avLst/>
-          </a:prstGeom>
-          <a:solidFill>
-            <a:srgbClr val="EA002C"/>
-          </a:solidFill>
-          <a:ln/>
-        </p:spPr>
-      </p:sp>
-      <p:sp>
-        <p:nvSpPr>
-          <p:cNvPr id="118" name="Text 116"/>
-          <p:cNvSpPr txBox="1"/>
-          <p:nvPr/>
-        </p:nvSpPr>
-        <p:spPr>
-          <a:xfrm>
-            <a:off x="3200400" y="2562225"/>
-            <a:ext cx="1905000" cy="137160"/>
-          </a:xfrm>
-          <a:prstGeom prst="rect">
-            <a:avLst/>
-          </a:prstGeom>
-          <a:noFill/>
-          <a:ln/>
-        </p:spPr>
-        <p:txBody>
-          <a:bodyPr wrap="square" lIns="0" tIns="0" rIns="0" bIns="0" rtlCol="0" anchor="t"/>
-          <a:lstStyle/>
-          <a:p>
-            <a:pPr algn="l" indent="0" marL="0">
-              <a:lnSpc>
-                <a:spcPts val="1080"/>
-              </a:lnSpc>
-              <a:buNone/>
-            </a:pPr>
-            <a:r>
-              <a:rPr lang="en-US" sz="900" dirty="0">
-                <a:solidFill>
-                  <a:srgbClr val="EA002C"/>
-                </a:solidFill>
-                <a:latin typeface="Malgun Gothic" pitchFamily="34" charset="0"/>
-                <a:ea typeface="Malgun Gothic" pitchFamily="34" charset="-122"/>
-                <a:cs typeface="Malgun Gothic" pitchFamily="34" charset="-120"/>
-              </a:rPr>
-              <a:t>도구가 신고하는 값</a:t>
-            </a:r>
-            <a:endParaRPr lang="en-US" sz="900" dirty="0"/>
-          </a:p>
-        </p:txBody>
-      </p:sp>
-      <p:sp>
-        <p:nvSpPr>
-          <p:cNvPr id="119" name="Shape 117"/>
-          <p:cNvSpPr/>
-          <p:nvPr/>
-        </p:nvSpPr>
-        <p:spPr>
-          <a:xfrm>
-            <a:off x="685800" y="6153150"/>
+              <a:t>Q &amp; A</a:t>
+            </a:r>
+            <a:endParaRPr lang="en-US" sz="2325" dirty="0"/>
+          </a:p>
+        </p:txBody>
+      </p:sp>
+      <p:sp>
+        <p:nvSpPr>
+          <p:cNvPr id="8" name="Text 6"/>
+          <p:cNvSpPr txBox="1"/>
+          <p:nvPr/>
+        </p:nvSpPr>
+        <p:spPr>
+          <a:xfrm>
+            <a:off x="685800" y="3790950"/>
+            <a:ext cx="6667500" cy="200025"/>
+          </a:xfrm>
+          <a:prstGeom prst="rect">
+            <a:avLst/>
+          </a:prstGeom>
+          <a:noFill/>
+          <a:ln/>
+        </p:spPr>
+        <p:txBody>
+          <a:bodyPr wrap="square" lIns="0" tIns="0" rIns="0" bIns="0" rtlCol="0" anchor="t"/>
+          <a:lstStyle/>
+          <a:p>
+            <a:pPr algn="l" indent="0" marL="0">
+              <a:lnSpc>
+                <a:spcPts val="1575"/>
+              </a:lnSpc>
+              <a:buNone/>
+            </a:pPr>
+            <a:r>
+              <a:rPr lang="en-US" sz="1125" dirty="0">
+                <a:solidFill>
+                  <a:srgbClr val="5A5A5A"/>
+                </a:solidFill>
+                <a:latin typeface="Malgun Gothic" pitchFamily="34" charset="0"/>
+                <a:ea typeface="Malgun Gothic" pitchFamily="34" charset="-122"/>
+                <a:cs typeface="Malgun Gothic" pitchFamily="34" charset="-120"/>
+              </a:rPr>
+              <a:t>질문 주시면 해당 장을 띄워 설명하겠습니다.</a:t>
+            </a:r>
+            <a:endParaRPr lang="en-US" sz="1125" dirty="0"/>
+          </a:p>
+        </p:txBody>
+      </p:sp>
+      <p:pic>
+        <p:nvPicPr>
+          <p:cNvPr id="9" name="Image 0" descr="/home/user/Narae-AI/docs/ppt/assets/ci_narae.png">    </p:cNvPr>
+          <p:cNvPicPr>
+            <a:picLocks noChangeAspect="1"/>
+          </p:cNvPicPr>
+          <p:nvPr/>
+        </p:nvPicPr>
+        <p:blipFill>
+          <a:blip r:embed="rId1"/>
+          <a:stretch>
+            <a:fillRect/>
+          </a:stretch>
+        </p:blipFill>
+        <p:spPr>
+          <a:xfrm>
+            <a:off x="685800" y="5295900"/>
+            <a:ext cx="1866900" cy="352425"/>
+          </a:xfrm>
+          <a:prstGeom prst="rect">
+            <a:avLst/>
+          </a:prstGeom>
+        </p:spPr>
+      </p:pic>
+      <p:sp>
+        <p:nvSpPr>
+          <p:cNvPr id="10" name="Shape 7"/>
+          <p:cNvSpPr/>
+          <p:nvPr/>
+        </p:nvSpPr>
+        <p:spPr>
+          <a:xfrm>
+            <a:off x="685800" y="6038850"/>
             <a:ext cx="10820400" cy="0"/>
           </a:xfrm>
           <a:prstGeom prst="line">
@@ -12176,7 +9545,7 @@
       </p:sp>
       <p:sp>
         <p:nvSpPr>
-          <p:cNvPr id="120" name="Text 118"/>
+          <p:cNvPr id="11" name="Text 8"/>
           <p:cNvSpPr txBox="1"/>
           <p:nvPr/>
         </p:nvSpPr>
@@ -12218,7 +9587,7 @@
       </p:sp>
       <p:sp>
         <p:nvSpPr>
-          <p:cNvPr id="121" name="Text 119"/>
+          <p:cNvPr id="12" name="Text 9"/>
           <p:cNvSpPr txBox="1"/>
           <p:nvPr/>
         </p:nvSpPr>

--- a/docs/ppt/위례_공급가능용량_최종발표_v3.pptx
+++ b/docs/ppt/위례_공급가능용량_최종발표_v3.pptx
@@ -1945,84 +1945,82 @@
       </p:grpSpPr>
       <p:sp>
         <p:nvSpPr>
-          <p:cNvPr id="2" name="Shape 0"/>
-          <p:cNvSpPr/>
-          <p:nvPr/>
-        </p:nvSpPr>
-        <p:spPr>
-          <a:xfrm>
-            <a:off x="685800" y="533400"/>
-            <a:ext cx="2133600" cy="600075"/>
-          </a:xfrm>
-          <a:prstGeom prst="rect">
-            <a:avLst/>
-          </a:prstGeom>
-          <a:solidFill>
-            <a:srgbClr val="FFFFFF"/>
-          </a:solidFill>
-          <a:ln/>
-        </p:spPr>
-      </p:sp>
-      <p:pic>
-        <p:nvPicPr>
-          <p:cNvPr id="3" name="Image 0" descr="/home/user/Narae-AI/docs/ppt/assets/ci_narae.png">    </p:cNvPr>
-          <p:cNvPicPr>
-            <a:picLocks noChangeAspect="1"/>
-          </p:cNvPicPr>
-          <p:nvPr/>
-        </p:nvPicPr>
-        <p:blipFill>
-          <a:blip r:embed="rId1"/>
-          <a:stretch>
-            <a:fillRect/>
-          </a:stretch>
-        </p:blipFill>
-        <p:spPr>
-          <a:xfrm>
-            <a:off x="819150" y="657225"/>
-            <a:ext cx="1866900" cy="352425"/>
-          </a:xfrm>
-          <a:prstGeom prst="rect">
-            <a:avLst/>
-          </a:prstGeom>
-        </p:spPr>
-      </p:pic>
-      <p:sp>
-        <p:nvSpPr>
-          <p:cNvPr id="4" name="Text 1"/>
-          <p:cNvSpPr txBox="1"/>
-          <p:nvPr/>
-        </p:nvSpPr>
-        <p:spPr>
-          <a:xfrm>
-            <a:off x="7696200" y="704850"/>
-            <a:ext cx="3810000" cy="148828"/>
-          </a:xfrm>
-          <a:prstGeom prst="rect">
-            <a:avLst/>
-          </a:prstGeom>
-          <a:noFill/>
-          <a:ln/>
-        </p:spPr>
-        <p:txBody>
-          <a:bodyPr wrap="square" lIns="0" tIns="0" rIns="0" bIns="0" rtlCol="0" anchor="t"/>
-          <a:lstStyle/>
-          <a:p>
-            <a:pPr algn="r" indent="0" marL="0">
-              <a:lnSpc>
-                <a:spcPts val="1172"/>
-              </a:lnSpc>
-              <a:buNone/>
-            </a:pPr>
-            <a:r>
-              <a:rPr lang="en-US" sz="938" spc="200" kern="0" dirty="0">
-                <a:solidFill>
-                  <a:srgbClr val="5A5A5A"/>
+          <p:cNvPr id="2" name="Text 0"/>
+          <p:cNvSpPr txBox="1"/>
+          <p:nvPr/>
+        </p:nvSpPr>
+        <p:spPr>
+          <a:xfrm>
+            <a:off x="685800" y="742950"/>
+            <a:ext cx="5715000" cy="142875"/>
+          </a:xfrm>
+          <a:prstGeom prst="rect">
+            <a:avLst/>
+          </a:prstGeom>
+          <a:noFill/>
+          <a:ln/>
+        </p:spPr>
+        <p:txBody>
+          <a:bodyPr wrap="square" lIns="0" tIns="0" rIns="0" bIns="0" rtlCol="0" anchor="t"/>
+          <a:lstStyle/>
+          <a:p>
+            <a:pPr algn="l" indent="0" marL="0">
+              <a:lnSpc>
+                <a:spcPts val="1125"/>
+              </a:lnSpc>
+              <a:buNone/>
+            </a:pPr>
+            <a:r>
+              <a:rPr lang="en-US" sz="900" spc="180" kern="0" dirty="0">
+                <a:solidFill>
+                  <a:srgbClr val="8C8C8C"/>
                 </a:solidFill>
                 <a:latin typeface="Consolas" pitchFamily="34" charset="0"/>
                 <a:ea typeface="Consolas" pitchFamily="34" charset="-122"/>
                 <a:cs typeface="Consolas" pitchFamily="34" charset="-120"/>
               </a:rPr>
+              <a:t>나래에너지서비스 위례사업소</a:t>
+            </a:r>
+            <a:endParaRPr lang="en-US" sz="900" dirty="0"/>
+          </a:p>
+        </p:txBody>
+      </p:sp>
+      <p:sp>
+        <p:nvSpPr>
+          <p:cNvPr id="3" name="Text 1"/>
+          <p:cNvSpPr txBox="1"/>
+          <p:nvPr/>
+        </p:nvSpPr>
+        <p:spPr>
+          <a:xfrm>
+            <a:off x="7696200" y="704850"/>
+            <a:ext cx="3810000" cy="148828"/>
+          </a:xfrm>
+          <a:prstGeom prst="rect">
+            <a:avLst/>
+          </a:prstGeom>
+          <a:noFill/>
+          <a:ln/>
+        </p:spPr>
+        <p:txBody>
+          <a:bodyPr wrap="square" lIns="0" tIns="0" rIns="0" bIns="0" rtlCol="0" anchor="t"/>
+          <a:lstStyle/>
+          <a:p>
+            <a:pPr algn="r" indent="0" marL="0">
+              <a:lnSpc>
+                <a:spcPts val="1172"/>
+              </a:lnSpc>
+              <a:buNone/>
+            </a:pPr>
+            <a:r>
+              <a:rPr lang="en-US" sz="938" spc="200" kern="0" dirty="0">
+                <a:solidFill>
+                  <a:srgbClr val="5A5A5A"/>
+                </a:solidFill>
+                <a:latin typeface="Consolas" pitchFamily="34" charset="0"/>
+                <a:ea typeface="Consolas" pitchFamily="34" charset="-122"/>
+                <a:cs typeface="Consolas" pitchFamily="34" charset="-120"/>
+              </a:rPr>
               <a:t>개선과제 최종 보고</a:t>
             </a:r>
             <a:endParaRPr lang="en-US" sz="938" dirty="0"/>
@@ -2031,7 +2029,7 @@
       </p:sp>
       <p:sp>
         <p:nvSpPr>
-          <p:cNvPr id="5" name="Shape 2"/>
+          <p:cNvPr id="4" name="Shape 2"/>
           <p:cNvSpPr/>
           <p:nvPr/>
         </p:nvSpPr>
@@ -2054,7 +2052,7 @@
       </p:sp>
       <p:sp>
         <p:nvSpPr>
-          <p:cNvPr id="6" name="Shape 3"/>
+          <p:cNvPr id="5" name="Shape 3"/>
           <p:cNvSpPr/>
           <p:nvPr/>
         </p:nvSpPr>
@@ -2074,7 +2072,7 @@
       </p:sp>
       <p:sp>
         <p:nvSpPr>
-          <p:cNvPr id="7" name="Text 4"/>
+          <p:cNvPr id="6" name="Text 4"/>
           <p:cNvSpPr txBox="1"/>
           <p:nvPr/>
         </p:nvSpPr>
@@ -2116,7 +2114,7 @@
       </p:sp>
       <p:sp>
         <p:nvSpPr>
-          <p:cNvPr id="8" name="Text 5"/>
+          <p:cNvPr id="7" name="Text 5"/>
           <p:cNvSpPr txBox="1"/>
           <p:nvPr/>
         </p:nvSpPr>
@@ -2158,7 +2156,7 @@
       </p:sp>
       <p:sp>
         <p:nvSpPr>
-          <p:cNvPr id="9" name="Text 6"/>
+          <p:cNvPr id="8" name="Text 6"/>
           <p:cNvSpPr txBox="1"/>
           <p:nvPr/>
         </p:nvSpPr>
@@ -2200,7 +2198,7 @@
       </p:sp>
       <p:sp>
         <p:nvSpPr>
-          <p:cNvPr id="10" name="Shape 7"/>
+          <p:cNvPr id="9" name="Shape 7"/>
           <p:cNvSpPr/>
           <p:nvPr/>
         </p:nvSpPr>
@@ -2223,7 +2221,7 @@
       </p:sp>
       <p:sp>
         <p:nvSpPr>
-          <p:cNvPr id="11" name="Text 8"/>
+          <p:cNvPr id="10" name="Text 8"/>
           <p:cNvSpPr txBox="1"/>
           <p:nvPr/>
         </p:nvSpPr>
@@ -2265,7 +2263,7 @@
       </p:sp>
       <p:sp>
         <p:nvSpPr>
-          <p:cNvPr id="12" name="Shape 9"/>
+          <p:cNvPr id="11" name="Shape 9"/>
           <p:cNvSpPr/>
           <p:nvPr/>
         </p:nvSpPr>
@@ -2288,7 +2286,7 @@
       </p:sp>
       <p:sp>
         <p:nvSpPr>
-          <p:cNvPr id="13" name="Text 10"/>
+          <p:cNvPr id="12" name="Text 10"/>
           <p:cNvSpPr txBox="1"/>
           <p:nvPr/>
         </p:nvSpPr>
@@ -2330,7 +2328,7 @@
       </p:sp>
       <p:sp>
         <p:nvSpPr>
-          <p:cNvPr id="14" name="Text 11"/>
+          <p:cNvPr id="13" name="Text 11"/>
           <p:cNvSpPr txBox="1"/>
           <p:nvPr/>
         </p:nvSpPr>
@@ -2372,7 +2370,7 @@
       </p:sp>
       <p:sp>
         <p:nvSpPr>
-          <p:cNvPr id="15" name="Shape 12"/>
+          <p:cNvPr id="14" name="Shape 12"/>
           <p:cNvSpPr/>
           <p:nvPr/>
         </p:nvSpPr>
@@ -2395,7 +2393,7 @@
       </p:sp>
       <p:sp>
         <p:nvSpPr>
-          <p:cNvPr id="16" name="Text 13"/>
+          <p:cNvPr id="15" name="Text 13"/>
           <p:cNvSpPr txBox="1"/>
           <p:nvPr/>
         </p:nvSpPr>
@@ -2437,7 +2435,7 @@
       </p:sp>
       <p:sp>
         <p:nvSpPr>
-          <p:cNvPr id="17" name="Text 14"/>
+          <p:cNvPr id="16" name="Text 14"/>
           <p:cNvSpPr txBox="1"/>
           <p:nvPr/>
         </p:nvSpPr>
@@ -2479,7 +2477,7 @@
       </p:sp>
       <p:sp>
         <p:nvSpPr>
-          <p:cNvPr id="18" name="Shape 15"/>
+          <p:cNvPr id="17" name="Shape 15"/>
           <p:cNvSpPr/>
           <p:nvPr/>
         </p:nvSpPr>
@@ -2502,7 +2500,7 @@
       </p:sp>
       <p:sp>
         <p:nvSpPr>
-          <p:cNvPr id="19" name="Text 16"/>
+          <p:cNvPr id="18" name="Text 16"/>
           <p:cNvSpPr txBox="1"/>
           <p:nvPr/>
         </p:nvSpPr>
@@ -2544,7 +2542,7 @@
       </p:sp>
       <p:sp>
         <p:nvSpPr>
-          <p:cNvPr id="20" name="Text 17"/>
+          <p:cNvPr id="19" name="Text 17"/>
           <p:cNvSpPr txBox="1"/>
           <p:nvPr/>
         </p:nvSpPr>
@@ -2586,7 +2584,7 @@
       </p:sp>
       <p:sp>
         <p:nvSpPr>
-          <p:cNvPr id="21" name="Shape 18"/>
+          <p:cNvPr id="20" name="Shape 18"/>
           <p:cNvSpPr/>
           <p:nvPr/>
         </p:nvSpPr>
@@ -2609,7 +2607,7 @@
       </p:sp>
       <p:sp>
         <p:nvSpPr>
-          <p:cNvPr id="22" name="Text 19"/>
+          <p:cNvPr id="21" name="Text 19"/>
           <p:cNvSpPr txBox="1"/>
           <p:nvPr/>
         </p:nvSpPr>
@@ -2651,7 +2649,7 @@
       </p:sp>
       <p:sp>
         <p:nvSpPr>
-          <p:cNvPr id="23" name="Shape 20"/>
+          <p:cNvPr id="22" name="Shape 20"/>
           <p:cNvSpPr/>
           <p:nvPr/>
         </p:nvSpPr>
@@ -2674,7 +2672,7 @@
       </p:sp>
       <p:sp>
         <p:nvSpPr>
-          <p:cNvPr id="24" name="Text 21"/>
+          <p:cNvPr id="23" name="Text 21"/>
           <p:cNvSpPr txBox="1"/>
           <p:nvPr/>
         </p:nvSpPr>
@@ -9358,7 +9356,7 @@
         </p:nvSpPr>
         <p:spPr>
           <a:xfrm>
-            <a:off x="685800" y="2152650"/>
+            <a:off x="685800" y="2962275"/>
             <a:ext cx="438150" cy="28575"/>
           </a:xfrm>
           <a:prstGeom prst="rect">
@@ -9378,7 +9376,7 @@
         </p:nvSpPr>
         <p:spPr>
           <a:xfrm>
-            <a:off x="685800" y="2419350"/>
+            <a:off x="685800" y="3228975"/>
             <a:ext cx="8572500" cy="662940"/>
           </a:xfrm>
           <a:prstGeom prst="rect">
@@ -9420,7 +9418,7 @@
         </p:nvSpPr>
         <p:spPr>
           <a:xfrm>
-            <a:off x="685800" y="3314700"/>
+            <a:off x="685800" y="4124325"/>
             <a:ext cx="3810000" cy="354330"/>
           </a:xfrm>
           <a:prstGeom prst="rect">
@@ -9456,73 +9454,7 @@
       </p:sp>
       <p:sp>
         <p:nvSpPr>
-          <p:cNvPr id="8" name="Text 6"/>
-          <p:cNvSpPr txBox="1"/>
-          <p:nvPr/>
-        </p:nvSpPr>
-        <p:spPr>
-          <a:xfrm>
-            <a:off x="685800" y="3790950"/>
-            <a:ext cx="6667500" cy="200025"/>
-          </a:xfrm>
-          <a:prstGeom prst="rect">
-            <a:avLst/>
-          </a:prstGeom>
-          <a:noFill/>
-          <a:ln/>
-        </p:spPr>
-        <p:txBody>
-          <a:bodyPr wrap="square" lIns="0" tIns="0" rIns="0" bIns="0" rtlCol="0" anchor="t"/>
-          <a:lstStyle/>
-          <a:p>
-            <a:pPr algn="l" indent="0" marL="0">
-              <a:lnSpc>
-                <a:spcPts val="1575"/>
-              </a:lnSpc>
-              <a:buNone/>
-            </a:pPr>
-            <a:r>
-              <a:rPr lang="en-US" sz="1125" dirty="0">
-                <a:solidFill>
-                  <a:srgbClr val="5A5A5A"/>
-                </a:solidFill>
-                <a:latin typeface="Malgun Gothic" pitchFamily="34" charset="0"/>
-                <a:ea typeface="Malgun Gothic" pitchFamily="34" charset="-122"/>
-                <a:cs typeface="Malgun Gothic" pitchFamily="34" charset="-120"/>
-              </a:rPr>
-              <a:t>질문 주시면 해당 장을 띄워 설명하겠습니다.</a:t>
-            </a:r>
-            <a:endParaRPr lang="en-US" sz="1125" dirty="0"/>
-          </a:p>
-        </p:txBody>
-      </p:sp>
-      <p:pic>
-        <p:nvPicPr>
-          <p:cNvPr id="9" name="Image 0" descr="/home/user/Narae-AI/docs/ppt/assets/ci_narae.png">    </p:cNvPr>
-          <p:cNvPicPr>
-            <a:picLocks noChangeAspect="1"/>
-          </p:cNvPicPr>
-          <p:nvPr/>
-        </p:nvPicPr>
-        <p:blipFill>
-          <a:blip r:embed="rId1"/>
-          <a:stretch>
-            <a:fillRect/>
-          </a:stretch>
-        </p:blipFill>
-        <p:spPr>
-          <a:xfrm>
-            <a:off x="685800" y="5295900"/>
-            <a:ext cx="1866900" cy="352425"/>
-          </a:xfrm>
-          <a:prstGeom prst="rect">
-            <a:avLst/>
-          </a:prstGeom>
-        </p:spPr>
-      </p:pic>
-      <p:sp>
-        <p:nvSpPr>
-          <p:cNvPr id="10" name="Shape 7"/>
+          <p:cNvPr id="8" name="Shape 6"/>
           <p:cNvSpPr/>
           <p:nvPr/>
         </p:nvSpPr>
@@ -9545,7 +9477,7 @@
       </p:sp>
       <p:sp>
         <p:nvSpPr>
-          <p:cNvPr id="11" name="Text 8"/>
+          <p:cNvPr id="9" name="Text 7"/>
           <p:cNvSpPr txBox="1"/>
           <p:nvPr/>
         </p:nvSpPr>
@@ -9587,7 +9519,7 @@
       </p:sp>
       <p:sp>
         <p:nvSpPr>
-          <p:cNvPr id="12" name="Text 9"/>
+          <p:cNvPr id="10" name="Text 8"/>
           <p:cNvSpPr txBox="1"/>
           <p:nvPr/>
         </p:nvSpPr>

--- a/docs/ppt/위례_공급가능용량_최종발표_v3.pptx
+++ b/docs/ppt/위례_공급가능용량_최종발표_v3.pptx
@@ -3125,7 +3125,7 @@
                 <a:ea typeface="Malgun Gothic" pitchFamily="34" charset="-122"/>
                 <a:cs typeface="Malgun Gothic" pitchFamily="34" charset="-120"/>
               </a:rPr>
-              <a:t>숫자로 적기 어렵지만 일하는 방식에서 달라진 것들입니다.</a:t>
+              <a:t>숫자로 적기는 어렵지만, 일하는 방식이 이렇게 달라졌습니다.</a:t>
             </a:r>
             <a:endParaRPr lang="en-US" sz="1275" dirty="0"/>
           </a:p>
@@ -4256,7 +4256,7 @@
                 <a:ea typeface="Malgun Gothic" pitchFamily="34" charset="-122"/>
                 <a:cs typeface="Malgun Gothic" pitchFamily="34" charset="-120"/>
               </a:rPr>
-              <a:t>숫자 말고도, 일하는 방식이 사람 손에서 도구 쪽으로 옮겨 왔습니다.</a:t>
+              <a:t>숫자뿐 아니라 일하는 방식도 사람 손에서 도구로 넘어왔습니다.</a:t>
             </a:r>
             <a:endParaRPr lang="en-US" sz="1163" dirty="0"/>
           </a:p>
@@ -4675,7 +4675,7 @@
                 <a:ea typeface="Malgun Gothic" pitchFamily="34" charset="-122"/>
                 <a:cs typeface="Malgun Gothic" pitchFamily="34" charset="-120"/>
               </a:rPr>
-              <a:t>실적을 쌓아 더 정확하게 만들고, 입찰을 하는 다른 사업소로 넓힙니다.</a:t>
+              <a:t>실적을 쌓아 더 정확하게 만들고, 입찰하는 다른 사업소로 넓힙니다.</a:t>
             </a:r>
             <a:endParaRPr lang="en-US" sz="1275" dirty="0"/>
           </a:p>
@@ -6121,7 +6121,7 @@
                 <a:ea typeface="Malgun Gothic" pitchFamily="34" charset="-122"/>
                 <a:cs typeface="Malgun Gothic" pitchFamily="34" charset="-120"/>
               </a:rPr>
-              <a:t>2주마다 시험하고 결과를 도구에 넣습니다. 20~25℃ 1회, 15~20℃ 3회처럼 얇은 온도대부터 채웁니다.</a:t>
+              <a:t>2주마다 시험하고 결과를 도구에 넣습니다. 20~25℃ 1회, 15~20℃ 3회처럼 시험이 적은 온도대부터 채웁니다.</a:t>
             </a:r>
             <a:endParaRPr lang="en-US" sz="825" dirty="0"/>
           </a:p>
@@ -6394,7 +6394,7 @@
                 <a:ea typeface="Malgun Gothic" pitchFamily="34" charset="-122"/>
                 <a:cs typeface="Malgun Gothic" pitchFamily="34" charset="-120"/>
               </a:rPr>
-              <a:t>겨울과 여름이 한 번 더 지나면 신고 구간 전체에 실적이 붙습니다. 그 데이터로 후보 7가지를 다시 채점(LOOCV)해 최적 회귀 모델을 다시 고릅니다 — 지금 1등이 계속 1등이라는 보장은 없습니다.</a:t>
+              <a:t>겨울과 여름이 한 번 더 지나면 신고 구간 전체에 실적이 생깁니다. 그 데이터로 후보 7가지를 다시 채점(LOOCV)해 최적 회귀 모델을 다시 고릅니다 — 지금 1등이 계속 1등이라는 보장은 없습니다.</a:t>
             </a:r>
             <a:endParaRPr lang="en-US" sz="825" dirty="0"/>
           </a:p>
@@ -6563,7 +6563,7 @@
                 <a:ea typeface="Malgun Gothic" pitchFamily="34" charset="-122"/>
                 <a:cs typeface="Malgun Gothic" pitchFamily="34" charset="-120"/>
               </a:rPr>
-              <a:t>도구와 절차는 그대로 옮기고 특성 곡선표만 그 사업소 것으로 바꿔 넣습니다 — 곡선은 코드가 아니라 온도 61줄 표 파일로 읽습니다. 보정 곡선은 그 사업소 실적으로 새로 쌓습니다.</a:t>
+              <a:t>도구와 절차는 그대로 옮기고 특성 곡선표만 그 사업소 것으로 바꿔 넣습니다 — 도구는 곡선을 표 파일(온도 61줄)로 읽습니다. 보정 곡선은 그 사업소 실적으로 새로 쌓습니다.</a:t>
             </a:r>
             <a:endParaRPr lang="en-US" sz="825" dirty="0"/>
           </a:p>
@@ -6965,7 +6965,7 @@
                 <a:ea typeface="Malgun Gothic" pitchFamily="34" charset="-122"/>
                 <a:cs typeface="Malgun Gothic" pitchFamily="34" charset="-120"/>
               </a:rPr>
-              <a:t>한 번 만들고 끝나는 도구가 아닙니다. 쌓일수록 촘촘해지고, 다른 사업소로 넓힐 수 있습니다.</a:t>
+              <a:t>한 번 만들고 끝나는 도구가 아닙니다. 실적이 쌓일수록 촘촘해지고, 다른 사업소로 넓힐 수 있습니다.</a:t>
             </a:r>
             <a:endParaRPr lang="en-US" sz="1163" dirty="0"/>
           </a:p>
@@ -7442,7 +7442,7 @@
                 <a:ea typeface="Malgun Gothic" pitchFamily="34" charset="-122"/>
                 <a:cs typeface="Malgun Gothic" pitchFamily="34" charset="-120"/>
               </a:rPr>
-              <a:t>업무를 줄이는 것만 생각했다면 엑셀을 손보고 끝냈을 것입니다. AI 를 써서 해 본 적 없는 분야를 공부하고 스스로 풀어내는 성취감을 맛보고 싶었습니다. 그 마음이 끝까지 가게 한 힘이었습니다.</a:t>
+              <a:t>업무를 줄이는 것만 생각했다면 엑셀을 손보고 끝냈을 것입니다. AI 를 써서 해 본 적 없는 분야를 공부하고 스스로 풀어내는 성취감을 느껴 보고 싶었습니다. 그 마음으로 끝까지 왔습니다.</a:t>
             </a:r>
             <a:endParaRPr lang="en-US" sz="863" dirty="0"/>
           </a:p>
@@ -8336,7 +8336,7 @@
                 <a:ea typeface="Malgun Gothic" pitchFamily="34" charset="-122"/>
                 <a:cs typeface="Malgun Gothic" pitchFamily="34" charset="-120"/>
               </a:rPr>
-              <a:t>예측·보정 모델도, 공급가능용량 테스트 절차도 우리 일이 아니었습니다. AI 를 길잡이로 삼아 공부하고, 담당자에게 자문을 구하고, 시험을 직접 해 봤습니다.</a:t>
+              <a:t>예측·보정 모델도, 공급가능용량 테스트 절차도 우리 일이 아니었습니다. AI 의 도움을 받아 공부하고, 담당자에게 자문을 구하고, 시험을 직접 해 봤습니다.</a:t>
             </a:r>
             <a:endParaRPr lang="en-US" sz="863" dirty="0"/>
           </a:p>
@@ -9753,7 +9753,7 @@
                 <a:ea typeface="Malgun Gothic" pitchFamily="34" charset="-122"/>
                 <a:cs typeface="Malgun Gothic" pitchFamily="34" charset="-120"/>
               </a:rPr>
-              <a:t>문제에서 시작해 개선효과와 확산까지 하나로 잇습니다.</a:t>
+              <a:t>문제 → 원인 → 해결 → 효과 → 확산 순서로 이어집니다.</a:t>
             </a:r>
             <a:endParaRPr lang="en-US" sz="1275" dirty="0"/>
           </a:p>
@@ -12418,7 +12418,7 @@
                 <a:ea typeface="Malgun Gothic" pitchFamily="34" charset="-122"/>
                 <a:cs typeface="Malgun Gothic" pitchFamily="34" charset="-120"/>
               </a:rPr>
-              <a:t>발전소는 전기를 팔기 전에 얼마나 낼 수 있는지 미리 신고해야 합니다. 그 숫자를 만드는 일입니다.</a:t>
+              <a:t>발전소는 전기를 팔기 전에 얼마나 낼 수 있는지 미리 신고해야 합니다. 이 과제는 그 신고 숫자를 만드는 일입니다.</a:t>
             </a:r>
             <a:endParaRPr lang="en-US" sz="1275" dirty="0"/>
           </a:p>
@@ -14291,7 +14291,7 @@
                 <a:ea typeface="Malgun Gothic" pitchFamily="34" charset="-122"/>
                 <a:cs typeface="Malgun Gothic" pitchFamily="34" charset="-120"/>
               </a:rPr>
-              <a:t>예측·보정 모델은 해 본 적이 없었습니다. AI 를 길잡이로 삼아 직접 공부하고 풀어내는 성취감을 맛보고 싶었습니다.</a:t>
+              <a:t>예측·보정 모델은 해 본 적이 없었습니다. AI 의 도움을 받아 직접 공부하고 풀어내는 성취감을 느껴 보고 싶었습니다.</a:t>
             </a:r>
             <a:endParaRPr lang="en-US" sz="863" dirty="0"/>
           </a:p>
@@ -15238,7 +15238,7 @@
                 <a:ea typeface="Malgun Gothic" pitchFamily="34" charset="-122"/>
                 <a:cs typeface="Malgun Gothic" pitchFamily="34" charset="-120"/>
               </a:rPr>
-              <a:t>값은 손으로 옮겼습니다. 옮겨 적는 값이 61개였습니다.</a:t>
+              <a:t>값은 사람이 손으로 옮겼습니다. 한 회에 61개였습니다.</a:t>
             </a:r>
             <a:endParaRPr lang="en-US" sz="863" dirty="0"/>
           </a:p>
@@ -15367,7 +15367,7 @@
                 <a:ea typeface="Malgun Gothic" pitchFamily="34" charset="-122"/>
                 <a:cs typeface="Malgun Gothic" pitchFamily="34" charset="-120"/>
               </a:rPr>
-              <a:t>배워 보고 싶은 분야와, 곁에서 보이던 낭비가 같은 자리에 있었습니다.</a:t>
+              <a:t>공부해 보고 싶은 분야였고, 줄일 수 있는 일도 눈에 보였습니다.</a:t>
             </a:r>
             <a:endParaRPr lang="en-US" sz="1163" dirty="0"/>
           </a:p>
@@ -15786,7 +15786,7 @@
                 <a:ea typeface="Malgun Gothic" pitchFamily="34" charset="-122"/>
                 <a:cs typeface="Malgun Gothic" pitchFamily="34" charset="-120"/>
               </a:rPr>
-              <a:t>절차가 번거로웠고, 더하는 값은 하나로 정해 두고 그대로 썼습니다. 그래서 신고한 숫자가 어긋났습니다.</a:t>
+              <a:t>절차가 번거로웠고, 더하는 값은 늘 하나였습니다. 그래서 신고 숫자가 실제와 어긋났습니다.</a:t>
             </a:r>
             <a:endParaRPr lang="en-US" sz="1275" dirty="0"/>
           </a:p>
@@ -16528,8 +16528,8 @@
         </p:nvSpPr>
         <p:spPr>
           <a:xfrm>
-            <a:off x="10296525" y="1847850"/>
-            <a:ext cx="1095375" cy="125730"/>
+            <a:off x="10591800" y="1847850"/>
+            <a:ext cx="800100" cy="125730"/>
           </a:xfrm>
           <a:prstGeom prst="rect">
             <a:avLst/>
@@ -16556,7 +16556,7 @@
                 <a:ea typeface="Malgun Gothic" pitchFamily="34" charset="-122"/>
                 <a:cs typeface="Malgun Gothic" pitchFamily="34" charset="-120"/>
               </a:rPr>
-              <a:t>이 두 가지만 한다</a:t>
+              <a:t>목표 두 가지</a:t>
             </a:r>
             <a:endParaRPr lang="en-US" sz="825" dirty="0"/>
           </a:p>
@@ -16660,7 +16660,7 @@
                 <a:ea typeface="Malgun Gothic" pitchFamily="34" charset="-122"/>
                 <a:cs typeface="Malgun Gothic" pitchFamily="34" charset="-120"/>
               </a:rPr>
-              <a:t>엑셀 파일 4개로 하던 일을 도구 하나로 합친다.</a:t>
+              <a:t>엑셀 파일 4개로 하던 일을 도구 하나로 합칩니다.</a:t>
             </a:r>
             <a:endParaRPr lang="en-US" sz="863" dirty="0"/>
           </a:p>
@@ -16764,7 +16764,7 @@
                 <a:ea typeface="Malgun Gothic" pitchFamily="34" charset="-122"/>
                 <a:cs typeface="Malgun Gothic" pitchFamily="34" charset="-120"/>
               </a:rPr>
-              <a:t>시험 실적을 쌓아, 더하는 값을 온도마다 다르게 만든다.</a:t>
+              <a:t>시험 실적을 쌓아서 더하는 값을 온도마다 다르게 만듭니다.</a:t>
             </a:r>
             <a:endParaRPr lang="en-US" sz="863" dirty="0"/>
           </a:p>
@@ -22022,7 +22022,7 @@
                 <a:ea typeface="Malgun Gothic" pitchFamily="34" charset="-122"/>
                 <a:cs typeface="Malgun Gothic" pitchFamily="34" charset="-120"/>
               </a:rPr>
-              <a:t>차이의 </a:t>
+              <a:t>온도 하나로 차이의 </a:t>
             </a:r>
             <a:pPr algn="l" indent="0" marL="0">
               <a:lnSpc>
@@ -22056,7 +22056,7 @@
                 <a:ea typeface="Malgun Gothic" pitchFamily="34" charset="-122"/>
                 <a:cs typeface="Malgun Gothic" pitchFamily="34" charset="-120"/>
               </a:rPr>
-              <a:t> 를 이것만으로 설명합니다</a:t>
+              <a:t> 를 설명합니다</a:t>
             </a:r>
             <a:endParaRPr lang="en-US" sz="863" dirty="0"/>
           </a:p>
@@ -22309,7 +22309,7 @@
                 <a:ea typeface="Malgun Gothic" pitchFamily="34" charset="-122"/>
                 <a:cs typeface="Malgun Gothic" pitchFamily="34" charset="-120"/>
               </a:rPr>
-              <a:t>0.01 나아졌지만 흔들림 ±0.08 보다 작습니다</a:t>
+              <a:t>0.01 나아졌지만 흔들리는 폭 ±0.08 보다 작습니다</a:t>
             </a:r>
             <a:endParaRPr lang="en-US" sz="863" dirty="0"/>
           </a:p>
@@ -22542,7 +22542,7 @@
                 <a:ea typeface="Malgun Gothic" pitchFamily="34" charset="-122"/>
                 <a:cs typeface="Malgun Gothic" pitchFamily="34" charset="-120"/>
               </a:rPr>
-              <a:t>제작사 계산식이 이미 쓰고 있습니다 (두 번 반영)</a:t>
+              <a:t>제작사 계산식이 이미 쓰는 값입니다 (두 번 반영됩니다)</a:t>
             </a:r>
             <a:endParaRPr lang="en-US" sz="863" dirty="0"/>
           </a:p>
@@ -23070,7 +23070,7 @@
                 <a:ea typeface="Malgun Gothic" pitchFamily="34" charset="-122"/>
                 <a:cs typeface="Malgun Gothic" pitchFamily="34" charset="-120"/>
               </a:rPr>
-              <a:t>단위 MW · 작을수록 잘 맞힌 것입니다. 회차마다 흔들리는 폭이 ±0.08 이므로 그보다 작은 차이는 차이로 볼 수 없습니다. 한 회를 가리고 나머지로 그 회를 맞혀 보는 방식으로 채점했습니다.</a:t>
+              <a:t>단위 MW · 작을수록 잘 맞힌 것입니다. 회차마다 ±0.08 은 그냥 흔들리는 폭이라, 그보다 작은 차이는 의미가 없습니다. 채점은 한 회를 가리고 나머지로 그 회를 맞혀 봤습니다.</a:t>
             </a:r>
             <a:endParaRPr lang="en-US" sz="788" dirty="0"/>
           </a:p>
@@ -23305,7 +23305,7 @@
                 <a:ea typeface="Malgun Gothic" pitchFamily="34" charset="-122"/>
                 <a:cs typeface="Malgun Gothic" pitchFamily="34" charset="-120"/>
               </a:rPr>
-              <a:t>혼자서 대부분을 설명한다</a:t>
+              <a:t>온도 하나로 대부분이 설명된다</a:t>
             </a:r>
             <a:endParaRPr lang="en-US" sz="1125" dirty="0"/>
           </a:p>
@@ -23347,7 +23347,7 @@
                 <a:ea typeface="Malgun Gothic" pitchFamily="34" charset="-122"/>
                 <a:cs typeface="Malgun Gothic" pitchFamily="34" charset="-120"/>
               </a:rPr>
-              <a:t>차이의 85% 가 온도로 설명됩니다. 추우면 커지고 더우면 작아집니다.</a:t>
+              <a:t>추우면 차이가 커지고, 더우면 작아집니다. 온도만 넣어도 대부분 맞습니다.</a:t>
             </a:r>
             <a:endParaRPr lang="en-US" sz="863" dirty="0"/>
           </a:p>
@@ -23639,7 +23639,7 @@
                 <a:ea typeface="Malgun Gothic" pitchFamily="34" charset="-122"/>
                 <a:cs typeface="Malgun Gothic" pitchFamily="34" charset="-120"/>
               </a:rPr>
-              <a:t>신고는 영하 20도부터 40도까지 온도마다 내야 합니다. 입력이 온도여야 표를 만들 수 있습니다.</a:t>
+              <a:t>신고는 영하 20도부터 40도까지 온도마다 해야 합니다. 그래서 입력도 온도여야 표를 만들 수 있습니다.</a:t>
             </a:r>
             <a:endParaRPr lang="en-US" sz="863" dirty="0"/>
           </a:p>
@@ -23950,7 +23950,7 @@
                 <a:ea typeface="Malgun Gothic" pitchFamily="34" charset="-122"/>
                 <a:cs typeface="Malgun Gothic" pitchFamily="34" charset="-120"/>
               </a:rPr>
-              <a:t>에서 해야 합니다. 가스터빈 입구 날개를 더 여는 조작입니다(IGV turn-up). 그 조작을 하지 않고 측정한 날이었습니다. 덜 올린 채로 쟀으니 낮게 나온 것입니다.</a:t>
+              <a:t>에서 해야 합니다. 가스터빈 입구 날개를 더 여는 조작(IGV turn-up)을 하지 않고 측정한 날이었습니다. 덜 올린 채로 쟀으니 낮게 나왔습니다.</a:t>
             </a:r>
             <a:endParaRPr lang="en-US" sz="900" dirty="0"/>
           </a:p>
@@ -24121,7 +24121,7 @@
                 <a:ea typeface="Malgun Gothic" pitchFamily="34" charset="-122"/>
                 <a:cs typeface="Malgun Gothic" pitchFamily="34" charset="-120"/>
               </a:rPr>
-              <a:t>후보를 하나씩 접고 나니 외기 온도만 남았습니다.</a:t>
+              <a:t>후보를 하나씩 빼 보니 외기 온도만 남았습니다.</a:t>
             </a:r>
             <a:endParaRPr lang="en-US" sz="1163" dirty="0"/>
           </a:p>
@@ -24540,7 +24540,7 @@
                 <a:ea typeface="Malgun Gothic" pitchFamily="34" charset="-122"/>
                 <a:cs typeface="Malgun Gothic" pitchFamily="34" charset="-120"/>
               </a:rPr>
-              <a:t>목표가 둘이었습니다. 각각 무엇으로 풀지 정했습니다.</a:t>
+              <a:t>목표는 두 가지였습니다. 각 목표를 무엇으로 풀지 정했습니다.</a:t>
             </a:r>
             <a:endParaRPr lang="en-US" sz="1275" dirty="0"/>
           </a:p>
@@ -24775,7 +24775,7 @@
                 <a:ea typeface="Malgun Gothic" pitchFamily="34" charset="-122"/>
                 <a:cs typeface="Malgun Gothic" pitchFamily="34" charset="-120"/>
               </a:rPr>
-              <a:t>엑셀 4개는 손으로 이어야 한다</a:t>
+              <a:t>엑셀 4개는 사람이 손으로 잇는다</a:t>
             </a:r>
             <a:endParaRPr lang="en-US" sz="975" dirty="0"/>
           </a:p>
@@ -24879,7 +24879,7 @@
                 <a:ea typeface="Malgun Gothic" pitchFamily="34" charset="-122"/>
                 <a:cs typeface="Malgun Gothic" pitchFamily="34" charset="-120"/>
               </a:rPr>
-              <a:t>곡선을 배우는 계산은 수식으로 어렵다</a:t>
+              <a:t>곡선 계산은 엑셀 수식으로 어렵다</a:t>
             </a:r>
             <a:endParaRPr lang="en-US" sz="975" dirty="0"/>
           </a:p>
@@ -24921,7 +24921,7 @@
                 <a:ea typeface="Malgun Gothic" pitchFamily="34" charset="-122"/>
                 <a:cs typeface="Malgun Gothic" pitchFamily="34" charset="-120"/>
               </a:rPr>
-              <a:t>온도별 보정 곡선을 찾는 계산은 엑셀 수식으로 짜기 어렵습니다.</a:t>
+              <a:t>온도별 보정 곡선은 엑셀 수식으로 짜기 어렵습니다. 프로그램에서 계산해야 합니다.</a:t>
             </a:r>
             <a:endParaRPr lang="en-US" sz="788" dirty="0"/>
           </a:p>
@@ -24983,7 +24983,7 @@
                 <a:ea typeface="Malgun Gothic" pitchFamily="34" charset="-122"/>
                 <a:cs typeface="Malgun Gothic" pitchFamily="34" charset="-120"/>
               </a:rPr>
-              <a:t>실적을 쌓아 다시 배우려면 저장소가 필요하다</a:t>
+              <a:t>실적을 쌓아 둘 곳이 필요하다</a:t>
             </a:r>
             <a:endParaRPr lang="en-US" sz="975" dirty="0"/>
           </a:p>
@@ -25025,7 +25025,7 @@
                 <a:ea typeface="Malgun Gothic" pitchFamily="34" charset="-122"/>
                 <a:cs typeface="Malgun Gothic" pitchFamily="34" charset="-120"/>
               </a:rPr>
-              <a:t>회차를 쌓아 두고 늘 때마다 다시 배워야 합니다. 파일로는 관리가 되지 않습니다.</a:t>
+              <a:t>회차를 쌓아 두고, 늘 때마다 곡선을 다시 그려야 합니다. 파일로는 관리가 되지 않습니다.</a:t>
             </a:r>
             <a:endParaRPr lang="en-US" sz="788" dirty="0"/>
           </a:p>
@@ -26329,7 +26329,7 @@
                 <a:ea typeface="Malgun Gothic" pitchFamily="34" charset="-122"/>
                 <a:cs typeface="Malgun Gothic" pitchFamily="34" charset="-120"/>
               </a:rPr>
-              <a:t>② 곡선을 배운다</a:t>
+              <a:t>② 곡선을 그린다</a:t>
             </a:r>
             <a:endParaRPr lang="en-US" sz="938" dirty="0"/>
           </a:p>
@@ -28165,7 +28165,7 @@
                 <a:ea typeface="Malgun Gothic" pitchFamily="34" charset="-122"/>
                 <a:cs typeface="Malgun Gothic" pitchFamily="34" charset="-120"/>
               </a:rPr>
-              <a:t>어떤 곡선을 쓸지는 여기서 정하지 않았습니다 — 후보 회귀 모델 7가지를 겨루게 한 결과가 다음 장입니다.</a:t>
+              <a:t>어떤 곡선을 쓸지는 다음 장에서 정합니다. 후보 회귀 모델 7가지를 같은 데이터로 겨루게 했습니다.</a:t>
             </a:r>
             <a:endParaRPr lang="en-US" sz="863" dirty="0"/>
           </a:p>
@@ -29756,7 +29756,7 @@
                 <a:ea typeface="Malgun Gothic" pitchFamily="34" charset="-122"/>
                 <a:cs typeface="Malgun Gothic" pitchFamily="34" charset="-120"/>
               </a:rPr>
-              <a:t>완만한 물결과 급한 물결을 섞은 곡선</a:t>
+              <a:t>느린 물결과 급한 물결을 섞은 곡선</a:t>
             </a:r>
             <a:endParaRPr lang="en-US" sz="788" dirty="0"/>
           </a:p>
@@ -30320,7 +30320,7 @@
                 <a:ea typeface="Malgun Gothic" pitchFamily="34" charset="-122"/>
                 <a:cs typeface="Malgun Gothic" pitchFamily="34" charset="-120"/>
               </a:rPr>
-              <a:t>꺾임을 허용하는 곡선</a:t>
+              <a:t>꺾이는 곳을 따라가는 곡선</a:t>
             </a:r>
             <a:endParaRPr lang="en-US" sz="788" dirty="0"/>
           </a:p>
@@ -30508,7 +30508,7 @@
                 <a:ea typeface="Malgun Gothic" pitchFamily="34" charset="-122"/>
                 <a:cs typeface="Malgun Gothic" pitchFamily="34" charset="-120"/>
               </a:rPr>
-              <a:t>가까운 시험에 무게를 더 주는 평균</a:t>
+              <a:t>가까운 시험을 더 크게 보는 평균</a:t>
             </a:r>
             <a:endParaRPr lang="en-US" sz="788" dirty="0"/>
           </a:p>
@@ -30780,7 +30780,7 @@
                 <a:ea typeface="Malgun Gothic" pitchFamily="34" charset="-122"/>
                 <a:cs typeface="Malgun Gothic" pitchFamily="34" charset="-120"/>
               </a:rPr>
-              <a:t>* GP = 가우시안 프로세스 — 값 하나가 아니라 곡선 전체를 후보로 두고 실적에 가장 잘 맞는 곡선을 고릅니다. 뒤에 붙은 이름은 곡선이 얼마나 부드러운지를 정하는 설정입니다.</a:t>
+              <a:t>* GP = 가우시안 프로세스. 곡선 하나를 고르는 대신 가능한 곡선을 모두 놓고 그 가운데를 답으로 냅니다. 뒤에 붙은 이름은 곡선을 얼마나 부드럽게 그을지 정하는 설정입니다.</a:t>
             </a:r>
             <a:endParaRPr lang="en-US" sz="750" dirty="0"/>
           </a:p>
@@ -31799,7 +31799,7 @@
                 <a:ea typeface="Malgun Gothic" pitchFamily="34" charset="-122"/>
                 <a:cs typeface="Malgun Gothic" pitchFamily="34" charset="-120"/>
               </a:rPr>
-              <a:t>한 번 만들고 끝나지 않습니다. 돌리고 · 대 보고 · 다시 채점하는 순서를 만들어 두었습니다.</a:t>
+              <a:t>한 번 만들고 끝내지 않습니다. 2주마다 실적을 넣고, 곡선을 다시 그리고, 모델을 다시 채점합니다.</a:t>
             </a:r>
             <a:endParaRPr lang="en-US" sz="1275" dirty="0"/>
           </a:p>
@@ -32945,7 +32945,7 @@
                 <a:ea typeface="Malgun Gothic" pitchFamily="34" charset="-122"/>
                 <a:cs typeface="Malgun Gothic" pitchFamily="34" charset="-120"/>
               </a:rPr>
-              <a:t>, 치우침은 −0.04 MW 로 한쪽으로 쏠리지 않았습니다.</a:t>
+              <a:t> 였고, 한쪽으로 쏠리지도 않았습니다 (치우침 −0.04 MW).</a:t>
             </a:r>
             <a:endParaRPr lang="en-US" sz="938" dirty="0"/>
           </a:p>
@@ -33177,7 +33177,7 @@
                 <a:ea typeface="Malgun Gothic" pitchFamily="34" charset="-122"/>
                 <a:cs typeface="Malgun Gothic" pitchFamily="34" charset="-120"/>
               </a:rPr>
-              <a:t> 다시 채점하나 — 시험이 40회뿐입니다. 표본이 적으면 한 번 고른 곡선을 계속 믿을 수 없고, 실적이 늘면 성적이 바뀔 수 있습니다.</a:t>
+              <a:t> 다시 채점하나 — 시험이 아직 40회뿐입니다. 실적이 늘면 성적이 바뀔 수 있습니다.</a:t>
             </a:r>
             <a:endParaRPr lang="en-US" sz="938" dirty="0"/>
           </a:p>
@@ -33236,7 +33236,7 @@
                 <a:ea typeface="Malgun Gothic" pitchFamily="34" charset="-122"/>
                 <a:cs typeface="Malgun Gothic" pitchFamily="34" charset="-120"/>
               </a:rPr>
-              <a:t> 채점하나 — 한 회를 가리고 나머지로 그 회를 맞혀 보는 채점을 후보 7가지에 모두 다시 돌려 성적을 새로 매깁니다. 앞서는 모델이 바뀌면 그때 바꿉니다.</a:t>
+              <a:t> 채점하나 — 한 회를 가리고 나머지로 맞혀 보는 채점을 후보 7가지에 다시 돌립니다. 1등이 바뀌면 쓰는 모델을 바꿉니다.</a:t>
             </a:r>
             <a:endParaRPr lang="en-US" sz="938" dirty="0"/>
           </a:p>
@@ -33366,7 +33366,7 @@
                 <a:ea typeface="Malgun Gothic" pitchFamily="34" charset="-122"/>
                 <a:cs typeface="Malgun Gothic" pitchFamily="34" charset="-120"/>
               </a:rPr>
-              <a:t>성적이 가장 좋은 모델에 도구가 표시합니다.</a:t>
+              <a:t>도구가 성적이 가장 좋은 모델에 표시합니다.</a:t>
             </a:r>
             <a:endParaRPr lang="en-US" sz="788" dirty="0"/>
           </a:p>
@@ -33450,7 +33450,7 @@
                 <a:ea typeface="Malgun Gothic" pitchFamily="34" charset="-122"/>
                 <a:cs typeface="Malgun Gothic" pitchFamily="34" charset="-120"/>
               </a:rPr>
-              <a:t>MAE · RMSE · R² · 편차 · 과대 신고 건수를 한자리에서 봅니다.</a:t>
+              <a:t>MAE · RMSE · R² · 편차 · 과대 신고 건수를 한 화면에서 봅니다.</a:t>
             </a:r>
             <a:endParaRPr lang="en-US" sz="788" dirty="0"/>
           </a:p>
@@ -33534,7 +33534,7 @@
                 <a:ea typeface="Malgun Gothic" pitchFamily="34" charset="-122"/>
                 <a:cs typeface="Malgun Gothic" pitchFamily="34" charset="-120"/>
               </a:rPr>
-              <a:t>GP · RBF 가 앞섭니다. 이 표가 다음 회차에 다시 계산됩니다.</a:t>
+              <a:t>GP · RBF 가 1등입니다. 다음 회차에 이 표를 다시 계산합니다.</a:t>
             </a:r>
             <a:endParaRPr lang="en-US" sz="788" dirty="0"/>
           </a:p>
@@ -33663,7 +33663,7 @@
                 <a:ea typeface="Malgun Gothic" pitchFamily="34" charset="-122"/>
                 <a:cs typeface="Malgun Gothic" pitchFamily="34" charset="-120"/>
               </a:rPr>
-              <a:t>넉 달을 나란히 돌려 확인했고, 실적이 늘 때마다 도구가 스스로 다시 채점합니다.</a:t>
+              <a:t>넉 달 동안 기존 방식과 나란히 돌려 확인했습니다. 실적이 늘 때마다 도구가 다시 채점합니다.</a:t>
             </a:r>
             <a:endParaRPr lang="en-US" sz="1163" dirty="0"/>
           </a:p>
@@ -36014,7 +36014,7 @@
                 <a:ea typeface="Malgun Gothic" pitchFamily="34" charset="-122"/>
                 <a:cs typeface="Malgun Gothic" pitchFamily="34" charset="-120"/>
               </a:rPr>
-              <a:t>가린 회차의 온도만 주고 보정값을 예측하게 합니다.</a:t>
+              <a:t>가린 회차의 온도만 주고 모델이 보정값을 예측하게 합니다.</a:t>
             </a:r>
             <a:endParaRPr lang="en-US" sz="788" dirty="0"/>
           </a:p>
@@ -36392,7 +36392,7 @@
                 <a:ea typeface="Malgun Gothic" pitchFamily="34" charset="-122"/>
                 <a:cs typeface="Malgun Gothic" pitchFamily="34" charset="-120"/>
               </a:rPr>
-              <a:t>종전 방식도 같은 회차에 「늘 같은 값 하나」를 더해 똑같이 채점했습니다. 그래서 두 값을 나란히 견줄 수 있습니다. 40회 가운데 39회를 썼습니다 — 한 회차는 그 온도 구간에 시험이 그것뿐이어서 가리면 비교 대상 방식 하나가 답을 못 냅니다.</a:t>
+              <a:t>종전 방식도 같은 회차에 「늘 같은 값 하나」를 더해 똑같이 채점했습니다. 그래서 두 값을 나란히 견줄 수 있습니다. 40회 가운데 39회를 썼습니다 — 한 회차는 그 온도 구간에 시험이 하나뿐이라, 가리면 종전 방식이 답을 못 냅니다.</a:t>
             </a:r>
             <a:endParaRPr lang="en-US" sz="750" dirty="0"/>
           </a:p>
@@ -37367,7 +37367,7 @@
                 <a:ea typeface="Malgun Gothic" pitchFamily="34" charset="-122"/>
                 <a:cs typeface="Malgun Gothic" pitchFamily="34" charset="-120"/>
               </a:rPr>
-              <a:t>일은 줄고 숫자는 정확해졌습니다. 처음에 세운 목표 두 가지입니다.</a:t>
+              <a:t>일은 줄고 숫자는 정확해졌습니다. 처음에 세운 목표 두 가지를 다 이뤘습니다.</a:t>
             </a:r>
             <a:endParaRPr lang="en-US" sz="1163" dirty="0"/>
           </a:p>

--- a/docs/ppt/위례_공급가능용량_최종발표_v3.pptx
+++ b/docs/ppt/위례_공급가능용량_최종발표_v3.pptx
@@ -2190,7 +2190,7 @@
                 <a:ea typeface="Malgun Gothic" pitchFamily="34" charset="-122"/>
                 <a:cs typeface="Malgun Gothic" pitchFamily="34" charset="-120"/>
               </a:rPr>
-              <a:t>온도 프로파일 생성 절차 통합과 누적 40회 실적 기반 보정 곡선 적용</a:t>
+              <a:t>산정 절차를 하나로 합치고, 누적 40회 실적으로 온도별 보정 곡선을 만들었습니다</a:t>
             </a:r>
             <a:endParaRPr lang="en-US" sz="1275" dirty="0"/>
           </a:p>
@@ -6394,7 +6394,7 @@
                 <a:ea typeface="Malgun Gothic" pitchFamily="34" charset="-122"/>
                 <a:cs typeface="Malgun Gothic" pitchFamily="34" charset="-120"/>
               </a:rPr>
-              <a:t>겨울과 여름이 한 번 더 지나면 신고 구간 전체에 실적이 생깁니다. 그 데이터로 후보 7가지를 다시 채점(LOOCV)해 최적 회귀 모델을 다시 고릅니다 — 지금 1등이 계속 1등이라는 보장은 없습니다.</a:t>
+              <a:t>겨울과 여름이 한 번 더 지나면 신고 구간 전체에 실적이 생깁니다. 그 데이터로 후보 7가지를 다시 채점(LOOCV)해 가장 성적이 좋은 모델을 다시 고릅니다 — 지금 1등이 계속 1등이라는 보장은 없습니다.</a:t>
             </a:r>
             <a:endParaRPr lang="en-US" sz="825" dirty="0"/>
           </a:p>
@@ -7930,7 +7930,7 @@
                 <a:ea typeface="Malgun Gothic" pitchFamily="34" charset="-122"/>
                 <a:cs typeface="Malgun Gothic" pitchFamily="34" charset="-120"/>
               </a:rPr>
-              <a:t>받은 문제점과 개선사항을 도구에 고쳐 넣었습니다. 시운전에서 드러난 것도 그때그때 반영했습니다.</a:t>
+              <a:t>넘겨받은 문제점과 개선사항을 도구에 고쳐 넣었습니다. 시운전에서 드러난 것도 그때그때 반영했습니다.</a:t>
             </a:r>
             <a:endParaRPr lang="en-US" sz="825" dirty="0"/>
           </a:p>
@@ -8674,7 +8674,7 @@
                 <a:ea typeface="Malgun Gothic" pitchFamily="34" charset="-122"/>
                 <a:cs typeface="Malgun Gothic" pitchFamily="34" charset="-120"/>
               </a:rPr>
-              <a:t>후보 7가지를 놓고 같은 데이터로 겨루게 했습니다. 사람이 아니라 성적이 골랐습니다.</a:t>
+              <a:t>후보 7가지를 같은 데이터로 시험했습니다. 사람이 아니라 성적이 골랐습니다.</a:t>
             </a:r>
             <a:endParaRPr lang="en-US" sz="863" dirty="0"/>
           </a:p>
@@ -14437,7 +14437,7 @@
                 <a:ea typeface="Malgun Gothic" pitchFamily="34" charset="-122"/>
                 <a:cs typeface="Malgun Gothic" pitchFamily="34" charset="-120"/>
               </a:rPr>
-              <a:t>공급가능용량 테스트는 발전운영팀 업무입니다. 곁에서 보니 엑셀 파일 네 개를 오가는 일이 번거로워 보였습니다.</a:t>
+              <a:t>공급가능용량 테스트는 발전운영팀 업무입니다. 곁에서 보니 엑셀 네 개를 오가는 일이 번거로워 보였습니다.</a:t>
             </a:r>
             <a:endParaRPr lang="en-US" sz="863" dirty="0"/>
           </a:p>
@@ -20708,7 +20708,7 @@
                 <a:ea typeface="Malgun Gothic" pitchFamily="34" charset="-122"/>
                 <a:cs typeface="Malgun Gothic" pitchFamily="34" charset="-120"/>
               </a:rPr>
-              <a:t>겨울에는 적게 신고하고, 여름에는 못 내는데 많이 신고하게 됩니다.</a:t>
+              <a:t>겨울에는 낼 수 있는데 적게 신고하고, 여름에는 못 낼 만큼 많이 신고하게 됩니다.</a:t>
             </a:r>
             <a:endParaRPr lang="en-US" sz="1088" dirty="0"/>
           </a:p>
@@ -22022,7 +22022,7 @@
                 <a:ea typeface="Malgun Gothic" pitchFamily="34" charset="-122"/>
                 <a:cs typeface="Malgun Gothic" pitchFamily="34" charset="-120"/>
               </a:rPr>
-              <a:t>온도 하나로 차이의 </a:t>
+              <a:t>차이의 </a:t>
             </a:r>
             <a:pPr algn="l" indent="0" marL="0">
               <a:lnSpc>
@@ -22056,7 +22056,7 @@
                 <a:ea typeface="Malgun Gothic" pitchFamily="34" charset="-122"/>
                 <a:cs typeface="Malgun Gothic" pitchFamily="34" charset="-120"/>
               </a:rPr>
-              <a:t> 를 설명합니다</a:t>
+              <a:t> 는 온도 하나로 설명됩니다</a:t>
             </a:r>
             <a:endParaRPr lang="en-US" sz="863" dirty="0"/>
           </a:p>
@@ -23070,7 +23070,7 @@
                 <a:ea typeface="Malgun Gothic" pitchFamily="34" charset="-122"/>
                 <a:cs typeface="Malgun Gothic" pitchFamily="34" charset="-120"/>
               </a:rPr>
-              <a:t>단위 MW · 작을수록 잘 맞힌 것입니다. 회차마다 ±0.08 은 그냥 흔들리는 폭이라, 그보다 작은 차이는 의미가 없습니다. 채점은 한 회를 가리고 나머지로 그 회를 맞혀 봤습니다.</a:t>
+              <a:t>단위 MW · 작을수록 잘 맞힌 것입니다. 회차마다 ±0.08 은 그냥 흔들리는 폭이라, 그보다 작은 차이는 의미가 없습니다. 채점은 한 회를 가리고 나머지로 그 회를 맞혀 보는 방식입니다.</a:t>
             </a:r>
             <a:endParaRPr lang="en-US" sz="788" dirty="0"/>
           </a:p>
@@ -23493,7 +23493,7 @@
                 <a:ea typeface="Malgun Gothic" pitchFamily="34" charset="-122"/>
                 <a:cs typeface="Malgun Gothic" pitchFamily="34" charset="-120"/>
               </a:rPr>
-              <a:t>온도가 오르면 차이가 내려갑니다 (반대 방향 0.84). 네 후보 가운데 가장 뚜렷합니다.</a:t>
+              <a:t>온도가 오르면 차이가 줄어듭니다 (반대 방향 0.84). 네 후보 가운데 가장 뚜렷합니다.</a:t>
             </a:r>
             <a:endParaRPr lang="en-US" sz="863" dirty="0"/>
           </a:p>
@@ -23639,7 +23639,7 @@
                 <a:ea typeface="Malgun Gothic" pitchFamily="34" charset="-122"/>
                 <a:cs typeface="Malgun Gothic" pitchFamily="34" charset="-120"/>
               </a:rPr>
-              <a:t>신고는 영하 20도부터 40도까지 온도마다 해야 합니다. 그래서 입력도 온도여야 표를 만들 수 있습니다.</a:t>
+              <a:t>신고는 영하 20도부터 40도까지 온도마다 해야 합니다. 입력도 온도여야 표가 나옵니다.</a:t>
             </a:r>
             <a:endParaRPr lang="en-US" sz="863" dirty="0"/>
           </a:p>
@@ -23812,7 +23812,7 @@
                 <a:ea typeface="Malgun Gothic" pitchFamily="34" charset="-122"/>
                 <a:cs typeface="Malgun Gothic" pitchFamily="34" charset="-120"/>
               </a:rPr>
-              <a:t>봄 시험 몇 회가 유별나게 낮았습니다. 설비가 늙었다고 보고 문서까지 썼습니다.</a:t>
+              <a:t>봄 시험 몇 회가 유별나게 낮았습니다. 설비가 낡아서 그렇다고 보고서까지 썼습니다.</a:t>
             </a:r>
             <a:endParaRPr lang="en-US" sz="975" dirty="0"/>
           </a:p>
@@ -23992,7 +23992,7 @@
                 <a:ea typeface="Malgun Gothic" pitchFamily="34" charset="-122"/>
                 <a:cs typeface="Malgun Gothic" pitchFamily="34" charset="-120"/>
               </a:rPr>
-              <a:t>보고 결론을 거뒀습니다. 지금은 그런 날의 시험을 도구가 걸러냅니다.</a:t>
+              <a:t>그 보고서는 취소했습니다. 지금은 그런 날의 시험을 도구가 걸러냅니다.</a:t>
             </a:r>
             <a:endParaRPr lang="en-US" sz="900" dirty="0"/>
           </a:p>
@@ -25143,7 +25143,7 @@
                 <a:ea typeface="Malgun Gothic" pitchFamily="34" charset="-122"/>
                 <a:cs typeface="Malgun Gothic" pitchFamily="34" charset="-120"/>
               </a:rPr>
-              <a:t>제작사 계산식과 RiMS 취득 방식은 기존 엑셀 것을 그대로 옮겼습니다.</a:t>
+              <a:t>제작사 계산식과 RiMS 취득 방식은 기존 엑셀에 있던 것을 그대로 옮겼습니다.</a:t>
             </a:r>
             <a:endParaRPr lang="en-US" sz="825" dirty="0"/>
           </a:p>
@@ -28165,7 +28165,7 @@
                 <a:ea typeface="Malgun Gothic" pitchFamily="34" charset="-122"/>
                 <a:cs typeface="Malgun Gothic" pitchFamily="34" charset="-120"/>
               </a:rPr>
-              <a:t>어떤 곡선을 쓸지는 다음 장에서 정합니다. 후보 회귀 모델 7가지를 같은 데이터로 겨루게 했습니다.</a:t>
+              <a:t>어떤 곡선을 쓸지는 다음 장에서 정합니다. 후보 회귀 모델 7가지를 같은 데이터로 시험했습니다.</a:t>
             </a:r>
             <a:endParaRPr lang="en-US" sz="863" dirty="0"/>
           </a:p>
@@ -29184,7 +29184,7 @@
                 <a:ea typeface="Malgun Gothic" pitchFamily="34" charset="-122"/>
                 <a:cs typeface="Malgun Gothic" pitchFamily="34" charset="-120"/>
               </a:rPr>
-              <a:t>온도별 곡선을 어떤 회귀 모델로 그릴지 정했습니다. 후보 7가지를 같은 데이터로 겨루게 했습니다.</a:t>
+              <a:t>온도별 곡선을 어떤 회귀 모델로 그릴지 정했습니다. 후보 7가지를 같은 데이터로 시험했습니다.</a:t>
             </a:r>
             <a:endParaRPr lang="en-US" sz="1275" dirty="0"/>
           </a:p>
@@ -30508,7 +30508,7 @@
                 <a:ea typeface="Malgun Gothic" pitchFamily="34" charset="-122"/>
                 <a:cs typeface="Malgun Gothic" pitchFamily="34" charset="-120"/>
               </a:rPr>
-              <a:t>가까운 시험을 더 크게 보는 평균</a:t>
+              <a:t>가까운 시험을 더 많이 반영한 평균</a:t>
             </a:r>
             <a:endParaRPr lang="en-US" sz="788" dirty="0"/>
           </a:p>
@@ -30738,7 +30738,7 @@
                 <a:ea typeface="Malgun Gothic" pitchFamily="34" charset="-122"/>
                 <a:cs typeface="Malgun Gothic" pitchFamily="34" charset="-120"/>
               </a:rPr>
-              <a:t>* 막대는 1등과의 차이 · 가운데 숫자가 평균 오차 · 한 회씩 가려 맞혀 보는 방식으로 누적 40회 가운데 39회를 썼습니다(한 회차는 구간평균이 답을 못 내 빠집니다).</a:t>
+              <a:t>* 막대는 1등과의 차이 · 가운데 숫자는 평균 오차 · 한 회씩 가려 맞혀 보는 방식으로 누적 40회 가운데 39회를 썼습니다(한 회차는 구간평균이 답을 못 내 빠집니다).</a:t>
             </a:r>
             <a:endParaRPr lang="en-US" sz="750" dirty="0"/>
           </a:p>
@@ -30780,7 +30780,7 @@
                 <a:ea typeface="Malgun Gothic" pitchFamily="34" charset="-122"/>
                 <a:cs typeface="Malgun Gothic" pitchFamily="34" charset="-120"/>
               </a:rPr>
-              <a:t>* GP = 가우시안 프로세스. 곡선 하나를 고르는 대신 가능한 곡선을 모두 놓고 그 가운데를 답으로 냅니다. 뒤에 붙은 이름은 곡선을 얼마나 부드럽게 그을지 정하는 설정입니다.</a:t>
+              <a:t>* GP = 가우시안 프로세스. 선을 하나만 긋지 않습니다. 점을 지나는 선을 여러 개 그리고 그 평균을 답으로 냅니다. 뒤에 붙은 이름은 곡선을 얼마나 부드럽게 그을지 정하는 설정입니다.</a:t>
             </a:r>
             <a:endParaRPr lang="en-US" sz="750" dirty="0"/>
           </a:p>
@@ -32911,7 +32911,7 @@
                 <a:ea typeface="Malgun Gothic" pitchFamily="34" charset="-122"/>
                 <a:cs typeface="Malgun Gothic" pitchFamily="34" charset="-120"/>
               </a:rPr>
-              <a:t>. 평균 어긋난 폭은 </a:t>
+              <a:t>. 어긋난 폭은 평균 </a:t>
             </a:r>
             <a:pPr algn="l" indent="0" marL="0">
               <a:lnSpc>
@@ -33366,7 +33366,7 @@
                 <a:ea typeface="Malgun Gothic" pitchFamily="34" charset="-122"/>
                 <a:cs typeface="Malgun Gothic" pitchFamily="34" charset="-120"/>
               </a:rPr>
-              <a:t>도구가 성적이 가장 좋은 모델에 표시합니다.</a:t>
+              <a:t>성적이 가장 좋은 모델을 도구가 표시해 줍니다.</a:t>
             </a:r>
             <a:endParaRPr lang="en-US" sz="788" dirty="0"/>
           </a:p>
